--- a/slides/2_clustering.pptx
+++ b/slides/2_clustering.pptx
@@ -11,9 +11,9 @@
     <p:sldId id="256" r:id="rId2"/>
     <p:sldId id="265" r:id="rId3"/>
     <p:sldId id="266" r:id="rId4"/>
-    <p:sldId id="269" r:id="rId5"/>
-    <p:sldId id="258" r:id="rId6"/>
-    <p:sldId id="270" r:id="rId7"/>
+    <p:sldId id="258" r:id="rId5"/>
+    <p:sldId id="270" r:id="rId6"/>
+    <p:sldId id="285" r:id="rId7"/>
     <p:sldId id="271" r:id="rId8"/>
     <p:sldId id="267" r:id="rId9"/>
     <p:sldId id="268" r:id="rId10"/>
@@ -500,7 +500,7 @@
           <a:p>
             <a:fld id="{506E0FD1-891F-4B1E-916D-E9B585160BB8}" type="datetimeFigureOut">
               <a:rPr lang="en-GB" smtClean="0"/>
-              <a:t>11/01/2026</a:t>
+              <a:t>27/02/2026</a:t>
             </a:fld>
             <a:endParaRPr lang="en-GB"/>
           </a:p>
@@ -917,7 +917,7 @@
           <a:p>
             <a:fld id="{D68C3F22-27B2-44E3-9C5F-D08126455F6F}" type="datetime1">
               <a:rPr lang="en-GB" smtClean="0"/>
-              <a:t>11/01/2026</a:t>
+              <a:t>27/02/2026</a:t>
             </a:fld>
             <a:endParaRPr lang="en-GB"/>
           </a:p>
@@ -1117,7 +1117,7 @@
           <a:p>
             <a:fld id="{1CD03846-7BF6-4FB6-A921-FF3379ADBD4C}" type="datetime1">
               <a:rPr lang="en-GB" smtClean="0"/>
-              <a:t>11/01/2026</a:t>
+              <a:t>27/02/2026</a:t>
             </a:fld>
             <a:endParaRPr lang="en-GB"/>
           </a:p>
@@ -1327,7 +1327,7 @@
           <a:p>
             <a:fld id="{99E1B91A-3FD0-4144-9C84-63E9688ED2FE}" type="datetime1">
               <a:rPr lang="en-GB" smtClean="0"/>
-              <a:t>11/01/2026</a:t>
+              <a:t>27/02/2026</a:t>
             </a:fld>
             <a:endParaRPr lang="en-GB"/>
           </a:p>
@@ -1527,7 +1527,7 @@
           <a:p>
             <a:fld id="{5295ED7B-FEAD-4734-819F-93EF4B0EA908}" type="datetime1">
               <a:rPr lang="en-GB" smtClean="0"/>
-              <a:t>11/01/2026</a:t>
+              <a:t>27/02/2026</a:t>
             </a:fld>
             <a:endParaRPr lang="en-GB"/>
           </a:p>
@@ -1803,7 +1803,7 @@
           <a:p>
             <a:fld id="{D2D5D4B4-C926-4B45-8815-1ED8911179A2}" type="datetime1">
               <a:rPr lang="en-GB" smtClean="0"/>
-              <a:t>11/01/2026</a:t>
+              <a:t>27/02/2026</a:t>
             </a:fld>
             <a:endParaRPr lang="en-GB"/>
           </a:p>
@@ -2071,7 +2071,7 @@
           <a:p>
             <a:fld id="{B4C5210A-0E37-4935-93AF-69F21A5F712F}" type="datetime1">
               <a:rPr lang="en-GB" smtClean="0"/>
-              <a:t>11/01/2026</a:t>
+              <a:t>27/02/2026</a:t>
             </a:fld>
             <a:endParaRPr lang="en-GB"/>
           </a:p>
@@ -2486,7 +2486,7 @@
           <a:p>
             <a:fld id="{3D3A6B2F-436C-4691-80E8-9C890E000E9D}" type="datetime1">
               <a:rPr lang="en-GB" smtClean="0"/>
-              <a:t>11/01/2026</a:t>
+              <a:t>27/02/2026</a:t>
             </a:fld>
             <a:endParaRPr lang="en-GB"/>
           </a:p>
@@ -2628,7 +2628,7 @@
           <a:p>
             <a:fld id="{84385F4C-D74B-496F-8D21-97E3549C783B}" type="datetime1">
               <a:rPr lang="en-GB" smtClean="0"/>
-              <a:t>11/01/2026</a:t>
+              <a:t>27/02/2026</a:t>
             </a:fld>
             <a:endParaRPr lang="en-GB"/>
           </a:p>
@@ -2741,7 +2741,7 @@
           <a:p>
             <a:fld id="{0CBDCB32-C241-4703-A832-4EB47BD54E83}" type="datetime1">
               <a:rPr lang="en-GB" smtClean="0"/>
-              <a:t>11/01/2026</a:t>
+              <a:t>27/02/2026</a:t>
             </a:fld>
             <a:endParaRPr lang="en-GB"/>
           </a:p>
@@ -3054,7 +3054,7 @@
           <a:p>
             <a:fld id="{85C150FF-BE95-4D25-A16A-E368A81CBF24}" type="datetime1">
               <a:rPr lang="en-GB" smtClean="0"/>
-              <a:t>11/01/2026</a:t>
+              <a:t>27/02/2026</a:t>
             </a:fld>
             <a:endParaRPr lang="en-GB"/>
           </a:p>
@@ -3343,7 +3343,7 @@
           <a:p>
             <a:fld id="{F3C5DB4B-B349-43C9-A424-BADA723AD9F1}" type="datetime1">
               <a:rPr lang="en-GB" smtClean="0"/>
-              <a:t>11/01/2026</a:t>
+              <a:t>27/02/2026</a:t>
             </a:fld>
             <a:endParaRPr lang="en-GB"/>
           </a:p>
@@ -3586,7 +3586,7 @@
           <a:p>
             <a:fld id="{12632426-0A0C-405F-A3D0-2D11AA44702A}" type="datetime1">
               <a:rPr lang="en-GB" smtClean="0"/>
-              <a:t>11/01/2026</a:t>
+              <a:t>27/02/2026</a:t>
             </a:fld>
             <a:endParaRPr lang="en-GB"/>
           </a:p>
@@ -5704,6 +5704,9 @@
             <a:endParaRPr lang="de-DE" dirty="0"/>
           </a:p>
           <a:p>
+            <a:endParaRPr lang="de-DE" dirty="0"/>
+          </a:p>
+          <a:p>
             <a:r>
               <a:rPr lang="de-DE" dirty="0" err="1"/>
               <a:t>k-means</a:t>
@@ -5711,6 +5714,9 @@
             <a:endParaRPr lang="de-DE" dirty="0"/>
           </a:p>
           <a:p>
+            <a:endParaRPr lang="de-DE" dirty="0"/>
+          </a:p>
+          <a:p>
             <a:r>
               <a:rPr lang="de-DE" dirty="0" err="1"/>
               <a:t>hierarchical</a:t>
@@ -5723,6 +5729,9 @@
               <a:rPr lang="de-DE" dirty="0" err="1"/>
               <a:t>clustering</a:t>
             </a:r>
+            <a:endParaRPr lang="de-DE" dirty="0"/>
+          </a:p>
+          <a:p>
             <a:endParaRPr lang="de-DE" dirty="0"/>
           </a:p>
           <a:p>
@@ -5794,18 +5803,18 @@
       </p:grpSpPr>
       <p:sp>
         <p:nvSpPr>
-          <p:cNvPr id="2" name="Titel 1">
-            <a:extLst>
-              <a:ext uri="{FF2B5EF4-FFF2-40B4-BE49-F238E27FC236}">
-                <a16:creationId xmlns:a16="http://schemas.microsoft.com/office/drawing/2014/main" id="{789F8F1E-B016-91ED-B28E-2D00D108FB87}"/>
-              </a:ext>
-            </a:extLst>
-          </p:cNvPr>
-          <p:cNvSpPr>
-            <a:spLocks noGrp="1"/>
-          </p:cNvSpPr>
-          <p:nvPr>
-            <p:ph type="title"/>
+          <p:cNvPr id="4" name="Slide Number Placeholder 3">
+            <a:extLst>
+              <a:ext uri="{FF2B5EF4-FFF2-40B4-BE49-F238E27FC236}">
+                <a16:creationId xmlns:a16="http://schemas.microsoft.com/office/drawing/2014/main" id="{96068474-B64E-C6EC-6B3C-9C843D4BE0A6}"/>
+              </a:ext>
+            </a:extLst>
+          </p:cNvPr>
+          <p:cNvSpPr>
+            <a:spLocks noGrp="1"/>
+          </p:cNvSpPr>
+          <p:nvPr>
+            <p:ph type="sldNum" sz="quarter" idx="12"/>
           </p:nvPr>
         </p:nvSpPr>
         <p:spPr/>
@@ -5813,133 +5822,9 @@
           <a:bodyPr/>
           <a:lstStyle/>
           <a:p>
-            <a:r>
-              <a:rPr lang="de-DE" dirty="0" err="1"/>
-              <a:t>What</a:t>
-            </a:r>
-            <a:r>
-              <a:rPr lang="de-DE" dirty="0"/>
-              <a:t> </a:t>
-            </a:r>
-            <a:r>
-              <a:rPr lang="de-DE" dirty="0" err="1"/>
-              <a:t>Is</a:t>
-            </a:r>
-            <a:r>
-              <a:rPr lang="de-DE" dirty="0"/>
-              <a:t> Clustering?</a:t>
-            </a:r>
-          </a:p>
-        </p:txBody>
-      </p:sp>
-      <p:sp>
-        <p:nvSpPr>
-          <p:cNvPr id="3" name="Inhaltsplatzhalter 2">
-            <a:extLst>
-              <a:ext uri="{FF2B5EF4-FFF2-40B4-BE49-F238E27FC236}">
-                <a16:creationId xmlns:a16="http://schemas.microsoft.com/office/drawing/2014/main" id="{1B2C8508-761C-1192-0A16-0AAF0F97443A}"/>
-              </a:ext>
-            </a:extLst>
-          </p:cNvPr>
-          <p:cNvSpPr>
-            <a:spLocks noGrp="1"/>
-          </p:cNvSpPr>
-          <p:nvPr>
-            <p:ph idx="1"/>
-          </p:nvPr>
-        </p:nvSpPr>
-        <p:spPr/>
-        <p:txBody>
-          <a:bodyPr/>
-          <a:lstStyle/>
-          <a:p>
-            <a:endParaRPr lang="de-DE"/>
-          </a:p>
-        </p:txBody>
-      </p:sp>
-      <p:sp>
-        <p:nvSpPr>
-          <p:cNvPr id="4" name="Foliennummernplatzhalter 3">
-            <a:extLst>
-              <a:ext uri="{FF2B5EF4-FFF2-40B4-BE49-F238E27FC236}">
-                <a16:creationId xmlns:a16="http://schemas.microsoft.com/office/drawing/2014/main" id="{A36509C0-697B-C2D4-6E52-F82C10B1729C}"/>
-              </a:ext>
-            </a:extLst>
-          </p:cNvPr>
-          <p:cNvSpPr>
-            <a:spLocks noGrp="1"/>
-          </p:cNvSpPr>
-          <p:nvPr>
-            <p:ph type="sldNum" sz="quarter" idx="12"/>
-          </p:nvPr>
-        </p:nvSpPr>
-        <p:spPr/>
-        <p:txBody>
-          <a:bodyPr/>
-          <a:lstStyle/>
-          <a:p>
-            <a:fld id="{08C366F5-AFAD-49CB-854A-9D9E238FCA13}" type="slidenum">
+            <a:fld id="{3D4C94FE-FF23-4504-88E9-14D481113291}" type="slidenum">
               <a:rPr lang="en-GB" smtClean="0"/>
               <a:t>4</a:t>
-            </a:fld>
-            <a:endParaRPr lang="en-GB"/>
-          </a:p>
-        </p:txBody>
-      </p:sp>
-    </p:spTree>
-    <p:extLst>
-      <p:ext uri="{BB962C8B-B14F-4D97-AF65-F5344CB8AC3E}">
-        <p14:creationId xmlns:p14="http://schemas.microsoft.com/office/powerpoint/2010/main" val="892022358"/>
-      </p:ext>
-    </p:extLst>
-  </p:cSld>
-  <p:clrMapOvr>
-    <a:masterClrMapping/>
-  </p:clrMapOvr>
-</p:sld>
-</file>
-
-<file path=ppt/slides/slide5.xml><?xml version="1.0" encoding="utf-8"?>
-<p:sld xmlns:a="http://schemas.openxmlformats.org/drawingml/2006/main" xmlns:r="http://schemas.openxmlformats.org/officeDocument/2006/relationships" xmlns:p="http://schemas.openxmlformats.org/presentationml/2006/main">
-  <p:cSld>
-    <p:spTree>
-      <p:nvGrpSpPr>
-        <p:cNvPr id="1" name=""/>
-        <p:cNvGrpSpPr/>
-        <p:nvPr/>
-      </p:nvGrpSpPr>
-      <p:grpSpPr>
-        <a:xfrm>
-          <a:off x="0" y="0"/>
-          <a:ext cx="0" cy="0"/>
-          <a:chOff x="0" y="0"/>
-          <a:chExt cx="0" cy="0"/>
-        </a:xfrm>
-      </p:grpSpPr>
-      <p:sp>
-        <p:nvSpPr>
-          <p:cNvPr id="4" name="Slide Number Placeholder 3">
-            <a:extLst>
-              <a:ext uri="{FF2B5EF4-FFF2-40B4-BE49-F238E27FC236}">
-                <a16:creationId xmlns:a16="http://schemas.microsoft.com/office/drawing/2014/main" id="{96068474-B64E-C6EC-6B3C-9C843D4BE0A6}"/>
-              </a:ext>
-            </a:extLst>
-          </p:cNvPr>
-          <p:cNvSpPr>
-            <a:spLocks noGrp="1"/>
-          </p:cNvSpPr>
-          <p:nvPr>
-            <p:ph type="sldNum" sz="quarter" idx="12"/>
-          </p:nvPr>
-        </p:nvSpPr>
-        <p:spPr/>
-        <p:txBody>
-          <a:bodyPr/>
-          <a:lstStyle/>
-          <a:p>
-            <a:fld id="{3D4C94FE-FF23-4504-88E9-14D481113291}" type="slidenum">
-              <a:rPr lang="en-GB" smtClean="0"/>
-              <a:t>5</a:t>
             </a:fld>
             <a:endParaRPr lang="en-GB"/>
           </a:p>
@@ -7845,12 +7730,42 @@
           </p:style>
         </p:cxnSp>
       </p:grpSp>
-      <p:sp>
-        <p:nvSpPr>
-          <p:cNvPr id="43" name="TextBox 42">
-            <a:extLst>
-              <a:ext uri="{FF2B5EF4-FFF2-40B4-BE49-F238E27FC236}">
-                <a16:creationId xmlns:a16="http://schemas.microsoft.com/office/drawing/2014/main" id="{54C13FEC-ECD5-AC00-B8E2-8D8BC7A67351}"/>
+    </p:spTree>
+    <p:extLst>
+      <p:ext uri="{BB962C8B-B14F-4D97-AF65-F5344CB8AC3E}">
+        <p14:creationId xmlns:p14="http://schemas.microsoft.com/office/powerpoint/2010/main" val="3765141192"/>
+      </p:ext>
+    </p:extLst>
+  </p:cSld>
+  <p:clrMapOvr>
+    <a:masterClrMapping/>
+  </p:clrMapOvr>
+</p:sld>
+</file>
+
+<file path=ppt/slides/slide5.xml><?xml version="1.0" encoding="utf-8"?>
+<p:sld xmlns:a="http://schemas.openxmlformats.org/drawingml/2006/main" xmlns:r="http://schemas.openxmlformats.org/officeDocument/2006/relationships" xmlns:p="http://schemas.openxmlformats.org/presentationml/2006/main">
+  <p:cSld>
+    <p:spTree>
+      <p:nvGrpSpPr>
+        <p:cNvPr id="1" name=""/>
+        <p:cNvGrpSpPr/>
+        <p:nvPr/>
+      </p:nvGrpSpPr>
+      <p:grpSpPr>
+        <a:xfrm>
+          <a:off x="0" y="0"/>
+          <a:ext cx="0" cy="0"/>
+          <a:chOff x="0" y="0"/>
+          <a:chExt cx="0" cy="0"/>
+        </a:xfrm>
+      </p:grpSpPr>
+      <p:sp>
+        <p:nvSpPr>
+          <p:cNvPr id="5" name="Textfeld 4">
+            <a:extLst>
+              <a:ext uri="{FF2B5EF4-FFF2-40B4-BE49-F238E27FC236}">
+                <a16:creationId xmlns:a16="http://schemas.microsoft.com/office/drawing/2014/main" id="{171740E0-17BA-14E5-D6A3-D769CF9386D6}"/>
               </a:ext>
             </a:extLst>
           </p:cNvPr>
@@ -7859,8 +7774,8 @@
         </p:nvSpPr>
         <p:spPr>
           <a:xfrm>
-            <a:off x="5289232" y="6125944"/>
-            <a:ext cx="4831367" cy="646331"/>
+            <a:off x="9459441" y="4706690"/>
+            <a:ext cx="2662267" cy="369332"/>
           </a:xfrm>
           <a:prstGeom prst="rect">
             <a:avLst/>
@@ -7868,14 +7783,727 @@
           <a:noFill/>
         </p:spPr>
         <p:txBody>
+          <a:bodyPr wrap="none" rtlCol="0">
+            <a:spAutoFit/>
+          </a:bodyPr>
+          <a:lstStyle/>
+          <a:p>
+            <a:r>
+              <a:rPr lang="de-DE" dirty="0"/>
+              <a:t>Customer Segmentation</a:t>
+            </a:r>
+          </a:p>
+        </p:txBody>
+      </p:sp>
+      <p:sp>
+        <p:nvSpPr>
+          <p:cNvPr id="2" name="Titel 1">
+            <a:extLst>
+              <a:ext uri="{FF2B5EF4-FFF2-40B4-BE49-F238E27FC236}">
+                <a16:creationId xmlns:a16="http://schemas.microsoft.com/office/drawing/2014/main" id="{A9723A98-5383-DEFF-2162-FA018A5C262F}"/>
+              </a:ext>
+            </a:extLst>
+          </p:cNvPr>
+          <p:cNvSpPr>
+            <a:spLocks noGrp="1"/>
+          </p:cNvSpPr>
+          <p:nvPr>
+            <p:ph type="title"/>
+          </p:nvPr>
+        </p:nvSpPr>
+        <p:spPr/>
+        <p:txBody>
+          <a:bodyPr/>
+          <a:lstStyle/>
+          <a:p>
+            <a:r>
+              <a:rPr lang="de-DE" dirty="0"/>
+              <a:t>Use Cases </a:t>
+            </a:r>
+            <a:r>
+              <a:rPr lang="de-DE" dirty="0" err="1"/>
+              <a:t>for</a:t>
+            </a:r>
+            <a:r>
+              <a:rPr lang="de-DE" dirty="0"/>
+              <a:t> </a:t>
+            </a:r>
+            <a:r>
+              <a:rPr lang="de-DE" dirty="0" err="1"/>
+              <a:t>Unsupervised</a:t>
+            </a:r>
+            <a:r>
+              <a:rPr lang="de-DE" dirty="0"/>
+              <a:t> Learning</a:t>
+            </a:r>
+          </a:p>
+        </p:txBody>
+      </p:sp>
+      <p:sp>
+        <p:nvSpPr>
+          <p:cNvPr id="4" name="Foliennummernplatzhalter 3">
+            <a:extLst>
+              <a:ext uri="{FF2B5EF4-FFF2-40B4-BE49-F238E27FC236}">
+                <a16:creationId xmlns:a16="http://schemas.microsoft.com/office/drawing/2014/main" id="{30062167-9517-D148-36D2-E07544A0CD93}"/>
+              </a:ext>
+            </a:extLst>
+          </p:cNvPr>
+          <p:cNvSpPr>
+            <a:spLocks noGrp="1"/>
+          </p:cNvSpPr>
+          <p:nvPr>
+            <p:ph type="sldNum" sz="quarter" idx="12"/>
+          </p:nvPr>
+        </p:nvSpPr>
+        <p:spPr/>
+        <p:txBody>
+          <a:bodyPr/>
+          <a:lstStyle/>
+          <a:p>
+            <a:fld id="{08C366F5-AFAD-49CB-854A-9D9E238FCA13}" type="slidenum">
+              <a:rPr lang="en-GB" smtClean="0"/>
+              <a:t>5</a:t>
+            </a:fld>
+            <a:endParaRPr lang="en-GB"/>
+          </a:p>
+        </p:txBody>
+      </p:sp>
+      <p:sp>
+        <p:nvSpPr>
+          <p:cNvPr id="6" name="Textfeld 5">
+            <a:extLst>
+              <a:ext uri="{FF2B5EF4-FFF2-40B4-BE49-F238E27FC236}">
+                <a16:creationId xmlns:a16="http://schemas.microsoft.com/office/drawing/2014/main" id="{D460F03F-C6CE-A5A6-8A3A-CE53697E655E}"/>
+              </a:ext>
+            </a:extLst>
+          </p:cNvPr>
+          <p:cNvSpPr txBox="1"/>
+          <p:nvPr/>
+        </p:nvSpPr>
+        <p:spPr>
+          <a:xfrm>
+            <a:off x="659104" y="4744225"/>
+            <a:ext cx="1784015" cy="369332"/>
+          </a:xfrm>
+          <a:prstGeom prst="rect">
+            <a:avLst/>
+          </a:prstGeom>
+          <a:noFill/>
+        </p:spPr>
+        <p:txBody>
+          <a:bodyPr wrap="none" rtlCol="0">
+            <a:spAutoFit/>
+          </a:bodyPr>
+          <a:lstStyle/>
+          <a:p>
+            <a:r>
+              <a:rPr lang="de-DE" dirty="0"/>
+              <a:t>Fraud </a:t>
+            </a:r>
+            <a:r>
+              <a:rPr lang="de-DE" dirty="0" err="1"/>
+              <a:t>Detection</a:t>
+            </a:r>
+            <a:endParaRPr lang="de-DE" dirty="0"/>
+          </a:p>
+        </p:txBody>
+      </p:sp>
+      <p:sp>
+        <p:nvSpPr>
+          <p:cNvPr id="7" name="Textfeld 6">
+            <a:extLst>
+              <a:ext uri="{FF2B5EF4-FFF2-40B4-BE49-F238E27FC236}">
+                <a16:creationId xmlns:a16="http://schemas.microsoft.com/office/drawing/2014/main" id="{4C47B1B0-97FC-F4FE-3604-C591119001D0}"/>
+              </a:ext>
+            </a:extLst>
+          </p:cNvPr>
+          <p:cNvSpPr txBox="1"/>
+          <p:nvPr/>
+        </p:nvSpPr>
+        <p:spPr>
+          <a:xfrm>
+            <a:off x="4815071" y="5504257"/>
+            <a:ext cx="2185214" cy="369332"/>
+          </a:xfrm>
+          <a:prstGeom prst="rect">
+            <a:avLst/>
+          </a:prstGeom>
+          <a:noFill/>
+        </p:spPr>
+        <p:txBody>
+          <a:bodyPr wrap="none" rtlCol="0">
+            <a:spAutoFit/>
+          </a:bodyPr>
+          <a:lstStyle/>
+          <a:p>
+            <a:r>
+              <a:rPr lang="de-DE" dirty="0"/>
+              <a:t>Image </a:t>
+            </a:r>
+            <a:r>
+              <a:rPr lang="de-DE" dirty="0" err="1"/>
+              <a:t>Compression</a:t>
+            </a:r>
+            <a:endParaRPr lang="de-DE" dirty="0"/>
+          </a:p>
+        </p:txBody>
+      </p:sp>
+      <p:sp>
+        <p:nvSpPr>
+          <p:cNvPr id="8" name="Textfeld 7">
+            <a:extLst>
+              <a:ext uri="{FF2B5EF4-FFF2-40B4-BE49-F238E27FC236}">
+                <a16:creationId xmlns:a16="http://schemas.microsoft.com/office/drawing/2014/main" id="{411D884F-C00E-15FC-41F3-F77DE91C60A4}"/>
+              </a:ext>
+            </a:extLst>
+          </p:cNvPr>
+          <p:cNvSpPr txBox="1"/>
+          <p:nvPr/>
+        </p:nvSpPr>
+        <p:spPr>
+          <a:xfrm>
+            <a:off x="4815071" y="4962948"/>
+            <a:ext cx="2561855" cy="369332"/>
+          </a:xfrm>
+          <a:prstGeom prst="rect">
+            <a:avLst/>
+          </a:prstGeom>
+          <a:noFill/>
+        </p:spPr>
+        <p:txBody>
+          <a:bodyPr wrap="none" rtlCol="0">
+            <a:spAutoFit/>
+          </a:bodyPr>
+          <a:lstStyle/>
+          <a:p>
+            <a:r>
+              <a:rPr lang="de-DE" dirty="0" err="1"/>
+              <a:t>Recommender</a:t>
+            </a:r>
+            <a:r>
+              <a:rPr lang="de-DE" dirty="0"/>
+              <a:t> Systems</a:t>
+            </a:r>
+          </a:p>
+        </p:txBody>
+      </p:sp>
+      <p:sp>
+        <p:nvSpPr>
+          <p:cNvPr id="9" name="Textfeld 8">
+            <a:extLst>
+              <a:ext uri="{FF2B5EF4-FFF2-40B4-BE49-F238E27FC236}">
+                <a16:creationId xmlns:a16="http://schemas.microsoft.com/office/drawing/2014/main" id="{494C0A01-562B-BA3C-7066-F067DC02F29B}"/>
+              </a:ext>
+            </a:extLst>
+          </p:cNvPr>
+          <p:cNvSpPr txBox="1"/>
+          <p:nvPr/>
+        </p:nvSpPr>
+        <p:spPr>
+          <a:xfrm>
+            <a:off x="7574555" y="5147614"/>
+            <a:ext cx="1687257" cy="369332"/>
+          </a:xfrm>
+          <a:prstGeom prst="rect">
+            <a:avLst/>
+          </a:prstGeom>
+          <a:noFill/>
+        </p:spPr>
+        <p:txBody>
+          <a:bodyPr wrap="none" rtlCol="0">
+            <a:spAutoFit/>
+          </a:bodyPr>
+          <a:lstStyle/>
+          <a:p>
+            <a:r>
+              <a:rPr lang="de-DE" dirty="0"/>
+              <a:t>Drug Discovery</a:t>
+            </a:r>
+          </a:p>
+        </p:txBody>
+      </p:sp>
+      <p:sp>
+        <p:nvSpPr>
+          <p:cNvPr id="12" name="Textfeld 11">
+            <a:extLst>
+              <a:ext uri="{FF2B5EF4-FFF2-40B4-BE49-F238E27FC236}">
+                <a16:creationId xmlns:a16="http://schemas.microsoft.com/office/drawing/2014/main" id="{8DF3880F-9601-CE4D-FED6-F6CD3C3A64B3}"/>
+              </a:ext>
+            </a:extLst>
+          </p:cNvPr>
+          <p:cNvSpPr txBox="1"/>
+          <p:nvPr/>
+        </p:nvSpPr>
+        <p:spPr>
+          <a:xfrm>
+            <a:off x="9459441" y="5251786"/>
+            <a:ext cx="2561535" cy="369332"/>
+          </a:xfrm>
+          <a:prstGeom prst="rect">
+            <a:avLst/>
+          </a:prstGeom>
+          <a:noFill/>
+        </p:spPr>
+        <p:txBody>
+          <a:bodyPr wrap="none" rtlCol="0">
+            <a:spAutoFit/>
+          </a:bodyPr>
+          <a:lstStyle/>
+          <a:p>
+            <a:r>
+              <a:rPr lang="de-DE" dirty="0" err="1"/>
+              <a:t>Social</a:t>
+            </a:r>
+            <a:r>
+              <a:rPr lang="de-DE" dirty="0"/>
+              <a:t> Network Analysis</a:t>
+            </a:r>
+          </a:p>
+        </p:txBody>
+      </p:sp>
+      <p:sp>
+        <p:nvSpPr>
+          <p:cNvPr id="13" name="Textfeld 12">
+            <a:extLst>
+              <a:ext uri="{FF2B5EF4-FFF2-40B4-BE49-F238E27FC236}">
+                <a16:creationId xmlns:a16="http://schemas.microsoft.com/office/drawing/2014/main" id="{6838F8EE-95E8-9EB9-ECC5-AC0724485D61}"/>
+              </a:ext>
+            </a:extLst>
+          </p:cNvPr>
+          <p:cNvSpPr txBox="1"/>
+          <p:nvPr/>
+        </p:nvSpPr>
+        <p:spPr>
+          <a:xfrm>
+            <a:off x="7574555" y="5660645"/>
+            <a:ext cx="1669816" cy="369332"/>
+          </a:xfrm>
+          <a:prstGeom prst="rect">
+            <a:avLst/>
+          </a:prstGeom>
+          <a:noFill/>
+        </p:spPr>
+        <p:txBody>
+          <a:bodyPr wrap="none" rtlCol="0">
+            <a:spAutoFit/>
+          </a:bodyPr>
+          <a:lstStyle/>
+          <a:p>
+            <a:r>
+              <a:rPr lang="de-DE" dirty="0"/>
+              <a:t>Topic Modeling</a:t>
+            </a:r>
+          </a:p>
+        </p:txBody>
+      </p:sp>
+      <p:sp>
+        <p:nvSpPr>
+          <p:cNvPr id="14" name="Textfeld 13">
+            <a:extLst>
+              <a:ext uri="{FF2B5EF4-FFF2-40B4-BE49-F238E27FC236}">
+                <a16:creationId xmlns:a16="http://schemas.microsoft.com/office/drawing/2014/main" id="{D9425F67-F9A7-351E-B88B-606B0E94A34A}"/>
+              </a:ext>
+            </a:extLst>
+          </p:cNvPr>
+          <p:cNvSpPr txBox="1"/>
+          <p:nvPr/>
+        </p:nvSpPr>
+        <p:spPr>
+          <a:xfrm>
+            <a:off x="659104" y="5255179"/>
+            <a:ext cx="1476943" cy="369332"/>
+          </a:xfrm>
+          <a:prstGeom prst="rect">
+            <a:avLst/>
+          </a:prstGeom>
+          <a:noFill/>
+        </p:spPr>
+        <p:txBody>
+          <a:bodyPr wrap="none" rtlCol="0">
+            <a:spAutoFit/>
+          </a:bodyPr>
+          <a:lstStyle/>
+          <a:p>
+            <a:r>
+              <a:rPr lang="de-DE" dirty="0"/>
+              <a:t>Risk Analysis</a:t>
+            </a:r>
+          </a:p>
+        </p:txBody>
+      </p:sp>
+      <p:sp>
+        <p:nvSpPr>
+          <p:cNvPr id="15" name="Textfeld 14">
+            <a:extLst>
+              <a:ext uri="{FF2B5EF4-FFF2-40B4-BE49-F238E27FC236}">
+                <a16:creationId xmlns:a16="http://schemas.microsoft.com/office/drawing/2014/main" id="{11C3A217-130D-0A09-400E-2154C70A564F}"/>
+              </a:ext>
+            </a:extLst>
+          </p:cNvPr>
+          <p:cNvSpPr txBox="1"/>
+          <p:nvPr/>
+        </p:nvSpPr>
+        <p:spPr>
+          <a:xfrm>
+            <a:off x="487018" y="2017860"/>
+            <a:ext cx="2722348" cy="461665"/>
+          </a:xfrm>
+          <a:prstGeom prst="rect">
+            <a:avLst/>
+          </a:prstGeom>
+          <a:noFill/>
+        </p:spPr>
+        <p:txBody>
+          <a:bodyPr wrap="none" rtlCol="0">
+            <a:spAutoFit/>
+          </a:bodyPr>
+          <a:lstStyle/>
+          <a:p>
+            <a:r>
+              <a:rPr lang="de-DE" sz="2400" dirty="0" err="1"/>
+              <a:t>Anomaly</a:t>
+            </a:r>
+            <a:r>
+              <a:rPr lang="de-DE" sz="2400" dirty="0"/>
+              <a:t> </a:t>
+            </a:r>
+            <a:r>
+              <a:rPr lang="de-DE" sz="2400" dirty="0" err="1"/>
+              <a:t>Detection</a:t>
+            </a:r>
+            <a:endParaRPr lang="de-DE" sz="2400" dirty="0"/>
+          </a:p>
+        </p:txBody>
+      </p:sp>
+      <p:sp>
+        <p:nvSpPr>
+          <p:cNvPr id="16" name="Textfeld 15">
+            <a:extLst>
+              <a:ext uri="{FF2B5EF4-FFF2-40B4-BE49-F238E27FC236}">
+                <a16:creationId xmlns:a16="http://schemas.microsoft.com/office/drawing/2014/main" id="{51E32D26-D10D-430E-A1B9-75D2728EFBBF}"/>
+              </a:ext>
+            </a:extLst>
+          </p:cNvPr>
+          <p:cNvSpPr txBox="1"/>
+          <p:nvPr/>
+        </p:nvSpPr>
+        <p:spPr>
+          <a:xfrm>
+            <a:off x="4382710" y="2017860"/>
+            <a:ext cx="3426579" cy="461665"/>
+          </a:xfrm>
+          <a:prstGeom prst="rect">
+            <a:avLst/>
+          </a:prstGeom>
+          <a:noFill/>
+        </p:spPr>
+        <p:txBody>
+          <a:bodyPr wrap="none" rtlCol="0">
+            <a:spAutoFit/>
+          </a:bodyPr>
+          <a:lstStyle/>
+          <a:p>
+            <a:r>
+              <a:rPr lang="de-DE" sz="2400" dirty="0" err="1"/>
+              <a:t>Representation</a:t>
+            </a:r>
+            <a:r>
+              <a:rPr lang="de-DE" sz="2400" dirty="0"/>
+              <a:t> Learning</a:t>
+            </a:r>
+          </a:p>
+        </p:txBody>
+      </p:sp>
+      <p:sp>
+        <p:nvSpPr>
+          <p:cNvPr id="17" name="Textfeld 16">
+            <a:extLst>
+              <a:ext uri="{FF2B5EF4-FFF2-40B4-BE49-F238E27FC236}">
+                <a16:creationId xmlns:a16="http://schemas.microsoft.com/office/drawing/2014/main" id="{3D0627B5-13AE-8372-EE15-304E94CF30BD}"/>
+              </a:ext>
+            </a:extLst>
+          </p:cNvPr>
+          <p:cNvSpPr txBox="1"/>
+          <p:nvPr/>
+        </p:nvSpPr>
+        <p:spPr>
+          <a:xfrm>
+            <a:off x="8908191" y="2017860"/>
+            <a:ext cx="2796791" cy="461665"/>
+          </a:xfrm>
+          <a:prstGeom prst="rect">
+            <a:avLst/>
+          </a:prstGeom>
+          <a:noFill/>
+        </p:spPr>
+        <p:txBody>
+          <a:bodyPr wrap="none" rtlCol="0">
+            <a:spAutoFit/>
+          </a:bodyPr>
+          <a:lstStyle/>
+          <a:p>
+            <a:r>
+              <a:rPr lang="de-DE" sz="2400" dirty="0" err="1"/>
+              <a:t>Structure</a:t>
+            </a:r>
+            <a:r>
+              <a:rPr lang="de-DE" sz="2400" dirty="0"/>
+              <a:t> Discovery</a:t>
+            </a:r>
+          </a:p>
+        </p:txBody>
+      </p:sp>
+      <p:sp>
+        <p:nvSpPr>
+          <p:cNvPr id="18" name="Textfeld 17">
+            <a:extLst>
+              <a:ext uri="{FF2B5EF4-FFF2-40B4-BE49-F238E27FC236}">
+                <a16:creationId xmlns:a16="http://schemas.microsoft.com/office/drawing/2014/main" id="{7B29B286-4626-503B-9BB5-04AE1418E3A0}"/>
+              </a:ext>
+            </a:extLst>
+          </p:cNvPr>
+          <p:cNvSpPr txBox="1"/>
+          <p:nvPr/>
+        </p:nvSpPr>
+        <p:spPr>
+          <a:xfrm>
+            <a:off x="2889466" y="6356350"/>
+            <a:ext cx="7056291" cy="369332"/>
+          </a:xfrm>
+          <a:prstGeom prst="rect">
+            <a:avLst/>
+          </a:prstGeom>
+          <a:noFill/>
+        </p:spPr>
+        <p:txBody>
+          <a:bodyPr wrap="none" rtlCol="0">
+            <a:spAutoFit/>
+          </a:bodyPr>
+          <a:lstStyle/>
+          <a:p>
+            <a:r>
+              <a:rPr lang="de-DE" dirty="0" err="1"/>
+              <a:t>Techniques</a:t>
+            </a:r>
+            <a:r>
+              <a:rPr lang="de-DE" dirty="0"/>
+              <a:t>: </a:t>
+            </a:r>
+            <a:r>
+              <a:rPr lang="de-DE" dirty="0" err="1"/>
+              <a:t>clustering</a:t>
+            </a:r>
+            <a:r>
+              <a:rPr lang="de-DE" dirty="0"/>
+              <a:t>, </a:t>
+            </a:r>
+            <a:r>
+              <a:rPr lang="de-DE" dirty="0" err="1"/>
+              <a:t>dimensionality</a:t>
+            </a:r>
+            <a:r>
+              <a:rPr lang="de-DE" dirty="0"/>
+              <a:t> </a:t>
+            </a:r>
+            <a:r>
+              <a:rPr lang="de-DE" dirty="0" err="1"/>
+              <a:t>reduction</a:t>
+            </a:r>
+            <a:r>
+              <a:rPr lang="de-DE" dirty="0"/>
+              <a:t>, </a:t>
+            </a:r>
+            <a:r>
+              <a:rPr lang="de-DE" dirty="0" err="1"/>
+              <a:t>association</a:t>
+            </a:r>
+            <a:r>
+              <a:rPr lang="de-DE" dirty="0"/>
+              <a:t> </a:t>
+            </a:r>
+            <a:r>
+              <a:rPr lang="de-DE" dirty="0" err="1"/>
+              <a:t>rules</a:t>
+            </a:r>
+            <a:r>
+              <a:rPr lang="de-DE" dirty="0"/>
+              <a:t>, …</a:t>
+            </a:r>
+          </a:p>
+        </p:txBody>
+      </p:sp>
+      <p:pic>
+        <p:nvPicPr>
+          <p:cNvPr id="1028" name="Picture 4">
+            <a:extLst>
+              <a:ext uri="{FF2B5EF4-FFF2-40B4-BE49-F238E27FC236}">
+                <a16:creationId xmlns:a16="http://schemas.microsoft.com/office/drawing/2014/main" id="{0CC232DC-47A4-B760-2789-E1C42E43C510}"/>
+              </a:ext>
+            </a:extLst>
+          </p:cNvPr>
+          <p:cNvPicPr>
+            <a:picLocks noChangeAspect="1" noChangeArrowheads="1"/>
+          </p:cNvPicPr>
+          <p:nvPr/>
+        </p:nvPicPr>
+        <p:blipFill>
+          <a:blip r:embed="rId2">
+            <a:extLst>
+              <a:ext uri="{28A0092B-C50C-407E-A947-70E740481C1C}">
+                <a14:useLocalDpi xmlns:a14="http://schemas.microsoft.com/office/drawing/2010/main" val="0"/>
+              </a:ext>
+            </a:extLst>
+          </a:blip>
+          <a:srcRect/>
+          <a:stretch>
+            <a:fillRect/>
+          </a:stretch>
+        </p:blipFill>
+        <p:spPr bwMode="auto">
+          <a:xfrm>
+            <a:off x="750153" y="3092374"/>
+            <a:ext cx="2196077" cy="1325563"/>
+          </a:xfrm>
+          <a:prstGeom prst="rect">
+            <a:avLst/>
+          </a:prstGeom>
+          <a:noFill/>
+          <a:extLst>
+            <a:ext uri="{909E8E84-426E-40DD-AFC4-6F175D3DCCD1}">
+              <a14:hiddenFill xmlns:a14="http://schemas.microsoft.com/office/drawing/2010/main">
+                <a:solidFill>
+                  <a:srgbClr val="FFFFFF"/>
+                </a:solidFill>
+              </a14:hiddenFill>
+            </a:ext>
+          </a:extLst>
+        </p:spPr>
+      </p:pic>
+      <p:pic>
+        <p:nvPicPr>
+          <p:cNvPr id="1032" name="Picture 8" descr="Recommender Systems in Machine Learning: Examples">
+            <a:extLst>
+              <a:ext uri="{FF2B5EF4-FFF2-40B4-BE49-F238E27FC236}">
+                <a16:creationId xmlns:a16="http://schemas.microsoft.com/office/drawing/2014/main" id="{7E241801-E2EA-9D59-DD10-69D7E78E944F}"/>
+              </a:ext>
+            </a:extLst>
+          </p:cNvPr>
+          <p:cNvPicPr>
+            <a:picLocks noChangeAspect="1" noChangeArrowheads="1"/>
+          </p:cNvPicPr>
+          <p:nvPr/>
+        </p:nvPicPr>
+        <p:blipFill>
+          <a:blip r:embed="rId3">
+            <a:extLst>
+              <a:ext uri="{28A0092B-C50C-407E-A947-70E740481C1C}">
+                <a14:useLocalDpi xmlns:a14="http://schemas.microsoft.com/office/drawing/2010/main" val="0"/>
+              </a:ext>
+            </a:extLst>
+          </a:blip>
+          <a:srcRect/>
+          <a:stretch>
+            <a:fillRect/>
+          </a:stretch>
+        </p:blipFill>
+        <p:spPr bwMode="auto">
+          <a:xfrm>
+            <a:off x="4997961" y="2719339"/>
+            <a:ext cx="2196076" cy="2071632"/>
+          </a:xfrm>
+          <a:prstGeom prst="rect">
+            <a:avLst/>
+          </a:prstGeom>
+          <a:noFill/>
+          <a:extLst>
+            <a:ext uri="{909E8E84-426E-40DD-AFC4-6F175D3DCCD1}">
+              <a14:hiddenFill xmlns:a14="http://schemas.microsoft.com/office/drawing/2010/main">
+                <a:solidFill>
+                  <a:srgbClr val="FFFFFF"/>
+                </a:solidFill>
+              </a14:hiddenFill>
+            </a:ext>
+          </a:extLst>
+        </p:spPr>
+      </p:pic>
+      <p:pic>
+        <p:nvPicPr>
+          <p:cNvPr id="1034" name="Picture 10" descr="Unlocking Business Potential Through Effective Customer Segmentation |  Towards Data Science">
+            <a:extLst>
+              <a:ext uri="{FF2B5EF4-FFF2-40B4-BE49-F238E27FC236}">
+                <a16:creationId xmlns:a16="http://schemas.microsoft.com/office/drawing/2014/main" id="{9172C856-1B39-286B-3D40-A1345B00C7AF}"/>
+              </a:ext>
+            </a:extLst>
+          </p:cNvPr>
+          <p:cNvPicPr>
+            <a:picLocks noChangeAspect="1" noChangeArrowheads="1"/>
+          </p:cNvPicPr>
+          <p:nvPr/>
+        </p:nvPicPr>
+        <p:blipFill>
+          <a:blip r:embed="rId4">
+            <a:extLst>
+              <a:ext uri="{28A0092B-C50C-407E-A947-70E740481C1C}">
+                <a14:useLocalDpi xmlns:a14="http://schemas.microsoft.com/office/drawing/2010/main" val="0"/>
+              </a:ext>
+            </a:extLst>
+          </a:blip>
+          <a:srcRect/>
+          <a:stretch>
+            <a:fillRect/>
+          </a:stretch>
+        </p:blipFill>
+        <p:spPr bwMode="auto">
+          <a:xfrm>
+            <a:off x="9009760" y="2714758"/>
+            <a:ext cx="2654300" cy="1963702"/>
+          </a:xfrm>
+          <a:prstGeom prst="rect">
+            <a:avLst/>
+          </a:prstGeom>
+          <a:noFill/>
+          <a:extLst>
+            <a:ext uri="{909E8E84-426E-40DD-AFC4-6F175D3DCCD1}">
+              <a14:hiddenFill xmlns:a14="http://schemas.microsoft.com/office/drawing/2010/main">
+                <a:solidFill>
+                  <a:srgbClr val="FFFFFF"/>
+                </a:solidFill>
+              </a14:hiddenFill>
+            </a:ext>
+          </a:extLst>
+        </p:spPr>
+      </p:pic>
+      <p:sp>
+        <p:nvSpPr>
+          <p:cNvPr id="20" name="Textfeld 19">
+            <a:extLst>
+              <a:ext uri="{FF2B5EF4-FFF2-40B4-BE49-F238E27FC236}">
+                <a16:creationId xmlns:a16="http://schemas.microsoft.com/office/drawing/2014/main" id="{7B8E74B0-0778-3DC1-D9FE-F76D89DF951C}"/>
+              </a:ext>
+            </a:extLst>
+          </p:cNvPr>
+          <p:cNvSpPr txBox="1"/>
+          <p:nvPr/>
+        </p:nvSpPr>
+        <p:spPr>
+          <a:xfrm>
+            <a:off x="2833427" y="5030786"/>
+            <a:ext cx="1784015" cy="646331"/>
+          </a:xfrm>
+          <a:prstGeom prst="rect">
+            <a:avLst/>
+          </a:prstGeom>
+          <a:noFill/>
+        </p:spPr>
+        <p:txBody>
           <a:bodyPr wrap="square" rtlCol="0">
             <a:spAutoFit/>
           </a:bodyPr>
           <a:lstStyle/>
           <a:p>
             <a:r>
-              <a:rPr lang="en-GB" dirty="0"/>
-              <a:t>unsupervised and reinforcement learning can both be cast as supervised-learning setup</a:t>
+              <a:rPr lang="de-DE" dirty="0"/>
+              <a:t>Time Series Reconstruction</a:t>
             </a:r>
           </a:p>
         </p:txBody>
@@ -7883,7 +8511,7 @@
     </p:spTree>
     <p:extLst>
       <p:ext uri="{BB962C8B-B14F-4D97-AF65-F5344CB8AC3E}">
-        <p14:creationId xmlns:p14="http://schemas.microsoft.com/office/powerpoint/2010/main" val="3765141192"/>
+        <p14:creationId xmlns:p14="http://schemas.microsoft.com/office/powerpoint/2010/main" val="716457656"/>
       </p:ext>
     </p:extLst>
   </p:cSld>
@@ -7915,7 +8543,7 @@
           <p:cNvPr id="2" name="Titel 1">
             <a:extLst>
               <a:ext uri="{FF2B5EF4-FFF2-40B4-BE49-F238E27FC236}">
-                <a16:creationId xmlns:a16="http://schemas.microsoft.com/office/drawing/2014/main" id="{A9723A98-5383-DEFF-2162-FA018A5C262F}"/>
+                <a16:creationId xmlns:a16="http://schemas.microsoft.com/office/drawing/2014/main" id="{9B3B1BF6-3B68-363E-F2F5-5DC138A9247A}"/>
               </a:ext>
             </a:extLst>
           </p:cNvPr>
@@ -7932,12 +8560,8 @@
           <a:lstStyle/>
           <a:p>
             <a:r>
-              <a:rPr lang="de-DE" dirty="0"/>
-              <a:t>Use Cases </a:t>
-            </a:r>
-            <a:r>
               <a:rPr lang="de-DE" dirty="0" err="1"/>
-              <a:t>for</a:t>
+              <a:t>What</a:t>
             </a:r>
             <a:r>
               <a:rPr lang="de-DE" dirty="0"/>
@@ -7945,46 +8569,21 @@
             </a:r>
             <a:r>
               <a:rPr lang="de-DE" dirty="0" err="1"/>
-              <a:t>Unsupervised</a:t>
+              <a:t>Is</a:t>
             </a:r>
             <a:r>
               <a:rPr lang="de-DE" dirty="0"/>
-              <a:t> Learning</a:t>
-            </a:r>
-          </a:p>
-        </p:txBody>
-      </p:sp>
-      <p:sp>
-        <p:nvSpPr>
-          <p:cNvPr id="3" name="Inhaltsplatzhalter 2">
-            <a:extLst>
-              <a:ext uri="{FF2B5EF4-FFF2-40B4-BE49-F238E27FC236}">
-                <a16:creationId xmlns:a16="http://schemas.microsoft.com/office/drawing/2014/main" id="{4C2EF707-9B3C-32C9-4934-7282D4574FEF}"/>
-              </a:ext>
-            </a:extLst>
-          </p:cNvPr>
-          <p:cNvSpPr>
-            <a:spLocks noGrp="1"/>
-          </p:cNvSpPr>
-          <p:nvPr>
-            <p:ph idx="1"/>
-          </p:nvPr>
-        </p:nvSpPr>
-        <p:spPr/>
-        <p:txBody>
-          <a:bodyPr/>
-          <a:lstStyle/>
-          <a:p>
-            <a:endParaRPr lang="de-DE"/>
-          </a:p>
-        </p:txBody>
-      </p:sp>
-      <p:sp>
-        <p:nvSpPr>
-          <p:cNvPr id="4" name="Foliennummernplatzhalter 3">
-            <a:extLst>
-              <a:ext uri="{FF2B5EF4-FFF2-40B4-BE49-F238E27FC236}">
-                <a16:creationId xmlns:a16="http://schemas.microsoft.com/office/drawing/2014/main" id="{30062167-9517-D148-36D2-E07544A0CD93}"/>
+              <a:t> Clustering?</a:t>
+            </a:r>
+          </a:p>
+        </p:txBody>
+      </p:sp>
+      <p:sp>
+        <p:nvSpPr>
+          <p:cNvPr id="3" name="Foliennummernplatzhalter 2">
+            <a:extLst>
+              <a:ext uri="{FF2B5EF4-FFF2-40B4-BE49-F238E27FC236}">
+                <a16:creationId xmlns:a16="http://schemas.microsoft.com/office/drawing/2014/main" id="{8A7EBB15-2B75-32A3-5033-3371960D7156}"/>
               </a:ext>
             </a:extLst>
           </p:cNvPr>
@@ -8011,7 +8610,7 @@
     </p:spTree>
     <p:extLst>
       <p:ext uri="{BB962C8B-B14F-4D97-AF65-F5344CB8AC3E}">
-        <p14:creationId xmlns:p14="http://schemas.microsoft.com/office/powerpoint/2010/main" val="716457656"/>
+        <p14:creationId xmlns:p14="http://schemas.microsoft.com/office/powerpoint/2010/main" val="3373108070"/>
       </p:ext>
     </p:extLst>
   </p:cSld>

--- a/slides/2_clustering.pptx
+++ b/slides/2_clustering.pptx
@@ -5,7 +5,7 @@
     <p:sldMasterId id="2147483648" r:id="rId1"/>
   </p:sldMasterIdLst>
   <p:notesMasterIdLst>
-    <p:notesMasterId r:id="rId24"/>
+    <p:notesMasterId r:id="rId26"/>
   </p:notesMasterIdLst>
   <p:sldIdLst>
     <p:sldId id="256" r:id="rId2"/>
@@ -20,16 +20,18 @@
     <p:sldId id="272" r:id="rId11"/>
     <p:sldId id="273" r:id="rId12"/>
     <p:sldId id="274" r:id="rId13"/>
-    <p:sldId id="275" r:id="rId14"/>
-    <p:sldId id="276" r:id="rId15"/>
-    <p:sldId id="277" r:id="rId16"/>
-    <p:sldId id="278" r:id="rId17"/>
-    <p:sldId id="279" r:id="rId18"/>
-    <p:sldId id="280" r:id="rId19"/>
-    <p:sldId id="281" r:id="rId20"/>
-    <p:sldId id="282" r:id="rId21"/>
-    <p:sldId id="283" r:id="rId22"/>
-    <p:sldId id="284" r:id="rId23"/>
+    <p:sldId id="287" r:id="rId14"/>
+    <p:sldId id="286" r:id="rId15"/>
+    <p:sldId id="275" r:id="rId16"/>
+    <p:sldId id="276" r:id="rId17"/>
+    <p:sldId id="277" r:id="rId18"/>
+    <p:sldId id="278" r:id="rId19"/>
+    <p:sldId id="279" r:id="rId20"/>
+    <p:sldId id="280" r:id="rId21"/>
+    <p:sldId id="281" r:id="rId22"/>
+    <p:sldId id="282" r:id="rId23"/>
+    <p:sldId id="283" r:id="rId24"/>
+    <p:sldId id="284" r:id="rId25"/>
   </p:sldIdLst>
   <p:sldSz cx="12192000" cy="6858000"/>
   <p:notesSz cx="6858000" cy="9144000"/>
@@ -4410,7 +4412,7 @@
           <p:cNvPr id="2" name="Titel 1">
             <a:extLst>
               <a:ext uri="{FF2B5EF4-FFF2-40B4-BE49-F238E27FC236}">
-                <a16:creationId xmlns:a16="http://schemas.microsoft.com/office/drawing/2014/main" id="{712D266D-155F-F226-2B1D-358BA749E8CC}"/>
+                <a16:creationId xmlns:a16="http://schemas.microsoft.com/office/drawing/2014/main" id="{AE45E519-E948-8501-ACAD-BDF00444DFDC}"/>
               </a:ext>
             </a:extLst>
           </p:cNvPr>
@@ -4427,13 +4429,39 @@
           <a:lstStyle/>
           <a:p>
             <a:r>
+              <a:rPr lang="de-DE" dirty="0"/>
+              <a:t>Mini Batch </a:t>
+            </a:r>
+            <a:r>
               <a:rPr lang="de-DE" dirty="0" err="1"/>
-              <a:t>Hierarchical</a:t>
-            </a:r>
-            <a:r>
-              <a:rPr lang="de-DE" dirty="0"/>
-              <a:t> Clustering: Motivation</a:t>
-            </a:r>
+              <a:t>k-Means</a:t>
+            </a:r>
+            <a:endParaRPr lang="de-DE" dirty="0"/>
+          </a:p>
+        </p:txBody>
+      </p:sp>
+      <p:sp>
+        <p:nvSpPr>
+          <p:cNvPr id="4" name="Inhaltsplatzhalter 3">
+            <a:extLst>
+              <a:ext uri="{FF2B5EF4-FFF2-40B4-BE49-F238E27FC236}">
+                <a16:creationId xmlns:a16="http://schemas.microsoft.com/office/drawing/2014/main" id="{DAA8C059-BF98-DA76-D11E-B2885769186E}"/>
+              </a:ext>
+            </a:extLst>
+          </p:cNvPr>
+          <p:cNvSpPr>
+            <a:spLocks noGrp="1"/>
+          </p:cNvSpPr>
+          <p:nvPr>
+            <p:ph idx="1"/>
+          </p:nvPr>
+        </p:nvSpPr>
+        <p:spPr/>
+        <p:txBody>
+          <a:bodyPr/>
+          <a:lstStyle/>
+          <a:p>
+            <a:endParaRPr lang="de-DE"/>
           </a:p>
         </p:txBody>
       </p:sp>
@@ -4442,7 +4470,7 @@
           <p:cNvPr id="3" name="Foliennummernplatzhalter 2">
             <a:extLst>
               <a:ext uri="{FF2B5EF4-FFF2-40B4-BE49-F238E27FC236}">
-                <a16:creationId xmlns:a16="http://schemas.microsoft.com/office/drawing/2014/main" id="{0837E5E9-930A-77A7-EDB3-BE3C126787F0}"/>
+                <a16:creationId xmlns:a16="http://schemas.microsoft.com/office/drawing/2014/main" id="{2B02C868-452A-3E9E-3E72-BA889BC8609C}"/>
               </a:ext>
             </a:extLst>
           </p:cNvPr>
@@ -4466,10 +4494,57 @@
           </a:p>
         </p:txBody>
       </p:sp>
+      <p:pic>
+        <p:nvPicPr>
+          <p:cNvPr id="1026" name="Picture 2" descr="KMeans, MiniBatchKMeans, Difference">
+            <a:extLst>
+              <a:ext uri="{FF2B5EF4-FFF2-40B4-BE49-F238E27FC236}">
+                <a16:creationId xmlns:a16="http://schemas.microsoft.com/office/drawing/2014/main" id="{8E76ED71-B047-741E-33C3-F2BB69959819}"/>
+              </a:ext>
+            </a:extLst>
+          </p:cNvPr>
+          <p:cNvPicPr>
+            <a:picLocks noChangeAspect="1" noChangeArrowheads="1"/>
+          </p:cNvPicPr>
+          <p:nvPr/>
+        </p:nvPicPr>
+        <p:blipFill>
+          <a:blip r:embed="rId2">
+            <a:extLst>
+              <a:ext uri="{28A0092B-C50C-407E-A947-70E740481C1C}">
+                <a14:useLocalDpi xmlns:a14="http://schemas.microsoft.com/office/drawing/2010/main" val="0"/>
+              </a:ext>
+            </a:extLst>
+          </a:blip>
+          <a:srcRect/>
+          <a:stretch>
+            <a:fillRect/>
+          </a:stretch>
+        </p:blipFill>
+        <p:spPr bwMode="auto">
+          <a:xfrm>
+            <a:off x="2205892" y="3941884"/>
+            <a:ext cx="7776308" cy="2916116"/>
+          </a:xfrm>
+          <a:prstGeom prst="rect">
+            <a:avLst/>
+          </a:prstGeom>
+          <a:noFill/>
+          <a:extLst>
+            <a:ext uri="{909E8E84-426E-40DD-AFC4-6F175D3DCCD1}">
+              <a14:hiddenFill xmlns:a14="http://schemas.microsoft.com/office/drawing/2010/main">
+                <a:solidFill>
+                  <a:srgbClr val="FFFFFF"/>
+                </a:solidFill>
+              </a14:hiddenFill>
+            </a:ext>
+          </a:extLst>
+        </p:spPr>
+      </p:pic>
     </p:spTree>
     <p:extLst>
       <p:ext uri="{BB962C8B-B14F-4D97-AF65-F5344CB8AC3E}">
-        <p14:creationId xmlns:p14="http://schemas.microsoft.com/office/powerpoint/2010/main" val="3112906239"/>
+        <p14:creationId xmlns:p14="http://schemas.microsoft.com/office/powerpoint/2010/main" val="1327327153"/>
       </p:ext>
     </p:extLst>
   </p:cSld>
@@ -4501,7 +4576,7 @@
           <p:cNvPr id="2" name="Titel 1">
             <a:extLst>
               <a:ext uri="{FF2B5EF4-FFF2-40B4-BE49-F238E27FC236}">
-                <a16:creationId xmlns:a16="http://schemas.microsoft.com/office/drawing/2014/main" id="{4DB71406-467A-A03D-EBA2-95505D3C5AF2}"/>
+                <a16:creationId xmlns:a16="http://schemas.microsoft.com/office/drawing/2014/main" id="{DFE85EF2-749A-FE44-0A02-FD2D92497601}"/>
               </a:ext>
             </a:extLst>
           </p:cNvPr>
@@ -4519,7 +4594,7 @@
           <a:p>
             <a:r>
               <a:rPr lang="de-DE" dirty="0" err="1"/>
-              <a:t>Linkage</a:t>
+              <a:t>Gaussian</a:t>
             </a:r>
             <a:r>
               <a:rPr lang="de-DE" dirty="0"/>
@@ -4527,7 +4602,122 @@
             </a:r>
             <a:r>
               <a:rPr lang="de-DE" dirty="0" err="1"/>
-              <a:t>Criteria</a:t>
+              <a:t>Mixture</a:t>
+            </a:r>
+            <a:r>
+              <a:rPr lang="de-DE" dirty="0"/>
+              <a:t> Models</a:t>
+            </a:r>
+          </a:p>
+        </p:txBody>
+      </p:sp>
+      <p:sp>
+        <p:nvSpPr>
+          <p:cNvPr id="4" name="Inhaltsplatzhalter 3">
+            <a:extLst>
+              <a:ext uri="{FF2B5EF4-FFF2-40B4-BE49-F238E27FC236}">
+                <a16:creationId xmlns:a16="http://schemas.microsoft.com/office/drawing/2014/main" id="{0A2F8357-AF4F-871F-2CBC-4B5FD73DABB1}"/>
+              </a:ext>
+            </a:extLst>
+          </p:cNvPr>
+          <p:cNvSpPr>
+            <a:spLocks noGrp="1"/>
+          </p:cNvSpPr>
+          <p:nvPr>
+            <p:ph idx="1"/>
+          </p:nvPr>
+        </p:nvSpPr>
+        <p:spPr/>
+        <p:txBody>
+          <a:bodyPr/>
+          <a:lstStyle/>
+          <a:p>
+            <a:pPr marL="0" indent="0">
+              <a:buNone/>
+            </a:pPr>
+            <a:r>
+              <a:rPr lang="de-DE" dirty="0" err="1"/>
+              <a:t>k-Means</a:t>
+            </a:r>
+            <a:r>
+              <a:rPr lang="de-DE" dirty="0"/>
+              <a:t>: </a:t>
+            </a:r>
+            <a:r>
+              <a:rPr lang="de-DE" dirty="0" err="1"/>
+              <a:t>special</a:t>
+            </a:r>
+            <a:r>
+              <a:rPr lang="de-DE" dirty="0"/>
+              <a:t> </a:t>
+            </a:r>
+            <a:r>
+              <a:rPr lang="de-DE" dirty="0" err="1"/>
+              <a:t>case</a:t>
+            </a:r>
+            <a:r>
+              <a:rPr lang="de-DE" dirty="0"/>
+              <a:t> </a:t>
+            </a:r>
+            <a:r>
+              <a:rPr lang="de-DE" dirty="0" err="1"/>
+              <a:t>of</a:t>
+            </a:r>
+            <a:r>
+              <a:rPr lang="de-DE" dirty="0"/>
+              <a:t> </a:t>
+            </a:r>
+            <a:r>
+              <a:rPr lang="de-DE" dirty="0" err="1"/>
+              <a:t>Gaussian</a:t>
+            </a:r>
+            <a:r>
+              <a:rPr lang="de-DE" dirty="0"/>
+              <a:t> </a:t>
+            </a:r>
+            <a:r>
+              <a:rPr lang="de-DE" dirty="0" err="1"/>
+              <a:t>mixture</a:t>
+            </a:r>
+            <a:r>
+              <a:rPr lang="de-DE" dirty="0"/>
+              <a:t> </a:t>
+            </a:r>
+            <a:r>
+              <a:rPr lang="de-DE" dirty="0" err="1"/>
+              <a:t>model</a:t>
+            </a:r>
+            <a:r>
+              <a:rPr lang="de-DE" dirty="0"/>
+              <a:t> </a:t>
+            </a:r>
+            <a:r>
+              <a:rPr lang="de-DE" dirty="0" err="1"/>
+              <a:t>with</a:t>
+            </a:r>
+            <a:r>
+              <a:rPr lang="de-DE" dirty="0"/>
+              <a:t> </a:t>
+            </a:r>
+            <a:r>
+              <a:rPr lang="de-DE" dirty="0" err="1"/>
+              <a:t>equal</a:t>
+            </a:r>
+            <a:r>
+              <a:rPr lang="de-DE" dirty="0"/>
+              <a:t> </a:t>
+            </a:r>
+            <a:r>
+              <a:rPr lang="de-DE" dirty="0" err="1"/>
+              <a:t>covariance</a:t>
+            </a:r>
+            <a:r>
+              <a:rPr lang="de-DE" dirty="0"/>
+              <a:t> per </a:t>
+            </a:r>
+            <a:r>
+              <a:rPr lang="de-DE" dirty="0" err="1"/>
+              <a:t>component</a:t>
             </a:r>
             <a:endParaRPr lang="de-DE" dirty="0"/>
           </a:p>
@@ -4538,7 +4728,7 @@
           <p:cNvPr id="3" name="Foliennummernplatzhalter 2">
             <a:extLst>
               <a:ext uri="{FF2B5EF4-FFF2-40B4-BE49-F238E27FC236}">
-                <a16:creationId xmlns:a16="http://schemas.microsoft.com/office/drawing/2014/main" id="{0F696987-D96D-454C-5E9D-CD69887E2F65}"/>
+                <a16:creationId xmlns:a16="http://schemas.microsoft.com/office/drawing/2014/main" id="{0B40836D-FBB2-F6AE-DB5B-B3E743214157}"/>
               </a:ext>
             </a:extLst>
           </p:cNvPr>
@@ -4565,7 +4755,7 @@
     </p:spTree>
     <p:extLst>
       <p:ext uri="{BB962C8B-B14F-4D97-AF65-F5344CB8AC3E}">
-        <p14:creationId xmlns:p14="http://schemas.microsoft.com/office/powerpoint/2010/main" val="2365265487"/>
+        <p14:creationId xmlns:p14="http://schemas.microsoft.com/office/powerpoint/2010/main" val="3563920324"/>
       </p:ext>
     </p:extLst>
   </p:cSld>
@@ -4597,7 +4787,7 @@
           <p:cNvPr id="2" name="Titel 1">
             <a:extLst>
               <a:ext uri="{FF2B5EF4-FFF2-40B4-BE49-F238E27FC236}">
-                <a16:creationId xmlns:a16="http://schemas.microsoft.com/office/drawing/2014/main" id="{54142ABE-7200-78B0-CCD9-D683F1797E62}"/>
+                <a16:creationId xmlns:a16="http://schemas.microsoft.com/office/drawing/2014/main" id="{712D266D-155F-F226-2B1D-358BA749E8CC}"/>
               </a:ext>
             </a:extLst>
           </p:cNvPr>
@@ -4615,11 +4805,11 @@
           <a:p>
             <a:r>
               <a:rPr lang="de-DE" dirty="0" err="1"/>
-              <a:t>Dendrograms</a:t>
+              <a:t>Hierarchical</a:t>
             </a:r>
             <a:r>
               <a:rPr lang="de-DE" dirty="0"/>
-              <a:t> and Interpretation</a:t>
+              <a:t> Clustering: Motivation</a:t>
             </a:r>
           </a:p>
         </p:txBody>
@@ -4629,7 +4819,7 @@
           <p:cNvPr id="3" name="Foliennummernplatzhalter 2">
             <a:extLst>
               <a:ext uri="{FF2B5EF4-FFF2-40B4-BE49-F238E27FC236}">
-                <a16:creationId xmlns:a16="http://schemas.microsoft.com/office/drawing/2014/main" id="{3CF1EAA3-D7F2-B045-B22D-C9405AEBC70C}"/>
+                <a16:creationId xmlns:a16="http://schemas.microsoft.com/office/drawing/2014/main" id="{0837E5E9-930A-77A7-EDB3-BE3C126787F0}"/>
               </a:ext>
             </a:extLst>
           </p:cNvPr>
@@ -4656,7 +4846,7 @@
     </p:spTree>
     <p:extLst>
       <p:ext uri="{BB962C8B-B14F-4D97-AF65-F5344CB8AC3E}">
-        <p14:creationId xmlns:p14="http://schemas.microsoft.com/office/powerpoint/2010/main" val="1704252082"/>
+        <p14:creationId xmlns:p14="http://schemas.microsoft.com/office/powerpoint/2010/main" val="3112906239"/>
       </p:ext>
     </p:extLst>
   </p:cSld>
@@ -4688,7 +4878,7 @@
           <p:cNvPr id="2" name="Titel 1">
             <a:extLst>
               <a:ext uri="{FF2B5EF4-FFF2-40B4-BE49-F238E27FC236}">
-                <a16:creationId xmlns:a16="http://schemas.microsoft.com/office/drawing/2014/main" id="{C1279D54-116A-6D58-B75A-2556899D6B46}"/>
+                <a16:creationId xmlns:a16="http://schemas.microsoft.com/office/drawing/2014/main" id="{4DB71406-467A-A03D-EBA2-95505D3C5AF2}"/>
               </a:ext>
             </a:extLst>
           </p:cNvPr>
@@ -4705,17 +4895,18 @@
           <a:lstStyle/>
           <a:p>
             <a:r>
+              <a:rPr lang="de-DE" dirty="0" err="1"/>
+              <a:t>Linkage</a:t>
+            </a:r>
+            <a:r>
               <a:rPr lang="de-DE" dirty="0"/>
-              <a:t>DBSCAN: Density-</a:t>
+              <a:t> </a:t>
             </a:r>
             <a:r>
               <a:rPr lang="de-DE" dirty="0" err="1"/>
-              <a:t>Based</a:t>
-            </a:r>
-            <a:r>
-              <a:rPr lang="de-DE" dirty="0"/>
-              <a:t> Clustering</a:t>
-            </a:r>
+              <a:t>Criteria</a:t>
+            </a:r>
+            <a:endParaRPr lang="de-DE" dirty="0"/>
           </a:p>
         </p:txBody>
       </p:sp>
@@ -4724,7 +4915,7 @@
           <p:cNvPr id="3" name="Foliennummernplatzhalter 2">
             <a:extLst>
               <a:ext uri="{FF2B5EF4-FFF2-40B4-BE49-F238E27FC236}">
-                <a16:creationId xmlns:a16="http://schemas.microsoft.com/office/drawing/2014/main" id="{C6A32FD8-548B-71F2-BB0C-E2FA7DE0D672}"/>
+                <a16:creationId xmlns:a16="http://schemas.microsoft.com/office/drawing/2014/main" id="{0F696987-D96D-454C-5E9D-CD69887E2F65}"/>
               </a:ext>
             </a:extLst>
           </p:cNvPr>
@@ -4751,7 +4942,7 @@
     </p:spTree>
     <p:extLst>
       <p:ext uri="{BB962C8B-B14F-4D97-AF65-F5344CB8AC3E}">
-        <p14:creationId xmlns:p14="http://schemas.microsoft.com/office/powerpoint/2010/main" val="3058453600"/>
+        <p14:creationId xmlns:p14="http://schemas.microsoft.com/office/powerpoint/2010/main" val="2365265487"/>
       </p:ext>
     </p:extLst>
   </p:cSld>
@@ -4783,7 +4974,7 @@
           <p:cNvPr id="2" name="Titel 1">
             <a:extLst>
               <a:ext uri="{FF2B5EF4-FFF2-40B4-BE49-F238E27FC236}">
-                <a16:creationId xmlns:a16="http://schemas.microsoft.com/office/drawing/2014/main" id="{9CC7556B-98BB-9EF2-B9BD-688767AA83EE}"/>
+                <a16:creationId xmlns:a16="http://schemas.microsoft.com/office/drawing/2014/main" id="{54142ABE-7200-78B0-CCD9-D683F1797E62}"/>
               </a:ext>
             </a:extLst>
           </p:cNvPr>
@@ -4800,8 +4991,12 @@
           <a:lstStyle/>
           <a:p>
             <a:r>
+              <a:rPr lang="de-DE" dirty="0" err="1"/>
+              <a:t>Dendrograms</a:t>
+            </a:r>
+            <a:r>
               <a:rPr lang="de-DE" dirty="0"/>
-              <a:t>Core Points, Border Points, Noise</a:t>
+              <a:t> and Interpretation</a:t>
             </a:r>
           </a:p>
         </p:txBody>
@@ -4811,7 +5006,7 @@
           <p:cNvPr id="3" name="Foliennummernplatzhalter 2">
             <a:extLst>
               <a:ext uri="{FF2B5EF4-FFF2-40B4-BE49-F238E27FC236}">
-                <a16:creationId xmlns:a16="http://schemas.microsoft.com/office/drawing/2014/main" id="{157EE93D-CF21-6985-77E6-E17034472C2F}"/>
+                <a16:creationId xmlns:a16="http://schemas.microsoft.com/office/drawing/2014/main" id="{3CF1EAA3-D7F2-B045-B22D-C9405AEBC70C}"/>
               </a:ext>
             </a:extLst>
           </p:cNvPr>
@@ -4838,7 +5033,7 @@
     </p:spTree>
     <p:extLst>
       <p:ext uri="{BB962C8B-B14F-4D97-AF65-F5344CB8AC3E}">
-        <p14:creationId xmlns:p14="http://schemas.microsoft.com/office/powerpoint/2010/main" val="1093548525"/>
+        <p14:creationId xmlns:p14="http://schemas.microsoft.com/office/powerpoint/2010/main" val="1704252082"/>
       </p:ext>
     </p:extLst>
   </p:cSld>
@@ -4870,7 +5065,7 @@
           <p:cNvPr id="2" name="Titel 1">
             <a:extLst>
               <a:ext uri="{FF2B5EF4-FFF2-40B4-BE49-F238E27FC236}">
-                <a16:creationId xmlns:a16="http://schemas.microsoft.com/office/drawing/2014/main" id="{9AD358E7-F39E-EF65-C4C0-6907CB00234F}"/>
+                <a16:creationId xmlns:a16="http://schemas.microsoft.com/office/drawing/2014/main" id="{C1279D54-116A-6D58-B75A-2556899D6B46}"/>
               </a:ext>
             </a:extLst>
           </p:cNvPr>
@@ -4887,26 +5082,17 @@
           <a:lstStyle/>
           <a:p>
             <a:r>
+              <a:rPr lang="de-DE" dirty="0"/>
+              <a:t>DBSCAN: Density-</a:t>
+            </a:r>
+            <a:r>
               <a:rPr lang="de-DE" dirty="0" err="1"/>
-              <a:t>Choosing</a:t>
+              <a:t>Based</a:t>
             </a:r>
             <a:r>
               <a:rPr lang="de-DE" dirty="0"/>
-              <a:t> </a:t>
-            </a:r>
-            <a:r>
-              <a:rPr lang="el-GR" dirty="0"/>
-              <a:t>ε </a:t>
-            </a:r>
-            <a:r>
-              <a:rPr lang="de-DE" dirty="0"/>
-              <a:t>and </a:t>
-            </a:r>
-            <a:r>
-              <a:rPr lang="de-DE" dirty="0" err="1"/>
-              <a:t>min_samples</a:t>
-            </a:r>
-            <a:endParaRPr lang="de-DE" dirty="0"/>
+              <a:t> Clustering</a:t>
+            </a:r>
           </a:p>
         </p:txBody>
       </p:sp>
@@ -4915,7 +5101,7 @@
           <p:cNvPr id="3" name="Foliennummernplatzhalter 2">
             <a:extLst>
               <a:ext uri="{FF2B5EF4-FFF2-40B4-BE49-F238E27FC236}">
-                <a16:creationId xmlns:a16="http://schemas.microsoft.com/office/drawing/2014/main" id="{7F67A71D-5771-002A-3ED3-D1F7EA87F83F}"/>
+                <a16:creationId xmlns:a16="http://schemas.microsoft.com/office/drawing/2014/main" id="{C6A32FD8-548B-71F2-BB0C-E2FA7DE0D672}"/>
               </a:ext>
             </a:extLst>
           </p:cNvPr>
@@ -4942,7 +5128,7 @@
     </p:spTree>
     <p:extLst>
       <p:ext uri="{BB962C8B-B14F-4D97-AF65-F5344CB8AC3E}">
-        <p14:creationId xmlns:p14="http://schemas.microsoft.com/office/powerpoint/2010/main" val="1011311951"/>
+        <p14:creationId xmlns:p14="http://schemas.microsoft.com/office/powerpoint/2010/main" val="3058453600"/>
       </p:ext>
     </p:extLst>
   </p:cSld>
@@ -4974,7 +5160,7 @@
           <p:cNvPr id="2" name="Titel 1">
             <a:extLst>
               <a:ext uri="{FF2B5EF4-FFF2-40B4-BE49-F238E27FC236}">
-                <a16:creationId xmlns:a16="http://schemas.microsoft.com/office/drawing/2014/main" id="{AB0A312D-A6FF-AB8E-359F-EE1BDB1D4399}"/>
+                <a16:creationId xmlns:a16="http://schemas.microsoft.com/office/drawing/2014/main" id="{9CC7556B-98BB-9EF2-B9BD-688767AA83EE}"/>
               </a:ext>
             </a:extLst>
           </p:cNvPr>
@@ -4991,12 +5177,8 @@
           <a:lstStyle/>
           <a:p>
             <a:r>
-              <a:rPr lang="de-DE" dirty="0" err="1"/>
-              <a:t>Comparing</a:t>
-            </a:r>
-            <a:r>
               <a:rPr lang="de-DE" dirty="0"/>
-              <a:t> Clustering Methods</a:t>
+              <a:t>Core Points, Border Points, Noise</a:t>
             </a:r>
           </a:p>
         </p:txBody>
@@ -5006,7 +5188,7 @@
           <p:cNvPr id="3" name="Foliennummernplatzhalter 2">
             <a:extLst>
               <a:ext uri="{FF2B5EF4-FFF2-40B4-BE49-F238E27FC236}">
-                <a16:creationId xmlns:a16="http://schemas.microsoft.com/office/drawing/2014/main" id="{6EFA0DEA-9C10-4341-0996-B658FBE37513}"/>
+                <a16:creationId xmlns:a16="http://schemas.microsoft.com/office/drawing/2014/main" id="{157EE93D-CF21-6985-77E6-E17034472C2F}"/>
               </a:ext>
             </a:extLst>
           </p:cNvPr>
@@ -5033,7 +5215,7 @@
     </p:spTree>
     <p:extLst>
       <p:ext uri="{BB962C8B-B14F-4D97-AF65-F5344CB8AC3E}">
-        <p14:creationId xmlns:p14="http://schemas.microsoft.com/office/powerpoint/2010/main" val="2928299488"/>
+        <p14:creationId xmlns:p14="http://schemas.microsoft.com/office/powerpoint/2010/main" val="1093548525"/>
       </p:ext>
     </p:extLst>
   </p:cSld>
@@ -5374,7 +5556,7 @@
           <p:cNvPr id="2" name="Titel 1">
             <a:extLst>
               <a:ext uri="{FF2B5EF4-FFF2-40B4-BE49-F238E27FC236}">
-                <a16:creationId xmlns:a16="http://schemas.microsoft.com/office/drawing/2014/main" id="{121AA823-E2CE-8C0D-90DB-02DFE9572552}"/>
+                <a16:creationId xmlns:a16="http://schemas.microsoft.com/office/drawing/2014/main" id="{9AD358E7-F39E-EF65-C4C0-6907CB00234F}"/>
               </a:ext>
             </a:extLst>
           </p:cNvPr>
@@ -5391,12 +5573,24 @@
           <a:lstStyle/>
           <a:p>
             <a:r>
+              <a:rPr lang="de-DE" dirty="0" err="1"/>
+              <a:t>Choosing</a:t>
+            </a:r>
+            <a:r>
               <a:rPr lang="de-DE" dirty="0"/>
-              <a:t>Cluster Validation </a:t>
+              <a:t> </a:t>
+            </a:r>
+            <a:r>
+              <a:rPr lang="el-GR" dirty="0"/>
+              <a:t>ε </a:t>
+            </a:r>
+            <a:r>
+              <a:rPr lang="de-DE" dirty="0"/>
+              <a:t>and </a:t>
             </a:r>
             <a:r>
               <a:rPr lang="de-DE" dirty="0" err="1"/>
-              <a:t>Metrics</a:t>
+              <a:t>min_samples</a:t>
             </a:r>
             <a:endParaRPr lang="de-DE" dirty="0"/>
           </a:p>
@@ -5407,7 +5601,7 @@
           <p:cNvPr id="3" name="Foliennummernplatzhalter 2">
             <a:extLst>
               <a:ext uri="{FF2B5EF4-FFF2-40B4-BE49-F238E27FC236}">
-                <a16:creationId xmlns:a16="http://schemas.microsoft.com/office/drawing/2014/main" id="{563E3869-C5B7-1A95-0614-2B381BD8C120}"/>
+                <a16:creationId xmlns:a16="http://schemas.microsoft.com/office/drawing/2014/main" id="{7F67A71D-5771-002A-3ED3-D1F7EA87F83F}"/>
               </a:ext>
             </a:extLst>
           </p:cNvPr>
@@ -5434,7 +5628,7 @@
     </p:spTree>
     <p:extLst>
       <p:ext uri="{BB962C8B-B14F-4D97-AF65-F5344CB8AC3E}">
-        <p14:creationId xmlns:p14="http://schemas.microsoft.com/office/powerpoint/2010/main" val="474217543"/>
+        <p14:creationId xmlns:p14="http://schemas.microsoft.com/office/powerpoint/2010/main" val="1011311951"/>
       </p:ext>
     </p:extLst>
   </p:cSld>
@@ -5466,7 +5660,7 @@
           <p:cNvPr id="2" name="Titel 1">
             <a:extLst>
               <a:ext uri="{FF2B5EF4-FFF2-40B4-BE49-F238E27FC236}">
-                <a16:creationId xmlns:a16="http://schemas.microsoft.com/office/drawing/2014/main" id="{E1872AF3-6DAA-E6C2-A919-228FF3EB5851}"/>
+                <a16:creationId xmlns:a16="http://schemas.microsoft.com/office/drawing/2014/main" id="{AB0A312D-A6FF-AB8E-359F-EE1BDB1D4399}"/>
               </a:ext>
             </a:extLst>
           </p:cNvPr>
@@ -5484,11 +5678,11 @@
           <a:p>
             <a:r>
               <a:rPr lang="de-DE" dirty="0" err="1"/>
-              <a:t>Visualizing</a:t>
+              <a:t>Comparing</a:t>
             </a:r>
             <a:r>
               <a:rPr lang="de-DE" dirty="0"/>
-              <a:t> Clusters</a:t>
+              <a:t> Clustering Methods</a:t>
             </a:r>
           </a:p>
         </p:txBody>
@@ -5498,7 +5692,7 @@
           <p:cNvPr id="3" name="Foliennummernplatzhalter 2">
             <a:extLst>
               <a:ext uri="{FF2B5EF4-FFF2-40B4-BE49-F238E27FC236}">
-                <a16:creationId xmlns:a16="http://schemas.microsoft.com/office/drawing/2014/main" id="{81251F56-854B-D4C6-04C7-5A3B3F8DB84E}"/>
+                <a16:creationId xmlns:a16="http://schemas.microsoft.com/office/drawing/2014/main" id="{6EFA0DEA-9C10-4341-0996-B658FBE37513}"/>
               </a:ext>
             </a:extLst>
           </p:cNvPr>
@@ -5525,7 +5719,7 @@
     </p:spTree>
     <p:extLst>
       <p:ext uri="{BB962C8B-B14F-4D97-AF65-F5344CB8AC3E}">
-        <p14:creationId xmlns:p14="http://schemas.microsoft.com/office/powerpoint/2010/main" val="2070037097"/>
+        <p14:creationId xmlns:p14="http://schemas.microsoft.com/office/powerpoint/2010/main" val="2928299488"/>
       </p:ext>
     </p:extLst>
   </p:cSld>
@@ -5557,7 +5751,7 @@
           <p:cNvPr id="2" name="Titel 1">
             <a:extLst>
               <a:ext uri="{FF2B5EF4-FFF2-40B4-BE49-F238E27FC236}">
-                <a16:creationId xmlns:a16="http://schemas.microsoft.com/office/drawing/2014/main" id="{45D9CD1B-A5B6-7BCE-AB1E-4C80D77AE1D3}"/>
+                <a16:creationId xmlns:a16="http://schemas.microsoft.com/office/drawing/2014/main" id="{121AA823-E2CE-8C0D-90DB-02DFE9572552}"/>
               </a:ext>
             </a:extLst>
           </p:cNvPr>
@@ -5574,8 +5768,44 @@
           <a:lstStyle/>
           <a:p>
             <a:r>
+              <a:rPr lang="de-DE" dirty="0"/>
+              <a:t>Cluster Validation </a:t>
+            </a:r>
+            <a:r>
               <a:rPr lang="de-DE" dirty="0" err="1"/>
-              <a:t>Practical</a:t>
+              <a:t>Metrics</a:t>
+            </a:r>
+            <a:endParaRPr lang="de-DE" dirty="0"/>
+          </a:p>
+        </p:txBody>
+      </p:sp>
+      <p:sp>
+        <p:nvSpPr>
+          <p:cNvPr id="4" name="Inhaltsplatzhalter 3">
+            <a:extLst>
+              <a:ext uri="{FF2B5EF4-FFF2-40B4-BE49-F238E27FC236}">
+                <a16:creationId xmlns:a16="http://schemas.microsoft.com/office/drawing/2014/main" id="{4AAAE878-7307-C927-4B47-5A9C5B86AC4E}"/>
+              </a:ext>
+            </a:extLst>
+          </p:cNvPr>
+          <p:cNvSpPr>
+            <a:spLocks noGrp="1"/>
+          </p:cNvSpPr>
+          <p:nvPr>
+            <p:ph idx="1"/>
+          </p:nvPr>
+        </p:nvSpPr>
+        <p:spPr/>
+        <p:txBody>
+          <a:bodyPr/>
+          <a:lstStyle/>
+          <a:p>
+            <a:pPr marL="0" indent="0">
+              <a:buNone/>
+            </a:pPr>
+            <a:r>
+              <a:rPr lang="de-DE" dirty="0" err="1"/>
+              <a:t>Since</a:t>
             </a:r>
             <a:r>
               <a:rPr lang="de-DE" dirty="0"/>
@@ -5583,10 +5813,170 @@
             </a:r>
             <a:r>
               <a:rPr lang="de-DE" dirty="0" err="1"/>
-              <a:t>Considerations</a:t>
+              <a:t>clustering</a:t>
+            </a:r>
+            <a:r>
+              <a:rPr lang="de-DE" dirty="0"/>
+              <a:t> </a:t>
+            </a:r>
+            <a:r>
+              <a:rPr lang="de-DE" dirty="0" err="1"/>
+              <a:t>is</a:t>
+            </a:r>
+            <a:r>
+              <a:rPr lang="de-DE" dirty="0"/>
+              <a:t> </a:t>
+            </a:r>
+            <a:r>
+              <a:rPr lang="de-DE" dirty="0" err="1"/>
+              <a:t>unsupervised</a:t>
+            </a:r>
+            <a:r>
+              <a:rPr lang="de-DE" dirty="0"/>
+              <a:t>: </a:t>
+            </a:r>
+            <a:r>
+              <a:rPr lang="de-DE" dirty="0" err="1"/>
+              <a:t>no</a:t>
+            </a:r>
+            <a:r>
+              <a:rPr lang="de-DE" dirty="0"/>
+              <a:t> </a:t>
+            </a:r>
+            <a:r>
+              <a:rPr lang="de-DE" dirty="0" err="1"/>
+              <a:t>single</a:t>
+            </a:r>
+            <a:r>
+              <a:rPr lang="de-DE" dirty="0"/>
+              <a:t> “</a:t>
+            </a:r>
+            <a:r>
+              <a:rPr lang="de-DE" dirty="0" err="1"/>
+              <a:t>correct</a:t>
+            </a:r>
+            <a:r>
+              <a:rPr lang="de-DE" dirty="0"/>
+              <a:t>” </a:t>
+            </a:r>
+            <a:r>
+              <a:rPr lang="de-DE" dirty="0" err="1"/>
+              <a:t>answer</a:t>
             </a:r>
             <a:endParaRPr lang="de-DE" dirty="0"/>
           </a:p>
+          <a:p>
+            <a:pPr marL="0" indent="0">
+              <a:buNone/>
+            </a:pPr>
+            <a:endParaRPr lang="de-DE" dirty="0"/>
+          </a:p>
+          <a:p>
+            <a:pPr marL="0" indent="0">
+              <a:buNone/>
+            </a:pPr>
+            <a:r>
+              <a:rPr lang="de-DE" dirty="0" err="1"/>
+              <a:t>Instead</a:t>
+            </a:r>
+            <a:r>
+              <a:rPr lang="de-DE" dirty="0"/>
+              <a:t> </a:t>
+            </a:r>
+            <a:r>
+              <a:rPr lang="de-DE" dirty="0" err="1"/>
+              <a:t>measure</a:t>
+            </a:r>
+            <a:r>
+              <a:rPr lang="de-DE" dirty="0"/>
+              <a:t> </a:t>
+            </a:r>
+            <a:r>
+              <a:rPr lang="de-DE" dirty="0" err="1"/>
+              <a:t>how</a:t>
+            </a:r>
+            <a:r>
+              <a:rPr lang="de-DE" dirty="0"/>
+              <a:t> well-</a:t>
+            </a:r>
+            <a:r>
+              <a:rPr lang="de-DE" dirty="0" err="1"/>
+              <a:t>separated</a:t>
+            </a:r>
+            <a:r>
+              <a:rPr lang="de-DE" dirty="0"/>
+              <a:t> and </a:t>
+            </a:r>
+            <a:r>
+              <a:rPr lang="de-DE" dirty="0" err="1"/>
+              <a:t>cohesive</a:t>
+            </a:r>
+            <a:r>
+              <a:rPr lang="de-DE" dirty="0"/>
+              <a:t> </a:t>
+            </a:r>
+            <a:r>
+              <a:rPr lang="de-DE" dirty="0" err="1"/>
+              <a:t>clusters</a:t>
+            </a:r>
+            <a:r>
+              <a:rPr lang="de-DE" dirty="0"/>
+              <a:t> </a:t>
+            </a:r>
+            <a:r>
+              <a:rPr lang="de-DE" dirty="0" err="1"/>
+              <a:t>are</a:t>
+            </a:r>
+            <a:endParaRPr lang="de-DE" dirty="0"/>
+          </a:p>
+          <a:p>
+            <a:pPr marL="0" indent="0">
+              <a:buNone/>
+            </a:pPr>
+            <a:endParaRPr lang="de-DE" dirty="0"/>
+          </a:p>
+          <a:p>
+            <a:pPr marL="0" indent="0">
+              <a:buNone/>
+            </a:pPr>
+            <a:r>
+              <a:rPr lang="de-DE" dirty="0"/>
+              <a:t>Evaluation </a:t>
+            </a:r>
+            <a:r>
+              <a:rPr lang="de-DE" dirty="0" err="1"/>
+              <a:t>metrics</a:t>
+            </a:r>
+            <a:r>
+              <a:rPr lang="de-DE" dirty="0"/>
+              <a:t>:</a:t>
+            </a:r>
+          </a:p>
+          <a:p>
+            <a:r>
+              <a:rPr lang="de-DE" dirty="0"/>
+              <a:t>Silhouette score</a:t>
+            </a:r>
+          </a:p>
+          <a:p>
+            <a:r>
+              <a:rPr lang="de-DE" dirty="0"/>
+              <a:t>Davies-</a:t>
+            </a:r>
+            <a:r>
+              <a:rPr lang="de-DE" dirty="0" err="1"/>
+              <a:t>Bouldin</a:t>
+            </a:r>
+            <a:r>
+              <a:rPr lang="de-DE" dirty="0"/>
+              <a:t> </a:t>
+            </a:r>
+            <a:r>
+              <a:rPr lang="de-DE" dirty="0" err="1"/>
+              <a:t>index</a:t>
+            </a:r>
+            <a:endParaRPr lang="de-DE" dirty="0"/>
+          </a:p>
         </p:txBody>
       </p:sp>
       <p:sp>
@@ -5594,7 +5984,7 @@
           <p:cNvPr id="3" name="Foliennummernplatzhalter 2">
             <a:extLst>
               <a:ext uri="{FF2B5EF4-FFF2-40B4-BE49-F238E27FC236}">
-                <a16:creationId xmlns:a16="http://schemas.microsoft.com/office/drawing/2014/main" id="{5AE0FEB0-A1C8-1184-0009-46A75979A2F5}"/>
+                <a16:creationId xmlns:a16="http://schemas.microsoft.com/office/drawing/2014/main" id="{563E3869-C5B7-1A95-0614-2B381BD8C120}"/>
               </a:ext>
             </a:extLst>
           </p:cNvPr>
@@ -5613,6 +6003,193 @@
             <a:fld id="{08C366F5-AFAD-49CB-854A-9D9E238FCA13}" type="slidenum">
               <a:rPr lang="en-GB" smtClean="0"/>
               <a:t>22</a:t>
+            </a:fld>
+            <a:endParaRPr lang="en-GB"/>
+          </a:p>
+        </p:txBody>
+      </p:sp>
+    </p:spTree>
+    <p:extLst>
+      <p:ext uri="{BB962C8B-B14F-4D97-AF65-F5344CB8AC3E}">
+        <p14:creationId xmlns:p14="http://schemas.microsoft.com/office/powerpoint/2010/main" val="474217543"/>
+      </p:ext>
+    </p:extLst>
+  </p:cSld>
+  <p:clrMapOvr>
+    <a:masterClrMapping/>
+  </p:clrMapOvr>
+</p:sld>
+</file>
+
+<file path=ppt/slides/slide23.xml><?xml version="1.0" encoding="utf-8"?>
+<p:sld xmlns:a="http://schemas.openxmlformats.org/drawingml/2006/main" xmlns:r="http://schemas.openxmlformats.org/officeDocument/2006/relationships" xmlns:p="http://schemas.openxmlformats.org/presentationml/2006/main">
+  <p:cSld>
+    <p:spTree>
+      <p:nvGrpSpPr>
+        <p:cNvPr id="1" name=""/>
+        <p:cNvGrpSpPr/>
+        <p:nvPr/>
+      </p:nvGrpSpPr>
+      <p:grpSpPr>
+        <a:xfrm>
+          <a:off x="0" y="0"/>
+          <a:ext cx="0" cy="0"/>
+          <a:chOff x="0" y="0"/>
+          <a:chExt cx="0" cy="0"/>
+        </a:xfrm>
+      </p:grpSpPr>
+      <p:sp>
+        <p:nvSpPr>
+          <p:cNvPr id="2" name="Titel 1">
+            <a:extLst>
+              <a:ext uri="{FF2B5EF4-FFF2-40B4-BE49-F238E27FC236}">
+                <a16:creationId xmlns:a16="http://schemas.microsoft.com/office/drawing/2014/main" id="{E1872AF3-6DAA-E6C2-A919-228FF3EB5851}"/>
+              </a:ext>
+            </a:extLst>
+          </p:cNvPr>
+          <p:cNvSpPr>
+            <a:spLocks noGrp="1"/>
+          </p:cNvSpPr>
+          <p:nvPr>
+            <p:ph type="title"/>
+          </p:nvPr>
+        </p:nvSpPr>
+        <p:spPr/>
+        <p:txBody>
+          <a:bodyPr/>
+          <a:lstStyle/>
+          <a:p>
+            <a:r>
+              <a:rPr lang="de-DE" dirty="0" err="1"/>
+              <a:t>Visualizing</a:t>
+            </a:r>
+            <a:r>
+              <a:rPr lang="de-DE" dirty="0"/>
+              <a:t> Clusters</a:t>
+            </a:r>
+          </a:p>
+        </p:txBody>
+      </p:sp>
+      <p:sp>
+        <p:nvSpPr>
+          <p:cNvPr id="3" name="Foliennummernplatzhalter 2">
+            <a:extLst>
+              <a:ext uri="{FF2B5EF4-FFF2-40B4-BE49-F238E27FC236}">
+                <a16:creationId xmlns:a16="http://schemas.microsoft.com/office/drawing/2014/main" id="{81251F56-854B-D4C6-04C7-5A3B3F8DB84E}"/>
+              </a:ext>
+            </a:extLst>
+          </p:cNvPr>
+          <p:cNvSpPr>
+            <a:spLocks noGrp="1"/>
+          </p:cNvSpPr>
+          <p:nvPr>
+            <p:ph type="sldNum" sz="quarter" idx="12"/>
+          </p:nvPr>
+        </p:nvSpPr>
+        <p:spPr/>
+        <p:txBody>
+          <a:bodyPr/>
+          <a:lstStyle/>
+          <a:p>
+            <a:fld id="{08C366F5-AFAD-49CB-854A-9D9E238FCA13}" type="slidenum">
+              <a:rPr lang="en-GB" smtClean="0"/>
+              <a:t>23</a:t>
+            </a:fld>
+            <a:endParaRPr lang="en-GB"/>
+          </a:p>
+        </p:txBody>
+      </p:sp>
+    </p:spTree>
+    <p:extLst>
+      <p:ext uri="{BB962C8B-B14F-4D97-AF65-F5344CB8AC3E}">
+        <p14:creationId xmlns:p14="http://schemas.microsoft.com/office/powerpoint/2010/main" val="2070037097"/>
+      </p:ext>
+    </p:extLst>
+  </p:cSld>
+  <p:clrMapOvr>
+    <a:masterClrMapping/>
+  </p:clrMapOvr>
+</p:sld>
+</file>
+
+<file path=ppt/slides/slide24.xml><?xml version="1.0" encoding="utf-8"?>
+<p:sld xmlns:a="http://schemas.openxmlformats.org/drawingml/2006/main" xmlns:r="http://schemas.openxmlformats.org/officeDocument/2006/relationships" xmlns:p="http://schemas.openxmlformats.org/presentationml/2006/main">
+  <p:cSld>
+    <p:spTree>
+      <p:nvGrpSpPr>
+        <p:cNvPr id="1" name=""/>
+        <p:cNvGrpSpPr/>
+        <p:nvPr/>
+      </p:nvGrpSpPr>
+      <p:grpSpPr>
+        <a:xfrm>
+          <a:off x="0" y="0"/>
+          <a:ext cx="0" cy="0"/>
+          <a:chOff x="0" y="0"/>
+          <a:chExt cx="0" cy="0"/>
+        </a:xfrm>
+      </p:grpSpPr>
+      <p:sp>
+        <p:nvSpPr>
+          <p:cNvPr id="2" name="Titel 1">
+            <a:extLst>
+              <a:ext uri="{FF2B5EF4-FFF2-40B4-BE49-F238E27FC236}">
+                <a16:creationId xmlns:a16="http://schemas.microsoft.com/office/drawing/2014/main" id="{45D9CD1B-A5B6-7BCE-AB1E-4C80D77AE1D3}"/>
+              </a:ext>
+            </a:extLst>
+          </p:cNvPr>
+          <p:cNvSpPr>
+            <a:spLocks noGrp="1"/>
+          </p:cNvSpPr>
+          <p:nvPr>
+            <p:ph type="title"/>
+          </p:nvPr>
+        </p:nvSpPr>
+        <p:spPr/>
+        <p:txBody>
+          <a:bodyPr/>
+          <a:lstStyle/>
+          <a:p>
+            <a:r>
+              <a:rPr lang="de-DE" dirty="0" err="1"/>
+              <a:t>Practical</a:t>
+            </a:r>
+            <a:r>
+              <a:rPr lang="de-DE" dirty="0"/>
+              <a:t> </a:t>
+            </a:r>
+            <a:r>
+              <a:rPr lang="de-DE" dirty="0" err="1"/>
+              <a:t>Considerations</a:t>
+            </a:r>
+            <a:endParaRPr lang="de-DE" dirty="0"/>
+          </a:p>
+        </p:txBody>
+      </p:sp>
+      <p:sp>
+        <p:nvSpPr>
+          <p:cNvPr id="3" name="Foliennummernplatzhalter 2">
+            <a:extLst>
+              <a:ext uri="{FF2B5EF4-FFF2-40B4-BE49-F238E27FC236}">
+                <a16:creationId xmlns:a16="http://schemas.microsoft.com/office/drawing/2014/main" id="{5AE0FEB0-A1C8-1184-0009-46A75979A2F5}"/>
+              </a:ext>
+            </a:extLst>
+          </p:cNvPr>
+          <p:cNvSpPr>
+            <a:spLocks noGrp="1"/>
+          </p:cNvSpPr>
+          <p:nvPr>
+            <p:ph type="sldNum" sz="quarter" idx="12"/>
+          </p:nvPr>
+        </p:nvSpPr>
+        <p:spPr/>
+        <p:txBody>
+          <a:bodyPr/>
+          <a:lstStyle/>
+          <a:p>
+            <a:fld id="{08C366F5-AFAD-49CB-854A-9D9E238FCA13}" type="slidenum">
+              <a:rPr lang="en-GB" smtClean="0"/>
+              <a:t>24</a:t>
             </a:fld>
             <a:endParaRPr lang="en-GB"/>
           </a:p>
@@ -7774,8 +8351,8 @@
         </p:nvSpPr>
         <p:spPr>
           <a:xfrm>
-            <a:off x="9459441" y="4706690"/>
-            <a:ext cx="2662267" cy="369332"/>
+            <a:off x="9459441" y="4678460"/>
+            <a:ext cx="2196076" cy="646331"/>
           </a:xfrm>
           <a:prstGeom prst="rect">
             <a:avLst/>
@@ -7783,14 +8360,22 @@
           <a:noFill/>
         </p:spPr>
         <p:txBody>
-          <a:bodyPr wrap="none" rtlCol="0">
+          <a:bodyPr wrap="square" rtlCol="0">
             <a:spAutoFit/>
           </a:bodyPr>
           <a:lstStyle/>
           <a:p>
             <a:r>
               <a:rPr lang="de-DE" dirty="0"/>
-              <a:t>Customer Segmentation</a:t>
+              <a:t>Customer </a:t>
+            </a:r>
+            <a:r>
+              <a:rPr lang="de-DE" dirty="0" err="1"/>
+              <a:t>or</a:t>
+            </a:r>
+            <a:r>
+              <a:rPr lang="de-DE" dirty="0"/>
+              <a:t> Market Segmentation</a:t>
             </a:r>
           </a:p>
         </p:txBody>
@@ -8036,7 +8621,7 @@
         </p:nvSpPr>
         <p:spPr>
           <a:xfrm>
-            <a:off x="9459441" y="5251786"/>
+            <a:off x="9459441" y="5438220"/>
             <a:ext cx="2561535" cy="369332"/>
           </a:xfrm>
           <a:prstGeom prst="rect">
@@ -8580,6 +9165,86 @@
       </p:sp>
       <p:sp>
         <p:nvSpPr>
+          <p:cNvPr id="4" name="Inhaltsplatzhalter 3">
+            <a:extLst>
+              <a:ext uri="{FF2B5EF4-FFF2-40B4-BE49-F238E27FC236}">
+                <a16:creationId xmlns:a16="http://schemas.microsoft.com/office/drawing/2014/main" id="{6A8826D5-35A0-6F5B-6D31-5EEBEA85C82E}"/>
+              </a:ext>
+            </a:extLst>
+          </p:cNvPr>
+          <p:cNvSpPr>
+            <a:spLocks noGrp="1"/>
+          </p:cNvSpPr>
+          <p:nvPr>
+            <p:ph idx="1"/>
+          </p:nvPr>
+        </p:nvSpPr>
+        <p:spPr/>
+        <p:txBody>
+          <a:bodyPr/>
+          <a:lstStyle/>
+          <a:p>
+            <a:pPr marL="0" indent="0">
+              <a:buNone/>
+            </a:pPr>
+            <a:r>
+              <a:rPr lang="de-DE" dirty="0" err="1"/>
+              <a:t>Automatic</a:t>
+            </a:r>
+            <a:r>
+              <a:rPr lang="de-DE" dirty="0"/>
+              <a:t> </a:t>
+            </a:r>
+            <a:r>
+              <a:rPr lang="de-DE" dirty="0" err="1"/>
+              <a:t>grouping</a:t>
+            </a:r>
+            <a:r>
+              <a:rPr lang="de-DE" dirty="0"/>
+              <a:t> </a:t>
+            </a:r>
+            <a:r>
+              <a:rPr lang="de-DE" dirty="0" err="1"/>
+              <a:t>of</a:t>
+            </a:r>
+            <a:r>
+              <a:rPr lang="de-DE" dirty="0"/>
+              <a:t> </a:t>
+            </a:r>
+            <a:r>
+              <a:rPr lang="de-DE" dirty="0" err="1"/>
+              <a:t>similar</a:t>
+            </a:r>
+            <a:r>
+              <a:rPr lang="de-DE" dirty="0"/>
+              <a:t> </a:t>
+            </a:r>
+            <a:r>
+              <a:rPr lang="de-DE" dirty="0" err="1"/>
+              <a:t>objects</a:t>
+            </a:r>
+            <a:r>
+              <a:rPr lang="de-DE" dirty="0"/>
+              <a:t> </a:t>
+            </a:r>
+            <a:r>
+              <a:rPr lang="de-DE" dirty="0" err="1"/>
+              <a:t>into</a:t>
+            </a:r>
+            <a:r>
+              <a:rPr lang="de-DE" dirty="0"/>
+              <a:t> </a:t>
+            </a:r>
+            <a:r>
+              <a:rPr lang="de-DE" dirty="0" err="1"/>
+              <a:t>sets</a:t>
+            </a:r>
+            <a:endParaRPr lang="de-DE" dirty="0"/>
+          </a:p>
+        </p:txBody>
+      </p:sp>
+      <p:sp>
+        <p:nvSpPr>
           <p:cNvPr id="3" name="Foliennummernplatzhalter 2">
             <a:extLst>
               <a:ext uri="{FF2B5EF4-FFF2-40B4-BE49-F238E27FC236}">
@@ -8703,7 +9368,61 @@
           <a:bodyPr/>
           <a:lstStyle/>
           <a:p>
-            <a:endParaRPr lang="de-DE"/>
+            <a:pPr marL="0" indent="0">
+              <a:buNone/>
+            </a:pPr>
+            <a:r>
+              <a:rPr lang="de-DE" dirty="0"/>
+              <a:t>How </a:t>
+            </a:r>
+            <a:r>
+              <a:rPr lang="de-DE" dirty="0" err="1"/>
+              <a:t>to</a:t>
+            </a:r>
+            <a:r>
+              <a:rPr lang="de-DE" dirty="0"/>
+              <a:t> </a:t>
+            </a:r>
+            <a:r>
+              <a:rPr lang="de-DE" dirty="0" err="1"/>
+              <a:t>measure</a:t>
+            </a:r>
+            <a:r>
+              <a:rPr lang="de-DE" dirty="0"/>
+              <a:t> </a:t>
+            </a:r>
+            <a:r>
+              <a:rPr lang="de-DE" dirty="0" err="1"/>
+              <a:t>if</a:t>
+            </a:r>
+            <a:r>
+              <a:rPr lang="de-DE" dirty="0"/>
+              <a:t> </a:t>
+            </a:r>
+            <a:r>
+              <a:rPr lang="de-DE" dirty="0" err="1"/>
+              <a:t>points</a:t>
+            </a:r>
+            <a:r>
+              <a:rPr lang="de-DE" dirty="0"/>
+              <a:t> </a:t>
+            </a:r>
+            <a:r>
+              <a:rPr lang="de-DE" dirty="0" err="1"/>
+              <a:t>are</a:t>
+            </a:r>
+            <a:r>
+              <a:rPr lang="de-DE" dirty="0"/>
+              <a:t> </a:t>
+            </a:r>
+            <a:r>
+              <a:rPr lang="de-DE" dirty="0" err="1"/>
+              <a:t>close</a:t>
+            </a:r>
+            <a:r>
+              <a:rPr lang="de-DE" dirty="0"/>
+              <a:t>?</a:t>
+            </a:r>
           </a:p>
         </p:txBody>
       </p:sp>

--- a/slides/2_clustering.pptx
+++ b/slides/2_clustering.pptx
@@ -502,7 +502,7 @@
           <a:p>
             <a:fld id="{506E0FD1-891F-4B1E-916D-E9B585160BB8}" type="datetimeFigureOut">
               <a:rPr lang="en-GB" smtClean="0"/>
-              <a:t>27/02/2026</a:t>
+              <a:t>06/03/2026</a:t>
             </a:fld>
             <a:endParaRPr lang="en-GB"/>
           </a:p>
@@ -919,7 +919,7 @@
           <a:p>
             <a:fld id="{D68C3F22-27B2-44E3-9C5F-D08126455F6F}" type="datetime1">
               <a:rPr lang="en-GB" smtClean="0"/>
-              <a:t>27/02/2026</a:t>
+              <a:t>06/03/2026</a:t>
             </a:fld>
             <a:endParaRPr lang="en-GB"/>
           </a:p>
@@ -1119,7 +1119,7 @@
           <a:p>
             <a:fld id="{1CD03846-7BF6-4FB6-A921-FF3379ADBD4C}" type="datetime1">
               <a:rPr lang="en-GB" smtClean="0"/>
-              <a:t>27/02/2026</a:t>
+              <a:t>06/03/2026</a:t>
             </a:fld>
             <a:endParaRPr lang="en-GB"/>
           </a:p>
@@ -1329,7 +1329,7 @@
           <a:p>
             <a:fld id="{99E1B91A-3FD0-4144-9C84-63E9688ED2FE}" type="datetime1">
               <a:rPr lang="en-GB" smtClean="0"/>
-              <a:t>27/02/2026</a:t>
+              <a:t>06/03/2026</a:t>
             </a:fld>
             <a:endParaRPr lang="en-GB"/>
           </a:p>
@@ -1529,7 +1529,7 @@
           <a:p>
             <a:fld id="{5295ED7B-FEAD-4734-819F-93EF4B0EA908}" type="datetime1">
               <a:rPr lang="en-GB" smtClean="0"/>
-              <a:t>27/02/2026</a:t>
+              <a:t>06/03/2026</a:t>
             </a:fld>
             <a:endParaRPr lang="en-GB"/>
           </a:p>
@@ -1805,7 +1805,7 @@
           <a:p>
             <a:fld id="{D2D5D4B4-C926-4B45-8815-1ED8911179A2}" type="datetime1">
               <a:rPr lang="en-GB" smtClean="0"/>
-              <a:t>27/02/2026</a:t>
+              <a:t>06/03/2026</a:t>
             </a:fld>
             <a:endParaRPr lang="en-GB"/>
           </a:p>
@@ -2073,7 +2073,7 @@
           <a:p>
             <a:fld id="{B4C5210A-0E37-4935-93AF-69F21A5F712F}" type="datetime1">
               <a:rPr lang="en-GB" smtClean="0"/>
-              <a:t>27/02/2026</a:t>
+              <a:t>06/03/2026</a:t>
             </a:fld>
             <a:endParaRPr lang="en-GB"/>
           </a:p>
@@ -2488,7 +2488,7 @@
           <a:p>
             <a:fld id="{3D3A6B2F-436C-4691-80E8-9C890E000E9D}" type="datetime1">
               <a:rPr lang="en-GB" smtClean="0"/>
-              <a:t>27/02/2026</a:t>
+              <a:t>06/03/2026</a:t>
             </a:fld>
             <a:endParaRPr lang="en-GB"/>
           </a:p>
@@ -2630,7 +2630,7 @@
           <a:p>
             <a:fld id="{84385F4C-D74B-496F-8D21-97E3549C783B}" type="datetime1">
               <a:rPr lang="en-GB" smtClean="0"/>
-              <a:t>27/02/2026</a:t>
+              <a:t>06/03/2026</a:t>
             </a:fld>
             <a:endParaRPr lang="en-GB"/>
           </a:p>
@@ -2743,7 +2743,7 @@
           <a:p>
             <a:fld id="{0CBDCB32-C241-4703-A832-4EB47BD54E83}" type="datetime1">
               <a:rPr lang="en-GB" smtClean="0"/>
-              <a:t>27/02/2026</a:t>
+              <a:t>06/03/2026</a:t>
             </a:fld>
             <a:endParaRPr lang="en-GB"/>
           </a:p>
@@ -3056,7 +3056,7 @@
           <a:p>
             <a:fld id="{85C150FF-BE95-4D25-A16A-E368A81CBF24}" type="datetime1">
               <a:rPr lang="en-GB" smtClean="0"/>
-              <a:t>27/02/2026</a:t>
+              <a:t>06/03/2026</a:t>
             </a:fld>
             <a:endParaRPr lang="en-GB"/>
           </a:p>
@@ -3345,7 +3345,7 @@
           <a:p>
             <a:fld id="{F3C5DB4B-B349-43C9-A424-BADA723AD9F1}" type="datetime1">
               <a:rPr lang="en-GB" smtClean="0"/>
-              <a:t>27/02/2026</a:t>
+              <a:t>06/03/2026</a:t>
             </a:fld>
             <a:endParaRPr lang="en-GB"/>
           </a:p>
@@ -3588,7 +3588,7 @@
           <a:p>
             <a:fld id="{12632426-0A0C-405F-A3D0-2D11AA44702A}" type="datetime1">
               <a:rPr lang="en-GB" smtClean="0"/>
-              <a:t>27/02/2026</a:t>
+              <a:t>06/03/2026</a:t>
             </a:fld>
             <a:endParaRPr lang="en-GB"/>
           </a:p>

--- a/slides/2_clustering.pptx
+++ b/slides/2_clustering.pptx
@@ -5,7 +5,7 @@
     <p:sldMasterId id="2147483648" r:id="rId1"/>
   </p:sldMasterIdLst>
   <p:notesMasterIdLst>
-    <p:notesMasterId r:id="rId26"/>
+    <p:notesMasterId r:id="rId31"/>
   </p:notesMasterIdLst>
   <p:sldIdLst>
     <p:sldId id="256" r:id="rId2"/>
@@ -15,23 +15,28 @@
     <p:sldId id="270" r:id="rId6"/>
     <p:sldId id="285" r:id="rId7"/>
     <p:sldId id="271" r:id="rId8"/>
-    <p:sldId id="267" r:id="rId9"/>
-    <p:sldId id="268" r:id="rId10"/>
-    <p:sldId id="272" r:id="rId11"/>
-    <p:sldId id="273" r:id="rId12"/>
-    <p:sldId id="274" r:id="rId13"/>
-    <p:sldId id="287" r:id="rId14"/>
-    <p:sldId id="286" r:id="rId15"/>
-    <p:sldId id="275" r:id="rId16"/>
-    <p:sldId id="276" r:id="rId17"/>
-    <p:sldId id="277" r:id="rId18"/>
-    <p:sldId id="278" r:id="rId19"/>
-    <p:sldId id="279" r:id="rId20"/>
-    <p:sldId id="280" r:id="rId21"/>
-    <p:sldId id="281" r:id="rId22"/>
-    <p:sldId id="282" r:id="rId23"/>
-    <p:sldId id="283" r:id="rId24"/>
-    <p:sldId id="284" r:id="rId25"/>
+    <p:sldId id="289" r:id="rId9"/>
+    <p:sldId id="267" r:id="rId10"/>
+    <p:sldId id="268" r:id="rId11"/>
+    <p:sldId id="272" r:id="rId12"/>
+    <p:sldId id="290" r:id="rId13"/>
+    <p:sldId id="292" r:id="rId14"/>
+    <p:sldId id="274" r:id="rId15"/>
+    <p:sldId id="288" r:id="rId16"/>
+    <p:sldId id="273" r:id="rId17"/>
+    <p:sldId id="291" r:id="rId18"/>
+    <p:sldId id="287" r:id="rId19"/>
+    <p:sldId id="286" r:id="rId20"/>
+    <p:sldId id="275" r:id="rId21"/>
+    <p:sldId id="276" r:id="rId22"/>
+    <p:sldId id="277" r:id="rId23"/>
+    <p:sldId id="278" r:id="rId24"/>
+    <p:sldId id="279" r:id="rId25"/>
+    <p:sldId id="280" r:id="rId26"/>
+    <p:sldId id="281" r:id="rId27"/>
+    <p:sldId id="282" r:id="rId28"/>
+    <p:sldId id="283" r:id="rId29"/>
+    <p:sldId id="284" r:id="rId30"/>
   </p:sldIdLst>
   <p:sldSz cx="12192000" cy="6858000"/>
   <p:notesSz cx="6858000" cy="9144000"/>
@@ -502,7 +507,7 @@
           <a:p>
             <a:fld id="{506E0FD1-891F-4B1E-916D-E9B585160BB8}" type="datetimeFigureOut">
               <a:rPr lang="en-GB" smtClean="0"/>
-              <a:t>06/03/2026</a:t>
+              <a:t>07/03/2026</a:t>
             </a:fld>
             <a:endParaRPr lang="en-GB"/>
           </a:p>
@@ -919,7 +924,7 @@
           <a:p>
             <a:fld id="{D68C3F22-27B2-44E3-9C5F-D08126455F6F}" type="datetime1">
               <a:rPr lang="en-GB" smtClean="0"/>
-              <a:t>06/03/2026</a:t>
+              <a:t>07/03/2026</a:t>
             </a:fld>
             <a:endParaRPr lang="en-GB"/>
           </a:p>
@@ -1119,7 +1124,7 @@
           <a:p>
             <a:fld id="{1CD03846-7BF6-4FB6-A921-FF3379ADBD4C}" type="datetime1">
               <a:rPr lang="en-GB" smtClean="0"/>
-              <a:t>06/03/2026</a:t>
+              <a:t>07/03/2026</a:t>
             </a:fld>
             <a:endParaRPr lang="en-GB"/>
           </a:p>
@@ -1329,7 +1334,7 @@
           <a:p>
             <a:fld id="{99E1B91A-3FD0-4144-9C84-63E9688ED2FE}" type="datetime1">
               <a:rPr lang="en-GB" smtClean="0"/>
-              <a:t>06/03/2026</a:t>
+              <a:t>07/03/2026</a:t>
             </a:fld>
             <a:endParaRPr lang="en-GB"/>
           </a:p>
@@ -1529,7 +1534,7 @@
           <a:p>
             <a:fld id="{5295ED7B-FEAD-4734-819F-93EF4B0EA908}" type="datetime1">
               <a:rPr lang="en-GB" smtClean="0"/>
-              <a:t>06/03/2026</a:t>
+              <a:t>07/03/2026</a:t>
             </a:fld>
             <a:endParaRPr lang="en-GB"/>
           </a:p>
@@ -1805,7 +1810,7 @@
           <a:p>
             <a:fld id="{D2D5D4B4-C926-4B45-8815-1ED8911179A2}" type="datetime1">
               <a:rPr lang="en-GB" smtClean="0"/>
-              <a:t>06/03/2026</a:t>
+              <a:t>07/03/2026</a:t>
             </a:fld>
             <a:endParaRPr lang="en-GB"/>
           </a:p>
@@ -2073,7 +2078,7 @@
           <a:p>
             <a:fld id="{B4C5210A-0E37-4935-93AF-69F21A5F712F}" type="datetime1">
               <a:rPr lang="en-GB" smtClean="0"/>
-              <a:t>06/03/2026</a:t>
+              <a:t>07/03/2026</a:t>
             </a:fld>
             <a:endParaRPr lang="en-GB"/>
           </a:p>
@@ -2488,7 +2493,7 @@
           <a:p>
             <a:fld id="{3D3A6B2F-436C-4691-80E8-9C890E000E9D}" type="datetime1">
               <a:rPr lang="en-GB" smtClean="0"/>
-              <a:t>06/03/2026</a:t>
+              <a:t>07/03/2026</a:t>
             </a:fld>
             <a:endParaRPr lang="en-GB"/>
           </a:p>
@@ -2630,7 +2635,7 @@
           <a:p>
             <a:fld id="{84385F4C-D74B-496F-8D21-97E3549C783B}" type="datetime1">
               <a:rPr lang="en-GB" smtClean="0"/>
-              <a:t>06/03/2026</a:t>
+              <a:t>07/03/2026</a:t>
             </a:fld>
             <a:endParaRPr lang="en-GB"/>
           </a:p>
@@ -2743,7 +2748,7 @@
           <a:p>
             <a:fld id="{0CBDCB32-C241-4703-A832-4EB47BD54E83}" type="datetime1">
               <a:rPr lang="en-GB" smtClean="0"/>
-              <a:t>06/03/2026</a:t>
+              <a:t>07/03/2026</a:t>
             </a:fld>
             <a:endParaRPr lang="en-GB"/>
           </a:p>
@@ -3056,7 +3061,7 @@
           <a:p>
             <a:fld id="{85C150FF-BE95-4D25-A16A-E368A81CBF24}" type="datetime1">
               <a:rPr lang="en-GB" smtClean="0"/>
-              <a:t>06/03/2026</a:t>
+              <a:t>07/03/2026</a:t>
             </a:fld>
             <a:endParaRPr lang="en-GB"/>
           </a:p>
@@ -3345,7 +3350,7 @@
           <a:p>
             <a:fld id="{F3C5DB4B-B349-43C9-A424-BADA723AD9F1}" type="datetime1">
               <a:rPr lang="en-GB" smtClean="0"/>
-              <a:t>06/03/2026</a:t>
+              <a:t>07/03/2026</a:t>
             </a:fld>
             <a:endParaRPr lang="en-GB"/>
           </a:p>
@@ -3588,7 +3593,7 @@
           <a:p>
             <a:fld id="{12632426-0A0C-405F-A3D0-2D11AA44702A}" type="datetime1">
               <a:rPr lang="en-GB" smtClean="0"/>
-              <a:t>06/03/2026</a:t>
+              <a:t>07/03/2026</a:t>
             </a:fld>
             <a:endParaRPr lang="en-GB"/>
           </a:p>
@@ -4092,12 +4097,59 @@
           <a:chExt cx="0" cy="0"/>
         </a:xfrm>
       </p:grpSpPr>
-      <p:sp>
-        <p:nvSpPr>
-          <p:cNvPr id="2" name="Titel 1">
-            <a:extLst>
-              <a:ext uri="{FF2B5EF4-FFF2-40B4-BE49-F238E27FC236}">
-                <a16:creationId xmlns:a16="http://schemas.microsoft.com/office/drawing/2014/main" id="{3449D85B-4E0C-2CDA-A2D9-4273DBF6D8D3}"/>
+      <p:pic>
+        <p:nvPicPr>
+          <p:cNvPr id="2050" name="Picture 2" descr="K-means clustering on the digits dataset (PCA-reduced data) Centroids are marked with white cross">
+            <a:extLst>
+              <a:ext uri="{FF2B5EF4-FFF2-40B4-BE49-F238E27FC236}">
+                <a16:creationId xmlns:a16="http://schemas.microsoft.com/office/drawing/2014/main" id="{B44A8871-A62C-5BCB-319E-EB2705B9E077}"/>
+              </a:ext>
+            </a:extLst>
+          </p:cNvPr>
+          <p:cNvPicPr>
+            <a:picLocks noChangeAspect="1" noChangeArrowheads="1"/>
+          </p:cNvPicPr>
+          <p:nvPr/>
+        </p:nvPicPr>
+        <p:blipFill>
+          <a:blip r:embed="rId2">
+            <a:extLst>
+              <a:ext uri="{28A0092B-C50C-407E-A947-70E740481C1C}">
+                <a14:useLocalDpi xmlns:a14="http://schemas.microsoft.com/office/drawing/2010/main" val="0"/>
+              </a:ext>
+            </a:extLst>
+          </a:blip>
+          <a:srcRect/>
+          <a:stretch>
+            <a:fillRect/>
+          </a:stretch>
+        </p:blipFill>
+        <p:spPr bwMode="auto">
+          <a:xfrm>
+            <a:off x="5294795" y="1319972"/>
+            <a:ext cx="6897205" cy="5172903"/>
+          </a:xfrm>
+          <a:prstGeom prst="rect">
+            <a:avLst/>
+          </a:prstGeom>
+          <a:noFill/>
+          <a:extLst>
+            <a:ext uri="{909E8E84-426E-40DD-AFC4-6F175D3DCCD1}">
+              <a14:hiddenFill xmlns:a14="http://schemas.microsoft.com/office/drawing/2010/main">
+                <a:solidFill>
+                  <a:srgbClr val="FFFFFF"/>
+                </a:solidFill>
+              </a14:hiddenFill>
+            </a:ext>
+          </a:extLst>
+        </p:spPr>
+      </p:pic>
+      <p:sp>
+        <p:nvSpPr>
+          <p:cNvPr id="3" name="Titel 2">
+            <a:extLst>
+              <a:ext uri="{FF2B5EF4-FFF2-40B4-BE49-F238E27FC236}">
+                <a16:creationId xmlns:a16="http://schemas.microsoft.com/office/drawing/2014/main" id="{3E5EF26E-96B1-27BE-03F5-79AA27F58A84}"/>
               </a:ext>
             </a:extLst>
           </p:cNvPr>
@@ -4119,22 +4171,344 @@
             </a:r>
             <a:r>
               <a:rPr lang="de-DE" dirty="0"/>
+              <a:t>: Intuition</a:t>
+            </a:r>
+          </a:p>
+        </p:txBody>
+      </p:sp>
+      <p:sp>
+        <p:nvSpPr>
+          <p:cNvPr id="4" name="Inhaltsplatzhalter 3">
+            <a:extLst>
+              <a:ext uri="{FF2B5EF4-FFF2-40B4-BE49-F238E27FC236}">
+                <a16:creationId xmlns:a16="http://schemas.microsoft.com/office/drawing/2014/main" id="{3145C140-32EF-08E0-AEC7-D57455757080}"/>
+              </a:ext>
+            </a:extLst>
+          </p:cNvPr>
+          <p:cNvSpPr>
+            <a:spLocks noGrp="1"/>
+          </p:cNvSpPr>
+          <p:nvPr>
+            <p:ph idx="1"/>
+          </p:nvPr>
+        </p:nvSpPr>
+        <p:spPr>
+          <a:xfrm>
+            <a:off x="838200" y="1825625"/>
+            <a:ext cx="4817165" cy="4351338"/>
+          </a:xfrm>
+        </p:spPr>
+        <p:txBody>
+          <a:bodyPr>
+            <a:normAutofit lnSpcReduction="10000"/>
+          </a:bodyPr>
+          <a:lstStyle/>
+          <a:p>
+            <a:pPr marL="0" indent="0">
+              <a:buNone/>
+            </a:pPr>
+            <a:r>
+              <a:rPr lang="de-DE" dirty="0"/>
+              <a:t>divide a </a:t>
+            </a:r>
+            <a:r>
+              <a:rPr lang="de-DE" dirty="0" err="1"/>
+              <a:t>dataset</a:t>
+            </a:r>
+            <a:r>
+              <a:rPr lang="de-DE" dirty="0"/>
               <a:t> </a:t>
             </a:r>
             <a:r>
               <a:rPr lang="de-DE" dirty="0" err="1"/>
-              <a:t>Algorithm</a:t>
+              <a:t>into</a:t>
+            </a:r>
+            <a:r>
+              <a:rPr lang="de-DE" dirty="0"/>
+              <a:t> </a:t>
+            </a:r>
+            <a:r>
+              <a:rPr lang="de-DE" dirty="0" err="1"/>
+              <a:t>k</a:t>
+            </a:r>
+            <a:r>
+              <a:rPr lang="de-DE" dirty="0"/>
+              <a:t> </a:t>
+            </a:r>
+            <a:r>
+              <a:rPr lang="de-DE" dirty="0" err="1"/>
+              <a:t>clusters</a:t>
             </a:r>
             <a:endParaRPr lang="de-DE" dirty="0"/>
           </a:p>
-        </p:txBody>
-      </p:sp>
-      <p:sp>
-        <p:nvSpPr>
-          <p:cNvPr id="3" name="Foliennummernplatzhalter 2">
-            <a:extLst>
-              <a:ext uri="{FF2B5EF4-FFF2-40B4-BE49-F238E27FC236}">
-                <a16:creationId xmlns:a16="http://schemas.microsoft.com/office/drawing/2014/main" id="{5AF30DBF-AD11-3C18-1D07-A54DAB515319}"/>
+          <a:p>
+            <a:pPr marL="0" indent="0">
+              <a:buNone/>
+            </a:pPr>
+            <a:endParaRPr lang="de-DE" dirty="0"/>
+          </a:p>
+          <a:p>
+            <a:pPr marL="0" indent="0">
+              <a:buNone/>
+            </a:pPr>
+            <a:r>
+              <a:rPr lang="de-DE" dirty="0" err="1"/>
+              <a:t>k</a:t>
+            </a:r>
+            <a:r>
+              <a:rPr lang="de-DE" dirty="0"/>
+              <a:t> </a:t>
+            </a:r>
+            <a:r>
+              <a:rPr lang="de-DE" dirty="0" err="1"/>
+              <a:t>is</a:t>
+            </a:r>
+            <a:r>
+              <a:rPr lang="de-DE" dirty="0"/>
+              <a:t> a </a:t>
+            </a:r>
+            <a:r>
+              <a:rPr lang="de-DE" dirty="0" err="1"/>
+              <a:t>hyperparameter</a:t>
+            </a:r>
+            <a:r>
+              <a:rPr lang="de-DE" dirty="0"/>
+              <a:t> (</a:t>
+            </a:r>
+            <a:r>
+              <a:rPr lang="de-DE" dirty="0" err="1"/>
+              <a:t>to</a:t>
+            </a:r>
+            <a:r>
+              <a:rPr lang="de-DE" dirty="0"/>
+              <a:t> </a:t>
+            </a:r>
+            <a:r>
+              <a:rPr lang="de-DE" dirty="0" err="1"/>
+              <a:t>be</a:t>
+            </a:r>
+            <a:r>
+              <a:rPr lang="de-DE" dirty="0"/>
+              <a:t> </a:t>
+            </a:r>
+            <a:r>
+              <a:rPr lang="de-DE" dirty="0" err="1"/>
+              <a:t>set</a:t>
+            </a:r>
+            <a:r>
+              <a:rPr lang="de-DE" dirty="0"/>
+              <a:t> </a:t>
+            </a:r>
+            <a:r>
+              <a:rPr lang="de-DE" dirty="0" err="1"/>
+              <a:t>before</a:t>
+            </a:r>
+            <a:r>
+              <a:rPr lang="de-DE" dirty="0"/>
+              <a:t> </a:t>
+            </a:r>
+            <a:r>
+              <a:rPr lang="de-DE" dirty="0" err="1"/>
+              <a:t>the</a:t>
+            </a:r>
+            <a:r>
+              <a:rPr lang="de-DE" dirty="0"/>
+              <a:t> </a:t>
+            </a:r>
+            <a:r>
+              <a:rPr lang="de-DE" dirty="0" err="1"/>
+              <a:t>algorithm</a:t>
+            </a:r>
+            <a:r>
+              <a:rPr lang="de-DE" dirty="0"/>
+              <a:t> </a:t>
+            </a:r>
+            <a:r>
+              <a:rPr lang="de-DE" dirty="0" err="1"/>
+              <a:t>runs</a:t>
+            </a:r>
+            <a:r>
+              <a:rPr lang="de-DE" dirty="0"/>
+              <a:t>)</a:t>
+            </a:r>
+          </a:p>
+          <a:p>
+            <a:pPr marL="0" indent="0">
+              <a:buNone/>
+            </a:pPr>
+            <a:endParaRPr lang="de-DE" dirty="0"/>
+          </a:p>
+          <a:p>
+            <a:pPr marL="0" indent="0">
+              <a:buNone/>
+            </a:pPr>
+            <a:r>
+              <a:rPr lang="de-DE" dirty="0" err="1"/>
+              <a:t>each</a:t>
+            </a:r>
+            <a:r>
+              <a:rPr lang="de-DE" dirty="0"/>
+              <a:t> </a:t>
+            </a:r>
+            <a:r>
+              <a:rPr lang="de-DE" dirty="0" err="1"/>
+              <a:t>cluster</a:t>
+            </a:r>
+            <a:r>
+              <a:rPr lang="de-DE" dirty="0"/>
+              <a:t> </a:t>
+            </a:r>
+            <a:r>
+              <a:rPr lang="de-DE" dirty="0" err="1"/>
+              <a:t>is</a:t>
+            </a:r>
+            <a:r>
+              <a:rPr lang="de-DE" dirty="0"/>
+              <a:t> </a:t>
+            </a:r>
+            <a:r>
+              <a:rPr lang="de-DE" dirty="0" err="1"/>
+              <a:t>represented</a:t>
+            </a:r>
+            <a:r>
+              <a:rPr lang="de-DE" dirty="0"/>
+              <a:t> </a:t>
+            </a:r>
+            <a:r>
+              <a:rPr lang="de-DE" dirty="0" err="1"/>
+              <a:t>by</a:t>
+            </a:r>
+            <a:r>
+              <a:rPr lang="de-DE" dirty="0"/>
+              <a:t> </a:t>
+            </a:r>
+            <a:r>
+              <a:rPr lang="de-DE" dirty="0" err="1"/>
+              <a:t>its</a:t>
+            </a:r>
+            <a:r>
+              <a:rPr lang="de-DE" dirty="0"/>
+              <a:t> </a:t>
+            </a:r>
+            <a:r>
+              <a:rPr lang="de-DE" dirty="0" err="1"/>
+              <a:t>centroid</a:t>
+            </a:r>
+            <a:r>
+              <a:rPr lang="de-DE" dirty="0"/>
+              <a:t> (</a:t>
+            </a:r>
+            <a:r>
+              <a:rPr lang="de-DE" dirty="0" err="1"/>
+              <a:t>mean</a:t>
+            </a:r>
+            <a:r>
+              <a:rPr lang="de-DE" dirty="0"/>
+              <a:t> </a:t>
+            </a:r>
+            <a:r>
+              <a:rPr lang="de-DE" dirty="0" err="1"/>
+              <a:t>point</a:t>
+            </a:r>
+            <a:r>
+              <a:rPr lang="de-DE" dirty="0"/>
+              <a:t>)</a:t>
+            </a:r>
+          </a:p>
+          <a:p>
+            <a:pPr marL="0" indent="0">
+              <a:buNone/>
+            </a:pPr>
+            <a:endParaRPr lang="de-DE" dirty="0"/>
+          </a:p>
+          <a:p>
+            <a:pPr marL="0" indent="0">
+              <a:buNone/>
+            </a:pPr>
+            <a:r>
+              <a:rPr lang="de-DE" dirty="0" err="1"/>
+              <a:t>each</a:t>
+            </a:r>
+            <a:r>
+              <a:rPr lang="de-DE" dirty="0"/>
+              <a:t> </a:t>
+            </a:r>
+            <a:r>
+              <a:rPr lang="de-DE" dirty="0" err="1"/>
+              <a:t>data</a:t>
+            </a:r>
+            <a:r>
+              <a:rPr lang="de-DE" dirty="0"/>
+              <a:t> </a:t>
+            </a:r>
+            <a:r>
+              <a:rPr lang="de-DE" dirty="0" err="1"/>
+              <a:t>point</a:t>
+            </a:r>
+            <a:r>
+              <a:rPr lang="de-DE" dirty="0"/>
+              <a:t> </a:t>
+            </a:r>
+            <a:r>
+              <a:rPr lang="de-DE" dirty="0" err="1"/>
+              <a:t>is</a:t>
+            </a:r>
+            <a:r>
+              <a:rPr lang="de-DE" dirty="0"/>
+              <a:t> </a:t>
+            </a:r>
+            <a:r>
+              <a:rPr lang="de-DE" dirty="0" err="1"/>
+              <a:t>assigned</a:t>
+            </a:r>
+            <a:r>
+              <a:rPr lang="de-DE" dirty="0"/>
+              <a:t> </a:t>
+            </a:r>
+            <a:r>
+              <a:rPr lang="de-DE" dirty="0" err="1"/>
+              <a:t>to</a:t>
+            </a:r>
+            <a:r>
+              <a:rPr lang="de-DE" dirty="0"/>
+              <a:t> </a:t>
+            </a:r>
+            <a:r>
+              <a:rPr lang="de-DE" dirty="0" err="1"/>
+              <a:t>the</a:t>
+            </a:r>
+            <a:r>
+              <a:rPr lang="de-DE" dirty="0"/>
+              <a:t> </a:t>
+            </a:r>
+            <a:r>
+              <a:rPr lang="de-DE" dirty="0" err="1"/>
+              <a:t>nearest</a:t>
+            </a:r>
+            <a:r>
+              <a:rPr lang="de-DE" dirty="0"/>
+              <a:t> </a:t>
+            </a:r>
+            <a:r>
+              <a:rPr lang="de-DE" dirty="0" err="1"/>
+              <a:t>centroid</a:t>
+            </a:r>
+            <a:endParaRPr lang="de-DE" dirty="0"/>
+          </a:p>
+          <a:p>
+            <a:pPr marL="0" indent="0">
+              <a:buNone/>
+            </a:pPr>
+            <a:endParaRPr lang="de-DE" dirty="0"/>
+          </a:p>
+        </p:txBody>
+      </p:sp>
+      <p:sp>
+        <p:nvSpPr>
+          <p:cNvPr id="2" name="Foliennummernplatzhalter 1">
+            <a:extLst>
+              <a:ext uri="{FF2B5EF4-FFF2-40B4-BE49-F238E27FC236}">
+                <a16:creationId xmlns:a16="http://schemas.microsoft.com/office/drawing/2014/main" id="{93F3BDB8-AB06-D6F6-923D-DBA0EE4E79AE}"/>
               </a:ext>
             </a:extLst>
           </p:cNvPr>
@@ -4158,10 +4532,93 @@
           </a:p>
         </p:txBody>
       </p:sp>
+      <p:sp>
+        <p:nvSpPr>
+          <p:cNvPr id="5" name="Textfeld 4">
+            <a:extLst>
+              <a:ext uri="{FF2B5EF4-FFF2-40B4-BE49-F238E27FC236}">
+                <a16:creationId xmlns:a16="http://schemas.microsoft.com/office/drawing/2014/main" id="{2A4877FB-7B11-447F-8D3C-FDF353D66B88}"/>
+              </a:ext>
+            </a:extLst>
+          </p:cNvPr>
+          <p:cNvSpPr txBox="1"/>
+          <p:nvPr/>
+        </p:nvSpPr>
+        <p:spPr>
+          <a:xfrm>
+            <a:off x="6401341" y="6171684"/>
+            <a:ext cx="2209259" cy="369332"/>
+          </a:xfrm>
+          <a:prstGeom prst="rect">
+            <a:avLst/>
+          </a:prstGeom>
+          <a:noFill/>
+        </p:spPr>
+        <p:txBody>
+          <a:bodyPr wrap="none" rtlCol="0">
+            <a:spAutoFit/>
+          </a:bodyPr>
+          <a:lstStyle/>
+          <a:p>
+            <a:r>
+              <a:rPr lang="de-DE" dirty="0" err="1"/>
+              <a:t>decision</a:t>
+            </a:r>
+            <a:r>
+              <a:rPr lang="de-DE" dirty="0"/>
+              <a:t> </a:t>
+            </a:r>
+            <a:r>
+              <a:rPr lang="de-DE" dirty="0" err="1"/>
+              <a:t>boundaries</a:t>
+            </a:r>
+            <a:endParaRPr lang="de-DE" dirty="0"/>
+          </a:p>
+        </p:txBody>
+      </p:sp>
+      <p:cxnSp>
+        <p:nvCxnSpPr>
+          <p:cNvPr id="7" name="Gerade Verbindung mit Pfeil 6">
+            <a:extLst>
+              <a:ext uri="{FF2B5EF4-FFF2-40B4-BE49-F238E27FC236}">
+                <a16:creationId xmlns:a16="http://schemas.microsoft.com/office/drawing/2014/main" id="{9A50DEF1-BEAD-FB26-5241-E76096B292E0}"/>
+              </a:ext>
+            </a:extLst>
+          </p:cNvPr>
+          <p:cNvCxnSpPr/>
+          <p:nvPr/>
+        </p:nvCxnSpPr>
+        <p:spPr>
+          <a:xfrm flipH="1" flipV="1">
+            <a:off x="6917635" y="5466522"/>
+            <a:ext cx="606287" cy="626165"/>
+          </a:xfrm>
+          <a:prstGeom prst="straightConnector1">
+            <a:avLst/>
+          </a:prstGeom>
+          <a:ln>
+            <a:tailEnd type="triangle"/>
+          </a:ln>
+        </p:spPr>
+        <p:style>
+          <a:lnRef idx="2">
+            <a:schemeClr val="accent1"/>
+          </a:lnRef>
+          <a:fillRef idx="0">
+            <a:schemeClr val="accent1"/>
+          </a:fillRef>
+          <a:effectRef idx="1">
+            <a:schemeClr val="accent1"/>
+          </a:effectRef>
+          <a:fontRef idx="minor">
+            <a:schemeClr val="tx1"/>
+          </a:fontRef>
+        </p:style>
+      </p:cxnSp>
     </p:spTree>
     <p:extLst>
       <p:ext uri="{BB962C8B-B14F-4D97-AF65-F5344CB8AC3E}">
-        <p14:creationId xmlns:p14="http://schemas.microsoft.com/office/powerpoint/2010/main" val="3988780308"/>
+        <p14:creationId xmlns:p14="http://schemas.microsoft.com/office/powerpoint/2010/main" val="2526389082"/>
       </p:ext>
     </p:extLst>
   </p:cSld>
@@ -4193,7 +4650,7 @@
           <p:cNvPr id="2" name="Titel 1">
             <a:extLst>
               <a:ext uri="{FF2B5EF4-FFF2-40B4-BE49-F238E27FC236}">
-                <a16:creationId xmlns:a16="http://schemas.microsoft.com/office/drawing/2014/main" id="{7B756E6D-D8FC-FA7F-8EFC-F623F1FAA574}"/>
+                <a16:creationId xmlns:a16="http://schemas.microsoft.com/office/drawing/2014/main" id="{3449D85B-4E0C-2CDA-A2D9-4273DBF6D8D3}"/>
               </a:ext>
             </a:extLst>
           </p:cNvPr>
@@ -4211,7 +4668,7 @@
           <a:p>
             <a:r>
               <a:rPr lang="de-DE" dirty="0" err="1"/>
-              <a:t>Choosing</a:t>
+              <a:t>k-Means</a:t>
             </a:r>
             <a:r>
               <a:rPr lang="de-DE" dirty="0"/>
@@ -4219,6 +4676,186 @@
             </a:r>
             <a:r>
               <a:rPr lang="de-DE" dirty="0" err="1"/>
+              <a:t>Algorithm</a:t>
+            </a:r>
+            <a:endParaRPr lang="de-DE" dirty="0"/>
+          </a:p>
+        </p:txBody>
+      </p:sp>
+      <p:sp>
+        <p:nvSpPr>
+          <p:cNvPr id="4" name="Inhaltsplatzhalter 3">
+            <a:extLst>
+              <a:ext uri="{FF2B5EF4-FFF2-40B4-BE49-F238E27FC236}">
+                <a16:creationId xmlns:a16="http://schemas.microsoft.com/office/drawing/2014/main" id="{E22A36B6-BDB3-0940-B6A3-50D4BB310EA6}"/>
+              </a:ext>
+            </a:extLst>
+          </p:cNvPr>
+          <p:cNvSpPr>
+            <a:spLocks noGrp="1"/>
+          </p:cNvSpPr>
+          <p:nvPr>
+            <p:ph idx="1"/>
+          </p:nvPr>
+        </p:nvSpPr>
+        <p:spPr/>
+        <p:txBody>
+          <a:bodyPr>
+            <a:normAutofit/>
+          </a:bodyPr>
+          <a:lstStyle/>
+          <a:p>
+            <a:pPr marL="514350" indent="-514350">
+              <a:buFont typeface="+mj-lt"/>
+              <a:buAutoNum type="arabicPeriod"/>
+            </a:pPr>
+            <a:r>
+              <a:rPr lang="de-DE" dirty="0" err="1"/>
+              <a:t>choose</a:t>
+            </a:r>
+            <a:r>
+              <a:rPr lang="de-DE" dirty="0"/>
+              <a:t> </a:t>
+            </a:r>
+            <a:r>
+              <a:rPr lang="de-DE" b="1" dirty="0" err="1"/>
+              <a:t>k</a:t>
+            </a:r>
+            <a:r>
+              <a:rPr lang="de-DE" dirty="0"/>
+              <a:t> (</a:t>
+            </a:r>
+            <a:r>
+              <a:rPr lang="de-DE" dirty="0" err="1"/>
+              <a:t>number</a:t>
+            </a:r>
+            <a:r>
+              <a:rPr lang="de-DE" dirty="0"/>
+              <a:t> </a:t>
+            </a:r>
+            <a:r>
+              <a:rPr lang="de-DE" dirty="0" err="1"/>
+              <a:t>of</a:t>
+            </a:r>
+            <a:r>
+              <a:rPr lang="de-DE" dirty="0"/>
+              <a:t> </a:t>
+            </a:r>
+            <a:r>
+              <a:rPr lang="de-DE" dirty="0" err="1"/>
+              <a:t>clusters</a:t>
+            </a:r>
+            <a:r>
+              <a:rPr lang="de-DE" dirty="0"/>
+              <a:t>)</a:t>
+            </a:r>
+          </a:p>
+          <a:p>
+            <a:pPr marL="514350" indent="-514350">
+              <a:buFont typeface="+mj-lt"/>
+              <a:buAutoNum type="arabicPeriod"/>
+            </a:pPr>
+            <a:r>
+              <a:rPr lang="de-DE" dirty="0" err="1"/>
+              <a:t>initialize</a:t>
+            </a:r>
+            <a:r>
+              <a:rPr lang="de-DE" dirty="0"/>
+              <a:t> </a:t>
+            </a:r>
+            <a:r>
+              <a:rPr lang="de-DE" dirty="0" err="1"/>
+              <a:t>centroids</a:t>
+            </a:r>
+            <a:r>
+              <a:rPr lang="de-DE" dirty="0"/>
+              <a:t>: (</a:t>
+            </a:r>
+            <a:r>
+              <a:rPr lang="de-DE" dirty="0" err="1"/>
+              <a:t>randomly</a:t>
+            </a:r>
+            <a:r>
+              <a:rPr lang="de-DE" dirty="0"/>
+              <a:t>) </a:t>
+            </a:r>
+            <a:r>
+              <a:rPr lang="de-DE" dirty="0" err="1"/>
+              <a:t>place</a:t>
+            </a:r>
+            <a:r>
+              <a:rPr lang="de-DE" dirty="0"/>
+              <a:t> </a:t>
+            </a:r>
+            <a:r>
+              <a:rPr lang="de-DE" dirty="0" err="1"/>
+              <a:t>k</a:t>
+            </a:r>
+            <a:r>
+              <a:rPr lang="de-DE" dirty="0"/>
+              <a:t> </a:t>
+            </a:r>
+            <a:r>
+              <a:rPr lang="de-DE" dirty="0" err="1"/>
+              <a:t>centroids</a:t>
+            </a:r>
+            <a:r>
+              <a:rPr lang="de-DE" dirty="0"/>
+              <a:t> in </a:t>
+            </a:r>
+            <a:r>
+              <a:rPr lang="de-DE" dirty="0" err="1"/>
+              <a:t>data</a:t>
+            </a:r>
+            <a:r>
+              <a:rPr lang="de-DE" dirty="0"/>
+              <a:t> </a:t>
+            </a:r>
+            <a:r>
+              <a:rPr lang="de-DE" dirty="0" err="1"/>
+              <a:t>space</a:t>
+            </a:r>
+            <a:endParaRPr lang="de-DE" dirty="0"/>
+          </a:p>
+          <a:p>
+            <a:pPr marL="514350" indent="-514350">
+              <a:buFont typeface="+mj-lt"/>
+              <a:buAutoNum type="arabicPeriod"/>
+            </a:pPr>
+            <a:r>
+              <a:rPr lang="de-DE" dirty="0" err="1"/>
+              <a:t>assign</a:t>
+            </a:r>
+            <a:r>
+              <a:rPr lang="de-DE" dirty="0"/>
+              <a:t> </a:t>
+            </a:r>
+            <a:r>
+              <a:rPr lang="de-DE" dirty="0" err="1"/>
+              <a:t>each</a:t>
+            </a:r>
+            <a:r>
+              <a:rPr lang="de-DE" dirty="0"/>
+              <a:t> </a:t>
+            </a:r>
+            <a:r>
+              <a:rPr lang="de-DE" dirty="0" err="1"/>
+              <a:t>points</a:t>
+            </a:r>
+            <a:r>
+              <a:rPr lang="de-DE" dirty="0"/>
+              <a:t> </a:t>
+            </a:r>
+            <a:r>
+              <a:rPr lang="de-DE" dirty="0" err="1"/>
+              <a:t>to</a:t>
+            </a:r>
+            <a:r>
+              <a:rPr lang="de-DE" dirty="0"/>
+              <a:t> </a:t>
+            </a:r>
+            <a:r>
+              <a:rPr lang="de-DE" dirty="0" err="1"/>
               <a:t>the</a:t>
             </a:r>
             <a:r>
@@ -4227,7 +4864,7 @@
             </a:r>
             <a:r>
               <a:rPr lang="de-DE" dirty="0" err="1"/>
-              <a:t>Number</a:t>
+              <a:t>nearest</a:t>
             </a:r>
             <a:r>
               <a:rPr lang="de-DE" dirty="0"/>
@@ -4235,11 +4872,255 @@
             </a:r>
             <a:r>
               <a:rPr lang="de-DE" dirty="0" err="1"/>
+              <a:t>centroid</a:t>
+            </a:r>
+            <a:r>
+              <a:rPr lang="de-DE" dirty="0"/>
+              <a:t> (</a:t>
+            </a:r>
+            <a:r>
+              <a:rPr lang="de-DE" dirty="0" err="1"/>
+              <a:t>according</a:t>
+            </a:r>
+            <a:r>
+              <a:rPr lang="de-DE" dirty="0"/>
+              <a:t> </a:t>
+            </a:r>
+            <a:r>
+              <a:rPr lang="de-DE" dirty="0" err="1"/>
+              <a:t>to</a:t>
+            </a:r>
+            <a:r>
+              <a:rPr lang="de-DE" dirty="0"/>
+              <a:t> </a:t>
+            </a:r>
+            <a:r>
+              <a:rPr lang="de-DE" dirty="0" err="1"/>
+              <a:t>computed</a:t>
+            </a:r>
+            <a:r>
+              <a:rPr lang="de-DE" dirty="0"/>
+              <a:t> </a:t>
+            </a:r>
+            <a:r>
+              <a:rPr lang="de-DE" b="1" dirty="0" err="1"/>
+              <a:t>Euclidean</a:t>
+            </a:r>
+            <a:r>
+              <a:rPr lang="de-DE" b="1" dirty="0"/>
+              <a:t> </a:t>
+            </a:r>
+            <a:r>
+              <a:rPr lang="de-DE" b="1" dirty="0" err="1"/>
+              <a:t>distances</a:t>
+            </a:r>
+            <a:r>
+              <a:rPr lang="de-DE" dirty="0"/>
+              <a:t>)</a:t>
+            </a:r>
+          </a:p>
+          <a:p>
+            <a:pPr marL="514350" indent="-514350">
+              <a:buFont typeface="+mj-lt"/>
+              <a:buAutoNum type="arabicPeriod"/>
+            </a:pPr>
+            <a:r>
+              <a:rPr lang="de-DE" dirty="0" err="1"/>
+              <a:t>recalculate</a:t>
+            </a:r>
+            <a:r>
+              <a:rPr lang="de-DE" dirty="0"/>
+              <a:t> </a:t>
+            </a:r>
+            <a:r>
+              <a:rPr lang="de-DE" dirty="0" err="1"/>
+              <a:t>centroids</a:t>
+            </a:r>
+            <a:r>
+              <a:rPr lang="de-DE" dirty="0"/>
+              <a:t> </a:t>
+            </a:r>
+            <a:r>
+              <a:rPr lang="de-DE" dirty="0" err="1"/>
               <a:t>of</a:t>
             </a:r>
             <a:r>
               <a:rPr lang="de-DE" dirty="0"/>
-              <a:t> Clusters</a:t>
+              <a:t> </a:t>
+            </a:r>
+            <a:r>
+              <a:rPr lang="de-DE" dirty="0" err="1"/>
+              <a:t>each</a:t>
+            </a:r>
+            <a:r>
+              <a:rPr lang="de-DE" dirty="0"/>
+              <a:t> </a:t>
+            </a:r>
+            <a:r>
+              <a:rPr lang="de-DE" dirty="0" err="1"/>
+              <a:t>cluster</a:t>
+            </a:r>
+            <a:r>
+              <a:rPr lang="de-DE" dirty="0"/>
+              <a:t> (</a:t>
+            </a:r>
+            <a:r>
+              <a:rPr lang="de-DE" b="1" dirty="0" err="1"/>
+              <a:t>average</a:t>
+            </a:r>
+            <a:r>
+              <a:rPr lang="de-DE" dirty="0"/>
+              <a:t> </a:t>
+            </a:r>
+            <a:r>
+              <a:rPr lang="de-DE" dirty="0" err="1"/>
+              <a:t>of</a:t>
+            </a:r>
+            <a:r>
+              <a:rPr lang="de-DE" dirty="0"/>
+              <a:t> all </a:t>
+            </a:r>
+            <a:r>
+              <a:rPr lang="de-DE" dirty="0" err="1"/>
+              <a:t>points</a:t>
+            </a:r>
+            <a:r>
+              <a:rPr lang="de-DE" dirty="0"/>
+              <a:t> </a:t>
+            </a:r>
+            <a:r>
+              <a:rPr lang="de-DE" dirty="0" err="1"/>
+              <a:t>assigned</a:t>
+            </a:r>
+            <a:r>
+              <a:rPr lang="de-DE" dirty="0"/>
+              <a:t> </a:t>
+            </a:r>
+            <a:r>
+              <a:rPr lang="de-DE" dirty="0" err="1"/>
+              <a:t>to</a:t>
+            </a:r>
+            <a:r>
+              <a:rPr lang="de-DE" dirty="0"/>
+              <a:t> </a:t>
+            </a:r>
+            <a:r>
+              <a:rPr lang="de-DE" dirty="0" err="1"/>
+              <a:t>the</a:t>
+            </a:r>
+            <a:r>
+              <a:rPr lang="de-DE" dirty="0"/>
+              <a:t> </a:t>
+            </a:r>
+            <a:r>
+              <a:rPr lang="de-DE" dirty="0" err="1"/>
+              <a:t>cluster</a:t>
+            </a:r>
+            <a:r>
+              <a:rPr lang="de-DE" dirty="0"/>
+              <a:t>)</a:t>
+            </a:r>
+          </a:p>
+          <a:p>
+            <a:pPr marL="514350" indent="-514350">
+              <a:buFont typeface="+mj-lt"/>
+              <a:buAutoNum type="arabicPeriod"/>
+            </a:pPr>
+            <a:r>
+              <a:rPr lang="de-DE" dirty="0" err="1"/>
+              <a:t>iterate</a:t>
+            </a:r>
+            <a:r>
+              <a:rPr lang="de-DE" dirty="0"/>
+              <a:t> </a:t>
+            </a:r>
+            <a:r>
+              <a:rPr lang="de-DE" dirty="0" err="1"/>
+              <a:t>until</a:t>
+            </a:r>
+            <a:r>
+              <a:rPr lang="de-DE" dirty="0"/>
+              <a:t> </a:t>
+            </a:r>
+            <a:r>
+              <a:rPr lang="de-DE" dirty="0" err="1"/>
+              <a:t>convergence</a:t>
+            </a:r>
+            <a:r>
+              <a:rPr lang="de-DE" dirty="0"/>
+              <a:t> (</a:t>
+            </a:r>
+            <a:r>
+              <a:rPr lang="de-DE" dirty="0" err="1"/>
+              <a:t>centroids</a:t>
+            </a:r>
+            <a:r>
+              <a:rPr lang="de-DE" dirty="0"/>
+              <a:t> </a:t>
+            </a:r>
+            <a:r>
+              <a:rPr lang="de-DE" dirty="0" err="1"/>
+              <a:t>stop</a:t>
+            </a:r>
+            <a:r>
+              <a:rPr lang="de-DE" dirty="0"/>
+              <a:t> </a:t>
+            </a:r>
+            <a:r>
+              <a:rPr lang="de-DE" dirty="0" err="1"/>
+              <a:t>moving</a:t>
+            </a:r>
+            <a:r>
+              <a:rPr lang="de-DE" dirty="0"/>
+              <a:t> </a:t>
+            </a:r>
+            <a:r>
+              <a:rPr lang="de-DE" dirty="0" err="1"/>
+              <a:t>significantly</a:t>
+            </a:r>
+            <a:r>
+              <a:rPr lang="de-DE" dirty="0"/>
+              <a:t> </a:t>
+            </a:r>
+            <a:r>
+              <a:rPr lang="de-DE" dirty="0" err="1"/>
+              <a:t>or</a:t>
+            </a:r>
+            <a:r>
+              <a:rPr lang="de-DE" dirty="0"/>
+              <a:t> </a:t>
+            </a:r>
+            <a:r>
+              <a:rPr lang="de-DE" dirty="0" err="1"/>
+              <a:t>cluster</a:t>
+            </a:r>
+            <a:r>
+              <a:rPr lang="de-DE" dirty="0"/>
+              <a:t> </a:t>
+            </a:r>
+            <a:r>
+              <a:rPr lang="de-DE" dirty="0" err="1"/>
+              <a:t>assignments</a:t>
+            </a:r>
+            <a:r>
+              <a:rPr lang="de-DE" dirty="0"/>
+              <a:t> </a:t>
+            </a:r>
+            <a:r>
+              <a:rPr lang="de-DE" dirty="0" err="1"/>
+              <a:t>stop</a:t>
+            </a:r>
+            <a:r>
+              <a:rPr lang="de-DE" dirty="0"/>
+              <a:t> </a:t>
+            </a:r>
+            <a:r>
+              <a:rPr lang="de-DE" dirty="0" err="1"/>
+              <a:t>changing</a:t>
+            </a:r>
+            <a:r>
+              <a:rPr lang="de-DE" dirty="0"/>
+              <a:t>)</a:t>
             </a:r>
           </a:p>
         </p:txBody>
@@ -4249,7 +5130,7 @@
           <p:cNvPr id="3" name="Foliennummernplatzhalter 2">
             <a:extLst>
               <a:ext uri="{FF2B5EF4-FFF2-40B4-BE49-F238E27FC236}">
-                <a16:creationId xmlns:a16="http://schemas.microsoft.com/office/drawing/2014/main" id="{85AE942C-3574-952F-F18E-4BD93B73FB61}"/>
+                <a16:creationId xmlns:a16="http://schemas.microsoft.com/office/drawing/2014/main" id="{5AF30DBF-AD11-3C18-1D07-A54DAB515319}"/>
               </a:ext>
             </a:extLst>
           </p:cNvPr>
@@ -4276,7 +5157,7 @@
     </p:spTree>
     <p:extLst>
       <p:ext uri="{BB962C8B-B14F-4D97-AF65-F5344CB8AC3E}">
-        <p14:creationId xmlns:p14="http://schemas.microsoft.com/office/powerpoint/2010/main" val="3872348448"/>
+        <p14:creationId xmlns:p14="http://schemas.microsoft.com/office/powerpoint/2010/main" val="3988780308"/>
       </p:ext>
     </p:extLst>
   </p:cSld>
@@ -4308,7 +5189,7 @@
           <p:cNvPr id="2" name="Titel 1">
             <a:extLst>
               <a:ext uri="{FF2B5EF4-FFF2-40B4-BE49-F238E27FC236}">
-                <a16:creationId xmlns:a16="http://schemas.microsoft.com/office/drawing/2014/main" id="{1AB97CEE-DA9B-A98C-98BF-3E784E6E5ABB}"/>
+                <a16:creationId xmlns:a16="http://schemas.microsoft.com/office/drawing/2014/main" id="{5E911FD9-7F33-36F5-BFF7-3BD6F330C3E0}"/>
               </a:ext>
             </a:extLst>
           </p:cNvPr>
@@ -4326,7 +5207,7 @@
           <a:p>
             <a:r>
               <a:rPr lang="de-DE" dirty="0" err="1"/>
-              <a:t>k-Means</a:t>
+              <a:t>Objective</a:t>
             </a:r>
             <a:r>
               <a:rPr lang="de-DE" dirty="0"/>
@@ -4334,26 +5215,418 @@
             </a:r>
             <a:r>
               <a:rPr lang="de-DE" dirty="0" err="1"/>
-              <a:t>Assumptions</a:t>
-            </a:r>
-            <a:r>
-              <a:rPr lang="de-DE" dirty="0"/>
-              <a:t> and </a:t>
-            </a:r>
-            <a:r>
-              <a:rPr lang="de-DE" dirty="0" err="1"/>
-              <a:t>Limitations</a:t>
+              <a:t>Function</a:t>
             </a:r>
             <a:endParaRPr lang="de-DE" dirty="0"/>
           </a:p>
         </p:txBody>
       </p:sp>
-      <p:sp>
-        <p:nvSpPr>
-          <p:cNvPr id="3" name="Foliennummernplatzhalter 2">
-            <a:extLst>
-              <a:ext uri="{FF2B5EF4-FFF2-40B4-BE49-F238E27FC236}">
-                <a16:creationId xmlns:a16="http://schemas.microsoft.com/office/drawing/2014/main" id="{361F564A-5810-6633-6054-C0BC5BA3FC59}"/>
+      <mc:AlternateContent xmlns:mc="http://schemas.openxmlformats.org/markup-compatibility/2006">
+        <mc:Choice xmlns:a14="http://schemas.microsoft.com/office/drawing/2010/main" Requires="a14">
+          <p:sp>
+            <p:nvSpPr>
+              <p:cNvPr id="3" name="Inhaltsplatzhalter 2">
+                <a:extLst>
+                  <a:ext uri="{FF2B5EF4-FFF2-40B4-BE49-F238E27FC236}">
+                    <a16:creationId xmlns:a16="http://schemas.microsoft.com/office/drawing/2014/main" id="{217B770E-9FDC-AA16-DB2B-28638BF9385A}"/>
+                  </a:ext>
+                </a:extLst>
+              </p:cNvPr>
+              <p:cNvSpPr>
+                <a:spLocks noGrp="1"/>
+              </p:cNvSpPr>
+              <p:nvPr>
+                <p:ph idx="1"/>
+              </p:nvPr>
+            </p:nvSpPr>
+            <p:spPr/>
+            <p:txBody>
+              <a:bodyPr>
+                <a:normAutofit/>
+              </a:bodyPr>
+              <a:lstStyle/>
+              <a:p>
+                <a:pPr marL="0" indent="0">
+                  <a:buNone/>
+                </a:pPr>
+                <a:r>
+                  <a:rPr lang="de-DE" sz="2400" dirty="0"/>
+                  <a:t>k-Means </a:t>
+                </a:r>
+                <a:r>
+                  <a:rPr lang="de-DE" sz="2400" dirty="0" err="1"/>
+                  <a:t>minimizes</a:t>
+                </a:r>
+                <a:r>
+                  <a:rPr lang="de-DE" sz="2400" dirty="0"/>
+                  <a:t> </a:t>
+                </a:r>
+                <a:r>
+                  <a:rPr lang="de-DE" sz="2400" dirty="0" err="1"/>
+                  <a:t>the</a:t>
+                </a:r>
+                <a:r>
+                  <a:rPr lang="de-DE" sz="2400" dirty="0"/>
+                  <a:t> </a:t>
+                </a:r>
+                <a:r>
+                  <a:rPr lang="de-DE" sz="2400" dirty="0" err="1"/>
+                  <a:t>sum</a:t>
+                </a:r>
+                <a:r>
+                  <a:rPr lang="de-DE" sz="2400" dirty="0"/>
+                  <a:t> </a:t>
+                </a:r>
+                <a:r>
+                  <a:rPr lang="de-DE" sz="2400" dirty="0" err="1"/>
+                  <a:t>of</a:t>
+                </a:r>
+                <a:r>
+                  <a:rPr lang="de-DE" sz="2400" dirty="0"/>
+                  <a:t> </a:t>
+                </a:r>
+                <a:r>
+                  <a:rPr lang="de-DE" sz="2400" dirty="0" err="1"/>
+                  <a:t>squared</a:t>
+                </a:r>
+                <a:r>
+                  <a:rPr lang="de-DE" sz="2400" dirty="0"/>
+                  <a:t> </a:t>
+                </a:r>
+                <a:r>
+                  <a:rPr lang="de-DE" sz="2400" dirty="0" err="1"/>
+                  <a:t>distances</a:t>
+                </a:r>
+                <a:r>
+                  <a:rPr lang="de-DE" sz="2400" dirty="0"/>
+                  <a:t> </a:t>
+                </a:r>
+                <a:r>
+                  <a:rPr lang="de-DE" sz="2400" dirty="0" err="1"/>
+                  <a:t>from</a:t>
+                </a:r>
+                <a:r>
+                  <a:rPr lang="de-DE" sz="2400" dirty="0"/>
+                  <a:t> </a:t>
+                </a:r>
+                <a:r>
+                  <a:rPr lang="de-DE" sz="2400" dirty="0" err="1"/>
+                  <a:t>points</a:t>
+                </a:r>
+                <a:r>
+                  <a:rPr lang="de-DE" sz="2400" dirty="0"/>
+                  <a:t> </a:t>
+                </a:r>
+                <a:r>
+                  <a:rPr lang="de-DE" sz="2400" dirty="0" err="1"/>
+                  <a:t>to</a:t>
+                </a:r>
+                <a:r>
+                  <a:rPr lang="de-DE" sz="2400" dirty="0"/>
+                  <a:t> </a:t>
+                </a:r>
+                <a:r>
+                  <a:rPr lang="de-DE" sz="2400" dirty="0" err="1"/>
+                  <a:t>their</a:t>
+                </a:r>
+                <a:r>
+                  <a:rPr lang="de-DE" sz="2400" dirty="0"/>
+                  <a:t> </a:t>
+                </a:r>
+                <a:r>
+                  <a:rPr lang="de-DE" sz="2400" dirty="0" err="1"/>
+                  <a:t>cluster</a:t>
+                </a:r>
+                <a:r>
+                  <a:rPr lang="de-DE" sz="2400" dirty="0"/>
+                  <a:t> </a:t>
+                </a:r>
+                <a:r>
+                  <a:rPr lang="de-DE" sz="2400" dirty="0" err="1"/>
+                  <a:t>center</a:t>
+                </a:r>
+                <a:r>
+                  <a:rPr lang="de-DE" sz="2400" dirty="0"/>
+                  <a:t> (</a:t>
+                </a:r>
+                <a:r>
+                  <a:rPr lang="de-DE" sz="2400" dirty="0" err="1"/>
+                  <a:t>mean</a:t>
+                </a:r>
+                <a:r>
+                  <a:rPr lang="de-DE" sz="2400" dirty="0"/>
+                  <a:t>):</a:t>
+                </a:r>
+              </a:p>
+              <a:p>
+                <a:pPr marL="0" indent="0">
+                  <a:buNone/>
+                </a:pPr>
+                <a14:m>
+                  <m:oMathPara xmlns:m="http://schemas.openxmlformats.org/officeDocument/2006/math">
+                    <m:oMathParaPr>
+                      <m:jc m:val="centerGroup"/>
+                    </m:oMathParaPr>
+                    <m:oMath xmlns:m="http://schemas.openxmlformats.org/officeDocument/2006/math">
+                      <m:nary>
+                        <m:naryPr>
+                          <m:chr m:val="∑"/>
+                          <m:ctrlPr>
+                            <a:rPr lang="de-DE" sz="2400" i="1" smtClean="0">
+                              <a:latin typeface="Cambria Math" panose="02040503050406030204" pitchFamily="18" charset="0"/>
+                            </a:rPr>
+                          </m:ctrlPr>
+                        </m:naryPr>
+                        <m:sub>
+                          <m:r>
+                            <m:rPr>
+                              <m:brk m:alnAt="23"/>
+                            </m:rPr>
+                            <a:rPr lang="de-DE" sz="2400" b="0" i="1" smtClean="0">
+                              <a:latin typeface="Cambria Math" panose="02040503050406030204" pitchFamily="18" charset="0"/>
+                            </a:rPr>
+                            <m:t>𝑖</m:t>
+                          </m:r>
+                          <m:r>
+                            <a:rPr lang="de-DE" sz="2400" b="0" i="1" smtClean="0">
+                              <a:latin typeface="Cambria Math" panose="02040503050406030204" pitchFamily="18" charset="0"/>
+                            </a:rPr>
+                            <m:t>=1</m:t>
+                          </m:r>
+                        </m:sub>
+                        <m:sup>
+                          <m:r>
+                            <a:rPr lang="de-DE" sz="2400" b="0" i="1" smtClean="0">
+                              <a:latin typeface="Cambria Math" panose="02040503050406030204" pitchFamily="18" charset="0"/>
+                            </a:rPr>
+                            <m:t>𝑘</m:t>
+                          </m:r>
+                        </m:sup>
+                        <m:e>
+                          <m:nary>
+                            <m:naryPr>
+                              <m:chr m:val="∑"/>
+                              <m:supHide m:val="on"/>
+                              <m:ctrlPr>
+                                <a:rPr lang="de-DE" sz="2400" i="1" smtClean="0">
+                                  <a:latin typeface="Cambria Math" panose="02040503050406030204" pitchFamily="18" charset="0"/>
+                                </a:rPr>
+                              </m:ctrlPr>
+                            </m:naryPr>
+                            <m:sub>
+                              <m:r>
+                                <m:rPr>
+                                  <m:brk m:alnAt="7"/>
+                                </m:rPr>
+                                <a:rPr lang="de-DE" sz="2400" b="0" i="1" smtClean="0">
+                                  <a:latin typeface="Cambria Math" panose="02040503050406030204" pitchFamily="18" charset="0"/>
+                                </a:rPr>
+                                <m:t>𝑥</m:t>
+                              </m:r>
+                              <m:r>
+                                <a:rPr lang="de-DE" sz="2400" b="0" i="1" smtClean="0">
+                                  <a:latin typeface="Cambria Math" panose="02040503050406030204" pitchFamily="18" charset="0"/>
+                                  <a:ea typeface="Cambria Math" panose="02040503050406030204" pitchFamily="18" charset="0"/>
+                                </a:rPr>
+                                <m:t>∈</m:t>
+                              </m:r>
+                              <m:sSub>
+                                <m:sSubPr>
+                                  <m:ctrlPr>
+                                    <a:rPr lang="de-DE" sz="2400" b="0" i="1" smtClean="0">
+                                      <a:latin typeface="Cambria Math" panose="02040503050406030204" pitchFamily="18" charset="0"/>
+                                      <a:ea typeface="Cambria Math" panose="02040503050406030204" pitchFamily="18" charset="0"/>
+                                    </a:rPr>
+                                  </m:ctrlPr>
+                                </m:sSubPr>
+                                <m:e>
+                                  <m:r>
+                                    <a:rPr lang="de-DE" sz="2400" b="0" i="1" smtClean="0">
+                                      <a:latin typeface="Cambria Math" panose="02040503050406030204" pitchFamily="18" charset="0"/>
+                                      <a:ea typeface="Cambria Math" panose="02040503050406030204" pitchFamily="18" charset="0"/>
+                                    </a:rPr>
+                                    <m:t>𝐶</m:t>
+                                  </m:r>
+                                </m:e>
+                                <m:sub>
+                                  <m:r>
+                                    <a:rPr lang="de-DE" sz="2400" b="0" i="1" smtClean="0">
+                                      <a:latin typeface="Cambria Math" panose="02040503050406030204" pitchFamily="18" charset="0"/>
+                                      <a:ea typeface="Cambria Math" panose="02040503050406030204" pitchFamily="18" charset="0"/>
+                                    </a:rPr>
+                                    <m:t>𝑖</m:t>
+                                  </m:r>
+                                </m:sub>
+                              </m:sSub>
+                            </m:sub>
+                            <m:sup/>
+                            <m:e>
+                              <m:sSup>
+                                <m:sSupPr>
+                                  <m:ctrlPr>
+                                    <a:rPr lang="de-DE" sz="2400" i="1">
+                                      <a:latin typeface="Cambria Math" panose="02040503050406030204" pitchFamily="18" charset="0"/>
+                                    </a:rPr>
+                                  </m:ctrlPr>
+                                </m:sSupPr>
+                                <m:e>
+                                  <m:d>
+                                    <m:dPr>
+                                      <m:begChr m:val="‖"/>
+                                      <m:endChr m:val="‖"/>
+                                      <m:ctrlPr>
+                                        <a:rPr lang="de-DE" sz="2400" i="1">
+                                          <a:latin typeface="Cambria Math" panose="02040503050406030204" pitchFamily="18" charset="0"/>
+                                        </a:rPr>
+                                      </m:ctrlPr>
+                                    </m:dPr>
+                                    <m:e>
+                                      <m:r>
+                                        <a:rPr lang="de-DE" sz="2400" i="1">
+                                          <a:latin typeface="Cambria Math" panose="02040503050406030204" pitchFamily="18" charset="0"/>
+                                        </a:rPr>
+                                        <m:t>𝑥</m:t>
+                                      </m:r>
+                                      <m:r>
+                                        <a:rPr lang="de-DE" sz="2400" i="1">
+                                          <a:latin typeface="Cambria Math" panose="02040503050406030204" pitchFamily="18" charset="0"/>
+                                        </a:rPr>
+                                        <m:t>−</m:t>
+                                      </m:r>
+                                      <m:sSub>
+                                        <m:sSubPr>
+                                          <m:ctrlPr>
+                                            <a:rPr lang="de-DE" sz="2400" i="1">
+                                              <a:latin typeface="Cambria Math" panose="02040503050406030204" pitchFamily="18" charset="0"/>
+                                            </a:rPr>
+                                          </m:ctrlPr>
+                                        </m:sSubPr>
+                                        <m:e>
+                                          <m:r>
+                                            <a:rPr lang="de-DE" sz="2400" i="1">
+                                              <a:latin typeface="Cambria Math" panose="02040503050406030204" pitchFamily="18" charset="0"/>
+                                              <a:ea typeface="Cambria Math" panose="02040503050406030204" pitchFamily="18" charset="0"/>
+                                            </a:rPr>
+                                            <m:t>𝜇</m:t>
+                                          </m:r>
+                                        </m:e>
+                                        <m:sub>
+                                          <m:r>
+                                            <a:rPr lang="de-DE" sz="2400" i="1">
+                                              <a:latin typeface="Cambria Math" panose="02040503050406030204" pitchFamily="18" charset="0"/>
+                                            </a:rPr>
+                                            <m:t>𝑖</m:t>
+                                          </m:r>
+                                        </m:sub>
+                                      </m:sSub>
+                                    </m:e>
+                                  </m:d>
+                                </m:e>
+                                <m:sup>
+                                  <m:r>
+                                    <a:rPr lang="de-DE" sz="2400" i="1">
+                                      <a:latin typeface="Cambria Math" panose="02040503050406030204" pitchFamily="18" charset="0"/>
+                                    </a:rPr>
+                                    <m:t>2</m:t>
+                                  </m:r>
+                                </m:sup>
+                              </m:sSup>
+                            </m:e>
+                          </m:nary>
+                        </m:e>
+                      </m:nary>
+                    </m:oMath>
+                  </m:oMathPara>
+                </a14:m>
+                <a:endParaRPr lang="de-DE" sz="2400" dirty="0"/>
+              </a:p>
+              <a:p>
+                <a:pPr marL="0" indent="0">
+                  <a:buNone/>
+                </a:pPr>
+                <a:endParaRPr lang="de-DE" sz="2400" dirty="0"/>
+              </a:p>
+              <a:p>
+                <a:pPr marL="0" indent="0">
+                  <a:buNone/>
+                </a:pPr>
+                <a:r>
+                  <a:rPr lang="de-DE" sz="2400" dirty="0">
+                    <a:sym typeface="Wingdings" pitchFamily="2" charset="2"/>
+                  </a:rPr>
+                  <a:t> </a:t>
+                </a:r>
+                <a:r>
+                  <a:rPr lang="de-DE" sz="2400" dirty="0" err="1">
+                    <a:sym typeface="Wingdings" pitchFamily="2" charset="2"/>
+                  </a:rPr>
+                  <a:t>optimization</a:t>
+                </a:r>
+                <a:r>
+                  <a:rPr lang="de-DE" sz="2400" dirty="0">
+                    <a:sym typeface="Wingdings" pitchFamily="2" charset="2"/>
+                  </a:rPr>
+                  <a:t> </a:t>
+                </a:r>
+                <a:r>
+                  <a:rPr lang="de-DE" sz="2400" dirty="0" err="1">
+                    <a:sym typeface="Wingdings" pitchFamily="2" charset="2"/>
+                  </a:rPr>
+                  <a:t>probem</a:t>
+                </a:r>
+                <a:endParaRPr lang="de-DE" sz="2400" dirty="0">
+                  <a:sym typeface="Wingdings" pitchFamily="2" charset="2"/>
+                </a:endParaRPr>
+              </a:p>
+            </p:txBody>
+          </p:sp>
+        </mc:Choice>
+        <mc:Fallback>
+          <p:sp>
+            <p:nvSpPr>
+              <p:cNvPr id="3" name="Inhaltsplatzhalter 2">
+                <a:extLst>
+                  <a:ext uri="{FF2B5EF4-FFF2-40B4-BE49-F238E27FC236}">
+                    <a16:creationId xmlns:a16="http://schemas.microsoft.com/office/drawing/2014/main" id="{217B770E-9FDC-AA16-DB2B-28638BF9385A}"/>
+                  </a:ext>
+                </a:extLst>
+              </p:cNvPr>
+              <p:cNvSpPr>
+                <a:spLocks noGrp="1" noRot="1" noChangeAspect="1" noMove="1" noResize="1" noEditPoints="1" noAdjustHandles="1" noChangeArrowheads="1" noChangeShapeType="1" noTextEdit="1"/>
+              </p:cNvSpPr>
+              <p:nvPr>
+                <p:ph idx="1"/>
+              </p:nvPr>
+            </p:nvSpPr>
+            <p:spPr>
+              <a:blipFill>
+                <a:blip r:embed="rId2"/>
+                <a:stretch>
+                  <a:fillRect l="-965" t="-13372"/>
+                </a:stretch>
+              </a:blipFill>
+            </p:spPr>
+            <p:txBody>
+              <a:bodyPr/>
+              <a:lstStyle/>
+              <a:p>
+                <a:r>
+                  <a:rPr lang="de-DE">
+                    <a:noFill/>
+                  </a:rPr>
+                  <a:t> </a:t>
+                </a:r>
+              </a:p>
+            </p:txBody>
+          </p:sp>
+        </mc:Fallback>
+      </mc:AlternateContent>
+      <p:sp>
+        <p:nvSpPr>
+          <p:cNvPr id="4" name="Foliennummernplatzhalter 3">
+            <a:extLst>
+              <a:ext uri="{FF2B5EF4-FFF2-40B4-BE49-F238E27FC236}">
+                <a16:creationId xmlns:a16="http://schemas.microsoft.com/office/drawing/2014/main" id="{BE922702-5E58-0568-C418-A1EAB8DBB5CE}"/>
               </a:ext>
             </a:extLst>
           </p:cNvPr>
@@ -4377,10 +5650,260 @@
           </a:p>
         </p:txBody>
       </p:sp>
+      <p:sp>
+        <p:nvSpPr>
+          <p:cNvPr id="5" name="Textfeld 4">
+            <a:extLst>
+              <a:ext uri="{FF2B5EF4-FFF2-40B4-BE49-F238E27FC236}">
+                <a16:creationId xmlns:a16="http://schemas.microsoft.com/office/drawing/2014/main" id="{809020DA-8026-7CCB-58DA-1957117D8C78}"/>
+              </a:ext>
+            </a:extLst>
+          </p:cNvPr>
+          <p:cNvSpPr txBox="1"/>
+          <p:nvPr/>
+        </p:nvSpPr>
+        <p:spPr>
+          <a:xfrm>
+            <a:off x="6016487" y="3828663"/>
+            <a:ext cx="4113686" cy="830997"/>
+          </a:xfrm>
+          <a:prstGeom prst="rect">
+            <a:avLst/>
+          </a:prstGeom>
+          <a:noFill/>
+        </p:spPr>
+        <p:txBody>
+          <a:bodyPr wrap="square" rtlCol="0">
+            <a:spAutoFit/>
+          </a:bodyPr>
+          <a:lstStyle/>
+          <a:p>
+            <a:r>
+              <a:rPr lang="de-DE" sz="2400" dirty="0" err="1"/>
+              <a:t>Euclidean</a:t>
+            </a:r>
+            <a:r>
+              <a:rPr lang="de-DE" sz="2400" dirty="0"/>
+              <a:t> </a:t>
+            </a:r>
+            <a:r>
+              <a:rPr lang="de-DE" sz="2400" dirty="0" err="1"/>
+              <a:t>distances</a:t>
+            </a:r>
+            <a:endParaRPr lang="de-DE" sz="2400" dirty="0"/>
+          </a:p>
+          <a:p>
+            <a:r>
+              <a:rPr lang="de-DE" sz="2400" dirty="0">
+                <a:sym typeface="Wingdings" pitchFamily="2" charset="2"/>
+              </a:rPr>
+              <a:t> </a:t>
+            </a:r>
+            <a:r>
+              <a:rPr lang="de-DE" sz="2400" dirty="0" err="1"/>
+              <a:t>spherical</a:t>
+            </a:r>
+            <a:r>
+              <a:rPr lang="de-DE" sz="2400" dirty="0"/>
+              <a:t> </a:t>
+            </a:r>
+            <a:r>
+              <a:rPr lang="de-DE" sz="2400" dirty="0" err="1"/>
+              <a:t>clusters</a:t>
+            </a:r>
+            <a:endParaRPr lang="de-DE" sz="2400" dirty="0"/>
+          </a:p>
+        </p:txBody>
+      </p:sp>
+      <p:cxnSp>
+        <p:nvCxnSpPr>
+          <p:cNvPr id="7" name="Gerade Verbindung mit Pfeil 6">
+            <a:extLst>
+              <a:ext uri="{FF2B5EF4-FFF2-40B4-BE49-F238E27FC236}">
+                <a16:creationId xmlns:a16="http://schemas.microsoft.com/office/drawing/2014/main" id="{0D9ABA17-E386-5CBD-E762-71B68A65B821}"/>
+              </a:ext>
+            </a:extLst>
+          </p:cNvPr>
+          <p:cNvCxnSpPr>
+            <a:cxnSpLocks/>
+          </p:cNvCxnSpPr>
+          <p:nvPr/>
+        </p:nvCxnSpPr>
+        <p:spPr>
+          <a:xfrm flipH="1" flipV="1">
+            <a:off x="6659217" y="3319670"/>
+            <a:ext cx="228600" cy="508993"/>
+          </a:xfrm>
+          <a:prstGeom prst="straightConnector1">
+            <a:avLst/>
+          </a:prstGeom>
+          <a:ln>
+            <a:tailEnd type="triangle"/>
+          </a:ln>
+        </p:spPr>
+        <p:style>
+          <a:lnRef idx="2">
+            <a:schemeClr val="accent1"/>
+          </a:lnRef>
+          <a:fillRef idx="0">
+            <a:schemeClr val="accent1"/>
+          </a:fillRef>
+          <a:effectRef idx="1">
+            <a:schemeClr val="accent1"/>
+          </a:effectRef>
+          <a:fontRef idx="minor">
+            <a:schemeClr val="tx1"/>
+          </a:fontRef>
+        </p:style>
+      </p:cxnSp>
+      <p:sp>
+        <p:nvSpPr>
+          <p:cNvPr id="8" name="Textfeld 7">
+            <a:extLst>
+              <a:ext uri="{FF2B5EF4-FFF2-40B4-BE49-F238E27FC236}">
+                <a16:creationId xmlns:a16="http://schemas.microsoft.com/office/drawing/2014/main" id="{A61831F7-0D8A-1BA2-0B83-252CE10C4F34}"/>
+              </a:ext>
+            </a:extLst>
+          </p:cNvPr>
+          <p:cNvSpPr txBox="1"/>
+          <p:nvPr/>
+        </p:nvSpPr>
+        <p:spPr>
+          <a:xfrm>
+            <a:off x="4351123" y="5135121"/>
+            <a:ext cx="6532225" cy="1200329"/>
+          </a:xfrm>
+          <a:prstGeom prst="rect">
+            <a:avLst/>
+          </a:prstGeom>
+          <a:noFill/>
+        </p:spPr>
+        <p:txBody>
+          <a:bodyPr wrap="square">
+            <a:spAutoFit/>
+          </a:bodyPr>
+          <a:lstStyle/>
+          <a:p>
+            <a:r>
+              <a:rPr lang="de-DE" sz="2400" dirty="0"/>
+              <a:t>Manhattan </a:t>
+            </a:r>
+            <a:r>
+              <a:rPr lang="de-DE" sz="2400" dirty="0" err="1"/>
+              <a:t>distances</a:t>
+            </a:r>
+            <a:r>
+              <a:rPr lang="de-DE" sz="2400" dirty="0"/>
+              <a:t> (L1) </a:t>
+            </a:r>
+            <a:r>
+              <a:rPr lang="de-DE" sz="2400" dirty="0">
+                <a:sym typeface="Wingdings" pitchFamily="2" charset="2"/>
+              </a:rPr>
+              <a:t> </a:t>
+            </a:r>
+            <a:r>
+              <a:rPr lang="de-DE" sz="2400" dirty="0" err="1">
+                <a:sym typeface="Wingdings" pitchFamily="2" charset="2"/>
+              </a:rPr>
+              <a:t>k</a:t>
+            </a:r>
+            <a:r>
+              <a:rPr lang="de-DE" sz="2400" dirty="0">
+                <a:sym typeface="Wingdings" pitchFamily="2" charset="2"/>
+              </a:rPr>
+              <a:t>-Medians (also </a:t>
+            </a:r>
+            <a:r>
+              <a:rPr lang="de-DE" sz="2400" dirty="0" err="1"/>
+              <a:t>recalculate</a:t>
+            </a:r>
+            <a:r>
+              <a:rPr lang="de-DE" sz="2400" dirty="0"/>
+              <a:t> </a:t>
+            </a:r>
+            <a:r>
+              <a:rPr lang="de-DE" sz="2400" dirty="0" err="1"/>
+              <a:t>the</a:t>
+            </a:r>
+            <a:r>
+              <a:rPr lang="de-DE" sz="2400" dirty="0"/>
+              <a:t> </a:t>
+            </a:r>
+            <a:r>
+              <a:rPr lang="de-DE" sz="2400" dirty="0" err="1"/>
+              <a:t>cluster</a:t>
+            </a:r>
+            <a:r>
+              <a:rPr lang="de-DE" sz="2400" dirty="0"/>
+              <a:t> </a:t>
+            </a:r>
+            <a:r>
+              <a:rPr lang="de-DE" sz="2400" dirty="0" err="1"/>
+              <a:t>centers</a:t>
+            </a:r>
+            <a:r>
+              <a:rPr lang="de-DE" sz="2400" dirty="0"/>
+              <a:t> </a:t>
+            </a:r>
+            <a:r>
+              <a:rPr lang="de-DE" sz="2400" dirty="0" err="1"/>
+              <a:t>using</a:t>
+            </a:r>
+            <a:r>
+              <a:rPr lang="de-DE" sz="2400" dirty="0"/>
+              <a:t> </a:t>
+            </a:r>
+            <a:r>
+              <a:rPr lang="de-DE" sz="2400" dirty="0" err="1"/>
+              <a:t>the</a:t>
+            </a:r>
+            <a:r>
+              <a:rPr lang="de-DE" sz="2400" dirty="0"/>
+              <a:t> median </a:t>
+            </a:r>
+            <a:r>
+              <a:rPr lang="de-DE" sz="2400" dirty="0" err="1"/>
+              <a:t>instead</a:t>
+            </a:r>
+            <a:r>
+              <a:rPr lang="de-DE" sz="2400" dirty="0"/>
+              <a:t> </a:t>
+            </a:r>
+            <a:r>
+              <a:rPr lang="de-DE" sz="2400" dirty="0" err="1"/>
+              <a:t>of</a:t>
+            </a:r>
+            <a:r>
+              <a:rPr lang="de-DE" sz="2400" dirty="0"/>
+              <a:t> </a:t>
+            </a:r>
+            <a:r>
+              <a:rPr lang="de-DE" sz="2400" dirty="0" err="1"/>
+              <a:t>the</a:t>
+            </a:r>
+            <a:r>
+              <a:rPr lang="de-DE" sz="2400" dirty="0"/>
+              <a:t> </a:t>
+            </a:r>
+            <a:r>
+              <a:rPr lang="de-DE" sz="2400" dirty="0" err="1"/>
+              <a:t>mean</a:t>
+            </a:r>
+            <a:r>
+              <a:rPr lang="de-DE" sz="2400" dirty="0">
+                <a:sym typeface="Wingdings" pitchFamily="2" charset="2"/>
+              </a:rPr>
+              <a:t>)</a:t>
+            </a:r>
+            <a:endParaRPr lang="de-DE" sz="2400" dirty="0"/>
+          </a:p>
+        </p:txBody>
+      </p:sp>
     </p:spTree>
     <p:extLst>
       <p:ext uri="{BB962C8B-B14F-4D97-AF65-F5344CB8AC3E}">
-        <p14:creationId xmlns:p14="http://schemas.microsoft.com/office/powerpoint/2010/main" val="2136084940"/>
+        <p14:creationId xmlns:p14="http://schemas.microsoft.com/office/powerpoint/2010/main" val="738207542"/>
       </p:ext>
     </p:extLst>
   </p:cSld>
@@ -4412,7 +5935,7 @@
           <p:cNvPr id="2" name="Titel 1">
             <a:extLst>
               <a:ext uri="{FF2B5EF4-FFF2-40B4-BE49-F238E27FC236}">
-                <a16:creationId xmlns:a16="http://schemas.microsoft.com/office/drawing/2014/main" id="{AE45E519-E948-8501-ACAD-BDF00444DFDC}"/>
+                <a16:creationId xmlns:a16="http://schemas.microsoft.com/office/drawing/2014/main" id="{B4C481BB-DFD4-77CC-115E-6A31A6CFCF52}"/>
               </a:ext>
             </a:extLst>
           </p:cNvPr>
@@ -4430,22 +5953,25 @@
           <a:p>
             <a:r>
               <a:rPr lang="de-DE" dirty="0"/>
-              <a:t>Mini Batch </a:t>
-            </a:r>
-            <a:r>
-              <a:rPr lang="de-DE" dirty="0" err="1"/>
-              <a:t>k-Means</a:t>
-            </a:r>
-            <a:endParaRPr lang="de-DE" dirty="0"/>
-          </a:p>
-        </p:txBody>
-      </p:sp>
-      <p:sp>
-        <p:nvSpPr>
-          <p:cNvPr id="4" name="Inhaltsplatzhalter 3">
-            <a:extLst>
-              <a:ext uri="{FF2B5EF4-FFF2-40B4-BE49-F238E27FC236}">
-                <a16:creationId xmlns:a16="http://schemas.microsoft.com/office/drawing/2014/main" id="{DAA8C059-BF98-DA76-D11E-B2885769186E}"/>
+              <a:t>… Mean L2 </a:t>
+            </a:r>
+            <a:r>
+              <a:rPr lang="de-DE" dirty="0" err="1"/>
+              <a:t>vs</a:t>
+            </a:r>
+            <a:r>
+              <a:rPr lang="de-DE" dirty="0"/>
+              <a:t> Median L1 …</a:t>
+            </a:r>
+          </a:p>
+        </p:txBody>
+      </p:sp>
+      <p:sp>
+        <p:nvSpPr>
+          <p:cNvPr id="3" name="Inhaltsplatzhalter 2">
+            <a:extLst>
+              <a:ext uri="{FF2B5EF4-FFF2-40B4-BE49-F238E27FC236}">
+                <a16:creationId xmlns:a16="http://schemas.microsoft.com/office/drawing/2014/main" id="{085BD90E-4E62-2134-AC41-EB7A9018D82B}"/>
               </a:ext>
             </a:extLst>
           </p:cNvPr>
@@ -4467,10 +5993,10 @@
       </p:sp>
       <p:sp>
         <p:nvSpPr>
-          <p:cNvPr id="3" name="Foliennummernplatzhalter 2">
-            <a:extLst>
-              <a:ext uri="{FF2B5EF4-FFF2-40B4-BE49-F238E27FC236}">
-                <a16:creationId xmlns:a16="http://schemas.microsoft.com/office/drawing/2014/main" id="{2B02C868-452A-3E9E-3E72-BA889BC8609C}"/>
+          <p:cNvPr id="4" name="Foliennummernplatzhalter 3">
+            <a:extLst>
+              <a:ext uri="{FF2B5EF4-FFF2-40B4-BE49-F238E27FC236}">
+                <a16:creationId xmlns:a16="http://schemas.microsoft.com/office/drawing/2014/main" id="{58F66D73-FD92-F395-A736-DB16B54A0AF4}"/>
               </a:ext>
             </a:extLst>
           </p:cNvPr>
@@ -4489,6 +6015,1112 @@
             <a:fld id="{08C366F5-AFAD-49CB-854A-9D9E238FCA13}" type="slidenum">
               <a:rPr lang="en-GB" smtClean="0"/>
               <a:t>13</a:t>
+            </a:fld>
+            <a:endParaRPr lang="en-GB"/>
+          </a:p>
+        </p:txBody>
+      </p:sp>
+    </p:spTree>
+    <p:extLst>
+      <p:ext uri="{BB962C8B-B14F-4D97-AF65-F5344CB8AC3E}">
+        <p14:creationId xmlns:p14="http://schemas.microsoft.com/office/powerpoint/2010/main" val="1142767289"/>
+      </p:ext>
+    </p:extLst>
+  </p:cSld>
+  <p:clrMapOvr>
+    <a:masterClrMapping/>
+  </p:clrMapOvr>
+</p:sld>
+</file>
+
+<file path=ppt/slides/slide14.xml><?xml version="1.0" encoding="utf-8"?>
+<p:sld xmlns:a="http://schemas.openxmlformats.org/drawingml/2006/main" xmlns:r="http://schemas.openxmlformats.org/officeDocument/2006/relationships" xmlns:p="http://schemas.openxmlformats.org/presentationml/2006/main">
+  <p:cSld>
+    <p:spTree>
+      <p:nvGrpSpPr>
+        <p:cNvPr id="1" name=""/>
+        <p:cNvGrpSpPr/>
+        <p:nvPr/>
+      </p:nvGrpSpPr>
+      <p:grpSpPr>
+        <a:xfrm>
+          <a:off x="0" y="0"/>
+          <a:ext cx="0" cy="0"/>
+          <a:chOff x="0" y="0"/>
+          <a:chExt cx="0" cy="0"/>
+        </a:xfrm>
+      </p:grpSpPr>
+      <p:sp>
+        <p:nvSpPr>
+          <p:cNvPr id="2" name="Titel 1">
+            <a:extLst>
+              <a:ext uri="{FF2B5EF4-FFF2-40B4-BE49-F238E27FC236}">
+                <a16:creationId xmlns:a16="http://schemas.microsoft.com/office/drawing/2014/main" id="{1AB97CEE-DA9B-A98C-98BF-3E784E6E5ABB}"/>
+              </a:ext>
+            </a:extLst>
+          </p:cNvPr>
+          <p:cNvSpPr>
+            <a:spLocks noGrp="1"/>
+          </p:cNvSpPr>
+          <p:nvPr>
+            <p:ph type="title"/>
+          </p:nvPr>
+        </p:nvSpPr>
+        <p:spPr/>
+        <p:txBody>
+          <a:bodyPr/>
+          <a:lstStyle/>
+          <a:p>
+            <a:r>
+              <a:rPr lang="de-DE" dirty="0" err="1"/>
+              <a:t>k-Means</a:t>
+            </a:r>
+            <a:r>
+              <a:rPr lang="de-DE" dirty="0"/>
+              <a:t> </a:t>
+            </a:r>
+            <a:r>
+              <a:rPr lang="de-DE" dirty="0" err="1"/>
+              <a:t>Assumptions</a:t>
+            </a:r>
+            <a:r>
+              <a:rPr lang="de-DE" dirty="0"/>
+              <a:t> and </a:t>
+            </a:r>
+            <a:r>
+              <a:rPr lang="de-DE" dirty="0" err="1"/>
+              <a:t>Limitations</a:t>
+            </a:r>
+            <a:endParaRPr lang="de-DE" dirty="0"/>
+          </a:p>
+        </p:txBody>
+      </p:sp>
+      <mc:AlternateContent xmlns:mc="http://schemas.openxmlformats.org/markup-compatibility/2006" xmlns:a14="http://schemas.microsoft.com/office/drawing/2010/main">
+        <mc:Choice Requires="a14">
+          <p:sp>
+            <p:nvSpPr>
+              <p:cNvPr id="4" name="Inhaltsplatzhalter 3">
+                <a:extLst>
+                  <a:ext uri="{FF2B5EF4-FFF2-40B4-BE49-F238E27FC236}">
+                    <a16:creationId xmlns:a16="http://schemas.microsoft.com/office/drawing/2014/main" id="{8EB38805-6A59-7BC3-1404-033473E3A342}"/>
+                  </a:ext>
+                </a:extLst>
+              </p:cNvPr>
+              <p:cNvSpPr>
+                <a:spLocks noGrp="1"/>
+              </p:cNvSpPr>
+              <p:nvPr>
+                <p:ph idx="1"/>
+              </p:nvPr>
+            </p:nvSpPr>
+            <p:spPr/>
+            <p:txBody>
+              <a:bodyPr>
+                <a:normAutofit/>
+              </a:bodyPr>
+              <a:lstStyle/>
+              <a:p>
+                <a:r>
+                  <a:rPr lang="de-DE" dirty="0"/>
+                  <a:t>must </a:t>
+                </a:r>
+                <a:r>
+                  <a:rPr lang="de-DE" dirty="0" err="1"/>
+                  <a:t>choose</a:t>
+                </a:r>
+                <a:r>
+                  <a:rPr lang="de-DE" dirty="0"/>
+                  <a:t> </a:t>
+                </a:r>
+                <a:r>
+                  <a:rPr lang="de-DE" dirty="0" err="1"/>
+                  <a:t>k</a:t>
+                </a:r>
+                <a:r>
+                  <a:rPr lang="de-DE" dirty="0"/>
+                  <a:t> </a:t>
+                </a:r>
+                <a:r>
+                  <a:rPr lang="de-DE" dirty="0" err="1"/>
+                  <a:t>beforehand</a:t>
+                </a:r>
+                <a:endParaRPr lang="de-DE" dirty="0"/>
+              </a:p>
+              <a:p>
+                <a:r>
+                  <a:rPr lang="de-DE" dirty="0"/>
+                  <a:t>sensitive </a:t>
+                </a:r>
+                <a:r>
+                  <a:rPr lang="de-DE" dirty="0" err="1"/>
+                  <a:t>to</a:t>
+                </a:r>
+                <a:r>
+                  <a:rPr lang="de-DE" dirty="0"/>
+                  <a:t> initial </a:t>
+                </a:r>
+                <a:r>
+                  <a:rPr lang="de-DE" dirty="0" err="1"/>
+                  <a:t>centroid</a:t>
+                </a:r>
+                <a:r>
+                  <a:rPr lang="de-DE" dirty="0"/>
+                  <a:t> </a:t>
+                </a:r>
+                <a:r>
+                  <a:rPr lang="de-DE" dirty="0" err="1"/>
+                  <a:t>placement</a:t>
+                </a:r>
+                <a:endParaRPr lang="de-DE" dirty="0"/>
+              </a:p>
+              <a:p>
+                <a:r>
+                  <a:rPr lang="de-DE" dirty="0" err="1"/>
+                  <a:t>assumes</a:t>
+                </a:r>
+                <a:r>
+                  <a:rPr lang="de-DE" dirty="0"/>
+                  <a:t> </a:t>
+                </a:r>
+                <a:r>
+                  <a:rPr lang="de-DE" dirty="0" err="1"/>
+                  <a:t>clusters</a:t>
+                </a:r>
+                <a:r>
+                  <a:rPr lang="de-DE" dirty="0"/>
+                  <a:t> </a:t>
+                </a:r>
+                <a:r>
+                  <a:rPr lang="de-DE" dirty="0" err="1"/>
+                  <a:t>are</a:t>
+                </a:r>
+                <a:r>
+                  <a:rPr lang="de-DE" dirty="0"/>
+                  <a:t> </a:t>
+                </a:r>
+                <a:r>
+                  <a:rPr lang="de-DE" dirty="0" err="1"/>
+                  <a:t>spherical</a:t>
+                </a:r>
+                <a:endParaRPr lang="de-DE" dirty="0"/>
+              </a:p>
+              <a:p>
+                <a:r>
+                  <a:rPr lang="de-DE" dirty="0"/>
+                  <a:t>sensitive </a:t>
+                </a:r>
+                <a:r>
+                  <a:rPr lang="de-DE" dirty="0" err="1"/>
+                  <a:t>to</a:t>
+                </a:r>
+                <a:r>
+                  <a:rPr lang="de-DE" dirty="0"/>
+                  <a:t> </a:t>
+                </a:r>
+                <a:r>
+                  <a:rPr lang="de-DE" dirty="0" err="1"/>
+                  <a:t>outliers</a:t>
+                </a:r>
+                <a:endParaRPr lang="de-DE" dirty="0"/>
+              </a:p>
+              <a:p>
+                <a:pPr marL="0" indent="0">
+                  <a:buNone/>
+                </a:pPr>
+                <a:endParaRPr lang="de-DE" dirty="0"/>
+              </a:p>
+              <a:p>
+                <a:pPr marL="0" indent="0">
+                  <a:buNone/>
+                </a:pPr>
+                <a:r>
+                  <a:rPr lang="de-DE" dirty="0"/>
+                  <a:t>Advantages:</a:t>
+                </a:r>
+              </a:p>
+              <a:p>
+                <a:r>
+                  <a:rPr lang="de-DE" dirty="0"/>
+                  <a:t>simple and fast: </a:t>
+                </a:r>
+                <a14:m>
+                  <m:oMath xmlns:m="http://schemas.openxmlformats.org/officeDocument/2006/math">
+                    <m:r>
+                      <a:rPr lang="de-DE" b="0" i="1" smtClean="0">
+                        <a:latin typeface="Cambria Math" panose="02040503050406030204" pitchFamily="18" charset="0"/>
+                        <a:ea typeface="Cambria Math" panose="02040503050406030204" pitchFamily="18" charset="0"/>
+                      </a:rPr>
+                      <m:t>𝑂</m:t>
+                    </m:r>
+                    <m:r>
+                      <a:rPr lang="de-DE" b="0" i="1" smtClean="0">
+                        <a:latin typeface="Cambria Math" panose="02040503050406030204" pitchFamily="18" charset="0"/>
+                        <a:ea typeface="Cambria Math" panose="02040503050406030204" pitchFamily="18" charset="0"/>
+                      </a:rPr>
+                      <m:t>(</m:t>
+                    </m:r>
+                    <m:r>
+                      <a:rPr lang="de-DE" b="0" i="1" smtClean="0">
+                        <a:latin typeface="Cambria Math" panose="02040503050406030204" pitchFamily="18" charset="0"/>
+                        <a:ea typeface="Cambria Math" panose="02040503050406030204" pitchFamily="18" charset="0"/>
+                      </a:rPr>
+                      <m:t>𝑛</m:t>
+                    </m:r>
+                    <m:r>
+                      <a:rPr lang="de-DE" b="0" i="1" smtClean="0">
+                        <a:latin typeface="Cambria Math" panose="02040503050406030204" pitchFamily="18" charset="0"/>
+                        <a:ea typeface="Cambria Math" panose="02040503050406030204" pitchFamily="18" charset="0"/>
+                      </a:rPr>
+                      <m:t>∙</m:t>
+                    </m:r>
+                    <m:r>
+                      <a:rPr lang="de-DE" b="0" i="1" smtClean="0">
+                        <a:latin typeface="Cambria Math" panose="02040503050406030204" pitchFamily="18" charset="0"/>
+                        <a:ea typeface="Cambria Math" panose="02040503050406030204" pitchFamily="18" charset="0"/>
+                      </a:rPr>
+                      <m:t>𝑘</m:t>
+                    </m:r>
+                    <m:r>
+                      <a:rPr lang="de-DE" b="0" i="1" smtClean="0">
+                        <a:latin typeface="Cambria Math" panose="02040503050406030204" pitchFamily="18" charset="0"/>
+                        <a:ea typeface="Cambria Math" panose="02040503050406030204" pitchFamily="18" charset="0"/>
+                      </a:rPr>
+                      <m:t>∙</m:t>
+                    </m:r>
+                    <m:r>
+                      <a:rPr lang="de-DE" b="0" i="1" smtClean="0">
+                        <a:latin typeface="Cambria Math" panose="02040503050406030204" pitchFamily="18" charset="0"/>
+                        <a:ea typeface="Cambria Math" panose="02040503050406030204" pitchFamily="18" charset="0"/>
+                      </a:rPr>
+                      <m:t>𝑖</m:t>
+                    </m:r>
+                    <m:r>
+                      <a:rPr lang="de-DE" b="0" i="1" smtClean="0">
+                        <a:latin typeface="Cambria Math" panose="02040503050406030204" pitchFamily="18" charset="0"/>
+                        <a:ea typeface="Cambria Math" panose="02040503050406030204" pitchFamily="18" charset="0"/>
+                      </a:rPr>
+                      <m:t>∙</m:t>
+                    </m:r>
+                    <m:r>
+                      <a:rPr lang="de-DE" b="0" i="1" smtClean="0">
+                        <a:latin typeface="Cambria Math" panose="02040503050406030204" pitchFamily="18" charset="0"/>
+                        <a:ea typeface="Cambria Math" panose="02040503050406030204" pitchFamily="18" charset="0"/>
+                      </a:rPr>
+                      <m:t>𝑑</m:t>
+                    </m:r>
+                    <m:r>
+                      <a:rPr lang="de-DE" b="0" i="1" smtClean="0">
+                        <a:latin typeface="Cambria Math" panose="02040503050406030204" pitchFamily="18" charset="0"/>
+                        <a:ea typeface="Cambria Math" panose="02040503050406030204" pitchFamily="18" charset="0"/>
+                      </a:rPr>
+                      <m:t>)</m:t>
+                    </m:r>
+                  </m:oMath>
+                </a14:m>
+                <a:endParaRPr lang="de-DE" dirty="0"/>
+              </a:p>
+              <a:p>
+                <a:r>
+                  <a:rPr lang="de-DE" dirty="0" err="1"/>
+                  <a:t>scales</a:t>
+                </a:r>
+                <a:r>
+                  <a:rPr lang="de-DE" dirty="0"/>
+                  <a:t> </a:t>
+                </a:r>
+                <a:r>
+                  <a:rPr lang="de-DE" dirty="0" err="1"/>
+                  <a:t>well</a:t>
+                </a:r>
+                <a:r>
+                  <a:rPr lang="de-DE" dirty="0"/>
+                  <a:t> </a:t>
+                </a:r>
+                <a:r>
+                  <a:rPr lang="de-DE" dirty="0" err="1"/>
+                  <a:t>to</a:t>
+                </a:r>
+                <a:r>
+                  <a:rPr lang="de-DE" dirty="0"/>
+                  <a:t> large </a:t>
+                </a:r>
+                <a:r>
+                  <a:rPr lang="de-DE" dirty="0" err="1"/>
+                  <a:t>datasets</a:t>
+                </a:r>
+                <a:endParaRPr lang="de-DE" dirty="0"/>
+              </a:p>
+            </p:txBody>
+          </p:sp>
+        </mc:Choice>
+        <mc:Fallback xmlns="">
+          <p:sp>
+            <p:nvSpPr>
+              <p:cNvPr id="4" name="Inhaltsplatzhalter 3">
+                <a:extLst>
+                  <a:ext uri="{FF2B5EF4-FFF2-40B4-BE49-F238E27FC236}">
+                    <a16:creationId xmlns:a16="http://schemas.microsoft.com/office/drawing/2014/main" id="{8EB38805-6A59-7BC3-1404-033473E3A342}"/>
+                  </a:ext>
+                </a:extLst>
+              </p:cNvPr>
+              <p:cNvSpPr>
+                <a:spLocks noGrp="1" noRot="1" noChangeAspect="1" noMove="1" noResize="1" noEditPoints="1" noAdjustHandles="1" noChangeArrowheads="1" noChangeShapeType="1" noTextEdit="1"/>
+              </p:cNvSpPr>
+              <p:nvPr>
+                <p:ph idx="1"/>
+              </p:nvPr>
+            </p:nvSpPr>
+            <p:spPr>
+              <a:blipFill>
+                <a:blip r:embed="rId2"/>
+                <a:stretch>
+                  <a:fillRect l="-1206" t="-2326"/>
+                </a:stretch>
+              </a:blipFill>
+            </p:spPr>
+            <p:txBody>
+              <a:bodyPr/>
+              <a:lstStyle/>
+              <a:p>
+                <a:r>
+                  <a:rPr lang="de-DE">
+                    <a:noFill/>
+                  </a:rPr>
+                  <a:t> </a:t>
+                </a:r>
+              </a:p>
+            </p:txBody>
+          </p:sp>
+        </mc:Fallback>
+      </mc:AlternateContent>
+      <p:sp>
+        <p:nvSpPr>
+          <p:cNvPr id="3" name="Foliennummernplatzhalter 2">
+            <a:extLst>
+              <a:ext uri="{FF2B5EF4-FFF2-40B4-BE49-F238E27FC236}">
+                <a16:creationId xmlns:a16="http://schemas.microsoft.com/office/drawing/2014/main" id="{361F564A-5810-6633-6054-C0BC5BA3FC59}"/>
+              </a:ext>
+            </a:extLst>
+          </p:cNvPr>
+          <p:cNvSpPr>
+            <a:spLocks noGrp="1"/>
+          </p:cNvSpPr>
+          <p:nvPr>
+            <p:ph type="sldNum" sz="quarter" idx="12"/>
+          </p:nvPr>
+        </p:nvSpPr>
+        <p:spPr/>
+        <p:txBody>
+          <a:bodyPr/>
+          <a:lstStyle/>
+          <a:p>
+            <a:fld id="{08C366F5-AFAD-49CB-854A-9D9E238FCA13}" type="slidenum">
+              <a:rPr lang="en-GB" smtClean="0"/>
+              <a:t>14</a:t>
+            </a:fld>
+            <a:endParaRPr lang="en-GB"/>
+          </a:p>
+        </p:txBody>
+      </p:sp>
+      <p:sp>
+        <p:nvSpPr>
+          <p:cNvPr id="5" name="Textfeld 4">
+            <a:extLst>
+              <a:ext uri="{FF2B5EF4-FFF2-40B4-BE49-F238E27FC236}">
+                <a16:creationId xmlns:a16="http://schemas.microsoft.com/office/drawing/2014/main" id="{CC78B86E-2536-62A6-22F6-FE295559335A}"/>
+              </a:ext>
+            </a:extLst>
+          </p:cNvPr>
+          <p:cNvSpPr txBox="1"/>
+          <p:nvPr/>
+        </p:nvSpPr>
+        <p:spPr>
+          <a:xfrm>
+            <a:off x="5445561" y="4080805"/>
+            <a:ext cx="1121974" cy="369332"/>
+          </a:xfrm>
+          <a:prstGeom prst="rect">
+            <a:avLst/>
+          </a:prstGeom>
+          <a:noFill/>
+        </p:spPr>
+        <p:txBody>
+          <a:bodyPr wrap="none" rtlCol="0">
+            <a:spAutoFit/>
+          </a:bodyPr>
+          <a:lstStyle/>
+          <a:p>
+            <a:r>
+              <a:rPr lang="de-DE" dirty="0" err="1"/>
+              <a:t>iterations</a:t>
+            </a:r>
+            <a:endParaRPr lang="de-DE" dirty="0"/>
+          </a:p>
+        </p:txBody>
+      </p:sp>
+      <p:sp>
+        <p:nvSpPr>
+          <p:cNvPr id="6" name="Textfeld 5">
+            <a:extLst>
+              <a:ext uri="{FF2B5EF4-FFF2-40B4-BE49-F238E27FC236}">
+                <a16:creationId xmlns:a16="http://schemas.microsoft.com/office/drawing/2014/main" id="{91DF7AF4-6660-0D67-224C-96CA0E54AB03}"/>
+              </a:ext>
+            </a:extLst>
+          </p:cNvPr>
+          <p:cNvSpPr txBox="1"/>
+          <p:nvPr/>
+        </p:nvSpPr>
+        <p:spPr>
+          <a:xfrm>
+            <a:off x="3945835" y="4080805"/>
+            <a:ext cx="1304524" cy="369332"/>
+          </a:xfrm>
+          <a:prstGeom prst="rect">
+            <a:avLst/>
+          </a:prstGeom>
+          <a:noFill/>
+        </p:spPr>
+        <p:txBody>
+          <a:bodyPr wrap="none" rtlCol="0">
+            <a:spAutoFit/>
+          </a:bodyPr>
+          <a:lstStyle/>
+          <a:p>
+            <a:r>
+              <a:rPr lang="de-DE" dirty="0" err="1"/>
+              <a:t>data</a:t>
+            </a:r>
+            <a:r>
+              <a:rPr lang="de-DE" dirty="0"/>
+              <a:t> </a:t>
+            </a:r>
+            <a:r>
+              <a:rPr lang="de-DE" dirty="0" err="1"/>
+              <a:t>points</a:t>
+            </a:r>
+            <a:endParaRPr lang="de-DE" dirty="0"/>
+          </a:p>
+        </p:txBody>
+      </p:sp>
+      <p:cxnSp>
+        <p:nvCxnSpPr>
+          <p:cNvPr id="8" name="Gerade Verbindung mit Pfeil 7">
+            <a:extLst>
+              <a:ext uri="{FF2B5EF4-FFF2-40B4-BE49-F238E27FC236}">
+                <a16:creationId xmlns:a16="http://schemas.microsoft.com/office/drawing/2014/main" id="{DA36754A-6012-D801-22B7-A249ADAEA4E9}"/>
+              </a:ext>
+            </a:extLst>
+          </p:cNvPr>
+          <p:cNvCxnSpPr>
+            <a:stCxn id="6" idx="2"/>
+          </p:cNvCxnSpPr>
+          <p:nvPr/>
+        </p:nvCxnSpPr>
+        <p:spPr>
+          <a:xfrm flipH="1">
+            <a:off x="4263887" y="4450137"/>
+            <a:ext cx="334210" cy="489611"/>
+          </a:xfrm>
+          <a:prstGeom prst="straightConnector1">
+            <a:avLst/>
+          </a:prstGeom>
+          <a:ln>
+            <a:tailEnd type="triangle"/>
+          </a:ln>
+        </p:spPr>
+        <p:style>
+          <a:lnRef idx="2">
+            <a:schemeClr val="accent1"/>
+          </a:lnRef>
+          <a:fillRef idx="0">
+            <a:schemeClr val="accent1"/>
+          </a:fillRef>
+          <a:effectRef idx="1">
+            <a:schemeClr val="accent1"/>
+          </a:effectRef>
+          <a:fontRef idx="minor">
+            <a:schemeClr val="tx1"/>
+          </a:fontRef>
+        </p:style>
+      </p:cxnSp>
+      <p:cxnSp>
+        <p:nvCxnSpPr>
+          <p:cNvPr id="10" name="Gerade Verbindung mit Pfeil 9">
+            <a:extLst>
+              <a:ext uri="{FF2B5EF4-FFF2-40B4-BE49-F238E27FC236}">
+                <a16:creationId xmlns:a16="http://schemas.microsoft.com/office/drawing/2014/main" id="{8CFCD8D1-E55A-87A0-735D-5CE8FAA215F8}"/>
+              </a:ext>
+            </a:extLst>
+          </p:cNvPr>
+          <p:cNvCxnSpPr>
+            <a:stCxn id="5" idx="2"/>
+          </p:cNvCxnSpPr>
+          <p:nvPr/>
+        </p:nvCxnSpPr>
+        <p:spPr>
+          <a:xfrm flipH="1">
+            <a:off x="5160907" y="4450137"/>
+            <a:ext cx="845641" cy="489611"/>
+          </a:xfrm>
+          <a:prstGeom prst="straightConnector1">
+            <a:avLst/>
+          </a:prstGeom>
+          <a:ln>
+            <a:tailEnd type="triangle"/>
+          </a:ln>
+        </p:spPr>
+        <p:style>
+          <a:lnRef idx="2">
+            <a:schemeClr val="accent1"/>
+          </a:lnRef>
+          <a:fillRef idx="0">
+            <a:schemeClr val="accent1"/>
+          </a:fillRef>
+          <a:effectRef idx="1">
+            <a:schemeClr val="accent1"/>
+          </a:effectRef>
+          <a:fontRef idx="minor">
+            <a:schemeClr val="tx1"/>
+          </a:fontRef>
+        </p:style>
+      </p:cxnSp>
+    </p:spTree>
+    <p:extLst>
+      <p:ext uri="{BB962C8B-B14F-4D97-AF65-F5344CB8AC3E}">
+        <p14:creationId xmlns:p14="http://schemas.microsoft.com/office/powerpoint/2010/main" val="2136084940"/>
+      </p:ext>
+    </p:extLst>
+  </p:cSld>
+  <p:clrMapOvr>
+    <a:masterClrMapping/>
+  </p:clrMapOvr>
+</p:sld>
+</file>
+
+<file path=ppt/slides/slide15.xml><?xml version="1.0" encoding="utf-8"?>
+<p:sld xmlns:a="http://schemas.openxmlformats.org/drawingml/2006/main" xmlns:r="http://schemas.openxmlformats.org/officeDocument/2006/relationships" xmlns:p="http://schemas.openxmlformats.org/presentationml/2006/main">
+  <p:cSld>
+    <p:spTree>
+      <p:nvGrpSpPr>
+        <p:cNvPr id="1" name=""/>
+        <p:cNvGrpSpPr/>
+        <p:nvPr/>
+      </p:nvGrpSpPr>
+      <p:grpSpPr>
+        <a:xfrm>
+          <a:off x="0" y="0"/>
+          <a:ext cx="0" cy="0"/>
+          <a:chOff x="0" y="0"/>
+          <a:chExt cx="0" cy="0"/>
+        </a:xfrm>
+      </p:grpSpPr>
+      <p:sp>
+        <p:nvSpPr>
+          <p:cNvPr id="2" name="Titel 1">
+            <a:extLst>
+              <a:ext uri="{FF2B5EF4-FFF2-40B4-BE49-F238E27FC236}">
+                <a16:creationId xmlns:a16="http://schemas.microsoft.com/office/drawing/2014/main" id="{A7B2E4CA-B735-2522-94A8-FABA7925C76C}"/>
+              </a:ext>
+            </a:extLst>
+          </p:cNvPr>
+          <p:cNvSpPr>
+            <a:spLocks noGrp="1"/>
+          </p:cNvSpPr>
+          <p:nvPr>
+            <p:ph type="title"/>
+          </p:nvPr>
+        </p:nvSpPr>
+        <p:spPr/>
+        <p:txBody>
+          <a:bodyPr/>
+          <a:lstStyle/>
+          <a:p>
+            <a:r>
+              <a:rPr lang="de-DE" dirty="0"/>
+              <a:t>Cluster </a:t>
+            </a:r>
+            <a:r>
+              <a:rPr lang="de-DE" dirty="0" err="1"/>
+              <a:t>Initialization</a:t>
+            </a:r>
+            <a:endParaRPr lang="de-DE" dirty="0"/>
+          </a:p>
+        </p:txBody>
+      </p:sp>
+      <p:sp>
+        <p:nvSpPr>
+          <p:cNvPr id="4" name="Inhaltsplatzhalter 3">
+            <a:extLst>
+              <a:ext uri="{FF2B5EF4-FFF2-40B4-BE49-F238E27FC236}">
+                <a16:creationId xmlns:a16="http://schemas.microsoft.com/office/drawing/2014/main" id="{9F51F910-C916-5E02-AF25-164F3AD865B2}"/>
+              </a:ext>
+            </a:extLst>
+          </p:cNvPr>
+          <p:cNvSpPr>
+            <a:spLocks noGrp="1"/>
+          </p:cNvSpPr>
+          <p:nvPr>
+            <p:ph idx="1"/>
+          </p:nvPr>
+        </p:nvSpPr>
+        <p:spPr/>
+        <p:txBody>
+          <a:bodyPr/>
+          <a:lstStyle/>
+          <a:p>
+            <a:r>
+              <a:rPr lang="de-DE" dirty="0"/>
+              <a:t>…</a:t>
+            </a:r>
+          </a:p>
+        </p:txBody>
+      </p:sp>
+      <p:sp>
+        <p:nvSpPr>
+          <p:cNvPr id="3" name="Foliennummernplatzhalter 2">
+            <a:extLst>
+              <a:ext uri="{FF2B5EF4-FFF2-40B4-BE49-F238E27FC236}">
+                <a16:creationId xmlns:a16="http://schemas.microsoft.com/office/drawing/2014/main" id="{3A2A536F-3618-D2CF-0544-827E525AAB04}"/>
+              </a:ext>
+            </a:extLst>
+          </p:cNvPr>
+          <p:cNvSpPr>
+            <a:spLocks noGrp="1"/>
+          </p:cNvSpPr>
+          <p:nvPr>
+            <p:ph type="sldNum" sz="quarter" idx="12"/>
+          </p:nvPr>
+        </p:nvSpPr>
+        <p:spPr/>
+        <p:txBody>
+          <a:bodyPr/>
+          <a:lstStyle/>
+          <a:p>
+            <a:fld id="{08C366F5-AFAD-49CB-854A-9D9E238FCA13}" type="slidenum">
+              <a:rPr lang="en-GB" smtClean="0"/>
+              <a:t>15</a:t>
+            </a:fld>
+            <a:endParaRPr lang="en-GB"/>
+          </a:p>
+        </p:txBody>
+      </p:sp>
+    </p:spTree>
+    <p:extLst>
+      <p:ext uri="{BB962C8B-B14F-4D97-AF65-F5344CB8AC3E}">
+        <p14:creationId xmlns:p14="http://schemas.microsoft.com/office/powerpoint/2010/main" val="4145213422"/>
+      </p:ext>
+    </p:extLst>
+  </p:cSld>
+  <p:clrMapOvr>
+    <a:masterClrMapping/>
+  </p:clrMapOvr>
+</p:sld>
+</file>
+
+<file path=ppt/slides/slide16.xml><?xml version="1.0" encoding="utf-8"?>
+<p:sld xmlns:a="http://schemas.openxmlformats.org/drawingml/2006/main" xmlns:r="http://schemas.openxmlformats.org/officeDocument/2006/relationships" xmlns:p="http://schemas.openxmlformats.org/presentationml/2006/main">
+  <p:cSld>
+    <p:spTree>
+      <p:nvGrpSpPr>
+        <p:cNvPr id="1" name=""/>
+        <p:cNvGrpSpPr/>
+        <p:nvPr/>
+      </p:nvGrpSpPr>
+      <p:grpSpPr>
+        <a:xfrm>
+          <a:off x="0" y="0"/>
+          <a:ext cx="0" cy="0"/>
+          <a:chOff x="0" y="0"/>
+          <a:chExt cx="0" cy="0"/>
+        </a:xfrm>
+      </p:grpSpPr>
+      <p:sp>
+        <p:nvSpPr>
+          <p:cNvPr id="2" name="Titel 1">
+            <a:extLst>
+              <a:ext uri="{FF2B5EF4-FFF2-40B4-BE49-F238E27FC236}">
+                <a16:creationId xmlns:a16="http://schemas.microsoft.com/office/drawing/2014/main" id="{7B756E6D-D8FC-FA7F-8EFC-F623F1FAA574}"/>
+              </a:ext>
+            </a:extLst>
+          </p:cNvPr>
+          <p:cNvSpPr>
+            <a:spLocks noGrp="1"/>
+          </p:cNvSpPr>
+          <p:nvPr>
+            <p:ph type="title"/>
+          </p:nvPr>
+        </p:nvSpPr>
+        <p:spPr/>
+        <p:txBody>
+          <a:bodyPr/>
+          <a:lstStyle/>
+          <a:p>
+            <a:r>
+              <a:rPr lang="de-DE" dirty="0" err="1"/>
+              <a:t>Choosing</a:t>
+            </a:r>
+            <a:r>
+              <a:rPr lang="de-DE" dirty="0"/>
+              <a:t> </a:t>
+            </a:r>
+            <a:r>
+              <a:rPr lang="de-DE" dirty="0" err="1"/>
+              <a:t>the</a:t>
+            </a:r>
+            <a:r>
+              <a:rPr lang="de-DE" dirty="0"/>
+              <a:t> </a:t>
+            </a:r>
+            <a:r>
+              <a:rPr lang="de-DE" dirty="0" err="1"/>
+              <a:t>Number</a:t>
+            </a:r>
+            <a:r>
+              <a:rPr lang="de-DE" dirty="0"/>
+              <a:t> </a:t>
+            </a:r>
+            <a:r>
+              <a:rPr lang="de-DE" dirty="0" err="1"/>
+              <a:t>of</a:t>
+            </a:r>
+            <a:r>
+              <a:rPr lang="de-DE" dirty="0"/>
+              <a:t> Clusters</a:t>
+            </a:r>
+          </a:p>
+        </p:txBody>
+      </p:sp>
+      <p:sp>
+        <p:nvSpPr>
+          <p:cNvPr id="4" name="Inhaltsplatzhalter 3">
+            <a:extLst>
+              <a:ext uri="{FF2B5EF4-FFF2-40B4-BE49-F238E27FC236}">
+                <a16:creationId xmlns:a16="http://schemas.microsoft.com/office/drawing/2014/main" id="{A1562A41-9B7D-DBB9-79D1-7AADFCB4AF6A}"/>
+              </a:ext>
+            </a:extLst>
+          </p:cNvPr>
+          <p:cNvSpPr>
+            <a:spLocks noGrp="1"/>
+          </p:cNvSpPr>
+          <p:nvPr>
+            <p:ph idx="1"/>
+          </p:nvPr>
+        </p:nvSpPr>
+        <p:spPr/>
+        <p:txBody>
+          <a:bodyPr/>
+          <a:lstStyle/>
+          <a:p>
+            <a:pPr marL="0" indent="0">
+              <a:buNone/>
+            </a:pPr>
+            <a:r>
+              <a:rPr lang="de-DE" dirty="0"/>
+              <a:t>Common </a:t>
+            </a:r>
+            <a:r>
+              <a:rPr lang="de-DE" dirty="0" err="1"/>
+              <a:t>methods</a:t>
+            </a:r>
+            <a:r>
+              <a:rPr lang="de-DE" dirty="0"/>
+              <a:t> </a:t>
+            </a:r>
+            <a:r>
+              <a:rPr lang="de-DE" dirty="0" err="1"/>
+              <a:t>include</a:t>
+            </a:r>
+            <a:r>
+              <a:rPr lang="de-DE" dirty="0"/>
+              <a:t>:</a:t>
+            </a:r>
+          </a:p>
+          <a:p>
+            <a:r>
+              <a:rPr lang="de-DE" dirty="0"/>
+              <a:t>Elbow Method</a:t>
+            </a:r>
+          </a:p>
+          <a:p>
+            <a:r>
+              <a:rPr lang="de-DE" dirty="0"/>
+              <a:t>Silhouette Score</a:t>
+            </a:r>
+          </a:p>
+          <a:p>
+            <a:r>
+              <a:rPr lang="de-DE" dirty="0"/>
+              <a:t>Gap </a:t>
+            </a:r>
+            <a:r>
+              <a:rPr lang="de-DE" dirty="0" err="1"/>
+              <a:t>Statistic</a:t>
+            </a:r>
+            <a:endParaRPr lang="de-DE" dirty="0"/>
+          </a:p>
+        </p:txBody>
+      </p:sp>
+      <p:sp>
+        <p:nvSpPr>
+          <p:cNvPr id="3" name="Foliennummernplatzhalter 2">
+            <a:extLst>
+              <a:ext uri="{FF2B5EF4-FFF2-40B4-BE49-F238E27FC236}">
+                <a16:creationId xmlns:a16="http://schemas.microsoft.com/office/drawing/2014/main" id="{85AE942C-3574-952F-F18E-4BD93B73FB61}"/>
+              </a:ext>
+            </a:extLst>
+          </p:cNvPr>
+          <p:cNvSpPr>
+            <a:spLocks noGrp="1"/>
+          </p:cNvSpPr>
+          <p:nvPr>
+            <p:ph type="sldNum" sz="quarter" idx="12"/>
+          </p:nvPr>
+        </p:nvSpPr>
+        <p:spPr/>
+        <p:txBody>
+          <a:bodyPr/>
+          <a:lstStyle/>
+          <a:p>
+            <a:fld id="{08C366F5-AFAD-49CB-854A-9D9E238FCA13}" type="slidenum">
+              <a:rPr lang="en-GB" smtClean="0"/>
+              <a:t>16</a:t>
+            </a:fld>
+            <a:endParaRPr lang="en-GB"/>
+          </a:p>
+        </p:txBody>
+      </p:sp>
+    </p:spTree>
+    <p:extLst>
+      <p:ext uri="{BB962C8B-B14F-4D97-AF65-F5344CB8AC3E}">
+        <p14:creationId xmlns:p14="http://schemas.microsoft.com/office/powerpoint/2010/main" val="3872348448"/>
+      </p:ext>
+    </p:extLst>
+  </p:cSld>
+  <p:clrMapOvr>
+    <a:masterClrMapping/>
+  </p:clrMapOvr>
+</p:sld>
+</file>
+
+<file path=ppt/slides/slide17.xml><?xml version="1.0" encoding="utf-8"?>
+<p:sld xmlns:a="http://schemas.openxmlformats.org/drawingml/2006/main" xmlns:r="http://schemas.openxmlformats.org/officeDocument/2006/relationships" xmlns:p="http://schemas.openxmlformats.org/presentationml/2006/main">
+  <p:cSld>
+    <p:spTree>
+      <p:nvGrpSpPr>
+        <p:cNvPr id="1" name=""/>
+        <p:cNvGrpSpPr/>
+        <p:nvPr/>
+      </p:nvGrpSpPr>
+      <p:grpSpPr>
+        <a:xfrm>
+          <a:off x="0" y="0"/>
+          <a:ext cx="0" cy="0"/>
+          <a:chOff x="0" y="0"/>
+          <a:chExt cx="0" cy="0"/>
+        </a:xfrm>
+      </p:grpSpPr>
+      <p:sp>
+        <p:nvSpPr>
+          <p:cNvPr id="2" name="Titel 1">
+            <a:extLst>
+              <a:ext uri="{FF2B5EF4-FFF2-40B4-BE49-F238E27FC236}">
+                <a16:creationId xmlns:a16="http://schemas.microsoft.com/office/drawing/2014/main" id="{0BB459EB-FAE8-31DC-E38F-3046EC588CF6}"/>
+              </a:ext>
+            </a:extLst>
+          </p:cNvPr>
+          <p:cNvSpPr>
+            <a:spLocks noGrp="1"/>
+          </p:cNvSpPr>
+          <p:nvPr>
+            <p:ph type="title"/>
+          </p:nvPr>
+        </p:nvSpPr>
+        <p:spPr/>
+        <p:txBody>
+          <a:bodyPr/>
+          <a:lstStyle/>
+          <a:p>
+            <a:r>
+              <a:rPr lang="de-DE" dirty="0"/>
+              <a:t>… Evaluation </a:t>
+            </a:r>
+            <a:r>
+              <a:rPr lang="de-DE" dirty="0" err="1"/>
+              <a:t>against</a:t>
+            </a:r>
+            <a:r>
+              <a:rPr lang="de-DE" dirty="0"/>
+              <a:t> True Labels …</a:t>
+            </a:r>
+          </a:p>
+        </p:txBody>
+      </p:sp>
+      <p:sp>
+        <p:nvSpPr>
+          <p:cNvPr id="3" name="Inhaltsplatzhalter 2">
+            <a:extLst>
+              <a:ext uri="{FF2B5EF4-FFF2-40B4-BE49-F238E27FC236}">
+                <a16:creationId xmlns:a16="http://schemas.microsoft.com/office/drawing/2014/main" id="{392427C8-4330-BC0E-F7FF-95DB2D9863DA}"/>
+              </a:ext>
+            </a:extLst>
+          </p:cNvPr>
+          <p:cNvSpPr>
+            <a:spLocks noGrp="1"/>
+          </p:cNvSpPr>
+          <p:nvPr>
+            <p:ph idx="1"/>
+          </p:nvPr>
+        </p:nvSpPr>
+        <p:spPr/>
+        <p:txBody>
+          <a:bodyPr/>
+          <a:lstStyle/>
+          <a:p>
+            <a:endParaRPr lang="de-DE"/>
+          </a:p>
+        </p:txBody>
+      </p:sp>
+      <p:sp>
+        <p:nvSpPr>
+          <p:cNvPr id="4" name="Foliennummernplatzhalter 3">
+            <a:extLst>
+              <a:ext uri="{FF2B5EF4-FFF2-40B4-BE49-F238E27FC236}">
+                <a16:creationId xmlns:a16="http://schemas.microsoft.com/office/drawing/2014/main" id="{701A4EA1-06DA-F940-1383-630B8622B38F}"/>
+              </a:ext>
+            </a:extLst>
+          </p:cNvPr>
+          <p:cNvSpPr>
+            <a:spLocks noGrp="1"/>
+          </p:cNvSpPr>
+          <p:nvPr>
+            <p:ph type="sldNum" sz="quarter" idx="12"/>
+          </p:nvPr>
+        </p:nvSpPr>
+        <p:spPr/>
+        <p:txBody>
+          <a:bodyPr/>
+          <a:lstStyle/>
+          <a:p>
+            <a:fld id="{08C366F5-AFAD-49CB-854A-9D9E238FCA13}" type="slidenum">
+              <a:rPr lang="en-GB" smtClean="0"/>
+              <a:t>17</a:t>
+            </a:fld>
+            <a:endParaRPr lang="en-GB"/>
+          </a:p>
+        </p:txBody>
+      </p:sp>
+    </p:spTree>
+    <p:extLst>
+      <p:ext uri="{BB962C8B-B14F-4D97-AF65-F5344CB8AC3E}">
+        <p14:creationId xmlns:p14="http://schemas.microsoft.com/office/powerpoint/2010/main" val="2860005827"/>
+      </p:ext>
+    </p:extLst>
+  </p:cSld>
+  <p:clrMapOvr>
+    <a:masterClrMapping/>
+  </p:clrMapOvr>
+</p:sld>
+</file>
+
+<file path=ppt/slides/slide18.xml><?xml version="1.0" encoding="utf-8"?>
+<p:sld xmlns:a="http://schemas.openxmlformats.org/drawingml/2006/main" xmlns:r="http://schemas.openxmlformats.org/officeDocument/2006/relationships" xmlns:p="http://schemas.openxmlformats.org/presentationml/2006/main">
+  <p:cSld>
+    <p:spTree>
+      <p:nvGrpSpPr>
+        <p:cNvPr id="1" name=""/>
+        <p:cNvGrpSpPr/>
+        <p:nvPr/>
+      </p:nvGrpSpPr>
+      <p:grpSpPr>
+        <a:xfrm>
+          <a:off x="0" y="0"/>
+          <a:ext cx="0" cy="0"/>
+          <a:chOff x="0" y="0"/>
+          <a:chExt cx="0" cy="0"/>
+        </a:xfrm>
+      </p:grpSpPr>
+      <p:sp>
+        <p:nvSpPr>
+          <p:cNvPr id="2" name="Titel 1">
+            <a:extLst>
+              <a:ext uri="{FF2B5EF4-FFF2-40B4-BE49-F238E27FC236}">
+                <a16:creationId xmlns:a16="http://schemas.microsoft.com/office/drawing/2014/main" id="{AE45E519-E948-8501-ACAD-BDF00444DFDC}"/>
+              </a:ext>
+            </a:extLst>
+          </p:cNvPr>
+          <p:cNvSpPr>
+            <a:spLocks noGrp="1"/>
+          </p:cNvSpPr>
+          <p:nvPr>
+            <p:ph type="title"/>
+          </p:nvPr>
+        </p:nvSpPr>
+        <p:spPr/>
+        <p:txBody>
+          <a:bodyPr/>
+          <a:lstStyle/>
+          <a:p>
+            <a:r>
+              <a:rPr lang="de-DE" dirty="0"/>
+              <a:t>Mini Batch </a:t>
+            </a:r>
+            <a:r>
+              <a:rPr lang="de-DE" dirty="0" err="1"/>
+              <a:t>k-Means</a:t>
+            </a:r>
+            <a:endParaRPr lang="de-DE" dirty="0"/>
+          </a:p>
+        </p:txBody>
+      </p:sp>
+      <p:sp>
+        <p:nvSpPr>
+          <p:cNvPr id="4" name="Inhaltsplatzhalter 3">
+            <a:extLst>
+              <a:ext uri="{FF2B5EF4-FFF2-40B4-BE49-F238E27FC236}">
+                <a16:creationId xmlns:a16="http://schemas.microsoft.com/office/drawing/2014/main" id="{DAA8C059-BF98-DA76-D11E-B2885769186E}"/>
+              </a:ext>
+            </a:extLst>
+          </p:cNvPr>
+          <p:cNvSpPr>
+            <a:spLocks noGrp="1"/>
+          </p:cNvSpPr>
+          <p:nvPr>
+            <p:ph idx="1"/>
+          </p:nvPr>
+        </p:nvSpPr>
+        <p:spPr/>
+        <p:txBody>
+          <a:bodyPr/>
+          <a:lstStyle/>
+          <a:p>
+            <a:endParaRPr lang="de-DE"/>
+          </a:p>
+        </p:txBody>
+      </p:sp>
+      <p:sp>
+        <p:nvSpPr>
+          <p:cNvPr id="3" name="Foliennummernplatzhalter 2">
+            <a:extLst>
+              <a:ext uri="{FF2B5EF4-FFF2-40B4-BE49-F238E27FC236}">
+                <a16:creationId xmlns:a16="http://schemas.microsoft.com/office/drawing/2014/main" id="{2B02C868-452A-3E9E-3E72-BA889BC8609C}"/>
+              </a:ext>
+            </a:extLst>
+          </p:cNvPr>
+          <p:cNvSpPr>
+            <a:spLocks noGrp="1"/>
+          </p:cNvSpPr>
+          <p:nvPr>
+            <p:ph type="sldNum" sz="quarter" idx="12"/>
+          </p:nvPr>
+        </p:nvSpPr>
+        <p:spPr/>
+        <p:txBody>
+          <a:bodyPr/>
+          <a:lstStyle/>
+          <a:p>
+            <a:fld id="{08C366F5-AFAD-49CB-854A-9D9E238FCA13}" type="slidenum">
+              <a:rPr lang="en-GB" smtClean="0"/>
+              <a:t>18</a:t>
             </a:fld>
             <a:endParaRPr lang="en-GB"/>
           </a:p>
@@ -4554,590 +7186,6 @@
 </p:sld>
 </file>
 
-<file path=ppt/slides/slide14.xml><?xml version="1.0" encoding="utf-8"?>
-<p:sld xmlns:a="http://schemas.openxmlformats.org/drawingml/2006/main" xmlns:r="http://schemas.openxmlformats.org/officeDocument/2006/relationships" xmlns:p="http://schemas.openxmlformats.org/presentationml/2006/main">
-  <p:cSld>
-    <p:spTree>
-      <p:nvGrpSpPr>
-        <p:cNvPr id="1" name=""/>
-        <p:cNvGrpSpPr/>
-        <p:nvPr/>
-      </p:nvGrpSpPr>
-      <p:grpSpPr>
-        <a:xfrm>
-          <a:off x="0" y="0"/>
-          <a:ext cx="0" cy="0"/>
-          <a:chOff x="0" y="0"/>
-          <a:chExt cx="0" cy="0"/>
-        </a:xfrm>
-      </p:grpSpPr>
-      <p:sp>
-        <p:nvSpPr>
-          <p:cNvPr id="2" name="Titel 1">
-            <a:extLst>
-              <a:ext uri="{FF2B5EF4-FFF2-40B4-BE49-F238E27FC236}">
-                <a16:creationId xmlns:a16="http://schemas.microsoft.com/office/drawing/2014/main" id="{DFE85EF2-749A-FE44-0A02-FD2D92497601}"/>
-              </a:ext>
-            </a:extLst>
-          </p:cNvPr>
-          <p:cNvSpPr>
-            <a:spLocks noGrp="1"/>
-          </p:cNvSpPr>
-          <p:nvPr>
-            <p:ph type="title"/>
-          </p:nvPr>
-        </p:nvSpPr>
-        <p:spPr/>
-        <p:txBody>
-          <a:bodyPr/>
-          <a:lstStyle/>
-          <a:p>
-            <a:r>
-              <a:rPr lang="de-DE" dirty="0" err="1"/>
-              <a:t>Gaussian</a:t>
-            </a:r>
-            <a:r>
-              <a:rPr lang="de-DE" dirty="0"/>
-              <a:t> </a:t>
-            </a:r>
-            <a:r>
-              <a:rPr lang="de-DE" dirty="0" err="1"/>
-              <a:t>Mixture</a:t>
-            </a:r>
-            <a:r>
-              <a:rPr lang="de-DE" dirty="0"/>
-              <a:t> Models</a:t>
-            </a:r>
-          </a:p>
-        </p:txBody>
-      </p:sp>
-      <p:sp>
-        <p:nvSpPr>
-          <p:cNvPr id="4" name="Inhaltsplatzhalter 3">
-            <a:extLst>
-              <a:ext uri="{FF2B5EF4-FFF2-40B4-BE49-F238E27FC236}">
-                <a16:creationId xmlns:a16="http://schemas.microsoft.com/office/drawing/2014/main" id="{0A2F8357-AF4F-871F-2CBC-4B5FD73DABB1}"/>
-              </a:ext>
-            </a:extLst>
-          </p:cNvPr>
-          <p:cNvSpPr>
-            <a:spLocks noGrp="1"/>
-          </p:cNvSpPr>
-          <p:nvPr>
-            <p:ph idx="1"/>
-          </p:nvPr>
-        </p:nvSpPr>
-        <p:spPr/>
-        <p:txBody>
-          <a:bodyPr/>
-          <a:lstStyle/>
-          <a:p>
-            <a:pPr marL="0" indent="0">
-              <a:buNone/>
-            </a:pPr>
-            <a:r>
-              <a:rPr lang="de-DE" dirty="0" err="1"/>
-              <a:t>k-Means</a:t>
-            </a:r>
-            <a:r>
-              <a:rPr lang="de-DE" dirty="0"/>
-              <a:t>: </a:t>
-            </a:r>
-            <a:r>
-              <a:rPr lang="de-DE" dirty="0" err="1"/>
-              <a:t>special</a:t>
-            </a:r>
-            <a:r>
-              <a:rPr lang="de-DE" dirty="0"/>
-              <a:t> </a:t>
-            </a:r>
-            <a:r>
-              <a:rPr lang="de-DE" dirty="0" err="1"/>
-              <a:t>case</a:t>
-            </a:r>
-            <a:r>
-              <a:rPr lang="de-DE" dirty="0"/>
-              <a:t> </a:t>
-            </a:r>
-            <a:r>
-              <a:rPr lang="de-DE" dirty="0" err="1"/>
-              <a:t>of</a:t>
-            </a:r>
-            <a:r>
-              <a:rPr lang="de-DE" dirty="0"/>
-              <a:t> </a:t>
-            </a:r>
-            <a:r>
-              <a:rPr lang="de-DE" dirty="0" err="1"/>
-              <a:t>Gaussian</a:t>
-            </a:r>
-            <a:r>
-              <a:rPr lang="de-DE" dirty="0"/>
-              <a:t> </a:t>
-            </a:r>
-            <a:r>
-              <a:rPr lang="de-DE" dirty="0" err="1"/>
-              <a:t>mixture</a:t>
-            </a:r>
-            <a:r>
-              <a:rPr lang="de-DE" dirty="0"/>
-              <a:t> </a:t>
-            </a:r>
-            <a:r>
-              <a:rPr lang="de-DE" dirty="0" err="1"/>
-              <a:t>model</a:t>
-            </a:r>
-            <a:r>
-              <a:rPr lang="de-DE" dirty="0"/>
-              <a:t> </a:t>
-            </a:r>
-            <a:r>
-              <a:rPr lang="de-DE" dirty="0" err="1"/>
-              <a:t>with</a:t>
-            </a:r>
-            <a:r>
-              <a:rPr lang="de-DE" dirty="0"/>
-              <a:t> </a:t>
-            </a:r>
-            <a:r>
-              <a:rPr lang="de-DE" dirty="0" err="1"/>
-              <a:t>equal</a:t>
-            </a:r>
-            <a:r>
-              <a:rPr lang="de-DE" dirty="0"/>
-              <a:t> </a:t>
-            </a:r>
-            <a:r>
-              <a:rPr lang="de-DE" dirty="0" err="1"/>
-              <a:t>covariance</a:t>
-            </a:r>
-            <a:r>
-              <a:rPr lang="de-DE" dirty="0"/>
-              <a:t> per </a:t>
-            </a:r>
-            <a:r>
-              <a:rPr lang="de-DE" dirty="0" err="1"/>
-              <a:t>component</a:t>
-            </a:r>
-            <a:endParaRPr lang="de-DE" dirty="0"/>
-          </a:p>
-        </p:txBody>
-      </p:sp>
-      <p:sp>
-        <p:nvSpPr>
-          <p:cNvPr id="3" name="Foliennummernplatzhalter 2">
-            <a:extLst>
-              <a:ext uri="{FF2B5EF4-FFF2-40B4-BE49-F238E27FC236}">
-                <a16:creationId xmlns:a16="http://schemas.microsoft.com/office/drawing/2014/main" id="{0B40836D-FBB2-F6AE-DB5B-B3E743214157}"/>
-              </a:ext>
-            </a:extLst>
-          </p:cNvPr>
-          <p:cNvSpPr>
-            <a:spLocks noGrp="1"/>
-          </p:cNvSpPr>
-          <p:nvPr>
-            <p:ph type="sldNum" sz="quarter" idx="12"/>
-          </p:nvPr>
-        </p:nvSpPr>
-        <p:spPr/>
-        <p:txBody>
-          <a:bodyPr/>
-          <a:lstStyle/>
-          <a:p>
-            <a:fld id="{08C366F5-AFAD-49CB-854A-9D9E238FCA13}" type="slidenum">
-              <a:rPr lang="en-GB" smtClean="0"/>
-              <a:t>14</a:t>
-            </a:fld>
-            <a:endParaRPr lang="en-GB"/>
-          </a:p>
-        </p:txBody>
-      </p:sp>
-    </p:spTree>
-    <p:extLst>
-      <p:ext uri="{BB962C8B-B14F-4D97-AF65-F5344CB8AC3E}">
-        <p14:creationId xmlns:p14="http://schemas.microsoft.com/office/powerpoint/2010/main" val="3563920324"/>
-      </p:ext>
-    </p:extLst>
-  </p:cSld>
-  <p:clrMapOvr>
-    <a:masterClrMapping/>
-  </p:clrMapOvr>
-</p:sld>
-</file>
-
-<file path=ppt/slides/slide15.xml><?xml version="1.0" encoding="utf-8"?>
-<p:sld xmlns:a="http://schemas.openxmlformats.org/drawingml/2006/main" xmlns:r="http://schemas.openxmlformats.org/officeDocument/2006/relationships" xmlns:p="http://schemas.openxmlformats.org/presentationml/2006/main">
-  <p:cSld>
-    <p:spTree>
-      <p:nvGrpSpPr>
-        <p:cNvPr id="1" name=""/>
-        <p:cNvGrpSpPr/>
-        <p:nvPr/>
-      </p:nvGrpSpPr>
-      <p:grpSpPr>
-        <a:xfrm>
-          <a:off x="0" y="0"/>
-          <a:ext cx="0" cy="0"/>
-          <a:chOff x="0" y="0"/>
-          <a:chExt cx="0" cy="0"/>
-        </a:xfrm>
-      </p:grpSpPr>
-      <p:sp>
-        <p:nvSpPr>
-          <p:cNvPr id="2" name="Titel 1">
-            <a:extLst>
-              <a:ext uri="{FF2B5EF4-FFF2-40B4-BE49-F238E27FC236}">
-                <a16:creationId xmlns:a16="http://schemas.microsoft.com/office/drawing/2014/main" id="{712D266D-155F-F226-2B1D-358BA749E8CC}"/>
-              </a:ext>
-            </a:extLst>
-          </p:cNvPr>
-          <p:cNvSpPr>
-            <a:spLocks noGrp="1"/>
-          </p:cNvSpPr>
-          <p:nvPr>
-            <p:ph type="title"/>
-          </p:nvPr>
-        </p:nvSpPr>
-        <p:spPr/>
-        <p:txBody>
-          <a:bodyPr/>
-          <a:lstStyle/>
-          <a:p>
-            <a:r>
-              <a:rPr lang="de-DE" dirty="0" err="1"/>
-              <a:t>Hierarchical</a:t>
-            </a:r>
-            <a:r>
-              <a:rPr lang="de-DE" dirty="0"/>
-              <a:t> Clustering: Motivation</a:t>
-            </a:r>
-          </a:p>
-        </p:txBody>
-      </p:sp>
-      <p:sp>
-        <p:nvSpPr>
-          <p:cNvPr id="3" name="Foliennummernplatzhalter 2">
-            <a:extLst>
-              <a:ext uri="{FF2B5EF4-FFF2-40B4-BE49-F238E27FC236}">
-                <a16:creationId xmlns:a16="http://schemas.microsoft.com/office/drawing/2014/main" id="{0837E5E9-930A-77A7-EDB3-BE3C126787F0}"/>
-              </a:ext>
-            </a:extLst>
-          </p:cNvPr>
-          <p:cNvSpPr>
-            <a:spLocks noGrp="1"/>
-          </p:cNvSpPr>
-          <p:nvPr>
-            <p:ph type="sldNum" sz="quarter" idx="12"/>
-          </p:nvPr>
-        </p:nvSpPr>
-        <p:spPr/>
-        <p:txBody>
-          <a:bodyPr/>
-          <a:lstStyle/>
-          <a:p>
-            <a:fld id="{08C366F5-AFAD-49CB-854A-9D9E238FCA13}" type="slidenum">
-              <a:rPr lang="en-GB" smtClean="0"/>
-              <a:t>15</a:t>
-            </a:fld>
-            <a:endParaRPr lang="en-GB"/>
-          </a:p>
-        </p:txBody>
-      </p:sp>
-    </p:spTree>
-    <p:extLst>
-      <p:ext uri="{BB962C8B-B14F-4D97-AF65-F5344CB8AC3E}">
-        <p14:creationId xmlns:p14="http://schemas.microsoft.com/office/powerpoint/2010/main" val="3112906239"/>
-      </p:ext>
-    </p:extLst>
-  </p:cSld>
-  <p:clrMapOvr>
-    <a:masterClrMapping/>
-  </p:clrMapOvr>
-</p:sld>
-</file>
-
-<file path=ppt/slides/slide16.xml><?xml version="1.0" encoding="utf-8"?>
-<p:sld xmlns:a="http://schemas.openxmlformats.org/drawingml/2006/main" xmlns:r="http://schemas.openxmlformats.org/officeDocument/2006/relationships" xmlns:p="http://schemas.openxmlformats.org/presentationml/2006/main">
-  <p:cSld>
-    <p:spTree>
-      <p:nvGrpSpPr>
-        <p:cNvPr id="1" name=""/>
-        <p:cNvGrpSpPr/>
-        <p:nvPr/>
-      </p:nvGrpSpPr>
-      <p:grpSpPr>
-        <a:xfrm>
-          <a:off x="0" y="0"/>
-          <a:ext cx="0" cy="0"/>
-          <a:chOff x="0" y="0"/>
-          <a:chExt cx="0" cy="0"/>
-        </a:xfrm>
-      </p:grpSpPr>
-      <p:sp>
-        <p:nvSpPr>
-          <p:cNvPr id="2" name="Titel 1">
-            <a:extLst>
-              <a:ext uri="{FF2B5EF4-FFF2-40B4-BE49-F238E27FC236}">
-                <a16:creationId xmlns:a16="http://schemas.microsoft.com/office/drawing/2014/main" id="{4DB71406-467A-A03D-EBA2-95505D3C5AF2}"/>
-              </a:ext>
-            </a:extLst>
-          </p:cNvPr>
-          <p:cNvSpPr>
-            <a:spLocks noGrp="1"/>
-          </p:cNvSpPr>
-          <p:nvPr>
-            <p:ph type="title"/>
-          </p:nvPr>
-        </p:nvSpPr>
-        <p:spPr/>
-        <p:txBody>
-          <a:bodyPr/>
-          <a:lstStyle/>
-          <a:p>
-            <a:r>
-              <a:rPr lang="de-DE" dirty="0" err="1"/>
-              <a:t>Linkage</a:t>
-            </a:r>
-            <a:r>
-              <a:rPr lang="de-DE" dirty="0"/>
-              <a:t> </a:t>
-            </a:r>
-            <a:r>
-              <a:rPr lang="de-DE" dirty="0" err="1"/>
-              <a:t>Criteria</a:t>
-            </a:r>
-            <a:endParaRPr lang="de-DE" dirty="0"/>
-          </a:p>
-        </p:txBody>
-      </p:sp>
-      <p:sp>
-        <p:nvSpPr>
-          <p:cNvPr id="3" name="Foliennummernplatzhalter 2">
-            <a:extLst>
-              <a:ext uri="{FF2B5EF4-FFF2-40B4-BE49-F238E27FC236}">
-                <a16:creationId xmlns:a16="http://schemas.microsoft.com/office/drawing/2014/main" id="{0F696987-D96D-454C-5E9D-CD69887E2F65}"/>
-              </a:ext>
-            </a:extLst>
-          </p:cNvPr>
-          <p:cNvSpPr>
-            <a:spLocks noGrp="1"/>
-          </p:cNvSpPr>
-          <p:nvPr>
-            <p:ph type="sldNum" sz="quarter" idx="12"/>
-          </p:nvPr>
-        </p:nvSpPr>
-        <p:spPr/>
-        <p:txBody>
-          <a:bodyPr/>
-          <a:lstStyle/>
-          <a:p>
-            <a:fld id="{08C366F5-AFAD-49CB-854A-9D9E238FCA13}" type="slidenum">
-              <a:rPr lang="en-GB" smtClean="0"/>
-              <a:t>16</a:t>
-            </a:fld>
-            <a:endParaRPr lang="en-GB"/>
-          </a:p>
-        </p:txBody>
-      </p:sp>
-    </p:spTree>
-    <p:extLst>
-      <p:ext uri="{BB962C8B-B14F-4D97-AF65-F5344CB8AC3E}">
-        <p14:creationId xmlns:p14="http://schemas.microsoft.com/office/powerpoint/2010/main" val="2365265487"/>
-      </p:ext>
-    </p:extLst>
-  </p:cSld>
-  <p:clrMapOvr>
-    <a:masterClrMapping/>
-  </p:clrMapOvr>
-</p:sld>
-</file>
-
-<file path=ppt/slides/slide17.xml><?xml version="1.0" encoding="utf-8"?>
-<p:sld xmlns:a="http://schemas.openxmlformats.org/drawingml/2006/main" xmlns:r="http://schemas.openxmlformats.org/officeDocument/2006/relationships" xmlns:p="http://schemas.openxmlformats.org/presentationml/2006/main">
-  <p:cSld>
-    <p:spTree>
-      <p:nvGrpSpPr>
-        <p:cNvPr id="1" name=""/>
-        <p:cNvGrpSpPr/>
-        <p:nvPr/>
-      </p:nvGrpSpPr>
-      <p:grpSpPr>
-        <a:xfrm>
-          <a:off x="0" y="0"/>
-          <a:ext cx="0" cy="0"/>
-          <a:chOff x="0" y="0"/>
-          <a:chExt cx="0" cy="0"/>
-        </a:xfrm>
-      </p:grpSpPr>
-      <p:sp>
-        <p:nvSpPr>
-          <p:cNvPr id="2" name="Titel 1">
-            <a:extLst>
-              <a:ext uri="{FF2B5EF4-FFF2-40B4-BE49-F238E27FC236}">
-                <a16:creationId xmlns:a16="http://schemas.microsoft.com/office/drawing/2014/main" id="{54142ABE-7200-78B0-CCD9-D683F1797E62}"/>
-              </a:ext>
-            </a:extLst>
-          </p:cNvPr>
-          <p:cNvSpPr>
-            <a:spLocks noGrp="1"/>
-          </p:cNvSpPr>
-          <p:nvPr>
-            <p:ph type="title"/>
-          </p:nvPr>
-        </p:nvSpPr>
-        <p:spPr/>
-        <p:txBody>
-          <a:bodyPr/>
-          <a:lstStyle/>
-          <a:p>
-            <a:r>
-              <a:rPr lang="de-DE" dirty="0" err="1"/>
-              <a:t>Dendrograms</a:t>
-            </a:r>
-            <a:r>
-              <a:rPr lang="de-DE" dirty="0"/>
-              <a:t> and Interpretation</a:t>
-            </a:r>
-          </a:p>
-        </p:txBody>
-      </p:sp>
-      <p:sp>
-        <p:nvSpPr>
-          <p:cNvPr id="3" name="Foliennummernplatzhalter 2">
-            <a:extLst>
-              <a:ext uri="{FF2B5EF4-FFF2-40B4-BE49-F238E27FC236}">
-                <a16:creationId xmlns:a16="http://schemas.microsoft.com/office/drawing/2014/main" id="{3CF1EAA3-D7F2-B045-B22D-C9405AEBC70C}"/>
-              </a:ext>
-            </a:extLst>
-          </p:cNvPr>
-          <p:cNvSpPr>
-            <a:spLocks noGrp="1"/>
-          </p:cNvSpPr>
-          <p:nvPr>
-            <p:ph type="sldNum" sz="quarter" idx="12"/>
-          </p:nvPr>
-        </p:nvSpPr>
-        <p:spPr/>
-        <p:txBody>
-          <a:bodyPr/>
-          <a:lstStyle/>
-          <a:p>
-            <a:fld id="{08C366F5-AFAD-49CB-854A-9D9E238FCA13}" type="slidenum">
-              <a:rPr lang="en-GB" smtClean="0"/>
-              <a:t>17</a:t>
-            </a:fld>
-            <a:endParaRPr lang="en-GB"/>
-          </a:p>
-        </p:txBody>
-      </p:sp>
-    </p:spTree>
-    <p:extLst>
-      <p:ext uri="{BB962C8B-B14F-4D97-AF65-F5344CB8AC3E}">
-        <p14:creationId xmlns:p14="http://schemas.microsoft.com/office/powerpoint/2010/main" val="1704252082"/>
-      </p:ext>
-    </p:extLst>
-  </p:cSld>
-  <p:clrMapOvr>
-    <a:masterClrMapping/>
-  </p:clrMapOvr>
-</p:sld>
-</file>
-
-<file path=ppt/slides/slide18.xml><?xml version="1.0" encoding="utf-8"?>
-<p:sld xmlns:a="http://schemas.openxmlformats.org/drawingml/2006/main" xmlns:r="http://schemas.openxmlformats.org/officeDocument/2006/relationships" xmlns:p="http://schemas.openxmlformats.org/presentationml/2006/main">
-  <p:cSld>
-    <p:spTree>
-      <p:nvGrpSpPr>
-        <p:cNvPr id="1" name=""/>
-        <p:cNvGrpSpPr/>
-        <p:nvPr/>
-      </p:nvGrpSpPr>
-      <p:grpSpPr>
-        <a:xfrm>
-          <a:off x="0" y="0"/>
-          <a:ext cx="0" cy="0"/>
-          <a:chOff x="0" y="0"/>
-          <a:chExt cx="0" cy="0"/>
-        </a:xfrm>
-      </p:grpSpPr>
-      <p:sp>
-        <p:nvSpPr>
-          <p:cNvPr id="2" name="Titel 1">
-            <a:extLst>
-              <a:ext uri="{FF2B5EF4-FFF2-40B4-BE49-F238E27FC236}">
-                <a16:creationId xmlns:a16="http://schemas.microsoft.com/office/drawing/2014/main" id="{C1279D54-116A-6D58-B75A-2556899D6B46}"/>
-              </a:ext>
-            </a:extLst>
-          </p:cNvPr>
-          <p:cNvSpPr>
-            <a:spLocks noGrp="1"/>
-          </p:cNvSpPr>
-          <p:nvPr>
-            <p:ph type="title"/>
-          </p:nvPr>
-        </p:nvSpPr>
-        <p:spPr/>
-        <p:txBody>
-          <a:bodyPr/>
-          <a:lstStyle/>
-          <a:p>
-            <a:r>
-              <a:rPr lang="de-DE" dirty="0"/>
-              <a:t>DBSCAN: Density-</a:t>
-            </a:r>
-            <a:r>
-              <a:rPr lang="de-DE" dirty="0" err="1"/>
-              <a:t>Based</a:t>
-            </a:r>
-            <a:r>
-              <a:rPr lang="de-DE" dirty="0"/>
-              <a:t> Clustering</a:t>
-            </a:r>
-          </a:p>
-        </p:txBody>
-      </p:sp>
-      <p:sp>
-        <p:nvSpPr>
-          <p:cNvPr id="3" name="Foliennummernplatzhalter 2">
-            <a:extLst>
-              <a:ext uri="{FF2B5EF4-FFF2-40B4-BE49-F238E27FC236}">
-                <a16:creationId xmlns:a16="http://schemas.microsoft.com/office/drawing/2014/main" id="{C6A32FD8-548B-71F2-BB0C-E2FA7DE0D672}"/>
-              </a:ext>
-            </a:extLst>
-          </p:cNvPr>
-          <p:cNvSpPr>
-            <a:spLocks noGrp="1"/>
-          </p:cNvSpPr>
-          <p:nvPr>
-            <p:ph type="sldNum" sz="quarter" idx="12"/>
-          </p:nvPr>
-        </p:nvSpPr>
-        <p:spPr/>
-        <p:txBody>
-          <a:bodyPr/>
-          <a:lstStyle/>
-          <a:p>
-            <a:fld id="{08C366F5-AFAD-49CB-854A-9D9E238FCA13}" type="slidenum">
-              <a:rPr lang="en-GB" smtClean="0"/>
-              <a:t>18</a:t>
-            </a:fld>
-            <a:endParaRPr lang="en-GB"/>
-          </a:p>
-        </p:txBody>
-      </p:sp>
-    </p:spTree>
-    <p:extLst>
-      <p:ext uri="{BB962C8B-B14F-4D97-AF65-F5344CB8AC3E}">
-        <p14:creationId xmlns:p14="http://schemas.microsoft.com/office/powerpoint/2010/main" val="3058453600"/>
-      </p:ext>
-    </p:extLst>
-  </p:cSld>
-  <p:clrMapOvr>
-    <a:masterClrMapping/>
-  </p:clrMapOvr>
-</p:sld>
-</file>
-
 <file path=ppt/slides/slide19.xml><?xml version="1.0" encoding="utf-8"?>
 <p:sld xmlns:a="http://schemas.openxmlformats.org/drawingml/2006/main" xmlns:r="http://schemas.openxmlformats.org/officeDocument/2006/relationships" xmlns:p="http://schemas.openxmlformats.org/presentationml/2006/main">
   <p:cSld>
@@ -5160,7 +7208,7 @@
           <p:cNvPr id="2" name="Titel 1">
             <a:extLst>
               <a:ext uri="{FF2B5EF4-FFF2-40B4-BE49-F238E27FC236}">
-                <a16:creationId xmlns:a16="http://schemas.microsoft.com/office/drawing/2014/main" id="{9CC7556B-98BB-9EF2-B9BD-688767AA83EE}"/>
+                <a16:creationId xmlns:a16="http://schemas.microsoft.com/office/drawing/2014/main" id="{DFE85EF2-749A-FE44-0A02-FD2D92497601}"/>
               </a:ext>
             </a:extLst>
           </p:cNvPr>
@@ -5177,9 +7225,133 @@
           <a:lstStyle/>
           <a:p>
             <a:r>
-              <a:rPr lang="de-DE" dirty="0"/>
-              <a:t>Core Points, Border Points, Noise</a:t>
-            </a:r>
+              <a:rPr lang="de-DE" dirty="0" err="1"/>
+              <a:t>Gaussian</a:t>
+            </a:r>
+            <a:r>
+              <a:rPr lang="de-DE" dirty="0"/>
+              <a:t> </a:t>
+            </a:r>
+            <a:r>
+              <a:rPr lang="de-DE" dirty="0" err="1"/>
+              <a:t>Mixture</a:t>
+            </a:r>
+            <a:r>
+              <a:rPr lang="de-DE" dirty="0"/>
+              <a:t> Models</a:t>
+            </a:r>
+          </a:p>
+        </p:txBody>
+      </p:sp>
+      <p:sp>
+        <p:nvSpPr>
+          <p:cNvPr id="4" name="Inhaltsplatzhalter 3">
+            <a:extLst>
+              <a:ext uri="{FF2B5EF4-FFF2-40B4-BE49-F238E27FC236}">
+                <a16:creationId xmlns:a16="http://schemas.microsoft.com/office/drawing/2014/main" id="{0A2F8357-AF4F-871F-2CBC-4B5FD73DABB1}"/>
+              </a:ext>
+            </a:extLst>
+          </p:cNvPr>
+          <p:cNvSpPr>
+            <a:spLocks noGrp="1"/>
+          </p:cNvSpPr>
+          <p:nvPr>
+            <p:ph idx="1"/>
+          </p:nvPr>
+        </p:nvSpPr>
+        <p:spPr/>
+        <p:txBody>
+          <a:bodyPr/>
+          <a:lstStyle/>
+          <a:p>
+            <a:pPr marL="0" indent="0">
+              <a:buNone/>
+            </a:pPr>
+            <a:r>
+              <a:rPr lang="de-DE" dirty="0" err="1"/>
+              <a:t>k-Means</a:t>
+            </a:r>
+            <a:r>
+              <a:rPr lang="de-DE" dirty="0"/>
+              <a:t>: </a:t>
+            </a:r>
+            <a:r>
+              <a:rPr lang="de-DE" dirty="0" err="1"/>
+              <a:t>special</a:t>
+            </a:r>
+            <a:r>
+              <a:rPr lang="de-DE" dirty="0"/>
+              <a:t> </a:t>
+            </a:r>
+            <a:r>
+              <a:rPr lang="de-DE" dirty="0" err="1"/>
+              <a:t>case</a:t>
+            </a:r>
+            <a:r>
+              <a:rPr lang="de-DE" dirty="0"/>
+              <a:t> </a:t>
+            </a:r>
+            <a:r>
+              <a:rPr lang="de-DE" dirty="0" err="1"/>
+              <a:t>of</a:t>
+            </a:r>
+            <a:r>
+              <a:rPr lang="de-DE" dirty="0"/>
+              <a:t> </a:t>
+            </a:r>
+            <a:r>
+              <a:rPr lang="de-DE" dirty="0" err="1"/>
+              <a:t>Gaussian</a:t>
+            </a:r>
+            <a:r>
+              <a:rPr lang="de-DE" dirty="0"/>
+              <a:t> </a:t>
+            </a:r>
+            <a:r>
+              <a:rPr lang="de-DE" dirty="0" err="1"/>
+              <a:t>mixture</a:t>
+            </a:r>
+            <a:r>
+              <a:rPr lang="de-DE" dirty="0"/>
+              <a:t> </a:t>
+            </a:r>
+            <a:r>
+              <a:rPr lang="de-DE" dirty="0" err="1"/>
+              <a:t>model</a:t>
+            </a:r>
+            <a:r>
+              <a:rPr lang="de-DE" dirty="0"/>
+              <a:t> </a:t>
+            </a:r>
+            <a:r>
+              <a:rPr lang="de-DE" dirty="0" err="1"/>
+              <a:t>with</a:t>
+            </a:r>
+            <a:r>
+              <a:rPr lang="de-DE" dirty="0"/>
+              <a:t> </a:t>
+            </a:r>
+            <a:r>
+              <a:rPr lang="de-DE" dirty="0" err="1"/>
+              <a:t>equal</a:t>
+            </a:r>
+            <a:r>
+              <a:rPr lang="de-DE" dirty="0"/>
+              <a:t> </a:t>
+            </a:r>
+            <a:r>
+              <a:rPr lang="de-DE" dirty="0" err="1"/>
+              <a:t>covariance</a:t>
+            </a:r>
+            <a:r>
+              <a:rPr lang="de-DE" dirty="0"/>
+              <a:t> per </a:t>
+            </a:r>
+            <a:r>
+              <a:rPr lang="de-DE" dirty="0" err="1"/>
+              <a:t>component</a:t>
+            </a:r>
+            <a:endParaRPr lang="de-DE" dirty="0"/>
           </a:p>
         </p:txBody>
       </p:sp>
@@ -5188,7 +7360,7 @@
           <p:cNvPr id="3" name="Foliennummernplatzhalter 2">
             <a:extLst>
               <a:ext uri="{FF2B5EF4-FFF2-40B4-BE49-F238E27FC236}">
-                <a16:creationId xmlns:a16="http://schemas.microsoft.com/office/drawing/2014/main" id="{157EE93D-CF21-6985-77E6-E17034472C2F}"/>
+                <a16:creationId xmlns:a16="http://schemas.microsoft.com/office/drawing/2014/main" id="{0B40836D-FBB2-F6AE-DB5B-B3E743214157}"/>
               </a:ext>
             </a:extLst>
           </p:cNvPr>
@@ -5215,7 +7387,7 @@
     </p:spTree>
     <p:extLst>
       <p:ext uri="{BB962C8B-B14F-4D97-AF65-F5344CB8AC3E}">
-        <p14:creationId xmlns:p14="http://schemas.microsoft.com/office/powerpoint/2010/main" val="1093548525"/>
+        <p14:creationId xmlns:p14="http://schemas.microsoft.com/office/powerpoint/2010/main" val="3563920324"/>
       </p:ext>
     </p:extLst>
   </p:cSld>
@@ -5556,7 +7728,7 @@
           <p:cNvPr id="2" name="Titel 1">
             <a:extLst>
               <a:ext uri="{FF2B5EF4-FFF2-40B4-BE49-F238E27FC236}">
-                <a16:creationId xmlns:a16="http://schemas.microsoft.com/office/drawing/2014/main" id="{9AD358E7-F39E-EF65-C4C0-6907CB00234F}"/>
+                <a16:creationId xmlns:a16="http://schemas.microsoft.com/office/drawing/2014/main" id="{712D266D-155F-F226-2B1D-358BA749E8CC}"/>
               </a:ext>
             </a:extLst>
           </p:cNvPr>
@@ -5574,25 +7746,12 @@
           <a:p>
             <a:r>
               <a:rPr lang="de-DE" dirty="0" err="1"/>
-              <a:t>Choosing</a:t>
-            </a:r>
-            <a:r>
-              <a:rPr lang="de-DE" dirty="0"/>
-              <a:t> </a:t>
-            </a:r>
-            <a:r>
-              <a:rPr lang="el-GR" dirty="0"/>
-              <a:t>ε </a:t>
-            </a:r>
-            <a:r>
-              <a:rPr lang="de-DE" dirty="0"/>
-              <a:t>and </a:t>
-            </a:r>
-            <a:r>
-              <a:rPr lang="de-DE" dirty="0" err="1"/>
-              <a:t>min_samples</a:t>
-            </a:r>
-            <a:endParaRPr lang="de-DE" dirty="0"/>
+              <a:t>Hierarchical</a:t>
+            </a:r>
+            <a:r>
+              <a:rPr lang="de-DE" dirty="0"/>
+              <a:t> Clustering: Motivation</a:t>
+            </a:r>
           </a:p>
         </p:txBody>
       </p:sp>
@@ -5601,7 +7760,7 @@
           <p:cNvPr id="3" name="Foliennummernplatzhalter 2">
             <a:extLst>
               <a:ext uri="{FF2B5EF4-FFF2-40B4-BE49-F238E27FC236}">
-                <a16:creationId xmlns:a16="http://schemas.microsoft.com/office/drawing/2014/main" id="{7F67A71D-5771-002A-3ED3-D1F7EA87F83F}"/>
+                <a16:creationId xmlns:a16="http://schemas.microsoft.com/office/drawing/2014/main" id="{0837E5E9-930A-77A7-EDB3-BE3C126787F0}"/>
               </a:ext>
             </a:extLst>
           </p:cNvPr>
@@ -5628,7 +7787,7 @@
     </p:spTree>
     <p:extLst>
       <p:ext uri="{BB962C8B-B14F-4D97-AF65-F5344CB8AC3E}">
-        <p14:creationId xmlns:p14="http://schemas.microsoft.com/office/powerpoint/2010/main" val="1011311951"/>
+        <p14:creationId xmlns:p14="http://schemas.microsoft.com/office/powerpoint/2010/main" val="3112906239"/>
       </p:ext>
     </p:extLst>
   </p:cSld>
@@ -5660,7 +7819,7 @@
           <p:cNvPr id="2" name="Titel 1">
             <a:extLst>
               <a:ext uri="{FF2B5EF4-FFF2-40B4-BE49-F238E27FC236}">
-                <a16:creationId xmlns:a16="http://schemas.microsoft.com/office/drawing/2014/main" id="{AB0A312D-A6FF-AB8E-359F-EE1BDB1D4399}"/>
+                <a16:creationId xmlns:a16="http://schemas.microsoft.com/office/drawing/2014/main" id="{4DB71406-467A-A03D-EBA2-95505D3C5AF2}"/>
               </a:ext>
             </a:extLst>
           </p:cNvPr>
@@ -5678,12 +7837,17 @@
           <a:p>
             <a:r>
               <a:rPr lang="de-DE" dirty="0" err="1"/>
-              <a:t>Comparing</a:t>
-            </a:r>
-            <a:r>
-              <a:rPr lang="de-DE" dirty="0"/>
-              <a:t> Clustering Methods</a:t>
-            </a:r>
+              <a:t>Linkage</a:t>
+            </a:r>
+            <a:r>
+              <a:rPr lang="de-DE" dirty="0"/>
+              <a:t> </a:t>
+            </a:r>
+            <a:r>
+              <a:rPr lang="de-DE" dirty="0" err="1"/>
+              <a:t>Criteria</a:t>
+            </a:r>
+            <a:endParaRPr lang="de-DE" dirty="0"/>
           </a:p>
         </p:txBody>
       </p:sp>
@@ -5692,7 +7856,7 @@
           <p:cNvPr id="3" name="Foliennummernplatzhalter 2">
             <a:extLst>
               <a:ext uri="{FF2B5EF4-FFF2-40B4-BE49-F238E27FC236}">
-                <a16:creationId xmlns:a16="http://schemas.microsoft.com/office/drawing/2014/main" id="{6EFA0DEA-9C10-4341-0996-B658FBE37513}"/>
+                <a16:creationId xmlns:a16="http://schemas.microsoft.com/office/drawing/2014/main" id="{0F696987-D96D-454C-5E9D-CD69887E2F65}"/>
               </a:ext>
             </a:extLst>
           </p:cNvPr>
@@ -5719,7 +7883,7 @@
     </p:spTree>
     <p:extLst>
       <p:ext uri="{BB962C8B-B14F-4D97-AF65-F5344CB8AC3E}">
-        <p14:creationId xmlns:p14="http://schemas.microsoft.com/office/powerpoint/2010/main" val="2928299488"/>
+        <p14:creationId xmlns:p14="http://schemas.microsoft.com/office/powerpoint/2010/main" val="2365265487"/>
       </p:ext>
     </p:extLst>
   </p:cSld>
@@ -5751,7 +7915,7 @@
           <p:cNvPr id="2" name="Titel 1">
             <a:extLst>
               <a:ext uri="{FF2B5EF4-FFF2-40B4-BE49-F238E27FC236}">
-                <a16:creationId xmlns:a16="http://schemas.microsoft.com/office/drawing/2014/main" id="{121AA823-E2CE-8C0D-90DB-02DFE9572552}"/>
+                <a16:creationId xmlns:a16="http://schemas.microsoft.com/office/drawing/2014/main" id="{54142ABE-7200-78B0-CCD9-D683F1797E62}"/>
               </a:ext>
             </a:extLst>
           </p:cNvPr>
@@ -5768,214 +7932,13 @@
           <a:lstStyle/>
           <a:p>
             <a:r>
-              <a:rPr lang="de-DE" dirty="0"/>
-              <a:t>Cluster Validation </a:t>
-            </a:r>
-            <a:r>
-              <a:rPr lang="de-DE" dirty="0" err="1"/>
-              <a:t>Metrics</a:t>
-            </a:r>
-            <a:endParaRPr lang="de-DE" dirty="0"/>
-          </a:p>
-        </p:txBody>
-      </p:sp>
-      <p:sp>
-        <p:nvSpPr>
-          <p:cNvPr id="4" name="Inhaltsplatzhalter 3">
-            <a:extLst>
-              <a:ext uri="{FF2B5EF4-FFF2-40B4-BE49-F238E27FC236}">
-                <a16:creationId xmlns:a16="http://schemas.microsoft.com/office/drawing/2014/main" id="{4AAAE878-7307-C927-4B47-5A9C5B86AC4E}"/>
-              </a:ext>
-            </a:extLst>
-          </p:cNvPr>
-          <p:cNvSpPr>
-            <a:spLocks noGrp="1"/>
-          </p:cNvSpPr>
-          <p:nvPr>
-            <p:ph idx="1"/>
-          </p:nvPr>
-        </p:nvSpPr>
-        <p:spPr/>
-        <p:txBody>
-          <a:bodyPr/>
-          <a:lstStyle/>
-          <a:p>
-            <a:pPr marL="0" indent="0">
-              <a:buNone/>
-            </a:pPr>
-            <a:r>
-              <a:rPr lang="de-DE" dirty="0" err="1"/>
-              <a:t>Since</a:t>
-            </a:r>
-            <a:r>
-              <a:rPr lang="de-DE" dirty="0"/>
-              <a:t> </a:t>
-            </a:r>
-            <a:r>
-              <a:rPr lang="de-DE" dirty="0" err="1"/>
-              <a:t>clustering</a:t>
-            </a:r>
-            <a:r>
-              <a:rPr lang="de-DE" dirty="0"/>
-              <a:t> </a:t>
-            </a:r>
-            <a:r>
-              <a:rPr lang="de-DE" dirty="0" err="1"/>
-              <a:t>is</a:t>
-            </a:r>
-            <a:r>
-              <a:rPr lang="de-DE" dirty="0"/>
-              <a:t> </a:t>
-            </a:r>
-            <a:r>
-              <a:rPr lang="de-DE" dirty="0" err="1"/>
-              <a:t>unsupervised</a:t>
-            </a:r>
-            <a:r>
-              <a:rPr lang="de-DE" dirty="0"/>
-              <a:t>: </a:t>
-            </a:r>
-            <a:r>
-              <a:rPr lang="de-DE" dirty="0" err="1"/>
-              <a:t>no</a:t>
-            </a:r>
-            <a:r>
-              <a:rPr lang="de-DE" dirty="0"/>
-              <a:t> </a:t>
-            </a:r>
-            <a:r>
-              <a:rPr lang="de-DE" dirty="0" err="1"/>
-              <a:t>single</a:t>
-            </a:r>
-            <a:r>
-              <a:rPr lang="de-DE" dirty="0"/>
-              <a:t> “</a:t>
-            </a:r>
-            <a:r>
-              <a:rPr lang="de-DE" dirty="0" err="1"/>
-              <a:t>correct</a:t>
-            </a:r>
-            <a:r>
-              <a:rPr lang="de-DE" dirty="0"/>
-              <a:t>” </a:t>
-            </a:r>
-            <a:r>
-              <a:rPr lang="de-DE" dirty="0" err="1"/>
-              <a:t>answer</a:t>
-            </a:r>
-            <a:endParaRPr lang="de-DE" dirty="0"/>
-          </a:p>
-          <a:p>
-            <a:pPr marL="0" indent="0">
-              <a:buNone/>
-            </a:pPr>
-            <a:endParaRPr lang="de-DE" dirty="0"/>
-          </a:p>
-          <a:p>
-            <a:pPr marL="0" indent="0">
-              <a:buNone/>
-            </a:pPr>
-            <a:r>
-              <a:rPr lang="de-DE" dirty="0" err="1"/>
-              <a:t>Instead</a:t>
-            </a:r>
-            <a:r>
-              <a:rPr lang="de-DE" dirty="0"/>
-              <a:t> </a:t>
-            </a:r>
-            <a:r>
-              <a:rPr lang="de-DE" dirty="0" err="1"/>
-              <a:t>measure</a:t>
-            </a:r>
-            <a:r>
-              <a:rPr lang="de-DE" dirty="0"/>
-              <a:t> </a:t>
-            </a:r>
-            <a:r>
-              <a:rPr lang="de-DE" dirty="0" err="1"/>
-              <a:t>how</a:t>
-            </a:r>
-            <a:r>
-              <a:rPr lang="de-DE" dirty="0"/>
-              <a:t> well-</a:t>
-            </a:r>
-            <a:r>
-              <a:rPr lang="de-DE" dirty="0" err="1"/>
-              <a:t>separated</a:t>
-            </a:r>
-            <a:r>
-              <a:rPr lang="de-DE" dirty="0"/>
-              <a:t> and </a:t>
-            </a:r>
-            <a:r>
-              <a:rPr lang="de-DE" dirty="0" err="1"/>
-              <a:t>cohesive</a:t>
-            </a:r>
-            <a:r>
-              <a:rPr lang="de-DE" dirty="0"/>
-              <a:t> </a:t>
-            </a:r>
-            <a:r>
-              <a:rPr lang="de-DE" dirty="0" err="1"/>
-              <a:t>clusters</a:t>
-            </a:r>
-            <a:r>
-              <a:rPr lang="de-DE" dirty="0"/>
-              <a:t> </a:t>
-            </a:r>
-            <a:r>
-              <a:rPr lang="de-DE" dirty="0" err="1"/>
-              <a:t>are</a:t>
-            </a:r>
-            <a:endParaRPr lang="de-DE" dirty="0"/>
-          </a:p>
-          <a:p>
-            <a:pPr marL="0" indent="0">
-              <a:buNone/>
-            </a:pPr>
-            <a:endParaRPr lang="de-DE" dirty="0"/>
-          </a:p>
-          <a:p>
-            <a:pPr marL="0" indent="0">
-              <a:buNone/>
-            </a:pPr>
-            <a:r>
-              <a:rPr lang="de-DE" dirty="0"/>
-              <a:t>Evaluation </a:t>
-            </a:r>
-            <a:r>
-              <a:rPr lang="de-DE" dirty="0" err="1"/>
-              <a:t>metrics</a:t>
-            </a:r>
-            <a:r>
-              <a:rPr lang="de-DE" dirty="0"/>
-              <a:t>:</a:t>
-            </a:r>
-          </a:p>
-          <a:p>
-            <a:r>
-              <a:rPr lang="de-DE" dirty="0"/>
-              <a:t>Silhouette score</a:t>
-            </a:r>
-          </a:p>
-          <a:p>
-            <a:r>
-              <a:rPr lang="de-DE" dirty="0"/>
-              <a:t>Davies-</a:t>
-            </a:r>
-            <a:r>
-              <a:rPr lang="de-DE" dirty="0" err="1"/>
-              <a:t>Bouldin</a:t>
-            </a:r>
-            <a:r>
-              <a:rPr lang="de-DE" dirty="0"/>
-              <a:t> </a:t>
-            </a:r>
-            <a:r>
-              <a:rPr lang="de-DE" dirty="0" err="1"/>
-              <a:t>index</a:t>
-            </a:r>
-            <a:endParaRPr lang="de-DE" dirty="0"/>
+              <a:rPr lang="de-DE" dirty="0" err="1"/>
+              <a:t>Dendrograms</a:t>
+            </a:r>
+            <a:r>
+              <a:rPr lang="de-DE" dirty="0"/>
+              <a:t> and Interpretation</a:t>
+            </a:r>
           </a:p>
         </p:txBody>
       </p:sp>
@@ -5984,7 +7947,7 @@
           <p:cNvPr id="3" name="Foliennummernplatzhalter 2">
             <a:extLst>
               <a:ext uri="{FF2B5EF4-FFF2-40B4-BE49-F238E27FC236}">
-                <a16:creationId xmlns:a16="http://schemas.microsoft.com/office/drawing/2014/main" id="{563E3869-C5B7-1A95-0614-2B381BD8C120}"/>
+                <a16:creationId xmlns:a16="http://schemas.microsoft.com/office/drawing/2014/main" id="{3CF1EAA3-D7F2-B045-B22D-C9405AEBC70C}"/>
               </a:ext>
             </a:extLst>
           </p:cNvPr>
@@ -6011,7 +7974,7 @@
     </p:spTree>
     <p:extLst>
       <p:ext uri="{BB962C8B-B14F-4D97-AF65-F5344CB8AC3E}">
-        <p14:creationId xmlns:p14="http://schemas.microsoft.com/office/powerpoint/2010/main" val="474217543"/>
+        <p14:creationId xmlns:p14="http://schemas.microsoft.com/office/powerpoint/2010/main" val="1704252082"/>
       </p:ext>
     </p:extLst>
   </p:cSld>
@@ -6043,7 +8006,7 @@
           <p:cNvPr id="2" name="Titel 1">
             <a:extLst>
               <a:ext uri="{FF2B5EF4-FFF2-40B4-BE49-F238E27FC236}">
-                <a16:creationId xmlns:a16="http://schemas.microsoft.com/office/drawing/2014/main" id="{E1872AF3-6DAA-E6C2-A919-228FF3EB5851}"/>
+                <a16:creationId xmlns:a16="http://schemas.microsoft.com/office/drawing/2014/main" id="{C1279D54-116A-6D58-B75A-2556899D6B46}"/>
               </a:ext>
             </a:extLst>
           </p:cNvPr>
@@ -6060,12 +8023,16 @@
           <a:lstStyle/>
           <a:p>
             <a:r>
-              <a:rPr lang="de-DE" dirty="0" err="1"/>
-              <a:t>Visualizing</a:t>
-            </a:r>
-            <a:r>
-              <a:rPr lang="de-DE" dirty="0"/>
-              <a:t> Clusters</a:t>
+              <a:rPr lang="de-DE" dirty="0"/>
+              <a:t>DBSCAN: Density-</a:t>
+            </a:r>
+            <a:r>
+              <a:rPr lang="de-DE" dirty="0" err="1"/>
+              <a:t>Based</a:t>
+            </a:r>
+            <a:r>
+              <a:rPr lang="de-DE" dirty="0"/>
+              <a:t> Clustering</a:t>
             </a:r>
           </a:p>
         </p:txBody>
@@ -6075,7 +8042,7 @@
           <p:cNvPr id="3" name="Foliennummernplatzhalter 2">
             <a:extLst>
               <a:ext uri="{FF2B5EF4-FFF2-40B4-BE49-F238E27FC236}">
-                <a16:creationId xmlns:a16="http://schemas.microsoft.com/office/drawing/2014/main" id="{81251F56-854B-D4C6-04C7-5A3B3F8DB84E}"/>
+                <a16:creationId xmlns:a16="http://schemas.microsoft.com/office/drawing/2014/main" id="{C6A32FD8-548B-71F2-BB0C-E2FA7DE0D672}"/>
               </a:ext>
             </a:extLst>
           </p:cNvPr>
@@ -6102,7 +8069,7 @@
     </p:spTree>
     <p:extLst>
       <p:ext uri="{BB962C8B-B14F-4D97-AF65-F5344CB8AC3E}">
-        <p14:creationId xmlns:p14="http://schemas.microsoft.com/office/powerpoint/2010/main" val="2070037097"/>
+        <p14:creationId xmlns:p14="http://schemas.microsoft.com/office/powerpoint/2010/main" val="3058453600"/>
       </p:ext>
     </p:extLst>
   </p:cSld>
@@ -6134,7 +8101,7 @@
           <p:cNvPr id="2" name="Titel 1">
             <a:extLst>
               <a:ext uri="{FF2B5EF4-FFF2-40B4-BE49-F238E27FC236}">
-                <a16:creationId xmlns:a16="http://schemas.microsoft.com/office/drawing/2014/main" id="{45D9CD1B-A5B6-7BCE-AB1E-4C80D77AE1D3}"/>
+                <a16:creationId xmlns:a16="http://schemas.microsoft.com/office/drawing/2014/main" id="{9CC7556B-98BB-9EF2-B9BD-688767AA83EE}"/>
               </a:ext>
             </a:extLst>
           </p:cNvPr>
@@ -6151,18 +8118,9 @@
           <a:lstStyle/>
           <a:p>
             <a:r>
-              <a:rPr lang="de-DE" dirty="0" err="1"/>
-              <a:t>Practical</a:t>
-            </a:r>
-            <a:r>
-              <a:rPr lang="de-DE" dirty="0"/>
-              <a:t> </a:t>
-            </a:r>
-            <a:r>
-              <a:rPr lang="de-DE" dirty="0" err="1"/>
-              <a:t>Considerations</a:t>
-            </a:r>
-            <a:endParaRPr lang="de-DE" dirty="0"/>
+              <a:rPr lang="de-DE" dirty="0"/>
+              <a:t>Core Points, Border Points, Noise</a:t>
+            </a:r>
           </a:p>
         </p:txBody>
       </p:sp>
@@ -6171,7 +8129,7 @@
           <p:cNvPr id="3" name="Foliennummernplatzhalter 2">
             <a:extLst>
               <a:ext uri="{FF2B5EF4-FFF2-40B4-BE49-F238E27FC236}">
-                <a16:creationId xmlns:a16="http://schemas.microsoft.com/office/drawing/2014/main" id="{5AE0FEB0-A1C8-1184-0009-46A75979A2F5}"/>
+                <a16:creationId xmlns:a16="http://schemas.microsoft.com/office/drawing/2014/main" id="{157EE93D-CF21-6985-77E6-E17034472C2F}"/>
               </a:ext>
             </a:extLst>
           </p:cNvPr>
@@ -6190,6 +8148,680 @@
             <a:fld id="{08C366F5-AFAD-49CB-854A-9D9E238FCA13}" type="slidenum">
               <a:rPr lang="en-GB" smtClean="0"/>
               <a:t>24</a:t>
+            </a:fld>
+            <a:endParaRPr lang="en-GB"/>
+          </a:p>
+        </p:txBody>
+      </p:sp>
+    </p:spTree>
+    <p:extLst>
+      <p:ext uri="{BB962C8B-B14F-4D97-AF65-F5344CB8AC3E}">
+        <p14:creationId xmlns:p14="http://schemas.microsoft.com/office/powerpoint/2010/main" val="1093548525"/>
+      </p:ext>
+    </p:extLst>
+  </p:cSld>
+  <p:clrMapOvr>
+    <a:masterClrMapping/>
+  </p:clrMapOvr>
+</p:sld>
+</file>
+
+<file path=ppt/slides/slide25.xml><?xml version="1.0" encoding="utf-8"?>
+<p:sld xmlns:a="http://schemas.openxmlformats.org/drawingml/2006/main" xmlns:r="http://schemas.openxmlformats.org/officeDocument/2006/relationships" xmlns:p="http://schemas.openxmlformats.org/presentationml/2006/main">
+  <p:cSld>
+    <p:spTree>
+      <p:nvGrpSpPr>
+        <p:cNvPr id="1" name=""/>
+        <p:cNvGrpSpPr/>
+        <p:nvPr/>
+      </p:nvGrpSpPr>
+      <p:grpSpPr>
+        <a:xfrm>
+          <a:off x="0" y="0"/>
+          <a:ext cx="0" cy="0"/>
+          <a:chOff x="0" y="0"/>
+          <a:chExt cx="0" cy="0"/>
+        </a:xfrm>
+      </p:grpSpPr>
+      <p:sp>
+        <p:nvSpPr>
+          <p:cNvPr id="2" name="Titel 1">
+            <a:extLst>
+              <a:ext uri="{FF2B5EF4-FFF2-40B4-BE49-F238E27FC236}">
+                <a16:creationId xmlns:a16="http://schemas.microsoft.com/office/drawing/2014/main" id="{9AD358E7-F39E-EF65-C4C0-6907CB00234F}"/>
+              </a:ext>
+            </a:extLst>
+          </p:cNvPr>
+          <p:cNvSpPr>
+            <a:spLocks noGrp="1"/>
+          </p:cNvSpPr>
+          <p:nvPr>
+            <p:ph type="title"/>
+          </p:nvPr>
+        </p:nvSpPr>
+        <p:spPr/>
+        <p:txBody>
+          <a:bodyPr/>
+          <a:lstStyle/>
+          <a:p>
+            <a:r>
+              <a:rPr lang="de-DE" dirty="0" err="1"/>
+              <a:t>Choosing</a:t>
+            </a:r>
+            <a:r>
+              <a:rPr lang="de-DE" dirty="0"/>
+              <a:t> </a:t>
+            </a:r>
+            <a:r>
+              <a:rPr lang="el-GR" dirty="0"/>
+              <a:t>ε </a:t>
+            </a:r>
+            <a:r>
+              <a:rPr lang="de-DE" dirty="0"/>
+              <a:t>and </a:t>
+            </a:r>
+            <a:r>
+              <a:rPr lang="de-DE" dirty="0" err="1"/>
+              <a:t>min_samples</a:t>
+            </a:r>
+            <a:endParaRPr lang="de-DE" dirty="0"/>
+          </a:p>
+        </p:txBody>
+      </p:sp>
+      <p:sp>
+        <p:nvSpPr>
+          <p:cNvPr id="3" name="Foliennummernplatzhalter 2">
+            <a:extLst>
+              <a:ext uri="{FF2B5EF4-FFF2-40B4-BE49-F238E27FC236}">
+                <a16:creationId xmlns:a16="http://schemas.microsoft.com/office/drawing/2014/main" id="{7F67A71D-5771-002A-3ED3-D1F7EA87F83F}"/>
+              </a:ext>
+            </a:extLst>
+          </p:cNvPr>
+          <p:cNvSpPr>
+            <a:spLocks noGrp="1"/>
+          </p:cNvSpPr>
+          <p:nvPr>
+            <p:ph type="sldNum" sz="quarter" idx="12"/>
+          </p:nvPr>
+        </p:nvSpPr>
+        <p:spPr/>
+        <p:txBody>
+          <a:bodyPr/>
+          <a:lstStyle/>
+          <a:p>
+            <a:fld id="{08C366F5-AFAD-49CB-854A-9D9E238FCA13}" type="slidenum">
+              <a:rPr lang="en-GB" smtClean="0"/>
+              <a:t>25</a:t>
+            </a:fld>
+            <a:endParaRPr lang="en-GB"/>
+          </a:p>
+        </p:txBody>
+      </p:sp>
+    </p:spTree>
+    <p:extLst>
+      <p:ext uri="{BB962C8B-B14F-4D97-AF65-F5344CB8AC3E}">
+        <p14:creationId xmlns:p14="http://schemas.microsoft.com/office/powerpoint/2010/main" val="1011311951"/>
+      </p:ext>
+    </p:extLst>
+  </p:cSld>
+  <p:clrMapOvr>
+    <a:masterClrMapping/>
+  </p:clrMapOvr>
+</p:sld>
+</file>
+
+<file path=ppt/slides/slide26.xml><?xml version="1.0" encoding="utf-8"?>
+<p:sld xmlns:a="http://schemas.openxmlformats.org/drawingml/2006/main" xmlns:r="http://schemas.openxmlformats.org/officeDocument/2006/relationships" xmlns:p="http://schemas.openxmlformats.org/presentationml/2006/main">
+  <p:cSld>
+    <p:spTree>
+      <p:nvGrpSpPr>
+        <p:cNvPr id="1" name=""/>
+        <p:cNvGrpSpPr/>
+        <p:nvPr/>
+      </p:nvGrpSpPr>
+      <p:grpSpPr>
+        <a:xfrm>
+          <a:off x="0" y="0"/>
+          <a:ext cx="0" cy="0"/>
+          <a:chOff x="0" y="0"/>
+          <a:chExt cx="0" cy="0"/>
+        </a:xfrm>
+      </p:grpSpPr>
+      <p:sp>
+        <p:nvSpPr>
+          <p:cNvPr id="2" name="Titel 1">
+            <a:extLst>
+              <a:ext uri="{FF2B5EF4-FFF2-40B4-BE49-F238E27FC236}">
+                <a16:creationId xmlns:a16="http://schemas.microsoft.com/office/drawing/2014/main" id="{AB0A312D-A6FF-AB8E-359F-EE1BDB1D4399}"/>
+              </a:ext>
+            </a:extLst>
+          </p:cNvPr>
+          <p:cNvSpPr>
+            <a:spLocks noGrp="1"/>
+          </p:cNvSpPr>
+          <p:nvPr>
+            <p:ph type="title"/>
+          </p:nvPr>
+        </p:nvSpPr>
+        <p:spPr/>
+        <p:txBody>
+          <a:bodyPr/>
+          <a:lstStyle/>
+          <a:p>
+            <a:r>
+              <a:rPr lang="de-DE" dirty="0" err="1"/>
+              <a:t>Comparing</a:t>
+            </a:r>
+            <a:r>
+              <a:rPr lang="de-DE" dirty="0"/>
+              <a:t> Clustering Methods</a:t>
+            </a:r>
+          </a:p>
+        </p:txBody>
+      </p:sp>
+      <p:sp>
+        <p:nvSpPr>
+          <p:cNvPr id="3" name="Foliennummernplatzhalter 2">
+            <a:extLst>
+              <a:ext uri="{FF2B5EF4-FFF2-40B4-BE49-F238E27FC236}">
+                <a16:creationId xmlns:a16="http://schemas.microsoft.com/office/drawing/2014/main" id="{6EFA0DEA-9C10-4341-0996-B658FBE37513}"/>
+              </a:ext>
+            </a:extLst>
+          </p:cNvPr>
+          <p:cNvSpPr>
+            <a:spLocks noGrp="1"/>
+          </p:cNvSpPr>
+          <p:nvPr>
+            <p:ph type="sldNum" sz="quarter" idx="12"/>
+          </p:nvPr>
+        </p:nvSpPr>
+        <p:spPr/>
+        <p:txBody>
+          <a:bodyPr/>
+          <a:lstStyle/>
+          <a:p>
+            <a:fld id="{08C366F5-AFAD-49CB-854A-9D9E238FCA13}" type="slidenum">
+              <a:rPr lang="en-GB" smtClean="0"/>
+              <a:t>26</a:t>
+            </a:fld>
+            <a:endParaRPr lang="en-GB"/>
+          </a:p>
+        </p:txBody>
+      </p:sp>
+    </p:spTree>
+    <p:extLst>
+      <p:ext uri="{BB962C8B-B14F-4D97-AF65-F5344CB8AC3E}">
+        <p14:creationId xmlns:p14="http://schemas.microsoft.com/office/powerpoint/2010/main" val="2928299488"/>
+      </p:ext>
+    </p:extLst>
+  </p:cSld>
+  <p:clrMapOvr>
+    <a:masterClrMapping/>
+  </p:clrMapOvr>
+</p:sld>
+</file>
+
+<file path=ppt/slides/slide27.xml><?xml version="1.0" encoding="utf-8"?>
+<p:sld xmlns:a="http://schemas.openxmlformats.org/drawingml/2006/main" xmlns:r="http://schemas.openxmlformats.org/officeDocument/2006/relationships" xmlns:p="http://schemas.openxmlformats.org/presentationml/2006/main">
+  <p:cSld>
+    <p:spTree>
+      <p:nvGrpSpPr>
+        <p:cNvPr id="1" name=""/>
+        <p:cNvGrpSpPr/>
+        <p:nvPr/>
+      </p:nvGrpSpPr>
+      <p:grpSpPr>
+        <a:xfrm>
+          <a:off x="0" y="0"/>
+          <a:ext cx="0" cy="0"/>
+          <a:chOff x="0" y="0"/>
+          <a:chExt cx="0" cy="0"/>
+        </a:xfrm>
+      </p:grpSpPr>
+      <p:sp>
+        <p:nvSpPr>
+          <p:cNvPr id="2" name="Titel 1">
+            <a:extLst>
+              <a:ext uri="{FF2B5EF4-FFF2-40B4-BE49-F238E27FC236}">
+                <a16:creationId xmlns:a16="http://schemas.microsoft.com/office/drawing/2014/main" id="{121AA823-E2CE-8C0D-90DB-02DFE9572552}"/>
+              </a:ext>
+            </a:extLst>
+          </p:cNvPr>
+          <p:cNvSpPr>
+            <a:spLocks noGrp="1"/>
+          </p:cNvSpPr>
+          <p:nvPr>
+            <p:ph type="title"/>
+          </p:nvPr>
+        </p:nvSpPr>
+        <p:spPr/>
+        <p:txBody>
+          <a:bodyPr/>
+          <a:lstStyle/>
+          <a:p>
+            <a:r>
+              <a:rPr lang="de-DE" dirty="0"/>
+              <a:t>Cluster Validation </a:t>
+            </a:r>
+            <a:r>
+              <a:rPr lang="de-DE" dirty="0" err="1"/>
+              <a:t>Metrics</a:t>
+            </a:r>
+            <a:endParaRPr lang="de-DE" dirty="0"/>
+          </a:p>
+        </p:txBody>
+      </p:sp>
+      <p:sp>
+        <p:nvSpPr>
+          <p:cNvPr id="4" name="Inhaltsplatzhalter 3">
+            <a:extLst>
+              <a:ext uri="{FF2B5EF4-FFF2-40B4-BE49-F238E27FC236}">
+                <a16:creationId xmlns:a16="http://schemas.microsoft.com/office/drawing/2014/main" id="{4AAAE878-7307-C927-4B47-5A9C5B86AC4E}"/>
+              </a:ext>
+            </a:extLst>
+          </p:cNvPr>
+          <p:cNvSpPr>
+            <a:spLocks noGrp="1"/>
+          </p:cNvSpPr>
+          <p:nvPr>
+            <p:ph idx="1"/>
+          </p:nvPr>
+        </p:nvSpPr>
+        <p:spPr/>
+        <p:txBody>
+          <a:bodyPr/>
+          <a:lstStyle/>
+          <a:p>
+            <a:pPr marL="0" indent="0">
+              <a:buNone/>
+            </a:pPr>
+            <a:r>
+              <a:rPr lang="de-DE" dirty="0" err="1"/>
+              <a:t>Since</a:t>
+            </a:r>
+            <a:r>
+              <a:rPr lang="de-DE" dirty="0"/>
+              <a:t> </a:t>
+            </a:r>
+            <a:r>
+              <a:rPr lang="de-DE" dirty="0" err="1"/>
+              <a:t>clustering</a:t>
+            </a:r>
+            <a:r>
+              <a:rPr lang="de-DE" dirty="0"/>
+              <a:t> </a:t>
+            </a:r>
+            <a:r>
+              <a:rPr lang="de-DE" dirty="0" err="1"/>
+              <a:t>is</a:t>
+            </a:r>
+            <a:r>
+              <a:rPr lang="de-DE" dirty="0"/>
+              <a:t> </a:t>
+            </a:r>
+            <a:r>
+              <a:rPr lang="de-DE" dirty="0" err="1"/>
+              <a:t>unsupervised</a:t>
+            </a:r>
+            <a:r>
+              <a:rPr lang="de-DE" dirty="0"/>
+              <a:t>: </a:t>
+            </a:r>
+            <a:r>
+              <a:rPr lang="de-DE" dirty="0" err="1"/>
+              <a:t>no</a:t>
+            </a:r>
+            <a:r>
+              <a:rPr lang="de-DE" dirty="0"/>
+              <a:t> </a:t>
+            </a:r>
+            <a:r>
+              <a:rPr lang="de-DE" dirty="0" err="1"/>
+              <a:t>single</a:t>
+            </a:r>
+            <a:r>
+              <a:rPr lang="de-DE" dirty="0"/>
+              <a:t> “</a:t>
+            </a:r>
+            <a:r>
+              <a:rPr lang="de-DE" dirty="0" err="1"/>
+              <a:t>correct</a:t>
+            </a:r>
+            <a:r>
+              <a:rPr lang="de-DE" dirty="0"/>
+              <a:t>” </a:t>
+            </a:r>
+            <a:r>
+              <a:rPr lang="de-DE" dirty="0" err="1"/>
+              <a:t>answer</a:t>
+            </a:r>
+            <a:endParaRPr lang="de-DE" dirty="0"/>
+          </a:p>
+          <a:p>
+            <a:pPr marL="0" indent="0">
+              <a:buNone/>
+            </a:pPr>
+            <a:endParaRPr lang="de-DE" dirty="0"/>
+          </a:p>
+          <a:p>
+            <a:pPr marL="0" indent="0">
+              <a:buNone/>
+            </a:pPr>
+            <a:r>
+              <a:rPr lang="de-DE" dirty="0" err="1"/>
+              <a:t>Instead</a:t>
+            </a:r>
+            <a:r>
+              <a:rPr lang="de-DE" dirty="0"/>
+              <a:t> </a:t>
+            </a:r>
+            <a:r>
+              <a:rPr lang="de-DE" dirty="0" err="1"/>
+              <a:t>measure</a:t>
+            </a:r>
+            <a:r>
+              <a:rPr lang="de-DE" dirty="0"/>
+              <a:t> </a:t>
+            </a:r>
+            <a:r>
+              <a:rPr lang="de-DE" dirty="0" err="1"/>
+              <a:t>how</a:t>
+            </a:r>
+            <a:r>
+              <a:rPr lang="de-DE" dirty="0"/>
+              <a:t> well-</a:t>
+            </a:r>
+            <a:r>
+              <a:rPr lang="de-DE" dirty="0" err="1"/>
+              <a:t>separated</a:t>
+            </a:r>
+            <a:r>
+              <a:rPr lang="de-DE" dirty="0"/>
+              <a:t> and </a:t>
+            </a:r>
+            <a:r>
+              <a:rPr lang="de-DE" dirty="0" err="1"/>
+              <a:t>cohesive</a:t>
+            </a:r>
+            <a:r>
+              <a:rPr lang="de-DE" dirty="0"/>
+              <a:t> </a:t>
+            </a:r>
+            <a:r>
+              <a:rPr lang="de-DE" dirty="0" err="1"/>
+              <a:t>clusters</a:t>
+            </a:r>
+            <a:r>
+              <a:rPr lang="de-DE" dirty="0"/>
+              <a:t> </a:t>
+            </a:r>
+            <a:r>
+              <a:rPr lang="de-DE" dirty="0" err="1"/>
+              <a:t>are</a:t>
+            </a:r>
+            <a:endParaRPr lang="de-DE" dirty="0"/>
+          </a:p>
+          <a:p>
+            <a:pPr marL="0" indent="0">
+              <a:buNone/>
+            </a:pPr>
+            <a:endParaRPr lang="de-DE" dirty="0"/>
+          </a:p>
+          <a:p>
+            <a:pPr marL="0" indent="0">
+              <a:buNone/>
+            </a:pPr>
+            <a:r>
+              <a:rPr lang="de-DE" dirty="0"/>
+              <a:t>Evaluation </a:t>
+            </a:r>
+            <a:r>
+              <a:rPr lang="de-DE" dirty="0" err="1"/>
+              <a:t>metrics</a:t>
+            </a:r>
+            <a:r>
+              <a:rPr lang="de-DE" dirty="0"/>
+              <a:t>:</a:t>
+            </a:r>
+          </a:p>
+          <a:p>
+            <a:r>
+              <a:rPr lang="de-DE" dirty="0"/>
+              <a:t>Silhouette score</a:t>
+            </a:r>
+          </a:p>
+          <a:p>
+            <a:r>
+              <a:rPr lang="de-DE" dirty="0"/>
+              <a:t>Davies-</a:t>
+            </a:r>
+            <a:r>
+              <a:rPr lang="de-DE" dirty="0" err="1"/>
+              <a:t>Bouldin</a:t>
+            </a:r>
+            <a:r>
+              <a:rPr lang="de-DE" dirty="0"/>
+              <a:t> </a:t>
+            </a:r>
+            <a:r>
+              <a:rPr lang="de-DE" dirty="0" err="1"/>
+              <a:t>index</a:t>
+            </a:r>
+            <a:endParaRPr lang="de-DE" dirty="0"/>
+          </a:p>
+        </p:txBody>
+      </p:sp>
+      <p:sp>
+        <p:nvSpPr>
+          <p:cNvPr id="3" name="Foliennummernplatzhalter 2">
+            <a:extLst>
+              <a:ext uri="{FF2B5EF4-FFF2-40B4-BE49-F238E27FC236}">
+                <a16:creationId xmlns:a16="http://schemas.microsoft.com/office/drawing/2014/main" id="{563E3869-C5B7-1A95-0614-2B381BD8C120}"/>
+              </a:ext>
+            </a:extLst>
+          </p:cNvPr>
+          <p:cNvSpPr>
+            <a:spLocks noGrp="1"/>
+          </p:cNvSpPr>
+          <p:nvPr>
+            <p:ph type="sldNum" sz="quarter" idx="12"/>
+          </p:nvPr>
+        </p:nvSpPr>
+        <p:spPr/>
+        <p:txBody>
+          <a:bodyPr/>
+          <a:lstStyle/>
+          <a:p>
+            <a:fld id="{08C366F5-AFAD-49CB-854A-9D9E238FCA13}" type="slidenum">
+              <a:rPr lang="en-GB" smtClean="0"/>
+              <a:t>27</a:t>
+            </a:fld>
+            <a:endParaRPr lang="en-GB"/>
+          </a:p>
+        </p:txBody>
+      </p:sp>
+    </p:spTree>
+    <p:extLst>
+      <p:ext uri="{BB962C8B-B14F-4D97-AF65-F5344CB8AC3E}">
+        <p14:creationId xmlns:p14="http://schemas.microsoft.com/office/powerpoint/2010/main" val="474217543"/>
+      </p:ext>
+    </p:extLst>
+  </p:cSld>
+  <p:clrMapOvr>
+    <a:masterClrMapping/>
+  </p:clrMapOvr>
+</p:sld>
+</file>
+
+<file path=ppt/slides/slide28.xml><?xml version="1.0" encoding="utf-8"?>
+<p:sld xmlns:a="http://schemas.openxmlformats.org/drawingml/2006/main" xmlns:r="http://schemas.openxmlformats.org/officeDocument/2006/relationships" xmlns:p="http://schemas.openxmlformats.org/presentationml/2006/main">
+  <p:cSld>
+    <p:spTree>
+      <p:nvGrpSpPr>
+        <p:cNvPr id="1" name=""/>
+        <p:cNvGrpSpPr/>
+        <p:nvPr/>
+      </p:nvGrpSpPr>
+      <p:grpSpPr>
+        <a:xfrm>
+          <a:off x="0" y="0"/>
+          <a:ext cx="0" cy="0"/>
+          <a:chOff x="0" y="0"/>
+          <a:chExt cx="0" cy="0"/>
+        </a:xfrm>
+      </p:grpSpPr>
+      <p:sp>
+        <p:nvSpPr>
+          <p:cNvPr id="2" name="Titel 1">
+            <a:extLst>
+              <a:ext uri="{FF2B5EF4-FFF2-40B4-BE49-F238E27FC236}">
+                <a16:creationId xmlns:a16="http://schemas.microsoft.com/office/drawing/2014/main" id="{E1872AF3-6DAA-E6C2-A919-228FF3EB5851}"/>
+              </a:ext>
+            </a:extLst>
+          </p:cNvPr>
+          <p:cNvSpPr>
+            <a:spLocks noGrp="1"/>
+          </p:cNvSpPr>
+          <p:nvPr>
+            <p:ph type="title"/>
+          </p:nvPr>
+        </p:nvSpPr>
+        <p:spPr/>
+        <p:txBody>
+          <a:bodyPr/>
+          <a:lstStyle/>
+          <a:p>
+            <a:r>
+              <a:rPr lang="de-DE" dirty="0" err="1"/>
+              <a:t>Visualizing</a:t>
+            </a:r>
+            <a:r>
+              <a:rPr lang="de-DE" dirty="0"/>
+              <a:t> Clusters</a:t>
+            </a:r>
+          </a:p>
+        </p:txBody>
+      </p:sp>
+      <p:sp>
+        <p:nvSpPr>
+          <p:cNvPr id="3" name="Foliennummernplatzhalter 2">
+            <a:extLst>
+              <a:ext uri="{FF2B5EF4-FFF2-40B4-BE49-F238E27FC236}">
+                <a16:creationId xmlns:a16="http://schemas.microsoft.com/office/drawing/2014/main" id="{81251F56-854B-D4C6-04C7-5A3B3F8DB84E}"/>
+              </a:ext>
+            </a:extLst>
+          </p:cNvPr>
+          <p:cNvSpPr>
+            <a:spLocks noGrp="1"/>
+          </p:cNvSpPr>
+          <p:nvPr>
+            <p:ph type="sldNum" sz="quarter" idx="12"/>
+          </p:nvPr>
+        </p:nvSpPr>
+        <p:spPr/>
+        <p:txBody>
+          <a:bodyPr/>
+          <a:lstStyle/>
+          <a:p>
+            <a:fld id="{08C366F5-AFAD-49CB-854A-9D9E238FCA13}" type="slidenum">
+              <a:rPr lang="en-GB" smtClean="0"/>
+              <a:t>28</a:t>
+            </a:fld>
+            <a:endParaRPr lang="en-GB"/>
+          </a:p>
+        </p:txBody>
+      </p:sp>
+    </p:spTree>
+    <p:extLst>
+      <p:ext uri="{BB962C8B-B14F-4D97-AF65-F5344CB8AC3E}">
+        <p14:creationId xmlns:p14="http://schemas.microsoft.com/office/powerpoint/2010/main" val="2070037097"/>
+      </p:ext>
+    </p:extLst>
+  </p:cSld>
+  <p:clrMapOvr>
+    <a:masterClrMapping/>
+  </p:clrMapOvr>
+</p:sld>
+</file>
+
+<file path=ppt/slides/slide29.xml><?xml version="1.0" encoding="utf-8"?>
+<p:sld xmlns:a="http://schemas.openxmlformats.org/drawingml/2006/main" xmlns:r="http://schemas.openxmlformats.org/officeDocument/2006/relationships" xmlns:p="http://schemas.openxmlformats.org/presentationml/2006/main">
+  <p:cSld>
+    <p:spTree>
+      <p:nvGrpSpPr>
+        <p:cNvPr id="1" name=""/>
+        <p:cNvGrpSpPr/>
+        <p:nvPr/>
+      </p:nvGrpSpPr>
+      <p:grpSpPr>
+        <a:xfrm>
+          <a:off x="0" y="0"/>
+          <a:ext cx="0" cy="0"/>
+          <a:chOff x="0" y="0"/>
+          <a:chExt cx="0" cy="0"/>
+        </a:xfrm>
+      </p:grpSpPr>
+      <p:sp>
+        <p:nvSpPr>
+          <p:cNvPr id="2" name="Titel 1">
+            <a:extLst>
+              <a:ext uri="{FF2B5EF4-FFF2-40B4-BE49-F238E27FC236}">
+                <a16:creationId xmlns:a16="http://schemas.microsoft.com/office/drawing/2014/main" id="{45D9CD1B-A5B6-7BCE-AB1E-4C80D77AE1D3}"/>
+              </a:ext>
+            </a:extLst>
+          </p:cNvPr>
+          <p:cNvSpPr>
+            <a:spLocks noGrp="1"/>
+          </p:cNvSpPr>
+          <p:nvPr>
+            <p:ph type="title"/>
+          </p:nvPr>
+        </p:nvSpPr>
+        <p:spPr/>
+        <p:txBody>
+          <a:bodyPr/>
+          <a:lstStyle/>
+          <a:p>
+            <a:r>
+              <a:rPr lang="de-DE" dirty="0" err="1"/>
+              <a:t>Practical</a:t>
+            </a:r>
+            <a:r>
+              <a:rPr lang="de-DE" dirty="0"/>
+              <a:t> </a:t>
+            </a:r>
+            <a:r>
+              <a:rPr lang="de-DE" dirty="0" err="1"/>
+              <a:t>Considerations</a:t>
+            </a:r>
+            <a:endParaRPr lang="de-DE" dirty="0"/>
+          </a:p>
+        </p:txBody>
+      </p:sp>
+      <p:sp>
+        <p:nvSpPr>
+          <p:cNvPr id="3" name="Foliennummernplatzhalter 2">
+            <a:extLst>
+              <a:ext uri="{FF2B5EF4-FFF2-40B4-BE49-F238E27FC236}">
+                <a16:creationId xmlns:a16="http://schemas.microsoft.com/office/drawing/2014/main" id="{5AE0FEB0-A1C8-1184-0009-46A75979A2F5}"/>
+              </a:ext>
+            </a:extLst>
+          </p:cNvPr>
+          <p:cNvSpPr>
+            <a:spLocks noGrp="1"/>
+          </p:cNvSpPr>
+          <p:nvPr>
+            <p:ph type="sldNum" sz="quarter" idx="12"/>
+          </p:nvPr>
+        </p:nvSpPr>
+        <p:spPr/>
+        <p:txBody>
+          <a:bodyPr/>
+          <a:lstStyle/>
+          <a:p>
+            <a:fld id="{08C366F5-AFAD-49CB-854A-9D9E238FCA13}" type="slidenum">
+              <a:rPr lang="en-GB" smtClean="0"/>
+              <a:t>29</a:t>
             </a:fld>
             <a:endParaRPr lang="en-GB"/>
           </a:p>
@@ -9181,7 +11813,9 @@
         </p:nvSpPr>
         <p:spPr/>
         <p:txBody>
-          <a:bodyPr/>
+          <a:bodyPr>
+            <a:normAutofit fontScale="92500"/>
+          </a:bodyPr>
           <a:lstStyle/>
           <a:p>
             <a:pPr marL="0" indent="0">
@@ -9189,7 +11823,7 @@
             </a:pPr>
             <a:r>
               <a:rPr lang="de-DE" dirty="0" err="1"/>
-              <a:t>Automatic</a:t>
+              <a:t>automatic</a:t>
             </a:r>
             <a:r>
               <a:rPr lang="de-DE" dirty="0"/>
@@ -9240,6 +11874,227 @@
               <a:t>sets</a:t>
             </a:r>
             <a:endParaRPr lang="de-DE" dirty="0"/>
+          </a:p>
+          <a:p>
+            <a:pPr marL="0" indent="0">
+              <a:buNone/>
+            </a:pPr>
+            <a:r>
+              <a:rPr lang="de-DE" dirty="0"/>
+              <a:t>(</a:t>
+            </a:r>
+            <a:r>
+              <a:rPr lang="de-DE" dirty="0" err="1"/>
+              <a:t>without</a:t>
+            </a:r>
+            <a:r>
+              <a:rPr lang="de-DE" dirty="0"/>
+              <a:t> </a:t>
+            </a:r>
+            <a:r>
+              <a:rPr lang="de-DE" dirty="0" err="1"/>
+              <a:t>predefined</a:t>
+            </a:r>
+            <a:r>
+              <a:rPr lang="de-DE" dirty="0"/>
+              <a:t> </a:t>
+            </a:r>
+            <a:r>
+              <a:rPr lang="de-DE" dirty="0" err="1"/>
+              <a:t>labels</a:t>
+            </a:r>
+            <a:r>
+              <a:rPr lang="de-DE" dirty="0"/>
+              <a:t>)</a:t>
+            </a:r>
+          </a:p>
+          <a:p>
+            <a:pPr marL="0" indent="0">
+              <a:buNone/>
+            </a:pPr>
+            <a:endParaRPr lang="de-DE" dirty="0"/>
+          </a:p>
+          <a:p>
+            <a:pPr marL="0" indent="0">
+              <a:buNone/>
+            </a:pPr>
+            <a:r>
+              <a:rPr lang="de-DE" dirty="0" err="1"/>
+              <a:t>similar</a:t>
+            </a:r>
+            <a:r>
+              <a:rPr lang="de-DE" dirty="0"/>
+              <a:t> </a:t>
+            </a:r>
+            <a:r>
+              <a:rPr lang="de-DE" dirty="0" err="1"/>
+              <a:t>means</a:t>
+            </a:r>
+            <a:r>
+              <a:rPr lang="de-DE" dirty="0"/>
+              <a:t> </a:t>
+            </a:r>
+            <a:r>
+              <a:rPr lang="de-DE" dirty="0" err="1"/>
+              <a:t>similar</a:t>
+            </a:r>
+            <a:r>
+              <a:rPr lang="de-DE" dirty="0"/>
+              <a:t> in </a:t>
+            </a:r>
+            <a:r>
+              <a:rPr lang="de-DE" dirty="0" err="1"/>
+              <a:t>terms</a:t>
+            </a:r>
+            <a:r>
+              <a:rPr lang="de-DE" dirty="0"/>
+              <a:t> </a:t>
+            </a:r>
+            <a:r>
+              <a:rPr lang="de-DE" dirty="0" err="1"/>
+              <a:t>of</a:t>
+            </a:r>
+            <a:r>
+              <a:rPr lang="de-DE" dirty="0"/>
+              <a:t> </a:t>
+            </a:r>
+            <a:r>
+              <a:rPr lang="de-DE" dirty="0" err="1"/>
+              <a:t>the</a:t>
+            </a:r>
+            <a:r>
+              <a:rPr lang="de-DE" dirty="0"/>
+              <a:t> </a:t>
+            </a:r>
+            <a:r>
+              <a:rPr lang="de-DE" dirty="0" err="1"/>
+              <a:t>object's</a:t>
+            </a:r>
+            <a:r>
+              <a:rPr lang="de-DE" dirty="0"/>
+              <a:t> </a:t>
+            </a:r>
+            <a:r>
+              <a:rPr lang="de-DE" dirty="0" err="1"/>
+              <a:t>features</a:t>
+            </a:r>
+            <a:endParaRPr lang="de-DE" dirty="0"/>
+          </a:p>
+          <a:p>
+            <a:pPr marL="0" indent="0">
+              <a:buNone/>
+            </a:pPr>
+            <a:endParaRPr lang="de-DE" dirty="0"/>
+          </a:p>
+          <a:p>
+            <a:r>
+              <a:rPr lang="de-DE" dirty="0" err="1"/>
+              <a:t>customer</a:t>
+            </a:r>
+            <a:r>
+              <a:rPr lang="de-DE" dirty="0"/>
+              <a:t> </a:t>
+            </a:r>
+            <a:r>
+              <a:rPr lang="de-DE" dirty="0" err="1"/>
+              <a:t>segmentation</a:t>
+            </a:r>
+            <a:endParaRPr lang="de-DE" dirty="0"/>
+          </a:p>
+          <a:p>
+            <a:r>
+              <a:rPr lang="de-DE" dirty="0" err="1"/>
+              <a:t>document</a:t>
+            </a:r>
+            <a:r>
+              <a:rPr lang="de-DE" dirty="0"/>
+              <a:t> </a:t>
+            </a:r>
+            <a:r>
+              <a:rPr lang="de-DE" dirty="0" err="1"/>
+              <a:t>clustering</a:t>
+            </a:r>
+            <a:endParaRPr lang="de-DE" dirty="0"/>
+          </a:p>
+          <a:p>
+            <a:r>
+              <a:rPr lang="de-DE" dirty="0" err="1"/>
+              <a:t>image</a:t>
+            </a:r>
+            <a:r>
+              <a:rPr lang="de-DE" dirty="0"/>
+              <a:t> </a:t>
+            </a:r>
+            <a:r>
+              <a:rPr lang="de-DE" dirty="0" err="1"/>
+              <a:t>segmentation</a:t>
+            </a:r>
+            <a:r>
+              <a:rPr lang="de-DE" dirty="0"/>
+              <a:t> (</a:t>
+            </a:r>
+            <a:r>
+              <a:rPr lang="de-DE" dirty="0" err="1"/>
+              <a:t>regions</a:t>
+            </a:r>
+            <a:r>
+              <a:rPr lang="de-DE" dirty="0"/>
+              <a:t> </a:t>
+            </a:r>
+            <a:r>
+              <a:rPr lang="de-DE" dirty="0" err="1"/>
+              <a:t>with</a:t>
+            </a:r>
+            <a:r>
+              <a:rPr lang="de-DE" dirty="0"/>
+              <a:t> </a:t>
+            </a:r>
+            <a:r>
+              <a:rPr lang="de-DE" dirty="0" err="1"/>
+              <a:t>similar</a:t>
+            </a:r>
+            <a:r>
+              <a:rPr lang="de-DE" dirty="0"/>
+              <a:t> </a:t>
+            </a:r>
+            <a:r>
+              <a:rPr lang="de-DE" dirty="0" err="1"/>
+              <a:t>color</a:t>
+            </a:r>
+            <a:r>
+              <a:rPr lang="de-DE" dirty="0"/>
+              <a:t>, </a:t>
+            </a:r>
+            <a:r>
+              <a:rPr lang="de-DE" dirty="0" err="1"/>
+              <a:t>texture</a:t>
+            </a:r>
+            <a:r>
+              <a:rPr lang="de-DE" dirty="0"/>
+              <a:t>, </a:t>
+            </a:r>
+            <a:r>
+              <a:rPr lang="de-DE" dirty="0" err="1"/>
+              <a:t>or</a:t>
+            </a:r>
+            <a:r>
+              <a:rPr lang="de-DE" dirty="0"/>
+              <a:t> </a:t>
+            </a:r>
+            <a:r>
+              <a:rPr lang="de-DE" dirty="0" err="1"/>
+              <a:t>intensity</a:t>
+            </a:r>
+            <a:r>
+              <a:rPr lang="de-DE" dirty="0"/>
+              <a:t>)</a:t>
+            </a:r>
+          </a:p>
+          <a:p>
+            <a:r>
+              <a:rPr lang="de-DE" dirty="0"/>
+              <a:t>…</a:t>
+            </a:r>
           </a:p>
         </p:txBody>
       </p:sp>
@@ -9347,85 +12202,827 @@
           </a:p>
         </p:txBody>
       </p:sp>
-      <p:sp>
-        <p:nvSpPr>
-          <p:cNvPr id="3" name="Inhaltsplatzhalter 2">
-            <a:extLst>
-              <a:ext uri="{FF2B5EF4-FFF2-40B4-BE49-F238E27FC236}">
-                <a16:creationId xmlns:a16="http://schemas.microsoft.com/office/drawing/2014/main" id="{F557B7C9-9D66-A25B-D11C-5254C08E0B87}"/>
-              </a:ext>
-            </a:extLst>
-          </p:cNvPr>
-          <p:cNvSpPr>
-            <a:spLocks noGrp="1"/>
-          </p:cNvSpPr>
-          <p:nvPr>
-            <p:ph idx="1"/>
-          </p:nvPr>
-        </p:nvSpPr>
-        <p:spPr/>
-        <p:txBody>
-          <a:bodyPr/>
-          <a:lstStyle/>
-          <a:p>
-            <a:pPr marL="0" indent="0">
-              <a:buNone/>
-            </a:pPr>
-            <a:r>
-              <a:rPr lang="de-DE" dirty="0"/>
-              <a:t>How </a:t>
-            </a:r>
-            <a:r>
-              <a:rPr lang="de-DE" dirty="0" err="1"/>
-              <a:t>to</a:t>
-            </a:r>
-            <a:r>
-              <a:rPr lang="de-DE" dirty="0"/>
-              <a:t> </a:t>
-            </a:r>
-            <a:r>
-              <a:rPr lang="de-DE" dirty="0" err="1"/>
-              <a:t>measure</a:t>
-            </a:r>
-            <a:r>
-              <a:rPr lang="de-DE" dirty="0"/>
-              <a:t> </a:t>
-            </a:r>
-            <a:r>
-              <a:rPr lang="de-DE" dirty="0" err="1"/>
-              <a:t>if</a:t>
-            </a:r>
-            <a:r>
-              <a:rPr lang="de-DE" dirty="0"/>
-              <a:t> </a:t>
-            </a:r>
-            <a:r>
-              <a:rPr lang="de-DE" dirty="0" err="1"/>
-              <a:t>points</a:t>
-            </a:r>
-            <a:r>
-              <a:rPr lang="de-DE" dirty="0"/>
-              <a:t> </a:t>
-            </a:r>
-            <a:r>
-              <a:rPr lang="de-DE" dirty="0" err="1"/>
-              <a:t>are</a:t>
-            </a:r>
-            <a:r>
-              <a:rPr lang="de-DE" dirty="0"/>
-              <a:t> </a:t>
-            </a:r>
-            <a:r>
-              <a:rPr lang="de-DE" dirty="0" err="1"/>
-              <a:t>close</a:t>
-            </a:r>
-            <a:r>
-              <a:rPr lang="de-DE" dirty="0"/>
-              <a:t>?</a:t>
-            </a:r>
-          </a:p>
-        </p:txBody>
-      </p:sp>
+      <mc:AlternateContent xmlns:mc="http://schemas.openxmlformats.org/markup-compatibility/2006" xmlns:a14="http://schemas.microsoft.com/office/drawing/2010/main">
+        <mc:Choice Requires="a14">
+          <p:sp>
+            <p:nvSpPr>
+              <p:cNvPr id="3" name="Inhaltsplatzhalter 2">
+                <a:extLst>
+                  <a:ext uri="{FF2B5EF4-FFF2-40B4-BE49-F238E27FC236}">
+                    <a16:creationId xmlns:a16="http://schemas.microsoft.com/office/drawing/2014/main" id="{F557B7C9-9D66-A25B-D11C-5254C08E0B87}"/>
+                  </a:ext>
+                </a:extLst>
+              </p:cNvPr>
+              <p:cNvSpPr>
+                <a:spLocks noGrp="1"/>
+              </p:cNvSpPr>
+              <p:nvPr>
+                <p:ph idx="1"/>
+              </p:nvPr>
+            </p:nvSpPr>
+            <p:spPr/>
+            <p:txBody>
+              <a:bodyPr/>
+              <a:lstStyle/>
+              <a:p>
+                <a:pPr marL="0" indent="0">
+                  <a:buNone/>
+                </a:pPr>
+                <a:r>
+                  <a:rPr lang="de-DE" dirty="0"/>
+                  <a:t>How </a:t>
+                </a:r>
+                <a:r>
+                  <a:rPr lang="de-DE" dirty="0" err="1"/>
+                  <a:t>to</a:t>
+                </a:r>
+                <a:r>
+                  <a:rPr lang="de-DE" dirty="0"/>
+                  <a:t> </a:t>
+                </a:r>
+                <a:r>
+                  <a:rPr lang="de-DE" dirty="0" err="1"/>
+                  <a:t>measure</a:t>
+                </a:r>
+                <a:r>
+                  <a:rPr lang="de-DE" dirty="0"/>
+                  <a:t> </a:t>
+                </a:r>
+                <a:r>
+                  <a:rPr lang="de-DE" dirty="0" err="1"/>
+                  <a:t>if</a:t>
+                </a:r>
+                <a:r>
+                  <a:rPr lang="de-DE" dirty="0"/>
+                  <a:t> </a:t>
+                </a:r>
+                <a:r>
+                  <a:rPr lang="de-DE" dirty="0" err="1"/>
+                  <a:t>points</a:t>
+                </a:r>
+                <a:r>
+                  <a:rPr lang="de-DE" dirty="0"/>
+                  <a:t> (in </a:t>
+                </a:r>
+                <a:r>
+                  <a:rPr lang="de-DE" dirty="0" err="1"/>
+                  <a:t>higher</a:t>
+                </a:r>
+                <a:r>
+                  <a:rPr lang="de-DE" dirty="0"/>
+                  <a:t>-dimensional </a:t>
+                </a:r>
+                <a:r>
+                  <a:rPr lang="de-DE" dirty="0" err="1"/>
+                  <a:t>space</a:t>
+                </a:r>
+                <a:r>
+                  <a:rPr lang="de-DE" dirty="0"/>
+                  <a:t>) </a:t>
+                </a:r>
+                <a:r>
+                  <a:rPr lang="de-DE" dirty="0" err="1"/>
+                  <a:t>are</a:t>
+                </a:r>
+                <a:r>
+                  <a:rPr lang="de-DE" dirty="0"/>
+                  <a:t> </a:t>
+                </a:r>
+                <a:r>
+                  <a:rPr lang="de-DE" dirty="0" err="1"/>
+                  <a:t>close</a:t>
+                </a:r>
+                <a:r>
+                  <a:rPr lang="de-DE" dirty="0"/>
+                  <a:t>?</a:t>
+                </a:r>
+              </a:p>
+              <a:p>
+                <a:r>
+                  <a:rPr lang="de-DE" dirty="0" err="1"/>
+                  <a:t>each</a:t>
+                </a:r>
+                <a:r>
+                  <a:rPr lang="de-DE" dirty="0"/>
+                  <a:t> feature </a:t>
+                </a:r>
+                <a:r>
+                  <a:rPr lang="de-DE" dirty="0" err="1"/>
+                  <a:t>corresponds</a:t>
+                </a:r>
+                <a:r>
+                  <a:rPr lang="de-DE" dirty="0"/>
+                  <a:t> </a:t>
+                </a:r>
+                <a:r>
+                  <a:rPr lang="de-DE" dirty="0" err="1"/>
+                  <a:t>to</a:t>
+                </a:r>
+                <a:r>
+                  <a:rPr lang="de-DE" dirty="0"/>
+                  <a:t> </a:t>
+                </a:r>
+                <a:r>
+                  <a:rPr lang="de-DE" dirty="0" err="1"/>
+                  <a:t>one</a:t>
+                </a:r>
+                <a:r>
+                  <a:rPr lang="de-DE" dirty="0"/>
+                  <a:t> </a:t>
+                </a:r>
+                <a:r>
+                  <a:rPr lang="de-DE" dirty="0" err="1"/>
+                  <a:t>dimension</a:t>
+                </a:r>
+                <a:endParaRPr lang="de-DE" dirty="0"/>
+              </a:p>
+              <a:p>
+                <a:r>
+                  <a:rPr lang="de-DE" dirty="0" err="1"/>
+                  <a:t>close</a:t>
+                </a:r>
+                <a:r>
+                  <a:rPr lang="de-DE" dirty="0"/>
+                  <a:t> </a:t>
+                </a:r>
+                <a:r>
+                  <a:rPr lang="de-DE" dirty="0" err="1"/>
+                  <a:t>means</a:t>
+                </a:r>
+                <a:r>
+                  <a:rPr lang="de-DE" dirty="0"/>
+                  <a:t> </a:t>
+                </a:r>
+                <a:r>
+                  <a:rPr lang="de-DE" dirty="0" err="1"/>
+                  <a:t>small</a:t>
+                </a:r>
+                <a:r>
+                  <a:rPr lang="de-DE" dirty="0"/>
+                  <a:t> </a:t>
+                </a:r>
+                <a:r>
+                  <a:rPr lang="de-DE" dirty="0" err="1"/>
+                  <a:t>differences</a:t>
+                </a:r>
+                <a:r>
+                  <a:rPr lang="de-DE" dirty="0"/>
+                  <a:t> </a:t>
+                </a:r>
+                <a:r>
+                  <a:rPr lang="de-DE" dirty="0" err="1"/>
+                  <a:t>across</a:t>
+                </a:r>
+                <a:r>
+                  <a:rPr lang="de-DE" dirty="0"/>
+                  <a:t> </a:t>
+                </a:r>
+                <a:r>
+                  <a:rPr lang="de-DE" dirty="0" err="1"/>
+                  <a:t>dimensions</a:t>
+                </a:r>
+                <a:endParaRPr lang="de-DE" dirty="0"/>
+              </a:p>
+              <a:p>
+                <a:pPr lvl="1"/>
+                <a:r>
+                  <a:rPr lang="de-DE" dirty="0" err="1"/>
+                  <a:t>Euclidean</a:t>
+                </a:r>
+                <a:r>
+                  <a:rPr lang="de-DE" dirty="0"/>
+                  <a:t> </a:t>
+                </a:r>
+                <a:r>
+                  <a:rPr lang="de-DE" dirty="0" err="1"/>
+                  <a:t>distance</a:t>
+                </a:r>
+                <a:r>
+                  <a:rPr lang="de-DE" dirty="0"/>
+                  <a:t>: </a:t>
+                </a:r>
+                <a14:m>
+                  <m:oMath xmlns:m="http://schemas.openxmlformats.org/officeDocument/2006/math">
+                    <m:sSub>
+                      <m:sSubPr>
+                        <m:ctrlPr>
+                          <a:rPr lang="de-DE" i="1" smtClean="0">
+                            <a:latin typeface="Cambria Math" panose="02040503050406030204" pitchFamily="18" charset="0"/>
+                          </a:rPr>
+                        </m:ctrlPr>
+                      </m:sSubPr>
+                      <m:e>
+                        <m:r>
+                          <a:rPr lang="de-DE" b="0" i="1" smtClean="0">
+                            <a:latin typeface="Cambria Math" panose="02040503050406030204" pitchFamily="18" charset="0"/>
+                          </a:rPr>
+                          <m:t>𝑑</m:t>
+                        </m:r>
+                      </m:e>
+                      <m:sub>
+                        <m:r>
+                          <a:rPr lang="de-DE" b="0" i="1" smtClean="0">
+                            <a:latin typeface="Cambria Math" panose="02040503050406030204" pitchFamily="18" charset="0"/>
+                          </a:rPr>
+                          <m:t>𝐸</m:t>
+                        </m:r>
+                      </m:sub>
+                    </m:sSub>
+                    <m:d>
+                      <m:dPr>
+                        <m:ctrlPr>
+                          <a:rPr lang="de-DE" i="1" smtClean="0">
+                            <a:latin typeface="Cambria Math" panose="02040503050406030204" pitchFamily="18" charset="0"/>
+                          </a:rPr>
+                        </m:ctrlPr>
+                      </m:dPr>
+                      <m:e>
+                        <m:r>
+                          <a:rPr lang="de-DE" b="1" i="1" smtClean="0">
+                            <a:latin typeface="Cambria Math" panose="02040503050406030204" pitchFamily="18" charset="0"/>
+                          </a:rPr>
+                          <m:t>𝒙</m:t>
+                        </m:r>
+                        <m:r>
+                          <a:rPr lang="de-DE" b="0" i="1" smtClean="0">
+                            <a:latin typeface="Cambria Math" panose="02040503050406030204" pitchFamily="18" charset="0"/>
+                          </a:rPr>
+                          <m:t>,</m:t>
+                        </m:r>
+                        <m:r>
+                          <a:rPr lang="de-DE" b="1" i="1" smtClean="0">
+                            <a:latin typeface="Cambria Math" panose="02040503050406030204" pitchFamily="18" charset="0"/>
+                          </a:rPr>
+                          <m:t>𝒚</m:t>
+                        </m:r>
+                      </m:e>
+                    </m:d>
+                    <m:r>
+                      <a:rPr lang="de-DE" b="0" i="1" smtClean="0">
+                        <a:latin typeface="Cambria Math" panose="02040503050406030204" pitchFamily="18" charset="0"/>
+                      </a:rPr>
+                      <m:t>=</m:t>
+                    </m:r>
+                    <m:rad>
+                      <m:radPr>
+                        <m:degHide m:val="on"/>
+                        <m:ctrlPr>
+                          <a:rPr lang="de-DE" b="0" i="1" smtClean="0">
+                            <a:latin typeface="Cambria Math" panose="02040503050406030204" pitchFamily="18" charset="0"/>
+                          </a:rPr>
+                        </m:ctrlPr>
+                      </m:radPr>
+                      <m:deg/>
+                      <m:e>
+                        <m:nary>
+                          <m:naryPr>
+                            <m:chr m:val="∑"/>
+                            <m:ctrlPr>
+                              <a:rPr lang="de-DE" b="0" i="1" smtClean="0">
+                                <a:latin typeface="Cambria Math" panose="02040503050406030204" pitchFamily="18" charset="0"/>
+                              </a:rPr>
+                            </m:ctrlPr>
+                          </m:naryPr>
+                          <m:sub>
+                            <m:r>
+                              <m:rPr>
+                                <m:brk m:alnAt="23"/>
+                              </m:rPr>
+                              <a:rPr lang="de-DE" b="0" i="1" smtClean="0">
+                                <a:latin typeface="Cambria Math" panose="02040503050406030204" pitchFamily="18" charset="0"/>
+                              </a:rPr>
+                              <m:t>𝑖</m:t>
+                            </m:r>
+                            <m:r>
+                              <a:rPr lang="de-DE" b="0" i="1" smtClean="0">
+                                <a:latin typeface="Cambria Math" panose="02040503050406030204" pitchFamily="18" charset="0"/>
+                              </a:rPr>
+                              <m:t>=1</m:t>
+                            </m:r>
+                          </m:sub>
+                          <m:sup>
+                            <m:r>
+                              <a:rPr lang="de-DE" b="0" i="1" smtClean="0">
+                                <a:latin typeface="Cambria Math" panose="02040503050406030204" pitchFamily="18" charset="0"/>
+                              </a:rPr>
+                              <m:t>𝑑</m:t>
+                            </m:r>
+                          </m:sup>
+                          <m:e>
+                            <m:sSup>
+                              <m:sSupPr>
+                                <m:ctrlPr>
+                                  <a:rPr lang="de-DE" b="0" i="1" smtClean="0">
+                                    <a:latin typeface="Cambria Math" panose="02040503050406030204" pitchFamily="18" charset="0"/>
+                                  </a:rPr>
+                                </m:ctrlPr>
+                              </m:sSupPr>
+                              <m:e>
+                                <m:d>
+                                  <m:dPr>
+                                    <m:ctrlPr>
+                                      <a:rPr lang="de-DE" b="0" i="1" smtClean="0">
+                                        <a:latin typeface="Cambria Math" panose="02040503050406030204" pitchFamily="18" charset="0"/>
+                                      </a:rPr>
+                                    </m:ctrlPr>
+                                  </m:dPr>
+                                  <m:e>
+                                    <m:sSub>
+                                      <m:sSubPr>
+                                        <m:ctrlPr>
+                                          <a:rPr lang="de-DE" b="0" i="1" smtClean="0">
+                                            <a:latin typeface="Cambria Math" panose="02040503050406030204" pitchFamily="18" charset="0"/>
+                                          </a:rPr>
+                                        </m:ctrlPr>
+                                      </m:sSubPr>
+                                      <m:e>
+                                        <m:r>
+                                          <a:rPr lang="de-DE" b="0" i="1" smtClean="0">
+                                            <a:latin typeface="Cambria Math" panose="02040503050406030204" pitchFamily="18" charset="0"/>
+                                          </a:rPr>
+                                          <m:t>𝑥</m:t>
+                                        </m:r>
+                                      </m:e>
+                                      <m:sub>
+                                        <m:r>
+                                          <a:rPr lang="de-DE" b="0" i="1" smtClean="0">
+                                            <a:latin typeface="Cambria Math" panose="02040503050406030204" pitchFamily="18" charset="0"/>
+                                          </a:rPr>
+                                          <m:t>𝑖</m:t>
+                                        </m:r>
+                                      </m:sub>
+                                    </m:sSub>
+                                    <m:r>
+                                      <a:rPr lang="de-DE" b="0" i="1" smtClean="0">
+                                        <a:latin typeface="Cambria Math" panose="02040503050406030204" pitchFamily="18" charset="0"/>
+                                      </a:rPr>
+                                      <m:t>−</m:t>
+                                    </m:r>
+                                    <m:sSub>
+                                      <m:sSubPr>
+                                        <m:ctrlPr>
+                                          <a:rPr lang="de-DE" b="0" i="1" smtClean="0">
+                                            <a:latin typeface="Cambria Math" panose="02040503050406030204" pitchFamily="18" charset="0"/>
+                                          </a:rPr>
+                                        </m:ctrlPr>
+                                      </m:sSubPr>
+                                      <m:e>
+                                        <m:r>
+                                          <a:rPr lang="de-DE" b="0" i="1" smtClean="0">
+                                            <a:latin typeface="Cambria Math" panose="02040503050406030204" pitchFamily="18" charset="0"/>
+                                          </a:rPr>
+                                          <m:t>𝑦</m:t>
+                                        </m:r>
+                                      </m:e>
+                                      <m:sub>
+                                        <m:r>
+                                          <a:rPr lang="de-DE" b="0" i="1" smtClean="0">
+                                            <a:latin typeface="Cambria Math" panose="02040503050406030204" pitchFamily="18" charset="0"/>
+                                          </a:rPr>
+                                          <m:t>𝑖</m:t>
+                                        </m:r>
+                                      </m:sub>
+                                    </m:sSub>
+                                  </m:e>
+                                </m:d>
+                              </m:e>
+                              <m:sup>
+                                <m:r>
+                                  <a:rPr lang="de-DE" b="0" i="1" smtClean="0">
+                                    <a:latin typeface="Cambria Math" panose="02040503050406030204" pitchFamily="18" charset="0"/>
+                                  </a:rPr>
+                                  <m:t>2</m:t>
+                                </m:r>
+                              </m:sup>
+                            </m:sSup>
+                          </m:e>
+                        </m:nary>
+                      </m:e>
+                    </m:rad>
+                  </m:oMath>
+                </a14:m>
+                <a:endParaRPr lang="de-DE" dirty="0"/>
+              </a:p>
+              <a:p>
+                <a:pPr lvl="1"/>
+                <a:r>
+                  <a:rPr lang="de-DE" dirty="0"/>
+                  <a:t>Manhattan </a:t>
+                </a:r>
+                <a:r>
+                  <a:rPr lang="de-DE" dirty="0" err="1"/>
+                  <a:t>distance</a:t>
+                </a:r>
+                <a:r>
+                  <a:rPr lang="de-DE" dirty="0"/>
+                  <a:t>: </a:t>
+                </a:r>
+                <a14:m>
+                  <m:oMath xmlns:m="http://schemas.openxmlformats.org/officeDocument/2006/math">
+                    <m:sSub>
+                      <m:sSubPr>
+                        <m:ctrlPr>
+                          <a:rPr lang="de-DE" i="1">
+                            <a:latin typeface="Cambria Math" panose="02040503050406030204" pitchFamily="18" charset="0"/>
+                          </a:rPr>
+                        </m:ctrlPr>
+                      </m:sSubPr>
+                      <m:e>
+                        <m:r>
+                          <a:rPr lang="de-DE" i="1">
+                            <a:latin typeface="Cambria Math" panose="02040503050406030204" pitchFamily="18" charset="0"/>
+                          </a:rPr>
+                          <m:t>𝑑</m:t>
+                        </m:r>
+                      </m:e>
+                      <m:sub>
+                        <m:r>
+                          <a:rPr lang="de-DE" b="0" i="1" smtClean="0">
+                            <a:latin typeface="Cambria Math" panose="02040503050406030204" pitchFamily="18" charset="0"/>
+                          </a:rPr>
+                          <m:t>𝑀</m:t>
+                        </m:r>
+                      </m:sub>
+                    </m:sSub>
+                    <m:d>
+                      <m:dPr>
+                        <m:ctrlPr>
+                          <a:rPr lang="de-DE" i="1">
+                            <a:latin typeface="Cambria Math" panose="02040503050406030204" pitchFamily="18" charset="0"/>
+                          </a:rPr>
+                        </m:ctrlPr>
+                      </m:dPr>
+                      <m:e>
+                        <m:r>
+                          <a:rPr lang="de-DE" b="1" i="1">
+                            <a:latin typeface="Cambria Math" panose="02040503050406030204" pitchFamily="18" charset="0"/>
+                          </a:rPr>
+                          <m:t>𝒙</m:t>
+                        </m:r>
+                        <m:r>
+                          <a:rPr lang="de-DE" i="1">
+                            <a:latin typeface="Cambria Math" panose="02040503050406030204" pitchFamily="18" charset="0"/>
+                          </a:rPr>
+                          <m:t>,</m:t>
+                        </m:r>
+                        <m:r>
+                          <a:rPr lang="de-DE" b="1" i="1">
+                            <a:latin typeface="Cambria Math" panose="02040503050406030204" pitchFamily="18" charset="0"/>
+                          </a:rPr>
+                          <m:t>𝒚</m:t>
+                        </m:r>
+                      </m:e>
+                    </m:d>
+                    <m:r>
+                      <a:rPr lang="de-DE" i="1">
+                        <a:latin typeface="Cambria Math" panose="02040503050406030204" pitchFamily="18" charset="0"/>
+                      </a:rPr>
+                      <m:t>=</m:t>
+                    </m:r>
+                    <m:nary>
+                      <m:naryPr>
+                        <m:chr m:val="∑"/>
+                        <m:ctrlPr>
+                          <a:rPr lang="de-DE" i="1">
+                            <a:latin typeface="Cambria Math" panose="02040503050406030204" pitchFamily="18" charset="0"/>
+                          </a:rPr>
+                        </m:ctrlPr>
+                      </m:naryPr>
+                      <m:sub>
+                        <m:r>
+                          <m:rPr>
+                            <m:brk m:alnAt="23"/>
+                          </m:rPr>
+                          <a:rPr lang="de-DE" i="1">
+                            <a:latin typeface="Cambria Math" panose="02040503050406030204" pitchFamily="18" charset="0"/>
+                          </a:rPr>
+                          <m:t>𝑖</m:t>
+                        </m:r>
+                        <m:r>
+                          <a:rPr lang="de-DE" i="1">
+                            <a:latin typeface="Cambria Math" panose="02040503050406030204" pitchFamily="18" charset="0"/>
+                          </a:rPr>
+                          <m:t>=1</m:t>
+                        </m:r>
+                      </m:sub>
+                      <m:sup>
+                        <m:r>
+                          <a:rPr lang="de-DE" i="1">
+                            <a:latin typeface="Cambria Math" panose="02040503050406030204" pitchFamily="18" charset="0"/>
+                          </a:rPr>
+                          <m:t>𝑑</m:t>
+                        </m:r>
+                      </m:sup>
+                      <m:e>
+                        <m:d>
+                          <m:dPr>
+                            <m:begChr m:val="|"/>
+                            <m:endChr m:val="|"/>
+                            <m:ctrlPr>
+                              <a:rPr lang="de-DE" i="1" smtClean="0">
+                                <a:latin typeface="Cambria Math" panose="02040503050406030204" pitchFamily="18" charset="0"/>
+                              </a:rPr>
+                            </m:ctrlPr>
+                          </m:dPr>
+                          <m:e>
+                            <m:sSub>
+                              <m:sSubPr>
+                                <m:ctrlPr>
+                                  <a:rPr lang="de-DE" i="1">
+                                    <a:latin typeface="Cambria Math" panose="02040503050406030204" pitchFamily="18" charset="0"/>
+                                  </a:rPr>
+                                </m:ctrlPr>
+                              </m:sSubPr>
+                              <m:e>
+                                <m:r>
+                                  <a:rPr lang="de-DE" i="1">
+                                    <a:latin typeface="Cambria Math" panose="02040503050406030204" pitchFamily="18" charset="0"/>
+                                  </a:rPr>
+                                  <m:t>𝑥</m:t>
+                                </m:r>
+                              </m:e>
+                              <m:sub>
+                                <m:r>
+                                  <a:rPr lang="de-DE" i="1">
+                                    <a:latin typeface="Cambria Math" panose="02040503050406030204" pitchFamily="18" charset="0"/>
+                                  </a:rPr>
+                                  <m:t>𝑖</m:t>
+                                </m:r>
+                              </m:sub>
+                            </m:sSub>
+                            <m:r>
+                              <a:rPr lang="de-DE" i="1">
+                                <a:latin typeface="Cambria Math" panose="02040503050406030204" pitchFamily="18" charset="0"/>
+                              </a:rPr>
+                              <m:t>−</m:t>
+                            </m:r>
+                            <m:sSub>
+                              <m:sSubPr>
+                                <m:ctrlPr>
+                                  <a:rPr lang="de-DE" i="1">
+                                    <a:latin typeface="Cambria Math" panose="02040503050406030204" pitchFamily="18" charset="0"/>
+                                  </a:rPr>
+                                </m:ctrlPr>
+                              </m:sSubPr>
+                              <m:e>
+                                <m:r>
+                                  <a:rPr lang="de-DE" i="1">
+                                    <a:latin typeface="Cambria Math" panose="02040503050406030204" pitchFamily="18" charset="0"/>
+                                  </a:rPr>
+                                  <m:t>𝑦</m:t>
+                                </m:r>
+                              </m:e>
+                              <m:sub>
+                                <m:r>
+                                  <a:rPr lang="de-DE" i="1">
+                                    <a:latin typeface="Cambria Math" panose="02040503050406030204" pitchFamily="18" charset="0"/>
+                                  </a:rPr>
+                                  <m:t>𝑖</m:t>
+                                </m:r>
+                              </m:sub>
+                            </m:sSub>
+                          </m:e>
+                        </m:d>
+                      </m:e>
+                    </m:nary>
+                  </m:oMath>
+                </a14:m>
+                <a:endParaRPr lang="de-DE" dirty="0"/>
+              </a:p>
+              <a:p>
+                <a:r>
+                  <a:rPr lang="de-DE" dirty="0" err="1"/>
+                  <a:t>instead</a:t>
+                </a:r>
+                <a:r>
+                  <a:rPr lang="de-DE" dirty="0"/>
+                  <a:t> </a:t>
+                </a:r>
+                <a:r>
+                  <a:rPr lang="de-DE" dirty="0" err="1"/>
+                  <a:t>of</a:t>
+                </a:r>
+                <a:r>
+                  <a:rPr lang="de-DE" dirty="0"/>
+                  <a:t> </a:t>
+                </a:r>
+                <a:r>
+                  <a:rPr lang="de-DE" dirty="0" err="1"/>
+                  <a:t>distance</a:t>
+                </a:r>
+                <a:r>
+                  <a:rPr lang="de-DE" dirty="0"/>
+                  <a:t>, </a:t>
+                </a:r>
+                <a:r>
+                  <a:rPr lang="de-DE" dirty="0" err="1"/>
+                  <a:t>sometimes</a:t>
+                </a:r>
+                <a:r>
+                  <a:rPr lang="de-DE" dirty="0"/>
+                  <a:t> also </a:t>
+                </a:r>
+                <a:r>
+                  <a:rPr lang="de-DE" dirty="0" err="1"/>
+                  <a:t>similarity</a:t>
+                </a:r>
+                <a:r>
+                  <a:rPr lang="de-DE" dirty="0"/>
+                  <a:t>: </a:t>
+                </a:r>
+                <a:r>
+                  <a:rPr lang="de-DE" dirty="0" err="1"/>
+                  <a:t>higher</a:t>
+                </a:r>
+                <a:r>
+                  <a:rPr lang="de-DE" dirty="0"/>
+                  <a:t> = </a:t>
+                </a:r>
+                <a:r>
+                  <a:rPr lang="de-DE" dirty="0" err="1"/>
+                  <a:t>closer</a:t>
+                </a:r>
+                <a:endParaRPr lang="de-DE" dirty="0"/>
+              </a:p>
+              <a:p>
+                <a:pPr lvl="1"/>
+                <a:r>
+                  <a:rPr lang="de-DE" dirty="0" err="1"/>
+                  <a:t>cosine</a:t>
+                </a:r>
+                <a:r>
+                  <a:rPr lang="de-DE" dirty="0"/>
+                  <a:t> </a:t>
+                </a:r>
+                <a:r>
+                  <a:rPr lang="de-DE" dirty="0" err="1"/>
+                  <a:t>similarity</a:t>
+                </a:r>
+                <a:r>
+                  <a:rPr lang="de-DE" dirty="0"/>
+                  <a:t>: </a:t>
+                </a:r>
+                <a14:m>
+                  <m:oMath xmlns:m="http://schemas.openxmlformats.org/officeDocument/2006/math">
+                    <m:f>
+                      <m:fPr>
+                        <m:ctrlPr>
+                          <a:rPr lang="de-DE" i="1" smtClean="0">
+                            <a:latin typeface="Cambria Math" panose="02040503050406030204" pitchFamily="18" charset="0"/>
+                          </a:rPr>
+                        </m:ctrlPr>
+                      </m:fPr>
+                      <m:num>
+                        <m:r>
+                          <a:rPr lang="de-DE" b="1" i="1">
+                            <a:latin typeface="Cambria Math" panose="02040503050406030204" pitchFamily="18" charset="0"/>
+                          </a:rPr>
+                          <m:t>𝒙</m:t>
+                        </m:r>
+                        <m:r>
+                          <a:rPr lang="de-DE" b="1" i="1" smtClean="0">
+                            <a:latin typeface="Cambria Math" panose="02040503050406030204" pitchFamily="18" charset="0"/>
+                            <a:ea typeface="Cambria Math" panose="02040503050406030204" pitchFamily="18" charset="0"/>
+                          </a:rPr>
+                          <m:t>∙</m:t>
+                        </m:r>
+                        <m:r>
+                          <a:rPr lang="de-DE" b="1" i="1">
+                            <a:latin typeface="Cambria Math" panose="02040503050406030204" pitchFamily="18" charset="0"/>
+                          </a:rPr>
+                          <m:t>𝒚</m:t>
+                        </m:r>
+                      </m:num>
+                      <m:den>
+                        <m:d>
+                          <m:dPr>
+                            <m:begChr m:val="‖"/>
+                            <m:endChr m:val="‖"/>
+                            <m:ctrlPr>
+                              <a:rPr lang="de-DE" i="1" smtClean="0">
+                                <a:latin typeface="Cambria Math" panose="02040503050406030204" pitchFamily="18" charset="0"/>
+                              </a:rPr>
+                            </m:ctrlPr>
+                          </m:dPr>
+                          <m:e>
+                            <m:r>
+                              <a:rPr lang="de-DE" b="1" i="1" smtClean="0">
+                                <a:latin typeface="Cambria Math" panose="02040503050406030204" pitchFamily="18" charset="0"/>
+                              </a:rPr>
+                              <m:t>𝒙</m:t>
+                            </m:r>
+                          </m:e>
+                        </m:d>
+                        <m:d>
+                          <m:dPr>
+                            <m:begChr m:val="‖"/>
+                            <m:endChr m:val="‖"/>
+                            <m:ctrlPr>
+                              <a:rPr lang="de-DE" i="1" smtClean="0">
+                                <a:latin typeface="Cambria Math" panose="02040503050406030204" pitchFamily="18" charset="0"/>
+                              </a:rPr>
+                            </m:ctrlPr>
+                          </m:dPr>
+                          <m:e>
+                            <m:r>
+                              <a:rPr lang="de-DE" b="1" i="1">
+                                <a:latin typeface="Cambria Math" panose="02040503050406030204" pitchFamily="18" charset="0"/>
+                              </a:rPr>
+                              <m:t>𝒚</m:t>
+                            </m:r>
+                          </m:e>
+                        </m:d>
+                      </m:den>
+                    </m:f>
+                  </m:oMath>
+                </a14:m>
+                <a:endParaRPr lang="de-DE" dirty="0"/>
+              </a:p>
+              <a:p>
+                <a:pPr lvl="1"/>
+                <a:r>
+                  <a:rPr lang="de-DE" dirty="0"/>
+                  <a:t>Pearson </a:t>
+                </a:r>
+                <a:r>
+                  <a:rPr lang="de-DE" dirty="0" err="1"/>
+                  <a:t>correlation</a:t>
+                </a:r>
+                <a:r>
+                  <a:rPr lang="de-DE" dirty="0"/>
+                  <a:t>: linear </a:t>
+                </a:r>
+                <a:r>
+                  <a:rPr lang="de-DE" dirty="0" err="1"/>
+                  <a:t>similarity</a:t>
+                </a:r>
+                <a:r>
+                  <a:rPr lang="de-DE" dirty="0"/>
+                  <a:t> </a:t>
+                </a:r>
+                <a:r>
+                  <a:rPr lang="de-DE" dirty="0" err="1"/>
+                  <a:t>between</a:t>
+                </a:r>
+                <a:r>
+                  <a:rPr lang="de-DE" dirty="0"/>
+                  <a:t> </a:t>
+                </a:r>
+                <a:r>
+                  <a:rPr lang="de-DE" dirty="0" err="1"/>
+                  <a:t>features</a:t>
+                </a:r>
+                <a:endParaRPr lang="de-DE" dirty="0"/>
+              </a:p>
+              <a:p>
+                <a:pPr marL="0" indent="0">
+                  <a:buNone/>
+                </a:pPr>
+                <a:endParaRPr lang="de-DE" dirty="0"/>
+              </a:p>
+            </p:txBody>
+          </p:sp>
+        </mc:Choice>
+        <mc:Fallback xmlns="">
+          <p:sp>
+            <p:nvSpPr>
+              <p:cNvPr id="3" name="Inhaltsplatzhalter 2">
+                <a:extLst>
+                  <a:ext uri="{FF2B5EF4-FFF2-40B4-BE49-F238E27FC236}">
+                    <a16:creationId xmlns:a16="http://schemas.microsoft.com/office/drawing/2014/main" id="{F557B7C9-9D66-A25B-D11C-5254C08E0B87}"/>
+                  </a:ext>
+                </a:extLst>
+              </p:cNvPr>
+              <p:cNvSpPr>
+                <a:spLocks noGrp="1" noRot="1" noChangeAspect="1" noMove="1" noResize="1" noEditPoints="1" noAdjustHandles="1" noChangeArrowheads="1" noChangeShapeType="1" noTextEdit="1"/>
+              </p:cNvSpPr>
+              <p:nvPr>
+                <p:ph idx="1"/>
+              </p:nvPr>
+            </p:nvSpPr>
+            <p:spPr>
+              <a:blipFill>
+                <a:blip r:embed="rId2"/>
+                <a:stretch>
+                  <a:fillRect l="-1206" t="-2326"/>
+                </a:stretch>
+              </a:blipFill>
+            </p:spPr>
+            <p:txBody>
+              <a:bodyPr/>
+              <a:lstStyle/>
+              <a:p>
+                <a:r>
+                  <a:rPr lang="de-DE">
+                    <a:noFill/>
+                  </a:rPr>
+                  <a:t> </a:t>
+                </a:r>
+              </a:p>
+            </p:txBody>
+          </p:sp>
+        </mc:Fallback>
+      </mc:AlternateContent>
       <p:sp>
         <p:nvSpPr>
           <p:cNvPr id="4" name="Foliennummernplatzhalter 3">
@@ -9490,7 +13087,7 @@
           <p:cNvPr id="2" name="Titel 1">
             <a:extLst>
               <a:ext uri="{FF2B5EF4-FFF2-40B4-BE49-F238E27FC236}">
-                <a16:creationId xmlns:a16="http://schemas.microsoft.com/office/drawing/2014/main" id="{91161FD2-1411-8BB8-D755-1F422C1937A4}"/>
+                <a16:creationId xmlns:a16="http://schemas.microsoft.com/office/drawing/2014/main" id="{10F2B2B9-9ED8-1237-271E-39149E2D1239}"/>
               </a:ext>
             </a:extLst>
           </p:cNvPr>
@@ -9508,7 +13105,7 @@
           <a:p>
             <a:r>
               <a:rPr lang="de-DE" dirty="0" err="1"/>
-              <a:t>Overview</a:t>
+              <a:t>Preprocessing</a:t>
             </a:r>
             <a:r>
               <a:rPr lang="de-DE" dirty="0"/>
@@ -9516,29 +13113,365 @@
             </a:r>
             <a:r>
               <a:rPr lang="de-DE" dirty="0" err="1"/>
-              <a:t>of</a:t>
-            </a:r>
-            <a:r>
-              <a:rPr lang="de-DE" dirty="0"/>
-              <a:t> </a:t>
-            </a:r>
-            <a:r>
-              <a:rPr lang="de-DE" dirty="0" err="1"/>
-              <a:t>scikit-learn</a:t>
-            </a:r>
-            <a:r>
-              <a:rPr lang="de-DE" dirty="0"/>
-              <a:t> Clustering API</a:t>
-            </a:r>
-          </a:p>
-        </p:txBody>
-      </p:sp>
+              <a:t>for</a:t>
+            </a:r>
+            <a:r>
+              <a:rPr lang="de-DE" dirty="0"/>
+              <a:t> Clustering</a:t>
+            </a:r>
+          </a:p>
+        </p:txBody>
+      </p:sp>
+      <mc:AlternateContent xmlns:mc="http://schemas.openxmlformats.org/markup-compatibility/2006" xmlns:a14="http://schemas.microsoft.com/office/drawing/2010/main">
+        <mc:Choice Requires="a14">
+          <p:sp>
+            <p:nvSpPr>
+              <p:cNvPr id="3" name="Inhaltsplatzhalter 2">
+                <a:extLst>
+                  <a:ext uri="{FF2B5EF4-FFF2-40B4-BE49-F238E27FC236}">
+                    <a16:creationId xmlns:a16="http://schemas.microsoft.com/office/drawing/2014/main" id="{D853B87B-6769-3173-C4FC-34C0F88DA6C1}"/>
+                  </a:ext>
+                </a:extLst>
+              </p:cNvPr>
+              <p:cNvSpPr>
+                <a:spLocks noGrp="1"/>
+              </p:cNvSpPr>
+              <p:nvPr>
+                <p:ph idx="1"/>
+              </p:nvPr>
+            </p:nvSpPr>
+            <p:spPr/>
+            <p:txBody>
+              <a:bodyPr/>
+              <a:lstStyle/>
+              <a:p>
+                <a:pPr marL="0" indent="0">
+                  <a:buNone/>
+                </a:pPr>
+                <a:r>
+                  <a:rPr lang="de-DE" dirty="0"/>
+                  <a:t>distance </a:t>
+                </a:r>
+                <a:r>
+                  <a:rPr lang="de-DE" dirty="0" err="1"/>
+                  <a:t>measures</a:t>
+                </a:r>
+                <a:r>
+                  <a:rPr lang="de-DE" dirty="0"/>
+                  <a:t> sensitive </a:t>
+                </a:r>
+                <a:r>
+                  <a:rPr lang="de-DE" dirty="0" err="1"/>
+                  <a:t>to</a:t>
+                </a:r>
+                <a:r>
+                  <a:rPr lang="de-DE" dirty="0"/>
+                  <a:t> </a:t>
+                </a:r>
+                <a:r>
+                  <a:rPr lang="de-DE" dirty="0" err="1"/>
+                  <a:t>scale</a:t>
+                </a:r>
+                <a:endParaRPr lang="de-DE" dirty="0"/>
+              </a:p>
+              <a:p>
+                <a:pPr marL="0" indent="0">
+                  <a:buNone/>
+                </a:pPr>
+                <a:endParaRPr lang="de-DE" dirty="0"/>
+              </a:p>
+              <a:p>
+                <a:pPr marL="0" indent="0">
+                  <a:buNone/>
+                </a:pPr>
+                <a:r>
+                  <a:rPr lang="de-DE" dirty="0">
+                    <a:sym typeface="Wingdings" pitchFamily="2" charset="2"/>
+                  </a:rPr>
+                  <a:t> </a:t>
+                </a:r>
+                <a:r>
+                  <a:rPr lang="de-DE" dirty="0" err="1">
+                    <a:sym typeface="Wingdings" pitchFamily="2" charset="2"/>
+                  </a:rPr>
+                  <a:t>need</a:t>
+                </a:r>
+                <a:r>
+                  <a:rPr lang="de-DE" dirty="0">
+                    <a:sym typeface="Wingdings" pitchFamily="2" charset="2"/>
+                  </a:rPr>
+                  <a:t> </a:t>
+                </a:r>
+                <a:r>
+                  <a:rPr lang="de-DE" dirty="0" err="1">
+                    <a:sym typeface="Wingdings" pitchFamily="2" charset="2"/>
+                  </a:rPr>
+                  <a:t>for</a:t>
+                </a:r>
+                <a:r>
+                  <a:rPr lang="de-DE" dirty="0">
+                    <a:sym typeface="Wingdings" pitchFamily="2" charset="2"/>
+                  </a:rPr>
+                  <a:t> </a:t>
+                </a:r>
+                <a:r>
+                  <a:rPr lang="de-DE" dirty="0" err="1">
+                    <a:sym typeface="Wingdings" pitchFamily="2" charset="2"/>
+                  </a:rPr>
+                  <a:t>scaling</a:t>
+                </a:r>
+                <a:endParaRPr lang="de-DE" dirty="0"/>
+              </a:p>
+              <a:p>
+                <a:r>
+                  <a:rPr lang="de-DE" b="1" dirty="0" err="1"/>
+                  <a:t>standardization</a:t>
+                </a:r>
+                <a:r>
+                  <a:rPr lang="de-DE" dirty="0"/>
+                  <a:t>: </a:t>
+                </a:r>
+                <a14:m>
+                  <m:oMath xmlns:m="http://schemas.openxmlformats.org/officeDocument/2006/math">
+                    <m:r>
+                      <a:rPr lang="de-DE" b="0" i="1" smtClean="0">
+                        <a:latin typeface="Cambria Math" panose="02040503050406030204" pitchFamily="18" charset="0"/>
+                      </a:rPr>
+                      <m:t>𝑧</m:t>
+                    </m:r>
+                    <m:r>
+                      <a:rPr lang="de-DE" b="0" i="1" smtClean="0">
+                        <a:latin typeface="Cambria Math" panose="02040503050406030204" pitchFamily="18" charset="0"/>
+                      </a:rPr>
+                      <m:t>=</m:t>
+                    </m:r>
+                    <m:f>
+                      <m:fPr>
+                        <m:ctrlPr>
+                          <a:rPr lang="de-DE" b="0" i="1" smtClean="0">
+                            <a:latin typeface="Cambria Math" panose="02040503050406030204" pitchFamily="18" charset="0"/>
+                          </a:rPr>
+                        </m:ctrlPr>
+                      </m:fPr>
+                      <m:num>
+                        <m:r>
+                          <a:rPr lang="de-DE" b="0" i="1" smtClean="0">
+                            <a:latin typeface="Cambria Math" panose="02040503050406030204" pitchFamily="18" charset="0"/>
+                          </a:rPr>
+                          <m:t>𝑥</m:t>
+                        </m:r>
+                        <m:r>
+                          <a:rPr lang="de-DE" b="0" i="1" smtClean="0">
+                            <a:latin typeface="Cambria Math" panose="02040503050406030204" pitchFamily="18" charset="0"/>
+                          </a:rPr>
+                          <m:t>−</m:t>
+                        </m:r>
+                        <m:r>
+                          <a:rPr lang="de-DE" b="0" i="1" smtClean="0">
+                            <a:latin typeface="Cambria Math" panose="02040503050406030204" pitchFamily="18" charset="0"/>
+                            <a:ea typeface="Cambria Math" panose="02040503050406030204" pitchFamily="18" charset="0"/>
+                          </a:rPr>
+                          <m:t>𝜇</m:t>
+                        </m:r>
+                      </m:num>
+                      <m:den>
+                        <m:r>
+                          <a:rPr lang="de-DE" b="0" i="1" smtClean="0">
+                            <a:latin typeface="Cambria Math" panose="02040503050406030204" pitchFamily="18" charset="0"/>
+                            <a:ea typeface="Cambria Math" panose="02040503050406030204" pitchFamily="18" charset="0"/>
+                          </a:rPr>
+                          <m:t>𝜎</m:t>
+                        </m:r>
+                      </m:den>
+                    </m:f>
+                  </m:oMath>
+                </a14:m>
+                <a:endParaRPr lang="de-DE" dirty="0"/>
+              </a:p>
+              <a:p>
+                <a:r>
+                  <a:rPr lang="de-DE" b="1" dirty="0" err="1"/>
+                  <a:t>normalization</a:t>
+                </a:r>
+                <a:r>
+                  <a:rPr lang="de-DE" dirty="0"/>
+                  <a:t>: </a:t>
+                </a:r>
+                <a:r>
+                  <a:rPr lang="de-DE" dirty="0" err="1"/>
+                  <a:t>scale</a:t>
+                </a:r>
+                <a:r>
+                  <a:rPr lang="de-DE" dirty="0"/>
+                  <a:t> all </a:t>
+                </a:r>
+                <a:r>
+                  <a:rPr lang="de-DE" dirty="0" err="1"/>
+                  <a:t>features</a:t>
+                </a:r>
+                <a:r>
+                  <a:rPr lang="de-DE" dirty="0"/>
+                  <a:t> </a:t>
+                </a:r>
+                <a:r>
+                  <a:rPr lang="de-DE" dirty="0" err="1"/>
+                  <a:t>to</a:t>
+                </a:r>
+                <a:r>
+                  <a:rPr lang="de-DE" dirty="0"/>
+                  <a:t> </a:t>
+                </a:r>
+                <a14:m>
+                  <m:oMath xmlns:m="http://schemas.openxmlformats.org/officeDocument/2006/math">
+                    <m:d>
+                      <m:dPr>
+                        <m:begChr m:val="["/>
+                        <m:endChr m:val="]"/>
+                        <m:ctrlPr>
+                          <a:rPr lang="de-DE" i="1" smtClean="0">
+                            <a:latin typeface="Cambria Math" panose="02040503050406030204" pitchFamily="18" charset="0"/>
+                          </a:rPr>
+                        </m:ctrlPr>
+                      </m:dPr>
+                      <m:e>
+                        <m:r>
+                          <a:rPr lang="de-DE" b="0" i="1" smtClean="0">
+                            <a:latin typeface="Cambria Math" panose="02040503050406030204" pitchFamily="18" charset="0"/>
+                          </a:rPr>
+                          <m:t>0,1</m:t>
+                        </m:r>
+                      </m:e>
+                    </m:d>
+                  </m:oMath>
+                </a14:m>
+                <a:br>
+                  <a:rPr lang="de-DE" dirty="0"/>
+                </a:br>
+                <a:endParaRPr lang="de-DE" dirty="0"/>
+              </a:p>
+              <a:p>
+                <a:pPr marL="0" indent="0">
+                  <a:buNone/>
+                </a:pPr>
+                <a:r>
+                  <a:rPr lang="de-DE" dirty="0" err="1"/>
+                  <a:t>without</a:t>
+                </a:r>
+                <a:r>
+                  <a:rPr lang="de-DE" dirty="0"/>
+                  <a:t> </a:t>
+                </a:r>
+                <a:r>
+                  <a:rPr lang="de-DE" dirty="0" err="1"/>
+                  <a:t>scaling</a:t>
+                </a:r>
+                <a:r>
+                  <a:rPr lang="de-DE" dirty="0"/>
+                  <a:t>, </a:t>
+                </a:r>
+                <a:r>
+                  <a:rPr lang="de-DE" dirty="0" err="1"/>
+                  <a:t>distance</a:t>
+                </a:r>
+                <a:r>
+                  <a:rPr lang="de-DE" dirty="0"/>
+                  <a:t> </a:t>
+                </a:r>
+                <a:r>
+                  <a:rPr lang="de-DE" dirty="0" err="1"/>
+                  <a:t>dominated</a:t>
+                </a:r>
+                <a:r>
+                  <a:rPr lang="de-DE" dirty="0"/>
+                  <a:t> </a:t>
+                </a:r>
+                <a:r>
+                  <a:rPr lang="de-DE" dirty="0" err="1"/>
+                  <a:t>by</a:t>
+                </a:r>
+                <a:r>
+                  <a:rPr lang="de-DE" dirty="0"/>
+                  <a:t> </a:t>
+                </a:r>
+                <a:r>
+                  <a:rPr lang="de-DE" dirty="0" err="1"/>
+                  <a:t>features</a:t>
+                </a:r>
+                <a:r>
+                  <a:rPr lang="de-DE" dirty="0"/>
+                  <a:t> </a:t>
+                </a:r>
+                <a:r>
+                  <a:rPr lang="de-DE" dirty="0" err="1"/>
+                  <a:t>with</a:t>
+                </a:r>
+                <a:r>
+                  <a:rPr lang="de-DE" dirty="0"/>
+                  <a:t> larger </a:t>
+                </a:r>
+                <a:r>
+                  <a:rPr lang="de-DE" dirty="0" err="1"/>
+                  <a:t>numeric</a:t>
+                </a:r>
+                <a:r>
+                  <a:rPr lang="de-DE" dirty="0"/>
+                  <a:t> </a:t>
+                </a:r>
+                <a:r>
+                  <a:rPr lang="de-DE" dirty="0" err="1"/>
+                  <a:t>ranges</a:t>
+                </a:r>
+                <a:endParaRPr lang="de-DE" dirty="0"/>
+              </a:p>
+            </p:txBody>
+          </p:sp>
+        </mc:Choice>
+        <mc:Fallback xmlns="">
+          <p:sp>
+            <p:nvSpPr>
+              <p:cNvPr id="3" name="Inhaltsplatzhalter 2">
+                <a:extLst>
+                  <a:ext uri="{FF2B5EF4-FFF2-40B4-BE49-F238E27FC236}">
+                    <a16:creationId xmlns:a16="http://schemas.microsoft.com/office/drawing/2014/main" id="{D853B87B-6769-3173-C4FC-34C0F88DA6C1}"/>
+                  </a:ext>
+                </a:extLst>
+              </p:cNvPr>
+              <p:cNvSpPr>
+                <a:spLocks noGrp="1" noRot="1" noChangeAspect="1" noMove="1" noResize="1" noEditPoints="1" noAdjustHandles="1" noChangeArrowheads="1" noChangeShapeType="1" noTextEdit="1"/>
+              </p:cNvSpPr>
+              <p:nvPr>
+                <p:ph idx="1"/>
+              </p:nvPr>
+            </p:nvSpPr>
+            <p:spPr>
+              <a:blipFill>
+                <a:blip r:embed="rId2"/>
+                <a:stretch>
+                  <a:fillRect l="-1206" t="-2326"/>
+                </a:stretch>
+              </a:blipFill>
+            </p:spPr>
+            <p:txBody>
+              <a:bodyPr/>
+              <a:lstStyle/>
+              <a:p>
+                <a:r>
+                  <a:rPr lang="de-DE">
+                    <a:noFill/>
+                  </a:rPr>
+                  <a:t> </a:t>
+                </a:r>
+              </a:p>
+            </p:txBody>
+          </p:sp>
+        </mc:Fallback>
+      </mc:AlternateContent>
       <p:sp>
         <p:nvSpPr>
           <p:cNvPr id="4" name="Foliennummernplatzhalter 3">
             <a:extLst>
               <a:ext uri="{FF2B5EF4-FFF2-40B4-BE49-F238E27FC236}">
-                <a16:creationId xmlns:a16="http://schemas.microsoft.com/office/drawing/2014/main" id="{0872D469-9E39-C0DF-2321-08C1385A8014}"/>
+                <a16:creationId xmlns:a16="http://schemas.microsoft.com/office/drawing/2014/main" id="{1230CB5C-3BD6-9F60-160E-F61FA944E85E}"/>
               </a:ext>
             </a:extLst>
           </p:cNvPr>
@@ -9562,57 +13495,10 @@
           </a:p>
         </p:txBody>
       </p:sp>
-      <p:pic>
-        <p:nvPicPr>
-          <p:cNvPr id="1026" name="Picture 2" descr="MiniBatch KMeans, Affinity Propagation, MeanShift, Spectral Clustering, Ward, Agglomerative Clustering, DBSCAN, HDBSCAN, OPTICS, BIRCH, Gaussian Mixture">
-            <a:extLst>
-              <a:ext uri="{FF2B5EF4-FFF2-40B4-BE49-F238E27FC236}">
-                <a16:creationId xmlns:a16="http://schemas.microsoft.com/office/drawing/2014/main" id="{CCCCBEB2-AD32-344D-3161-053446F1D955}"/>
-              </a:ext>
-            </a:extLst>
-          </p:cNvPr>
-          <p:cNvPicPr>
-            <a:picLocks noChangeAspect="1" noChangeArrowheads="1"/>
-          </p:cNvPicPr>
-          <p:nvPr/>
-        </p:nvPicPr>
-        <p:blipFill>
-          <a:blip r:embed="rId2">
-            <a:extLst>
-              <a:ext uri="{28A0092B-C50C-407E-A947-70E740481C1C}">
-                <a14:useLocalDpi xmlns:a14="http://schemas.microsoft.com/office/drawing/2010/main" val="0"/>
-              </a:ext>
-            </a:extLst>
-          </a:blip>
-          <a:srcRect/>
-          <a:stretch>
-            <a:fillRect/>
-          </a:stretch>
-        </p:blipFill>
-        <p:spPr bwMode="auto">
-          <a:xfrm>
-            <a:off x="1787330" y="1386578"/>
-            <a:ext cx="8617340" cy="5334897"/>
-          </a:xfrm>
-          <a:prstGeom prst="rect">
-            <a:avLst/>
-          </a:prstGeom>
-          <a:noFill/>
-          <a:extLst>
-            <a:ext uri="{909E8E84-426E-40DD-AFC4-6F175D3DCCD1}">
-              <a14:hiddenFill xmlns:a14="http://schemas.microsoft.com/office/drawing/2010/main">
-                <a:solidFill>
-                  <a:srgbClr val="FFFFFF"/>
-                </a:solidFill>
-              </a14:hiddenFill>
-            </a:ext>
-          </a:extLst>
-        </p:spPr>
-      </p:pic>
     </p:spTree>
     <p:extLst>
       <p:ext uri="{BB962C8B-B14F-4D97-AF65-F5344CB8AC3E}">
-        <p14:creationId xmlns:p14="http://schemas.microsoft.com/office/powerpoint/2010/main" val="390680938"/>
+        <p14:creationId xmlns:p14="http://schemas.microsoft.com/office/powerpoint/2010/main" val="2638188608"/>
       </p:ext>
     </p:extLst>
   </p:cSld>
@@ -9641,10 +13527,10 @@
       </p:grpSpPr>
       <p:sp>
         <p:nvSpPr>
-          <p:cNvPr id="3" name="Titel 2">
-            <a:extLst>
-              <a:ext uri="{FF2B5EF4-FFF2-40B4-BE49-F238E27FC236}">
-                <a16:creationId xmlns:a16="http://schemas.microsoft.com/office/drawing/2014/main" id="{3E5EF26E-96B1-27BE-03F5-79AA27F58A84}"/>
+          <p:cNvPr id="2" name="Titel 1">
+            <a:extLst>
+              <a:ext uri="{FF2B5EF4-FFF2-40B4-BE49-F238E27FC236}">
+                <a16:creationId xmlns:a16="http://schemas.microsoft.com/office/drawing/2014/main" id="{91161FD2-1411-8BB8-D755-1F422C1937A4}"/>
               </a:ext>
             </a:extLst>
           </p:cNvPr>
@@ -9662,21 +13548,42 @@
           <a:p>
             <a:r>
               <a:rPr lang="de-DE" dirty="0" err="1"/>
-              <a:t>k-Means</a:t>
-            </a:r>
-            <a:r>
-              <a:rPr lang="de-DE" dirty="0"/>
-              <a:t>: Intuition</a:t>
-            </a:r>
-          </a:p>
-        </p:txBody>
-      </p:sp>
-      <p:sp>
-        <p:nvSpPr>
-          <p:cNvPr id="2" name="Foliennummernplatzhalter 1">
-            <a:extLst>
-              <a:ext uri="{FF2B5EF4-FFF2-40B4-BE49-F238E27FC236}">
-                <a16:creationId xmlns:a16="http://schemas.microsoft.com/office/drawing/2014/main" id="{93F3BDB8-AB06-D6F6-923D-DBA0EE4E79AE}"/>
+              <a:t>Overview</a:t>
+            </a:r>
+            <a:r>
+              <a:rPr lang="de-DE" dirty="0"/>
+              <a:t> </a:t>
+            </a:r>
+            <a:r>
+              <a:rPr lang="de-DE" dirty="0" err="1"/>
+              <a:t>of</a:t>
+            </a:r>
+            <a:r>
+              <a:rPr lang="de-DE" dirty="0"/>
+              <a:t> </a:t>
+            </a:r>
+            <a:r>
+              <a:rPr lang="de-DE" dirty="0" err="1"/>
+              <a:t>scikit-learn</a:t>
+            </a:r>
+            <a:r>
+              <a:rPr lang="de-DE" dirty="0"/>
+              <a:t> Clustering </a:t>
+            </a:r>
+            <a:r>
+              <a:rPr lang="de-DE" dirty="0" err="1"/>
+              <a:t>Algorithms</a:t>
+            </a:r>
+            <a:endParaRPr lang="de-DE" dirty="0"/>
+          </a:p>
+        </p:txBody>
+      </p:sp>
+      <p:sp>
+        <p:nvSpPr>
+          <p:cNvPr id="4" name="Foliennummernplatzhalter 3">
+            <a:extLst>
+              <a:ext uri="{FF2B5EF4-FFF2-40B4-BE49-F238E27FC236}">
+                <a16:creationId xmlns:a16="http://schemas.microsoft.com/office/drawing/2014/main" id="{0872D469-9E39-C0DF-2321-08C1385A8014}"/>
               </a:ext>
             </a:extLst>
           </p:cNvPr>
@@ -9702,10 +13609,10 @@
       </p:sp>
       <p:pic>
         <p:nvPicPr>
-          <p:cNvPr id="2050" name="Picture 2" descr="K-means clustering on the digits dataset (PCA-reduced data) Centroids are marked with white cross">
-            <a:extLst>
-              <a:ext uri="{FF2B5EF4-FFF2-40B4-BE49-F238E27FC236}">
-                <a16:creationId xmlns:a16="http://schemas.microsoft.com/office/drawing/2014/main" id="{B44A8871-A62C-5BCB-319E-EB2705B9E077}"/>
+          <p:cNvPr id="1026" name="Picture 2" descr="MiniBatch KMeans, Affinity Propagation, MeanShift, Spectral Clustering, Ward, Agglomerative Clustering, DBSCAN, HDBSCAN, OPTICS, BIRCH, Gaussian Mixture">
+            <a:extLst>
+              <a:ext uri="{FF2B5EF4-FFF2-40B4-BE49-F238E27FC236}">
+                <a16:creationId xmlns:a16="http://schemas.microsoft.com/office/drawing/2014/main" id="{CCCCBEB2-AD32-344D-3161-053446F1D955}"/>
               </a:ext>
             </a:extLst>
           </p:cNvPr>
@@ -9729,8 +13636,8 @@
         </p:blipFill>
         <p:spPr bwMode="auto">
           <a:xfrm>
-            <a:off x="2647397" y="1690688"/>
-            <a:ext cx="6897205" cy="5172903"/>
+            <a:off x="1787330" y="1523103"/>
+            <a:ext cx="8617340" cy="5334897"/>
           </a:xfrm>
           <a:prstGeom prst="rect">
             <a:avLst/>
@@ -9750,7 +13657,7 @@
     </p:spTree>
     <p:extLst>
       <p:ext uri="{BB962C8B-B14F-4D97-AF65-F5344CB8AC3E}">
-        <p14:creationId xmlns:p14="http://schemas.microsoft.com/office/powerpoint/2010/main" val="2526389082"/>
+        <p14:creationId xmlns:p14="http://schemas.microsoft.com/office/powerpoint/2010/main" val="390680938"/>
       </p:ext>
     </p:extLst>
   </p:cSld>

--- a/slides/2_clustering.pptx
+++ b/slides/2_clustering.pptx
@@ -5,7 +5,7 @@
     <p:sldMasterId id="2147483648" r:id="rId1"/>
   </p:sldMasterIdLst>
   <p:notesMasterIdLst>
-    <p:notesMasterId r:id="rId31"/>
+    <p:notesMasterId r:id="rId30"/>
   </p:notesMasterIdLst>
   <p:sldIdLst>
     <p:sldId id="256" r:id="rId2"/>
@@ -24,19 +24,18 @@
     <p:sldId id="274" r:id="rId15"/>
     <p:sldId id="288" r:id="rId16"/>
     <p:sldId id="273" r:id="rId17"/>
-    <p:sldId id="291" r:id="rId18"/>
-    <p:sldId id="287" r:id="rId19"/>
-    <p:sldId id="286" r:id="rId20"/>
-    <p:sldId id="275" r:id="rId21"/>
-    <p:sldId id="276" r:id="rId22"/>
-    <p:sldId id="277" r:id="rId23"/>
-    <p:sldId id="278" r:id="rId24"/>
-    <p:sldId id="279" r:id="rId25"/>
-    <p:sldId id="280" r:id="rId26"/>
-    <p:sldId id="281" r:id="rId27"/>
-    <p:sldId id="282" r:id="rId28"/>
-    <p:sldId id="283" r:id="rId29"/>
-    <p:sldId id="284" r:id="rId30"/>
+    <p:sldId id="283" r:id="rId18"/>
+    <p:sldId id="282" r:id="rId19"/>
+    <p:sldId id="291" r:id="rId20"/>
+    <p:sldId id="287" r:id="rId21"/>
+    <p:sldId id="286" r:id="rId22"/>
+    <p:sldId id="275" r:id="rId23"/>
+    <p:sldId id="276" r:id="rId24"/>
+    <p:sldId id="277" r:id="rId25"/>
+    <p:sldId id="278" r:id="rId26"/>
+    <p:sldId id="279" r:id="rId27"/>
+    <p:sldId id="280" r:id="rId28"/>
+    <p:sldId id="281" r:id="rId29"/>
   </p:sldIdLst>
   <p:sldSz cx="12192000" cy="6858000"/>
   <p:notesSz cx="6858000" cy="9144000"/>
@@ -507,7 +506,7 @@
           <a:p>
             <a:fld id="{506E0FD1-891F-4B1E-916D-E9B585160BB8}" type="datetimeFigureOut">
               <a:rPr lang="en-GB" smtClean="0"/>
-              <a:t>07/03/2026</a:t>
+              <a:t>08/03/2026</a:t>
             </a:fld>
             <a:endParaRPr lang="en-GB"/>
           </a:p>
@@ -924,7 +923,7 @@
           <a:p>
             <a:fld id="{D68C3F22-27B2-44E3-9C5F-D08126455F6F}" type="datetime1">
               <a:rPr lang="en-GB" smtClean="0"/>
-              <a:t>07/03/2026</a:t>
+              <a:t>08/03/2026</a:t>
             </a:fld>
             <a:endParaRPr lang="en-GB"/>
           </a:p>
@@ -1124,7 +1123,7 @@
           <a:p>
             <a:fld id="{1CD03846-7BF6-4FB6-A921-FF3379ADBD4C}" type="datetime1">
               <a:rPr lang="en-GB" smtClean="0"/>
-              <a:t>07/03/2026</a:t>
+              <a:t>08/03/2026</a:t>
             </a:fld>
             <a:endParaRPr lang="en-GB"/>
           </a:p>
@@ -1334,7 +1333,7 @@
           <a:p>
             <a:fld id="{99E1B91A-3FD0-4144-9C84-63E9688ED2FE}" type="datetime1">
               <a:rPr lang="en-GB" smtClean="0"/>
-              <a:t>07/03/2026</a:t>
+              <a:t>08/03/2026</a:t>
             </a:fld>
             <a:endParaRPr lang="en-GB"/>
           </a:p>
@@ -1534,7 +1533,7 @@
           <a:p>
             <a:fld id="{5295ED7B-FEAD-4734-819F-93EF4B0EA908}" type="datetime1">
               <a:rPr lang="en-GB" smtClean="0"/>
-              <a:t>07/03/2026</a:t>
+              <a:t>08/03/2026</a:t>
             </a:fld>
             <a:endParaRPr lang="en-GB"/>
           </a:p>
@@ -1810,7 +1809,7 @@
           <a:p>
             <a:fld id="{D2D5D4B4-C926-4B45-8815-1ED8911179A2}" type="datetime1">
               <a:rPr lang="en-GB" smtClean="0"/>
-              <a:t>07/03/2026</a:t>
+              <a:t>08/03/2026</a:t>
             </a:fld>
             <a:endParaRPr lang="en-GB"/>
           </a:p>
@@ -2078,7 +2077,7 @@
           <a:p>
             <a:fld id="{B4C5210A-0E37-4935-93AF-69F21A5F712F}" type="datetime1">
               <a:rPr lang="en-GB" smtClean="0"/>
-              <a:t>07/03/2026</a:t>
+              <a:t>08/03/2026</a:t>
             </a:fld>
             <a:endParaRPr lang="en-GB"/>
           </a:p>
@@ -2493,7 +2492,7 @@
           <a:p>
             <a:fld id="{3D3A6B2F-436C-4691-80E8-9C890E000E9D}" type="datetime1">
               <a:rPr lang="en-GB" smtClean="0"/>
-              <a:t>07/03/2026</a:t>
+              <a:t>08/03/2026</a:t>
             </a:fld>
             <a:endParaRPr lang="en-GB"/>
           </a:p>
@@ -2635,7 +2634,7 @@
           <a:p>
             <a:fld id="{84385F4C-D74B-496F-8D21-97E3549C783B}" type="datetime1">
               <a:rPr lang="en-GB" smtClean="0"/>
-              <a:t>07/03/2026</a:t>
+              <a:t>08/03/2026</a:t>
             </a:fld>
             <a:endParaRPr lang="en-GB"/>
           </a:p>
@@ -2748,7 +2747,7 @@
           <a:p>
             <a:fld id="{0CBDCB32-C241-4703-A832-4EB47BD54E83}" type="datetime1">
               <a:rPr lang="en-GB" smtClean="0"/>
-              <a:t>07/03/2026</a:t>
+              <a:t>08/03/2026</a:t>
             </a:fld>
             <a:endParaRPr lang="en-GB"/>
           </a:p>
@@ -3061,7 +3060,7 @@
           <a:p>
             <a:fld id="{85C150FF-BE95-4D25-A16A-E368A81CBF24}" type="datetime1">
               <a:rPr lang="en-GB" smtClean="0"/>
-              <a:t>07/03/2026</a:t>
+              <a:t>08/03/2026</a:t>
             </a:fld>
             <a:endParaRPr lang="en-GB"/>
           </a:p>
@@ -3350,7 +3349,7 @@
           <a:p>
             <a:fld id="{F3C5DB4B-B349-43C9-A424-BADA723AD9F1}" type="datetime1">
               <a:rPr lang="en-GB" smtClean="0"/>
-              <a:t>07/03/2026</a:t>
+              <a:t>08/03/2026</a:t>
             </a:fld>
             <a:endParaRPr lang="en-GB"/>
           </a:p>
@@ -3593,7 +3592,7 @@
           <a:p>
             <a:fld id="{12632426-0A0C-405F-A3D0-2D11AA44702A}" type="datetime1">
               <a:rPr lang="en-GB" smtClean="0"/>
-              <a:t>07/03/2026</a:t>
+              <a:t>08/03/2026</a:t>
             </a:fld>
             <a:endParaRPr lang="en-GB"/>
           </a:p>
@@ -5221,8 +5220,8 @@
           </a:p>
         </p:txBody>
       </p:sp>
-      <mc:AlternateContent xmlns:mc="http://schemas.openxmlformats.org/markup-compatibility/2006">
-        <mc:Choice xmlns:a14="http://schemas.microsoft.com/office/drawing/2010/main" Requires="a14">
+      <mc:AlternateContent xmlns:mc="http://schemas.openxmlformats.org/markup-compatibility/2006" xmlns:a14="http://schemas.microsoft.com/office/drawing/2010/main">
+        <mc:Choice Requires="a14">
           <p:sp>
             <p:nvSpPr>
               <p:cNvPr id="3" name="Inhaltsplatzhalter 2">
@@ -5581,7 +5580,7 @@
             </p:txBody>
           </p:sp>
         </mc:Choice>
-        <mc:Fallback>
+        <mc:Fallback xmlns="">
           <p:sp>
             <p:nvSpPr>
               <p:cNvPr id="3" name="Inhaltsplatzhalter 2">
@@ -5953,44 +5952,1321 @@
           <a:p>
             <a:r>
               <a:rPr lang="de-DE" dirty="0"/>
-              <a:t>… Mean L2 </a:t>
-            </a:r>
-            <a:r>
-              <a:rPr lang="de-DE" dirty="0" err="1"/>
-              <a:t>vs</a:t>
-            </a:r>
-            <a:r>
-              <a:rPr lang="de-DE" dirty="0"/>
-              <a:t> Median L1 …</a:t>
-            </a:r>
+              <a:t>L2 </a:t>
+            </a:r>
+            <a:r>
+              <a:rPr lang="de-DE" dirty="0">
+                <a:sym typeface="Wingdings" pitchFamily="2" charset="2"/>
+              </a:rPr>
+              <a:t> Mean, </a:t>
+            </a:r>
+            <a:r>
+              <a:rPr lang="de-DE" dirty="0"/>
+              <a:t> L1 </a:t>
+            </a:r>
+            <a:r>
+              <a:rPr lang="de-DE" dirty="0">
+                <a:sym typeface="Wingdings" pitchFamily="2" charset="2"/>
+              </a:rPr>
+              <a:t> Median</a:t>
+            </a:r>
+            <a:endParaRPr lang="de-DE" dirty="0"/>
           </a:p>
         </p:txBody>
       </p:sp>
-      <p:sp>
-        <p:nvSpPr>
-          <p:cNvPr id="3" name="Inhaltsplatzhalter 2">
-            <a:extLst>
-              <a:ext uri="{FF2B5EF4-FFF2-40B4-BE49-F238E27FC236}">
-                <a16:creationId xmlns:a16="http://schemas.microsoft.com/office/drawing/2014/main" id="{085BD90E-4E62-2134-AC41-EB7A9018D82B}"/>
-              </a:ext>
-            </a:extLst>
-          </p:cNvPr>
-          <p:cNvSpPr>
-            <a:spLocks noGrp="1"/>
-          </p:cNvSpPr>
-          <p:nvPr>
-            <p:ph idx="1"/>
-          </p:nvPr>
-        </p:nvSpPr>
-        <p:spPr/>
-        <p:txBody>
-          <a:bodyPr/>
-          <a:lstStyle/>
-          <a:p>
-            <a:endParaRPr lang="de-DE"/>
-          </a:p>
-        </p:txBody>
-      </p:sp>
+      <mc:AlternateContent xmlns:mc="http://schemas.openxmlformats.org/markup-compatibility/2006">
+        <mc:Choice xmlns:a14="http://schemas.microsoft.com/office/drawing/2010/main" Requires="a14">
+          <p:sp>
+            <p:nvSpPr>
+              <p:cNvPr id="5" name="Inhaltsplatzhalter 4">
+                <a:extLst>
+                  <a:ext uri="{FF2B5EF4-FFF2-40B4-BE49-F238E27FC236}">
+                    <a16:creationId xmlns:a16="http://schemas.microsoft.com/office/drawing/2014/main" id="{DB2D2E5C-783C-A264-2A40-ADE2D331F73F}"/>
+                  </a:ext>
+                </a:extLst>
+              </p:cNvPr>
+              <p:cNvSpPr>
+                <a:spLocks noGrp="1"/>
+              </p:cNvSpPr>
+              <p:nvPr>
+                <p:ph sz="half" idx="1"/>
+              </p:nvPr>
+            </p:nvSpPr>
+            <p:spPr/>
+            <p:txBody>
+              <a:bodyPr>
+                <a:normAutofit fontScale="92500" lnSpcReduction="20000"/>
+              </a:bodyPr>
+              <a:lstStyle/>
+              <a:p>
+                <a:pPr marL="0" indent="0">
+                  <a:buNone/>
+                </a:pPr>
+                <a:r>
+                  <a:rPr lang="de-DE" sz="3300" dirty="0"/>
+                  <a:t>L2 </a:t>
+                </a:r>
+                <a:r>
+                  <a:rPr lang="de-DE" sz="3300" dirty="0" err="1"/>
+                  <a:t>objective</a:t>
+                </a:r>
+                <a:r>
+                  <a:rPr lang="de-DE" sz="3300" dirty="0"/>
+                  <a:t>:</a:t>
+                </a:r>
+              </a:p>
+              <a:p>
+                <a:pPr marL="0" indent="0" algn="ctr">
+                  <a:buNone/>
+                </a:pPr>
+                <a:endParaRPr lang="de-DE" sz="2400" dirty="0"/>
+              </a:p>
+              <a:p>
+                <a:pPr marL="0" indent="0">
+                  <a:buNone/>
+                </a:pPr>
+                <a14:m>
+                  <m:oMathPara xmlns:m="http://schemas.openxmlformats.org/officeDocument/2006/math">
+                    <m:oMathParaPr>
+                      <m:jc m:val="left"/>
+                    </m:oMathParaPr>
+                    <m:oMath xmlns:m="http://schemas.openxmlformats.org/officeDocument/2006/math">
+                      <m:func>
+                        <m:funcPr>
+                          <m:ctrlPr>
+                            <a:rPr lang="de-DE" sz="2400" i="1" smtClean="0">
+                              <a:latin typeface="Cambria Math" panose="02040503050406030204" pitchFamily="18" charset="0"/>
+                            </a:rPr>
+                          </m:ctrlPr>
+                        </m:funcPr>
+                        <m:fName>
+                          <m:limLow>
+                            <m:limLowPr>
+                              <m:ctrlPr>
+                                <a:rPr lang="de-DE" sz="2400" i="1" smtClean="0">
+                                  <a:latin typeface="Cambria Math" panose="02040503050406030204" pitchFamily="18" charset="0"/>
+                                </a:rPr>
+                              </m:ctrlPr>
+                            </m:limLowPr>
+                            <m:e>
+                              <m:r>
+                                <m:rPr>
+                                  <m:sty m:val="p"/>
+                                </m:rPr>
+                                <a:rPr lang="de-DE" sz="2400" i="0" smtClean="0">
+                                  <a:latin typeface="Cambria Math" panose="02040503050406030204" pitchFamily="18" charset="0"/>
+                                </a:rPr>
+                                <m:t>min</m:t>
+                              </m:r>
+                            </m:e>
+                            <m:lim>
+                              <m:r>
+                                <a:rPr lang="de-DE" sz="2400" b="0" i="1" smtClean="0">
+                                  <a:latin typeface="Cambria Math" panose="02040503050406030204" pitchFamily="18" charset="0"/>
+                                </a:rPr>
+                                <m:t>𝑎</m:t>
+                              </m:r>
+                            </m:lim>
+                          </m:limLow>
+                        </m:fName>
+                        <m:e>
+                          <m:nary>
+                            <m:naryPr>
+                              <m:chr m:val="∑"/>
+                              <m:ctrlPr>
+                                <a:rPr lang="de-DE" sz="2400" i="1" smtClean="0">
+                                  <a:latin typeface="Cambria Math" panose="02040503050406030204" pitchFamily="18" charset="0"/>
+                                </a:rPr>
+                              </m:ctrlPr>
+                            </m:naryPr>
+                            <m:sub>
+                              <m:r>
+                                <m:rPr>
+                                  <m:brk m:alnAt="23"/>
+                                </m:rPr>
+                                <a:rPr lang="de-DE" sz="2400" b="0" i="1" smtClean="0">
+                                  <a:latin typeface="Cambria Math" panose="02040503050406030204" pitchFamily="18" charset="0"/>
+                                </a:rPr>
+                                <m:t>𝑖</m:t>
+                              </m:r>
+                              <m:r>
+                                <a:rPr lang="de-DE" sz="2400" b="0" i="1" smtClean="0">
+                                  <a:latin typeface="Cambria Math" panose="02040503050406030204" pitchFamily="18" charset="0"/>
+                                </a:rPr>
+                                <m:t>=1</m:t>
+                              </m:r>
+                            </m:sub>
+                            <m:sup>
+                              <m:r>
+                                <a:rPr lang="de-DE" sz="2400" b="0" i="1" smtClean="0">
+                                  <a:latin typeface="Cambria Math" panose="02040503050406030204" pitchFamily="18" charset="0"/>
+                                </a:rPr>
+                                <m:t>𝑛</m:t>
+                              </m:r>
+                            </m:sup>
+                            <m:e>
+                              <m:sSup>
+                                <m:sSupPr>
+                                  <m:ctrlPr>
+                                    <a:rPr lang="de-DE" sz="2400" i="1" smtClean="0">
+                                      <a:latin typeface="Cambria Math" panose="02040503050406030204" pitchFamily="18" charset="0"/>
+                                    </a:rPr>
+                                  </m:ctrlPr>
+                                </m:sSupPr>
+                                <m:e>
+                                  <m:d>
+                                    <m:dPr>
+                                      <m:ctrlPr>
+                                        <a:rPr lang="de-DE" sz="2400" i="1" smtClean="0">
+                                          <a:latin typeface="Cambria Math" panose="02040503050406030204" pitchFamily="18" charset="0"/>
+                                        </a:rPr>
+                                      </m:ctrlPr>
+                                    </m:dPr>
+                                    <m:e>
+                                      <m:sSub>
+                                        <m:sSubPr>
+                                          <m:ctrlPr>
+                                            <a:rPr lang="de-DE" sz="2400" i="1" smtClean="0">
+                                              <a:latin typeface="Cambria Math" panose="02040503050406030204" pitchFamily="18" charset="0"/>
+                                            </a:rPr>
+                                          </m:ctrlPr>
+                                        </m:sSubPr>
+                                        <m:e>
+                                          <m:r>
+                                            <a:rPr lang="de-DE" sz="2400" b="0" i="1" smtClean="0">
+                                              <a:latin typeface="Cambria Math" panose="02040503050406030204" pitchFamily="18" charset="0"/>
+                                            </a:rPr>
+                                            <m:t>𝑥</m:t>
+                                          </m:r>
+                                        </m:e>
+                                        <m:sub>
+                                          <m:r>
+                                            <a:rPr lang="de-DE" sz="2400" b="0" i="1" smtClean="0">
+                                              <a:latin typeface="Cambria Math" panose="02040503050406030204" pitchFamily="18" charset="0"/>
+                                            </a:rPr>
+                                            <m:t>𝑖</m:t>
+                                          </m:r>
+                                        </m:sub>
+                                      </m:sSub>
+                                      <m:r>
+                                        <a:rPr lang="de-DE" sz="2400" b="0" i="1" smtClean="0">
+                                          <a:latin typeface="Cambria Math" panose="02040503050406030204" pitchFamily="18" charset="0"/>
+                                        </a:rPr>
+                                        <m:t>−</m:t>
+                                      </m:r>
+                                      <m:r>
+                                        <a:rPr lang="de-DE" sz="2400" b="0" i="1" smtClean="0">
+                                          <a:latin typeface="Cambria Math" panose="02040503050406030204" pitchFamily="18" charset="0"/>
+                                        </a:rPr>
+                                        <m:t>𝑎</m:t>
+                                      </m:r>
+                                    </m:e>
+                                  </m:d>
+                                </m:e>
+                                <m:sup>
+                                  <m:r>
+                                    <a:rPr lang="de-DE" sz="2400" b="0" i="1" smtClean="0">
+                                      <a:latin typeface="Cambria Math" panose="02040503050406030204" pitchFamily="18" charset="0"/>
+                                    </a:rPr>
+                                    <m:t>2</m:t>
+                                  </m:r>
+                                </m:sup>
+                              </m:sSup>
+                            </m:e>
+                          </m:nary>
+                        </m:e>
+                      </m:func>
+                    </m:oMath>
+                  </m:oMathPara>
+                </a14:m>
+                <a:endParaRPr lang="de-DE" sz="2400" dirty="0"/>
+              </a:p>
+              <a:p>
+                <a:pPr marL="0" indent="0">
+                  <a:buNone/>
+                </a:pPr>
+                <a:endParaRPr lang="de-DE" sz="2400" dirty="0"/>
+              </a:p>
+              <a:p>
+                <a:pPr marL="0" indent="0">
+                  <a:buNone/>
+                </a:pPr>
+                <a14:m>
+                  <m:oMathPara xmlns:m="http://schemas.openxmlformats.org/officeDocument/2006/math">
+                    <m:oMathParaPr>
+                      <m:jc m:val="left"/>
+                    </m:oMathParaPr>
+                    <m:oMath xmlns:m="http://schemas.openxmlformats.org/officeDocument/2006/math">
+                      <m:f>
+                        <m:fPr>
+                          <m:ctrlPr>
+                            <a:rPr lang="de-DE" sz="2400" i="1" smtClean="0">
+                              <a:latin typeface="Cambria Math" panose="02040503050406030204" pitchFamily="18" charset="0"/>
+                            </a:rPr>
+                          </m:ctrlPr>
+                        </m:fPr>
+                        <m:num>
+                          <m:r>
+                            <a:rPr lang="de-DE" sz="2400" i="1" smtClean="0">
+                              <a:latin typeface="Cambria Math" panose="02040503050406030204" pitchFamily="18" charset="0"/>
+                            </a:rPr>
+                            <m:t>𝑑</m:t>
+                          </m:r>
+                        </m:num>
+                        <m:den>
+                          <m:r>
+                            <a:rPr lang="de-DE" sz="2400" i="1" smtClean="0">
+                              <a:latin typeface="Cambria Math" panose="02040503050406030204" pitchFamily="18" charset="0"/>
+                            </a:rPr>
+                            <m:t>𝑑</m:t>
+                          </m:r>
+                          <m:r>
+                            <a:rPr lang="de-DE" sz="2400" b="0" i="1" smtClean="0">
+                              <a:latin typeface="Cambria Math" panose="02040503050406030204" pitchFamily="18" charset="0"/>
+                            </a:rPr>
+                            <m:t>𝑎</m:t>
+                          </m:r>
+                        </m:den>
+                      </m:f>
+                      <m:nary>
+                        <m:naryPr>
+                          <m:chr m:val="∑"/>
+                          <m:subHide m:val="on"/>
+                          <m:supHide m:val="on"/>
+                          <m:ctrlPr>
+                            <a:rPr lang="de-DE" sz="2400" i="1">
+                              <a:latin typeface="Cambria Math" panose="02040503050406030204" pitchFamily="18" charset="0"/>
+                            </a:rPr>
+                          </m:ctrlPr>
+                        </m:naryPr>
+                        <m:sub/>
+                        <m:sup/>
+                        <m:e>
+                          <m:sSup>
+                            <m:sSupPr>
+                              <m:ctrlPr>
+                                <a:rPr lang="de-DE" sz="2400" i="1">
+                                  <a:latin typeface="Cambria Math" panose="02040503050406030204" pitchFamily="18" charset="0"/>
+                                </a:rPr>
+                              </m:ctrlPr>
+                            </m:sSupPr>
+                            <m:e>
+                              <m:d>
+                                <m:dPr>
+                                  <m:ctrlPr>
+                                    <a:rPr lang="de-DE" sz="2400" i="1">
+                                      <a:latin typeface="Cambria Math" panose="02040503050406030204" pitchFamily="18" charset="0"/>
+                                    </a:rPr>
+                                  </m:ctrlPr>
+                                </m:dPr>
+                                <m:e>
+                                  <m:sSub>
+                                    <m:sSubPr>
+                                      <m:ctrlPr>
+                                        <a:rPr lang="de-DE" sz="2400" i="1">
+                                          <a:latin typeface="Cambria Math" panose="02040503050406030204" pitchFamily="18" charset="0"/>
+                                        </a:rPr>
+                                      </m:ctrlPr>
+                                    </m:sSubPr>
+                                    <m:e>
+                                      <m:r>
+                                        <a:rPr lang="de-DE" sz="2400" i="1">
+                                          <a:latin typeface="Cambria Math" panose="02040503050406030204" pitchFamily="18" charset="0"/>
+                                        </a:rPr>
+                                        <m:t>𝑥</m:t>
+                                      </m:r>
+                                    </m:e>
+                                    <m:sub>
+                                      <m:r>
+                                        <a:rPr lang="de-DE" sz="2400" i="1">
+                                          <a:latin typeface="Cambria Math" panose="02040503050406030204" pitchFamily="18" charset="0"/>
+                                        </a:rPr>
+                                        <m:t>𝑖</m:t>
+                                      </m:r>
+                                    </m:sub>
+                                  </m:sSub>
+                                  <m:r>
+                                    <a:rPr lang="de-DE" sz="2400" i="1">
+                                      <a:latin typeface="Cambria Math" panose="02040503050406030204" pitchFamily="18" charset="0"/>
+                                    </a:rPr>
+                                    <m:t>−</m:t>
+                                  </m:r>
+                                  <m:r>
+                                    <a:rPr lang="de-DE" sz="2400" i="1">
+                                      <a:latin typeface="Cambria Math" panose="02040503050406030204" pitchFamily="18" charset="0"/>
+                                    </a:rPr>
+                                    <m:t>𝑎</m:t>
+                                  </m:r>
+                                </m:e>
+                              </m:d>
+                            </m:e>
+                            <m:sup>
+                              <m:r>
+                                <a:rPr lang="de-DE" sz="2400" i="1">
+                                  <a:latin typeface="Cambria Math" panose="02040503050406030204" pitchFamily="18" charset="0"/>
+                                </a:rPr>
+                                <m:t>2</m:t>
+                              </m:r>
+                            </m:sup>
+                          </m:sSup>
+                        </m:e>
+                      </m:nary>
+                      <m:r>
+                        <a:rPr lang="de-DE" sz="2400" b="0" i="1" smtClean="0">
+                          <a:latin typeface="Cambria Math" panose="02040503050406030204" pitchFamily="18" charset="0"/>
+                        </a:rPr>
+                        <m:t>=0</m:t>
+                      </m:r>
+                    </m:oMath>
+                  </m:oMathPara>
+                </a14:m>
+                <a:endParaRPr lang="de-DE" sz="2400" b="0" dirty="0"/>
+              </a:p>
+              <a:p>
+                <a:pPr marL="0" indent="0">
+                  <a:buNone/>
+                </a:pPr>
+                <a:endParaRPr lang="de-DE" sz="2400" b="0" dirty="0"/>
+              </a:p>
+              <a:p>
+                <a:pPr marL="0" indent="0">
+                  <a:buNone/>
+                </a:pPr>
+                <a14:m>
+                  <m:oMathPara xmlns:m="http://schemas.openxmlformats.org/officeDocument/2006/math">
+                    <m:oMathParaPr>
+                      <m:jc m:val="left"/>
+                    </m:oMathParaPr>
+                    <m:oMath xmlns:m="http://schemas.openxmlformats.org/officeDocument/2006/math">
+                      <m:r>
+                        <a:rPr lang="de-DE" sz="2400" i="1" smtClean="0">
+                          <a:latin typeface="Cambria Math" panose="02040503050406030204" pitchFamily="18" charset="0"/>
+                          <a:ea typeface="Cambria Math" panose="02040503050406030204" pitchFamily="18" charset="0"/>
+                        </a:rPr>
+                        <m:t>⇒</m:t>
+                      </m:r>
+                      <m:nary>
+                        <m:naryPr>
+                          <m:chr m:val="∑"/>
+                          <m:subHide m:val="on"/>
+                          <m:supHide m:val="on"/>
+                          <m:ctrlPr>
+                            <a:rPr lang="de-DE" sz="2400" i="1">
+                              <a:latin typeface="Cambria Math" panose="02040503050406030204" pitchFamily="18" charset="0"/>
+                            </a:rPr>
+                          </m:ctrlPr>
+                        </m:naryPr>
+                        <m:sub/>
+                        <m:sup/>
+                        <m:e>
+                          <m:d>
+                            <m:dPr>
+                              <m:ctrlPr>
+                                <a:rPr lang="de-DE" sz="2400" i="1">
+                                  <a:latin typeface="Cambria Math" panose="02040503050406030204" pitchFamily="18" charset="0"/>
+                                </a:rPr>
+                              </m:ctrlPr>
+                            </m:dPr>
+                            <m:e>
+                              <m:r>
+                                <a:rPr lang="de-DE" sz="2400" b="0" i="1" smtClean="0">
+                                  <a:latin typeface="Cambria Math" panose="02040503050406030204" pitchFamily="18" charset="0"/>
+                                </a:rPr>
+                                <m:t>𝑎</m:t>
+                              </m:r>
+                              <m:r>
+                                <a:rPr lang="de-DE" sz="2400" b="0" i="1" smtClean="0">
+                                  <a:latin typeface="Cambria Math" panose="02040503050406030204" pitchFamily="18" charset="0"/>
+                                </a:rPr>
+                                <m:t>−</m:t>
+                              </m:r>
+                              <m:sSub>
+                                <m:sSubPr>
+                                  <m:ctrlPr>
+                                    <a:rPr lang="de-DE" sz="2400" i="1">
+                                      <a:latin typeface="Cambria Math" panose="02040503050406030204" pitchFamily="18" charset="0"/>
+                                    </a:rPr>
+                                  </m:ctrlPr>
+                                </m:sSubPr>
+                                <m:e>
+                                  <m:r>
+                                    <a:rPr lang="de-DE" sz="2400" i="1">
+                                      <a:latin typeface="Cambria Math" panose="02040503050406030204" pitchFamily="18" charset="0"/>
+                                    </a:rPr>
+                                    <m:t>𝑥</m:t>
+                                  </m:r>
+                                </m:e>
+                                <m:sub>
+                                  <m:r>
+                                    <a:rPr lang="de-DE" sz="2400" i="1">
+                                      <a:latin typeface="Cambria Math" panose="02040503050406030204" pitchFamily="18" charset="0"/>
+                                    </a:rPr>
+                                    <m:t>𝑖</m:t>
+                                  </m:r>
+                                </m:sub>
+                              </m:sSub>
+                            </m:e>
+                          </m:d>
+                        </m:e>
+                      </m:nary>
+                      <m:r>
+                        <a:rPr lang="de-DE" sz="2400" b="0" i="1" smtClean="0">
+                          <a:latin typeface="Cambria Math" panose="02040503050406030204" pitchFamily="18" charset="0"/>
+                        </a:rPr>
+                        <m:t>=0</m:t>
+                      </m:r>
+                      <m:r>
+                        <a:rPr lang="de-DE" sz="2400" b="0" i="0" smtClean="0">
+                          <a:latin typeface="Cambria Math" panose="02040503050406030204" pitchFamily="18" charset="0"/>
+                        </a:rPr>
+                        <m:t> </m:t>
+                      </m:r>
+                      <m:r>
+                        <a:rPr lang="de-DE" sz="2400" b="0" i="1" smtClean="0">
+                          <a:latin typeface="Cambria Math" panose="02040503050406030204" pitchFamily="18" charset="0"/>
+                          <a:ea typeface="Cambria Math" panose="02040503050406030204" pitchFamily="18" charset="0"/>
+                        </a:rPr>
+                        <m:t>⇒</m:t>
+                      </m:r>
+                      <m:r>
+                        <a:rPr lang="de-DE" sz="2400" b="0" i="1" smtClean="0">
+                          <a:latin typeface="Cambria Math" panose="02040503050406030204" pitchFamily="18" charset="0"/>
+                        </a:rPr>
+                        <m:t>𝑛𝑎</m:t>
+                      </m:r>
+                      <m:r>
+                        <a:rPr lang="de-DE" sz="2400" b="0" i="1" smtClean="0">
+                          <a:latin typeface="Cambria Math" panose="02040503050406030204" pitchFamily="18" charset="0"/>
+                        </a:rPr>
+                        <m:t>−</m:t>
+                      </m:r>
+                      <m:nary>
+                        <m:naryPr>
+                          <m:chr m:val="∑"/>
+                          <m:subHide m:val="on"/>
+                          <m:supHide m:val="on"/>
+                          <m:ctrlPr>
+                            <a:rPr lang="de-DE" sz="2400" b="0" i="1" smtClean="0">
+                              <a:latin typeface="Cambria Math" panose="02040503050406030204" pitchFamily="18" charset="0"/>
+                            </a:rPr>
+                          </m:ctrlPr>
+                        </m:naryPr>
+                        <m:sub/>
+                        <m:sup/>
+                        <m:e>
+                          <m:sSub>
+                            <m:sSubPr>
+                              <m:ctrlPr>
+                                <a:rPr lang="de-DE" sz="2400" i="1">
+                                  <a:latin typeface="Cambria Math" panose="02040503050406030204" pitchFamily="18" charset="0"/>
+                                </a:rPr>
+                              </m:ctrlPr>
+                            </m:sSubPr>
+                            <m:e>
+                              <m:r>
+                                <a:rPr lang="de-DE" sz="2400" i="1">
+                                  <a:latin typeface="Cambria Math" panose="02040503050406030204" pitchFamily="18" charset="0"/>
+                                </a:rPr>
+                                <m:t>𝑥</m:t>
+                              </m:r>
+                            </m:e>
+                            <m:sub>
+                              <m:r>
+                                <a:rPr lang="de-DE" sz="2400" i="1">
+                                  <a:latin typeface="Cambria Math" panose="02040503050406030204" pitchFamily="18" charset="0"/>
+                                </a:rPr>
+                                <m:t>𝑖</m:t>
+                              </m:r>
+                            </m:sub>
+                          </m:sSub>
+                        </m:e>
+                      </m:nary>
+                      <m:r>
+                        <a:rPr lang="de-DE" sz="2400" b="0" i="1" smtClean="0">
+                          <a:latin typeface="Cambria Math" panose="02040503050406030204" pitchFamily="18" charset="0"/>
+                        </a:rPr>
+                        <m:t>=0</m:t>
+                      </m:r>
+                    </m:oMath>
+                  </m:oMathPara>
+                </a14:m>
+                <a:endParaRPr lang="de-DE" sz="2400" b="0" dirty="0"/>
+              </a:p>
+              <a:p>
+                <a:pPr marL="0" indent="0">
+                  <a:buNone/>
+                </a:pPr>
+                <a14:m>
+                  <m:oMath xmlns:m="http://schemas.openxmlformats.org/officeDocument/2006/math">
+                    <m:r>
+                      <a:rPr lang="de-DE" sz="2400" i="1">
+                        <a:latin typeface="Cambria Math" panose="02040503050406030204" pitchFamily="18" charset="0"/>
+                        <a:ea typeface="Cambria Math" panose="02040503050406030204" pitchFamily="18" charset="0"/>
+                      </a:rPr>
+                      <m:t>⇒</m:t>
+                    </m:r>
+                    <m:r>
+                      <a:rPr lang="de-DE" sz="2400" b="0" i="1" smtClean="0">
+                        <a:latin typeface="Cambria Math" panose="02040503050406030204" pitchFamily="18" charset="0"/>
+                      </a:rPr>
+                      <m:t>𝑎</m:t>
+                    </m:r>
+                    <m:r>
+                      <a:rPr lang="de-DE" sz="2400" b="0" i="1" smtClean="0">
+                        <a:latin typeface="Cambria Math" panose="02040503050406030204" pitchFamily="18" charset="0"/>
+                      </a:rPr>
+                      <m:t>=</m:t>
+                    </m:r>
+                    <m:f>
+                      <m:fPr>
+                        <m:ctrlPr>
+                          <a:rPr lang="de-DE" sz="2400" b="0" i="1" smtClean="0">
+                            <a:latin typeface="Cambria Math" panose="02040503050406030204" pitchFamily="18" charset="0"/>
+                          </a:rPr>
+                        </m:ctrlPr>
+                      </m:fPr>
+                      <m:num>
+                        <m:r>
+                          <a:rPr lang="de-DE" sz="2400" b="0" i="1" smtClean="0">
+                            <a:latin typeface="Cambria Math" panose="02040503050406030204" pitchFamily="18" charset="0"/>
+                          </a:rPr>
+                          <m:t>1</m:t>
+                        </m:r>
+                      </m:num>
+                      <m:den>
+                        <m:r>
+                          <a:rPr lang="de-DE" sz="2400" b="0" i="1" smtClean="0">
+                            <a:latin typeface="Cambria Math" panose="02040503050406030204" pitchFamily="18" charset="0"/>
+                          </a:rPr>
+                          <m:t>𝑛</m:t>
+                        </m:r>
+                      </m:den>
+                    </m:f>
+                    <m:nary>
+                      <m:naryPr>
+                        <m:chr m:val="∑"/>
+                        <m:ctrlPr>
+                          <a:rPr lang="de-DE" sz="2400" b="0" i="1" smtClean="0">
+                            <a:latin typeface="Cambria Math" panose="02040503050406030204" pitchFamily="18" charset="0"/>
+                          </a:rPr>
+                        </m:ctrlPr>
+                      </m:naryPr>
+                      <m:sub>
+                        <m:r>
+                          <m:rPr>
+                            <m:brk m:alnAt="23"/>
+                          </m:rPr>
+                          <a:rPr lang="de-DE" sz="2400" b="0" i="1" smtClean="0">
+                            <a:latin typeface="Cambria Math" panose="02040503050406030204" pitchFamily="18" charset="0"/>
+                          </a:rPr>
+                          <m:t>𝑖</m:t>
+                        </m:r>
+                        <m:r>
+                          <a:rPr lang="de-DE" sz="2400" b="0" i="1" smtClean="0">
+                            <a:latin typeface="Cambria Math" panose="02040503050406030204" pitchFamily="18" charset="0"/>
+                          </a:rPr>
+                          <m:t>=1</m:t>
+                        </m:r>
+                      </m:sub>
+                      <m:sup>
+                        <m:r>
+                          <a:rPr lang="de-DE" sz="2400" b="0" i="1" smtClean="0">
+                            <a:latin typeface="Cambria Math" panose="02040503050406030204" pitchFamily="18" charset="0"/>
+                          </a:rPr>
+                          <m:t>𝑛</m:t>
+                        </m:r>
+                      </m:sup>
+                      <m:e>
+                        <m:sSub>
+                          <m:sSubPr>
+                            <m:ctrlPr>
+                              <a:rPr lang="de-DE" sz="2400" b="0" i="1" smtClean="0">
+                                <a:latin typeface="Cambria Math" panose="02040503050406030204" pitchFamily="18" charset="0"/>
+                              </a:rPr>
+                            </m:ctrlPr>
+                          </m:sSubPr>
+                          <m:e>
+                            <m:r>
+                              <a:rPr lang="de-DE" sz="2400" b="0" i="1" smtClean="0">
+                                <a:latin typeface="Cambria Math" panose="02040503050406030204" pitchFamily="18" charset="0"/>
+                              </a:rPr>
+                              <m:t>𝑥</m:t>
+                            </m:r>
+                          </m:e>
+                          <m:sub>
+                            <m:r>
+                              <a:rPr lang="de-DE" sz="2400" b="0" i="1" smtClean="0">
+                                <a:latin typeface="Cambria Math" panose="02040503050406030204" pitchFamily="18" charset="0"/>
+                              </a:rPr>
+                              <m:t>𝑖</m:t>
+                            </m:r>
+                          </m:sub>
+                        </m:sSub>
+                      </m:e>
+                    </m:nary>
+                  </m:oMath>
+                </a14:m>
+                <a:r>
+                  <a:rPr lang="de-DE" sz="2400" dirty="0"/>
+                  <a:t> </a:t>
+                </a:r>
+                <a:r>
+                  <a:rPr lang="de-DE" sz="2400" dirty="0">
+                    <a:sym typeface="Wingdings" pitchFamily="2" charset="2"/>
+                  </a:rPr>
+                  <a:t> </a:t>
+                </a:r>
+                <a:r>
+                  <a:rPr lang="de-DE" sz="2400" dirty="0" err="1">
+                    <a:sym typeface="Wingdings" pitchFamily="2" charset="2"/>
+                  </a:rPr>
+                  <a:t>mean</a:t>
+                </a:r>
+                <a:endParaRPr lang="de-DE" sz="2400" dirty="0"/>
+              </a:p>
+            </p:txBody>
+          </p:sp>
+        </mc:Choice>
+        <mc:Fallback>
+          <p:sp>
+            <p:nvSpPr>
+              <p:cNvPr id="5" name="Inhaltsplatzhalter 4">
+                <a:extLst>
+                  <a:ext uri="{FF2B5EF4-FFF2-40B4-BE49-F238E27FC236}">
+                    <a16:creationId xmlns:a16="http://schemas.microsoft.com/office/drawing/2014/main" id="{DB2D2E5C-783C-A264-2A40-ADE2D331F73F}"/>
+                  </a:ext>
+                </a:extLst>
+              </p:cNvPr>
+              <p:cNvSpPr>
+                <a:spLocks noGrp="1" noRot="1" noChangeAspect="1" noMove="1" noResize="1" noEditPoints="1" noAdjustHandles="1" noChangeArrowheads="1" noChangeShapeType="1" noTextEdit="1"/>
+              </p:cNvSpPr>
+              <p:nvPr>
+                <p:ph sz="half" idx="1"/>
+              </p:nvPr>
+            </p:nvSpPr>
+            <p:spPr>
+              <a:blipFill>
+                <a:blip r:embed="rId2"/>
+                <a:stretch>
+                  <a:fillRect l="-12958" t="-10174" b="-25581"/>
+                </a:stretch>
+              </a:blipFill>
+            </p:spPr>
+            <p:txBody>
+              <a:bodyPr/>
+              <a:lstStyle/>
+              <a:p>
+                <a:r>
+                  <a:rPr lang="de-DE">
+                    <a:noFill/>
+                  </a:rPr>
+                  <a:t> </a:t>
+                </a:r>
+              </a:p>
+            </p:txBody>
+          </p:sp>
+        </mc:Fallback>
+      </mc:AlternateContent>
+      <mc:AlternateContent xmlns:mc="http://schemas.openxmlformats.org/markup-compatibility/2006">
+        <mc:Choice xmlns:a14="http://schemas.microsoft.com/office/drawing/2010/main" Requires="a14">
+          <p:sp>
+            <p:nvSpPr>
+              <p:cNvPr id="6" name="Inhaltsplatzhalter 5">
+                <a:extLst>
+                  <a:ext uri="{FF2B5EF4-FFF2-40B4-BE49-F238E27FC236}">
+                    <a16:creationId xmlns:a16="http://schemas.microsoft.com/office/drawing/2014/main" id="{734C84D0-8A69-5879-390D-1E0ACF82D07A}"/>
+                  </a:ext>
+                </a:extLst>
+              </p:cNvPr>
+              <p:cNvSpPr>
+                <a:spLocks noGrp="1"/>
+              </p:cNvSpPr>
+              <p:nvPr>
+                <p:ph sz="half" idx="2"/>
+              </p:nvPr>
+            </p:nvSpPr>
+            <p:spPr/>
+            <p:txBody>
+              <a:bodyPr>
+                <a:normAutofit fontScale="92500" lnSpcReduction="20000"/>
+              </a:bodyPr>
+              <a:lstStyle/>
+              <a:p>
+                <a:pPr marL="0" indent="0">
+                  <a:buNone/>
+                </a:pPr>
+                <a:r>
+                  <a:rPr lang="de-DE" sz="3300" dirty="0"/>
+                  <a:t>L1 </a:t>
+                </a:r>
+                <a:r>
+                  <a:rPr lang="de-DE" sz="3300" dirty="0" err="1"/>
+                  <a:t>objective</a:t>
+                </a:r>
+                <a:r>
+                  <a:rPr lang="de-DE" sz="3300" dirty="0"/>
+                  <a:t>:</a:t>
+                </a:r>
+              </a:p>
+              <a:p>
+                <a:pPr marL="0" indent="0">
+                  <a:buNone/>
+                </a:pPr>
+                <a:endParaRPr lang="de-DE" sz="2400" dirty="0"/>
+              </a:p>
+              <a:p>
+                <a:pPr marL="0" indent="0">
+                  <a:buNone/>
+                </a:pPr>
+                <a14:m>
+                  <m:oMathPara xmlns:m="http://schemas.openxmlformats.org/officeDocument/2006/math">
+                    <m:oMathParaPr>
+                      <m:jc m:val="left"/>
+                    </m:oMathParaPr>
+                    <m:oMath xmlns:m="http://schemas.openxmlformats.org/officeDocument/2006/math">
+                      <m:func>
+                        <m:funcPr>
+                          <m:ctrlPr>
+                            <a:rPr lang="de-DE" sz="2400" i="1">
+                              <a:latin typeface="Cambria Math" panose="02040503050406030204" pitchFamily="18" charset="0"/>
+                            </a:rPr>
+                          </m:ctrlPr>
+                        </m:funcPr>
+                        <m:fName>
+                          <m:limLow>
+                            <m:limLowPr>
+                              <m:ctrlPr>
+                                <a:rPr lang="de-DE" sz="2400" i="1">
+                                  <a:latin typeface="Cambria Math" panose="02040503050406030204" pitchFamily="18" charset="0"/>
+                                </a:rPr>
+                              </m:ctrlPr>
+                            </m:limLowPr>
+                            <m:e>
+                              <m:r>
+                                <m:rPr>
+                                  <m:sty m:val="p"/>
+                                </m:rPr>
+                                <a:rPr lang="de-DE" sz="2400">
+                                  <a:latin typeface="Cambria Math" panose="02040503050406030204" pitchFamily="18" charset="0"/>
+                                </a:rPr>
+                                <m:t>min</m:t>
+                              </m:r>
+                            </m:e>
+                            <m:lim>
+                              <m:r>
+                                <a:rPr lang="de-DE" sz="2400" i="1">
+                                  <a:latin typeface="Cambria Math" panose="02040503050406030204" pitchFamily="18" charset="0"/>
+                                </a:rPr>
+                                <m:t>𝑎</m:t>
+                              </m:r>
+                            </m:lim>
+                          </m:limLow>
+                        </m:fName>
+                        <m:e>
+                          <m:nary>
+                            <m:naryPr>
+                              <m:chr m:val="∑"/>
+                              <m:ctrlPr>
+                                <a:rPr lang="de-DE" sz="2400" i="1">
+                                  <a:latin typeface="Cambria Math" panose="02040503050406030204" pitchFamily="18" charset="0"/>
+                                </a:rPr>
+                              </m:ctrlPr>
+                            </m:naryPr>
+                            <m:sub>
+                              <m:r>
+                                <m:rPr>
+                                  <m:brk m:alnAt="23"/>
+                                </m:rPr>
+                                <a:rPr lang="de-DE" sz="2400" i="1">
+                                  <a:latin typeface="Cambria Math" panose="02040503050406030204" pitchFamily="18" charset="0"/>
+                                </a:rPr>
+                                <m:t>𝑖</m:t>
+                              </m:r>
+                              <m:r>
+                                <a:rPr lang="de-DE" sz="2400" i="1">
+                                  <a:latin typeface="Cambria Math" panose="02040503050406030204" pitchFamily="18" charset="0"/>
+                                </a:rPr>
+                                <m:t>=1</m:t>
+                              </m:r>
+                            </m:sub>
+                            <m:sup>
+                              <m:r>
+                                <a:rPr lang="de-DE" sz="2400" i="1">
+                                  <a:latin typeface="Cambria Math" panose="02040503050406030204" pitchFamily="18" charset="0"/>
+                                </a:rPr>
+                                <m:t>𝑛</m:t>
+                              </m:r>
+                            </m:sup>
+                            <m:e>
+                              <m:d>
+                                <m:dPr>
+                                  <m:begChr m:val="|"/>
+                                  <m:endChr m:val="|"/>
+                                  <m:ctrlPr>
+                                    <a:rPr lang="de-DE" sz="2400" i="1" smtClean="0">
+                                      <a:latin typeface="Cambria Math" panose="02040503050406030204" pitchFamily="18" charset="0"/>
+                                    </a:rPr>
+                                  </m:ctrlPr>
+                                </m:dPr>
+                                <m:e>
+                                  <m:sSub>
+                                    <m:sSubPr>
+                                      <m:ctrlPr>
+                                        <a:rPr lang="de-DE" sz="2400" i="1">
+                                          <a:latin typeface="Cambria Math" panose="02040503050406030204" pitchFamily="18" charset="0"/>
+                                        </a:rPr>
+                                      </m:ctrlPr>
+                                    </m:sSubPr>
+                                    <m:e>
+                                      <m:r>
+                                        <a:rPr lang="de-DE" sz="2400" i="1">
+                                          <a:latin typeface="Cambria Math" panose="02040503050406030204" pitchFamily="18" charset="0"/>
+                                        </a:rPr>
+                                        <m:t>𝑥</m:t>
+                                      </m:r>
+                                    </m:e>
+                                    <m:sub>
+                                      <m:r>
+                                        <a:rPr lang="de-DE" sz="2400" i="1">
+                                          <a:latin typeface="Cambria Math" panose="02040503050406030204" pitchFamily="18" charset="0"/>
+                                        </a:rPr>
+                                        <m:t>𝑖</m:t>
+                                      </m:r>
+                                    </m:sub>
+                                  </m:sSub>
+                                  <m:r>
+                                    <a:rPr lang="de-DE" sz="2400" i="1">
+                                      <a:latin typeface="Cambria Math" panose="02040503050406030204" pitchFamily="18" charset="0"/>
+                                    </a:rPr>
+                                    <m:t>−</m:t>
+                                  </m:r>
+                                  <m:r>
+                                    <a:rPr lang="de-DE" sz="2400" b="0" i="1" smtClean="0">
+                                      <a:latin typeface="Cambria Math" panose="02040503050406030204" pitchFamily="18" charset="0"/>
+                                    </a:rPr>
+                                    <m:t>𝑎</m:t>
+                                  </m:r>
+                                </m:e>
+                              </m:d>
+                            </m:e>
+                          </m:nary>
+                        </m:e>
+                      </m:func>
+                    </m:oMath>
+                  </m:oMathPara>
+                </a14:m>
+                <a:endParaRPr lang="de-DE" sz="2400" dirty="0"/>
+              </a:p>
+              <a:p>
+                <a:pPr marL="0" indent="0">
+                  <a:buNone/>
+                </a:pPr>
+                <a:endParaRPr lang="de-DE" sz="2400" dirty="0"/>
+              </a:p>
+              <a:p>
+                <a:pPr marL="0" indent="0">
+                  <a:buNone/>
+                </a:pPr>
+                <a14:m>
+                  <m:oMathPara xmlns:m="http://schemas.openxmlformats.org/officeDocument/2006/math">
+                    <m:oMathParaPr>
+                      <m:jc m:val="left"/>
+                    </m:oMathParaPr>
+                    <m:oMath xmlns:m="http://schemas.openxmlformats.org/officeDocument/2006/math">
+                      <m:f>
+                        <m:fPr>
+                          <m:ctrlPr>
+                            <a:rPr lang="de-DE" sz="2400" i="1">
+                              <a:latin typeface="Cambria Math" panose="02040503050406030204" pitchFamily="18" charset="0"/>
+                            </a:rPr>
+                          </m:ctrlPr>
+                        </m:fPr>
+                        <m:num>
+                          <m:r>
+                            <a:rPr lang="de-DE" sz="2400" i="1">
+                              <a:latin typeface="Cambria Math" panose="02040503050406030204" pitchFamily="18" charset="0"/>
+                            </a:rPr>
+                            <m:t>𝑑</m:t>
+                          </m:r>
+                        </m:num>
+                        <m:den>
+                          <m:r>
+                            <a:rPr lang="de-DE" sz="2400" i="1">
+                              <a:latin typeface="Cambria Math" panose="02040503050406030204" pitchFamily="18" charset="0"/>
+                            </a:rPr>
+                            <m:t>𝑑𝑎</m:t>
+                          </m:r>
+                        </m:den>
+                      </m:f>
+                      <m:nary>
+                        <m:naryPr>
+                          <m:chr m:val="∑"/>
+                          <m:subHide m:val="on"/>
+                          <m:supHide m:val="on"/>
+                          <m:ctrlPr>
+                            <a:rPr lang="de-DE" sz="2400" i="1">
+                              <a:latin typeface="Cambria Math" panose="02040503050406030204" pitchFamily="18" charset="0"/>
+                            </a:rPr>
+                          </m:ctrlPr>
+                        </m:naryPr>
+                        <m:sub/>
+                        <m:sup/>
+                        <m:e>
+                          <m:d>
+                            <m:dPr>
+                              <m:begChr m:val="|"/>
+                              <m:endChr m:val="|"/>
+                              <m:ctrlPr>
+                                <a:rPr lang="de-DE" sz="2400" i="1">
+                                  <a:latin typeface="Cambria Math" panose="02040503050406030204" pitchFamily="18" charset="0"/>
+                                </a:rPr>
+                              </m:ctrlPr>
+                            </m:dPr>
+                            <m:e>
+                              <m:sSub>
+                                <m:sSubPr>
+                                  <m:ctrlPr>
+                                    <a:rPr lang="de-DE" sz="2400" i="1">
+                                      <a:latin typeface="Cambria Math" panose="02040503050406030204" pitchFamily="18" charset="0"/>
+                                    </a:rPr>
+                                  </m:ctrlPr>
+                                </m:sSubPr>
+                                <m:e>
+                                  <m:r>
+                                    <a:rPr lang="de-DE" sz="2400" i="1">
+                                      <a:latin typeface="Cambria Math" panose="02040503050406030204" pitchFamily="18" charset="0"/>
+                                    </a:rPr>
+                                    <m:t>𝑥</m:t>
+                                  </m:r>
+                                </m:e>
+                                <m:sub>
+                                  <m:r>
+                                    <a:rPr lang="de-DE" sz="2400" i="1">
+                                      <a:latin typeface="Cambria Math" panose="02040503050406030204" pitchFamily="18" charset="0"/>
+                                    </a:rPr>
+                                    <m:t>𝑖</m:t>
+                                  </m:r>
+                                </m:sub>
+                              </m:sSub>
+                              <m:r>
+                                <a:rPr lang="de-DE" sz="2400" i="1">
+                                  <a:latin typeface="Cambria Math" panose="02040503050406030204" pitchFamily="18" charset="0"/>
+                                </a:rPr>
+                                <m:t>−</m:t>
+                              </m:r>
+                              <m:r>
+                                <a:rPr lang="de-DE" sz="2400" i="1">
+                                  <a:latin typeface="Cambria Math" panose="02040503050406030204" pitchFamily="18" charset="0"/>
+                                </a:rPr>
+                                <m:t>𝑎</m:t>
+                              </m:r>
+                            </m:e>
+                          </m:d>
+                        </m:e>
+                      </m:nary>
+                      <m:r>
+                        <a:rPr lang="de-DE" sz="2400" i="1">
+                          <a:latin typeface="Cambria Math" panose="02040503050406030204" pitchFamily="18" charset="0"/>
+                        </a:rPr>
+                        <m:t>=0</m:t>
+                      </m:r>
+                    </m:oMath>
+                  </m:oMathPara>
+                </a14:m>
+                <a:endParaRPr lang="de-DE" sz="2400" dirty="0"/>
+              </a:p>
+              <a:p>
+                <a:pPr marL="0" indent="0">
+                  <a:buNone/>
+                </a:pPr>
+                <a:endParaRPr lang="de-DE" sz="2400" dirty="0"/>
+              </a:p>
+              <a:p>
+                <a:pPr marL="0" indent="0">
+                  <a:buNone/>
+                </a:pPr>
+                <a14:m>
+                  <m:oMathPara xmlns:m="http://schemas.openxmlformats.org/officeDocument/2006/math">
+                    <m:oMathParaPr>
+                      <m:jc m:val="left"/>
+                    </m:oMathParaPr>
+                    <m:oMath xmlns:m="http://schemas.openxmlformats.org/officeDocument/2006/math">
+                      <m:r>
+                        <a:rPr lang="de-DE" sz="2400" i="1">
+                          <a:latin typeface="Cambria Math" panose="02040503050406030204" pitchFamily="18" charset="0"/>
+                          <a:ea typeface="Cambria Math" panose="02040503050406030204" pitchFamily="18" charset="0"/>
+                        </a:rPr>
+                        <m:t>⇒</m:t>
+                      </m:r>
+                      <m:nary>
+                        <m:naryPr>
+                          <m:chr m:val="∑"/>
+                          <m:subHide m:val="on"/>
+                          <m:supHide m:val="on"/>
+                          <m:ctrlPr>
+                            <a:rPr lang="de-DE" sz="2400" i="1">
+                              <a:latin typeface="Cambria Math" panose="02040503050406030204" pitchFamily="18" charset="0"/>
+                            </a:rPr>
+                          </m:ctrlPr>
+                        </m:naryPr>
+                        <m:sub/>
+                        <m:sup/>
+                        <m:e>
+                          <m:r>
+                            <m:rPr>
+                              <m:sty m:val="p"/>
+                            </m:rPr>
+                            <a:rPr lang="de-DE" sz="2400" b="0" i="0" smtClean="0">
+                              <a:latin typeface="Cambria Math" panose="02040503050406030204" pitchFamily="18" charset="0"/>
+                            </a:rPr>
+                            <m:t>sign</m:t>
+                          </m:r>
+                          <m:d>
+                            <m:dPr>
+                              <m:ctrlPr>
+                                <a:rPr lang="de-DE" sz="2400" i="1">
+                                  <a:latin typeface="Cambria Math" panose="02040503050406030204" pitchFamily="18" charset="0"/>
+                                </a:rPr>
+                              </m:ctrlPr>
+                            </m:dPr>
+                            <m:e>
+                              <m:r>
+                                <a:rPr lang="de-DE" sz="2400" i="1">
+                                  <a:latin typeface="Cambria Math" panose="02040503050406030204" pitchFamily="18" charset="0"/>
+                                </a:rPr>
+                                <m:t>𝑎</m:t>
+                              </m:r>
+                              <m:r>
+                                <a:rPr lang="de-DE" sz="2400" i="1">
+                                  <a:latin typeface="Cambria Math" panose="02040503050406030204" pitchFamily="18" charset="0"/>
+                                </a:rPr>
+                                <m:t>−</m:t>
+                              </m:r>
+                              <m:sSub>
+                                <m:sSubPr>
+                                  <m:ctrlPr>
+                                    <a:rPr lang="de-DE" sz="2400" i="1">
+                                      <a:latin typeface="Cambria Math" panose="02040503050406030204" pitchFamily="18" charset="0"/>
+                                    </a:rPr>
+                                  </m:ctrlPr>
+                                </m:sSubPr>
+                                <m:e>
+                                  <m:r>
+                                    <a:rPr lang="de-DE" sz="2400" i="1">
+                                      <a:latin typeface="Cambria Math" panose="02040503050406030204" pitchFamily="18" charset="0"/>
+                                    </a:rPr>
+                                    <m:t>𝑥</m:t>
+                                  </m:r>
+                                </m:e>
+                                <m:sub>
+                                  <m:r>
+                                    <a:rPr lang="de-DE" sz="2400" i="1">
+                                      <a:latin typeface="Cambria Math" panose="02040503050406030204" pitchFamily="18" charset="0"/>
+                                    </a:rPr>
+                                    <m:t>𝑖</m:t>
+                                  </m:r>
+                                </m:sub>
+                              </m:sSub>
+                            </m:e>
+                          </m:d>
+                        </m:e>
+                      </m:nary>
+                      <m:r>
+                        <a:rPr lang="de-DE" sz="2400" i="1">
+                          <a:latin typeface="Cambria Math" panose="02040503050406030204" pitchFamily="18" charset="0"/>
+                        </a:rPr>
+                        <m:t>=0</m:t>
+                      </m:r>
+                    </m:oMath>
+                  </m:oMathPara>
+                </a14:m>
+                <a:endParaRPr lang="de-DE" sz="2400" dirty="0"/>
+              </a:p>
+              <a:p>
+                <a:pPr marL="0" indent="0">
+                  <a:buNone/>
+                </a:pPr>
+                <a14:m>
+                  <m:oMath xmlns:m="http://schemas.openxmlformats.org/officeDocument/2006/math">
+                    <m:r>
+                      <a:rPr lang="de-DE" sz="2400" i="1">
+                        <a:latin typeface="Cambria Math" panose="02040503050406030204" pitchFamily="18" charset="0"/>
+                        <a:ea typeface="Cambria Math" panose="02040503050406030204" pitchFamily="18" charset="0"/>
+                      </a:rPr>
+                      <m:t>⇒</m:t>
+                    </m:r>
+                    <m:r>
+                      <a:rPr lang="de-DE" sz="2400" b="0" i="1" smtClean="0">
+                        <a:latin typeface="Cambria Math" panose="02040503050406030204" pitchFamily="18" charset="0"/>
+                        <a:sym typeface="Wingdings" pitchFamily="2" charset="2"/>
+                      </a:rPr>
+                      <m:t>#</m:t>
+                    </m:r>
+                    <m:d>
+                      <m:dPr>
+                        <m:ctrlPr>
+                          <a:rPr lang="de-DE" sz="2400" b="0" i="1" smtClean="0">
+                            <a:latin typeface="Cambria Math" panose="02040503050406030204" pitchFamily="18" charset="0"/>
+                            <a:sym typeface="Wingdings" pitchFamily="2" charset="2"/>
+                          </a:rPr>
+                        </m:ctrlPr>
+                      </m:dPr>
+                      <m:e>
+                        <m:sSub>
+                          <m:sSubPr>
+                            <m:ctrlPr>
+                              <a:rPr lang="de-DE" sz="2400" i="1">
+                                <a:latin typeface="Cambria Math" panose="02040503050406030204" pitchFamily="18" charset="0"/>
+                              </a:rPr>
+                            </m:ctrlPr>
+                          </m:sSubPr>
+                          <m:e>
+                            <m:r>
+                              <a:rPr lang="de-DE" sz="2400" i="1">
+                                <a:latin typeface="Cambria Math" panose="02040503050406030204" pitchFamily="18" charset="0"/>
+                              </a:rPr>
+                              <m:t>𝑥</m:t>
+                            </m:r>
+                          </m:e>
+                          <m:sub>
+                            <m:r>
+                              <a:rPr lang="de-DE" sz="2400" i="1">
+                                <a:latin typeface="Cambria Math" panose="02040503050406030204" pitchFamily="18" charset="0"/>
+                              </a:rPr>
+                              <m:t>𝑖</m:t>
+                            </m:r>
+                          </m:sub>
+                        </m:sSub>
+                        <m:r>
+                          <a:rPr lang="de-DE" sz="2400" i="1">
+                            <a:latin typeface="Cambria Math" panose="02040503050406030204" pitchFamily="18" charset="0"/>
+                          </a:rPr>
+                          <m:t>&lt;</m:t>
+                        </m:r>
+                        <m:r>
+                          <a:rPr lang="de-DE" sz="2400" b="0" i="1" smtClean="0">
+                            <a:latin typeface="Cambria Math" panose="02040503050406030204" pitchFamily="18" charset="0"/>
+                          </a:rPr>
+                          <m:t>𝑎</m:t>
+                        </m:r>
+                      </m:e>
+                    </m:d>
+                    <m:r>
+                      <a:rPr lang="de-DE" sz="2400" b="0" i="1" smtClean="0">
+                        <a:latin typeface="Cambria Math" panose="02040503050406030204" pitchFamily="18" charset="0"/>
+                        <a:sym typeface="Wingdings" pitchFamily="2" charset="2"/>
+                      </a:rPr>
+                      <m:t>=</m:t>
+                    </m:r>
+                    <m:r>
+                      <a:rPr lang="de-DE" sz="2400" i="1">
+                        <a:latin typeface="Cambria Math" panose="02040503050406030204" pitchFamily="18" charset="0"/>
+                        <a:sym typeface="Wingdings" pitchFamily="2" charset="2"/>
+                      </a:rPr>
+                      <m:t>#</m:t>
+                    </m:r>
+                    <m:d>
+                      <m:dPr>
+                        <m:ctrlPr>
+                          <a:rPr lang="de-DE" sz="2400" i="1">
+                            <a:latin typeface="Cambria Math" panose="02040503050406030204" pitchFamily="18" charset="0"/>
+                            <a:sym typeface="Wingdings" pitchFamily="2" charset="2"/>
+                          </a:rPr>
+                        </m:ctrlPr>
+                      </m:dPr>
+                      <m:e>
+                        <m:sSub>
+                          <m:sSubPr>
+                            <m:ctrlPr>
+                              <a:rPr lang="de-DE" sz="2400" i="1">
+                                <a:latin typeface="Cambria Math" panose="02040503050406030204" pitchFamily="18" charset="0"/>
+                              </a:rPr>
+                            </m:ctrlPr>
+                          </m:sSubPr>
+                          <m:e>
+                            <m:r>
+                              <a:rPr lang="de-DE" sz="2400" i="1">
+                                <a:latin typeface="Cambria Math" panose="02040503050406030204" pitchFamily="18" charset="0"/>
+                              </a:rPr>
+                              <m:t>𝑥</m:t>
+                            </m:r>
+                          </m:e>
+                          <m:sub>
+                            <m:r>
+                              <a:rPr lang="de-DE" sz="2400" i="1">
+                                <a:latin typeface="Cambria Math" panose="02040503050406030204" pitchFamily="18" charset="0"/>
+                              </a:rPr>
+                              <m:t>𝑖</m:t>
+                            </m:r>
+                          </m:sub>
+                        </m:sSub>
+                        <m:r>
+                          <a:rPr lang="de-DE" sz="2400" b="0" i="1" smtClean="0">
+                            <a:latin typeface="Cambria Math" panose="02040503050406030204" pitchFamily="18" charset="0"/>
+                          </a:rPr>
+                          <m:t>&gt;</m:t>
+                        </m:r>
+                        <m:r>
+                          <a:rPr lang="de-DE" sz="2400" b="0" i="1" smtClean="0">
+                            <a:latin typeface="Cambria Math" panose="02040503050406030204" pitchFamily="18" charset="0"/>
+                          </a:rPr>
+                          <m:t>𝑎</m:t>
+                        </m:r>
+                      </m:e>
+                    </m:d>
+                  </m:oMath>
+                </a14:m>
+                <a:r>
+                  <a:rPr lang="de-DE" sz="2400" dirty="0">
+                    <a:sym typeface="Wingdings" pitchFamily="2" charset="2"/>
+                  </a:rPr>
+                  <a:t>  median</a:t>
+                </a:r>
+                <a:endParaRPr lang="de-DE" sz="2400" dirty="0"/>
+              </a:p>
+            </p:txBody>
+          </p:sp>
+        </mc:Choice>
+        <mc:Fallback>
+          <p:sp>
+            <p:nvSpPr>
+              <p:cNvPr id="6" name="Inhaltsplatzhalter 5">
+                <a:extLst>
+                  <a:ext uri="{FF2B5EF4-FFF2-40B4-BE49-F238E27FC236}">
+                    <a16:creationId xmlns:a16="http://schemas.microsoft.com/office/drawing/2014/main" id="{734C84D0-8A69-5879-390D-1E0ACF82D07A}"/>
+                  </a:ext>
+                </a:extLst>
+              </p:cNvPr>
+              <p:cNvSpPr>
+                <a:spLocks noGrp="1" noRot="1" noChangeAspect="1" noMove="1" noResize="1" noEditPoints="1" noAdjustHandles="1" noChangeArrowheads="1" noChangeShapeType="1" noTextEdit="1"/>
+              </p:cNvSpPr>
+              <p:nvPr>
+                <p:ph sz="half" idx="2"/>
+              </p:nvPr>
+            </p:nvSpPr>
+            <p:spPr>
+              <a:blipFill>
+                <a:blip r:embed="rId3"/>
+                <a:stretch>
+                  <a:fillRect l="-12958" t="-10174" b="-25581"/>
+                </a:stretch>
+              </a:blipFill>
+            </p:spPr>
+            <p:txBody>
+              <a:bodyPr/>
+              <a:lstStyle/>
+              <a:p>
+                <a:r>
+                  <a:rPr lang="de-DE">
+                    <a:noFill/>
+                  </a:rPr>
+                  <a:t> </a:t>
+                </a:r>
+              </a:p>
+            </p:txBody>
+          </p:sp>
+        </mc:Fallback>
+      </mc:AlternateContent>
       <p:sp>
         <p:nvSpPr>
           <p:cNvPr id="4" name="Foliennummernplatzhalter 3">
@@ -6924,7 +8200,7 @@
           <p:cNvPr id="2" name="Titel 1">
             <a:extLst>
               <a:ext uri="{FF2B5EF4-FFF2-40B4-BE49-F238E27FC236}">
-                <a16:creationId xmlns:a16="http://schemas.microsoft.com/office/drawing/2014/main" id="{0BB459EB-FAE8-31DC-E38F-3046EC588CF6}"/>
+                <a16:creationId xmlns:a16="http://schemas.microsoft.com/office/drawing/2014/main" id="{E1872AF3-6DAA-E6C2-A919-228FF3EB5851}"/>
               </a:ext>
             </a:extLst>
           </p:cNvPr>
@@ -6941,51 +8217,22 @@
           <a:lstStyle/>
           <a:p>
             <a:r>
-              <a:rPr lang="de-DE" dirty="0"/>
-              <a:t>… Evaluation </a:t>
-            </a:r>
-            <a:r>
-              <a:rPr lang="de-DE" dirty="0" err="1"/>
-              <a:t>against</a:t>
-            </a:r>
-            <a:r>
-              <a:rPr lang="de-DE" dirty="0"/>
-              <a:t> True Labels …</a:t>
+              <a:rPr lang="de-DE" dirty="0" err="1"/>
+              <a:t>Visualizing</a:t>
+            </a:r>
+            <a:r>
+              <a:rPr lang="de-DE" dirty="0"/>
+              <a:t> Clusters</a:t>
             </a:r>
           </a:p>
         </p:txBody>
       </p:sp>
       <p:sp>
         <p:nvSpPr>
-          <p:cNvPr id="3" name="Inhaltsplatzhalter 2">
+          <p:cNvPr id="3" name="Foliennummernplatzhalter 2">
             <a:extLst>
               <a:ext uri="{FF2B5EF4-FFF2-40B4-BE49-F238E27FC236}">
-                <a16:creationId xmlns:a16="http://schemas.microsoft.com/office/drawing/2014/main" id="{392427C8-4330-BC0E-F7FF-95DB2D9863DA}"/>
-              </a:ext>
-            </a:extLst>
-          </p:cNvPr>
-          <p:cNvSpPr>
-            <a:spLocks noGrp="1"/>
-          </p:cNvSpPr>
-          <p:nvPr>
-            <p:ph idx="1"/>
-          </p:nvPr>
-        </p:nvSpPr>
-        <p:spPr/>
-        <p:txBody>
-          <a:bodyPr/>
-          <a:lstStyle/>
-          <a:p>
-            <a:endParaRPr lang="de-DE"/>
-          </a:p>
-        </p:txBody>
-      </p:sp>
-      <p:sp>
-        <p:nvSpPr>
-          <p:cNvPr id="4" name="Foliennummernplatzhalter 3">
-            <a:extLst>
-              <a:ext uri="{FF2B5EF4-FFF2-40B4-BE49-F238E27FC236}">
-                <a16:creationId xmlns:a16="http://schemas.microsoft.com/office/drawing/2014/main" id="{701A4EA1-06DA-F940-1383-630B8622B38F}"/>
+                <a16:creationId xmlns:a16="http://schemas.microsoft.com/office/drawing/2014/main" id="{81251F56-854B-D4C6-04C7-5A3B3F8DB84E}"/>
               </a:ext>
             </a:extLst>
           </p:cNvPr>
@@ -7012,7 +8259,7 @@
     </p:spTree>
     <p:extLst>
       <p:ext uri="{BB962C8B-B14F-4D97-AF65-F5344CB8AC3E}">
-        <p14:creationId xmlns:p14="http://schemas.microsoft.com/office/powerpoint/2010/main" val="2860005827"/>
+        <p14:creationId xmlns:p14="http://schemas.microsoft.com/office/powerpoint/2010/main" val="2070037097"/>
       </p:ext>
     </p:extLst>
   </p:cSld>
@@ -7044,7 +8291,7 @@
           <p:cNvPr id="2" name="Titel 1">
             <a:extLst>
               <a:ext uri="{FF2B5EF4-FFF2-40B4-BE49-F238E27FC236}">
-                <a16:creationId xmlns:a16="http://schemas.microsoft.com/office/drawing/2014/main" id="{AE45E519-E948-8501-ACAD-BDF00444DFDC}"/>
+                <a16:creationId xmlns:a16="http://schemas.microsoft.com/office/drawing/2014/main" id="{121AA823-E2CE-8C0D-90DB-02DFE9572552}"/>
               </a:ext>
             </a:extLst>
           </p:cNvPr>
@@ -7062,11 +8309,11 @@
           <a:p>
             <a:r>
               <a:rPr lang="de-DE" dirty="0"/>
-              <a:t>Mini Batch </a:t>
-            </a:r>
-            <a:r>
-              <a:rPr lang="de-DE" dirty="0" err="1"/>
-              <a:t>k-Means</a:t>
+              <a:t>Cluster Validation </a:t>
+            </a:r>
+            <a:r>
+              <a:rPr lang="de-DE" dirty="0" err="1"/>
+              <a:t>Metrics</a:t>
             </a:r>
             <a:endParaRPr lang="de-DE" dirty="0"/>
           </a:p>
@@ -7077,7 +8324,7 @@
           <p:cNvPr id="4" name="Inhaltsplatzhalter 3">
             <a:extLst>
               <a:ext uri="{FF2B5EF4-FFF2-40B4-BE49-F238E27FC236}">
-                <a16:creationId xmlns:a16="http://schemas.microsoft.com/office/drawing/2014/main" id="{DAA8C059-BF98-DA76-D11E-B2885769186E}"/>
+                <a16:creationId xmlns:a16="http://schemas.microsoft.com/office/drawing/2014/main" id="{4AAAE878-7307-C927-4B47-5A9C5B86AC4E}"/>
               </a:ext>
             </a:extLst>
           </p:cNvPr>
@@ -7093,7 +8340,182 @@
           <a:bodyPr/>
           <a:lstStyle/>
           <a:p>
-            <a:endParaRPr lang="de-DE"/>
+            <a:pPr marL="0" indent="0">
+              <a:buNone/>
+            </a:pPr>
+            <a:r>
+              <a:rPr lang="de-DE" dirty="0" err="1"/>
+              <a:t>Since</a:t>
+            </a:r>
+            <a:r>
+              <a:rPr lang="de-DE" dirty="0"/>
+              <a:t> </a:t>
+            </a:r>
+            <a:r>
+              <a:rPr lang="de-DE" dirty="0" err="1"/>
+              <a:t>clustering</a:t>
+            </a:r>
+            <a:r>
+              <a:rPr lang="de-DE" dirty="0"/>
+              <a:t> </a:t>
+            </a:r>
+            <a:r>
+              <a:rPr lang="de-DE" dirty="0" err="1"/>
+              <a:t>is</a:t>
+            </a:r>
+            <a:r>
+              <a:rPr lang="de-DE" dirty="0"/>
+              <a:t> </a:t>
+            </a:r>
+            <a:r>
+              <a:rPr lang="de-DE" dirty="0" err="1"/>
+              <a:t>unsupervised</a:t>
+            </a:r>
+            <a:r>
+              <a:rPr lang="de-DE" dirty="0"/>
+              <a:t>: </a:t>
+            </a:r>
+            <a:r>
+              <a:rPr lang="de-DE" dirty="0" err="1"/>
+              <a:t>no</a:t>
+            </a:r>
+            <a:r>
+              <a:rPr lang="de-DE" dirty="0"/>
+              <a:t> </a:t>
+            </a:r>
+            <a:r>
+              <a:rPr lang="de-DE" dirty="0" err="1"/>
+              <a:t>single</a:t>
+            </a:r>
+            <a:r>
+              <a:rPr lang="de-DE" dirty="0"/>
+              <a:t> “</a:t>
+            </a:r>
+            <a:r>
+              <a:rPr lang="de-DE" dirty="0" err="1"/>
+              <a:t>correct</a:t>
+            </a:r>
+            <a:r>
+              <a:rPr lang="de-DE" dirty="0"/>
+              <a:t>” </a:t>
+            </a:r>
+            <a:r>
+              <a:rPr lang="de-DE" dirty="0" err="1"/>
+              <a:t>answer</a:t>
+            </a:r>
+            <a:endParaRPr lang="de-DE" dirty="0"/>
+          </a:p>
+          <a:p>
+            <a:pPr marL="0" indent="0">
+              <a:buNone/>
+            </a:pPr>
+            <a:endParaRPr lang="de-DE" dirty="0"/>
+          </a:p>
+          <a:p>
+            <a:pPr marL="0" indent="0">
+              <a:buNone/>
+            </a:pPr>
+            <a:r>
+              <a:rPr lang="de-DE" dirty="0" err="1"/>
+              <a:t>Instead</a:t>
+            </a:r>
+            <a:r>
+              <a:rPr lang="de-DE" dirty="0"/>
+              <a:t> </a:t>
+            </a:r>
+            <a:r>
+              <a:rPr lang="de-DE" dirty="0" err="1"/>
+              <a:t>measure</a:t>
+            </a:r>
+            <a:r>
+              <a:rPr lang="de-DE" dirty="0"/>
+              <a:t> </a:t>
+            </a:r>
+            <a:r>
+              <a:rPr lang="de-DE" dirty="0" err="1"/>
+              <a:t>how</a:t>
+            </a:r>
+            <a:r>
+              <a:rPr lang="de-DE" dirty="0"/>
+              <a:t> well-</a:t>
+            </a:r>
+            <a:r>
+              <a:rPr lang="de-DE" dirty="0" err="1"/>
+              <a:t>separated</a:t>
+            </a:r>
+            <a:r>
+              <a:rPr lang="de-DE" dirty="0"/>
+              <a:t> and </a:t>
+            </a:r>
+            <a:r>
+              <a:rPr lang="de-DE" dirty="0" err="1"/>
+              <a:t>cohesive</a:t>
+            </a:r>
+            <a:r>
+              <a:rPr lang="de-DE" dirty="0"/>
+              <a:t> </a:t>
+            </a:r>
+            <a:r>
+              <a:rPr lang="de-DE" dirty="0" err="1"/>
+              <a:t>clusters</a:t>
+            </a:r>
+            <a:r>
+              <a:rPr lang="de-DE" dirty="0"/>
+              <a:t> </a:t>
+            </a:r>
+            <a:r>
+              <a:rPr lang="de-DE" dirty="0" err="1"/>
+              <a:t>are</a:t>
+            </a:r>
+            <a:endParaRPr lang="de-DE" dirty="0"/>
+          </a:p>
+          <a:p>
+            <a:pPr marL="0" indent="0">
+              <a:buNone/>
+            </a:pPr>
+            <a:endParaRPr lang="de-DE" dirty="0"/>
+          </a:p>
+          <a:p>
+            <a:pPr marL="0" indent="0">
+              <a:buNone/>
+            </a:pPr>
+            <a:r>
+              <a:rPr lang="de-DE" dirty="0"/>
+              <a:t>Evaluation </a:t>
+            </a:r>
+            <a:r>
+              <a:rPr lang="de-DE" dirty="0" err="1"/>
+              <a:t>metrics</a:t>
+            </a:r>
+            <a:r>
+              <a:rPr lang="de-DE" dirty="0"/>
+              <a:t>:</a:t>
+            </a:r>
+          </a:p>
+          <a:p>
+            <a:r>
+              <a:rPr lang="de-DE" dirty="0"/>
+              <a:t>Silhouette score</a:t>
+            </a:r>
+          </a:p>
+          <a:p>
+            <a:r>
+              <a:rPr lang="de-DE" dirty="0"/>
+              <a:t>Davies-</a:t>
+            </a:r>
+            <a:r>
+              <a:rPr lang="de-DE" dirty="0" err="1"/>
+              <a:t>Bouldin</a:t>
+            </a:r>
+            <a:r>
+              <a:rPr lang="de-DE" dirty="0"/>
+              <a:t> </a:t>
+            </a:r>
+            <a:r>
+              <a:rPr lang="de-DE" dirty="0" err="1"/>
+              <a:t>index</a:t>
+            </a:r>
+            <a:endParaRPr lang="de-DE" dirty="0"/>
           </a:p>
         </p:txBody>
       </p:sp>
@@ -7102,7 +8524,7 @@
           <p:cNvPr id="3" name="Foliennummernplatzhalter 2">
             <a:extLst>
               <a:ext uri="{FF2B5EF4-FFF2-40B4-BE49-F238E27FC236}">
-                <a16:creationId xmlns:a16="http://schemas.microsoft.com/office/drawing/2014/main" id="{2B02C868-452A-3E9E-3E72-BA889BC8609C}"/>
+                <a16:creationId xmlns:a16="http://schemas.microsoft.com/office/drawing/2014/main" id="{563E3869-C5B7-1A95-0614-2B381BD8C120}"/>
               </a:ext>
             </a:extLst>
           </p:cNvPr>
@@ -7121,6 +8543,967 @@
             <a:fld id="{08C366F5-AFAD-49CB-854A-9D9E238FCA13}" type="slidenum">
               <a:rPr lang="en-GB" smtClean="0"/>
               <a:t>18</a:t>
+            </a:fld>
+            <a:endParaRPr lang="en-GB"/>
+          </a:p>
+        </p:txBody>
+      </p:sp>
+    </p:spTree>
+    <p:extLst>
+      <p:ext uri="{BB962C8B-B14F-4D97-AF65-F5344CB8AC3E}">
+        <p14:creationId xmlns:p14="http://schemas.microsoft.com/office/powerpoint/2010/main" val="474217543"/>
+      </p:ext>
+    </p:extLst>
+  </p:cSld>
+  <p:clrMapOvr>
+    <a:masterClrMapping/>
+  </p:clrMapOvr>
+</p:sld>
+</file>
+
+<file path=ppt/slides/slide19.xml><?xml version="1.0" encoding="utf-8"?>
+<p:sld xmlns:a="http://schemas.openxmlformats.org/drawingml/2006/main" xmlns:r="http://schemas.openxmlformats.org/officeDocument/2006/relationships" xmlns:p="http://schemas.openxmlformats.org/presentationml/2006/main">
+  <p:cSld>
+    <p:spTree>
+      <p:nvGrpSpPr>
+        <p:cNvPr id="1" name=""/>
+        <p:cNvGrpSpPr/>
+        <p:nvPr/>
+      </p:nvGrpSpPr>
+      <p:grpSpPr>
+        <a:xfrm>
+          <a:off x="0" y="0"/>
+          <a:ext cx="0" cy="0"/>
+          <a:chOff x="0" y="0"/>
+          <a:chExt cx="0" cy="0"/>
+        </a:xfrm>
+      </p:grpSpPr>
+      <p:sp>
+        <p:nvSpPr>
+          <p:cNvPr id="2" name="Titel 1">
+            <a:extLst>
+              <a:ext uri="{FF2B5EF4-FFF2-40B4-BE49-F238E27FC236}">
+                <a16:creationId xmlns:a16="http://schemas.microsoft.com/office/drawing/2014/main" id="{0BB459EB-FAE8-31DC-E38F-3046EC588CF6}"/>
+              </a:ext>
+            </a:extLst>
+          </p:cNvPr>
+          <p:cNvSpPr>
+            <a:spLocks noGrp="1"/>
+          </p:cNvSpPr>
+          <p:nvPr>
+            <p:ph type="title"/>
+          </p:nvPr>
+        </p:nvSpPr>
+        <p:spPr/>
+        <p:txBody>
+          <a:bodyPr/>
+          <a:lstStyle/>
+          <a:p>
+            <a:r>
+              <a:rPr lang="de-DE" dirty="0" err="1"/>
+              <a:t>Supervised</a:t>
+            </a:r>
+            <a:r>
+              <a:rPr lang="de-DE" dirty="0"/>
+              <a:t> Clustering Validation</a:t>
+            </a:r>
+          </a:p>
+        </p:txBody>
+      </p:sp>
+      <p:sp>
+        <p:nvSpPr>
+          <p:cNvPr id="3" name="Inhaltsplatzhalter 2">
+            <a:extLst>
+              <a:ext uri="{FF2B5EF4-FFF2-40B4-BE49-F238E27FC236}">
+                <a16:creationId xmlns:a16="http://schemas.microsoft.com/office/drawing/2014/main" id="{392427C8-4330-BC0E-F7FF-95DB2D9863DA}"/>
+              </a:ext>
+            </a:extLst>
+          </p:cNvPr>
+          <p:cNvSpPr>
+            <a:spLocks noGrp="1"/>
+          </p:cNvSpPr>
+          <p:nvPr>
+            <p:ph idx="1"/>
+          </p:nvPr>
+        </p:nvSpPr>
+        <p:spPr/>
+        <p:txBody>
+          <a:bodyPr>
+            <a:normAutofit fontScale="92500"/>
+          </a:bodyPr>
+          <a:lstStyle/>
+          <a:p>
+            <a:pPr marL="0" indent="0">
+              <a:buNone/>
+            </a:pPr>
+            <a:r>
+              <a:rPr lang="de-DE" dirty="0"/>
+              <a:t>…</a:t>
+            </a:r>
+          </a:p>
+          <a:p>
+            <a:r>
+              <a:rPr lang="de-DE" dirty="0" err="1"/>
+              <a:t>homogeneity</a:t>
+            </a:r>
+            <a:r>
+              <a:rPr lang="de-DE" dirty="0"/>
+              <a:t> score: A </a:t>
+            </a:r>
+            <a:r>
+              <a:rPr lang="de-DE" dirty="0" err="1"/>
+              <a:t>clustering</a:t>
+            </a:r>
+            <a:r>
+              <a:rPr lang="de-DE" dirty="0"/>
+              <a:t> </a:t>
+            </a:r>
+            <a:r>
+              <a:rPr lang="de-DE" dirty="0" err="1"/>
+              <a:t>result</a:t>
+            </a:r>
+            <a:r>
+              <a:rPr lang="de-DE" dirty="0"/>
+              <a:t> </a:t>
+            </a:r>
+            <a:r>
+              <a:rPr lang="de-DE" dirty="0" err="1"/>
+              <a:t>satisfies</a:t>
+            </a:r>
+            <a:r>
+              <a:rPr lang="de-DE" dirty="0"/>
+              <a:t> </a:t>
+            </a:r>
+            <a:r>
+              <a:rPr lang="de-DE" dirty="0" err="1"/>
+              <a:t>homogeneity</a:t>
+            </a:r>
+            <a:r>
+              <a:rPr lang="de-DE" dirty="0"/>
+              <a:t> </a:t>
+            </a:r>
+            <a:r>
+              <a:rPr lang="de-DE" dirty="0" err="1"/>
+              <a:t>if</a:t>
+            </a:r>
+            <a:r>
+              <a:rPr lang="de-DE" dirty="0"/>
+              <a:t> all </a:t>
+            </a:r>
+            <a:r>
+              <a:rPr lang="de-DE" dirty="0" err="1"/>
+              <a:t>of</a:t>
+            </a:r>
+            <a:r>
+              <a:rPr lang="de-DE" dirty="0"/>
+              <a:t> </a:t>
+            </a:r>
+            <a:r>
+              <a:rPr lang="de-DE" dirty="0" err="1"/>
+              <a:t>its</a:t>
+            </a:r>
+            <a:r>
+              <a:rPr lang="de-DE" dirty="0"/>
+              <a:t> </a:t>
+            </a:r>
+            <a:r>
+              <a:rPr lang="de-DE" dirty="0" err="1"/>
+              <a:t>clusters</a:t>
+            </a:r>
+            <a:r>
+              <a:rPr lang="de-DE" dirty="0"/>
+              <a:t> </a:t>
+            </a:r>
+            <a:r>
+              <a:rPr lang="de-DE" dirty="0" err="1"/>
+              <a:t>contain</a:t>
+            </a:r>
+            <a:r>
+              <a:rPr lang="de-DE" dirty="0"/>
+              <a:t> </a:t>
+            </a:r>
+            <a:r>
+              <a:rPr lang="de-DE" dirty="0" err="1"/>
+              <a:t>only</a:t>
+            </a:r>
+            <a:r>
+              <a:rPr lang="de-DE" dirty="0"/>
+              <a:t> </a:t>
+            </a:r>
+            <a:r>
+              <a:rPr lang="de-DE" dirty="0" err="1"/>
+              <a:t>data</a:t>
+            </a:r>
+            <a:r>
+              <a:rPr lang="de-DE" dirty="0"/>
+              <a:t> </a:t>
+            </a:r>
+            <a:r>
+              <a:rPr lang="de-DE" dirty="0" err="1"/>
+              <a:t>points</a:t>
+            </a:r>
+            <a:r>
+              <a:rPr lang="de-DE" dirty="0"/>
+              <a:t> </a:t>
+            </a:r>
+            <a:r>
+              <a:rPr lang="de-DE" dirty="0" err="1"/>
+              <a:t>which</a:t>
+            </a:r>
+            <a:r>
+              <a:rPr lang="de-DE" dirty="0"/>
+              <a:t> </a:t>
+            </a:r>
+            <a:r>
+              <a:rPr lang="de-DE" dirty="0" err="1"/>
+              <a:t>are</a:t>
+            </a:r>
+            <a:r>
+              <a:rPr lang="de-DE" dirty="0"/>
+              <a:t> </a:t>
+            </a:r>
+            <a:r>
+              <a:rPr lang="de-DE" dirty="0" err="1"/>
+              <a:t>members</a:t>
+            </a:r>
+            <a:r>
+              <a:rPr lang="de-DE" dirty="0"/>
+              <a:t> </a:t>
+            </a:r>
+            <a:r>
+              <a:rPr lang="de-DE" dirty="0" err="1"/>
+              <a:t>of</a:t>
+            </a:r>
+            <a:r>
+              <a:rPr lang="de-DE" dirty="0"/>
+              <a:t> a </a:t>
+            </a:r>
+            <a:r>
+              <a:rPr lang="de-DE" dirty="0" err="1"/>
+              <a:t>single</a:t>
+            </a:r>
+            <a:r>
+              <a:rPr lang="de-DE" dirty="0"/>
+              <a:t> </a:t>
+            </a:r>
+            <a:r>
+              <a:rPr lang="de-DE" dirty="0" err="1"/>
+              <a:t>class</a:t>
+            </a:r>
+            <a:r>
+              <a:rPr lang="de-DE" dirty="0"/>
+              <a:t>.</a:t>
+            </a:r>
+          </a:p>
+          <a:p>
+            <a:r>
+              <a:rPr lang="de-DE" dirty="0" err="1"/>
+              <a:t>completeness</a:t>
+            </a:r>
+            <a:r>
+              <a:rPr lang="de-DE" dirty="0"/>
+              <a:t> score: A </a:t>
+            </a:r>
+            <a:r>
+              <a:rPr lang="de-DE" dirty="0" err="1"/>
+              <a:t>clustering</a:t>
+            </a:r>
+            <a:r>
+              <a:rPr lang="de-DE" dirty="0"/>
+              <a:t> </a:t>
+            </a:r>
+            <a:r>
+              <a:rPr lang="de-DE" dirty="0" err="1"/>
+              <a:t>result</a:t>
+            </a:r>
+            <a:r>
+              <a:rPr lang="de-DE" dirty="0"/>
+              <a:t> </a:t>
+            </a:r>
+            <a:r>
+              <a:rPr lang="de-DE" dirty="0" err="1"/>
+              <a:t>satisfies</a:t>
+            </a:r>
+            <a:r>
+              <a:rPr lang="de-DE" dirty="0"/>
+              <a:t> </a:t>
+            </a:r>
+            <a:r>
+              <a:rPr lang="de-DE" dirty="0" err="1"/>
+              <a:t>completeness</a:t>
+            </a:r>
+            <a:r>
+              <a:rPr lang="de-DE" dirty="0"/>
+              <a:t> </a:t>
+            </a:r>
+            <a:r>
+              <a:rPr lang="de-DE" dirty="0" err="1"/>
+              <a:t>if</a:t>
+            </a:r>
+            <a:r>
+              <a:rPr lang="de-DE" dirty="0"/>
+              <a:t> all </a:t>
+            </a:r>
+            <a:r>
+              <a:rPr lang="de-DE" dirty="0" err="1"/>
+              <a:t>the</a:t>
+            </a:r>
+            <a:r>
+              <a:rPr lang="de-DE" dirty="0"/>
+              <a:t> </a:t>
+            </a:r>
+            <a:r>
+              <a:rPr lang="de-DE" dirty="0" err="1"/>
+              <a:t>data</a:t>
+            </a:r>
+            <a:r>
+              <a:rPr lang="de-DE" dirty="0"/>
+              <a:t> </a:t>
+            </a:r>
+            <a:r>
+              <a:rPr lang="de-DE" dirty="0" err="1"/>
+              <a:t>points</a:t>
+            </a:r>
+            <a:r>
+              <a:rPr lang="de-DE" dirty="0"/>
+              <a:t> </a:t>
+            </a:r>
+            <a:r>
+              <a:rPr lang="de-DE" dirty="0" err="1"/>
+              <a:t>that</a:t>
+            </a:r>
+            <a:r>
+              <a:rPr lang="de-DE" dirty="0"/>
+              <a:t> </a:t>
+            </a:r>
+            <a:r>
+              <a:rPr lang="de-DE" dirty="0" err="1"/>
+              <a:t>are</a:t>
+            </a:r>
+            <a:r>
+              <a:rPr lang="de-DE" dirty="0"/>
+              <a:t> </a:t>
+            </a:r>
+            <a:r>
+              <a:rPr lang="de-DE" dirty="0" err="1"/>
+              <a:t>members</a:t>
+            </a:r>
+            <a:r>
+              <a:rPr lang="de-DE" dirty="0"/>
+              <a:t> </a:t>
+            </a:r>
+            <a:r>
+              <a:rPr lang="de-DE" dirty="0" err="1"/>
+              <a:t>of</a:t>
+            </a:r>
+            <a:r>
+              <a:rPr lang="de-DE" dirty="0"/>
+              <a:t> a </a:t>
+            </a:r>
+            <a:r>
+              <a:rPr lang="de-DE" dirty="0" err="1"/>
+              <a:t>given</a:t>
+            </a:r>
+            <a:r>
+              <a:rPr lang="de-DE" dirty="0"/>
+              <a:t> </a:t>
+            </a:r>
+            <a:r>
+              <a:rPr lang="de-DE" dirty="0" err="1"/>
+              <a:t>class</a:t>
+            </a:r>
+            <a:r>
+              <a:rPr lang="de-DE" dirty="0"/>
+              <a:t> </a:t>
+            </a:r>
+            <a:r>
+              <a:rPr lang="de-DE" dirty="0" err="1"/>
+              <a:t>are</a:t>
+            </a:r>
+            <a:r>
+              <a:rPr lang="de-DE" dirty="0"/>
+              <a:t> </a:t>
+            </a:r>
+            <a:r>
+              <a:rPr lang="de-DE" dirty="0" err="1"/>
+              <a:t>elements</a:t>
+            </a:r>
+            <a:r>
+              <a:rPr lang="de-DE" dirty="0"/>
+              <a:t> </a:t>
+            </a:r>
+            <a:r>
+              <a:rPr lang="de-DE" dirty="0" err="1"/>
+              <a:t>of</a:t>
+            </a:r>
+            <a:r>
+              <a:rPr lang="de-DE" dirty="0"/>
+              <a:t> </a:t>
+            </a:r>
+            <a:r>
+              <a:rPr lang="de-DE" dirty="0" err="1"/>
+              <a:t>the</a:t>
+            </a:r>
+            <a:r>
+              <a:rPr lang="de-DE" dirty="0"/>
+              <a:t> same </a:t>
+            </a:r>
+            <a:r>
+              <a:rPr lang="de-DE" dirty="0" err="1"/>
+              <a:t>cluster</a:t>
+            </a:r>
+            <a:r>
+              <a:rPr lang="de-DE" dirty="0"/>
+              <a:t>.</a:t>
+            </a:r>
+          </a:p>
+          <a:p>
+            <a:r>
+              <a:rPr lang="de-DE" dirty="0"/>
+              <a:t>V-</a:t>
+            </a:r>
+            <a:r>
+              <a:rPr lang="de-DE" dirty="0" err="1"/>
+              <a:t>measure</a:t>
+            </a:r>
+            <a:r>
+              <a:rPr lang="de-DE" dirty="0"/>
+              <a:t> score: </a:t>
+            </a:r>
+            <a:r>
+              <a:rPr lang="de-DE" dirty="0" err="1"/>
+              <a:t>harmonic</a:t>
+            </a:r>
+            <a:r>
+              <a:rPr lang="de-DE" dirty="0"/>
+              <a:t> </a:t>
+            </a:r>
+            <a:r>
+              <a:rPr lang="de-DE" dirty="0" err="1"/>
+              <a:t>mean</a:t>
+            </a:r>
+            <a:r>
+              <a:rPr lang="de-DE" dirty="0"/>
+              <a:t> </a:t>
+            </a:r>
+            <a:r>
+              <a:rPr lang="de-DE" dirty="0" err="1"/>
+              <a:t>between</a:t>
+            </a:r>
+            <a:r>
+              <a:rPr lang="de-DE" dirty="0"/>
+              <a:t> </a:t>
+            </a:r>
+            <a:r>
+              <a:rPr lang="de-DE" dirty="0" err="1"/>
+              <a:t>homogeneity</a:t>
+            </a:r>
+            <a:r>
+              <a:rPr lang="de-DE" dirty="0"/>
+              <a:t> and </a:t>
+            </a:r>
+            <a:r>
+              <a:rPr lang="de-DE" dirty="0" err="1"/>
+              <a:t>completeness</a:t>
+            </a:r>
+            <a:endParaRPr lang="de-DE" dirty="0"/>
+          </a:p>
+          <a:p>
+            <a:r>
+              <a:rPr lang="de-DE" dirty="0"/>
+              <a:t>(</a:t>
+            </a:r>
+            <a:r>
+              <a:rPr lang="de-DE" dirty="0" err="1"/>
+              <a:t>adjusted</a:t>
+            </a:r>
+            <a:r>
+              <a:rPr lang="de-DE" dirty="0"/>
+              <a:t>) Rand </a:t>
+            </a:r>
+            <a:r>
+              <a:rPr lang="de-DE" dirty="0" err="1"/>
+              <a:t>index</a:t>
+            </a:r>
+            <a:r>
+              <a:rPr lang="de-DE" dirty="0"/>
+              <a:t>: …</a:t>
+            </a:r>
+          </a:p>
+          <a:p>
+            <a:r>
+              <a:rPr lang="de-DE" dirty="0"/>
+              <a:t>(</a:t>
+            </a:r>
+            <a:r>
+              <a:rPr lang="de-DE" dirty="0" err="1"/>
+              <a:t>adjusted</a:t>
+            </a:r>
+            <a:r>
+              <a:rPr lang="de-DE" dirty="0"/>
+              <a:t>) mutual </a:t>
+            </a:r>
+            <a:r>
+              <a:rPr lang="de-DE" dirty="0" err="1"/>
+              <a:t>information</a:t>
+            </a:r>
+            <a:r>
+              <a:rPr lang="de-DE" dirty="0"/>
+              <a:t> score: …</a:t>
+            </a:r>
+          </a:p>
+        </p:txBody>
+      </p:sp>
+      <p:sp>
+        <p:nvSpPr>
+          <p:cNvPr id="4" name="Foliennummernplatzhalter 3">
+            <a:extLst>
+              <a:ext uri="{FF2B5EF4-FFF2-40B4-BE49-F238E27FC236}">
+                <a16:creationId xmlns:a16="http://schemas.microsoft.com/office/drawing/2014/main" id="{701A4EA1-06DA-F940-1383-630B8622B38F}"/>
+              </a:ext>
+            </a:extLst>
+          </p:cNvPr>
+          <p:cNvSpPr>
+            <a:spLocks noGrp="1"/>
+          </p:cNvSpPr>
+          <p:nvPr>
+            <p:ph type="sldNum" sz="quarter" idx="12"/>
+          </p:nvPr>
+        </p:nvSpPr>
+        <p:spPr/>
+        <p:txBody>
+          <a:bodyPr/>
+          <a:lstStyle/>
+          <a:p>
+            <a:fld id="{08C366F5-AFAD-49CB-854A-9D9E238FCA13}" type="slidenum">
+              <a:rPr lang="en-GB" smtClean="0"/>
+              <a:t>19</a:t>
+            </a:fld>
+            <a:endParaRPr lang="en-GB"/>
+          </a:p>
+        </p:txBody>
+      </p:sp>
+    </p:spTree>
+    <p:extLst>
+      <p:ext uri="{BB962C8B-B14F-4D97-AF65-F5344CB8AC3E}">
+        <p14:creationId xmlns:p14="http://schemas.microsoft.com/office/powerpoint/2010/main" val="2860005827"/>
+      </p:ext>
+    </p:extLst>
+  </p:cSld>
+  <p:clrMapOvr>
+    <a:masterClrMapping/>
+  </p:clrMapOvr>
+</p:sld>
+</file>
+
+<file path=ppt/slides/slide2.xml><?xml version="1.0" encoding="utf-8"?>
+<p:sld xmlns:a="http://schemas.openxmlformats.org/drawingml/2006/main" xmlns:r="http://schemas.openxmlformats.org/officeDocument/2006/relationships" xmlns:p="http://schemas.openxmlformats.org/presentationml/2006/main">
+  <p:cSld>
+    <p:spTree>
+      <p:nvGrpSpPr>
+        <p:cNvPr id="1" name=""/>
+        <p:cNvGrpSpPr/>
+        <p:nvPr/>
+      </p:nvGrpSpPr>
+      <p:grpSpPr>
+        <a:xfrm>
+          <a:off x="0" y="0"/>
+          <a:ext cx="0" cy="0"/>
+          <a:chOff x="0" y="0"/>
+          <a:chExt cx="0" cy="0"/>
+        </a:xfrm>
+      </p:grpSpPr>
+      <p:sp>
+        <p:nvSpPr>
+          <p:cNvPr id="4" name="Title 3">
+            <a:extLst>
+              <a:ext uri="{FF2B5EF4-FFF2-40B4-BE49-F238E27FC236}">
+                <a16:creationId xmlns:a16="http://schemas.microsoft.com/office/drawing/2014/main" id="{080AD447-446B-E09E-6F4A-522C1DBB462E}"/>
+              </a:ext>
+            </a:extLst>
+          </p:cNvPr>
+          <p:cNvSpPr>
+            <a:spLocks noGrp="1"/>
+          </p:cNvSpPr>
+          <p:nvPr>
+            <p:ph type="title"/>
+          </p:nvPr>
+        </p:nvSpPr>
+        <p:spPr/>
+        <p:txBody>
+          <a:bodyPr/>
+          <a:lstStyle/>
+          <a:p>
+            <a:r>
+              <a:rPr lang="en-GB" dirty="0"/>
+              <a:t>Course Schedule</a:t>
+            </a:r>
+          </a:p>
+        </p:txBody>
+      </p:sp>
+      <p:sp>
+        <p:nvSpPr>
+          <p:cNvPr id="6" name="Inhaltsplatzhalter 5">
+            <a:extLst>
+              <a:ext uri="{FF2B5EF4-FFF2-40B4-BE49-F238E27FC236}">
+                <a16:creationId xmlns:a16="http://schemas.microsoft.com/office/drawing/2014/main" id="{CF502483-E45D-7D7D-D169-ACA4F8327D26}"/>
+              </a:ext>
+            </a:extLst>
+          </p:cNvPr>
+          <p:cNvSpPr>
+            <a:spLocks noGrp="1"/>
+          </p:cNvSpPr>
+          <p:nvPr>
+            <p:ph sz="half" idx="1"/>
+          </p:nvPr>
+        </p:nvSpPr>
+        <p:spPr/>
+        <p:txBody>
+          <a:bodyPr>
+            <a:normAutofit lnSpcReduction="10000"/>
+          </a:bodyPr>
+          <a:lstStyle/>
+          <a:p>
+            <a:pPr marL="514350" indent="-514350">
+              <a:buFont typeface="+mj-lt"/>
+              <a:buAutoNum type="arabicPeriod"/>
+            </a:pPr>
+            <a:r>
+              <a:rPr lang="de-DE" dirty="0" err="1"/>
+              <a:t>Exploratory</a:t>
+            </a:r>
+            <a:r>
+              <a:rPr lang="de-DE" dirty="0"/>
+              <a:t> Data Analysis</a:t>
+            </a:r>
+          </a:p>
+          <a:p>
+            <a:pPr marL="514350" indent="-514350">
+              <a:buFont typeface="+mj-lt"/>
+              <a:buAutoNum type="arabicPeriod"/>
+            </a:pPr>
+            <a:endParaRPr lang="de-DE" dirty="0"/>
+          </a:p>
+          <a:p>
+            <a:pPr marL="514350" indent="-514350">
+              <a:buFont typeface="+mj-lt"/>
+              <a:buAutoNum type="arabicPeriod"/>
+            </a:pPr>
+            <a:r>
+              <a:rPr lang="de-DE" dirty="0"/>
+              <a:t>Clustering</a:t>
+            </a:r>
+          </a:p>
+          <a:p>
+            <a:pPr marL="514350" indent="-514350">
+              <a:buFont typeface="+mj-lt"/>
+              <a:buAutoNum type="arabicPeriod"/>
+            </a:pPr>
+            <a:endParaRPr lang="de-DE" dirty="0"/>
+          </a:p>
+          <a:p>
+            <a:pPr marL="514350" indent="-514350">
+              <a:buFont typeface="+mj-lt"/>
+              <a:buAutoNum type="arabicPeriod"/>
+            </a:pPr>
+            <a:r>
+              <a:rPr lang="de-DE" dirty="0" err="1"/>
+              <a:t>Probabilistic</a:t>
+            </a:r>
+            <a:r>
+              <a:rPr lang="de-DE" dirty="0"/>
+              <a:t> Models</a:t>
+            </a:r>
+          </a:p>
+          <a:p>
+            <a:pPr marL="514350" indent="-514350">
+              <a:buFont typeface="+mj-lt"/>
+              <a:buAutoNum type="arabicPeriod"/>
+            </a:pPr>
+            <a:endParaRPr lang="de-DE" dirty="0"/>
+          </a:p>
+          <a:p>
+            <a:pPr marL="514350" indent="-514350">
+              <a:buFont typeface="+mj-lt"/>
+              <a:buAutoNum type="arabicPeriod"/>
+            </a:pPr>
+            <a:r>
+              <a:rPr lang="de-DE" dirty="0"/>
+              <a:t>Statistical </a:t>
+            </a:r>
+            <a:r>
+              <a:rPr lang="de-DE" dirty="0" err="1"/>
+              <a:t>Inference</a:t>
+            </a:r>
+            <a:endParaRPr lang="de-DE" dirty="0"/>
+          </a:p>
+          <a:p>
+            <a:pPr marL="514350" indent="-514350">
+              <a:buFont typeface="+mj-lt"/>
+              <a:buAutoNum type="arabicPeriod"/>
+            </a:pPr>
+            <a:endParaRPr lang="de-DE" dirty="0"/>
+          </a:p>
+          <a:p>
+            <a:pPr marL="514350" indent="-514350">
+              <a:buFont typeface="+mj-lt"/>
+              <a:buAutoNum type="arabicPeriod"/>
+            </a:pPr>
+            <a:r>
+              <a:rPr lang="de-DE" dirty="0" err="1"/>
+              <a:t>Machine</a:t>
+            </a:r>
+            <a:r>
+              <a:rPr lang="de-DE" dirty="0"/>
+              <a:t> Learning</a:t>
+            </a:r>
+          </a:p>
+        </p:txBody>
+      </p:sp>
+      <p:sp>
+        <p:nvSpPr>
+          <p:cNvPr id="7" name="Inhaltsplatzhalter 6">
+            <a:extLst>
+              <a:ext uri="{FF2B5EF4-FFF2-40B4-BE49-F238E27FC236}">
+                <a16:creationId xmlns:a16="http://schemas.microsoft.com/office/drawing/2014/main" id="{B671907E-FFFA-73EF-8E7D-4AB4EBDD957B}"/>
+              </a:ext>
+            </a:extLst>
+          </p:cNvPr>
+          <p:cNvSpPr>
+            <a:spLocks noGrp="1"/>
+          </p:cNvSpPr>
+          <p:nvPr>
+            <p:ph sz="half" idx="2"/>
+          </p:nvPr>
+        </p:nvSpPr>
+        <p:spPr/>
+        <p:txBody>
+          <a:bodyPr>
+            <a:normAutofit lnSpcReduction="10000"/>
+          </a:bodyPr>
+          <a:lstStyle/>
+          <a:p>
+            <a:pPr marL="514350" indent="-514350">
+              <a:buFont typeface="+mj-lt"/>
+              <a:buAutoNum type="arabicPeriod" startAt="6"/>
+            </a:pPr>
+            <a:r>
+              <a:rPr lang="de-DE" dirty="0"/>
+              <a:t>Feature Engineering</a:t>
+            </a:r>
+          </a:p>
+          <a:p>
+            <a:pPr marL="514350" indent="-514350">
+              <a:buFont typeface="+mj-lt"/>
+              <a:buAutoNum type="arabicPeriod" startAt="6"/>
+            </a:pPr>
+            <a:endParaRPr lang="de-DE" dirty="0"/>
+          </a:p>
+          <a:p>
+            <a:pPr marL="514350" indent="-514350">
+              <a:buFont typeface="+mj-lt"/>
+              <a:buAutoNum type="arabicPeriod" startAt="6"/>
+            </a:pPr>
+            <a:r>
+              <a:rPr lang="de-DE" dirty="0"/>
+              <a:t>Model Evaluation</a:t>
+            </a:r>
+          </a:p>
+          <a:p>
+            <a:pPr marL="514350" indent="-514350">
+              <a:buFont typeface="+mj-lt"/>
+              <a:buAutoNum type="arabicPeriod" startAt="6"/>
+            </a:pPr>
+            <a:endParaRPr lang="de-DE" dirty="0"/>
+          </a:p>
+          <a:p>
+            <a:pPr marL="514350" indent="-514350">
+              <a:buFont typeface="+mj-lt"/>
+              <a:buAutoNum type="arabicPeriod" startAt="6"/>
+            </a:pPr>
+            <a:r>
+              <a:rPr lang="de-DE" dirty="0"/>
+              <a:t>Deep Learning</a:t>
+            </a:r>
+          </a:p>
+          <a:p>
+            <a:pPr marL="514350" indent="-514350">
+              <a:buFont typeface="+mj-lt"/>
+              <a:buAutoNum type="arabicPeriod" startAt="6"/>
+            </a:pPr>
+            <a:endParaRPr lang="de-DE" dirty="0"/>
+          </a:p>
+          <a:p>
+            <a:pPr marL="514350" indent="-514350">
+              <a:buFont typeface="+mj-lt"/>
+              <a:buAutoNum type="arabicPeriod" startAt="6"/>
+            </a:pPr>
+            <a:r>
+              <a:rPr lang="de-DE" dirty="0"/>
+              <a:t>Time Series</a:t>
+            </a:r>
+          </a:p>
+          <a:p>
+            <a:pPr marL="514350" indent="-514350">
+              <a:buFont typeface="+mj-lt"/>
+              <a:buAutoNum type="arabicPeriod" startAt="6"/>
+            </a:pPr>
+            <a:endParaRPr lang="de-DE" dirty="0"/>
+          </a:p>
+          <a:p>
+            <a:pPr marL="514350" indent="-514350">
+              <a:buFont typeface="+mj-lt"/>
+              <a:buAutoNum type="arabicPeriod" startAt="6"/>
+            </a:pPr>
+            <a:r>
+              <a:rPr lang="de-DE" dirty="0" err="1"/>
+              <a:t>Causality</a:t>
+            </a:r>
+            <a:endParaRPr lang="de-DE" dirty="0"/>
+          </a:p>
+        </p:txBody>
+      </p:sp>
+      <p:sp>
+        <p:nvSpPr>
+          <p:cNvPr id="3" name="Slide Number Placeholder 2">
+            <a:extLst>
+              <a:ext uri="{FF2B5EF4-FFF2-40B4-BE49-F238E27FC236}">
+                <a16:creationId xmlns:a16="http://schemas.microsoft.com/office/drawing/2014/main" id="{A0664D44-83AC-6A7A-17E0-C1AE2ED18FF5}"/>
+              </a:ext>
+            </a:extLst>
+          </p:cNvPr>
+          <p:cNvSpPr>
+            <a:spLocks noGrp="1"/>
+          </p:cNvSpPr>
+          <p:nvPr>
+            <p:ph type="sldNum" sz="quarter" idx="12"/>
+          </p:nvPr>
+        </p:nvSpPr>
+        <p:spPr/>
+        <p:txBody>
+          <a:bodyPr/>
+          <a:lstStyle/>
+          <a:p>
+            <a:fld id="{08C366F5-AFAD-49CB-854A-9D9E238FCA13}" type="slidenum">
+              <a:rPr lang="en-GB" smtClean="0"/>
+              <a:t>2</a:t>
+            </a:fld>
+            <a:endParaRPr lang="en-GB" dirty="0"/>
+          </a:p>
+        </p:txBody>
+      </p:sp>
+    </p:spTree>
+    <p:extLst>
+      <p:ext uri="{BB962C8B-B14F-4D97-AF65-F5344CB8AC3E}">
+        <p14:creationId xmlns:p14="http://schemas.microsoft.com/office/powerpoint/2010/main" val="310336692"/>
+      </p:ext>
+    </p:extLst>
+  </p:cSld>
+  <p:clrMapOvr>
+    <a:masterClrMapping/>
+  </p:clrMapOvr>
+</p:sld>
+</file>
+
+<file path=ppt/slides/slide20.xml><?xml version="1.0" encoding="utf-8"?>
+<p:sld xmlns:a="http://schemas.openxmlformats.org/drawingml/2006/main" xmlns:r="http://schemas.openxmlformats.org/officeDocument/2006/relationships" xmlns:p="http://schemas.openxmlformats.org/presentationml/2006/main">
+  <p:cSld>
+    <p:spTree>
+      <p:nvGrpSpPr>
+        <p:cNvPr id="1" name=""/>
+        <p:cNvGrpSpPr/>
+        <p:nvPr/>
+      </p:nvGrpSpPr>
+      <p:grpSpPr>
+        <a:xfrm>
+          <a:off x="0" y="0"/>
+          <a:ext cx="0" cy="0"/>
+          <a:chOff x="0" y="0"/>
+          <a:chExt cx="0" cy="0"/>
+        </a:xfrm>
+      </p:grpSpPr>
+      <p:sp>
+        <p:nvSpPr>
+          <p:cNvPr id="2" name="Titel 1">
+            <a:extLst>
+              <a:ext uri="{FF2B5EF4-FFF2-40B4-BE49-F238E27FC236}">
+                <a16:creationId xmlns:a16="http://schemas.microsoft.com/office/drawing/2014/main" id="{AE45E519-E948-8501-ACAD-BDF00444DFDC}"/>
+              </a:ext>
+            </a:extLst>
+          </p:cNvPr>
+          <p:cNvSpPr>
+            <a:spLocks noGrp="1"/>
+          </p:cNvSpPr>
+          <p:nvPr>
+            <p:ph type="title"/>
+          </p:nvPr>
+        </p:nvSpPr>
+        <p:spPr/>
+        <p:txBody>
+          <a:bodyPr/>
+          <a:lstStyle/>
+          <a:p>
+            <a:r>
+              <a:rPr lang="de-DE" dirty="0"/>
+              <a:t>Mini Batch </a:t>
+            </a:r>
+            <a:r>
+              <a:rPr lang="de-DE" dirty="0" err="1"/>
+              <a:t>k-Means</a:t>
+            </a:r>
+            <a:endParaRPr lang="de-DE" dirty="0"/>
+          </a:p>
+        </p:txBody>
+      </p:sp>
+      <p:sp>
+        <p:nvSpPr>
+          <p:cNvPr id="4" name="Inhaltsplatzhalter 3">
+            <a:extLst>
+              <a:ext uri="{FF2B5EF4-FFF2-40B4-BE49-F238E27FC236}">
+                <a16:creationId xmlns:a16="http://schemas.microsoft.com/office/drawing/2014/main" id="{DAA8C059-BF98-DA76-D11E-B2885769186E}"/>
+              </a:ext>
+            </a:extLst>
+          </p:cNvPr>
+          <p:cNvSpPr>
+            <a:spLocks noGrp="1"/>
+          </p:cNvSpPr>
+          <p:nvPr>
+            <p:ph idx="1"/>
+          </p:nvPr>
+        </p:nvSpPr>
+        <p:spPr/>
+        <p:txBody>
+          <a:bodyPr/>
+          <a:lstStyle/>
+          <a:p>
+            <a:endParaRPr lang="de-DE"/>
+          </a:p>
+        </p:txBody>
+      </p:sp>
+      <p:sp>
+        <p:nvSpPr>
+          <p:cNvPr id="3" name="Foliennummernplatzhalter 2">
+            <a:extLst>
+              <a:ext uri="{FF2B5EF4-FFF2-40B4-BE49-F238E27FC236}">
+                <a16:creationId xmlns:a16="http://schemas.microsoft.com/office/drawing/2014/main" id="{2B02C868-452A-3E9E-3E72-BA889BC8609C}"/>
+              </a:ext>
+            </a:extLst>
+          </p:cNvPr>
+          <p:cNvSpPr>
+            <a:spLocks noGrp="1"/>
+          </p:cNvSpPr>
+          <p:nvPr>
+            <p:ph type="sldNum" sz="quarter" idx="12"/>
+          </p:nvPr>
+        </p:nvSpPr>
+        <p:spPr/>
+        <p:txBody>
+          <a:bodyPr/>
+          <a:lstStyle/>
+          <a:p>
+            <a:fld id="{08C366F5-AFAD-49CB-854A-9D9E238FCA13}" type="slidenum">
+              <a:rPr lang="en-GB" smtClean="0"/>
+              <a:t>20</a:t>
             </a:fld>
             <a:endParaRPr lang="en-GB"/>
           </a:p>
@@ -7186,617 +9569,6 @@
 </p:sld>
 </file>
 
-<file path=ppt/slides/slide19.xml><?xml version="1.0" encoding="utf-8"?>
-<p:sld xmlns:a="http://schemas.openxmlformats.org/drawingml/2006/main" xmlns:r="http://schemas.openxmlformats.org/officeDocument/2006/relationships" xmlns:p="http://schemas.openxmlformats.org/presentationml/2006/main">
-  <p:cSld>
-    <p:spTree>
-      <p:nvGrpSpPr>
-        <p:cNvPr id="1" name=""/>
-        <p:cNvGrpSpPr/>
-        <p:nvPr/>
-      </p:nvGrpSpPr>
-      <p:grpSpPr>
-        <a:xfrm>
-          <a:off x="0" y="0"/>
-          <a:ext cx="0" cy="0"/>
-          <a:chOff x="0" y="0"/>
-          <a:chExt cx="0" cy="0"/>
-        </a:xfrm>
-      </p:grpSpPr>
-      <p:sp>
-        <p:nvSpPr>
-          <p:cNvPr id="2" name="Titel 1">
-            <a:extLst>
-              <a:ext uri="{FF2B5EF4-FFF2-40B4-BE49-F238E27FC236}">
-                <a16:creationId xmlns:a16="http://schemas.microsoft.com/office/drawing/2014/main" id="{DFE85EF2-749A-FE44-0A02-FD2D92497601}"/>
-              </a:ext>
-            </a:extLst>
-          </p:cNvPr>
-          <p:cNvSpPr>
-            <a:spLocks noGrp="1"/>
-          </p:cNvSpPr>
-          <p:nvPr>
-            <p:ph type="title"/>
-          </p:nvPr>
-        </p:nvSpPr>
-        <p:spPr/>
-        <p:txBody>
-          <a:bodyPr/>
-          <a:lstStyle/>
-          <a:p>
-            <a:r>
-              <a:rPr lang="de-DE" dirty="0" err="1"/>
-              <a:t>Gaussian</a:t>
-            </a:r>
-            <a:r>
-              <a:rPr lang="de-DE" dirty="0"/>
-              <a:t> </a:t>
-            </a:r>
-            <a:r>
-              <a:rPr lang="de-DE" dirty="0" err="1"/>
-              <a:t>Mixture</a:t>
-            </a:r>
-            <a:r>
-              <a:rPr lang="de-DE" dirty="0"/>
-              <a:t> Models</a:t>
-            </a:r>
-          </a:p>
-        </p:txBody>
-      </p:sp>
-      <p:sp>
-        <p:nvSpPr>
-          <p:cNvPr id="4" name="Inhaltsplatzhalter 3">
-            <a:extLst>
-              <a:ext uri="{FF2B5EF4-FFF2-40B4-BE49-F238E27FC236}">
-                <a16:creationId xmlns:a16="http://schemas.microsoft.com/office/drawing/2014/main" id="{0A2F8357-AF4F-871F-2CBC-4B5FD73DABB1}"/>
-              </a:ext>
-            </a:extLst>
-          </p:cNvPr>
-          <p:cNvSpPr>
-            <a:spLocks noGrp="1"/>
-          </p:cNvSpPr>
-          <p:nvPr>
-            <p:ph idx="1"/>
-          </p:nvPr>
-        </p:nvSpPr>
-        <p:spPr/>
-        <p:txBody>
-          <a:bodyPr/>
-          <a:lstStyle/>
-          <a:p>
-            <a:pPr marL="0" indent="0">
-              <a:buNone/>
-            </a:pPr>
-            <a:r>
-              <a:rPr lang="de-DE" dirty="0" err="1"/>
-              <a:t>k-Means</a:t>
-            </a:r>
-            <a:r>
-              <a:rPr lang="de-DE" dirty="0"/>
-              <a:t>: </a:t>
-            </a:r>
-            <a:r>
-              <a:rPr lang="de-DE" dirty="0" err="1"/>
-              <a:t>special</a:t>
-            </a:r>
-            <a:r>
-              <a:rPr lang="de-DE" dirty="0"/>
-              <a:t> </a:t>
-            </a:r>
-            <a:r>
-              <a:rPr lang="de-DE" dirty="0" err="1"/>
-              <a:t>case</a:t>
-            </a:r>
-            <a:r>
-              <a:rPr lang="de-DE" dirty="0"/>
-              <a:t> </a:t>
-            </a:r>
-            <a:r>
-              <a:rPr lang="de-DE" dirty="0" err="1"/>
-              <a:t>of</a:t>
-            </a:r>
-            <a:r>
-              <a:rPr lang="de-DE" dirty="0"/>
-              <a:t> </a:t>
-            </a:r>
-            <a:r>
-              <a:rPr lang="de-DE" dirty="0" err="1"/>
-              <a:t>Gaussian</a:t>
-            </a:r>
-            <a:r>
-              <a:rPr lang="de-DE" dirty="0"/>
-              <a:t> </a:t>
-            </a:r>
-            <a:r>
-              <a:rPr lang="de-DE" dirty="0" err="1"/>
-              <a:t>mixture</a:t>
-            </a:r>
-            <a:r>
-              <a:rPr lang="de-DE" dirty="0"/>
-              <a:t> </a:t>
-            </a:r>
-            <a:r>
-              <a:rPr lang="de-DE" dirty="0" err="1"/>
-              <a:t>model</a:t>
-            </a:r>
-            <a:r>
-              <a:rPr lang="de-DE" dirty="0"/>
-              <a:t> </a:t>
-            </a:r>
-            <a:r>
-              <a:rPr lang="de-DE" dirty="0" err="1"/>
-              <a:t>with</a:t>
-            </a:r>
-            <a:r>
-              <a:rPr lang="de-DE" dirty="0"/>
-              <a:t> </a:t>
-            </a:r>
-            <a:r>
-              <a:rPr lang="de-DE" dirty="0" err="1"/>
-              <a:t>equal</a:t>
-            </a:r>
-            <a:r>
-              <a:rPr lang="de-DE" dirty="0"/>
-              <a:t> </a:t>
-            </a:r>
-            <a:r>
-              <a:rPr lang="de-DE" dirty="0" err="1"/>
-              <a:t>covariance</a:t>
-            </a:r>
-            <a:r>
-              <a:rPr lang="de-DE" dirty="0"/>
-              <a:t> per </a:t>
-            </a:r>
-            <a:r>
-              <a:rPr lang="de-DE" dirty="0" err="1"/>
-              <a:t>component</a:t>
-            </a:r>
-            <a:endParaRPr lang="de-DE" dirty="0"/>
-          </a:p>
-        </p:txBody>
-      </p:sp>
-      <p:sp>
-        <p:nvSpPr>
-          <p:cNvPr id="3" name="Foliennummernplatzhalter 2">
-            <a:extLst>
-              <a:ext uri="{FF2B5EF4-FFF2-40B4-BE49-F238E27FC236}">
-                <a16:creationId xmlns:a16="http://schemas.microsoft.com/office/drawing/2014/main" id="{0B40836D-FBB2-F6AE-DB5B-B3E743214157}"/>
-              </a:ext>
-            </a:extLst>
-          </p:cNvPr>
-          <p:cNvSpPr>
-            <a:spLocks noGrp="1"/>
-          </p:cNvSpPr>
-          <p:nvPr>
-            <p:ph type="sldNum" sz="quarter" idx="12"/>
-          </p:nvPr>
-        </p:nvSpPr>
-        <p:spPr/>
-        <p:txBody>
-          <a:bodyPr/>
-          <a:lstStyle/>
-          <a:p>
-            <a:fld id="{08C366F5-AFAD-49CB-854A-9D9E238FCA13}" type="slidenum">
-              <a:rPr lang="en-GB" smtClean="0"/>
-              <a:t>19</a:t>
-            </a:fld>
-            <a:endParaRPr lang="en-GB"/>
-          </a:p>
-        </p:txBody>
-      </p:sp>
-    </p:spTree>
-    <p:extLst>
-      <p:ext uri="{BB962C8B-B14F-4D97-AF65-F5344CB8AC3E}">
-        <p14:creationId xmlns:p14="http://schemas.microsoft.com/office/powerpoint/2010/main" val="3563920324"/>
-      </p:ext>
-    </p:extLst>
-  </p:cSld>
-  <p:clrMapOvr>
-    <a:masterClrMapping/>
-  </p:clrMapOvr>
-</p:sld>
-</file>
-
-<file path=ppt/slides/slide2.xml><?xml version="1.0" encoding="utf-8"?>
-<p:sld xmlns:a="http://schemas.openxmlformats.org/drawingml/2006/main" xmlns:r="http://schemas.openxmlformats.org/officeDocument/2006/relationships" xmlns:p="http://schemas.openxmlformats.org/presentationml/2006/main">
-  <p:cSld>
-    <p:spTree>
-      <p:nvGrpSpPr>
-        <p:cNvPr id="1" name=""/>
-        <p:cNvGrpSpPr/>
-        <p:nvPr/>
-      </p:nvGrpSpPr>
-      <p:grpSpPr>
-        <a:xfrm>
-          <a:off x="0" y="0"/>
-          <a:ext cx="0" cy="0"/>
-          <a:chOff x="0" y="0"/>
-          <a:chExt cx="0" cy="0"/>
-        </a:xfrm>
-      </p:grpSpPr>
-      <p:sp>
-        <p:nvSpPr>
-          <p:cNvPr id="4" name="Title 3">
-            <a:extLst>
-              <a:ext uri="{FF2B5EF4-FFF2-40B4-BE49-F238E27FC236}">
-                <a16:creationId xmlns:a16="http://schemas.microsoft.com/office/drawing/2014/main" id="{080AD447-446B-E09E-6F4A-522C1DBB462E}"/>
-              </a:ext>
-            </a:extLst>
-          </p:cNvPr>
-          <p:cNvSpPr>
-            <a:spLocks noGrp="1"/>
-          </p:cNvSpPr>
-          <p:nvPr>
-            <p:ph type="title"/>
-          </p:nvPr>
-        </p:nvSpPr>
-        <p:spPr/>
-        <p:txBody>
-          <a:bodyPr/>
-          <a:lstStyle/>
-          <a:p>
-            <a:r>
-              <a:rPr lang="en-GB" dirty="0"/>
-              <a:t>Course Schedule</a:t>
-            </a:r>
-          </a:p>
-        </p:txBody>
-      </p:sp>
-      <p:sp>
-        <p:nvSpPr>
-          <p:cNvPr id="6" name="Inhaltsplatzhalter 5">
-            <a:extLst>
-              <a:ext uri="{FF2B5EF4-FFF2-40B4-BE49-F238E27FC236}">
-                <a16:creationId xmlns:a16="http://schemas.microsoft.com/office/drawing/2014/main" id="{CF502483-E45D-7D7D-D169-ACA4F8327D26}"/>
-              </a:ext>
-            </a:extLst>
-          </p:cNvPr>
-          <p:cNvSpPr>
-            <a:spLocks noGrp="1"/>
-          </p:cNvSpPr>
-          <p:nvPr>
-            <p:ph sz="half" idx="1"/>
-          </p:nvPr>
-        </p:nvSpPr>
-        <p:spPr/>
-        <p:txBody>
-          <a:bodyPr>
-            <a:normAutofit lnSpcReduction="10000"/>
-          </a:bodyPr>
-          <a:lstStyle/>
-          <a:p>
-            <a:pPr marL="514350" indent="-514350">
-              <a:buFont typeface="+mj-lt"/>
-              <a:buAutoNum type="arabicPeriod"/>
-            </a:pPr>
-            <a:r>
-              <a:rPr lang="de-DE" dirty="0" err="1"/>
-              <a:t>Exploratory</a:t>
-            </a:r>
-            <a:r>
-              <a:rPr lang="de-DE" dirty="0"/>
-              <a:t> Data Analysis</a:t>
-            </a:r>
-          </a:p>
-          <a:p>
-            <a:pPr marL="514350" indent="-514350">
-              <a:buFont typeface="+mj-lt"/>
-              <a:buAutoNum type="arabicPeriod"/>
-            </a:pPr>
-            <a:endParaRPr lang="de-DE" dirty="0"/>
-          </a:p>
-          <a:p>
-            <a:pPr marL="514350" indent="-514350">
-              <a:buFont typeface="+mj-lt"/>
-              <a:buAutoNum type="arabicPeriod"/>
-            </a:pPr>
-            <a:r>
-              <a:rPr lang="de-DE" dirty="0"/>
-              <a:t>Clustering</a:t>
-            </a:r>
-          </a:p>
-          <a:p>
-            <a:pPr marL="514350" indent="-514350">
-              <a:buFont typeface="+mj-lt"/>
-              <a:buAutoNum type="arabicPeriod"/>
-            </a:pPr>
-            <a:endParaRPr lang="de-DE" dirty="0"/>
-          </a:p>
-          <a:p>
-            <a:pPr marL="514350" indent="-514350">
-              <a:buFont typeface="+mj-lt"/>
-              <a:buAutoNum type="arabicPeriod"/>
-            </a:pPr>
-            <a:r>
-              <a:rPr lang="de-DE" dirty="0" err="1"/>
-              <a:t>Probabilistic</a:t>
-            </a:r>
-            <a:r>
-              <a:rPr lang="de-DE" dirty="0"/>
-              <a:t> Models</a:t>
-            </a:r>
-          </a:p>
-          <a:p>
-            <a:pPr marL="514350" indent="-514350">
-              <a:buFont typeface="+mj-lt"/>
-              <a:buAutoNum type="arabicPeriod"/>
-            </a:pPr>
-            <a:endParaRPr lang="de-DE" dirty="0"/>
-          </a:p>
-          <a:p>
-            <a:pPr marL="514350" indent="-514350">
-              <a:buFont typeface="+mj-lt"/>
-              <a:buAutoNum type="arabicPeriod"/>
-            </a:pPr>
-            <a:r>
-              <a:rPr lang="de-DE" dirty="0"/>
-              <a:t>Statistical </a:t>
-            </a:r>
-            <a:r>
-              <a:rPr lang="de-DE" dirty="0" err="1"/>
-              <a:t>Inference</a:t>
-            </a:r>
-            <a:endParaRPr lang="de-DE" dirty="0"/>
-          </a:p>
-          <a:p>
-            <a:pPr marL="514350" indent="-514350">
-              <a:buFont typeface="+mj-lt"/>
-              <a:buAutoNum type="arabicPeriod"/>
-            </a:pPr>
-            <a:endParaRPr lang="de-DE" dirty="0"/>
-          </a:p>
-          <a:p>
-            <a:pPr marL="514350" indent="-514350">
-              <a:buFont typeface="+mj-lt"/>
-              <a:buAutoNum type="arabicPeriod"/>
-            </a:pPr>
-            <a:r>
-              <a:rPr lang="de-DE" dirty="0" err="1"/>
-              <a:t>Machine</a:t>
-            </a:r>
-            <a:r>
-              <a:rPr lang="de-DE" dirty="0"/>
-              <a:t> Learning</a:t>
-            </a:r>
-          </a:p>
-        </p:txBody>
-      </p:sp>
-      <p:sp>
-        <p:nvSpPr>
-          <p:cNvPr id="7" name="Inhaltsplatzhalter 6">
-            <a:extLst>
-              <a:ext uri="{FF2B5EF4-FFF2-40B4-BE49-F238E27FC236}">
-                <a16:creationId xmlns:a16="http://schemas.microsoft.com/office/drawing/2014/main" id="{B671907E-FFFA-73EF-8E7D-4AB4EBDD957B}"/>
-              </a:ext>
-            </a:extLst>
-          </p:cNvPr>
-          <p:cNvSpPr>
-            <a:spLocks noGrp="1"/>
-          </p:cNvSpPr>
-          <p:nvPr>
-            <p:ph sz="half" idx="2"/>
-          </p:nvPr>
-        </p:nvSpPr>
-        <p:spPr/>
-        <p:txBody>
-          <a:bodyPr>
-            <a:normAutofit lnSpcReduction="10000"/>
-          </a:bodyPr>
-          <a:lstStyle/>
-          <a:p>
-            <a:pPr marL="514350" indent="-514350">
-              <a:buFont typeface="+mj-lt"/>
-              <a:buAutoNum type="arabicPeriod" startAt="6"/>
-            </a:pPr>
-            <a:r>
-              <a:rPr lang="de-DE" dirty="0"/>
-              <a:t>Feature Engineering</a:t>
-            </a:r>
-          </a:p>
-          <a:p>
-            <a:pPr marL="514350" indent="-514350">
-              <a:buFont typeface="+mj-lt"/>
-              <a:buAutoNum type="arabicPeriod" startAt="6"/>
-            </a:pPr>
-            <a:endParaRPr lang="de-DE" dirty="0"/>
-          </a:p>
-          <a:p>
-            <a:pPr marL="514350" indent="-514350">
-              <a:buFont typeface="+mj-lt"/>
-              <a:buAutoNum type="arabicPeriod" startAt="6"/>
-            </a:pPr>
-            <a:r>
-              <a:rPr lang="de-DE" dirty="0"/>
-              <a:t>Model Evaluation</a:t>
-            </a:r>
-          </a:p>
-          <a:p>
-            <a:pPr marL="514350" indent="-514350">
-              <a:buFont typeface="+mj-lt"/>
-              <a:buAutoNum type="arabicPeriod" startAt="6"/>
-            </a:pPr>
-            <a:endParaRPr lang="de-DE" dirty="0"/>
-          </a:p>
-          <a:p>
-            <a:pPr marL="514350" indent="-514350">
-              <a:buFont typeface="+mj-lt"/>
-              <a:buAutoNum type="arabicPeriod" startAt="6"/>
-            </a:pPr>
-            <a:r>
-              <a:rPr lang="de-DE" dirty="0"/>
-              <a:t>Deep Learning</a:t>
-            </a:r>
-          </a:p>
-          <a:p>
-            <a:pPr marL="514350" indent="-514350">
-              <a:buFont typeface="+mj-lt"/>
-              <a:buAutoNum type="arabicPeriod" startAt="6"/>
-            </a:pPr>
-            <a:endParaRPr lang="de-DE" dirty="0"/>
-          </a:p>
-          <a:p>
-            <a:pPr marL="514350" indent="-514350">
-              <a:buFont typeface="+mj-lt"/>
-              <a:buAutoNum type="arabicPeriod" startAt="6"/>
-            </a:pPr>
-            <a:r>
-              <a:rPr lang="de-DE" dirty="0"/>
-              <a:t>Time Series</a:t>
-            </a:r>
-          </a:p>
-          <a:p>
-            <a:pPr marL="514350" indent="-514350">
-              <a:buFont typeface="+mj-lt"/>
-              <a:buAutoNum type="arabicPeriod" startAt="6"/>
-            </a:pPr>
-            <a:endParaRPr lang="de-DE" dirty="0"/>
-          </a:p>
-          <a:p>
-            <a:pPr marL="514350" indent="-514350">
-              <a:buFont typeface="+mj-lt"/>
-              <a:buAutoNum type="arabicPeriod" startAt="6"/>
-            </a:pPr>
-            <a:r>
-              <a:rPr lang="de-DE" dirty="0" err="1"/>
-              <a:t>Causality</a:t>
-            </a:r>
-            <a:endParaRPr lang="de-DE" dirty="0"/>
-          </a:p>
-        </p:txBody>
-      </p:sp>
-      <p:sp>
-        <p:nvSpPr>
-          <p:cNvPr id="3" name="Slide Number Placeholder 2">
-            <a:extLst>
-              <a:ext uri="{FF2B5EF4-FFF2-40B4-BE49-F238E27FC236}">
-                <a16:creationId xmlns:a16="http://schemas.microsoft.com/office/drawing/2014/main" id="{A0664D44-83AC-6A7A-17E0-C1AE2ED18FF5}"/>
-              </a:ext>
-            </a:extLst>
-          </p:cNvPr>
-          <p:cNvSpPr>
-            <a:spLocks noGrp="1"/>
-          </p:cNvSpPr>
-          <p:nvPr>
-            <p:ph type="sldNum" sz="quarter" idx="12"/>
-          </p:nvPr>
-        </p:nvSpPr>
-        <p:spPr/>
-        <p:txBody>
-          <a:bodyPr/>
-          <a:lstStyle/>
-          <a:p>
-            <a:fld id="{08C366F5-AFAD-49CB-854A-9D9E238FCA13}" type="slidenum">
-              <a:rPr lang="en-GB" smtClean="0"/>
-              <a:t>2</a:t>
-            </a:fld>
-            <a:endParaRPr lang="en-GB" dirty="0"/>
-          </a:p>
-        </p:txBody>
-      </p:sp>
-    </p:spTree>
-    <p:extLst>
-      <p:ext uri="{BB962C8B-B14F-4D97-AF65-F5344CB8AC3E}">
-        <p14:creationId xmlns:p14="http://schemas.microsoft.com/office/powerpoint/2010/main" val="310336692"/>
-      </p:ext>
-    </p:extLst>
-  </p:cSld>
-  <p:clrMapOvr>
-    <a:masterClrMapping/>
-  </p:clrMapOvr>
-</p:sld>
-</file>
-
-<file path=ppt/slides/slide20.xml><?xml version="1.0" encoding="utf-8"?>
-<p:sld xmlns:a="http://schemas.openxmlformats.org/drawingml/2006/main" xmlns:r="http://schemas.openxmlformats.org/officeDocument/2006/relationships" xmlns:p="http://schemas.openxmlformats.org/presentationml/2006/main">
-  <p:cSld>
-    <p:spTree>
-      <p:nvGrpSpPr>
-        <p:cNvPr id="1" name=""/>
-        <p:cNvGrpSpPr/>
-        <p:nvPr/>
-      </p:nvGrpSpPr>
-      <p:grpSpPr>
-        <a:xfrm>
-          <a:off x="0" y="0"/>
-          <a:ext cx="0" cy="0"/>
-          <a:chOff x="0" y="0"/>
-          <a:chExt cx="0" cy="0"/>
-        </a:xfrm>
-      </p:grpSpPr>
-      <p:sp>
-        <p:nvSpPr>
-          <p:cNvPr id="2" name="Titel 1">
-            <a:extLst>
-              <a:ext uri="{FF2B5EF4-FFF2-40B4-BE49-F238E27FC236}">
-                <a16:creationId xmlns:a16="http://schemas.microsoft.com/office/drawing/2014/main" id="{712D266D-155F-F226-2B1D-358BA749E8CC}"/>
-              </a:ext>
-            </a:extLst>
-          </p:cNvPr>
-          <p:cNvSpPr>
-            <a:spLocks noGrp="1"/>
-          </p:cNvSpPr>
-          <p:nvPr>
-            <p:ph type="title"/>
-          </p:nvPr>
-        </p:nvSpPr>
-        <p:spPr/>
-        <p:txBody>
-          <a:bodyPr/>
-          <a:lstStyle/>
-          <a:p>
-            <a:r>
-              <a:rPr lang="de-DE" dirty="0" err="1"/>
-              <a:t>Hierarchical</a:t>
-            </a:r>
-            <a:r>
-              <a:rPr lang="de-DE" dirty="0"/>
-              <a:t> Clustering: Motivation</a:t>
-            </a:r>
-          </a:p>
-        </p:txBody>
-      </p:sp>
-      <p:sp>
-        <p:nvSpPr>
-          <p:cNvPr id="3" name="Foliennummernplatzhalter 2">
-            <a:extLst>
-              <a:ext uri="{FF2B5EF4-FFF2-40B4-BE49-F238E27FC236}">
-                <a16:creationId xmlns:a16="http://schemas.microsoft.com/office/drawing/2014/main" id="{0837E5E9-930A-77A7-EDB3-BE3C126787F0}"/>
-              </a:ext>
-            </a:extLst>
-          </p:cNvPr>
-          <p:cNvSpPr>
-            <a:spLocks noGrp="1"/>
-          </p:cNvSpPr>
-          <p:nvPr>
-            <p:ph type="sldNum" sz="quarter" idx="12"/>
-          </p:nvPr>
-        </p:nvSpPr>
-        <p:spPr/>
-        <p:txBody>
-          <a:bodyPr/>
-          <a:lstStyle/>
-          <a:p>
-            <a:fld id="{08C366F5-AFAD-49CB-854A-9D9E238FCA13}" type="slidenum">
-              <a:rPr lang="en-GB" smtClean="0"/>
-              <a:t>20</a:t>
-            </a:fld>
-            <a:endParaRPr lang="en-GB"/>
-          </a:p>
-        </p:txBody>
-      </p:sp>
-    </p:spTree>
-    <p:extLst>
-      <p:ext uri="{BB962C8B-B14F-4D97-AF65-F5344CB8AC3E}">
-        <p14:creationId xmlns:p14="http://schemas.microsoft.com/office/powerpoint/2010/main" val="3112906239"/>
-      </p:ext>
-    </p:extLst>
-  </p:cSld>
-  <p:clrMapOvr>
-    <a:masterClrMapping/>
-  </p:clrMapOvr>
-</p:sld>
-</file>
-
 <file path=ppt/slides/slide21.xml><?xml version="1.0" encoding="utf-8"?>
 <p:sld xmlns:a="http://schemas.openxmlformats.org/drawingml/2006/main" xmlns:r="http://schemas.openxmlformats.org/officeDocument/2006/relationships" xmlns:p="http://schemas.openxmlformats.org/presentationml/2006/main">
   <p:cSld>
@@ -7819,7 +9591,7 @@
           <p:cNvPr id="2" name="Titel 1">
             <a:extLst>
               <a:ext uri="{FF2B5EF4-FFF2-40B4-BE49-F238E27FC236}">
-                <a16:creationId xmlns:a16="http://schemas.microsoft.com/office/drawing/2014/main" id="{4DB71406-467A-A03D-EBA2-95505D3C5AF2}"/>
+                <a16:creationId xmlns:a16="http://schemas.microsoft.com/office/drawing/2014/main" id="{DFE85EF2-749A-FE44-0A02-FD2D92497601}"/>
               </a:ext>
             </a:extLst>
           </p:cNvPr>
@@ -7837,15 +9609,130 @@
           <a:p>
             <a:r>
               <a:rPr lang="de-DE" dirty="0" err="1"/>
-              <a:t>Linkage</a:t>
-            </a:r>
-            <a:r>
-              <a:rPr lang="de-DE" dirty="0"/>
-              <a:t> </a:t>
-            </a:r>
-            <a:r>
-              <a:rPr lang="de-DE" dirty="0" err="1"/>
-              <a:t>Criteria</a:t>
+              <a:t>Gaussian</a:t>
+            </a:r>
+            <a:r>
+              <a:rPr lang="de-DE" dirty="0"/>
+              <a:t> </a:t>
+            </a:r>
+            <a:r>
+              <a:rPr lang="de-DE" dirty="0" err="1"/>
+              <a:t>Mixture</a:t>
+            </a:r>
+            <a:r>
+              <a:rPr lang="de-DE" dirty="0"/>
+              <a:t> Models</a:t>
+            </a:r>
+          </a:p>
+        </p:txBody>
+      </p:sp>
+      <p:sp>
+        <p:nvSpPr>
+          <p:cNvPr id="4" name="Inhaltsplatzhalter 3">
+            <a:extLst>
+              <a:ext uri="{FF2B5EF4-FFF2-40B4-BE49-F238E27FC236}">
+                <a16:creationId xmlns:a16="http://schemas.microsoft.com/office/drawing/2014/main" id="{0A2F8357-AF4F-871F-2CBC-4B5FD73DABB1}"/>
+              </a:ext>
+            </a:extLst>
+          </p:cNvPr>
+          <p:cNvSpPr>
+            <a:spLocks noGrp="1"/>
+          </p:cNvSpPr>
+          <p:nvPr>
+            <p:ph idx="1"/>
+          </p:nvPr>
+        </p:nvSpPr>
+        <p:spPr/>
+        <p:txBody>
+          <a:bodyPr/>
+          <a:lstStyle/>
+          <a:p>
+            <a:pPr marL="0" indent="0">
+              <a:buNone/>
+            </a:pPr>
+            <a:r>
+              <a:rPr lang="de-DE" dirty="0" err="1"/>
+              <a:t>k-Means</a:t>
+            </a:r>
+            <a:r>
+              <a:rPr lang="de-DE" dirty="0"/>
+              <a:t>: </a:t>
+            </a:r>
+            <a:r>
+              <a:rPr lang="de-DE" dirty="0" err="1"/>
+              <a:t>special</a:t>
+            </a:r>
+            <a:r>
+              <a:rPr lang="de-DE" dirty="0"/>
+              <a:t> </a:t>
+            </a:r>
+            <a:r>
+              <a:rPr lang="de-DE" dirty="0" err="1"/>
+              <a:t>case</a:t>
+            </a:r>
+            <a:r>
+              <a:rPr lang="de-DE" dirty="0"/>
+              <a:t> </a:t>
+            </a:r>
+            <a:r>
+              <a:rPr lang="de-DE" dirty="0" err="1"/>
+              <a:t>of</a:t>
+            </a:r>
+            <a:r>
+              <a:rPr lang="de-DE" dirty="0"/>
+              <a:t> </a:t>
+            </a:r>
+            <a:r>
+              <a:rPr lang="de-DE" dirty="0" err="1"/>
+              <a:t>Gaussian</a:t>
+            </a:r>
+            <a:r>
+              <a:rPr lang="de-DE" dirty="0"/>
+              <a:t> </a:t>
+            </a:r>
+            <a:r>
+              <a:rPr lang="de-DE" dirty="0" err="1"/>
+              <a:t>mixture</a:t>
+            </a:r>
+            <a:r>
+              <a:rPr lang="de-DE" dirty="0"/>
+              <a:t> </a:t>
+            </a:r>
+            <a:r>
+              <a:rPr lang="de-DE" dirty="0" err="1"/>
+              <a:t>model</a:t>
+            </a:r>
+            <a:r>
+              <a:rPr lang="de-DE" dirty="0"/>
+              <a:t> </a:t>
+            </a:r>
+            <a:r>
+              <a:rPr lang="de-DE" dirty="0" err="1"/>
+              <a:t>with</a:t>
+            </a:r>
+            <a:r>
+              <a:rPr lang="de-DE" dirty="0"/>
+              <a:t> </a:t>
+            </a:r>
+            <a:r>
+              <a:rPr lang="de-DE" dirty="0" err="1"/>
+              <a:t>equal</a:t>
+            </a:r>
+            <a:r>
+              <a:rPr lang="de-DE" dirty="0"/>
+              <a:t> </a:t>
+            </a:r>
+            <a:r>
+              <a:rPr lang="de-DE" dirty="0" err="1"/>
+              <a:t>covariance</a:t>
+            </a:r>
+            <a:r>
+              <a:rPr lang="de-DE" dirty="0"/>
+              <a:t> per </a:t>
+            </a:r>
+            <a:r>
+              <a:rPr lang="de-DE" dirty="0" err="1"/>
+              <a:t>component</a:t>
             </a:r>
             <a:endParaRPr lang="de-DE" dirty="0"/>
           </a:p>
@@ -7856,7 +9743,7 @@
           <p:cNvPr id="3" name="Foliennummernplatzhalter 2">
             <a:extLst>
               <a:ext uri="{FF2B5EF4-FFF2-40B4-BE49-F238E27FC236}">
-                <a16:creationId xmlns:a16="http://schemas.microsoft.com/office/drawing/2014/main" id="{0F696987-D96D-454C-5E9D-CD69887E2F65}"/>
+                <a16:creationId xmlns:a16="http://schemas.microsoft.com/office/drawing/2014/main" id="{0B40836D-FBB2-F6AE-DB5B-B3E743214157}"/>
               </a:ext>
             </a:extLst>
           </p:cNvPr>
@@ -7883,7 +9770,7 @@
     </p:spTree>
     <p:extLst>
       <p:ext uri="{BB962C8B-B14F-4D97-AF65-F5344CB8AC3E}">
-        <p14:creationId xmlns:p14="http://schemas.microsoft.com/office/powerpoint/2010/main" val="2365265487"/>
+        <p14:creationId xmlns:p14="http://schemas.microsoft.com/office/powerpoint/2010/main" val="3563920324"/>
       </p:ext>
     </p:extLst>
   </p:cSld>
@@ -7915,7 +9802,7 @@
           <p:cNvPr id="2" name="Titel 1">
             <a:extLst>
               <a:ext uri="{FF2B5EF4-FFF2-40B4-BE49-F238E27FC236}">
-                <a16:creationId xmlns:a16="http://schemas.microsoft.com/office/drawing/2014/main" id="{54142ABE-7200-78B0-CCD9-D683F1797E62}"/>
+                <a16:creationId xmlns:a16="http://schemas.microsoft.com/office/drawing/2014/main" id="{712D266D-155F-F226-2B1D-358BA749E8CC}"/>
               </a:ext>
             </a:extLst>
           </p:cNvPr>
@@ -7933,11 +9820,11 @@
           <a:p>
             <a:r>
               <a:rPr lang="de-DE" dirty="0" err="1"/>
-              <a:t>Dendrograms</a:t>
-            </a:r>
-            <a:r>
-              <a:rPr lang="de-DE" dirty="0"/>
-              <a:t> and Interpretation</a:t>
+              <a:t>Hierarchical</a:t>
+            </a:r>
+            <a:r>
+              <a:rPr lang="de-DE" dirty="0"/>
+              <a:t> Clustering: Motivation</a:t>
             </a:r>
           </a:p>
         </p:txBody>
@@ -7947,7 +9834,7 @@
           <p:cNvPr id="3" name="Foliennummernplatzhalter 2">
             <a:extLst>
               <a:ext uri="{FF2B5EF4-FFF2-40B4-BE49-F238E27FC236}">
-                <a16:creationId xmlns:a16="http://schemas.microsoft.com/office/drawing/2014/main" id="{3CF1EAA3-D7F2-B045-B22D-C9405AEBC70C}"/>
+                <a16:creationId xmlns:a16="http://schemas.microsoft.com/office/drawing/2014/main" id="{0837E5E9-930A-77A7-EDB3-BE3C126787F0}"/>
               </a:ext>
             </a:extLst>
           </p:cNvPr>
@@ -7974,7 +9861,7 @@
     </p:spTree>
     <p:extLst>
       <p:ext uri="{BB962C8B-B14F-4D97-AF65-F5344CB8AC3E}">
-        <p14:creationId xmlns:p14="http://schemas.microsoft.com/office/powerpoint/2010/main" val="1704252082"/>
+        <p14:creationId xmlns:p14="http://schemas.microsoft.com/office/powerpoint/2010/main" val="3112906239"/>
       </p:ext>
     </p:extLst>
   </p:cSld>
@@ -8006,7 +9893,7 @@
           <p:cNvPr id="2" name="Titel 1">
             <a:extLst>
               <a:ext uri="{FF2B5EF4-FFF2-40B4-BE49-F238E27FC236}">
-                <a16:creationId xmlns:a16="http://schemas.microsoft.com/office/drawing/2014/main" id="{C1279D54-116A-6D58-B75A-2556899D6B46}"/>
+                <a16:creationId xmlns:a16="http://schemas.microsoft.com/office/drawing/2014/main" id="{4DB71406-467A-A03D-EBA2-95505D3C5AF2}"/>
               </a:ext>
             </a:extLst>
           </p:cNvPr>
@@ -8023,17 +9910,18 @@
           <a:lstStyle/>
           <a:p>
             <a:r>
-              <a:rPr lang="de-DE" dirty="0"/>
-              <a:t>DBSCAN: Density-</a:t>
-            </a:r>
-            <a:r>
-              <a:rPr lang="de-DE" dirty="0" err="1"/>
-              <a:t>Based</a:t>
-            </a:r>
-            <a:r>
-              <a:rPr lang="de-DE" dirty="0"/>
-              <a:t> Clustering</a:t>
-            </a:r>
+              <a:rPr lang="de-DE" dirty="0" err="1"/>
+              <a:t>Linkage</a:t>
+            </a:r>
+            <a:r>
+              <a:rPr lang="de-DE" dirty="0"/>
+              <a:t> </a:t>
+            </a:r>
+            <a:r>
+              <a:rPr lang="de-DE" dirty="0" err="1"/>
+              <a:t>Criteria</a:t>
+            </a:r>
+            <a:endParaRPr lang="de-DE" dirty="0"/>
           </a:p>
         </p:txBody>
       </p:sp>
@@ -8042,7 +9930,7 @@
           <p:cNvPr id="3" name="Foliennummernplatzhalter 2">
             <a:extLst>
               <a:ext uri="{FF2B5EF4-FFF2-40B4-BE49-F238E27FC236}">
-                <a16:creationId xmlns:a16="http://schemas.microsoft.com/office/drawing/2014/main" id="{C6A32FD8-548B-71F2-BB0C-E2FA7DE0D672}"/>
+                <a16:creationId xmlns:a16="http://schemas.microsoft.com/office/drawing/2014/main" id="{0F696987-D96D-454C-5E9D-CD69887E2F65}"/>
               </a:ext>
             </a:extLst>
           </p:cNvPr>
@@ -8069,7 +9957,7 @@
     </p:spTree>
     <p:extLst>
       <p:ext uri="{BB962C8B-B14F-4D97-AF65-F5344CB8AC3E}">
-        <p14:creationId xmlns:p14="http://schemas.microsoft.com/office/powerpoint/2010/main" val="3058453600"/>
+        <p14:creationId xmlns:p14="http://schemas.microsoft.com/office/powerpoint/2010/main" val="2365265487"/>
       </p:ext>
     </p:extLst>
   </p:cSld>
@@ -8101,7 +9989,7 @@
           <p:cNvPr id="2" name="Titel 1">
             <a:extLst>
               <a:ext uri="{FF2B5EF4-FFF2-40B4-BE49-F238E27FC236}">
-                <a16:creationId xmlns:a16="http://schemas.microsoft.com/office/drawing/2014/main" id="{9CC7556B-98BB-9EF2-B9BD-688767AA83EE}"/>
+                <a16:creationId xmlns:a16="http://schemas.microsoft.com/office/drawing/2014/main" id="{54142ABE-7200-78B0-CCD9-D683F1797E62}"/>
               </a:ext>
             </a:extLst>
           </p:cNvPr>
@@ -8118,8 +10006,12 @@
           <a:lstStyle/>
           <a:p>
             <a:r>
-              <a:rPr lang="de-DE" dirty="0"/>
-              <a:t>Core Points, Border Points, Noise</a:t>
+              <a:rPr lang="de-DE" dirty="0" err="1"/>
+              <a:t>Dendrograms</a:t>
+            </a:r>
+            <a:r>
+              <a:rPr lang="de-DE" dirty="0"/>
+              <a:t> and Interpretation</a:t>
             </a:r>
           </a:p>
         </p:txBody>
@@ -8129,7 +10021,7 @@
           <p:cNvPr id="3" name="Foliennummernplatzhalter 2">
             <a:extLst>
               <a:ext uri="{FF2B5EF4-FFF2-40B4-BE49-F238E27FC236}">
-                <a16:creationId xmlns:a16="http://schemas.microsoft.com/office/drawing/2014/main" id="{157EE93D-CF21-6985-77E6-E17034472C2F}"/>
+                <a16:creationId xmlns:a16="http://schemas.microsoft.com/office/drawing/2014/main" id="{3CF1EAA3-D7F2-B045-B22D-C9405AEBC70C}"/>
               </a:ext>
             </a:extLst>
           </p:cNvPr>
@@ -8156,7 +10048,7 @@
     </p:spTree>
     <p:extLst>
       <p:ext uri="{BB962C8B-B14F-4D97-AF65-F5344CB8AC3E}">
-        <p14:creationId xmlns:p14="http://schemas.microsoft.com/office/powerpoint/2010/main" val="1093548525"/>
+        <p14:creationId xmlns:p14="http://schemas.microsoft.com/office/powerpoint/2010/main" val="1704252082"/>
       </p:ext>
     </p:extLst>
   </p:cSld>
@@ -8188,7 +10080,7 @@
           <p:cNvPr id="2" name="Titel 1">
             <a:extLst>
               <a:ext uri="{FF2B5EF4-FFF2-40B4-BE49-F238E27FC236}">
-                <a16:creationId xmlns:a16="http://schemas.microsoft.com/office/drawing/2014/main" id="{9AD358E7-F39E-EF65-C4C0-6907CB00234F}"/>
+                <a16:creationId xmlns:a16="http://schemas.microsoft.com/office/drawing/2014/main" id="{C1279D54-116A-6D58-B75A-2556899D6B46}"/>
               </a:ext>
             </a:extLst>
           </p:cNvPr>
@@ -8205,26 +10097,17 @@
           <a:lstStyle/>
           <a:p>
             <a:r>
-              <a:rPr lang="de-DE" dirty="0" err="1"/>
-              <a:t>Choosing</a:t>
-            </a:r>
-            <a:r>
-              <a:rPr lang="de-DE" dirty="0"/>
-              <a:t> </a:t>
-            </a:r>
-            <a:r>
-              <a:rPr lang="el-GR" dirty="0"/>
-              <a:t>ε </a:t>
-            </a:r>
-            <a:r>
-              <a:rPr lang="de-DE" dirty="0"/>
-              <a:t>and </a:t>
-            </a:r>
-            <a:r>
-              <a:rPr lang="de-DE" dirty="0" err="1"/>
-              <a:t>min_samples</a:t>
-            </a:r>
-            <a:endParaRPr lang="de-DE" dirty="0"/>
+              <a:rPr lang="de-DE" dirty="0"/>
+              <a:t>DBSCAN: Density-</a:t>
+            </a:r>
+            <a:r>
+              <a:rPr lang="de-DE" dirty="0" err="1"/>
+              <a:t>Based</a:t>
+            </a:r>
+            <a:r>
+              <a:rPr lang="de-DE" dirty="0"/>
+              <a:t> Clustering</a:t>
+            </a:r>
           </a:p>
         </p:txBody>
       </p:sp>
@@ -8233,7 +10116,7 @@
           <p:cNvPr id="3" name="Foliennummernplatzhalter 2">
             <a:extLst>
               <a:ext uri="{FF2B5EF4-FFF2-40B4-BE49-F238E27FC236}">
-                <a16:creationId xmlns:a16="http://schemas.microsoft.com/office/drawing/2014/main" id="{7F67A71D-5771-002A-3ED3-D1F7EA87F83F}"/>
+                <a16:creationId xmlns:a16="http://schemas.microsoft.com/office/drawing/2014/main" id="{C6A32FD8-548B-71F2-BB0C-E2FA7DE0D672}"/>
               </a:ext>
             </a:extLst>
           </p:cNvPr>
@@ -8260,7 +10143,7 @@
     </p:spTree>
     <p:extLst>
       <p:ext uri="{BB962C8B-B14F-4D97-AF65-F5344CB8AC3E}">
-        <p14:creationId xmlns:p14="http://schemas.microsoft.com/office/powerpoint/2010/main" val="1011311951"/>
+        <p14:creationId xmlns:p14="http://schemas.microsoft.com/office/powerpoint/2010/main" val="3058453600"/>
       </p:ext>
     </p:extLst>
   </p:cSld>
@@ -8292,7 +10175,7 @@
           <p:cNvPr id="2" name="Titel 1">
             <a:extLst>
               <a:ext uri="{FF2B5EF4-FFF2-40B4-BE49-F238E27FC236}">
-                <a16:creationId xmlns:a16="http://schemas.microsoft.com/office/drawing/2014/main" id="{AB0A312D-A6FF-AB8E-359F-EE1BDB1D4399}"/>
+                <a16:creationId xmlns:a16="http://schemas.microsoft.com/office/drawing/2014/main" id="{9CC7556B-98BB-9EF2-B9BD-688767AA83EE}"/>
               </a:ext>
             </a:extLst>
           </p:cNvPr>
@@ -8309,12 +10192,8 @@
           <a:lstStyle/>
           <a:p>
             <a:r>
-              <a:rPr lang="de-DE" dirty="0" err="1"/>
-              <a:t>Comparing</a:t>
-            </a:r>
-            <a:r>
-              <a:rPr lang="de-DE" dirty="0"/>
-              <a:t> Clustering Methods</a:t>
+              <a:rPr lang="de-DE" dirty="0"/>
+              <a:t>Core Points, Border Points, Noise</a:t>
             </a:r>
           </a:p>
         </p:txBody>
@@ -8324,7 +10203,7 @@
           <p:cNvPr id="3" name="Foliennummernplatzhalter 2">
             <a:extLst>
               <a:ext uri="{FF2B5EF4-FFF2-40B4-BE49-F238E27FC236}">
-                <a16:creationId xmlns:a16="http://schemas.microsoft.com/office/drawing/2014/main" id="{6EFA0DEA-9C10-4341-0996-B658FBE37513}"/>
+                <a16:creationId xmlns:a16="http://schemas.microsoft.com/office/drawing/2014/main" id="{157EE93D-CF21-6985-77E6-E17034472C2F}"/>
               </a:ext>
             </a:extLst>
           </p:cNvPr>
@@ -8351,7 +10230,7 @@
     </p:spTree>
     <p:extLst>
       <p:ext uri="{BB962C8B-B14F-4D97-AF65-F5344CB8AC3E}">
-        <p14:creationId xmlns:p14="http://schemas.microsoft.com/office/powerpoint/2010/main" val="2928299488"/>
+        <p14:creationId xmlns:p14="http://schemas.microsoft.com/office/powerpoint/2010/main" val="1093548525"/>
       </p:ext>
     </p:extLst>
   </p:cSld>
@@ -8383,7 +10262,7 @@
           <p:cNvPr id="2" name="Titel 1">
             <a:extLst>
               <a:ext uri="{FF2B5EF4-FFF2-40B4-BE49-F238E27FC236}">
-                <a16:creationId xmlns:a16="http://schemas.microsoft.com/office/drawing/2014/main" id="{121AA823-E2CE-8C0D-90DB-02DFE9572552}"/>
+                <a16:creationId xmlns:a16="http://schemas.microsoft.com/office/drawing/2014/main" id="{9AD358E7-F39E-EF65-C4C0-6907CB00234F}"/>
               </a:ext>
             </a:extLst>
           </p:cNvPr>
@@ -8400,212 +10279,24 @@
           <a:lstStyle/>
           <a:p>
             <a:r>
-              <a:rPr lang="de-DE" dirty="0"/>
-              <a:t>Cluster Validation </a:t>
-            </a:r>
-            <a:r>
-              <a:rPr lang="de-DE" dirty="0" err="1"/>
-              <a:t>Metrics</a:t>
-            </a:r>
-            <a:endParaRPr lang="de-DE" dirty="0"/>
-          </a:p>
-        </p:txBody>
-      </p:sp>
-      <p:sp>
-        <p:nvSpPr>
-          <p:cNvPr id="4" name="Inhaltsplatzhalter 3">
-            <a:extLst>
-              <a:ext uri="{FF2B5EF4-FFF2-40B4-BE49-F238E27FC236}">
-                <a16:creationId xmlns:a16="http://schemas.microsoft.com/office/drawing/2014/main" id="{4AAAE878-7307-C927-4B47-5A9C5B86AC4E}"/>
-              </a:ext>
-            </a:extLst>
-          </p:cNvPr>
-          <p:cNvSpPr>
-            <a:spLocks noGrp="1"/>
-          </p:cNvSpPr>
-          <p:nvPr>
-            <p:ph idx="1"/>
-          </p:nvPr>
-        </p:nvSpPr>
-        <p:spPr/>
-        <p:txBody>
-          <a:bodyPr/>
-          <a:lstStyle/>
-          <a:p>
-            <a:pPr marL="0" indent="0">
-              <a:buNone/>
-            </a:pPr>
-            <a:r>
-              <a:rPr lang="de-DE" dirty="0" err="1"/>
-              <a:t>Since</a:t>
-            </a:r>
-            <a:r>
-              <a:rPr lang="de-DE" dirty="0"/>
-              <a:t> </a:t>
-            </a:r>
-            <a:r>
-              <a:rPr lang="de-DE" dirty="0" err="1"/>
-              <a:t>clustering</a:t>
-            </a:r>
-            <a:r>
-              <a:rPr lang="de-DE" dirty="0"/>
-              <a:t> </a:t>
-            </a:r>
-            <a:r>
-              <a:rPr lang="de-DE" dirty="0" err="1"/>
-              <a:t>is</a:t>
-            </a:r>
-            <a:r>
-              <a:rPr lang="de-DE" dirty="0"/>
-              <a:t> </a:t>
-            </a:r>
-            <a:r>
-              <a:rPr lang="de-DE" dirty="0" err="1"/>
-              <a:t>unsupervised</a:t>
-            </a:r>
-            <a:r>
-              <a:rPr lang="de-DE" dirty="0"/>
-              <a:t>: </a:t>
-            </a:r>
-            <a:r>
-              <a:rPr lang="de-DE" dirty="0" err="1"/>
-              <a:t>no</a:t>
-            </a:r>
-            <a:r>
-              <a:rPr lang="de-DE" dirty="0"/>
-              <a:t> </a:t>
-            </a:r>
-            <a:r>
-              <a:rPr lang="de-DE" dirty="0" err="1"/>
-              <a:t>single</a:t>
-            </a:r>
-            <a:r>
-              <a:rPr lang="de-DE" dirty="0"/>
-              <a:t> “</a:t>
-            </a:r>
-            <a:r>
-              <a:rPr lang="de-DE" dirty="0" err="1"/>
-              <a:t>correct</a:t>
-            </a:r>
-            <a:r>
-              <a:rPr lang="de-DE" dirty="0"/>
-              <a:t>” </a:t>
-            </a:r>
-            <a:r>
-              <a:rPr lang="de-DE" dirty="0" err="1"/>
-              <a:t>answer</a:t>
-            </a:r>
-            <a:endParaRPr lang="de-DE" dirty="0"/>
-          </a:p>
-          <a:p>
-            <a:pPr marL="0" indent="0">
-              <a:buNone/>
-            </a:pPr>
-            <a:endParaRPr lang="de-DE" dirty="0"/>
-          </a:p>
-          <a:p>
-            <a:pPr marL="0" indent="0">
-              <a:buNone/>
-            </a:pPr>
-            <a:r>
-              <a:rPr lang="de-DE" dirty="0" err="1"/>
-              <a:t>Instead</a:t>
-            </a:r>
-            <a:r>
-              <a:rPr lang="de-DE" dirty="0"/>
-              <a:t> </a:t>
-            </a:r>
-            <a:r>
-              <a:rPr lang="de-DE" dirty="0" err="1"/>
-              <a:t>measure</a:t>
-            </a:r>
-            <a:r>
-              <a:rPr lang="de-DE" dirty="0"/>
-              <a:t> </a:t>
-            </a:r>
-            <a:r>
-              <a:rPr lang="de-DE" dirty="0" err="1"/>
-              <a:t>how</a:t>
-            </a:r>
-            <a:r>
-              <a:rPr lang="de-DE" dirty="0"/>
-              <a:t> well-</a:t>
-            </a:r>
-            <a:r>
-              <a:rPr lang="de-DE" dirty="0" err="1"/>
-              <a:t>separated</a:t>
-            </a:r>
-            <a:r>
-              <a:rPr lang="de-DE" dirty="0"/>
-              <a:t> and </a:t>
-            </a:r>
-            <a:r>
-              <a:rPr lang="de-DE" dirty="0" err="1"/>
-              <a:t>cohesive</a:t>
-            </a:r>
-            <a:r>
-              <a:rPr lang="de-DE" dirty="0"/>
-              <a:t> </a:t>
-            </a:r>
-            <a:r>
-              <a:rPr lang="de-DE" dirty="0" err="1"/>
-              <a:t>clusters</a:t>
-            </a:r>
-            <a:r>
-              <a:rPr lang="de-DE" dirty="0"/>
-              <a:t> </a:t>
-            </a:r>
-            <a:r>
-              <a:rPr lang="de-DE" dirty="0" err="1"/>
-              <a:t>are</a:t>
-            </a:r>
-            <a:endParaRPr lang="de-DE" dirty="0"/>
-          </a:p>
-          <a:p>
-            <a:pPr marL="0" indent="0">
-              <a:buNone/>
-            </a:pPr>
-            <a:endParaRPr lang="de-DE" dirty="0"/>
-          </a:p>
-          <a:p>
-            <a:pPr marL="0" indent="0">
-              <a:buNone/>
-            </a:pPr>
-            <a:r>
-              <a:rPr lang="de-DE" dirty="0"/>
-              <a:t>Evaluation </a:t>
-            </a:r>
-            <a:r>
-              <a:rPr lang="de-DE" dirty="0" err="1"/>
-              <a:t>metrics</a:t>
-            </a:r>
-            <a:r>
-              <a:rPr lang="de-DE" dirty="0"/>
-              <a:t>:</a:t>
-            </a:r>
-          </a:p>
-          <a:p>
-            <a:r>
-              <a:rPr lang="de-DE" dirty="0"/>
-              <a:t>Silhouette score</a:t>
-            </a:r>
-          </a:p>
-          <a:p>
-            <a:r>
-              <a:rPr lang="de-DE" dirty="0"/>
-              <a:t>Davies-</a:t>
-            </a:r>
-            <a:r>
-              <a:rPr lang="de-DE" dirty="0" err="1"/>
-              <a:t>Bouldin</a:t>
-            </a:r>
-            <a:r>
-              <a:rPr lang="de-DE" dirty="0"/>
-              <a:t> </a:t>
-            </a:r>
-            <a:r>
-              <a:rPr lang="de-DE" dirty="0" err="1"/>
-              <a:t>index</a:t>
+              <a:rPr lang="de-DE" dirty="0" err="1"/>
+              <a:t>Choosing</a:t>
+            </a:r>
+            <a:r>
+              <a:rPr lang="de-DE" dirty="0"/>
+              <a:t> </a:t>
+            </a:r>
+            <a:r>
+              <a:rPr lang="el-GR" dirty="0"/>
+              <a:t>ε </a:t>
+            </a:r>
+            <a:r>
+              <a:rPr lang="de-DE" dirty="0"/>
+              <a:t>and </a:t>
+            </a:r>
+            <a:r>
+              <a:rPr lang="de-DE" dirty="0" err="1"/>
+              <a:t>min_samples</a:t>
             </a:r>
             <a:endParaRPr lang="de-DE" dirty="0"/>
           </a:p>
@@ -8616,7 +10307,7 @@
           <p:cNvPr id="3" name="Foliennummernplatzhalter 2">
             <a:extLst>
               <a:ext uri="{FF2B5EF4-FFF2-40B4-BE49-F238E27FC236}">
-                <a16:creationId xmlns:a16="http://schemas.microsoft.com/office/drawing/2014/main" id="{563E3869-C5B7-1A95-0614-2B381BD8C120}"/>
+                <a16:creationId xmlns:a16="http://schemas.microsoft.com/office/drawing/2014/main" id="{7F67A71D-5771-002A-3ED3-D1F7EA87F83F}"/>
               </a:ext>
             </a:extLst>
           </p:cNvPr>
@@ -8643,7 +10334,7 @@
     </p:spTree>
     <p:extLst>
       <p:ext uri="{BB962C8B-B14F-4D97-AF65-F5344CB8AC3E}">
-        <p14:creationId xmlns:p14="http://schemas.microsoft.com/office/powerpoint/2010/main" val="474217543"/>
+        <p14:creationId xmlns:p14="http://schemas.microsoft.com/office/powerpoint/2010/main" val="1011311951"/>
       </p:ext>
     </p:extLst>
   </p:cSld>
@@ -8675,7 +10366,7 @@
           <p:cNvPr id="2" name="Titel 1">
             <a:extLst>
               <a:ext uri="{FF2B5EF4-FFF2-40B4-BE49-F238E27FC236}">
-                <a16:creationId xmlns:a16="http://schemas.microsoft.com/office/drawing/2014/main" id="{E1872AF3-6DAA-E6C2-A919-228FF3EB5851}"/>
+                <a16:creationId xmlns:a16="http://schemas.microsoft.com/office/drawing/2014/main" id="{AB0A312D-A6FF-AB8E-359F-EE1BDB1D4399}"/>
               </a:ext>
             </a:extLst>
           </p:cNvPr>
@@ -8693,11 +10384,11 @@
           <a:p>
             <a:r>
               <a:rPr lang="de-DE" dirty="0" err="1"/>
-              <a:t>Visualizing</a:t>
-            </a:r>
-            <a:r>
-              <a:rPr lang="de-DE" dirty="0"/>
-              <a:t> Clusters</a:t>
+              <a:t>Comparing</a:t>
+            </a:r>
+            <a:r>
+              <a:rPr lang="de-DE" dirty="0"/>
+              <a:t> Clustering Methods</a:t>
             </a:r>
           </a:p>
         </p:txBody>
@@ -8707,7 +10398,7 @@
           <p:cNvPr id="3" name="Foliennummernplatzhalter 2">
             <a:extLst>
               <a:ext uri="{FF2B5EF4-FFF2-40B4-BE49-F238E27FC236}">
-                <a16:creationId xmlns:a16="http://schemas.microsoft.com/office/drawing/2014/main" id="{81251F56-854B-D4C6-04C7-5A3B3F8DB84E}"/>
+                <a16:creationId xmlns:a16="http://schemas.microsoft.com/office/drawing/2014/main" id="{6EFA0DEA-9C10-4341-0996-B658FBE37513}"/>
               </a:ext>
             </a:extLst>
           </p:cNvPr>
@@ -8734,103 +10425,7 @@
     </p:spTree>
     <p:extLst>
       <p:ext uri="{BB962C8B-B14F-4D97-AF65-F5344CB8AC3E}">
-        <p14:creationId xmlns:p14="http://schemas.microsoft.com/office/powerpoint/2010/main" val="2070037097"/>
-      </p:ext>
-    </p:extLst>
-  </p:cSld>
-  <p:clrMapOvr>
-    <a:masterClrMapping/>
-  </p:clrMapOvr>
-</p:sld>
-</file>
-
-<file path=ppt/slides/slide29.xml><?xml version="1.0" encoding="utf-8"?>
-<p:sld xmlns:a="http://schemas.openxmlformats.org/drawingml/2006/main" xmlns:r="http://schemas.openxmlformats.org/officeDocument/2006/relationships" xmlns:p="http://schemas.openxmlformats.org/presentationml/2006/main">
-  <p:cSld>
-    <p:spTree>
-      <p:nvGrpSpPr>
-        <p:cNvPr id="1" name=""/>
-        <p:cNvGrpSpPr/>
-        <p:nvPr/>
-      </p:nvGrpSpPr>
-      <p:grpSpPr>
-        <a:xfrm>
-          <a:off x="0" y="0"/>
-          <a:ext cx="0" cy="0"/>
-          <a:chOff x="0" y="0"/>
-          <a:chExt cx="0" cy="0"/>
-        </a:xfrm>
-      </p:grpSpPr>
-      <p:sp>
-        <p:nvSpPr>
-          <p:cNvPr id="2" name="Titel 1">
-            <a:extLst>
-              <a:ext uri="{FF2B5EF4-FFF2-40B4-BE49-F238E27FC236}">
-                <a16:creationId xmlns:a16="http://schemas.microsoft.com/office/drawing/2014/main" id="{45D9CD1B-A5B6-7BCE-AB1E-4C80D77AE1D3}"/>
-              </a:ext>
-            </a:extLst>
-          </p:cNvPr>
-          <p:cNvSpPr>
-            <a:spLocks noGrp="1"/>
-          </p:cNvSpPr>
-          <p:nvPr>
-            <p:ph type="title"/>
-          </p:nvPr>
-        </p:nvSpPr>
-        <p:spPr/>
-        <p:txBody>
-          <a:bodyPr/>
-          <a:lstStyle/>
-          <a:p>
-            <a:r>
-              <a:rPr lang="de-DE" dirty="0" err="1"/>
-              <a:t>Practical</a:t>
-            </a:r>
-            <a:r>
-              <a:rPr lang="de-DE" dirty="0"/>
-              <a:t> </a:t>
-            </a:r>
-            <a:r>
-              <a:rPr lang="de-DE" dirty="0" err="1"/>
-              <a:t>Considerations</a:t>
-            </a:r>
-            <a:endParaRPr lang="de-DE" dirty="0"/>
-          </a:p>
-        </p:txBody>
-      </p:sp>
-      <p:sp>
-        <p:nvSpPr>
-          <p:cNvPr id="3" name="Foliennummernplatzhalter 2">
-            <a:extLst>
-              <a:ext uri="{FF2B5EF4-FFF2-40B4-BE49-F238E27FC236}">
-                <a16:creationId xmlns:a16="http://schemas.microsoft.com/office/drawing/2014/main" id="{5AE0FEB0-A1C8-1184-0009-46A75979A2F5}"/>
-              </a:ext>
-            </a:extLst>
-          </p:cNvPr>
-          <p:cNvSpPr>
-            <a:spLocks noGrp="1"/>
-          </p:cNvSpPr>
-          <p:nvPr>
-            <p:ph type="sldNum" sz="quarter" idx="12"/>
-          </p:nvPr>
-        </p:nvSpPr>
-        <p:spPr/>
-        <p:txBody>
-          <a:bodyPr/>
-          <a:lstStyle/>
-          <a:p>
-            <a:fld id="{08C366F5-AFAD-49CB-854A-9D9E238FCA13}" type="slidenum">
-              <a:rPr lang="en-GB" smtClean="0"/>
-              <a:t>29</a:t>
-            </a:fld>
-            <a:endParaRPr lang="en-GB"/>
-          </a:p>
-        </p:txBody>
-      </p:sp>
-    </p:spTree>
-    <p:extLst>
-      <p:ext uri="{BB962C8B-B14F-4D97-AF65-F5344CB8AC3E}">
-        <p14:creationId xmlns:p14="http://schemas.microsoft.com/office/powerpoint/2010/main" val="3939287568"/>
+        <p14:creationId xmlns:p14="http://schemas.microsoft.com/office/powerpoint/2010/main" val="2928299488"/>
       </p:ext>
     </p:extLst>
   </p:cSld>

--- a/slides/2_clustering.pptx
+++ b/slides/2_clustering.pptx
@@ -5,7 +5,7 @@
     <p:sldMasterId id="2147483648" r:id="rId1"/>
   </p:sldMasterIdLst>
   <p:notesMasterIdLst>
-    <p:notesMasterId r:id="rId30"/>
+    <p:notesMasterId r:id="rId31"/>
   </p:notesMasterIdLst>
   <p:sldIdLst>
     <p:sldId id="256" r:id="rId2"/>
@@ -24,18 +24,19 @@
     <p:sldId id="274" r:id="rId15"/>
     <p:sldId id="288" r:id="rId16"/>
     <p:sldId id="273" r:id="rId17"/>
-    <p:sldId id="283" r:id="rId18"/>
+    <p:sldId id="293" r:id="rId18"/>
     <p:sldId id="282" r:id="rId19"/>
-    <p:sldId id="291" r:id="rId20"/>
-    <p:sldId id="287" r:id="rId21"/>
-    <p:sldId id="286" r:id="rId22"/>
-    <p:sldId id="275" r:id="rId23"/>
-    <p:sldId id="276" r:id="rId24"/>
-    <p:sldId id="277" r:id="rId25"/>
-    <p:sldId id="278" r:id="rId26"/>
-    <p:sldId id="279" r:id="rId27"/>
-    <p:sldId id="280" r:id="rId28"/>
-    <p:sldId id="281" r:id="rId29"/>
+    <p:sldId id="294" r:id="rId20"/>
+    <p:sldId id="291" r:id="rId21"/>
+    <p:sldId id="283" r:id="rId22"/>
+    <p:sldId id="286" r:id="rId23"/>
+    <p:sldId id="275" r:id="rId24"/>
+    <p:sldId id="276" r:id="rId25"/>
+    <p:sldId id="277" r:id="rId26"/>
+    <p:sldId id="278" r:id="rId27"/>
+    <p:sldId id="279" r:id="rId28"/>
+    <p:sldId id="280" r:id="rId29"/>
+    <p:sldId id="281" r:id="rId30"/>
   </p:sldIdLst>
   <p:sldSz cx="12192000" cy="6858000"/>
   <p:notesSz cx="6858000" cy="9144000"/>
@@ -506,7 +507,7 @@
           <a:p>
             <a:fld id="{506E0FD1-891F-4B1E-916D-E9B585160BB8}" type="datetimeFigureOut">
               <a:rPr lang="en-GB" smtClean="0"/>
-              <a:t>08/03/2026</a:t>
+              <a:t>18/03/2026</a:t>
             </a:fld>
             <a:endParaRPr lang="en-GB"/>
           </a:p>
@@ -923,7 +924,7 @@
           <a:p>
             <a:fld id="{D68C3F22-27B2-44E3-9C5F-D08126455F6F}" type="datetime1">
               <a:rPr lang="en-GB" smtClean="0"/>
-              <a:t>08/03/2026</a:t>
+              <a:t>18/03/2026</a:t>
             </a:fld>
             <a:endParaRPr lang="en-GB"/>
           </a:p>
@@ -1123,7 +1124,7 @@
           <a:p>
             <a:fld id="{1CD03846-7BF6-4FB6-A921-FF3379ADBD4C}" type="datetime1">
               <a:rPr lang="en-GB" smtClean="0"/>
-              <a:t>08/03/2026</a:t>
+              <a:t>18/03/2026</a:t>
             </a:fld>
             <a:endParaRPr lang="en-GB"/>
           </a:p>
@@ -1333,7 +1334,7 @@
           <a:p>
             <a:fld id="{99E1B91A-3FD0-4144-9C84-63E9688ED2FE}" type="datetime1">
               <a:rPr lang="en-GB" smtClean="0"/>
-              <a:t>08/03/2026</a:t>
+              <a:t>18/03/2026</a:t>
             </a:fld>
             <a:endParaRPr lang="en-GB"/>
           </a:p>
@@ -1533,7 +1534,7 @@
           <a:p>
             <a:fld id="{5295ED7B-FEAD-4734-819F-93EF4B0EA908}" type="datetime1">
               <a:rPr lang="en-GB" smtClean="0"/>
-              <a:t>08/03/2026</a:t>
+              <a:t>18/03/2026</a:t>
             </a:fld>
             <a:endParaRPr lang="en-GB"/>
           </a:p>
@@ -1809,7 +1810,7 @@
           <a:p>
             <a:fld id="{D2D5D4B4-C926-4B45-8815-1ED8911179A2}" type="datetime1">
               <a:rPr lang="en-GB" smtClean="0"/>
-              <a:t>08/03/2026</a:t>
+              <a:t>18/03/2026</a:t>
             </a:fld>
             <a:endParaRPr lang="en-GB"/>
           </a:p>
@@ -2077,7 +2078,7 @@
           <a:p>
             <a:fld id="{B4C5210A-0E37-4935-93AF-69F21A5F712F}" type="datetime1">
               <a:rPr lang="en-GB" smtClean="0"/>
-              <a:t>08/03/2026</a:t>
+              <a:t>18/03/2026</a:t>
             </a:fld>
             <a:endParaRPr lang="en-GB"/>
           </a:p>
@@ -2492,7 +2493,7 @@
           <a:p>
             <a:fld id="{3D3A6B2F-436C-4691-80E8-9C890E000E9D}" type="datetime1">
               <a:rPr lang="en-GB" smtClean="0"/>
-              <a:t>08/03/2026</a:t>
+              <a:t>18/03/2026</a:t>
             </a:fld>
             <a:endParaRPr lang="en-GB"/>
           </a:p>
@@ -2634,7 +2635,7 @@
           <a:p>
             <a:fld id="{84385F4C-D74B-496F-8D21-97E3549C783B}" type="datetime1">
               <a:rPr lang="en-GB" smtClean="0"/>
-              <a:t>08/03/2026</a:t>
+              <a:t>18/03/2026</a:t>
             </a:fld>
             <a:endParaRPr lang="en-GB"/>
           </a:p>
@@ -2747,7 +2748,7 @@
           <a:p>
             <a:fld id="{0CBDCB32-C241-4703-A832-4EB47BD54E83}" type="datetime1">
               <a:rPr lang="en-GB" smtClean="0"/>
-              <a:t>08/03/2026</a:t>
+              <a:t>18/03/2026</a:t>
             </a:fld>
             <a:endParaRPr lang="en-GB"/>
           </a:p>
@@ -3060,7 +3061,7 @@
           <a:p>
             <a:fld id="{85C150FF-BE95-4D25-A16A-E368A81CBF24}" type="datetime1">
               <a:rPr lang="en-GB" smtClean="0"/>
-              <a:t>08/03/2026</a:t>
+              <a:t>18/03/2026</a:t>
             </a:fld>
             <a:endParaRPr lang="en-GB"/>
           </a:p>
@@ -3349,7 +3350,7 @@
           <a:p>
             <a:fld id="{F3C5DB4B-B349-43C9-A424-BADA723AD9F1}" type="datetime1">
               <a:rPr lang="en-GB" smtClean="0"/>
-              <a:t>08/03/2026</a:t>
+              <a:t>18/03/2026</a:t>
             </a:fld>
             <a:endParaRPr lang="en-GB"/>
           </a:p>
@@ -3592,7 +3593,7 @@
           <a:p>
             <a:fld id="{12632426-0A0C-405F-A3D0-2D11AA44702A}" type="datetime1">
               <a:rPr lang="en-GB" smtClean="0"/>
-              <a:t>08/03/2026</a:t>
+              <a:t>18/03/2026</a:t>
             </a:fld>
             <a:endParaRPr lang="en-GB"/>
           </a:p>
@@ -5974,8 +5975,8 @@
           </a:p>
         </p:txBody>
       </p:sp>
-      <mc:AlternateContent xmlns:mc="http://schemas.openxmlformats.org/markup-compatibility/2006">
-        <mc:Choice xmlns:a14="http://schemas.microsoft.com/office/drawing/2010/main" Requires="a14">
+      <mc:AlternateContent xmlns:mc="http://schemas.openxmlformats.org/markup-compatibility/2006" xmlns:a14="http://schemas.microsoft.com/office/drawing/2010/main">
+        <mc:Choice Requires="a14">
           <p:sp>
             <p:nvSpPr>
               <p:cNvPr id="5" name="Inhaltsplatzhalter 4">
@@ -6627,7 +6628,7 @@
             </p:txBody>
           </p:sp>
         </mc:Choice>
-        <mc:Fallback>
+        <mc:Fallback xmlns="">
           <p:sp>
             <p:nvSpPr>
               <p:cNvPr id="5" name="Inhaltsplatzhalter 4">
@@ -6667,8 +6668,8 @@
           </p:sp>
         </mc:Fallback>
       </mc:AlternateContent>
-      <mc:AlternateContent xmlns:mc="http://schemas.openxmlformats.org/markup-compatibility/2006">
-        <mc:Choice xmlns:a14="http://schemas.microsoft.com/office/drawing/2010/main" Requires="a14">
+      <mc:AlternateContent xmlns:mc="http://schemas.openxmlformats.org/markup-compatibility/2006" xmlns:a14="http://schemas.microsoft.com/office/drawing/2010/main">
+        <mc:Choice Requires="a14">
           <p:sp>
             <p:nvSpPr>
               <p:cNvPr id="6" name="Inhaltsplatzhalter 5">
@@ -7227,7 +7228,7 @@
             </p:txBody>
           </p:sp>
         </mc:Choice>
-        <mc:Fallback>
+        <mc:Fallback xmlns="">
           <p:sp>
             <p:nvSpPr>
               <p:cNvPr id="6" name="Inhaltsplatzhalter 5">
@@ -7371,8 +7372,8 @@
           </a:p>
         </p:txBody>
       </p:sp>
-      <mc:AlternateContent xmlns:mc="http://schemas.openxmlformats.org/markup-compatibility/2006" xmlns:a14="http://schemas.microsoft.com/office/drawing/2010/main">
-        <mc:Choice Requires="a14">
+      <mc:AlternateContent xmlns:mc="http://schemas.openxmlformats.org/markup-compatibility/2006">
+        <mc:Choice xmlns:a14="http://schemas.microsoft.com/office/drawing/2010/main" Requires="a14">
           <p:sp>
             <p:nvSpPr>
               <p:cNvPr id="4" name="Inhaltsplatzhalter 3">
@@ -7624,12 +7625,41 @@
                   <a:rPr lang="de-DE" dirty="0" err="1"/>
                   <a:t>datasets</a:t>
                 </a:r>
-                <a:endParaRPr lang="de-DE" dirty="0"/>
+                <a:r>
+                  <a:rPr lang="de-DE" dirty="0"/>
+                  <a:t> (</a:t>
+                </a:r>
+                <a:r>
+                  <a:rPr lang="de-DE" dirty="0" err="1">
+                    <a:hlinkClick r:id="rId2"/>
+                  </a:rPr>
+                  <a:t>MiniBatchKMeans</a:t>
+                </a:r>
+                <a:r>
+                  <a:rPr lang="de-DE" dirty="0"/>
+                  <a:t> </a:t>
+                </a:r>
+                <a:r>
+                  <a:rPr lang="de-DE" dirty="0" err="1"/>
+                  <a:t>even</a:t>
+                </a:r>
+                <a:r>
+                  <a:rPr lang="de-DE" dirty="0"/>
+                  <a:t> </a:t>
+                </a:r>
+                <a:r>
+                  <a:rPr lang="de-DE" dirty="0" err="1"/>
+                  <a:t>more</a:t>
+                </a:r>
+                <a:r>
+                  <a:rPr lang="de-DE" dirty="0"/>
+                  <a:t> so)</a:t>
+                </a:r>
               </a:p>
             </p:txBody>
           </p:sp>
         </mc:Choice>
-        <mc:Fallback xmlns="">
+        <mc:Fallback>
           <p:sp>
             <p:nvSpPr>
               <p:cNvPr id="4" name="Inhaltsplatzhalter 3">
@@ -7648,7 +7678,7 @@
             </p:nvSpPr>
             <p:spPr>
               <a:blipFill>
-                <a:blip r:embed="rId2"/>
+                <a:blip r:embed="rId3"/>
                 <a:stretch>
                   <a:fillRect l="-1206" t="-2326"/>
                 </a:stretch>
@@ -7941,13 +7971,601 @@
         </p:nvSpPr>
         <p:spPr/>
         <p:txBody>
-          <a:bodyPr/>
+          <a:bodyPr>
+            <a:normAutofit fontScale="77500" lnSpcReduction="20000"/>
+          </a:bodyPr>
           <a:lstStyle/>
           <a:p>
-            <a:r>
-              <a:rPr lang="de-DE" dirty="0"/>
-              <a:t>…</a:t>
-            </a:r>
+            <a:pPr marL="0" indent="0">
+              <a:buNone/>
+            </a:pPr>
+            <a:r>
+              <a:rPr lang="de-DE" dirty="0" err="1"/>
+              <a:t>k-Means</a:t>
+            </a:r>
+            <a:r>
+              <a:rPr lang="de-DE" dirty="0"/>
+              <a:t> </a:t>
+            </a:r>
+            <a:r>
+              <a:rPr lang="de-DE" dirty="0" err="1"/>
+              <a:t>depends</a:t>
+            </a:r>
+            <a:r>
+              <a:rPr lang="de-DE" dirty="0"/>
+              <a:t> on </a:t>
+            </a:r>
+            <a:r>
+              <a:rPr lang="de-DE" dirty="0" err="1"/>
+              <a:t>its</a:t>
+            </a:r>
+            <a:r>
+              <a:rPr lang="de-DE" dirty="0"/>
+              <a:t> </a:t>
+            </a:r>
+            <a:r>
+              <a:rPr lang="de-DE" dirty="0" err="1"/>
+              <a:t>starting</a:t>
+            </a:r>
+            <a:r>
+              <a:rPr lang="de-DE" dirty="0"/>
+              <a:t> </a:t>
+            </a:r>
+            <a:r>
+              <a:rPr lang="de-DE" dirty="0" err="1"/>
+              <a:t>centroids</a:t>
+            </a:r>
+            <a:r>
+              <a:rPr lang="de-DE" dirty="0"/>
+              <a:t> (</a:t>
+            </a:r>
+            <a:r>
+              <a:rPr lang="de-DE" dirty="0" err="1"/>
+              <a:t>numerical</a:t>
+            </a:r>
+            <a:r>
+              <a:rPr lang="de-DE" dirty="0"/>
+              <a:t> </a:t>
+            </a:r>
+            <a:r>
+              <a:rPr lang="de-DE" dirty="0" err="1"/>
+              <a:t>optimization</a:t>
+            </a:r>
+            <a:r>
+              <a:rPr lang="de-DE" dirty="0"/>
+              <a:t> </a:t>
+            </a:r>
+            <a:r>
+              <a:rPr lang="de-DE" dirty="0" err="1"/>
+              <a:t>over</a:t>
+            </a:r>
+            <a:r>
+              <a:rPr lang="de-DE" dirty="0"/>
+              <a:t> a non-</a:t>
+            </a:r>
+            <a:r>
+              <a:rPr lang="de-DE" dirty="0" err="1"/>
+              <a:t>convex</a:t>
+            </a:r>
+            <a:r>
+              <a:rPr lang="de-DE" dirty="0"/>
+              <a:t> </a:t>
+            </a:r>
+            <a:r>
+              <a:rPr lang="de-DE" dirty="0" err="1"/>
+              <a:t>objective</a:t>
+            </a:r>
+            <a:r>
+              <a:rPr lang="de-DE" dirty="0"/>
+              <a:t>: different initial </a:t>
+            </a:r>
+            <a:r>
+              <a:rPr lang="de-DE" dirty="0" err="1"/>
+              <a:t>centroids</a:t>
+            </a:r>
+            <a:r>
+              <a:rPr lang="de-DE" dirty="0"/>
+              <a:t> </a:t>
+            </a:r>
+            <a:r>
+              <a:rPr lang="de-DE" dirty="0" err="1"/>
+              <a:t>can</a:t>
+            </a:r>
+            <a:r>
+              <a:rPr lang="de-DE" dirty="0"/>
+              <a:t> </a:t>
+            </a:r>
+            <a:r>
+              <a:rPr lang="de-DE" dirty="0" err="1"/>
+              <a:t>lead</a:t>
+            </a:r>
+            <a:r>
+              <a:rPr lang="de-DE" dirty="0"/>
+              <a:t> </a:t>
+            </a:r>
+            <a:r>
+              <a:rPr lang="de-DE" dirty="0" err="1"/>
+              <a:t>the</a:t>
+            </a:r>
+            <a:r>
+              <a:rPr lang="de-DE" dirty="0"/>
+              <a:t> </a:t>
+            </a:r>
+            <a:r>
+              <a:rPr lang="de-DE" dirty="0" err="1"/>
+              <a:t>algorithm</a:t>
+            </a:r>
+            <a:r>
+              <a:rPr lang="de-DE" dirty="0"/>
+              <a:t> </a:t>
+            </a:r>
+            <a:r>
+              <a:rPr lang="de-DE" dirty="0" err="1"/>
+              <a:t>to</a:t>
+            </a:r>
+            <a:r>
+              <a:rPr lang="de-DE" dirty="0"/>
+              <a:t> different </a:t>
+            </a:r>
+            <a:r>
+              <a:rPr lang="de-DE" dirty="0" err="1"/>
+              <a:t>local</a:t>
+            </a:r>
+            <a:r>
+              <a:rPr lang="de-DE" dirty="0"/>
+              <a:t> </a:t>
+            </a:r>
+            <a:r>
+              <a:rPr lang="de-DE" dirty="0" err="1"/>
+              <a:t>minima</a:t>
+            </a:r>
+            <a:r>
+              <a:rPr lang="de-DE" dirty="0"/>
+              <a:t>)</a:t>
+            </a:r>
+          </a:p>
+          <a:p>
+            <a:pPr marL="0" indent="0">
+              <a:buNone/>
+            </a:pPr>
+            <a:r>
+              <a:rPr lang="de-DE" dirty="0">
+                <a:sym typeface="Wingdings" pitchFamily="2" charset="2"/>
+              </a:rPr>
+              <a:t> </a:t>
+            </a:r>
+            <a:r>
+              <a:rPr lang="de-DE" dirty="0"/>
+              <a:t>Running </a:t>
+            </a:r>
+            <a:r>
+              <a:rPr lang="de-DE" dirty="0" err="1"/>
+              <a:t>k-means</a:t>
+            </a:r>
+            <a:r>
+              <a:rPr lang="de-DE" dirty="0"/>
+              <a:t> multiple </a:t>
+            </a:r>
+            <a:r>
+              <a:rPr lang="de-DE" dirty="0" err="1"/>
+              <a:t>times</a:t>
+            </a:r>
+            <a:r>
+              <a:rPr lang="de-DE" dirty="0"/>
+              <a:t> </a:t>
+            </a:r>
+            <a:r>
+              <a:rPr lang="de-DE" dirty="0" err="1"/>
+              <a:t>with</a:t>
+            </a:r>
+            <a:r>
+              <a:rPr lang="de-DE" dirty="0"/>
+              <a:t> different </a:t>
+            </a:r>
+            <a:r>
+              <a:rPr lang="de-DE" dirty="0" err="1"/>
+              <a:t>initializations</a:t>
+            </a:r>
+            <a:r>
+              <a:rPr lang="de-DE" dirty="0"/>
+              <a:t> </a:t>
+            </a:r>
+            <a:r>
+              <a:rPr lang="de-DE" dirty="0" err="1"/>
+              <a:t>can</a:t>
+            </a:r>
+            <a:r>
+              <a:rPr lang="de-DE" dirty="0"/>
+              <a:t> </a:t>
+            </a:r>
+            <a:r>
+              <a:rPr lang="de-DE" dirty="0" err="1"/>
+              <a:t>produce</a:t>
+            </a:r>
+            <a:r>
+              <a:rPr lang="de-DE" dirty="0"/>
+              <a:t> different </a:t>
+            </a:r>
+            <a:r>
+              <a:rPr lang="de-DE" dirty="0" err="1"/>
+              <a:t>clustering</a:t>
+            </a:r>
+            <a:r>
+              <a:rPr lang="de-DE" dirty="0"/>
+              <a:t> </a:t>
+            </a:r>
+            <a:r>
+              <a:rPr lang="de-DE" dirty="0" err="1"/>
+              <a:t>results</a:t>
+            </a:r>
+            <a:endParaRPr lang="de-DE" dirty="0"/>
+          </a:p>
+          <a:p>
+            <a:r>
+              <a:rPr lang="de-DE" dirty="0" err="1"/>
+              <a:t>Good</a:t>
+            </a:r>
+            <a:r>
+              <a:rPr lang="de-DE" dirty="0"/>
+              <a:t> </a:t>
+            </a:r>
+            <a:r>
+              <a:rPr lang="de-DE" dirty="0" err="1"/>
+              <a:t>initialization</a:t>
+            </a:r>
+            <a:r>
+              <a:rPr lang="de-DE" dirty="0"/>
+              <a:t> </a:t>
+            </a:r>
+            <a:r>
+              <a:rPr lang="de-DE" dirty="0" err="1"/>
+              <a:t>leads</a:t>
+            </a:r>
+            <a:r>
+              <a:rPr lang="de-DE" dirty="0"/>
+              <a:t> </a:t>
+            </a:r>
+            <a:r>
+              <a:rPr lang="de-DE" dirty="0" err="1"/>
+              <a:t>to</a:t>
+            </a:r>
+            <a:r>
+              <a:rPr lang="de-DE" dirty="0"/>
+              <a:t> </a:t>
+            </a:r>
+            <a:r>
+              <a:rPr lang="de-DE" dirty="0" err="1"/>
+              <a:t>better</a:t>
+            </a:r>
+            <a:r>
+              <a:rPr lang="de-DE" dirty="0"/>
+              <a:t> </a:t>
+            </a:r>
+            <a:r>
+              <a:rPr lang="de-DE" dirty="0" err="1"/>
+              <a:t>clusters</a:t>
+            </a:r>
+            <a:r>
+              <a:rPr lang="de-DE" dirty="0"/>
+              <a:t>, </a:t>
+            </a:r>
+            <a:r>
+              <a:rPr lang="de-DE" dirty="0" err="1"/>
+              <a:t>faster</a:t>
+            </a:r>
+            <a:r>
+              <a:rPr lang="de-DE" dirty="0"/>
+              <a:t> </a:t>
+            </a:r>
+            <a:r>
+              <a:rPr lang="de-DE" dirty="0" err="1"/>
+              <a:t>convergence</a:t>
+            </a:r>
+            <a:r>
+              <a:rPr lang="de-DE" dirty="0"/>
+              <a:t>, and </a:t>
+            </a:r>
+            <a:r>
+              <a:rPr lang="de-DE" dirty="0" err="1"/>
+              <a:t>more</a:t>
+            </a:r>
+            <a:r>
+              <a:rPr lang="de-DE" dirty="0"/>
+              <a:t> </a:t>
+            </a:r>
+            <a:r>
+              <a:rPr lang="de-DE" dirty="0" err="1"/>
+              <a:t>stable</a:t>
+            </a:r>
+            <a:r>
+              <a:rPr lang="de-DE" dirty="0"/>
+              <a:t> </a:t>
+            </a:r>
+            <a:r>
+              <a:rPr lang="de-DE" dirty="0" err="1"/>
+              <a:t>results</a:t>
+            </a:r>
+            <a:endParaRPr lang="de-DE" dirty="0"/>
+          </a:p>
+          <a:p>
+            <a:r>
+              <a:rPr lang="de-DE" dirty="0"/>
+              <a:t>Poor </a:t>
+            </a:r>
+            <a:r>
+              <a:rPr lang="de-DE" dirty="0" err="1"/>
+              <a:t>initialization</a:t>
+            </a:r>
+            <a:r>
+              <a:rPr lang="de-DE" dirty="0"/>
+              <a:t> </a:t>
+            </a:r>
+            <a:r>
+              <a:rPr lang="de-DE" dirty="0" err="1"/>
+              <a:t>can</a:t>
+            </a:r>
+            <a:r>
+              <a:rPr lang="de-DE" dirty="0"/>
+              <a:t> </a:t>
+            </a:r>
+            <a:r>
+              <a:rPr lang="de-DE" dirty="0" err="1"/>
+              <a:t>lead</a:t>
+            </a:r>
+            <a:r>
+              <a:rPr lang="de-DE" dirty="0"/>
+              <a:t> </a:t>
+            </a:r>
+            <a:r>
+              <a:rPr lang="de-DE" dirty="0" err="1"/>
+              <a:t>to</a:t>
+            </a:r>
+            <a:r>
+              <a:rPr lang="de-DE" dirty="0"/>
+              <a:t> suboptimal </a:t>
+            </a:r>
+            <a:r>
+              <a:rPr lang="de-DE" dirty="0" err="1"/>
+              <a:t>or</a:t>
+            </a:r>
+            <a:r>
+              <a:rPr lang="de-DE" dirty="0"/>
+              <a:t> </a:t>
+            </a:r>
+            <a:r>
+              <a:rPr lang="de-DE" dirty="0" err="1"/>
+              <a:t>inconsistent</a:t>
+            </a:r>
+            <a:r>
+              <a:rPr lang="de-DE" dirty="0"/>
+              <a:t> </a:t>
+            </a:r>
+            <a:r>
+              <a:rPr lang="de-DE" dirty="0" err="1"/>
+              <a:t>clustering</a:t>
+            </a:r>
+            <a:endParaRPr lang="de-DE" dirty="0"/>
+          </a:p>
+          <a:p>
+            <a:pPr marL="0" indent="0">
+              <a:buNone/>
+            </a:pPr>
+            <a:endParaRPr lang="de-DE" dirty="0"/>
+          </a:p>
+          <a:p>
+            <a:pPr marL="0" indent="0">
+              <a:buNone/>
+            </a:pPr>
+            <a:r>
+              <a:rPr lang="de-DE" dirty="0" err="1">
+                <a:sym typeface="Wingdings" pitchFamily="2" charset="2"/>
+              </a:rPr>
+              <a:t>Practical</a:t>
+            </a:r>
+            <a:r>
+              <a:rPr lang="de-DE" dirty="0">
+                <a:sym typeface="Wingdings" pitchFamily="2" charset="2"/>
+              </a:rPr>
+              <a:t> </a:t>
+            </a:r>
+            <a:r>
+              <a:rPr lang="de-DE" dirty="0" err="1">
+                <a:sym typeface="Wingdings" pitchFamily="2" charset="2"/>
+              </a:rPr>
+              <a:t>strategies</a:t>
+            </a:r>
+            <a:r>
+              <a:rPr lang="de-DE" dirty="0">
+                <a:sym typeface="Wingdings" pitchFamily="2" charset="2"/>
+              </a:rPr>
+              <a:t>:</a:t>
+            </a:r>
+            <a:endParaRPr lang="de-DE" dirty="0"/>
+          </a:p>
+          <a:p>
+            <a:r>
+              <a:rPr lang="de-DE" dirty="0"/>
+              <a:t>Random </a:t>
+            </a:r>
+            <a:r>
+              <a:rPr lang="de-DE" dirty="0" err="1"/>
+              <a:t>restarts</a:t>
+            </a:r>
+            <a:r>
+              <a:rPr lang="de-DE" dirty="0"/>
+              <a:t>: </a:t>
+            </a:r>
+            <a:r>
+              <a:rPr lang="de-DE" dirty="0" err="1"/>
+              <a:t>run</a:t>
+            </a:r>
+            <a:r>
+              <a:rPr lang="de-DE" dirty="0"/>
+              <a:t> </a:t>
+            </a:r>
+            <a:r>
+              <a:rPr lang="de-DE" dirty="0" err="1"/>
+              <a:t>k-Means</a:t>
+            </a:r>
+            <a:r>
+              <a:rPr lang="de-DE" dirty="0"/>
+              <a:t> </a:t>
+            </a:r>
+            <a:r>
+              <a:rPr lang="de-DE" dirty="0" err="1"/>
+              <a:t>many</a:t>
+            </a:r>
+            <a:r>
+              <a:rPr lang="de-DE" dirty="0"/>
+              <a:t> </a:t>
+            </a:r>
+            <a:r>
+              <a:rPr lang="de-DE" dirty="0" err="1"/>
+              <a:t>times</a:t>
+            </a:r>
+            <a:r>
+              <a:rPr lang="de-DE" dirty="0"/>
+              <a:t> and </a:t>
+            </a:r>
+            <a:r>
+              <a:rPr lang="de-DE" dirty="0" err="1"/>
+              <a:t>keep</a:t>
+            </a:r>
+            <a:r>
+              <a:rPr lang="de-DE" dirty="0"/>
+              <a:t> </a:t>
+            </a:r>
+            <a:r>
+              <a:rPr lang="de-DE" dirty="0" err="1"/>
+              <a:t>the</a:t>
+            </a:r>
+            <a:r>
+              <a:rPr lang="de-DE" dirty="0"/>
+              <a:t> </a:t>
+            </a:r>
+            <a:r>
+              <a:rPr lang="de-DE" dirty="0" err="1"/>
+              <a:t>best</a:t>
+            </a:r>
+            <a:r>
+              <a:rPr lang="de-DE" dirty="0"/>
+              <a:t> </a:t>
+            </a:r>
+            <a:r>
+              <a:rPr lang="de-DE" dirty="0" err="1"/>
+              <a:t>solution</a:t>
+            </a:r>
+            <a:endParaRPr lang="de-DE" dirty="0"/>
+          </a:p>
+          <a:p>
+            <a:r>
+              <a:rPr lang="de-DE" dirty="0" err="1"/>
+              <a:t>k-means</a:t>
+            </a:r>
+            <a:r>
+              <a:rPr lang="de-DE" dirty="0"/>
+              <a:t>++: </a:t>
+            </a:r>
+            <a:r>
+              <a:rPr lang="de-DE" dirty="0" err="1"/>
+              <a:t>algorithm</a:t>
+            </a:r>
+            <a:r>
+              <a:rPr lang="de-DE" dirty="0"/>
+              <a:t> </a:t>
+            </a:r>
+            <a:r>
+              <a:rPr lang="de-DE" dirty="0" err="1"/>
+              <a:t>to</a:t>
+            </a:r>
+            <a:r>
+              <a:rPr lang="de-DE" dirty="0"/>
+              <a:t> </a:t>
+            </a:r>
+            <a:r>
+              <a:rPr lang="de-DE" dirty="0" err="1"/>
+              <a:t>spread</a:t>
+            </a:r>
+            <a:r>
+              <a:rPr lang="de-DE" dirty="0"/>
+              <a:t> out initial </a:t>
+            </a:r>
+            <a:r>
+              <a:rPr lang="de-DE" dirty="0" err="1"/>
+              <a:t>centroids</a:t>
+            </a:r>
+            <a:r>
+              <a:rPr lang="de-DE" dirty="0"/>
+              <a:t> (also </a:t>
+            </a:r>
+            <a:r>
+              <a:rPr lang="de-DE" dirty="0" err="1"/>
+              <a:t>stochastic</a:t>
+            </a:r>
+            <a:r>
+              <a:rPr lang="de-DE" dirty="0"/>
+              <a:t>)</a:t>
+            </a:r>
+          </a:p>
+          <a:p>
+            <a:r>
+              <a:rPr lang="de-DE" dirty="0"/>
+              <a:t>PCA-</a:t>
+            </a:r>
+            <a:r>
+              <a:rPr lang="de-DE" dirty="0" err="1"/>
+              <a:t>based</a:t>
+            </a:r>
+            <a:r>
+              <a:rPr lang="de-DE" dirty="0"/>
+              <a:t> </a:t>
+            </a:r>
+            <a:r>
+              <a:rPr lang="de-DE" dirty="0" err="1"/>
+              <a:t>initialization</a:t>
+            </a:r>
+            <a:r>
+              <a:rPr lang="de-DE" dirty="0"/>
+              <a:t> (</a:t>
+            </a:r>
+            <a:r>
+              <a:rPr lang="de-DE" dirty="0" err="1"/>
+              <a:t>deterministic</a:t>
+            </a:r>
+            <a:r>
+              <a:rPr lang="de-DE" dirty="0"/>
+              <a:t>: </a:t>
+            </a:r>
+            <a:r>
+              <a:rPr lang="de-DE" dirty="0" err="1"/>
+              <a:t>only</a:t>
+            </a:r>
+            <a:r>
+              <a:rPr lang="de-DE" dirty="0"/>
+              <a:t> </a:t>
+            </a:r>
+            <a:r>
+              <a:rPr lang="de-DE" dirty="0" err="1"/>
+              <a:t>one</a:t>
+            </a:r>
+            <a:r>
+              <a:rPr lang="de-DE" dirty="0"/>
+              <a:t> </a:t>
+            </a:r>
+            <a:r>
+              <a:rPr lang="de-DE" dirty="0" err="1"/>
+              <a:t>run</a:t>
+            </a:r>
+            <a:r>
+              <a:rPr lang="de-DE" dirty="0"/>
+              <a:t>)</a:t>
+            </a:r>
+          </a:p>
+          <a:p>
+            <a:pPr marL="0" indent="0">
+              <a:buNone/>
+            </a:pPr>
+            <a:endParaRPr lang="de-DE" dirty="0"/>
           </a:p>
         </p:txBody>
       </p:sp>
@@ -7980,6 +8598,36 @@
           </a:p>
         </p:txBody>
       </p:sp>
+      <p:pic>
+        <p:nvPicPr>
+          <p:cNvPr id="10" name="Picture 9">
+            <a:extLst>
+              <a:ext uri="{FF2B5EF4-FFF2-40B4-BE49-F238E27FC236}">
+                <a16:creationId xmlns:a16="http://schemas.microsoft.com/office/drawing/2014/main" id="{8B0F8E02-7531-FD72-EA16-1FEB526B2E50}"/>
+              </a:ext>
+            </a:extLst>
+          </p:cNvPr>
+          <p:cNvPicPr>
+            <a:picLocks noChangeAspect="1"/>
+          </p:cNvPicPr>
+          <p:nvPr/>
+        </p:nvPicPr>
+        <p:blipFill>
+          <a:blip r:embed="rId2"/>
+          <a:stretch>
+            <a:fillRect/>
+          </a:stretch>
+        </p:blipFill>
+        <p:spPr>
+          <a:xfrm>
+            <a:off x="10035779" y="0"/>
+            <a:ext cx="2156221" cy="1825625"/>
+          </a:xfrm>
+          <a:prstGeom prst="rect">
+            <a:avLst/>
+          </a:prstGeom>
+        </p:spPr>
+      </p:pic>
     </p:spTree>
     <p:extLst>
       <p:ext uri="{BB962C8B-B14F-4D97-AF65-F5344CB8AC3E}">
@@ -8084,27 +8732,215 @@
         </p:nvSpPr>
         <p:spPr/>
         <p:txBody>
-          <a:bodyPr/>
+          <a:bodyPr>
+            <a:normAutofit fontScale="92500" lnSpcReduction="10000"/>
+          </a:bodyPr>
           <a:lstStyle/>
           <a:p>
             <a:pPr marL="0" indent="0">
               <a:buNone/>
             </a:pPr>
             <a:r>
+              <a:rPr lang="de-DE" dirty="0" err="1"/>
+              <a:t>Crucial</a:t>
+            </a:r>
+            <a:r>
+              <a:rPr lang="de-DE" dirty="0"/>
+              <a:t>: </a:t>
+            </a:r>
+            <a:r>
+              <a:rPr lang="de-DE" dirty="0" err="1"/>
+              <a:t>determines</a:t>
+            </a:r>
+            <a:r>
+              <a:rPr lang="de-DE" dirty="0"/>
+              <a:t> </a:t>
+            </a:r>
+            <a:r>
+              <a:rPr lang="de-DE" dirty="0" err="1"/>
+              <a:t>whether</a:t>
+            </a:r>
+            <a:r>
+              <a:rPr lang="de-DE" dirty="0"/>
+              <a:t> </a:t>
+            </a:r>
+            <a:r>
+              <a:rPr lang="de-DE" dirty="0" err="1"/>
+              <a:t>model</a:t>
+            </a:r>
+            <a:r>
+              <a:rPr lang="de-DE" dirty="0"/>
+              <a:t> </a:t>
+            </a:r>
+            <a:r>
+              <a:rPr lang="de-DE" dirty="0" err="1"/>
+              <a:t>captures</a:t>
+            </a:r>
+            <a:r>
+              <a:rPr lang="de-DE" dirty="0"/>
+              <a:t> </a:t>
+            </a:r>
+            <a:r>
+              <a:rPr lang="de-DE" dirty="0" err="1"/>
+              <a:t>meaningful</a:t>
+            </a:r>
+            <a:r>
+              <a:rPr lang="de-DE" dirty="0"/>
+              <a:t> </a:t>
+            </a:r>
+            <a:r>
+              <a:rPr lang="de-DE" dirty="0" err="1"/>
+              <a:t>structure</a:t>
+            </a:r>
+            <a:r>
+              <a:rPr lang="de-DE" dirty="0"/>
+              <a:t> </a:t>
+            </a:r>
+            <a:r>
+              <a:rPr lang="de-DE" dirty="0" err="1"/>
+              <a:t>or</a:t>
+            </a:r>
+            <a:r>
+              <a:rPr lang="de-DE" dirty="0"/>
+              <a:t> </a:t>
+            </a:r>
+            <a:r>
+              <a:rPr lang="de-DE" dirty="0" err="1"/>
+              <a:t>produces</a:t>
+            </a:r>
+            <a:r>
+              <a:rPr lang="de-DE" dirty="0"/>
+              <a:t> </a:t>
+            </a:r>
+            <a:r>
+              <a:rPr lang="de-DE" dirty="0" err="1"/>
+              <a:t>misleading</a:t>
+            </a:r>
+            <a:r>
+              <a:rPr lang="de-DE" dirty="0"/>
+              <a:t>, </a:t>
+            </a:r>
+            <a:r>
+              <a:rPr lang="de-DE" dirty="0" err="1"/>
+              <a:t>arbitrary</a:t>
+            </a:r>
+            <a:r>
+              <a:rPr lang="de-DE" dirty="0"/>
+              <a:t> </a:t>
+            </a:r>
+            <a:r>
+              <a:rPr lang="de-DE" dirty="0" err="1"/>
+              <a:t>groupings</a:t>
+            </a:r>
+            <a:endParaRPr lang="de-DE" dirty="0"/>
+          </a:p>
+          <a:p>
+            <a:r>
+              <a:rPr lang="de-DE" dirty="0" err="1"/>
+              <a:t>Too</a:t>
+            </a:r>
+            <a:r>
+              <a:rPr lang="de-DE" dirty="0"/>
+              <a:t> </a:t>
+            </a:r>
+            <a:r>
+              <a:rPr lang="de-DE" dirty="0" err="1"/>
+              <a:t>small</a:t>
+            </a:r>
+            <a:r>
+              <a:rPr lang="de-DE" dirty="0"/>
+              <a:t> </a:t>
+            </a:r>
+            <a:r>
+              <a:rPr lang="de-DE" dirty="0" err="1"/>
+              <a:t>k</a:t>
+            </a:r>
+            <a:r>
+              <a:rPr lang="de-DE" dirty="0"/>
+              <a:t> </a:t>
+            </a:r>
+            <a:r>
+              <a:rPr lang="de-DE" dirty="0">
+                <a:sym typeface="Wingdings" pitchFamily="2" charset="2"/>
+              </a:rPr>
+              <a:t></a:t>
+            </a:r>
+            <a:r>
+              <a:rPr lang="de-DE" dirty="0"/>
+              <a:t> </a:t>
+            </a:r>
+            <a:r>
+              <a:rPr lang="de-DE" dirty="0" err="1"/>
+              <a:t>underfitting</a:t>
+            </a:r>
+            <a:endParaRPr lang="de-DE" dirty="0"/>
+          </a:p>
+          <a:p>
+            <a:r>
+              <a:rPr lang="de-DE" dirty="0" err="1"/>
+              <a:t>Too</a:t>
+            </a:r>
+            <a:r>
+              <a:rPr lang="de-DE" dirty="0"/>
+              <a:t> large </a:t>
+            </a:r>
+            <a:r>
+              <a:rPr lang="de-DE" dirty="0" err="1"/>
+              <a:t>k</a:t>
+            </a:r>
+            <a:r>
+              <a:rPr lang="de-DE" dirty="0"/>
+              <a:t> </a:t>
+            </a:r>
+            <a:r>
+              <a:rPr lang="de-DE" dirty="0">
+                <a:sym typeface="Wingdings" pitchFamily="2" charset="2"/>
+              </a:rPr>
+              <a:t></a:t>
+            </a:r>
+            <a:r>
+              <a:rPr lang="de-DE" dirty="0"/>
+              <a:t> </a:t>
+            </a:r>
+            <a:r>
+              <a:rPr lang="de-DE" dirty="0" err="1"/>
+              <a:t>overfitting</a:t>
+            </a:r>
+            <a:r>
+              <a:rPr lang="de-DE" dirty="0"/>
+              <a:t> / </a:t>
+            </a:r>
+            <a:r>
+              <a:rPr lang="de-DE" dirty="0" err="1"/>
+              <a:t>meaningless</a:t>
+            </a:r>
+            <a:r>
+              <a:rPr lang="de-DE" dirty="0"/>
+              <a:t> </a:t>
+            </a:r>
+            <a:r>
+              <a:rPr lang="de-DE" dirty="0" err="1"/>
+              <a:t>splits</a:t>
+            </a:r>
+            <a:endParaRPr lang="de-DE" dirty="0"/>
+          </a:p>
+          <a:p>
+            <a:pPr marL="0" indent="0">
+              <a:buNone/>
+            </a:pPr>
+            <a:endParaRPr lang="de-DE" dirty="0"/>
+          </a:p>
+          <a:p>
+            <a:pPr marL="0" indent="0">
+              <a:buNone/>
+            </a:pPr>
+            <a:r>
               <a:rPr lang="de-DE" dirty="0"/>
               <a:t>Common </a:t>
             </a:r>
             <a:r>
               <a:rPr lang="de-DE" dirty="0" err="1"/>
-              <a:t>methods</a:t>
-            </a:r>
-            <a:r>
-              <a:rPr lang="de-DE" dirty="0"/>
-              <a:t> </a:t>
-            </a:r>
-            <a:r>
-              <a:rPr lang="de-DE" dirty="0" err="1"/>
-              <a:t>include</a:t>
+              <a:t>workflow</a:t>
             </a:r>
             <a:r>
               <a:rPr lang="de-DE" dirty="0"/>
@@ -8114,23 +8950,169 @@
           <a:p>
             <a:r>
               <a:rPr lang="de-DE" dirty="0"/>
-              <a:t>Elbow Method</a:t>
-            </a:r>
-          </a:p>
-          <a:p>
-            <a:r>
-              <a:rPr lang="de-DE" dirty="0"/>
-              <a:t>Silhouette Score</a:t>
-            </a:r>
-          </a:p>
-          <a:p>
-            <a:r>
-              <a:rPr lang="de-DE" dirty="0"/>
-              <a:t>Gap </a:t>
-            </a:r>
-            <a:r>
-              <a:rPr lang="de-DE" dirty="0" err="1"/>
-              <a:t>Statistic</a:t>
+              <a:t>Elbow </a:t>
+            </a:r>
+            <a:r>
+              <a:rPr lang="de-DE" dirty="0" err="1"/>
+              <a:t>plot</a:t>
+            </a:r>
+            <a:r>
+              <a:rPr lang="de-DE" dirty="0"/>
+              <a:t> </a:t>
+            </a:r>
+            <a:r>
+              <a:rPr lang="de-DE" dirty="0" err="1"/>
+              <a:t>for</a:t>
+            </a:r>
+            <a:r>
+              <a:rPr lang="de-DE" dirty="0"/>
+              <a:t> quick </a:t>
+            </a:r>
+            <a:r>
+              <a:rPr lang="de-DE" dirty="0" err="1"/>
+              <a:t>insight</a:t>
+            </a:r>
+            <a:endParaRPr lang="de-DE" dirty="0"/>
+          </a:p>
+          <a:p>
+            <a:r>
+              <a:rPr lang="de-DE" dirty="0" err="1"/>
+              <a:t>Compute</a:t>
+            </a:r>
+            <a:r>
+              <a:rPr lang="de-DE" dirty="0"/>
+              <a:t> </a:t>
+            </a:r>
+            <a:r>
+              <a:rPr lang="de-DE" dirty="0" err="1"/>
+              <a:t>cluster</a:t>
+            </a:r>
+            <a:r>
+              <a:rPr lang="de-DE" dirty="0"/>
+              <a:t> </a:t>
+            </a:r>
+            <a:r>
+              <a:rPr lang="de-DE" dirty="0" err="1"/>
+              <a:t>validation</a:t>
+            </a:r>
+            <a:r>
+              <a:rPr lang="de-DE" dirty="0"/>
+              <a:t> </a:t>
+            </a:r>
+            <a:r>
+              <a:rPr lang="de-DE" dirty="0" err="1"/>
+              <a:t>metrics</a:t>
+            </a:r>
+            <a:r>
+              <a:rPr lang="de-DE" dirty="0"/>
+              <a:t>: </a:t>
+            </a:r>
+            <a:r>
+              <a:rPr lang="de-DE" dirty="0" err="1"/>
+              <a:t>compute</a:t>
+            </a:r>
+            <a:r>
+              <a:rPr lang="de-DE" dirty="0"/>
+              <a:t> </a:t>
+            </a:r>
+            <a:r>
+              <a:rPr lang="de-DE" dirty="0" err="1"/>
+              <a:t>metrics</a:t>
+            </a:r>
+            <a:r>
+              <a:rPr lang="de-DE" dirty="0"/>
+              <a:t> </a:t>
+            </a:r>
+            <a:r>
+              <a:rPr lang="de-DE" dirty="0" err="1"/>
+              <a:t>for</a:t>
+            </a:r>
+            <a:r>
+              <a:rPr lang="de-DE" dirty="0"/>
+              <a:t> </a:t>
+            </a:r>
+            <a:r>
+              <a:rPr lang="de-DE" dirty="0" err="1"/>
+              <a:t>each</a:t>
+            </a:r>
+            <a:r>
+              <a:rPr lang="de-DE" dirty="0"/>
+              <a:t> </a:t>
+            </a:r>
+            <a:r>
+              <a:rPr lang="de-DE" dirty="0" err="1"/>
+              <a:t>k</a:t>
+            </a:r>
+            <a:r>
+              <a:rPr lang="de-DE" dirty="0"/>
+              <a:t> and </a:t>
+            </a:r>
+            <a:r>
+              <a:rPr lang="de-DE" dirty="0" err="1"/>
+              <a:t>choose</a:t>
+            </a:r>
+            <a:r>
+              <a:rPr lang="de-DE" dirty="0"/>
+              <a:t> </a:t>
+            </a:r>
+            <a:r>
+              <a:rPr lang="de-DE" dirty="0" err="1"/>
+              <a:t>the</a:t>
+            </a:r>
+            <a:r>
+              <a:rPr lang="de-DE" dirty="0"/>
+              <a:t> </a:t>
+            </a:r>
+            <a:r>
+              <a:rPr lang="de-DE" dirty="0" err="1"/>
+              <a:t>k</a:t>
+            </a:r>
+            <a:r>
+              <a:rPr lang="de-DE" dirty="0"/>
+              <a:t> </a:t>
+            </a:r>
+            <a:r>
+              <a:rPr lang="de-DE" dirty="0" err="1"/>
+              <a:t>with</a:t>
+            </a:r>
+            <a:r>
+              <a:rPr lang="de-DE" dirty="0"/>
+              <a:t> </a:t>
+            </a:r>
+            <a:r>
+              <a:rPr lang="de-DE" dirty="0" err="1"/>
+              <a:t>the</a:t>
+            </a:r>
+            <a:r>
+              <a:rPr lang="de-DE" dirty="0"/>
+              <a:t> </a:t>
+            </a:r>
+            <a:r>
+              <a:rPr lang="de-DE" dirty="0" err="1"/>
+              <a:t>best</a:t>
+            </a:r>
+            <a:r>
+              <a:rPr lang="de-DE" dirty="0"/>
+              <a:t> </a:t>
+            </a:r>
+            <a:r>
+              <a:rPr lang="de-DE" dirty="0" err="1"/>
+              <a:t>metric</a:t>
+            </a:r>
+            <a:endParaRPr lang="de-DE" dirty="0"/>
+          </a:p>
+          <a:p>
+            <a:r>
+              <a:rPr lang="de-DE" dirty="0" err="1"/>
+              <a:t>Visualize</a:t>
+            </a:r>
+            <a:r>
+              <a:rPr lang="de-DE" dirty="0"/>
+              <a:t> </a:t>
+            </a:r>
+            <a:r>
+              <a:rPr lang="de-DE" dirty="0" err="1"/>
+              <a:t>clusters</a:t>
             </a:r>
             <a:endParaRPr lang="de-DE" dirty="0"/>
           </a:p>
@@ -8200,7 +9182,7 @@
           <p:cNvPr id="2" name="Titel 1">
             <a:extLst>
               <a:ext uri="{FF2B5EF4-FFF2-40B4-BE49-F238E27FC236}">
-                <a16:creationId xmlns:a16="http://schemas.microsoft.com/office/drawing/2014/main" id="{E1872AF3-6DAA-E6C2-A919-228FF3EB5851}"/>
+                <a16:creationId xmlns:a16="http://schemas.microsoft.com/office/drawing/2014/main" id="{9EE71995-888F-33AD-8980-89DD72BBB631}"/>
               </a:ext>
             </a:extLst>
           </p:cNvPr>
@@ -8217,22 +9199,356 @@
           <a:lstStyle/>
           <a:p>
             <a:r>
-              <a:rPr lang="de-DE" dirty="0" err="1"/>
-              <a:t>Visualizing</a:t>
-            </a:r>
-            <a:r>
-              <a:rPr lang="de-DE" dirty="0"/>
-              <a:t> Clusters</a:t>
+              <a:rPr lang="de-DE" dirty="0"/>
+              <a:t>Elbow Plot</a:t>
             </a:r>
           </a:p>
         </p:txBody>
       </p:sp>
       <p:sp>
         <p:nvSpPr>
-          <p:cNvPr id="3" name="Foliennummernplatzhalter 2">
+          <p:cNvPr id="3" name="Inhaltsplatzhalter 2">
             <a:extLst>
               <a:ext uri="{FF2B5EF4-FFF2-40B4-BE49-F238E27FC236}">
-                <a16:creationId xmlns:a16="http://schemas.microsoft.com/office/drawing/2014/main" id="{81251F56-854B-D4C6-04C7-5A3B3F8DB84E}"/>
+                <a16:creationId xmlns:a16="http://schemas.microsoft.com/office/drawing/2014/main" id="{7D133066-2A06-1084-9274-4E3774F4ACD6}"/>
+              </a:ext>
+            </a:extLst>
+          </p:cNvPr>
+          <p:cNvSpPr>
+            <a:spLocks noGrp="1"/>
+          </p:cNvSpPr>
+          <p:nvPr>
+            <p:ph idx="1"/>
+          </p:nvPr>
+        </p:nvSpPr>
+        <p:spPr>
+          <a:xfrm>
+            <a:off x="838200" y="1825625"/>
+            <a:ext cx="6144847" cy="4351338"/>
+          </a:xfrm>
+        </p:spPr>
+        <p:txBody>
+          <a:bodyPr>
+            <a:normAutofit fontScale="85000" lnSpcReduction="10000"/>
+          </a:bodyPr>
+          <a:lstStyle/>
+          <a:p>
+            <a:r>
+              <a:rPr lang="de-DE" dirty="0"/>
+              <a:t>Run </a:t>
+            </a:r>
+            <a:r>
+              <a:rPr lang="de-DE" dirty="0" err="1"/>
+              <a:t>k-means</a:t>
+            </a:r>
+            <a:r>
+              <a:rPr lang="de-DE" dirty="0"/>
+              <a:t> </a:t>
+            </a:r>
+            <a:r>
+              <a:rPr lang="de-DE" dirty="0" err="1"/>
+              <a:t>for</a:t>
+            </a:r>
+            <a:r>
+              <a:rPr lang="de-DE" dirty="0"/>
+              <a:t> different </a:t>
+            </a:r>
+            <a:r>
+              <a:rPr lang="de-DE" dirty="0" err="1"/>
+              <a:t>values</a:t>
+            </a:r>
+            <a:r>
+              <a:rPr lang="de-DE" dirty="0"/>
+              <a:t> </a:t>
+            </a:r>
+            <a:r>
+              <a:rPr lang="de-DE" dirty="0" err="1"/>
+              <a:t>of</a:t>
+            </a:r>
+            <a:r>
+              <a:rPr lang="de-DE" dirty="0"/>
+              <a:t> </a:t>
+            </a:r>
+            <a:r>
+              <a:rPr lang="de-DE" dirty="0" err="1"/>
+              <a:t>k</a:t>
+            </a:r>
+            <a:r>
+              <a:rPr lang="de-DE" dirty="0"/>
+              <a:t> and </a:t>
+            </a:r>
+            <a:r>
+              <a:rPr lang="de-DE" dirty="0" err="1"/>
+              <a:t>compute</a:t>
+            </a:r>
+            <a:r>
+              <a:rPr lang="de-DE" dirty="0"/>
+              <a:t> </a:t>
+            </a:r>
+            <a:r>
+              <a:rPr lang="de-DE" dirty="0" err="1"/>
+              <a:t>the</a:t>
+            </a:r>
+            <a:r>
+              <a:rPr lang="de-DE" dirty="0"/>
+              <a:t> </a:t>
+            </a:r>
+            <a:r>
+              <a:rPr lang="de-DE" dirty="0" err="1"/>
+              <a:t>within</a:t>
+            </a:r>
+            <a:r>
+              <a:rPr lang="de-DE" dirty="0"/>
+              <a:t>-cluster </a:t>
+            </a:r>
+            <a:r>
+              <a:rPr lang="de-DE" dirty="0" err="1"/>
+              <a:t>sum</a:t>
+            </a:r>
+            <a:r>
+              <a:rPr lang="de-DE" dirty="0"/>
+              <a:t> </a:t>
+            </a:r>
+            <a:r>
+              <a:rPr lang="de-DE" dirty="0" err="1"/>
+              <a:t>of</a:t>
+            </a:r>
+            <a:r>
+              <a:rPr lang="de-DE" dirty="0"/>
+              <a:t> </a:t>
+            </a:r>
+            <a:r>
+              <a:rPr lang="de-DE" dirty="0" err="1"/>
+              <a:t>squares</a:t>
+            </a:r>
+            <a:r>
+              <a:rPr lang="de-DE" dirty="0"/>
+              <a:t> (WCSS)</a:t>
+            </a:r>
+          </a:p>
+          <a:p>
+            <a:r>
+              <a:rPr lang="de-DE" dirty="0"/>
+              <a:t>Plot WCSS vs. </a:t>
+            </a:r>
+            <a:r>
+              <a:rPr lang="de-DE" dirty="0" err="1"/>
+              <a:t>k</a:t>
+            </a:r>
+            <a:endParaRPr lang="de-DE" dirty="0"/>
+          </a:p>
+          <a:p>
+            <a:r>
+              <a:rPr lang="de-DE" dirty="0"/>
+              <a:t>Look </a:t>
+            </a:r>
+            <a:r>
+              <a:rPr lang="de-DE" dirty="0" err="1"/>
+              <a:t>for</a:t>
+            </a:r>
+            <a:r>
+              <a:rPr lang="de-DE" dirty="0"/>
+              <a:t> a “</a:t>
+            </a:r>
+            <a:r>
+              <a:rPr lang="de-DE" dirty="0" err="1"/>
+              <a:t>bend</a:t>
+            </a:r>
+            <a:r>
+              <a:rPr lang="de-DE" dirty="0"/>
+              <a:t>” (</a:t>
+            </a:r>
+            <a:r>
+              <a:rPr lang="de-DE" dirty="0" err="1"/>
+              <a:t>elbow</a:t>
+            </a:r>
+            <a:r>
+              <a:rPr lang="de-DE" dirty="0"/>
+              <a:t>) </a:t>
+            </a:r>
+            <a:r>
+              <a:rPr lang="de-DE" dirty="0" err="1"/>
+              <a:t>where</a:t>
+            </a:r>
+            <a:r>
+              <a:rPr lang="de-DE" dirty="0"/>
+              <a:t> </a:t>
+            </a:r>
+            <a:r>
+              <a:rPr lang="de-DE" dirty="0" err="1"/>
+              <a:t>improvement</a:t>
+            </a:r>
+            <a:r>
+              <a:rPr lang="de-DE" dirty="0"/>
+              <a:t> </a:t>
+            </a:r>
+            <a:r>
+              <a:rPr lang="de-DE" dirty="0" err="1"/>
+              <a:t>slows</a:t>
+            </a:r>
+            <a:r>
+              <a:rPr lang="de-DE" dirty="0"/>
+              <a:t> down</a:t>
+            </a:r>
+          </a:p>
+          <a:p>
+            <a:pPr marL="0" indent="0">
+              <a:buNone/>
+            </a:pPr>
+            <a:endParaRPr lang="de-DE" dirty="0"/>
+          </a:p>
+          <a:p>
+            <a:pPr marL="0" indent="0">
+              <a:buNone/>
+            </a:pPr>
+            <a:r>
+              <a:rPr lang="de-DE" dirty="0"/>
+              <a:t>Idea: </a:t>
+            </a:r>
+            <a:r>
+              <a:rPr lang="de-DE" dirty="0" err="1"/>
+              <a:t>Adding</a:t>
+            </a:r>
+            <a:r>
+              <a:rPr lang="de-DE" dirty="0"/>
+              <a:t> </a:t>
+            </a:r>
+            <a:r>
+              <a:rPr lang="de-DE" dirty="0" err="1"/>
+              <a:t>clusters</a:t>
+            </a:r>
+            <a:r>
+              <a:rPr lang="de-DE" dirty="0"/>
+              <a:t> </a:t>
+            </a:r>
+            <a:r>
+              <a:rPr lang="de-DE" dirty="0" err="1"/>
+              <a:t>always</a:t>
+            </a:r>
+            <a:r>
+              <a:rPr lang="de-DE" dirty="0"/>
+              <a:t> </a:t>
+            </a:r>
+            <a:r>
+              <a:rPr lang="de-DE" dirty="0" err="1"/>
+              <a:t>reduces</a:t>
+            </a:r>
+            <a:r>
+              <a:rPr lang="de-DE" dirty="0"/>
+              <a:t> </a:t>
+            </a:r>
+            <a:r>
+              <a:rPr lang="de-DE" dirty="0" err="1"/>
+              <a:t>error</a:t>
+            </a:r>
+            <a:r>
+              <a:rPr lang="de-DE" dirty="0"/>
+              <a:t>, but after a </a:t>
+            </a:r>
+            <a:r>
+              <a:rPr lang="de-DE" dirty="0" err="1"/>
+              <a:t>point</a:t>
+            </a:r>
+            <a:r>
+              <a:rPr lang="de-DE" dirty="0"/>
+              <a:t> </a:t>
+            </a:r>
+            <a:r>
+              <a:rPr lang="de-DE" dirty="0" err="1"/>
+              <a:t>the</a:t>
+            </a:r>
+            <a:r>
+              <a:rPr lang="de-DE" dirty="0"/>
+              <a:t> </a:t>
+            </a:r>
+            <a:r>
+              <a:rPr lang="de-DE" dirty="0" err="1"/>
+              <a:t>gain</a:t>
+            </a:r>
+            <a:r>
+              <a:rPr lang="de-DE" dirty="0"/>
+              <a:t> </a:t>
+            </a:r>
+            <a:r>
+              <a:rPr lang="de-DE" dirty="0" err="1"/>
+              <a:t>becomes</a:t>
+            </a:r>
+            <a:r>
+              <a:rPr lang="de-DE" dirty="0"/>
+              <a:t> </a:t>
+            </a:r>
+            <a:r>
+              <a:rPr lang="de-DE" dirty="0" err="1"/>
+              <a:t>small</a:t>
+            </a:r>
+            <a:r>
+              <a:rPr lang="de-DE" dirty="0"/>
+              <a:t>.</a:t>
+            </a:r>
+          </a:p>
+          <a:p>
+            <a:pPr marL="0" indent="0">
+              <a:buNone/>
+            </a:pPr>
+            <a:endParaRPr lang="de-DE" dirty="0"/>
+          </a:p>
+          <a:p>
+            <a:pPr marL="0" indent="0">
+              <a:buNone/>
+            </a:pPr>
+            <a:r>
+              <a:rPr lang="de-DE" dirty="0"/>
+              <a:t>But </a:t>
+            </a:r>
+            <a:r>
+              <a:rPr lang="de-DE" dirty="0" err="1"/>
+              <a:t>elbow</a:t>
+            </a:r>
+            <a:r>
+              <a:rPr lang="de-DE" dirty="0"/>
+              <a:t> </a:t>
+            </a:r>
+            <a:r>
+              <a:rPr lang="de-DE" dirty="0" err="1"/>
+              <a:t>is</a:t>
+            </a:r>
+            <a:r>
+              <a:rPr lang="de-DE" dirty="0"/>
+              <a:t> </a:t>
+            </a:r>
+            <a:r>
+              <a:rPr lang="de-DE" dirty="0" err="1"/>
+              <a:t>often</a:t>
+            </a:r>
+            <a:r>
+              <a:rPr lang="de-DE" dirty="0"/>
+              <a:t> </a:t>
+            </a:r>
+            <a:r>
+              <a:rPr lang="de-DE" dirty="0" err="1"/>
+              <a:t>ambiguous</a:t>
+            </a:r>
+            <a:r>
+              <a:rPr lang="de-DE" dirty="0"/>
+              <a:t> </a:t>
+            </a:r>
+            <a:r>
+              <a:rPr lang="de-DE" dirty="0" err="1"/>
+              <a:t>or</a:t>
+            </a:r>
+            <a:r>
+              <a:rPr lang="de-DE" dirty="0"/>
+              <a:t> not visible</a:t>
+            </a:r>
+          </a:p>
+        </p:txBody>
+      </p:sp>
+      <p:sp>
+        <p:nvSpPr>
+          <p:cNvPr id="4" name="Foliennummernplatzhalter 3">
+            <a:extLst>
+              <a:ext uri="{FF2B5EF4-FFF2-40B4-BE49-F238E27FC236}">
+                <a16:creationId xmlns:a16="http://schemas.microsoft.com/office/drawing/2014/main" id="{88CDA20E-5253-C45E-C09D-183FF5686795}"/>
               </a:ext>
             </a:extLst>
           </p:cNvPr>
@@ -8256,10 +9572,143 @@
           </a:p>
         </p:txBody>
       </p:sp>
+      <p:pic>
+        <p:nvPicPr>
+          <p:cNvPr id="9" name="Grafik 8">
+            <a:extLst>
+              <a:ext uri="{FF2B5EF4-FFF2-40B4-BE49-F238E27FC236}">
+                <a16:creationId xmlns:a16="http://schemas.microsoft.com/office/drawing/2014/main" id="{C7715189-1203-533C-6770-2E3921D6DD9F}"/>
+              </a:ext>
+            </a:extLst>
+          </p:cNvPr>
+          <p:cNvPicPr>
+            <a:picLocks noChangeAspect="1"/>
+          </p:cNvPicPr>
+          <p:nvPr/>
+        </p:nvPicPr>
+        <p:blipFill>
+          <a:blip r:embed="rId2"/>
+          <a:stretch>
+            <a:fillRect/>
+          </a:stretch>
+        </p:blipFill>
+        <p:spPr>
+          <a:xfrm>
+            <a:off x="6983047" y="1825625"/>
+            <a:ext cx="5172510" cy="4121702"/>
+          </a:xfrm>
+          <a:prstGeom prst="rect">
+            <a:avLst/>
+          </a:prstGeom>
+        </p:spPr>
+      </p:pic>
+      <p:sp>
+        <p:nvSpPr>
+          <p:cNvPr id="11" name="Textfeld 10">
+            <a:extLst>
+              <a:ext uri="{FF2B5EF4-FFF2-40B4-BE49-F238E27FC236}">
+                <a16:creationId xmlns:a16="http://schemas.microsoft.com/office/drawing/2014/main" id="{39F7A56C-157A-F7A8-DB88-C620B9C37FCD}"/>
+              </a:ext>
+            </a:extLst>
+          </p:cNvPr>
+          <p:cNvSpPr txBox="1"/>
+          <p:nvPr/>
+        </p:nvSpPr>
+        <p:spPr>
+          <a:xfrm>
+            <a:off x="9569302" y="3105834"/>
+            <a:ext cx="1600200" cy="646331"/>
+          </a:xfrm>
+          <a:prstGeom prst="rect">
+            <a:avLst/>
+          </a:prstGeom>
+          <a:noFill/>
+        </p:spPr>
+        <p:txBody>
+          <a:bodyPr wrap="square" rtlCol="0">
+            <a:spAutoFit/>
+          </a:bodyPr>
+          <a:lstStyle/>
+          <a:p>
+            <a:r>
+              <a:rPr lang="de-DE" dirty="0"/>
+              <a:t>3 </a:t>
+            </a:r>
+            <a:r>
+              <a:rPr lang="de-DE" dirty="0" err="1"/>
+              <a:t>true</a:t>
+            </a:r>
+            <a:r>
+              <a:rPr lang="de-DE" dirty="0"/>
+              <a:t> </a:t>
+            </a:r>
+            <a:r>
+              <a:rPr lang="de-DE" dirty="0" err="1"/>
+              <a:t>clusters</a:t>
+            </a:r>
+            <a:r>
+              <a:rPr lang="de-DE" dirty="0"/>
+              <a:t> in </a:t>
+            </a:r>
+            <a:r>
+              <a:rPr lang="de-DE" dirty="0" err="1"/>
+              <a:t>this</a:t>
+            </a:r>
+            <a:r>
+              <a:rPr lang="de-DE" dirty="0"/>
+              <a:t> </a:t>
+            </a:r>
+            <a:r>
+              <a:rPr lang="de-DE" dirty="0" err="1"/>
+              <a:t>case</a:t>
+            </a:r>
+            <a:endParaRPr lang="de-DE" dirty="0"/>
+          </a:p>
+        </p:txBody>
+      </p:sp>
+      <p:cxnSp>
+        <p:nvCxnSpPr>
+          <p:cNvPr id="15" name="Gerade Verbindung mit Pfeil 14">
+            <a:extLst>
+              <a:ext uri="{FF2B5EF4-FFF2-40B4-BE49-F238E27FC236}">
+                <a16:creationId xmlns:a16="http://schemas.microsoft.com/office/drawing/2014/main" id="{1510C779-81C9-F430-7680-D17C2AEAB739}"/>
+              </a:ext>
+            </a:extLst>
+          </p:cNvPr>
+          <p:cNvCxnSpPr/>
+          <p:nvPr/>
+        </p:nvCxnSpPr>
+        <p:spPr>
+          <a:xfrm flipH="1">
+            <a:off x="8746435" y="3429000"/>
+            <a:ext cx="822867" cy="1530626"/>
+          </a:xfrm>
+          <a:prstGeom prst="straightConnector1">
+            <a:avLst/>
+          </a:prstGeom>
+          <a:ln>
+            <a:tailEnd type="triangle"/>
+          </a:ln>
+        </p:spPr>
+        <p:style>
+          <a:lnRef idx="2">
+            <a:schemeClr val="accent1"/>
+          </a:lnRef>
+          <a:fillRef idx="0">
+            <a:schemeClr val="accent1"/>
+          </a:fillRef>
+          <a:effectRef idx="1">
+            <a:schemeClr val="accent1"/>
+          </a:effectRef>
+          <a:fontRef idx="minor">
+            <a:schemeClr val="tx1"/>
+          </a:fontRef>
+        </p:style>
+      </p:cxnSp>
     </p:spTree>
     <p:extLst>
       <p:ext uri="{BB962C8B-B14F-4D97-AF65-F5344CB8AC3E}">
-        <p14:creationId xmlns:p14="http://schemas.microsoft.com/office/powerpoint/2010/main" val="2070037097"/>
+        <p14:creationId xmlns:p14="http://schemas.microsoft.com/office/powerpoint/2010/main" val="841768269"/>
       </p:ext>
     </p:extLst>
   </p:cSld>
@@ -8337,7 +9786,9 @@
         </p:nvSpPr>
         <p:spPr/>
         <p:txBody>
-          <a:bodyPr/>
+          <a:bodyPr>
+            <a:normAutofit/>
+          </a:bodyPr>
           <a:lstStyle/>
           <a:p>
             <a:pPr marL="0" indent="0">
@@ -8489,6 +9940,14 @@
             </a:r>
             <a:r>
               <a:rPr lang="de-DE" dirty="0"/>
+              <a:t> </a:t>
+            </a:r>
+            <a:r>
+              <a:rPr lang="de-DE" dirty="0" err="1"/>
+              <a:t>include</a:t>
+            </a:r>
+            <a:r>
+              <a:rPr lang="de-DE" dirty="0"/>
               <a:t>:</a:t>
             </a:r>
           </a:p>
@@ -8515,7 +9974,10 @@
               <a:rPr lang="de-DE" dirty="0" err="1"/>
               <a:t>index</a:t>
             </a:r>
-            <a:endParaRPr lang="de-DE" dirty="0"/>
+            <a:r>
+              <a:rPr lang="de-DE" dirty="0"/>
+              <a:t> (fast alternative)</a:t>
+            </a:r>
           </a:p>
         </p:txBody>
       </p:sp>
@@ -8583,7 +10045,7 @@
           <p:cNvPr id="2" name="Titel 1">
             <a:extLst>
               <a:ext uri="{FF2B5EF4-FFF2-40B4-BE49-F238E27FC236}">
-                <a16:creationId xmlns:a16="http://schemas.microsoft.com/office/drawing/2014/main" id="{0BB459EB-FAE8-31DC-E38F-3046EC588CF6}"/>
+                <a16:creationId xmlns:a16="http://schemas.microsoft.com/office/drawing/2014/main" id="{005A60AB-F037-38B2-551A-BD097CB6129B}"/>
               </a:ext>
             </a:extLst>
           </p:cNvPr>
@@ -8600,466 +10062,697 @@
           <a:lstStyle/>
           <a:p>
             <a:r>
-              <a:rPr lang="de-DE" dirty="0" err="1"/>
-              <a:t>Supervised</a:t>
-            </a:r>
-            <a:r>
-              <a:rPr lang="de-DE" dirty="0"/>
-              <a:t> Clustering Validation</a:t>
+              <a:rPr lang="de-DE" dirty="0"/>
+              <a:t>Silhouette Score</a:t>
             </a:r>
           </a:p>
         </p:txBody>
       </p:sp>
-      <p:sp>
-        <p:nvSpPr>
-          <p:cNvPr id="3" name="Inhaltsplatzhalter 2">
-            <a:extLst>
-              <a:ext uri="{FF2B5EF4-FFF2-40B4-BE49-F238E27FC236}">
-                <a16:creationId xmlns:a16="http://schemas.microsoft.com/office/drawing/2014/main" id="{392427C8-4330-BC0E-F7FF-95DB2D9863DA}"/>
-              </a:ext>
-            </a:extLst>
-          </p:cNvPr>
-          <p:cNvSpPr>
-            <a:spLocks noGrp="1"/>
-          </p:cNvSpPr>
-          <p:nvPr>
-            <p:ph idx="1"/>
-          </p:nvPr>
-        </p:nvSpPr>
-        <p:spPr/>
-        <p:txBody>
-          <a:bodyPr>
-            <a:normAutofit fontScale="92500"/>
-          </a:bodyPr>
-          <a:lstStyle/>
-          <a:p>
-            <a:pPr marL="0" indent="0">
-              <a:buNone/>
-            </a:pPr>
-            <a:r>
-              <a:rPr lang="de-DE" dirty="0"/>
-              <a:t>…</a:t>
-            </a:r>
-          </a:p>
-          <a:p>
-            <a:r>
-              <a:rPr lang="de-DE" dirty="0" err="1"/>
-              <a:t>homogeneity</a:t>
-            </a:r>
-            <a:r>
-              <a:rPr lang="de-DE" dirty="0"/>
-              <a:t> score: A </a:t>
-            </a:r>
-            <a:r>
-              <a:rPr lang="de-DE" dirty="0" err="1"/>
-              <a:t>clustering</a:t>
-            </a:r>
-            <a:r>
-              <a:rPr lang="de-DE" dirty="0"/>
-              <a:t> </a:t>
-            </a:r>
-            <a:r>
-              <a:rPr lang="de-DE" dirty="0" err="1"/>
-              <a:t>result</a:t>
-            </a:r>
-            <a:r>
-              <a:rPr lang="de-DE" dirty="0"/>
-              <a:t> </a:t>
-            </a:r>
-            <a:r>
-              <a:rPr lang="de-DE" dirty="0" err="1"/>
-              <a:t>satisfies</a:t>
-            </a:r>
-            <a:r>
-              <a:rPr lang="de-DE" dirty="0"/>
-              <a:t> </a:t>
-            </a:r>
-            <a:r>
-              <a:rPr lang="de-DE" dirty="0" err="1"/>
-              <a:t>homogeneity</a:t>
-            </a:r>
-            <a:r>
-              <a:rPr lang="de-DE" dirty="0"/>
-              <a:t> </a:t>
-            </a:r>
-            <a:r>
-              <a:rPr lang="de-DE" dirty="0" err="1"/>
-              <a:t>if</a:t>
-            </a:r>
-            <a:r>
-              <a:rPr lang="de-DE" dirty="0"/>
-              <a:t> all </a:t>
-            </a:r>
-            <a:r>
-              <a:rPr lang="de-DE" dirty="0" err="1"/>
-              <a:t>of</a:t>
-            </a:r>
-            <a:r>
-              <a:rPr lang="de-DE" dirty="0"/>
-              <a:t> </a:t>
-            </a:r>
-            <a:r>
-              <a:rPr lang="de-DE" dirty="0" err="1"/>
-              <a:t>its</a:t>
-            </a:r>
-            <a:r>
-              <a:rPr lang="de-DE" dirty="0"/>
-              <a:t> </a:t>
-            </a:r>
-            <a:r>
-              <a:rPr lang="de-DE" dirty="0" err="1"/>
-              <a:t>clusters</a:t>
-            </a:r>
-            <a:r>
-              <a:rPr lang="de-DE" dirty="0"/>
-              <a:t> </a:t>
-            </a:r>
-            <a:r>
-              <a:rPr lang="de-DE" dirty="0" err="1"/>
-              <a:t>contain</a:t>
-            </a:r>
-            <a:r>
-              <a:rPr lang="de-DE" dirty="0"/>
-              <a:t> </a:t>
-            </a:r>
-            <a:r>
-              <a:rPr lang="de-DE" dirty="0" err="1"/>
-              <a:t>only</a:t>
-            </a:r>
-            <a:r>
-              <a:rPr lang="de-DE" dirty="0"/>
-              <a:t> </a:t>
-            </a:r>
-            <a:r>
-              <a:rPr lang="de-DE" dirty="0" err="1"/>
-              <a:t>data</a:t>
-            </a:r>
-            <a:r>
-              <a:rPr lang="de-DE" dirty="0"/>
-              <a:t> </a:t>
-            </a:r>
-            <a:r>
-              <a:rPr lang="de-DE" dirty="0" err="1"/>
-              <a:t>points</a:t>
-            </a:r>
-            <a:r>
-              <a:rPr lang="de-DE" dirty="0"/>
-              <a:t> </a:t>
-            </a:r>
-            <a:r>
-              <a:rPr lang="de-DE" dirty="0" err="1"/>
-              <a:t>which</a:t>
-            </a:r>
-            <a:r>
-              <a:rPr lang="de-DE" dirty="0"/>
-              <a:t> </a:t>
-            </a:r>
-            <a:r>
-              <a:rPr lang="de-DE" dirty="0" err="1"/>
-              <a:t>are</a:t>
-            </a:r>
-            <a:r>
-              <a:rPr lang="de-DE" dirty="0"/>
-              <a:t> </a:t>
-            </a:r>
-            <a:r>
-              <a:rPr lang="de-DE" dirty="0" err="1"/>
-              <a:t>members</a:t>
-            </a:r>
-            <a:r>
-              <a:rPr lang="de-DE" dirty="0"/>
-              <a:t> </a:t>
-            </a:r>
-            <a:r>
-              <a:rPr lang="de-DE" dirty="0" err="1"/>
-              <a:t>of</a:t>
-            </a:r>
-            <a:r>
-              <a:rPr lang="de-DE" dirty="0"/>
-              <a:t> a </a:t>
-            </a:r>
-            <a:r>
-              <a:rPr lang="de-DE" dirty="0" err="1"/>
-              <a:t>single</a:t>
-            </a:r>
-            <a:r>
-              <a:rPr lang="de-DE" dirty="0"/>
-              <a:t> </a:t>
-            </a:r>
-            <a:r>
-              <a:rPr lang="de-DE" dirty="0" err="1"/>
-              <a:t>class</a:t>
-            </a:r>
-            <a:r>
-              <a:rPr lang="de-DE" dirty="0"/>
-              <a:t>.</a:t>
-            </a:r>
-          </a:p>
-          <a:p>
-            <a:r>
-              <a:rPr lang="de-DE" dirty="0" err="1"/>
-              <a:t>completeness</a:t>
-            </a:r>
-            <a:r>
-              <a:rPr lang="de-DE" dirty="0"/>
-              <a:t> score: A </a:t>
-            </a:r>
-            <a:r>
-              <a:rPr lang="de-DE" dirty="0" err="1"/>
-              <a:t>clustering</a:t>
-            </a:r>
-            <a:r>
-              <a:rPr lang="de-DE" dirty="0"/>
-              <a:t> </a:t>
-            </a:r>
-            <a:r>
-              <a:rPr lang="de-DE" dirty="0" err="1"/>
-              <a:t>result</a:t>
-            </a:r>
-            <a:r>
-              <a:rPr lang="de-DE" dirty="0"/>
-              <a:t> </a:t>
-            </a:r>
-            <a:r>
-              <a:rPr lang="de-DE" dirty="0" err="1"/>
-              <a:t>satisfies</a:t>
-            </a:r>
-            <a:r>
-              <a:rPr lang="de-DE" dirty="0"/>
-              <a:t> </a:t>
-            </a:r>
-            <a:r>
-              <a:rPr lang="de-DE" dirty="0" err="1"/>
-              <a:t>completeness</a:t>
-            </a:r>
-            <a:r>
-              <a:rPr lang="de-DE" dirty="0"/>
-              <a:t> </a:t>
-            </a:r>
-            <a:r>
-              <a:rPr lang="de-DE" dirty="0" err="1"/>
-              <a:t>if</a:t>
-            </a:r>
-            <a:r>
-              <a:rPr lang="de-DE" dirty="0"/>
-              <a:t> all </a:t>
-            </a:r>
-            <a:r>
-              <a:rPr lang="de-DE" dirty="0" err="1"/>
-              <a:t>the</a:t>
-            </a:r>
-            <a:r>
-              <a:rPr lang="de-DE" dirty="0"/>
-              <a:t> </a:t>
-            </a:r>
-            <a:r>
-              <a:rPr lang="de-DE" dirty="0" err="1"/>
-              <a:t>data</a:t>
-            </a:r>
-            <a:r>
-              <a:rPr lang="de-DE" dirty="0"/>
-              <a:t> </a:t>
-            </a:r>
-            <a:r>
-              <a:rPr lang="de-DE" dirty="0" err="1"/>
-              <a:t>points</a:t>
-            </a:r>
-            <a:r>
-              <a:rPr lang="de-DE" dirty="0"/>
-              <a:t> </a:t>
-            </a:r>
-            <a:r>
-              <a:rPr lang="de-DE" dirty="0" err="1"/>
-              <a:t>that</a:t>
-            </a:r>
-            <a:r>
-              <a:rPr lang="de-DE" dirty="0"/>
-              <a:t> </a:t>
-            </a:r>
-            <a:r>
-              <a:rPr lang="de-DE" dirty="0" err="1"/>
-              <a:t>are</a:t>
-            </a:r>
-            <a:r>
-              <a:rPr lang="de-DE" dirty="0"/>
-              <a:t> </a:t>
-            </a:r>
-            <a:r>
-              <a:rPr lang="de-DE" dirty="0" err="1"/>
-              <a:t>members</a:t>
-            </a:r>
-            <a:r>
-              <a:rPr lang="de-DE" dirty="0"/>
-              <a:t> </a:t>
-            </a:r>
-            <a:r>
-              <a:rPr lang="de-DE" dirty="0" err="1"/>
-              <a:t>of</a:t>
-            </a:r>
-            <a:r>
-              <a:rPr lang="de-DE" dirty="0"/>
-              <a:t> a </a:t>
-            </a:r>
-            <a:r>
-              <a:rPr lang="de-DE" dirty="0" err="1"/>
-              <a:t>given</a:t>
-            </a:r>
-            <a:r>
-              <a:rPr lang="de-DE" dirty="0"/>
-              <a:t> </a:t>
-            </a:r>
-            <a:r>
-              <a:rPr lang="de-DE" dirty="0" err="1"/>
-              <a:t>class</a:t>
-            </a:r>
-            <a:r>
-              <a:rPr lang="de-DE" dirty="0"/>
-              <a:t> </a:t>
-            </a:r>
-            <a:r>
-              <a:rPr lang="de-DE" dirty="0" err="1"/>
-              <a:t>are</a:t>
-            </a:r>
-            <a:r>
-              <a:rPr lang="de-DE" dirty="0"/>
-              <a:t> </a:t>
-            </a:r>
-            <a:r>
-              <a:rPr lang="de-DE" dirty="0" err="1"/>
-              <a:t>elements</a:t>
-            </a:r>
-            <a:r>
-              <a:rPr lang="de-DE" dirty="0"/>
-              <a:t> </a:t>
-            </a:r>
-            <a:r>
-              <a:rPr lang="de-DE" dirty="0" err="1"/>
-              <a:t>of</a:t>
-            </a:r>
-            <a:r>
-              <a:rPr lang="de-DE" dirty="0"/>
-              <a:t> </a:t>
-            </a:r>
-            <a:r>
-              <a:rPr lang="de-DE" dirty="0" err="1"/>
-              <a:t>the</a:t>
-            </a:r>
-            <a:r>
-              <a:rPr lang="de-DE" dirty="0"/>
-              <a:t> same </a:t>
-            </a:r>
-            <a:r>
-              <a:rPr lang="de-DE" dirty="0" err="1"/>
-              <a:t>cluster</a:t>
-            </a:r>
-            <a:r>
-              <a:rPr lang="de-DE" dirty="0"/>
-              <a:t>.</a:t>
-            </a:r>
-          </a:p>
-          <a:p>
-            <a:r>
-              <a:rPr lang="de-DE" dirty="0"/>
-              <a:t>V-</a:t>
-            </a:r>
-            <a:r>
-              <a:rPr lang="de-DE" dirty="0" err="1"/>
-              <a:t>measure</a:t>
-            </a:r>
-            <a:r>
-              <a:rPr lang="de-DE" dirty="0"/>
-              <a:t> score: </a:t>
-            </a:r>
-            <a:r>
-              <a:rPr lang="de-DE" dirty="0" err="1"/>
-              <a:t>harmonic</a:t>
-            </a:r>
-            <a:r>
-              <a:rPr lang="de-DE" dirty="0"/>
-              <a:t> </a:t>
-            </a:r>
-            <a:r>
-              <a:rPr lang="de-DE" dirty="0" err="1"/>
-              <a:t>mean</a:t>
-            </a:r>
-            <a:r>
-              <a:rPr lang="de-DE" dirty="0"/>
-              <a:t> </a:t>
-            </a:r>
-            <a:r>
-              <a:rPr lang="de-DE" dirty="0" err="1"/>
-              <a:t>between</a:t>
-            </a:r>
-            <a:r>
-              <a:rPr lang="de-DE" dirty="0"/>
-              <a:t> </a:t>
-            </a:r>
-            <a:r>
-              <a:rPr lang="de-DE" dirty="0" err="1"/>
-              <a:t>homogeneity</a:t>
-            </a:r>
-            <a:r>
-              <a:rPr lang="de-DE" dirty="0"/>
-              <a:t> and </a:t>
-            </a:r>
-            <a:r>
-              <a:rPr lang="de-DE" dirty="0" err="1"/>
-              <a:t>completeness</a:t>
-            </a:r>
-            <a:endParaRPr lang="de-DE" dirty="0"/>
-          </a:p>
-          <a:p>
-            <a:r>
-              <a:rPr lang="de-DE" dirty="0"/>
-              <a:t>(</a:t>
-            </a:r>
-            <a:r>
-              <a:rPr lang="de-DE" dirty="0" err="1"/>
-              <a:t>adjusted</a:t>
-            </a:r>
-            <a:r>
-              <a:rPr lang="de-DE" dirty="0"/>
-              <a:t>) Rand </a:t>
-            </a:r>
-            <a:r>
-              <a:rPr lang="de-DE" dirty="0" err="1"/>
-              <a:t>index</a:t>
-            </a:r>
-            <a:r>
-              <a:rPr lang="de-DE" dirty="0"/>
-              <a:t>: …</a:t>
-            </a:r>
-          </a:p>
-          <a:p>
-            <a:r>
-              <a:rPr lang="de-DE" dirty="0"/>
-              <a:t>(</a:t>
-            </a:r>
-            <a:r>
-              <a:rPr lang="de-DE" dirty="0" err="1"/>
-              <a:t>adjusted</a:t>
-            </a:r>
-            <a:r>
-              <a:rPr lang="de-DE" dirty="0"/>
-              <a:t>) mutual </a:t>
-            </a:r>
-            <a:r>
-              <a:rPr lang="de-DE" dirty="0" err="1"/>
-              <a:t>information</a:t>
-            </a:r>
-            <a:r>
-              <a:rPr lang="de-DE" dirty="0"/>
-              <a:t> score: …</a:t>
-            </a:r>
-          </a:p>
-        </p:txBody>
-      </p:sp>
+      <mc:AlternateContent xmlns:mc="http://schemas.openxmlformats.org/markup-compatibility/2006">
+        <mc:Choice xmlns:a14="http://schemas.microsoft.com/office/drawing/2010/main" Requires="a14">
+          <p:sp>
+            <p:nvSpPr>
+              <p:cNvPr id="3" name="Inhaltsplatzhalter 2">
+                <a:extLst>
+                  <a:ext uri="{FF2B5EF4-FFF2-40B4-BE49-F238E27FC236}">
+                    <a16:creationId xmlns:a16="http://schemas.microsoft.com/office/drawing/2014/main" id="{20B3396B-0F4D-E379-6688-1825F47C2F9E}"/>
+                  </a:ext>
+                </a:extLst>
+              </p:cNvPr>
+              <p:cNvSpPr>
+                <a:spLocks noGrp="1"/>
+              </p:cNvSpPr>
+              <p:nvPr>
+                <p:ph idx="1"/>
+              </p:nvPr>
+            </p:nvSpPr>
+            <p:spPr/>
+            <p:txBody>
+              <a:bodyPr>
+                <a:noAutofit/>
+              </a:bodyPr>
+              <a:lstStyle/>
+              <a:p>
+                <a:pPr marL="0" indent="0">
+                  <a:buNone/>
+                </a:pPr>
+                <a:r>
+                  <a:rPr lang="de-DE" sz="1800" dirty="0" err="1"/>
+                  <a:t>Compares</a:t>
+                </a:r>
+                <a:r>
+                  <a:rPr lang="de-DE" sz="1800" dirty="0"/>
+                  <a:t> </a:t>
+                </a:r>
+                <a:r>
+                  <a:rPr lang="de-DE" sz="1800" dirty="0" err="1"/>
+                  <a:t>how</a:t>
+                </a:r>
+                <a:r>
+                  <a:rPr lang="de-DE" sz="1800" dirty="0"/>
+                  <a:t> </a:t>
+                </a:r>
+                <a:r>
+                  <a:rPr lang="de-DE" sz="1800" dirty="0" err="1"/>
+                  <a:t>well</a:t>
+                </a:r>
+                <a:r>
+                  <a:rPr lang="de-DE" sz="1800" dirty="0"/>
+                  <a:t> a </a:t>
+                </a:r>
+                <a:r>
+                  <a:rPr lang="de-DE" sz="1800" dirty="0" err="1"/>
+                  <a:t>point</a:t>
+                </a:r>
+                <a:r>
+                  <a:rPr lang="de-DE" sz="1800" dirty="0"/>
+                  <a:t> </a:t>
+                </a:r>
+                <a:r>
+                  <a:rPr lang="de-DE" sz="1800" dirty="0" err="1"/>
+                  <a:t>fits</a:t>
+                </a:r>
+                <a:r>
+                  <a:rPr lang="de-DE" sz="1800" dirty="0"/>
+                  <a:t> in </a:t>
+                </a:r>
+                <a:r>
+                  <a:rPr lang="de-DE" sz="1800" dirty="0" err="1"/>
+                  <a:t>its</a:t>
+                </a:r>
+                <a:r>
+                  <a:rPr lang="de-DE" sz="1800" dirty="0"/>
+                  <a:t> own </a:t>
+                </a:r>
+                <a:r>
+                  <a:rPr lang="de-DE" sz="1800" dirty="0" err="1"/>
+                  <a:t>cluster</a:t>
+                </a:r>
+                <a:r>
+                  <a:rPr lang="de-DE" sz="1800" dirty="0"/>
+                  <a:t> vs. </a:t>
+                </a:r>
+                <a:r>
+                  <a:rPr lang="de-DE" sz="1800" dirty="0" err="1"/>
+                  <a:t>how</a:t>
+                </a:r>
+                <a:r>
+                  <a:rPr lang="de-DE" sz="1800" dirty="0"/>
+                  <a:t> </a:t>
+                </a:r>
+                <a:r>
+                  <a:rPr lang="de-DE" sz="1800" dirty="0" err="1"/>
+                  <a:t>well</a:t>
+                </a:r>
+                <a:r>
+                  <a:rPr lang="de-DE" sz="1800" dirty="0"/>
+                  <a:t> </a:t>
+                </a:r>
+                <a:r>
+                  <a:rPr lang="de-DE" sz="1800" dirty="0" err="1"/>
+                  <a:t>it</a:t>
+                </a:r>
+                <a:r>
+                  <a:rPr lang="de-DE" sz="1800" dirty="0"/>
+                  <a:t> </a:t>
+                </a:r>
+                <a:r>
+                  <a:rPr lang="de-DE" sz="1800" dirty="0" err="1"/>
+                  <a:t>would</a:t>
+                </a:r>
+                <a:r>
+                  <a:rPr lang="de-DE" sz="1800" dirty="0"/>
+                  <a:t> fit in </a:t>
+                </a:r>
+                <a:r>
+                  <a:rPr lang="de-DE" sz="1800" dirty="0" err="1"/>
+                  <a:t>the</a:t>
+                </a:r>
+                <a:r>
+                  <a:rPr lang="de-DE" sz="1800" dirty="0"/>
+                  <a:t> </a:t>
+                </a:r>
+                <a:r>
+                  <a:rPr lang="de-DE" sz="1800" dirty="0" err="1"/>
+                  <a:t>next</a:t>
+                </a:r>
+                <a:r>
+                  <a:rPr lang="de-DE" sz="1800" dirty="0"/>
+                  <a:t> </a:t>
+                </a:r>
+                <a:r>
+                  <a:rPr lang="de-DE" sz="1800" dirty="0" err="1"/>
+                  <a:t>best</a:t>
+                </a:r>
+                <a:r>
+                  <a:rPr lang="de-DE" sz="1800" dirty="0"/>
+                  <a:t> </a:t>
+                </a:r>
+                <a:r>
+                  <a:rPr lang="de-DE" sz="1800" dirty="0" err="1"/>
+                  <a:t>cluster</a:t>
+                </a:r>
+                <a:endParaRPr lang="de-DE" sz="1800" dirty="0"/>
+              </a:p>
+              <a:p>
+                <a:pPr marL="0" indent="0">
+                  <a:buNone/>
+                </a:pPr>
+                <a:endParaRPr lang="de-DE" sz="1800" dirty="0"/>
+              </a:p>
+              <a:p>
+                <a:pPr marL="0" indent="0">
+                  <a:buNone/>
+                </a:pPr>
+                <a:r>
+                  <a:rPr lang="de-DE" sz="1800" dirty="0"/>
+                  <a:t>Silhouette score = </a:t>
+                </a:r>
+                <a:r>
+                  <a:rPr lang="de-DE" sz="1800" dirty="0" err="1"/>
+                  <a:t>mean</a:t>
+                </a:r>
+                <a:r>
+                  <a:rPr lang="de-DE" sz="1800" dirty="0"/>
+                  <a:t> Silhouette </a:t>
+                </a:r>
+                <a:r>
+                  <a:rPr lang="de-DE" sz="1800" dirty="0" err="1"/>
+                  <a:t>coefficient</a:t>
+                </a:r>
+                <a:r>
+                  <a:rPr lang="de-DE" sz="1800" dirty="0"/>
+                  <a:t> </a:t>
+                </a:r>
+                <a:r>
+                  <a:rPr lang="de-DE" sz="1800" dirty="0" err="1"/>
+                  <a:t>over</a:t>
+                </a:r>
+                <a:r>
+                  <a:rPr lang="de-DE" sz="1800" dirty="0"/>
+                  <a:t> all </a:t>
+                </a:r>
+                <a:r>
+                  <a:rPr lang="de-DE" sz="1800" dirty="0" err="1"/>
+                  <a:t>samples</a:t>
+                </a:r>
+                <a:endParaRPr lang="de-DE" sz="1800" dirty="0"/>
+              </a:p>
+              <a:p>
+                <a:pPr marL="0" indent="0">
+                  <a:buNone/>
+                </a:pPr>
+                <a:r>
+                  <a:rPr lang="de-DE" sz="1800" dirty="0"/>
+                  <a:t>Silhouette </a:t>
+                </a:r>
+                <a:r>
+                  <a:rPr lang="de-DE" sz="1800" dirty="0" err="1"/>
+                  <a:t>coefficient</a:t>
+                </a:r>
+                <a:r>
+                  <a:rPr lang="de-DE" sz="1800" dirty="0"/>
+                  <a:t> </a:t>
+                </a:r>
+                <a:r>
+                  <a:rPr lang="de-DE" sz="1800" dirty="0" err="1"/>
+                  <a:t>for</a:t>
+                </a:r>
+                <a:r>
+                  <a:rPr lang="de-DE" sz="1800" dirty="0"/>
+                  <a:t> a sample: </a:t>
+                </a:r>
+                <a14:m>
+                  <m:oMath xmlns:m="http://schemas.openxmlformats.org/officeDocument/2006/math">
+                    <m:f>
+                      <m:fPr>
+                        <m:type m:val="lin"/>
+                        <m:ctrlPr>
+                          <a:rPr lang="de-DE" sz="1800" i="1" smtClean="0">
+                            <a:latin typeface="Cambria Math" panose="02040503050406030204" pitchFamily="18" charset="0"/>
+                          </a:rPr>
+                        </m:ctrlPr>
+                      </m:fPr>
+                      <m:num>
+                        <m:d>
+                          <m:dPr>
+                            <m:ctrlPr>
+                              <a:rPr lang="de-DE" sz="1800" i="1" smtClean="0">
+                                <a:latin typeface="Cambria Math" panose="02040503050406030204" pitchFamily="18" charset="0"/>
+                              </a:rPr>
+                            </m:ctrlPr>
+                          </m:dPr>
+                          <m:e>
+                            <m:r>
+                              <a:rPr lang="de-DE" sz="1800" b="0" i="1" smtClean="0">
+                                <a:latin typeface="Cambria Math" panose="02040503050406030204" pitchFamily="18" charset="0"/>
+                              </a:rPr>
+                              <m:t>𝑏</m:t>
+                            </m:r>
+                            <m:r>
+                              <a:rPr lang="de-DE" sz="1800" b="0" i="1" smtClean="0">
+                                <a:latin typeface="Cambria Math" panose="02040503050406030204" pitchFamily="18" charset="0"/>
+                              </a:rPr>
+                              <m:t>−</m:t>
+                            </m:r>
+                            <m:r>
+                              <a:rPr lang="de-DE" sz="1800" b="0" i="1" smtClean="0">
+                                <a:latin typeface="Cambria Math" panose="02040503050406030204" pitchFamily="18" charset="0"/>
+                              </a:rPr>
+                              <m:t>𝑎</m:t>
+                            </m:r>
+                          </m:e>
+                        </m:d>
+                      </m:num>
+                      <m:den>
+                        <m:func>
+                          <m:funcPr>
+                            <m:ctrlPr>
+                              <a:rPr lang="de-DE" sz="1800" i="1" smtClean="0">
+                                <a:latin typeface="Cambria Math" panose="02040503050406030204" pitchFamily="18" charset="0"/>
+                              </a:rPr>
+                            </m:ctrlPr>
+                          </m:funcPr>
+                          <m:fName>
+                            <m:r>
+                              <m:rPr>
+                                <m:sty m:val="p"/>
+                              </m:rPr>
+                              <a:rPr lang="de-DE" sz="1800" b="0" i="0" smtClean="0">
+                                <a:latin typeface="Cambria Math" panose="02040503050406030204" pitchFamily="18" charset="0"/>
+                              </a:rPr>
+                              <m:t>max</m:t>
+                            </m:r>
+                          </m:fName>
+                          <m:e>
+                            <m:d>
+                              <m:dPr>
+                                <m:ctrlPr>
+                                  <a:rPr lang="de-DE" sz="1800" i="1" smtClean="0">
+                                    <a:latin typeface="Cambria Math" panose="02040503050406030204" pitchFamily="18" charset="0"/>
+                                  </a:rPr>
+                                </m:ctrlPr>
+                              </m:dPr>
+                              <m:e>
+                                <m:r>
+                                  <a:rPr lang="de-DE" sz="1800" b="0" i="1" smtClean="0">
+                                    <a:latin typeface="Cambria Math" panose="02040503050406030204" pitchFamily="18" charset="0"/>
+                                  </a:rPr>
+                                  <m:t>𝑎</m:t>
+                                </m:r>
+                                <m:r>
+                                  <a:rPr lang="de-DE" sz="1800" b="0" i="1" smtClean="0">
+                                    <a:latin typeface="Cambria Math" panose="02040503050406030204" pitchFamily="18" charset="0"/>
+                                  </a:rPr>
+                                  <m:t>,</m:t>
+                                </m:r>
+                                <m:r>
+                                  <a:rPr lang="de-DE" sz="1800" b="0" i="1" smtClean="0">
+                                    <a:latin typeface="Cambria Math" panose="02040503050406030204" pitchFamily="18" charset="0"/>
+                                  </a:rPr>
+                                  <m:t>𝑏</m:t>
+                                </m:r>
+                              </m:e>
+                            </m:d>
+                          </m:e>
+                        </m:func>
+                      </m:den>
+                    </m:f>
+                  </m:oMath>
+                </a14:m>
+                <a:endParaRPr lang="de-DE" sz="1800" dirty="0"/>
+              </a:p>
+              <a:p>
+                <a:pPr marL="0" indent="0">
+                  <a:buNone/>
+                </a:pPr>
+                <a14:m>
+                  <m:oMath xmlns:m="http://schemas.openxmlformats.org/officeDocument/2006/math">
+                    <m:r>
+                      <a:rPr lang="de-DE" sz="1800" i="1">
+                        <a:latin typeface="Cambria Math" panose="02040503050406030204" pitchFamily="18" charset="0"/>
+                      </a:rPr>
+                      <m:t>𝑎</m:t>
+                    </m:r>
+                  </m:oMath>
+                </a14:m>
+                <a:r>
+                  <a:rPr lang="de-DE" sz="1800" dirty="0"/>
+                  <a:t>: </a:t>
+                </a:r>
+                <a:r>
+                  <a:rPr lang="de-DE" sz="1800" dirty="0" err="1"/>
+                  <a:t>average</a:t>
+                </a:r>
+                <a:r>
+                  <a:rPr lang="de-DE" sz="1800" dirty="0"/>
+                  <a:t> </a:t>
+                </a:r>
+                <a:r>
+                  <a:rPr lang="de-DE" sz="1800" dirty="0" err="1"/>
+                  <a:t>distance</a:t>
+                </a:r>
+                <a:r>
+                  <a:rPr lang="de-DE" sz="1800" dirty="0"/>
+                  <a:t> </a:t>
+                </a:r>
+                <a:r>
+                  <a:rPr lang="de-DE" sz="1800" dirty="0" err="1"/>
+                  <a:t>from</a:t>
+                </a:r>
+                <a:r>
+                  <a:rPr lang="de-DE" sz="1800" dirty="0"/>
+                  <a:t> </a:t>
+                </a:r>
+                <a:r>
+                  <a:rPr lang="de-DE" sz="1800" dirty="0" err="1"/>
+                  <a:t>the</a:t>
+                </a:r>
+                <a:r>
+                  <a:rPr lang="de-DE" sz="1800" dirty="0"/>
+                  <a:t> sample </a:t>
+                </a:r>
+                <a:r>
+                  <a:rPr lang="de-DE" sz="1800" dirty="0" err="1"/>
+                  <a:t>to</a:t>
+                </a:r>
+                <a:r>
+                  <a:rPr lang="de-DE" sz="1800" dirty="0"/>
+                  <a:t> all </a:t>
+                </a:r>
+                <a:r>
+                  <a:rPr lang="de-DE" sz="1800" dirty="0" err="1"/>
+                  <a:t>other</a:t>
+                </a:r>
+                <a:r>
+                  <a:rPr lang="de-DE" sz="1800" dirty="0"/>
+                  <a:t> </a:t>
+                </a:r>
+                <a:r>
+                  <a:rPr lang="de-DE" sz="1800" dirty="0" err="1"/>
+                  <a:t>points</a:t>
+                </a:r>
+                <a:r>
+                  <a:rPr lang="de-DE" sz="1800" dirty="0"/>
+                  <a:t> in </a:t>
+                </a:r>
+                <a:r>
+                  <a:rPr lang="de-DE" sz="1800" dirty="0" err="1"/>
+                  <a:t>the</a:t>
+                </a:r>
+                <a:r>
+                  <a:rPr lang="de-DE" sz="1800" dirty="0"/>
+                  <a:t> same </a:t>
+                </a:r>
+                <a:r>
+                  <a:rPr lang="de-DE" sz="1800" dirty="0" err="1"/>
+                  <a:t>cluster</a:t>
+                </a:r>
+                <a:r>
+                  <a:rPr lang="de-DE" sz="1800" dirty="0"/>
+                  <a:t> (intra-cluster </a:t>
+                </a:r>
+                <a:r>
+                  <a:rPr lang="de-DE" sz="1800" dirty="0" err="1"/>
+                  <a:t>distance</a:t>
+                </a:r>
+                <a:r>
+                  <a:rPr lang="de-DE" sz="1800" dirty="0"/>
+                  <a:t>)</a:t>
+                </a:r>
+              </a:p>
+              <a:p>
+                <a:pPr marL="0" indent="0">
+                  <a:buNone/>
+                </a:pPr>
+                <a14:m>
+                  <m:oMath xmlns:m="http://schemas.openxmlformats.org/officeDocument/2006/math">
+                    <m:r>
+                      <a:rPr lang="de-DE" sz="1800" i="1">
+                        <a:latin typeface="Cambria Math" panose="02040503050406030204" pitchFamily="18" charset="0"/>
+                      </a:rPr>
+                      <m:t>𝑏</m:t>
+                    </m:r>
+                  </m:oMath>
+                </a14:m>
+                <a:r>
+                  <a:rPr lang="de-DE" sz="1800" dirty="0"/>
+                  <a:t>: </a:t>
+                </a:r>
+                <a:r>
+                  <a:rPr lang="de-DE" sz="1800" dirty="0" err="1"/>
+                  <a:t>lowest</a:t>
+                </a:r>
+                <a:r>
+                  <a:rPr lang="de-DE" sz="1800" dirty="0"/>
+                  <a:t> </a:t>
+                </a:r>
+                <a:r>
+                  <a:rPr lang="de-DE" sz="1800" dirty="0" err="1"/>
+                  <a:t>average</a:t>
+                </a:r>
+                <a:r>
+                  <a:rPr lang="de-DE" sz="1800" dirty="0"/>
+                  <a:t> </a:t>
+                </a:r>
+                <a:r>
+                  <a:rPr lang="de-DE" sz="1800" dirty="0" err="1"/>
+                  <a:t>distance</a:t>
+                </a:r>
+                <a:r>
+                  <a:rPr lang="de-DE" sz="1800" dirty="0"/>
+                  <a:t> </a:t>
+                </a:r>
+                <a:r>
+                  <a:rPr lang="de-DE" sz="1800" dirty="0" err="1"/>
+                  <a:t>from</a:t>
+                </a:r>
+                <a:r>
+                  <a:rPr lang="de-DE" sz="1800" dirty="0"/>
+                  <a:t> </a:t>
+                </a:r>
+                <a:r>
+                  <a:rPr lang="de-DE" sz="1800" dirty="0" err="1"/>
+                  <a:t>the</a:t>
+                </a:r>
+                <a:r>
+                  <a:rPr lang="de-DE" sz="1800" dirty="0"/>
+                  <a:t> sample </a:t>
+                </a:r>
+                <a:r>
+                  <a:rPr lang="de-DE" sz="1800" dirty="0" err="1"/>
+                  <a:t>to</a:t>
+                </a:r>
+                <a:r>
+                  <a:rPr lang="de-DE" sz="1800" dirty="0"/>
+                  <a:t> all </a:t>
+                </a:r>
+                <a:r>
+                  <a:rPr lang="de-DE" sz="1800" dirty="0" err="1"/>
+                  <a:t>points</a:t>
+                </a:r>
+                <a:r>
+                  <a:rPr lang="de-DE" sz="1800" dirty="0"/>
+                  <a:t> in </a:t>
+                </a:r>
+                <a:r>
+                  <a:rPr lang="de-DE" sz="1800" dirty="0" err="1"/>
+                  <a:t>another</a:t>
+                </a:r>
+                <a:r>
+                  <a:rPr lang="de-DE" sz="1800" dirty="0"/>
+                  <a:t> </a:t>
+                </a:r>
+                <a:r>
+                  <a:rPr lang="de-DE" sz="1800" dirty="0" err="1"/>
+                  <a:t>cluster</a:t>
+                </a:r>
+                <a:r>
+                  <a:rPr lang="de-DE" sz="1800" dirty="0"/>
+                  <a:t> (</a:t>
+                </a:r>
+                <a:r>
+                  <a:rPr lang="de-DE" sz="1800" dirty="0" err="1"/>
+                  <a:t>nearest</a:t>
+                </a:r>
+                <a:r>
+                  <a:rPr lang="de-DE" sz="1800" dirty="0"/>
+                  <a:t> </a:t>
+                </a:r>
+                <a:r>
+                  <a:rPr lang="de-DE" sz="1800" dirty="0" err="1"/>
+                  <a:t>other</a:t>
+                </a:r>
+                <a:r>
+                  <a:rPr lang="de-DE" sz="1800" dirty="0"/>
+                  <a:t> </a:t>
+                </a:r>
+                <a:r>
+                  <a:rPr lang="de-DE" sz="1800" dirty="0" err="1"/>
+                  <a:t>cluster</a:t>
+                </a:r>
+                <a:r>
+                  <a:rPr lang="de-DE" sz="1800" dirty="0"/>
+                  <a:t>)</a:t>
+                </a:r>
+              </a:p>
+              <a:p>
+                <a:pPr marL="0" indent="0">
+                  <a:buNone/>
+                </a:pPr>
+                <a:endParaRPr lang="de-DE" sz="1800" dirty="0"/>
+              </a:p>
+              <a:p>
+                <a:pPr marL="0" indent="0">
+                  <a:buNone/>
+                </a:pPr>
+                <a:r>
+                  <a:rPr lang="de-DE" sz="1800" dirty="0"/>
+                  <a:t>Score </a:t>
+                </a:r>
+                <a:r>
+                  <a:rPr lang="de-DE" sz="1800" dirty="0" err="1"/>
+                  <a:t>ranges</a:t>
+                </a:r>
+                <a:r>
+                  <a:rPr lang="de-DE" sz="1800" dirty="0"/>
+                  <a:t> </a:t>
+                </a:r>
+                <a:r>
+                  <a:rPr lang="de-DE" sz="1800" dirty="0" err="1"/>
+                  <a:t>from</a:t>
+                </a:r>
+                <a:r>
+                  <a:rPr lang="de-DE" sz="1800" dirty="0"/>
+                  <a:t> -1 </a:t>
+                </a:r>
+                <a:r>
+                  <a:rPr lang="de-DE" sz="1800" dirty="0" err="1"/>
+                  <a:t>to</a:t>
+                </a:r>
+                <a:r>
+                  <a:rPr lang="de-DE" sz="1800" dirty="0"/>
+                  <a:t> 1</a:t>
+                </a:r>
+              </a:p>
+              <a:p>
+                <a:r>
+                  <a:rPr lang="de-DE" sz="1800" dirty="0"/>
+                  <a:t>Close </a:t>
+                </a:r>
+                <a:r>
+                  <a:rPr lang="de-DE" sz="1800" dirty="0" err="1"/>
+                  <a:t>to</a:t>
+                </a:r>
+                <a:r>
+                  <a:rPr lang="de-DE" sz="1800" dirty="0"/>
+                  <a:t> 1: well-</a:t>
+                </a:r>
+                <a:r>
+                  <a:rPr lang="de-DE" sz="1800" dirty="0" err="1"/>
+                  <a:t>separated</a:t>
+                </a:r>
+                <a:r>
+                  <a:rPr lang="de-DE" sz="1800" dirty="0"/>
+                  <a:t> </a:t>
+                </a:r>
+                <a:r>
+                  <a:rPr lang="de-DE" sz="1800" dirty="0" err="1"/>
+                  <a:t>clusters</a:t>
+                </a:r>
+                <a:endParaRPr lang="de-DE" sz="1800" dirty="0"/>
+              </a:p>
+              <a:p>
+                <a:r>
+                  <a:rPr lang="de-DE" sz="1800" dirty="0" err="1"/>
+                  <a:t>Around</a:t>
+                </a:r>
+                <a:r>
+                  <a:rPr lang="de-DE" sz="1800" dirty="0"/>
+                  <a:t> 0: </a:t>
+                </a:r>
+                <a:r>
+                  <a:rPr lang="de-DE" sz="1800" dirty="0" err="1"/>
+                  <a:t>overlapping</a:t>
+                </a:r>
+                <a:r>
+                  <a:rPr lang="de-DE" sz="1800" dirty="0"/>
+                  <a:t> </a:t>
+                </a:r>
+                <a:r>
+                  <a:rPr lang="de-DE" sz="1800" dirty="0" err="1"/>
+                  <a:t>clusters</a:t>
+                </a:r>
+                <a:endParaRPr lang="de-DE" sz="1800" dirty="0"/>
+              </a:p>
+              <a:p>
+                <a:r>
+                  <a:rPr lang="de-DE" sz="1800" dirty="0"/>
+                  <a:t>Negative: </a:t>
+                </a:r>
+                <a:r>
+                  <a:rPr lang="de-DE" sz="1800" dirty="0" err="1"/>
+                  <a:t>wrong</a:t>
+                </a:r>
+                <a:r>
+                  <a:rPr lang="de-DE" sz="1800" dirty="0"/>
+                  <a:t> </a:t>
+                </a:r>
+                <a:r>
+                  <a:rPr lang="de-DE" sz="1800" dirty="0" err="1"/>
+                  <a:t>assignments</a:t>
+                </a:r>
+                <a:endParaRPr lang="de-DE" sz="1800" dirty="0"/>
+              </a:p>
+            </p:txBody>
+          </p:sp>
+        </mc:Choice>
+        <mc:Fallback>
+          <p:sp>
+            <p:nvSpPr>
+              <p:cNvPr id="3" name="Inhaltsplatzhalter 2">
+                <a:extLst>
+                  <a:ext uri="{FF2B5EF4-FFF2-40B4-BE49-F238E27FC236}">
+                    <a16:creationId xmlns:a16="http://schemas.microsoft.com/office/drawing/2014/main" id="{20B3396B-0F4D-E379-6688-1825F47C2F9E}"/>
+                  </a:ext>
+                </a:extLst>
+              </p:cNvPr>
+              <p:cNvSpPr>
+                <a:spLocks noGrp="1" noRot="1" noChangeAspect="1" noMove="1" noResize="1" noEditPoints="1" noAdjustHandles="1" noChangeArrowheads="1" noChangeShapeType="1" noTextEdit="1"/>
+              </p:cNvSpPr>
+              <p:nvPr>
+                <p:ph idx="1"/>
+              </p:nvPr>
+            </p:nvSpPr>
+            <p:spPr>
+              <a:blipFill>
+                <a:blip r:embed="rId2"/>
+                <a:stretch>
+                  <a:fillRect l="-603" t="-1163"/>
+                </a:stretch>
+              </a:blipFill>
+            </p:spPr>
+            <p:txBody>
+              <a:bodyPr/>
+              <a:lstStyle/>
+              <a:p>
+                <a:r>
+                  <a:rPr lang="de-DE">
+                    <a:noFill/>
+                  </a:rPr>
+                  <a:t> </a:t>
+                </a:r>
+              </a:p>
+            </p:txBody>
+          </p:sp>
+        </mc:Fallback>
+      </mc:AlternateContent>
       <p:sp>
         <p:nvSpPr>
           <p:cNvPr id="4" name="Foliennummernplatzhalter 3">
             <a:extLst>
               <a:ext uri="{FF2B5EF4-FFF2-40B4-BE49-F238E27FC236}">
-                <a16:creationId xmlns:a16="http://schemas.microsoft.com/office/drawing/2014/main" id="{701A4EA1-06DA-F940-1383-630B8622B38F}"/>
+                <a16:creationId xmlns:a16="http://schemas.microsoft.com/office/drawing/2014/main" id="{5AF17BED-567A-F135-F979-7F17529C4742}"/>
               </a:ext>
             </a:extLst>
           </p:cNvPr>
@@ -9086,7 +10779,7 @@
     </p:spTree>
     <p:extLst>
       <p:ext uri="{BB962C8B-B14F-4D97-AF65-F5344CB8AC3E}">
-        <p14:creationId xmlns:p14="http://schemas.microsoft.com/office/powerpoint/2010/main" val="2860005827"/>
+        <p14:creationId xmlns:p14="http://schemas.microsoft.com/office/powerpoint/2010/main" val="3536884331"/>
       </p:ext>
     </p:extLst>
   </p:cSld>
@@ -9427,7 +11120,7 @@
           <p:cNvPr id="2" name="Titel 1">
             <a:extLst>
               <a:ext uri="{FF2B5EF4-FFF2-40B4-BE49-F238E27FC236}">
-                <a16:creationId xmlns:a16="http://schemas.microsoft.com/office/drawing/2014/main" id="{AE45E519-E948-8501-ACAD-BDF00444DFDC}"/>
+                <a16:creationId xmlns:a16="http://schemas.microsoft.com/office/drawing/2014/main" id="{0BB459EB-FAE8-31DC-E38F-3046EC588CF6}"/>
               </a:ext>
             </a:extLst>
           </p:cNvPr>
@@ -9444,23 +11137,22 @@
           <a:lstStyle/>
           <a:p>
             <a:r>
-              <a:rPr lang="de-DE" dirty="0"/>
-              <a:t>Mini Batch </a:t>
-            </a:r>
-            <a:r>
-              <a:rPr lang="de-DE" dirty="0" err="1"/>
-              <a:t>k-Means</a:t>
-            </a:r>
-            <a:endParaRPr lang="de-DE" dirty="0"/>
+              <a:rPr lang="de-DE" dirty="0" err="1"/>
+              <a:t>Supervised</a:t>
+            </a:r>
+            <a:r>
+              <a:rPr lang="de-DE" dirty="0"/>
+              <a:t> Clustering Validation</a:t>
+            </a:r>
           </a:p>
         </p:txBody>
       </p:sp>
       <p:sp>
         <p:nvSpPr>
-          <p:cNvPr id="4" name="Inhaltsplatzhalter 3">
+          <p:cNvPr id="3" name="Inhaltsplatzhalter 2">
             <a:extLst>
               <a:ext uri="{FF2B5EF4-FFF2-40B4-BE49-F238E27FC236}">
-                <a16:creationId xmlns:a16="http://schemas.microsoft.com/office/drawing/2014/main" id="{DAA8C059-BF98-DA76-D11E-B2885769186E}"/>
+                <a16:creationId xmlns:a16="http://schemas.microsoft.com/office/drawing/2014/main" id="{392427C8-4330-BC0E-F7FF-95DB2D9863DA}"/>
               </a:ext>
             </a:extLst>
           </p:cNvPr>
@@ -9473,19 +11165,629 @@
         </p:nvSpPr>
         <p:spPr/>
         <p:txBody>
-          <a:bodyPr/>
+          <a:bodyPr>
+            <a:normAutofit fontScale="85000" lnSpcReduction="10000"/>
+          </a:bodyPr>
           <a:lstStyle/>
           <a:p>
-            <a:endParaRPr lang="de-DE"/>
+            <a:pPr marL="0" indent="0">
+              <a:buNone/>
+            </a:pPr>
+            <a:r>
+              <a:rPr lang="de-DE" dirty="0"/>
+              <a:t>External </a:t>
+            </a:r>
+            <a:r>
+              <a:rPr lang="de-DE" dirty="0" err="1"/>
+              <a:t>validation</a:t>
+            </a:r>
+            <a:r>
+              <a:rPr lang="de-DE" dirty="0"/>
+              <a:t>: </a:t>
+            </a:r>
+            <a:r>
+              <a:rPr lang="de-DE" dirty="0" err="1"/>
+              <a:t>used</a:t>
+            </a:r>
+            <a:r>
+              <a:rPr lang="de-DE" dirty="0"/>
+              <a:t> </a:t>
+            </a:r>
+            <a:r>
+              <a:rPr lang="de-DE" dirty="0" err="1"/>
+              <a:t>when</a:t>
+            </a:r>
+            <a:r>
+              <a:rPr lang="de-DE" dirty="0"/>
+              <a:t> </a:t>
+            </a:r>
+            <a:r>
+              <a:rPr lang="de-DE" dirty="0" err="1"/>
+              <a:t>you</a:t>
+            </a:r>
+            <a:r>
+              <a:rPr lang="de-DE" dirty="0"/>
+              <a:t> </a:t>
+            </a:r>
+            <a:r>
+              <a:rPr lang="de-DE" dirty="0" err="1"/>
+              <a:t>already</a:t>
+            </a:r>
+            <a:r>
+              <a:rPr lang="de-DE" dirty="0"/>
+              <a:t> </a:t>
+            </a:r>
+            <a:r>
+              <a:rPr lang="de-DE" dirty="0" err="1"/>
+              <a:t>have</a:t>
+            </a:r>
+            <a:r>
+              <a:rPr lang="de-DE" dirty="0"/>
+              <a:t> </a:t>
+            </a:r>
+            <a:r>
+              <a:rPr lang="de-DE" dirty="0" err="1"/>
+              <a:t>ground-truth</a:t>
+            </a:r>
+            <a:r>
+              <a:rPr lang="de-DE" dirty="0"/>
+              <a:t> </a:t>
+            </a:r>
+            <a:r>
+              <a:rPr lang="de-DE" dirty="0" err="1"/>
+              <a:t>labels</a:t>
+            </a:r>
+            <a:r>
+              <a:rPr lang="de-DE" dirty="0"/>
+              <a:t> and </a:t>
+            </a:r>
+            <a:r>
+              <a:rPr lang="de-DE" dirty="0" err="1"/>
+              <a:t>want</a:t>
+            </a:r>
+            <a:r>
+              <a:rPr lang="de-DE" dirty="0"/>
+              <a:t> </a:t>
+            </a:r>
+            <a:r>
+              <a:rPr lang="de-DE" dirty="0" err="1"/>
+              <a:t>to</a:t>
+            </a:r>
+            <a:r>
+              <a:rPr lang="de-DE" dirty="0"/>
+              <a:t> </a:t>
+            </a:r>
+            <a:r>
+              <a:rPr lang="de-DE" dirty="0" err="1"/>
+              <a:t>evaluate</a:t>
+            </a:r>
+            <a:r>
+              <a:rPr lang="de-DE" dirty="0"/>
+              <a:t> </a:t>
+            </a:r>
+            <a:r>
+              <a:rPr lang="de-DE" dirty="0" err="1"/>
+              <a:t>how</a:t>
+            </a:r>
+            <a:r>
+              <a:rPr lang="de-DE" dirty="0"/>
+              <a:t> </a:t>
+            </a:r>
+            <a:r>
+              <a:rPr lang="de-DE" dirty="0" err="1"/>
+              <a:t>well</a:t>
+            </a:r>
+            <a:r>
+              <a:rPr lang="de-DE" dirty="0"/>
+              <a:t> a </a:t>
+            </a:r>
+            <a:r>
+              <a:rPr lang="de-DE" dirty="0" err="1"/>
+              <a:t>clustering</a:t>
+            </a:r>
+            <a:r>
+              <a:rPr lang="de-DE" dirty="0"/>
+              <a:t> </a:t>
+            </a:r>
+            <a:r>
+              <a:rPr lang="de-DE" dirty="0" err="1"/>
+              <a:t>matches</a:t>
+            </a:r>
+            <a:r>
+              <a:rPr lang="de-DE" dirty="0"/>
+              <a:t> </a:t>
+            </a:r>
+            <a:r>
+              <a:rPr lang="de-DE" dirty="0" err="1"/>
+              <a:t>the</a:t>
+            </a:r>
+            <a:r>
+              <a:rPr lang="de-DE" dirty="0"/>
+              <a:t> “</a:t>
+            </a:r>
+            <a:r>
+              <a:rPr lang="de-DE" dirty="0" err="1"/>
+              <a:t>true</a:t>
+            </a:r>
+            <a:r>
+              <a:rPr lang="de-DE" dirty="0"/>
+              <a:t>” </a:t>
+            </a:r>
+            <a:r>
+              <a:rPr lang="de-DE" dirty="0" err="1"/>
+              <a:t>grouping</a:t>
+            </a:r>
+            <a:endParaRPr lang="de-DE" dirty="0"/>
+          </a:p>
+          <a:p>
+            <a:pPr marL="0" indent="0">
+              <a:buNone/>
+            </a:pPr>
+            <a:r>
+              <a:rPr lang="de-DE" dirty="0">
+                <a:sym typeface="Wingdings" pitchFamily="2" charset="2"/>
+              </a:rPr>
+              <a:t> </a:t>
+            </a:r>
+            <a:r>
+              <a:rPr lang="de-DE" dirty="0" err="1">
+                <a:sym typeface="Wingdings" pitchFamily="2" charset="2"/>
+              </a:rPr>
+              <a:t>Evaluates</a:t>
+            </a:r>
+            <a:r>
+              <a:rPr lang="de-DE" dirty="0">
+                <a:sym typeface="Wingdings" pitchFamily="2" charset="2"/>
+              </a:rPr>
+              <a:t> </a:t>
+            </a:r>
+            <a:r>
+              <a:rPr lang="de-DE" dirty="0" err="1">
+                <a:sym typeface="Wingdings" pitchFamily="2" charset="2"/>
+              </a:rPr>
+              <a:t>correctness</a:t>
+            </a:r>
+            <a:r>
+              <a:rPr lang="de-DE" dirty="0">
+                <a:sym typeface="Wingdings" pitchFamily="2" charset="2"/>
+              </a:rPr>
+              <a:t>, not just </a:t>
+            </a:r>
+            <a:r>
+              <a:rPr lang="de-DE" dirty="0" err="1">
+                <a:sym typeface="Wingdings" pitchFamily="2" charset="2"/>
+              </a:rPr>
+              <a:t>structure</a:t>
+            </a:r>
+            <a:endParaRPr lang="de-DE" dirty="0"/>
+          </a:p>
+          <a:p>
+            <a:pPr marL="0" indent="0">
+              <a:buNone/>
+            </a:pPr>
+            <a:endParaRPr lang="de-DE" dirty="0"/>
+          </a:p>
+          <a:p>
+            <a:r>
+              <a:rPr lang="de-DE" dirty="0" err="1"/>
+              <a:t>Adjusted</a:t>
+            </a:r>
+            <a:r>
+              <a:rPr lang="de-DE" dirty="0"/>
+              <a:t> Rand </a:t>
+            </a:r>
+            <a:r>
+              <a:rPr lang="de-DE" dirty="0" err="1"/>
+              <a:t>index</a:t>
+            </a:r>
+            <a:r>
+              <a:rPr lang="de-DE" dirty="0"/>
+              <a:t>: </a:t>
+            </a:r>
+            <a:r>
+              <a:rPr lang="de-DE" dirty="0" err="1"/>
+              <a:t>counting</a:t>
+            </a:r>
+            <a:r>
+              <a:rPr lang="de-DE" dirty="0"/>
+              <a:t> </a:t>
+            </a:r>
+            <a:r>
+              <a:rPr lang="de-DE" dirty="0" err="1"/>
+              <a:t>pairs</a:t>
+            </a:r>
+            <a:r>
+              <a:rPr lang="de-DE" dirty="0"/>
+              <a:t> </a:t>
+            </a:r>
+            <a:r>
+              <a:rPr lang="de-DE" dirty="0" err="1"/>
+              <a:t>that</a:t>
+            </a:r>
+            <a:r>
+              <a:rPr lang="de-DE" dirty="0"/>
+              <a:t> </a:t>
+            </a:r>
+            <a:r>
+              <a:rPr lang="de-DE" dirty="0" err="1"/>
+              <a:t>are</a:t>
+            </a:r>
+            <a:r>
+              <a:rPr lang="de-DE" dirty="0"/>
+              <a:t> </a:t>
+            </a:r>
+            <a:r>
+              <a:rPr lang="de-DE" dirty="0" err="1"/>
+              <a:t>assigned</a:t>
+            </a:r>
+            <a:r>
+              <a:rPr lang="de-DE" dirty="0"/>
+              <a:t> in </a:t>
+            </a:r>
+            <a:r>
+              <a:rPr lang="de-DE" dirty="0" err="1"/>
+              <a:t>the</a:t>
+            </a:r>
+            <a:r>
+              <a:rPr lang="de-DE" dirty="0"/>
+              <a:t> same </a:t>
+            </a:r>
+            <a:r>
+              <a:rPr lang="de-DE" dirty="0" err="1"/>
+              <a:t>or</a:t>
+            </a:r>
+            <a:r>
+              <a:rPr lang="de-DE" dirty="0"/>
+              <a:t> different </a:t>
+            </a:r>
+            <a:r>
+              <a:rPr lang="de-DE" dirty="0" err="1"/>
+              <a:t>clusters</a:t>
+            </a:r>
+            <a:r>
+              <a:rPr lang="de-DE" dirty="0"/>
+              <a:t> in </a:t>
+            </a:r>
+            <a:r>
+              <a:rPr lang="de-DE" dirty="0" err="1"/>
+              <a:t>the</a:t>
+            </a:r>
+            <a:r>
+              <a:rPr lang="de-DE" dirty="0"/>
+              <a:t> </a:t>
+            </a:r>
+            <a:r>
+              <a:rPr lang="de-DE" dirty="0" err="1"/>
+              <a:t>predicted</a:t>
+            </a:r>
+            <a:r>
+              <a:rPr lang="de-DE" dirty="0"/>
+              <a:t> and </a:t>
+            </a:r>
+            <a:r>
+              <a:rPr lang="de-DE" dirty="0" err="1"/>
+              <a:t>true</a:t>
+            </a:r>
+            <a:r>
+              <a:rPr lang="de-DE" dirty="0"/>
+              <a:t> </a:t>
+            </a:r>
+            <a:r>
+              <a:rPr lang="de-DE" dirty="0" err="1"/>
+              <a:t>clusterings</a:t>
+            </a:r>
+            <a:r>
+              <a:rPr lang="de-DE" dirty="0"/>
+              <a:t>, </a:t>
+            </a:r>
+            <a:r>
+              <a:rPr lang="de-DE" dirty="0" err="1"/>
+              <a:t>adjusted</a:t>
+            </a:r>
+            <a:r>
+              <a:rPr lang="de-DE" dirty="0"/>
+              <a:t> </a:t>
+            </a:r>
+            <a:r>
+              <a:rPr lang="de-DE" dirty="0" err="1"/>
+              <a:t>for</a:t>
+            </a:r>
+            <a:r>
+              <a:rPr lang="de-DE" dirty="0"/>
+              <a:t> </a:t>
+            </a:r>
+            <a:r>
+              <a:rPr lang="de-DE" dirty="0" err="1"/>
+              <a:t>chance</a:t>
+            </a:r>
+            <a:r>
+              <a:rPr lang="de-DE" dirty="0"/>
+              <a:t> (</a:t>
+            </a:r>
+            <a:r>
+              <a:rPr lang="de-DE" dirty="0" err="1"/>
+              <a:t>random</a:t>
+            </a:r>
+            <a:r>
+              <a:rPr lang="de-DE" dirty="0"/>
+              <a:t> </a:t>
+            </a:r>
+            <a:r>
+              <a:rPr lang="de-DE" dirty="0" err="1"/>
+              <a:t>clustering</a:t>
+            </a:r>
+            <a:r>
+              <a:rPr lang="de-DE" dirty="0"/>
+              <a:t>): </a:t>
+            </a:r>
+            <a:r>
+              <a:rPr lang="de-DE" dirty="0">
+                <a:latin typeface="Cambria Math" panose="02040503050406030204" pitchFamily="18" charset="0"/>
+                <a:ea typeface="Cambria Math" panose="02040503050406030204" pitchFamily="18" charset="0"/>
+              </a:rPr>
+              <a:t>ARI = (RI - </a:t>
+            </a:r>
+            <a:r>
+              <a:rPr lang="de-DE" dirty="0" err="1">
+                <a:latin typeface="Cambria Math" panose="02040503050406030204" pitchFamily="18" charset="0"/>
+                <a:ea typeface="Cambria Math" panose="02040503050406030204" pitchFamily="18" charset="0"/>
+              </a:rPr>
+              <a:t>Expected_RI</a:t>
+            </a:r>
+            <a:r>
+              <a:rPr lang="de-DE" dirty="0">
+                <a:latin typeface="Cambria Math" panose="02040503050406030204" pitchFamily="18" charset="0"/>
+                <a:ea typeface="Cambria Math" panose="02040503050406030204" pitchFamily="18" charset="0"/>
+              </a:rPr>
+              <a:t>) / (</a:t>
+            </a:r>
+            <a:r>
+              <a:rPr lang="de-DE" dirty="0" err="1">
+                <a:latin typeface="Cambria Math" panose="02040503050406030204" pitchFamily="18" charset="0"/>
+                <a:ea typeface="Cambria Math" panose="02040503050406030204" pitchFamily="18" charset="0"/>
+              </a:rPr>
+              <a:t>max</a:t>
+            </a:r>
+            <a:r>
+              <a:rPr lang="de-DE" dirty="0">
+                <a:latin typeface="Cambria Math" panose="02040503050406030204" pitchFamily="18" charset="0"/>
+                <a:ea typeface="Cambria Math" panose="02040503050406030204" pitchFamily="18" charset="0"/>
+              </a:rPr>
+              <a:t>(RI) - </a:t>
+            </a:r>
+            <a:r>
+              <a:rPr lang="de-DE" dirty="0" err="1">
+                <a:latin typeface="Cambria Math" panose="02040503050406030204" pitchFamily="18" charset="0"/>
+                <a:ea typeface="Cambria Math" panose="02040503050406030204" pitchFamily="18" charset="0"/>
+              </a:rPr>
+              <a:t>Expected_RI</a:t>
+            </a:r>
+            <a:r>
+              <a:rPr lang="de-DE" dirty="0">
+                <a:latin typeface="Cambria Math" panose="02040503050406030204" pitchFamily="18" charset="0"/>
+                <a:ea typeface="Cambria Math" panose="02040503050406030204" pitchFamily="18" charset="0"/>
+              </a:rPr>
+              <a:t>)</a:t>
+            </a:r>
+          </a:p>
+          <a:p>
+            <a:r>
+              <a:rPr lang="de-DE" dirty="0" err="1"/>
+              <a:t>Adjusted</a:t>
+            </a:r>
+            <a:r>
+              <a:rPr lang="de-DE" dirty="0"/>
+              <a:t> mutual </a:t>
+            </a:r>
+            <a:r>
+              <a:rPr lang="de-DE" dirty="0" err="1"/>
+              <a:t>information</a:t>
+            </a:r>
+            <a:endParaRPr lang="de-DE" dirty="0"/>
+          </a:p>
+          <a:p>
+            <a:r>
+              <a:rPr lang="de-DE" dirty="0" err="1"/>
+              <a:t>Homogeneity</a:t>
+            </a:r>
+            <a:r>
+              <a:rPr lang="de-DE" dirty="0"/>
+              <a:t>, </a:t>
+            </a:r>
+            <a:r>
+              <a:rPr lang="de-DE" dirty="0" err="1"/>
+              <a:t>completeness</a:t>
+            </a:r>
+            <a:r>
+              <a:rPr lang="de-DE" dirty="0"/>
+              <a:t>, and V-</a:t>
+            </a:r>
+            <a:r>
+              <a:rPr lang="de-DE" dirty="0" err="1"/>
+              <a:t>measure</a:t>
+            </a:r>
+            <a:r>
+              <a:rPr lang="de-DE" dirty="0"/>
+              <a:t> </a:t>
+            </a:r>
+            <a:r>
+              <a:rPr lang="de-DE" dirty="0" err="1"/>
+              <a:t>scores</a:t>
+            </a:r>
+            <a:endParaRPr lang="de-DE" dirty="0"/>
+          </a:p>
+          <a:p>
+            <a:pPr lvl="1"/>
+            <a:r>
+              <a:rPr lang="de-DE" dirty="0" err="1"/>
+              <a:t>homogeneity</a:t>
+            </a:r>
+            <a:r>
+              <a:rPr lang="de-DE" dirty="0"/>
+              <a:t>: </a:t>
+            </a:r>
+            <a:r>
+              <a:rPr lang="de-DE" dirty="0" err="1"/>
+              <a:t>each</a:t>
+            </a:r>
+            <a:r>
+              <a:rPr lang="de-DE" dirty="0"/>
+              <a:t> </a:t>
+            </a:r>
+            <a:r>
+              <a:rPr lang="de-DE" dirty="0" err="1"/>
+              <a:t>cluster</a:t>
+            </a:r>
+            <a:r>
+              <a:rPr lang="de-DE" dirty="0"/>
+              <a:t> </a:t>
+            </a:r>
+            <a:r>
+              <a:rPr lang="de-DE" dirty="0" err="1"/>
+              <a:t>contains</a:t>
+            </a:r>
+            <a:r>
+              <a:rPr lang="de-DE" dirty="0"/>
+              <a:t> </a:t>
+            </a:r>
+            <a:r>
+              <a:rPr lang="de-DE" dirty="0" err="1"/>
+              <a:t>only</a:t>
+            </a:r>
+            <a:r>
+              <a:rPr lang="de-DE" dirty="0"/>
+              <a:t> </a:t>
+            </a:r>
+            <a:r>
+              <a:rPr lang="de-DE" dirty="0" err="1"/>
+              <a:t>one</a:t>
+            </a:r>
+            <a:r>
+              <a:rPr lang="de-DE" dirty="0"/>
+              <a:t> </a:t>
+            </a:r>
+            <a:r>
+              <a:rPr lang="de-DE" dirty="0" err="1"/>
+              <a:t>class</a:t>
+            </a:r>
+            <a:endParaRPr lang="de-DE" dirty="0"/>
+          </a:p>
+          <a:p>
+            <a:pPr lvl="1"/>
+            <a:r>
+              <a:rPr lang="de-DE" dirty="0" err="1"/>
+              <a:t>completeness</a:t>
+            </a:r>
+            <a:r>
+              <a:rPr lang="de-DE" dirty="0"/>
+              <a:t>: all </a:t>
+            </a:r>
+            <a:r>
+              <a:rPr lang="de-DE" dirty="0" err="1"/>
+              <a:t>members</a:t>
+            </a:r>
+            <a:r>
+              <a:rPr lang="de-DE" dirty="0"/>
+              <a:t> </a:t>
+            </a:r>
+            <a:r>
+              <a:rPr lang="de-DE" dirty="0" err="1"/>
+              <a:t>of</a:t>
+            </a:r>
+            <a:r>
+              <a:rPr lang="de-DE" dirty="0"/>
+              <a:t> a </a:t>
+            </a:r>
+            <a:r>
+              <a:rPr lang="de-DE" dirty="0" err="1"/>
+              <a:t>class</a:t>
+            </a:r>
+            <a:r>
+              <a:rPr lang="de-DE" dirty="0"/>
+              <a:t> </a:t>
+            </a:r>
+            <a:r>
+              <a:rPr lang="de-DE" dirty="0" err="1"/>
+              <a:t>are</a:t>
+            </a:r>
+            <a:r>
+              <a:rPr lang="de-DE" dirty="0"/>
+              <a:t> in </a:t>
+            </a:r>
+            <a:r>
+              <a:rPr lang="de-DE" dirty="0" err="1"/>
+              <a:t>the</a:t>
+            </a:r>
+            <a:r>
+              <a:rPr lang="de-DE" dirty="0"/>
+              <a:t> same </a:t>
+            </a:r>
+            <a:r>
+              <a:rPr lang="de-DE" dirty="0" err="1"/>
+              <a:t>cluster</a:t>
+            </a:r>
+            <a:endParaRPr lang="de-DE" dirty="0"/>
+          </a:p>
+          <a:p>
+            <a:pPr lvl="1"/>
+            <a:r>
+              <a:rPr lang="de-DE" dirty="0"/>
+              <a:t>V-</a:t>
+            </a:r>
+            <a:r>
+              <a:rPr lang="de-DE" dirty="0" err="1"/>
+              <a:t>measure</a:t>
+            </a:r>
+            <a:r>
+              <a:rPr lang="de-DE" dirty="0"/>
+              <a:t>: </a:t>
+            </a:r>
+            <a:r>
+              <a:rPr lang="de-DE" dirty="0" err="1"/>
+              <a:t>harmonic</a:t>
+            </a:r>
+            <a:r>
+              <a:rPr lang="de-DE" dirty="0"/>
+              <a:t> </a:t>
+            </a:r>
+            <a:r>
+              <a:rPr lang="de-DE" dirty="0" err="1"/>
+              <a:t>mean</a:t>
+            </a:r>
+            <a:r>
+              <a:rPr lang="de-DE" dirty="0"/>
+              <a:t> </a:t>
+            </a:r>
+            <a:r>
+              <a:rPr lang="de-DE" dirty="0" err="1"/>
+              <a:t>between</a:t>
+            </a:r>
+            <a:r>
+              <a:rPr lang="de-DE" dirty="0"/>
+              <a:t> </a:t>
+            </a:r>
+            <a:r>
+              <a:rPr lang="de-DE" dirty="0" err="1"/>
+              <a:t>homogeneity</a:t>
+            </a:r>
+            <a:r>
+              <a:rPr lang="de-DE" dirty="0"/>
+              <a:t> and </a:t>
+            </a:r>
+            <a:r>
+              <a:rPr lang="de-DE" dirty="0" err="1"/>
+              <a:t>completeness</a:t>
+            </a:r>
+            <a:endParaRPr lang="de-DE" dirty="0"/>
           </a:p>
         </p:txBody>
       </p:sp>
       <p:sp>
         <p:nvSpPr>
-          <p:cNvPr id="3" name="Foliennummernplatzhalter 2">
+          <p:cNvPr id="4" name="Foliennummernplatzhalter 3">
             <a:extLst>
               <a:ext uri="{FF2B5EF4-FFF2-40B4-BE49-F238E27FC236}">
-                <a16:creationId xmlns:a16="http://schemas.microsoft.com/office/drawing/2014/main" id="{2B02C868-452A-3E9E-3E72-BA889BC8609C}"/>
+                <a16:creationId xmlns:a16="http://schemas.microsoft.com/office/drawing/2014/main" id="{701A4EA1-06DA-F940-1383-630B8622B38F}"/>
               </a:ext>
             </a:extLst>
           </p:cNvPr>
@@ -9509,57 +11811,10 @@
           </a:p>
         </p:txBody>
       </p:sp>
-      <p:pic>
-        <p:nvPicPr>
-          <p:cNvPr id="1026" name="Picture 2" descr="KMeans, MiniBatchKMeans, Difference">
-            <a:extLst>
-              <a:ext uri="{FF2B5EF4-FFF2-40B4-BE49-F238E27FC236}">
-                <a16:creationId xmlns:a16="http://schemas.microsoft.com/office/drawing/2014/main" id="{8E76ED71-B047-741E-33C3-F2BB69959819}"/>
-              </a:ext>
-            </a:extLst>
-          </p:cNvPr>
-          <p:cNvPicPr>
-            <a:picLocks noChangeAspect="1" noChangeArrowheads="1"/>
-          </p:cNvPicPr>
-          <p:nvPr/>
-        </p:nvPicPr>
-        <p:blipFill>
-          <a:blip r:embed="rId2">
-            <a:extLst>
-              <a:ext uri="{28A0092B-C50C-407E-A947-70E740481C1C}">
-                <a14:useLocalDpi xmlns:a14="http://schemas.microsoft.com/office/drawing/2010/main" val="0"/>
-              </a:ext>
-            </a:extLst>
-          </a:blip>
-          <a:srcRect/>
-          <a:stretch>
-            <a:fillRect/>
-          </a:stretch>
-        </p:blipFill>
-        <p:spPr bwMode="auto">
-          <a:xfrm>
-            <a:off x="2205892" y="3941884"/>
-            <a:ext cx="7776308" cy="2916116"/>
-          </a:xfrm>
-          <a:prstGeom prst="rect">
-            <a:avLst/>
-          </a:prstGeom>
-          <a:noFill/>
-          <a:extLst>
-            <a:ext uri="{909E8E84-426E-40DD-AFC4-6F175D3DCCD1}">
-              <a14:hiddenFill xmlns:a14="http://schemas.microsoft.com/office/drawing/2010/main">
-                <a:solidFill>
-                  <a:srgbClr val="FFFFFF"/>
-                </a:solidFill>
-              </a14:hiddenFill>
-            </a:ext>
-          </a:extLst>
-        </p:spPr>
-      </p:pic>
     </p:spTree>
     <p:extLst>
       <p:ext uri="{BB962C8B-B14F-4D97-AF65-F5344CB8AC3E}">
-        <p14:creationId xmlns:p14="http://schemas.microsoft.com/office/powerpoint/2010/main" val="1327327153"/>
+        <p14:creationId xmlns:p14="http://schemas.microsoft.com/office/powerpoint/2010/main" val="2860005827"/>
       </p:ext>
     </p:extLst>
   </p:cSld>
@@ -9570,6 +11825,318 @@
 </file>
 
 <file path=ppt/slides/slide21.xml><?xml version="1.0" encoding="utf-8"?>
+<p:sld xmlns:a="http://schemas.openxmlformats.org/drawingml/2006/main" xmlns:r="http://schemas.openxmlformats.org/officeDocument/2006/relationships" xmlns:p="http://schemas.openxmlformats.org/presentationml/2006/main">
+  <p:cSld>
+    <p:spTree>
+      <p:nvGrpSpPr>
+        <p:cNvPr id="1" name=""/>
+        <p:cNvGrpSpPr/>
+        <p:nvPr/>
+      </p:nvGrpSpPr>
+      <p:grpSpPr>
+        <a:xfrm>
+          <a:off x="0" y="0"/>
+          <a:ext cx="0" cy="0"/>
+          <a:chOff x="0" y="0"/>
+          <a:chExt cx="0" cy="0"/>
+        </a:xfrm>
+      </p:grpSpPr>
+      <p:sp>
+        <p:nvSpPr>
+          <p:cNvPr id="2" name="Titel 1">
+            <a:extLst>
+              <a:ext uri="{FF2B5EF4-FFF2-40B4-BE49-F238E27FC236}">
+                <a16:creationId xmlns:a16="http://schemas.microsoft.com/office/drawing/2014/main" id="{E1872AF3-6DAA-E6C2-A919-228FF3EB5851}"/>
+              </a:ext>
+            </a:extLst>
+          </p:cNvPr>
+          <p:cNvSpPr>
+            <a:spLocks noGrp="1"/>
+          </p:cNvSpPr>
+          <p:nvPr>
+            <p:ph type="title"/>
+          </p:nvPr>
+        </p:nvSpPr>
+        <p:spPr/>
+        <p:txBody>
+          <a:bodyPr/>
+          <a:lstStyle/>
+          <a:p>
+            <a:r>
+              <a:rPr lang="de-DE" dirty="0" err="1"/>
+              <a:t>Visualizing</a:t>
+            </a:r>
+            <a:r>
+              <a:rPr lang="de-DE" dirty="0"/>
+              <a:t> Clusters</a:t>
+            </a:r>
+          </a:p>
+        </p:txBody>
+      </p:sp>
+      <p:sp>
+        <p:nvSpPr>
+          <p:cNvPr id="4" name="Inhaltsplatzhalter 3">
+            <a:extLst>
+              <a:ext uri="{FF2B5EF4-FFF2-40B4-BE49-F238E27FC236}">
+                <a16:creationId xmlns:a16="http://schemas.microsoft.com/office/drawing/2014/main" id="{116E7ED1-7488-E0CC-5C80-6134391A151C}"/>
+              </a:ext>
+            </a:extLst>
+          </p:cNvPr>
+          <p:cNvSpPr>
+            <a:spLocks noGrp="1"/>
+          </p:cNvSpPr>
+          <p:nvPr>
+            <p:ph idx="1"/>
+          </p:nvPr>
+        </p:nvSpPr>
+        <p:spPr>
+          <a:xfrm>
+            <a:off x="838200" y="1825625"/>
+            <a:ext cx="10515600" cy="1325563"/>
+          </a:xfrm>
+        </p:spPr>
+        <p:txBody>
+          <a:bodyPr>
+            <a:normAutofit fontScale="92500" lnSpcReduction="10000"/>
+          </a:bodyPr>
+          <a:lstStyle/>
+          <a:p>
+            <a:pPr marL="0" indent="0">
+              <a:buNone/>
+            </a:pPr>
+            <a:r>
+              <a:rPr lang="de-DE" dirty="0"/>
+              <a:t>Even </a:t>
+            </a:r>
+            <a:r>
+              <a:rPr lang="de-DE" dirty="0" err="1"/>
+              <a:t>with</a:t>
+            </a:r>
+            <a:r>
+              <a:rPr lang="de-DE" dirty="0"/>
+              <a:t> </a:t>
+            </a:r>
+            <a:r>
+              <a:rPr lang="de-DE" dirty="0" err="1"/>
+              <a:t>metrics</a:t>
+            </a:r>
+            <a:r>
+              <a:rPr lang="de-DE" dirty="0"/>
+              <a:t>, </a:t>
+            </a:r>
+            <a:r>
+              <a:rPr lang="de-DE" dirty="0" err="1"/>
+              <a:t>always</a:t>
+            </a:r>
+            <a:r>
+              <a:rPr lang="de-DE" dirty="0"/>
+              <a:t> </a:t>
+            </a:r>
+            <a:r>
+              <a:rPr lang="de-DE" dirty="0" err="1"/>
+              <a:t>sanity</a:t>
+            </a:r>
+            <a:r>
+              <a:rPr lang="de-DE" dirty="0"/>
+              <a:t>-check:</a:t>
+            </a:r>
+          </a:p>
+          <a:p>
+            <a:r>
+              <a:rPr lang="de-DE" dirty="0" err="1"/>
+              <a:t>Visualize</a:t>
+            </a:r>
+            <a:r>
+              <a:rPr lang="de-DE" dirty="0"/>
+              <a:t> </a:t>
+            </a:r>
+            <a:r>
+              <a:rPr lang="de-DE" dirty="0" err="1"/>
+              <a:t>clusters</a:t>
+            </a:r>
+            <a:r>
+              <a:rPr lang="de-DE" dirty="0"/>
+              <a:t> (</a:t>
+            </a:r>
+            <a:r>
+              <a:rPr lang="de-DE" dirty="0" err="1"/>
+              <a:t>using</a:t>
+            </a:r>
+            <a:r>
+              <a:rPr lang="de-DE" dirty="0"/>
+              <a:t> PCA </a:t>
+            </a:r>
+            <a:r>
+              <a:rPr lang="de-DE" dirty="0" err="1"/>
+              <a:t>or</a:t>
+            </a:r>
+            <a:r>
+              <a:rPr lang="de-DE" dirty="0"/>
+              <a:t> t-SNE </a:t>
+            </a:r>
+            <a:r>
+              <a:rPr lang="de-DE" dirty="0" err="1"/>
+              <a:t>for</a:t>
+            </a:r>
+            <a:r>
+              <a:rPr lang="de-DE" dirty="0"/>
+              <a:t> high </a:t>
+            </a:r>
+            <a:r>
+              <a:rPr lang="de-DE" dirty="0" err="1"/>
+              <a:t>dimensions</a:t>
+            </a:r>
+            <a:r>
+              <a:rPr lang="de-DE" dirty="0"/>
+              <a:t>)</a:t>
+            </a:r>
+          </a:p>
+          <a:p>
+            <a:r>
+              <a:rPr lang="de-DE" dirty="0"/>
+              <a:t>Ask: Do </a:t>
+            </a:r>
+            <a:r>
+              <a:rPr lang="de-DE" dirty="0" err="1"/>
+              <a:t>clusters</a:t>
+            </a:r>
+            <a:r>
+              <a:rPr lang="de-DE" dirty="0"/>
+              <a:t> </a:t>
+            </a:r>
+            <a:r>
+              <a:rPr lang="de-DE" dirty="0" err="1"/>
+              <a:t>make</a:t>
+            </a:r>
+            <a:r>
+              <a:rPr lang="de-DE" dirty="0"/>
+              <a:t> sense in </a:t>
+            </a:r>
+            <a:r>
+              <a:rPr lang="de-DE" dirty="0" err="1"/>
+              <a:t>your</a:t>
+            </a:r>
+            <a:r>
+              <a:rPr lang="de-DE" dirty="0"/>
+              <a:t> </a:t>
+            </a:r>
+            <a:r>
+              <a:rPr lang="de-DE" dirty="0" err="1"/>
+              <a:t>domain</a:t>
+            </a:r>
+            <a:r>
+              <a:rPr lang="de-DE" dirty="0"/>
+              <a:t>?</a:t>
+            </a:r>
+          </a:p>
+          <a:p>
+            <a:endParaRPr lang="de-DE" dirty="0"/>
+          </a:p>
+        </p:txBody>
+      </p:sp>
+      <p:sp>
+        <p:nvSpPr>
+          <p:cNvPr id="3" name="Foliennummernplatzhalter 2">
+            <a:extLst>
+              <a:ext uri="{FF2B5EF4-FFF2-40B4-BE49-F238E27FC236}">
+                <a16:creationId xmlns:a16="http://schemas.microsoft.com/office/drawing/2014/main" id="{81251F56-854B-D4C6-04C7-5A3B3F8DB84E}"/>
+              </a:ext>
+            </a:extLst>
+          </p:cNvPr>
+          <p:cNvSpPr>
+            <a:spLocks noGrp="1"/>
+          </p:cNvSpPr>
+          <p:nvPr>
+            <p:ph type="sldNum" sz="quarter" idx="12"/>
+          </p:nvPr>
+        </p:nvSpPr>
+        <p:spPr/>
+        <p:txBody>
+          <a:bodyPr/>
+          <a:lstStyle/>
+          <a:p>
+            <a:fld id="{08C366F5-AFAD-49CB-854A-9D9E238FCA13}" type="slidenum">
+              <a:rPr lang="en-GB" smtClean="0"/>
+              <a:t>21</a:t>
+            </a:fld>
+            <a:endParaRPr lang="en-GB"/>
+          </a:p>
+        </p:txBody>
+      </p:sp>
+      <p:pic>
+        <p:nvPicPr>
+          <p:cNvPr id="7" name="Grafik 6">
+            <a:extLst>
+              <a:ext uri="{FF2B5EF4-FFF2-40B4-BE49-F238E27FC236}">
+                <a16:creationId xmlns:a16="http://schemas.microsoft.com/office/drawing/2014/main" id="{D861363D-71A9-BB23-8E03-572F96EE985B}"/>
+              </a:ext>
+            </a:extLst>
+          </p:cNvPr>
+          <p:cNvPicPr>
+            <a:picLocks noChangeAspect="1"/>
+          </p:cNvPicPr>
+          <p:nvPr/>
+        </p:nvPicPr>
+        <p:blipFill>
+          <a:blip r:embed="rId2"/>
+          <a:stretch>
+            <a:fillRect/>
+          </a:stretch>
+        </p:blipFill>
+        <p:spPr>
+          <a:xfrm>
+            <a:off x="954363" y="3188400"/>
+            <a:ext cx="4334091" cy="3350512"/>
+          </a:xfrm>
+          <a:prstGeom prst="rect">
+            <a:avLst/>
+          </a:prstGeom>
+        </p:spPr>
+      </p:pic>
+      <p:pic>
+        <p:nvPicPr>
+          <p:cNvPr id="8" name="Grafik 7">
+            <a:extLst>
+              <a:ext uri="{FF2B5EF4-FFF2-40B4-BE49-F238E27FC236}">
+                <a16:creationId xmlns:a16="http://schemas.microsoft.com/office/drawing/2014/main" id="{624B4F01-6342-71F0-9C42-11BC44FC5B11}"/>
+              </a:ext>
+            </a:extLst>
+          </p:cNvPr>
+          <p:cNvPicPr>
+            <a:picLocks noChangeAspect="1"/>
+          </p:cNvPicPr>
+          <p:nvPr/>
+        </p:nvPicPr>
+        <p:blipFill>
+          <a:blip r:embed="rId3"/>
+          <a:stretch>
+            <a:fillRect/>
+          </a:stretch>
+        </p:blipFill>
+        <p:spPr>
+          <a:xfrm>
+            <a:off x="6514010" y="3234437"/>
+            <a:ext cx="4193179" cy="3304475"/>
+          </a:xfrm>
+          <a:prstGeom prst="rect">
+            <a:avLst/>
+          </a:prstGeom>
+        </p:spPr>
+      </p:pic>
+    </p:spTree>
+    <p:extLst>
+      <p:ext uri="{BB962C8B-B14F-4D97-AF65-F5344CB8AC3E}">
+        <p14:creationId xmlns:p14="http://schemas.microsoft.com/office/powerpoint/2010/main" val="2070037097"/>
+      </p:ext>
+    </p:extLst>
+  </p:cSld>
+  <p:clrMapOvr>
+    <a:masterClrMapping/>
+  </p:clrMapOvr>
+</p:sld>
+</file>
+
+<file path=ppt/slides/slide22.xml><?xml version="1.0" encoding="utf-8"?>
 <p:sld xmlns:a="http://schemas.openxmlformats.org/drawingml/2006/main" xmlns:r="http://schemas.openxmlformats.org/officeDocument/2006/relationships" xmlns:p="http://schemas.openxmlformats.org/presentationml/2006/main">
   <p:cSld>
     <p:spTree>
@@ -9651,6 +12218,21 @@
               <a:buNone/>
             </a:pPr>
             <a:r>
+              <a:rPr lang="de-DE" dirty="0"/>
+              <a:t>…</a:t>
+            </a:r>
+          </a:p>
+          <a:p>
+            <a:pPr marL="0" indent="0">
+              <a:buNone/>
+            </a:pPr>
+            <a:endParaRPr lang="de-DE" dirty="0"/>
+          </a:p>
+          <a:p>
+            <a:pPr marL="0" indent="0">
+              <a:buNone/>
+            </a:pPr>
+            <a:r>
               <a:rPr lang="de-DE" dirty="0" err="1"/>
               <a:t>k-Means</a:t>
             </a:r>
@@ -9761,7 +12343,7 @@
           <a:p>
             <a:fld id="{08C366F5-AFAD-49CB-854A-9D9E238FCA13}" type="slidenum">
               <a:rPr lang="en-GB" smtClean="0"/>
-              <a:t>21</a:t>
+              <a:t>22</a:t>
             </a:fld>
             <a:endParaRPr lang="en-GB"/>
           </a:p>
@@ -9780,7 +12362,7 @@
 </p:sld>
 </file>
 
-<file path=ppt/slides/slide22.xml><?xml version="1.0" encoding="utf-8"?>
+<file path=ppt/slides/slide23.xml><?xml version="1.0" encoding="utf-8"?>
 <p:sld xmlns:a="http://schemas.openxmlformats.org/drawingml/2006/main" xmlns:r="http://schemas.openxmlformats.org/officeDocument/2006/relationships" xmlns:p="http://schemas.openxmlformats.org/presentationml/2006/main">
   <p:cSld>
     <p:spTree>
@@ -9852,7 +12434,7 @@
           <a:p>
             <a:fld id="{08C366F5-AFAD-49CB-854A-9D9E238FCA13}" type="slidenum">
               <a:rPr lang="en-GB" smtClean="0"/>
-              <a:t>22</a:t>
+              <a:t>23</a:t>
             </a:fld>
             <a:endParaRPr lang="en-GB"/>
           </a:p>
@@ -9871,7 +12453,7 @@
 </p:sld>
 </file>
 
-<file path=ppt/slides/slide23.xml><?xml version="1.0" encoding="utf-8"?>
+<file path=ppt/slides/slide24.xml><?xml version="1.0" encoding="utf-8"?>
 <p:sld xmlns:a="http://schemas.openxmlformats.org/drawingml/2006/main" xmlns:r="http://schemas.openxmlformats.org/officeDocument/2006/relationships" xmlns:p="http://schemas.openxmlformats.org/presentationml/2006/main">
   <p:cSld>
     <p:spTree>
@@ -9948,7 +12530,7 @@
           <a:p>
             <a:fld id="{08C366F5-AFAD-49CB-854A-9D9E238FCA13}" type="slidenum">
               <a:rPr lang="en-GB" smtClean="0"/>
-              <a:t>23</a:t>
+              <a:t>24</a:t>
             </a:fld>
             <a:endParaRPr lang="en-GB"/>
           </a:p>
@@ -9967,7 +12549,7 @@
 </p:sld>
 </file>
 
-<file path=ppt/slides/slide24.xml><?xml version="1.0" encoding="utf-8"?>
+<file path=ppt/slides/slide25.xml><?xml version="1.0" encoding="utf-8"?>
 <p:sld xmlns:a="http://schemas.openxmlformats.org/drawingml/2006/main" xmlns:r="http://schemas.openxmlformats.org/officeDocument/2006/relationships" xmlns:p="http://schemas.openxmlformats.org/presentationml/2006/main">
   <p:cSld>
     <p:spTree>
@@ -10039,7 +12621,7 @@
           <a:p>
             <a:fld id="{08C366F5-AFAD-49CB-854A-9D9E238FCA13}" type="slidenum">
               <a:rPr lang="en-GB" smtClean="0"/>
-              <a:t>24</a:t>
+              <a:t>25</a:t>
             </a:fld>
             <a:endParaRPr lang="en-GB"/>
           </a:p>
@@ -10058,7 +12640,7 @@
 </p:sld>
 </file>
 
-<file path=ppt/slides/slide25.xml><?xml version="1.0" encoding="utf-8"?>
+<file path=ppt/slides/slide26.xml><?xml version="1.0" encoding="utf-8"?>
 <p:sld xmlns:a="http://schemas.openxmlformats.org/drawingml/2006/main" xmlns:r="http://schemas.openxmlformats.org/officeDocument/2006/relationships" xmlns:p="http://schemas.openxmlformats.org/presentationml/2006/main">
   <p:cSld>
     <p:spTree>
@@ -10134,7 +12716,7 @@
           <a:p>
             <a:fld id="{08C366F5-AFAD-49CB-854A-9D9E238FCA13}" type="slidenum">
               <a:rPr lang="en-GB" smtClean="0"/>
-              <a:t>25</a:t>
+              <a:t>26</a:t>
             </a:fld>
             <a:endParaRPr lang="en-GB"/>
           </a:p>
@@ -10153,7 +12735,7 @@
 </p:sld>
 </file>
 
-<file path=ppt/slides/slide26.xml><?xml version="1.0" encoding="utf-8"?>
+<file path=ppt/slides/slide27.xml><?xml version="1.0" encoding="utf-8"?>
 <p:sld xmlns:a="http://schemas.openxmlformats.org/drawingml/2006/main" xmlns:r="http://schemas.openxmlformats.org/officeDocument/2006/relationships" xmlns:p="http://schemas.openxmlformats.org/presentationml/2006/main">
   <p:cSld>
     <p:spTree>
@@ -10221,7 +12803,7 @@
           <a:p>
             <a:fld id="{08C366F5-AFAD-49CB-854A-9D9E238FCA13}" type="slidenum">
               <a:rPr lang="en-GB" smtClean="0"/>
-              <a:t>26</a:t>
+              <a:t>27</a:t>
             </a:fld>
             <a:endParaRPr lang="en-GB"/>
           </a:p>
@@ -10240,7 +12822,7 @@
 </p:sld>
 </file>
 
-<file path=ppt/slides/slide27.xml><?xml version="1.0" encoding="utf-8"?>
+<file path=ppt/slides/slide28.xml><?xml version="1.0" encoding="utf-8"?>
 <p:sld xmlns:a="http://schemas.openxmlformats.org/drawingml/2006/main" xmlns:r="http://schemas.openxmlformats.org/officeDocument/2006/relationships" xmlns:p="http://schemas.openxmlformats.org/presentationml/2006/main">
   <p:cSld>
     <p:spTree>
@@ -10325,7 +12907,7 @@
           <a:p>
             <a:fld id="{08C366F5-AFAD-49CB-854A-9D9E238FCA13}" type="slidenum">
               <a:rPr lang="en-GB" smtClean="0"/>
-              <a:t>27</a:t>
+              <a:t>28</a:t>
             </a:fld>
             <a:endParaRPr lang="en-GB"/>
           </a:p>
@@ -10344,7 +12926,7 @@
 </p:sld>
 </file>
 
-<file path=ppt/slides/slide28.xml><?xml version="1.0" encoding="utf-8"?>
+<file path=ppt/slides/slide29.xml><?xml version="1.0" encoding="utf-8"?>
 <p:sld xmlns:a="http://schemas.openxmlformats.org/drawingml/2006/main" xmlns:r="http://schemas.openxmlformats.org/officeDocument/2006/relationships" xmlns:p="http://schemas.openxmlformats.org/presentationml/2006/main">
   <p:cSld>
     <p:spTree>
@@ -10416,7 +12998,7 @@
           <a:p>
             <a:fld id="{08C366F5-AFAD-49CB-854A-9D9E238FCA13}" type="slidenum">
               <a:rPr lang="en-GB" smtClean="0"/>
-              <a:t>28</a:t>
+              <a:t>29</a:t>
             </a:fld>
             <a:endParaRPr lang="en-GB"/>
           </a:p>

--- a/slides/2_clustering.pptx
+++ b/slides/2_clustering.pptx
@@ -5,7 +5,7 @@
     <p:sldMasterId id="2147483648" r:id="rId1"/>
   </p:sldMasterIdLst>
   <p:notesMasterIdLst>
-    <p:notesMasterId r:id="rId31"/>
+    <p:notesMasterId r:id="rId33"/>
   </p:notesMasterIdLst>
   <p:sldIdLst>
     <p:sldId id="256" r:id="rId2"/>
@@ -29,14 +29,16 @@
     <p:sldId id="294" r:id="rId20"/>
     <p:sldId id="291" r:id="rId21"/>
     <p:sldId id="283" r:id="rId22"/>
-    <p:sldId id="286" r:id="rId23"/>
-    <p:sldId id="275" r:id="rId24"/>
-    <p:sldId id="276" r:id="rId25"/>
-    <p:sldId id="277" r:id="rId26"/>
-    <p:sldId id="278" r:id="rId27"/>
-    <p:sldId id="279" r:id="rId28"/>
-    <p:sldId id="280" r:id="rId29"/>
-    <p:sldId id="281" r:id="rId30"/>
+    <p:sldId id="295" r:id="rId23"/>
+    <p:sldId id="296" r:id="rId24"/>
+    <p:sldId id="286" r:id="rId25"/>
+    <p:sldId id="275" r:id="rId26"/>
+    <p:sldId id="276" r:id="rId27"/>
+    <p:sldId id="277" r:id="rId28"/>
+    <p:sldId id="278" r:id="rId29"/>
+    <p:sldId id="279" r:id="rId30"/>
+    <p:sldId id="280" r:id="rId31"/>
+    <p:sldId id="281" r:id="rId32"/>
   </p:sldIdLst>
   <p:sldSz cx="12192000" cy="6858000"/>
   <p:notesSz cx="6858000" cy="9144000"/>
@@ -4546,8 +4548,8 @@
         </p:nvSpPr>
         <p:spPr>
           <a:xfrm>
-            <a:off x="6401341" y="6171684"/>
-            <a:ext cx="2209259" cy="369332"/>
+            <a:off x="5294795" y="6107389"/>
+            <a:ext cx="5824331" cy="646331"/>
           </a:xfrm>
           <a:prstGeom prst="rect">
             <a:avLst/>
@@ -4555,7 +4557,7 @@
           <a:noFill/>
         </p:spPr>
         <p:txBody>
-          <a:bodyPr wrap="none" rtlCol="0">
+          <a:bodyPr wrap="square" rtlCol="0">
             <a:spAutoFit/>
           </a:bodyPr>
           <a:lstStyle/>
@@ -4572,7 +4574,98 @@
               <a:rPr lang="de-DE" dirty="0" err="1"/>
               <a:t>boundaries</a:t>
             </a:r>
-            <a:endParaRPr lang="de-DE" dirty="0"/>
+            <a:r>
+              <a:rPr lang="de-DE" dirty="0"/>
+              <a:t> (</a:t>
+            </a:r>
+            <a:r>
+              <a:rPr lang="de-DE" dirty="0" err="1"/>
+              <a:t>straight</a:t>
+            </a:r>
+            <a:r>
+              <a:rPr lang="de-DE" dirty="0"/>
+              <a:t> </a:t>
+            </a:r>
+            <a:r>
+              <a:rPr lang="de-DE" dirty="0" err="1"/>
+              <a:t>lines</a:t>
+            </a:r>
+            <a:r>
+              <a:rPr lang="de-DE" dirty="0"/>
+              <a:t> </a:t>
+            </a:r>
+            <a:r>
+              <a:rPr lang="de-DE" dirty="0" err="1"/>
+              <a:t>because</a:t>
+            </a:r>
+            <a:r>
+              <a:rPr lang="de-DE" dirty="0"/>
+              <a:t> </a:t>
+            </a:r>
+            <a:r>
+              <a:rPr lang="de-DE" dirty="0" err="1"/>
+              <a:t>k-Means</a:t>
+            </a:r>
+            <a:r>
+              <a:rPr lang="de-DE" dirty="0"/>
+              <a:t> was </a:t>
+            </a:r>
+            <a:r>
+              <a:rPr lang="de-DE" dirty="0" err="1"/>
+              <a:t>trained</a:t>
+            </a:r>
+            <a:r>
+              <a:rPr lang="de-DE" dirty="0"/>
+              <a:t> </a:t>
+            </a:r>
+            <a:r>
+              <a:rPr lang="de-DE" dirty="0" err="1"/>
+              <a:t>directly</a:t>
+            </a:r>
+            <a:r>
+              <a:rPr lang="de-DE" dirty="0"/>
+              <a:t> in </a:t>
+            </a:r>
+            <a:r>
+              <a:rPr lang="de-DE" dirty="0" err="1"/>
+              <a:t>the</a:t>
+            </a:r>
+            <a:r>
+              <a:rPr lang="de-DE" dirty="0"/>
+              <a:t> same 2-D </a:t>
+            </a:r>
+            <a:r>
+              <a:rPr lang="de-DE" dirty="0" err="1"/>
+              <a:t>space</a:t>
+            </a:r>
+            <a:r>
+              <a:rPr lang="de-DE" dirty="0"/>
+              <a:t> </a:t>
+            </a:r>
+            <a:r>
+              <a:rPr lang="de-DE" dirty="0" err="1"/>
+              <a:t>that</a:t>
+            </a:r>
+            <a:r>
+              <a:rPr lang="de-DE" dirty="0"/>
+              <a:t> </a:t>
+            </a:r>
+            <a:r>
+              <a:rPr lang="de-DE" dirty="0" err="1"/>
+              <a:t>is</a:t>
+            </a:r>
+            <a:r>
+              <a:rPr lang="de-DE" dirty="0"/>
+              <a:t> </a:t>
+            </a:r>
+            <a:r>
+              <a:rPr lang="de-DE" dirty="0" err="1"/>
+              <a:t>visualized</a:t>
+            </a:r>
+            <a:r>
+              <a:rPr lang="de-DE" dirty="0"/>
+              <a:t>)</a:t>
+            </a:r>
           </a:p>
         </p:txBody>
       </p:sp>
@@ -4585,13 +4678,15 @@
               </a:ext>
             </a:extLst>
           </p:cNvPr>
-          <p:cNvCxnSpPr/>
+          <p:cNvCxnSpPr>
+            <a:cxnSpLocks/>
+          </p:cNvCxnSpPr>
           <p:nvPr/>
         </p:nvCxnSpPr>
         <p:spPr>
-          <a:xfrm flipH="1" flipV="1">
-            <a:off x="6917635" y="5466522"/>
-            <a:ext cx="606287" cy="626165"/>
+          <a:xfrm flipV="1">
+            <a:off x="6659217" y="5625548"/>
+            <a:ext cx="1013792" cy="551415"/>
           </a:xfrm>
           <a:prstGeom prst="straightConnector1">
             <a:avLst/>
@@ -7372,8 +7467,8 @@
           </a:p>
         </p:txBody>
       </p:sp>
-      <mc:AlternateContent xmlns:mc="http://schemas.openxmlformats.org/markup-compatibility/2006">
-        <mc:Choice xmlns:a14="http://schemas.microsoft.com/office/drawing/2010/main" Requires="a14">
+      <mc:AlternateContent xmlns:mc="http://schemas.openxmlformats.org/markup-compatibility/2006" xmlns:a14="http://schemas.microsoft.com/office/drawing/2010/main">
+        <mc:Choice Requires="a14">
           <p:sp>
             <p:nvSpPr>
               <p:cNvPr id="4" name="Inhaltsplatzhalter 3">
@@ -7659,7 +7754,7 @@
             </p:txBody>
           </p:sp>
         </mc:Choice>
-        <mc:Fallback>
+        <mc:Fallback xmlns="">
           <p:sp>
             <p:nvSpPr>
               <p:cNvPr id="4" name="Inhaltsplatzhalter 3">
@@ -10068,8 +10163,8 @@
           </a:p>
         </p:txBody>
       </p:sp>
-      <mc:AlternateContent xmlns:mc="http://schemas.openxmlformats.org/markup-compatibility/2006">
-        <mc:Choice xmlns:a14="http://schemas.microsoft.com/office/drawing/2010/main" Requires="a14">
+      <mc:AlternateContent xmlns:mc="http://schemas.openxmlformats.org/markup-compatibility/2006" xmlns:a14="http://schemas.microsoft.com/office/drawing/2010/main">
+        <mc:Choice Requires="a14">
           <p:sp>
             <p:nvSpPr>
               <p:cNvPr id="3" name="Inhaltsplatzhalter 2">
@@ -10707,7 +10802,7 @@
             </p:txBody>
           </p:sp>
         </mc:Choice>
-        <mc:Fallback>
+        <mc:Fallback xmlns="">
           <p:sp>
             <p:nvSpPr>
               <p:cNvPr id="3" name="Inhaltsplatzhalter 2">
@@ -12158,6 +12253,262 @@
           <p:cNvPr id="2" name="Titel 1">
             <a:extLst>
               <a:ext uri="{FF2B5EF4-FFF2-40B4-BE49-F238E27FC236}">
+                <a16:creationId xmlns:a16="http://schemas.microsoft.com/office/drawing/2014/main" id="{94A68D1B-A2EE-F2CE-AD52-EB2C87A5B0D8}"/>
+              </a:ext>
+            </a:extLst>
+          </p:cNvPr>
+          <p:cNvSpPr>
+            <a:spLocks noGrp="1"/>
+          </p:cNvSpPr>
+          <p:nvPr>
+            <p:ph type="title"/>
+          </p:nvPr>
+        </p:nvSpPr>
+        <p:spPr/>
+        <p:txBody>
+          <a:bodyPr/>
+          <a:lstStyle/>
+          <a:p>
+            <a:r>
+              <a:rPr lang="de-DE" dirty="0"/>
+              <a:t>Practice Project</a:t>
+            </a:r>
+          </a:p>
+        </p:txBody>
+      </p:sp>
+      <p:sp>
+        <p:nvSpPr>
+          <p:cNvPr id="4" name="Inhaltsplatzhalter 3">
+            <a:extLst>
+              <a:ext uri="{FF2B5EF4-FFF2-40B4-BE49-F238E27FC236}">
+                <a16:creationId xmlns:a16="http://schemas.microsoft.com/office/drawing/2014/main" id="{8584FCB9-BA82-739D-B7F6-7D6511A2597B}"/>
+              </a:ext>
+            </a:extLst>
+          </p:cNvPr>
+          <p:cNvSpPr>
+            <a:spLocks noGrp="1"/>
+          </p:cNvSpPr>
+          <p:nvPr>
+            <p:ph idx="1"/>
+          </p:nvPr>
+        </p:nvSpPr>
+        <p:spPr/>
+        <p:txBody>
+          <a:bodyPr/>
+          <a:lstStyle/>
+          <a:p>
+            <a:pPr marL="0" indent="0">
+              <a:buNone/>
+            </a:pPr>
+            <a:endParaRPr lang="de-DE" dirty="0"/>
+          </a:p>
+          <a:p>
+            <a:pPr marL="0" indent="0">
+              <a:buNone/>
+            </a:pPr>
+            <a:endParaRPr lang="de-DE" dirty="0"/>
+          </a:p>
+          <a:p>
+            <a:pPr marL="0" indent="0">
+              <a:buNone/>
+            </a:pPr>
+            <a:r>
+              <a:rPr lang="de-DE" dirty="0"/>
+              <a:t>Customer Segmentation on </a:t>
+            </a:r>
+            <a:r>
+              <a:rPr lang="de-DE" dirty="0">
+                <a:hlinkClick r:id="rId2"/>
+              </a:rPr>
+              <a:t>Mall Customers dataset</a:t>
+            </a:r>
+            <a:endParaRPr lang="de-DE" dirty="0"/>
+          </a:p>
+        </p:txBody>
+      </p:sp>
+      <p:sp>
+        <p:nvSpPr>
+          <p:cNvPr id="3" name="Foliennummernplatzhalter 2">
+            <a:extLst>
+              <a:ext uri="{FF2B5EF4-FFF2-40B4-BE49-F238E27FC236}">
+                <a16:creationId xmlns:a16="http://schemas.microsoft.com/office/drawing/2014/main" id="{7AF4DC5F-D48A-1033-7650-05C30D58CACF}"/>
+              </a:ext>
+            </a:extLst>
+          </p:cNvPr>
+          <p:cNvSpPr>
+            <a:spLocks noGrp="1"/>
+          </p:cNvSpPr>
+          <p:nvPr>
+            <p:ph type="sldNum" sz="quarter" idx="12"/>
+          </p:nvPr>
+        </p:nvSpPr>
+        <p:spPr/>
+        <p:txBody>
+          <a:bodyPr/>
+          <a:lstStyle/>
+          <a:p>
+            <a:fld id="{08C366F5-AFAD-49CB-854A-9D9E238FCA13}" type="slidenum">
+              <a:rPr lang="en-GB" smtClean="0"/>
+              <a:t>22</a:t>
+            </a:fld>
+            <a:endParaRPr lang="en-GB"/>
+          </a:p>
+        </p:txBody>
+      </p:sp>
+    </p:spTree>
+    <p:extLst>
+      <p:ext uri="{BB962C8B-B14F-4D97-AF65-F5344CB8AC3E}">
+        <p14:creationId xmlns:p14="http://schemas.microsoft.com/office/powerpoint/2010/main" val="1554786789"/>
+      </p:ext>
+    </p:extLst>
+  </p:cSld>
+  <p:clrMapOvr>
+    <a:masterClrMapping/>
+  </p:clrMapOvr>
+</p:sld>
+</file>
+
+<file path=ppt/slides/slide23.xml><?xml version="1.0" encoding="utf-8"?>
+<p:sld xmlns:a="http://schemas.openxmlformats.org/drawingml/2006/main" xmlns:r="http://schemas.openxmlformats.org/officeDocument/2006/relationships" xmlns:p="http://schemas.openxmlformats.org/presentationml/2006/main">
+  <p:cSld>
+    <p:spTree>
+      <p:nvGrpSpPr>
+        <p:cNvPr id="1" name=""/>
+        <p:cNvGrpSpPr/>
+        <p:nvPr/>
+      </p:nvGrpSpPr>
+      <p:grpSpPr>
+        <a:xfrm>
+          <a:off x="0" y="0"/>
+          <a:ext cx="0" cy="0"/>
+          <a:chOff x="0" y="0"/>
+          <a:chExt cx="0" cy="0"/>
+        </a:xfrm>
+      </p:grpSpPr>
+      <p:sp>
+        <p:nvSpPr>
+          <p:cNvPr id="4" name="Foliennummernplatzhalter 3">
+            <a:extLst>
+              <a:ext uri="{FF2B5EF4-FFF2-40B4-BE49-F238E27FC236}">
+                <a16:creationId xmlns:a16="http://schemas.microsoft.com/office/drawing/2014/main" id="{6E4A32B6-34C5-0593-9264-11762B336C99}"/>
+              </a:ext>
+            </a:extLst>
+          </p:cNvPr>
+          <p:cNvSpPr>
+            <a:spLocks noGrp="1"/>
+          </p:cNvSpPr>
+          <p:nvPr>
+            <p:ph type="sldNum" sz="quarter" idx="12"/>
+          </p:nvPr>
+        </p:nvSpPr>
+        <p:spPr/>
+        <p:txBody>
+          <a:bodyPr/>
+          <a:lstStyle/>
+          <a:p>
+            <a:fld id="{08C366F5-AFAD-49CB-854A-9D9E238FCA13}" type="slidenum">
+              <a:rPr lang="en-GB" smtClean="0"/>
+              <a:t>23</a:t>
+            </a:fld>
+            <a:endParaRPr lang="en-GB"/>
+          </a:p>
+        </p:txBody>
+      </p:sp>
+      <p:pic>
+        <p:nvPicPr>
+          <p:cNvPr id="5" name="Grafik 4">
+            <a:extLst>
+              <a:ext uri="{FF2B5EF4-FFF2-40B4-BE49-F238E27FC236}">
+                <a16:creationId xmlns:a16="http://schemas.microsoft.com/office/drawing/2014/main" id="{FFDA34E2-491D-0922-FDC4-FF707320F16C}"/>
+              </a:ext>
+            </a:extLst>
+          </p:cNvPr>
+          <p:cNvPicPr>
+            <a:picLocks noChangeAspect="1"/>
+          </p:cNvPicPr>
+          <p:nvPr/>
+        </p:nvPicPr>
+        <p:blipFill>
+          <a:blip r:embed="rId2"/>
+          <a:stretch>
+            <a:fillRect/>
+          </a:stretch>
+        </p:blipFill>
+        <p:spPr>
+          <a:xfrm>
+            <a:off x="0" y="370365"/>
+            <a:ext cx="7772400" cy="6117269"/>
+          </a:xfrm>
+          <a:prstGeom prst="rect">
+            <a:avLst/>
+          </a:prstGeom>
+        </p:spPr>
+      </p:pic>
+      <p:pic>
+        <p:nvPicPr>
+          <p:cNvPr id="6" name="Grafik 5">
+            <a:extLst>
+              <a:ext uri="{FF2B5EF4-FFF2-40B4-BE49-F238E27FC236}">
+                <a16:creationId xmlns:a16="http://schemas.microsoft.com/office/drawing/2014/main" id="{388F2B15-1EFD-A0F9-B86A-EEC2FA1566D3}"/>
+              </a:ext>
+            </a:extLst>
+          </p:cNvPr>
+          <p:cNvPicPr>
+            <a:picLocks noChangeAspect="1"/>
+          </p:cNvPicPr>
+          <p:nvPr/>
+        </p:nvPicPr>
+        <p:blipFill>
+          <a:blip r:embed="rId3"/>
+          <a:stretch>
+            <a:fillRect/>
+          </a:stretch>
+        </p:blipFill>
+        <p:spPr>
+          <a:xfrm>
+            <a:off x="7708624" y="1720510"/>
+            <a:ext cx="4483376" cy="3416978"/>
+          </a:xfrm>
+          <a:prstGeom prst="rect">
+            <a:avLst/>
+          </a:prstGeom>
+        </p:spPr>
+      </p:pic>
+    </p:spTree>
+    <p:extLst>
+      <p:ext uri="{BB962C8B-B14F-4D97-AF65-F5344CB8AC3E}">
+        <p14:creationId xmlns:p14="http://schemas.microsoft.com/office/powerpoint/2010/main" val="1859857367"/>
+      </p:ext>
+    </p:extLst>
+  </p:cSld>
+  <p:clrMapOvr>
+    <a:masterClrMapping/>
+  </p:clrMapOvr>
+</p:sld>
+</file>
+
+<file path=ppt/slides/slide24.xml><?xml version="1.0" encoding="utf-8"?>
+<p:sld xmlns:a="http://schemas.openxmlformats.org/drawingml/2006/main" xmlns:r="http://schemas.openxmlformats.org/officeDocument/2006/relationships" xmlns:p="http://schemas.openxmlformats.org/presentationml/2006/main">
+  <p:cSld>
+    <p:spTree>
+      <p:nvGrpSpPr>
+        <p:cNvPr id="1" name=""/>
+        <p:cNvGrpSpPr/>
+        <p:nvPr/>
+      </p:nvGrpSpPr>
+      <p:grpSpPr>
+        <a:xfrm>
+          <a:off x="0" y="0"/>
+          <a:ext cx="0" cy="0"/>
+          <a:chOff x="0" y="0"/>
+          <a:chExt cx="0" cy="0"/>
+        </a:xfrm>
+      </p:grpSpPr>
+      <p:sp>
+        <p:nvSpPr>
+          <p:cNvPr id="2" name="Titel 1">
+            <a:extLst>
+              <a:ext uri="{FF2B5EF4-FFF2-40B4-BE49-F238E27FC236}">
                 <a16:creationId xmlns:a16="http://schemas.microsoft.com/office/drawing/2014/main" id="{DFE85EF2-749A-FE44-0A02-FD2D92497601}"/>
               </a:ext>
             </a:extLst>
@@ -12211,15 +12562,149 @@
         </p:nvSpPr>
         <p:spPr/>
         <p:txBody>
-          <a:bodyPr/>
+          <a:bodyPr>
+            <a:normAutofit fontScale="85000" lnSpcReduction="20000"/>
+          </a:bodyPr>
           <a:lstStyle/>
           <a:p>
             <a:pPr marL="0" indent="0">
               <a:buNone/>
             </a:pPr>
             <a:r>
-              <a:rPr lang="de-DE" dirty="0"/>
-              <a:t>…</a:t>
+              <a:rPr lang="de-DE" dirty="0" err="1"/>
+              <a:t>k-Means</a:t>
+            </a:r>
+            <a:r>
+              <a:rPr lang="de-DE" dirty="0"/>
+              <a:t> </a:t>
+            </a:r>
+            <a:r>
+              <a:rPr lang="de-DE" dirty="0" err="1"/>
+              <a:t>assigns</a:t>
+            </a:r>
+            <a:r>
+              <a:rPr lang="de-DE" dirty="0"/>
+              <a:t> </a:t>
+            </a:r>
+            <a:r>
+              <a:rPr lang="de-DE" dirty="0" err="1"/>
+              <a:t>points</a:t>
+            </a:r>
+            <a:r>
+              <a:rPr lang="de-DE" dirty="0"/>
+              <a:t> </a:t>
+            </a:r>
+            <a:r>
+              <a:rPr lang="de-DE" dirty="0" err="1"/>
+              <a:t>based</a:t>
+            </a:r>
+            <a:r>
+              <a:rPr lang="de-DE" dirty="0"/>
+              <a:t> on </a:t>
+            </a:r>
+            <a:r>
+              <a:rPr lang="de-DE" dirty="0" err="1"/>
+              <a:t>Euclidean</a:t>
+            </a:r>
+            <a:r>
+              <a:rPr lang="de-DE" dirty="0"/>
+              <a:t> </a:t>
+            </a:r>
+            <a:r>
+              <a:rPr lang="de-DE" dirty="0" err="1"/>
+              <a:t>distance</a:t>
+            </a:r>
+            <a:r>
+              <a:rPr lang="de-DE" dirty="0"/>
+              <a:t> </a:t>
+            </a:r>
+            <a:r>
+              <a:rPr lang="de-DE" dirty="0" err="1"/>
+              <a:t>to</a:t>
+            </a:r>
+            <a:r>
+              <a:rPr lang="de-DE" dirty="0"/>
+              <a:t> </a:t>
+            </a:r>
+            <a:r>
+              <a:rPr lang="de-DE" dirty="0" err="1"/>
+              <a:t>the</a:t>
+            </a:r>
+            <a:r>
+              <a:rPr lang="de-DE" dirty="0"/>
+              <a:t> </a:t>
+            </a:r>
+            <a:r>
+              <a:rPr lang="de-DE" dirty="0" err="1"/>
+              <a:t>centroid</a:t>
+            </a:r>
+            <a:endParaRPr lang="de-DE" dirty="0"/>
+          </a:p>
+          <a:p>
+            <a:pPr marL="0" indent="0">
+              <a:buNone/>
+            </a:pPr>
+            <a:r>
+              <a:rPr lang="de-DE" dirty="0">
+                <a:sym typeface="Wingdings" pitchFamily="2" charset="2"/>
+              </a:rPr>
+              <a:t> </a:t>
+            </a:r>
+            <a:r>
+              <a:rPr lang="de-DE" dirty="0" err="1"/>
+              <a:t>clusters</a:t>
+            </a:r>
+            <a:r>
+              <a:rPr lang="de-DE" dirty="0"/>
+              <a:t> </a:t>
+            </a:r>
+            <a:r>
+              <a:rPr lang="de-DE" dirty="0" err="1"/>
+              <a:t>are</a:t>
+            </a:r>
+            <a:r>
+              <a:rPr lang="de-DE" dirty="0"/>
+              <a:t> </a:t>
+            </a:r>
+            <a:r>
+              <a:rPr lang="de-DE" dirty="0" err="1"/>
+              <a:t>effectively</a:t>
+            </a:r>
+            <a:r>
+              <a:rPr lang="de-DE" dirty="0"/>
+              <a:t> </a:t>
+            </a:r>
+            <a:r>
+              <a:rPr lang="de-DE" dirty="0" err="1"/>
+              <a:t>spherical</a:t>
+            </a:r>
+            <a:r>
+              <a:rPr lang="de-DE" dirty="0"/>
+              <a:t> (</a:t>
+            </a:r>
+            <a:r>
+              <a:rPr lang="de-DE" dirty="0" err="1"/>
+              <a:t>with</a:t>
+            </a:r>
+            <a:r>
+              <a:rPr lang="de-DE" dirty="0"/>
+              <a:t> </a:t>
+            </a:r>
+            <a:r>
+              <a:rPr lang="de-DE" dirty="0" err="1"/>
+              <a:t>straight</a:t>
+            </a:r>
+            <a:r>
+              <a:rPr lang="de-DE" dirty="0"/>
+              <a:t>-line </a:t>
+            </a:r>
+            <a:r>
+              <a:rPr lang="de-DE" dirty="0" err="1"/>
+              <a:t>boundaries</a:t>
+            </a:r>
+            <a:r>
+              <a:rPr lang="de-DE" dirty="0"/>
+              <a:t> in 2D)</a:t>
             </a:r>
           </a:p>
           <a:p>
@@ -12233,12 +12718,318 @@
               <a:buNone/>
             </a:pPr>
             <a:r>
+              <a:rPr lang="de-DE" dirty="0"/>
+              <a:t>In </a:t>
+            </a:r>
+            <a:r>
+              <a:rPr lang="de-DE" dirty="0" err="1"/>
+              <a:t>Gaussian</a:t>
+            </a:r>
+            <a:r>
+              <a:rPr lang="de-DE" dirty="0"/>
+              <a:t> </a:t>
+            </a:r>
+            <a:r>
+              <a:rPr lang="de-DE" dirty="0" err="1"/>
+              <a:t>Mixture</a:t>
+            </a:r>
+            <a:r>
+              <a:rPr lang="de-DE" dirty="0"/>
+              <a:t> Models (GMM), </a:t>
+            </a:r>
+            <a:r>
+              <a:rPr lang="de-DE" dirty="0" err="1"/>
+              <a:t>each</a:t>
+            </a:r>
+            <a:r>
+              <a:rPr lang="de-DE" dirty="0"/>
+              <a:t> </a:t>
+            </a:r>
+            <a:r>
+              <a:rPr lang="de-DE" dirty="0" err="1"/>
+              <a:t>cluster</a:t>
+            </a:r>
+            <a:r>
+              <a:rPr lang="de-DE" dirty="0"/>
+              <a:t> </a:t>
+            </a:r>
+            <a:r>
+              <a:rPr lang="de-DE" dirty="0" err="1"/>
+              <a:t>is</a:t>
+            </a:r>
+            <a:r>
+              <a:rPr lang="de-DE" dirty="0"/>
+              <a:t> </a:t>
+            </a:r>
+            <a:r>
+              <a:rPr lang="de-DE" dirty="0" err="1"/>
+              <a:t>modeled</a:t>
+            </a:r>
+            <a:r>
+              <a:rPr lang="de-DE" dirty="0"/>
+              <a:t> </a:t>
+            </a:r>
+            <a:r>
+              <a:rPr lang="de-DE" dirty="0" err="1"/>
+              <a:t>as</a:t>
+            </a:r>
+            <a:r>
+              <a:rPr lang="de-DE" dirty="0"/>
+              <a:t> a multivariate </a:t>
+            </a:r>
+            <a:r>
+              <a:rPr lang="de-DE" dirty="0" err="1"/>
+              <a:t>Gaussian</a:t>
+            </a:r>
+            <a:r>
+              <a:rPr lang="de-DE" dirty="0"/>
+              <a:t> </a:t>
+            </a:r>
+            <a:r>
+              <a:rPr lang="de-DE" dirty="0" err="1"/>
+              <a:t>distribution</a:t>
+            </a:r>
+            <a:r>
+              <a:rPr lang="de-DE" dirty="0"/>
+              <a:t> (</a:t>
+            </a:r>
+            <a:r>
+              <a:rPr lang="de-DE" dirty="0" err="1"/>
+              <a:t>covariance</a:t>
+            </a:r>
+            <a:r>
+              <a:rPr lang="de-DE" dirty="0"/>
+              <a:t> </a:t>
+            </a:r>
+            <a:r>
+              <a:rPr lang="de-DE" dirty="0" err="1"/>
+              <a:t>matrix</a:t>
+            </a:r>
+            <a:r>
+              <a:rPr lang="de-DE" dirty="0"/>
+              <a:t>) </a:t>
+            </a:r>
+            <a:r>
+              <a:rPr lang="de-DE" dirty="0">
+                <a:sym typeface="Wingdings" pitchFamily="2" charset="2"/>
+              </a:rPr>
+              <a:t> </a:t>
+            </a:r>
+            <a:r>
+              <a:rPr lang="de-DE" dirty="0" err="1"/>
+              <a:t>clusters</a:t>
+            </a:r>
+            <a:r>
+              <a:rPr lang="de-DE" dirty="0"/>
+              <a:t> </a:t>
+            </a:r>
+            <a:r>
+              <a:rPr lang="de-DE" dirty="0" err="1"/>
+              <a:t>can</a:t>
+            </a:r>
+            <a:r>
+              <a:rPr lang="de-DE" dirty="0"/>
+              <a:t> </a:t>
+            </a:r>
+            <a:r>
+              <a:rPr lang="de-DE" dirty="0" err="1"/>
+              <a:t>be</a:t>
+            </a:r>
+            <a:r>
+              <a:rPr lang="de-DE" dirty="0"/>
+              <a:t> </a:t>
+            </a:r>
+            <a:r>
+              <a:rPr lang="de-DE" dirty="0" err="1"/>
+              <a:t>elliptical</a:t>
+            </a:r>
+            <a:endParaRPr lang="de-DE" dirty="0"/>
+          </a:p>
+          <a:p>
+            <a:pPr marL="0" indent="0">
+              <a:buNone/>
+            </a:pPr>
+            <a:endParaRPr lang="de-DE" dirty="0"/>
+          </a:p>
+          <a:p>
+            <a:r>
               <a:rPr lang="de-DE" dirty="0" err="1"/>
               <a:t>k-Means</a:t>
             </a:r>
             <a:r>
               <a:rPr lang="de-DE" dirty="0"/>
-              <a:t>: </a:t>
+              <a:t>: Group </a:t>
+            </a:r>
+            <a:r>
+              <a:rPr lang="de-DE" dirty="0" err="1"/>
+              <a:t>points</a:t>
+            </a:r>
+            <a:r>
+              <a:rPr lang="de-DE" dirty="0"/>
+              <a:t> </a:t>
+            </a:r>
+            <a:r>
+              <a:rPr lang="de-DE" dirty="0" err="1"/>
+              <a:t>around</a:t>
+            </a:r>
+            <a:r>
+              <a:rPr lang="de-DE" dirty="0"/>
+              <a:t> </a:t>
+            </a:r>
+            <a:r>
+              <a:rPr lang="de-DE" dirty="0" err="1"/>
+              <a:t>the</a:t>
+            </a:r>
+            <a:r>
+              <a:rPr lang="de-DE" dirty="0"/>
+              <a:t> </a:t>
+            </a:r>
+            <a:r>
+              <a:rPr lang="de-DE" dirty="0" err="1"/>
+              <a:t>nearest</a:t>
+            </a:r>
+            <a:r>
+              <a:rPr lang="de-DE" dirty="0"/>
+              <a:t> </a:t>
+            </a:r>
+            <a:r>
+              <a:rPr lang="de-DE" dirty="0" err="1"/>
+              <a:t>center</a:t>
+            </a:r>
+            <a:endParaRPr lang="de-DE" dirty="0"/>
+          </a:p>
+          <a:p>
+            <a:r>
+              <a:rPr lang="de-DE" dirty="0"/>
+              <a:t>GMM: </a:t>
+            </a:r>
+            <a:r>
+              <a:rPr lang="de-DE" dirty="0" err="1"/>
+              <a:t>Assume</a:t>
+            </a:r>
+            <a:r>
+              <a:rPr lang="de-DE" dirty="0"/>
+              <a:t> </a:t>
+            </a:r>
+            <a:r>
+              <a:rPr lang="de-DE" dirty="0" err="1"/>
+              <a:t>the</a:t>
+            </a:r>
+            <a:r>
+              <a:rPr lang="de-DE" dirty="0"/>
+              <a:t> </a:t>
+            </a:r>
+            <a:r>
+              <a:rPr lang="de-DE" dirty="0" err="1"/>
+              <a:t>data</a:t>
+            </a:r>
+            <a:r>
+              <a:rPr lang="de-DE" dirty="0"/>
+              <a:t> was </a:t>
+            </a:r>
+            <a:r>
+              <a:rPr lang="de-DE" dirty="0" err="1"/>
+              <a:t>generated</a:t>
+            </a:r>
+            <a:r>
+              <a:rPr lang="de-DE" dirty="0"/>
+              <a:t> </a:t>
+            </a:r>
+            <a:r>
+              <a:rPr lang="de-DE" dirty="0" err="1"/>
+              <a:t>by</a:t>
+            </a:r>
+            <a:r>
+              <a:rPr lang="de-DE" dirty="0"/>
+              <a:t> </a:t>
+            </a:r>
+            <a:r>
+              <a:rPr lang="de-DE" dirty="0" err="1"/>
+              <a:t>several</a:t>
+            </a:r>
+            <a:r>
+              <a:rPr lang="de-DE" dirty="0"/>
+              <a:t> </a:t>
+            </a:r>
+            <a:r>
+              <a:rPr lang="de-DE" dirty="0" err="1"/>
+              <a:t>Gaussian</a:t>
+            </a:r>
+            <a:r>
+              <a:rPr lang="de-DE" dirty="0"/>
+              <a:t> </a:t>
+            </a:r>
+            <a:r>
+              <a:rPr lang="de-DE" dirty="0" err="1"/>
+              <a:t>distributions</a:t>
+            </a:r>
+            <a:r>
+              <a:rPr lang="de-DE" dirty="0"/>
+              <a:t> and </a:t>
+            </a:r>
+            <a:r>
+              <a:rPr lang="de-DE" dirty="0" err="1"/>
+              <a:t>estimate</a:t>
+            </a:r>
+            <a:r>
+              <a:rPr lang="de-DE" dirty="0"/>
+              <a:t> </a:t>
+            </a:r>
+            <a:r>
+              <a:rPr lang="de-DE" dirty="0" err="1"/>
+              <a:t>them</a:t>
+            </a:r>
+            <a:endParaRPr lang="de-DE" dirty="0"/>
+          </a:p>
+          <a:p>
+            <a:pPr marL="0" indent="0">
+              <a:buNone/>
+            </a:pPr>
+            <a:endParaRPr lang="de-DE" dirty="0"/>
+          </a:p>
+          <a:p>
+            <a:pPr marL="0" indent="0">
+              <a:buNone/>
+            </a:pPr>
+            <a:r>
+              <a:rPr lang="de-DE" dirty="0" err="1"/>
+              <a:t>k-Means</a:t>
+            </a:r>
+            <a:r>
+              <a:rPr lang="de-DE" dirty="0"/>
+              <a:t> </a:t>
+            </a:r>
+            <a:r>
+              <a:rPr lang="de-DE" dirty="0" err="1"/>
+              <a:t>can</a:t>
+            </a:r>
+            <a:r>
+              <a:rPr lang="de-DE" dirty="0"/>
+              <a:t> </a:t>
+            </a:r>
+            <a:r>
+              <a:rPr lang="de-DE" dirty="0" err="1"/>
+              <a:t>be</a:t>
+            </a:r>
+            <a:r>
+              <a:rPr lang="de-DE" dirty="0"/>
+              <a:t> </a:t>
+            </a:r>
+            <a:r>
+              <a:rPr lang="de-DE" dirty="0" err="1"/>
+              <a:t>interpreted</a:t>
+            </a:r>
+            <a:r>
+              <a:rPr lang="de-DE" dirty="0"/>
+              <a:t> </a:t>
+            </a:r>
+            <a:r>
+              <a:rPr lang="de-DE" dirty="0" err="1"/>
+              <a:t>as</a:t>
+            </a:r>
+            <a:r>
+              <a:rPr lang="de-DE" dirty="0"/>
+              <a:t> </a:t>
             </a:r>
             <a:r>
               <a:rPr lang="de-DE" dirty="0" err="1"/>
@@ -12294,11 +13085,27 @@
             </a:r>
             <a:r>
               <a:rPr lang="de-DE" dirty="0"/>
-              <a:t> </a:t>
-            </a:r>
-            <a:r>
-              <a:rPr lang="de-DE" dirty="0" err="1"/>
-              <a:t>equal</a:t>
+              <a:t> same </a:t>
+            </a:r>
+            <a:r>
+              <a:rPr lang="de-DE" dirty="0" err="1"/>
+              <a:t>variance</a:t>
+            </a:r>
+            <a:r>
+              <a:rPr lang="de-DE" dirty="0"/>
+              <a:t> in all </a:t>
+            </a:r>
+            <a:r>
+              <a:rPr lang="de-DE" dirty="0" err="1"/>
+              <a:t>directions</a:t>
+            </a:r>
+            <a:r>
+              <a:rPr lang="de-DE" dirty="0"/>
+              <a:t> and </a:t>
+            </a:r>
+            <a:r>
+              <a:rPr lang="de-DE" dirty="0" err="1"/>
+              <a:t>no</a:t>
             </a:r>
             <a:r>
               <a:rPr lang="de-DE" dirty="0"/>
@@ -12310,11 +13117,19 @@
             </a:r>
             <a:r>
               <a:rPr lang="de-DE" dirty="0"/>
-              <a:t> per </a:t>
-            </a:r>
-            <a:r>
-              <a:rPr lang="de-DE" dirty="0" err="1"/>
-              <a:t>component</a:t>
+              <a:t> </a:t>
+            </a:r>
+            <a:r>
+              <a:rPr lang="de-DE" dirty="0" err="1"/>
+              <a:t>between</a:t>
+            </a:r>
+            <a:r>
+              <a:rPr lang="de-DE" dirty="0"/>
+              <a:t> </a:t>
+            </a:r>
+            <a:r>
+              <a:rPr lang="de-DE" dirty="0" err="1"/>
+              <a:t>features</a:t>
             </a:r>
             <a:endParaRPr lang="de-DE" dirty="0"/>
           </a:p>
@@ -12343,7 +13158,7 @@
           <a:p>
             <a:fld id="{08C366F5-AFAD-49CB-854A-9D9E238FCA13}" type="slidenum">
               <a:rPr lang="en-GB" smtClean="0"/>
-              <a:t>22</a:t>
+              <a:t>24</a:t>
             </a:fld>
             <a:endParaRPr lang="en-GB"/>
           </a:p>
@@ -12362,7 +13177,7 @@
 </p:sld>
 </file>
 
-<file path=ppt/slides/slide23.xml><?xml version="1.0" encoding="utf-8"?>
+<file path=ppt/slides/slide25.xml><?xml version="1.0" encoding="utf-8"?>
 <p:sld xmlns:a="http://schemas.openxmlformats.org/drawingml/2006/main" xmlns:r="http://schemas.openxmlformats.org/officeDocument/2006/relationships" xmlns:p="http://schemas.openxmlformats.org/presentationml/2006/main">
   <p:cSld>
     <p:spTree>
@@ -12413,6 +13228,112 @@
       </p:sp>
       <p:sp>
         <p:nvSpPr>
+          <p:cNvPr id="4" name="Inhaltsplatzhalter 3">
+            <a:extLst>
+              <a:ext uri="{FF2B5EF4-FFF2-40B4-BE49-F238E27FC236}">
+                <a16:creationId xmlns:a16="http://schemas.microsoft.com/office/drawing/2014/main" id="{AED43E1A-B4C6-C600-C100-9CC8DC6410EF}"/>
+              </a:ext>
+            </a:extLst>
+          </p:cNvPr>
+          <p:cNvSpPr>
+            <a:spLocks noGrp="1"/>
+          </p:cNvSpPr>
+          <p:nvPr>
+            <p:ph idx="1"/>
+          </p:nvPr>
+        </p:nvSpPr>
+        <p:spPr/>
+        <p:txBody>
+          <a:bodyPr/>
+          <a:lstStyle/>
+          <a:p>
+            <a:r>
+              <a:rPr lang="de-DE" dirty="0" err="1"/>
+              <a:t>Builds</a:t>
+            </a:r>
+            <a:r>
+              <a:rPr lang="de-DE" dirty="0"/>
+              <a:t> a </a:t>
+            </a:r>
+            <a:r>
+              <a:rPr lang="de-DE" dirty="0" err="1"/>
+              <a:t>tree</a:t>
+            </a:r>
+            <a:r>
+              <a:rPr lang="de-DE" dirty="0"/>
+              <a:t> (</a:t>
+            </a:r>
+            <a:r>
+              <a:rPr lang="de-DE" dirty="0" err="1"/>
+              <a:t>dendrogram</a:t>
+            </a:r>
+            <a:r>
+              <a:rPr lang="de-DE" dirty="0"/>
+              <a:t>) </a:t>
+            </a:r>
+            <a:r>
+              <a:rPr lang="de-DE" dirty="0" err="1"/>
+              <a:t>of</a:t>
+            </a:r>
+            <a:r>
+              <a:rPr lang="de-DE" dirty="0"/>
+              <a:t> </a:t>
+            </a:r>
+            <a:r>
+              <a:rPr lang="de-DE" dirty="0" err="1"/>
+              <a:t>clusters</a:t>
+            </a:r>
+            <a:r>
+              <a:rPr lang="de-DE" dirty="0"/>
+              <a:t>.</a:t>
+            </a:r>
+          </a:p>
+          <a:p>
+            <a:r>
+              <a:rPr lang="de-DE" dirty="0" err="1"/>
+              <a:t>Useful</a:t>
+            </a:r>
+            <a:r>
+              <a:rPr lang="de-DE" dirty="0"/>
+              <a:t> </a:t>
+            </a:r>
+            <a:r>
+              <a:rPr lang="de-DE" dirty="0" err="1"/>
+              <a:t>for</a:t>
+            </a:r>
+            <a:r>
+              <a:rPr lang="de-DE" dirty="0"/>
+              <a:t> </a:t>
+            </a:r>
+            <a:r>
+              <a:rPr lang="de-DE" dirty="0" err="1"/>
+              <a:t>understanding</a:t>
+            </a:r>
+            <a:r>
+              <a:rPr lang="de-DE" dirty="0"/>
+              <a:t> </a:t>
+            </a:r>
+            <a:r>
+              <a:rPr lang="de-DE" dirty="0" err="1"/>
+              <a:t>nested</a:t>
+            </a:r>
+            <a:r>
+              <a:rPr lang="de-DE" dirty="0"/>
+              <a:t> </a:t>
+            </a:r>
+            <a:r>
+              <a:rPr lang="de-DE" dirty="0" err="1"/>
+              <a:t>structures</a:t>
+            </a:r>
+            <a:r>
+              <a:rPr lang="de-DE" dirty="0"/>
+              <a:t>.</a:t>
+            </a:r>
+          </a:p>
+        </p:txBody>
+      </p:sp>
+      <p:sp>
+        <p:nvSpPr>
           <p:cNvPr id="3" name="Foliennummernplatzhalter 2">
             <a:extLst>
               <a:ext uri="{FF2B5EF4-FFF2-40B4-BE49-F238E27FC236}">
@@ -12434,7 +13355,7 @@
           <a:p>
             <a:fld id="{08C366F5-AFAD-49CB-854A-9D9E238FCA13}" type="slidenum">
               <a:rPr lang="en-GB" smtClean="0"/>
-              <a:t>23</a:t>
+              <a:t>25</a:t>
             </a:fld>
             <a:endParaRPr lang="en-GB"/>
           </a:p>
@@ -12453,7 +13374,7 @@
 </p:sld>
 </file>
 
-<file path=ppt/slides/slide24.xml><?xml version="1.0" encoding="utf-8"?>
+<file path=ppt/slides/slide26.xml><?xml version="1.0" encoding="utf-8"?>
 <p:sld xmlns:a="http://schemas.openxmlformats.org/drawingml/2006/main" xmlns:r="http://schemas.openxmlformats.org/officeDocument/2006/relationships" xmlns:p="http://schemas.openxmlformats.org/presentationml/2006/main">
   <p:cSld>
     <p:spTree>
@@ -12530,7 +13451,7 @@
           <a:p>
             <a:fld id="{08C366F5-AFAD-49CB-854A-9D9E238FCA13}" type="slidenum">
               <a:rPr lang="en-GB" smtClean="0"/>
-              <a:t>24</a:t>
+              <a:t>26</a:t>
             </a:fld>
             <a:endParaRPr lang="en-GB"/>
           </a:p>
@@ -12549,7 +13470,7 @@
 </p:sld>
 </file>
 
-<file path=ppt/slides/slide25.xml><?xml version="1.0" encoding="utf-8"?>
+<file path=ppt/slides/slide27.xml><?xml version="1.0" encoding="utf-8"?>
 <p:sld xmlns:a="http://schemas.openxmlformats.org/drawingml/2006/main" xmlns:r="http://schemas.openxmlformats.org/officeDocument/2006/relationships" xmlns:p="http://schemas.openxmlformats.org/presentationml/2006/main">
   <p:cSld>
     <p:spTree>
@@ -12621,7 +13542,7 @@
           <a:p>
             <a:fld id="{08C366F5-AFAD-49CB-854A-9D9E238FCA13}" type="slidenum">
               <a:rPr lang="en-GB" smtClean="0"/>
-              <a:t>25</a:t>
+              <a:t>27</a:t>
             </a:fld>
             <a:endParaRPr lang="en-GB"/>
           </a:p>
@@ -12640,7 +13561,7 @@
 </p:sld>
 </file>
 
-<file path=ppt/slides/slide26.xml><?xml version="1.0" encoding="utf-8"?>
+<file path=ppt/slides/slide28.xml><?xml version="1.0" encoding="utf-8"?>
 <p:sld xmlns:a="http://schemas.openxmlformats.org/drawingml/2006/main" xmlns:r="http://schemas.openxmlformats.org/officeDocument/2006/relationships" xmlns:p="http://schemas.openxmlformats.org/presentationml/2006/main">
   <p:cSld>
     <p:spTree>
@@ -12695,6 +13616,72 @@
       </p:sp>
       <p:sp>
         <p:nvSpPr>
+          <p:cNvPr id="4" name="Inhaltsplatzhalter 3">
+            <a:extLst>
+              <a:ext uri="{FF2B5EF4-FFF2-40B4-BE49-F238E27FC236}">
+                <a16:creationId xmlns:a16="http://schemas.microsoft.com/office/drawing/2014/main" id="{DD30C41E-1B4C-8B40-FD0F-6A8D76270048}"/>
+              </a:ext>
+            </a:extLst>
+          </p:cNvPr>
+          <p:cNvSpPr>
+            <a:spLocks noGrp="1"/>
+          </p:cNvSpPr>
+          <p:nvPr>
+            <p:ph idx="1"/>
+          </p:nvPr>
+        </p:nvSpPr>
+        <p:spPr/>
+        <p:txBody>
+          <a:bodyPr/>
+          <a:lstStyle/>
+          <a:p>
+            <a:r>
+              <a:rPr lang="de-DE" dirty="0"/>
+              <a:t>Can </a:t>
+            </a:r>
+            <a:r>
+              <a:rPr lang="de-DE" dirty="0" err="1"/>
+              <a:t>detect</a:t>
+            </a:r>
+            <a:r>
+              <a:rPr lang="de-DE" dirty="0"/>
+              <a:t> </a:t>
+            </a:r>
+            <a:r>
+              <a:rPr lang="de-DE" dirty="0" err="1"/>
+              <a:t>irregular</a:t>
+            </a:r>
+            <a:r>
+              <a:rPr lang="de-DE" dirty="0"/>
+              <a:t> </a:t>
+            </a:r>
+            <a:r>
+              <a:rPr lang="de-DE" dirty="0" err="1"/>
+              <a:t>shapes</a:t>
+            </a:r>
+            <a:r>
+              <a:rPr lang="de-DE" dirty="0"/>
+              <a:t>.</a:t>
+            </a:r>
+          </a:p>
+          <a:p>
+            <a:r>
+              <a:rPr lang="de-DE" dirty="0"/>
+              <a:t>Handles </a:t>
+            </a:r>
+            <a:r>
+              <a:rPr lang="de-DE" dirty="0" err="1"/>
+              <a:t>outliers</a:t>
+            </a:r>
+            <a:r>
+              <a:rPr lang="de-DE" dirty="0"/>
+              <a:t>.</a:t>
+            </a:r>
+          </a:p>
+        </p:txBody>
+      </p:sp>
+      <p:sp>
+        <p:nvSpPr>
           <p:cNvPr id="3" name="Foliennummernplatzhalter 2">
             <a:extLst>
               <a:ext uri="{FF2B5EF4-FFF2-40B4-BE49-F238E27FC236}">
@@ -12716,7 +13703,7 @@
           <a:p>
             <a:fld id="{08C366F5-AFAD-49CB-854A-9D9E238FCA13}" type="slidenum">
               <a:rPr lang="en-GB" smtClean="0"/>
-              <a:t>26</a:t>
+              <a:t>28</a:t>
             </a:fld>
             <a:endParaRPr lang="en-GB"/>
           </a:p>
@@ -12735,7 +13722,7 @@
 </p:sld>
 </file>
 
-<file path=ppt/slides/slide27.xml><?xml version="1.0" encoding="utf-8"?>
+<file path=ppt/slides/slide29.xml><?xml version="1.0" encoding="utf-8"?>
 <p:sld xmlns:a="http://schemas.openxmlformats.org/drawingml/2006/main" xmlns:r="http://schemas.openxmlformats.org/officeDocument/2006/relationships" xmlns:p="http://schemas.openxmlformats.org/presentationml/2006/main">
   <p:cSld>
     <p:spTree>
@@ -12803,7 +13790,7 @@
           <a:p>
             <a:fld id="{08C366F5-AFAD-49CB-854A-9D9E238FCA13}" type="slidenum">
               <a:rPr lang="en-GB" smtClean="0"/>
-              <a:t>27</a:t>
+              <a:t>29</a:t>
             </a:fld>
             <a:endParaRPr lang="en-GB"/>
           </a:p>
@@ -12813,201 +13800,6 @@
     <p:extLst>
       <p:ext uri="{BB962C8B-B14F-4D97-AF65-F5344CB8AC3E}">
         <p14:creationId xmlns:p14="http://schemas.microsoft.com/office/powerpoint/2010/main" val="1093548525"/>
-      </p:ext>
-    </p:extLst>
-  </p:cSld>
-  <p:clrMapOvr>
-    <a:masterClrMapping/>
-  </p:clrMapOvr>
-</p:sld>
-</file>
-
-<file path=ppt/slides/slide28.xml><?xml version="1.0" encoding="utf-8"?>
-<p:sld xmlns:a="http://schemas.openxmlformats.org/drawingml/2006/main" xmlns:r="http://schemas.openxmlformats.org/officeDocument/2006/relationships" xmlns:p="http://schemas.openxmlformats.org/presentationml/2006/main">
-  <p:cSld>
-    <p:spTree>
-      <p:nvGrpSpPr>
-        <p:cNvPr id="1" name=""/>
-        <p:cNvGrpSpPr/>
-        <p:nvPr/>
-      </p:nvGrpSpPr>
-      <p:grpSpPr>
-        <a:xfrm>
-          <a:off x="0" y="0"/>
-          <a:ext cx="0" cy="0"/>
-          <a:chOff x="0" y="0"/>
-          <a:chExt cx="0" cy="0"/>
-        </a:xfrm>
-      </p:grpSpPr>
-      <p:sp>
-        <p:nvSpPr>
-          <p:cNvPr id="2" name="Titel 1">
-            <a:extLst>
-              <a:ext uri="{FF2B5EF4-FFF2-40B4-BE49-F238E27FC236}">
-                <a16:creationId xmlns:a16="http://schemas.microsoft.com/office/drawing/2014/main" id="{9AD358E7-F39E-EF65-C4C0-6907CB00234F}"/>
-              </a:ext>
-            </a:extLst>
-          </p:cNvPr>
-          <p:cNvSpPr>
-            <a:spLocks noGrp="1"/>
-          </p:cNvSpPr>
-          <p:nvPr>
-            <p:ph type="title"/>
-          </p:nvPr>
-        </p:nvSpPr>
-        <p:spPr/>
-        <p:txBody>
-          <a:bodyPr/>
-          <a:lstStyle/>
-          <a:p>
-            <a:r>
-              <a:rPr lang="de-DE" dirty="0" err="1"/>
-              <a:t>Choosing</a:t>
-            </a:r>
-            <a:r>
-              <a:rPr lang="de-DE" dirty="0"/>
-              <a:t> </a:t>
-            </a:r>
-            <a:r>
-              <a:rPr lang="el-GR" dirty="0"/>
-              <a:t>ε </a:t>
-            </a:r>
-            <a:r>
-              <a:rPr lang="de-DE" dirty="0"/>
-              <a:t>and </a:t>
-            </a:r>
-            <a:r>
-              <a:rPr lang="de-DE" dirty="0" err="1"/>
-              <a:t>min_samples</a:t>
-            </a:r>
-            <a:endParaRPr lang="de-DE" dirty="0"/>
-          </a:p>
-        </p:txBody>
-      </p:sp>
-      <p:sp>
-        <p:nvSpPr>
-          <p:cNvPr id="3" name="Foliennummernplatzhalter 2">
-            <a:extLst>
-              <a:ext uri="{FF2B5EF4-FFF2-40B4-BE49-F238E27FC236}">
-                <a16:creationId xmlns:a16="http://schemas.microsoft.com/office/drawing/2014/main" id="{7F67A71D-5771-002A-3ED3-D1F7EA87F83F}"/>
-              </a:ext>
-            </a:extLst>
-          </p:cNvPr>
-          <p:cNvSpPr>
-            <a:spLocks noGrp="1"/>
-          </p:cNvSpPr>
-          <p:nvPr>
-            <p:ph type="sldNum" sz="quarter" idx="12"/>
-          </p:nvPr>
-        </p:nvSpPr>
-        <p:spPr/>
-        <p:txBody>
-          <a:bodyPr/>
-          <a:lstStyle/>
-          <a:p>
-            <a:fld id="{08C366F5-AFAD-49CB-854A-9D9E238FCA13}" type="slidenum">
-              <a:rPr lang="en-GB" smtClean="0"/>
-              <a:t>28</a:t>
-            </a:fld>
-            <a:endParaRPr lang="en-GB"/>
-          </a:p>
-        </p:txBody>
-      </p:sp>
-    </p:spTree>
-    <p:extLst>
-      <p:ext uri="{BB962C8B-B14F-4D97-AF65-F5344CB8AC3E}">
-        <p14:creationId xmlns:p14="http://schemas.microsoft.com/office/powerpoint/2010/main" val="1011311951"/>
-      </p:ext>
-    </p:extLst>
-  </p:cSld>
-  <p:clrMapOvr>
-    <a:masterClrMapping/>
-  </p:clrMapOvr>
-</p:sld>
-</file>
-
-<file path=ppt/slides/slide29.xml><?xml version="1.0" encoding="utf-8"?>
-<p:sld xmlns:a="http://schemas.openxmlformats.org/drawingml/2006/main" xmlns:r="http://schemas.openxmlformats.org/officeDocument/2006/relationships" xmlns:p="http://schemas.openxmlformats.org/presentationml/2006/main">
-  <p:cSld>
-    <p:spTree>
-      <p:nvGrpSpPr>
-        <p:cNvPr id="1" name=""/>
-        <p:cNvGrpSpPr/>
-        <p:nvPr/>
-      </p:nvGrpSpPr>
-      <p:grpSpPr>
-        <a:xfrm>
-          <a:off x="0" y="0"/>
-          <a:ext cx="0" cy="0"/>
-          <a:chOff x="0" y="0"/>
-          <a:chExt cx="0" cy="0"/>
-        </a:xfrm>
-      </p:grpSpPr>
-      <p:sp>
-        <p:nvSpPr>
-          <p:cNvPr id="2" name="Titel 1">
-            <a:extLst>
-              <a:ext uri="{FF2B5EF4-FFF2-40B4-BE49-F238E27FC236}">
-                <a16:creationId xmlns:a16="http://schemas.microsoft.com/office/drawing/2014/main" id="{AB0A312D-A6FF-AB8E-359F-EE1BDB1D4399}"/>
-              </a:ext>
-            </a:extLst>
-          </p:cNvPr>
-          <p:cNvSpPr>
-            <a:spLocks noGrp="1"/>
-          </p:cNvSpPr>
-          <p:nvPr>
-            <p:ph type="title"/>
-          </p:nvPr>
-        </p:nvSpPr>
-        <p:spPr/>
-        <p:txBody>
-          <a:bodyPr/>
-          <a:lstStyle/>
-          <a:p>
-            <a:r>
-              <a:rPr lang="de-DE" dirty="0" err="1"/>
-              <a:t>Comparing</a:t>
-            </a:r>
-            <a:r>
-              <a:rPr lang="de-DE" dirty="0"/>
-              <a:t> Clustering Methods</a:t>
-            </a:r>
-          </a:p>
-        </p:txBody>
-      </p:sp>
-      <p:sp>
-        <p:nvSpPr>
-          <p:cNvPr id="3" name="Foliennummernplatzhalter 2">
-            <a:extLst>
-              <a:ext uri="{FF2B5EF4-FFF2-40B4-BE49-F238E27FC236}">
-                <a16:creationId xmlns:a16="http://schemas.microsoft.com/office/drawing/2014/main" id="{6EFA0DEA-9C10-4341-0996-B658FBE37513}"/>
-              </a:ext>
-            </a:extLst>
-          </p:cNvPr>
-          <p:cNvSpPr>
-            <a:spLocks noGrp="1"/>
-          </p:cNvSpPr>
-          <p:nvPr>
-            <p:ph type="sldNum" sz="quarter" idx="12"/>
-          </p:nvPr>
-        </p:nvSpPr>
-        <p:spPr/>
-        <p:txBody>
-          <a:bodyPr/>
-          <a:lstStyle/>
-          <a:p>
-            <a:fld id="{08C366F5-AFAD-49CB-854A-9D9E238FCA13}" type="slidenum">
-              <a:rPr lang="en-GB" smtClean="0"/>
-              <a:t>29</a:t>
-            </a:fld>
-            <a:endParaRPr lang="en-GB"/>
-          </a:p>
-        </p:txBody>
-      </p:sp>
-    </p:spTree>
-    <p:extLst>
-      <p:ext uri="{BB962C8B-B14F-4D97-AF65-F5344CB8AC3E}">
-        <p14:creationId xmlns:p14="http://schemas.microsoft.com/office/powerpoint/2010/main" val="2928299488"/>
       </p:ext>
     </p:extLst>
   </p:cSld>
@@ -13161,6 +13953,201 @@
     <p:extLst>
       <p:ext uri="{BB962C8B-B14F-4D97-AF65-F5344CB8AC3E}">
         <p14:creationId xmlns:p14="http://schemas.microsoft.com/office/powerpoint/2010/main" val="3204133960"/>
+      </p:ext>
+    </p:extLst>
+  </p:cSld>
+  <p:clrMapOvr>
+    <a:masterClrMapping/>
+  </p:clrMapOvr>
+</p:sld>
+</file>
+
+<file path=ppt/slides/slide30.xml><?xml version="1.0" encoding="utf-8"?>
+<p:sld xmlns:a="http://schemas.openxmlformats.org/drawingml/2006/main" xmlns:r="http://schemas.openxmlformats.org/officeDocument/2006/relationships" xmlns:p="http://schemas.openxmlformats.org/presentationml/2006/main">
+  <p:cSld>
+    <p:spTree>
+      <p:nvGrpSpPr>
+        <p:cNvPr id="1" name=""/>
+        <p:cNvGrpSpPr/>
+        <p:nvPr/>
+      </p:nvGrpSpPr>
+      <p:grpSpPr>
+        <a:xfrm>
+          <a:off x="0" y="0"/>
+          <a:ext cx="0" cy="0"/>
+          <a:chOff x="0" y="0"/>
+          <a:chExt cx="0" cy="0"/>
+        </a:xfrm>
+      </p:grpSpPr>
+      <p:sp>
+        <p:nvSpPr>
+          <p:cNvPr id="2" name="Titel 1">
+            <a:extLst>
+              <a:ext uri="{FF2B5EF4-FFF2-40B4-BE49-F238E27FC236}">
+                <a16:creationId xmlns:a16="http://schemas.microsoft.com/office/drawing/2014/main" id="{9AD358E7-F39E-EF65-C4C0-6907CB00234F}"/>
+              </a:ext>
+            </a:extLst>
+          </p:cNvPr>
+          <p:cNvSpPr>
+            <a:spLocks noGrp="1"/>
+          </p:cNvSpPr>
+          <p:nvPr>
+            <p:ph type="title"/>
+          </p:nvPr>
+        </p:nvSpPr>
+        <p:spPr/>
+        <p:txBody>
+          <a:bodyPr/>
+          <a:lstStyle/>
+          <a:p>
+            <a:r>
+              <a:rPr lang="de-DE" dirty="0" err="1"/>
+              <a:t>Choosing</a:t>
+            </a:r>
+            <a:r>
+              <a:rPr lang="de-DE" dirty="0"/>
+              <a:t> </a:t>
+            </a:r>
+            <a:r>
+              <a:rPr lang="el-GR" dirty="0"/>
+              <a:t>ε </a:t>
+            </a:r>
+            <a:r>
+              <a:rPr lang="de-DE" dirty="0"/>
+              <a:t>and </a:t>
+            </a:r>
+            <a:r>
+              <a:rPr lang="de-DE" dirty="0" err="1"/>
+              <a:t>min_samples</a:t>
+            </a:r>
+            <a:endParaRPr lang="de-DE" dirty="0"/>
+          </a:p>
+        </p:txBody>
+      </p:sp>
+      <p:sp>
+        <p:nvSpPr>
+          <p:cNvPr id="3" name="Foliennummernplatzhalter 2">
+            <a:extLst>
+              <a:ext uri="{FF2B5EF4-FFF2-40B4-BE49-F238E27FC236}">
+                <a16:creationId xmlns:a16="http://schemas.microsoft.com/office/drawing/2014/main" id="{7F67A71D-5771-002A-3ED3-D1F7EA87F83F}"/>
+              </a:ext>
+            </a:extLst>
+          </p:cNvPr>
+          <p:cNvSpPr>
+            <a:spLocks noGrp="1"/>
+          </p:cNvSpPr>
+          <p:nvPr>
+            <p:ph type="sldNum" sz="quarter" idx="12"/>
+          </p:nvPr>
+        </p:nvSpPr>
+        <p:spPr/>
+        <p:txBody>
+          <a:bodyPr/>
+          <a:lstStyle/>
+          <a:p>
+            <a:fld id="{08C366F5-AFAD-49CB-854A-9D9E238FCA13}" type="slidenum">
+              <a:rPr lang="en-GB" smtClean="0"/>
+              <a:t>30</a:t>
+            </a:fld>
+            <a:endParaRPr lang="en-GB"/>
+          </a:p>
+        </p:txBody>
+      </p:sp>
+    </p:spTree>
+    <p:extLst>
+      <p:ext uri="{BB962C8B-B14F-4D97-AF65-F5344CB8AC3E}">
+        <p14:creationId xmlns:p14="http://schemas.microsoft.com/office/powerpoint/2010/main" val="1011311951"/>
+      </p:ext>
+    </p:extLst>
+  </p:cSld>
+  <p:clrMapOvr>
+    <a:masterClrMapping/>
+  </p:clrMapOvr>
+</p:sld>
+</file>
+
+<file path=ppt/slides/slide31.xml><?xml version="1.0" encoding="utf-8"?>
+<p:sld xmlns:a="http://schemas.openxmlformats.org/drawingml/2006/main" xmlns:r="http://schemas.openxmlformats.org/officeDocument/2006/relationships" xmlns:p="http://schemas.openxmlformats.org/presentationml/2006/main">
+  <p:cSld>
+    <p:spTree>
+      <p:nvGrpSpPr>
+        <p:cNvPr id="1" name=""/>
+        <p:cNvGrpSpPr/>
+        <p:nvPr/>
+      </p:nvGrpSpPr>
+      <p:grpSpPr>
+        <a:xfrm>
+          <a:off x="0" y="0"/>
+          <a:ext cx="0" cy="0"/>
+          <a:chOff x="0" y="0"/>
+          <a:chExt cx="0" cy="0"/>
+        </a:xfrm>
+      </p:grpSpPr>
+      <p:sp>
+        <p:nvSpPr>
+          <p:cNvPr id="2" name="Titel 1">
+            <a:extLst>
+              <a:ext uri="{FF2B5EF4-FFF2-40B4-BE49-F238E27FC236}">
+                <a16:creationId xmlns:a16="http://schemas.microsoft.com/office/drawing/2014/main" id="{AB0A312D-A6FF-AB8E-359F-EE1BDB1D4399}"/>
+              </a:ext>
+            </a:extLst>
+          </p:cNvPr>
+          <p:cNvSpPr>
+            <a:spLocks noGrp="1"/>
+          </p:cNvSpPr>
+          <p:nvPr>
+            <p:ph type="title"/>
+          </p:nvPr>
+        </p:nvSpPr>
+        <p:spPr/>
+        <p:txBody>
+          <a:bodyPr/>
+          <a:lstStyle/>
+          <a:p>
+            <a:r>
+              <a:rPr lang="de-DE" dirty="0" err="1"/>
+              <a:t>Comparing</a:t>
+            </a:r>
+            <a:r>
+              <a:rPr lang="de-DE" dirty="0"/>
+              <a:t> Clustering Methods</a:t>
+            </a:r>
+          </a:p>
+        </p:txBody>
+      </p:sp>
+      <p:sp>
+        <p:nvSpPr>
+          <p:cNvPr id="3" name="Foliennummernplatzhalter 2">
+            <a:extLst>
+              <a:ext uri="{FF2B5EF4-FFF2-40B4-BE49-F238E27FC236}">
+                <a16:creationId xmlns:a16="http://schemas.microsoft.com/office/drawing/2014/main" id="{6EFA0DEA-9C10-4341-0996-B658FBE37513}"/>
+              </a:ext>
+            </a:extLst>
+          </p:cNvPr>
+          <p:cNvSpPr>
+            <a:spLocks noGrp="1"/>
+          </p:cNvSpPr>
+          <p:nvPr>
+            <p:ph type="sldNum" sz="quarter" idx="12"/>
+          </p:nvPr>
+        </p:nvSpPr>
+        <p:spPr/>
+        <p:txBody>
+          <a:bodyPr/>
+          <a:lstStyle/>
+          <a:p>
+            <a:fld id="{08C366F5-AFAD-49CB-854A-9D9E238FCA13}" type="slidenum">
+              <a:rPr lang="en-GB" smtClean="0"/>
+              <a:t>31</a:t>
+            </a:fld>
+            <a:endParaRPr lang="en-GB"/>
+          </a:p>
+        </p:txBody>
+      </p:sp>
+    </p:spTree>
+    <p:extLst>
+      <p:ext uri="{BB962C8B-B14F-4D97-AF65-F5344CB8AC3E}">
+        <p14:creationId xmlns:p14="http://schemas.microsoft.com/office/powerpoint/2010/main" val="2928299488"/>
       </p:ext>
     </p:extLst>
   </p:cSld>

--- a/slides/2_clustering.pptx
+++ b/slides/2_clustering.pptx
@@ -5,7 +5,7 @@
     <p:sldMasterId id="2147483648" r:id="rId1"/>
   </p:sldMasterIdLst>
   <p:notesMasterIdLst>
-    <p:notesMasterId r:id="rId33"/>
+    <p:notesMasterId r:id="rId37"/>
   </p:notesMasterIdLst>
   <p:sldIdLst>
     <p:sldId id="256" r:id="rId2"/>
@@ -16,29 +16,33 @@
     <p:sldId id="285" r:id="rId7"/>
     <p:sldId id="271" r:id="rId8"/>
     <p:sldId id="289" r:id="rId9"/>
-    <p:sldId id="267" r:id="rId10"/>
-    <p:sldId id="268" r:id="rId11"/>
-    <p:sldId id="272" r:id="rId12"/>
-    <p:sldId id="290" r:id="rId13"/>
-    <p:sldId id="292" r:id="rId14"/>
-    <p:sldId id="274" r:id="rId15"/>
-    <p:sldId id="288" r:id="rId16"/>
-    <p:sldId id="273" r:id="rId17"/>
-    <p:sldId id="293" r:id="rId18"/>
-    <p:sldId id="282" r:id="rId19"/>
-    <p:sldId id="294" r:id="rId20"/>
-    <p:sldId id="291" r:id="rId21"/>
-    <p:sldId id="283" r:id="rId22"/>
-    <p:sldId id="295" r:id="rId23"/>
-    <p:sldId id="296" r:id="rId24"/>
-    <p:sldId id="286" r:id="rId25"/>
+    <p:sldId id="268" r:id="rId10"/>
+    <p:sldId id="272" r:id="rId11"/>
+    <p:sldId id="290" r:id="rId12"/>
+    <p:sldId id="292" r:id="rId13"/>
+    <p:sldId id="274" r:id="rId14"/>
+    <p:sldId id="288" r:id="rId15"/>
+    <p:sldId id="273" r:id="rId16"/>
+    <p:sldId id="293" r:id="rId17"/>
+    <p:sldId id="282" r:id="rId18"/>
+    <p:sldId id="294" r:id="rId19"/>
+    <p:sldId id="291" r:id="rId20"/>
+    <p:sldId id="283" r:id="rId21"/>
+    <p:sldId id="295" r:id="rId22"/>
+    <p:sldId id="296" r:id="rId23"/>
+    <p:sldId id="286" r:id="rId24"/>
+    <p:sldId id="297" r:id="rId25"/>
     <p:sldId id="275" r:id="rId26"/>
-    <p:sldId id="276" r:id="rId27"/>
-    <p:sldId id="277" r:id="rId28"/>
-    <p:sldId id="278" r:id="rId29"/>
-    <p:sldId id="279" r:id="rId30"/>
-    <p:sldId id="280" r:id="rId31"/>
-    <p:sldId id="281" r:id="rId32"/>
+    <p:sldId id="298" r:id="rId27"/>
+    <p:sldId id="301" r:id="rId28"/>
+    <p:sldId id="276" r:id="rId29"/>
+    <p:sldId id="277" r:id="rId30"/>
+    <p:sldId id="278" r:id="rId31"/>
+    <p:sldId id="279" r:id="rId32"/>
+    <p:sldId id="303" r:id="rId33"/>
+    <p:sldId id="280" r:id="rId34"/>
+    <p:sldId id="281" r:id="rId35"/>
+    <p:sldId id="302" r:id="rId36"/>
   </p:sldIdLst>
   <p:sldSz cx="12192000" cy="6858000"/>
   <p:notesSz cx="6858000" cy="9144000"/>
@@ -509,7 +513,7 @@
           <a:p>
             <a:fld id="{506E0FD1-891F-4B1E-916D-E9B585160BB8}" type="datetimeFigureOut">
               <a:rPr lang="en-GB" smtClean="0"/>
-              <a:t>18/03/2026</a:t>
+              <a:t>19/03/2026</a:t>
             </a:fld>
             <a:endParaRPr lang="en-GB"/>
           </a:p>
@@ -926,7 +930,7 @@
           <a:p>
             <a:fld id="{D68C3F22-27B2-44E3-9C5F-D08126455F6F}" type="datetime1">
               <a:rPr lang="en-GB" smtClean="0"/>
-              <a:t>18/03/2026</a:t>
+              <a:t>19/03/2026</a:t>
             </a:fld>
             <a:endParaRPr lang="en-GB"/>
           </a:p>
@@ -1126,7 +1130,7 @@
           <a:p>
             <a:fld id="{1CD03846-7BF6-4FB6-A921-FF3379ADBD4C}" type="datetime1">
               <a:rPr lang="en-GB" smtClean="0"/>
-              <a:t>18/03/2026</a:t>
+              <a:t>19/03/2026</a:t>
             </a:fld>
             <a:endParaRPr lang="en-GB"/>
           </a:p>
@@ -1336,7 +1340,7 @@
           <a:p>
             <a:fld id="{99E1B91A-3FD0-4144-9C84-63E9688ED2FE}" type="datetime1">
               <a:rPr lang="en-GB" smtClean="0"/>
-              <a:t>18/03/2026</a:t>
+              <a:t>19/03/2026</a:t>
             </a:fld>
             <a:endParaRPr lang="en-GB"/>
           </a:p>
@@ -1536,7 +1540,7 @@
           <a:p>
             <a:fld id="{5295ED7B-FEAD-4734-819F-93EF4B0EA908}" type="datetime1">
               <a:rPr lang="en-GB" smtClean="0"/>
-              <a:t>18/03/2026</a:t>
+              <a:t>19/03/2026</a:t>
             </a:fld>
             <a:endParaRPr lang="en-GB"/>
           </a:p>
@@ -1812,7 +1816,7 @@
           <a:p>
             <a:fld id="{D2D5D4B4-C926-4B45-8815-1ED8911179A2}" type="datetime1">
               <a:rPr lang="en-GB" smtClean="0"/>
-              <a:t>18/03/2026</a:t>
+              <a:t>19/03/2026</a:t>
             </a:fld>
             <a:endParaRPr lang="en-GB"/>
           </a:p>
@@ -2080,7 +2084,7 @@
           <a:p>
             <a:fld id="{B4C5210A-0E37-4935-93AF-69F21A5F712F}" type="datetime1">
               <a:rPr lang="en-GB" smtClean="0"/>
-              <a:t>18/03/2026</a:t>
+              <a:t>19/03/2026</a:t>
             </a:fld>
             <a:endParaRPr lang="en-GB"/>
           </a:p>
@@ -2495,7 +2499,7 @@
           <a:p>
             <a:fld id="{3D3A6B2F-436C-4691-80E8-9C890E000E9D}" type="datetime1">
               <a:rPr lang="en-GB" smtClean="0"/>
-              <a:t>18/03/2026</a:t>
+              <a:t>19/03/2026</a:t>
             </a:fld>
             <a:endParaRPr lang="en-GB"/>
           </a:p>
@@ -2637,7 +2641,7 @@
           <a:p>
             <a:fld id="{84385F4C-D74B-496F-8D21-97E3549C783B}" type="datetime1">
               <a:rPr lang="en-GB" smtClean="0"/>
-              <a:t>18/03/2026</a:t>
+              <a:t>19/03/2026</a:t>
             </a:fld>
             <a:endParaRPr lang="en-GB"/>
           </a:p>
@@ -2750,7 +2754,7 @@
           <a:p>
             <a:fld id="{0CBDCB32-C241-4703-A832-4EB47BD54E83}" type="datetime1">
               <a:rPr lang="en-GB" smtClean="0"/>
-              <a:t>18/03/2026</a:t>
+              <a:t>19/03/2026</a:t>
             </a:fld>
             <a:endParaRPr lang="en-GB"/>
           </a:p>
@@ -3063,7 +3067,7 @@
           <a:p>
             <a:fld id="{85C150FF-BE95-4D25-A16A-E368A81CBF24}" type="datetime1">
               <a:rPr lang="en-GB" smtClean="0"/>
-              <a:t>18/03/2026</a:t>
+              <a:t>19/03/2026</a:t>
             </a:fld>
             <a:endParaRPr lang="en-GB"/>
           </a:p>
@@ -3352,7 +3356,7 @@
           <a:p>
             <a:fld id="{F3C5DB4B-B349-43C9-A424-BADA723AD9F1}" type="datetime1">
               <a:rPr lang="en-GB" smtClean="0"/>
-              <a:t>18/03/2026</a:t>
+              <a:t>19/03/2026</a:t>
             </a:fld>
             <a:endParaRPr lang="en-GB"/>
           </a:p>
@@ -3595,7 +3599,7 @@
           <a:p>
             <a:fld id="{12632426-0A0C-405F-A3D0-2D11AA44702A}" type="datetime1">
               <a:rPr lang="en-GB" smtClean="0"/>
-              <a:t>18/03/2026</a:t>
+              <a:t>19/03/2026</a:t>
             </a:fld>
             <a:endParaRPr lang="en-GB"/>
           </a:p>
@@ -4099,647 +4103,6 @@
           <a:chExt cx="0" cy="0"/>
         </a:xfrm>
       </p:grpSpPr>
-      <p:pic>
-        <p:nvPicPr>
-          <p:cNvPr id="2050" name="Picture 2" descr="K-means clustering on the digits dataset (PCA-reduced data) Centroids are marked with white cross">
-            <a:extLst>
-              <a:ext uri="{FF2B5EF4-FFF2-40B4-BE49-F238E27FC236}">
-                <a16:creationId xmlns:a16="http://schemas.microsoft.com/office/drawing/2014/main" id="{B44A8871-A62C-5BCB-319E-EB2705B9E077}"/>
-              </a:ext>
-            </a:extLst>
-          </p:cNvPr>
-          <p:cNvPicPr>
-            <a:picLocks noChangeAspect="1" noChangeArrowheads="1"/>
-          </p:cNvPicPr>
-          <p:nvPr/>
-        </p:nvPicPr>
-        <p:blipFill>
-          <a:blip r:embed="rId2">
-            <a:extLst>
-              <a:ext uri="{28A0092B-C50C-407E-A947-70E740481C1C}">
-                <a14:useLocalDpi xmlns:a14="http://schemas.microsoft.com/office/drawing/2010/main" val="0"/>
-              </a:ext>
-            </a:extLst>
-          </a:blip>
-          <a:srcRect/>
-          <a:stretch>
-            <a:fillRect/>
-          </a:stretch>
-        </p:blipFill>
-        <p:spPr bwMode="auto">
-          <a:xfrm>
-            <a:off x="5294795" y="1319972"/>
-            <a:ext cx="6897205" cy="5172903"/>
-          </a:xfrm>
-          <a:prstGeom prst="rect">
-            <a:avLst/>
-          </a:prstGeom>
-          <a:noFill/>
-          <a:extLst>
-            <a:ext uri="{909E8E84-426E-40DD-AFC4-6F175D3DCCD1}">
-              <a14:hiddenFill xmlns:a14="http://schemas.microsoft.com/office/drawing/2010/main">
-                <a:solidFill>
-                  <a:srgbClr val="FFFFFF"/>
-                </a:solidFill>
-              </a14:hiddenFill>
-            </a:ext>
-          </a:extLst>
-        </p:spPr>
-      </p:pic>
-      <p:sp>
-        <p:nvSpPr>
-          <p:cNvPr id="3" name="Titel 2">
-            <a:extLst>
-              <a:ext uri="{FF2B5EF4-FFF2-40B4-BE49-F238E27FC236}">
-                <a16:creationId xmlns:a16="http://schemas.microsoft.com/office/drawing/2014/main" id="{3E5EF26E-96B1-27BE-03F5-79AA27F58A84}"/>
-              </a:ext>
-            </a:extLst>
-          </p:cNvPr>
-          <p:cNvSpPr>
-            <a:spLocks noGrp="1"/>
-          </p:cNvSpPr>
-          <p:nvPr>
-            <p:ph type="title"/>
-          </p:nvPr>
-        </p:nvSpPr>
-        <p:spPr/>
-        <p:txBody>
-          <a:bodyPr/>
-          <a:lstStyle/>
-          <a:p>
-            <a:r>
-              <a:rPr lang="de-DE" dirty="0" err="1"/>
-              <a:t>k-Means</a:t>
-            </a:r>
-            <a:r>
-              <a:rPr lang="de-DE" dirty="0"/>
-              <a:t>: Intuition</a:t>
-            </a:r>
-          </a:p>
-        </p:txBody>
-      </p:sp>
-      <p:sp>
-        <p:nvSpPr>
-          <p:cNvPr id="4" name="Inhaltsplatzhalter 3">
-            <a:extLst>
-              <a:ext uri="{FF2B5EF4-FFF2-40B4-BE49-F238E27FC236}">
-                <a16:creationId xmlns:a16="http://schemas.microsoft.com/office/drawing/2014/main" id="{3145C140-32EF-08E0-AEC7-D57455757080}"/>
-              </a:ext>
-            </a:extLst>
-          </p:cNvPr>
-          <p:cNvSpPr>
-            <a:spLocks noGrp="1"/>
-          </p:cNvSpPr>
-          <p:nvPr>
-            <p:ph idx="1"/>
-          </p:nvPr>
-        </p:nvSpPr>
-        <p:spPr>
-          <a:xfrm>
-            <a:off x="838200" y="1825625"/>
-            <a:ext cx="4817165" cy="4351338"/>
-          </a:xfrm>
-        </p:spPr>
-        <p:txBody>
-          <a:bodyPr>
-            <a:normAutofit lnSpcReduction="10000"/>
-          </a:bodyPr>
-          <a:lstStyle/>
-          <a:p>
-            <a:pPr marL="0" indent="0">
-              <a:buNone/>
-            </a:pPr>
-            <a:r>
-              <a:rPr lang="de-DE" dirty="0"/>
-              <a:t>divide a </a:t>
-            </a:r>
-            <a:r>
-              <a:rPr lang="de-DE" dirty="0" err="1"/>
-              <a:t>dataset</a:t>
-            </a:r>
-            <a:r>
-              <a:rPr lang="de-DE" dirty="0"/>
-              <a:t> </a:t>
-            </a:r>
-            <a:r>
-              <a:rPr lang="de-DE" dirty="0" err="1"/>
-              <a:t>into</a:t>
-            </a:r>
-            <a:r>
-              <a:rPr lang="de-DE" dirty="0"/>
-              <a:t> </a:t>
-            </a:r>
-            <a:r>
-              <a:rPr lang="de-DE" dirty="0" err="1"/>
-              <a:t>k</a:t>
-            </a:r>
-            <a:r>
-              <a:rPr lang="de-DE" dirty="0"/>
-              <a:t> </a:t>
-            </a:r>
-            <a:r>
-              <a:rPr lang="de-DE" dirty="0" err="1"/>
-              <a:t>clusters</a:t>
-            </a:r>
-            <a:endParaRPr lang="de-DE" dirty="0"/>
-          </a:p>
-          <a:p>
-            <a:pPr marL="0" indent="0">
-              <a:buNone/>
-            </a:pPr>
-            <a:endParaRPr lang="de-DE" dirty="0"/>
-          </a:p>
-          <a:p>
-            <a:pPr marL="0" indent="0">
-              <a:buNone/>
-            </a:pPr>
-            <a:r>
-              <a:rPr lang="de-DE" dirty="0" err="1"/>
-              <a:t>k</a:t>
-            </a:r>
-            <a:r>
-              <a:rPr lang="de-DE" dirty="0"/>
-              <a:t> </a:t>
-            </a:r>
-            <a:r>
-              <a:rPr lang="de-DE" dirty="0" err="1"/>
-              <a:t>is</a:t>
-            </a:r>
-            <a:r>
-              <a:rPr lang="de-DE" dirty="0"/>
-              <a:t> a </a:t>
-            </a:r>
-            <a:r>
-              <a:rPr lang="de-DE" dirty="0" err="1"/>
-              <a:t>hyperparameter</a:t>
-            </a:r>
-            <a:r>
-              <a:rPr lang="de-DE" dirty="0"/>
-              <a:t> (</a:t>
-            </a:r>
-            <a:r>
-              <a:rPr lang="de-DE" dirty="0" err="1"/>
-              <a:t>to</a:t>
-            </a:r>
-            <a:r>
-              <a:rPr lang="de-DE" dirty="0"/>
-              <a:t> </a:t>
-            </a:r>
-            <a:r>
-              <a:rPr lang="de-DE" dirty="0" err="1"/>
-              <a:t>be</a:t>
-            </a:r>
-            <a:r>
-              <a:rPr lang="de-DE" dirty="0"/>
-              <a:t> </a:t>
-            </a:r>
-            <a:r>
-              <a:rPr lang="de-DE" dirty="0" err="1"/>
-              <a:t>set</a:t>
-            </a:r>
-            <a:r>
-              <a:rPr lang="de-DE" dirty="0"/>
-              <a:t> </a:t>
-            </a:r>
-            <a:r>
-              <a:rPr lang="de-DE" dirty="0" err="1"/>
-              <a:t>before</a:t>
-            </a:r>
-            <a:r>
-              <a:rPr lang="de-DE" dirty="0"/>
-              <a:t> </a:t>
-            </a:r>
-            <a:r>
-              <a:rPr lang="de-DE" dirty="0" err="1"/>
-              <a:t>the</a:t>
-            </a:r>
-            <a:r>
-              <a:rPr lang="de-DE" dirty="0"/>
-              <a:t> </a:t>
-            </a:r>
-            <a:r>
-              <a:rPr lang="de-DE" dirty="0" err="1"/>
-              <a:t>algorithm</a:t>
-            </a:r>
-            <a:r>
-              <a:rPr lang="de-DE" dirty="0"/>
-              <a:t> </a:t>
-            </a:r>
-            <a:r>
-              <a:rPr lang="de-DE" dirty="0" err="1"/>
-              <a:t>runs</a:t>
-            </a:r>
-            <a:r>
-              <a:rPr lang="de-DE" dirty="0"/>
-              <a:t>)</a:t>
-            </a:r>
-          </a:p>
-          <a:p>
-            <a:pPr marL="0" indent="0">
-              <a:buNone/>
-            </a:pPr>
-            <a:endParaRPr lang="de-DE" dirty="0"/>
-          </a:p>
-          <a:p>
-            <a:pPr marL="0" indent="0">
-              <a:buNone/>
-            </a:pPr>
-            <a:r>
-              <a:rPr lang="de-DE" dirty="0" err="1"/>
-              <a:t>each</a:t>
-            </a:r>
-            <a:r>
-              <a:rPr lang="de-DE" dirty="0"/>
-              <a:t> </a:t>
-            </a:r>
-            <a:r>
-              <a:rPr lang="de-DE" dirty="0" err="1"/>
-              <a:t>cluster</a:t>
-            </a:r>
-            <a:r>
-              <a:rPr lang="de-DE" dirty="0"/>
-              <a:t> </a:t>
-            </a:r>
-            <a:r>
-              <a:rPr lang="de-DE" dirty="0" err="1"/>
-              <a:t>is</a:t>
-            </a:r>
-            <a:r>
-              <a:rPr lang="de-DE" dirty="0"/>
-              <a:t> </a:t>
-            </a:r>
-            <a:r>
-              <a:rPr lang="de-DE" dirty="0" err="1"/>
-              <a:t>represented</a:t>
-            </a:r>
-            <a:r>
-              <a:rPr lang="de-DE" dirty="0"/>
-              <a:t> </a:t>
-            </a:r>
-            <a:r>
-              <a:rPr lang="de-DE" dirty="0" err="1"/>
-              <a:t>by</a:t>
-            </a:r>
-            <a:r>
-              <a:rPr lang="de-DE" dirty="0"/>
-              <a:t> </a:t>
-            </a:r>
-            <a:r>
-              <a:rPr lang="de-DE" dirty="0" err="1"/>
-              <a:t>its</a:t>
-            </a:r>
-            <a:r>
-              <a:rPr lang="de-DE" dirty="0"/>
-              <a:t> </a:t>
-            </a:r>
-            <a:r>
-              <a:rPr lang="de-DE" dirty="0" err="1"/>
-              <a:t>centroid</a:t>
-            </a:r>
-            <a:r>
-              <a:rPr lang="de-DE" dirty="0"/>
-              <a:t> (</a:t>
-            </a:r>
-            <a:r>
-              <a:rPr lang="de-DE" dirty="0" err="1"/>
-              <a:t>mean</a:t>
-            </a:r>
-            <a:r>
-              <a:rPr lang="de-DE" dirty="0"/>
-              <a:t> </a:t>
-            </a:r>
-            <a:r>
-              <a:rPr lang="de-DE" dirty="0" err="1"/>
-              <a:t>point</a:t>
-            </a:r>
-            <a:r>
-              <a:rPr lang="de-DE" dirty="0"/>
-              <a:t>)</a:t>
-            </a:r>
-          </a:p>
-          <a:p>
-            <a:pPr marL="0" indent="0">
-              <a:buNone/>
-            </a:pPr>
-            <a:endParaRPr lang="de-DE" dirty="0"/>
-          </a:p>
-          <a:p>
-            <a:pPr marL="0" indent="0">
-              <a:buNone/>
-            </a:pPr>
-            <a:r>
-              <a:rPr lang="de-DE" dirty="0" err="1"/>
-              <a:t>each</a:t>
-            </a:r>
-            <a:r>
-              <a:rPr lang="de-DE" dirty="0"/>
-              <a:t> </a:t>
-            </a:r>
-            <a:r>
-              <a:rPr lang="de-DE" dirty="0" err="1"/>
-              <a:t>data</a:t>
-            </a:r>
-            <a:r>
-              <a:rPr lang="de-DE" dirty="0"/>
-              <a:t> </a:t>
-            </a:r>
-            <a:r>
-              <a:rPr lang="de-DE" dirty="0" err="1"/>
-              <a:t>point</a:t>
-            </a:r>
-            <a:r>
-              <a:rPr lang="de-DE" dirty="0"/>
-              <a:t> </a:t>
-            </a:r>
-            <a:r>
-              <a:rPr lang="de-DE" dirty="0" err="1"/>
-              <a:t>is</a:t>
-            </a:r>
-            <a:r>
-              <a:rPr lang="de-DE" dirty="0"/>
-              <a:t> </a:t>
-            </a:r>
-            <a:r>
-              <a:rPr lang="de-DE" dirty="0" err="1"/>
-              <a:t>assigned</a:t>
-            </a:r>
-            <a:r>
-              <a:rPr lang="de-DE" dirty="0"/>
-              <a:t> </a:t>
-            </a:r>
-            <a:r>
-              <a:rPr lang="de-DE" dirty="0" err="1"/>
-              <a:t>to</a:t>
-            </a:r>
-            <a:r>
-              <a:rPr lang="de-DE" dirty="0"/>
-              <a:t> </a:t>
-            </a:r>
-            <a:r>
-              <a:rPr lang="de-DE" dirty="0" err="1"/>
-              <a:t>the</a:t>
-            </a:r>
-            <a:r>
-              <a:rPr lang="de-DE" dirty="0"/>
-              <a:t> </a:t>
-            </a:r>
-            <a:r>
-              <a:rPr lang="de-DE" dirty="0" err="1"/>
-              <a:t>nearest</a:t>
-            </a:r>
-            <a:r>
-              <a:rPr lang="de-DE" dirty="0"/>
-              <a:t> </a:t>
-            </a:r>
-            <a:r>
-              <a:rPr lang="de-DE" dirty="0" err="1"/>
-              <a:t>centroid</a:t>
-            </a:r>
-            <a:endParaRPr lang="de-DE" dirty="0"/>
-          </a:p>
-          <a:p>
-            <a:pPr marL="0" indent="0">
-              <a:buNone/>
-            </a:pPr>
-            <a:endParaRPr lang="de-DE" dirty="0"/>
-          </a:p>
-        </p:txBody>
-      </p:sp>
-      <p:sp>
-        <p:nvSpPr>
-          <p:cNvPr id="2" name="Foliennummernplatzhalter 1">
-            <a:extLst>
-              <a:ext uri="{FF2B5EF4-FFF2-40B4-BE49-F238E27FC236}">
-                <a16:creationId xmlns:a16="http://schemas.microsoft.com/office/drawing/2014/main" id="{93F3BDB8-AB06-D6F6-923D-DBA0EE4E79AE}"/>
-              </a:ext>
-            </a:extLst>
-          </p:cNvPr>
-          <p:cNvSpPr>
-            <a:spLocks noGrp="1"/>
-          </p:cNvSpPr>
-          <p:nvPr>
-            <p:ph type="sldNum" sz="quarter" idx="12"/>
-          </p:nvPr>
-        </p:nvSpPr>
-        <p:spPr/>
-        <p:txBody>
-          <a:bodyPr/>
-          <a:lstStyle/>
-          <a:p>
-            <a:fld id="{08C366F5-AFAD-49CB-854A-9D9E238FCA13}" type="slidenum">
-              <a:rPr lang="en-GB" smtClean="0"/>
-              <a:t>10</a:t>
-            </a:fld>
-            <a:endParaRPr lang="en-GB"/>
-          </a:p>
-        </p:txBody>
-      </p:sp>
-      <p:sp>
-        <p:nvSpPr>
-          <p:cNvPr id="5" name="Textfeld 4">
-            <a:extLst>
-              <a:ext uri="{FF2B5EF4-FFF2-40B4-BE49-F238E27FC236}">
-                <a16:creationId xmlns:a16="http://schemas.microsoft.com/office/drawing/2014/main" id="{2A4877FB-7B11-447F-8D3C-FDF353D66B88}"/>
-              </a:ext>
-            </a:extLst>
-          </p:cNvPr>
-          <p:cNvSpPr txBox="1"/>
-          <p:nvPr/>
-        </p:nvSpPr>
-        <p:spPr>
-          <a:xfrm>
-            <a:off x="5294795" y="6107389"/>
-            <a:ext cx="5824331" cy="646331"/>
-          </a:xfrm>
-          <a:prstGeom prst="rect">
-            <a:avLst/>
-          </a:prstGeom>
-          <a:noFill/>
-        </p:spPr>
-        <p:txBody>
-          <a:bodyPr wrap="square" rtlCol="0">
-            <a:spAutoFit/>
-          </a:bodyPr>
-          <a:lstStyle/>
-          <a:p>
-            <a:r>
-              <a:rPr lang="de-DE" dirty="0" err="1"/>
-              <a:t>decision</a:t>
-            </a:r>
-            <a:r>
-              <a:rPr lang="de-DE" dirty="0"/>
-              <a:t> </a:t>
-            </a:r>
-            <a:r>
-              <a:rPr lang="de-DE" dirty="0" err="1"/>
-              <a:t>boundaries</a:t>
-            </a:r>
-            <a:r>
-              <a:rPr lang="de-DE" dirty="0"/>
-              <a:t> (</a:t>
-            </a:r>
-            <a:r>
-              <a:rPr lang="de-DE" dirty="0" err="1"/>
-              <a:t>straight</a:t>
-            </a:r>
-            <a:r>
-              <a:rPr lang="de-DE" dirty="0"/>
-              <a:t> </a:t>
-            </a:r>
-            <a:r>
-              <a:rPr lang="de-DE" dirty="0" err="1"/>
-              <a:t>lines</a:t>
-            </a:r>
-            <a:r>
-              <a:rPr lang="de-DE" dirty="0"/>
-              <a:t> </a:t>
-            </a:r>
-            <a:r>
-              <a:rPr lang="de-DE" dirty="0" err="1"/>
-              <a:t>because</a:t>
-            </a:r>
-            <a:r>
-              <a:rPr lang="de-DE" dirty="0"/>
-              <a:t> </a:t>
-            </a:r>
-            <a:r>
-              <a:rPr lang="de-DE" dirty="0" err="1"/>
-              <a:t>k-Means</a:t>
-            </a:r>
-            <a:r>
-              <a:rPr lang="de-DE" dirty="0"/>
-              <a:t> was </a:t>
-            </a:r>
-            <a:r>
-              <a:rPr lang="de-DE" dirty="0" err="1"/>
-              <a:t>trained</a:t>
-            </a:r>
-            <a:r>
-              <a:rPr lang="de-DE" dirty="0"/>
-              <a:t> </a:t>
-            </a:r>
-            <a:r>
-              <a:rPr lang="de-DE" dirty="0" err="1"/>
-              <a:t>directly</a:t>
-            </a:r>
-            <a:r>
-              <a:rPr lang="de-DE" dirty="0"/>
-              <a:t> in </a:t>
-            </a:r>
-            <a:r>
-              <a:rPr lang="de-DE" dirty="0" err="1"/>
-              <a:t>the</a:t>
-            </a:r>
-            <a:r>
-              <a:rPr lang="de-DE" dirty="0"/>
-              <a:t> same 2-D </a:t>
-            </a:r>
-            <a:r>
-              <a:rPr lang="de-DE" dirty="0" err="1"/>
-              <a:t>space</a:t>
-            </a:r>
-            <a:r>
-              <a:rPr lang="de-DE" dirty="0"/>
-              <a:t> </a:t>
-            </a:r>
-            <a:r>
-              <a:rPr lang="de-DE" dirty="0" err="1"/>
-              <a:t>that</a:t>
-            </a:r>
-            <a:r>
-              <a:rPr lang="de-DE" dirty="0"/>
-              <a:t> </a:t>
-            </a:r>
-            <a:r>
-              <a:rPr lang="de-DE" dirty="0" err="1"/>
-              <a:t>is</a:t>
-            </a:r>
-            <a:r>
-              <a:rPr lang="de-DE" dirty="0"/>
-              <a:t> </a:t>
-            </a:r>
-            <a:r>
-              <a:rPr lang="de-DE" dirty="0" err="1"/>
-              <a:t>visualized</a:t>
-            </a:r>
-            <a:r>
-              <a:rPr lang="de-DE" dirty="0"/>
-              <a:t>)</a:t>
-            </a:r>
-          </a:p>
-        </p:txBody>
-      </p:sp>
-      <p:cxnSp>
-        <p:nvCxnSpPr>
-          <p:cNvPr id="7" name="Gerade Verbindung mit Pfeil 6">
-            <a:extLst>
-              <a:ext uri="{FF2B5EF4-FFF2-40B4-BE49-F238E27FC236}">
-                <a16:creationId xmlns:a16="http://schemas.microsoft.com/office/drawing/2014/main" id="{9A50DEF1-BEAD-FB26-5241-E76096B292E0}"/>
-              </a:ext>
-            </a:extLst>
-          </p:cNvPr>
-          <p:cNvCxnSpPr>
-            <a:cxnSpLocks/>
-          </p:cNvCxnSpPr>
-          <p:nvPr/>
-        </p:nvCxnSpPr>
-        <p:spPr>
-          <a:xfrm flipV="1">
-            <a:off x="6659217" y="5625548"/>
-            <a:ext cx="1013792" cy="551415"/>
-          </a:xfrm>
-          <a:prstGeom prst="straightConnector1">
-            <a:avLst/>
-          </a:prstGeom>
-          <a:ln>
-            <a:tailEnd type="triangle"/>
-          </a:ln>
-        </p:spPr>
-        <p:style>
-          <a:lnRef idx="2">
-            <a:schemeClr val="accent1"/>
-          </a:lnRef>
-          <a:fillRef idx="0">
-            <a:schemeClr val="accent1"/>
-          </a:fillRef>
-          <a:effectRef idx="1">
-            <a:schemeClr val="accent1"/>
-          </a:effectRef>
-          <a:fontRef idx="minor">
-            <a:schemeClr val="tx1"/>
-          </a:fontRef>
-        </p:style>
-      </p:cxnSp>
-    </p:spTree>
-    <p:extLst>
-      <p:ext uri="{BB962C8B-B14F-4D97-AF65-F5344CB8AC3E}">
-        <p14:creationId xmlns:p14="http://schemas.microsoft.com/office/powerpoint/2010/main" val="2526389082"/>
-      </p:ext>
-    </p:extLst>
-  </p:cSld>
-  <p:clrMapOvr>
-    <a:masterClrMapping/>
-  </p:clrMapOvr>
-</p:sld>
-</file>
-
-<file path=ppt/slides/slide11.xml><?xml version="1.0" encoding="utf-8"?>
-<p:sld xmlns:a="http://schemas.openxmlformats.org/drawingml/2006/main" xmlns:r="http://schemas.openxmlformats.org/officeDocument/2006/relationships" xmlns:p="http://schemas.openxmlformats.org/presentationml/2006/main">
-  <p:cSld>
-    <p:spTree>
-      <p:nvGrpSpPr>
-        <p:cNvPr id="1" name=""/>
-        <p:cNvGrpSpPr/>
-        <p:nvPr/>
-      </p:nvGrpSpPr>
-      <p:grpSpPr>
-        <a:xfrm>
-          <a:off x="0" y="0"/>
-          <a:ext cx="0" cy="0"/>
-          <a:chOff x="0" y="0"/>
-          <a:chExt cx="0" cy="0"/>
-        </a:xfrm>
-      </p:grpSpPr>
       <p:sp>
         <p:nvSpPr>
           <p:cNvPr id="2" name="Titel 1">
@@ -5243,7 +4606,7 @@
           <a:p>
             <a:fld id="{08C366F5-AFAD-49CB-854A-9D9E238FCA13}" type="slidenum">
               <a:rPr lang="en-GB" smtClean="0"/>
-              <a:t>11</a:t>
+              <a:t>10</a:t>
             </a:fld>
             <a:endParaRPr lang="en-GB"/>
           </a:p>
@@ -5262,7 +4625,7 @@
 </p:sld>
 </file>
 
-<file path=ppt/slides/slide12.xml><?xml version="1.0" encoding="utf-8"?>
+<file path=ppt/slides/slide11.xml><?xml version="1.0" encoding="utf-8"?>
 <p:sld xmlns:a="http://schemas.openxmlformats.org/drawingml/2006/main" xmlns:r="http://schemas.openxmlformats.org/officeDocument/2006/relationships" xmlns:p="http://schemas.openxmlformats.org/presentationml/2006/main">
   <p:cSld>
     <p:spTree>
@@ -5739,7 +5102,7 @@
           <a:p>
             <a:fld id="{08C366F5-AFAD-49CB-854A-9D9E238FCA13}" type="slidenum">
               <a:rPr lang="en-GB" smtClean="0"/>
-              <a:t>12</a:t>
+              <a:t>11</a:t>
             </a:fld>
             <a:endParaRPr lang="en-GB"/>
           </a:p>
@@ -6008,7 +5371,7 @@
 </p:sld>
 </file>
 
-<file path=ppt/slides/slide13.xml><?xml version="1.0" encoding="utf-8"?>
+<file path=ppt/slides/slide12.xml><?xml version="1.0" encoding="utf-8"?>
 <p:sld xmlns:a="http://schemas.openxmlformats.org/drawingml/2006/main" xmlns:r="http://schemas.openxmlformats.org/officeDocument/2006/relationships" xmlns:p="http://schemas.openxmlformats.org/presentationml/2006/main">
   <p:cSld>
     <p:spTree>
@@ -7386,7 +6749,7 @@
           <a:p>
             <a:fld id="{08C366F5-AFAD-49CB-854A-9D9E238FCA13}" type="slidenum">
               <a:rPr lang="en-GB" smtClean="0"/>
-              <a:t>13</a:t>
+              <a:t>12</a:t>
             </a:fld>
             <a:endParaRPr lang="en-GB"/>
           </a:p>
@@ -7405,7 +6768,7 @@
 </p:sld>
 </file>
 
-<file path=ppt/slides/slide14.xml><?xml version="1.0" encoding="utf-8"?>
+<file path=ppt/slides/slide13.xml><?xml version="1.0" encoding="utf-8"?>
 <p:sld xmlns:a="http://schemas.openxmlformats.org/drawingml/2006/main" xmlns:r="http://schemas.openxmlformats.org/officeDocument/2006/relationships" xmlns:p="http://schemas.openxmlformats.org/presentationml/2006/main">
   <p:cSld>
     <p:spTree>
@@ -7817,7 +7180,7 @@
           <a:p>
             <a:fld id="{08C366F5-AFAD-49CB-854A-9D9E238FCA13}" type="slidenum">
               <a:rPr lang="en-GB" smtClean="0"/>
-              <a:t>14</a:t>
+              <a:t>13</a:t>
             </a:fld>
             <a:endParaRPr lang="en-GB"/>
           </a:p>
@@ -7998,7 +7361,7 @@
 </p:sld>
 </file>
 
-<file path=ppt/slides/slide15.xml><?xml version="1.0" encoding="utf-8"?>
+<file path=ppt/slides/slide14.xml><?xml version="1.0" encoding="utf-8"?>
 <p:sld xmlns:a="http://schemas.openxmlformats.org/drawingml/2006/main" xmlns:r="http://schemas.openxmlformats.org/officeDocument/2006/relationships" xmlns:p="http://schemas.openxmlformats.org/presentationml/2006/main">
   <p:cSld>
     <p:spTree>
@@ -8687,7 +8050,7 @@
           <a:p>
             <a:fld id="{08C366F5-AFAD-49CB-854A-9D9E238FCA13}" type="slidenum">
               <a:rPr lang="en-GB" smtClean="0"/>
-              <a:t>15</a:t>
+              <a:t>14</a:t>
             </a:fld>
             <a:endParaRPr lang="en-GB"/>
           </a:p>
@@ -8736,7 +8099,7 @@
 </p:sld>
 </file>
 
-<file path=ppt/slides/slide16.xml><?xml version="1.0" encoding="utf-8"?>
+<file path=ppt/slides/slide15.xml><?xml version="1.0" encoding="utf-8"?>
 <p:sld xmlns:a="http://schemas.openxmlformats.org/drawingml/2006/main" xmlns:r="http://schemas.openxmlformats.org/officeDocument/2006/relationships" xmlns:p="http://schemas.openxmlformats.org/presentationml/2006/main">
   <p:cSld>
     <p:spTree>
@@ -9236,7 +8599,7 @@
           <a:p>
             <a:fld id="{08C366F5-AFAD-49CB-854A-9D9E238FCA13}" type="slidenum">
               <a:rPr lang="en-GB" smtClean="0"/>
-              <a:t>16</a:t>
+              <a:t>15</a:t>
             </a:fld>
             <a:endParaRPr lang="en-GB"/>
           </a:p>
@@ -9255,7 +8618,7 @@
 </p:sld>
 </file>
 
-<file path=ppt/slides/slide17.xml><?xml version="1.0" encoding="utf-8"?>
+<file path=ppt/slides/slide16.xml><?xml version="1.0" encoding="utf-8"?>
 <p:sld xmlns:a="http://schemas.openxmlformats.org/drawingml/2006/main" xmlns:r="http://schemas.openxmlformats.org/officeDocument/2006/relationships" xmlns:p="http://schemas.openxmlformats.org/presentationml/2006/main">
   <p:cSld>
     <p:spTree>
@@ -9661,7 +9024,7 @@
           <a:p>
             <a:fld id="{08C366F5-AFAD-49CB-854A-9D9E238FCA13}" type="slidenum">
               <a:rPr lang="en-GB" smtClean="0"/>
-              <a:t>17</a:t>
+              <a:t>16</a:t>
             </a:fld>
             <a:endParaRPr lang="en-GB"/>
           </a:p>
@@ -9813,7 +9176,7 @@
 </p:sld>
 </file>
 
-<file path=ppt/slides/slide18.xml><?xml version="1.0" encoding="utf-8"?>
+<file path=ppt/slides/slide17.xml><?xml version="1.0" encoding="utf-8"?>
 <p:sld xmlns:a="http://schemas.openxmlformats.org/drawingml/2006/main" xmlns:r="http://schemas.openxmlformats.org/officeDocument/2006/relationships" xmlns:p="http://schemas.openxmlformats.org/presentationml/2006/main">
   <p:cSld>
     <p:spTree>
@@ -10099,7 +9462,7 @@
           <a:p>
             <a:fld id="{08C366F5-AFAD-49CB-854A-9D9E238FCA13}" type="slidenum">
               <a:rPr lang="en-GB" smtClean="0"/>
-              <a:t>18</a:t>
+              <a:t>17</a:t>
             </a:fld>
             <a:endParaRPr lang="en-GB"/>
           </a:p>
@@ -10118,7 +9481,7 @@
 </p:sld>
 </file>
 
-<file path=ppt/slides/slide19.xml><?xml version="1.0" encoding="utf-8"?>
+<file path=ppt/slides/slide18.xml><?xml version="1.0" encoding="utf-8"?>
 <p:sld xmlns:a="http://schemas.openxmlformats.org/drawingml/2006/main" xmlns:r="http://schemas.openxmlformats.org/officeDocument/2006/relationships" xmlns:p="http://schemas.openxmlformats.org/presentationml/2006/main">
   <p:cSld>
     <p:spTree>
@@ -10865,7 +10228,7 @@
           <a:p>
             <a:fld id="{08C366F5-AFAD-49CB-854A-9D9E238FCA13}" type="slidenum">
               <a:rPr lang="en-GB" smtClean="0"/>
-              <a:t>19</a:t>
+              <a:t>18</a:t>
             </a:fld>
             <a:endParaRPr lang="en-GB"/>
           </a:p>
@@ -10875,6 +10238,732 @@
     <p:extLst>
       <p:ext uri="{BB962C8B-B14F-4D97-AF65-F5344CB8AC3E}">
         <p14:creationId xmlns:p14="http://schemas.microsoft.com/office/powerpoint/2010/main" val="3536884331"/>
+      </p:ext>
+    </p:extLst>
+  </p:cSld>
+  <p:clrMapOvr>
+    <a:masterClrMapping/>
+  </p:clrMapOvr>
+</p:sld>
+</file>
+
+<file path=ppt/slides/slide19.xml><?xml version="1.0" encoding="utf-8"?>
+<p:sld xmlns:a="http://schemas.openxmlformats.org/drawingml/2006/main" xmlns:r="http://schemas.openxmlformats.org/officeDocument/2006/relationships" xmlns:p="http://schemas.openxmlformats.org/presentationml/2006/main">
+  <p:cSld>
+    <p:spTree>
+      <p:nvGrpSpPr>
+        <p:cNvPr id="1" name=""/>
+        <p:cNvGrpSpPr/>
+        <p:nvPr/>
+      </p:nvGrpSpPr>
+      <p:grpSpPr>
+        <a:xfrm>
+          <a:off x="0" y="0"/>
+          <a:ext cx="0" cy="0"/>
+          <a:chOff x="0" y="0"/>
+          <a:chExt cx="0" cy="0"/>
+        </a:xfrm>
+      </p:grpSpPr>
+      <p:sp>
+        <p:nvSpPr>
+          <p:cNvPr id="2" name="Titel 1">
+            <a:extLst>
+              <a:ext uri="{FF2B5EF4-FFF2-40B4-BE49-F238E27FC236}">
+                <a16:creationId xmlns:a16="http://schemas.microsoft.com/office/drawing/2014/main" id="{0BB459EB-FAE8-31DC-E38F-3046EC588CF6}"/>
+              </a:ext>
+            </a:extLst>
+          </p:cNvPr>
+          <p:cNvSpPr>
+            <a:spLocks noGrp="1"/>
+          </p:cNvSpPr>
+          <p:nvPr>
+            <p:ph type="title"/>
+          </p:nvPr>
+        </p:nvSpPr>
+        <p:spPr/>
+        <p:txBody>
+          <a:bodyPr/>
+          <a:lstStyle/>
+          <a:p>
+            <a:r>
+              <a:rPr lang="de-DE" dirty="0" err="1"/>
+              <a:t>Supervised</a:t>
+            </a:r>
+            <a:r>
+              <a:rPr lang="de-DE" dirty="0"/>
+              <a:t> Clustering Validation</a:t>
+            </a:r>
+          </a:p>
+        </p:txBody>
+      </p:sp>
+      <p:sp>
+        <p:nvSpPr>
+          <p:cNvPr id="3" name="Inhaltsplatzhalter 2">
+            <a:extLst>
+              <a:ext uri="{FF2B5EF4-FFF2-40B4-BE49-F238E27FC236}">
+                <a16:creationId xmlns:a16="http://schemas.microsoft.com/office/drawing/2014/main" id="{392427C8-4330-BC0E-F7FF-95DB2D9863DA}"/>
+              </a:ext>
+            </a:extLst>
+          </p:cNvPr>
+          <p:cNvSpPr>
+            <a:spLocks noGrp="1"/>
+          </p:cNvSpPr>
+          <p:nvPr>
+            <p:ph idx="1"/>
+          </p:nvPr>
+        </p:nvSpPr>
+        <p:spPr/>
+        <p:txBody>
+          <a:bodyPr>
+            <a:normAutofit fontScale="85000" lnSpcReduction="10000"/>
+          </a:bodyPr>
+          <a:lstStyle/>
+          <a:p>
+            <a:pPr marL="0" indent="0">
+              <a:buNone/>
+            </a:pPr>
+            <a:r>
+              <a:rPr lang="de-DE" dirty="0"/>
+              <a:t>External </a:t>
+            </a:r>
+            <a:r>
+              <a:rPr lang="de-DE" dirty="0" err="1"/>
+              <a:t>validation</a:t>
+            </a:r>
+            <a:r>
+              <a:rPr lang="de-DE" dirty="0"/>
+              <a:t>: </a:t>
+            </a:r>
+            <a:r>
+              <a:rPr lang="de-DE" dirty="0" err="1"/>
+              <a:t>used</a:t>
+            </a:r>
+            <a:r>
+              <a:rPr lang="de-DE" dirty="0"/>
+              <a:t> </a:t>
+            </a:r>
+            <a:r>
+              <a:rPr lang="de-DE" dirty="0" err="1"/>
+              <a:t>when</a:t>
+            </a:r>
+            <a:r>
+              <a:rPr lang="de-DE" dirty="0"/>
+              <a:t> </a:t>
+            </a:r>
+            <a:r>
+              <a:rPr lang="de-DE" dirty="0" err="1"/>
+              <a:t>you</a:t>
+            </a:r>
+            <a:r>
+              <a:rPr lang="de-DE" dirty="0"/>
+              <a:t> </a:t>
+            </a:r>
+            <a:r>
+              <a:rPr lang="de-DE" dirty="0" err="1"/>
+              <a:t>already</a:t>
+            </a:r>
+            <a:r>
+              <a:rPr lang="de-DE" dirty="0"/>
+              <a:t> </a:t>
+            </a:r>
+            <a:r>
+              <a:rPr lang="de-DE" dirty="0" err="1"/>
+              <a:t>have</a:t>
+            </a:r>
+            <a:r>
+              <a:rPr lang="de-DE" dirty="0"/>
+              <a:t> </a:t>
+            </a:r>
+            <a:r>
+              <a:rPr lang="de-DE" dirty="0" err="1"/>
+              <a:t>ground-truth</a:t>
+            </a:r>
+            <a:r>
+              <a:rPr lang="de-DE" dirty="0"/>
+              <a:t> </a:t>
+            </a:r>
+            <a:r>
+              <a:rPr lang="de-DE" dirty="0" err="1"/>
+              <a:t>labels</a:t>
+            </a:r>
+            <a:r>
+              <a:rPr lang="de-DE" dirty="0"/>
+              <a:t> and </a:t>
+            </a:r>
+            <a:r>
+              <a:rPr lang="de-DE" dirty="0" err="1"/>
+              <a:t>want</a:t>
+            </a:r>
+            <a:r>
+              <a:rPr lang="de-DE" dirty="0"/>
+              <a:t> </a:t>
+            </a:r>
+            <a:r>
+              <a:rPr lang="de-DE" dirty="0" err="1"/>
+              <a:t>to</a:t>
+            </a:r>
+            <a:r>
+              <a:rPr lang="de-DE" dirty="0"/>
+              <a:t> </a:t>
+            </a:r>
+            <a:r>
+              <a:rPr lang="de-DE" dirty="0" err="1"/>
+              <a:t>evaluate</a:t>
+            </a:r>
+            <a:r>
+              <a:rPr lang="de-DE" dirty="0"/>
+              <a:t> </a:t>
+            </a:r>
+            <a:r>
+              <a:rPr lang="de-DE" dirty="0" err="1"/>
+              <a:t>how</a:t>
+            </a:r>
+            <a:r>
+              <a:rPr lang="de-DE" dirty="0"/>
+              <a:t> </a:t>
+            </a:r>
+            <a:r>
+              <a:rPr lang="de-DE" dirty="0" err="1"/>
+              <a:t>well</a:t>
+            </a:r>
+            <a:r>
+              <a:rPr lang="de-DE" dirty="0"/>
+              <a:t> a </a:t>
+            </a:r>
+            <a:r>
+              <a:rPr lang="de-DE" dirty="0" err="1"/>
+              <a:t>clustering</a:t>
+            </a:r>
+            <a:r>
+              <a:rPr lang="de-DE" dirty="0"/>
+              <a:t> </a:t>
+            </a:r>
+            <a:r>
+              <a:rPr lang="de-DE" dirty="0" err="1"/>
+              <a:t>matches</a:t>
+            </a:r>
+            <a:r>
+              <a:rPr lang="de-DE" dirty="0"/>
+              <a:t> </a:t>
+            </a:r>
+            <a:r>
+              <a:rPr lang="de-DE" dirty="0" err="1"/>
+              <a:t>the</a:t>
+            </a:r>
+            <a:r>
+              <a:rPr lang="de-DE" dirty="0"/>
+              <a:t> “</a:t>
+            </a:r>
+            <a:r>
+              <a:rPr lang="de-DE" dirty="0" err="1"/>
+              <a:t>true</a:t>
+            </a:r>
+            <a:r>
+              <a:rPr lang="de-DE" dirty="0"/>
+              <a:t>” </a:t>
+            </a:r>
+            <a:r>
+              <a:rPr lang="de-DE" dirty="0" err="1"/>
+              <a:t>grouping</a:t>
+            </a:r>
+            <a:endParaRPr lang="de-DE" dirty="0"/>
+          </a:p>
+          <a:p>
+            <a:pPr marL="0" indent="0">
+              <a:buNone/>
+            </a:pPr>
+            <a:r>
+              <a:rPr lang="de-DE" dirty="0">
+                <a:sym typeface="Wingdings" pitchFamily="2" charset="2"/>
+              </a:rPr>
+              <a:t> </a:t>
+            </a:r>
+            <a:r>
+              <a:rPr lang="de-DE" dirty="0" err="1">
+                <a:sym typeface="Wingdings" pitchFamily="2" charset="2"/>
+              </a:rPr>
+              <a:t>Evaluates</a:t>
+            </a:r>
+            <a:r>
+              <a:rPr lang="de-DE" dirty="0">
+                <a:sym typeface="Wingdings" pitchFamily="2" charset="2"/>
+              </a:rPr>
+              <a:t> </a:t>
+            </a:r>
+            <a:r>
+              <a:rPr lang="de-DE" dirty="0" err="1">
+                <a:sym typeface="Wingdings" pitchFamily="2" charset="2"/>
+              </a:rPr>
+              <a:t>correctness</a:t>
+            </a:r>
+            <a:r>
+              <a:rPr lang="de-DE" dirty="0">
+                <a:sym typeface="Wingdings" pitchFamily="2" charset="2"/>
+              </a:rPr>
+              <a:t>, not just </a:t>
+            </a:r>
+            <a:r>
+              <a:rPr lang="de-DE" dirty="0" err="1">
+                <a:sym typeface="Wingdings" pitchFamily="2" charset="2"/>
+              </a:rPr>
+              <a:t>structure</a:t>
+            </a:r>
+            <a:endParaRPr lang="de-DE" dirty="0"/>
+          </a:p>
+          <a:p>
+            <a:pPr marL="0" indent="0">
+              <a:buNone/>
+            </a:pPr>
+            <a:endParaRPr lang="de-DE" dirty="0"/>
+          </a:p>
+          <a:p>
+            <a:r>
+              <a:rPr lang="de-DE" dirty="0" err="1"/>
+              <a:t>Adjusted</a:t>
+            </a:r>
+            <a:r>
+              <a:rPr lang="de-DE" dirty="0"/>
+              <a:t> Rand </a:t>
+            </a:r>
+            <a:r>
+              <a:rPr lang="de-DE" dirty="0" err="1"/>
+              <a:t>index</a:t>
+            </a:r>
+            <a:r>
+              <a:rPr lang="de-DE" dirty="0"/>
+              <a:t>: </a:t>
+            </a:r>
+            <a:r>
+              <a:rPr lang="de-DE" dirty="0" err="1"/>
+              <a:t>counting</a:t>
+            </a:r>
+            <a:r>
+              <a:rPr lang="de-DE" dirty="0"/>
+              <a:t> </a:t>
+            </a:r>
+            <a:r>
+              <a:rPr lang="de-DE" dirty="0" err="1"/>
+              <a:t>pairs</a:t>
+            </a:r>
+            <a:r>
+              <a:rPr lang="de-DE" dirty="0"/>
+              <a:t> </a:t>
+            </a:r>
+            <a:r>
+              <a:rPr lang="de-DE" dirty="0" err="1"/>
+              <a:t>that</a:t>
+            </a:r>
+            <a:r>
+              <a:rPr lang="de-DE" dirty="0"/>
+              <a:t> </a:t>
+            </a:r>
+            <a:r>
+              <a:rPr lang="de-DE" dirty="0" err="1"/>
+              <a:t>are</a:t>
+            </a:r>
+            <a:r>
+              <a:rPr lang="de-DE" dirty="0"/>
+              <a:t> </a:t>
+            </a:r>
+            <a:r>
+              <a:rPr lang="de-DE" dirty="0" err="1"/>
+              <a:t>assigned</a:t>
+            </a:r>
+            <a:r>
+              <a:rPr lang="de-DE" dirty="0"/>
+              <a:t> in </a:t>
+            </a:r>
+            <a:r>
+              <a:rPr lang="de-DE" dirty="0" err="1"/>
+              <a:t>the</a:t>
+            </a:r>
+            <a:r>
+              <a:rPr lang="de-DE" dirty="0"/>
+              <a:t> same </a:t>
+            </a:r>
+            <a:r>
+              <a:rPr lang="de-DE" dirty="0" err="1"/>
+              <a:t>or</a:t>
+            </a:r>
+            <a:r>
+              <a:rPr lang="de-DE" dirty="0"/>
+              <a:t> different </a:t>
+            </a:r>
+            <a:r>
+              <a:rPr lang="de-DE" dirty="0" err="1"/>
+              <a:t>clusters</a:t>
+            </a:r>
+            <a:r>
+              <a:rPr lang="de-DE" dirty="0"/>
+              <a:t> in </a:t>
+            </a:r>
+            <a:r>
+              <a:rPr lang="de-DE" dirty="0" err="1"/>
+              <a:t>the</a:t>
+            </a:r>
+            <a:r>
+              <a:rPr lang="de-DE" dirty="0"/>
+              <a:t> </a:t>
+            </a:r>
+            <a:r>
+              <a:rPr lang="de-DE" dirty="0" err="1"/>
+              <a:t>predicted</a:t>
+            </a:r>
+            <a:r>
+              <a:rPr lang="de-DE" dirty="0"/>
+              <a:t> and </a:t>
+            </a:r>
+            <a:r>
+              <a:rPr lang="de-DE" dirty="0" err="1"/>
+              <a:t>true</a:t>
+            </a:r>
+            <a:r>
+              <a:rPr lang="de-DE" dirty="0"/>
+              <a:t> </a:t>
+            </a:r>
+            <a:r>
+              <a:rPr lang="de-DE" dirty="0" err="1"/>
+              <a:t>clusterings</a:t>
+            </a:r>
+            <a:r>
+              <a:rPr lang="de-DE" dirty="0"/>
+              <a:t>, </a:t>
+            </a:r>
+            <a:r>
+              <a:rPr lang="de-DE" dirty="0" err="1"/>
+              <a:t>adjusted</a:t>
+            </a:r>
+            <a:r>
+              <a:rPr lang="de-DE" dirty="0"/>
+              <a:t> </a:t>
+            </a:r>
+            <a:r>
+              <a:rPr lang="de-DE" dirty="0" err="1"/>
+              <a:t>for</a:t>
+            </a:r>
+            <a:r>
+              <a:rPr lang="de-DE" dirty="0"/>
+              <a:t> </a:t>
+            </a:r>
+            <a:r>
+              <a:rPr lang="de-DE" dirty="0" err="1"/>
+              <a:t>chance</a:t>
+            </a:r>
+            <a:r>
+              <a:rPr lang="de-DE" dirty="0"/>
+              <a:t> (</a:t>
+            </a:r>
+            <a:r>
+              <a:rPr lang="de-DE" dirty="0" err="1"/>
+              <a:t>random</a:t>
+            </a:r>
+            <a:r>
+              <a:rPr lang="de-DE" dirty="0"/>
+              <a:t> </a:t>
+            </a:r>
+            <a:r>
+              <a:rPr lang="de-DE" dirty="0" err="1"/>
+              <a:t>clustering</a:t>
+            </a:r>
+            <a:r>
+              <a:rPr lang="de-DE" dirty="0"/>
+              <a:t>): </a:t>
+            </a:r>
+            <a:r>
+              <a:rPr lang="de-DE" dirty="0">
+                <a:latin typeface="Cambria Math" panose="02040503050406030204" pitchFamily="18" charset="0"/>
+                <a:ea typeface="Cambria Math" panose="02040503050406030204" pitchFamily="18" charset="0"/>
+              </a:rPr>
+              <a:t>ARI = (RI - </a:t>
+            </a:r>
+            <a:r>
+              <a:rPr lang="de-DE" dirty="0" err="1">
+                <a:latin typeface="Cambria Math" panose="02040503050406030204" pitchFamily="18" charset="0"/>
+                <a:ea typeface="Cambria Math" panose="02040503050406030204" pitchFamily="18" charset="0"/>
+              </a:rPr>
+              <a:t>Expected_RI</a:t>
+            </a:r>
+            <a:r>
+              <a:rPr lang="de-DE" dirty="0">
+                <a:latin typeface="Cambria Math" panose="02040503050406030204" pitchFamily="18" charset="0"/>
+                <a:ea typeface="Cambria Math" panose="02040503050406030204" pitchFamily="18" charset="0"/>
+              </a:rPr>
+              <a:t>) / (</a:t>
+            </a:r>
+            <a:r>
+              <a:rPr lang="de-DE" dirty="0" err="1">
+                <a:latin typeface="Cambria Math" panose="02040503050406030204" pitchFamily="18" charset="0"/>
+                <a:ea typeface="Cambria Math" panose="02040503050406030204" pitchFamily="18" charset="0"/>
+              </a:rPr>
+              <a:t>max</a:t>
+            </a:r>
+            <a:r>
+              <a:rPr lang="de-DE" dirty="0">
+                <a:latin typeface="Cambria Math" panose="02040503050406030204" pitchFamily="18" charset="0"/>
+                <a:ea typeface="Cambria Math" panose="02040503050406030204" pitchFamily="18" charset="0"/>
+              </a:rPr>
+              <a:t>(RI) - </a:t>
+            </a:r>
+            <a:r>
+              <a:rPr lang="de-DE" dirty="0" err="1">
+                <a:latin typeface="Cambria Math" panose="02040503050406030204" pitchFamily="18" charset="0"/>
+                <a:ea typeface="Cambria Math" panose="02040503050406030204" pitchFamily="18" charset="0"/>
+              </a:rPr>
+              <a:t>Expected_RI</a:t>
+            </a:r>
+            <a:r>
+              <a:rPr lang="de-DE" dirty="0">
+                <a:latin typeface="Cambria Math" panose="02040503050406030204" pitchFamily="18" charset="0"/>
+                <a:ea typeface="Cambria Math" panose="02040503050406030204" pitchFamily="18" charset="0"/>
+              </a:rPr>
+              <a:t>)</a:t>
+            </a:r>
+          </a:p>
+          <a:p>
+            <a:r>
+              <a:rPr lang="de-DE" dirty="0" err="1"/>
+              <a:t>Adjusted</a:t>
+            </a:r>
+            <a:r>
+              <a:rPr lang="de-DE" dirty="0"/>
+              <a:t> mutual </a:t>
+            </a:r>
+            <a:r>
+              <a:rPr lang="de-DE" dirty="0" err="1"/>
+              <a:t>information</a:t>
+            </a:r>
+            <a:endParaRPr lang="de-DE" dirty="0"/>
+          </a:p>
+          <a:p>
+            <a:r>
+              <a:rPr lang="de-DE" dirty="0" err="1"/>
+              <a:t>Homogeneity</a:t>
+            </a:r>
+            <a:r>
+              <a:rPr lang="de-DE" dirty="0"/>
+              <a:t>, </a:t>
+            </a:r>
+            <a:r>
+              <a:rPr lang="de-DE" dirty="0" err="1"/>
+              <a:t>completeness</a:t>
+            </a:r>
+            <a:r>
+              <a:rPr lang="de-DE" dirty="0"/>
+              <a:t>, and V-</a:t>
+            </a:r>
+            <a:r>
+              <a:rPr lang="de-DE" dirty="0" err="1"/>
+              <a:t>measure</a:t>
+            </a:r>
+            <a:r>
+              <a:rPr lang="de-DE" dirty="0"/>
+              <a:t> </a:t>
+            </a:r>
+            <a:r>
+              <a:rPr lang="de-DE" dirty="0" err="1"/>
+              <a:t>scores</a:t>
+            </a:r>
+            <a:endParaRPr lang="de-DE" dirty="0"/>
+          </a:p>
+          <a:p>
+            <a:pPr lvl="1"/>
+            <a:r>
+              <a:rPr lang="de-DE" dirty="0" err="1"/>
+              <a:t>homogeneity</a:t>
+            </a:r>
+            <a:r>
+              <a:rPr lang="de-DE" dirty="0"/>
+              <a:t>: </a:t>
+            </a:r>
+            <a:r>
+              <a:rPr lang="de-DE" dirty="0" err="1"/>
+              <a:t>each</a:t>
+            </a:r>
+            <a:r>
+              <a:rPr lang="de-DE" dirty="0"/>
+              <a:t> </a:t>
+            </a:r>
+            <a:r>
+              <a:rPr lang="de-DE" dirty="0" err="1"/>
+              <a:t>cluster</a:t>
+            </a:r>
+            <a:r>
+              <a:rPr lang="de-DE" dirty="0"/>
+              <a:t> </a:t>
+            </a:r>
+            <a:r>
+              <a:rPr lang="de-DE" dirty="0" err="1"/>
+              <a:t>contains</a:t>
+            </a:r>
+            <a:r>
+              <a:rPr lang="de-DE" dirty="0"/>
+              <a:t> </a:t>
+            </a:r>
+            <a:r>
+              <a:rPr lang="de-DE" dirty="0" err="1"/>
+              <a:t>only</a:t>
+            </a:r>
+            <a:r>
+              <a:rPr lang="de-DE" dirty="0"/>
+              <a:t> </a:t>
+            </a:r>
+            <a:r>
+              <a:rPr lang="de-DE" dirty="0" err="1"/>
+              <a:t>one</a:t>
+            </a:r>
+            <a:r>
+              <a:rPr lang="de-DE" dirty="0"/>
+              <a:t> </a:t>
+            </a:r>
+            <a:r>
+              <a:rPr lang="de-DE" dirty="0" err="1"/>
+              <a:t>class</a:t>
+            </a:r>
+            <a:endParaRPr lang="de-DE" dirty="0"/>
+          </a:p>
+          <a:p>
+            <a:pPr lvl="1"/>
+            <a:r>
+              <a:rPr lang="de-DE" dirty="0" err="1"/>
+              <a:t>completeness</a:t>
+            </a:r>
+            <a:r>
+              <a:rPr lang="de-DE" dirty="0"/>
+              <a:t>: all </a:t>
+            </a:r>
+            <a:r>
+              <a:rPr lang="de-DE" dirty="0" err="1"/>
+              <a:t>members</a:t>
+            </a:r>
+            <a:r>
+              <a:rPr lang="de-DE" dirty="0"/>
+              <a:t> </a:t>
+            </a:r>
+            <a:r>
+              <a:rPr lang="de-DE" dirty="0" err="1"/>
+              <a:t>of</a:t>
+            </a:r>
+            <a:r>
+              <a:rPr lang="de-DE" dirty="0"/>
+              <a:t> a </a:t>
+            </a:r>
+            <a:r>
+              <a:rPr lang="de-DE" dirty="0" err="1"/>
+              <a:t>class</a:t>
+            </a:r>
+            <a:r>
+              <a:rPr lang="de-DE" dirty="0"/>
+              <a:t> </a:t>
+            </a:r>
+            <a:r>
+              <a:rPr lang="de-DE" dirty="0" err="1"/>
+              <a:t>are</a:t>
+            </a:r>
+            <a:r>
+              <a:rPr lang="de-DE" dirty="0"/>
+              <a:t> in </a:t>
+            </a:r>
+            <a:r>
+              <a:rPr lang="de-DE" dirty="0" err="1"/>
+              <a:t>the</a:t>
+            </a:r>
+            <a:r>
+              <a:rPr lang="de-DE" dirty="0"/>
+              <a:t> same </a:t>
+            </a:r>
+            <a:r>
+              <a:rPr lang="de-DE" dirty="0" err="1"/>
+              <a:t>cluster</a:t>
+            </a:r>
+            <a:endParaRPr lang="de-DE" dirty="0"/>
+          </a:p>
+          <a:p>
+            <a:pPr lvl="1"/>
+            <a:r>
+              <a:rPr lang="de-DE" dirty="0"/>
+              <a:t>V-</a:t>
+            </a:r>
+            <a:r>
+              <a:rPr lang="de-DE" dirty="0" err="1"/>
+              <a:t>measure</a:t>
+            </a:r>
+            <a:r>
+              <a:rPr lang="de-DE" dirty="0"/>
+              <a:t>: </a:t>
+            </a:r>
+            <a:r>
+              <a:rPr lang="de-DE" dirty="0" err="1"/>
+              <a:t>harmonic</a:t>
+            </a:r>
+            <a:r>
+              <a:rPr lang="de-DE" dirty="0"/>
+              <a:t> </a:t>
+            </a:r>
+            <a:r>
+              <a:rPr lang="de-DE" dirty="0" err="1"/>
+              <a:t>mean</a:t>
+            </a:r>
+            <a:r>
+              <a:rPr lang="de-DE" dirty="0"/>
+              <a:t> </a:t>
+            </a:r>
+            <a:r>
+              <a:rPr lang="de-DE" dirty="0" err="1"/>
+              <a:t>between</a:t>
+            </a:r>
+            <a:r>
+              <a:rPr lang="de-DE" dirty="0"/>
+              <a:t> </a:t>
+            </a:r>
+            <a:r>
+              <a:rPr lang="de-DE" dirty="0" err="1"/>
+              <a:t>homogeneity</a:t>
+            </a:r>
+            <a:r>
+              <a:rPr lang="de-DE" dirty="0"/>
+              <a:t> and </a:t>
+            </a:r>
+            <a:r>
+              <a:rPr lang="de-DE" dirty="0" err="1"/>
+              <a:t>completeness</a:t>
+            </a:r>
+            <a:endParaRPr lang="de-DE" dirty="0"/>
+          </a:p>
+        </p:txBody>
+      </p:sp>
+      <p:sp>
+        <p:nvSpPr>
+          <p:cNvPr id="4" name="Foliennummernplatzhalter 3">
+            <a:extLst>
+              <a:ext uri="{FF2B5EF4-FFF2-40B4-BE49-F238E27FC236}">
+                <a16:creationId xmlns:a16="http://schemas.microsoft.com/office/drawing/2014/main" id="{701A4EA1-06DA-F940-1383-630B8622B38F}"/>
+              </a:ext>
+            </a:extLst>
+          </p:cNvPr>
+          <p:cNvSpPr>
+            <a:spLocks noGrp="1"/>
+          </p:cNvSpPr>
+          <p:nvPr>
+            <p:ph type="sldNum" sz="quarter" idx="12"/>
+          </p:nvPr>
+        </p:nvSpPr>
+        <p:spPr/>
+        <p:txBody>
+          <a:bodyPr/>
+          <a:lstStyle/>
+          <a:p>
+            <a:fld id="{08C366F5-AFAD-49CB-854A-9D9E238FCA13}" type="slidenum">
+              <a:rPr lang="en-GB" smtClean="0"/>
+              <a:t>19</a:t>
+            </a:fld>
+            <a:endParaRPr lang="en-GB"/>
+          </a:p>
+        </p:txBody>
+      </p:sp>
+    </p:spTree>
+    <p:extLst>
+      <p:ext uri="{BB962C8B-B14F-4D97-AF65-F5344CB8AC3E}">
+        <p14:creationId xmlns:p14="http://schemas.microsoft.com/office/powerpoint/2010/main" val="2860005827"/>
       </p:ext>
     </p:extLst>
   </p:cSld>
@@ -11215,732 +11304,6 @@
           <p:cNvPr id="2" name="Titel 1">
             <a:extLst>
               <a:ext uri="{FF2B5EF4-FFF2-40B4-BE49-F238E27FC236}">
-                <a16:creationId xmlns:a16="http://schemas.microsoft.com/office/drawing/2014/main" id="{0BB459EB-FAE8-31DC-E38F-3046EC588CF6}"/>
-              </a:ext>
-            </a:extLst>
-          </p:cNvPr>
-          <p:cNvSpPr>
-            <a:spLocks noGrp="1"/>
-          </p:cNvSpPr>
-          <p:nvPr>
-            <p:ph type="title"/>
-          </p:nvPr>
-        </p:nvSpPr>
-        <p:spPr/>
-        <p:txBody>
-          <a:bodyPr/>
-          <a:lstStyle/>
-          <a:p>
-            <a:r>
-              <a:rPr lang="de-DE" dirty="0" err="1"/>
-              <a:t>Supervised</a:t>
-            </a:r>
-            <a:r>
-              <a:rPr lang="de-DE" dirty="0"/>
-              <a:t> Clustering Validation</a:t>
-            </a:r>
-          </a:p>
-        </p:txBody>
-      </p:sp>
-      <p:sp>
-        <p:nvSpPr>
-          <p:cNvPr id="3" name="Inhaltsplatzhalter 2">
-            <a:extLst>
-              <a:ext uri="{FF2B5EF4-FFF2-40B4-BE49-F238E27FC236}">
-                <a16:creationId xmlns:a16="http://schemas.microsoft.com/office/drawing/2014/main" id="{392427C8-4330-BC0E-F7FF-95DB2D9863DA}"/>
-              </a:ext>
-            </a:extLst>
-          </p:cNvPr>
-          <p:cNvSpPr>
-            <a:spLocks noGrp="1"/>
-          </p:cNvSpPr>
-          <p:nvPr>
-            <p:ph idx="1"/>
-          </p:nvPr>
-        </p:nvSpPr>
-        <p:spPr/>
-        <p:txBody>
-          <a:bodyPr>
-            <a:normAutofit fontScale="85000" lnSpcReduction="10000"/>
-          </a:bodyPr>
-          <a:lstStyle/>
-          <a:p>
-            <a:pPr marL="0" indent="0">
-              <a:buNone/>
-            </a:pPr>
-            <a:r>
-              <a:rPr lang="de-DE" dirty="0"/>
-              <a:t>External </a:t>
-            </a:r>
-            <a:r>
-              <a:rPr lang="de-DE" dirty="0" err="1"/>
-              <a:t>validation</a:t>
-            </a:r>
-            <a:r>
-              <a:rPr lang="de-DE" dirty="0"/>
-              <a:t>: </a:t>
-            </a:r>
-            <a:r>
-              <a:rPr lang="de-DE" dirty="0" err="1"/>
-              <a:t>used</a:t>
-            </a:r>
-            <a:r>
-              <a:rPr lang="de-DE" dirty="0"/>
-              <a:t> </a:t>
-            </a:r>
-            <a:r>
-              <a:rPr lang="de-DE" dirty="0" err="1"/>
-              <a:t>when</a:t>
-            </a:r>
-            <a:r>
-              <a:rPr lang="de-DE" dirty="0"/>
-              <a:t> </a:t>
-            </a:r>
-            <a:r>
-              <a:rPr lang="de-DE" dirty="0" err="1"/>
-              <a:t>you</a:t>
-            </a:r>
-            <a:r>
-              <a:rPr lang="de-DE" dirty="0"/>
-              <a:t> </a:t>
-            </a:r>
-            <a:r>
-              <a:rPr lang="de-DE" dirty="0" err="1"/>
-              <a:t>already</a:t>
-            </a:r>
-            <a:r>
-              <a:rPr lang="de-DE" dirty="0"/>
-              <a:t> </a:t>
-            </a:r>
-            <a:r>
-              <a:rPr lang="de-DE" dirty="0" err="1"/>
-              <a:t>have</a:t>
-            </a:r>
-            <a:r>
-              <a:rPr lang="de-DE" dirty="0"/>
-              <a:t> </a:t>
-            </a:r>
-            <a:r>
-              <a:rPr lang="de-DE" dirty="0" err="1"/>
-              <a:t>ground-truth</a:t>
-            </a:r>
-            <a:r>
-              <a:rPr lang="de-DE" dirty="0"/>
-              <a:t> </a:t>
-            </a:r>
-            <a:r>
-              <a:rPr lang="de-DE" dirty="0" err="1"/>
-              <a:t>labels</a:t>
-            </a:r>
-            <a:r>
-              <a:rPr lang="de-DE" dirty="0"/>
-              <a:t> and </a:t>
-            </a:r>
-            <a:r>
-              <a:rPr lang="de-DE" dirty="0" err="1"/>
-              <a:t>want</a:t>
-            </a:r>
-            <a:r>
-              <a:rPr lang="de-DE" dirty="0"/>
-              <a:t> </a:t>
-            </a:r>
-            <a:r>
-              <a:rPr lang="de-DE" dirty="0" err="1"/>
-              <a:t>to</a:t>
-            </a:r>
-            <a:r>
-              <a:rPr lang="de-DE" dirty="0"/>
-              <a:t> </a:t>
-            </a:r>
-            <a:r>
-              <a:rPr lang="de-DE" dirty="0" err="1"/>
-              <a:t>evaluate</a:t>
-            </a:r>
-            <a:r>
-              <a:rPr lang="de-DE" dirty="0"/>
-              <a:t> </a:t>
-            </a:r>
-            <a:r>
-              <a:rPr lang="de-DE" dirty="0" err="1"/>
-              <a:t>how</a:t>
-            </a:r>
-            <a:r>
-              <a:rPr lang="de-DE" dirty="0"/>
-              <a:t> </a:t>
-            </a:r>
-            <a:r>
-              <a:rPr lang="de-DE" dirty="0" err="1"/>
-              <a:t>well</a:t>
-            </a:r>
-            <a:r>
-              <a:rPr lang="de-DE" dirty="0"/>
-              <a:t> a </a:t>
-            </a:r>
-            <a:r>
-              <a:rPr lang="de-DE" dirty="0" err="1"/>
-              <a:t>clustering</a:t>
-            </a:r>
-            <a:r>
-              <a:rPr lang="de-DE" dirty="0"/>
-              <a:t> </a:t>
-            </a:r>
-            <a:r>
-              <a:rPr lang="de-DE" dirty="0" err="1"/>
-              <a:t>matches</a:t>
-            </a:r>
-            <a:r>
-              <a:rPr lang="de-DE" dirty="0"/>
-              <a:t> </a:t>
-            </a:r>
-            <a:r>
-              <a:rPr lang="de-DE" dirty="0" err="1"/>
-              <a:t>the</a:t>
-            </a:r>
-            <a:r>
-              <a:rPr lang="de-DE" dirty="0"/>
-              <a:t> “</a:t>
-            </a:r>
-            <a:r>
-              <a:rPr lang="de-DE" dirty="0" err="1"/>
-              <a:t>true</a:t>
-            </a:r>
-            <a:r>
-              <a:rPr lang="de-DE" dirty="0"/>
-              <a:t>” </a:t>
-            </a:r>
-            <a:r>
-              <a:rPr lang="de-DE" dirty="0" err="1"/>
-              <a:t>grouping</a:t>
-            </a:r>
-            <a:endParaRPr lang="de-DE" dirty="0"/>
-          </a:p>
-          <a:p>
-            <a:pPr marL="0" indent="0">
-              <a:buNone/>
-            </a:pPr>
-            <a:r>
-              <a:rPr lang="de-DE" dirty="0">
-                <a:sym typeface="Wingdings" pitchFamily="2" charset="2"/>
-              </a:rPr>
-              <a:t> </a:t>
-            </a:r>
-            <a:r>
-              <a:rPr lang="de-DE" dirty="0" err="1">
-                <a:sym typeface="Wingdings" pitchFamily="2" charset="2"/>
-              </a:rPr>
-              <a:t>Evaluates</a:t>
-            </a:r>
-            <a:r>
-              <a:rPr lang="de-DE" dirty="0">
-                <a:sym typeface="Wingdings" pitchFamily="2" charset="2"/>
-              </a:rPr>
-              <a:t> </a:t>
-            </a:r>
-            <a:r>
-              <a:rPr lang="de-DE" dirty="0" err="1">
-                <a:sym typeface="Wingdings" pitchFamily="2" charset="2"/>
-              </a:rPr>
-              <a:t>correctness</a:t>
-            </a:r>
-            <a:r>
-              <a:rPr lang="de-DE" dirty="0">
-                <a:sym typeface="Wingdings" pitchFamily="2" charset="2"/>
-              </a:rPr>
-              <a:t>, not just </a:t>
-            </a:r>
-            <a:r>
-              <a:rPr lang="de-DE" dirty="0" err="1">
-                <a:sym typeface="Wingdings" pitchFamily="2" charset="2"/>
-              </a:rPr>
-              <a:t>structure</a:t>
-            </a:r>
-            <a:endParaRPr lang="de-DE" dirty="0"/>
-          </a:p>
-          <a:p>
-            <a:pPr marL="0" indent="0">
-              <a:buNone/>
-            </a:pPr>
-            <a:endParaRPr lang="de-DE" dirty="0"/>
-          </a:p>
-          <a:p>
-            <a:r>
-              <a:rPr lang="de-DE" dirty="0" err="1"/>
-              <a:t>Adjusted</a:t>
-            </a:r>
-            <a:r>
-              <a:rPr lang="de-DE" dirty="0"/>
-              <a:t> Rand </a:t>
-            </a:r>
-            <a:r>
-              <a:rPr lang="de-DE" dirty="0" err="1"/>
-              <a:t>index</a:t>
-            </a:r>
-            <a:r>
-              <a:rPr lang="de-DE" dirty="0"/>
-              <a:t>: </a:t>
-            </a:r>
-            <a:r>
-              <a:rPr lang="de-DE" dirty="0" err="1"/>
-              <a:t>counting</a:t>
-            </a:r>
-            <a:r>
-              <a:rPr lang="de-DE" dirty="0"/>
-              <a:t> </a:t>
-            </a:r>
-            <a:r>
-              <a:rPr lang="de-DE" dirty="0" err="1"/>
-              <a:t>pairs</a:t>
-            </a:r>
-            <a:r>
-              <a:rPr lang="de-DE" dirty="0"/>
-              <a:t> </a:t>
-            </a:r>
-            <a:r>
-              <a:rPr lang="de-DE" dirty="0" err="1"/>
-              <a:t>that</a:t>
-            </a:r>
-            <a:r>
-              <a:rPr lang="de-DE" dirty="0"/>
-              <a:t> </a:t>
-            </a:r>
-            <a:r>
-              <a:rPr lang="de-DE" dirty="0" err="1"/>
-              <a:t>are</a:t>
-            </a:r>
-            <a:r>
-              <a:rPr lang="de-DE" dirty="0"/>
-              <a:t> </a:t>
-            </a:r>
-            <a:r>
-              <a:rPr lang="de-DE" dirty="0" err="1"/>
-              <a:t>assigned</a:t>
-            </a:r>
-            <a:r>
-              <a:rPr lang="de-DE" dirty="0"/>
-              <a:t> in </a:t>
-            </a:r>
-            <a:r>
-              <a:rPr lang="de-DE" dirty="0" err="1"/>
-              <a:t>the</a:t>
-            </a:r>
-            <a:r>
-              <a:rPr lang="de-DE" dirty="0"/>
-              <a:t> same </a:t>
-            </a:r>
-            <a:r>
-              <a:rPr lang="de-DE" dirty="0" err="1"/>
-              <a:t>or</a:t>
-            </a:r>
-            <a:r>
-              <a:rPr lang="de-DE" dirty="0"/>
-              <a:t> different </a:t>
-            </a:r>
-            <a:r>
-              <a:rPr lang="de-DE" dirty="0" err="1"/>
-              <a:t>clusters</a:t>
-            </a:r>
-            <a:r>
-              <a:rPr lang="de-DE" dirty="0"/>
-              <a:t> in </a:t>
-            </a:r>
-            <a:r>
-              <a:rPr lang="de-DE" dirty="0" err="1"/>
-              <a:t>the</a:t>
-            </a:r>
-            <a:r>
-              <a:rPr lang="de-DE" dirty="0"/>
-              <a:t> </a:t>
-            </a:r>
-            <a:r>
-              <a:rPr lang="de-DE" dirty="0" err="1"/>
-              <a:t>predicted</a:t>
-            </a:r>
-            <a:r>
-              <a:rPr lang="de-DE" dirty="0"/>
-              <a:t> and </a:t>
-            </a:r>
-            <a:r>
-              <a:rPr lang="de-DE" dirty="0" err="1"/>
-              <a:t>true</a:t>
-            </a:r>
-            <a:r>
-              <a:rPr lang="de-DE" dirty="0"/>
-              <a:t> </a:t>
-            </a:r>
-            <a:r>
-              <a:rPr lang="de-DE" dirty="0" err="1"/>
-              <a:t>clusterings</a:t>
-            </a:r>
-            <a:r>
-              <a:rPr lang="de-DE" dirty="0"/>
-              <a:t>, </a:t>
-            </a:r>
-            <a:r>
-              <a:rPr lang="de-DE" dirty="0" err="1"/>
-              <a:t>adjusted</a:t>
-            </a:r>
-            <a:r>
-              <a:rPr lang="de-DE" dirty="0"/>
-              <a:t> </a:t>
-            </a:r>
-            <a:r>
-              <a:rPr lang="de-DE" dirty="0" err="1"/>
-              <a:t>for</a:t>
-            </a:r>
-            <a:r>
-              <a:rPr lang="de-DE" dirty="0"/>
-              <a:t> </a:t>
-            </a:r>
-            <a:r>
-              <a:rPr lang="de-DE" dirty="0" err="1"/>
-              <a:t>chance</a:t>
-            </a:r>
-            <a:r>
-              <a:rPr lang="de-DE" dirty="0"/>
-              <a:t> (</a:t>
-            </a:r>
-            <a:r>
-              <a:rPr lang="de-DE" dirty="0" err="1"/>
-              <a:t>random</a:t>
-            </a:r>
-            <a:r>
-              <a:rPr lang="de-DE" dirty="0"/>
-              <a:t> </a:t>
-            </a:r>
-            <a:r>
-              <a:rPr lang="de-DE" dirty="0" err="1"/>
-              <a:t>clustering</a:t>
-            </a:r>
-            <a:r>
-              <a:rPr lang="de-DE" dirty="0"/>
-              <a:t>): </a:t>
-            </a:r>
-            <a:r>
-              <a:rPr lang="de-DE" dirty="0">
-                <a:latin typeface="Cambria Math" panose="02040503050406030204" pitchFamily="18" charset="0"/>
-                <a:ea typeface="Cambria Math" panose="02040503050406030204" pitchFamily="18" charset="0"/>
-              </a:rPr>
-              <a:t>ARI = (RI - </a:t>
-            </a:r>
-            <a:r>
-              <a:rPr lang="de-DE" dirty="0" err="1">
-                <a:latin typeface="Cambria Math" panose="02040503050406030204" pitchFamily="18" charset="0"/>
-                <a:ea typeface="Cambria Math" panose="02040503050406030204" pitchFamily="18" charset="0"/>
-              </a:rPr>
-              <a:t>Expected_RI</a:t>
-            </a:r>
-            <a:r>
-              <a:rPr lang="de-DE" dirty="0">
-                <a:latin typeface="Cambria Math" panose="02040503050406030204" pitchFamily="18" charset="0"/>
-                <a:ea typeface="Cambria Math" panose="02040503050406030204" pitchFamily="18" charset="0"/>
-              </a:rPr>
-              <a:t>) / (</a:t>
-            </a:r>
-            <a:r>
-              <a:rPr lang="de-DE" dirty="0" err="1">
-                <a:latin typeface="Cambria Math" panose="02040503050406030204" pitchFamily="18" charset="0"/>
-                <a:ea typeface="Cambria Math" panose="02040503050406030204" pitchFamily="18" charset="0"/>
-              </a:rPr>
-              <a:t>max</a:t>
-            </a:r>
-            <a:r>
-              <a:rPr lang="de-DE" dirty="0">
-                <a:latin typeface="Cambria Math" panose="02040503050406030204" pitchFamily="18" charset="0"/>
-                <a:ea typeface="Cambria Math" panose="02040503050406030204" pitchFamily="18" charset="0"/>
-              </a:rPr>
-              <a:t>(RI) - </a:t>
-            </a:r>
-            <a:r>
-              <a:rPr lang="de-DE" dirty="0" err="1">
-                <a:latin typeface="Cambria Math" panose="02040503050406030204" pitchFamily="18" charset="0"/>
-                <a:ea typeface="Cambria Math" panose="02040503050406030204" pitchFamily="18" charset="0"/>
-              </a:rPr>
-              <a:t>Expected_RI</a:t>
-            </a:r>
-            <a:r>
-              <a:rPr lang="de-DE" dirty="0">
-                <a:latin typeface="Cambria Math" panose="02040503050406030204" pitchFamily="18" charset="0"/>
-                <a:ea typeface="Cambria Math" panose="02040503050406030204" pitchFamily="18" charset="0"/>
-              </a:rPr>
-              <a:t>)</a:t>
-            </a:r>
-          </a:p>
-          <a:p>
-            <a:r>
-              <a:rPr lang="de-DE" dirty="0" err="1"/>
-              <a:t>Adjusted</a:t>
-            </a:r>
-            <a:r>
-              <a:rPr lang="de-DE" dirty="0"/>
-              <a:t> mutual </a:t>
-            </a:r>
-            <a:r>
-              <a:rPr lang="de-DE" dirty="0" err="1"/>
-              <a:t>information</a:t>
-            </a:r>
-            <a:endParaRPr lang="de-DE" dirty="0"/>
-          </a:p>
-          <a:p>
-            <a:r>
-              <a:rPr lang="de-DE" dirty="0" err="1"/>
-              <a:t>Homogeneity</a:t>
-            </a:r>
-            <a:r>
-              <a:rPr lang="de-DE" dirty="0"/>
-              <a:t>, </a:t>
-            </a:r>
-            <a:r>
-              <a:rPr lang="de-DE" dirty="0" err="1"/>
-              <a:t>completeness</a:t>
-            </a:r>
-            <a:r>
-              <a:rPr lang="de-DE" dirty="0"/>
-              <a:t>, and V-</a:t>
-            </a:r>
-            <a:r>
-              <a:rPr lang="de-DE" dirty="0" err="1"/>
-              <a:t>measure</a:t>
-            </a:r>
-            <a:r>
-              <a:rPr lang="de-DE" dirty="0"/>
-              <a:t> </a:t>
-            </a:r>
-            <a:r>
-              <a:rPr lang="de-DE" dirty="0" err="1"/>
-              <a:t>scores</a:t>
-            </a:r>
-            <a:endParaRPr lang="de-DE" dirty="0"/>
-          </a:p>
-          <a:p>
-            <a:pPr lvl="1"/>
-            <a:r>
-              <a:rPr lang="de-DE" dirty="0" err="1"/>
-              <a:t>homogeneity</a:t>
-            </a:r>
-            <a:r>
-              <a:rPr lang="de-DE" dirty="0"/>
-              <a:t>: </a:t>
-            </a:r>
-            <a:r>
-              <a:rPr lang="de-DE" dirty="0" err="1"/>
-              <a:t>each</a:t>
-            </a:r>
-            <a:r>
-              <a:rPr lang="de-DE" dirty="0"/>
-              <a:t> </a:t>
-            </a:r>
-            <a:r>
-              <a:rPr lang="de-DE" dirty="0" err="1"/>
-              <a:t>cluster</a:t>
-            </a:r>
-            <a:r>
-              <a:rPr lang="de-DE" dirty="0"/>
-              <a:t> </a:t>
-            </a:r>
-            <a:r>
-              <a:rPr lang="de-DE" dirty="0" err="1"/>
-              <a:t>contains</a:t>
-            </a:r>
-            <a:r>
-              <a:rPr lang="de-DE" dirty="0"/>
-              <a:t> </a:t>
-            </a:r>
-            <a:r>
-              <a:rPr lang="de-DE" dirty="0" err="1"/>
-              <a:t>only</a:t>
-            </a:r>
-            <a:r>
-              <a:rPr lang="de-DE" dirty="0"/>
-              <a:t> </a:t>
-            </a:r>
-            <a:r>
-              <a:rPr lang="de-DE" dirty="0" err="1"/>
-              <a:t>one</a:t>
-            </a:r>
-            <a:r>
-              <a:rPr lang="de-DE" dirty="0"/>
-              <a:t> </a:t>
-            </a:r>
-            <a:r>
-              <a:rPr lang="de-DE" dirty="0" err="1"/>
-              <a:t>class</a:t>
-            </a:r>
-            <a:endParaRPr lang="de-DE" dirty="0"/>
-          </a:p>
-          <a:p>
-            <a:pPr lvl="1"/>
-            <a:r>
-              <a:rPr lang="de-DE" dirty="0" err="1"/>
-              <a:t>completeness</a:t>
-            </a:r>
-            <a:r>
-              <a:rPr lang="de-DE" dirty="0"/>
-              <a:t>: all </a:t>
-            </a:r>
-            <a:r>
-              <a:rPr lang="de-DE" dirty="0" err="1"/>
-              <a:t>members</a:t>
-            </a:r>
-            <a:r>
-              <a:rPr lang="de-DE" dirty="0"/>
-              <a:t> </a:t>
-            </a:r>
-            <a:r>
-              <a:rPr lang="de-DE" dirty="0" err="1"/>
-              <a:t>of</a:t>
-            </a:r>
-            <a:r>
-              <a:rPr lang="de-DE" dirty="0"/>
-              <a:t> a </a:t>
-            </a:r>
-            <a:r>
-              <a:rPr lang="de-DE" dirty="0" err="1"/>
-              <a:t>class</a:t>
-            </a:r>
-            <a:r>
-              <a:rPr lang="de-DE" dirty="0"/>
-              <a:t> </a:t>
-            </a:r>
-            <a:r>
-              <a:rPr lang="de-DE" dirty="0" err="1"/>
-              <a:t>are</a:t>
-            </a:r>
-            <a:r>
-              <a:rPr lang="de-DE" dirty="0"/>
-              <a:t> in </a:t>
-            </a:r>
-            <a:r>
-              <a:rPr lang="de-DE" dirty="0" err="1"/>
-              <a:t>the</a:t>
-            </a:r>
-            <a:r>
-              <a:rPr lang="de-DE" dirty="0"/>
-              <a:t> same </a:t>
-            </a:r>
-            <a:r>
-              <a:rPr lang="de-DE" dirty="0" err="1"/>
-              <a:t>cluster</a:t>
-            </a:r>
-            <a:endParaRPr lang="de-DE" dirty="0"/>
-          </a:p>
-          <a:p>
-            <a:pPr lvl="1"/>
-            <a:r>
-              <a:rPr lang="de-DE" dirty="0"/>
-              <a:t>V-</a:t>
-            </a:r>
-            <a:r>
-              <a:rPr lang="de-DE" dirty="0" err="1"/>
-              <a:t>measure</a:t>
-            </a:r>
-            <a:r>
-              <a:rPr lang="de-DE" dirty="0"/>
-              <a:t>: </a:t>
-            </a:r>
-            <a:r>
-              <a:rPr lang="de-DE" dirty="0" err="1"/>
-              <a:t>harmonic</a:t>
-            </a:r>
-            <a:r>
-              <a:rPr lang="de-DE" dirty="0"/>
-              <a:t> </a:t>
-            </a:r>
-            <a:r>
-              <a:rPr lang="de-DE" dirty="0" err="1"/>
-              <a:t>mean</a:t>
-            </a:r>
-            <a:r>
-              <a:rPr lang="de-DE" dirty="0"/>
-              <a:t> </a:t>
-            </a:r>
-            <a:r>
-              <a:rPr lang="de-DE" dirty="0" err="1"/>
-              <a:t>between</a:t>
-            </a:r>
-            <a:r>
-              <a:rPr lang="de-DE" dirty="0"/>
-              <a:t> </a:t>
-            </a:r>
-            <a:r>
-              <a:rPr lang="de-DE" dirty="0" err="1"/>
-              <a:t>homogeneity</a:t>
-            </a:r>
-            <a:r>
-              <a:rPr lang="de-DE" dirty="0"/>
-              <a:t> and </a:t>
-            </a:r>
-            <a:r>
-              <a:rPr lang="de-DE" dirty="0" err="1"/>
-              <a:t>completeness</a:t>
-            </a:r>
-            <a:endParaRPr lang="de-DE" dirty="0"/>
-          </a:p>
-        </p:txBody>
-      </p:sp>
-      <p:sp>
-        <p:nvSpPr>
-          <p:cNvPr id="4" name="Foliennummernplatzhalter 3">
-            <a:extLst>
-              <a:ext uri="{FF2B5EF4-FFF2-40B4-BE49-F238E27FC236}">
-                <a16:creationId xmlns:a16="http://schemas.microsoft.com/office/drawing/2014/main" id="{701A4EA1-06DA-F940-1383-630B8622B38F}"/>
-              </a:ext>
-            </a:extLst>
-          </p:cNvPr>
-          <p:cNvSpPr>
-            <a:spLocks noGrp="1"/>
-          </p:cNvSpPr>
-          <p:nvPr>
-            <p:ph type="sldNum" sz="quarter" idx="12"/>
-          </p:nvPr>
-        </p:nvSpPr>
-        <p:spPr/>
-        <p:txBody>
-          <a:bodyPr/>
-          <a:lstStyle/>
-          <a:p>
-            <a:fld id="{08C366F5-AFAD-49CB-854A-9D9E238FCA13}" type="slidenum">
-              <a:rPr lang="en-GB" smtClean="0"/>
-              <a:t>20</a:t>
-            </a:fld>
-            <a:endParaRPr lang="en-GB"/>
-          </a:p>
-        </p:txBody>
-      </p:sp>
-    </p:spTree>
-    <p:extLst>
-      <p:ext uri="{BB962C8B-B14F-4D97-AF65-F5344CB8AC3E}">
-        <p14:creationId xmlns:p14="http://schemas.microsoft.com/office/powerpoint/2010/main" val="2860005827"/>
-      </p:ext>
-    </p:extLst>
-  </p:cSld>
-  <p:clrMapOvr>
-    <a:masterClrMapping/>
-  </p:clrMapOvr>
-</p:sld>
-</file>
-
-<file path=ppt/slides/slide21.xml><?xml version="1.0" encoding="utf-8"?>
-<p:sld xmlns:a="http://schemas.openxmlformats.org/drawingml/2006/main" xmlns:r="http://schemas.openxmlformats.org/officeDocument/2006/relationships" xmlns:p="http://schemas.openxmlformats.org/presentationml/2006/main">
-  <p:cSld>
-    <p:spTree>
-      <p:nvGrpSpPr>
-        <p:cNvPr id="1" name=""/>
-        <p:cNvGrpSpPr/>
-        <p:nvPr/>
-      </p:nvGrpSpPr>
-      <p:grpSpPr>
-        <a:xfrm>
-          <a:off x="0" y="0"/>
-          <a:ext cx="0" cy="0"/>
-          <a:chOff x="0" y="0"/>
-          <a:chExt cx="0" cy="0"/>
-        </a:xfrm>
-      </p:grpSpPr>
-      <p:sp>
-        <p:nvSpPr>
-          <p:cNvPr id="2" name="Titel 1">
-            <a:extLst>
-              <a:ext uri="{FF2B5EF4-FFF2-40B4-BE49-F238E27FC236}">
                 <a16:creationId xmlns:a16="http://schemas.microsoft.com/office/drawing/2014/main" id="{E1872AF3-6DAA-E6C2-A919-228FF3EB5851}"/>
               </a:ext>
             </a:extLst>
@@ -12152,7 +11515,7 @@
           <a:p>
             <a:fld id="{08C366F5-AFAD-49CB-854A-9D9E238FCA13}" type="slidenum">
               <a:rPr lang="en-GB" smtClean="0"/>
-              <a:t>21</a:t>
+              <a:t>20</a:t>
             </a:fld>
             <a:endParaRPr lang="en-GB"/>
           </a:p>
@@ -12231,7 +11594,7 @@
 </p:sld>
 </file>
 
-<file path=ppt/slides/slide22.xml><?xml version="1.0" encoding="utf-8"?>
+<file path=ppt/slides/slide21.xml><?xml version="1.0" encoding="utf-8"?>
 <p:sld xmlns:a="http://schemas.openxmlformats.org/drawingml/2006/main" xmlns:r="http://schemas.openxmlformats.org/officeDocument/2006/relationships" xmlns:p="http://schemas.openxmlformats.org/presentationml/2006/main">
   <p:cSld>
     <p:spTree>
@@ -12314,7 +11677,23 @@
             </a:pPr>
             <a:r>
               <a:rPr lang="de-DE" dirty="0"/>
-              <a:t>Customer Segmentation on </a:t>
+              <a:t>Customer Segmentation </a:t>
+            </a:r>
+            <a:r>
+              <a:rPr lang="de-DE" dirty="0" err="1"/>
+              <a:t>with</a:t>
+            </a:r>
+            <a:r>
+              <a:rPr lang="de-DE" dirty="0"/>
+              <a:t> </a:t>
+            </a:r>
+            <a:r>
+              <a:rPr lang="de-DE" dirty="0" err="1"/>
+              <a:t>k-Means</a:t>
+            </a:r>
+            <a:r>
+              <a:rPr lang="de-DE" dirty="0"/>
+              <a:t> on </a:t>
             </a:r>
             <a:r>
               <a:rPr lang="de-DE" dirty="0">
@@ -12349,7 +11728,7 @@
           <a:p>
             <a:fld id="{08C366F5-AFAD-49CB-854A-9D9E238FCA13}" type="slidenum">
               <a:rPr lang="en-GB" smtClean="0"/>
-              <a:t>22</a:t>
+              <a:t>21</a:t>
             </a:fld>
             <a:endParaRPr lang="en-GB"/>
           </a:p>
@@ -12368,7 +11747,7 @@
 </p:sld>
 </file>
 
-<file path=ppt/slides/slide23.xml><?xml version="1.0" encoding="utf-8"?>
+<file path=ppt/slides/slide22.xml><?xml version="1.0" encoding="utf-8"?>
 <p:sld xmlns:a="http://schemas.openxmlformats.org/drawingml/2006/main" xmlns:r="http://schemas.openxmlformats.org/officeDocument/2006/relationships" xmlns:p="http://schemas.openxmlformats.org/presentationml/2006/main">
   <p:cSld>
     <p:spTree>
@@ -12408,7 +11787,7 @@
           <a:p>
             <a:fld id="{08C366F5-AFAD-49CB-854A-9D9E238FCA13}" type="slidenum">
               <a:rPr lang="en-GB" smtClean="0"/>
-              <a:t>23</a:t>
+              <a:t>22</a:t>
             </a:fld>
             <a:endParaRPr lang="en-GB"/>
           </a:p>
@@ -12487,7 +11866,7 @@
 </p:sld>
 </file>
 
-<file path=ppt/slides/slide24.xml><?xml version="1.0" encoding="utf-8"?>
+<file path=ppt/slides/slide23.xml><?xml version="1.0" encoding="utf-8"?>
 <p:sld xmlns:a="http://schemas.openxmlformats.org/drawingml/2006/main" xmlns:r="http://schemas.openxmlformats.org/officeDocument/2006/relationships" xmlns:p="http://schemas.openxmlformats.org/presentationml/2006/main">
   <p:cSld>
     <p:spTree>
@@ -12560,7 +11939,12 @@
             <p:ph idx="1"/>
           </p:nvPr>
         </p:nvSpPr>
-        <p:spPr/>
+        <p:spPr>
+          <a:xfrm>
+            <a:off x="838200" y="1616905"/>
+            <a:ext cx="7172739" cy="2666863"/>
+          </a:xfrm>
+        </p:spPr>
         <p:txBody>
           <a:bodyPr>
             <a:normAutofit fontScale="85000" lnSpcReduction="20000"/>
@@ -12842,294 +12226,6 @@
             <a:r>
               <a:rPr lang="de-DE" dirty="0" err="1"/>
               <a:t>elliptical</a:t>
-            </a:r>
-            <a:endParaRPr lang="de-DE" dirty="0"/>
-          </a:p>
-          <a:p>
-            <a:pPr marL="0" indent="0">
-              <a:buNone/>
-            </a:pPr>
-            <a:endParaRPr lang="de-DE" dirty="0"/>
-          </a:p>
-          <a:p>
-            <a:r>
-              <a:rPr lang="de-DE" dirty="0" err="1"/>
-              <a:t>k-Means</a:t>
-            </a:r>
-            <a:r>
-              <a:rPr lang="de-DE" dirty="0"/>
-              <a:t>: Group </a:t>
-            </a:r>
-            <a:r>
-              <a:rPr lang="de-DE" dirty="0" err="1"/>
-              <a:t>points</a:t>
-            </a:r>
-            <a:r>
-              <a:rPr lang="de-DE" dirty="0"/>
-              <a:t> </a:t>
-            </a:r>
-            <a:r>
-              <a:rPr lang="de-DE" dirty="0" err="1"/>
-              <a:t>around</a:t>
-            </a:r>
-            <a:r>
-              <a:rPr lang="de-DE" dirty="0"/>
-              <a:t> </a:t>
-            </a:r>
-            <a:r>
-              <a:rPr lang="de-DE" dirty="0" err="1"/>
-              <a:t>the</a:t>
-            </a:r>
-            <a:r>
-              <a:rPr lang="de-DE" dirty="0"/>
-              <a:t> </a:t>
-            </a:r>
-            <a:r>
-              <a:rPr lang="de-DE" dirty="0" err="1"/>
-              <a:t>nearest</a:t>
-            </a:r>
-            <a:r>
-              <a:rPr lang="de-DE" dirty="0"/>
-              <a:t> </a:t>
-            </a:r>
-            <a:r>
-              <a:rPr lang="de-DE" dirty="0" err="1"/>
-              <a:t>center</a:t>
-            </a:r>
-            <a:endParaRPr lang="de-DE" dirty="0"/>
-          </a:p>
-          <a:p>
-            <a:r>
-              <a:rPr lang="de-DE" dirty="0"/>
-              <a:t>GMM: </a:t>
-            </a:r>
-            <a:r>
-              <a:rPr lang="de-DE" dirty="0" err="1"/>
-              <a:t>Assume</a:t>
-            </a:r>
-            <a:r>
-              <a:rPr lang="de-DE" dirty="0"/>
-              <a:t> </a:t>
-            </a:r>
-            <a:r>
-              <a:rPr lang="de-DE" dirty="0" err="1"/>
-              <a:t>the</a:t>
-            </a:r>
-            <a:r>
-              <a:rPr lang="de-DE" dirty="0"/>
-              <a:t> </a:t>
-            </a:r>
-            <a:r>
-              <a:rPr lang="de-DE" dirty="0" err="1"/>
-              <a:t>data</a:t>
-            </a:r>
-            <a:r>
-              <a:rPr lang="de-DE" dirty="0"/>
-              <a:t> was </a:t>
-            </a:r>
-            <a:r>
-              <a:rPr lang="de-DE" dirty="0" err="1"/>
-              <a:t>generated</a:t>
-            </a:r>
-            <a:r>
-              <a:rPr lang="de-DE" dirty="0"/>
-              <a:t> </a:t>
-            </a:r>
-            <a:r>
-              <a:rPr lang="de-DE" dirty="0" err="1"/>
-              <a:t>by</a:t>
-            </a:r>
-            <a:r>
-              <a:rPr lang="de-DE" dirty="0"/>
-              <a:t> </a:t>
-            </a:r>
-            <a:r>
-              <a:rPr lang="de-DE" dirty="0" err="1"/>
-              <a:t>several</a:t>
-            </a:r>
-            <a:r>
-              <a:rPr lang="de-DE" dirty="0"/>
-              <a:t> </a:t>
-            </a:r>
-            <a:r>
-              <a:rPr lang="de-DE" dirty="0" err="1"/>
-              <a:t>Gaussian</a:t>
-            </a:r>
-            <a:r>
-              <a:rPr lang="de-DE" dirty="0"/>
-              <a:t> </a:t>
-            </a:r>
-            <a:r>
-              <a:rPr lang="de-DE" dirty="0" err="1"/>
-              <a:t>distributions</a:t>
-            </a:r>
-            <a:r>
-              <a:rPr lang="de-DE" dirty="0"/>
-              <a:t> and </a:t>
-            </a:r>
-            <a:r>
-              <a:rPr lang="de-DE" dirty="0" err="1"/>
-              <a:t>estimate</a:t>
-            </a:r>
-            <a:r>
-              <a:rPr lang="de-DE" dirty="0"/>
-              <a:t> </a:t>
-            </a:r>
-            <a:r>
-              <a:rPr lang="de-DE" dirty="0" err="1"/>
-              <a:t>them</a:t>
-            </a:r>
-            <a:endParaRPr lang="de-DE" dirty="0"/>
-          </a:p>
-          <a:p>
-            <a:pPr marL="0" indent="0">
-              <a:buNone/>
-            </a:pPr>
-            <a:endParaRPr lang="de-DE" dirty="0"/>
-          </a:p>
-          <a:p>
-            <a:pPr marL="0" indent="0">
-              <a:buNone/>
-            </a:pPr>
-            <a:r>
-              <a:rPr lang="de-DE" dirty="0" err="1"/>
-              <a:t>k-Means</a:t>
-            </a:r>
-            <a:r>
-              <a:rPr lang="de-DE" dirty="0"/>
-              <a:t> </a:t>
-            </a:r>
-            <a:r>
-              <a:rPr lang="de-DE" dirty="0" err="1"/>
-              <a:t>can</a:t>
-            </a:r>
-            <a:r>
-              <a:rPr lang="de-DE" dirty="0"/>
-              <a:t> </a:t>
-            </a:r>
-            <a:r>
-              <a:rPr lang="de-DE" dirty="0" err="1"/>
-              <a:t>be</a:t>
-            </a:r>
-            <a:r>
-              <a:rPr lang="de-DE" dirty="0"/>
-              <a:t> </a:t>
-            </a:r>
-            <a:r>
-              <a:rPr lang="de-DE" dirty="0" err="1"/>
-              <a:t>interpreted</a:t>
-            </a:r>
-            <a:r>
-              <a:rPr lang="de-DE" dirty="0"/>
-              <a:t> </a:t>
-            </a:r>
-            <a:r>
-              <a:rPr lang="de-DE" dirty="0" err="1"/>
-              <a:t>as</a:t>
-            </a:r>
-            <a:r>
-              <a:rPr lang="de-DE" dirty="0"/>
-              <a:t> </a:t>
-            </a:r>
-            <a:r>
-              <a:rPr lang="de-DE" dirty="0" err="1"/>
-              <a:t>special</a:t>
-            </a:r>
-            <a:r>
-              <a:rPr lang="de-DE" dirty="0"/>
-              <a:t> </a:t>
-            </a:r>
-            <a:r>
-              <a:rPr lang="de-DE" dirty="0" err="1"/>
-              <a:t>case</a:t>
-            </a:r>
-            <a:r>
-              <a:rPr lang="de-DE" dirty="0"/>
-              <a:t> </a:t>
-            </a:r>
-            <a:r>
-              <a:rPr lang="de-DE" dirty="0" err="1"/>
-              <a:t>of</a:t>
-            </a:r>
-            <a:r>
-              <a:rPr lang="de-DE" dirty="0"/>
-              <a:t> </a:t>
-            </a:r>
-            <a:r>
-              <a:rPr lang="de-DE" dirty="0" err="1"/>
-              <a:t>Gaussian</a:t>
-            </a:r>
-            <a:r>
-              <a:rPr lang="de-DE" dirty="0"/>
-              <a:t> </a:t>
-            </a:r>
-            <a:r>
-              <a:rPr lang="de-DE" dirty="0" err="1"/>
-              <a:t>mixture</a:t>
-            </a:r>
-            <a:r>
-              <a:rPr lang="de-DE" dirty="0"/>
-              <a:t> </a:t>
-            </a:r>
-            <a:r>
-              <a:rPr lang="de-DE" dirty="0" err="1"/>
-              <a:t>model</a:t>
-            </a:r>
-            <a:r>
-              <a:rPr lang="de-DE" dirty="0"/>
-              <a:t> </a:t>
-            </a:r>
-            <a:r>
-              <a:rPr lang="de-DE" dirty="0" err="1"/>
-              <a:t>with</a:t>
-            </a:r>
-            <a:r>
-              <a:rPr lang="de-DE" dirty="0"/>
-              <a:t> same </a:t>
-            </a:r>
-            <a:r>
-              <a:rPr lang="de-DE" dirty="0" err="1"/>
-              <a:t>variance</a:t>
-            </a:r>
-            <a:r>
-              <a:rPr lang="de-DE" dirty="0"/>
-              <a:t> in all </a:t>
-            </a:r>
-            <a:r>
-              <a:rPr lang="de-DE" dirty="0" err="1"/>
-              <a:t>directions</a:t>
-            </a:r>
-            <a:r>
-              <a:rPr lang="de-DE" dirty="0"/>
-              <a:t> and </a:t>
-            </a:r>
-            <a:r>
-              <a:rPr lang="de-DE" dirty="0" err="1"/>
-              <a:t>no</a:t>
-            </a:r>
-            <a:r>
-              <a:rPr lang="de-DE" dirty="0"/>
-              <a:t> </a:t>
-            </a:r>
-            <a:r>
-              <a:rPr lang="de-DE" dirty="0" err="1"/>
-              <a:t>covariance</a:t>
-            </a:r>
-            <a:r>
-              <a:rPr lang="de-DE" dirty="0"/>
-              <a:t> </a:t>
-            </a:r>
-            <a:r>
-              <a:rPr lang="de-DE" dirty="0" err="1"/>
-              <a:t>between</a:t>
-            </a:r>
-            <a:r>
-              <a:rPr lang="de-DE" dirty="0"/>
-              <a:t> </a:t>
-            </a:r>
-            <a:r>
-              <a:rPr lang="de-DE" dirty="0" err="1"/>
-              <a:t>features</a:t>
             </a:r>
             <a:endParaRPr lang="de-DE" dirty="0"/>
           </a:p>
@@ -13158,9 +12254,375 @@
           <a:p>
             <a:fld id="{08C366F5-AFAD-49CB-854A-9D9E238FCA13}" type="slidenum">
               <a:rPr lang="en-GB" smtClean="0"/>
-              <a:t>24</a:t>
+              <a:t>23</a:t>
             </a:fld>
             <a:endParaRPr lang="en-GB"/>
+          </a:p>
+        </p:txBody>
+      </p:sp>
+      <p:pic>
+        <p:nvPicPr>
+          <p:cNvPr id="1026" name="Picture 2" descr="spherical, diag, tied, full">
+            <a:extLst>
+              <a:ext uri="{FF2B5EF4-FFF2-40B4-BE49-F238E27FC236}">
+                <a16:creationId xmlns:a16="http://schemas.microsoft.com/office/drawing/2014/main" id="{3C32AA3D-D421-BA34-023C-009765C6B9B3}"/>
+              </a:ext>
+            </a:extLst>
+          </p:cNvPr>
+          <p:cNvPicPr>
+            <a:picLocks noChangeAspect="1" noChangeArrowheads="1"/>
+          </p:cNvPicPr>
+          <p:nvPr/>
+        </p:nvPicPr>
+        <p:blipFill>
+          <a:blip r:embed="rId2">
+            <a:extLst>
+              <a:ext uri="{28A0092B-C50C-407E-A947-70E740481C1C}">
+                <a14:useLocalDpi xmlns:a14="http://schemas.microsoft.com/office/drawing/2010/main" val="0"/>
+              </a:ext>
+            </a:extLst>
+          </a:blip>
+          <a:srcRect/>
+          <a:stretch>
+            <a:fillRect/>
+          </a:stretch>
+        </p:blipFill>
+        <p:spPr bwMode="auto">
+          <a:xfrm>
+            <a:off x="8010939" y="0"/>
+            <a:ext cx="4181061" cy="4181061"/>
+          </a:xfrm>
+          <a:prstGeom prst="rect">
+            <a:avLst/>
+          </a:prstGeom>
+          <a:noFill/>
+          <a:extLst>
+            <a:ext uri="{909E8E84-426E-40DD-AFC4-6F175D3DCCD1}">
+              <a14:hiddenFill xmlns:a14="http://schemas.microsoft.com/office/drawing/2010/main">
+                <a:solidFill>
+                  <a:srgbClr val="FFFFFF"/>
+                </a:solidFill>
+              </a14:hiddenFill>
+            </a:ext>
+          </a:extLst>
+        </p:spPr>
+      </p:pic>
+      <p:sp>
+        <p:nvSpPr>
+          <p:cNvPr id="6" name="Textfeld 5">
+            <a:extLst>
+              <a:ext uri="{FF2B5EF4-FFF2-40B4-BE49-F238E27FC236}">
+                <a16:creationId xmlns:a16="http://schemas.microsoft.com/office/drawing/2014/main" id="{C0DB1C56-2B4E-7A89-9076-B2C295DE1860}"/>
+              </a:ext>
+            </a:extLst>
+          </p:cNvPr>
+          <p:cNvSpPr txBox="1"/>
+          <p:nvPr/>
+        </p:nvSpPr>
+        <p:spPr>
+          <a:xfrm>
+            <a:off x="838200" y="4413151"/>
+            <a:ext cx="10515600" cy="2308324"/>
+          </a:xfrm>
+          <a:prstGeom prst="rect">
+            <a:avLst/>
+          </a:prstGeom>
+          <a:noFill/>
+        </p:spPr>
+        <p:txBody>
+          <a:bodyPr wrap="square">
+            <a:spAutoFit/>
+          </a:bodyPr>
+          <a:lstStyle/>
+          <a:p>
+            <a:pPr marL="342900" indent="-342900">
+              <a:buFont typeface="Arial" panose="020B0604020202020204" pitchFamily="34" charset="0"/>
+              <a:buChar char="•"/>
+            </a:pPr>
+            <a:r>
+              <a:rPr lang="de-DE" sz="2400" dirty="0" err="1"/>
+              <a:t>k-Means</a:t>
+            </a:r>
+            <a:r>
+              <a:rPr lang="de-DE" sz="2400" dirty="0"/>
+              <a:t>: Group </a:t>
+            </a:r>
+            <a:r>
+              <a:rPr lang="de-DE" sz="2400" dirty="0" err="1"/>
+              <a:t>points</a:t>
+            </a:r>
+            <a:r>
+              <a:rPr lang="de-DE" sz="2400" dirty="0"/>
+              <a:t> </a:t>
+            </a:r>
+            <a:r>
+              <a:rPr lang="de-DE" sz="2400" dirty="0" err="1"/>
+              <a:t>around</a:t>
+            </a:r>
+            <a:r>
+              <a:rPr lang="de-DE" sz="2400" dirty="0"/>
+              <a:t> </a:t>
+            </a:r>
+            <a:r>
+              <a:rPr lang="de-DE" sz="2400" dirty="0" err="1"/>
+              <a:t>the</a:t>
+            </a:r>
+            <a:r>
+              <a:rPr lang="de-DE" sz="2400" dirty="0"/>
+              <a:t> </a:t>
+            </a:r>
+            <a:r>
+              <a:rPr lang="de-DE" sz="2400" dirty="0" err="1"/>
+              <a:t>nearest</a:t>
+            </a:r>
+            <a:r>
+              <a:rPr lang="de-DE" sz="2400" dirty="0"/>
+              <a:t> </a:t>
+            </a:r>
+            <a:r>
+              <a:rPr lang="de-DE" sz="2400" dirty="0" err="1"/>
+              <a:t>center</a:t>
+            </a:r>
+            <a:endParaRPr lang="de-DE" sz="2400" dirty="0"/>
+          </a:p>
+          <a:p>
+            <a:pPr marL="342900" indent="-342900">
+              <a:buFont typeface="Arial" panose="020B0604020202020204" pitchFamily="34" charset="0"/>
+              <a:buChar char="•"/>
+            </a:pPr>
+            <a:r>
+              <a:rPr lang="de-DE" sz="2400" dirty="0"/>
+              <a:t>GMM: </a:t>
+            </a:r>
+            <a:r>
+              <a:rPr lang="de-DE" sz="2400" dirty="0" err="1"/>
+              <a:t>Assume</a:t>
+            </a:r>
+            <a:r>
+              <a:rPr lang="de-DE" sz="2400" dirty="0"/>
+              <a:t> </a:t>
+            </a:r>
+            <a:r>
+              <a:rPr lang="de-DE" sz="2400" dirty="0" err="1"/>
+              <a:t>the</a:t>
+            </a:r>
+            <a:r>
+              <a:rPr lang="de-DE" sz="2400" dirty="0"/>
+              <a:t> </a:t>
+            </a:r>
+            <a:r>
+              <a:rPr lang="de-DE" sz="2400" dirty="0" err="1"/>
+              <a:t>data</a:t>
+            </a:r>
+            <a:r>
+              <a:rPr lang="de-DE" sz="2400" dirty="0"/>
+              <a:t> was </a:t>
+            </a:r>
+            <a:r>
+              <a:rPr lang="de-DE" sz="2400" dirty="0" err="1"/>
+              <a:t>generated</a:t>
+            </a:r>
+            <a:r>
+              <a:rPr lang="de-DE" sz="2400" dirty="0"/>
+              <a:t> </a:t>
+            </a:r>
+            <a:r>
+              <a:rPr lang="de-DE" sz="2400" dirty="0" err="1"/>
+              <a:t>by</a:t>
+            </a:r>
+            <a:r>
+              <a:rPr lang="de-DE" sz="2400" dirty="0"/>
+              <a:t> </a:t>
+            </a:r>
+            <a:r>
+              <a:rPr lang="de-DE" sz="2400" dirty="0" err="1"/>
+              <a:t>several</a:t>
+            </a:r>
+            <a:r>
+              <a:rPr lang="de-DE" sz="2400" dirty="0"/>
+              <a:t> </a:t>
+            </a:r>
+            <a:r>
+              <a:rPr lang="de-DE" sz="2400" dirty="0" err="1"/>
+              <a:t>Gaussian</a:t>
+            </a:r>
+            <a:r>
+              <a:rPr lang="de-DE" sz="2400" dirty="0"/>
+              <a:t> </a:t>
+            </a:r>
+            <a:r>
+              <a:rPr lang="de-DE" sz="2400" dirty="0" err="1"/>
+              <a:t>distributions</a:t>
+            </a:r>
+            <a:r>
+              <a:rPr lang="de-DE" sz="2400" dirty="0"/>
+              <a:t> and </a:t>
+            </a:r>
+            <a:r>
+              <a:rPr lang="de-DE" sz="2400" dirty="0" err="1"/>
+              <a:t>estimate</a:t>
+            </a:r>
+            <a:r>
+              <a:rPr lang="de-DE" sz="2400" dirty="0"/>
+              <a:t> </a:t>
+            </a:r>
+            <a:r>
+              <a:rPr lang="de-DE" sz="2400" dirty="0" err="1"/>
+              <a:t>them</a:t>
+            </a:r>
+            <a:endParaRPr lang="de-DE" sz="2400" dirty="0"/>
+          </a:p>
+          <a:p>
+            <a:pPr marL="0" indent="0">
+              <a:buNone/>
+            </a:pPr>
+            <a:endParaRPr lang="de-DE" sz="2400" dirty="0"/>
+          </a:p>
+          <a:p>
+            <a:pPr marL="0" indent="0">
+              <a:buNone/>
+            </a:pPr>
+            <a:r>
+              <a:rPr lang="de-DE" sz="2400" dirty="0" err="1"/>
+              <a:t>k-Means</a:t>
+            </a:r>
+            <a:r>
+              <a:rPr lang="de-DE" sz="2400" dirty="0"/>
+              <a:t> </a:t>
+            </a:r>
+            <a:r>
+              <a:rPr lang="de-DE" sz="2400" dirty="0" err="1"/>
+              <a:t>can</a:t>
+            </a:r>
+            <a:r>
+              <a:rPr lang="de-DE" sz="2400" dirty="0"/>
+              <a:t> </a:t>
+            </a:r>
+            <a:r>
+              <a:rPr lang="de-DE" sz="2400" dirty="0" err="1"/>
+              <a:t>be</a:t>
+            </a:r>
+            <a:r>
+              <a:rPr lang="de-DE" sz="2400" dirty="0"/>
+              <a:t> </a:t>
+            </a:r>
+            <a:r>
+              <a:rPr lang="de-DE" sz="2400" dirty="0" err="1"/>
+              <a:t>interpreted</a:t>
+            </a:r>
+            <a:r>
+              <a:rPr lang="de-DE" sz="2400" dirty="0"/>
+              <a:t> </a:t>
+            </a:r>
+            <a:r>
+              <a:rPr lang="de-DE" sz="2400" dirty="0" err="1"/>
+              <a:t>as</a:t>
+            </a:r>
+            <a:r>
+              <a:rPr lang="de-DE" sz="2400" dirty="0"/>
+              <a:t> </a:t>
+            </a:r>
+            <a:r>
+              <a:rPr lang="de-DE" sz="2400" dirty="0" err="1"/>
+              <a:t>special</a:t>
+            </a:r>
+            <a:r>
+              <a:rPr lang="de-DE" sz="2400" dirty="0"/>
+              <a:t> </a:t>
+            </a:r>
+            <a:r>
+              <a:rPr lang="de-DE" sz="2400" dirty="0" err="1"/>
+              <a:t>case</a:t>
+            </a:r>
+            <a:r>
+              <a:rPr lang="de-DE" sz="2400" dirty="0"/>
+              <a:t> </a:t>
+            </a:r>
+            <a:r>
+              <a:rPr lang="de-DE" sz="2400" dirty="0" err="1"/>
+              <a:t>of</a:t>
+            </a:r>
+            <a:r>
+              <a:rPr lang="de-DE" sz="2400" dirty="0"/>
+              <a:t> </a:t>
+            </a:r>
+            <a:r>
+              <a:rPr lang="de-DE" sz="2400" dirty="0" err="1"/>
+              <a:t>Gaussian</a:t>
+            </a:r>
+            <a:r>
+              <a:rPr lang="de-DE" sz="2400" dirty="0"/>
+              <a:t> </a:t>
+            </a:r>
+            <a:r>
+              <a:rPr lang="de-DE" sz="2400" dirty="0" err="1"/>
+              <a:t>mixture</a:t>
+            </a:r>
+            <a:r>
+              <a:rPr lang="de-DE" sz="2400" dirty="0"/>
+              <a:t> </a:t>
+            </a:r>
+            <a:r>
+              <a:rPr lang="de-DE" sz="2400" dirty="0" err="1"/>
+              <a:t>model</a:t>
+            </a:r>
+            <a:r>
+              <a:rPr lang="de-DE" sz="2400" dirty="0"/>
+              <a:t> </a:t>
+            </a:r>
+            <a:r>
+              <a:rPr lang="de-DE" sz="2400" dirty="0" err="1"/>
+              <a:t>with</a:t>
+            </a:r>
+            <a:r>
+              <a:rPr lang="de-DE" sz="2400" dirty="0"/>
+              <a:t> same </a:t>
+            </a:r>
+            <a:r>
+              <a:rPr lang="de-DE" sz="2400" dirty="0" err="1"/>
+              <a:t>variance</a:t>
+            </a:r>
+            <a:r>
+              <a:rPr lang="de-DE" sz="2400" dirty="0"/>
+              <a:t> in all </a:t>
+            </a:r>
+            <a:r>
+              <a:rPr lang="de-DE" sz="2400" dirty="0" err="1"/>
+              <a:t>directions</a:t>
+            </a:r>
+            <a:r>
+              <a:rPr lang="de-DE" sz="2400" dirty="0"/>
+              <a:t> and </a:t>
+            </a:r>
+            <a:r>
+              <a:rPr lang="de-DE" sz="2400" dirty="0" err="1"/>
+              <a:t>no</a:t>
+            </a:r>
+            <a:r>
+              <a:rPr lang="de-DE" sz="2400" dirty="0"/>
+              <a:t> </a:t>
+            </a:r>
+            <a:r>
+              <a:rPr lang="de-DE" sz="2400" dirty="0" err="1"/>
+              <a:t>covariance</a:t>
+            </a:r>
+            <a:r>
+              <a:rPr lang="de-DE" sz="2400" dirty="0"/>
+              <a:t> </a:t>
+            </a:r>
+            <a:r>
+              <a:rPr lang="de-DE" sz="2400" dirty="0" err="1"/>
+              <a:t>between</a:t>
+            </a:r>
+            <a:r>
+              <a:rPr lang="de-DE" sz="2400" dirty="0"/>
+              <a:t> </a:t>
+            </a:r>
+            <a:r>
+              <a:rPr lang="de-DE" sz="2400" dirty="0" err="1"/>
+              <a:t>features</a:t>
+            </a:r>
+            <a:endParaRPr lang="de-DE" sz="2400" dirty="0"/>
           </a:p>
         </p:txBody>
       </p:sp>
@@ -13168,6 +12630,465 @@
     <p:extLst>
       <p:ext uri="{BB962C8B-B14F-4D97-AF65-F5344CB8AC3E}">
         <p14:creationId xmlns:p14="http://schemas.microsoft.com/office/powerpoint/2010/main" val="3563920324"/>
+      </p:ext>
+    </p:extLst>
+  </p:cSld>
+  <p:clrMapOvr>
+    <a:masterClrMapping/>
+  </p:clrMapOvr>
+</p:sld>
+</file>
+
+<file path=ppt/slides/slide24.xml><?xml version="1.0" encoding="utf-8"?>
+<p:sld xmlns:a="http://schemas.openxmlformats.org/drawingml/2006/main" xmlns:r="http://schemas.openxmlformats.org/officeDocument/2006/relationships" xmlns:p="http://schemas.openxmlformats.org/presentationml/2006/main">
+  <p:cSld>
+    <p:spTree>
+      <p:nvGrpSpPr>
+        <p:cNvPr id="1" name=""/>
+        <p:cNvGrpSpPr/>
+        <p:nvPr/>
+      </p:nvGrpSpPr>
+      <p:grpSpPr>
+        <a:xfrm>
+          <a:off x="0" y="0"/>
+          <a:ext cx="0" cy="0"/>
+          <a:chOff x="0" y="0"/>
+          <a:chExt cx="0" cy="0"/>
+        </a:xfrm>
+      </p:grpSpPr>
+      <p:sp>
+        <p:nvSpPr>
+          <p:cNvPr id="2" name="Titel 1">
+            <a:extLst>
+              <a:ext uri="{FF2B5EF4-FFF2-40B4-BE49-F238E27FC236}">
+                <a16:creationId xmlns:a16="http://schemas.microsoft.com/office/drawing/2014/main" id="{086CDE3F-08E5-532F-4B3B-5300331A2D51}"/>
+              </a:ext>
+            </a:extLst>
+          </p:cNvPr>
+          <p:cNvSpPr>
+            <a:spLocks noGrp="1"/>
+          </p:cNvSpPr>
+          <p:nvPr>
+            <p:ph type="title"/>
+          </p:nvPr>
+        </p:nvSpPr>
+        <p:spPr/>
+        <p:txBody>
+          <a:bodyPr/>
+          <a:lstStyle/>
+          <a:p>
+            <a:r>
+              <a:rPr lang="de-DE" dirty="0"/>
+              <a:t>GMM </a:t>
+            </a:r>
+            <a:r>
+              <a:rPr lang="de-DE" dirty="0" err="1"/>
+              <a:t>Covariance</a:t>
+            </a:r>
+            <a:r>
+              <a:rPr lang="de-DE" dirty="0"/>
+              <a:t> Matrices</a:t>
+            </a:r>
+          </a:p>
+        </p:txBody>
+      </p:sp>
+      <p:sp>
+        <p:nvSpPr>
+          <p:cNvPr id="3" name="Inhaltsplatzhalter 2">
+            <a:extLst>
+              <a:ext uri="{FF2B5EF4-FFF2-40B4-BE49-F238E27FC236}">
+                <a16:creationId xmlns:a16="http://schemas.microsoft.com/office/drawing/2014/main" id="{BF5D104B-F4AC-DC24-01F6-E760C01233FD}"/>
+              </a:ext>
+            </a:extLst>
+          </p:cNvPr>
+          <p:cNvSpPr>
+            <a:spLocks noGrp="1"/>
+          </p:cNvSpPr>
+          <p:nvPr>
+            <p:ph idx="1"/>
+          </p:nvPr>
+        </p:nvSpPr>
+        <p:spPr>
+          <a:xfrm>
+            <a:off x="838200" y="1825625"/>
+            <a:ext cx="5257800" cy="4351338"/>
+          </a:xfrm>
+        </p:spPr>
+        <p:txBody>
+          <a:bodyPr/>
+          <a:lstStyle/>
+          <a:p>
+            <a:r>
+              <a:rPr lang="de-DE" dirty="0" err="1"/>
+              <a:t>full</a:t>
+            </a:r>
+            <a:r>
+              <a:rPr lang="de-DE" dirty="0"/>
+              <a:t>: </a:t>
+            </a:r>
+            <a:r>
+              <a:rPr lang="de-DE" dirty="0" err="1"/>
+              <a:t>each</a:t>
+            </a:r>
+            <a:r>
+              <a:rPr lang="de-DE" dirty="0"/>
+              <a:t> </a:t>
+            </a:r>
+            <a:r>
+              <a:rPr lang="de-DE" dirty="0" err="1"/>
+              <a:t>component</a:t>
+            </a:r>
+            <a:r>
+              <a:rPr lang="de-DE" dirty="0"/>
+              <a:t> </a:t>
+            </a:r>
+            <a:r>
+              <a:rPr lang="de-DE" dirty="0" err="1"/>
+              <a:t>has</a:t>
+            </a:r>
+            <a:r>
+              <a:rPr lang="de-DE" dirty="0"/>
+              <a:t> </a:t>
+            </a:r>
+            <a:r>
+              <a:rPr lang="de-DE" dirty="0" err="1"/>
+              <a:t>its</a:t>
+            </a:r>
+            <a:r>
+              <a:rPr lang="de-DE" dirty="0"/>
+              <a:t> own </a:t>
+            </a:r>
+            <a:r>
+              <a:rPr lang="de-DE" dirty="0" err="1"/>
+              <a:t>general</a:t>
+            </a:r>
+            <a:r>
+              <a:rPr lang="de-DE" dirty="0"/>
+              <a:t> </a:t>
+            </a:r>
+            <a:r>
+              <a:rPr lang="de-DE" dirty="0" err="1"/>
+              <a:t>covariance</a:t>
+            </a:r>
+            <a:r>
+              <a:rPr lang="de-DE" dirty="0"/>
+              <a:t> </a:t>
+            </a:r>
+            <a:r>
+              <a:rPr lang="de-DE" dirty="0" err="1"/>
+              <a:t>matrix</a:t>
+            </a:r>
+            <a:endParaRPr lang="de-DE" dirty="0"/>
+          </a:p>
+          <a:p>
+            <a:r>
+              <a:rPr lang="de-DE" dirty="0" err="1"/>
+              <a:t>tied</a:t>
+            </a:r>
+            <a:r>
+              <a:rPr lang="de-DE" dirty="0"/>
+              <a:t>: all </a:t>
+            </a:r>
+            <a:r>
+              <a:rPr lang="de-DE" dirty="0" err="1"/>
+              <a:t>components</a:t>
+            </a:r>
+            <a:r>
+              <a:rPr lang="de-DE" dirty="0"/>
+              <a:t> </a:t>
+            </a:r>
+            <a:r>
+              <a:rPr lang="de-DE" dirty="0" err="1"/>
+              <a:t>share</a:t>
+            </a:r>
+            <a:r>
+              <a:rPr lang="de-DE" dirty="0"/>
+              <a:t> </a:t>
+            </a:r>
+            <a:r>
+              <a:rPr lang="de-DE" dirty="0" err="1"/>
+              <a:t>the</a:t>
+            </a:r>
+            <a:r>
+              <a:rPr lang="de-DE" dirty="0"/>
+              <a:t> same </a:t>
+            </a:r>
+            <a:r>
+              <a:rPr lang="de-DE" dirty="0" err="1"/>
+              <a:t>general</a:t>
+            </a:r>
+            <a:r>
+              <a:rPr lang="de-DE" dirty="0"/>
+              <a:t> </a:t>
+            </a:r>
+            <a:r>
+              <a:rPr lang="de-DE" dirty="0" err="1"/>
+              <a:t>covariance</a:t>
+            </a:r>
+            <a:r>
+              <a:rPr lang="de-DE" dirty="0"/>
+              <a:t> </a:t>
+            </a:r>
+            <a:r>
+              <a:rPr lang="de-DE" dirty="0" err="1"/>
+              <a:t>matrix</a:t>
+            </a:r>
+            <a:endParaRPr lang="de-DE" dirty="0"/>
+          </a:p>
+          <a:p>
+            <a:r>
+              <a:rPr lang="de-DE" dirty="0" err="1"/>
+              <a:t>diag</a:t>
+            </a:r>
+            <a:r>
+              <a:rPr lang="de-DE" dirty="0"/>
+              <a:t>: </a:t>
+            </a:r>
+            <a:r>
+              <a:rPr lang="de-DE" dirty="0" err="1"/>
+              <a:t>each</a:t>
+            </a:r>
+            <a:r>
+              <a:rPr lang="de-DE" dirty="0"/>
+              <a:t> </a:t>
+            </a:r>
+            <a:r>
+              <a:rPr lang="de-DE" dirty="0" err="1"/>
+              <a:t>component</a:t>
+            </a:r>
+            <a:r>
+              <a:rPr lang="de-DE" dirty="0"/>
+              <a:t> </a:t>
+            </a:r>
+            <a:r>
+              <a:rPr lang="de-DE" dirty="0" err="1"/>
+              <a:t>has</a:t>
+            </a:r>
+            <a:r>
+              <a:rPr lang="de-DE" dirty="0"/>
+              <a:t> </a:t>
+            </a:r>
+            <a:r>
+              <a:rPr lang="de-DE" dirty="0" err="1"/>
+              <a:t>its</a:t>
+            </a:r>
+            <a:r>
+              <a:rPr lang="de-DE" dirty="0"/>
+              <a:t> own diagonal </a:t>
+            </a:r>
+            <a:r>
+              <a:rPr lang="de-DE" dirty="0" err="1"/>
+              <a:t>covariance</a:t>
+            </a:r>
+            <a:r>
+              <a:rPr lang="de-DE" dirty="0"/>
+              <a:t> </a:t>
+            </a:r>
+            <a:r>
+              <a:rPr lang="de-DE" dirty="0" err="1"/>
+              <a:t>matrix</a:t>
+            </a:r>
+            <a:endParaRPr lang="de-DE" dirty="0"/>
+          </a:p>
+          <a:p>
+            <a:r>
+              <a:rPr lang="de-DE" dirty="0" err="1"/>
+              <a:t>spherical</a:t>
+            </a:r>
+            <a:r>
+              <a:rPr lang="de-DE" dirty="0"/>
+              <a:t>: </a:t>
+            </a:r>
+            <a:r>
+              <a:rPr lang="de-DE" dirty="0" err="1"/>
+              <a:t>each</a:t>
+            </a:r>
+            <a:r>
+              <a:rPr lang="de-DE" dirty="0"/>
+              <a:t> </a:t>
+            </a:r>
+            <a:r>
+              <a:rPr lang="de-DE" dirty="0" err="1"/>
+              <a:t>component</a:t>
+            </a:r>
+            <a:r>
+              <a:rPr lang="de-DE" dirty="0"/>
+              <a:t> </a:t>
+            </a:r>
+            <a:r>
+              <a:rPr lang="de-DE" dirty="0" err="1"/>
+              <a:t>has</a:t>
+            </a:r>
+            <a:r>
+              <a:rPr lang="de-DE" dirty="0"/>
+              <a:t> </a:t>
+            </a:r>
+            <a:r>
+              <a:rPr lang="de-DE" dirty="0" err="1"/>
+              <a:t>its</a:t>
+            </a:r>
+            <a:r>
+              <a:rPr lang="de-DE" dirty="0"/>
+              <a:t> own </a:t>
+            </a:r>
+            <a:r>
+              <a:rPr lang="de-DE" dirty="0" err="1"/>
+              <a:t>single</a:t>
+            </a:r>
+            <a:r>
+              <a:rPr lang="de-DE" dirty="0"/>
+              <a:t> </a:t>
+            </a:r>
+            <a:r>
+              <a:rPr lang="de-DE" dirty="0" err="1"/>
+              <a:t>variance</a:t>
+            </a:r>
+            <a:endParaRPr lang="de-DE" dirty="0"/>
+          </a:p>
+        </p:txBody>
+      </p:sp>
+      <p:sp>
+        <p:nvSpPr>
+          <p:cNvPr id="4" name="Foliennummernplatzhalter 3">
+            <a:extLst>
+              <a:ext uri="{FF2B5EF4-FFF2-40B4-BE49-F238E27FC236}">
+                <a16:creationId xmlns:a16="http://schemas.microsoft.com/office/drawing/2014/main" id="{F861C2E3-B328-C29E-17C5-846C62E45A00}"/>
+              </a:ext>
+            </a:extLst>
+          </p:cNvPr>
+          <p:cNvSpPr>
+            <a:spLocks noGrp="1"/>
+          </p:cNvSpPr>
+          <p:nvPr>
+            <p:ph type="sldNum" sz="quarter" idx="12"/>
+          </p:nvPr>
+        </p:nvSpPr>
+        <p:spPr/>
+        <p:txBody>
+          <a:bodyPr/>
+          <a:lstStyle/>
+          <a:p>
+            <a:fld id="{08C366F5-AFAD-49CB-854A-9D9E238FCA13}" type="slidenum">
+              <a:rPr lang="en-GB" smtClean="0"/>
+              <a:t>24</a:t>
+            </a:fld>
+            <a:endParaRPr lang="en-GB"/>
+          </a:p>
+        </p:txBody>
+      </p:sp>
+      <p:pic>
+        <p:nvPicPr>
+          <p:cNvPr id="1026" name="Picture 2" descr="spherical, diag, tied, full">
+            <a:extLst>
+              <a:ext uri="{FF2B5EF4-FFF2-40B4-BE49-F238E27FC236}">
+                <a16:creationId xmlns:a16="http://schemas.microsoft.com/office/drawing/2014/main" id="{F801D49C-FEAF-C2A2-73EF-DBC1490E945C}"/>
+              </a:ext>
+            </a:extLst>
+          </p:cNvPr>
+          <p:cNvPicPr>
+            <a:picLocks noChangeAspect="1" noChangeArrowheads="1"/>
+          </p:cNvPicPr>
+          <p:nvPr/>
+        </p:nvPicPr>
+        <p:blipFill>
+          <a:blip r:embed="rId2">
+            <a:extLst>
+              <a:ext uri="{28A0092B-C50C-407E-A947-70E740481C1C}">
+                <a14:useLocalDpi xmlns:a14="http://schemas.microsoft.com/office/drawing/2010/main" val="0"/>
+              </a:ext>
+            </a:extLst>
+          </a:blip>
+          <a:srcRect/>
+          <a:stretch>
+            <a:fillRect/>
+          </a:stretch>
+        </p:blipFill>
+        <p:spPr bwMode="auto">
+          <a:xfrm>
+            <a:off x="6251113" y="1253663"/>
+            <a:ext cx="5102687" cy="5102687"/>
+          </a:xfrm>
+          <a:prstGeom prst="rect">
+            <a:avLst/>
+          </a:prstGeom>
+          <a:noFill/>
+          <a:extLst>
+            <a:ext uri="{909E8E84-426E-40DD-AFC4-6F175D3DCCD1}">
+              <a14:hiddenFill xmlns:a14="http://schemas.microsoft.com/office/drawing/2010/main">
+                <a:solidFill>
+                  <a:srgbClr val="FFFFFF"/>
+                </a:solidFill>
+              </a14:hiddenFill>
+            </a:ext>
+          </a:extLst>
+        </p:spPr>
+      </p:pic>
+      <p:sp>
+        <p:nvSpPr>
+          <p:cNvPr id="9" name="Textfeld 8">
+            <a:extLst>
+              <a:ext uri="{FF2B5EF4-FFF2-40B4-BE49-F238E27FC236}">
+                <a16:creationId xmlns:a16="http://schemas.microsoft.com/office/drawing/2014/main" id="{18F63E4B-DB35-4BD8-2083-ADEE9975DBE9}"/>
+              </a:ext>
+            </a:extLst>
+          </p:cNvPr>
+          <p:cNvSpPr txBox="1"/>
+          <p:nvPr/>
+        </p:nvSpPr>
+        <p:spPr>
+          <a:xfrm>
+            <a:off x="7736072" y="884331"/>
+            <a:ext cx="2246128" cy="369332"/>
+          </a:xfrm>
+          <a:prstGeom prst="rect">
+            <a:avLst/>
+          </a:prstGeom>
+          <a:noFill/>
+        </p:spPr>
+        <p:txBody>
+          <a:bodyPr wrap="none" rtlCol="0">
+            <a:spAutoFit/>
+          </a:bodyPr>
+          <a:lstStyle/>
+          <a:p>
+            <a:r>
+              <a:rPr lang="de-DE" dirty="0" err="1">
+                <a:hlinkClick r:id="rId3"/>
+              </a:rPr>
+              <a:t>scikit</a:t>
+            </a:r>
+            <a:r>
+              <a:rPr lang="de-DE" dirty="0">
+                <a:hlinkClick r:id="rId3"/>
+              </a:rPr>
+              <a:t> </a:t>
+            </a:r>
+            <a:r>
+              <a:rPr lang="de-DE" dirty="0" err="1">
+                <a:hlinkClick r:id="rId3"/>
+              </a:rPr>
+              <a:t>learn</a:t>
+            </a:r>
+            <a:r>
+              <a:rPr lang="de-DE" dirty="0">
+                <a:hlinkClick r:id="rId3"/>
+              </a:rPr>
+              <a:t> </a:t>
+            </a:r>
+            <a:r>
+              <a:rPr lang="de-DE" dirty="0" err="1">
+                <a:hlinkClick r:id="rId3"/>
+              </a:rPr>
+              <a:t>example</a:t>
+            </a:r>
+            <a:endParaRPr lang="de-DE" dirty="0"/>
+          </a:p>
+        </p:txBody>
+      </p:sp>
+    </p:spTree>
+    <p:extLst>
+      <p:ext uri="{BB962C8B-B14F-4D97-AF65-F5344CB8AC3E}">
+        <p14:creationId xmlns:p14="http://schemas.microsoft.com/office/powerpoint/2010/main" val="636748425"/>
       </p:ext>
     </p:extLst>
   </p:cSld>
@@ -13244,9 +13165,14 @@
         </p:nvSpPr>
         <p:spPr/>
         <p:txBody>
-          <a:bodyPr/>
+          <a:bodyPr>
+            <a:normAutofit lnSpcReduction="10000"/>
+          </a:bodyPr>
           <a:lstStyle/>
           <a:p>
+            <a:pPr marL="0" indent="0">
+              <a:buNone/>
+            </a:pPr>
             <a:r>
               <a:rPr lang="de-DE" dirty="0" err="1"/>
               <a:t>Builds</a:t>
@@ -13283,12 +13209,12 @@
               <a:rPr lang="de-DE" dirty="0" err="1"/>
               <a:t>clusters</a:t>
             </a:r>
-            <a:r>
-              <a:rPr lang="de-DE" dirty="0"/>
-              <a:t>.</a:t>
-            </a:r>
-          </a:p>
-          <a:p>
+            <a:endParaRPr lang="de-DE" dirty="0"/>
+          </a:p>
+          <a:p>
+            <a:pPr marL="0" indent="0">
+              <a:buNone/>
+            </a:pPr>
             <a:r>
               <a:rPr lang="de-DE" dirty="0" err="1"/>
               <a:t>Useful</a:t>
@@ -13325,10 +13251,171 @@
               <a:rPr lang="de-DE" dirty="0" err="1"/>
               <a:t>structures</a:t>
             </a:r>
-            <a:r>
-              <a:rPr lang="de-DE" dirty="0"/>
-              <a:t>.</a:t>
-            </a:r>
+            <a:endParaRPr lang="de-DE" dirty="0"/>
+          </a:p>
+          <a:p>
+            <a:pPr marL="0" indent="0">
+              <a:buNone/>
+            </a:pPr>
+            <a:endParaRPr lang="de-DE" dirty="0"/>
+          </a:p>
+          <a:p>
+            <a:pPr marL="0" indent="0">
+              <a:buNone/>
+            </a:pPr>
+            <a:r>
+              <a:rPr lang="de-DE" dirty="0"/>
+              <a:t>Advantages:</a:t>
+            </a:r>
+          </a:p>
+          <a:p>
+            <a:r>
+              <a:rPr lang="de-DE" dirty="0" err="1"/>
+              <a:t>No</a:t>
+            </a:r>
+            <a:r>
+              <a:rPr lang="de-DE" dirty="0"/>
+              <a:t> </a:t>
+            </a:r>
+            <a:r>
+              <a:rPr lang="de-DE" dirty="0" err="1"/>
+              <a:t>need</a:t>
+            </a:r>
+            <a:r>
+              <a:rPr lang="de-DE" dirty="0"/>
+              <a:t> </a:t>
+            </a:r>
+            <a:r>
+              <a:rPr lang="de-DE" dirty="0" err="1"/>
+              <a:t>to</a:t>
+            </a:r>
+            <a:r>
+              <a:rPr lang="de-DE" dirty="0"/>
+              <a:t> </a:t>
+            </a:r>
+            <a:r>
+              <a:rPr lang="de-DE" dirty="0" err="1"/>
+              <a:t>pre-specify</a:t>
+            </a:r>
+            <a:r>
+              <a:rPr lang="de-DE" dirty="0"/>
+              <a:t> </a:t>
+            </a:r>
+            <a:r>
+              <a:rPr lang="de-DE" dirty="0" err="1"/>
+              <a:t>number</a:t>
+            </a:r>
+            <a:r>
+              <a:rPr lang="de-DE" dirty="0"/>
+              <a:t> </a:t>
+            </a:r>
+            <a:r>
+              <a:rPr lang="de-DE" dirty="0" err="1"/>
+              <a:t>of</a:t>
+            </a:r>
+            <a:r>
+              <a:rPr lang="de-DE" dirty="0"/>
+              <a:t> </a:t>
+            </a:r>
+            <a:r>
+              <a:rPr lang="de-DE" dirty="0" err="1"/>
+              <a:t>clusters</a:t>
+            </a:r>
+            <a:endParaRPr lang="de-DE" dirty="0"/>
+          </a:p>
+          <a:p>
+            <a:r>
+              <a:rPr lang="de-DE" dirty="0" err="1"/>
+              <a:t>Captures</a:t>
+            </a:r>
+            <a:r>
+              <a:rPr lang="de-DE" dirty="0"/>
+              <a:t> </a:t>
+            </a:r>
+            <a:r>
+              <a:rPr lang="de-DE" dirty="0" err="1"/>
+              <a:t>hierarchical</a:t>
+            </a:r>
+            <a:r>
+              <a:rPr lang="de-DE" dirty="0"/>
+              <a:t> </a:t>
+            </a:r>
+            <a:r>
+              <a:rPr lang="de-DE" dirty="0" err="1"/>
+              <a:t>relationships</a:t>
+            </a:r>
+            <a:endParaRPr lang="de-DE" dirty="0"/>
+          </a:p>
+          <a:p>
+            <a:r>
+              <a:rPr lang="de-DE" dirty="0"/>
+              <a:t>Easy </a:t>
+            </a:r>
+            <a:r>
+              <a:rPr lang="de-DE" dirty="0" err="1"/>
+              <a:t>to</a:t>
+            </a:r>
+            <a:r>
+              <a:rPr lang="de-DE" dirty="0"/>
+              <a:t> </a:t>
+            </a:r>
+            <a:r>
+              <a:rPr lang="de-DE" dirty="0" err="1"/>
+              <a:t>visualize</a:t>
+            </a:r>
+            <a:r>
+              <a:rPr lang="de-DE" dirty="0"/>
+              <a:t> and </a:t>
+            </a:r>
+            <a:r>
+              <a:rPr lang="de-DE" dirty="0" err="1"/>
+              <a:t>interpret</a:t>
+            </a:r>
+            <a:endParaRPr lang="de-DE" dirty="0"/>
+          </a:p>
+          <a:p>
+            <a:pPr marL="0" indent="0">
+              <a:buNone/>
+            </a:pPr>
+            <a:endParaRPr lang="de-DE" dirty="0"/>
+          </a:p>
+          <a:p>
+            <a:pPr marL="0" indent="0">
+              <a:buNone/>
+            </a:pPr>
+            <a:r>
+              <a:rPr lang="de-DE" dirty="0"/>
+              <a:t>But </a:t>
+            </a:r>
+            <a:r>
+              <a:rPr lang="de-DE" dirty="0" err="1"/>
+              <a:t>computationally</a:t>
+            </a:r>
+            <a:r>
+              <a:rPr lang="de-DE" dirty="0"/>
+              <a:t> expensive and sensitive </a:t>
+            </a:r>
+            <a:r>
+              <a:rPr lang="de-DE" dirty="0" err="1"/>
+              <a:t>to</a:t>
+            </a:r>
+            <a:r>
+              <a:rPr lang="de-DE" dirty="0"/>
+              <a:t> </a:t>
+            </a:r>
+            <a:r>
+              <a:rPr lang="de-DE" dirty="0" err="1"/>
+              <a:t>noise</a:t>
+            </a:r>
+            <a:r>
+              <a:rPr lang="de-DE" dirty="0"/>
+              <a:t> and </a:t>
+            </a:r>
+            <a:r>
+              <a:rPr lang="de-DE" dirty="0" err="1"/>
+              <a:t>outliers</a:t>
+            </a:r>
+            <a:endParaRPr lang="de-DE" dirty="0"/>
           </a:p>
         </p:txBody>
       </p:sp>
@@ -13396,6 +13483,1195 @@
           <p:cNvPr id="2" name="Titel 1">
             <a:extLst>
               <a:ext uri="{FF2B5EF4-FFF2-40B4-BE49-F238E27FC236}">
+                <a16:creationId xmlns:a16="http://schemas.microsoft.com/office/drawing/2014/main" id="{D9A795E3-8759-6E8B-1DBA-45DFA164A151}"/>
+              </a:ext>
+            </a:extLst>
+          </p:cNvPr>
+          <p:cNvSpPr>
+            <a:spLocks noGrp="1"/>
+          </p:cNvSpPr>
+          <p:nvPr>
+            <p:ph type="title"/>
+          </p:nvPr>
+        </p:nvSpPr>
+        <p:spPr/>
+        <p:txBody>
+          <a:bodyPr/>
+          <a:lstStyle/>
+          <a:p>
+            <a:r>
+              <a:rPr lang="de-DE" dirty="0" err="1"/>
+              <a:t>Hierarchical</a:t>
+            </a:r>
+            <a:r>
+              <a:rPr lang="de-DE" dirty="0"/>
+              <a:t> Clustering: Key Idea</a:t>
+            </a:r>
+          </a:p>
+        </p:txBody>
+      </p:sp>
+      <p:sp>
+        <p:nvSpPr>
+          <p:cNvPr id="3" name="Inhaltsplatzhalter 2">
+            <a:extLst>
+              <a:ext uri="{FF2B5EF4-FFF2-40B4-BE49-F238E27FC236}">
+                <a16:creationId xmlns:a16="http://schemas.microsoft.com/office/drawing/2014/main" id="{D86B8F8F-3C4E-99B0-8059-286F2BFD6A49}"/>
+              </a:ext>
+            </a:extLst>
+          </p:cNvPr>
+          <p:cNvSpPr>
+            <a:spLocks noGrp="1"/>
+          </p:cNvSpPr>
+          <p:nvPr>
+            <p:ph idx="1"/>
+          </p:nvPr>
+        </p:nvSpPr>
+        <p:spPr>
+          <a:xfrm>
+            <a:off x="838200" y="1825626"/>
+            <a:ext cx="10515600" cy="857939"/>
+          </a:xfrm>
+        </p:spPr>
+        <p:txBody>
+          <a:bodyPr>
+            <a:normAutofit fontScale="85000" lnSpcReduction="10000"/>
+          </a:bodyPr>
+          <a:lstStyle/>
+          <a:p>
+            <a:pPr marL="0" indent="0">
+              <a:buNone/>
+            </a:pPr>
+            <a:r>
+              <a:rPr lang="de-DE" dirty="0" err="1"/>
+              <a:t>Iteratively</a:t>
+            </a:r>
+            <a:r>
+              <a:rPr lang="de-DE" dirty="0"/>
+              <a:t> </a:t>
+            </a:r>
+            <a:r>
+              <a:rPr lang="de-DE" dirty="0" err="1"/>
+              <a:t>merge</a:t>
+            </a:r>
+            <a:r>
+              <a:rPr lang="de-DE" dirty="0"/>
+              <a:t> </a:t>
+            </a:r>
+            <a:r>
+              <a:rPr lang="de-DE" dirty="0" err="1"/>
+              <a:t>or</a:t>
+            </a:r>
+            <a:r>
+              <a:rPr lang="de-DE" dirty="0"/>
+              <a:t> </a:t>
+            </a:r>
+            <a:r>
+              <a:rPr lang="de-DE" dirty="0" err="1"/>
+              <a:t>split</a:t>
+            </a:r>
+            <a:r>
+              <a:rPr lang="de-DE" dirty="0"/>
+              <a:t> </a:t>
+            </a:r>
+            <a:r>
+              <a:rPr lang="de-DE" dirty="0" err="1"/>
+              <a:t>clusters</a:t>
+            </a:r>
+            <a:r>
+              <a:rPr lang="de-DE" dirty="0"/>
+              <a:t>, </a:t>
+            </a:r>
+            <a:r>
+              <a:rPr lang="de-DE" dirty="0" err="1"/>
+              <a:t>based</a:t>
+            </a:r>
+            <a:r>
+              <a:rPr lang="de-DE" dirty="0"/>
+              <a:t> on a </a:t>
+            </a:r>
+            <a:r>
+              <a:rPr lang="de-DE" dirty="0" err="1"/>
+              <a:t>distance</a:t>
+            </a:r>
+            <a:r>
+              <a:rPr lang="de-DE" dirty="0"/>
+              <a:t> (</a:t>
+            </a:r>
+            <a:r>
+              <a:rPr lang="de-DE" dirty="0" err="1"/>
+              <a:t>similarity</a:t>
+            </a:r>
+            <a:r>
+              <a:rPr lang="de-DE" dirty="0"/>
+              <a:t>) </a:t>
+            </a:r>
+            <a:r>
+              <a:rPr lang="de-DE" dirty="0" err="1"/>
+              <a:t>measure</a:t>
+            </a:r>
+            <a:endParaRPr lang="de-DE" dirty="0"/>
+          </a:p>
+          <a:p>
+            <a:pPr marL="0" indent="0" algn="ctr">
+              <a:buNone/>
+            </a:pPr>
+            <a:r>
+              <a:rPr lang="de-DE" dirty="0" err="1"/>
+              <a:t>Two</a:t>
+            </a:r>
+            <a:r>
+              <a:rPr lang="de-DE" dirty="0"/>
+              <a:t> </a:t>
+            </a:r>
+            <a:r>
+              <a:rPr lang="de-DE" dirty="0" err="1"/>
+              <a:t>main</a:t>
+            </a:r>
+            <a:r>
+              <a:rPr lang="de-DE" dirty="0"/>
+              <a:t> </a:t>
+            </a:r>
+            <a:r>
+              <a:rPr lang="de-DE" dirty="0" err="1"/>
+              <a:t>approaches</a:t>
+            </a:r>
+            <a:r>
+              <a:rPr lang="de-DE" dirty="0"/>
+              <a:t>:</a:t>
+            </a:r>
+          </a:p>
+        </p:txBody>
+      </p:sp>
+      <p:sp>
+        <p:nvSpPr>
+          <p:cNvPr id="4" name="Foliennummernplatzhalter 3">
+            <a:extLst>
+              <a:ext uri="{FF2B5EF4-FFF2-40B4-BE49-F238E27FC236}">
+                <a16:creationId xmlns:a16="http://schemas.microsoft.com/office/drawing/2014/main" id="{7DAD117E-071A-5DEF-876A-40396D489AD5}"/>
+              </a:ext>
+            </a:extLst>
+          </p:cNvPr>
+          <p:cNvSpPr>
+            <a:spLocks noGrp="1"/>
+          </p:cNvSpPr>
+          <p:nvPr>
+            <p:ph type="sldNum" sz="quarter" idx="12"/>
+          </p:nvPr>
+        </p:nvSpPr>
+        <p:spPr/>
+        <p:txBody>
+          <a:bodyPr/>
+          <a:lstStyle/>
+          <a:p>
+            <a:fld id="{08C366F5-AFAD-49CB-854A-9D9E238FCA13}" type="slidenum">
+              <a:rPr lang="en-GB" smtClean="0"/>
+              <a:t>26</a:t>
+            </a:fld>
+            <a:endParaRPr lang="en-GB"/>
+          </a:p>
+        </p:txBody>
+      </p:sp>
+      <p:sp>
+        <p:nvSpPr>
+          <p:cNvPr id="6" name="Textfeld 5">
+            <a:extLst>
+              <a:ext uri="{FF2B5EF4-FFF2-40B4-BE49-F238E27FC236}">
+                <a16:creationId xmlns:a16="http://schemas.microsoft.com/office/drawing/2014/main" id="{418ACD6D-54C0-88CF-3882-B5E4C688401F}"/>
+              </a:ext>
+            </a:extLst>
+          </p:cNvPr>
+          <p:cNvSpPr txBox="1"/>
+          <p:nvPr/>
+        </p:nvSpPr>
+        <p:spPr>
+          <a:xfrm>
+            <a:off x="838200" y="2818503"/>
+            <a:ext cx="4707835" cy="3877985"/>
+          </a:xfrm>
+          <a:prstGeom prst="rect">
+            <a:avLst/>
+          </a:prstGeom>
+          <a:noFill/>
+          <a:ln>
+            <a:solidFill>
+              <a:schemeClr val="tx1"/>
+            </a:solidFill>
+          </a:ln>
+        </p:spPr>
+        <p:txBody>
+          <a:bodyPr wrap="square">
+            <a:spAutoFit/>
+          </a:bodyPr>
+          <a:lstStyle/>
+          <a:p>
+            <a:r>
+              <a:rPr lang="de-DE" sz="2400" b="1" dirty="0" err="1"/>
+              <a:t>Agglomerative</a:t>
+            </a:r>
+            <a:r>
+              <a:rPr lang="de-DE" sz="2400" dirty="0"/>
+              <a:t> (</a:t>
+            </a:r>
+            <a:r>
+              <a:rPr lang="de-DE" sz="2400" dirty="0" err="1"/>
+              <a:t>bottom-up</a:t>
+            </a:r>
+            <a:r>
+              <a:rPr lang="de-DE" sz="2400" dirty="0"/>
+              <a:t>)</a:t>
+            </a:r>
+          </a:p>
+          <a:p>
+            <a:endParaRPr lang="de-DE" sz="2400" dirty="0"/>
+          </a:p>
+          <a:p>
+            <a:pPr marL="285750" indent="-285750">
+              <a:buFont typeface="Arial" panose="020B0604020202020204" pitchFamily="34" charset="0"/>
+              <a:buChar char="•"/>
+            </a:pPr>
+            <a:r>
+              <a:rPr lang="de-DE" sz="2200" dirty="0"/>
+              <a:t>Start </a:t>
+            </a:r>
+            <a:r>
+              <a:rPr lang="de-DE" sz="2200" dirty="0" err="1"/>
+              <a:t>with</a:t>
+            </a:r>
+            <a:r>
+              <a:rPr lang="de-DE" sz="2200" dirty="0"/>
+              <a:t> </a:t>
+            </a:r>
+            <a:r>
+              <a:rPr lang="de-DE" sz="2200" dirty="0" err="1"/>
+              <a:t>each</a:t>
+            </a:r>
+            <a:r>
+              <a:rPr lang="de-DE" sz="2200" dirty="0"/>
+              <a:t> </a:t>
+            </a:r>
+            <a:r>
+              <a:rPr lang="de-DE" sz="2200" dirty="0" err="1"/>
+              <a:t>data</a:t>
+            </a:r>
+            <a:r>
+              <a:rPr lang="de-DE" sz="2200" dirty="0"/>
+              <a:t> </a:t>
+            </a:r>
+            <a:r>
+              <a:rPr lang="de-DE" sz="2200" dirty="0" err="1"/>
+              <a:t>point</a:t>
+            </a:r>
+            <a:r>
+              <a:rPr lang="de-DE" sz="2200" dirty="0"/>
+              <a:t> </a:t>
+            </a:r>
+            <a:r>
+              <a:rPr lang="de-DE" sz="2200" dirty="0" err="1"/>
+              <a:t>as</a:t>
+            </a:r>
+            <a:r>
+              <a:rPr lang="de-DE" sz="2200" dirty="0"/>
+              <a:t> </a:t>
+            </a:r>
+            <a:r>
+              <a:rPr lang="de-DE" sz="2200" dirty="0" err="1"/>
+              <a:t>its</a:t>
+            </a:r>
+            <a:r>
+              <a:rPr lang="de-DE" sz="2200" dirty="0"/>
+              <a:t> own </a:t>
+            </a:r>
+            <a:r>
+              <a:rPr lang="de-DE" sz="2200" dirty="0" err="1"/>
+              <a:t>cluster</a:t>
+            </a:r>
+            <a:endParaRPr lang="de-DE" sz="2200" dirty="0"/>
+          </a:p>
+          <a:p>
+            <a:pPr marL="285750" indent="-285750">
+              <a:buFont typeface="Arial" panose="020B0604020202020204" pitchFamily="34" charset="0"/>
+              <a:buChar char="•"/>
+            </a:pPr>
+            <a:r>
+              <a:rPr lang="de-DE" sz="2200" dirty="0"/>
+              <a:t>Repeat:</a:t>
+            </a:r>
+          </a:p>
+          <a:p>
+            <a:pPr marL="742950" lvl="1" indent="-285750">
+              <a:buFont typeface="Arial" panose="020B0604020202020204" pitchFamily="34" charset="0"/>
+              <a:buChar char="•"/>
+            </a:pPr>
+            <a:r>
+              <a:rPr lang="de-DE" sz="2200" dirty="0"/>
+              <a:t>Find </a:t>
+            </a:r>
+            <a:r>
+              <a:rPr lang="de-DE" sz="2200" dirty="0" err="1"/>
+              <a:t>the</a:t>
+            </a:r>
+            <a:r>
+              <a:rPr lang="de-DE" sz="2200" dirty="0"/>
+              <a:t> </a:t>
+            </a:r>
+            <a:r>
+              <a:rPr lang="de-DE" sz="2200" dirty="0" err="1"/>
+              <a:t>closest</a:t>
+            </a:r>
+            <a:r>
+              <a:rPr lang="de-DE" sz="2200" dirty="0"/>
+              <a:t> pair </a:t>
+            </a:r>
+            <a:r>
+              <a:rPr lang="de-DE" sz="2200" dirty="0" err="1"/>
+              <a:t>of</a:t>
+            </a:r>
+            <a:r>
+              <a:rPr lang="de-DE" sz="2200" dirty="0"/>
+              <a:t> </a:t>
+            </a:r>
+            <a:r>
+              <a:rPr lang="de-DE" sz="2200" dirty="0" err="1"/>
+              <a:t>clusters</a:t>
+            </a:r>
+            <a:endParaRPr lang="de-DE" sz="2200" dirty="0"/>
+          </a:p>
+          <a:p>
+            <a:pPr marL="742950" lvl="1" indent="-285750">
+              <a:buFont typeface="Arial" panose="020B0604020202020204" pitchFamily="34" charset="0"/>
+              <a:buChar char="•"/>
+            </a:pPr>
+            <a:r>
+              <a:rPr lang="de-DE" sz="2200" dirty="0" err="1"/>
+              <a:t>Merge</a:t>
+            </a:r>
+            <a:r>
+              <a:rPr lang="de-DE" sz="2200" dirty="0"/>
+              <a:t> </a:t>
+            </a:r>
+            <a:r>
+              <a:rPr lang="de-DE" sz="2200" dirty="0" err="1"/>
+              <a:t>them</a:t>
+            </a:r>
+            <a:endParaRPr lang="de-DE" sz="2200" dirty="0"/>
+          </a:p>
+          <a:p>
+            <a:pPr marL="285750" indent="-285750">
+              <a:buFont typeface="Arial" panose="020B0604020202020204" pitchFamily="34" charset="0"/>
+              <a:buChar char="•"/>
+            </a:pPr>
+            <a:r>
+              <a:rPr lang="de-DE" sz="2200" dirty="0" err="1"/>
+              <a:t>Continue</a:t>
+            </a:r>
+            <a:r>
+              <a:rPr lang="de-DE" sz="2200" dirty="0"/>
+              <a:t> </a:t>
+            </a:r>
+            <a:r>
+              <a:rPr lang="de-DE" sz="2200" dirty="0" err="1"/>
+              <a:t>until</a:t>
+            </a:r>
+            <a:r>
+              <a:rPr lang="de-DE" sz="2200" dirty="0"/>
+              <a:t>:</a:t>
+            </a:r>
+          </a:p>
+          <a:p>
+            <a:pPr marL="742950" lvl="1" indent="-285750">
+              <a:buFont typeface="Arial" panose="020B0604020202020204" pitchFamily="34" charset="0"/>
+              <a:buChar char="•"/>
+            </a:pPr>
+            <a:r>
+              <a:rPr lang="de-DE" sz="2200" dirty="0" err="1"/>
+              <a:t>One</a:t>
+            </a:r>
+            <a:r>
+              <a:rPr lang="de-DE" sz="2200" dirty="0"/>
+              <a:t> </a:t>
+            </a:r>
+            <a:r>
+              <a:rPr lang="de-DE" sz="2200" dirty="0" err="1"/>
+              <a:t>cluster</a:t>
+            </a:r>
+            <a:r>
+              <a:rPr lang="de-DE" sz="2200" dirty="0"/>
+              <a:t> </a:t>
+            </a:r>
+            <a:r>
+              <a:rPr lang="de-DE" sz="2200" dirty="0" err="1"/>
+              <a:t>remains</a:t>
+            </a:r>
+            <a:endParaRPr lang="de-DE" sz="2200" dirty="0"/>
+          </a:p>
+          <a:p>
+            <a:pPr marL="742950" lvl="1" indent="-285750">
+              <a:buFont typeface="Arial" panose="020B0604020202020204" pitchFamily="34" charset="0"/>
+              <a:buChar char="•"/>
+            </a:pPr>
+            <a:r>
+              <a:rPr lang="de-DE" sz="2200" dirty="0" err="1"/>
+              <a:t>Or</a:t>
+            </a:r>
+            <a:r>
+              <a:rPr lang="de-DE" sz="2200" dirty="0"/>
+              <a:t> </a:t>
+            </a:r>
+            <a:r>
+              <a:rPr lang="de-DE" sz="2200" dirty="0" err="1"/>
+              <a:t>desired</a:t>
+            </a:r>
+            <a:r>
+              <a:rPr lang="de-DE" sz="2200" dirty="0"/>
+              <a:t> </a:t>
+            </a:r>
+            <a:r>
+              <a:rPr lang="de-DE" sz="2200" dirty="0" err="1"/>
+              <a:t>number</a:t>
+            </a:r>
+            <a:r>
+              <a:rPr lang="de-DE" sz="2200" dirty="0"/>
+              <a:t> </a:t>
+            </a:r>
+            <a:r>
+              <a:rPr lang="de-DE" sz="2200" dirty="0" err="1"/>
+              <a:t>of</a:t>
+            </a:r>
+            <a:r>
+              <a:rPr lang="de-DE" sz="2200" dirty="0"/>
+              <a:t> </a:t>
+            </a:r>
+            <a:r>
+              <a:rPr lang="de-DE" sz="2200" dirty="0" err="1"/>
+              <a:t>clusters</a:t>
+            </a:r>
+            <a:r>
+              <a:rPr lang="de-DE" sz="2200" dirty="0"/>
+              <a:t> </a:t>
+            </a:r>
+            <a:r>
+              <a:rPr lang="de-DE" sz="2200" dirty="0" err="1"/>
+              <a:t>is</a:t>
+            </a:r>
+            <a:r>
+              <a:rPr lang="de-DE" sz="2200" dirty="0"/>
+              <a:t> </a:t>
+            </a:r>
+            <a:r>
+              <a:rPr lang="de-DE" sz="2200" dirty="0" err="1"/>
+              <a:t>reached</a:t>
+            </a:r>
+            <a:endParaRPr lang="de-DE" sz="2200" dirty="0"/>
+          </a:p>
+        </p:txBody>
+      </p:sp>
+      <p:sp>
+        <p:nvSpPr>
+          <p:cNvPr id="8" name="Textfeld 7">
+            <a:extLst>
+              <a:ext uri="{FF2B5EF4-FFF2-40B4-BE49-F238E27FC236}">
+                <a16:creationId xmlns:a16="http://schemas.microsoft.com/office/drawing/2014/main" id="{D9556136-CB1E-0103-27DC-DA49B42A857C}"/>
+              </a:ext>
+            </a:extLst>
+          </p:cNvPr>
+          <p:cNvSpPr txBox="1"/>
+          <p:nvPr/>
+        </p:nvSpPr>
+        <p:spPr>
+          <a:xfrm>
+            <a:off x="6645964" y="2824232"/>
+            <a:ext cx="4707835" cy="2523768"/>
+          </a:xfrm>
+          <a:prstGeom prst="rect">
+            <a:avLst/>
+          </a:prstGeom>
+          <a:noFill/>
+          <a:ln>
+            <a:solidFill>
+              <a:schemeClr val="tx1"/>
+            </a:solidFill>
+          </a:ln>
+        </p:spPr>
+        <p:txBody>
+          <a:bodyPr wrap="square">
+            <a:spAutoFit/>
+          </a:bodyPr>
+          <a:lstStyle/>
+          <a:p>
+            <a:r>
+              <a:rPr lang="de-DE" sz="2400" b="1" dirty="0" err="1"/>
+              <a:t>Divisive</a:t>
+            </a:r>
+            <a:r>
+              <a:rPr lang="de-DE" sz="2400" dirty="0"/>
+              <a:t> (top-down)</a:t>
+            </a:r>
+          </a:p>
+          <a:p>
+            <a:endParaRPr lang="de-DE" sz="2400" dirty="0"/>
+          </a:p>
+          <a:p>
+            <a:pPr marL="342900" indent="-342900">
+              <a:buFont typeface="Arial" panose="020B0604020202020204" pitchFamily="34" charset="0"/>
+              <a:buChar char="•"/>
+            </a:pPr>
+            <a:r>
+              <a:rPr lang="de-DE" sz="2200" dirty="0"/>
+              <a:t>Start </a:t>
+            </a:r>
+            <a:r>
+              <a:rPr lang="de-DE" sz="2200" dirty="0" err="1"/>
+              <a:t>with</a:t>
+            </a:r>
+            <a:r>
+              <a:rPr lang="de-DE" sz="2200" dirty="0"/>
+              <a:t> all </a:t>
+            </a:r>
+            <a:r>
+              <a:rPr lang="de-DE" sz="2200" dirty="0" err="1"/>
+              <a:t>data</a:t>
+            </a:r>
+            <a:r>
+              <a:rPr lang="de-DE" sz="2200" dirty="0"/>
+              <a:t> in </a:t>
+            </a:r>
+            <a:r>
+              <a:rPr lang="de-DE" sz="2200" dirty="0" err="1"/>
+              <a:t>one</a:t>
+            </a:r>
+            <a:r>
+              <a:rPr lang="de-DE" sz="2200" dirty="0"/>
+              <a:t> </a:t>
+            </a:r>
+            <a:r>
+              <a:rPr lang="de-DE" sz="2200" dirty="0" err="1"/>
+              <a:t>cluster</a:t>
+            </a:r>
+            <a:endParaRPr lang="de-DE" sz="2200" dirty="0"/>
+          </a:p>
+          <a:p>
+            <a:pPr marL="342900" indent="-342900">
+              <a:buFont typeface="Arial" panose="020B0604020202020204" pitchFamily="34" charset="0"/>
+              <a:buChar char="•"/>
+            </a:pPr>
+            <a:r>
+              <a:rPr lang="de-DE" sz="2200" dirty="0" err="1"/>
+              <a:t>Recursively</a:t>
+            </a:r>
+            <a:r>
+              <a:rPr lang="de-DE" sz="2200" dirty="0"/>
+              <a:t> </a:t>
+            </a:r>
+            <a:r>
+              <a:rPr lang="de-DE" sz="2200" dirty="0" err="1"/>
+              <a:t>split</a:t>
+            </a:r>
+            <a:r>
+              <a:rPr lang="de-DE" sz="2200" dirty="0"/>
+              <a:t> </a:t>
+            </a:r>
+            <a:r>
+              <a:rPr lang="de-DE" sz="2200" dirty="0" err="1"/>
+              <a:t>clusters</a:t>
+            </a:r>
+            <a:endParaRPr lang="de-DE" sz="2200" dirty="0"/>
+          </a:p>
+          <a:p>
+            <a:endParaRPr lang="de-DE" sz="2200" dirty="0"/>
+          </a:p>
+          <a:p>
+            <a:r>
+              <a:rPr lang="de-DE" sz="2200" dirty="0" err="1"/>
+              <a:t>Less</a:t>
+            </a:r>
+            <a:r>
+              <a:rPr lang="de-DE" sz="2200" dirty="0"/>
+              <a:t> </a:t>
+            </a:r>
+            <a:r>
+              <a:rPr lang="de-DE" sz="2200" dirty="0" err="1"/>
+              <a:t>commonly</a:t>
+            </a:r>
+            <a:r>
+              <a:rPr lang="de-DE" sz="2200" dirty="0"/>
+              <a:t> </a:t>
+            </a:r>
+            <a:r>
+              <a:rPr lang="de-DE" sz="2200" dirty="0" err="1"/>
+              <a:t>used</a:t>
+            </a:r>
+            <a:r>
+              <a:rPr lang="de-DE" sz="2200" dirty="0"/>
+              <a:t> (</a:t>
+            </a:r>
+            <a:r>
+              <a:rPr lang="de-DE" sz="2200" dirty="0" err="1"/>
+              <a:t>more</a:t>
+            </a:r>
+            <a:r>
+              <a:rPr lang="de-DE" sz="2200" dirty="0"/>
+              <a:t> </a:t>
+            </a:r>
+            <a:r>
+              <a:rPr lang="de-DE" sz="2200" dirty="0" err="1"/>
+              <a:t>computationally</a:t>
+            </a:r>
+            <a:r>
+              <a:rPr lang="de-DE" sz="2200" dirty="0"/>
+              <a:t> expensive)</a:t>
+            </a:r>
+          </a:p>
+        </p:txBody>
+      </p:sp>
+    </p:spTree>
+    <p:extLst>
+      <p:ext uri="{BB962C8B-B14F-4D97-AF65-F5344CB8AC3E}">
+        <p14:creationId xmlns:p14="http://schemas.microsoft.com/office/powerpoint/2010/main" val="2948405266"/>
+      </p:ext>
+    </p:extLst>
+  </p:cSld>
+  <p:clrMapOvr>
+    <a:masterClrMapping/>
+  </p:clrMapOvr>
+</p:sld>
+</file>
+
+<file path=ppt/slides/slide27.xml><?xml version="1.0" encoding="utf-8"?>
+<p:sld xmlns:a="http://schemas.openxmlformats.org/drawingml/2006/main" xmlns:r="http://schemas.openxmlformats.org/officeDocument/2006/relationships" xmlns:p="http://schemas.openxmlformats.org/presentationml/2006/main">
+  <p:cSld>
+    <p:spTree>
+      <p:nvGrpSpPr>
+        <p:cNvPr id="1" name=""/>
+        <p:cNvGrpSpPr/>
+        <p:nvPr/>
+      </p:nvGrpSpPr>
+      <p:grpSpPr>
+        <a:xfrm>
+          <a:off x="0" y="0"/>
+          <a:ext cx="0" cy="0"/>
+          <a:chOff x="0" y="0"/>
+          <a:chExt cx="0" cy="0"/>
+        </a:xfrm>
+      </p:grpSpPr>
+      <p:sp>
+        <p:nvSpPr>
+          <p:cNvPr id="2" name="Titel 1">
+            <a:extLst>
+              <a:ext uri="{FF2B5EF4-FFF2-40B4-BE49-F238E27FC236}">
+                <a16:creationId xmlns:a16="http://schemas.microsoft.com/office/drawing/2014/main" id="{AF7E9558-60FF-C775-2BB6-0984854DFA28}"/>
+              </a:ext>
+            </a:extLst>
+          </p:cNvPr>
+          <p:cNvSpPr>
+            <a:spLocks noGrp="1"/>
+          </p:cNvSpPr>
+          <p:nvPr>
+            <p:ph type="title"/>
+          </p:nvPr>
+        </p:nvSpPr>
+        <p:spPr/>
+        <p:txBody>
+          <a:bodyPr/>
+          <a:lstStyle/>
+          <a:p>
+            <a:r>
+              <a:rPr lang="de-DE" dirty="0" err="1"/>
+              <a:t>Distance</a:t>
+            </a:r>
+            <a:r>
+              <a:rPr lang="de-DE" dirty="0"/>
+              <a:t> </a:t>
+            </a:r>
+            <a:r>
+              <a:rPr lang="de-DE" dirty="0" err="1"/>
+              <a:t>Measures</a:t>
+            </a:r>
+            <a:r>
+              <a:rPr lang="de-DE" dirty="0"/>
+              <a:t> and </a:t>
+            </a:r>
+            <a:r>
+              <a:rPr lang="de-DE" dirty="0" err="1"/>
+              <a:t>Linkage</a:t>
+            </a:r>
+            <a:endParaRPr lang="de-DE" dirty="0"/>
+          </a:p>
+        </p:txBody>
+      </p:sp>
+      <p:sp>
+        <p:nvSpPr>
+          <p:cNvPr id="3" name="Inhaltsplatzhalter 2">
+            <a:extLst>
+              <a:ext uri="{FF2B5EF4-FFF2-40B4-BE49-F238E27FC236}">
+                <a16:creationId xmlns:a16="http://schemas.microsoft.com/office/drawing/2014/main" id="{4BBA418D-158A-0B53-CC56-8FC2C9052AFD}"/>
+              </a:ext>
+            </a:extLst>
+          </p:cNvPr>
+          <p:cNvSpPr>
+            <a:spLocks noGrp="1"/>
+          </p:cNvSpPr>
+          <p:nvPr>
+            <p:ph idx="1"/>
+          </p:nvPr>
+        </p:nvSpPr>
+        <p:spPr/>
+        <p:txBody>
+          <a:bodyPr>
+            <a:noAutofit/>
+          </a:bodyPr>
+          <a:lstStyle/>
+          <a:p>
+            <a:pPr marL="0" indent="0">
+              <a:buNone/>
+            </a:pPr>
+            <a:r>
+              <a:rPr lang="de-DE" sz="2400" dirty="0"/>
+              <a:t>As </a:t>
+            </a:r>
+            <a:r>
+              <a:rPr lang="de-DE" sz="2400" dirty="0" err="1"/>
+              <a:t>before</a:t>
+            </a:r>
+            <a:r>
+              <a:rPr lang="de-DE" sz="2400" dirty="0"/>
+              <a:t>, </a:t>
+            </a:r>
+            <a:r>
+              <a:rPr lang="de-DE" sz="2400" dirty="0" err="1"/>
+              <a:t>need</a:t>
+            </a:r>
+            <a:r>
+              <a:rPr lang="de-DE" sz="2400" dirty="0"/>
+              <a:t> a </a:t>
+            </a:r>
+            <a:r>
+              <a:rPr lang="de-DE" sz="2400" dirty="0" err="1"/>
+              <a:t>way</a:t>
+            </a:r>
+            <a:r>
+              <a:rPr lang="de-DE" sz="2400" dirty="0"/>
+              <a:t> </a:t>
+            </a:r>
+            <a:r>
+              <a:rPr lang="de-DE" sz="2400" dirty="0" err="1"/>
+              <a:t>to</a:t>
+            </a:r>
+            <a:r>
+              <a:rPr lang="de-DE" sz="2400" dirty="0"/>
+              <a:t> </a:t>
+            </a:r>
+            <a:r>
+              <a:rPr lang="de-DE" sz="2400" dirty="0" err="1"/>
+              <a:t>measure</a:t>
+            </a:r>
+            <a:r>
+              <a:rPr lang="de-DE" sz="2400" dirty="0"/>
+              <a:t> </a:t>
+            </a:r>
+            <a:r>
+              <a:rPr lang="de-DE" sz="2400" dirty="0" err="1"/>
+              <a:t>similarity</a:t>
+            </a:r>
+            <a:r>
+              <a:rPr lang="de-DE" sz="2400" dirty="0"/>
+              <a:t>/</a:t>
+            </a:r>
+            <a:r>
+              <a:rPr lang="de-DE" sz="2400" dirty="0" err="1"/>
+              <a:t>distance</a:t>
+            </a:r>
+            <a:r>
+              <a:rPr lang="de-DE" sz="2400" dirty="0"/>
+              <a:t> </a:t>
+            </a:r>
+            <a:r>
+              <a:rPr lang="de-DE" sz="2400" dirty="0" err="1"/>
+              <a:t>between</a:t>
+            </a:r>
+            <a:r>
+              <a:rPr lang="de-DE" sz="2400" dirty="0"/>
+              <a:t> </a:t>
+            </a:r>
+            <a:r>
+              <a:rPr lang="de-DE" sz="2400" dirty="0" err="1"/>
+              <a:t>points</a:t>
+            </a:r>
+            <a:r>
+              <a:rPr lang="de-DE" sz="2400" dirty="0"/>
+              <a:t>:</a:t>
+            </a:r>
+          </a:p>
+          <a:p>
+            <a:r>
+              <a:rPr lang="de-DE" sz="2400" dirty="0" err="1"/>
+              <a:t>Euclidean</a:t>
+            </a:r>
+            <a:r>
+              <a:rPr lang="de-DE" sz="2400" dirty="0"/>
+              <a:t> </a:t>
+            </a:r>
+            <a:r>
+              <a:rPr lang="de-DE" sz="2400" dirty="0" err="1"/>
+              <a:t>distance</a:t>
+            </a:r>
+            <a:endParaRPr lang="de-DE" sz="2400" dirty="0"/>
+          </a:p>
+          <a:p>
+            <a:r>
+              <a:rPr lang="de-DE" sz="2400" dirty="0"/>
+              <a:t>Manhattan </a:t>
+            </a:r>
+            <a:r>
+              <a:rPr lang="de-DE" sz="2400" dirty="0" err="1"/>
+              <a:t>distance</a:t>
+            </a:r>
+            <a:endParaRPr lang="de-DE" sz="2400" dirty="0"/>
+          </a:p>
+          <a:p>
+            <a:r>
+              <a:rPr lang="de-DE" sz="2400" dirty="0" err="1"/>
+              <a:t>Cosine</a:t>
+            </a:r>
+            <a:r>
+              <a:rPr lang="de-DE" sz="2400" dirty="0"/>
+              <a:t> </a:t>
+            </a:r>
+            <a:r>
+              <a:rPr lang="de-DE" sz="2400" dirty="0" err="1"/>
+              <a:t>similarity</a:t>
+            </a:r>
+            <a:endParaRPr lang="de-DE" sz="2400" dirty="0"/>
+          </a:p>
+          <a:p>
+            <a:pPr marL="0" indent="0">
+              <a:buNone/>
+            </a:pPr>
+            <a:r>
+              <a:rPr lang="de-DE" sz="2400" dirty="0">
+                <a:sym typeface="Wingdings" pitchFamily="2" charset="2"/>
+              </a:rPr>
+              <a:t> </a:t>
+            </a:r>
+            <a:r>
+              <a:rPr lang="de-DE" sz="2400" dirty="0"/>
+              <a:t>Choice </a:t>
+            </a:r>
+            <a:r>
+              <a:rPr lang="de-DE" sz="2400" dirty="0" err="1"/>
+              <a:t>affects</a:t>
+            </a:r>
+            <a:r>
+              <a:rPr lang="de-DE" sz="2400" dirty="0"/>
+              <a:t> </a:t>
+            </a:r>
+            <a:r>
+              <a:rPr lang="de-DE" sz="2400" dirty="0" err="1"/>
+              <a:t>clustering</a:t>
+            </a:r>
+            <a:r>
+              <a:rPr lang="de-DE" sz="2400" dirty="0"/>
+              <a:t> </a:t>
+            </a:r>
+            <a:r>
+              <a:rPr lang="de-DE" sz="2400" dirty="0" err="1"/>
+              <a:t>results</a:t>
+            </a:r>
+            <a:r>
+              <a:rPr lang="de-DE" sz="2400" dirty="0"/>
+              <a:t> </a:t>
+            </a:r>
+            <a:r>
+              <a:rPr lang="de-DE" sz="2400" dirty="0" err="1"/>
+              <a:t>significantly</a:t>
+            </a:r>
+            <a:endParaRPr lang="de-DE" sz="2400" dirty="0"/>
+          </a:p>
+          <a:p>
+            <a:pPr marL="0" indent="0">
+              <a:buNone/>
+            </a:pPr>
+            <a:endParaRPr lang="de-DE" sz="2400" dirty="0"/>
+          </a:p>
+          <a:p>
+            <a:pPr marL="0" indent="0">
+              <a:buNone/>
+            </a:pPr>
+            <a:r>
+              <a:rPr lang="de-DE" sz="2400" dirty="0"/>
+              <a:t>Cluster-</a:t>
+            </a:r>
+            <a:r>
+              <a:rPr lang="de-DE" sz="2400" dirty="0" err="1"/>
+              <a:t>to</a:t>
+            </a:r>
+            <a:r>
+              <a:rPr lang="de-DE" sz="2400" dirty="0"/>
+              <a:t>-cluster </a:t>
+            </a:r>
+            <a:r>
+              <a:rPr lang="de-DE" sz="2400" dirty="0" err="1"/>
+              <a:t>distance</a:t>
+            </a:r>
+            <a:r>
+              <a:rPr lang="de-DE" sz="2400" dirty="0"/>
+              <a:t> (</a:t>
+            </a:r>
+            <a:r>
+              <a:rPr lang="de-DE" sz="2400" dirty="0" err="1"/>
+              <a:t>linkage</a:t>
+            </a:r>
+            <a:r>
+              <a:rPr lang="de-DE" sz="2400" dirty="0"/>
+              <a:t>):</a:t>
+            </a:r>
+          </a:p>
+          <a:p>
+            <a:pPr marL="0" indent="0">
+              <a:buNone/>
+            </a:pPr>
+            <a:r>
+              <a:rPr lang="de-DE" sz="2400" dirty="0"/>
+              <a:t>In </a:t>
+            </a:r>
+            <a:r>
+              <a:rPr lang="de-DE" sz="2400" dirty="0" err="1"/>
+              <a:t>hierarchical</a:t>
+            </a:r>
+            <a:r>
+              <a:rPr lang="de-DE" sz="2400" dirty="0"/>
+              <a:t> </a:t>
+            </a:r>
+            <a:r>
+              <a:rPr lang="de-DE" sz="2400" dirty="0" err="1"/>
+              <a:t>clustering</a:t>
+            </a:r>
+            <a:r>
+              <a:rPr lang="de-DE" sz="2400" dirty="0"/>
+              <a:t>, </a:t>
+            </a:r>
+            <a:r>
+              <a:rPr lang="de-DE" sz="2400" dirty="0" err="1"/>
+              <a:t>clusters</a:t>
+            </a:r>
+            <a:r>
+              <a:rPr lang="de-DE" sz="2400" dirty="0"/>
+              <a:t> </a:t>
+            </a:r>
+            <a:r>
+              <a:rPr lang="de-DE" sz="2400" dirty="0" err="1"/>
+              <a:t>are</a:t>
+            </a:r>
+            <a:r>
+              <a:rPr lang="de-DE" sz="2400" dirty="0"/>
+              <a:t> not </a:t>
+            </a:r>
+            <a:r>
+              <a:rPr lang="de-DE" sz="2400" dirty="0" err="1"/>
+              <a:t>summarized</a:t>
+            </a:r>
+            <a:r>
+              <a:rPr lang="de-DE" sz="2400" dirty="0"/>
+              <a:t> </a:t>
+            </a:r>
+            <a:r>
+              <a:rPr lang="de-DE" sz="2400" dirty="0" err="1"/>
+              <a:t>by</a:t>
+            </a:r>
+            <a:r>
+              <a:rPr lang="de-DE" sz="2400" dirty="0"/>
+              <a:t> a </a:t>
+            </a:r>
+            <a:r>
+              <a:rPr lang="de-DE" sz="2400" dirty="0" err="1"/>
+              <a:t>single</a:t>
+            </a:r>
+            <a:r>
+              <a:rPr lang="de-DE" sz="2400" dirty="0"/>
+              <a:t> </a:t>
+            </a:r>
+            <a:r>
+              <a:rPr lang="de-DE" sz="2400" dirty="0" err="1"/>
+              <a:t>representative</a:t>
+            </a:r>
+            <a:r>
+              <a:rPr lang="de-DE" sz="2400" dirty="0"/>
+              <a:t> </a:t>
+            </a:r>
+            <a:r>
+              <a:rPr lang="de-DE" sz="2400" dirty="0" err="1"/>
+              <a:t>point</a:t>
+            </a:r>
+            <a:r>
+              <a:rPr lang="de-DE" sz="2400" dirty="0"/>
+              <a:t> (e.g., a </a:t>
+            </a:r>
+            <a:r>
+              <a:rPr lang="de-DE" sz="2400" dirty="0" err="1"/>
+              <a:t>centroid</a:t>
+            </a:r>
+            <a:r>
+              <a:rPr lang="de-DE" sz="2400" dirty="0"/>
+              <a:t>)</a:t>
+            </a:r>
+          </a:p>
+          <a:p>
+            <a:pPr marL="0" indent="0">
+              <a:buNone/>
+            </a:pPr>
+            <a:r>
+              <a:rPr lang="de-DE" sz="2400" dirty="0">
+                <a:sym typeface="Wingdings" pitchFamily="2" charset="2"/>
+              </a:rPr>
+              <a:t> N</a:t>
+            </a:r>
+            <a:r>
+              <a:rPr lang="de-DE" sz="2400" dirty="0"/>
+              <a:t>eed </a:t>
+            </a:r>
+            <a:r>
+              <a:rPr lang="de-DE" sz="2400" dirty="0" err="1"/>
+              <a:t>to</a:t>
+            </a:r>
+            <a:r>
+              <a:rPr lang="de-DE" sz="2400" dirty="0"/>
+              <a:t> </a:t>
+            </a:r>
+            <a:r>
+              <a:rPr lang="de-DE" sz="2400" dirty="0" err="1"/>
+              <a:t>define</a:t>
+            </a:r>
+            <a:r>
+              <a:rPr lang="de-DE" sz="2400" dirty="0"/>
+              <a:t> </a:t>
+            </a:r>
+            <a:r>
+              <a:rPr lang="de-DE" sz="2400" dirty="0" err="1"/>
+              <a:t>distance</a:t>
+            </a:r>
+            <a:r>
+              <a:rPr lang="de-DE" sz="2400" dirty="0"/>
+              <a:t> </a:t>
+            </a:r>
+            <a:r>
+              <a:rPr lang="de-DE" sz="2400" dirty="0" err="1"/>
+              <a:t>between</a:t>
+            </a:r>
+            <a:r>
+              <a:rPr lang="de-DE" sz="2400" dirty="0"/>
+              <a:t> </a:t>
+            </a:r>
+            <a:r>
+              <a:rPr lang="de-DE" sz="2400" dirty="0" err="1"/>
+              <a:t>clusters</a:t>
+            </a:r>
+            <a:r>
+              <a:rPr lang="de-DE" sz="2400" dirty="0"/>
+              <a:t> (</a:t>
+            </a:r>
+            <a:r>
+              <a:rPr lang="de-DE" sz="2400" dirty="0" err="1"/>
+              <a:t>sets</a:t>
+            </a:r>
+            <a:r>
+              <a:rPr lang="de-DE" sz="2400" dirty="0"/>
+              <a:t> </a:t>
+            </a:r>
+            <a:r>
+              <a:rPr lang="de-DE" sz="2400" dirty="0" err="1"/>
+              <a:t>of</a:t>
+            </a:r>
+            <a:r>
+              <a:rPr lang="de-DE" sz="2400" dirty="0"/>
+              <a:t> </a:t>
+            </a:r>
+            <a:r>
+              <a:rPr lang="de-DE" sz="2400" dirty="0" err="1"/>
+              <a:t>points</a:t>
+            </a:r>
+            <a:r>
+              <a:rPr lang="de-DE" sz="2400" dirty="0"/>
+              <a:t>): </a:t>
+            </a:r>
+            <a:r>
+              <a:rPr lang="de-DE" sz="2400" dirty="0" err="1"/>
+              <a:t>linkage</a:t>
+            </a:r>
+            <a:r>
+              <a:rPr lang="de-DE" sz="2400" dirty="0"/>
+              <a:t> </a:t>
+            </a:r>
+            <a:r>
+              <a:rPr lang="de-DE" sz="2400" dirty="0" err="1"/>
+              <a:t>criteria</a:t>
+            </a:r>
+            <a:endParaRPr lang="de-DE" sz="2400" dirty="0"/>
+          </a:p>
+        </p:txBody>
+      </p:sp>
+      <p:sp>
+        <p:nvSpPr>
+          <p:cNvPr id="4" name="Foliennummernplatzhalter 3">
+            <a:extLst>
+              <a:ext uri="{FF2B5EF4-FFF2-40B4-BE49-F238E27FC236}">
+                <a16:creationId xmlns:a16="http://schemas.microsoft.com/office/drawing/2014/main" id="{DB3E3578-2FA2-9F5A-8186-D9B607723B2B}"/>
+              </a:ext>
+            </a:extLst>
+          </p:cNvPr>
+          <p:cNvSpPr>
+            <a:spLocks noGrp="1"/>
+          </p:cNvSpPr>
+          <p:nvPr>
+            <p:ph type="sldNum" sz="quarter" idx="12"/>
+          </p:nvPr>
+        </p:nvSpPr>
+        <p:spPr/>
+        <p:txBody>
+          <a:bodyPr/>
+          <a:lstStyle/>
+          <a:p>
+            <a:fld id="{08C366F5-AFAD-49CB-854A-9D9E238FCA13}" type="slidenum">
+              <a:rPr lang="en-GB" smtClean="0"/>
+              <a:t>27</a:t>
+            </a:fld>
+            <a:endParaRPr lang="en-GB"/>
+          </a:p>
+        </p:txBody>
+      </p:sp>
+    </p:spTree>
+    <p:extLst>
+      <p:ext uri="{BB962C8B-B14F-4D97-AF65-F5344CB8AC3E}">
+        <p14:creationId xmlns:p14="http://schemas.microsoft.com/office/powerpoint/2010/main" val="1508339692"/>
+      </p:ext>
+    </p:extLst>
+  </p:cSld>
+  <p:clrMapOvr>
+    <a:masterClrMapping/>
+  </p:clrMapOvr>
+</p:sld>
+</file>
+
+<file path=ppt/slides/slide28.xml><?xml version="1.0" encoding="utf-8"?>
+<p:sld xmlns:a="http://schemas.openxmlformats.org/drawingml/2006/main" xmlns:r="http://schemas.openxmlformats.org/officeDocument/2006/relationships" xmlns:p="http://schemas.openxmlformats.org/presentationml/2006/main">
+  <p:cSld>
+    <p:spTree>
+      <p:nvGrpSpPr>
+        <p:cNvPr id="1" name=""/>
+        <p:cNvGrpSpPr/>
+        <p:nvPr/>
+      </p:nvGrpSpPr>
+      <p:grpSpPr>
+        <a:xfrm>
+          <a:off x="0" y="0"/>
+          <a:ext cx="0" cy="0"/>
+          <a:chOff x="0" y="0"/>
+          <a:chExt cx="0" cy="0"/>
+        </a:xfrm>
+      </p:grpSpPr>
+      <p:sp>
+        <p:nvSpPr>
+          <p:cNvPr id="2" name="Titel 1">
+            <a:extLst>
+              <a:ext uri="{FF2B5EF4-FFF2-40B4-BE49-F238E27FC236}">
                 <a16:creationId xmlns:a16="http://schemas.microsoft.com/office/drawing/2014/main" id="{4DB71406-467A-A03D-EBA2-95505D3C5AF2}"/>
               </a:ext>
             </a:extLst>
@@ -13423,6 +14699,375 @@
             <a:r>
               <a:rPr lang="de-DE" dirty="0" err="1"/>
               <a:t>Criteria</a:t>
+            </a:r>
+            <a:endParaRPr lang="de-DE" dirty="0"/>
+          </a:p>
+        </p:txBody>
+      </p:sp>
+      <p:sp>
+        <p:nvSpPr>
+          <p:cNvPr id="4" name="Inhaltsplatzhalter 3">
+            <a:extLst>
+              <a:ext uri="{FF2B5EF4-FFF2-40B4-BE49-F238E27FC236}">
+                <a16:creationId xmlns:a16="http://schemas.microsoft.com/office/drawing/2014/main" id="{28F11AAD-8546-9E9B-7B9C-27433A01B786}"/>
+              </a:ext>
+            </a:extLst>
+          </p:cNvPr>
+          <p:cNvSpPr>
+            <a:spLocks noGrp="1"/>
+          </p:cNvSpPr>
+          <p:nvPr>
+            <p:ph idx="1"/>
+          </p:nvPr>
+        </p:nvSpPr>
+        <p:spPr>
+          <a:xfrm>
+            <a:off x="838200" y="1825625"/>
+            <a:ext cx="6182208" cy="4351338"/>
+          </a:xfrm>
+        </p:spPr>
+        <p:txBody>
+          <a:bodyPr>
+            <a:normAutofit fontScale="92500" lnSpcReduction="20000"/>
+          </a:bodyPr>
+          <a:lstStyle/>
+          <a:p>
+            <a:pPr marL="0" indent="0">
+              <a:buNone/>
+            </a:pPr>
+            <a:r>
+              <a:rPr lang="de-DE" dirty="0"/>
+              <a:t>Different </a:t>
+            </a:r>
+            <a:r>
+              <a:rPr lang="de-DE" dirty="0" err="1"/>
+              <a:t>possibilities</a:t>
+            </a:r>
+            <a:r>
+              <a:rPr lang="de-DE" dirty="0"/>
+              <a:t> (</a:t>
+            </a:r>
+            <a:r>
+              <a:rPr lang="de-DE" dirty="0" err="1"/>
+              <a:t>choice</a:t>
+            </a:r>
+            <a:r>
+              <a:rPr lang="de-DE" dirty="0"/>
+              <a:t> </a:t>
+            </a:r>
+            <a:r>
+              <a:rPr lang="de-DE" dirty="0" err="1"/>
+              <a:t>strongly</a:t>
+            </a:r>
+            <a:r>
+              <a:rPr lang="de-DE" dirty="0"/>
+              <a:t> </a:t>
+            </a:r>
+            <a:r>
+              <a:rPr lang="de-DE" dirty="0" err="1"/>
+              <a:t>affects</a:t>
+            </a:r>
+            <a:r>
+              <a:rPr lang="de-DE" dirty="0"/>
+              <a:t> </a:t>
+            </a:r>
+            <a:r>
+              <a:rPr lang="de-DE" dirty="0" err="1"/>
+              <a:t>results</a:t>
+            </a:r>
+            <a:r>
+              <a:rPr lang="de-DE" dirty="0"/>
+              <a:t>):</a:t>
+            </a:r>
+          </a:p>
+          <a:p>
+            <a:r>
+              <a:rPr lang="de-DE" dirty="0"/>
+              <a:t>Single </a:t>
+            </a:r>
+            <a:r>
+              <a:rPr lang="de-DE" dirty="0" err="1"/>
+              <a:t>Linkage</a:t>
+            </a:r>
+            <a:r>
+              <a:rPr lang="de-DE" dirty="0"/>
+              <a:t>: </a:t>
+            </a:r>
+            <a:r>
+              <a:rPr lang="de-DE" dirty="0" err="1"/>
+              <a:t>Distance</a:t>
+            </a:r>
+            <a:r>
+              <a:rPr lang="de-DE" dirty="0"/>
+              <a:t> </a:t>
+            </a:r>
+            <a:r>
+              <a:rPr lang="de-DE" dirty="0" err="1"/>
+              <a:t>between</a:t>
+            </a:r>
+            <a:r>
+              <a:rPr lang="de-DE" dirty="0"/>
+              <a:t> </a:t>
+            </a:r>
+            <a:r>
+              <a:rPr lang="de-DE" dirty="0" err="1"/>
+              <a:t>closest</a:t>
+            </a:r>
+            <a:r>
+              <a:rPr lang="de-DE" dirty="0"/>
+              <a:t> </a:t>
+            </a:r>
+            <a:r>
+              <a:rPr lang="de-DE" dirty="0" err="1"/>
+              <a:t>points</a:t>
+            </a:r>
+            <a:r>
+              <a:rPr lang="de-DE" dirty="0"/>
+              <a:t> </a:t>
+            </a:r>
+            <a:r>
+              <a:rPr lang="de-DE" dirty="0">
+                <a:sym typeface="Wingdings" pitchFamily="2" charset="2"/>
+              </a:rPr>
+              <a:t> </a:t>
+            </a:r>
+            <a:r>
+              <a:rPr lang="de-DE" dirty="0" err="1"/>
+              <a:t>can</a:t>
+            </a:r>
+            <a:r>
+              <a:rPr lang="de-DE" dirty="0"/>
+              <a:t> form “</a:t>
+            </a:r>
+            <a:r>
+              <a:rPr lang="de-DE" dirty="0" err="1"/>
+              <a:t>chains</a:t>
+            </a:r>
+            <a:r>
+              <a:rPr lang="de-DE" dirty="0"/>
+              <a:t>” (</a:t>
+            </a:r>
+            <a:r>
+              <a:rPr lang="de-DE" dirty="0" err="1"/>
+              <a:t>elongated</a:t>
+            </a:r>
+            <a:r>
+              <a:rPr lang="de-DE" dirty="0"/>
+              <a:t> </a:t>
+            </a:r>
+            <a:r>
+              <a:rPr lang="de-DE" dirty="0" err="1"/>
+              <a:t>clusters</a:t>
+            </a:r>
+            <a:r>
+              <a:rPr lang="de-DE" dirty="0"/>
+              <a:t>)</a:t>
+            </a:r>
+          </a:p>
+          <a:p>
+            <a:r>
+              <a:rPr lang="de-DE" dirty="0" err="1"/>
+              <a:t>Complete</a:t>
+            </a:r>
+            <a:r>
+              <a:rPr lang="de-DE" dirty="0"/>
+              <a:t> </a:t>
+            </a:r>
+            <a:r>
+              <a:rPr lang="de-DE" dirty="0" err="1"/>
+              <a:t>Linkage</a:t>
+            </a:r>
+            <a:r>
+              <a:rPr lang="de-DE" dirty="0"/>
+              <a:t>: </a:t>
+            </a:r>
+            <a:r>
+              <a:rPr lang="de-DE" dirty="0" err="1"/>
+              <a:t>Distance</a:t>
+            </a:r>
+            <a:r>
+              <a:rPr lang="de-DE" dirty="0"/>
+              <a:t> </a:t>
+            </a:r>
+            <a:r>
+              <a:rPr lang="de-DE" dirty="0" err="1"/>
+              <a:t>between</a:t>
+            </a:r>
+            <a:r>
+              <a:rPr lang="de-DE" dirty="0"/>
+              <a:t> </a:t>
+            </a:r>
+            <a:r>
+              <a:rPr lang="de-DE" dirty="0" err="1"/>
+              <a:t>farthest</a:t>
+            </a:r>
+            <a:r>
+              <a:rPr lang="de-DE" dirty="0"/>
+              <a:t> </a:t>
+            </a:r>
+            <a:r>
+              <a:rPr lang="de-DE" dirty="0" err="1"/>
+              <a:t>points</a:t>
+            </a:r>
+            <a:r>
+              <a:rPr lang="de-DE" dirty="0"/>
+              <a:t> </a:t>
+            </a:r>
+            <a:r>
+              <a:rPr lang="de-DE" dirty="0">
+                <a:sym typeface="Wingdings" pitchFamily="2" charset="2"/>
+              </a:rPr>
+              <a:t> </a:t>
+            </a:r>
+            <a:r>
+              <a:rPr lang="de-DE" dirty="0" err="1"/>
+              <a:t>produces</a:t>
+            </a:r>
+            <a:r>
+              <a:rPr lang="de-DE" dirty="0"/>
+              <a:t> </a:t>
+            </a:r>
+            <a:r>
+              <a:rPr lang="de-DE" dirty="0" err="1"/>
+              <a:t>compact</a:t>
+            </a:r>
+            <a:r>
+              <a:rPr lang="de-DE" dirty="0"/>
+              <a:t> (</a:t>
+            </a:r>
+            <a:r>
+              <a:rPr lang="de-DE" dirty="0" err="1"/>
+              <a:t>spherical</a:t>
+            </a:r>
+            <a:r>
+              <a:rPr lang="de-DE" dirty="0"/>
+              <a:t>) </a:t>
+            </a:r>
+            <a:r>
+              <a:rPr lang="de-DE" dirty="0" err="1"/>
+              <a:t>clusters</a:t>
+            </a:r>
+            <a:endParaRPr lang="de-DE" dirty="0"/>
+          </a:p>
+          <a:p>
+            <a:r>
+              <a:rPr lang="de-DE" dirty="0"/>
+              <a:t>Average </a:t>
+            </a:r>
+            <a:r>
+              <a:rPr lang="de-DE" dirty="0" err="1"/>
+              <a:t>Linkage</a:t>
+            </a:r>
+            <a:r>
+              <a:rPr lang="de-DE" dirty="0"/>
+              <a:t>: Average </a:t>
+            </a:r>
+            <a:r>
+              <a:rPr lang="de-DE" dirty="0" err="1"/>
+              <a:t>pairwise</a:t>
+            </a:r>
+            <a:r>
+              <a:rPr lang="de-DE" dirty="0"/>
+              <a:t> </a:t>
+            </a:r>
+            <a:r>
+              <a:rPr lang="de-DE" dirty="0" err="1"/>
+              <a:t>distance</a:t>
+            </a:r>
+            <a:r>
+              <a:rPr lang="de-DE" dirty="0"/>
+              <a:t> </a:t>
+            </a:r>
+            <a:r>
+              <a:rPr lang="de-DE" dirty="0">
+                <a:sym typeface="Wingdings" pitchFamily="2" charset="2"/>
+              </a:rPr>
+              <a:t> </a:t>
+            </a:r>
+            <a:r>
+              <a:rPr lang="de-DE" dirty="0" err="1"/>
+              <a:t>balanced</a:t>
+            </a:r>
+            <a:r>
+              <a:rPr lang="de-DE" dirty="0"/>
+              <a:t> </a:t>
+            </a:r>
+            <a:r>
+              <a:rPr lang="de-DE" dirty="0" err="1"/>
+              <a:t>approach</a:t>
+            </a:r>
+            <a:endParaRPr lang="de-DE" dirty="0"/>
+          </a:p>
+          <a:p>
+            <a:r>
+              <a:rPr lang="de-DE" dirty="0"/>
+              <a:t>Ward’s Method: </a:t>
+            </a:r>
+            <a:r>
+              <a:rPr lang="de-DE" dirty="0" err="1"/>
+              <a:t>Minimizes</a:t>
+            </a:r>
+            <a:r>
+              <a:rPr lang="de-DE" dirty="0"/>
+              <a:t> </a:t>
+            </a:r>
+            <a:r>
+              <a:rPr lang="de-DE" dirty="0" err="1"/>
+              <a:t>variance</a:t>
+            </a:r>
+            <a:r>
+              <a:rPr lang="de-DE" dirty="0"/>
+              <a:t> </a:t>
+            </a:r>
+            <a:r>
+              <a:rPr lang="de-DE" dirty="0" err="1"/>
+              <a:t>within</a:t>
+            </a:r>
+            <a:r>
+              <a:rPr lang="de-DE" dirty="0"/>
+              <a:t> </a:t>
+            </a:r>
+            <a:r>
+              <a:rPr lang="de-DE" dirty="0" err="1"/>
+              <a:t>clusters</a:t>
+            </a:r>
+            <a:r>
+              <a:rPr lang="de-DE" dirty="0"/>
+              <a:t> </a:t>
+            </a:r>
+            <a:r>
+              <a:rPr lang="de-DE" dirty="0">
+                <a:sym typeface="Wingdings" pitchFamily="2" charset="2"/>
+              </a:rPr>
+              <a:t> </a:t>
+            </a:r>
+            <a:r>
+              <a:rPr lang="de-DE" dirty="0" err="1"/>
+              <a:t>often</a:t>
+            </a:r>
+            <a:r>
+              <a:rPr lang="de-DE" dirty="0"/>
+              <a:t> </a:t>
+            </a:r>
+            <a:r>
+              <a:rPr lang="de-DE" dirty="0" err="1"/>
+              <a:t>produces</a:t>
+            </a:r>
+            <a:r>
+              <a:rPr lang="de-DE" dirty="0"/>
+              <a:t> well-</a:t>
+            </a:r>
+            <a:r>
+              <a:rPr lang="de-DE" dirty="0" err="1"/>
+              <a:t>separated</a:t>
+            </a:r>
+            <a:r>
+              <a:rPr lang="de-DE" dirty="0"/>
+              <a:t> </a:t>
+            </a:r>
+            <a:r>
+              <a:rPr lang="de-DE" dirty="0" err="1"/>
+              <a:t>clusters</a:t>
             </a:r>
             <a:endParaRPr lang="de-DE" dirty="0"/>
           </a:p>
@@ -13451,9 +15096,119 @@
           <a:p>
             <a:fld id="{08C366F5-AFAD-49CB-854A-9D9E238FCA13}" type="slidenum">
               <a:rPr lang="en-GB" smtClean="0"/>
-              <a:t>26</a:t>
+              <a:t>28</a:t>
             </a:fld>
             <a:endParaRPr lang="en-GB"/>
+          </a:p>
+        </p:txBody>
+      </p:sp>
+      <p:pic>
+        <p:nvPicPr>
+          <p:cNvPr id="3074" name="Picture 2" descr="Single Linkage, Average Linkage, Complete Linkage, Ward Linkage">
+            <a:extLst>
+              <a:ext uri="{FF2B5EF4-FFF2-40B4-BE49-F238E27FC236}">
+                <a16:creationId xmlns:a16="http://schemas.microsoft.com/office/drawing/2014/main" id="{AC9426B0-19E7-4E1F-CB25-F92815AA0689}"/>
+              </a:ext>
+            </a:extLst>
+          </p:cNvPr>
+          <p:cNvPicPr>
+            <a:picLocks noChangeAspect="1" noChangeArrowheads="1"/>
+          </p:cNvPicPr>
+          <p:nvPr/>
+        </p:nvPicPr>
+        <p:blipFill>
+          <a:blip r:embed="rId2">
+            <a:extLst>
+              <a:ext uri="{28A0092B-C50C-407E-A947-70E740481C1C}">
+                <a14:useLocalDpi xmlns:a14="http://schemas.microsoft.com/office/drawing/2010/main" val="0"/>
+              </a:ext>
+            </a:extLst>
+          </a:blip>
+          <a:srcRect/>
+          <a:stretch>
+            <a:fillRect/>
+          </a:stretch>
+        </p:blipFill>
+        <p:spPr bwMode="auto">
+          <a:xfrm>
+            <a:off x="7020408" y="681037"/>
+            <a:ext cx="5171592" cy="5473120"/>
+          </a:xfrm>
+          <a:prstGeom prst="rect">
+            <a:avLst/>
+          </a:prstGeom>
+          <a:noFill/>
+          <a:extLst>
+            <a:ext uri="{909E8E84-426E-40DD-AFC4-6F175D3DCCD1}">
+              <a14:hiddenFill xmlns:a14="http://schemas.microsoft.com/office/drawing/2010/main">
+                <a:solidFill>
+                  <a:srgbClr val="FFFFFF"/>
+                </a:solidFill>
+              </a14:hiddenFill>
+            </a:ext>
+          </a:extLst>
+        </p:spPr>
+      </p:pic>
+      <p:sp>
+        <p:nvSpPr>
+          <p:cNvPr id="5" name="Textfeld 4">
+            <a:hlinkClick r:id="rId3"/>
+            <a:extLst>
+              <a:ext uri="{FF2B5EF4-FFF2-40B4-BE49-F238E27FC236}">
+                <a16:creationId xmlns:a16="http://schemas.microsoft.com/office/drawing/2014/main" id="{3CE2F3E2-F90D-63A0-D012-4A2CE4959D62}"/>
+              </a:ext>
+            </a:extLst>
+          </p:cNvPr>
+          <p:cNvSpPr txBox="1"/>
+          <p:nvPr/>
+        </p:nvSpPr>
+        <p:spPr>
+          <a:xfrm>
+            <a:off x="8483140" y="288899"/>
+            <a:ext cx="2246128" cy="369332"/>
+          </a:xfrm>
+          <a:prstGeom prst="rect">
+            <a:avLst/>
+          </a:prstGeom>
+          <a:noFill/>
+        </p:spPr>
+        <p:txBody>
+          <a:bodyPr wrap="none" rtlCol="0">
+            <a:spAutoFit/>
+          </a:bodyPr>
+          <a:lstStyle/>
+          <a:p>
+            <a:r>
+              <a:rPr lang="de-DE" dirty="0" err="1">
+                <a:hlinkClick r:id="rId4"/>
+              </a:rPr>
+              <a:t>scikit</a:t>
+            </a:r>
+            <a:r>
+              <a:rPr lang="de-DE" dirty="0">
+                <a:hlinkClick r:id="rId4"/>
+              </a:rPr>
+              <a:t> </a:t>
+            </a:r>
+            <a:r>
+              <a:rPr lang="de-DE" dirty="0" err="1">
+                <a:hlinkClick r:id="rId4"/>
+              </a:rPr>
+              <a:t>learn</a:t>
+            </a:r>
+            <a:r>
+              <a:rPr lang="de-DE" dirty="0">
+                <a:hlinkClick r:id="rId4"/>
+              </a:rPr>
+              <a:t> </a:t>
+            </a:r>
+            <a:r>
+              <a:rPr lang="de-DE" dirty="0" err="1">
+                <a:hlinkClick r:id="rId4"/>
+              </a:rPr>
+              <a:t>example</a:t>
+            </a:r>
+            <a:endParaRPr lang="de-DE" dirty="0"/>
           </a:p>
         </p:txBody>
       </p:sp>
@@ -13470,7 +15225,7 @@
 </p:sld>
 </file>
 
-<file path=ppt/slides/slide27.xml><?xml version="1.0" encoding="utf-8"?>
+<file path=ppt/slides/slide29.xml><?xml version="1.0" encoding="utf-8"?>
 <p:sld xmlns:a="http://schemas.openxmlformats.org/drawingml/2006/main" xmlns:r="http://schemas.openxmlformats.org/officeDocument/2006/relationships" xmlns:p="http://schemas.openxmlformats.org/presentationml/2006/main">
   <p:cSld>
     <p:spTree>
@@ -13512,10 +15267,339 @@
               <a:rPr lang="de-DE" dirty="0" err="1"/>
               <a:t>Dendrograms</a:t>
             </a:r>
-            <a:r>
-              <a:rPr lang="de-DE" dirty="0"/>
-              <a:t> and Interpretation</a:t>
-            </a:r>
+            <a:endParaRPr lang="de-DE" dirty="0"/>
+          </a:p>
+        </p:txBody>
+      </p:sp>
+      <p:sp>
+        <p:nvSpPr>
+          <p:cNvPr id="4" name="Inhaltsplatzhalter 3">
+            <a:extLst>
+              <a:ext uri="{FF2B5EF4-FFF2-40B4-BE49-F238E27FC236}">
+                <a16:creationId xmlns:a16="http://schemas.microsoft.com/office/drawing/2014/main" id="{CC4BC5C9-627A-19B4-BFA5-8B558B4CBEC3}"/>
+              </a:ext>
+            </a:extLst>
+          </p:cNvPr>
+          <p:cNvSpPr>
+            <a:spLocks noGrp="1"/>
+          </p:cNvSpPr>
+          <p:nvPr>
+            <p:ph idx="1"/>
+          </p:nvPr>
+        </p:nvSpPr>
+        <p:spPr>
+          <a:xfrm>
+            <a:off x="838200" y="1825625"/>
+            <a:ext cx="5801783" cy="4351338"/>
+          </a:xfrm>
+        </p:spPr>
+        <p:txBody>
+          <a:bodyPr>
+            <a:normAutofit fontScale="85000" lnSpcReduction="20000"/>
+          </a:bodyPr>
+          <a:lstStyle/>
+          <a:p>
+            <a:pPr marL="0" indent="0">
+              <a:buNone/>
+            </a:pPr>
+            <a:r>
+              <a:rPr lang="de-DE" dirty="0" err="1"/>
+              <a:t>Tree</a:t>
+            </a:r>
+            <a:r>
+              <a:rPr lang="de-DE" dirty="0"/>
+              <a:t> </a:t>
+            </a:r>
+            <a:r>
+              <a:rPr lang="de-DE" dirty="0" err="1"/>
+              <a:t>representation</a:t>
+            </a:r>
+            <a:r>
+              <a:rPr lang="de-DE" dirty="0"/>
+              <a:t> </a:t>
+            </a:r>
+            <a:r>
+              <a:rPr lang="de-DE" dirty="0" err="1"/>
+              <a:t>of</a:t>
+            </a:r>
+            <a:r>
+              <a:rPr lang="de-DE" dirty="0"/>
+              <a:t> </a:t>
+            </a:r>
+            <a:r>
+              <a:rPr lang="de-DE" dirty="0" err="1"/>
+              <a:t>clustering</a:t>
+            </a:r>
+            <a:r>
+              <a:rPr lang="de-DE" dirty="0"/>
+              <a:t>:</a:t>
+            </a:r>
+          </a:p>
+          <a:p>
+            <a:r>
+              <a:rPr lang="de-DE" dirty="0" err="1"/>
+              <a:t>Leaves</a:t>
+            </a:r>
+            <a:r>
+              <a:rPr lang="de-DE" dirty="0"/>
+              <a:t> = individual </a:t>
+            </a:r>
+            <a:r>
+              <a:rPr lang="de-DE" dirty="0" err="1"/>
+              <a:t>data</a:t>
+            </a:r>
+            <a:r>
+              <a:rPr lang="de-DE" dirty="0"/>
+              <a:t> </a:t>
+            </a:r>
+            <a:r>
+              <a:rPr lang="de-DE" dirty="0" err="1"/>
+              <a:t>points</a:t>
+            </a:r>
+            <a:endParaRPr lang="de-DE" dirty="0"/>
+          </a:p>
+          <a:p>
+            <a:r>
+              <a:rPr lang="de-DE" dirty="0"/>
+              <a:t>Internal </a:t>
+            </a:r>
+            <a:r>
+              <a:rPr lang="de-DE" dirty="0" err="1"/>
+              <a:t>nodes</a:t>
+            </a:r>
+            <a:r>
+              <a:rPr lang="de-DE" dirty="0"/>
+              <a:t> = </a:t>
+            </a:r>
+            <a:r>
+              <a:rPr lang="de-DE" dirty="0" err="1"/>
+              <a:t>cluster</a:t>
+            </a:r>
+            <a:r>
+              <a:rPr lang="de-DE" dirty="0"/>
+              <a:t> </a:t>
+            </a:r>
+            <a:r>
+              <a:rPr lang="de-DE" dirty="0" err="1"/>
+              <a:t>merges</a:t>
+            </a:r>
+            <a:endParaRPr lang="de-DE" dirty="0"/>
+          </a:p>
+          <a:p>
+            <a:r>
+              <a:rPr lang="de-DE" dirty="0"/>
+              <a:t>Height = </a:t>
+            </a:r>
+            <a:r>
+              <a:rPr lang="de-DE" dirty="0" err="1"/>
+              <a:t>distance</a:t>
+            </a:r>
+            <a:r>
+              <a:rPr lang="de-DE" dirty="0"/>
+              <a:t> at </a:t>
+            </a:r>
+            <a:r>
+              <a:rPr lang="de-DE" dirty="0" err="1"/>
+              <a:t>which</a:t>
+            </a:r>
+            <a:r>
+              <a:rPr lang="de-DE" dirty="0"/>
+              <a:t> </a:t>
+            </a:r>
+            <a:r>
+              <a:rPr lang="de-DE" dirty="0" err="1"/>
+              <a:t>clusters</a:t>
+            </a:r>
+            <a:r>
+              <a:rPr lang="de-DE" dirty="0"/>
+              <a:t> </a:t>
+            </a:r>
+            <a:r>
+              <a:rPr lang="de-DE" dirty="0" err="1"/>
+              <a:t>merge</a:t>
+            </a:r>
+            <a:endParaRPr lang="de-DE" dirty="0"/>
+          </a:p>
+          <a:p>
+            <a:pPr marL="0" indent="0">
+              <a:buNone/>
+            </a:pPr>
+            <a:endParaRPr lang="de-DE" dirty="0"/>
+          </a:p>
+          <a:p>
+            <a:pPr marL="0" indent="0">
+              <a:buNone/>
+            </a:pPr>
+            <a:r>
+              <a:rPr lang="de-DE" dirty="0"/>
+              <a:t>Interpretation:</a:t>
+            </a:r>
+          </a:p>
+          <a:p>
+            <a:r>
+              <a:rPr lang="de-DE" dirty="0"/>
+              <a:t>Cut </a:t>
+            </a:r>
+            <a:r>
+              <a:rPr lang="de-DE" dirty="0" err="1"/>
+              <a:t>tree</a:t>
+            </a:r>
+            <a:r>
+              <a:rPr lang="de-DE" dirty="0"/>
+              <a:t> at a </a:t>
+            </a:r>
+            <a:r>
+              <a:rPr lang="de-DE" dirty="0" err="1"/>
+              <a:t>chosen</a:t>
+            </a:r>
+            <a:r>
+              <a:rPr lang="de-DE" dirty="0"/>
+              <a:t> </a:t>
+            </a:r>
+            <a:r>
+              <a:rPr lang="de-DE" dirty="0" err="1"/>
+              <a:t>height</a:t>
+            </a:r>
+            <a:r>
+              <a:rPr lang="de-DE" dirty="0"/>
+              <a:t> </a:t>
+            </a:r>
+            <a:r>
+              <a:rPr lang="de-DE" dirty="0">
+                <a:sym typeface="Wingdings" pitchFamily="2" charset="2"/>
+              </a:rPr>
+              <a:t> </a:t>
+            </a:r>
+            <a:r>
+              <a:rPr lang="de-DE" dirty="0" err="1"/>
+              <a:t>clusters</a:t>
+            </a:r>
+            <a:r>
+              <a:rPr lang="de-DE" dirty="0"/>
+              <a:t> (</a:t>
+            </a:r>
+            <a:r>
+              <a:rPr lang="de-DE" dirty="0" err="1"/>
+              <a:t>enables</a:t>
+            </a:r>
+            <a:r>
+              <a:rPr lang="de-DE" dirty="0"/>
+              <a:t> flexible </a:t>
+            </a:r>
+            <a:r>
+              <a:rPr lang="de-DE" dirty="0" err="1"/>
+              <a:t>cluster</a:t>
+            </a:r>
+            <a:r>
+              <a:rPr lang="de-DE" dirty="0"/>
+              <a:t> </a:t>
+            </a:r>
+            <a:r>
+              <a:rPr lang="de-DE" dirty="0" err="1"/>
+              <a:t>selection</a:t>
+            </a:r>
+            <a:r>
+              <a:rPr lang="de-DE" dirty="0"/>
+              <a:t>)</a:t>
+            </a:r>
+          </a:p>
+          <a:p>
+            <a:r>
+              <a:rPr lang="de-DE" dirty="0"/>
+              <a:t>Large </a:t>
+            </a:r>
+            <a:r>
+              <a:rPr lang="de-DE" dirty="0" err="1"/>
+              <a:t>vertical</a:t>
+            </a:r>
+            <a:r>
+              <a:rPr lang="de-DE" dirty="0"/>
+              <a:t> </a:t>
+            </a:r>
+            <a:r>
+              <a:rPr lang="de-DE" dirty="0" err="1"/>
+              <a:t>gaps</a:t>
+            </a:r>
+            <a:r>
+              <a:rPr lang="de-DE" dirty="0"/>
+              <a:t> </a:t>
+            </a:r>
+            <a:r>
+              <a:rPr lang="de-DE" dirty="0">
+                <a:sym typeface="Wingdings" pitchFamily="2" charset="2"/>
+              </a:rPr>
+              <a:t></a:t>
+            </a:r>
+            <a:r>
+              <a:rPr lang="de-DE" dirty="0"/>
+              <a:t> </a:t>
+            </a:r>
+            <a:r>
+              <a:rPr lang="de-DE" dirty="0" err="1"/>
+              <a:t>natural</a:t>
+            </a:r>
+            <a:r>
+              <a:rPr lang="de-DE" dirty="0"/>
+              <a:t> </a:t>
+            </a:r>
+            <a:r>
+              <a:rPr lang="de-DE" dirty="0" err="1"/>
+              <a:t>cluster</a:t>
+            </a:r>
+            <a:r>
+              <a:rPr lang="de-DE" dirty="0"/>
+              <a:t> </a:t>
+            </a:r>
+            <a:r>
+              <a:rPr lang="de-DE" dirty="0" err="1"/>
+              <a:t>separation</a:t>
+            </a:r>
+            <a:endParaRPr lang="de-DE" dirty="0"/>
+          </a:p>
+          <a:p>
+            <a:r>
+              <a:rPr lang="de-DE" dirty="0"/>
+              <a:t>Lower </a:t>
+            </a:r>
+            <a:r>
+              <a:rPr lang="de-DE" dirty="0" err="1"/>
+              <a:t>merges</a:t>
+            </a:r>
+            <a:r>
+              <a:rPr lang="de-DE" dirty="0"/>
+              <a:t> </a:t>
+            </a:r>
+            <a:r>
+              <a:rPr lang="de-DE" dirty="0">
+                <a:sym typeface="Wingdings" pitchFamily="2" charset="2"/>
+              </a:rPr>
+              <a:t></a:t>
+            </a:r>
+            <a:r>
+              <a:rPr lang="de-DE" dirty="0"/>
+              <a:t> </a:t>
+            </a:r>
+            <a:r>
+              <a:rPr lang="de-DE" dirty="0" err="1"/>
+              <a:t>more</a:t>
+            </a:r>
+            <a:r>
+              <a:rPr lang="de-DE" dirty="0"/>
+              <a:t> </a:t>
+            </a:r>
+            <a:r>
+              <a:rPr lang="de-DE" dirty="0" err="1"/>
+              <a:t>similar</a:t>
+            </a:r>
+            <a:r>
+              <a:rPr lang="de-DE" dirty="0"/>
+              <a:t> </a:t>
+            </a:r>
+            <a:r>
+              <a:rPr lang="de-DE" dirty="0" err="1"/>
+              <a:t>clusters</a:t>
+            </a:r>
+            <a:endParaRPr lang="de-DE" dirty="0"/>
           </a:p>
         </p:txBody>
       </p:sp>
@@ -13542,264 +15626,63 @@
           <a:p>
             <a:fld id="{08C366F5-AFAD-49CB-854A-9D9E238FCA13}" type="slidenum">
               <a:rPr lang="en-GB" smtClean="0"/>
-              <a:t>27</a:t>
+              <a:t>29</a:t>
             </a:fld>
             <a:endParaRPr lang="en-GB"/>
           </a:p>
         </p:txBody>
       </p:sp>
+      <p:pic>
+        <p:nvPicPr>
+          <p:cNvPr id="5" name="Picture 2" descr="Hierarchical Clustering Dendrogram">
+            <a:extLst>
+              <a:ext uri="{FF2B5EF4-FFF2-40B4-BE49-F238E27FC236}">
+                <a16:creationId xmlns:a16="http://schemas.microsoft.com/office/drawing/2014/main" id="{9871BF83-A0D9-CB57-9965-66CDE0D3299B}"/>
+              </a:ext>
+            </a:extLst>
+          </p:cNvPr>
+          <p:cNvPicPr>
+            <a:picLocks noChangeAspect="1" noChangeArrowheads="1"/>
+          </p:cNvPicPr>
+          <p:nvPr/>
+        </p:nvPicPr>
+        <p:blipFill>
+          <a:blip r:embed="rId2">
+            <a:extLst>
+              <a:ext uri="{28A0092B-C50C-407E-A947-70E740481C1C}">
+                <a14:useLocalDpi xmlns:a14="http://schemas.microsoft.com/office/drawing/2010/main" val="0"/>
+              </a:ext>
+            </a:extLst>
+          </a:blip>
+          <a:srcRect/>
+          <a:stretch>
+            <a:fillRect/>
+          </a:stretch>
+        </p:blipFill>
+        <p:spPr bwMode="auto">
+          <a:xfrm>
+            <a:off x="6390217" y="1690688"/>
+            <a:ext cx="5801783" cy="4351338"/>
+          </a:xfrm>
+          <a:prstGeom prst="rect">
+            <a:avLst/>
+          </a:prstGeom>
+          <a:noFill/>
+          <a:extLst>
+            <a:ext uri="{909E8E84-426E-40DD-AFC4-6F175D3DCCD1}">
+              <a14:hiddenFill xmlns:a14="http://schemas.microsoft.com/office/drawing/2010/main">
+                <a:solidFill>
+                  <a:srgbClr val="FFFFFF"/>
+                </a:solidFill>
+              </a14:hiddenFill>
+            </a:ext>
+          </a:extLst>
+        </p:spPr>
+      </p:pic>
     </p:spTree>
     <p:extLst>
       <p:ext uri="{BB962C8B-B14F-4D97-AF65-F5344CB8AC3E}">
         <p14:creationId xmlns:p14="http://schemas.microsoft.com/office/powerpoint/2010/main" val="1704252082"/>
-      </p:ext>
-    </p:extLst>
-  </p:cSld>
-  <p:clrMapOvr>
-    <a:masterClrMapping/>
-  </p:clrMapOvr>
-</p:sld>
-</file>
-
-<file path=ppt/slides/slide28.xml><?xml version="1.0" encoding="utf-8"?>
-<p:sld xmlns:a="http://schemas.openxmlformats.org/drawingml/2006/main" xmlns:r="http://schemas.openxmlformats.org/officeDocument/2006/relationships" xmlns:p="http://schemas.openxmlformats.org/presentationml/2006/main">
-  <p:cSld>
-    <p:spTree>
-      <p:nvGrpSpPr>
-        <p:cNvPr id="1" name=""/>
-        <p:cNvGrpSpPr/>
-        <p:nvPr/>
-      </p:nvGrpSpPr>
-      <p:grpSpPr>
-        <a:xfrm>
-          <a:off x="0" y="0"/>
-          <a:ext cx="0" cy="0"/>
-          <a:chOff x="0" y="0"/>
-          <a:chExt cx="0" cy="0"/>
-        </a:xfrm>
-      </p:grpSpPr>
-      <p:sp>
-        <p:nvSpPr>
-          <p:cNvPr id="2" name="Titel 1">
-            <a:extLst>
-              <a:ext uri="{FF2B5EF4-FFF2-40B4-BE49-F238E27FC236}">
-                <a16:creationId xmlns:a16="http://schemas.microsoft.com/office/drawing/2014/main" id="{C1279D54-116A-6D58-B75A-2556899D6B46}"/>
-              </a:ext>
-            </a:extLst>
-          </p:cNvPr>
-          <p:cNvSpPr>
-            <a:spLocks noGrp="1"/>
-          </p:cNvSpPr>
-          <p:nvPr>
-            <p:ph type="title"/>
-          </p:nvPr>
-        </p:nvSpPr>
-        <p:spPr/>
-        <p:txBody>
-          <a:bodyPr/>
-          <a:lstStyle/>
-          <a:p>
-            <a:r>
-              <a:rPr lang="de-DE" dirty="0"/>
-              <a:t>DBSCAN: Density-</a:t>
-            </a:r>
-            <a:r>
-              <a:rPr lang="de-DE" dirty="0" err="1"/>
-              <a:t>Based</a:t>
-            </a:r>
-            <a:r>
-              <a:rPr lang="de-DE" dirty="0"/>
-              <a:t> Clustering</a:t>
-            </a:r>
-          </a:p>
-        </p:txBody>
-      </p:sp>
-      <p:sp>
-        <p:nvSpPr>
-          <p:cNvPr id="4" name="Inhaltsplatzhalter 3">
-            <a:extLst>
-              <a:ext uri="{FF2B5EF4-FFF2-40B4-BE49-F238E27FC236}">
-                <a16:creationId xmlns:a16="http://schemas.microsoft.com/office/drawing/2014/main" id="{DD30C41E-1B4C-8B40-FD0F-6A8D76270048}"/>
-              </a:ext>
-            </a:extLst>
-          </p:cNvPr>
-          <p:cNvSpPr>
-            <a:spLocks noGrp="1"/>
-          </p:cNvSpPr>
-          <p:nvPr>
-            <p:ph idx="1"/>
-          </p:nvPr>
-        </p:nvSpPr>
-        <p:spPr/>
-        <p:txBody>
-          <a:bodyPr/>
-          <a:lstStyle/>
-          <a:p>
-            <a:r>
-              <a:rPr lang="de-DE" dirty="0"/>
-              <a:t>Can </a:t>
-            </a:r>
-            <a:r>
-              <a:rPr lang="de-DE" dirty="0" err="1"/>
-              <a:t>detect</a:t>
-            </a:r>
-            <a:r>
-              <a:rPr lang="de-DE" dirty="0"/>
-              <a:t> </a:t>
-            </a:r>
-            <a:r>
-              <a:rPr lang="de-DE" dirty="0" err="1"/>
-              <a:t>irregular</a:t>
-            </a:r>
-            <a:r>
-              <a:rPr lang="de-DE" dirty="0"/>
-              <a:t> </a:t>
-            </a:r>
-            <a:r>
-              <a:rPr lang="de-DE" dirty="0" err="1"/>
-              <a:t>shapes</a:t>
-            </a:r>
-            <a:r>
-              <a:rPr lang="de-DE" dirty="0"/>
-              <a:t>.</a:t>
-            </a:r>
-          </a:p>
-          <a:p>
-            <a:r>
-              <a:rPr lang="de-DE" dirty="0"/>
-              <a:t>Handles </a:t>
-            </a:r>
-            <a:r>
-              <a:rPr lang="de-DE" dirty="0" err="1"/>
-              <a:t>outliers</a:t>
-            </a:r>
-            <a:r>
-              <a:rPr lang="de-DE" dirty="0"/>
-              <a:t>.</a:t>
-            </a:r>
-          </a:p>
-        </p:txBody>
-      </p:sp>
-      <p:sp>
-        <p:nvSpPr>
-          <p:cNvPr id="3" name="Foliennummernplatzhalter 2">
-            <a:extLst>
-              <a:ext uri="{FF2B5EF4-FFF2-40B4-BE49-F238E27FC236}">
-                <a16:creationId xmlns:a16="http://schemas.microsoft.com/office/drawing/2014/main" id="{C6A32FD8-548B-71F2-BB0C-E2FA7DE0D672}"/>
-              </a:ext>
-            </a:extLst>
-          </p:cNvPr>
-          <p:cNvSpPr>
-            <a:spLocks noGrp="1"/>
-          </p:cNvSpPr>
-          <p:nvPr>
-            <p:ph type="sldNum" sz="quarter" idx="12"/>
-          </p:nvPr>
-        </p:nvSpPr>
-        <p:spPr/>
-        <p:txBody>
-          <a:bodyPr/>
-          <a:lstStyle/>
-          <a:p>
-            <a:fld id="{08C366F5-AFAD-49CB-854A-9D9E238FCA13}" type="slidenum">
-              <a:rPr lang="en-GB" smtClean="0"/>
-              <a:t>28</a:t>
-            </a:fld>
-            <a:endParaRPr lang="en-GB"/>
-          </a:p>
-        </p:txBody>
-      </p:sp>
-    </p:spTree>
-    <p:extLst>
-      <p:ext uri="{BB962C8B-B14F-4D97-AF65-F5344CB8AC3E}">
-        <p14:creationId xmlns:p14="http://schemas.microsoft.com/office/powerpoint/2010/main" val="3058453600"/>
-      </p:ext>
-    </p:extLst>
-  </p:cSld>
-  <p:clrMapOvr>
-    <a:masterClrMapping/>
-  </p:clrMapOvr>
-</p:sld>
-</file>
-
-<file path=ppt/slides/slide29.xml><?xml version="1.0" encoding="utf-8"?>
-<p:sld xmlns:a="http://schemas.openxmlformats.org/drawingml/2006/main" xmlns:r="http://schemas.openxmlformats.org/officeDocument/2006/relationships" xmlns:p="http://schemas.openxmlformats.org/presentationml/2006/main">
-  <p:cSld>
-    <p:spTree>
-      <p:nvGrpSpPr>
-        <p:cNvPr id="1" name=""/>
-        <p:cNvGrpSpPr/>
-        <p:nvPr/>
-      </p:nvGrpSpPr>
-      <p:grpSpPr>
-        <a:xfrm>
-          <a:off x="0" y="0"/>
-          <a:ext cx="0" cy="0"/>
-          <a:chOff x="0" y="0"/>
-          <a:chExt cx="0" cy="0"/>
-        </a:xfrm>
-      </p:grpSpPr>
-      <p:sp>
-        <p:nvSpPr>
-          <p:cNvPr id="2" name="Titel 1">
-            <a:extLst>
-              <a:ext uri="{FF2B5EF4-FFF2-40B4-BE49-F238E27FC236}">
-                <a16:creationId xmlns:a16="http://schemas.microsoft.com/office/drawing/2014/main" id="{9CC7556B-98BB-9EF2-B9BD-688767AA83EE}"/>
-              </a:ext>
-            </a:extLst>
-          </p:cNvPr>
-          <p:cNvSpPr>
-            <a:spLocks noGrp="1"/>
-          </p:cNvSpPr>
-          <p:nvPr>
-            <p:ph type="title"/>
-          </p:nvPr>
-        </p:nvSpPr>
-        <p:spPr/>
-        <p:txBody>
-          <a:bodyPr/>
-          <a:lstStyle/>
-          <a:p>
-            <a:r>
-              <a:rPr lang="de-DE" dirty="0"/>
-              <a:t>Core Points, Border Points, Noise</a:t>
-            </a:r>
-          </a:p>
-        </p:txBody>
-      </p:sp>
-      <p:sp>
-        <p:nvSpPr>
-          <p:cNvPr id="3" name="Foliennummernplatzhalter 2">
-            <a:extLst>
-              <a:ext uri="{FF2B5EF4-FFF2-40B4-BE49-F238E27FC236}">
-                <a16:creationId xmlns:a16="http://schemas.microsoft.com/office/drawing/2014/main" id="{157EE93D-CF21-6985-77E6-E17034472C2F}"/>
-              </a:ext>
-            </a:extLst>
-          </p:cNvPr>
-          <p:cNvSpPr>
-            <a:spLocks noGrp="1"/>
-          </p:cNvSpPr>
-          <p:nvPr>
-            <p:ph type="sldNum" sz="quarter" idx="12"/>
-          </p:nvPr>
-        </p:nvSpPr>
-        <p:spPr/>
-        <p:txBody>
-          <a:bodyPr/>
-          <a:lstStyle/>
-          <a:p>
-            <a:fld id="{08C366F5-AFAD-49CB-854A-9D9E238FCA13}" type="slidenum">
-              <a:rPr lang="en-GB" smtClean="0"/>
-              <a:t>29</a:t>
-            </a:fld>
-            <a:endParaRPr lang="en-GB"/>
-          </a:p>
-        </p:txBody>
-      </p:sp>
-    </p:spTree>
-    <p:extLst>
-      <p:ext uri="{BB962C8B-B14F-4D97-AF65-F5344CB8AC3E}">
-        <p14:creationId xmlns:p14="http://schemas.microsoft.com/office/powerpoint/2010/main" val="1093548525"/>
       </p:ext>
     </p:extLst>
   </p:cSld>
@@ -13984,6 +15867,1484 @@
           <p:cNvPr id="2" name="Titel 1">
             <a:extLst>
               <a:ext uri="{FF2B5EF4-FFF2-40B4-BE49-F238E27FC236}">
+                <a16:creationId xmlns:a16="http://schemas.microsoft.com/office/drawing/2014/main" id="{C1279D54-116A-6D58-B75A-2556899D6B46}"/>
+              </a:ext>
+            </a:extLst>
+          </p:cNvPr>
+          <p:cNvSpPr>
+            <a:spLocks noGrp="1"/>
+          </p:cNvSpPr>
+          <p:nvPr>
+            <p:ph type="title"/>
+          </p:nvPr>
+        </p:nvSpPr>
+        <p:spPr/>
+        <p:txBody>
+          <a:bodyPr/>
+          <a:lstStyle/>
+          <a:p>
+            <a:r>
+              <a:rPr lang="de-DE" dirty="0"/>
+              <a:t>DBSCAN: Density-</a:t>
+            </a:r>
+            <a:r>
+              <a:rPr lang="de-DE" dirty="0" err="1"/>
+              <a:t>Based</a:t>
+            </a:r>
+            <a:r>
+              <a:rPr lang="de-DE" dirty="0"/>
+              <a:t> Clustering</a:t>
+            </a:r>
+          </a:p>
+        </p:txBody>
+      </p:sp>
+      <p:sp>
+        <p:nvSpPr>
+          <p:cNvPr id="4" name="Inhaltsplatzhalter 3">
+            <a:extLst>
+              <a:ext uri="{FF2B5EF4-FFF2-40B4-BE49-F238E27FC236}">
+                <a16:creationId xmlns:a16="http://schemas.microsoft.com/office/drawing/2014/main" id="{DD30C41E-1B4C-8B40-FD0F-6A8D76270048}"/>
+              </a:ext>
+            </a:extLst>
+          </p:cNvPr>
+          <p:cNvSpPr>
+            <a:spLocks noGrp="1"/>
+          </p:cNvSpPr>
+          <p:nvPr>
+            <p:ph idx="1"/>
+          </p:nvPr>
+        </p:nvSpPr>
+        <p:spPr/>
+        <p:txBody>
+          <a:bodyPr>
+            <a:normAutofit lnSpcReduction="10000"/>
+          </a:bodyPr>
+          <a:lstStyle/>
+          <a:p>
+            <a:pPr marL="0" indent="0">
+              <a:buNone/>
+            </a:pPr>
+            <a:r>
+              <a:rPr lang="de-DE" sz="2600" dirty="0"/>
+              <a:t>DBSCAN: Density-</a:t>
+            </a:r>
+            <a:r>
+              <a:rPr lang="de-DE" sz="2600" dirty="0" err="1"/>
+              <a:t>Based</a:t>
+            </a:r>
+            <a:r>
+              <a:rPr lang="de-DE" sz="2600" dirty="0"/>
+              <a:t> </a:t>
+            </a:r>
+            <a:r>
+              <a:rPr lang="de-DE" sz="2600" dirty="0" err="1"/>
+              <a:t>Spatial</a:t>
+            </a:r>
+            <a:r>
+              <a:rPr lang="de-DE" sz="2600" dirty="0"/>
+              <a:t> Clustering </a:t>
+            </a:r>
+            <a:r>
+              <a:rPr lang="de-DE" sz="2600" dirty="0" err="1"/>
+              <a:t>of</a:t>
+            </a:r>
+            <a:r>
+              <a:rPr lang="de-DE" sz="2600" dirty="0"/>
+              <a:t> </a:t>
+            </a:r>
+            <a:r>
+              <a:rPr lang="de-DE" sz="2600" dirty="0" err="1"/>
+              <a:t>Applications</a:t>
+            </a:r>
+            <a:r>
+              <a:rPr lang="de-DE" sz="2600" dirty="0"/>
+              <a:t> </a:t>
+            </a:r>
+            <a:r>
+              <a:rPr lang="de-DE" sz="2600" dirty="0" err="1"/>
+              <a:t>with</a:t>
+            </a:r>
+            <a:r>
+              <a:rPr lang="de-DE" sz="2600" dirty="0"/>
+              <a:t> Noise</a:t>
+            </a:r>
+          </a:p>
+          <a:p>
+            <a:pPr marL="0" indent="0">
+              <a:buNone/>
+            </a:pPr>
+            <a:endParaRPr lang="de-DE" sz="2600" dirty="0"/>
+          </a:p>
+          <a:p>
+            <a:r>
+              <a:rPr lang="de-DE" sz="2400" dirty="0"/>
+              <a:t>Groups </a:t>
+            </a:r>
+            <a:r>
+              <a:rPr lang="de-DE" sz="2400" dirty="0" err="1"/>
+              <a:t>points</a:t>
+            </a:r>
+            <a:r>
+              <a:rPr lang="de-DE" sz="2400" dirty="0"/>
+              <a:t> </a:t>
+            </a:r>
+            <a:r>
+              <a:rPr lang="de-DE" sz="2400" dirty="0" err="1"/>
+              <a:t>based</a:t>
+            </a:r>
+            <a:r>
+              <a:rPr lang="de-DE" sz="2400" dirty="0"/>
+              <a:t> on </a:t>
+            </a:r>
+            <a:r>
+              <a:rPr lang="de-DE" sz="2400" dirty="0" err="1"/>
+              <a:t>dense</a:t>
+            </a:r>
+            <a:r>
+              <a:rPr lang="de-DE" sz="2400" dirty="0"/>
+              <a:t> </a:t>
+            </a:r>
+            <a:r>
+              <a:rPr lang="de-DE" sz="2400" dirty="0" err="1"/>
+              <a:t>regions</a:t>
+            </a:r>
+            <a:endParaRPr lang="de-DE" sz="2400" dirty="0"/>
+          </a:p>
+          <a:p>
+            <a:r>
+              <a:rPr lang="de-DE" sz="2400" dirty="0"/>
+              <a:t>Can </a:t>
+            </a:r>
+            <a:r>
+              <a:rPr lang="de-DE" sz="2400" dirty="0" err="1"/>
+              <a:t>detect</a:t>
+            </a:r>
+            <a:r>
+              <a:rPr lang="de-DE" sz="2400" dirty="0"/>
+              <a:t> </a:t>
+            </a:r>
+            <a:r>
+              <a:rPr lang="de-DE" sz="2400" dirty="0" err="1"/>
+              <a:t>arbitrary-shaped</a:t>
+            </a:r>
+            <a:r>
+              <a:rPr lang="de-DE" sz="2400" dirty="0"/>
+              <a:t> </a:t>
+            </a:r>
+            <a:r>
+              <a:rPr lang="de-DE" sz="2400" dirty="0" err="1"/>
+              <a:t>clusters</a:t>
+            </a:r>
+            <a:endParaRPr lang="de-DE" sz="2400" dirty="0"/>
+          </a:p>
+          <a:p>
+            <a:r>
+              <a:rPr lang="de-DE" sz="2400" dirty="0" err="1"/>
+              <a:t>Explicitly</a:t>
+            </a:r>
+            <a:r>
+              <a:rPr lang="de-DE" sz="2400" dirty="0"/>
+              <a:t> </a:t>
+            </a:r>
+            <a:r>
+              <a:rPr lang="de-DE" sz="2400" dirty="0" err="1"/>
+              <a:t>identifies</a:t>
+            </a:r>
+            <a:r>
+              <a:rPr lang="de-DE" sz="2400" dirty="0"/>
+              <a:t> </a:t>
+            </a:r>
+            <a:r>
+              <a:rPr lang="de-DE" sz="2400" dirty="0" err="1"/>
+              <a:t>noise</a:t>
+            </a:r>
+            <a:r>
+              <a:rPr lang="de-DE" sz="2400" dirty="0"/>
+              <a:t> (</a:t>
+            </a:r>
+            <a:r>
+              <a:rPr lang="de-DE" sz="2400" dirty="0" err="1"/>
+              <a:t>outliers</a:t>
+            </a:r>
+            <a:r>
+              <a:rPr lang="de-DE" sz="2400" dirty="0"/>
+              <a:t>)</a:t>
+            </a:r>
+          </a:p>
+          <a:p>
+            <a:r>
+              <a:rPr lang="de-DE" sz="2400" dirty="0" err="1"/>
+              <a:t>No</a:t>
+            </a:r>
+            <a:r>
+              <a:rPr lang="de-DE" sz="2400" dirty="0"/>
+              <a:t> </a:t>
+            </a:r>
+            <a:r>
+              <a:rPr lang="de-DE" sz="2400" dirty="0" err="1"/>
+              <a:t>need</a:t>
+            </a:r>
+            <a:r>
+              <a:rPr lang="de-DE" sz="2400" dirty="0"/>
+              <a:t> </a:t>
+            </a:r>
+            <a:r>
+              <a:rPr lang="de-DE" sz="2400" dirty="0" err="1"/>
+              <a:t>to</a:t>
+            </a:r>
+            <a:r>
+              <a:rPr lang="de-DE" sz="2400" dirty="0"/>
+              <a:t> </a:t>
+            </a:r>
+            <a:r>
+              <a:rPr lang="de-DE" sz="2400" dirty="0" err="1"/>
+              <a:t>specify</a:t>
+            </a:r>
+            <a:r>
+              <a:rPr lang="de-DE" sz="2400" dirty="0"/>
+              <a:t> </a:t>
+            </a:r>
+            <a:r>
+              <a:rPr lang="de-DE" sz="2400" dirty="0" err="1"/>
+              <a:t>number</a:t>
+            </a:r>
+            <a:r>
+              <a:rPr lang="de-DE" sz="2400" dirty="0"/>
+              <a:t> </a:t>
+            </a:r>
+            <a:r>
+              <a:rPr lang="de-DE" sz="2400" dirty="0" err="1"/>
+              <a:t>of</a:t>
+            </a:r>
+            <a:r>
+              <a:rPr lang="de-DE" sz="2400" dirty="0"/>
+              <a:t> </a:t>
+            </a:r>
+            <a:r>
+              <a:rPr lang="de-DE" sz="2400" dirty="0" err="1"/>
+              <a:t>clusters</a:t>
+            </a:r>
+            <a:r>
+              <a:rPr lang="de-DE" sz="2400" dirty="0"/>
+              <a:t> </a:t>
+            </a:r>
+            <a:r>
+              <a:rPr lang="de-DE" sz="2400" dirty="0" err="1"/>
+              <a:t>beforehand</a:t>
+            </a:r>
+            <a:endParaRPr lang="de-DE" sz="2400" dirty="0"/>
+          </a:p>
+          <a:p>
+            <a:pPr marL="0" indent="0">
+              <a:buNone/>
+            </a:pPr>
+            <a:endParaRPr lang="de-DE" sz="2400" dirty="0"/>
+          </a:p>
+          <a:p>
+            <a:pPr marL="0" indent="0">
+              <a:buNone/>
+            </a:pPr>
+            <a:r>
+              <a:rPr lang="de-DE" sz="2400" dirty="0"/>
+              <a:t>Key </a:t>
+            </a:r>
+            <a:r>
+              <a:rPr lang="de-DE" sz="2400" dirty="0" err="1"/>
+              <a:t>idea</a:t>
+            </a:r>
+            <a:r>
+              <a:rPr lang="de-DE" sz="2400" dirty="0"/>
+              <a:t>: </a:t>
+            </a:r>
+            <a:r>
+              <a:rPr lang="de-DE" sz="2400" dirty="0" err="1"/>
+              <a:t>clusters</a:t>
+            </a:r>
+            <a:r>
+              <a:rPr lang="de-DE" sz="2400" dirty="0"/>
+              <a:t> </a:t>
+            </a:r>
+            <a:r>
+              <a:rPr lang="de-DE" sz="2400" dirty="0" err="1"/>
+              <a:t>are</a:t>
+            </a:r>
+            <a:r>
+              <a:rPr lang="de-DE" sz="2400" dirty="0"/>
+              <a:t> </a:t>
+            </a:r>
+            <a:r>
+              <a:rPr lang="de-DE" sz="2400" dirty="0" err="1"/>
+              <a:t>formed</a:t>
+            </a:r>
+            <a:r>
+              <a:rPr lang="de-DE" sz="2400" dirty="0"/>
+              <a:t> </a:t>
+            </a:r>
+            <a:r>
+              <a:rPr lang="de-DE" sz="2400" dirty="0" err="1"/>
+              <a:t>by</a:t>
+            </a:r>
+            <a:r>
+              <a:rPr lang="de-DE" sz="2400" dirty="0"/>
+              <a:t> </a:t>
+            </a:r>
+            <a:r>
+              <a:rPr lang="de-DE" sz="2400" dirty="0" err="1"/>
+              <a:t>dense</a:t>
+            </a:r>
+            <a:r>
+              <a:rPr lang="de-DE" sz="2400" dirty="0"/>
+              <a:t> </a:t>
+            </a:r>
+            <a:r>
+              <a:rPr lang="de-DE" sz="2400" dirty="0" err="1"/>
+              <a:t>regions</a:t>
+            </a:r>
+            <a:r>
+              <a:rPr lang="de-DE" sz="2400" dirty="0"/>
+              <a:t> </a:t>
+            </a:r>
+            <a:r>
+              <a:rPr lang="de-DE" sz="2400" dirty="0" err="1"/>
+              <a:t>of</a:t>
+            </a:r>
+            <a:r>
+              <a:rPr lang="de-DE" sz="2400" dirty="0"/>
+              <a:t> </a:t>
+            </a:r>
+            <a:r>
+              <a:rPr lang="de-DE" sz="2400" dirty="0" err="1"/>
+              <a:t>points</a:t>
+            </a:r>
+            <a:r>
+              <a:rPr lang="de-DE" sz="2400" dirty="0"/>
+              <a:t>, </a:t>
+            </a:r>
+            <a:r>
+              <a:rPr lang="de-DE" sz="2400" dirty="0" err="1"/>
+              <a:t>using</a:t>
+            </a:r>
+            <a:r>
+              <a:rPr lang="de-DE" sz="2400" dirty="0"/>
+              <a:t> </a:t>
+            </a:r>
+            <a:r>
+              <a:rPr lang="de-DE" sz="2400" dirty="0" err="1"/>
+              <a:t>two</a:t>
+            </a:r>
+            <a:r>
+              <a:rPr lang="de-DE" sz="2400" dirty="0"/>
+              <a:t> </a:t>
+            </a:r>
+            <a:r>
+              <a:rPr lang="de-DE" sz="2400" dirty="0" err="1"/>
+              <a:t>parameters</a:t>
+            </a:r>
+            <a:r>
+              <a:rPr lang="de-DE" sz="2400" dirty="0"/>
+              <a:t>:</a:t>
+            </a:r>
+          </a:p>
+          <a:p>
+            <a:r>
+              <a:rPr lang="el-GR" sz="2400" dirty="0">
+                <a:latin typeface="Cambria Math" panose="02040503050406030204" pitchFamily="18" charset="0"/>
+                <a:ea typeface="Cambria Math" panose="02040503050406030204" pitchFamily="18" charset="0"/>
+              </a:rPr>
+              <a:t>ε</a:t>
+            </a:r>
+            <a:r>
+              <a:rPr lang="de-DE" sz="2400" dirty="0"/>
+              <a:t>: </a:t>
+            </a:r>
+            <a:r>
+              <a:rPr lang="de-DE" sz="2400" dirty="0" err="1"/>
+              <a:t>neighborhood</a:t>
+            </a:r>
+            <a:r>
+              <a:rPr lang="de-DE" sz="2400" dirty="0"/>
+              <a:t> </a:t>
+            </a:r>
+            <a:r>
+              <a:rPr lang="de-DE" sz="2400" dirty="0" err="1"/>
+              <a:t>radius</a:t>
+            </a:r>
+            <a:endParaRPr lang="de-DE" sz="2400" dirty="0"/>
+          </a:p>
+          <a:p>
+            <a:r>
+              <a:rPr lang="de-DE" sz="2400" dirty="0" err="1">
+                <a:latin typeface="Cambria Math" panose="02040503050406030204" pitchFamily="18" charset="0"/>
+                <a:ea typeface="Cambria Math" panose="02040503050406030204" pitchFamily="18" charset="0"/>
+              </a:rPr>
+              <a:t>min_samples</a:t>
+            </a:r>
+            <a:r>
+              <a:rPr lang="de-DE" sz="2400" dirty="0"/>
+              <a:t>: </a:t>
+            </a:r>
+            <a:r>
+              <a:rPr lang="de-DE" sz="2400" dirty="0" err="1"/>
+              <a:t>minimum</a:t>
+            </a:r>
+            <a:r>
+              <a:rPr lang="de-DE" sz="2400" dirty="0"/>
+              <a:t> </a:t>
+            </a:r>
+            <a:r>
+              <a:rPr lang="de-DE" sz="2400" dirty="0" err="1"/>
+              <a:t>points</a:t>
+            </a:r>
+            <a:r>
+              <a:rPr lang="de-DE" sz="2400" dirty="0"/>
+              <a:t> </a:t>
+            </a:r>
+            <a:r>
+              <a:rPr lang="de-DE" sz="2400" dirty="0" err="1"/>
+              <a:t>to</a:t>
+            </a:r>
+            <a:r>
+              <a:rPr lang="de-DE" sz="2400" dirty="0"/>
+              <a:t> form a </a:t>
+            </a:r>
+            <a:r>
+              <a:rPr lang="de-DE" sz="2400" dirty="0" err="1"/>
+              <a:t>dense</a:t>
+            </a:r>
+            <a:r>
+              <a:rPr lang="de-DE" sz="2400" dirty="0"/>
+              <a:t> </a:t>
+            </a:r>
+            <a:r>
+              <a:rPr lang="de-DE" sz="2400" dirty="0" err="1"/>
+              <a:t>region</a:t>
+            </a:r>
+            <a:endParaRPr lang="de-DE" sz="2400" dirty="0"/>
+          </a:p>
+          <a:p>
+            <a:pPr marL="0" indent="0">
+              <a:buNone/>
+            </a:pPr>
+            <a:endParaRPr lang="de-DE" sz="2400" dirty="0"/>
+          </a:p>
+          <a:p>
+            <a:pPr marL="0" indent="0">
+              <a:buNone/>
+            </a:pPr>
+            <a:endParaRPr lang="de-DE" sz="2400" dirty="0"/>
+          </a:p>
+        </p:txBody>
+      </p:sp>
+      <p:sp>
+        <p:nvSpPr>
+          <p:cNvPr id="3" name="Foliennummernplatzhalter 2">
+            <a:extLst>
+              <a:ext uri="{FF2B5EF4-FFF2-40B4-BE49-F238E27FC236}">
+                <a16:creationId xmlns:a16="http://schemas.microsoft.com/office/drawing/2014/main" id="{C6A32FD8-548B-71F2-BB0C-E2FA7DE0D672}"/>
+              </a:ext>
+            </a:extLst>
+          </p:cNvPr>
+          <p:cNvSpPr>
+            <a:spLocks noGrp="1"/>
+          </p:cNvSpPr>
+          <p:nvPr>
+            <p:ph type="sldNum" sz="quarter" idx="12"/>
+          </p:nvPr>
+        </p:nvSpPr>
+        <p:spPr/>
+        <p:txBody>
+          <a:bodyPr/>
+          <a:lstStyle/>
+          <a:p>
+            <a:fld id="{08C366F5-AFAD-49CB-854A-9D9E238FCA13}" type="slidenum">
+              <a:rPr lang="en-GB" smtClean="0"/>
+              <a:t>30</a:t>
+            </a:fld>
+            <a:endParaRPr lang="en-GB"/>
+          </a:p>
+        </p:txBody>
+      </p:sp>
+    </p:spTree>
+    <p:extLst>
+      <p:ext uri="{BB962C8B-B14F-4D97-AF65-F5344CB8AC3E}">
+        <p14:creationId xmlns:p14="http://schemas.microsoft.com/office/powerpoint/2010/main" val="3058453600"/>
+      </p:ext>
+    </p:extLst>
+  </p:cSld>
+  <p:clrMapOvr>
+    <a:masterClrMapping/>
+  </p:clrMapOvr>
+</p:sld>
+</file>
+
+<file path=ppt/slides/slide31.xml><?xml version="1.0" encoding="utf-8"?>
+<p:sld xmlns:a="http://schemas.openxmlformats.org/drawingml/2006/main" xmlns:r="http://schemas.openxmlformats.org/officeDocument/2006/relationships" xmlns:p="http://schemas.openxmlformats.org/presentationml/2006/main">
+  <p:cSld>
+    <p:spTree>
+      <p:nvGrpSpPr>
+        <p:cNvPr id="1" name=""/>
+        <p:cNvGrpSpPr/>
+        <p:nvPr/>
+      </p:nvGrpSpPr>
+      <p:grpSpPr>
+        <a:xfrm>
+          <a:off x="0" y="0"/>
+          <a:ext cx="0" cy="0"/>
+          <a:chOff x="0" y="0"/>
+          <a:chExt cx="0" cy="0"/>
+        </a:xfrm>
+      </p:grpSpPr>
+      <p:sp>
+        <p:nvSpPr>
+          <p:cNvPr id="2" name="Titel 1">
+            <a:extLst>
+              <a:ext uri="{FF2B5EF4-FFF2-40B4-BE49-F238E27FC236}">
+                <a16:creationId xmlns:a16="http://schemas.microsoft.com/office/drawing/2014/main" id="{9CC7556B-98BB-9EF2-B9BD-688767AA83EE}"/>
+              </a:ext>
+            </a:extLst>
+          </p:cNvPr>
+          <p:cNvSpPr>
+            <a:spLocks noGrp="1"/>
+          </p:cNvSpPr>
+          <p:nvPr>
+            <p:ph type="title"/>
+          </p:nvPr>
+        </p:nvSpPr>
+        <p:spPr/>
+        <p:txBody>
+          <a:bodyPr/>
+          <a:lstStyle/>
+          <a:p>
+            <a:r>
+              <a:rPr lang="de-DE" dirty="0"/>
+              <a:t>Core Points, Border Points, Noise</a:t>
+            </a:r>
+          </a:p>
+        </p:txBody>
+      </p:sp>
+      <p:sp>
+        <p:nvSpPr>
+          <p:cNvPr id="4" name="Inhaltsplatzhalter 3">
+            <a:extLst>
+              <a:ext uri="{FF2B5EF4-FFF2-40B4-BE49-F238E27FC236}">
+                <a16:creationId xmlns:a16="http://schemas.microsoft.com/office/drawing/2014/main" id="{C0D2316E-28EC-6582-BF64-207C98454652}"/>
+              </a:ext>
+            </a:extLst>
+          </p:cNvPr>
+          <p:cNvSpPr>
+            <a:spLocks noGrp="1"/>
+          </p:cNvSpPr>
+          <p:nvPr>
+            <p:ph idx="1"/>
+          </p:nvPr>
+        </p:nvSpPr>
+        <p:spPr/>
+        <p:txBody>
+          <a:bodyPr>
+            <a:normAutofit/>
+          </a:bodyPr>
+          <a:lstStyle/>
+          <a:p>
+            <a:pPr marL="0" indent="0">
+              <a:buNone/>
+            </a:pPr>
+            <a:r>
+              <a:rPr lang="de-DE" dirty="0" err="1"/>
+              <a:t>Define</a:t>
+            </a:r>
+            <a:r>
+              <a:rPr lang="de-DE" dirty="0"/>
+              <a:t> different </a:t>
+            </a:r>
+            <a:r>
+              <a:rPr lang="de-DE" dirty="0" err="1"/>
+              <a:t>types</a:t>
+            </a:r>
+            <a:r>
+              <a:rPr lang="de-DE" dirty="0"/>
+              <a:t> </a:t>
+            </a:r>
+            <a:r>
+              <a:rPr lang="de-DE" dirty="0" err="1"/>
+              <a:t>of</a:t>
+            </a:r>
+            <a:r>
+              <a:rPr lang="de-DE" dirty="0"/>
+              <a:t> </a:t>
+            </a:r>
+            <a:r>
+              <a:rPr lang="de-DE" dirty="0" err="1"/>
+              <a:t>points</a:t>
+            </a:r>
+            <a:endParaRPr lang="de-DE" dirty="0"/>
+          </a:p>
+          <a:p>
+            <a:pPr marL="0" indent="0">
+              <a:buNone/>
+            </a:pPr>
+            <a:endParaRPr lang="de-DE" dirty="0"/>
+          </a:p>
+          <a:p>
+            <a:r>
+              <a:rPr lang="de-DE" dirty="0"/>
+              <a:t>Core Points: </a:t>
+            </a:r>
+            <a:r>
+              <a:rPr lang="de-DE" dirty="0" err="1"/>
+              <a:t>have</a:t>
+            </a:r>
+            <a:r>
+              <a:rPr lang="de-DE" dirty="0"/>
+              <a:t> </a:t>
+            </a:r>
+            <a:r>
+              <a:rPr lang="de-DE" dirty="0">
+                <a:latin typeface="Cambria Math" panose="02040503050406030204" pitchFamily="18" charset="0"/>
+                <a:ea typeface="Cambria Math" panose="02040503050406030204" pitchFamily="18" charset="0"/>
+              </a:rPr>
+              <a:t>≥ </a:t>
+            </a:r>
+            <a:r>
+              <a:rPr lang="de-DE" dirty="0" err="1">
+                <a:latin typeface="Cambria Math" panose="02040503050406030204" pitchFamily="18" charset="0"/>
+                <a:ea typeface="Cambria Math" panose="02040503050406030204" pitchFamily="18" charset="0"/>
+              </a:rPr>
+              <a:t>min_samples</a:t>
+            </a:r>
+            <a:r>
+              <a:rPr lang="de-DE" dirty="0"/>
+              <a:t> </a:t>
+            </a:r>
+            <a:r>
+              <a:rPr lang="de-DE" dirty="0" err="1"/>
+              <a:t>points</a:t>
+            </a:r>
+            <a:r>
+              <a:rPr lang="de-DE" dirty="0"/>
+              <a:t> </a:t>
+            </a:r>
+            <a:r>
+              <a:rPr lang="de-DE" dirty="0" err="1"/>
+              <a:t>within</a:t>
+            </a:r>
+            <a:r>
+              <a:rPr lang="de-DE" dirty="0"/>
+              <a:t> </a:t>
+            </a:r>
+            <a:r>
+              <a:rPr lang="el-GR" dirty="0">
+                <a:latin typeface="Cambria Math" panose="02040503050406030204" pitchFamily="18" charset="0"/>
+                <a:ea typeface="Cambria Math" panose="02040503050406030204" pitchFamily="18" charset="0"/>
+              </a:rPr>
+              <a:t>ε</a:t>
+            </a:r>
+            <a:r>
+              <a:rPr lang="de-DE" dirty="0"/>
+              <a:t> </a:t>
+            </a:r>
+            <a:r>
+              <a:rPr lang="de-DE" dirty="0">
+                <a:sym typeface="Wingdings" pitchFamily="2" charset="2"/>
+              </a:rPr>
+              <a:t> </a:t>
+            </a:r>
+            <a:r>
+              <a:rPr lang="de-DE" dirty="0" err="1">
+                <a:sym typeface="Wingdings" pitchFamily="2" charset="2"/>
+              </a:rPr>
+              <a:t>dense</a:t>
+            </a:r>
+            <a:r>
+              <a:rPr lang="de-DE" dirty="0">
+                <a:sym typeface="Wingdings" pitchFamily="2" charset="2"/>
+              </a:rPr>
+              <a:t> </a:t>
+            </a:r>
+            <a:r>
+              <a:rPr lang="de-DE" dirty="0" err="1">
+                <a:sym typeface="Wingdings" pitchFamily="2" charset="2"/>
+              </a:rPr>
+              <a:t>center</a:t>
+            </a:r>
+            <a:endParaRPr lang="el-GR" dirty="0"/>
+          </a:p>
+          <a:p>
+            <a:pPr marL="0" indent="0">
+              <a:buNone/>
+            </a:pPr>
+            <a:endParaRPr lang="de-DE" dirty="0"/>
+          </a:p>
+          <a:p>
+            <a:r>
+              <a:rPr lang="de-DE" dirty="0"/>
+              <a:t>Border Points: </a:t>
+            </a:r>
+            <a:r>
+              <a:rPr lang="de-DE" dirty="0" err="1"/>
+              <a:t>within</a:t>
+            </a:r>
+            <a:r>
+              <a:rPr lang="de-DE" dirty="0"/>
+              <a:t> </a:t>
+            </a:r>
+            <a:r>
+              <a:rPr lang="el-GR" dirty="0">
+                <a:latin typeface="Cambria Math" panose="02040503050406030204" pitchFamily="18" charset="0"/>
+                <a:ea typeface="Cambria Math" panose="02040503050406030204" pitchFamily="18" charset="0"/>
+              </a:rPr>
+              <a:t>ε</a:t>
+            </a:r>
+            <a:r>
+              <a:rPr lang="el-GR" dirty="0"/>
+              <a:t> </a:t>
+            </a:r>
+            <a:r>
+              <a:rPr lang="de-DE" dirty="0" err="1"/>
+              <a:t>of</a:t>
+            </a:r>
+            <a:r>
+              <a:rPr lang="de-DE" dirty="0"/>
+              <a:t> a </a:t>
+            </a:r>
+            <a:r>
+              <a:rPr lang="de-DE" dirty="0" err="1"/>
+              <a:t>core</a:t>
+            </a:r>
+            <a:r>
+              <a:rPr lang="de-DE" dirty="0"/>
+              <a:t> </a:t>
+            </a:r>
+            <a:r>
+              <a:rPr lang="de-DE" dirty="0" err="1"/>
+              <a:t>point</a:t>
+            </a:r>
+            <a:r>
+              <a:rPr lang="de-DE" dirty="0"/>
+              <a:t>, but not </a:t>
+            </a:r>
+            <a:r>
+              <a:rPr lang="de-DE" dirty="0" err="1"/>
+              <a:t>dense</a:t>
+            </a:r>
+            <a:r>
+              <a:rPr lang="de-DE" dirty="0"/>
+              <a:t> </a:t>
+            </a:r>
+            <a:r>
+              <a:rPr lang="de-DE" dirty="0" err="1"/>
+              <a:t>enough</a:t>
+            </a:r>
+            <a:r>
+              <a:rPr lang="de-DE" dirty="0"/>
+              <a:t> </a:t>
+            </a:r>
+            <a:r>
+              <a:rPr lang="de-DE" dirty="0" err="1"/>
+              <a:t>themselves</a:t>
+            </a:r>
+            <a:r>
+              <a:rPr lang="de-DE" dirty="0"/>
+              <a:t> </a:t>
+            </a:r>
+            <a:r>
+              <a:rPr lang="de-DE" dirty="0">
+                <a:sym typeface="Wingdings" pitchFamily="2" charset="2"/>
+              </a:rPr>
+              <a:t> </a:t>
+            </a:r>
+            <a:r>
+              <a:rPr lang="de-DE" dirty="0" err="1">
+                <a:sym typeface="Wingdings" pitchFamily="2" charset="2"/>
+              </a:rPr>
+              <a:t>edge</a:t>
+            </a:r>
+            <a:r>
+              <a:rPr lang="de-DE" dirty="0">
+                <a:sym typeface="Wingdings" pitchFamily="2" charset="2"/>
+              </a:rPr>
+              <a:t> </a:t>
+            </a:r>
+            <a:r>
+              <a:rPr lang="de-DE" dirty="0" err="1">
+                <a:sym typeface="Wingdings" pitchFamily="2" charset="2"/>
+              </a:rPr>
+              <a:t>of</a:t>
+            </a:r>
+            <a:r>
+              <a:rPr lang="de-DE" dirty="0">
+                <a:sym typeface="Wingdings" pitchFamily="2" charset="2"/>
+              </a:rPr>
+              <a:t> </a:t>
+            </a:r>
+            <a:r>
+              <a:rPr lang="de-DE" dirty="0" err="1">
+                <a:sym typeface="Wingdings" pitchFamily="2" charset="2"/>
+              </a:rPr>
+              <a:t>cluster</a:t>
+            </a:r>
+            <a:endParaRPr lang="de-DE" dirty="0"/>
+          </a:p>
+          <a:p>
+            <a:pPr marL="0" indent="0">
+              <a:buNone/>
+            </a:pPr>
+            <a:endParaRPr lang="de-DE" dirty="0"/>
+          </a:p>
+          <a:p>
+            <a:r>
+              <a:rPr lang="de-DE" dirty="0"/>
+              <a:t>Noise Points: not </a:t>
+            </a:r>
+            <a:r>
+              <a:rPr lang="de-DE" dirty="0" err="1"/>
+              <a:t>reachable</a:t>
+            </a:r>
+            <a:r>
+              <a:rPr lang="de-DE" dirty="0"/>
+              <a:t> </a:t>
+            </a:r>
+            <a:r>
+              <a:rPr lang="de-DE" dirty="0" err="1"/>
+              <a:t>from</a:t>
+            </a:r>
+            <a:r>
+              <a:rPr lang="de-DE" dirty="0"/>
+              <a:t> </a:t>
+            </a:r>
+            <a:r>
+              <a:rPr lang="de-DE" dirty="0" err="1"/>
+              <a:t>any</a:t>
+            </a:r>
+            <a:r>
+              <a:rPr lang="de-DE" dirty="0"/>
+              <a:t> </a:t>
+            </a:r>
+            <a:r>
+              <a:rPr lang="de-DE" dirty="0" err="1"/>
+              <a:t>core</a:t>
+            </a:r>
+            <a:r>
+              <a:rPr lang="de-DE" dirty="0"/>
+              <a:t> </a:t>
+            </a:r>
+            <a:r>
+              <a:rPr lang="de-DE" dirty="0" err="1"/>
+              <a:t>point</a:t>
+            </a:r>
+            <a:r>
+              <a:rPr lang="de-DE" dirty="0"/>
+              <a:t> </a:t>
+            </a:r>
+            <a:r>
+              <a:rPr lang="de-DE" dirty="0">
+                <a:sym typeface="Wingdings" pitchFamily="2" charset="2"/>
+              </a:rPr>
+              <a:t> </a:t>
+            </a:r>
+            <a:r>
+              <a:rPr lang="de-DE" dirty="0" err="1">
+                <a:sym typeface="Wingdings" pitchFamily="2" charset="2"/>
+              </a:rPr>
+              <a:t>isolated</a:t>
+            </a:r>
+            <a:r>
+              <a:rPr lang="de-DE" dirty="0">
+                <a:sym typeface="Wingdings" pitchFamily="2" charset="2"/>
+              </a:rPr>
+              <a:t> </a:t>
+            </a:r>
+            <a:r>
+              <a:rPr lang="de-DE" dirty="0" err="1">
+                <a:sym typeface="Wingdings" pitchFamily="2" charset="2"/>
+              </a:rPr>
+              <a:t>points</a:t>
+            </a:r>
+            <a:endParaRPr lang="de-DE" dirty="0"/>
+          </a:p>
+        </p:txBody>
+      </p:sp>
+      <p:sp>
+        <p:nvSpPr>
+          <p:cNvPr id="3" name="Foliennummernplatzhalter 2">
+            <a:extLst>
+              <a:ext uri="{FF2B5EF4-FFF2-40B4-BE49-F238E27FC236}">
+                <a16:creationId xmlns:a16="http://schemas.microsoft.com/office/drawing/2014/main" id="{157EE93D-CF21-6985-77E6-E17034472C2F}"/>
+              </a:ext>
+            </a:extLst>
+          </p:cNvPr>
+          <p:cNvSpPr>
+            <a:spLocks noGrp="1"/>
+          </p:cNvSpPr>
+          <p:nvPr>
+            <p:ph type="sldNum" sz="quarter" idx="12"/>
+          </p:nvPr>
+        </p:nvSpPr>
+        <p:spPr/>
+        <p:txBody>
+          <a:bodyPr/>
+          <a:lstStyle/>
+          <a:p>
+            <a:fld id="{08C366F5-AFAD-49CB-854A-9D9E238FCA13}" type="slidenum">
+              <a:rPr lang="en-GB" smtClean="0"/>
+              <a:t>31</a:t>
+            </a:fld>
+            <a:endParaRPr lang="en-GB"/>
+          </a:p>
+        </p:txBody>
+      </p:sp>
+    </p:spTree>
+    <p:extLst>
+      <p:ext uri="{BB962C8B-B14F-4D97-AF65-F5344CB8AC3E}">
+        <p14:creationId xmlns:p14="http://schemas.microsoft.com/office/powerpoint/2010/main" val="1093548525"/>
+      </p:ext>
+    </p:extLst>
+  </p:cSld>
+  <p:clrMapOvr>
+    <a:masterClrMapping/>
+  </p:clrMapOvr>
+</p:sld>
+</file>
+
+<file path=ppt/slides/slide32.xml><?xml version="1.0" encoding="utf-8"?>
+<p:sld xmlns:a="http://schemas.openxmlformats.org/drawingml/2006/main" xmlns:r="http://schemas.openxmlformats.org/officeDocument/2006/relationships" xmlns:p="http://schemas.openxmlformats.org/presentationml/2006/main">
+  <p:cSld>
+    <p:spTree>
+      <p:nvGrpSpPr>
+        <p:cNvPr id="1" name=""/>
+        <p:cNvGrpSpPr/>
+        <p:nvPr/>
+      </p:nvGrpSpPr>
+      <p:grpSpPr>
+        <a:xfrm>
+          <a:off x="0" y="0"/>
+          <a:ext cx="0" cy="0"/>
+          <a:chOff x="0" y="0"/>
+          <a:chExt cx="0" cy="0"/>
+        </a:xfrm>
+      </p:grpSpPr>
+      <p:sp>
+        <p:nvSpPr>
+          <p:cNvPr id="2" name="Titel 1">
+            <a:extLst>
+              <a:ext uri="{FF2B5EF4-FFF2-40B4-BE49-F238E27FC236}">
+                <a16:creationId xmlns:a16="http://schemas.microsoft.com/office/drawing/2014/main" id="{DA85E08B-65CA-DA0F-8B2B-32C7BF1987BF}"/>
+              </a:ext>
+            </a:extLst>
+          </p:cNvPr>
+          <p:cNvSpPr>
+            <a:spLocks noGrp="1"/>
+          </p:cNvSpPr>
+          <p:nvPr>
+            <p:ph type="title"/>
+          </p:nvPr>
+        </p:nvSpPr>
+        <p:spPr/>
+        <p:txBody>
+          <a:bodyPr/>
+          <a:lstStyle/>
+          <a:p>
+            <a:r>
+              <a:rPr lang="de-DE" dirty="0"/>
+              <a:t>DBSCAN </a:t>
+            </a:r>
+            <a:r>
+              <a:rPr lang="de-DE" dirty="0" err="1"/>
+              <a:t>Algorithm</a:t>
+            </a:r>
+            <a:endParaRPr lang="de-DE" dirty="0"/>
+          </a:p>
+        </p:txBody>
+      </p:sp>
+      <p:sp>
+        <p:nvSpPr>
+          <p:cNvPr id="3" name="Inhaltsplatzhalter 2">
+            <a:extLst>
+              <a:ext uri="{FF2B5EF4-FFF2-40B4-BE49-F238E27FC236}">
+                <a16:creationId xmlns:a16="http://schemas.microsoft.com/office/drawing/2014/main" id="{48293539-B5EA-4406-02DD-1F9D36FDC673}"/>
+              </a:ext>
+            </a:extLst>
+          </p:cNvPr>
+          <p:cNvSpPr>
+            <a:spLocks noGrp="1"/>
+          </p:cNvSpPr>
+          <p:nvPr>
+            <p:ph idx="1"/>
+          </p:nvPr>
+        </p:nvSpPr>
+        <p:spPr/>
+        <p:txBody>
+          <a:bodyPr>
+            <a:normAutofit fontScale="92500" lnSpcReduction="20000"/>
+          </a:bodyPr>
+          <a:lstStyle/>
+          <a:p>
+            <a:pPr marL="514350" indent="-514350">
+              <a:buFont typeface="+mj-lt"/>
+              <a:buAutoNum type="arabicPeriod"/>
+            </a:pPr>
+            <a:r>
+              <a:rPr lang="de-DE" dirty="0"/>
+              <a:t>Pick an </a:t>
+            </a:r>
+            <a:r>
+              <a:rPr lang="de-DE" dirty="0" err="1"/>
+              <a:t>unvisited</a:t>
+            </a:r>
+            <a:r>
+              <a:rPr lang="de-DE" dirty="0"/>
+              <a:t> </a:t>
+            </a:r>
+            <a:r>
+              <a:rPr lang="de-DE" dirty="0" err="1"/>
+              <a:t>point</a:t>
+            </a:r>
+            <a:endParaRPr lang="de-DE" dirty="0"/>
+          </a:p>
+          <a:p>
+            <a:pPr marL="514350" indent="-514350">
+              <a:buFont typeface="+mj-lt"/>
+              <a:buAutoNum type="arabicPeriod"/>
+            </a:pPr>
+            <a:r>
+              <a:rPr lang="de-DE" dirty="0"/>
+              <a:t>Check </a:t>
+            </a:r>
+            <a:r>
+              <a:rPr lang="de-DE" dirty="0" err="1"/>
+              <a:t>its</a:t>
+            </a:r>
+            <a:r>
+              <a:rPr lang="de-DE" dirty="0"/>
+              <a:t> </a:t>
+            </a:r>
+            <a:r>
+              <a:rPr lang="el-GR" dirty="0"/>
+              <a:t>ε-</a:t>
+            </a:r>
+            <a:r>
+              <a:rPr lang="de-DE" dirty="0" err="1"/>
+              <a:t>neighborhood</a:t>
+            </a:r>
+            <a:endParaRPr lang="de-DE" dirty="0"/>
+          </a:p>
+          <a:p>
+            <a:pPr marL="514350" indent="-514350">
+              <a:buFont typeface="+mj-lt"/>
+              <a:buAutoNum type="arabicPeriod"/>
+            </a:pPr>
+            <a:r>
+              <a:rPr lang="de-DE" dirty="0" err="1"/>
+              <a:t>If</a:t>
+            </a:r>
+            <a:r>
+              <a:rPr lang="de-DE" dirty="0"/>
+              <a:t> </a:t>
+            </a:r>
+            <a:r>
+              <a:rPr lang="de-DE" dirty="0" err="1"/>
+              <a:t>core</a:t>
+            </a:r>
+            <a:r>
+              <a:rPr lang="de-DE" dirty="0"/>
+              <a:t> </a:t>
+            </a:r>
+            <a:r>
+              <a:rPr lang="de-DE" dirty="0" err="1"/>
+              <a:t>point</a:t>
+            </a:r>
+            <a:r>
+              <a:rPr lang="de-DE" dirty="0"/>
+              <a:t>: </a:t>
+            </a:r>
+            <a:r>
+              <a:rPr lang="de-DE" dirty="0" err="1"/>
+              <a:t>create</a:t>
+            </a:r>
+            <a:r>
+              <a:rPr lang="de-DE" dirty="0"/>
+              <a:t> </a:t>
+            </a:r>
+            <a:r>
+              <a:rPr lang="de-DE" dirty="0" err="1"/>
+              <a:t>new</a:t>
+            </a:r>
+            <a:r>
+              <a:rPr lang="de-DE" dirty="0"/>
+              <a:t> </a:t>
+            </a:r>
+            <a:r>
+              <a:rPr lang="de-DE" dirty="0" err="1"/>
+              <a:t>cluster</a:t>
+            </a:r>
+            <a:r>
+              <a:rPr lang="de-DE" dirty="0"/>
+              <a:t>, </a:t>
+            </a:r>
+            <a:r>
+              <a:rPr lang="de-DE" dirty="0" err="1"/>
+              <a:t>expand</a:t>
+            </a:r>
+            <a:r>
+              <a:rPr lang="de-DE" dirty="0"/>
+              <a:t> </a:t>
+            </a:r>
+            <a:r>
+              <a:rPr lang="de-DE" dirty="0" err="1"/>
+              <a:t>cluster</a:t>
+            </a:r>
+            <a:r>
+              <a:rPr lang="de-DE" dirty="0"/>
+              <a:t> (</a:t>
+            </a:r>
+            <a:r>
+              <a:rPr lang="de-DE" dirty="0" err="1"/>
+              <a:t>density-reachable</a:t>
+            </a:r>
+            <a:r>
+              <a:rPr lang="de-DE" dirty="0"/>
+              <a:t> </a:t>
+            </a:r>
+            <a:r>
+              <a:rPr lang="de-DE" dirty="0" err="1"/>
+              <a:t>points</a:t>
+            </a:r>
+            <a:r>
+              <a:rPr lang="de-DE" dirty="0"/>
+              <a:t>)</a:t>
+            </a:r>
+          </a:p>
+          <a:p>
+            <a:pPr marL="514350" indent="-514350">
+              <a:buFont typeface="+mj-lt"/>
+              <a:buAutoNum type="arabicPeriod"/>
+            </a:pPr>
+            <a:r>
+              <a:rPr lang="de-DE" dirty="0" err="1"/>
+              <a:t>If</a:t>
+            </a:r>
+            <a:r>
+              <a:rPr lang="de-DE" dirty="0"/>
+              <a:t> not: </a:t>
+            </a:r>
+            <a:r>
+              <a:rPr lang="de-DE" dirty="0" err="1"/>
+              <a:t>mark</a:t>
+            </a:r>
+            <a:r>
+              <a:rPr lang="de-DE" dirty="0"/>
+              <a:t> </a:t>
+            </a:r>
+            <a:r>
+              <a:rPr lang="de-DE" dirty="0" err="1"/>
+              <a:t>as</a:t>
+            </a:r>
+            <a:r>
+              <a:rPr lang="de-DE" dirty="0"/>
+              <a:t> </a:t>
+            </a:r>
+            <a:r>
+              <a:rPr lang="de-DE" dirty="0" err="1"/>
+              <a:t>noise</a:t>
+            </a:r>
+            <a:r>
+              <a:rPr lang="de-DE" dirty="0"/>
+              <a:t> (</a:t>
+            </a:r>
+            <a:r>
+              <a:rPr lang="de-DE" dirty="0" err="1"/>
+              <a:t>may</a:t>
+            </a:r>
+            <a:r>
+              <a:rPr lang="de-DE" dirty="0"/>
+              <a:t> </a:t>
+            </a:r>
+            <a:r>
+              <a:rPr lang="de-DE" dirty="0" err="1"/>
+              <a:t>later</a:t>
+            </a:r>
+            <a:r>
+              <a:rPr lang="de-DE" dirty="0"/>
+              <a:t> </a:t>
+            </a:r>
+            <a:r>
+              <a:rPr lang="de-DE" dirty="0" err="1"/>
+              <a:t>become</a:t>
+            </a:r>
+            <a:r>
+              <a:rPr lang="de-DE" dirty="0"/>
+              <a:t> </a:t>
+            </a:r>
+            <a:r>
+              <a:rPr lang="de-DE" dirty="0" err="1"/>
+              <a:t>border</a:t>
+            </a:r>
+            <a:r>
+              <a:rPr lang="de-DE" dirty="0"/>
+              <a:t>)</a:t>
+            </a:r>
+          </a:p>
+          <a:p>
+            <a:pPr marL="514350" indent="-514350">
+              <a:buFont typeface="+mj-lt"/>
+              <a:buAutoNum type="arabicPeriod"/>
+            </a:pPr>
+            <a:r>
+              <a:rPr lang="de-DE" dirty="0"/>
+              <a:t>Repeat </a:t>
+            </a:r>
+            <a:r>
+              <a:rPr lang="de-DE" dirty="0" err="1"/>
+              <a:t>until</a:t>
+            </a:r>
+            <a:r>
+              <a:rPr lang="de-DE" dirty="0"/>
+              <a:t> all </a:t>
+            </a:r>
+            <a:r>
+              <a:rPr lang="de-DE" dirty="0" err="1"/>
+              <a:t>points</a:t>
+            </a:r>
+            <a:r>
+              <a:rPr lang="de-DE" dirty="0"/>
+              <a:t> </a:t>
+            </a:r>
+            <a:r>
+              <a:rPr lang="de-DE" dirty="0" err="1"/>
+              <a:t>processed</a:t>
+            </a:r>
+            <a:endParaRPr lang="de-DE" dirty="0"/>
+          </a:p>
+          <a:p>
+            <a:pPr marL="0" indent="0">
+              <a:buNone/>
+            </a:pPr>
+            <a:endParaRPr lang="de-DE" dirty="0"/>
+          </a:p>
+          <a:p>
+            <a:pPr marL="0" indent="0">
+              <a:buNone/>
+            </a:pPr>
+            <a:r>
+              <a:rPr lang="de-DE" dirty="0"/>
+              <a:t>Cluster </a:t>
+            </a:r>
+            <a:r>
+              <a:rPr lang="de-DE" dirty="0" err="1"/>
+              <a:t>formation</a:t>
+            </a:r>
+            <a:r>
+              <a:rPr lang="de-DE" dirty="0"/>
+              <a:t> </a:t>
+            </a:r>
+            <a:r>
+              <a:rPr lang="de-DE" dirty="0" err="1"/>
+              <a:t>concept</a:t>
+            </a:r>
+            <a:r>
+              <a:rPr lang="de-DE" dirty="0"/>
+              <a:t>:</a:t>
+            </a:r>
+          </a:p>
+          <a:p>
+            <a:r>
+              <a:rPr lang="de-DE" dirty="0"/>
+              <a:t>Points </a:t>
+            </a:r>
+            <a:r>
+              <a:rPr lang="de-DE" dirty="0" err="1"/>
+              <a:t>are</a:t>
+            </a:r>
+            <a:r>
+              <a:rPr lang="de-DE" dirty="0"/>
+              <a:t> </a:t>
+            </a:r>
+            <a:r>
+              <a:rPr lang="de-DE" dirty="0" err="1"/>
+              <a:t>density-connected</a:t>
+            </a:r>
+            <a:r>
+              <a:rPr lang="de-DE" dirty="0"/>
+              <a:t> </a:t>
+            </a:r>
+            <a:r>
+              <a:rPr lang="de-DE" dirty="0" err="1"/>
+              <a:t>if</a:t>
+            </a:r>
+            <a:r>
+              <a:rPr lang="de-DE" dirty="0"/>
+              <a:t> </a:t>
+            </a:r>
+            <a:r>
+              <a:rPr lang="de-DE" dirty="0" err="1"/>
+              <a:t>they</a:t>
+            </a:r>
+            <a:r>
+              <a:rPr lang="de-DE" dirty="0"/>
+              <a:t> </a:t>
+            </a:r>
+            <a:r>
+              <a:rPr lang="de-DE" dirty="0" err="1"/>
+              <a:t>can</a:t>
+            </a:r>
+            <a:r>
+              <a:rPr lang="de-DE" dirty="0"/>
+              <a:t> </a:t>
+            </a:r>
+            <a:r>
+              <a:rPr lang="de-DE" dirty="0" err="1"/>
+              <a:t>be</a:t>
+            </a:r>
+            <a:r>
+              <a:rPr lang="de-DE" dirty="0"/>
+              <a:t> </a:t>
+            </a:r>
+            <a:r>
+              <a:rPr lang="de-DE" dirty="0" err="1"/>
+              <a:t>reached</a:t>
+            </a:r>
+            <a:r>
+              <a:rPr lang="de-DE" dirty="0"/>
+              <a:t> via a </a:t>
+            </a:r>
+            <a:r>
+              <a:rPr lang="de-DE" dirty="0" err="1"/>
+              <a:t>chain</a:t>
+            </a:r>
+            <a:r>
+              <a:rPr lang="de-DE" dirty="0"/>
+              <a:t> </a:t>
+            </a:r>
+            <a:r>
+              <a:rPr lang="de-DE" dirty="0" err="1"/>
+              <a:t>of</a:t>
+            </a:r>
+            <a:r>
+              <a:rPr lang="de-DE" dirty="0"/>
+              <a:t> </a:t>
+            </a:r>
+            <a:r>
+              <a:rPr lang="de-DE" dirty="0" err="1"/>
+              <a:t>core</a:t>
+            </a:r>
+            <a:r>
+              <a:rPr lang="de-DE" dirty="0"/>
+              <a:t> </a:t>
+            </a:r>
+            <a:r>
+              <a:rPr lang="de-DE" dirty="0" err="1"/>
+              <a:t>points</a:t>
+            </a:r>
+            <a:endParaRPr lang="de-DE" dirty="0"/>
+          </a:p>
+          <a:p>
+            <a:r>
+              <a:rPr lang="de-DE" dirty="0"/>
+              <a:t>Clusters </a:t>
+            </a:r>
+            <a:r>
+              <a:rPr lang="de-DE" dirty="0" err="1"/>
+              <a:t>grow</a:t>
+            </a:r>
+            <a:r>
+              <a:rPr lang="de-DE" dirty="0"/>
+              <a:t> </a:t>
+            </a:r>
+            <a:r>
+              <a:rPr lang="de-DE" dirty="0" err="1"/>
+              <a:t>outward</a:t>
+            </a:r>
+            <a:r>
+              <a:rPr lang="de-DE" dirty="0"/>
+              <a:t> </a:t>
+            </a:r>
+            <a:r>
+              <a:rPr lang="de-DE" dirty="0" err="1"/>
+              <a:t>from</a:t>
+            </a:r>
+            <a:r>
+              <a:rPr lang="de-DE" dirty="0"/>
+              <a:t> </a:t>
+            </a:r>
+            <a:r>
+              <a:rPr lang="de-DE" dirty="0" err="1"/>
+              <a:t>core</a:t>
+            </a:r>
+            <a:r>
+              <a:rPr lang="de-DE" dirty="0"/>
+              <a:t> </a:t>
+            </a:r>
+            <a:r>
+              <a:rPr lang="de-DE" dirty="0" err="1"/>
+              <a:t>points</a:t>
+            </a:r>
+            <a:endParaRPr lang="de-DE" dirty="0"/>
+          </a:p>
+        </p:txBody>
+      </p:sp>
+      <p:sp>
+        <p:nvSpPr>
+          <p:cNvPr id="4" name="Foliennummernplatzhalter 3">
+            <a:extLst>
+              <a:ext uri="{FF2B5EF4-FFF2-40B4-BE49-F238E27FC236}">
+                <a16:creationId xmlns:a16="http://schemas.microsoft.com/office/drawing/2014/main" id="{D4A6B421-D07D-5E41-B951-5DE4AE10DC48}"/>
+              </a:ext>
+            </a:extLst>
+          </p:cNvPr>
+          <p:cNvSpPr>
+            <a:spLocks noGrp="1"/>
+          </p:cNvSpPr>
+          <p:nvPr>
+            <p:ph type="sldNum" sz="quarter" idx="12"/>
+          </p:nvPr>
+        </p:nvSpPr>
+        <p:spPr/>
+        <p:txBody>
+          <a:bodyPr/>
+          <a:lstStyle/>
+          <a:p>
+            <a:fld id="{08C366F5-AFAD-49CB-854A-9D9E238FCA13}" type="slidenum">
+              <a:rPr lang="en-GB" smtClean="0"/>
+              <a:t>32</a:t>
+            </a:fld>
+            <a:endParaRPr lang="en-GB"/>
+          </a:p>
+        </p:txBody>
+      </p:sp>
+    </p:spTree>
+    <p:extLst>
+      <p:ext uri="{BB962C8B-B14F-4D97-AF65-F5344CB8AC3E}">
+        <p14:creationId xmlns:p14="http://schemas.microsoft.com/office/powerpoint/2010/main" val="345989988"/>
+      </p:ext>
+    </p:extLst>
+  </p:cSld>
+  <p:clrMapOvr>
+    <a:masterClrMapping/>
+  </p:clrMapOvr>
+</p:sld>
+</file>
+
+<file path=ppt/slides/slide33.xml><?xml version="1.0" encoding="utf-8"?>
+<p:sld xmlns:a="http://schemas.openxmlformats.org/drawingml/2006/main" xmlns:r="http://schemas.openxmlformats.org/officeDocument/2006/relationships" xmlns:p="http://schemas.openxmlformats.org/presentationml/2006/main">
+  <p:cSld>
+    <p:spTree>
+      <p:nvGrpSpPr>
+        <p:cNvPr id="1" name=""/>
+        <p:cNvGrpSpPr/>
+        <p:nvPr/>
+      </p:nvGrpSpPr>
+      <p:grpSpPr>
+        <a:xfrm>
+          <a:off x="0" y="0"/>
+          <a:ext cx="0" cy="0"/>
+          <a:chOff x="0" y="0"/>
+          <a:chExt cx="0" cy="0"/>
+        </a:xfrm>
+      </p:grpSpPr>
+      <p:sp>
+        <p:nvSpPr>
+          <p:cNvPr id="2" name="Titel 1">
+            <a:extLst>
+              <a:ext uri="{FF2B5EF4-FFF2-40B4-BE49-F238E27FC236}">
                 <a16:creationId xmlns:a16="http://schemas.microsoft.com/office/drawing/2014/main" id="{9AD358E7-F39E-EF65-C4C0-6907CB00234F}"/>
               </a:ext>
             </a:extLst>
@@ -14009,16 +17370,512 @@
               <a:t> </a:t>
             </a:r>
             <a:r>
+              <a:rPr lang="el-GR" dirty="0">
+                <a:latin typeface="Cambria Math" panose="02040503050406030204" pitchFamily="18" charset="0"/>
+                <a:ea typeface="Cambria Math" panose="02040503050406030204" pitchFamily="18" charset="0"/>
+              </a:rPr>
+              <a:t>ε</a:t>
+            </a:r>
+            <a:r>
               <a:rPr lang="el-GR" dirty="0"/>
-              <a:t>ε </a:t>
+              <a:t> </a:t>
             </a:r>
             <a:r>
               <a:rPr lang="de-DE" dirty="0"/>
               <a:t>and </a:t>
             </a:r>
             <a:r>
-              <a:rPr lang="de-DE" dirty="0" err="1"/>
+              <a:rPr lang="de-DE" dirty="0" err="1">
+                <a:latin typeface="Cambria Math" panose="02040503050406030204" pitchFamily="18" charset="0"/>
+                <a:ea typeface="Cambria Math" panose="02040503050406030204" pitchFamily="18" charset="0"/>
+              </a:rPr>
               <a:t>min_samples</a:t>
+            </a:r>
+            <a:endParaRPr lang="de-DE" dirty="0">
+              <a:latin typeface="Cambria Math" panose="02040503050406030204" pitchFamily="18" charset="0"/>
+              <a:ea typeface="Cambria Math" panose="02040503050406030204" pitchFamily="18" charset="0"/>
+            </a:endParaRPr>
+          </a:p>
+        </p:txBody>
+      </p:sp>
+      <p:sp>
+        <p:nvSpPr>
+          <p:cNvPr id="4" name="Inhaltsplatzhalter 3">
+            <a:extLst>
+              <a:ext uri="{FF2B5EF4-FFF2-40B4-BE49-F238E27FC236}">
+                <a16:creationId xmlns:a16="http://schemas.microsoft.com/office/drawing/2014/main" id="{E4AF28DA-AC95-17F4-756E-FF4AE1F224EA}"/>
+              </a:ext>
+            </a:extLst>
+          </p:cNvPr>
+          <p:cNvSpPr>
+            <a:spLocks noGrp="1"/>
+          </p:cNvSpPr>
+          <p:nvPr>
+            <p:ph idx="1"/>
+          </p:nvPr>
+        </p:nvSpPr>
+        <p:spPr/>
+        <p:txBody>
+          <a:bodyPr>
+            <a:normAutofit fontScale="85000" lnSpcReduction="20000"/>
+          </a:bodyPr>
+          <a:lstStyle/>
+          <a:p>
+            <a:pPr marL="0" indent="0">
+              <a:buNone/>
+            </a:pPr>
+            <a:r>
+              <a:rPr lang="de-DE" dirty="0" err="1"/>
+              <a:t>Choosing</a:t>
+            </a:r>
+            <a:r>
+              <a:rPr lang="de-DE" dirty="0"/>
+              <a:t> </a:t>
+            </a:r>
+            <a:r>
+              <a:rPr lang="el-GR" dirty="0">
+                <a:latin typeface="Cambria Math" panose="02040503050406030204" pitchFamily="18" charset="0"/>
+                <a:ea typeface="Cambria Math" panose="02040503050406030204" pitchFamily="18" charset="0"/>
+              </a:rPr>
+              <a:t>ε</a:t>
+            </a:r>
+            <a:r>
+              <a:rPr lang="el-GR" dirty="0"/>
+              <a:t> (</a:t>
+            </a:r>
+            <a:r>
+              <a:rPr lang="de-DE" dirty="0" err="1"/>
+              <a:t>neighborhood</a:t>
+            </a:r>
+            <a:r>
+              <a:rPr lang="de-DE" dirty="0"/>
+              <a:t> </a:t>
+            </a:r>
+            <a:r>
+              <a:rPr lang="de-DE" dirty="0" err="1"/>
+              <a:t>radius</a:t>
+            </a:r>
+            <a:r>
+              <a:rPr lang="de-DE" dirty="0"/>
+              <a:t>)</a:t>
+            </a:r>
+          </a:p>
+          <a:p>
+            <a:r>
+              <a:rPr lang="de-DE" dirty="0" err="1"/>
+              <a:t>Too</a:t>
+            </a:r>
+            <a:r>
+              <a:rPr lang="de-DE" dirty="0"/>
+              <a:t> </a:t>
+            </a:r>
+            <a:r>
+              <a:rPr lang="de-DE" dirty="0" err="1"/>
+              <a:t>small</a:t>
+            </a:r>
+            <a:r>
+              <a:rPr lang="de-DE" dirty="0"/>
+              <a:t> </a:t>
+            </a:r>
+            <a:r>
+              <a:rPr lang="de-DE" dirty="0">
+                <a:sym typeface="Wingdings" pitchFamily="2" charset="2"/>
+              </a:rPr>
+              <a:t></a:t>
+            </a:r>
+            <a:r>
+              <a:rPr lang="de-DE" dirty="0"/>
+              <a:t> </a:t>
+            </a:r>
+            <a:r>
+              <a:rPr lang="de-DE" dirty="0" err="1"/>
+              <a:t>many</a:t>
+            </a:r>
+            <a:r>
+              <a:rPr lang="de-DE" dirty="0"/>
+              <a:t> </a:t>
+            </a:r>
+            <a:r>
+              <a:rPr lang="de-DE" dirty="0" err="1"/>
+              <a:t>points</a:t>
+            </a:r>
+            <a:r>
+              <a:rPr lang="de-DE" dirty="0"/>
+              <a:t> </a:t>
+            </a:r>
+            <a:r>
+              <a:rPr lang="de-DE" dirty="0" err="1"/>
+              <a:t>labeled</a:t>
+            </a:r>
+            <a:r>
+              <a:rPr lang="de-DE" dirty="0"/>
+              <a:t> </a:t>
+            </a:r>
+            <a:r>
+              <a:rPr lang="de-DE" dirty="0" err="1"/>
+              <a:t>as</a:t>
+            </a:r>
+            <a:r>
+              <a:rPr lang="de-DE" dirty="0"/>
+              <a:t> </a:t>
+            </a:r>
+            <a:r>
+              <a:rPr lang="de-DE" dirty="0" err="1"/>
+              <a:t>noise</a:t>
+            </a:r>
+            <a:endParaRPr lang="de-DE" dirty="0"/>
+          </a:p>
+          <a:p>
+            <a:r>
+              <a:rPr lang="de-DE" dirty="0" err="1"/>
+              <a:t>Too</a:t>
+            </a:r>
+            <a:r>
+              <a:rPr lang="de-DE" dirty="0"/>
+              <a:t> large </a:t>
+            </a:r>
+            <a:r>
+              <a:rPr lang="de-DE" dirty="0">
+                <a:sym typeface="Wingdings" pitchFamily="2" charset="2"/>
+              </a:rPr>
+              <a:t></a:t>
+            </a:r>
+            <a:r>
+              <a:rPr lang="de-DE" dirty="0"/>
+              <a:t> </a:t>
+            </a:r>
+            <a:r>
+              <a:rPr lang="de-DE" dirty="0" err="1"/>
+              <a:t>clusters</a:t>
+            </a:r>
+            <a:r>
+              <a:rPr lang="de-DE" dirty="0"/>
+              <a:t> </a:t>
+            </a:r>
+            <a:r>
+              <a:rPr lang="de-DE" dirty="0" err="1"/>
+              <a:t>merge</a:t>
+            </a:r>
+            <a:endParaRPr lang="de-DE" dirty="0"/>
+          </a:p>
+          <a:p>
+            <a:r>
+              <a:rPr lang="de-DE" dirty="0" err="1"/>
+              <a:t>Heuristic</a:t>
+            </a:r>
+            <a:r>
+              <a:rPr lang="de-DE" dirty="0"/>
+              <a:t>: </a:t>
+            </a:r>
+            <a:r>
+              <a:rPr lang="de-DE" dirty="0" err="1"/>
+              <a:t>use</a:t>
+            </a:r>
+            <a:r>
+              <a:rPr lang="de-DE" dirty="0"/>
+              <a:t> </a:t>
+            </a:r>
+            <a:r>
+              <a:rPr lang="de-DE" dirty="0" err="1"/>
+              <a:t>k-distance</a:t>
+            </a:r>
+            <a:r>
+              <a:rPr lang="de-DE" dirty="0"/>
+              <a:t> </a:t>
+            </a:r>
+            <a:r>
+              <a:rPr lang="de-DE" dirty="0" err="1"/>
+              <a:t>graph</a:t>
+            </a:r>
+            <a:r>
+              <a:rPr lang="de-DE" dirty="0"/>
+              <a:t>, </a:t>
+            </a:r>
+            <a:r>
+              <a:rPr lang="de-DE" dirty="0" err="1"/>
+              <a:t>look</a:t>
+            </a:r>
+            <a:r>
+              <a:rPr lang="de-DE" dirty="0"/>
+              <a:t> </a:t>
+            </a:r>
+            <a:r>
+              <a:rPr lang="de-DE" dirty="0" err="1"/>
+              <a:t>for</a:t>
+            </a:r>
+            <a:r>
+              <a:rPr lang="de-DE" dirty="0"/>
+              <a:t> “</a:t>
+            </a:r>
+            <a:r>
+              <a:rPr lang="de-DE" dirty="0" err="1"/>
+              <a:t>elbow</a:t>
+            </a:r>
+            <a:r>
+              <a:rPr lang="de-DE" dirty="0"/>
+              <a:t>” </a:t>
+            </a:r>
+            <a:r>
+              <a:rPr lang="de-DE" dirty="0" err="1"/>
+              <a:t>point</a:t>
+            </a:r>
+            <a:endParaRPr lang="de-DE" dirty="0"/>
+          </a:p>
+          <a:p>
+            <a:pPr marL="0" indent="0">
+              <a:buNone/>
+            </a:pPr>
+            <a:endParaRPr lang="de-DE" dirty="0"/>
+          </a:p>
+          <a:p>
+            <a:pPr marL="0" indent="0">
+              <a:buNone/>
+            </a:pPr>
+            <a:r>
+              <a:rPr lang="de-DE" dirty="0" err="1"/>
+              <a:t>Typical</a:t>
+            </a:r>
+            <a:r>
+              <a:rPr lang="de-DE" dirty="0"/>
+              <a:t> </a:t>
+            </a:r>
+            <a:r>
+              <a:rPr lang="de-DE" dirty="0" err="1"/>
+              <a:t>values</a:t>
+            </a:r>
+            <a:r>
+              <a:rPr lang="de-DE" dirty="0"/>
+              <a:t> </a:t>
+            </a:r>
+            <a:r>
+              <a:rPr lang="de-DE" dirty="0" err="1">
+                <a:latin typeface="Cambria Math" panose="02040503050406030204" pitchFamily="18" charset="0"/>
+                <a:ea typeface="Cambria Math" panose="02040503050406030204" pitchFamily="18" charset="0"/>
+              </a:rPr>
+              <a:t>min_samples</a:t>
+            </a:r>
+            <a:r>
+              <a:rPr lang="de-DE" dirty="0"/>
+              <a:t> (</a:t>
+            </a:r>
+            <a:r>
+              <a:rPr lang="de-DE" dirty="0" err="1"/>
+              <a:t>minimum</a:t>
+            </a:r>
+            <a:r>
+              <a:rPr lang="de-DE" dirty="0"/>
+              <a:t> </a:t>
+            </a:r>
+            <a:r>
+              <a:rPr lang="de-DE" dirty="0" err="1"/>
+              <a:t>points</a:t>
+            </a:r>
+            <a:r>
+              <a:rPr lang="de-DE" dirty="0"/>
+              <a:t> </a:t>
+            </a:r>
+            <a:r>
+              <a:rPr lang="de-DE" dirty="0" err="1"/>
+              <a:t>for</a:t>
+            </a:r>
+            <a:r>
+              <a:rPr lang="de-DE" dirty="0"/>
+              <a:t> </a:t>
+            </a:r>
+            <a:r>
+              <a:rPr lang="de-DE" dirty="0" err="1"/>
+              <a:t>density</a:t>
+            </a:r>
+            <a:r>
+              <a:rPr lang="de-DE" dirty="0"/>
+              <a:t>)</a:t>
+            </a:r>
+          </a:p>
+          <a:p>
+            <a:r>
+              <a:rPr lang="de-DE" dirty="0">
+                <a:latin typeface="Cambria Math" panose="02040503050406030204" pitchFamily="18" charset="0"/>
+                <a:ea typeface="Cambria Math" panose="02040503050406030204" pitchFamily="18" charset="0"/>
+              </a:rPr>
+              <a:t>4</a:t>
+            </a:r>
+            <a:r>
+              <a:rPr lang="de-DE" dirty="0"/>
+              <a:t> (</a:t>
+            </a:r>
+            <a:r>
+              <a:rPr lang="de-DE" dirty="0" err="1"/>
+              <a:t>low</a:t>
+            </a:r>
+            <a:r>
+              <a:rPr lang="de-DE" dirty="0"/>
+              <a:t>-dimensional </a:t>
+            </a:r>
+            <a:r>
+              <a:rPr lang="de-DE" dirty="0" err="1"/>
+              <a:t>data</a:t>
+            </a:r>
+            <a:r>
+              <a:rPr lang="de-DE" dirty="0"/>
+              <a:t>)</a:t>
+            </a:r>
+          </a:p>
+          <a:p>
+            <a:r>
+              <a:rPr lang="de-DE" dirty="0"/>
+              <a:t>Higher </a:t>
+            </a:r>
+            <a:r>
+              <a:rPr lang="de-DE" dirty="0" err="1"/>
+              <a:t>for</a:t>
+            </a:r>
+            <a:r>
+              <a:rPr lang="de-DE" dirty="0"/>
+              <a:t> high-dimensional </a:t>
+            </a:r>
+            <a:r>
+              <a:rPr lang="de-DE" dirty="0" err="1"/>
+              <a:t>data</a:t>
+            </a:r>
+            <a:endParaRPr lang="de-DE" dirty="0"/>
+          </a:p>
+          <a:p>
+            <a:r>
+              <a:rPr lang="de-DE" dirty="0"/>
+              <a:t>Guideline: </a:t>
+            </a:r>
+            <a:r>
+              <a:rPr lang="de-DE" dirty="0" err="1">
+                <a:latin typeface="Cambria Math" panose="02040503050406030204" pitchFamily="18" charset="0"/>
+                <a:ea typeface="Cambria Math" panose="02040503050406030204" pitchFamily="18" charset="0"/>
+              </a:rPr>
+              <a:t>min_samples</a:t>
+            </a:r>
+            <a:r>
+              <a:rPr lang="de-DE" dirty="0">
+                <a:latin typeface="Cambria Math" panose="02040503050406030204" pitchFamily="18" charset="0"/>
+                <a:ea typeface="Cambria Math" panose="02040503050406030204" pitchFamily="18" charset="0"/>
+              </a:rPr>
+              <a:t> ≥ </a:t>
+            </a:r>
+            <a:r>
+              <a:rPr lang="de-DE" dirty="0" err="1">
+                <a:latin typeface="Cambria Math" panose="02040503050406030204" pitchFamily="18" charset="0"/>
+                <a:ea typeface="Cambria Math" panose="02040503050406030204" pitchFamily="18" charset="0"/>
+              </a:rPr>
+              <a:t>dimensionality</a:t>
+            </a:r>
+            <a:r>
+              <a:rPr lang="de-DE" dirty="0">
+                <a:latin typeface="Cambria Math" panose="02040503050406030204" pitchFamily="18" charset="0"/>
+                <a:ea typeface="Cambria Math" panose="02040503050406030204" pitchFamily="18" charset="0"/>
+              </a:rPr>
+              <a:t> + 1</a:t>
+            </a:r>
+          </a:p>
+          <a:p>
+            <a:pPr marL="0" indent="0">
+              <a:buNone/>
+            </a:pPr>
+            <a:endParaRPr lang="de-DE" dirty="0"/>
+          </a:p>
+          <a:p>
+            <a:pPr marL="0" indent="0">
+              <a:buNone/>
+            </a:pPr>
+            <a:r>
+              <a:rPr lang="el-GR" dirty="0">
+                <a:latin typeface="Cambria Math" panose="02040503050406030204" pitchFamily="18" charset="0"/>
+                <a:ea typeface="Cambria Math" panose="02040503050406030204" pitchFamily="18" charset="0"/>
+              </a:rPr>
+              <a:t>ε</a:t>
+            </a:r>
+            <a:r>
+              <a:rPr lang="el-GR" dirty="0"/>
+              <a:t> </a:t>
+            </a:r>
+            <a:r>
+              <a:rPr lang="de-DE" dirty="0"/>
+              <a:t>and </a:t>
+            </a:r>
+            <a:r>
+              <a:rPr lang="de-DE" dirty="0" err="1">
+                <a:latin typeface="Cambria Math" panose="02040503050406030204" pitchFamily="18" charset="0"/>
+                <a:ea typeface="Cambria Math" panose="02040503050406030204" pitchFamily="18" charset="0"/>
+              </a:rPr>
+              <a:t>min_samples</a:t>
+            </a:r>
+            <a:r>
+              <a:rPr lang="de-DE" dirty="0"/>
+              <a:t> </a:t>
+            </a:r>
+            <a:r>
+              <a:rPr lang="de-DE" dirty="0" err="1"/>
+              <a:t>strongly</a:t>
+            </a:r>
+            <a:r>
+              <a:rPr lang="de-DE" dirty="0"/>
+              <a:t> </a:t>
+            </a:r>
+            <a:r>
+              <a:rPr lang="de-DE" dirty="0" err="1"/>
+              <a:t>affect</a:t>
+            </a:r>
+            <a:r>
+              <a:rPr lang="de-DE" dirty="0"/>
+              <a:t> </a:t>
+            </a:r>
+            <a:r>
+              <a:rPr lang="de-DE" dirty="0" err="1"/>
+              <a:t>results</a:t>
+            </a:r>
+            <a:r>
+              <a:rPr lang="de-DE" dirty="0"/>
+              <a:t> </a:t>
+            </a:r>
+            <a:r>
+              <a:rPr lang="de-DE" dirty="0">
+                <a:sym typeface="Wingdings" pitchFamily="2" charset="2"/>
+              </a:rPr>
+              <a:t> </a:t>
+            </a:r>
+            <a:r>
+              <a:rPr lang="de-DE" dirty="0" err="1">
+                <a:sym typeface="Wingdings" pitchFamily="2" charset="2"/>
+              </a:rPr>
+              <a:t>tuning</a:t>
+            </a:r>
+            <a:r>
+              <a:rPr lang="de-DE" dirty="0">
+                <a:sym typeface="Wingdings" pitchFamily="2" charset="2"/>
+              </a:rPr>
+              <a:t> and </a:t>
+            </a:r>
+            <a:r>
+              <a:rPr lang="de-DE" dirty="0" err="1">
+                <a:sym typeface="Wingdings" pitchFamily="2" charset="2"/>
+              </a:rPr>
+              <a:t>d</a:t>
+            </a:r>
+            <a:r>
+              <a:rPr lang="de-DE" dirty="0" err="1"/>
+              <a:t>ata</a:t>
+            </a:r>
+            <a:r>
+              <a:rPr lang="de-DE" dirty="0"/>
+              <a:t> </a:t>
+            </a:r>
+            <a:r>
+              <a:rPr lang="de-DE" dirty="0" err="1"/>
+              <a:t>scaling</a:t>
+            </a:r>
+            <a:r>
+              <a:rPr lang="de-DE" dirty="0"/>
+              <a:t> </a:t>
+            </a:r>
+            <a:r>
+              <a:rPr lang="de-DE" dirty="0" err="1"/>
+              <a:t>matters</a:t>
             </a:r>
             <a:endParaRPr lang="de-DE" dirty="0"/>
           </a:p>
@@ -14047,7 +17904,7 @@
           <a:p>
             <a:fld id="{08C366F5-AFAD-49CB-854A-9D9E238FCA13}" type="slidenum">
               <a:rPr lang="en-GB" smtClean="0"/>
-              <a:t>30</a:t>
+              <a:t>33</a:t>
             </a:fld>
             <a:endParaRPr lang="en-GB"/>
           </a:p>
@@ -14066,7 +17923,7 @@
 </p:sld>
 </file>
 
-<file path=ppt/slides/slide31.xml><?xml version="1.0" encoding="utf-8"?>
+<file path=ppt/slides/slide34.xml><?xml version="1.0" encoding="utf-8"?>
 <p:sld xmlns:a="http://schemas.openxmlformats.org/drawingml/2006/main" xmlns:r="http://schemas.openxmlformats.org/officeDocument/2006/relationships" xmlns:p="http://schemas.openxmlformats.org/presentationml/2006/main">
   <p:cSld>
     <p:spTree>
@@ -14117,6 +17974,394 @@
       </p:sp>
       <p:sp>
         <p:nvSpPr>
+          <p:cNvPr id="5" name="Inhaltsplatzhalter 4">
+            <a:extLst>
+              <a:ext uri="{FF2B5EF4-FFF2-40B4-BE49-F238E27FC236}">
+                <a16:creationId xmlns:a16="http://schemas.microsoft.com/office/drawing/2014/main" id="{403B17D7-2EA9-DC24-B9E5-1139CCEB955F}"/>
+              </a:ext>
+            </a:extLst>
+          </p:cNvPr>
+          <p:cNvSpPr>
+            <a:spLocks noGrp="1"/>
+          </p:cNvSpPr>
+          <p:nvPr>
+            <p:ph idx="1"/>
+          </p:nvPr>
+        </p:nvSpPr>
+        <p:spPr>
+          <a:xfrm>
+            <a:off x="8076841" y="1492595"/>
+            <a:ext cx="4115159" cy="4863755"/>
+          </a:xfrm>
+        </p:spPr>
+        <p:txBody>
+          <a:bodyPr>
+            <a:normAutofit fontScale="70000" lnSpcReduction="20000"/>
+          </a:bodyPr>
+          <a:lstStyle/>
+          <a:p>
+            <a:pPr marL="0" indent="0">
+              <a:buNone/>
+            </a:pPr>
+            <a:r>
+              <a:rPr lang="de-DE" dirty="0"/>
+              <a:t>Different </a:t>
+            </a:r>
+            <a:r>
+              <a:rPr lang="de-DE" dirty="0" err="1"/>
+              <a:t>algorithms</a:t>
+            </a:r>
+            <a:r>
+              <a:rPr lang="de-DE" dirty="0"/>
+              <a:t> </a:t>
+            </a:r>
+            <a:r>
+              <a:rPr lang="de-DE" dirty="0" err="1"/>
+              <a:t>suit</a:t>
+            </a:r>
+            <a:r>
+              <a:rPr lang="de-DE" dirty="0"/>
+              <a:t> different </a:t>
+            </a:r>
+            <a:r>
+              <a:rPr lang="de-DE" dirty="0" err="1"/>
+              <a:t>data</a:t>
+            </a:r>
+            <a:r>
+              <a:rPr lang="de-DE" dirty="0"/>
+              <a:t> </a:t>
+            </a:r>
+            <a:r>
+              <a:rPr lang="de-DE" dirty="0">
+                <a:sym typeface="Wingdings" pitchFamily="2" charset="2"/>
+              </a:rPr>
+              <a:t> </a:t>
+            </a:r>
+            <a:r>
+              <a:rPr lang="de-DE" dirty="0" err="1">
+                <a:sym typeface="Wingdings" pitchFamily="2" charset="2"/>
+              </a:rPr>
+              <a:t>n</a:t>
+            </a:r>
+            <a:r>
+              <a:rPr lang="de-DE" dirty="0" err="1"/>
+              <a:t>o</a:t>
+            </a:r>
+            <a:r>
+              <a:rPr lang="de-DE" dirty="0"/>
+              <a:t> </a:t>
+            </a:r>
+            <a:r>
+              <a:rPr lang="de-DE" dirty="0" err="1"/>
+              <a:t>single</a:t>
+            </a:r>
+            <a:r>
+              <a:rPr lang="de-DE" dirty="0"/>
+              <a:t> </a:t>
+            </a:r>
+            <a:r>
+              <a:rPr lang="de-DE" dirty="0" err="1"/>
+              <a:t>best</a:t>
+            </a:r>
+            <a:r>
+              <a:rPr lang="de-DE" dirty="0"/>
+              <a:t> </a:t>
+            </a:r>
+            <a:r>
+              <a:rPr lang="de-DE" dirty="0" err="1"/>
+              <a:t>method</a:t>
+            </a:r>
+            <a:endParaRPr lang="de-DE" dirty="0"/>
+          </a:p>
+          <a:p>
+            <a:pPr marL="0" indent="0">
+              <a:buNone/>
+            </a:pPr>
+            <a:endParaRPr lang="de-DE" dirty="0"/>
+          </a:p>
+          <a:p>
+            <a:pPr marL="0" indent="0">
+              <a:buNone/>
+            </a:pPr>
+            <a:r>
+              <a:rPr lang="de-DE" dirty="0" err="1"/>
+              <a:t>Practical</a:t>
+            </a:r>
+            <a:r>
+              <a:rPr lang="de-DE" dirty="0"/>
+              <a:t> </a:t>
+            </a:r>
+            <a:r>
+              <a:rPr lang="de-DE" dirty="0" err="1"/>
+              <a:t>guidance</a:t>
+            </a:r>
+            <a:r>
+              <a:rPr lang="de-DE" dirty="0"/>
+              <a:t>:</a:t>
+            </a:r>
+          </a:p>
+          <a:p>
+            <a:r>
+              <a:rPr lang="de-DE" dirty="0" err="1"/>
+              <a:t>k-Means</a:t>
+            </a:r>
+            <a:r>
+              <a:rPr lang="de-DE" dirty="0"/>
+              <a:t> </a:t>
+            </a:r>
+            <a:r>
+              <a:rPr lang="de-DE" dirty="0" err="1"/>
+              <a:t>if</a:t>
+            </a:r>
+            <a:r>
+              <a:rPr lang="de-DE" dirty="0"/>
+              <a:t> </a:t>
+            </a:r>
+            <a:r>
+              <a:rPr lang="de-DE" dirty="0" err="1"/>
+              <a:t>clusters</a:t>
+            </a:r>
+            <a:r>
+              <a:rPr lang="de-DE" dirty="0"/>
+              <a:t> </a:t>
+            </a:r>
+            <a:r>
+              <a:rPr lang="de-DE" dirty="0" err="1"/>
+              <a:t>are</a:t>
+            </a:r>
+            <a:r>
+              <a:rPr lang="de-DE" dirty="0"/>
+              <a:t> </a:t>
+            </a:r>
+            <a:r>
+              <a:rPr lang="de-DE" dirty="0" err="1"/>
+              <a:t>compact</a:t>
+            </a:r>
+            <a:r>
+              <a:rPr lang="de-DE" dirty="0"/>
+              <a:t> and </a:t>
+            </a:r>
+            <a:r>
+              <a:rPr lang="de-DE" dirty="0" err="1"/>
+              <a:t>known</a:t>
+            </a:r>
+            <a:endParaRPr lang="de-DE" dirty="0"/>
+          </a:p>
+          <a:p>
+            <a:r>
+              <a:rPr lang="de-DE" dirty="0" err="1"/>
+              <a:t>Hierarchical</a:t>
+            </a:r>
+            <a:r>
+              <a:rPr lang="de-DE" dirty="0"/>
+              <a:t> </a:t>
+            </a:r>
+            <a:r>
+              <a:rPr lang="de-DE" dirty="0" err="1"/>
+              <a:t>if</a:t>
+            </a:r>
+            <a:r>
+              <a:rPr lang="de-DE" dirty="0"/>
+              <a:t> </a:t>
+            </a:r>
+            <a:r>
+              <a:rPr lang="de-DE" dirty="0" err="1"/>
+              <a:t>structure</a:t>
+            </a:r>
+            <a:r>
+              <a:rPr lang="de-DE" dirty="0"/>
+              <a:t> and </a:t>
+            </a:r>
+            <a:r>
+              <a:rPr lang="de-DE" dirty="0" err="1"/>
+              <a:t>interpretability</a:t>
+            </a:r>
+            <a:r>
+              <a:rPr lang="de-DE" dirty="0"/>
+              <a:t> </a:t>
+            </a:r>
+            <a:r>
+              <a:rPr lang="de-DE" dirty="0" err="1"/>
+              <a:t>is</a:t>
+            </a:r>
+            <a:r>
+              <a:rPr lang="de-DE" dirty="0"/>
+              <a:t> </a:t>
+            </a:r>
+            <a:r>
+              <a:rPr lang="de-DE" dirty="0" err="1"/>
+              <a:t>needed</a:t>
+            </a:r>
+            <a:endParaRPr lang="de-DE" dirty="0"/>
+          </a:p>
+          <a:p>
+            <a:r>
+              <a:rPr lang="de-DE" dirty="0"/>
+              <a:t>DBSCAN </a:t>
+            </a:r>
+            <a:r>
+              <a:rPr lang="de-DE" dirty="0" err="1"/>
+              <a:t>if</a:t>
+            </a:r>
+            <a:r>
+              <a:rPr lang="de-DE" dirty="0"/>
+              <a:t> </a:t>
+            </a:r>
+            <a:r>
+              <a:rPr lang="de-DE" dirty="0" err="1"/>
+              <a:t>data</a:t>
+            </a:r>
+            <a:r>
+              <a:rPr lang="de-DE" dirty="0"/>
+              <a:t> </a:t>
+            </a:r>
+            <a:r>
+              <a:rPr lang="de-DE" dirty="0" err="1"/>
+              <a:t>has</a:t>
+            </a:r>
+            <a:r>
+              <a:rPr lang="de-DE" dirty="0"/>
+              <a:t> </a:t>
+            </a:r>
+            <a:r>
+              <a:rPr lang="de-DE" dirty="0" err="1"/>
+              <a:t>noise</a:t>
+            </a:r>
+            <a:r>
+              <a:rPr lang="de-DE" dirty="0"/>
+              <a:t> </a:t>
+            </a:r>
+            <a:r>
+              <a:rPr lang="de-DE" dirty="0" err="1"/>
+              <a:t>or</a:t>
+            </a:r>
+            <a:r>
+              <a:rPr lang="de-DE" dirty="0"/>
+              <a:t> </a:t>
+            </a:r>
+            <a:r>
+              <a:rPr lang="de-DE" dirty="0" err="1"/>
+              <a:t>complex</a:t>
+            </a:r>
+            <a:r>
+              <a:rPr lang="de-DE" dirty="0"/>
+              <a:t> </a:t>
+            </a:r>
+            <a:r>
+              <a:rPr lang="de-DE" dirty="0" err="1"/>
+              <a:t>shapes</a:t>
+            </a:r>
+            <a:endParaRPr lang="de-DE" dirty="0"/>
+          </a:p>
+          <a:p>
+            <a:pPr marL="0" indent="0">
+              <a:buNone/>
+            </a:pPr>
+            <a:endParaRPr lang="de-DE" dirty="0"/>
+          </a:p>
+          <a:p>
+            <a:pPr marL="0" indent="0">
+              <a:buNone/>
+            </a:pPr>
+            <a:r>
+              <a:rPr lang="de-DE" dirty="0" err="1"/>
+              <a:t>What</a:t>
+            </a:r>
+            <a:r>
+              <a:rPr lang="de-DE" dirty="0"/>
+              <a:t> </a:t>
+            </a:r>
+            <a:r>
+              <a:rPr lang="de-DE" dirty="0" err="1"/>
+              <a:t>affects</a:t>
+            </a:r>
+            <a:r>
+              <a:rPr lang="de-DE" dirty="0"/>
+              <a:t> </a:t>
+            </a:r>
+            <a:r>
+              <a:rPr lang="de-DE" dirty="0" err="1"/>
+              <a:t>results</a:t>
+            </a:r>
+            <a:r>
+              <a:rPr lang="de-DE" dirty="0"/>
+              <a:t>?</a:t>
+            </a:r>
+          </a:p>
+          <a:p>
+            <a:r>
+              <a:rPr lang="de-DE" dirty="0" err="1"/>
+              <a:t>k-Means</a:t>
+            </a:r>
+            <a:r>
+              <a:rPr lang="de-DE" dirty="0"/>
+              <a:t>: initial </a:t>
+            </a:r>
+            <a:r>
+              <a:rPr lang="de-DE" dirty="0" err="1"/>
+              <a:t>centroids</a:t>
+            </a:r>
+            <a:endParaRPr lang="de-DE" dirty="0"/>
+          </a:p>
+          <a:p>
+            <a:r>
+              <a:rPr lang="de-DE" dirty="0" err="1"/>
+              <a:t>Hierarchical</a:t>
+            </a:r>
+            <a:r>
+              <a:rPr lang="de-DE" dirty="0"/>
+              <a:t>: </a:t>
+            </a:r>
+            <a:r>
+              <a:rPr lang="de-DE" dirty="0" err="1"/>
+              <a:t>linkage</a:t>
+            </a:r>
+            <a:r>
+              <a:rPr lang="de-DE" dirty="0"/>
+              <a:t> </a:t>
+            </a:r>
+            <a:r>
+              <a:rPr lang="de-DE" dirty="0" err="1"/>
+              <a:t>method</a:t>
+            </a:r>
+            <a:endParaRPr lang="de-DE" dirty="0"/>
+          </a:p>
+          <a:p>
+            <a:r>
+              <a:rPr lang="de-DE" dirty="0"/>
+              <a:t>DBSCAN: </a:t>
+            </a:r>
+            <a:r>
+              <a:rPr lang="el-GR" dirty="0">
+                <a:latin typeface="Cambria Math" panose="02040503050406030204" pitchFamily="18" charset="0"/>
+                <a:ea typeface="Cambria Math" panose="02040503050406030204" pitchFamily="18" charset="0"/>
+              </a:rPr>
+              <a:t>ε</a:t>
+            </a:r>
+            <a:r>
+              <a:rPr lang="el-GR" dirty="0"/>
+              <a:t> </a:t>
+            </a:r>
+            <a:r>
+              <a:rPr lang="de-DE" dirty="0"/>
+              <a:t>and </a:t>
+            </a:r>
+            <a:r>
+              <a:rPr lang="de-DE" dirty="0" err="1">
+                <a:latin typeface="Cambria Math" panose="02040503050406030204" pitchFamily="18" charset="0"/>
+                <a:ea typeface="Cambria Math" panose="02040503050406030204" pitchFamily="18" charset="0"/>
+              </a:rPr>
+              <a:t>min_samples</a:t>
+            </a:r>
+            <a:endParaRPr lang="de-DE" dirty="0">
+              <a:latin typeface="Cambria Math" panose="02040503050406030204" pitchFamily="18" charset="0"/>
+              <a:ea typeface="Cambria Math" panose="02040503050406030204" pitchFamily="18" charset="0"/>
+            </a:endParaRPr>
+          </a:p>
+        </p:txBody>
+      </p:sp>
+      <p:sp>
+        <p:nvSpPr>
           <p:cNvPr id="3" name="Foliennummernplatzhalter 2">
             <a:extLst>
               <a:ext uri="{FF2B5EF4-FFF2-40B4-BE49-F238E27FC236}">
@@ -14138,7 +18383,217 @@
           <a:p>
             <a:fld id="{08C366F5-AFAD-49CB-854A-9D9E238FCA13}" type="slidenum">
               <a:rPr lang="en-GB" smtClean="0"/>
-              <a:t>31</a:t>
+              <a:t>34</a:t>
+            </a:fld>
+            <a:endParaRPr lang="en-GB"/>
+          </a:p>
+        </p:txBody>
+      </p:sp>
+      <p:pic>
+        <p:nvPicPr>
+          <p:cNvPr id="4" name="Picture 2" descr="MiniBatch KMeans, Affinity Propagation, MeanShift, Spectral Clustering, Ward, Agglomerative Clustering, DBSCAN, HDBSCAN, OPTICS, BIRCH, Gaussian Mixture">
+            <a:extLst>
+              <a:ext uri="{FF2B5EF4-FFF2-40B4-BE49-F238E27FC236}">
+                <a16:creationId xmlns:a16="http://schemas.microsoft.com/office/drawing/2014/main" id="{5A730511-A7F9-E57C-2E0C-B6C2442784C9}"/>
+              </a:ext>
+            </a:extLst>
+          </p:cNvPr>
+          <p:cNvPicPr>
+            <a:picLocks noChangeAspect="1" noChangeArrowheads="1"/>
+          </p:cNvPicPr>
+          <p:nvPr/>
+        </p:nvPicPr>
+        <p:blipFill>
+          <a:blip r:embed="rId2">
+            <a:extLst>
+              <a:ext uri="{28A0092B-C50C-407E-A947-70E740481C1C}">
+                <a14:useLocalDpi xmlns:a14="http://schemas.microsoft.com/office/drawing/2010/main" val="0"/>
+              </a:ext>
+            </a:extLst>
+          </a:blip>
+          <a:srcRect/>
+          <a:stretch>
+            <a:fillRect/>
+          </a:stretch>
+        </p:blipFill>
+        <p:spPr bwMode="auto">
+          <a:xfrm>
+            <a:off x="0" y="1492595"/>
+            <a:ext cx="8076841" cy="5000280"/>
+          </a:xfrm>
+          <a:prstGeom prst="rect">
+            <a:avLst/>
+          </a:prstGeom>
+          <a:noFill/>
+          <a:extLst>
+            <a:ext uri="{909E8E84-426E-40DD-AFC4-6F175D3DCCD1}">
+              <a14:hiddenFill xmlns:a14="http://schemas.microsoft.com/office/drawing/2010/main">
+                <a:solidFill>
+                  <a:srgbClr val="FFFFFF"/>
+                </a:solidFill>
+              </a14:hiddenFill>
+            </a:ext>
+          </a:extLst>
+        </p:spPr>
+      </p:pic>
+    </p:spTree>
+    <p:extLst>
+      <p:ext uri="{BB962C8B-B14F-4D97-AF65-F5344CB8AC3E}">
+        <p14:creationId xmlns:p14="http://schemas.microsoft.com/office/powerpoint/2010/main" val="2928299488"/>
+      </p:ext>
+    </p:extLst>
+  </p:cSld>
+  <p:clrMapOvr>
+    <a:masterClrMapping/>
+  </p:clrMapOvr>
+</p:sld>
+</file>
+
+<file path=ppt/slides/slide35.xml><?xml version="1.0" encoding="utf-8"?>
+<p:sld xmlns:a="http://schemas.openxmlformats.org/drawingml/2006/main" xmlns:r="http://schemas.openxmlformats.org/officeDocument/2006/relationships" xmlns:p="http://schemas.openxmlformats.org/presentationml/2006/main">
+  <p:cSld>
+    <p:spTree>
+      <p:nvGrpSpPr>
+        <p:cNvPr id="1" name="">
+          <a:extLst>
+            <a:ext uri="{FF2B5EF4-FFF2-40B4-BE49-F238E27FC236}">
+              <a16:creationId xmlns:a16="http://schemas.microsoft.com/office/drawing/2014/main" id="{CB00C5E9-3765-EE2A-7DFF-13E5F7EA431F}"/>
+            </a:ext>
+          </a:extLst>
+        </p:cNvPr>
+        <p:cNvGrpSpPr/>
+        <p:nvPr/>
+      </p:nvGrpSpPr>
+      <p:grpSpPr>
+        <a:xfrm>
+          <a:off x="0" y="0"/>
+          <a:ext cx="0" cy="0"/>
+          <a:chOff x="0" y="0"/>
+          <a:chExt cx="0" cy="0"/>
+        </a:xfrm>
+      </p:grpSpPr>
+      <p:sp>
+        <p:nvSpPr>
+          <p:cNvPr id="2" name="Titel 1">
+            <a:extLst>
+              <a:ext uri="{FF2B5EF4-FFF2-40B4-BE49-F238E27FC236}">
+                <a16:creationId xmlns:a16="http://schemas.microsoft.com/office/drawing/2014/main" id="{3F8DE861-6867-FA20-1E8C-02A7DCD9C0B2}"/>
+              </a:ext>
+            </a:extLst>
+          </p:cNvPr>
+          <p:cNvSpPr>
+            <a:spLocks noGrp="1"/>
+          </p:cNvSpPr>
+          <p:nvPr>
+            <p:ph type="title"/>
+          </p:nvPr>
+        </p:nvSpPr>
+        <p:spPr/>
+        <p:txBody>
+          <a:bodyPr/>
+          <a:lstStyle/>
+          <a:p>
+            <a:r>
+              <a:rPr lang="de-DE" dirty="0"/>
+              <a:t>Practice Project</a:t>
+            </a:r>
+          </a:p>
+        </p:txBody>
+      </p:sp>
+      <p:sp>
+        <p:nvSpPr>
+          <p:cNvPr id="4" name="Inhaltsplatzhalter 3">
+            <a:extLst>
+              <a:ext uri="{FF2B5EF4-FFF2-40B4-BE49-F238E27FC236}">
+                <a16:creationId xmlns:a16="http://schemas.microsoft.com/office/drawing/2014/main" id="{276E0A6B-1BDF-FD30-67E7-B5624AD47587}"/>
+              </a:ext>
+            </a:extLst>
+          </p:cNvPr>
+          <p:cNvSpPr>
+            <a:spLocks noGrp="1"/>
+          </p:cNvSpPr>
+          <p:nvPr>
+            <p:ph idx="1"/>
+          </p:nvPr>
+        </p:nvSpPr>
+        <p:spPr/>
+        <p:txBody>
+          <a:bodyPr/>
+          <a:lstStyle/>
+          <a:p>
+            <a:pPr marL="0" indent="0">
+              <a:buNone/>
+            </a:pPr>
+            <a:endParaRPr lang="de-DE" dirty="0"/>
+          </a:p>
+          <a:p>
+            <a:pPr marL="0" indent="0">
+              <a:buNone/>
+            </a:pPr>
+            <a:endParaRPr lang="de-DE" dirty="0"/>
+          </a:p>
+          <a:p>
+            <a:pPr marL="0" indent="0">
+              <a:buNone/>
+            </a:pPr>
+            <a:r>
+              <a:rPr lang="de-DE" dirty="0" err="1"/>
+              <a:t>Compare</a:t>
+            </a:r>
+            <a:r>
+              <a:rPr lang="de-DE" dirty="0"/>
+              <a:t> different </a:t>
+            </a:r>
+            <a:r>
+              <a:rPr lang="de-DE" dirty="0" err="1"/>
+              <a:t>clustering</a:t>
+            </a:r>
+            <a:r>
+              <a:rPr lang="de-DE" dirty="0"/>
+              <a:t> </a:t>
+            </a:r>
+            <a:r>
+              <a:rPr lang="de-DE" dirty="0" err="1"/>
+              <a:t>methods</a:t>
+            </a:r>
+            <a:r>
+              <a:rPr lang="de-DE" dirty="0"/>
+              <a:t> on </a:t>
+            </a:r>
+            <a:r>
+              <a:rPr lang="de-DE" dirty="0">
+                <a:hlinkClick r:id="rId2"/>
+              </a:rPr>
+              <a:t>Mall Customers dataset</a:t>
+            </a:r>
+            <a:endParaRPr lang="de-DE" dirty="0"/>
+          </a:p>
+        </p:txBody>
+      </p:sp>
+      <p:sp>
+        <p:nvSpPr>
+          <p:cNvPr id="3" name="Foliennummernplatzhalter 2">
+            <a:extLst>
+              <a:ext uri="{FF2B5EF4-FFF2-40B4-BE49-F238E27FC236}">
+                <a16:creationId xmlns:a16="http://schemas.microsoft.com/office/drawing/2014/main" id="{E795438C-73C3-6A2D-0846-70202255C097}"/>
+              </a:ext>
+            </a:extLst>
+          </p:cNvPr>
+          <p:cNvSpPr>
+            <a:spLocks noGrp="1"/>
+          </p:cNvSpPr>
+          <p:nvPr>
+            <p:ph type="sldNum" sz="quarter" idx="12"/>
+          </p:nvPr>
+        </p:nvSpPr>
+        <p:spPr/>
+        <p:txBody>
+          <a:bodyPr/>
+          <a:lstStyle/>
+          <a:p>
+            <a:fld id="{08C366F5-AFAD-49CB-854A-9D9E238FCA13}" type="slidenum">
+              <a:rPr lang="en-GB" smtClean="0"/>
+              <a:t>35</a:t>
             </a:fld>
             <a:endParaRPr lang="en-GB"/>
           </a:p>
@@ -14147,7 +18602,7 @@
     </p:spTree>
     <p:extLst>
       <p:ext uri="{BB962C8B-B14F-4D97-AF65-F5344CB8AC3E}">
-        <p14:creationId xmlns:p14="http://schemas.microsoft.com/office/powerpoint/2010/main" val="2928299488"/>
+        <p14:creationId xmlns:p14="http://schemas.microsoft.com/office/powerpoint/2010/main" val="3631203560"/>
       </p:ext>
     </p:extLst>
   </p:cSld>
@@ -18689,94 +23144,12 @@
           <a:chExt cx="0" cy="0"/>
         </a:xfrm>
       </p:grpSpPr>
-      <p:sp>
-        <p:nvSpPr>
-          <p:cNvPr id="2" name="Titel 1">
+      <p:pic>
+        <p:nvPicPr>
+          <p:cNvPr id="2050" name="Picture 2" descr="K-means clustering on the digits dataset (PCA-reduced data) Centroids are marked with white cross">
             <a:extLst>
               <a:ext uri="{FF2B5EF4-FFF2-40B4-BE49-F238E27FC236}">
-                <a16:creationId xmlns:a16="http://schemas.microsoft.com/office/drawing/2014/main" id="{91161FD2-1411-8BB8-D755-1F422C1937A4}"/>
-              </a:ext>
-            </a:extLst>
-          </p:cNvPr>
-          <p:cNvSpPr>
-            <a:spLocks noGrp="1"/>
-          </p:cNvSpPr>
-          <p:nvPr>
-            <p:ph type="title"/>
-          </p:nvPr>
-        </p:nvSpPr>
-        <p:spPr/>
-        <p:txBody>
-          <a:bodyPr/>
-          <a:lstStyle/>
-          <a:p>
-            <a:r>
-              <a:rPr lang="de-DE" dirty="0" err="1"/>
-              <a:t>Overview</a:t>
-            </a:r>
-            <a:r>
-              <a:rPr lang="de-DE" dirty="0"/>
-              <a:t> </a:t>
-            </a:r>
-            <a:r>
-              <a:rPr lang="de-DE" dirty="0" err="1"/>
-              <a:t>of</a:t>
-            </a:r>
-            <a:r>
-              <a:rPr lang="de-DE" dirty="0"/>
-              <a:t> </a:t>
-            </a:r>
-            <a:r>
-              <a:rPr lang="de-DE" dirty="0" err="1"/>
-              <a:t>scikit-learn</a:t>
-            </a:r>
-            <a:r>
-              <a:rPr lang="de-DE" dirty="0"/>
-              <a:t> Clustering </a:t>
-            </a:r>
-            <a:r>
-              <a:rPr lang="de-DE" dirty="0" err="1"/>
-              <a:t>Algorithms</a:t>
-            </a:r>
-            <a:endParaRPr lang="de-DE" dirty="0"/>
-          </a:p>
-        </p:txBody>
-      </p:sp>
-      <p:sp>
-        <p:nvSpPr>
-          <p:cNvPr id="4" name="Foliennummernplatzhalter 3">
-            <a:extLst>
-              <a:ext uri="{FF2B5EF4-FFF2-40B4-BE49-F238E27FC236}">
-                <a16:creationId xmlns:a16="http://schemas.microsoft.com/office/drawing/2014/main" id="{0872D469-9E39-C0DF-2321-08C1385A8014}"/>
-              </a:ext>
-            </a:extLst>
-          </p:cNvPr>
-          <p:cNvSpPr>
-            <a:spLocks noGrp="1"/>
-          </p:cNvSpPr>
-          <p:nvPr>
-            <p:ph type="sldNum" sz="quarter" idx="12"/>
-          </p:nvPr>
-        </p:nvSpPr>
-        <p:spPr/>
-        <p:txBody>
-          <a:bodyPr/>
-          <a:lstStyle/>
-          <a:p>
-            <a:fld id="{08C366F5-AFAD-49CB-854A-9D9E238FCA13}" type="slidenum">
-              <a:rPr lang="en-GB" smtClean="0"/>
-              <a:t>9</a:t>
-            </a:fld>
-            <a:endParaRPr lang="en-GB"/>
-          </a:p>
-        </p:txBody>
-      </p:sp>
-      <p:pic>
-        <p:nvPicPr>
-          <p:cNvPr id="1026" name="Picture 2" descr="MiniBatch KMeans, Affinity Propagation, MeanShift, Spectral Clustering, Ward, Agglomerative Clustering, DBSCAN, HDBSCAN, OPTICS, BIRCH, Gaussian Mixture">
-            <a:extLst>
-              <a:ext uri="{FF2B5EF4-FFF2-40B4-BE49-F238E27FC236}">
-                <a16:creationId xmlns:a16="http://schemas.microsoft.com/office/drawing/2014/main" id="{CCCCBEB2-AD32-344D-3161-053446F1D955}"/>
+                <a16:creationId xmlns:a16="http://schemas.microsoft.com/office/drawing/2014/main" id="{B44A8871-A62C-5BCB-319E-EB2705B9E077}"/>
               </a:ext>
             </a:extLst>
           </p:cNvPr>
@@ -18800,8 +23173,8 @@
         </p:blipFill>
         <p:spPr bwMode="auto">
           <a:xfrm>
-            <a:off x="1787330" y="1523103"/>
-            <a:ext cx="8617340" cy="5334897"/>
+            <a:off x="5294795" y="1319972"/>
+            <a:ext cx="6897205" cy="5172903"/>
           </a:xfrm>
           <a:prstGeom prst="rect">
             <a:avLst/>
@@ -18818,10 +23191,574 @@
           </a:extLst>
         </p:spPr>
       </p:pic>
+      <p:sp>
+        <p:nvSpPr>
+          <p:cNvPr id="3" name="Titel 2">
+            <a:extLst>
+              <a:ext uri="{FF2B5EF4-FFF2-40B4-BE49-F238E27FC236}">
+                <a16:creationId xmlns:a16="http://schemas.microsoft.com/office/drawing/2014/main" id="{3E5EF26E-96B1-27BE-03F5-79AA27F58A84}"/>
+              </a:ext>
+            </a:extLst>
+          </p:cNvPr>
+          <p:cNvSpPr>
+            <a:spLocks noGrp="1"/>
+          </p:cNvSpPr>
+          <p:nvPr>
+            <p:ph type="title"/>
+          </p:nvPr>
+        </p:nvSpPr>
+        <p:spPr/>
+        <p:txBody>
+          <a:bodyPr/>
+          <a:lstStyle/>
+          <a:p>
+            <a:r>
+              <a:rPr lang="de-DE" dirty="0" err="1"/>
+              <a:t>k-Means</a:t>
+            </a:r>
+            <a:r>
+              <a:rPr lang="de-DE" dirty="0"/>
+              <a:t>: Intuition</a:t>
+            </a:r>
+          </a:p>
+        </p:txBody>
+      </p:sp>
+      <p:sp>
+        <p:nvSpPr>
+          <p:cNvPr id="4" name="Inhaltsplatzhalter 3">
+            <a:extLst>
+              <a:ext uri="{FF2B5EF4-FFF2-40B4-BE49-F238E27FC236}">
+                <a16:creationId xmlns:a16="http://schemas.microsoft.com/office/drawing/2014/main" id="{3145C140-32EF-08E0-AEC7-D57455757080}"/>
+              </a:ext>
+            </a:extLst>
+          </p:cNvPr>
+          <p:cNvSpPr>
+            <a:spLocks noGrp="1"/>
+          </p:cNvSpPr>
+          <p:nvPr>
+            <p:ph idx="1"/>
+          </p:nvPr>
+        </p:nvSpPr>
+        <p:spPr>
+          <a:xfrm>
+            <a:off x="838200" y="1825625"/>
+            <a:ext cx="4817165" cy="4351338"/>
+          </a:xfrm>
+        </p:spPr>
+        <p:txBody>
+          <a:bodyPr>
+            <a:normAutofit lnSpcReduction="10000"/>
+          </a:bodyPr>
+          <a:lstStyle/>
+          <a:p>
+            <a:pPr marL="0" indent="0">
+              <a:buNone/>
+            </a:pPr>
+            <a:r>
+              <a:rPr lang="de-DE" dirty="0"/>
+              <a:t>divide a </a:t>
+            </a:r>
+            <a:r>
+              <a:rPr lang="de-DE" dirty="0" err="1"/>
+              <a:t>dataset</a:t>
+            </a:r>
+            <a:r>
+              <a:rPr lang="de-DE" dirty="0"/>
+              <a:t> </a:t>
+            </a:r>
+            <a:r>
+              <a:rPr lang="de-DE" dirty="0" err="1"/>
+              <a:t>into</a:t>
+            </a:r>
+            <a:r>
+              <a:rPr lang="de-DE" dirty="0"/>
+              <a:t> </a:t>
+            </a:r>
+            <a:r>
+              <a:rPr lang="de-DE" dirty="0" err="1"/>
+              <a:t>k</a:t>
+            </a:r>
+            <a:r>
+              <a:rPr lang="de-DE" dirty="0"/>
+              <a:t> </a:t>
+            </a:r>
+            <a:r>
+              <a:rPr lang="de-DE" dirty="0" err="1"/>
+              <a:t>clusters</a:t>
+            </a:r>
+            <a:endParaRPr lang="de-DE" dirty="0"/>
+          </a:p>
+          <a:p>
+            <a:pPr marL="0" indent="0">
+              <a:buNone/>
+            </a:pPr>
+            <a:endParaRPr lang="de-DE" dirty="0"/>
+          </a:p>
+          <a:p>
+            <a:pPr marL="0" indent="0">
+              <a:buNone/>
+            </a:pPr>
+            <a:r>
+              <a:rPr lang="de-DE" dirty="0" err="1"/>
+              <a:t>k</a:t>
+            </a:r>
+            <a:r>
+              <a:rPr lang="de-DE" dirty="0"/>
+              <a:t> </a:t>
+            </a:r>
+            <a:r>
+              <a:rPr lang="de-DE" dirty="0" err="1"/>
+              <a:t>is</a:t>
+            </a:r>
+            <a:r>
+              <a:rPr lang="de-DE" dirty="0"/>
+              <a:t> a </a:t>
+            </a:r>
+            <a:r>
+              <a:rPr lang="de-DE" dirty="0" err="1"/>
+              <a:t>hyperparameter</a:t>
+            </a:r>
+            <a:r>
+              <a:rPr lang="de-DE" dirty="0"/>
+              <a:t> (</a:t>
+            </a:r>
+            <a:r>
+              <a:rPr lang="de-DE" dirty="0" err="1"/>
+              <a:t>to</a:t>
+            </a:r>
+            <a:r>
+              <a:rPr lang="de-DE" dirty="0"/>
+              <a:t> </a:t>
+            </a:r>
+            <a:r>
+              <a:rPr lang="de-DE" dirty="0" err="1"/>
+              <a:t>be</a:t>
+            </a:r>
+            <a:r>
+              <a:rPr lang="de-DE" dirty="0"/>
+              <a:t> </a:t>
+            </a:r>
+            <a:r>
+              <a:rPr lang="de-DE" dirty="0" err="1"/>
+              <a:t>set</a:t>
+            </a:r>
+            <a:r>
+              <a:rPr lang="de-DE" dirty="0"/>
+              <a:t> </a:t>
+            </a:r>
+            <a:r>
+              <a:rPr lang="de-DE" dirty="0" err="1"/>
+              <a:t>before</a:t>
+            </a:r>
+            <a:r>
+              <a:rPr lang="de-DE" dirty="0"/>
+              <a:t> </a:t>
+            </a:r>
+            <a:r>
+              <a:rPr lang="de-DE" dirty="0" err="1"/>
+              <a:t>the</a:t>
+            </a:r>
+            <a:r>
+              <a:rPr lang="de-DE" dirty="0"/>
+              <a:t> </a:t>
+            </a:r>
+            <a:r>
+              <a:rPr lang="de-DE" dirty="0" err="1"/>
+              <a:t>algorithm</a:t>
+            </a:r>
+            <a:r>
+              <a:rPr lang="de-DE" dirty="0"/>
+              <a:t> </a:t>
+            </a:r>
+            <a:r>
+              <a:rPr lang="de-DE" dirty="0" err="1"/>
+              <a:t>runs</a:t>
+            </a:r>
+            <a:r>
+              <a:rPr lang="de-DE" dirty="0"/>
+              <a:t>)</a:t>
+            </a:r>
+          </a:p>
+          <a:p>
+            <a:pPr marL="0" indent="0">
+              <a:buNone/>
+            </a:pPr>
+            <a:endParaRPr lang="de-DE" dirty="0"/>
+          </a:p>
+          <a:p>
+            <a:pPr marL="0" indent="0">
+              <a:buNone/>
+            </a:pPr>
+            <a:r>
+              <a:rPr lang="de-DE" dirty="0" err="1"/>
+              <a:t>each</a:t>
+            </a:r>
+            <a:r>
+              <a:rPr lang="de-DE" dirty="0"/>
+              <a:t> </a:t>
+            </a:r>
+            <a:r>
+              <a:rPr lang="de-DE" dirty="0" err="1"/>
+              <a:t>cluster</a:t>
+            </a:r>
+            <a:r>
+              <a:rPr lang="de-DE" dirty="0"/>
+              <a:t> </a:t>
+            </a:r>
+            <a:r>
+              <a:rPr lang="de-DE" dirty="0" err="1"/>
+              <a:t>is</a:t>
+            </a:r>
+            <a:r>
+              <a:rPr lang="de-DE" dirty="0"/>
+              <a:t> </a:t>
+            </a:r>
+            <a:r>
+              <a:rPr lang="de-DE" dirty="0" err="1"/>
+              <a:t>represented</a:t>
+            </a:r>
+            <a:r>
+              <a:rPr lang="de-DE" dirty="0"/>
+              <a:t> </a:t>
+            </a:r>
+            <a:r>
+              <a:rPr lang="de-DE" dirty="0" err="1"/>
+              <a:t>by</a:t>
+            </a:r>
+            <a:r>
+              <a:rPr lang="de-DE" dirty="0"/>
+              <a:t> </a:t>
+            </a:r>
+            <a:r>
+              <a:rPr lang="de-DE" dirty="0" err="1"/>
+              <a:t>its</a:t>
+            </a:r>
+            <a:r>
+              <a:rPr lang="de-DE" dirty="0"/>
+              <a:t> </a:t>
+            </a:r>
+            <a:r>
+              <a:rPr lang="de-DE" dirty="0" err="1"/>
+              <a:t>centroid</a:t>
+            </a:r>
+            <a:r>
+              <a:rPr lang="de-DE" dirty="0"/>
+              <a:t> (</a:t>
+            </a:r>
+            <a:r>
+              <a:rPr lang="de-DE" dirty="0" err="1"/>
+              <a:t>mean</a:t>
+            </a:r>
+            <a:r>
+              <a:rPr lang="de-DE" dirty="0"/>
+              <a:t> </a:t>
+            </a:r>
+            <a:r>
+              <a:rPr lang="de-DE" dirty="0" err="1"/>
+              <a:t>point</a:t>
+            </a:r>
+            <a:r>
+              <a:rPr lang="de-DE" dirty="0"/>
+              <a:t>)</a:t>
+            </a:r>
+          </a:p>
+          <a:p>
+            <a:pPr marL="0" indent="0">
+              <a:buNone/>
+            </a:pPr>
+            <a:endParaRPr lang="de-DE" dirty="0"/>
+          </a:p>
+          <a:p>
+            <a:pPr marL="0" indent="0">
+              <a:buNone/>
+            </a:pPr>
+            <a:r>
+              <a:rPr lang="de-DE" dirty="0" err="1"/>
+              <a:t>each</a:t>
+            </a:r>
+            <a:r>
+              <a:rPr lang="de-DE" dirty="0"/>
+              <a:t> </a:t>
+            </a:r>
+            <a:r>
+              <a:rPr lang="de-DE" dirty="0" err="1"/>
+              <a:t>data</a:t>
+            </a:r>
+            <a:r>
+              <a:rPr lang="de-DE" dirty="0"/>
+              <a:t> </a:t>
+            </a:r>
+            <a:r>
+              <a:rPr lang="de-DE" dirty="0" err="1"/>
+              <a:t>point</a:t>
+            </a:r>
+            <a:r>
+              <a:rPr lang="de-DE" dirty="0"/>
+              <a:t> </a:t>
+            </a:r>
+            <a:r>
+              <a:rPr lang="de-DE" dirty="0" err="1"/>
+              <a:t>is</a:t>
+            </a:r>
+            <a:r>
+              <a:rPr lang="de-DE" dirty="0"/>
+              <a:t> </a:t>
+            </a:r>
+            <a:r>
+              <a:rPr lang="de-DE" dirty="0" err="1"/>
+              <a:t>assigned</a:t>
+            </a:r>
+            <a:r>
+              <a:rPr lang="de-DE" dirty="0"/>
+              <a:t> </a:t>
+            </a:r>
+            <a:r>
+              <a:rPr lang="de-DE" dirty="0" err="1"/>
+              <a:t>to</a:t>
+            </a:r>
+            <a:r>
+              <a:rPr lang="de-DE" dirty="0"/>
+              <a:t> </a:t>
+            </a:r>
+            <a:r>
+              <a:rPr lang="de-DE" dirty="0" err="1"/>
+              <a:t>the</a:t>
+            </a:r>
+            <a:r>
+              <a:rPr lang="de-DE" dirty="0"/>
+              <a:t> </a:t>
+            </a:r>
+            <a:r>
+              <a:rPr lang="de-DE" dirty="0" err="1"/>
+              <a:t>nearest</a:t>
+            </a:r>
+            <a:r>
+              <a:rPr lang="de-DE" dirty="0"/>
+              <a:t> </a:t>
+            </a:r>
+            <a:r>
+              <a:rPr lang="de-DE" dirty="0" err="1"/>
+              <a:t>centroid</a:t>
+            </a:r>
+            <a:endParaRPr lang="de-DE" dirty="0"/>
+          </a:p>
+          <a:p>
+            <a:pPr marL="0" indent="0">
+              <a:buNone/>
+            </a:pPr>
+            <a:endParaRPr lang="de-DE" dirty="0"/>
+          </a:p>
+        </p:txBody>
+      </p:sp>
+      <p:sp>
+        <p:nvSpPr>
+          <p:cNvPr id="2" name="Foliennummernplatzhalter 1">
+            <a:extLst>
+              <a:ext uri="{FF2B5EF4-FFF2-40B4-BE49-F238E27FC236}">
+                <a16:creationId xmlns:a16="http://schemas.microsoft.com/office/drawing/2014/main" id="{93F3BDB8-AB06-D6F6-923D-DBA0EE4E79AE}"/>
+              </a:ext>
+            </a:extLst>
+          </p:cNvPr>
+          <p:cNvSpPr>
+            <a:spLocks noGrp="1"/>
+          </p:cNvSpPr>
+          <p:nvPr>
+            <p:ph type="sldNum" sz="quarter" idx="12"/>
+          </p:nvPr>
+        </p:nvSpPr>
+        <p:spPr/>
+        <p:txBody>
+          <a:bodyPr/>
+          <a:lstStyle/>
+          <a:p>
+            <a:fld id="{08C366F5-AFAD-49CB-854A-9D9E238FCA13}" type="slidenum">
+              <a:rPr lang="en-GB" smtClean="0"/>
+              <a:t>9</a:t>
+            </a:fld>
+            <a:endParaRPr lang="en-GB"/>
+          </a:p>
+        </p:txBody>
+      </p:sp>
+      <p:sp>
+        <p:nvSpPr>
+          <p:cNvPr id="5" name="Textfeld 4">
+            <a:extLst>
+              <a:ext uri="{FF2B5EF4-FFF2-40B4-BE49-F238E27FC236}">
+                <a16:creationId xmlns:a16="http://schemas.microsoft.com/office/drawing/2014/main" id="{2A4877FB-7B11-447F-8D3C-FDF353D66B88}"/>
+              </a:ext>
+            </a:extLst>
+          </p:cNvPr>
+          <p:cNvSpPr txBox="1"/>
+          <p:nvPr/>
+        </p:nvSpPr>
+        <p:spPr>
+          <a:xfrm>
+            <a:off x="5294795" y="6107389"/>
+            <a:ext cx="5824331" cy="646331"/>
+          </a:xfrm>
+          <a:prstGeom prst="rect">
+            <a:avLst/>
+          </a:prstGeom>
+          <a:noFill/>
+        </p:spPr>
+        <p:txBody>
+          <a:bodyPr wrap="square" rtlCol="0">
+            <a:spAutoFit/>
+          </a:bodyPr>
+          <a:lstStyle/>
+          <a:p>
+            <a:r>
+              <a:rPr lang="de-DE" dirty="0" err="1"/>
+              <a:t>decision</a:t>
+            </a:r>
+            <a:r>
+              <a:rPr lang="de-DE" dirty="0"/>
+              <a:t> </a:t>
+            </a:r>
+            <a:r>
+              <a:rPr lang="de-DE" dirty="0" err="1"/>
+              <a:t>boundaries</a:t>
+            </a:r>
+            <a:r>
+              <a:rPr lang="de-DE" dirty="0"/>
+              <a:t> (</a:t>
+            </a:r>
+            <a:r>
+              <a:rPr lang="de-DE" dirty="0" err="1"/>
+              <a:t>straight</a:t>
+            </a:r>
+            <a:r>
+              <a:rPr lang="de-DE" dirty="0"/>
+              <a:t> </a:t>
+            </a:r>
+            <a:r>
+              <a:rPr lang="de-DE" dirty="0" err="1"/>
+              <a:t>lines</a:t>
+            </a:r>
+            <a:r>
+              <a:rPr lang="de-DE" dirty="0"/>
+              <a:t> </a:t>
+            </a:r>
+            <a:r>
+              <a:rPr lang="de-DE" dirty="0" err="1"/>
+              <a:t>because</a:t>
+            </a:r>
+            <a:r>
+              <a:rPr lang="de-DE" dirty="0"/>
+              <a:t> </a:t>
+            </a:r>
+            <a:r>
+              <a:rPr lang="de-DE" dirty="0" err="1"/>
+              <a:t>k-Means</a:t>
+            </a:r>
+            <a:r>
+              <a:rPr lang="de-DE" dirty="0"/>
+              <a:t> was </a:t>
+            </a:r>
+            <a:r>
+              <a:rPr lang="de-DE" dirty="0" err="1"/>
+              <a:t>trained</a:t>
+            </a:r>
+            <a:r>
+              <a:rPr lang="de-DE" dirty="0"/>
+              <a:t> </a:t>
+            </a:r>
+            <a:r>
+              <a:rPr lang="de-DE" dirty="0" err="1"/>
+              <a:t>directly</a:t>
+            </a:r>
+            <a:r>
+              <a:rPr lang="de-DE" dirty="0"/>
+              <a:t> in </a:t>
+            </a:r>
+            <a:r>
+              <a:rPr lang="de-DE" dirty="0" err="1"/>
+              <a:t>the</a:t>
+            </a:r>
+            <a:r>
+              <a:rPr lang="de-DE" dirty="0"/>
+              <a:t> same 2-D </a:t>
+            </a:r>
+            <a:r>
+              <a:rPr lang="de-DE" dirty="0" err="1"/>
+              <a:t>space</a:t>
+            </a:r>
+            <a:r>
+              <a:rPr lang="de-DE" dirty="0"/>
+              <a:t> </a:t>
+            </a:r>
+            <a:r>
+              <a:rPr lang="de-DE" dirty="0" err="1"/>
+              <a:t>that</a:t>
+            </a:r>
+            <a:r>
+              <a:rPr lang="de-DE" dirty="0"/>
+              <a:t> </a:t>
+            </a:r>
+            <a:r>
+              <a:rPr lang="de-DE" dirty="0" err="1"/>
+              <a:t>is</a:t>
+            </a:r>
+            <a:r>
+              <a:rPr lang="de-DE" dirty="0"/>
+              <a:t> </a:t>
+            </a:r>
+            <a:r>
+              <a:rPr lang="de-DE" dirty="0" err="1"/>
+              <a:t>visualized</a:t>
+            </a:r>
+            <a:r>
+              <a:rPr lang="de-DE" dirty="0"/>
+              <a:t>)</a:t>
+            </a:r>
+          </a:p>
+        </p:txBody>
+      </p:sp>
+      <p:cxnSp>
+        <p:nvCxnSpPr>
+          <p:cNvPr id="7" name="Gerade Verbindung mit Pfeil 6">
+            <a:extLst>
+              <a:ext uri="{FF2B5EF4-FFF2-40B4-BE49-F238E27FC236}">
+                <a16:creationId xmlns:a16="http://schemas.microsoft.com/office/drawing/2014/main" id="{9A50DEF1-BEAD-FB26-5241-E76096B292E0}"/>
+              </a:ext>
+            </a:extLst>
+          </p:cNvPr>
+          <p:cNvCxnSpPr>
+            <a:cxnSpLocks/>
+          </p:cNvCxnSpPr>
+          <p:nvPr/>
+        </p:nvCxnSpPr>
+        <p:spPr>
+          <a:xfrm flipV="1">
+            <a:off x="6659217" y="5625548"/>
+            <a:ext cx="1013792" cy="551415"/>
+          </a:xfrm>
+          <a:prstGeom prst="straightConnector1">
+            <a:avLst/>
+          </a:prstGeom>
+          <a:ln>
+            <a:tailEnd type="triangle"/>
+          </a:ln>
+        </p:spPr>
+        <p:style>
+          <a:lnRef idx="2">
+            <a:schemeClr val="accent1"/>
+          </a:lnRef>
+          <a:fillRef idx="0">
+            <a:schemeClr val="accent1"/>
+          </a:fillRef>
+          <a:effectRef idx="1">
+            <a:schemeClr val="accent1"/>
+          </a:effectRef>
+          <a:fontRef idx="minor">
+            <a:schemeClr val="tx1"/>
+          </a:fontRef>
+        </p:style>
+      </p:cxnSp>
     </p:spTree>
     <p:extLst>
       <p:ext uri="{BB962C8B-B14F-4D97-AF65-F5344CB8AC3E}">
-        <p14:creationId xmlns:p14="http://schemas.microsoft.com/office/powerpoint/2010/main" val="390680938"/>
+        <p14:creationId xmlns:p14="http://schemas.microsoft.com/office/powerpoint/2010/main" val="2526389082"/>
       </p:ext>
     </p:extLst>
   </p:cSld>

--- a/slides/2_clustering.pptx
+++ b/slides/2_clustering.pptx
@@ -5,7 +5,7 @@
     <p:sldMasterId id="2147483648" r:id="rId1"/>
   </p:sldMasterIdLst>
   <p:notesMasterIdLst>
-    <p:notesMasterId r:id="rId37"/>
+    <p:notesMasterId r:id="rId38"/>
   </p:notesMasterIdLst>
   <p:sldIdLst>
     <p:sldId id="256" r:id="rId2"/>
@@ -41,8 +41,9 @@
     <p:sldId id="279" r:id="rId32"/>
     <p:sldId id="303" r:id="rId33"/>
     <p:sldId id="280" r:id="rId34"/>
-    <p:sldId id="281" r:id="rId35"/>
-    <p:sldId id="302" r:id="rId36"/>
+    <p:sldId id="304" r:id="rId35"/>
+    <p:sldId id="281" r:id="rId36"/>
+    <p:sldId id="302" r:id="rId37"/>
   </p:sldIdLst>
   <p:sldSz cx="12192000" cy="6858000"/>
   <p:notesSz cx="6858000" cy="9144000"/>
@@ -513,7 +514,7 @@
           <a:p>
             <a:fld id="{506E0FD1-891F-4B1E-916D-E9B585160BB8}" type="datetimeFigureOut">
               <a:rPr lang="en-GB" smtClean="0"/>
-              <a:t>19/03/2026</a:t>
+              <a:t>21/03/2026</a:t>
             </a:fld>
             <a:endParaRPr lang="en-GB"/>
           </a:p>
@@ -930,7 +931,7 @@
           <a:p>
             <a:fld id="{D68C3F22-27B2-44E3-9C5F-D08126455F6F}" type="datetime1">
               <a:rPr lang="en-GB" smtClean="0"/>
-              <a:t>19/03/2026</a:t>
+              <a:t>21/03/2026</a:t>
             </a:fld>
             <a:endParaRPr lang="en-GB"/>
           </a:p>
@@ -1130,7 +1131,7 @@
           <a:p>
             <a:fld id="{1CD03846-7BF6-4FB6-A921-FF3379ADBD4C}" type="datetime1">
               <a:rPr lang="en-GB" smtClean="0"/>
-              <a:t>19/03/2026</a:t>
+              <a:t>21/03/2026</a:t>
             </a:fld>
             <a:endParaRPr lang="en-GB"/>
           </a:p>
@@ -1340,7 +1341,7 @@
           <a:p>
             <a:fld id="{99E1B91A-3FD0-4144-9C84-63E9688ED2FE}" type="datetime1">
               <a:rPr lang="en-GB" smtClean="0"/>
-              <a:t>19/03/2026</a:t>
+              <a:t>21/03/2026</a:t>
             </a:fld>
             <a:endParaRPr lang="en-GB"/>
           </a:p>
@@ -1540,7 +1541,7 @@
           <a:p>
             <a:fld id="{5295ED7B-FEAD-4734-819F-93EF4B0EA908}" type="datetime1">
               <a:rPr lang="en-GB" smtClean="0"/>
-              <a:t>19/03/2026</a:t>
+              <a:t>21/03/2026</a:t>
             </a:fld>
             <a:endParaRPr lang="en-GB"/>
           </a:p>
@@ -1816,7 +1817,7 @@
           <a:p>
             <a:fld id="{D2D5D4B4-C926-4B45-8815-1ED8911179A2}" type="datetime1">
               <a:rPr lang="en-GB" smtClean="0"/>
-              <a:t>19/03/2026</a:t>
+              <a:t>21/03/2026</a:t>
             </a:fld>
             <a:endParaRPr lang="en-GB"/>
           </a:p>
@@ -2084,7 +2085,7 @@
           <a:p>
             <a:fld id="{B4C5210A-0E37-4935-93AF-69F21A5F712F}" type="datetime1">
               <a:rPr lang="en-GB" smtClean="0"/>
-              <a:t>19/03/2026</a:t>
+              <a:t>21/03/2026</a:t>
             </a:fld>
             <a:endParaRPr lang="en-GB"/>
           </a:p>
@@ -2499,7 +2500,7 @@
           <a:p>
             <a:fld id="{3D3A6B2F-436C-4691-80E8-9C890E000E9D}" type="datetime1">
               <a:rPr lang="en-GB" smtClean="0"/>
-              <a:t>19/03/2026</a:t>
+              <a:t>21/03/2026</a:t>
             </a:fld>
             <a:endParaRPr lang="en-GB"/>
           </a:p>
@@ -2641,7 +2642,7 @@
           <a:p>
             <a:fld id="{84385F4C-D74B-496F-8D21-97E3549C783B}" type="datetime1">
               <a:rPr lang="en-GB" smtClean="0"/>
-              <a:t>19/03/2026</a:t>
+              <a:t>21/03/2026</a:t>
             </a:fld>
             <a:endParaRPr lang="en-GB"/>
           </a:p>
@@ -2754,7 +2755,7 @@
           <a:p>
             <a:fld id="{0CBDCB32-C241-4703-A832-4EB47BD54E83}" type="datetime1">
               <a:rPr lang="en-GB" smtClean="0"/>
-              <a:t>19/03/2026</a:t>
+              <a:t>21/03/2026</a:t>
             </a:fld>
             <a:endParaRPr lang="en-GB"/>
           </a:p>
@@ -3067,7 +3068,7 @@
           <a:p>
             <a:fld id="{85C150FF-BE95-4D25-A16A-E368A81CBF24}" type="datetime1">
               <a:rPr lang="en-GB" smtClean="0"/>
-              <a:t>19/03/2026</a:t>
+              <a:t>21/03/2026</a:t>
             </a:fld>
             <a:endParaRPr lang="en-GB"/>
           </a:p>
@@ -3356,7 +3357,7 @@
           <a:p>
             <a:fld id="{F3C5DB4B-B349-43C9-A424-BADA723AD9F1}" type="datetime1">
               <a:rPr lang="en-GB" smtClean="0"/>
-              <a:t>19/03/2026</a:t>
+              <a:t>21/03/2026</a:t>
             </a:fld>
             <a:endParaRPr lang="en-GB"/>
           </a:p>
@@ -3599,7 +3600,7 @@
           <a:p>
             <a:fld id="{12632426-0A0C-405F-A3D0-2D11AA44702A}" type="datetime1">
               <a:rPr lang="en-GB" smtClean="0"/>
-              <a:t>19/03/2026</a:t>
+              <a:t>21/03/2026</a:t>
             </a:fld>
             <a:endParaRPr lang="en-GB"/>
           </a:p>
@@ -4159,9 +4160,18 @@
         <p:spPr/>
         <p:txBody>
           <a:bodyPr>
-            <a:normAutofit/>
+            <a:normAutofit fontScale="85000" lnSpcReduction="20000"/>
           </a:bodyPr>
           <a:lstStyle/>
+          <a:p>
+            <a:pPr marL="0" indent="0">
+              <a:buNone/>
+            </a:pPr>
+            <a:r>
+              <a:rPr lang="de-DE" dirty="0"/>
+              <a:t>Fit:</a:t>
+            </a:r>
+          </a:p>
           <a:p>
             <a:pPr marL="514350" indent="-514350">
               <a:buFont typeface="+mj-lt"/>
@@ -4580,6 +4590,123 @@
               <a:rPr lang="de-DE" dirty="0"/>
               <a:t>)</a:t>
             </a:r>
+          </a:p>
+          <a:p>
+            <a:pPr marL="0" indent="0">
+              <a:buNone/>
+            </a:pPr>
+            <a:endParaRPr lang="de-DE" dirty="0"/>
+          </a:p>
+          <a:p>
+            <a:pPr marL="0" indent="0">
+              <a:buNone/>
+            </a:pPr>
+            <a:r>
+              <a:rPr lang="de-DE" dirty="0" err="1"/>
+              <a:t>Predict</a:t>
+            </a:r>
+            <a:r>
+              <a:rPr lang="de-DE" dirty="0"/>
+              <a:t>:</a:t>
+            </a:r>
+          </a:p>
+          <a:p>
+            <a:pPr marL="0" indent="0">
+              <a:buNone/>
+            </a:pPr>
+            <a:r>
+              <a:rPr lang="de-DE" dirty="0" err="1"/>
+              <a:t>For</a:t>
+            </a:r>
+            <a:r>
+              <a:rPr lang="de-DE" dirty="0"/>
+              <a:t> a </a:t>
+            </a:r>
+            <a:r>
+              <a:rPr lang="de-DE" dirty="0" err="1"/>
+              <a:t>new</a:t>
+            </a:r>
+            <a:r>
+              <a:rPr lang="de-DE" dirty="0"/>
+              <a:t> </a:t>
+            </a:r>
+            <a:r>
+              <a:rPr lang="de-DE" dirty="0" err="1"/>
+              <a:t>point</a:t>
+            </a:r>
+            <a:r>
+              <a:rPr lang="de-DE" dirty="0"/>
+              <a:t>: </a:t>
+            </a:r>
+            <a:r>
+              <a:rPr lang="de-DE" dirty="0" err="1"/>
+              <a:t>Assign</a:t>
+            </a:r>
+            <a:r>
+              <a:rPr lang="de-DE" dirty="0"/>
+              <a:t> </a:t>
+            </a:r>
+            <a:r>
+              <a:rPr lang="de-DE" dirty="0" err="1"/>
+              <a:t>it</a:t>
+            </a:r>
+            <a:r>
+              <a:rPr lang="de-DE" dirty="0"/>
+              <a:t> </a:t>
+            </a:r>
+            <a:r>
+              <a:rPr lang="de-DE" dirty="0" err="1"/>
+              <a:t>to</a:t>
+            </a:r>
+            <a:r>
+              <a:rPr lang="de-DE" dirty="0"/>
+              <a:t> </a:t>
+            </a:r>
+            <a:r>
+              <a:rPr lang="de-DE" dirty="0" err="1"/>
+              <a:t>the</a:t>
+            </a:r>
+            <a:r>
+              <a:rPr lang="de-DE" dirty="0"/>
+              <a:t> </a:t>
+            </a:r>
+            <a:r>
+              <a:rPr lang="de-DE" dirty="0" err="1"/>
+              <a:t>cluster</a:t>
+            </a:r>
+            <a:r>
+              <a:rPr lang="de-DE" dirty="0"/>
+              <a:t> </a:t>
+            </a:r>
+            <a:r>
+              <a:rPr lang="de-DE" dirty="0" err="1"/>
+              <a:t>with</a:t>
+            </a:r>
+            <a:r>
+              <a:rPr lang="de-DE" dirty="0"/>
+              <a:t> </a:t>
+            </a:r>
+            <a:r>
+              <a:rPr lang="de-DE" dirty="0" err="1"/>
+              <a:t>the</a:t>
+            </a:r>
+            <a:r>
+              <a:rPr lang="de-DE" dirty="0"/>
+              <a:t> </a:t>
+            </a:r>
+            <a:r>
+              <a:rPr lang="de-DE" b="1" dirty="0" err="1"/>
+              <a:t>nearest</a:t>
+            </a:r>
+            <a:r>
+              <a:rPr lang="de-DE" b="1" dirty="0"/>
+              <a:t> </a:t>
+            </a:r>
+            <a:r>
+              <a:rPr lang="de-DE" b="1" dirty="0" err="1"/>
+              <a:t>centroid</a:t>
+            </a:r>
+            <a:endParaRPr lang="de-DE" dirty="0"/>
           </a:p>
         </p:txBody>
       </p:sp>
@@ -15289,7 +15416,7 @@
         </p:nvSpPr>
         <p:spPr>
           <a:xfrm>
-            <a:off x="838200" y="1825625"/>
+            <a:off x="838200" y="1477759"/>
             <a:ext cx="5801783" cy="4351338"/>
           </a:xfrm>
         </p:spPr>
@@ -15661,7 +15788,7 @@
         </p:blipFill>
         <p:spPr bwMode="auto">
           <a:xfrm>
-            <a:off x="6390217" y="1690688"/>
+            <a:off x="6390217" y="1342822"/>
             <a:ext cx="5801783" cy="4351338"/>
           </a:xfrm>
           <a:prstGeom prst="rect">
@@ -15679,6 +15806,346 @@
           </a:extLst>
         </p:spPr>
       </p:pic>
+      <p:sp>
+        <p:nvSpPr>
+          <p:cNvPr id="7" name="Textfeld 6">
+            <a:extLst>
+              <a:ext uri="{FF2B5EF4-FFF2-40B4-BE49-F238E27FC236}">
+                <a16:creationId xmlns:a16="http://schemas.microsoft.com/office/drawing/2014/main" id="{1AF073BF-A815-CFE5-9DA2-61E930072E0D}"/>
+              </a:ext>
+            </a:extLst>
+          </p:cNvPr>
+          <p:cNvSpPr txBox="1"/>
+          <p:nvPr/>
+        </p:nvSpPr>
+        <p:spPr>
+          <a:xfrm>
+            <a:off x="838200" y="5975797"/>
+            <a:ext cx="9707216" cy="830997"/>
+          </a:xfrm>
+          <a:prstGeom prst="rect">
+            <a:avLst/>
+          </a:prstGeom>
+          <a:noFill/>
+        </p:spPr>
+        <p:txBody>
+          <a:bodyPr wrap="square">
+            <a:spAutoFit/>
+          </a:bodyPr>
+          <a:lstStyle/>
+          <a:p>
+            <a:pPr>
+              <a:buNone/>
+            </a:pPr>
+            <a:r>
+              <a:rPr lang="de-DE" sz="2400" dirty="0" err="1">
+                <a:solidFill>
+                  <a:srgbClr val="0E0E0E"/>
+                </a:solidFill>
+                <a:effectLst/>
+                <a:latin typeface=".AppleSystemUIFont"/>
+              </a:rPr>
+              <a:t>Assign</a:t>
+            </a:r>
+            <a:r>
+              <a:rPr lang="de-DE" sz="2400" dirty="0">
+                <a:solidFill>
+                  <a:srgbClr val="0E0E0E"/>
+                </a:solidFill>
+                <a:effectLst/>
+                <a:latin typeface=".AppleSystemUIFont"/>
+              </a:rPr>
+              <a:t> </a:t>
+            </a:r>
+            <a:r>
+              <a:rPr lang="de-DE" sz="2400" dirty="0" err="1">
+                <a:solidFill>
+                  <a:srgbClr val="0E0E0E"/>
+                </a:solidFill>
+                <a:effectLst/>
+                <a:latin typeface=".AppleSystemUIFont"/>
+              </a:rPr>
+              <a:t>new</a:t>
+            </a:r>
+            <a:r>
+              <a:rPr lang="de-DE" sz="2400" dirty="0">
+                <a:solidFill>
+                  <a:srgbClr val="0E0E0E"/>
+                </a:solidFill>
+                <a:effectLst/>
+                <a:latin typeface=".AppleSystemUIFont"/>
+              </a:rPr>
+              <a:t> </a:t>
+            </a:r>
+            <a:r>
+              <a:rPr lang="de-DE" sz="2400" dirty="0" err="1">
+                <a:solidFill>
+                  <a:srgbClr val="0E0E0E"/>
+                </a:solidFill>
+                <a:effectLst/>
+                <a:latin typeface=".AppleSystemUIFont"/>
+              </a:rPr>
+              <a:t>points</a:t>
+            </a:r>
+            <a:r>
+              <a:rPr lang="de-DE" sz="2400" dirty="0">
+                <a:solidFill>
+                  <a:srgbClr val="0E0E0E"/>
+                </a:solidFill>
+                <a:effectLst/>
+                <a:latin typeface=".AppleSystemUIFont"/>
+              </a:rPr>
+              <a:t> </a:t>
+            </a:r>
+            <a:r>
+              <a:rPr lang="de-DE" sz="2400" dirty="0" err="1">
+                <a:solidFill>
+                  <a:srgbClr val="0E0E0E"/>
+                </a:solidFill>
+                <a:effectLst/>
+                <a:latin typeface=".AppleSystemUIFont"/>
+              </a:rPr>
+              <a:t>by</a:t>
+            </a:r>
+            <a:r>
+              <a:rPr lang="de-DE" sz="2400" dirty="0">
+                <a:solidFill>
+                  <a:srgbClr val="0E0E0E"/>
+                </a:solidFill>
+                <a:effectLst/>
+                <a:latin typeface=".AppleSystemUIFont"/>
+              </a:rPr>
+              <a:t> </a:t>
+            </a:r>
+            <a:r>
+              <a:rPr lang="de-DE" sz="2400" dirty="0" err="1">
+                <a:solidFill>
+                  <a:srgbClr val="0E0E0E"/>
+                </a:solidFill>
+                <a:effectLst/>
+                <a:latin typeface=".AppleSystemUIFont"/>
+              </a:rPr>
+              <a:t>distance</a:t>
+            </a:r>
+            <a:r>
+              <a:rPr lang="de-DE" sz="2400" dirty="0">
+                <a:solidFill>
+                  <a:srgbClr val="0E0E0E"/>
+                </a:solidFill>
+                <a:effectLst/>
+                <a:latin typeface=".AppleSystemUIFont"/>
+              </a:rPr>
+              <a:t> </a:t>
+            </a:r>
+            <a:r>
+              <a:rPr lang="de-DE" sz="2400" dirty="0" err="1">
+                <a:solidFill>
+                  <a:srgbClr val="0E0E0E"/>
+                </a:solidFill>
+                <a:effectLst/>
+                <a:latin typeface=".AppleSystemUIFont"/>
+              </a:rPr>
+              <a:t>to</a:t>
+            </a:r>
+            <a:r>
+              <a:rPr lang="de-DE" sz="2400" dirty="0">
+                <a:solidFill>
+                  <a:srgbClr val="0E0E0E"/>
+                </a:solidFill>
+                <a:effectLst/>
+                <a:latin typeface=".AppleSystemUIFont"/>
+              </a:rPr>
+              <a:t> </a:t>
+            </a:r>
+            <a:r>
+              <a:rPr lang="de-DE" sz="2400" dirty="0" err="1">
+                <a:solidFill>
+                  <a:srgbClr val="0E0E0E"/>
+                </a:solidFill>
+                <a:effectLst/>
+                <a:latin typeface=".AppleSystemUIFont"/>
+              </a:rPr>
+              <a:t>cluster</a:t>
+            </a:r>
+            <a:r>
+              <a:rPr lang="de-DE" sz="2400" dirty="0">
+                <a:solidFill>
+                  <a:srgbClr val="0E0E0E"/>
+                </a:solidFill>
+                <a:effectLst/>
+                <a:latin typeface=".AppleSystemUIFont"/>
+              </a:rPr>
+              <a:t> </a:t>
+            </a:r>
+            <a:r>
+              <a:rPr lang="de-DE" sz="2400" dirty="0" err="1">
+                <a:solidFill>
+                  <a:srgbClr val="0E0E0E"/>
+                </a:solidFill>
+                <a:effectLst/>
+                <a:latin typeface=".AppleSystemUIFont"/>
+              </a:rPr>
+              <a:t>representatives</a:t>
+            </a:r>
+            <a:r>
+              <a:rPr lang="de-DE" sz="2400" dirty="0">
+                <a:solidFill>
+                  <a:srgbClr val="0E0E0E"/>
+                </a:solidFill>
+                <a:effectLst/>
+                <a:latin typeface=".AppleSystemUIFont"/>
+              </a:rPr>
+              <a:t> (e.g., </a:t>
+            </a:r>
+            <a:r>
+              <a:rPr lang="de-DE" sz="2400" dirty="0" err="1">
+                <a:solidFill>
+                  <a:srgbClr val="0E0E0E"/>
+                </a:solidFill>
+                <a:effectLst/>
+                <a:latin typeface=".AppleSystemUIFont"/>
+              </a:rPr>
+              <a:t>centroids</a:t>
+            </a:r>
+            <a:r>
+              <a:rPr lang="de-DE" sz="2400" dirty="0">
+                <a:solidFill>
+                  <a:srgbClr val="0E0E0E"/>
+                </a:solidFill>
+                <a:effectLst/>
+                <a:latin typeface=".AppleSystemUIFont"/>
+              </a:rPr>
+              <a:t>):</a:t>
+            </a:r>
+            <a:r>
+              <a:rPr lang="de-DE" sz="2400" dirty="0">
+                <a:solidFill>
+                  <a:srgbClr val="0E0E0E"/>
+                </a:solidFill>
+                <a:latin typeface=".AppleSystemUIFont"/>
+              </a:rPr>
+              <a:t> </a:t>
+            </a:r>
+            <a:r>
+              <a:rPr lang="de-DE" sz="2400" dirty="0" err="1">
+                <a:solidFill>
+                  <a:srgbClr val="0E0E0E"/>
+                </a:solidFill>
+                <a:effectLst/>
+                <a:latin typeface=".AppleSystemUIFont"/>
+              </a:rPr>
+              <a:t>practical</a:t>
+            </a:r>
+            <a:r>
+              <a:rPr lang="de-DE" sz="2400" dirty="0">
+                <a:solidFill>
+                  <a:srgbClr val="0E0E0E"/>
+                </a:solidFill>
+                <a:effectLst/>
+                <a:latin typeface=".AppleSystemUIFont"/>
+              </a:rPr>
+              <a:t> </a:t>
+            </a:r>
+            <a:r>
+              <a:rPr lang="de-DE" sz="2400" dirty="0" err="1">
+                <a:solidFill>
+                  <a:srgbClr val="0E0E0E"/>
+                </a:solidFill>
+                <a:effectLst/>
+                <a:latin typeface=".AppleSystemUIFont"/>
+              </a:rPr>
+              <a:t>heuristic</a:t>
+            </a:r>
+            <a:r>
+              <a:rPr lang="de-DE" sz="2400" dirty="0">
+                <a:solidFill>
+                  <a:srgbClr val="0E0E0E"/>
+                </a:solidFill>
+                <a:effectLst/>
+                <a:latin typeface=".AppleSystemUIFont"/>
+              </a:rPr>
+              <a:t>, not </a:t>
+            </a:r>
+            <a:r>
+              <a:rPr lang="de-DE" sz="2400" dirty="0" err="1">
+                <a:solidFill>
+                  <a:srgbClr val="0E0E0E"/>
+                </a:solidFill>
+                <a:effectLst/>
+                <a:latin typeface=".AppleSystemUIFont"/>
+              </a:rPr>
+              <a:t>inherent</a:t>
+            </a:r>
+            <a:r>
+              <a:rPr lang="de-DE" sz="2400" dirty="0">
+                <a:solidFill>
+                  <a:srgbClr val="0E0E0E"/>
+                </a:solidFill>
+                <a:effectLst/>
+                <a:latin typeface=".AppleSystemUIFont"/>
+              </a:rPr>
+              <a:t> </a:t>
+            </a:r>
+            <a:r>
+              <a:rPr lang="de-DE" sz="2400" dirty="0" err="1">
+                <a:solidFill>
+                  <a:srgbClr val="0E0E0E"/>
+                </a:solidFill>
+                <a:effectLst/>
+                <a:latin typeface=".AppleSystemUIFont"/>
+              </a:rPr>
+              <a:t>to</a:t>
+            </a:r>
+            <a:r>
+              <a:rPr lang="de-DE" sz="2400" dirty="0">
+                <a:solidFill>
+                  <a:srgbClr val="0E0E0E"/>
+                </a:solidFill>
+                <a:effectLst/>
+                <a:latin typeface=".AppleSystemUIFont"/>
+              </a:rPr>
+              <a:t> </a:t>
+            </a:r>
+            <a:r>
+              <a:rPr lang="de-DE" sz="2400" dirty="0" err="1">
+                <a:solidFill>
+                  <a:srgbClr val="0E0E0E"/>
+                </a:solidFill>
+                <a:effectLst/>
+                <a:latin typeface=".AppleSystemUIFont"/>
+              </a:rPr>
+              <a:t>hierarchical</a:t>
+            </a:r>
+            <a:r>
+              <a:rPr lang="de-DE" sz="2400" dirty="0">
+                <a:solidFill>
+                  <a:srgbClr val="0E0E0E"/>
+                </a:solidFill>
+                <a:effectLst/>
+                <a:latin typeface=".AppleSystemUIFont"/>
+              </a:rPr>
+              <a:t> </a:t>
+            </a:r>
+            <a:r>
+              <a:rPr lang="de-DE" sz="2400" dirty="0" err="1">
+                <a:solidFill>
+                  <a:srgbClr val="0E0E0E"/>
+                </a:solidFill>
+                <a:effectLst/>
+                <a:latin typeface=".AppleSystemUIFont"/>
+              </a:rPr>
+              <a:t>clustering</a:t>
+            </a:r>
+            <a:endParaRPr lang="de-DE" sz="2400" dirty="0">
+              <a:solidFill>
+                <a:srgbClr val="0E0E0E"/>
+              </a:solidFill>
+              <a:effectLst/>
+              <a:latin typeface=".AppleSystemUIFont"/>
+            </a:endParaRPr>
+          </a:p>
+        </p:txBody>
+      </p:sp>
     </p:spTree>
     <p:extLst>
       <p:ext uri="{BB962C8B-B14F-4D97-AF65-F5344CB8AC3E}">
@@ -16487,7 +16954,7 @@
           <a:p>
             <a:r>
               <a:rPr lang="de-DE" dirty="0"/>
-              <a:t>Core Points: </a:t>
+              <a:t>Core Point: </a:t>
             </a:r>
             <a:r>
               <a:rPr lang="de-DE" dirty="0" err="1"/>
@@ -16577,7 +17044,7 @@
           <a:p>
             <a:r>
               <a:rPr lang="de-DE" dirty="0"/>
-              <a:t>Border Points: </a:t>
+              <a:t>Border Point: </a:t>
             </a:r>
             <a:r>
               <a:rPr lang="de-DE" dirty="0" err="1"/>
@@ -16620,7 +17087,31 @@
             </a:r>
             <a:r>
               <a:rPr lang="de-DE" dirty="0"/>
-              <a:t>, but not </a:t>
+              <a:t>, but not a </a:t>
+            </a:r>
+            <a:r>
+              <a:rPr lang="de-DE" dirty="0" err="1"/>
+              <a:t>core</a:t>
+            </a:r>
+            <a:r>
+              <a:rPr lang="de-DE" dirty="0"/>
+              <a:t> </a:t>
+            </a:r>
+            <a:r>
+              <a:rPr lang="de-DE" dirty="0" err="1"/>
+              <a:t>point</a:t>
+            </a:r>
+            <a:r>
+              <a:rPr lang="de-DE" dirty="0"/>
+              <a:t> </a:t>
+            </a:r>
+            <a:r>
+              <a:rPr lang="de-DE" dirty="0" err="1"/>
+              <a:t>itself</a:t>
+            </a:r>
+            <a:r>
+              <a:rPr lang="de-DE" dirty="0"/>
+              <a:t> (not </a:t>
             </a:r>
             <a:r>
               <a:rPr lang="de-DE" dirty="0" err="1"/>
@@ -16636,15 +17127,7 @@
             </a:r>
             <a:r>
               <a:rPr lang="de-DE" dirty="0"/>
-              <a:t> </a:t>
-            </a:r>
-            <a:r>
-              <a:rPr lang="de-DE" dirty="0" err="1"/>
-              <a:t>themselves</a:t>
-            </a:r>
-            <a:r>
-              <a:rPr lang="de-DE" dirty="0"/>
-              <a:t> </a:t>
+              <a:t>) </a:t>
             </a:r>
             <a:r>
               <a:rPr lang="de-DE" dirty="0">
@@ -16693,7 +17176,7 @@
           <a:p>
             <a:r>
               <a:rPr lang="de-DE" dirty="0"/>
-              <a:t>Noise Points: not </a:t>
+              <a:t>Noise Point: not </a:t>
             </a:r>
             <a:r>
               <a:rPr lang="de-DE" dirty="0" err="1"/>
@@ -16757,7 +17240,7 @@
               <a:rPr lang="de-DE" dirty="0" err="1">
                 <a:sym typeface="Wingdings" pitchFamily="2" charset="2"/>
               </a:rPr>
-              <a:t>points</a:t>
+              <a:t>point</a:t>
             </a:r>
             <a:endParaRPr lang="de-DE" dirty="0"/>
           </a:p>
@@ -16855,432 +17338,1049 @@
           </a:p>
         </p:txBody>
       </p:sp>
-      <p:sp>
-        <p:nvSpPr>
-          <p:cNvPr id="3" name="Inhaltsplatzhalter 2">
-            <a:extLst>
-              <a:ext uri="{FF2B5EF4-FFF2-40B4-BE49-F238E27FC236}">
-                <a16:creationId xmlns:a16="http://schemas.microsoft.com/office/drawing/2014/main" id="{48293539-B5EA-4406-02DD-1F9D36FDC673}"/>
-              </a:ext>
-            </a:extLst>
-          </p:cNvPr>
-          <p:cNvSpPr>
-            <a:spLocks noGrp="1"/>
-          </p:cNvSpPr>
-          <p:nvPr>
-            <p:ph idx="1"/>
-          </p:nvPr>
-        </p:nvSpPr>
-        <p:spPr/>
-        <p:txBody>
-          <a:bodyPr>
-            <a:normAutofit fontScale="92500" lnSpcReduction="20000"/>
-          </a:bodyPr>
-          <a:lstStyle/>
-          <a:p>
-            <a:pPr marL="514350" indent="-514350">
-              <a:buFont typeface="+mj-lt"/>
-              <a:buAutoNum type="arabicPeriod"/>
-            </a:pPr>
-            <a:r>
-              <a:rPr lang="de-DE" dirty="0"/>
-              <a:t>Pick an </a:t>
-            </a:r>
-            <a:r>
-              <a:rPr lang="de-DE" dirty="0" err="1"/>
-              <a:t>unvisited</a:t>
-            </a:r>
-            <a:r>
-              <a:rPr lang="de-DE" dirty="0"/>
-              <a:t> </a:t>
-            </a:r>
-            <a:r>
-              <a:rPr lang="de-DE" dirty="0" err="1"/>
-              <a:t>point</a:t>
-            </a:r>
-            <a:endParaRPr lang="de-DE" dirty="0"/>
-          </a:p>
-          <a:p>
-            <a:pPr marL="514350" indent="-514350">
-              <a:buFont typeface="+mj-lt"/>
-              <a:buAutoNum type="arabicPeriod"/>
-            </a:pPr>
-            <a:r>
-              <a:rPr lang="de-DE" dirty="0"/>
-              <a:t>Check </a:t>
-            </a:r>
-            <a:r>
-              <a:rPr lang="de-DE" dirty="0" err="1"/>
-              <a:t>its</a:t>
-            </a:r>
-            <a:r>
-              <a:rPr lang="de-DE" dirty="0"/>
-              <a:t> </a:t>
-            </a:r>
-            <a:r>
-              <a:rPr lang="el-GR" dirty="0"/>
-              <a:t>ε-</a:t>
-            </a:r>
-            <a:r>
-              <a:rPr lang="de-DE" dirty="0" err="1"/>
-              <a:t>neighborhood</a:t>
-            </a:r>
-            <a:endParaRPr lang="de-DE" dirty="0"/>
-          </a:p>
-          <a:p>
-            <a:pPr marL="514350" indent="-514350">
-              <a:buFont typeface="+mj-lt"/>
-              <a:buAutoNum type="arabicPeriod"/>
-            </a:pPr>
-            <a:r>
-              <a:rPr lang="de-DE" dirty="0" err="1"/>
-              <a:t>If</a:t>
-            </a:r>
-            <a:r>
-              <a:rPr lang="de-DE" dirty="0"/>
-              <a:t> </a:t>
-            </a:r>
-            <a:r>
-              <a:rPr lang="de-DE" dirty="0" err="1"/>
-              <a:t>core</a:t>
-            </a:r>
-            <a:r>
-              <a:rPr lang="de-DE" dirty="0"/>
-              <a:t> </a:t>
-            </a:r>
-            <a:r>
-              <a:rPr lang="de-DE" dirty="0" err="1"/>
-              <a:t>point</a:t>
-            </a:r>
-            <a:r>
-              <a:rPr lang="de-DE" dirty="0"/>
-              <a:t>: </a:t>
-            </a:r>
-            <a:r>
-              <a:rPr lang="de-DE" dirty="0" err="1"/>
-              <a:t>create</a:t>
-            </a:r>
-            <a:r>
-              <a:rPr lang="de-DE" dirty="0"/>
-              <a:t> </a:t>
-            </a:r>
-            <a:r>
-              <a:rPr lang="de-DE" dirty="0" err="1"/>
-              <a:t>new</a:t>
-            </a:r>
-            <a:r>
-              <a:rPr lang="de-DE" dirty="0"/>
-              <a:t> </a:t>
-            </a:r>
-            <a:r>
-              <a:rPr lang="de-DE" dirty="0" err="1"/>
-              <a:t>cluster</a:t>
-            </a:r>
-            <a:r>
-              <a:rPr lang="de-DE" dirty="0"/>
-              <a:t>, </a:t>
-            </a:r>
-            <a:r>
-              <a:rPr lang="de-DE" dirty="0" err="1"/>
-              <a:t>expand</a:t>
-            </a:r>
-            <a:r>
-              <a:rPr lang="de-DE" dirty="0"/>
-              <a:t> </a:t>
-            </a:r>
-            <a:r>
-              <a:rPr lang="de-DE" dirty="0" err="1"/>
-              <a:t>cluster</a:t>
-            </a:r>
-            <a:r>
-              <a:rPr lang="de-DE" dirty="0"/>
-              <a:t> (</a:t>
-            </a:r>
-            <a:r>
-              <a:rPr lang="de-DE" dirty="0" err="1"/>
-              <a:t>density-reachable</a:t>
-            </a:r>
-            <a:r>
-              <a:rPr lang="de-DE" dirty="0"/>
-              <a:t> </a:t>
-            </a:r>
-            <a:r>
-              <a:rPr lang="de-DE" dirty="0" err="1"/>
-              <a:t>points</a:t>
-            </a:r>
-            <a:r>
-              <a:rPr lang="de-DE" dirty="0"/>
-              <a:t>)</a:t>
-            </a:r>
-          </a:p>
-          <a:p>
-            <a:pPr marL="514350" indent="-514350">
-              <a:buFont typeface="+mj-lt"/>
-              <a:buAutoNum type="arabicPeriod"/>
-            </a:pPr>
-            <a:r>
-              <a:rPr lang="de-DE" dirty="0" err="1"/>
-              <a:t>If</a:t>
-            </a:r>
-            <a:r>
-              <a:rPr lang="de-DE" dirty="0"/>
-              <a:t> not: </a:t>
-            </a:r>
-            <a:r>
-              <a:rPr lang="de-DE" dirty="0" err="1"/>
-              <a:t>mark</a:t>
-            </a:r>
-            <a:r>
-              <a:rPr lang="de-DE" dirty="0"/>
-              <a:t> </a:t>
-            </a:r>
-            <a:r>
-              <a:rPr lang="de-DE" dirty="0" err="1"/>
-              <a:t>as</a:t>
-            </a:r>
-            <a:r>
-              <a:rPr lang="de-DE" dirty="0"/>
-              <a:t> </a:t>
-            </a:r>
-            <a:r>
-              <a:rPr lang="de-DE" dirty="0" err="1"/>
-              <a:t>noise</a:t>
-            </a:r>
-            <a:r>
-              <a:rPr lang="de-DE" dirty="0"/>
-              <a:t> (</a:t>
-            </a:r>
-            <a:r>
-              <a:rPr lang="de-DE" dirty="0" err="1"/>
-              <a:t>may</a:t>
-            </a:r>
-            <a:r>
-              <a:rPr lang="de-DE" dirty="0"/>
-              <a:t> </a:t>
-            </a:r>
-            <a:r>
-              <a:rPr lang="de-DE" dirty="0" err="1"/>
-              <a:t>later</a:t>
-            </a:r>
-            <a:r>
-              <a:rPr lang="de-DE" dirty="0"/>
-              <a:t> </a:t>
-            </a:r>
-            <a:r>
-              <a:rPr lang="de-DE" dirty="0" err="1"/>
-              <a:t>become</a:t>
-            </a:r>
-            <a:r>
-              <a:rPr lang="de-DE" dirty="0"/>
-              <a:t> </a:t>
-            </a:r>
-            <a:r>
-              <a:rPr lang="de-DE" dirty="0" err="1"/>
-              <a:t>border</a:t>
-            </a:r>
-            <a:r>
-              <a:rPr lang="de-DE" dirty="0"/>
-              <a:t>)</a:t>
-            </a:r>
-          </a:p>
-          <a:p>
-            <a:pPr marL="514350" indent="-514350">
-              <a:buFont typeface="+mj-lt"/>
-              <a:buAutoNum type="arabicPeriod"/>
-            </a:pPr>
-            <a:r>
-              <a:rPr lang="de-DE" dirty="0"/>
-              <a:t>Repeat </a:t>
-            </a:r>
-            <a:r>
-              <a:rPr lang="de-DE" dirty="0" err="1"/>
-              <a:t>until</a:t>
-            </a:r>
-            <a:r>
-              <a:rPr lang="de-DE" dirty="0"/>
-              <a:t> all </a:t>
-            </a:r>
-            <a:r>
-              <a:rPr lang="de-DE" dirty="0" err="1"/>
-              <a:t>points</a:t>
-            </a:r>
-            <a:r>
-              <a:rPr lang="de-DE" dirty="0"/>
-              <a:t> </a:t>
-            </a:r>
-            <a:r>
-              <a:rPr lang="de-DE" dirty="0" err="1"/>
-              <a:t>processed</a:t>
-            </a:r>
-            <a:endParaRPr lang="de-DE" dirty="0"/>
-          </a:p>
-          <a:p>
-            <a:pPr marL="0" indent="0">
-              <a:buNone/>
-            </a:pPr>
-            <a:endParaRPr lang="de-DE" dirty="0"/>
-          </a:p>
-          <a:p>
-            <a:pPr marL="0" indent="0">
-              <a:buNone/>
-            </a:pPr>
-            <a:r>
-              <a:rPr lang="de-DE" dirty="0"/>
-              <a:t>Cluster </a:t>
-            </a:r>
-            <a:r>
-              <a:rPr lang="de-DE" dirty="0" err="1"/>
-              <a:t>formation</a:t>
-            </a:r>
-            <a:r>
-              <a:rPr lang="de-DE" dirty="0"/>
-              <a:t> </a:t>
-            </a:r>
-            <a:r>
-              <a:rPr lang="de-DE" dirty="0" err="1"/>
-              <a:t>concept</a:t>
-            </a:r>
-            <a:r>
-              <a:rPr lang="de-DE" dirty="0"/>
-              <a:t>:</a:t>
-            </a:r>
-          </a:p>
-          <a:p>
-            <a:r>
-              <a:rPr lang="de-DE" dirty="0"/>
-              <a:t>Points </a:t>
-            </a:r>
-            <a:r>
-              <a:rPr lang="de-DE" dirty="0" err="1"/>
-              <a:t>are</a:t>
-            </a:r>
-            <a:r>
-              <a:rPr lang="de-DE" dirty="0"/>
-              <a:t> </a:t>
-            </a:r>
-            <a:r>
-              <a:rPr lang="de-DE" dirty="0" err="1"/>
-              <a:t>density-connected</a:t>
-            </a:r>
-            <a:r>
-              <a:rPr lang="de-DE" dirty="0"/>
-              <a:t> </a:t>
-            </a:r>
-            <a:r>
-              <a:rPr lang="de-DE" dirty="0" err="1"/>
-              <a:t>if</a:t>
-            </a:r>
-            <a:r>
-              <a:rPr lang="de-DE" dirty="0"/>
-              <a:t> </a:t>
-            </a:r>
-            <a:r>
-              <a:rPr lang="de-DE" dirty="0" err="1"/>
-              <a:t>they</a:t>
-            </a:r>
-            <a:r>
-              <a:rPr lang="de-DE" dirty="0"/>
-              <a:t> </a:t>
-            </a:r>
-            <a:r>
-              <a:rPr lang="de-DE" dirty="0" err="1"/>
-              <a:t>can</a:t>
-            </a:r>
-            <a:r>
-              <a:rPr lang="de-DE" dirty="0"/>
-              <a:t> </a:t>
-            </a:r>
-            <a:r>
-              <a:rPr lang="de-DE" dirty="0" err="1"/>
-              <a:t>be</a:t>
-            </a:r>
-            <a:r>
-              <a:rPr lang="de-DE" dirty="0"/>
-              <a:t> </a:t>
-            </a:r>
-            <a:r>
-              <a:rPr lang="de-DE" dirty="0" err="1"/>
-              <a:t>reached</a:t>
-            </a:r>
-            <a:r>
-              <a:rPr lang="de-DE" dirty="0"/>
-              <a:t> via a </a:t>
-            </a:r>
-            <a:r>
-              <a:rPr lang="de-DE" dirty="0" err="1"/>
-              <a:t>chain</a:t>
-            </a:r>
-            <a:r>
-              <a:rPr lang="de-DE" dirty="0"/>
-              <a:t> </a:t>
-            </a:r>
-            <a:r>
-              <a:rPr lang="de-DE" dirty="0" err="1"/>
-              <a:t>of</a:t>
-            </a:r>
-            <a:r>
-              <a:rPr lang="de-DE" dirty="0"/>
-              <a:t> </a:t>
-            </a:r>
-            <a:r>
-              <a:rPr lang="de-DE" dirty="0" err="1"/>
-              <a:t>core</a:t>
-            </a:r>
-            <a:r>
-              <a:rPr lang="de-DE" dirty="0"/>
-              <a:t> </a:t>
-            </a:r>
-            <a:r>
-              <a:rPr lang="de-DE" dirty="0" err="1"/>
-              <a:t>points</a:t>
-            </a:r>
-            <a:endParaRPr lang="de-DE" dirty="0"/>
-          </a:p>
-          <a:p>
-            <a:r>
-              <a:rPr lang="de-DE" dirty="0"/>
-              <a:t>Clusters </a:t>
-            </a:r>
-            <a:r>
-              <a:rPr lang="de-DE" dirty="0" err="1"/>
-              <a:t>grow</a:t>
-            </a:r>
-            <a:r>
-              <a:rPr lang="de-DE" dirty="0"/>
-              <a:t> </a:t>
-            </a:r>
-            <a:r>
-              <a:rPr lang="de-DE" dirty="0" err="1"/>
-              <a:t>outward</a:t>
-            </a:r>
-            <a:r>
-              <a:rPr lang="de-DE" dirty="0"/>
-              <a:t> </a:t>
-            </a:r>
-            <a:r>
-              <a:rPr lang="de-DE" dirty="0" err="1"/>
-              <a:t>from</a:t>
-            </a:r>
-            <a:r>
-              <a:rPr lang="de-DE" dirty="0"/>
-              <a:t> </a:t>
-            </a:r>
-            <a:r>
-              <a:rPr lang="de-DE" dirty="0" err="1"/>
-              <a:t>core</a:t>
-            </a:r>
-            <a:r>
-              <a:rPr lang="de-DE" dirty="0"/>
-              <a:t> </a:t>
-            </a:r>
-            <a:r>
-              <a:rPr lang="de-DE" dirty="0" err="1"/>
-              <a:t>points</a:t>
-            </a:r>
-            <a:endParaRPr lang="de-DE" dirty="0"/>
-          </a:p>
-        </p:txBody>
-      </p:sp>
+      <mc:AlternateContent xmlns:mc="http://schemas.openxmlformats.org/markup-compatibility/2006">
+        <mc:Choice xmlns:a14="http://schemas.microsoft.com/office/drawing/2010/main" Requires="a14">
+          <p:sp>
+            <p:nvSpPr>
+              <p:cNvPr id="3" name="Inhaltsplatzhalter 2">
+                <a:extLst>
+                  <a:ext uri="{FF2B5EF4-FFF2-40B4-BE49-F238E27FC236}">
+                    <a16:creationId xmlns:a16="http://schemas.microsoft.com/office/drawing/2014/main" id="{48293539-B5EA-4406-02DD-1F9D36FDC673}"/>
+                  </a:ext>
+                </a:extLst>
+              </p:cNvPr>
+              <p:cNvSpPr>
+                <a:spLocks noGrp="1"/>
+              </p:cNvSpPr>
+              <p:nvPr>
+                <p:ph idx="1"/>
+              </p:nvPr>
+            </p:nvSpPr>
+            <p:spPr/>
+            <p:txBody>
+              <a:bodyPr>
+                <a:normAutofit fontScale="70000" lnSpcReduction="20000"/>
+              </a:bodyPr>
+              <a:lstStyle/>
+              <a:p>
+                <a:pPr marL="514350" indent="-514350">
+                  <a:buFont typeface="+mj-lt"/>
+                  <a:buAutoNum type="arabicPeriod"/>
+                </a:pPr>
+                <a:r>
+                  <a:rPr lang="de-DE" dirty="0"/>
+                  <a:t>Pick an </a:t>
+                </a:r>
+                <a:r>
+                  <a:rPr lang="de-DE" dirty="0" err="1"/>
+                  <a:t>unvisited</a:t>
+                </a:r>
+                <a:r>
+                  <a:rPr lang="de-DE" dirty="0"/>
+                  <a:t> </a:t>
+                </a:r>
+                <a:r>
+                  <a:rPr lang="de-DE" dirty="0" err="1"/>
+                  <a:t>point</a:t>
+                </a:r>
+                <a:r>
+                  <a:rPr lang="de-DE" dirty="0"/>
+                  <a:t> </a:t>
+                </a:r>
+                <a:r>
+                  <a:rPr lang="de-DE" i="1" dirty="0">
+                    <a:latin typeface="Cambria Math" panose="02040503050406030204" pitchFamily="18" charset="0"/>
+                    <a:ea typeface="Cambria Math" panose="02040503050406030204" pitchFamily="18" charset="0"/>
+                  </a:rPr>
+                  <a:t>P</a:t>
+                </a:r>
+                <a:r>
+                  <a:rPr lang="de-DE" dirty="0"/>
+                  <a:t> and </a:t>
+                </a:r>
+                <a:r>
+                  <a:rPr lang="de-DE" dirty="0" err="1"/>
+                  <a:t>mark</a:t>
+                </a:r>
+                <a:r>
+                  <a:rPr lang="de-DE" dirty="0"/>
+                  <a:t> </a:t>
+                </a:r>
+                <a:r>
+                  <a:rPr lang="de-DE" dirty="0" err="1"/>
+                  <a:t>it</a:t>
+                </a:r>
+                <a:r>
+                  <a:rPr lang="de-DE" dirty="0"/>
+                  <a:t> </a:t>
+                </a:r>
+                <a:r>
+                  <a:rPr lang="de-DE" dirty="0" err="1"/>
+                  <a:t>as</a:t>
+                </a:r>
+                <a:r>
+                  <a:rPr lang="de-DE" dirty="0"/>
+                  <a:t> </a:t>
+                </a:r>
+                <a:r>
+                  <a:rPr lang="de-DE" dirty="0" err="1"/>
+                  <a:t>visited</a:t>
+                </a:r>
+                <a:endParaRPr lang="de-DE" dirty="0"/>
+              </a:p>
+              <a:p>
+                <a:pPr marL="514350" indent="-514350">
+                  <a:buFont typeface="+mj-lt"/>
+                  <a:buAutoNum type="arabicPeriod"/>
+                </a:pPr>
+                <a:r>
+                  <a:rPr lang="de-DE" dirty="0" err="1"/>
+                  <a:t>Retrieve</a:t>
+                </a:r>
+                <a:r>
+                  <a:rPr lang="de-DE" dirty="0"/>
+                  <a:t> </a:t>
+                </a:r>
+                <a:r>
+                  <a:rPr lang="de-DE" dirty="0" err="1"/>
+                  <a:t>its</a:t>
+                </a:r>
+                <a:r>
+                  <a:rPr lang="de-DE" dirty="0"/>
+                  <a:t> </a:t>
+                </a:r>
+                <a:r>
+                  <a:rPr lang="el-GR" dirty="0">
+                    <a:latin typeface="Cambria Math" panose="02040503050406030204" pitchFamily="18" charset="0"/>
+                    <a:ea typeface="Cambria Math" panose="02040503050406030204" pitchFamily="18" charset="0"/>
+                  </a:rPr>
+                  <a:t>ε</a:t>
+                </a:r>
+                <a:r>
+                  <a:rPr lang="el-GR" dirty="0"/>
+                  <a:t>-</a:t>
+                </a:r>
+                <a:r>
+                  <a:rPr lang="de-DE" dirty="0" err="1"/>
+                  <a:t>neighborhood</a:t>
+                </a:r>
+                <a:r>
+                  <a:rPr lang="de-DE" dirty="0"/>
+                  <a:t> </a:t>
+                </a:r>
+                <a14:m>
+                  <m:oMath xmlns:m="http://schemas.openxmlformats.org/officeDocument/2006/math">
+                    <m:sSub>
+                      <m:sSubPr>
+                        <m:ctrlPr>
+                          <a:rPr lang="de-DE" i="1">
+                            <a:latin typeface="Cambria Math" panose="02040503050406030204" pitchFamily="18" charset="0"/>
+                          </a:rPr>
+                        </m:ctrlPr>
+                      </m:sSubPr>
+                      <m:e>
+                        <m:r>
+                          <a:rPr lang="de-DE" i="1">
+                            <a:latin typeface="Cambria Math" panose="02040503050406030204" pitchFamily="18" charset="0"/>
+                          </a:rPr>
+                          <m:t>𝑁</m:t>
+                        </m:r>
+                      </m:e>
+                      <m:sub>
+                        <m:r>
+                          <m:rPr>
+                            <m:nor/>
+                          </m:rPr>
+                          <a:rPr lang="el-GR" dirty="0">
+                            <a:latin typeface="Cambria Math" panose="02040503050406030204" pitchFamily="18" charset="0"/>
+                            <a:ea typeface="Cambria Math" panose="02040503050406030204" pitchFamily="18" charset="0"/>
+                          </a:rPr>
+                          <m:t>ε</m:t>
+                        </m:r>
+                      </m:sub>
+                    </m:sSub>
+                    <m:r>
+                      <a:rPr lang="de-DE" i="1">
+                        <a:latin typeface="Cambria Math" panose="02040503050406030204" pitchFamily="18" charset="0"/>
+                      </a:rPr>
+                      <m:t>(</m:t>
+                    </m:r>
+                    <m:r>
+                      <a:rPr lang="de-DE" i="1">
+                        <a:latin typeface="Cambria Math" panose="02040503050406030204" pitchFamily="18" charset="0"/>
+                      </a:rPr>
+                      <m:t>𝑃</m:t>
+                    </m:r>
+                    <m:r>
+                      <a:rPr lang="de-DE" i="1">
+                        <a:latin typeface="Cambria Math" panose="02040503050406030204" pitchFamily="18" charset="0"/>
+                      </a:rPr>
+                      <m:t>)</m:t>
+                    </m:r>
+                  </m:oMath>
+                </a14:m>
+                <a:endParaRPr lang="de-DE" dirty="0"/>
+              </a:p>
+              <a:p>
+                <a:pPr marL="514350" indent="-514350">
+                  <a:buFont typeface="+mj-lt"/>
+                  <a:buAutoNum type="arabicPeriod"/>
+                </a:pPr>
+                <a:r>
+                  <a:rPr lang="de-DE" dirty="0" err="1"/>
+                  <a:t>If</a:t>
+                </a:r>
+                <a:r>
+                  <a:rPr lang="de-DE" dirty="0"/>
+                  <a:t> </a:t>
+                </a:r>
+                <a:r>
+                  <a:rPr lang="de-DE" i="1" dirty="0">
+                    <a:latin typeface="Cambria Math" panose="02040503050406030204" pitchFamily="18" charset="0"/>
+                    <a:ea typeface="Cambria Math" panose="02040503050406030204" pitchFamily="18" charset="0"/>
+                  </a:rPr>
+                  <a:t>P </a:t>
+                </a:r>
+                <a:r>
+                  <a:rPr lang="de-DE" dirty="0"/>
+                  <a:t> </a:t>
+                </a:r>
+                <a:r>
+                  <a:rPr lang="de-DE" dirty="0" err="1"/>
+                  <a:t>is</a:t>
+                </a:r>
+                <a:r>
+                  <a:rPr lang="de-DE" dirty="0"/>
+                  <a:t> a </a:t>
+                </a:r>
+                <a:r>
+                  <a:rPr lang="de-DE" dirty="0" err="1"/>
+                  <a:t>core</a:t>
+                </a:r>
+                <a:r>
+                  <a:rPr lang="de-DE" dirty="0"/>
+                  <a:t> </a:t>
+                </a:r>
+                <a:r>
+                  <a:rPr lang="de-DE" dirty="0" err="1"/>
+                  <a:t>point</a:t>
+                </a:r>
+                <a:r>
+                  <a:rPr lang="de-DE" dirty="0"/>
+                  <a:t>:</a:t>
+                </a:r>
+              </a:p>
+              <a:p>
+                <a:pPr lvl="1"/>
+                <a:r>
+                  <a:rPr lang="de-DE" dirty="0"/>
+                  <a:t>Create a </a:t>
+                </a:r>
+                <a:r>
+                  <a:rPr lang="de-DE" dirty="0" err="1"/>
+                  <a:t>new</a:t>
+                </a:r>
+                <a:r>
+                  <a:rPr lang="de-DE" dirty="0"/>
+                  <a:t> </a:t>
+                </a:r>
+                <a:r>
+                  <a:rPr lang="de-DE" dirty="0" err="1"/>
+                  <a:t>cluster</a:t>
+                </a:r>
+                <a:r>
+                  <a:rPr lang="de-DE" dirty="0"/>
+                  <a:t> and </a:t>
+                </a:r>
+                <a:r>
+                  <a:rPr lang="de-DE" dirty="0" err="1"/>
+                  <a:t>add</a:t>
+                </a:r>
+                <a:r>
+                  <a:rPr lang="de-DE" dirty="0"/>
+                  <a:t> </a:t>
+                </a:r>
+                <a:r>
+                  <a:rPr lang="de-DE" i="1" dirty="0">
+                    <a:latin typeface="Cambria Math" panose="02040503050406030204" pitchFamily="18" charset="0"/>
+                    <a:ea typeface="Cambria Math" panose="02040503050406030204" pitchFamily="18" charset="0"/>
+                  </a:rPr>
+                  <a:t>P</a:t>
+                </a:r>
+                <a:r>
+                  <a:rPr lang="de-DE" dirty="0"/>
+                  <a:t> and all </a:t>
+                </a:r>
+                <a:r>
+                  <a:rPr lang="de-DE" dirty="0" err="1"/>
+                  <a:t>points</a:t>
+                </a:r>
+                <a:r>
+                  <a:rPr lang="de-DE" dirty="0"/>
+                  <a:t> in </a:t>
+                </a:r>
+                <a14:m>
+                  <m:oMath xmlns:m="http://schemas.openxmlformats.org/officeDocument/2006/math">
+                    <m:sSub>
+                      <m:sSubPr>
+                        <m:ctrlPr>
+                          <a:rPr lang="de-DE" i="1">
+                            <a:latin typeface="Cambria Math" panose="02040503050406030204" pitchFamily="18" charset="0"/>
+                          </a:rPr>
+                        </m:ctrlPr>
+                      </m:sSubPr>
+                      <m:e>
+                        <m:r>
+                          <a:rPr lang="de-DE" i="1">
+                            <a:latin typeface="Cambria Math" panose="02040503050406030204" pitchFamily="18" charset="0"/>
+                          </a:rPr>
+                          <m:t>𝑁</m:t>
+                        </m:r>
+                      </m:e>
+                      <m:sub>
+                        <m:r>
+                          <m:rPr>
+                            <m:nor/>
+                          </m:rPr>
+                          <a:rPr lang="el-GR" dirty="0">
+                            <a:latin typeface="Cambria Math" panose="02040503050406030204" pitchFamily="18" charset="0"/>
+                            <a:ea typeface="Cambria Math" panose="02040503050406030204" pitchFamily="18" charset="0"/>
+                          </a:rPr>
+                          <m:t>ε</m:t>
+                        </m:r>
+                      </m:sub>
+                    </m:sSub>
+                    <m:r>
+                      <a:rPr lang="de-DE" i="1">
+                        <a:latin typeface="Cambria Math" panose="02040503050406030204" pitchFamily="18" charset="0"/>
+                      </a:rPr>
+                      <m:t>(</m:t>
+                    </m:r>
+                    <m:r>
+                      <a:rPr lang="de-DE" i="1">
+                        <a:latin typeface="Cambria Math" panose="02040503050406030204" pitchFamily="18" charset="0"/>
+                      </a:rPr>
+                      <m:t>𝑃</m:t>
+                    </m:r>
+                    <m:r>
+                      <a:rPr lang="de-DE" i="1" smtClean="0">
+                        <a:latin typeface="Cambria Math" panose="02040503050406030204" pitchFamily="18" charset="0"/>
+                      </a:rPr>
+                      <m:t>)</m:t>
+                    </m:r>
+                  </m:oMath>
+                </a14:m>
+                <a:r>
+                  <a:rPr lang="de-DE" dirty="0"/>
+                  <a:t> </a:t>
+                </a:r>
+                <a:r>
+                  <a:rPr lang="de-DE" dirty="0" err="1"/>
+                  <a:t>to</a:t>
+                </a:r>
+                <a:r>
+                  <a:rPr lang="de-DE" dirty="0"/>
+                  <a:t> </a:t>
+                </a:r>
+                <a:r>
+                  <a:rPr lang="de-DE" dirty="0" err="1"/>
+                  <a:t>it</a:t>
+                </a:r>
+                <a:r>
+                  <a:rPr lang="de-DE" dirty="0"/>
+                  <a:t> (</a:t>
+                </a:r>
+                <a:r>
+                  <a:rPr lang="de-DE" dirty="0" err="1"/>
+                  <a:t>that</a:t>
+                </a:r>
+                <a:r>
+                  <a:rPr lang="de-DE" dirty="0"/>
+                  <a:t> </a:t>
+                </a:r>
+                <a:r>
+                  <a:rPr lang="de-DE" dirty="0" err="1"/>
+                  <a:t>are</a:t>
+                </a:r>
+                <a:r>
+                  <a:rPr lang="de-DE" dirty="0"/>
+                  <a:t> not </a:t>
+                </a:r>
+                <a:r>
+                  <a:rPr lang="de-DE" dirty="0" err="1"/>
+                  <a:t>yet</a:t>
+                </a:r>
+                <a:r>
+                  <a:rPr lang="de-DE" dirty="0"/>
+                  <a:t> </a:t>
+                </a:r>
+                <a:r>
+                  <a:rPr lang="de-DE" dirty="0" err="1"/>
+                  <a:t>assigned</a:t>
+                </a:r>
+                <a:r>
+                  <a:rPr lang="de-DE" dirty="0"/>
+                  <a:t> </a:t>
+                </a:r>
+                <a:r>
+                  <a:rPr lang="de-DE" dirty="0" err="1"/>
+                  <a:t>to</a:t>
+                </a:r>
+                <a:r>
+                  <a:rPr lang="de-DE" dirty="0"/>
+                  <a:t> </a:t>
+                </a:r>
+                <a:r>
+                  <a:rPr lang="de-DE" dirty="0" err="1"/>
+                  <a:t>any</a:t>
+                </a:r>
+                <a:r>
+                  <a:rPr lang="de-DE" dirty="0"/>
+                  <a:t> </a:t>
+                </a:r>
+                <a:r>
+                  <a:rPr lang="de-DE" dirty="0" err="1"/>
+                  <a:t>cluster</a:t>
+                </a:r>
+                <a:r>
+                  <a:rPr lang="de-DE" dirty="0"/>
+                  <a:t>)</a:t>
+                </a:r>
+              </a:p>
+              <a:p>
+                <a:pPr lvl="1"/>
+                <a:r>
+                  <a:rPr lang="de-DE" dirty="0" err="1"/>
+                  <a:t>For</a:t>
+                </a:r>
+                <a:r>
+                  <a:rPr lang="de-DE" dirty="0"/>
+                  <a:t> </a:t>
+                </a:r>
+                <a:r>
+                  <a:rPr lang="de-DE" dirty="0" err="1"/>
+                  <a:t>each</a:t>
+                </a:r>
+                <a:r>
+                  <a:rPr lang="de-DE" dirty="0"/>
+                  <a:t> </a:t>
+                </a:r>
+                <a:r>
+                  <a:rPr lang="de-DE" dirty="0" err="1"/>
+                  <a:t>point</a:t>
+                </a:r>
+                <a:r>
+                  <a:rPr lang="de-DE" dirty="0"/>
+                  <a:t> </a:t>
+                </a:r>
+                <a:r>
+                  <a:rPr lang="de-DE" i="1" dirty="0">
+                    <a:latin typeface="Cambria Math" panose="02040503050406030204" pitchFamily="18" charset="0"/>
+                    <a:ea typeface="Cambria Math" panose="02040503050406030204" pitchFamily="18" charset="0"/>
+                  </a:rPr>
+                  <a:t>Q</a:t>
+                </a:r>
+                <a:r>
+                  <a:rPr lang="de-DE" dirty="0"/>
+                  <a:t> in </a:t>
+                </a:r>
+                <a14:m>
+                  <m:oMath xmlns:m="http://schemas.openxmlformats.org/officeDocument/2006/math">
+                    <m:sSub>
+                      <m:sSubPr>
+                        <m:ctrlPr>
+                          <a:rPr lang="de-DE" i="1" smtClean="0">
+                            <a:latin typeface="Cambria Math" panose="02040503050406030204" pitchFamily="18" charset="0"/>
+                          </a:rPr>
+                        </m:ctrlPr>
+                      </m:sSubPr>
+                      <m:e>
+                        <m:r>
+                          <a:rPr lang="de-DE" b="0" i="1" smtClean="0">
+                            <a:latin typeface="Cambria Math" panose="02040503050406030204" pitchFamily="18" charset="0"/>
+                          </a:rPr>
+                          <m:t>𝑁</m:t>
+                        </m:r>
+                      </m:e>
+                      <m:sub>
+                        <m:r>
+                          <m:rPr>
+                            <m:nor/>
+                          </m:rPr>
+                          <a:rPr lang="el-GR" dirty="0">
+                            <a:latin typeface="Cambria Math" panose="02040503050406030204" pitchFamily="18" charset="0"/>
+                            <a:ea typeface="Cambria Math" panose="02040503050406030204" pitchFamily="18" charset="0"/>
+                          </a:rPr>
+                          <m:t>ε</m:t>
+                        </m:r>
+                      </m:sub>
+                    </m:sSub>
+                    <m:r>
+                      <a:rPr lang="de-DE" b="0" i="1" smtClean="0">
+                        <a:latin typeface="Cambria Math" panose="02040503050406030204" pitchFamily="18" charset="0"/>
+                      </a:rPr>
+                      <m:t>(</m:t>
+                    </m:r>
+                    <m:r>
+                      <a:rPr lang="de-DE" b="0" i="1" smtClean="0">
+                        <a:latin typeface="Cambria Math" panose="02040503050406030204" pitchFamily="18" charset="0"/>
+                      </a:rPr>
+                      <m:t>𝑃</m:t>
+                    </m:r>
+                    <m:r>
+                      <a:rPr lang="de-DE" b="0" i="1" smtClean="0">
+                        <a:latin typeface="Cambria Math" panose="02040503050406030204" pitchFamily="18" charset="0"/>
+                      </a:rPr>
+                      <m:t>)</m:t>
+                    </m:r>
+                  </m:oMath>
+                </a14:m>
+                <a:r>
+                  <a:rPr lang="de-DE" dirty="0"/>
+                  <a:t>:</a:t>
+                </a:r>
+              </a:p>
+              <a:p>
+                <a:pPr lvl="2"/>
+                <a:r>
+                  <a:rPr lang="de-DE" dirty="0"/>
+                  <a:t>Mark </a:t>
+                </a:r>
+                <a:r>
+                  <a:rPr lang="de-DE" dirty="0" err="1"/>
+                  <a:t>as</a:t>
+                </a:r>
+                <a:r>
+                  <a:rPr lang="de-DE" dirty="0"/>
+                  <a:t> </a:t>
+                </a:r>
+                <a:r>
+                  <a:rPr lang="de-DE" dirty="0" err="1"/>
+                  <a:t>visited</a:t>
+                </a:r>
+                <a:r>
+                  <a:rPr lang="de-DE" dirty="0"/>
+                  <a:t> (</a:t>
+                </a:r>
+                <a:r>
+                  <a:rPr lang="de-DE" dirty="0" err="1"/>
+                  <a:t>if</a:t>
+                </a:r>
+                <a:r>
+                  <a:rPr lang="de-DE" dirty="0"/>
+                  <a:t> </a:t>
+                </a:r>
+                <a:r>
+                  <a:rPr lang="de-DE" dirty="0" err="1"/>
+                  <a:t>unvisited</a:t>
+                </a:r>
+                <a:r>
+                  <a:rPr lang="de-DE" dirty="0"/>
+                  <a:t>) and </a:t>
+                </a:r>
+                <a:r>
+                  <a:rPr lang="de-DE" dirty="0" err="1"/>
+                  <a:t>retrieve</a:t>
+                </a:r>
+                <a:r>
+                  <a:rPr lang="de-DE" dirty="0"/>
+                  <a:t> </a:t>
+                </a:r>
+                <a14:m>
+                  <m:oMath xmlns:m="http://schemas.openxmlformats.org/officeDocument/2006/math">
+                    <m:sSub>
+                      <m:sSubPr>
+                        <m:ctrlPr>
+                          <a:rPr lang="de-DE" i="1">
+                            <a:latin typeface="Cambria Math" panose="02040503050406030204" pitchFamily="18" charset="0"/>
+                          </a:rPr>
+                        </m:ctrlPr>
+                      </m:sSubPr>
+                      <m:e>
+                        <m:r>
+                          <a:rPr lang="de-DE" i="1">
+                            <a:latin typeface="Cambria Math" panose="02040503050406030204" pitchFamily="18" charset="0"/>
+                          </a:rPr>
+                          <m:t>𝑁</m:t>
+                        </m:r>
+                      </m:e>
+                      <m:sub>
+                        <m:r>
+                          <m:rPr>
+                            <m:nor/>
+                          </m:rPr>
+                          <a:rPr lang="el-GR" dirty="0">
+                            <a:latin typeface="Cambria Math" panose="02040503050406030204" pitchFamily="18" charset="0"/>
+                            <a:ea typeface="Cambria Math" panose="02040503050406030204" pitchFamily="18" charset="0"/>
+                          </a:rPr>
+                          <m:t>ε</m:t>
+                        </m:r>
+                      </m:sub>
+                    </m:sSub>
+                    <m:r>
+                      <a:rPr lang="de-DE" i="1">
+                        <a:latin typeface="Cambria Math" panose="02040503050406030204" pitchFamily="18" charset="0"/>
+                      </a:rPr>
+                      <m:t>(</m:t>
+                    </m:r>
+                    <m:r>
+                      <a:rPr lang="de-DE" b="0" i="1" smtClean="0">
+                        <a:latin typeface="Cambria Math" panose="02040503050406030204" pitchFamily="18" charset="0"/>
+                      </a:rPr>
+                      <m:t>𝑄</m:t>
+                    </m:r>
+                    <m:r>
+                      <a:rPr lang="de-DE" i="1">
+                        <a:latin typeface="Cambria Math" panose="02040503050406030204" pitchFamily="18" charset="0"/>
+                      </a:rPr>
+                      <m:t>)</m:t>
+                    </m:r>
+                  </m:oMath>
+                </a14:m>
+                <a:endParaRPr lang="de-DE" dirty="0"/>
+              </a:p>
+              <a:p>
+                <a:pPr lvl="2"/>
+                <a:r>
+                  <a:rPr lang="de-DE" dirty="0" err="1"/>
+                  <a:t>If</a:t>
+                </a:r>
+                <a:r>
+                  <a:rPr lang="de-DE" dirty="0"/>
+                  <a:t> </a:t>
+                </a:r>
+                <a:r>
+                  <a:rPr lang="de-DE" i="1" dirty="0">
+                    <a:latin typeface="Cambria Math" panose="02040503050406030204" pitchFamily="18" charset="0"/>
+                    <a:ea typeface="Cambria Math" panose="02040503050406030204" pitchFamily="18" charset="0"/>
+                  </a:rPr>
+                  <a:t>Q</a:t>
+                </a:r>
+                <a:r>
+                  <a:rPr lang="de-DE" dirty="0"/>
+                  <a:t> </a:t>
+                </a:r>
+                <a:r>
+                  <a:rPr lang="de-DE" dirty="0" err="1"/>
+                  <a:t>is</a:t>
+                </a:r>
+                <a:r>
+                  <a:rPr lang="de-DE" dirty="0"/>
+                  <a:t> a </a:t>
+                </a:r>
+                <a:r>
+                  <a:rPr lang="de-DE" dirty="0" err="1"/>
+                  <a:t>core</a:t>
+                </a:r>
+                <a:r>
+                  <a:rPr lang="de-DE" dirty="0"/>
+                  <a:t> </a:t>
+                </a:r>
+                <a:r>
+                  <a:rPr lang="de-DE" dirty="0" err="1"/>
+                  <a:t>core</a:t>
+                </a:r>
+                <a:r>
+                  <a:rPr lang="de-DE" dirty="0"/>
+                  <a:t> </a:t>
+                </a:r>
+                <a:r>
+                  <a:rPr lang="de-DE" dirty="0" err="1"/>
+                  <a:t>point</a:t>
+                </a:r>
+                <a:r>
+                  <a:rPr lang="de-DE" dirty="0"/>
+                  <a:t>: </a:t>
+                </a:r>
+                <a:r>
+                  <a:rPr lang="de-DE" dirty="0" err="1"/>
+                  <a:t>iteratively</a:t>
+                </a:r>
+                <a:r>
+                  <a:rPr lang="de-DE" dirty="0"/>
+                  <a:t> </a:t>
+                </a:r>
+                <a:r>
+                  <a:rPr lang="de-DE" dirty="0" err="1"/>
+                  <a:t>expand</a:t>
+                </a:r>
+                <a:r>
+                  <a:rPr lang="de-DE" dirty="0"/>
+                  <a:t> </a:t>
+                </a:r>
+                <a:r>
+                  <a:rPr lang="de-DE" dirty="0" err="1"/>
+                  <a:t>the</a:t>
+                </a:r>
+                <a:r>
+                  <a:rPr lang="de-DE" dirty="0"/>
+                  <a:t> </a:t>
+                </a:r>
+                <a:r>
+                  <a:rPr lang="de-DE" dirty="0" err="1"/>
+                  <a:t>cluster</a:t>
+                </a:r>
+                <a:r>
+                  <a:rPr lang="de-DE" dirty="0"/>
+                  <a:t> (</a:t>
+                </a:r>
+                <a:r>
+                  <a:rPr lang="de-DE" dirty="0" err="1"/>
+                  <a:t>density-reachable</a:t>
+                </a:r>
+                <a:r>
+                  <a:rPr lang="de-DE" dirty="0"/>
+                  <a:t> </a:t>
+                </a:r>
+                <a:r>
+                  <a:rPr lang="de-DE" dirty="0" err="1"/>
+                  <a:t>points</a:t>
+                </a:r>
+                <a:r>
+                  <a:rPr lang="de-DE" dirty="0"/>
+                  <a:t>)</a:t>
+                </a:r>
+              </a:p>
+              <a:p>
+                <a:pPr marL="514350" indent="-514350">
+                  <a:buFont typeface="+mj-lt"/>
+                  <a:buAutoNum type="arabicPeriod"/>
+                </a:pPr>
+                <a:r>
+                  <a:rPr lang="de-DE" dirty="0"/>
+                  <a:t>Else: </a:t>
+                </a:r>
+                <a:r>
+                  <a:rPr lang="de-DE" dirty="0" err="1"/>
+                  <a:t>mark</a:t>
+                </a:r>
+                <a:r>
+                  <a:rPr lang="de-DE" dirty="0"/>
+                  <a:t> </a:t>
+                </a:r>
+                <a:r>
+                  <a:rPr lang="de-DE" i="1" dirty="0">
+                    <a:latin typeface="Cambria Math" panose="02040503050406030204" pitchFamily="18" charset="0"/>
+                    <a:ea typeface="Cambria Math" panose="02040503050406030204" pitchFamily="18" charset="0"/>
+                  </a:rPr>
+                  <a:t>P </a:t>
+                </a:r>
+                <a:r>
+                  <a:rPr lang="de-DE" dirty="0"/>
+                  <a:t> </a:t>
+                </a:r>
+                <a:r>
+                  <a:rPr lang="de-DE" dirty="0" err="1"/>
+                  <a:t>as</a:t>
+                </a:r>
+                <a:r>
+                  <a:rPr lang="de-DE" dirty="0"/>
+                  <a:t> </a:t>
+                </a:r>
+                <a:r>
+                  <a:rPr lang="de-DE" dirty="0" err="1"/>
+                  <a:t>noise</a:t>
+                </a:r>
+                <a:r>
+                  <a:rPr lang="de-DE" dirty="0"/>
+                  <a:t> (</a:t>
+                </a:r>
+                <a:r>
+                  <a:rPr lang="de-DE" dirty="0" err="1"/>
+                  <a:t>temporary</a:t>
+                </a:r>
+                <a:r>
+                  <a:rPr lang="de-DE" dirty="0"/>
+                  <a:t>, </a:t>
+                </a:r>
+                <a:r>
+                  <a:rPr lang="de-DE" dirty="0" err="1"/>
+                  <a:t>may</a:t>
+                </a:r>
+                <a:r>
+                  <a:rPr lang="de-DE" dirty="0"/>
+                  <a:t> </a:t>
+                </a:r>
+                <a:r>
+                  <a:rPr lang="de-DE" dirty="0" err="1"/>
+                  <a:t>later</a:t>
+                </a:r>
+                <a:r>
+                  <a:rPr lang="de-DE" dirty="0"/>
+                  <a:t> </a:t>
+                </a:r>
+                <a:r>
+                  <a:rPr lang="de-DE" dirty="0" err="1"/>
+                  <a:t>become</a:t>
+                </a:r>
+                <a:r>
+                  <a:rPr lang="de-DE" dirty="0"/>
+                  <a:t> a </a:t>
+                </a:r>
+                <a:r>
+                  <a:rPr lang="de-DE" dirty="0" err="1"/>
+                  <a:t>border</a:t>
+                </a:r>
+                <a:r>
+                  <a:rPr lang="de-DE" dirty="0"/>
+                  <a:t> </a:t>
+                </a:r>
+                <a:r>
+                  <a:rPr lang="de-DE" dirty="0" err="1"/>
+                  <a:t>point</a:t>
+                </a:r>
+                <a:r>
+                  <a:rPr lang="de-DE" dirty="0"/>
+                  <a:t>)</a:t>
+                </a:r>
+              </a:p>
+              <a:p>
+                <a:pPr marL="514350" indent="-514350">
+                  <a:buFont typeface="+mj-lt"/>
+                  <a:buAutoNum type="arabicPeriod"/>
+                </a:pPr>
+                <a:r>
+                  <a:rPr lang="de-DE" dirty="0"/>
+                  <a:t>Repeat </a:t>
+                </a:r>
+                <a:r>
+                  <a:rPr lang="de-DE" dirty="0" err="1"/>
+                  <a:t>until</a:t>
+                </a:r>
+                <a:r>
+                  <a:rPr lang="de-DE" dirty="0"/>
+                  <a:t> all </a:t>
+                </a:r>
+                <a:r>
+                  <a:rPr lang="de-DE" dirty="0" err="1"/>
+                  <a:t>points</a:t>
+                </a:r>
+                <a:r>
+                  <a:rPr lang="de-DE" dirty="0"/>
+                  <a:t> </a:t>
+                </a:r>
+                <a:r>
+                  <a:rPr lang="de-DE" dirty="0" err="1"/>
+                  <a:t>are</a:t>
+                </a:r>
+                <a:r>
+                  <a:rPr lang="de-DE" dirty="0"/>
+                  <a:t> </a:t>
+                </a:r>
+                <a:r>
+                  <a:rPr lang="de-DE" dirty="0" err="1"/>
+                  <a:t>processed</a:t>
+                </a:r>
+                <a:endParaRPr lang="de-DE" dirty="0"/>
+              </a:p>
+              <a:p>
+                <a:pPr marL="0" indent="0">
+                  <a:buNone/>
+                </a:pPr>
+                <a:endParaRPr lang="de-DE" dirty="0"/>
+              </a:p>
+              <a:p>
+                <a:pPr marL="0" indent="0">
+                  <a:buNone/>
+                </a:pPr>
+                <a:r>
+                  <a:rPr lang="de-DE" dirty="0"/>
+                  <a:t>Cluster </a:t>
+                </a:r>
+                <a:r>
+                  <a:rPr lang="de-DE" dirty="0" err="1"/>
+                  <a:t>formation</a:t>
+                </a:r>
+                <a:r>
+                  <a:rPr lang="de-DE" dirty="0"/>
+                  <a:t> </a:t>
+                </a:r>
+                <a:r>
+                  <a:rPr lang="de-DE" dirty="0" err="1"/>
+                  <a:t>concept</a:t>
+                </a:r>
+                <a:r>
+                  <a:rPr lang="de-DE" dirty="0"/>
+                  <a:t>:</a:t>
+                </a:r>
+              </a:p>
+              <a:p>
+                <a:r>
+                  <a:rPr lang="de-DE" dirty="0"/>
+                  <a:t>Points </a:t>
+                </a:r>
+                <a:r>
+                  <a:rPr lang="de-DE" dirty="0" err="1"/>
+                  <a:t>are</a:t>
+                </a:r>
+                <a:r>
+                  <a:rPr lang="de-DE" dirty="0"/>
+                  <a:t> </a:t>
+                </a:r>
+                <a:r>
+                  <a:rPr lang="de-DE" dirty="0" err="1"/>
+                  <a:t>density-connected</a:t>
+                </a:r>
+                <a:r>
+                  <a:rPr lang="de-DE" dirty="0"/>
+                  <a:t> </a:t>
+                </a:r>
+                <a:r>
+                  <a:rPr lang="de-DE" dirty="0" err="1"/>
+                  <a:t>if</a:t>
+                </a:r>
+                <a:r>
+                  <a:rPr lang="de-DE" dirty="0"/>
+                  <a:t> </a:t>
+                </a:r>
+                <a:r>
+                  <a:rPr lang="de-DE" dirty="0" err="1"/>
+                  <a:t>they</a:t>
+                </a:r>
+                <a:r>
+                  <a:rPr lang="de-DE" dirty="0"/>
+                  <a:t> </a:t>
+                </a:r>
+                <a:r>
+                  <a:rPr lang="de-DE" dirty="0" err="1"/>
+                  <a:t>can</a:t>
+                </a:r>
+                <a:r>
+                  <a:rPr lang="de-DE" dirty="0"/>
+                  <a:t> </a:t>
+                </a:r>
+                <a:r>
+                  <a:rPr lang="de-DE" dirty="0" err="1"/>
+                  <a:t>be</a:t>
+                </a:r>
+                <a:r>
+                  <a:rPr lang="de-DE" dirty="0"/>
+                  <a:t> </a:t>
+                </a:r>
+                <a:r>
+                  <a:rPr lang="de-DE" dirty="0" err="1"/>
+                  <a:t>reached</a:t>
+                </a:r>
+                <a:r>
+                  <a:rPr lang="de-DE" dirty="0"/>
+                  <a:t> via a </a:t>
+                </a:r>
+                <a:r>
+                  <a:rPr lang="de-DE" dirty="0" err="1"/>
+                  <a:t>chain</a:t>
+                </a:r>
+                <a:r>
+                  <a:rPr lang="de-DE" dirty="0"/>
+                  <a:t> </a:t>
+                </a:r>
+                <a:r>
+                  <a:rPr lang="de-DE" dirty="0" err="1"/>
+                  <a:t>of</a:t>
+                </a:r>
+                <a:r>
+                  <a:rPr lang="de-DE" dirty="0"/>
+                  <a:t> </a:t>
+                </a:r>
+                <a:r>
+                  <a:rPr lang="de-DE" dirty="0" err="1"/>
+                  <a:t>core</a:t>
+                </a:r>
+                <a:r>
+                  <a:rPr lang="de-DE" dirty="0"/>
+                  <a:t> </a:t>
+                </a:r>
+                <a:r>
+                  <a:rPr lang="de-DE" dirty="0" err="1"/>
+                  <a:t>points</a:t>
+                </a:r>
+                <a:endParaRPr lang="de-DE" dirty="0"/>
+              </a:p>
+              <a:p>
+                <a:r>
+                  <a:rPr lang="de-DE" dirty="0"/>
+                  <a:t>Clusters </a:t>
+                </a:r>
+                <a:r>
+                  <a:rPr lang="de-DE" dirty="0" err="1"/>
+                  <a:t>grow</a:t>
+                </a:r>
+                <a:r>
+                  <a:rPr lang="de-DE" dirty="0"/>
+                  <a:t> </a:t>
+                </a:r>
+                <a:r>
+                  <a:rPr lang="de-DE" dirty="0" err="1"/>
+                  <a:t>outward</a:t>
+                </a:r>
+                <a:r>
+                  <a:rPr lang="de-DE" dirty="0"/>
+                  <a:t> </a:t>
+                </a:r>
+                <a:r>
+                  <a:rPr lang="de-DE" dirty="0" err="1"/>
+                  <a:t>from</a:t>
+                </a:r>
+                <a:r>
+                  <a:rPr lang="de-DE" dirty="0"/>
+                  <a:t> </a:t>
+                </a:r>
+                <a:r>
+                  <a:rPr lang="de-DE" dirty="0" err="1"/>
+                  <a:t>core</a:t>
+                </a:r>
+                <a:r>
+                  <a:rPr lang="de-DE" dirty="0"/>
+                  <a:t> </a:t>
+                </a:r>
+                <a:r>
+                  <a:rPr lang="de-DE" dirty="0" err="1"/>
+                  <a:t>points</a:t>
+                </a:r>
+                <a:endParaRPr lang="de-DE" dirty="0"/>
+              </a:p>
+            </p:txBody>
+          </p:sp>
+        </mc:Choice>
+        <mc:Fallback>
+          <p:sp>
+            <p:nvSpPr>
+              <p:cNvPr id="3" name="Inhaltsplatzhalter 2">
+                <a:extLst>
+                  <a:ext uri="{FF2B5EF4-FFF2-40B4-BE49-F238E27FC236}">
+                    <a16:creationId xmlns:a16="http://schemas.microsoft.com/office/drawing/2014/main" id="{48293539-B5EA-4406-02DD-1F9D36FDC673}"/>
+                  </a:ext>
+                </a:extLst>
+              </p:cNvPr>
+              <p:cNvSpPr>
+                <a:spLocks noGrp="1" noRot="1" noChangeAspect="1" noMove="1" noResize="1" noEditPoints="1" noAdjustHandles="1" noChangeArrowheads="1" noChangeShapeType="1" noTextEdit="1"/>
+              </p:cNvSpPr>
+              <p:nvPr>
+                <p:ph idx="1"/>
+              </p:nvPr>
+            </p:nvSpPr>
+            <p:spPr>
+              <a:blipFill>
+                <a:blip r:embed="rId2"/>
+                <a:stretch>
+                  <a:fillRect l="-724" t="-2616"/>
+                </a:stretch>
+              </a:blipFill>
+            </p:spPr>
+            <p:txBody>
+              <a:bodyPr/>
+              <a:lstStyle/>
+              <a:p>
+                <a:r>
+                  <a:rPr lang="de-DE">
+                    <a:noFill/>
+                  </a:rPr>
+                  <a:t> </a:t>
+                </a:r>
+              </a:p>
+            </p:txBody>
+          </p:sp>
+        </mc:Fallback>
+      </mc:AlternateContent>
       <p:sp>
         <p:nvSpPr>
           <p:cNvPr id="4" name="Foliennummernplatzhalter 3">
@@ -17945,6 +19045,607 @@
           <p:cNvPr id="2" name="Titel 1">
             <a:extLst>
               <a:ext uri="{FF2B5EF4-FFF2-40B4-BE49-F238E27FC236}">
+                <a16:creationId xmlns:a16="http://schemas.microsoft.com/office/drawing/2014/main" id="{12451C77-ED0D-F705-8D1C-ADFA8F6C97BF}"/>
+              </a:ext>
+            </a:extLst>
+          </p:cNvPr>
+          <p:cNvSpPr>
+            <a:spLocks noGrp="1"/>
+          </p:cNvSpPr>
+          <p:nvPr>
+            <p:ph type="title"/>
+          </p:nvPr>
+        </p:nvSpPr>
+        <p:spPr/>
+        <p:txBody>
+          <a:bodyPr/>
+          <a:lstStyle/>
+          <a:p>
+            <a:r>
+              <a:rPr lang="de-DE" dirty="0"/>
+              <a:t>How </a:t>
+            </a:r>
+            <a:r>
+              <a:rPr lang="de-DE" dirty="0" err="1"/>
+              <a:t>to</a:t>
+            </a:r>
+            <a:r>
+              <a:rPr lang="de-DE" dirty="0"/>
+              <a:t> </a:t>
+            </a:r>
+            <a:r>
+              <a:rPr lang="de-DE" dirty="0" err="1"/>
+              <a:t>Assign</a:t>
+            </a:r>
+            <a:r>
+              <a:rPr lang="de-DE" dirty="0"/>
+              <a:t> New Points</a:t>
+            </a:r>
+          </a:p>
+        </p:txBody>
+      </p:sp>
+      <p:sp>
+        <p:nvSpPr>
+          <p:cNvPr id="3" name="Inhaltsplatzhalter 2">
+            <a:extLst>
+              <a:ext uri="{FF2B5EF4-FFF2-40B4-BE49-F238E27FC236}">
+                <a16:creationId xmlns:a16="http://schemas.microsoft.com/office/drawing/2014/main" id="{FA126657-2593-4771-3A67-51F3B2F3A6EF}"/>
+              </a:ext>
+            </a:extLst>
+          </p:cNvPr>
+          <p:cNvSpPr>
+            <a:spLocks noGrp="1"/>
+          </p:cNvSpPr>
+          <p:nvPr>
+            <p:ph idx="1"/>
+          </p:nvPr>
+        </p:nvSpPr>
+        <p:spPr/>
+        <p:txBody>
+          <a:bodyPr>
+            <a:normAutofit/>
+          </a:bodyPr>
+          <a:lstStyle/>
+          <a:p>
+            <a:pPr marL="0" indent="0">
+              <a:buNone/>
+            </a:pPr>
+            <a:r>
+              <a:rPr lang="de-DE" dirty="0" err="1"/>
+              <a:t>For</a:t>
+            </a:r>
+            <a:r>
+              <a:rPr lang="de-DE" dirty="0"/>
+              <a:t> a </a:t>
+            </a:r>
+            <a:r>
+              <a:rPr lang="de-DE" dirty="0" err="1"/>
+              <a:t>new</a:t>
+            </a:r>
+            <a:r>
+              <a:rPr lang="de-DE" dirty="0"/>
+              <a:t> </a:t>
+            </a:r>
+            <a:r>
+              <a:rPr lang="de-DE" dirty="0" err="1"/>
+              <a:t>point</a:t>
+            </a:r>
+            <a:r>
+              <a:rPr lang="de-DE" dirty="0"/>
+              <a:t>: Check </a:t>
+            </a:r>
+            <a:r>
+              <a:rPr lang="de-DE" dirty="0" err="1"/>
+              <a:t>its</a:t>
+            </a:r>
+            <a:r>
+              <a:rPr lang="de-DE" dirty="0"/>
+              <a:t> </a:t>
+            </a:r>
+            <a:r>
+              <a:rPr lang="el-GR" dirty="0">
+                <a:latin typeface="Cambria Math" panose="02040503050406030204" pitchFamily="18" charset="0"/>
+                <a:ea typeface="Cambria Math" panose="02040503050406030204" pitchFamily="18" charset="0"/>
+              </a:rPr>
+              <a:t>ε</a:t>
+            </a:r>
+            <a:r>
+              <a:rPr lang="el-GR" dirty="0"/>
+              <a:t>-</a:t>
+            </a:r>
+            <a:r>
+              <a:rPr lang="de-DE" dirty="0" err="1"/>
+              <a:t>neighborhood</a:t>
+            </a:r>
+            <a:endParaRPr lang="de-DE" dirty="0"/>
+          </a:p>
+          <a:p>
+            <a:r>
+              <a:rPr lang="de-DE" dirty="0" err="1"/>
+              <a:t>If</a:t>
+            </a:r>
+            <a:r>
+              <a:rPr lang="de-DE" dirty="0"/>
+              <a:t> </a:t>
+            </a:r>
+            <a:r>
+              <a:rPr lang="de-DE" dirty="0" err="1"/>
+              <a:t>within</a:t>
+            </a:r>
+            <a:r>
+              <a:rPr lang="de-DE" dirty="0"/>
+              <a:t> </a:t>
+            </a:r>
+            <a:r>
+              <a:rPr lang="el-GR" dirty="0">
+                <a:latin typeface="Cambria Math" panose="02040503050406030204" pitchFamily="18" charset="0"/>
+                <a:ea typeface="Cambria Math" panose="02040503050406030204" pitchFamily="18" charset="0"/>
+              </a:rPr>
+              <a:t>ε</a:t>
+            </a:r>
+            <a:r>
+              <a:rPr lang="el-GR" dirty="0"/>
+              <a:t> </a:t>
+            </a:r>
+            <a:r>
+              <a:rPr lang="de-DE" dirty="0" err="1"/>
+              <a:t>of</a:t>
+            </a:r>
+            <a:r>
+              <a:rPr lang="de-DE" dirty="0"/>
+              <a:t> a </a:t>
+            </a:r>
+            <a:r>
+              <a:rPr lang="de-DE" dirty="0" err="1"/>
+              <a:t>core</a:t>
+            </a:r>
+            <a:r>
+              <a:rPr lang="de-DE" dirty="0"/>
+              <a:t> </a:t>
+            </a:r>
+            <a:r>
+              <a:rPr lang="de-DE" dirty="0" err="1"/>
+              <a:t>point</a:t>
+            </a:r>
+            <a:r>
+              <a:rPr lang="de-DE" dirty="0"/>
+              <a:t>: </a:t>
+            </a:r>
+            <a:r>
+              <a:rPr lang="de-DE" dirty="0" err="1"/>
+              <a:t>Assign</a:t>
+            </a:r>
+            <a:r>
+              <a:rPr lang="de-DE" dirty="0"/>
+              <a:t> </a:t>
+            </a:r>
+            <a:r>
+              <a:rPr lang="de-DE" dirty="0" err="1"/>
+              <a:t>it</a:t>
+            </a:r>
+            <a:r>
+              <a:rPr lang="de-DE" dirty="0"/>
+              <a:t> </a:t>
+            </a:r>
+            <a:r>
+              <a:rPr lang="de-DE" dirty="0" err="1"/>
+              <a:t>to</a:t>
+            </a:r>
+            <a:r>
+              <a:rPr lang="de-DE" dirty="0"/>
+              <a:t> </a:t>
+            </a:r>
+            <a:r>
+              <a:rPr lang="de-DE" dirty="0" err="1"/>
+              <a:t>that</a:t>
+            </a:r>
+            <a:r>
+              <a:rPr lang="de-DE" dirty="0"/>
+              <a:t> </a:t>
+            </a:r>
+            <a:r>
+              <a:rPr lang="de-DE" dirty="0" err="1"/>
+              <a:t>cluster</a:t>
+            </a:r>
+            <a:endParaRPr lang="de-DE" dirty="0"/>
+          </a:p>
+          <a:p>
+            <a:r>
+              <a:rPr lang="de-DE" dirty="0" err="1"/>
+              <a:t>If</a:t>
+            </a:r>
+            <a:r>
+              <a:rPr lang="de-DE" dirty="0"/>
+              <a:t> not </a:t>
+            </a:r>
+            <a:r>
+              <a:rPr lang="de-DE" dirty="0" err="1"/>
+              <a:t>near</a:t>
+            </a:r>
+            <a:r>
+              <a:rPr lang="de-DE" dirty="0"/>
+              <a:t> </a:t>
+            </a:r>
+            <a:r>
+              <a:rPr lang="de-DE" dirty="0" err="1"/>
+              <a:t>any</a:t>
+            </a:r>
+            <a:r>
+              <a:rPr lang="de-DE" dirty="0"/>
+              <a:t> </a:t>
+            </a:r>
+            <a:r>
+              <a:rPr lang="de-DE" dirty="0" err="1"/>
+              <a:t>core</a:t>
+            </a:r>
+            <a:r>
+              <a:rPr lang="de-DE" dirty="0"/>
+              <a:t> </a:t>
+            </a:r>
+            <a:r>
+              <a:rPr lang="de-DE" dirty="0" err="1"/>
+              <a:t>point</a:t>
+            </a:r>
+            <a:r>
+              <a:rPr lang="de-DE" dirty="0"/>
+              <a:t>: Label </a:t>
+            </a:r>
+            <a:r>
+              <a:rPr lang="de-DE" dirty="0" err="1"/>
+              <a:t>as</a:t>
+            </a:r>
+            <a:r>
+              <a:rPr lang="de-DE" dirty="0"/>
+              <a:t> </a:t>
+            </a:r>
+            <a:r>
+              <a:rPr lang="de-DE" dirty="0" err="1"/>
+              <a:t>noise</a:t>
+            </a:r>
+            <a:endParaRPr lang="de-DE" dirty="0"/>
+          </a:p>
+          <a:p>
+            <a:r>
+              <a:rPr lang="de-DE" dirty="0" err="1"/>
+              <a:t>If</a:t>
+            </a:r>
+            <a:r>
+              <a:rPr lang="de-DE" dirty="0"/>
+              <a:t> </a:t>
+            </a:r>
+            <a:r>
+              <a:rPr lang="de-DE" dirty="0" err="1"/>
+              <a:t>within</a:t>
+            </a:r>
+            <a:r>
+              <a:rPr lang="de-DE" dirty="0"/>
+              <a:t> </a:t>
+            </a:r>
+            <a:r>
+              <a:rPr lang="el-GR" dirty="0">
+                <a:latin typeface="Cambria Math" panose="02040503050406030204" pitchFamily="18" charset="0"/>
+                <a:ea typeface="Cambria Math" panose="02040503050406030204" pitchFamily="18" charset="0"/>
+              </a:rPr>
+              <a:t>ε</a:t>
+            </a:r>
+            <a:r>
+              <a:rPr lang="el-GR" dirty="0"/>
+              <a:t> </a:t>
+            </a:r>
+            <a:r>
+              <a:rPr lang="de-DE" dirty="0" err="1"/>
+              <a:t>of</a:t>
+            </a:r>
+            <a:r>
+              <a:rPr lang="de-DE" dirty="0"/>
+              <a:t> </a:t>
+            </a:r>
+            <a:r>
+              <a:rPr lang="de-DE" dirty="0" err="1"/>
+              <a:t>core</a:t>
+            </a:r>
+            <a:r>
+              <a:rPr lang="de-DE" dirty="0"/>
+              <a:t> </a:t>
+            </a:r>
+            <a:r>
+              <a:rPr lang="de-DE" dirty="0" err="1"/>
+              <a:t>points</a:t>
+            </a:r>
+            <a:r>
+              <a:rPr lang="de-DE" dirty="0"/>
+              <a:t> </a:t>
+            </a:r>
+            <a:r>
+              <a:rPr lang="de-DE" dirty="0" err="1"/>
+              <a:t>from</a:t>
+            </a:r>
+            <a:r>
+              <a:rPr lang="de-DE" dirty="0"/>
+              <a:t> different </a:t>
+            </a:r>
+            <a:r>
+              <a:rPr lang="de-DE" dirty="0" err="1"/>
+              <a:t>clusters</a:t>
+            </a:r>
+            <a:r>
+              <a:rPr lang="de-DE" dirty="0"/>
+              <a:t>:</a:t>
+            </a:r>
+          </a:p>
+          <a:p>
+            <a:pPr lvl="1"/>
+            <a:r>
+              <a:rPr lang="de-DE" dirty="0"/>
+              <a:t>Option 1: </a:t>
+            </a:r>
+            <a:r>
+              <a:rPr lang="de-DE" dirty="0" err="1"/>
+              <a:t>Assign</a:t>
+            </a:r>
+            <a:r>
+              <a:rPr lang="de-DE" dirty="0"/>
+              <a:t> </a:t>
+            </a:r>
+            <a:r>
+              <a:rPr lang="de-DE" dirty="0" err="1"/>
+              <a:t>to</a:t>
+            </a:r>
+            <a:r>
+              <a:rPr lang="de-DE" dirty="0"/>
+              <a:t> </a:t>
+            </a:r>
+            <a:r>
+              <a:rPr lang="de-DE" dirty="0" err="1"/>
+              <a:t>first</a:t>
+            </a:r>
+            <a:r>
+              <a:rPr lang="de-DE" dirty="0"/>
+              <a:t> </a:t>
+            </a:r>
+            <a:r>
+              <a:rPr lang="de-DE" dirty="0" err="1"/>
+              <a:t>found</a:t>
+            </a:r>
+            <a:r>
+              <a:rPr lang="de-DE" dirty="0"/>
+              <a:t> (like DBSCAN </a:t>
+            </a:r>
+            <a:r>
+              <a:rPr lang="de-DE" dirty="0" err="1"/>
+              <a:t>would</a:t>
+            </a:r>
+            <a:r>
+              <a:rPr lang="de-DE" dirty="0"/>
+              <a:t>)</a:t>
+            </a:r>
+          </a:p>
+          <a:p>
+            <a:pPr lvl="1"/>
+            <a:r>
+              <a:rPr lang="de-DE" dirty="0"/>
+              <a:t>Option 2: </a:t>
+            </a:r>
+            <a:r>
+              <a:rPr lang="de-DE" dirty="0" err="1"/>
+              <a:t>Assign</a:t>
+            </a:r>
+            <a:r>
+              <a:rPr lang="de-DE" dirty="0"/>
+              <a:t> </a:t>
+            </a:r>
+            <a:r>
+              <a:rPr lang="de-DE" dirty="0" err="1"/>
+              <a:t>to</a:t>
+            </a:r>
+            <a:r>
+              <a:rPr lang="de-DE" dirty="0"/>
+              <a:t> </a:t>
+            </a:r>
+            <a:r>
+              <a:rPr lang="de-DE" dirty="0" err="1"/>
+              <a:t>closest</a:t>
+            </a:r>
+            <a:r>
+              <a:rPr lang="de-DE" dirty="0"/>
+              <a:t> </a:t>
+            </a:r>
+            <a:r>
+              <a:rPr lang="de-DE" dirty="0" err="1"/>
+              <a:t>core</a:t>
+            </a:r>
+            <a:r>
+              <a:rPr lang="de-DE" dirty="0"/>
+              <a:t> </a:t>
+            </a:r>
+            <a:r>
+              <a:rPr lang="de-DE" dirty="0" err="1"/>
+              <a:t>point</a:t>
+            </a:r>
+            <a:endParaRPr lang="de-DE" dirty="0"/>
+          </a:p>
+          <a:p>
+            <a:pPr marL="0" indent="0">
+              <a:buNone/>
+            </a:pPr>
+            <a:endParaRPr lang="de-DE" b="1" dirty="0"/>
+          </a:p>
+          <a:p>
+            <a:pPr marL="0" indent="0">
+              <a:buNone/>
+            </a:pPr>
+            <a:r>
+              <a:rPr lang="de-DE" dirty="0" err="1"/>
+              <a:t>Adding</a:t>
+            </a:r>
+            <a:r>
+              <a:rPr lang="de-DE" dirty="0"/>
+              <a:t> </a:t>
+            </a:r>
+            <a:r>
+              <a:rPr lang="de-DE" dirty="0" err="1"/>
+              <a:t>one</a:t>
+            </a:r>
+            <a:r>
+              <a:rPr lang="de-DE" dirty="0"/>
+              <a:t> </a:t>
+            </a:r>
+            <a:r>
+              <a:rPr lang="de-DE" dirty="0" err="1"/>
+              <a:t>point</a:t>
+            </a:r>
+            <a:r>
+              <a:rPr lang="de-DE" dirty="0"/>
+              <a:t> </a:t>
+            </a:r>
+            <a:r>
+              <a:rPr lang="de-DE" dirty="0" err="1"/>
+              <a:t>can</a:t>
+            </a:r>
+            <a:r>
+              <a:rPr lang="de-DE" dirty="0"/>
+              <a:t> </a:t>
+            </a:r>
+            <a:r>
+              <a:rPr lang="de-DE" dirty="0" err="1"/>
+              <a:t>change</a:t>
+            </a:r>
+            <a:r>
+              <a:rPr lang="de-DE" dirty="0"/>
+              <a:t> </a:t>
+            </a:r>
+            <a:r>
+              <a:rPr lang="de-DE" dirty="0" err="1"/>
+              <a:t>cluster</a:t>
+            </a:r>
+            <a:r>
+              <a:rPr lang="de-DE" dirty="0"/>
+              <a:t> </a:t>
+            </a:r>
+            <a:r>
+              <a:rPr lang="de-DE" dirty="0" err="1"/>
+              <a:t>structure</a:t>
+            </a:r>
+            <a:endParaRPr lang="de-DE" dirty="0"/>
+          </a:p>
+          <a:p>
+            <a:pPr marL="0" indent="0">
+              <a:buNone/>
+            </a:pPr>
+            <a:r>
+              <a:rPr lang="de-DE" dirty="0">
+                <a:sym typeface="Wingdings" pitchFamily="2" charset="2"/>
+              </a:rPr>
+              <a:t> </a:t>
+            </a:r>
+            <a:r>
+              <a:rPr lang="de-DE" dirty="0"/>
+              <a:t>True DBSCAN </a:t>
+            </a:r>
+            <a:r>
+              <a:rPr lang="de-DE" dirty="0" err="1"/>
+              <a:t>would</a:t>
+            </a:r>
+            <a:r>
+              <a:rPr lang="de-DE" dirty="0"/>
+              <a:t> </a:t>
+            </a:r>
+            <a:r>
+              <a:rPr lang="de-DE" dirty="0" err="1"/>
+              <a:t>require</a:t>
+            </a:r>
+            <a:r>
+              <a:rPr lang="de-DE" dirty="0"/>
+              <a:t> </a:t>
+            </a:r>
+            <a:r>
+              <a:rPr lang="de-DE" dirty="0" err="1"/>
+              <a:t>re-running</a:t>
+            </a:r>
+            <a:r>
+              <a:rPr lang="de-DE" dirty="0"/>
+              <a:t> </a:t>
+            </a:r>
+            <a:r>
+              <a:rPr lang="de-DE" dirty="0" err="1"/>
+              <a:t>the</a:t>
+            </a:r>
+            <a:r>
+              <a:rPr lang="de-DE" dirty="0"/>
+              <a:t> </a:t>
+            </a:r>
+            <a:r>
+              <a:rPr lang="de-DE" dirty="0" err="1"/>
+              <a:t>algorithm</a:t>
+            </a:r>
+            <a:endParaRPr lang="de-DE" dirty="0"/>
+          </a:p>
+        </p:txBody>
+      </p:sp>
+      <p:sp>
+        <p:nvSpPr>
+          <p:cNvPr id="4" name="Foliennummernplatzhalter 3">
+            <a:extLst>
+              <a:ext uri="{FF2B5EF4-FFF2-40B4-BE49-F238E27FC236}">
+                <a16:creationId xmlns:a16="http://schemas.microsoft.com/office/drawing/2014/main" id="{0B161C99-D9A5-D8DB-0687-150C7C9C9AE1}"/>
+              </a:ext>
+            </a:extLst>
+          </p:cNvPr>
+          <p:cNvSpPr>
+            <a:spLocks noGrp="1"/>
+          </p:cNvSpPr>
+          <p:nvPr>
+            <p:ph type="sldNum" sz="quarter" idx="12"/>
+          </p:nvPr>
+        </p:nvSpPr>
+        <p:spPr/>
+        <p:txBody>
+          <a:bodyPr/>
+          <a:lstStyle/>
+          <a:p>
+            <a:fld id="{08C366F5-AFAD-49CB-854A-9D9E238FCA13}" type="slidenum">
+              <a:rPr lang="en-GB" smtClean="0"/>
+              <a:t>34</a:t>
+            </a:fld>
+            <a:endParaRPr lang="en-GB"/>
+          </a:p>
+        </p:txBody>
+      </p:sp>
+    </p:spTree>
+    <p:extLst>
+      <p:ext uri="{BB962C8B-B14F-4D97-AF65-F5344CB8AC3E}">
+        <p14:creationId xmlns:p14="http://schemas.microsoft.com/office/powerpoint/2010/main" val="1263246602"/>
+      </p:ext>
+    </p:extLst>
+  </p:cSld>
+  <p:clrMapOvr>
+    <a:masterClrMapping/>
+  </p:clrMapOvr>
+</p:sld>
+</file>
+
+<file path=ppt/slides/slide35.xml><?xml version="1.0" encoding="utf-8"?>
+<p:sld xmlns:a="http://schemas.openxmlformats.org/drawingml/2006/main" xmlns:r="http://schemas.openxmlformats.org/officeDocument/2006/relationships" xmlns:p="http://schemas.openxmlformats.org/presentationml/2006/main">
+  <p:cSld>
+    <p:spTree>
+      <p:nvGrpSpPr>
+        <p:cNvPr id="1" name=""/>
+        <p:cNvGrpSpPr/>
+        <p:nvPr/>
+      </p:nvGrpSpPr>
+      <p:grpSpPr>
+        <a:xfrm>
+          <a:off x="0" y="0"/>
+          <a:ext cx="0" cy="0"/>
+          <a:chOff x="0" y="0"/>
+          <a:chExt cx="0" cy="0"/>
+        </a:xfrm>
+      </p:grpSpPr>
+      <p:sp>
+        <p:nvSpPr>
+          <p:cNvPr id="2" name="Titel 1">
+            <a:extLst>
+              <a:ext uri="{FF2B5EF4-FFF2-40B4-BE49-F238E27FC236}">
                 <a16:creationId xmlns:a16="http://schemas.microsoft.com/office/drawing/2014/main" id="{AB0A312D-A6FF-AB8E-359F-EE1BDB1D4399}"/>
               </a:ext>
             </a:extLst>
@@ -18383,7 +20084,7 @@
           <a:p>
             <a:fld id="{08C366F5-AFAD-49CB-854A-9D9E238FCA13}" type="slidenum">
               <a:rPr lang="en-GB" smtClean="0"/>
-              <a:t>34</a:t>
+              <a:t>35</a:t>
             </a:fld>
             <a:endParaRPr lang="en-GB"/>
           </a:p>
@@ -18449,7 +20150,7 @@
 </p:sld>
 </file>
 
-<file path=ppt/slides/slide35.xml><?xml version="1.0" encoding="utf-8"?>
+<file path=ppt/slides/slide36.xml><?xml version="1.0" encoding="utf-8"?>
 <p:sld xmlns:a="http://schemas.openxmlformats.org/drawingml/2006/main" xmlns:r="http://schemas.openxmlformats.org/officeDocument/2006/relationships" xmlns:p="http://schemas.openxmlformats.org/presentationml/2006/main">
   <p:cSld>
     <p:spTree>
@@ -18593,7 +20294,7 @@
           <a:p>
             <a:fld id="{08C366F5-AFAD-49CB-854A-9D9E238FCA13}" type="slidenum">
               <a:rPr lang="en-GB" smtClean="0"/>
-              <a:t>35</a:t>
+              <a:t>36</a:t>
             </a:fld>
             <a:endParaRPr lang="en-GB"/>
           </a:p>

--- a/slides/2_clustering.pptx
+++ b/slides/2_clustering.pptx
@@ -514,7 +514,7 @@
           <a:p>
             <a:fld id="{506E0FD1-891F-4B1E-916D-E9B585160BB8}" type="datetimeFigureOut">
               <a:rPr lang="en-GB" smtClean="0"/>
-              <a:t>21/03/2026</a:t>
+              <a:t>31/03/2026</a:t>
             </a:fld>
             <a:endParaRPr lang="en-GB"/>
           </a:p>
@@ -931,7 +931,7 @@
           <a:p>
             <a:fld id="{D68C3F22-27B2-44E3-9C5F-D08126455F6F}" type="datetime1">
               <a:rPr lang="en-GB" smtClean="0"/>
-              <a:t>21/03/2026</a:t>
+              <a:t>31/03/2026</a:t>
             </a:fld>
             <a:endParaRPr lang="en-GB"/>
           </a:p>
@@ -1131,7 +1131,7 @@
           <a:p>
             <a:fld id="{1CD03846-7BF6-4FB6-A921-FF3379ADBD4C}" type="datetime1">
               <a:rPr lang="en-GB" smtClean="0"/>
-              <a:t>21/03/2026</a:t>
+              <a:t>31/03/2026</a:t>
             </a:fld>
             <a:endParaRPr lang="en-GB"/>
           </a:p>
@@ -1341,7 +1341,7 @@
           <a:p>
             <a:fld id="{99E1B91A-3FD0-4144-9C84-63E9688ED2FE}" type="datetime1">
               <a:rPr lang="en-GB" smtClean="0"/>
-              <a:t>21/03/2026</a:t>
+              <a:t>31/03/2026</a:t>
             </a:fld>
             <a:endParaRPr lang="en-GB"/>
           </a:p>
@@ -1541,7 +1541,7 @@
           <a:p>
             <a:fld id="{5295ED7B-FEAD-4734-819F-93EF4B0EA908}" type="datetime1">
               <a:rPr lang="en-GB" smtClean="0"/>
-              <a:t>21/03/2026</a:t>
+              <a:t>31/03/2026</a:t>
             </a:fld>
             <a:endParaRPr lang="en-GB"/>
           </a:p>
@@ -1817,7 +1817,7 @@
           <a:p>
             <a:fld id="{D2D5D4B4-C926-4B45-8815-1ED8911179A2}" type="datetime1">
               <a:rPr lang="en-GB" smtClean="0"/>
-              <a:t>21/03/2026</a:t>
+              <a:t>31/03/2026</a:t>
             </a:fld>
             <a:endParaRPr lang="en-GB"/>
           </a:p>
@@ -2085,7 +2085,7 @@
           <a:p>
             <a:fld id="{B4C5210A-0E37-4935-93AF-69F21A5F712F}" type="datetime1">
               <a:rPr lang="en-GB" smtClean="0"/>
-              <a:t>21/03/2026</a:t>
+              <a:t>31/03/2026</a:t>
             </a:fld>
             <a:endParaRPr lang="en-GB"/>
           </a:p>
@@ -2500,7 +2500,7 @@
           <a:p>
             <a:fld id="{3D3A6B2F-436C-4691-80E8-9C890E000E9D}" type="datetime1">
               <a:rPr lang="en-GB" smtClean="0"/>
-              <a:t>21/03/2026</a:t>
+              <a:t>31/03/2026</a:t>
             </a:fld>
             <a:endParaRPr lang="en-GB"/>
           </a:p>
@@ -2642,7 +2642,7 @@
           <a:p>
             <a:fld id="{84385F4C-D74B-496F-8D21-97E3549C783B}" type="datetime1">
               <a:rPr lang="en-GB" smtClean="0"/>
-              <a:t>21/03/2026</a:t>
+              <a:t>31/03/2026</a:t>
             </a:fld>
             <a:endParaRPr lang="en-GB"/>
           </a:p>
@@ -2755,7 +2755,7 @@
           <a:p>
             <a:fld id="{0CBDCB32-C241-4703-A832-4EB47BD54E83}" type="datetime1">
               <a:rPr lang="en-GB" smtClean="0"/>
-              <a:t>21/03/2026</a:t>
+              <a:t>31/03/2026</a:t>
             </a:fld>
             <a:endParaRPr lang="en-GB"/>
           </a:p>
@@ -3068,7 +3068,7 @@
           <a:p>
             <a:fld id="{85C150FF-BE95-4D25-A16A-E368A81CBF24}" type="datetime1">
               <a:rPr lang="en-GB" smtClean="0"/>
-              <a:t>21/03/2026</a:t>
+              <a:t>31/03/2026</a:t>
             </a:fld>
             <a:endParaRPr lang="en-GB"/>
           </a:p>
@@ -3357,7 +3357,7 @@
           <a:p>
             <a:fld id="{F3C5DB4B-B349-43C9-A424-BADA723AD9F1}" type="datetime1">
               <a:rPr lang="en-GB" smtClean="0"/>
-              <a:t>21/03/2026</a:t>
+              <a:t>31/03/2026</a:t>
             </a:fld>
             <a:endParaRPr lang="en-GB"/>
           </a:p>
@@ -3600,7 +3600,7 @@
           <a:p>
             <a:fld id="{12632426-0A0C-405F-A3D0-2D11AA44702A}" type="datetime1">
               <a:rPr lang="en-GB" smtClean="0"/>
-              <a:t>21/03/2026</a:t>
+              <a:t>31/03/2026</a:t>
             </a:fld>
             <a:endParaRPr lang="en-GB"/>
           </a:p>
@@ -4308,7 +4308,7 @@
             </a:r>
             <a:r>
               <a:rPr lang="de-DE" dirty="0" err="1"/>
-              <a:t>points</a:t>
+              <a:t>point</a:t>
             </a:r>
             <a:r>
               <a:rPr lang="de-DE" dirty="0"/>
@@ -17338,8 +17338,8 @@
           </a:p>
         </p:txBody>
       </p:sp>
-      <mc:AlternateContent xmlns:mc="http://schemas.openxmlformats.org/markup-compatibility/2006">
-        <mc:Choice xmlns:a14="http://schemas.microsoft.com/office/drawing/2010/main" Requires="a14">
+      <mc:AlternateContent xmlns:mc="http://schemas.openxmlformats.org/markup-compatibility/2006" xmlns:a14="http://schemas.microsoft.com/office/drawing/2010/main">
+        <mc:Choice Requires="a14">
           <p:sp>
             <p:nvSpPr>
               <p:cNvPr id="3" name="Inhaltsplatzhalter 2">
@@ -18341,7 +18341,7 @@
             </p:txBody>
           </p:sp>
         </mc:Choice>
-        <mc:Fallback>
+        <mc:Fallback xmlns="">
           <p:sp>
             <p:nvSpPr>
               <p:cNvPr id="3" name="Inhaltsplatzhalter 2">

--- a/slides/2_clustering.pptx
+++ b/slides/2_clustering.pptx
@@ -5,45 +5,43 @@
     <p:sldMasterId id="2147483648" r:id="rId1"/>
   </p:sldMasterIdLst>
   <p:notesMasterIdLst>
-    <p:notesMasterId r:id="rId38"/>
+    <p:notesMasterId r:id="rId36"/>
   </p:notesMasterIdLst>
   <p:sldIdLst>
     <p:sldId id="256" r:id="rId2"/>
-    <p:sldId id="265" r:id="rId3"/>
-    <p:sldId id="266" r:id="rId4"/>
-    <p:sldId id="258" r:id="rId5"/>
-    <p:sldId id="270" r:id="rId6"/>
-    <p:sldId id="285" r:id="rId7"/>
-    <p:sldId id="271" r:id="rId8"/>
-    <p:sldId id="289" r:id="rId9"/>
-    <p:sldId id="268" r:id="rId10"/>
-    <p:sldId id="272" r:id="rId11"/>
-    <p:sldId id="290" r:id="rId12"/>
-    <p:sldId id="292" r:id="rId13"/>
-    <p:sldId id="274" r:id="rId14"/>
-    <p:sldId id="288" r:id="rId15"/>
-    <p:sldId id="273" r:id="rId16"/>
-    <p:sldId id="293" r:id="rId17"/>
-    <p:sldId id="282" r:id="rId18"/>
-    <p:sldId id="294" r:id="rId19"/>
-    <p:sldId id="291" r:id="rId20"/>
-    <p:sldId id="283" r:id="rId21"/>
-    <p:sldId id="295" r:id="rId22"/>
-    <p:sldId id="296" r:id="rId23"/>
-    <p:sldId id="286" r:id="rId24"/>
-    <p:sldId id="297" r:id="rId25"/>
-    <p:sldId id="275" r:id="rId26"/>
-    <p:sldId id="298" r:id="rId27"/>
-    <p:sldId id="301" r:id="rId28"/>
-    <p:sldId id="276" r:id="rId29"/>
-    <p:sldId id="277" r:id="rId30"/>
-    <p:sldId id="278" r:id="rId31"/>
-    <p:sldId id="279" r:id="rId32"/>
-    <p:sldId id="303" r:id="rId33"/>
-    <p:sldId id="280" r:id="rId34"/>
-    <p:sldId id="304" r:id="rId35"/>
-    <p:sldId id="281" r:id="rId36"/>
-    <p:sldId id="302" r:id="rId37"/>
+    <p:sldId id="266" r:id="rId3"/>
+    <p:sldId id="258" r:id="rId4"/>
+    <p:sldId id="270" r:id="rId5"/>
+    <p:sldId id="285" r:id="rId6"/>
+    <p:sldId id="271" r:id="rId7"/>
+    <p:sldId id="289" r:id="rId8"/>
+    <p:sldId id="268" r:id="rId9"/>
+    <p:sldId id="272" r:id="rId10"/>
+    <p:sldId id="290" r:id="rId11"/>
+    <p:sldId id="292" r:id="rId12"/>
+    <p:sldId id="274" r:id="rId13"/>
+    <p:sldId id="288" r:id="rId14"/>
+    <p:sldId id="273" r:id="rId15"/>
+    <p:sldId id="293" r:id="rId16"/>
+    <p:sldId id="282" r:id="rId17"/>
+    <p:sldId id="294" r:id="rId18"/>
+    <p:sldId id="291" r:id="rId19"/>
+    <p:sldId id="283" r:id="rId20"/>
+    <p:sldId id="295" r:id="rId21"/>
+    <p:sldId id="296" r:id="rId22"/>
+    <p:sldId id="286" r:id="rId23"/>
+    <p:sldId id="297" r:id="rId24"/>
+    <p:sldId id="275" r:id="rId25"/>
+    <p:sldId id="298" r:id="rId26"/>
+    <p:sldId id="301" r:id="rId27"/>
+    <p:sldId id="276" r:id="rId28"/>
+    <p:sldId id="277" r:id="rId29"/>
+    <p:sldId id="278" r:id="rId30"/>
+    <p:sldId id="279" r:id="rId31"/>
+    <p:sldId id="303" r:id="rId32"/>
+    <p:sldId id="280" r:id="rId33"/>
+    <p:sldId id="304" r:id="rId34"/>
+    <p:sldId id="281" r:id="rId35"/>
   </p:sldIdLst>
   <p:sldSz cx="12192000" cy="6858000"/>
   <p:notesSz cx="6858000" cy="9144000"/>
@@ -514,7 +512,7 @@
           <a:p>
             <a:fld id="{506E0FD1-891F-4B1E-916D-E9B585160BB8}" type="datetimeFigureOut">
               <a:rPr lang="en-GB" smtClean="0"/>
-              <a:t>31/03/2026</a:t>
+              <a:t>17/04/2026</a:t>
             </a:fld>
             <a:endParaRPr lang="en-GB"/>
           </a:p>
@@ -931,7 +929,7 @@
           <a:p>
             <a:fld id="{D68C3F22-27B2-44E3-9C5F-D08126455F6F}" type="datetime1">
               <a:rPr lang="en-GB" smtClean="0"/>
-              <a:t>31/03/2026</a:t>
+              <a:t>17/04/2026</a:t>
             </a:fld>
             <a:endParaRPr lang="en-GB"/>
           </a:p>
@@ -1131,7 +1129,7 @@
           <a:p>
             <a:fld id="{1CD03846-7BF6-4FB6-A921-FF3379ADBD4C}" type="datetime1">
               <a:rPr lang="en-GB" smtClean="0"/>
-              <a:t>31/03/2026</a:t>
+              <a:t>17/04/2026</a:t>
             </a:fld>
             <a:endParaRPr lang="en-GB"/>
           </a:p>
@@ -1341,7 +1339,7 @@
           <a:p>
             <a:fld id="{99E1B91A-3FD0-4144-9C84-63E9688ED2FE}" type="datetime1">
               <a:rPr lang="en-GB" smtClean="0"/>
-              <a:t>31/03/2026</a:t>
+              <a:t>17/04/2026</a:t>
             </a:fld>
             <a:endParaRPr lang="en-GB"/>
           </a:p>
@@ -1541,7 +1539,7 @@
           <a:p>
             <a:fld id="{5295ED7B-FEAD-4734-819F-93EF4B0EA908}" type="datetime1">
               <a:rPr lang="en-GB" smtClean="0"/>
-              <a:t>31/03/2026</a:t>
+              <a:t>17/04/2026</a:t>
             </a:fld>
             <a:endParaRPr lang="en-GB"/>
           </a:p>
@@ -1817,7 +1815,7 @@
           <a:p>
             <a:fld id="{D2D5D4B4-C926-4B45-8815-1ED8911179A2}" type="datetime1">
               <a:rPr lang="en-GB" smtClean="0"/>
-              <a:t>31/03/2026</a:t>
+              <a:t>17/04/2026</a:t>
             </a:fld>
             <a:endParaRPr lang="en-GB"/>
           </a:p>
@@ -2085,7 +2083,7 @@
           <a:p>
             <a:fld id="{B4C5210A-0E37-4935-93AF-69F21A5F712F}" type="datetime1">
               <a:rPr lang="en-GB" smtClean="0"/>
-              <a:t>31/03/2026</a:t>
+              <a:t>17/04/2026</a:t>
             </a:fld>
             <a:endParaRPr lang="en-GB"/>
           </a:p>
@@ -2500,7 +2498,7 @@
           <a:p>
             <a:fld id="{3D3A6B2F-436C-4691-80E8-9C890E000E9D}" type="datetime1">
               <a:rPr lang="en-GB" smtClean="0"/>
-              <a:t>31/03/2026</a:t>
+              <a:t>17/04/2026</a:t>
             </a:fld>
             <a:endParaRPr lang="en-GB"/>
           </a:p>
@@ -2642,7 +2640,7 @@
           <a:p>
             <a:fld id="{84385F4C-D74B-496F-8D21-97E3549C783B}" type="datetime1">
               <a:rPr lang="en-GB" smtClean="0"/>
-              <a:t>31/03/2026</a:t>
+              <a:t>17/04/2026</a:t>
             </a:fld>
             <a:endParaRPr lang="en-GB"/>
           </a:p>
@@ -2755,7 +2753,7 @@
           <a:p>
             <a:fld id="{0CBDCB32-C241-4703-A832-4EB47BD54E83}" type="datetime1">
               <a:rPr lang="en-GB" smtClean="0"/>
-              <a:t>31/03/2026</a:t>
+              <a:t>17/04/2026</a:t>
             </a:fld>
             <a:endParaRPr lang="en-GB"/>
           </a:p>
@@ -3068,7 +3066,7 @@
           <a:p>
             <a:fld id="{85C150FF-BE95-4D25-A16A-E368A81CBF24}" type="datetime1">
               <a:rPr lang="en-GB" smtClean="0"/>
-              <a:t>31/03/2026</a:t>
+              <a:t>17/04/2026</a:t>
             </a:fld>
             <a:endParaRPr lang="en-GB"/>
           </a:p>
@@ -3357,7 +3355,7 @@
           <a:p>
             <a:fld id="{F3C5DB4B-B349-43C9-A424-BADA723AD9F1}" type="datetime1">
               <a:rPr lang="en-GB" smtClean="0"/>
-              <a:t>31/03/2026</a:t>
+              <a:t>17/04/2026</a:t>
             </a:fld>
             <a:endParaRPr lang="en-GB"/>
           </a:p>
@@ -3600,7 +3598,7 @@
           <a:p>
             <a:fld id="{12632426-0A0C-405F-A3D0-2D11AA44702A}" type="datetime1">
               <a:rPr lang="en-GB" smtClean="0"/>
-              <a:t>31/03/2026</a:t>
+              <a:t>17/04/2026</a:t>
             </a:fld>
             <a:endParaRPr lang="en-GB"/>
           </a:p>
@@ -4109,671 +4107,6 @@
           <p:cNvPr id="2" name="Titel 1">
             <a:extLst>
               <a:ext uri="{FF2B5EF4-FFF2-40B4-BE49-F238E27FC236}">
-                <a16:creationId xmlns:a16="http://schemas.microsoft.com/office/drawing/2014/main" id="{3449D85B-4E0C-2CDA-A2D9-4273DBF6D8D3}"/>
-              </a:ext>
-            </a:extLst>
-          </p:cNvPr>
-          <p:cNvSpPr>
-            <a:spLocks noGrp="1"/>
-          </p:cNvSpPr>
-          <p:nvPr>
-            <p:ph type="title"/>
-          </p:nvPr>
-        </p:nvSpPr>
-        <p:spPr/>
-        <p:txBody>
-          <a:bodyPr/>
-          <a:lstStyle/>
-          <a:p>
-            <a:r>
-              <a:rPr lang="de-DE" dirty="0" err="1"/>
-              <a:t>k-Means</a:t>
-            </a:r>
-            <a:r>
-              <a:rPr lang="de-DE" dirty="0"/>
-              <a:t> </a:t>
-            </a:r>
-            <a:r>
-              <a:rPr lang="de-DE" dirty="0" err="1"/>
-              <a:t>Algorithm</a:t>
-            </a:r>
-            <a:endParaRPr lang="de-DE" dirty="0"/>
-          </a:p>
-        </p:txBody>
-      </p:sp>
-      <p:sp>
-        <p:nvSpPr>
-          <p:cNvPr id="4" name="Inhaltsplatzhalter 3">
-            <a:extLst>
-              <a:ext uri="{FF2B5EF4-FFF2-40B4-BE49-F238E27FC236}">
-                <a16:creationId xmlns:a16="http://schemas.microsoft.com/office/drawing/2014/main" id="{E22A36B6-BDB3-0940-B6A3-50D4BB310EA6}"/>
-              </a:ext>
-            </a:extLst>
-          </p:cNvPr>
-          <p:cNvSpPr>
-            <a:spLocks noGrp="1"/>
-          </p:cNvSpPr>
-          <p:nvPr>
-            <p:ph idx="1"/>
-          </p:nvPr>
-        </p:nvSpPr>
-        <p:spPr/>
-        <p:txBody>
-          <a:bodyPr>
-            <a:normAutofit fontScale="85000" lnSpcReduction="20000"/>
-          </a:bodyPr>
-          <a:lstStyle/>
-          <a:p>
-            <a:pPr marL="0" indent="0">
-              <a:buNone/>
-            </a:pPr>
-            <a:r>
-              <a:rPr lang="de-DE" dirty="0"/>
-              <a:t>Fit:</a:t>
-            </a:r>
-          </a:p>
-          <a:p>
-            <a:pPr marL="514350" indent="-514350">
-              <a:buFont typeface="+mj-lt"/>
-              <a:buAutoNum type="arabicPeriod"/>
-            </a:pPr>
-            <a:r>
-              <a:rPr lang="de-DE" dirty="0" err="1"/>
-              <a:t>choose</a:t>
-            </a:r>
-            <a:r>
-              <a:rPr lang="de-DE" dirty="0"/>
-              <a:t> </a:t>
-            </a:r>
-            <a:r>
-              <a:rPr lang="de-DE" b="1" dirty="0" err="1"/>
-              <a:t>k</a:t>
-            </a:r>
-            <a:r>
-              <a:rPr lang="de-DE" dirty="0"/>
-              <a:t> (</a:t>
-            </a:r>
-            <a:r>
-              <a:rPr lang="de-DE" dirty="0" err="1"/>
-              <a:t>number</a:t>
-            </a:r>
-            <a:r>
-              <a:rPr lang="de-DE" dirty="0"/>
-              <a:t> </a:t>
-            </a:r>
-            <a:r>
-              <a:rPr lang="de-DE" dirty="0" err="1"/>
-              <a:t>of</a:t>
-            </a:r>
-            <a:r>
-              <a:rPr lang="de-DE" dirty="0"/>
-              <a:t> </a:t>
-            </a:r>
-            <a:r>
-              <a:rPr lang="de-DE" dirty="0" err="1"/>
-              <a:t>clusters</a:t>
-            </a:r>
-            <a:r>
-              <a:rPr lang="de-DE" dirty="0"/>
-              <a:t>)</a:t>
-            </a:r>
-          </a:p>
-          <a:p>
-            <a:pPr marL="514350" indent="-514350">
-              <a:buFont typeface="+mj-lt"/>
-              <a:buAutoNum type="arabicPeriod"/>
-            </a:pPr>
-            <a:r>
-              <a:rPr lang="de-DE" dirty="0" err="1"/>
-              <a:t>initialize</a:t>
-            </a:r>
-            <a:r>
-              <a:rPr lang="de-DE" dirty="0"/>
-              <a:t> </a:t>
-            </a:r>
-            <a:r>
-              <a:rPr lang="de-DE" dirty="0" err="1"/>
-              <a:t>centroids</a:t>
-            </a:r>
-            <a:r>
-              <a:rPr lang="de-DE" dirty="0"/>
-              <a:t>: (</a:t>
-            </a:r>
-            <a:r>
-              <a:rPr lang="de-DE" dirty="0" err="1"/>
-              <a:t>randomly</a:t>
-            </a:r>
-            <a:r>
-              <a:rPr lang="de-DE" dirty="0"/>
-              <a:t>) </a:t>
-            </a:r>
-            <a:r>
-              <a:rPr lang="de-DE" dirty="0" err="1"/>
-              <a:t>place</a:t>
-            </a:r>
-            <a:r>
-              <a:rPr lang="de-DE" dirty="0"/>
-              <a:t> </a:t>
-            </a:r>
-            <a:r>
-              <a:rPr lang="de-DE" dirty="0" err="1"/>
-              <a:t>k</a:t>
-            </a:r>
-            <a:r>
-              <a:rPr lang="de-DE" dirty="0"/>
-              <a:t> </a:t>
-            </a:r>
-            <a:r>
-              <a:rPr lang="de-DE" dirty="0" err="1"/>
-              <a:t>centroids</a:t>
-            </a:r>
-            <a:r>
-              <a:rPr lang="de-DE" dirty="0"/>
-              <a:t> in </a:t>
-            </a:r>
-            <a:r>
-              <a:rPr lang="de-DE" dirty="0" err="1"/>
-              <a:t>data</a:t>
-            </a:r>
-            <a:r>
-              <a:rPr lang="de-DE" dirty="0"/>
-              <a:t> </a:t>
-            </a:r>
-            <a:r>
-              <a:rPr lang="de-DE" dirty="0" err="1"/>
-              <a:t>space</a:t>
-            </a:r>
-            <a:endParaRPr lang="de-DE" dirty="0"/>
-          </a:p>
-          <a:p>
-            <a:pPr marL="514350" indent="-514350">
-              <a:buFont typeface="+mj-lt"/>
-              <a:buAutoNum type="arabicPeriod"/>
-            </a:pPr>
-            <a:r>
-              <a:rPr lang="de-DE" dirty="0" err="1"/>
-              <a:t>assign</a:t>
-            </a:r>
-            <a:r>
-              <a:rPr lang="de-DE" dirty="0"/>
-              <a:t> </a:t>
-            </a:r>
-            <a:r>
-              <a:rPr lang="de-DE" dirty="0" err="1"/>
-              <a:t>each</a:t>
-            </a:r>
-            <a:r>
-              <a:rPr lang="de-DE" dirty="0"/>
-              <a:t> </a:t>
-            </a:r>
-            <a:r>
-              <a:rPr lang="de-DE" dirty="0" err="1"/>
-              <a:t>point</a:t>
-            </a:r>
-            <a:r>
-              <a:rPr lang="de-DE" dirty="0"/>
-              <a:t> </a:t>
-            </a:r>
-            <a:r>
-              <a:rPr lang="de-DE" dirty="0" err="1"/>
-              <a:t>to</a:t>
-            </a:r>
-            <a:r>
-              <a:rPr lang="de-DE" dirty="0"/>
-              <a:t> </a:t>
-            </a:r>
-            <a:r>
-              <a:rPr lang="de-DE" dirty="0" err="1"/>
-              <a:t>the</a:t>
-            </a:r>
-            <a:r>
-              <a:rPr lang="de-DE" dirty="0"/>
-              <a:t> </a:t>
-            </a:r>
-            <a:r>
-              <a:rPr lang="de-DE" dirty="0" err="1"/>
-              <a:t>nearest</a:t>
-            </a:r>
-            <a:r>
-              <a:rPr lang="de-DE" dirty="0"/>
-              <a:t> </a:t>
-            </a:r>
-            <a:r>
-              <a:rPr lang="de-DE" dirty="0" err="1"/>
-              <a:t>centroid</a:t>
-            </a:r>
-            <a:r>
-              <a:rPr lang="de-DE" dirty="0"/>
-              <a:t> (</a:t>
-            </a:r>
-            <a:r>
-              <a:rPr lang="de-DE" dirty="0" err="1"/>
-              <a:t>according</a:t>
-            </a:r>
-            <a:r>
-              <a:rPr lang="de-DE" dirty="0"/>
-              <a:t> </a:t>
-            </a:r>
-            <a:r>
-              <a:rPr lang="de-DE" dirty="0" err="1"/>
-              <a:t>to</a:t>
-            </a:r>
-            <a:r>
-              <a:rPr lang="de-DE" dirty="0"/>
-              <a:t> </a:t>
-            </a:r>
-            <a:r>
-              <a:rPr lang="de-DE" dirty="0" err="1"/>
-              <a:t>computed</a:t>
-            </a:r>
-            <a:r>
-              <a:rPr lang="de-DE" dirty="0"/>
-              <a:t> </a:t>
-            </a:r>
-            <a:r>
-              <a:rPr lang="de-DE" b="1" dirty="0" err="1"/>
-              <a:t>Euclidean</a:t>
-            </a:r>
-            <a:r>
-              <a:rPr lang="de-DE" b="1" dirty="0"/>
-              <a:t> </a:t>
-            </a:r>
-            <a:r>
-              <a:rPr lang="de-DE" b="1" dirty="0" err="1"/>
-              <a:t>distances</a:t>
-            </a:r>
-            <a:r>
-              <a:rPr lang="de-DE" dirty="0"/>
-              <a:t>)</a:t>
-            </a:r>
-          </a:p>
-          <a:p>
-            <a:pPr marL="514350" indent="-514350">
-              <a:buFont typeface="+mj-lt"/>
-              <a:buAutoNum type="arabicPeriod"/>
-            </a:pPr>
-            <a:r>
-              <a:rPr lang="de-DE" dirty="0" err="1"/>
-              <a:t>recalculate</a:t>
-            </a:r>
-            <a:r>
-              <a:rPr lang="de-DE" dirty="0"/>
-              <a:t> </a:t>
-            </a:r>
-            <a:r>
-              <a:rPr lang="de-DE" dirty="0" err="1"/>
-              <a:t>centroids</a:t>
-            </a:r>
-            <a:r>
-              <a:rPr lang="de-DE" dirty="0"/>
-              <a:t> </a:t>
-            </a:r>
-            <a:r>
-              <a:rPr lang="de-DE" dirty="0" err="1"/>
-              <a:t>of</a:t>
-            </a:r>
-            <a:r>
-              <a:rPr lang="de-DE" dirty="0"/>
-              <a:t> </a:t>
-            </a:r>
-            <a:r>
-              <a:rPr lang="de-DE" dirty="0" err="1"/>
-              <a:t>each</a:t>
-            </a:r>
-            <a:r>
-              <a:rPr lang="de-DE" dirty="0"/>
-              <a:t> </a:t>
-            </a:r>
-            <a:r>
-              <a:rPr lang="de-DE" dirty="0" err="1"/>
-              <a:t>cluster</a:t>
-            </a:r>
-            <a:r>
-              <a:rPr lang="de-DE" dirty="0"/>
-              <a:t> (</a:t>
-            </a:r>
-            <a:r>
-              <a:rPr lang="de-DE" b="1" dirty="0" err="1"/>
-              <a:t>average</a:t>
-            </a:r>
-            <a:r>
-              <a:rPr lang="de-DE" dirty="0"/>
-              <a:t> </a:t>
-            </a:r>
-            <a:r>
-              <a:rPr lang="de-DE" dirty="0" err="1"/>
-              <a:t>of</a:t>
-            </a:r>
-            <a:r>
-              <a:rPr lang="de-DE" dirty="0"/>
-              <a:t> all </a:t>
-            </a:r>
-            <a:r>
-              <a:rPr lang="de-DE" dirty="0" err="1"/>
-              <a:t>points</a:t>
-            </a:r>
-            <a:r>
-              <a:rPr lang="de-DE" dirty="0"/>
-              <a:t> </a:t>
-            </a:r>
-            <a:r>
-              <a:rPr lang="de-DE" dirty="0" err="1"/>
-              <a:t>assigned</a:t>
-            </a:r>
-            <a:r>
-              <a:rPr lang="de-DE" dirty="0"/>
-              <a:t> </a:t>
-            </a:r>
-            <a:r>
-              <a:rPr lang="de-DE" dirty="0" err="1"/>
-              <a:t>to</a:t>
-            </a:r>
-            <a:r>
-              <a:rPr lang="de-DE" dirty="0"/>
-              <a:t> </a:t>
-            </a:r>
-            <a:r>
-              <a:rPr lang="de-DE" dirty="0" err="1"/>
-              <a:t>the</a:t>
-            </a:r>
-            <a:r>
-              <a:rPr lang="de-DE" dirty="0"/>
-              <a:t> </a:t>
-            </a:r>
-            <a:r>
-              <a:rPr lang="de-DE" dirty="0" err="1"/>
-              <a:t>cluster</a:t>
-            </a:r>
-            <a:r>
-              <a:rPr lang="de-DE" dirty="0"/>
-              <a:t>)</a:t>
-            </a:r>
-          </a:p>
-          <a:p>
-            <a:pPr marL="514350" indent="-514350">
-              <a:buFont typeface="+mj-lt"/>
-              <a:buAutoNum type="arabicPeriod"/>
-            </a:pPr>
-            <a:r>
-              <a:rPr lang="de-DE" dirty="0" err="1"/>
-              <a:t>iterate</a:t>
-            </a:r>
-            <a:r>
-              <a:rPr lang="de-DE" dirty="0"/>
-              <a:t> </a:t>
-            </a:r>
-            <a:r>
-              <a:rPr lang="de-DE" dirty="0" err="1"/>
-              <a:t>until</a:t>
-            </a:r>
-            <a:r>
-              <a:rPr lang="de-DE" dirty="0"/>
-              <a:t> </a:t>
-            </a:r>
-            <a:r>
-              <a:rPr lang="de-DE" dirty="0" err="1"/>
-              <a:t>convergence</a:t>
-            </a:r>
-            <a:r>
-              <a:rPr lang="de-DE" dirty="0"/>
-              <a:t> (</a:t>
-            </a:r>
-            <a:r>
-              <a:rPr lang="de-DE" dirty="0" err="1"/>
-              <a:t>centroids</a:t>
-            </a:r>
-            <a:r>
-              <a:rPr lang="de-DE" dirty="0"/>
-              <a:t> </a:t>
-            </a:r>
-            <a:r>
-              <a:rPr lang="de-DE" dirty="0" err="1"/>
-              <a:t>stop</a:t>
-            </a:r>
-            <a:r>
-              <a:rPr lang="de-DE" dirty="0"/>
-              <a:t> </a:t>
-            </a:r>
-            <a:r>
-              <a:rPr lang="de-DE" dirty="0" err="1"/>
-              <a:t>moving</a:t>
-            </a:r>
-            <a:r>
-              <a:rPr lang="de-DE" dirty="0"/>
-              <a:t> </a:t>
-            </a:r>
-            <a:r>
-              <a:rPr lang="de-DE" dirty="0" err="1"/>
-              <a:t>significantly</a:t>
-            </a:r>
-            <a:r>
-              <a:rPr lang="de-DE" dirty="0"/>
-              <a:t> </a:t>
-            </a:r>
-            <a:r>
-              <a:rPr lang="de-DE" dirty="0" err="1"/>
-              <a:t>or</a:t>
-            </a:r>
-            <a:r>
-              <a:rPr lang="de-DE" dirty="0"/>
-              <a:t> </a:t>
-            </a:r>
-            <a:r>
-              <a:rPr lang="de-DE" dirty="0" err="1"/>
-              <a:t>cluster</a:t>
-            </a:r>
-            <a:r>
-              <a:rPr lang="de-DE" dirty="0"/>
-              <a:t> </a:t>
-            </a:r>
-            <a:r>
-              <a:rPr lang="de-DE" dirty="0" err="1"/>
-              <a:t>assignments</a:t>
-            </a:r>
-            <a:r>
-              <a:rPr lang="de-DE" dirty="0"/>
-              <a:t> </a:t>
-            </a:r>
-            <a:r>
-              <a:rPr lang="de-DE" dirty="0" err="1"/>
-              <a:t>stop</a:t>
-            </a:r>
-            <a:r>
-              <a:rPr lang="de-DE" dirty="0"/>
-              <a:t> </a:t>
-            </a:r>
-            <a:r>
-              <a:rPr lang="de-DE" dirty="0" err="1"/>
-              <a:t>changing</a:t>
-            </a:r>
-            <a:r>
-              <a:rPr lang="de-DE" dirty="0"/>
-              <a:t>)</a:t>
-            </a:r>
-          </a:p>
-          <a:p>
-            <a:pPr marL="0" indent="0">
-              <a:buNone/>
-            </a:pPr>
-            <a:endParaRPr lang="de-DE" dirty="0"/>
-          </a:p>
-          <a:p>
-            <a:pPr marL="0" indent="0">
-              <a:buNone/>
-            </a:pPr>
-            <a:r>
-              <a:rPr lang="de-DE" dirty="0" err="1"/>
-              <a:t>Predict</a:t>
-            </a:r>
-            <a:r>
-              <a:rPr lang="de-DE" dirty="0"/>
-              <a:t>:</a:t>
-            </a:r>
-          </a:p>
-          <a:p>
-            <a:pPr marL="0" indent="0">
-              <a:buNone/>
-            </a:pPr>
-            <a:r>
-              <a:rPr lang="de-DE" dirty="0" err="1"/>
-              <a:t>For</a:t>
-            </a:r>
-            <a:r>
-              <a:rPr lang="de-DE" dirty="0"/>
-              <a:t> a </a:t>
-            </a:r>
-            <a:r>
-              <a:rPr lang="de-DE" dirty="0" err="1"/>
-              <a:t>new</a:t>
-            </a:r>
-            <a:r>
-              <a:rPr lang="de-DE" dirty="0"/>
-              <a:t> </a:t>
-            </a:r>
-            <a:r>
-              <a:rPr lang="de-DE" dirty="0" err="1"/>
-              <a:t>point</a:t>
-            </a:r>
-            <a:r>
-              <a:rPr lang="de-DE" dirty="0"/>
-              <a:t>: </a:t>
-            </a:r>
-            <a:r>
-              <a:rPr lang="de-DE" dirty="0" err="1"/>
-              <a:t>Assign</a:t>
-            </a:r>
-            <a:r>
-              <a:rPr lang="de-DE" dirty="0"/>
-              <a:t> </a:t>
-            </a:r>
-            <a:r>
-              <a:rPr lang="de-DE" dirty="0" err="1"/>
-              <a:t>it</a:t>
-            </a:r>
-            <a:r>
-              <a:rPr lang="de-DE" dirty="0"/>
-              <a:t> </a:t>
-            </a:r>
-            <a:r>
-              <a:rPr lang="de-DE" dirty="0" err="1"/>
-              <a:t>to</a:t>
-            </a:r>
-            <a:r>
-              <a:rPr lang="de-DE" dirty="0"/>
-              <a:t> </a:t>
-            </a:r>
-            <a:r>
-              <a:rPr lang="de-DE" dirty="0" err="1"/>
-              <a:t>the</a:t>
-            </a:r>
-            <a:r>
-              <a:rPr lang="de-DE" dirty="0"/>
-              <a:t> </a:t>
-            </a:r>
-            <a:r>
-              <a:rPr lang="de-DE" dirty="0" err="1"/>
-              <a:t>cluster</a:t>
-            </a:r>
-            <a:r>
-              <a:rPr lang="de-DE" dirty="0"/>
-              <a:t> </a:t>
-            </a:r>
-            <a:r>
-              <a:rPr lang="de-DE" dirty="0" err="1"/>
-              <a:t>with</a:t>
-            </a:r>
-            <a:r>
-              <a:rPr lang="de-DE" dirty="0"/>
-              <a:t> </a:t>
-            </a:r>
-            <a:r>
-              <a:rPr lang="de-DE" dirty="0" err="1"/>
-              <a:t>the</a:t>
-            </a:r>
-            <a:r>
-              <a:rPr lang="de-DE" dirty="0"/>
-              <a:t> </a:t>
-            </a:r>
-            <a:r>
-              <a:rPr lang="de-DE" b="1" dirty="0" err="1"/>
-              <a:t>nearest</a:t>
-            </a:r>
-            <a:r>
-              <a:rPr lang="de-DE" b="1" dirty="0"/>
-              <a:t> </a:t>
-            </a:r>
-            <a:r>
-              <a:rPr lang="de-DE" b="1" dirty="0" err="1"/>
-              <a:t>centroid</a:t>
-            </a:r>
-            <a:endParaRPr lang="de-DE" dirty="0"/>
-          </a:p>
-        </p:txBody>
-      </p:sp>
-      <p:sp>
-        <p:nvSpPr>
-          <p:cNvPr id="3" name="Foliennummernplatzhalter 2">
-            <a:extLst>
-              <a:ext uri="{FF2B5EF4-FFF2-40B4-BE49-F238E27FC236}">
-                <a16:creationId xmlns:a16="http://schemas.microsoft.com/office/drawing/2014/main" id="{5AF30DBF-AD11-3C18-1D07-A54DAB515319}"/>
-              </a:ext>
-            </a:extLst>
-          </p:cNvPr>
-          <p:cNvSpPr>
-            <a:spLocks noGrp="1"/>
-          </p:cNvSpPr>
-          <p:nvPr>
-            <p:ph type="sldNum" sz="quarter" idx="12"/>
-          </p:nvPr>
-        </p:nvSpPr>
-        <p:spPr/>
-        <p:txBody>
-          <a:bodyPr/>
-          <a:lstStyle/>
-          <a:p>
-            <a:fld id="{08C366F5-AFAD-49CB-854A-9D9E238FCA13}" type="slidenum">
-              <a:rPr lang="en-GB" smtClean="0"/>
-              <a:t>10</a:t>
-            </a:fld>
-            <a:endParaRPr lang="en-GB"/>
-          </a:p>
-        </p:txBody>
-      </p:sp>
-    </p:spTree>
-    <p:extLst>
-      <p:ext uri="{BB962C8B-B14F-4D97-AF65-F5344CB8AC3E}">
-        <p14:creationId xmlns:p14="http://schemas.microsoft.com/office/powerpoint/2010/main" val="3988780308"/>
-      </p:ext>
-    </p:extLst>
-  </p:cSld>
-  <p:clrMapOvr>
-    <a:masterClrMapping/>
-  </p:clrMapOvr>
-</p:sld>
-</file>
-
-<file path=ppt/slides/slide11.xml><?xml version="1.0" encoding="utf-8"?>
-<p:sld xmlns:a="http://schemas.openxmlformats.org/drawingml/2006/main" xmlns:r="http://schemas.openxmlformats.org/officeDocument/2006/relationships" xmlns:p="http://schemas.openxmlformats.org/presentationml/2006/main">
-  <p:cSld>
-    <p:spTree>
-      <p:nvGrpSpPr>
-        <p:cNvPr id="1" name=""/>
-        <p:cNvGrpSpPr/>
-        <p:nvPr/>
-      </p:nvGrpSpPr>
-      <p:grpSpPr>
-        <a:xfrm>
-          <a:off x="0" y="0"/>
-          <a:ext cx="0" cy="0"/>
-          <a:chOff x="0" y="0"/>
-          <a:chExt cx="0" cy="0"/>
-        </a:xfrm>
-      </p:grpSpPr>
-      <p:sp>
-        <p:nvSpPr>
-          <p:cNvPr id="2" name="Titel 1">
-            <a:extLst>
-              <a:ext uri="{FF2B5EF4-FFF2-40B4-BE49-F238E27FC236}">
                 <a16:creationId xmlns:a16="http://schemas.microsoft.com/office/drawing/2014/main" id="{5E911FD9-7F33-36F5-BFF7-3BD6F330C3E0}"/>
               </a:ext>
             </a:extLst>
@@ -5229,7 +4562,7 @@
           <a:p>
             <a:fld id="{08C366F5-AFAD-49CB-854A-9D9E238FCA13}" type="slidenum">
               <a:rPr lang="en-GB" smtClean="0"/>
-              <a:t>11</a:t>
+              <a:t>10</a:t>
             </a:fld>
             <a:endParaRPr lang="en-GB"/>
           </a:p>
@@ -5498,7 +4831,7 @@
 </p:sld>
 </file>
 
-<file path=ppt/slides/slide12.xml><?xml version="1.0" encoding="utf-8"?>
+<file path=ppt/slides/slide11.xml><?xml version="1.0" encoding="utf-8"?>
 <p:sld xmlns:a="http://schemas.openxmlformats.org/drawingml/2006/main" xmlns:r="http://schemas.openxmlformats.org/officeDocument/2006/relationships" xmlns:p="http://schemas.openxmlformats.org/presentationml/2006/main">
   <p:cSld>
     <p:spTree>
@@ -6876,7 +6209,7 @@
           <a:p>
             <a:fld id="{08C366F5-AFAD-49CB-854A-9D9E238FCA13}" type="slidenum">
               <a:rPr lang="en-GB" smtClean="0"/>
-              <a:t>12</a:t>
+              <a:t>11</a:t>
             </a:fld>
             <a:endParaRPr lang="en-GB"/>
           </a:p>
@@ -6895,7 +6228,7 @@
 </p:sld>
 </file>
 
-<file path=ppt/slides/slide13.xml><?xml version="1.0" encoding="utf-8"?>
+<file path=ppt/slides/slide12.xml><?xml version="1.0" encoding="utf-8"?>
 <p:sld xmlns:a="http://schemas.openxmlformats.org/drawingml/2006/main" xmlns:r="http://schemas.openxmlformats.org/officeDocument/2006/relationships" xmlns:p="http://schemas.openxmlformats.org/presentationml/2006/main">
   <p:cSld>
     <p:spTree>
@@ -7307,7 +6640,7 @@
           <a:p>
             <a:fld id="{08C366F5-AFAD-49CB-854A-9D9E238FCA13}" type="slidenum">
               <a:rPr lang="en-GB" smtClean="0"/>
-              <a:t>13</a:t>
+              <a:t>12</a:t>
             </a:fld>
             <a:endParaRPr lang="en-GB"/>
           </a:p>
@@ -7488,7 +6821,7 @@
 </p:sld>
 </file>
 
-<file path=ppt/slides/slide14.xml><?xml version="1.0" encoding="utf-8"?>
+<file path=ppt/slides/slide13.xml><?xml version="1.0" encoding="utf-8"?>
 <p:sld xmlns:a="http://schemas.openxmlformats.org/drawingml/2006/main" xmlns:r="http://schemas.openxmlformats.org/officeDocument/2006/relationships" xmlns:p="http://schemas.openxmlformats.org/presentationml/2006/main">
   <p:cSld>
     <p:spTree>
@@ -8177,7 +7510,7 @@
           <a:p>
             <a:fld id="{08C366F5-AFAD-49CB-854A-9D9E238FCA13}" type="slidenum">
               <a:rPr lang="en-GB" smtClean="0"/>
-              <a:t>14</a:t>
+              <a:t>13</a:t>
             </a:fld>
             <a:endParaRPr lang="en-GB"/>
           </a:p>
@@ -8226,7 +7559,7 @@
 </p:sld>
 </file>
 
-<file path=ppt/slides/slide15.xml><?xml version="1.0" encoding="utf-8"?>
+<file path=ppt/slides/slide14.xml><?xml version="1.0" encoding="utf-8"?>
 <p:sld xmlns:a="http://schemas.openxmlformats.org/drawingml/2006/main" xmlns:r="http://schemas.openxmlformats.org/officeDocument/2006/relationships" xmlns:p="http://schemas.openxmlformats.org/presentationml/2006/main">
   <p:cSld>
     <p:spTree>
@@ -8726,7 +8059,7 @@
           <a:p>
             <a:fld id="{08C366F5-AFAD-49CB-854A-9D9E238FCA13}" type="slidenum">
               <a:rPr lang="en-GB" smtClean="0"/>
-              <a:t>15</a:t>
+              <a:t>14</a:t>
             </a:fld>
             <a:endParaRPr lang="en-GB"/>
           </a:p>
@@ -8745,7 +8078,7 @@
 </p:sld>
 </file>
 
-<file path=ppt/slides/slide16.xml><?xml version="1.0" encoding="utf-8"?>
+<file path=ppt/slides/slide15.xml><?xml version="1.0" encoding="utf-8"?>
 <p:sld xmlns:a="http://schemas.openxmlformats.org/drawingml/2006/main" xmlns:r="http://schemas.openxmlformats.org/officeDocument/2006/relationships" xmlns:p="http://schemas.openxmlformats.org/presentationml/2006/main">
   <p:cSld>
     <p:spTree>
@@ -9151,7 +8484,7 @@
           <a:p>
             <a:fld id="{08C366F5-AFAD-49CB-854A-9D9E238FCA13}" type="slidenum">
               <a:rPr lang="en-GB" smtClean="0"/>
-              <a:t>16</a:t>
+              <a:t>15</a:t>
             </a:fld>
             <a:endParaRPr lang="en-GB"/>
           </a:p>
@@ -9303,7 +8636,7 @@
 </p:sld>
 </file>
 
-<file path=ppt/slides/slide17.xml><?xml version="1.0" encoding="utf-8"?>
+<file path=ppt/slides/slide16.xml><?xml version="1.0" encoding="utf-8"?>
 <p:sld xmlns:a="http://schemas.openxmlformats.org/drawingml/2006/main" xmlns:r="http://schemas.openxmlformats.org/officeDocument/2006/relationships" xmlns:p="http://schemas.openxmlformats.org/presentationml/2006/main">
   <p:cSld>
     <p:spTree>
@@ -9589,7 +8922,7 @@
           <a:p>
             <a:fld id="{08C366F5-AFAD-49CB-854A-9D9E238FCA13}" type="slidenum">
               <a:rPr lang="en-GB" smtClean="0"/>
-              <a:t>17</a:t>
+              <a:t>16</a:t>
             </a:fld>
             <a:endParaRPr lang="en-GB"/>
           </a:p>
@@ -9608,7 +8941,7 @@
 </p:sld>
 </file>
 
-<file path=ppt/slides/slide18.xml><?xml version="1.0" encoding="utf-8"?>
+<file path=ppt/slides/slide17.xml><?xml version="1.0" encoding="utf-8"?>
 <p:sld xmlns:a="http://schemas.openxmlformats.org/drawingml/2006/main" xmlns:r="http://schemas.openxmlformats.org/officeDocument/2006/relationships" xmlns:p="http://schemas.openxmlformats.org/presentationml/2006/main">
   <p:cSld>
     <p:spTree>
@@ -10355,7 +9688,7 @@
           <a:p>
             <a:fld id="{08C366F5-AFAD-49CB-854A-9D9E238FCA13}" type="slidenum">
               <a:rPr lang="en-GB" smtClean="0"/>
-              <a:t>18</a:t>
+              <a:t>17</a:t>
             </a:fld>
             <a:endParaRPr lang="en-GB"/>
           </a:p>
@@ -10374,7 +9707,7 @@
 </p:sld>
 </file>
 
-<file path=ppt/slides/slide19.xml><?xml version="1.0" encoding="utf-8"?>
+<file path=ppt/slides/slide18.xml><?xml version="1.0" encoding="utf-8"?>
 <p:sld xmlns:a="http://schemas.openxmlformats.org/drawingml/2006/main" xmlns:r="http://schemas.openxmlformats.org/officeDocument/2006/relationships" xmlns:p="http://schemas.openxmlformats.org/presentationml/2006/main">
   <p:cSld>
     <p:spTree>
@@ -11081,7 +10414,7 @@
           <a:p>
             <a:fld id="{08C366F5-AFAD-49CB-854A-9D9E238FCA13}" type="slidenum">
               <a:rPr lang="en-GB" smtClean="0"/>
-              <a:t>19</a:t>
+              <a:t>18</a:t>
             </a:fld>
             <a:endParaRPr lang="en-GB"/>
           </a:p>
@@ -11100,316 +10433,7 @@
 </p:sld>
 </file>
 
-<file path=ppt/slides/slide2.xml><?xml version="1.0" encoding="utf-8"?>
-<p:sld xmlns:a="http://schemas.openxmlformats.org/drawingml/2006/main" xmlns:r="http://schemas.openxmlformats.org/officeDocument/2006/relationships" xmlns:p="http://schemas.openxmlformats.org/presentationml/2006/main">
-  <p:cSld>
-    <p:spTree>
-      <p:nvGrpSpPr>
-        <p:cNvPr id="1" name=""/>
-        <p:cNvGrpSpPr/>
-        <p:nvPr/>
-      </p:nvGrpSpPr>
-      <p:grpSpPr>
-        <a:xfrm>
-          <a:off x="0" y="0"/>
-          <a:ext cx="0" cy="0"/>
-          <a:chOff x="0" y="0"/>
-          <a:chExt cx="0" cy="0"/>
-        </a:xfrm>
-      </p:grpSpPr>
-      <p:sp>
-        <p:nvSpPr>
-          <p:cNvPr id="4" name="Title 3">
-            <a:extLst>
-              <a:ext uri="{FF2B5EF4-FFF2-40B4-BE49-F238E27FC236}">
-                <a16:creationId xmlns:a16="http://schemas.microsoft.com/office/drawing/2014/main" id="{080AD447-446B-E09E-6F4A-522C1DBB462E}"/>
-              </a:ext>
-            </a:extLst>
-          </p:cNvPr>
-          <p:cNvSpPr>
-            <a:spLocks noGrp="1"/>
-          </p:cNvSpPr>
-          <p:nvPr>
-            <p:ph type="title"/>
-          </p:nvPr>
-        </p:nvSpPr>
-        <p:spPr/>
-        <p:txBody>
-          <a:bodyPr/>
-          <a:lstStyle/>
-          <a:p>
-            <a:r>
-              <a:rPr lang="en-GB" dirty="0"/>
-              <a:t>Course Schedule</a:t>
-            </a:r>
-          </a:p>
-        </p:txBody>
-      </p:sp>
-      <p:sp>
-        <p:nvSpPr>
-          <p:cNvPr id="6" name="Inhaltsplatzhalter 5">
-            <a:extLst>
-              <a:ext uri="{FF2B5EF4-FFF2-40B4-BE49-F238E27FC236}">
-                <a16:creationId xmlns:a16="http://schemas.microsoft.com/office/drawing/2014/main" id="{CF502483-E45D-7D7D-D169-ACA4F8327D26}"/>
-              </a:ext>
-            </a:extLst>
-          </p:cNvPr>
-          <p:cNvSpPr>
-            <a:spLocks noGrp="1"/>
-          </p:cNvSpPr>
-          <p:nvPr>
-            <p:ph sz="half" idx="1"/>
-          </p:nvPr>
-        </p:nvSpPr>
-        <p:spPr/>
-        <p:txBody>
-          <a:bodyPr>
-            <a:normAutofit lnSpcReduction="10000"/>
-          </a:bodyPr>
-          <a:lstStyle/>
-          <a:p>
-            <a:pPr marL="514350" indent="-514350">
-              <a:buFont typeface="+mj-lt"/>
-              <a:buAutoNum type="arabicPeriod"/>
-            </a:pPr>
-            <a:r>
-              <a:rPr lang="de-DE" dirty="0" err="1"/>
-              <a:t>Exploratory</a:t>
-            </a:r>
-            <a:r>
-              <a:rPr lang="de-DE" dirty="0"/>
-              <a:t> Data Analysis</a:t>
-            </a:r>
-          </a:p>
-          <a:p>
-            <a:pPr marL="514350" indent="-514350">
-              <a:buFont typeface="+mj-lt"/>
-              <a:buAutoNum type="arabicPeriod"/>
-            </a:pPr>
-            <a:endParaRPr lang="de-DE" dirty="0"/>
-          </a:p>
-          <a:p>
-            <a:pPr marL="514350" indent="-514350">
-              <a:buFont typeface="+mj-lt"/>
-              <a:buAutoNum type="arabicPeriod"/>
-            </a:pPr>
-            <a:r>
-              <a:rPr lang="de-DE" dirty="0"/>
-              <a:t>Clustering</a:t>
-            </a:r>
-          </a:p>
-          <a:p>
-            <a:pPr marL="514350" indent="-514350">
-              <a:buFont typeface="+mj-lt"/>
-              <a:buAutoNum type="arabicPeriod"/>
-            </a:pPr>
-            <a:endParaRPr lang="de-DE" dirty="0"/>
-          </a:p>
-          <a:p>
-            <a:pPr marL="514350" indent="-514350">
-              <a:buFont typeface="+mj-lt"/>
-              <a:buAutoNum type="arabicPeriod"/>
-            </a:pPr>
-            <a:r>
-              <a:rPr lang="de-DE" dirty="0" err="1"/>
-              <a:t>Probabilistic</a:t>
-            </a:r>
-            <a:r>
-              <a:rPr lang="de-DE" dirty="0"/>
-              <a:t> Models</a:t>
-            </a:r>
-          </a:p>
-          <a:p>
-            <a:pPr marL="514350" indent="-514350">
-              <a:buFont typeface="+mj-lt"/>
-              <a:buAutoNum type="arabicPeriod"/>
-            </a:pPr>
-            <a:endParaRPr lang="de-DE" dirty="0"/>
-          </a:p>
-          <a:p>
-            <a:pPr marL="514350" indent="-514350">
-              <a:buFont typeface="+mj-lt"/>
-              <a:buAutoNum type="arabicPeriod"/>
-            </a:pPr>
-            <a:r>
-              <a:rPr lang="de-DE" dirty="0"/>
-              <a:t>Statistical </a:t>
-            </a:r>
-            <a:r>
-              <a:rPr lang="de-DE" dirty="0" err="1"/>
-              <a:t>Inference</a:t>
-            </a:r>
-            <a:endParaRPr lang="de-DE" dirty="0"/>
-          </a:p>
-          <a:p>
-            <a:pPr marL="514350" indent="-514350">
-              <a:buFont typeface="+mj-lt"/>
-              <a:buAutoNum type="arabicPeriod"/>
-            </a:pPr>
-            <a:endParaRPr lang="de-DE" dirty="0"/>
-          </a:p>
-          <a:p>
-            <a:pPr marL="514350" indent="-514350">
-              <a:buFont typeface="+mj-lt"/>
-              <a:buAutoNum type="arabicPeriod"/>
-            </a:pPr>
-            <a:r>
-              <a:rPr lang="de-DE" dirty="0" err="1"/>
-              <a:t>Machine</a:t>
-            </a:r>
-            <a:r>
-              <a:rPr lang="de-DE" dirty="0"/>
-              <a:t> Learning</a:t>
-            </a:r>
-          </a:p>
-        </p:txBody>
-      </p:sp>
-      <p:sp>
-        <p:nvSpPr>
-          <p:cNvPr id="7" name="Inhaltsplatzhalter 6">
-            <a:extLst>
-              <a:ext uri="{FF2B5EF4-FFF2-40B4-BE49-F238E27FC236}">
-                <a16:creationId xmlns:a16="http://schemas.microsoft.com/office/drawing/2014/main" id="{B671907E-FFFA-73EF-8E7D-4AB4EBDD957B}"/>
-              </a:ext>
-            </a:extLst>
-          </p:cNvPr>
-          <p:cNvSpPr>
-            <a:spLocks noGrp="1"/>
-          </p:cNvSpPr>
-          <p:nvPr>
-            <p:ph sz="half" idx="2"/>
-          </p:nvPr>
-        </p:nvSpPr>
-        <p:spPr/>
-        <p:txBody>
-          <a:bodyPr>
-            <a:normAutofit lnSpcReduction="10000"/>
-          </a:bodyPr>
-          <a:lstStyle/>
-          <a:p>
-            <a:pPr marL="514350" indent="-514350">
-              <a:buFont typeface="+mj-lt"/>
-              <a:buAutoNum type="arabicPeriod" startAt="6"/>
-            </a:pPr>
-            <a:r>
-              <a:rPr lang="de-DE" dirty="0"/>
-              <a:t>Feature Engineering</a:t>
-            </a:r>
-          </a:p>
-          <a:p>
-            <a:pPr marL="514350" indent="-514350">
-              <a:buFont typeface="+mj-lt"/>
-              <a:buAutoNum type="arabicPeriod" startAt="6"/>
-            </a:pPr>
-            <a:endParaRPr lang="de-DE" dirty="0"/>
-          </a:p>
-          <a:p>
-            <a:pPr marL="514350" indent="-514350">
-              <a:buFont typeface="+mj-lt"/>
-              <a:buAutoNum type="arabicPeriod" startAt="6"/>
-            </a:pPr>
-            <a:r>
-              <a:rPr lang="de-DE" dirty="0"/>
-              <a:t>Model Evaluation</a:t>
-            </a:r>
-          </a:p>
-          <a:p>
-            <a:pPr marL="514350" indent="-514350">
-              <a:buFont typeface="+mj-lt"/>
-              <a:buAutoNum type="arabicPeriod" startAt="6"/>
-            </a:pPr>
-            <a:endParaRPr lang="de-DE" dirty="0"/>
-          </a:p>
-          <a:p>
-            <a:pPr marL="514350" indent="-514350">
-              <a:buFont typeface="+mj-lt"/>
-              <a:buAutoNum type="arabicPeriod" startAt="6"/>
-            </a:pPr>
-            <a:r>
-              <a:rPr lang="de-DE" dirty="0"/>
-              <a:t>Deep Learning</a:t>
-            </a:r>
-          </a:p>
-          <a:p>
-            <a:pPr marL="514350" indent="-514350">
-              <a:buFont typeface="+mj-lt"/>
-              <a:buAutoNum type="arabicPeriod" startAt="6"/>
-            </a:pPr>
-            <a:endParaRPr lang="de-DE" dirty="0"/>
-          </a:p>
-          <a:p>
-            <a:pPr marL="514350" indent="-514350">
-              <a:buFont typeface="+mj-lt"/>
-              <a:buAutoNum type="arabicPeriod" startAt="6"/>
-            </a:pPr>
-            <a:r>
-              <a:rPr lang="de-DE" dirty="0"/>
-              <a:t>Time Series</a:t>
-            </a:r>
-          </a:p>
-          <a:p>
-            <a:pPr marL="514350" indent="-514350">
-              <a:buFont typeface="+mj-lt"/>
-              <a:buAutoNum type="arabicPeriod" startAt="6"/>
-            </a:pPr>
-            <a:endParaRPr lang="de-DE" dirty="0"/>
-          </a:p>
-          <a:p>
-            <a:pPr marL="514350" indent="-514350">
-              <a:buFont typeface="+mj-lt"/>
-              <a:buAutoNum type="arabicPeriod" startAt="6"/>
-            </a:pPr>
-            <a:r>
-              <a:rPr lang="de-DE" dirty="0" err="1"/>
-              <a:t>Causality</a:t>
-            </a:r>
-            <a:endParaRPr lang="de-DE" dirty="0"/>
-          </a:p>
-        </p:txBody>
-      </p:sp>
-      <p:sp>
-        <p:nvSpPr>
-          <p:cNvPr id="3" name="Slide Number Placeholder 2">
-            <a:extLst>
-              <a:ext uri="{FF2B5EF4-FFF2-40B4-BE49-F238E27FC236}">
-                <a16:creationId xmlns:a16="http://schemas.microsoft.com/office/drawing/2014/main" id="{A0664D44-83AC-6A7A-17E0-C1AE2ED18FF5}"/>
-              </a:ext>
-            </a:extLst>
-          </p:cNvPr>
-          <p:cNvSpPr>
-            <a:spLocks noGrp="1"/>
-          </p:cNvSpPr>
-          <p:nvPr>
-            <p:ph type="sldNum" sz="quarter" idx="12"/>
-          </p:nvPr>
-        </p:nvSpPr>
-        <p:spPr/>
-        <p:txBody>
-          <a:bodyPr/>
-          <a:lstStyle/>
-          <a:p>
-            <a:fld id="{08C366F5-AFAD-49CB-854A-9D9E238FCA13}" type="slidenum">
-              <a:rPr lang="en-GB" smtClean="0"/>
-              <a:t>2</a:t>
-            </a:fld>
-            <a:endParaRPr lang="en-GB" dirty="0"/>
-          </a:p>
-        </p:txBody>
-      </p:sp>
-    </p:spTree>
-    <p:extLst>
-      <p:ext uri="{BB962C8B-B14F-4D97-AF65-F5344CB8AC3E}">
-        <p14:creationId xmlns:p14="http://schemas.microsoft.com/office/powerpoint/2010/main" val="310336692"/>
-      </p:ext>
-    </p:extLst>
-  </p:cSld>
-  <p:clrMapOvr>
-    <a:masterClrMapping/>
-  </p:clrMapOvr>
-</p:sld>
-</file>
-
-<file path=ppt/slides/slide20.xml><?xml version="1.0" encoding="utf-8"?>
+<file path=ppt/slides/slide19.xml><?xml version="1.0" encoding="utf-8"?>
 <p:sld xmlns:a="http://schemas.openxmlformats.org/drawingml/2006/main" xmlns:r="http://schemas.openxmlformats.org/officeDocument/2006/relationships" xmlns:p="http://schemas.openxmlformats.org/presentationml/2006/main">
   <p:cSld>
     <p:spTree>
@@ -11642,7 +10666,7 @@
           <a:p>
             <a:fld id="{08C366F5-AFAD-49CB-854A-9D9E238FCA13}" type="slidenum">
               <a:rPr lang="en-GB" smtClean="0"/>
-              <a:t>20</a:t>
+              <a:t>19</a:t>
             </a:fld>
             <a:endParaRPr lang="en-GB"/>
           </a:p>
@@ -11721,7 +10745,162 @@
 </p:sld>
 </file>
 
-<file path=ppt/slides/slide21.xml><?xml version="1.0" encoding="utf-8"?>
+<file path=ppt/slides/slide2.xml><?xml version="1.0" encoding="utf-8"?>
+<p:sld xmlns:a="http://schemas.openxmlformats.org/drawingml/2006/main" xmlns:r="http://schemas.openxmlformats.org/officeDocument/2006/relationships" xmlns:p="http://schemas.openxmlformats.org/presentationml/2006/main">
+  <p:cSld>
+    <p:spTree>
+      <p:nvGrpSpPr>
+        <p:cNvPr id="1" name=""/>
+        <p:cNvGrpSpPr/>
+        <p:nvPr/>
+      </p:nvGrpSpPr>
+      <p:grpSpPr>
+        <a:xfrm>
+          <a:off x="0" y="0"/>
+          <a:ext cx="0" cy="0"/>
+          <a:chOff x="0" y="0"/>
+          <a:chExt cx="0" cy="0"/>
+        </a:xfrm>
+      </p:grpSpPr>
+      <p:sp>
+        <p:nvSpPr>
+          <p:cNvPr id="6" name="Titel 5">
+            <a:extLst>
+              <a:ext uri="{FF2B5EF4-FFF2-40B4-BE49-F238E27FC236}">
+                <a16:creationId xmlns:a16="http://schemas.microsoft.com/office/drawing/2014/main" id="{E92B2E04-27B7-8A9A-6143-C8831F834080}"/>
+              </a:ext>
+            </a:extLst>
+          </p:cNvPr>
+          <p:cNvSpPr>
+            <a:spLocks noGrp="1"/>
+          </p:cNvSpPr>
+          <p:nvPr>
+            <p:ph type="title"/>
+          </p:nvPr>
+        </p:nvSpPr>
+        <p:spPr/>
+        <p:txBody>
+          <a:bodyPr/>
+          <a:lstStyle/>
+          <a:p>
+            <a:r>
+              <a:rPr lang="de-DE" dirty="0"/>
+              <a:t>Clustering</a:t>
+            </a:r>
+          </a:p>
+        </p:txBody>
+      </p:sp>
+      <p:sp>
+        <p:nvSpPr>
+          <p:cNvPr id="7" name="Inhaltsplatzhalter 6">
+            <a:extLst>
+              <a:ext uri="{FF2B5EF4-FFF2-40B4-BE49-F238E27FC236}">
+                <a16:creationId xmlns:a16="http://schemas.microsoft.com/office/drawing/2014/main" id="{16CBE6C5-FF71-FE69-AF96-EB26512AF61F}"/>
+              </a:ext>
+            </a:extLst>
+          </p:cNvPr>
+          <p:cNvSpPr>
+            <a:spLocks noGrp="1"/>
+          </p:cNvSpPr>
+          <p:nvPr>
+            <p:ph idx="1"/>
+          </p:nvPr>
+        </p:nvSpPr>
+        <p:spPr/>
+        <p:txBody>
+          <a:bodyPr/>
+          <a:lstStyle/>
+          <a:p>
+            <a:pPr marL="0" indent="0">
+              <a:buNone/>
+            </a:pPr>
+            <a:endParaRPr lang="de-DE" dirty="0"/>
+          </a:p>
+          <a:p>
+            <a:r>
+              <a:rPr lang="de-DE" dirty="0" err="1"/>
+              <a:t>k-means</a:t>
+            </a:r>
+            <a:endParaRPr lang="de-DE" dirty="0"/>
+          </a:p>
+          <a:p>
+            <a:pPr marL="0" indent="0">
+              <a:buNone/>
+            </a:pPr>
+            <a:endParaRPr lang="de-DE" dirty="0"/>
+          </a:p>
+          <a:p>
+            <a:r>
+              <a:rPr lang="de-DE" dirty="0" err="1"/>
+              <a:t>hierarchical</a:t>
+            </a:r>
+            <a:r>
+              <a:rPr lang="de-DE" dirty="0"/>
+              <a:t> </a:t>
+            </a:r>
+            <a:r>
+              <a:rPr lang="de-DE" dirty="0" err="1"/>
+              <a:t>clustering</a:t>
+            </a:r>
+            <a:endParaRPr lang="de-DE" dirty="0"/>
+          </a:p>
+          <a:p>
+            <a:pPr marL="0" indent="0">
+              <a:buNone/>
+            </a:pPr>
+            <a:endParaRPr lang="de-DE" dirty="0"/>
+          </a:p>
+          <a:p>
+            <a:r>
+              <a:rPr lang="de-DE" dirty="0"/>
+              <a:t>DBSCAN</a:t>
+            </a:r>
+          </a:p>
+        </p:txBody>
+      </p:sp>
+      <p:sp>
+        <p:nvSpPr>
+          <p:cNvPr id="5" name="Foliennummernplatzhalter 4">
+            <a:extLst>
+              <a:ext uri="{FF2B5EF4-FFF2-40B4-BE49-F238E27FC236}">
+                <a16:creationId xmlns:a16="http://schemas.microsoft.com/office/drawing/2014/main" id="{422405FE-CC14-5A9E-E6BC-374EBECB4E84}"/>
+              </a:ext>
+            </a:extLst>
+          </p:cNvPr>
+          <p:cNvSpPr>
+            <a:spLocks noGrp="1"/>
+          </p:cNvSpPr>
+          <p:nvPr>
+            <p:ph type="sldNum" sz="quarter" idx="12"/>
+          </p:nvPr>
+        </p:nvSpPr>
+        <p:spPr/>
+        <p:txBody>
+          <a:bodyPr/>
+          <a:lstStyle/>
+          <a:p>
+            <a:fld id="{08C366F5-AFAD-49CB-854A-9D9E238FCA13}" type="slidenum">
+              <a:rPr lang="en-GB" smtClean="0"/>
+              <a:t>2</a:t>
+            </a:fld>
+            <a:endParaRPr lang="en-GB"/>
+          </a:p>
+        </p:txBody>
+      </p:sp>
+    </p:spTree>
+    <p:extLst>
+      <p:ext uri="{BB962C8B-B14F-4D97-AF65-F5344CB8AC3E}">
+        <p14:creationId xmlns:p14="http://schemas.microsoft.com/office/powerpoint/2010/main" val="3204133960"/>
+      </p:ext>
+    </p:extLst>
+  </p:cSld>
+  <p:clrMapOvr>
+    <a:masterClrMapping/>
+  </p:clrMapOvr>
+</p:sld>
+</file>
+
+<file path=ppt/slides/slide20.xml><?xml version="1.0" encoding="utf-8"?>
 <p:sld xmlns:a="http://schemas.openxmlformats.org/drawingml/2006/main" xmlns:r="http://schemas.openxmlformats.org/officeDocument/2006/relationships" xmlns:p="http://schemas.openxmlformats.org/presentationml/2006/main">
   <p:cSld>
     <p:spTree>
@@ -11855,7 +11034,7 @@
           <a:p>
             <a:fld id="{08C366F5-AFAD-49CB-854A-9D9E238FCA13}" type="slidenum">
               <a:rPr lang="en-GB" smtClean="0"/>
-              <a:t>21</a:t>
+              <a:t>20</a:t>
             </a:fld>
             <a:endParaRPr lang="en-GB"/>
           </a:p>
@@ -11874,7 +11053,7 @@
 </p:sld>
 </file>
 
-<file path=ppt/slides/slide22.xml><?xml version="1.0" encoding="utf-8"?>
+<file path=ppt/slides/slide21.xml><?xml version="1.0" encoding="utf-8"?>
 <p:sld xmlns:a="http://schemas.openxmlformats.org/drawingml/2006/main" xmlns:r="http://schemas.openxmlformats.org/officeDocument/2006/relationships" xmlns:p="http://schemas.openxmlformats.org/presentationml/2006/main">
   <p:cSld>
     <p:spTree>
@@ -11914,7 +11093,7 @@
           <a:p>
             <a:fld id="{08C366F5-AFAD-49CB-854A-9D9E238FCA13}" type="slidenum">
               <a:rPr lang="en-GB" smtClean="0"/>
-              <a:t>22</a:t>
+              <a:t>21</a:t>
             </a:fld>
             <a:endParaRPr lang="en-GB"/>
           </a:p>
@@ -11993,7 +11172,7 @@
 </p:sld>
 </file>
 
-<file path=ppt/slides/slide23.xml><?xml version="1.0" encoding="utf-8"?>
+<file path=ppt/slides/slide22.xml><?xml version="1.0" encoding="utf-8"?>
 <p:sld xmlns:a="http://schemas.openxmlformats.org/drawingml/2006/main" xmlns:r="http://schemas.openxmlformats.org/officeDocument/2006/relationships" xmlns:p="http://schemas.openxmlformats.org/presentationml/2006/main">
   <p:cSld>
     <p:spTree>
@@ -12381,7 +11560,7 @@
           <a:p>
             <a:fld id="{08C366F5-AFAD-49CB-854A-9D9E238FCA13}" type="slidenum">
               <a:rPr lang="en-GB" smtClean="0"/>
-              <a:t>23</a:t>
+              <a:t>22</a:t>
             </a:fld>
             <a:endParaRPr lang="en-GB"/>
           </a:p>
@@ -12766,7 +11945,7 @@
 </p:sld>
 </file>
 
-<file path=ppt/slides/slide24.xml><?xml version="1.0" encoding="utf-8"?>
+<file path=ppt/slides/slide23.xml><?xml version="1.0" encoding="utf-8"?>
 <p:sld xmlns:a="http://schemas.openxmlformats.org/drawingml/2006/main" xmlns:r="http://schemas.openxmlformats.org/officeDocument/2006/relationships" xmlns:p="http://schemas.openxmlformats.org/presentationml/2006/main">
   <p:cSld>
     <p:spTree>
@@ -13097,7 +12276,7 @@
           <a:p>
             <a:fld id="{08C366F5-AFAD-49CB-854A-9D9E238FCA13}" type="slidenum">
               <a:rPr lang="en-GB" smtClean="0"/>
-              <a:t>24</a:t>
+              <a:t>23</a:t>
             </a:fld>
             <a:endParaRPr lang="en-GB"/>
           </a:p>
@@ -13225,7 +12404,7 @@
 </p:sld>
 </file>
 
-<file path=ppt/slides/slide25.xml><?xml version="1.0" encoding="utf-8"?>
+<file path=ppt/slides/slide24.xml><?xml version="1.0" encoding="utf-8"?>
 <p:sld xmlns:a="http://schemas.openxmlformats.org/drawingml/2006/main" xmlns:r="http://schemas.openxmlformats.org/officeDocument/2006/relationships" xmlns:p="http://schemas.openxmlformats.org/presentationml/2006/main">
   <p:cSld>
     <p:spTree>
@@ -13569,7 +12748,7 @@
           <a:p>
             <a:fld id="{08C366F5-AFAD-49CB-854A-9D9E238FCA13}" type="slidenum">
               <a:rPr lang="en-GB" smtClean="0"/>
-              <a:t>25</a:t>
+              <a:t>24</a:t>
             </a:fld>
             <a:endParaRPr lang="en-GB"/>
           </a:p>
@@ -13588,7 +12767,7 @@
 </p:sld>
 </file>
 
-<file path=ppt/slides/slide26.xml><?xml version="1.0" encoding="utf-8"?>
+<file path=ppt/slides/slide25.xml><?xml version="1.0" encoding="utf-8"?>
 <p:sld xmlns:a="http://schemas.openxmlformats.org/drawingml/2006/main" xmlns:r="http://schemas.openxmlformats.org/officeDocument/2006/relationships" xmlns:p="http://schemas.openxmlformats.org/presentationml/2006/main">
   <p:cSld>
     <p:spTree>
@@ -13792,7 +12971,7 @@
           <a:p>
             <a:fld id="{08C366F5-AFAD-49CB-854A-9D9E238FCA13}" type="slidenum">
               <a:rPr lang="en-GB" smtClean="0"/>
-              <a:t>26</a:t>
+              <a:t>25</a:t>
             </a:fld>
             <a:endParaRPr lang="en-GB"/>
           </a:p>
@@ -14263,7 +13442,7 @@
 </p:sld>
 </file>
 
-<file path=ppt/slides/slide27.xml><?xml version="1.0" encoding="utf-8"?>
+<file path=ppt/slides/slide26.xml><?xml version="1.0" encoding="utf-8"?>
 <p:sld xmlns:a="http://schemas.openxmlformats.org/drawingml/2006/main" xmlns:r="http://schemas.openxmlformats.org/officeDocument/2006/relationships" xmlns:p="http://schemas.openxmlformats.org/presentationml/2006/main">
   <p:cSld>
     <p:spTree>
@@ -14758,7 +13937,7 @@
           <a:p>
             <a:fld id="{08C366F5-AFAD-49CB-854A-9D9E238FCA13}" type="slidenum">
               <a:rPr lang="en-GB" smtClean="0"/>
-              <a:t>27</a:t>
+              <a:t>26</a:t>
             </a:fld>
             <a:endParaRPr lang="en-GB"/>
           </a:p>
@@ -14777,7 +13956,7 @@
 </p:sld>
 </file>
 
-<file path=ppt/slides/slide28.xml><?xml version="1.0" encoding="utf-8"?>
+<file path=ppt/slides/slide27.xml><?xml version="1.0" encoding="utf-8"?>
 <p:sld xmlns:a="http://schemas.openxmlformats.org/drawingml/2006/main" xmlns:r="http://schemas.openxmlformats.org/officeDocument/2006/relationships" xmlns:p="http://schemas.openxmlformats.org/presentationml/2006/main">
   <p:cSld>
     <p:spTree>
@@ -15223,7 +14402,7 @@
           <a:p>
             <a:fld id="{08C366F5-AFAD-49CB-854A-9D9E238FCA13}" type="slidenum">
               <a:rPr lang="en-GB" smtClean="0"/>
-              <a:t>28</a:t>
+              <a:t>27</a:t>
             </a:fld>
             <a:endParaRPr lang="en-GB"/>
           </a:p>
@@ -15352,7 +14531,7 @@
 </p:sld>
 </file>
 
-<file path=ppt/slides/slide29.xml><?xml version="1.0" encoding="utf-8"?>
+<file path=ppt/slides/slide28.xml><?xml version="1.0" encoding="utf-8"?>
 <p:sld xmlns:a="http://schemas.openxmlformats.org/drawingml/2006/main" xmlns:r="http://schemas.openxmlformats.org/officeDocument/2006/relationships" xmlns:p="http://schemas.openxmlformats.org/presentationml/2006/main">
   <p:cSld>
     <p:spTree>
@@ -15753,7 +14932,7 @@
           <a:p>
             <a:fld id="{08C366F5-AFAD-49CB-854A-9D9E238FCA13}" type="slidenum">
               <a:rPr lang="en-GB" smtClean="0"/>
-              <a:t>29</a:t>
+              <a:t>28</a:t>
             </a:fld>
             <a:endParaRPr lang="en-GB"/>
           </a:p>
@@ -16159,160 +15338,7 @@
 </p:sld>
 </file>
 
-<file path=ppt/slides/slide3.xml><?xml version="1.0" encoding="utf-8"?>
-<p:sld xmlns:a="http://schemas.openxmlformats.org/drawingml/2006/main" xmlns:r="http://schemas.openxmlformats.org/officeDocument/2006/relationships" xmlns:p="http://schemas.openxmlformats.org/presentationml/2006/main">
-  <p:cSld>
-    <p:spTree>
-      <p:nvGrpSpPr>
-        <p:cNvPr id="1" name=""/>
-        <p:cNvGrpSpPr/>
-        <p:nvPr/>
-      </p:nvGrpSpPr>
-      <p:grpSpPr>
-        <a:xfrm>
-          <a:off x="0" y="0"/>
-          <a:ext cx="0" cy="0"/>
-          <a:chOff x="0" y="0"/>
-          <a:chExt cx="0" cy="0"/>
-        </a:xfrm>
-      </p:grpSpPr>
-      <p:sp>
-        <p:nvSpPr>
-          <p:cNvPr id="6" name="Titel 5">
-            <a:extLst>
-              <a:ext uri="{FF2B5EF4-FFF2-40B4-BE49-F238E27FC236}">
-                <a16:creationId xmlns:a16="http://schemas.microsoft.com/office/drawing/2014/main" id="{E92B2E04-27B7-8A9A-6143-C8831F834080}"/>
-              </a:ext>
-            </a:extLst>
-          </p:cNvPr>
-          <p:cNvSpPr>
-            <a:spLocks noGrp="1"/>
-          </p:cNvSpPr>
-          <p:nvPr>
-            <p:ph type="title"/>
-          </p:nvPr>
-        </p:nvSpPr>
-        <p:spPr/>
-        <p:txBody>
-          <a:bodyPr/>
-          <a:lstStyle/>
-          <a:p>
-            <a:r>
-              <a:rPr lang="de-DE" dirty="0"/>
-              <a:t>Clustering</a:t>
-            </a:r>
-          </a:p>
-        </p:txBody>
-      </p:sp>
-      <p:sp>
-        <p:nvSpPr>
-          <p:cNvPr id="7" name="Inhaltsplatzhalter 6">
-            <a:extLst>
-              <a:ext uri="{FF2B5EF4-FFF2-40B4-BE49-F238E27FC236}">
-                <a16:creationId xmlns:a16="http://schemas.microsoft.com/office/drawing/2014/main" id="{16CBE6C5-FF71-FE69-AF96-EB26512AF61F}"/>
-              </a:ext>
-            </a:extLst>
-          </p:cNvPr>
-          <p:cNvSpPr>
-            <a:spLocks noGrp="1"/>
-          </p:cNvSpPr>
-          <p:nvPr>
-            <p:ph idx="1"/>
-          </p:nvPr>
-        </p:nvSpPr>
-        <p:spPr/>
-        <p:txBody>
-          <a:bodyPr/>
-          <a:lstStyle/>
-          <a:p>
-            <a:r>
-              <a:rPr lang="de-DE" dirty="0" err="1"/>
-              <a:t>scikit-learn</a:t>
-            </a:r>
-            <a:endParaRPr lang="de-DE" dirty="0"/>
-          </a:p>
-          <a:p>
-            <a:endParaRPr lang="de-DE" dirty="0"/>
-          </a:p>
-          <a:p>
-            <a:r>
-              <a:rPr lang="de-DE" dirty="0" err="1"/>
-              <a:t>k-means</a:t>
-            </a:r>
-            <a:endParaRPr lang="de-DE" dirty="0"/>
-          </a:p>
-          <a:p>
-            <a:endParaRPr lang="de-DE" dirty="0"/>
-          </a:p>
-          <a:p>
-            <a:r>
-              <a:rPr lang="de-DE" dirty="0" err="1"/>
-              <a:t>hierarchical</a:t>
-            </a:r>
-            <a:r>
-              <a:rPr lang="de-DE" dirty="0"/>
-              <a:t> </a:t>
-            </a:r>
-            <a:r>
-              <a:rPr lang="de-DE" dirty="0" err="1"/>
-              <a:t>clustering</a:t>
-            </a:r>
-            <a:endParaRPr lang="de-DE" dirty="0"/>
-          </a:p>
-          <a:p>
-            <a:endParaRPr lang="de-DE" dirty="0"/>
-          </a:p>
-          <a:p>
-            <a:r>
-              <a:rPr lang="de-DE" dirty="0"/>
-              <a:t>DBSCAN</a:t>
-            </a:r>
-          </a:p>
-        </p:txBody>
-      </p:sp>
-      <p:sp>
-        <p:nvSpPr>
-          <p:cNvPr id="5" name="Foliennummernplatzhalter 4">
-            <a:extLst>
-              <a:ext uri="{FF2B5EF4-FFF2-40B4-BE49-F238E27FC236}">
-                <a16:creationId xmlns:a16="http://schemas.microsoft.com/office/drawing/2014/main" id="{422405FE-CC14-5A9E-E6BC-374EBECB4E84}"/>
-              </a:ext>
-            </a:extLst>
-          </p:cNvPr>
-          <p:cNvSpPr>
-            <a:spLocks noGrp="1"/>
-          </p:cNvSpPr>
-          <p:nvPr>
-            <p:ph type="sldNum" sz="quarter" idx="12"/>
-          </p:nvPr>
-        </p:nvSpPr>
-        <p:spPr/>
-        <p:txBody>
-          <a:bodyPr/>
-          <a:lstStyle/>
-          <a:p>
-            <a:fld id="{08C366F5-AFAD-49CB-854A-9D9E238FCA13}" type="slidenum">
-              <a:rPr lang="en-GB" smtClean="0"/>
-              <a:t>3</a:t>
-            </a:fld>
-            <a:endParaRPr lang="en-GB"/>
-          </a:p>
-        </p:txBody>
-      </p:sp>
-    </p:spTree>
-    <p:extLst>
-      <p:ext uri="{BB962C8B-B14F-4D97-AF65-F5344CB8AC3E}">
-        <p14:creationId xmlns:p14="http://schemas.microsoft.com/office/powerpoint/2010/main" val="3204133960"/>
-      </p:ext>
-    </p:extLst>
-  </p:cSld>
-  <p:clrMapOvr>
-    <a:masterClrMapping/>
-  </p:clrMapOvr>
-</p:sld>
-</file>
-
-<file path=ppt/slides/slide30.xml><?xml version="1.0" encoding="utf-8"?>
+<file path=ppt/slides/slide29.xml><?xml version="1.0" encoding="utf-8"?>
 <p:sld xmlns:a="http://schemas.openxmlformats.org/drawingml/2006/main" xmlns:r="http://schemas.openxmlformats.org/officeDocument/2006/relationships" xmlns:p="http://schemas.openxmlformats.org/presentationml/2006/main">
   <p:cSld>
     <p:spTree>
@@ -16825,7 +15851,7 @@
           <a:p>
             <a:fld id="{08C366F5-AFAD-49CB-854A-9D9E238FCA13}" type="slidenum">
               <a:rPr lang="en-GB" smtClean="0"/>
-              <a:t>30</a:t>
+              <a:t>29</a:t>
             </a:fld>
             <a:endParaRPr lang="en-GB"/>
           </a:p>
@@ -16844,3476 +15870,7 @@
 </p:sld>
 </file>
 
-<file path=ppt/slides/slide31.xml><?xml version="1.0" encoding="utf-8"?>
-<p:sld xmlns:a="http://schemas.openxmlformats.org/drawingml/2006/main" xmlns:r="http://schemas.openxmlformats.org/officeDocument/2006/relationships" xmlns:p="http://schemas.openxmlformats.org/presentationml/2006/main">
-  <p:cSld>
-    <p:spTree>
-      <p:nvGrpSpPr>
-        <p:cNvPr id="1" name=""/>
-        <p:cNvGrpSpPr/>
-        <p:nvPr/>
-      </p:nvGrpSpPr>
-      <p:grpSpPr>
-        <a:xfrm>
-          <a:off x="0" y="0"/>
-          <a:ext cx="0" cy="0"/>
-          <a:chOff x="0" y="0"/>
-          <a:chExt cx="0" cy="0"/>
-        </a:xfrm>
-      </p:grpSpPr>
-      <p:sp>
-        <p:nvSpPr>
-          <p:cNvPr id="2" name="Titel 1">
-            <a:extLst>
-              <a:ext uri="{FF2B5EF4-FFF2-40B4-BE49-F238E27FC236}">
-                <a16:creationId xmlns:a16="http://schemas.microsoft.com/office/drawing/2014/main" id="{9CC7556B-98BB-9EF2-B9BD-688767AA83EE}"/>
-              </a:ext>
-            </a:extLst>
-          </p:cNvPr>
-          <p:cNvSpPr>
-            <a:spLocks noGrp="1"/>
-          </p:cNvSpPr>
-          <p:nvPr>
-            <p:ph type="title"/>
-          </p:nvPr>
-        </p:nvSpPr>
-        <p:spPr/>
-        <p:txBody>
-          <a:bodyPr/>
-          <a:lstStyle/>
-          <a:p>
-            <a:r>
-              <a:rPr lang="de-DE" dirty="0"/>
-              <a:t>Core Points, Border Points, Noise</a:t>
-            </a:r>
-          </a:p>
-        </p:txBody>
-      </p:sp>
-      <p:sp>
-        <p:nvSpPr>
-          <p:cNvPr id="4" name="Inhaltsplatzhalter 3">
-            <a:extLst>
-              <a:ext uri="{FF2B5EF4-FFF2-40B4-BE49-F238E27FC236}">
-                <a16:creationId xmlns:a16="http://schemas.microsoft.com/office/drawing/2014/main" id="{C0D2316E-28EC-6582-BF64-207C98454652}"/>
-              </a:ext>
-            </a:extLst>
-          </p:cNvPr>
-          <p:cNvSpPr>
-            <a:spLocks noGrp="1"/>
-          </p:cNvSpPr>
-          <p:nvPr>
-            <p:ph idx="1"/>
-          </p:nvPr>
-        </p:nvSpPr>
-        <p:spPr/>
-        <p:txBody>
-          <a:bodyPr>
-            <a:normAutofit/>
-          </a:bodyPr>
-          <a:lstStyle/>
-          <a:p>
-            <a:pPr marL="0" indent="0">
-              <a:buNone/>
-            </a:pPr>
-            <a:r>
-              <a:rPr lang="de-DE" dirty="0" err="1"/>
-              <a:t>Define</a:t>
-            </a:r>
-            <a:r>
-              <a:rPr lang="de-DE" dirty="0"/>
-              <a:t> different </a:t>
-            </a:r>
-            <a:r>
-              <a:rPr lang="de-DE" dirty="0" err="1"/>
-              <a:t>types</a:t>
-            </a:r>
-            <a:r>
-              <a:rPr lang="de-DE" dirty="0"/>
-              <a:t> </a:t>
-            </a:r>
-            <a:r>
-              <a:rPr lang="de-DE" dirty="0" err="1"/>
-              <a:t>of</a:t>
-            </a:r>
-            <a:r>
-              <a:rPr lang="de-DE" dirty="0"/>
-              <a:t> </a:t>
-            </a:r>
-            <a:r>
-              <a:rPr lang="de-DE" dirty="0" err="1"/>
-              <a:t>points</a:t>
-            </a:r>
-            <a:endParaRPr lang="de-DE" dirty="0"/>
-          </a:p>
-          <a:p>
-            <a:pPr marL="0" indent="0">
-              <a:buNone/>
-            </a:pPr>
-            <a:endParaRPr lang="de-DE" dirty="0"/>
-          </a:p>
-          <a:p>
-            <a:r>
-              <a:rPr lang="de-DE" dirty="0"/>
-              <a:t>Core Point: </a:t>
-            </a:r>
-            <a:r>
-              <a:rPr lang="de-DE" dirty="0" err="1"/>
-              <a:t>have</a:t>
-            </a:r>
-            <a:r>
-              <a:rPr lang="de-DE" dirty="0"/>
-              <a:t> </a:t>
-            </a:r>
-            <a:r>
-              <a:rPr lang="de-DE" dirty="0">
-                <a:latin typeface="Cambria Math" panose="02040503050406030204" pitchFamily="18" charset="0"/>
-                <a:ea typeface="Cambria Math" panose="02040503050406030204" pitchFamily="18" charset="0"/>
-              </a:rPr>
-              <a:t>≥ </a:t>
-            </a:r>
-            <a:r>
-              <a:rPr lang="de-DE" dirty="0" err="1">
-                <a:latin typeface="Cambria Math" panose="02040503050406030204" pitchFamily="18" charset="0"/>
-                <a:ea typeface="Cambria Math" panose="02040503050406030204" pitchFamily="18" charset="0"/>
-              </a:rPr>
-              <a:t>min_samples</a:t>
-            </a:r>
-            <a:r>
-              <a:rPr lang="de-DE" dirty="0"/>
-              <a:t> </a:t>
-            </a:r>
-            <a:r>
-              <a:rPr lang="de-DE" dirty="0" err="1"/>
-              <a:t>points</a:t>
-            </a:r>
-            <a:r>
-              <a:rPr lang="de-DE" dirty="0"/>
-              <a:t> </a:t>
-            </a:r>
-            <a:r>
-              <a:rPr lang="de-DE" dirty="0" err="1"/>
-              <a:t>within</a:t>
-            </a:r>
-            <a:r>
-              <a:rPr lang="de-DE" dirty="0"/>
-              <a:t> </a:t>
-            </a:r>
-            <a:r>
-              <a:rPr lang="el-GR" dirty="0">
-                <a:latin typeface="Cambria Math" panose="02040503050406030204" pitchFamily="18" charset="0"/>
-                <a:ea typeface="Cambria Math" panose="02040503050406030204" pitchFamily="18" charset="0"/>
-              </a:rPr>
-              <a:t>ε</a:t>
-            </a:r>
-            <a:r>
-              <a:rPr lang="de-DE" dirty="0"/>
-              <a:t> </a:t>
-            </a:r>
-            <a:r>
-              <a:rPr lang="de-DE" dirty="0">
-                <a:sym typeface="Wingdings" pitchFamily="2" charset="2"/>
-              </a:rPr>
-              <a:t> </a:t>
-            </a:r>
-            <a:r>
-              <a:rPr lang="de-DE" dirty="0" err="1">
-                <a:sym typeface="Wingdings" pitchFamily="2" charset="2"/>
-              </a:rPr>
-              <a:t>dense</a:t>
-            </a:r>
-            <a:r>
-              <a:rPr lang="de-DE" dirty="0">
-                <a:sym typeface="Wingdings" pitchFamily="2" charset="2"/>
-              </a:rPr>
-              <a:t> </a:t>
-            </a:r>
-            <a:r>
-              <a:rPr lang="de-DE" dirty="0" err="1">
-                <a:sym typeface="Wingdings" pitchFamily="2" charset="2"/>
-              </a:rPr>
-              <a:t>center</a:t>
-            </a:r>
-            <a:endParaRPr lang="el-GR" dirty="0"/>
-          </a:p>
-          <a:p>
-            <a:pPr marL="0" indent="0">
-              <a:buNone/>
-            </a:pPr>
-            <a:endParaRPr lang="de-DE" dirty="0"/>
-          </a:p>
-          <a:p>
-            <a:r>
-              <a:rPr lang="de-DE" dirty="0"/>
-              <a:t>Border Point: </a:t>
-            </a:r>
-            <a:r>
-              <a:rPr lang="de-DE" dirty="0" err="1"/>
-              <a:t>within</a:t>
-            </a:r>
-            <a:r>
-              <a:rPr lang="de-DE" dirty="0"/>
-              <a:t> </a:t>
-            </a:r>
-            <a:r>
-              <a:rPr lang="el-GR" dirty="0">
-                <a:latin typeface="Cambria Math" panose="02040503050406030204" pitchFamily="18" charset="0"/>
-                <a:ea typeface="Cambria Math" panose="02040503050406030204" pitchFamily="18" charset="0"/>
-              </a:rPr>
-              <a:t>ε</a:t>
-            </a:r>
-            <a:r>
-              <a:rPr lang="el-GR" dirty="0"/>
-              <a:t> </a:t>
-            </a:r>
-            <a:r>
-              <a:rPr lang="de-DE" dirty="0" err="1"/>
-              <a:t>of</a:t>
-            </a:r>
-            <a:r>
-              <a:rPr lang="de-DE" dirty="0"/>
-              <a:t> a </a:t>
-            </a:r>
-            <a:r>
-              <a:rPr lang="de-DE" dirty="0" err="1"/>
-              <a:t>core</a:t>
-            </a:r>
-            <a:r>
-              <a:rPr lang="de-DE" dirty="0"/>
-              <a:t> </a:t>
-            </a:r>
-            <a:r>
-              <a:rPr lang="de-DE" dirty="0" err="1"/>
-              <a:t>point</a:t>
-            </a:r>
-            <a:r>
-              <a:rPr lang="de-DE" dirty="0"/>
-              <a:t>, but not a </a:t>
-            </a:r>
-            <a:r>
-              <a:rPr lang="de-DE" dirty="0" err="1"/>
-              <a:t>core</a:t>
-            </a:r>
-            <a:r>
-              <a:rPr lang="de-DE" dirty="0"/>
-              <a:t> </a:t>
-            </a:r>
-            <a:r>
-              <a:rPr lang="de-DE" dirty="0" err="1"/>
-              <a:t>point</a:t>
-            </a:r>
-            <a:r>
-              <a:rPr lang="de-DE" dirty="0"/>
-              <a:t> </a:t>
-            </a:r>
-            <a:r>
-              <a:rPr lang="de-DE" dirty="0" err="1"/>
-              <a:t>itself</a:t>
-            </a:r>
-            <a:r>
-              <a:rPr lang="de-DE" dirty="0"/>
-              <a:t> (not </a:t>
-            </a:r>
-            <a:r>
-              <a:rPr lang="de-DE" dirty="0" err="1"/>
-              <a:t>dense</a:t>
-            </a:r>
-            <a:r>
-              <a:rPr lang="de-DE" dirty="0"/>
-              <a:t> </a:t>
-            </a:r>
-            <a:r>
-              <a:rPr lang="de-DE" dirty="0" err="1"/>
-              <a:t>enough</a:t>
-            </a:r>
-            <a:r>
-              <a:rPr lang="de-DE" dirty="0"/>
-              <a:t>) </a:t>
-            </a:r>
-            <a:r>
-              <a:rPr lang="de-DE" dirty="0">
-                <a:sym typeface="Wingdings" pitchFamily="2" charset="2"/>
-              </a:rPr>
-              <a:t> </a:t>
-            </a:r>
-            <a:r>
-              <a:rPr lang="de-DE" dirty="0" err="1">
-                <a:sym typeface="Wingdings" pitchFamily="2" charset="2"/>
-              </a:rPr>
-              <a:t>edge</a:t>
-            </a:r>
-            <a:r>
-              <a:rPr lang="de-DE" dirty="0">
-                <a:sym typeface="Wingdings" pitchFamily="2" charset="2"/>
-              </a:rPr>
-              <a:t> </a:t>
-            </a:r>
-            <a:r>
-              <a:rPr lang="de-DE" dirty="0" err="1">
-                <a:sym typeface="Wingdings" pitchFamily="2" charset="2"/>
-              </a:rPr>
-              <a:t>of</a:t>
-            </a:r>
-            <a:r>
-              <a:rPr lang="de-DE" dirty="0">
-                <a:sym typeface="Wingdings" pitchFamily="2" charset="2"/>
-              </a:rPr>
-              <a:t> </a:t>
-            </a:r>
-            <a:r>
-              <a:rPr lang="de-DE" dirty="0" err="1">
-                <a:sym typeface="Wingdings" pitchFamily="2" charset="2"/>
-              </a:rPr>
-              <a:t>cluster</a:t>
-            </a:r>
-            <a:endParaRPr lang="de-DE" dirty="0"/>
-          </a:p>
-          <a:p>
-            <a:pPr marL="0" indent="0">
-              <a:buNone/>
-            </a:pPr>
-            <a:endParaRPr lang="de-DE" dirty="0"/>
-          </a:p>
-          <a:p>
-            <a:r>
-              <a:rPr lang="de-DE" dirty="0"/>
-              <a:t>Noise Point: not </a:t>
-            </a:r>
-            <a:r>
-              <a:rPr lang="de-DE" dirty="0" err="1"/>
-              <a:t>reachable</a:t>
-            </a:r>
-            <a:r>
-              <a:rPr lang="de-DE" dirty="0"/>
-              <a:t> </a:t>
-            </a:r>
-            <a:r>
-              <a:rPr lang="de-DE" dirty="0" err="1"/>
-              <a:t>from</a:t>
-            </a:r>
-            <a:r>
-              <a:rPr lang="de-DE" dirty="0"/>
-              <a:t> </a:t>
-            </a:r>
-            <a:r>
-              <a:rPr lang="de-DE" dirty="0" err="1"/>
-              <a:t>any</a:t>
-            </a:r>
-            <a:r>
-              <a:rPr lang="de-DE" dirty="0"/>
-              <a:t> </a:t>
-            </a:r>
-            <a:r>
-              <a:rPr lang="de-DE" dirty="0" err="1"/>
-              <a:t>core</a:t>
-            </a:r>
-            <a:r>
-              <a:rPr lang="de-DE" dirty="0"/>
-              <a:t> </a:t>
-            </a:r>
-            <a:r>
-              <a:rPr lang="de-DE" dirty="0" err="1"/>
-              <a:t>point</a:t>
-            </a:r>
-            <a:r>
-              <a:rPr lang="de-DE" dirty="0"/>
-              <a:t> </a:t>
-            </a:r>
-            <a:r>
-              <a:rPr lang="de-DE" dirty="0">
-                <a:sym typeface="Wingdings" pitchFamily="2" charset="2"/>
-              </a:rPr>
-              <a:t> </a:t>
-            </a:r>
-            <a:r>
-              <a:rPr lang="de-DE" dirty="0" err="1">
-                <a:sym typeface="Wingdings" pitchFamily="2" charset="2"/>
-              </a:rPr>
-              <a:t>isolated</a:t>
-            </a:r>
-            <a:r>
-              <a:rPr lang="de-DE" dirty="0">
-                <a:sym typeface="Wingdings" pitchFamily="2" charset="2"/>
-              </a:rPr>
-              <a:t> </a:t>
-            </a:r>
-            <a:r>
-              <a:rPr lang="de-DE" dirty="0" err="1">
-                <a:sym typeface="Wingdings" pitchFamily="2" charset="2"/>
-              </a:rPr>
-              <a:t>point</a:t>
-            </a:r>
-            <a:endParaRPr lang="de-DE" dirty="0"/>
-          </a:p>
-        </p:txBody>
-      </p:sp>
-      <p:sp>
-        <p:nvSpPr>
-          <p:cNvPr id="3" name="Foliennummernplatzhalter 2">
-            <a:extLst>
-              <a:ext uri="{FF2B5EF4-FFF2-40B4-BE49-F238E27FC236}">
-                <a16:creationId xmlns:a16="http://schemas.microsoft.com/office/drawing/2014/main" id="{157EE93D-CF21-6985-77E6-E17034472C2F}"/>
-              </a:ext>
-            </a:extLst>
-          </p:cNvPr>
-          <p:cNvSpPr>
-            <a:spLocks noGrp="1"/>
-          </p:cNvSpPr>
-          <p:nvPr>
-            <p:ph type="sldNum" sz="quarter" idx="12"/>
-          </p:nvPr>
-        </p:nvSpPr>
-        <p:spPr/>
-        <p:txBody>
-          <a:bodyPr/>
-          <a:lstStyle/>
-          <a:p>
-            <a:fld id="{08C366F5-AFAD-49CB-854A-9D9E238FCA13}" type="slidenum">
-              <a:rPr lang="en-GB" smtClean="0"/>
-              <a:t>31</a:t>
-            </a:fld>
-            <a:endParaRPr lang="en-GB"/>
-          </a:p>
-        </p:txBody>
-      </p:sp>
-    </p:spTree>
-    <p:extLst>
-      <p:ext uri="{BB962C8B-B14F-4D97-AF65-F5344CB8AC3E}">
-        <p14:creationId xmlns:p14="http://schemas.microsoft.com/office/powerpoint/2010/main" val="1093548525"/>
-      </p:ext>
-    </p:extLst>
-  </p:cSld>
-  <p:clrMapOvr>
-    <a:masterClrMapping/>
-  </p:clrMapOvr>
-</p:sld>
-</file>
-
-<file path=ppt/slides/slide32.xml><?xml version="1.0" encoding="utf-8"?>
-<p:sld xmlns:a="http://schemas.openxmlformats.org/drawingml/2006/main" xmlns:r="http://schemas.openxmlformats.org/officeDocument/2006/relationships" xmlns:p="http://schemas.openxmlformats.org/presentationml/2006/main">
-  <p:cSld>
-    <p:spTree>
-      <p:nvGrpSpPr>
-        <p:cNvPr id="1" name=""/>
-        <p:cNvGrpSpPr/>
-        <p:nvPr/>
-      </p:nvGrpSpPr>
-      <p:grpSpPr>
-        <a:xfrm>
-          <a:off x="0" y="0"/>
-          <a:ext cx="0" cy="0"/>
-          <a:chOff x="0" y="0"/>
-          <a:chExt cx="0" cy="0"/>
-        </a:xfrm>
-      </p:grpSpPr>
-      <p:sp>
-        <p:nvSpPr>
-          <p:cNvPr id="2" name="Titel 1">
-            <a:extLst>
-              <a:ext uri="{FF2B5EF4-FFF2-40B4-BE49-F238E27FC236}">
-                <a16:creationId xmlns:a16="http://schemas.microsoft.com/office/drawing/2014/main" id="{DA85E08B-65CA-DA0F-8B2B-32C7BF1987BF}"/>
-              </a:ext>
-            </a:extLst>
-          </p:cNvPr>
-          <p:cNvSpPr>
-            <a:spLocks noGrp="1"/>
-          </p:cNvSpPr>
-          <p:nvPr>
-            <p:ph type="title"/>
-          </p:nvPr>
-        </p:nvSpPr>
-        <p:spPr/>
-        <p:txBody>
-          <a:bodyPr/>
-          <a:lstStyle/>
-          <a:p>
-            <a:r>
-              <a:rPr lang="de-DE" dirty="0"/>
-              <a:t>DBSCAN </a:t>
-            </a:r>
-            <a:r>
-              <a:rPr lang="de-DE" dirty="0" err="1"/>
-              <a:t>Algorithm</a:t>
-            </a:r>
-            <a:endParaRPr lang="de-DE" dirty="0"/>
-          </a:p>
-        </p:txBody>
-      </p:sp>
-      <mc:AlternateContent xmlns:mc="http://schemas.openxmlformats.org/markup-compatibility/2006" xmlns:a14="http://schemas.microsoft.com/office/drawing/2010/main">
-        <mc:Choice Requires="a14">
-          <p:sp>
-            <p:nvSpPr>
-              <p:cNvPr id="3" name="Inhaltsplatzhalter 2">
-                <a:extLst>
-                  <a:ext uri="{FF2B5EF4-FFF2-40B4-BE49-F238E27FC236}">
-                    <a16:creationId xmlns:a16="http://schemas.microsoft.com/office/drawing/2014/main" id="{48293539-B5EA-4406-02DD-1F9D36FDC673}"/>
-                  </a:ext>
-                </a:extLst>
-              </p:cNvPr>
-              <p:cNvSpPr>
-                <a:spLocks noGrp="1"/>
-              </p:cNvSpPr>
-              <p:nvPr>
-                <p:ph idx="1"/>
-              </p:nvPr>
-            </p:nvSpPr>
-            <p:spPr/>
-            <p:txBody>
-              <a:bodyPr>
-                <a:normAutofit fontScale="70000" lnSpcReduction="20000"/>
-              </a:bodyPr>
-              <a:lstStyle/>
-              <a:p>
-                <a:pPr marL="514350" indent="-514350">
-                  <a:buFont typeface="+mj-lt"/>
-                  <a:buAutoNum type="arabicPeriod"/>
-                </a:pPr>
-                <a:r>
-                  <a:rPr lang="de-DE" dirty="0"/>
-                  <a:t>Pick an </a:t>
-                </a:r>
-                <a:r>
-                  <a:rPr lang="de-DE" dirty="0" err="1"/>
-                  <a:t>unvisited</a:t>
-                </a:r>
-                <a:r>
-                  <a:rPr lang="de-DE" dirty="0"/>
-                  <a:t> </a:t>
-                </a:r>
-                <a:r>
-                  <a:rPr lang="de-DE" dirty="0" err="1"/>
-                  <a:t>point</a:t>
-                </a:r>
-                <a:r>
-                  <a:rPr lang="de-DE" dirty="0"/>
-                  <a:t> </a:t>
-                </a:r>
-                <a:r>
-                  <a:rPr lang="de-DE" i="1" dirty="0">
-                    <a:latin typeface="Cambria Math" panose="02040503050406030204" pitchFamily="18" charset="0"/>
-                    <a:ea typeface="Cambria Math" panose="02040503050406030204" pitchFamily="18" charset="0"/>
-                  </a:rPr>
-                  <a:t>P</a:t>
-                </a:r>
-                <a:r>
-                  <a:rPr lang="de-DE" dirty="0"/>
-                  <a:t> and </a:t>
-                </a:r>
-                <a:r>
-                  <a:rPr lang="de-DE" dirty="0" err="1"/>
-                  <a:t>mark</a:t>
-                </a:r>
-                <a:r>
-                  <a:rPr lang="de-DE" dirty="0"/>
-                  <a:t> </a:t>
-                </a:r>
-                <a:r>
-                  <a:rPr lang="de-DE" dirty="0" err="1"/>
-                  <a:t>it</a:t>
-                </a:r>
-                <a:r>
-                  <a:rPr lang="de-DE" dirty="0"/>
-                  <a:t> </a:t>
-                </a:r>
-                <a:r>
-                  <a:rPr lang="de-DE" dirty="0" err="1"/>
-                  <a:t>as</a:t>
-                </a:r>
-                <a:r>
-                  <a:rPr lang="de-DE" dirty="0"/>
-                  <a:t> </a:t>
-                </a:r>
-                <a:r>
-                  <a:rPr lang="de-DE" dirty="0" err="1"/>
-                  <a:t>visited</a:t>
-                </a:r>
-                <a:endParaRPr lang="de-DE" dirty="0"/>
-              </a:p>
-              <a:p>
-                <a:pPr marL="514350" indent="-514350">
-                  <a:buFont typeface="+mj-lt"/>
-                  <a:buAutoNum type="arabicPeriod"/>
-                </a:pPr>
-                <a:r>
-                  <a:rPr lang="de-DE" dirty="0" err="1"/>
-                  <a:t>Retrieve</a:t>
-                </a:r>
-                <a:r>
-                  <a:rPr lang="de-DE" dirty="0"/>
-                  <a:t> </a:t>
-                </a:r>
-                <a:r>
-                  <a:rPr lang="de-DE" dirty="0" err="1"/>
-                  <a:t>its</a:t>
-                </a:r>
-                <a:r>
-                  <a:rPr lang="de-DE" dirty="0"/>
-                  <a:t> </a:t>
-                </a:r>
-                <a:r>
-                  <a:rPr lang="el-GR" dirty="0">
-                    <a:latin typeface="Cambria Math" panose="02040503050406030204" pitchFamily="18" charset="0"/>
-                    <a:ea typeface="Cambria Math" panose="02040503050406030204" pitchFamily="18" charset="0"/>
-                  </a:rPr>
-                  <a:t>ε</a:t>
-                </a:r>
-                <a:r>
-                  <a:rPr lang="el-GR" dirty="0"/>
-                  <a:t>-</a:t>
-                </a:r>
-                <a:r>
-                  <a:rPr lang="de-DE" dirty="0" err="1"/>
-                  <a:t>neighborhood</a:t>
-                </a:r>
-                <a:r>
-                  <a:rPr lang="de-DE" dirty="0"/>
-                  <a:t> </a:t>
-                </a:r>
-                <a14:m>
-                  <m:oMath xmlns:m="http://schemas.openxmlformats.org/officeDocument/2006/math">
-                    <m:sSub>
-                      <m:sSubPr>
-                        <m:ctrlPr>
-                          <a:rPr lang="de-DE" i="1">
-                            <a:latin typeface="Cambria Math" panose="02040503050406030204" pitchFamily="18" charset="0"/>
-                          </a:rPr>
-                        </m:ctrlPr>
-                      </m:sSubPr>
-                      <m:e>
-                        <m:r>
-                          <a:rPr lang="de-DE" i="1">
-                            <a:latin typeface="Cambria Math" panose="02040503050406030204" pitchFamily="18" charset="0"/>
-                          </a:rPr>
-                          <m:t>𝑁</m:t>
-                        </m:r>
-                      </m:e>
-                      <m:sub>
-                        <m:r>
-                          <m:rPr>
-                            <m:nor/>
-                          </m:rPr>
-                          <a:rPr lang="el-GR" dirty="0">
-                            <a:latin typeface="Cambria Math" panose="02040503050406030204" pitchFamily="18" charset="0"/>
-                            <a:ea typeface="Cambria Math" panose="02040503050406030204" pitchFamily="18" charset="0"/>
-                          </a:rPr>
-                          <m:t>ε</m:t>
-                        </m:r>
-                      </m:sub>
-                    </m:sSub>
-                    <m:r>
-                      <a:rPr lang="de-DE" i="1">
-                        <a:latin typeface="Cambria Math" panose="02040503050406030204" pitchFamily="18" charset="0"/>
-                      </a:rPr>
-                      <m:t>(</m:t>
-                    </m:r>
-                    <m:r>
-                      <a:rPr lang="de-DE" i="1">
-                        <a:latin typeface="Cambria Math" panose="02040503050406030204" pitchFamily="18" charset="0"/>
-                      </a:rPr>
-                      <m:t>𝑃</m:t>
-                    </m:r>
-                    <m:r>
-                      <a:rPr lang="de-DE" i="1">
-                        <a:latin typeface="Cambria Math" panose="02040503050406030204" pitchFamily="18" charset="0"/>
-                      </a:rPr>
-                      <m:t>)</m:t>
-                    </m:r>
-                  </m:oMath>
-                </a14:m>
-                <a:endParaRPr lang="de-DE" dirty="0"/>
-              </a:p>
-              <a:p>
-                <a:pPr marL="514350" indent="-514350">
-                  <a:buFont typeface="+mj-lt"/>
-                  <a:buAutoNum type="arabicPeriod"/>
-                </a:pPr>
-                <a:r>
-                  <a:rPr lang="de-DE" dirty="0" err="1"/>
-                  <a:t>If</a:t>
-                </a:r>
-                <a:r>
-                  <a:rPr lang="de-DE" dirty="0"/>
-                  <a:t> </a:t>
-                </a:r>
-                <a:r>
-                  <a:rPr lang="de-DE" i="1" dirty="0">
-                    <a:latin typeface="Cambria Math" panose="02040503050406030204" pitchFamily="18" charset="0"/>
-                    <a:ea typeface="Cambria Math" panose="02040503050406030204" pitchFamily="18" charset="0"/>
-                  </a:rPr>
-                  <a:t>P </a:t>
-                </a:r>
-                <a:r>
-                  <a:rPr lang="de-DE" dirty="0"/>
-                  <a:t> </a:t>
-                </a:r>
-                <a:r>
-                  <a:rPr lang="de-DE" dirty="0" err="1"/>
-                  <a:t>is</a:t>
-                </a:r>
-                <a:r>
-                  <a:rPr lang="de-DE" dirty="0"/>
-                  <a:t> a </a:t>
-                </a:r>
-                <a:r>
-                  <a:rPr lang="de-DE" dirty="0" err="1"/>
-                  <a:t>core</a:t>
-                </a:r>
-                <a:r>
-                  <a:rPr lang="de-DE" dirty="0"/>
-                  <a:t> </a:t>
-                </a:r>
-                <a:r>
-                  <a:rPr lang="de-DE" dirty="0" err="1"/>
-                  <a:t>point</a:t>
-                </a:r>
-                <a:r>
-                  <a:rPr lang="de-DE" dirty="0"/>
-                  <a:t>:</a:t>
-                </a:r>
-              </a:p>
-              <a:p>
-                <a:pPr lvl="1"/>
-                <a:r>
-                  <a:rPr lang="de-DE" dirty="0"/>
-                  <a:t>Create a </a:t>
-                </a:r>
-                <a:r>
-                  <a:rPr lang="de-DE" dirty="0" err="1"/>
-                  <a:t>new</a:t>
-                </a:r>
-                <a:r>
-                  <a:rPr lang="de-DE" dirty="0"/>
-                  <a:t> </a:t>
-                </a:r>
-                <a:r>
-                  <a:rPr lang="de-DE" dirty="0" err="1"/>
-                  <a:t>cluster</a:t>
-                </a:r>
-                <a:r>
-                  <a:rPr lang="de-DE" dirty="0"/>
-                  <a:t> and </a:t>
-                </a:r>
-                <a:r>
-                  <a:rPr lang="de-DE" dirty="0" err="1"/>
-                  <a:t>add</a:t>
-                </a:r>
-                <a:r>
-                  <a:rPr lang="de-DE" dirty="0"/>
-                  <a:t> </a:t>
-                </a:r>
-                <a:r>
-                  <a:rPr lang="de-DE" i="1" dirty="0">
-                    <a:latin typeface="Cambria Math" panose="02040503050406030204" pitchFamily="18" charset="0"/>
-                    <a:ea typeface="Cambria Math" panose="02040503050406030204" pitchFamily="18" charset="0"/>
-                  </a:rPr>
-                  <a:t>P</a:t>
-                </a:r>
-                <a:r>
-                  <a:rPr lang="de-DE" dirty="0"/>
-                  <a:t> and all </a:t>
-                </a:r>
-                <a:r>
-                  <a:rPr lang="de-DE" dirty="0" err="1"/>
-                  <a:t>points</a:t>
-                </a:r>
-                <a:r>
-                  <a:rPr lang="de-DE" dirty="0"/>
-                  <a:t> in </a:t>
-                </a:r>
-                <a14:m>
-                  <m:oMath xmlns:m="http://schemas.openxmlformats.org/officeDocument/2006/math">
-                    <m:sSub>
-                      <m:sSubPr>
-                        <m:ctrlPr>
-                          <a:rPr lang="de-DE" i="1">
-                            <a:latin typeface="Cambria Math" panose="02040503050406030204" pitchFamily="18" charset="0"/>
-                          </a:rPr>
-                        </m:ctrlPr>
-                      </m:sSubPr>
-                      <m:e>
-                        <m:r>
-                          <a:rPr lang="de-DE" i="1">
-                            <a:latin typeface="Cambria Math" panose="02040503050406030204" pitchFamily="18" charset="0"/>
-                          </a:rPr>
-                          <m:t>𝑁</m:t>
-                        </m:r>
-                      </m:e>
-                      <m:sub>
-                        <m:r>
-                          <m:rPr>
-                            <m:nor/>
-                          </m:rPr>
-                          <a:rPr lang="el-GR" dirty="0">
-                            <a:latin typeface="Cambria Math" panose="02040503050406030204" pitchFamily="18" charset="0"/>
-                            <a:ea typeface="Cambria Math" panose="02040503050406030204" pitchFamily="18" charset="0"/>
-                          </a:rPr>
-                          <m:t>ε</m:t>
-                        </m:r>
-                      </m:sub>
-                    </m:sSub>
-                    <m:r>
-                      <a:rPr lang="de-DE" i="1">
-                        <a:latin typeface="Cambria Math" panose="02040503050406030204" pitchFamily="18" charset="0"/>
-                      </a:rPr>
-                      <m:t>(</m:t>
-                    </m:r>
-                    <m:r>
-                      <a:rPr lang="de-DE" i="1">
-                        <a:latin typeface="Cambria Math" panose="02040503050406030204" pitchFamily="18" charset="0"/>
-                      </a:rPr>
-                      <m:t>𝑃</m:t>
-                    </m:r>
-                    <m:r>
-                      <a:rPr lang="de-DE" i="1" smtClean="0">
-                        <a:latin typeface="Cambria Math" panose="02040503050406030204" pitchFamily="18" charset="0"/>
-                      </a:rPr>
-                      <m:t>)</m:t>
-                    </m:r>
-                  </m:oMath>
-                </a14:m>
-                <a:r>
-                  <a:rPr lang="de-DE" dirty="0"/>
-                  <a:t> </a:t>
-                </a:r>
-                <a:r>
-                  <a:rPr lang="de-DE" dirty="0" err="1"/>
-                  <a:t>to</a:t>
-                </a:r>
-                <a:r>
-                  <a:rPr lang="de-DE" dirty="0"/>
-                  <a:t> </a:t>
-                </a:r>
-                <a:r>
-                  <a:rPr lang="de-DE" dirty="0" err="1"/>
-                  <a:t>it</a:t>
-                </a:r>
-                <a:r>
-                  <a:rPr lang="de-DE" dirty="0"/>
-                  <a:t> (</a:t>
-                </a:r>
-                <a:r>
-                  <a:rPr lang="de-DE" dirty="0" err="1"/>
-                  <a:t>that</a:t>
-                </a:r>
-                <a:r>
-                  <a:rPr lang="de-DE" dirty="0"/>
-                  <a:t> </a:t>
-                </a:r>
-                <a:r>
-                  <a:rPr lang="de-DE" dirty="0" err="1"/>
-                  <a:t>are</a:t>
-                </a:r>
-                <a:r>
-                  <a:rPr lang="de-DE" dirty="0"/>
-                  <a:t> not </a:t>
-                </a:r>
-                <a:r>
-                  <a:rPr lang="de-DE" dirty="0" err="1"/>
-                  <a:t>yet</a:t>
-                </a:r>
-                <a:r>
-                  <a:rPr lang="de-DE" dirty="0"/>
-                  <a:t> </a:t>
-                </a:r>
-                <a:r>
-                  <a:rPr lang="de-DE" dirty="0" err="1"/>
-                  <a:t>assigned</a:t>
-                </a:r>
-                <a:r>
-                  <a:rPr lang="de-DE" dirty="0"/>
-                  <a:t> </a:t>
-                </a:r>
-                <a:r>
-                  <a:rPr lang="de-DE" dirty="0" err="1"/>
-                  <a:t>to</a:t>
-                </a:r>
-                <a:r>
-                  <a:rPr lang="de-DE" dirty="0"/>
-                  <a:t> </a:t>
-                </a:r>
-                <a:r>
-                  <a:rPr lang="de-DE" dirty="0" err="1"/>
-                  <a:t>any</a:t>
-                </a:r>
-                <a:r>
-                  <a:rPr lang="de-DE" dirty="0"/>
-                  <a:t> </a:t>
-                </a:r>
-                <a:r>
-                  <a:rPr lang="de-DE" dirty="0" err="1"/>
-                  <a:t>cluster</a:t>
-                </a:r>
-                <a:r>
-                  <a:rPr lang="de-DE" dirty="0"/>
-                  <a:t>)</a:t>
-                </a:r>
-              </a:p>
-              <a:p>
-                <a:pPr lvl="1"/>
-                <a:r>
-                  <a:rPr lang="de-DE" dirty="0" err="1"/>
-                  <a:t>For</a:t>
-                </a:r>
-                <a:r>
-                  <a:rPr lang="de-DE" dirty="0"/>
-                  <a:t> </a:t>
-                </a:r>
-                <a:r>
-                  <a:rPr lang="de-DE" dirty="0" err="1"/>
-                  <a:t>each</a:t>
-                </a:r>
-                <a:r>
-                  <a:rPr lang="de-DE" dirty="0"/>
-                  <a:t> </a:t>
-                </a:r>
-                <a:r>
-                  <a:rPr lang="de-DE" dirty="0" err="1"/>
-                  <a:t>point</a:t>
-                </a:r>
-                <a:r>
-                  <a:rPr lang="de-DE" dirty="0"/>
-                  <a:t> </a:t>
-                </a:r>
-                <a:r>
-                  <a:rPr lang="de-DE" i="1" dirty="0">
-                    <a:latin typeface="Cambria Math" panose="02040503050406030204" pitchFamily="18" charset="0"/>
-                    <a:ea typeface="Cambria Math" panose="02040503050406030204" pitchFamily="18" charset="0"/>
-                  </a:rPr>
-                  <a:t>Q</a:t>
-                </a:r>
-                <a:r>
-                  <a:rPr lang="de-DE" dirty="0"/>
-                  <a:t> in </a:t>
-                </a:r>
-                <a14:m>
-                  <m:oMath xmlns:m="http://schemas.openxmlformats.org/officeDocument/2006/math">
-                    <m:sSub>
-                      <m:sSubPr>
-                        <m:ctrlPr>
-                          <a:rPr lang="de-DE" i="1" smtClean="0">
-                            <a:latin typeface="Cambria Math" panose="02040503050406030204" pitchFamily="18" charset="0"/>
-                          </a:rPr>
-                        </m:ctrlPr>
-                      </m:sSubPr>
-                      <m:e>
-                        <m:r>
-                          <a:rPr lang="de-DE" b="0" i="1" smtClean="0">
-                            <a:latin typeface="Cambria Math" panose="02040503050406030204" pitchFamily="18" charset="0"/>
-                          </a:rPr>
-                          <m:t>𝑁</m:t>
-                        </m:r>
-                      </m:e>
-                      <m:sub>
-                        <m:r>
-                          <m:rPr>
-                            <m:nor/>
-                          </m:rPr>
-                          <a:rPr lang="el-GR" dirty="0">
-                            <a:latin typeface="Cambria Math" panose="02040503050406030204" pitchFamily="18" charset="0"/>
-                            <a:ea typeface="Cambria Math" panose="02040503050406030204" pitchFamily="18" charset="0"/>
-                          </a:rPr>
-                          <m:t>ε</m:t>
-                        </m:r>
-                      </m:sub>
-                    </m:sSub>
-                    <m:r>
-                      <a:rPr lang="de-DE" b="0" i="1" smtClean="0">
-                        <a:latin typeface="Cambria Math" panose="02040503050406030204" pitchFamily="18" charset="0"/>
-                      </a:rPr>
-                      <m:t>(</m:t>
-                    </m:r>
-                    <m:r>
-                      <a:rPr lang="de-DE" b="0" i="1" smtClean="0">
-                        <a:latin typeface="Cambria Math" panose="02040503050406030204" pitchFamily="18" charset="0"/>
-                      </a:rPr>
-                      <m:t>𝑃</m:t>
-                    </m:r>
-                    <m:r>
-                      <a:rPr lang="de-DE" b="0" i="1" smtClean="0">
-                        <a:latin typeface="Cambria Math" panose="02040503050406030204" pitchFamily="18" charset="0"/>
-                      </a:rPr>
-                      <m:t>)</m:t>
-                    </m:r>
-                  </m:oMath>
-                </a14:m>
-                <a:r>
-                  <a:rPr lang="de-DE" dirty="0"/>
-                  <a:t>:</a:t>
-                </a:r>
-              </a:p>
-              <a:p>
-                <a:pPr lvl="2"/>
-                <a:r>
-                  <a:rPr lang="de-DE" dirty="0"/>
-                  <a:t>Mark </a:t>
-                </a:r>
-                <a:r>
-                  <a:rPr lang="de-DE" dirty="0" err="1"/>
-                  <a:t>as</a:t>
-                </a:r>
-                <a:r>
-                  <a:rPr lang="de-DE" dirty="0"/>
-                  <a:t> </a:t>
-                </a:r>
-                <a:r>
-                  <a:rPr lang="de-DE" dirty="0" err="1"/>
-                  <a:t>visited</a:t>
-                </a:r>
-                <a:r>
-                  <a:rPr lang="de-DE" dirty="0"/>
-                  <a:t> (</a:t>
-                </a:r>
-                <a:r>
-                  <a:rPr lang="de-DE" dirty="0" err="1"/>
-                  <a:t>if</a:t>
-                </a:r>
-                <a:r>
-                  <a:rPr lang="de-DE" dirty="0"/>
-                  <a:t> </a:t>
-                </a:r>
-                <a:r>
-                  <a:rPr lang="de-DE" dirty="0" err="1"/>
-                  <a:t>unvisited</a:t>
-                </a:r>
-                <a:r>
-                  <a:rPr lang="de-DE" dirty="0"/>
-                  <a:t>) and </a:t>
-                </a:r>
-                <a:r>
-                  <a:rPr lang="de-DE" dirty="0" err="1"/>
-                  <a:t>retrieve</a:t>
-                </a:r>
-                <a:r>
-                  <a:rPr lang="de-DE" dirty="0"/>
-                  <a:t> </a:t>
-                </a:r>
-                <a14:m>
-                  <m:oMath xmlns:m="http://schemas.openxmlformats.org/officeDocument/2006/math">
-                    <m:sSub>
-                      <m:sSubPr>
-                        <m:ctrlPr>
-                          <a:rPr lang="de-DE" i="1">
-                            <a:latin typeface="Cambria Math" panose="02040503050406030204" pitchFamily="18" charset="0"/>
-                          </a:rPr>
-                        </m:ctrlPr>
-                      </m:sSubPr>
-                      <m:e>
-                        <m:r>
-                          <a:rPr lang="de-DE" i="1">
-                            <a:latin typeface="Cambria Math" panose="02040503050406030204" pitchFamily="18" charset="0"/>
-                          </a:rPr>
-                          <m:t>𝑁</m:t>
-                        </m:r>
-                      </m:e>
-                      <m:sub>
-                        <m:r>
-                          <m:rPr>
-                            <m:nor/>
-                          </m:rPr>
-                          <a:rPr lang="el-GR" dirty="0">
-                            <a:latin typeface="Cambria Math" panose="02040503050406030204" pitchFamily="18" charset="0"/>
-                            <a:ea typeface="Cambria Math" panose="02040503050406030204" pitchFamily="18" charset="0"/>
-                          </a:rPr>
-                          <m:t>ε</m:t>
-                        </m:r>
-                      </m:sub>
-                    </m:sSub>
-                    <m:r>
-                      <a:rPr lang="de-DE" i="1">
-                        <a:latin typeface="Cambria Math" panose="02040503050406030204" pitchFamily="18" charset="0"/>
-                      </a:rPr>
-                      <m:t>(</m:t>
-                    </m:r>
-                    <m:r>
-                      <a:rPr lang="de-DE" b="0" i="1" smtClean="0">
-                        <a:latin typeface="Cambria Math" panose="02040503050406030204" pitchFamily="18" charset="0"/>
-                      </a:rPr>
-                      <m:t>𝑄</m:t>
-                    </m:r>
-                    <m:r>
-                      <a:rPr lang="de-DE" i="1">
-                        <a:latin typeface="Cambria Math" panose="02040503050406030204" pitchFamily="18" charset="0"/>
-                      </a:rPr>
-                      <m:t>)</m:t>
-                    </m:r>
-                  </m:oMath>
-                </a14:m>
-                <a:endParaRPr lang="de-DE" dirty="0"/>
-              </a:p>
-              <a:p>
-                <a:pPr lvl="2"/>
-                <a:r>
-                  <a:rPr lang="de-DE" dirty="0" err="1"/>
-                  <a:t>If</a:t>
-                </a:r>
-                <a:r>
-                  <a:rPr lang="de-DE" dirty="0"/>
-                  <a:t> </a:t>
-                </a:r>
-                <a:r>
-                  <a:rPr lang="de-DE" i="1" dirty="0">
-                    <a:latin typeface="Cambria Math" panose="02040503050406030204" pitchFamily="18" charset="0"/>
-                    <a:ea typeface="Cambria Math" panose="02040503050406030204" pitchFamily="18" charset="0"/>
-                  </a:rPr>
-                  <a:t>Q</a:t>
-                </a:r>
-                <a:r>
-                  <a:rPr lang="de-DE" dirty="0"/>
-                  <a:t> </a:t>
-                </a:r>
-                <a:r>
-                  <a:rPr lang="de-DE" dirty="0" err="1"/>
-                  <a:t>is</a:t>
-                </a:r>
-                <a:r>
-                  <a:rPr lang="de-DE" dirty="0"/>
-                  <a:t> a </a:t>
-                </a:r>
-                <a:r>
-                  <a:rPr lang="de-DE" dirty="0" err="1"/>
-                  <a:t>core</a:t>
-                </a:r>
-                <a:r>
-                  <a:rPr lang="de-DE" dirty="0"/>
-                  <a:t> </a:t>
-                </a:r>
-                <a:r>
-                  <a:rPr lang="de-DE" dirty="0" err="1"/>
-                  <a:t>core</a:t>
-                </a:r>
-                <a:r>
-                  <a:rPr lang="de-DE" dirty="0"/>
-                  <a:t> </a:t>
-                </a:r>
-                <a:r>
-                  <a:rPr lang="de-DE" dirty="0" err="1"/>
-                  <a:t>point</a:t>
-                </a:r>
-                <a:r>
-                  <a:rPr lang="de-DE" dirty="0"/>
-                  <a:t>: </a:t>
-                </a:r>
-                <a:r>
-                  <a:rPr lang="de-DE" dirty="0" err="1"/>
-                  <a:t>iteratively</a:t>
-                </a:r>
-                <a:r>
-                  <a:rPr lang="de-DE" dirty="0"/>
-                  <a:t> </a:t>
-                </a:r>
-                <a:r>
-                  <a:rPr lang="de-DE" dirty="0" err="1"/>
-                  <a:t>expand</a:t>
-                </a:r>
-                <a:r>
-                  <a:rPr lang="de-DE" dirty="0"/>
-                  <a:t> </a:t>
-                </a:r>
-                <a:r>
-                  <a:rPr lang="de-DE" dirty="0" err="1"/>
-                  <a:t>the</a:t>
-                </a:r>
-                <a:r>
-                  <a:rPr lang="de-DE" dirty="0"/>
-                  <a:t> </a:t>
-                </a:r>
-                <a:r>
-                  <a:rPr lang="de-DE" dirty="0" err="1"/>
-                  <a:t>cluster</a:t>
-                </a:r>
-                <a:r>
-                  <a:rPr lang="de-DE" dirty="0"/>
-                  <a:t> (</a:t>
-                </a:r>
-                <a:r>
-                  <a:rPr lang="de-DE" dirty="0" err="1"/>
-                  <a:t>density-reachable</a:t>
-                </a:r>
-                <a:r>
-                  <a:rPr lang="de-DE" dirty="0"/>
-                  <a:t> </a:t>
-                </a:r>
-                <a:r>
-                  <a:rPr lang="de-DE" dirty="0" err="1"/>
-                  <a:t>points</a:t>
-                </a:r>
-                <a:r>
-                  <a:rPr lang="de-DE" dirty="0"/>
-                  <a:t>)</a:t>
-                </a:r>
-              </a:p>
-              <a:p>
-                <a:pPr marL="514350" indent="-514350">
-                  <a:buFont typeface="+mj-lt"/>
-                  <a:buAutoNum type="arabicPeriod"/>
-                </a:pPr>
-                <a:r>
-                  <a:rPr lang="de-DE" dirty="0"/>
-                  <a:t>Else: </a:t>
-                </a:r>
-                <a:r>
-                  <a:rPr lang="de-DE" dirty="0" err="1"/>
-                  <a:t>mark</a:t>
-                </a:r>
-                <a:r>
-                  <a:rPr lang="de-DE" dirty="0"/>
-                  <a:t> </a:t>
-                </a:r>
-                <a:r>
-                  <a:rPr lang="de-DE" i="1" dirty="0">
-                    <a:latin typeface="Cambria Math" panose="02040503050406030204" pitchFamily="18" charset="0"/>
-                    <a:ea typeface="Cambria Math" panose="02040503050406030204" pitchFamily="18" charset="0"/>
-                  </a:rPr>
-                  <a:t>P </a:t>
-                </a:r>
-                <a:r>
-                  <a:rPr lang="de-DE" dirty="0"/>
-                  <a:t> </a:t>
-                </a:r>
-                <a:r>
-                  <a:rPr lang="de-DE" dirty="0" err="1"/>
-                  <a:t>as</a:t>
-                </a:r>
-                <a:r>
-                  <a:rPr lang="de-DE" dirty="0"/>
-                  <a:t> </a:t>
-                </a:r>
-                <a:r>
-                  <a:rPr lang="de-DE" dirty="0" err="1"/>
-                  <a:t>noise</a:t>
-                </a:r>
-                <a:r>
-                  <a:rPr lang="de-DE" dirty="0"/>
-                  <a:t> (</a:t>
-                </a:r>
-                <a:r>
-                  <a:rPr lang="de-DE" dirty="0" err="1"/>
-                  <a:t>temporary</a:t>
-                </a:r>
-                <a:r>
-                  <a:rPr lang="de-DE" dirty="0"/>
-                  <a:t>, </a:t>
-                </a:r>
-                <a:r>
-                  <a:rPr lang="de-DE" dirty="0" err="1"/>
-                  <a:t>may</a:t>
-                </a:r>
-                <a:r>
-                  <a:rPr lang="de-DE" dirty="0"/>
-                  <a:t> </a:t>
-                </a:r>
-                <a:r>
-                  <a:rPr lang="de-DE" dirty="0" err="1"/>
-                  <a:t>later</a:t>
-                </a:r>
-                <a:r>
-                  <a:rPr lang="de-DE" dirty="0"/>
-                  <a:t> </a:t>
-                </a:r>
-                <a:r>
-                  <a:rPr lang="de-DE" dirty="0" err="1"/>
-                  <a:t>become</a:t>
-                </a:r>
-                <a:r>
-                  <a:rPr lang="de-DE" dirty="0"/>
-                  <a:t> a </a:t>
-                </a:r>
-                <a:r>
-                  <a:rPr lang="de-DE" dirty="0" err="1"/>
-                  <a:t>border</a:t>
-                </a:r>
-                <a:r>
-                  <a:rPr lang="de-DE" dirty="0"/>
-                  <a:t> </a:t>
-                </a:r>
-                <a:r>
-                  <a:rPr lang="de-DE" dirty="0" err="1"/>
-                  <a:t>point</a:t>
-                </a:r>
-                <a:r>
-                  <a:rPr lang="de-DE" dirty="0"/>
-                  <a:t>)</a:t>
-                </a:r>
-              </a:p>
-              <a:p>
-                <a:pPr marL="514350" indent="-514350">
-                  <a:buFont typeface="+mj-lt"/>
-                  <a:buAutoNum type="arabicPeriod"/>
-                </a:pPr>
-                <a:r>
-                  <a:rPr lang="de-DE" dirty="0"/>
-                  <a:t>Repeat </a:t>
-                </a:r>
-                <a:r>
-                  <a:rPr lang="de-DE" dirty="0" err="1"/>
-                  <a:t>until</a:t>
-                </a:r>
-                <a:r>
-                  <a:rPr lang="de-DE" dirty="0"/>
-                  <a:t> all </a:t>
-                </a:r>
-                <a:r>
-                  <a:rPr lang="de-DE" dirty="0" err="1"/>
-                  <a:t>points</a:t>
-                </a:r>
-                <a:r>
-                  <a:rPr lang="de-DE" dirty="0"/>
-                  <a:t> </a:t>
-                </a:r>
-                <a:r>
-                  <a:rPr lang="de-DE" dirty="0" err="1"/>
-                  <a:t>are</a:t>
-                </a:r>
-                <a:r>
-                  <a:rPr lang="de-DE" dirty="0"/>
-                  <a:t> </a:t>
-                </a:r>
-                <a:r>
-                  <a:rPr lang="de-DE" dirty="0" err="1"/>
-                  <a:t>processed</a:t>
-                </a:r>
-                <a:endParaRPr lang="de-DE" dirty="0"/>
-              </a:p>
-              <a:p>
-                <a:pPr marL="0" indent="0">
-                  <a:buNone/>
-                </a:pPr>
-                <a:endParaRPr lang="de-DE" dirty="0"/>
-              </a:p>
-              <a:p>
-                <a:pPr marL="0" indent="0">
-                  <a:buNone/>
-                </a:pPr>
-                <a:r>
-                  <a:rPr lang="de-DE" dirty="0"/>
-                  <a:t>Cluster </a:t>
-                </a:r>
-                <a:r>
-                  <a:rPr lang="de-DE" dirty="0" err="1"/>
-                  <a:t>formation</a:t>
-                </a:r>
-                <a:r>
-                  <a:rPr lang="de-DE" dirty="0"/>
-                  <a:t> </a:t>
-                </a:r>
-                <a:r>
-                  <a:rPr lang="de-DE" dirty="0" err="1"/>
-                  <a:t>concept</a:t>
-                </a:r>
-                <a:r>
-                  <a:rPr lang="de-DE" dirty="0"/>
-                  <a:t>:</a:t>
-                </a:r>
-              </a:p>
-              <a:p>
-                <a:r>
-                  <a:rPr lang="de-DE" dirty="0"/>
-                  <a:t>Points </a:t>
-                </a:r>
-                <a:r>
-                  <a:rPr lang="de-DE" dirty="0" err="1"/>
-                  <a:t>are</a:t>
-                </a:r>
-                <a:r>
-                  <a:rPr lang="de-DE" dirty="0"/>
-                  <a:t> </a:t>
-                </a:r>
-                <a:r>
-                  <a:rPr lang="de-DE" dirty="0" err="1"/>
-                  <a:t>density-connected</a:t>
-                </a:r>
-                <a:r>
-                  <a:rPr lang="de-DE" dirty="0"/>
-                  <a:t> </a:t>
-                </a:r>
-                <a:r>
-                  <a:rPr lang="de-DE" dirty="0" err="1"/>
-                  <a:t>if</a:t>
-                </a:r>
-                <a:r>
-                  <a:rPr lang="de-DE" dirty="0"/>
-                  <a:t> </a:t>
-                </a:r>
-                <a:r>
-                  <a:rPr lang="de-DE" dirty="0" err="1"/>
-                  <a:t>they</a:t>
-                </a:r>
-                <a:r>
-                  <a:rPr lang="de-DE" dirty="0"/>
-                  <a:t> </a:t>
-                </a:r>
-                <a:r>
-                  <a:rPr lang="de-DE" dirty="0" err="1"/>
-                  <a:t>can</a:t>
-                </a:r>
-                <a:r>
-                  <a:rPr lang="de-DE" dirty="0"/>
-                  <a:t> </a:t>
-                </a:r>
-                <a:r>
-                  <a:rPr lang="de-DE" dirty="0" err="1"/>
-                  <a:t>be</a:t>
-                </a:r>
-                <a:r>
-                  <a:rPr lang="de-DE" dirty="0"/>
-                  <a:t> </a:t>
-                </a:r>
-                <a:r>
-                  <a:rPr lang="de-DE" dirty="0" err="1"/>
-                  <a:t>reached</a:t>
-                </a:r>
-                <a:r>
-                  <a:rPr lang="de-DE" dirty="0"/>
-                  <a:t> via a </a:t>
-                </a:r>
-                <a:r>
-                  <a:rPr lang="de-DE" dirty="0" err="1"/>
-                  <a:t>chain</a:t>
-                </a:r>
-                <a:r>
-                  <a:rPr lang="de-DE" dirty="0"/>
-                  <a:t> </a:t>
-                </a:r>
-                <a:r>
-                  <a:rPr lang="de-DE" dirty="0" err="1"/>
-                  <a:t>of</a:t>
-                </a:r>
-                <a:r>
-                  <a:rPr lang="de-DE" dirty="0"/>
-                  <a:t> </a:t>
-                </a:r>
-                <a:r>
-                  <a:rPr lang="de-DE" dirty="0" err="1"/>
-                  <a:t>core</a:t>
-                </a:r>
-                <a:r>
-                  <a:rPr lang="de-DE" dirty="0"/>
-                  <a:t> </a:t>
-                </a:r>
-                <a:r>
-                  <a:rPr lang="de-DE" dirty="0" err="1"/>
-                  <a:t>points</a:t>
-                </a:r>
-                <a:endParaRPr lang="de-DE" dirty="0"/>
-              </a:p>
-              <a:p>
-                <a:r>
-                  <a:rPr lang="de-DE" dirty="0"/>
-                  <a:t>Clusters </a:t>
-                </a:r>
-                <a:r>
-                  <a:rPr lang="de-DE" dirty="0" err="1"/>
-                  <a:t>grow</a:t>
-                </a:r>
-                <a:r>
-                  <a:rPr lang="de-DE" dirty="0"/>
-                  <a:t> </a:t>
-                </a:r>
-                <a:r>
-                  <a:rPr lang="de-DE" dirty="0" err="1"/>
-                  <a:t>outward</a:t>
-                </a:r>
-                <a:r>
-                  <a:rPr lang="de-DE" dirty="0"/>
-                  <a:t> </a:t>
-                </a:r>
-                <a:r>
-                  <a:rPr lang="de-DE" dirty="0" err="1"/>
-                  <a:t>from</a:t>
-                </a:r>
-                <a:r>
-                  <a:rPr lang="de-DE" dirty="0"/>
-                  <a:t> </a:t>
-                </a:r>
-                <a:r>
-                  <a:rPr lang="de-DE" dirty="0" err="1"/>
-                  <a:t>core</a:t>
-                </a:r>
-                <a:r>
-                  <a:rPr lang="de-DE" dirty="0"/>
-                  <a:t> </a:t>
-                </a:r>
-                <a:r>
-                  <a:rPr lang="de-DE" dirty="0" err="1"/>
-                  <a:t>points</a:t>
-                </a:r>
-                <a:endParaRPr lang="de-DE" dirty="0"/>
-              </a:p>
-            </p:txBody>
-          </p:sp>
-        </mc:Choice>
-        <mc:Fallback xmlns="">
-          <p:sp>
-            <p:nvSpPr>
-              <p:cNvPr id="3" name="Inhaltsplatzhalter 2">
-                <a:extLst>
-                  <a:ext uri="{FF2B5EF4-FFF2-40B4-BE49-F238E27FC236}">
-                    <a16:creationId xmlns:a16="http://schemas.microsoft.com/office/drawing/2014/main" id="{48293539-B5EA-4406-02DD-1F9D36FDC673}"/>
-                  </a:ext>
-                </a:extLst>
-              </p:cNvPr>
-              <p:cNvSpPr>
-                <a:spLocks noGrp="1" noRot="1" noChangeAspect="1" noMove="1" noResize="1" noEditPoints="1" noAdjustHandles="1" noChangeArrowheads="1" noChangeShapeType="1" noTextEdit="1"/>
-              </p:cNvSpPr>
-              <p:nvPr>
-                <p:ph idx="1"/>
-              </p:nvPr>
-            </p:nvSpPr>
-            <p:spPr>
-              <a:blipFill>
-                <a:blip r:embed="rId2"/>
-                <a:stretch>
-                  <a:fillRect l="-724" t="-2616"/>
-                </a:stretch>
-              </a:blipFill>
-            </p:spPr>
-            <p:txBody>
-              <a:bodyPr/>
-              <a:lstStyle/>
-              <a:p>
-                <a:r>
-                  <a:rPr lang="de-DE">
-                    <a:noFill/>
-                  </a:rPr>
-                  <a:t> </a:t>
-                </a:r>
-              </a:p>
-            </p:txBody>
-          </p:sp>
-        </mc:Fallback>
-      </mc:AlternateContent>
-      <p:sp>
-        <p:nvSpPr>
-          <p:cNvPr id="4" name="Foliennummernplatzhalter 3">
-            <a:extLst>
-              <a:ext uri="{FF2B5EF4-FFF2-40B4-BE49-F238E27FC236}">
-                <a16:creationId xmlns:a16="http://schemas.microsoft.com/office/drawing/2014/main" id="{D4A6B421-D07D-5E41-B951-5DE4AE10DC48}"/>
-              </a:ext>
-            </a:extLst>
-          </p:cNvPr>
-          <p:cNvSpPr>
-            <a:spLocks noGrp="1"/>
-          </p:cNvSpPr>
-          <p:nvPr>
-            <p:ph type="sldNum" sz="quarter" idx="12"/>
-          </p:nvPr>
-        </p:nvSpPr>
-        <p:spPr/>
-        <p:txBody>
-          <a:bodyPr/>
-          <a:lstStyle/>
-          <a:p>
-            <a:fld id="{08C366F5-AFAD-49CB-854A-9D9E238FCA13}" type="slidenum">
-              <a:rPr lang="en-GB" smtClean="0"/>
-              <a:t>32</a:t>
-            </a:fld>
-            <a:endParaRPr lang="en-GB"/>
-          </a:p>
-        </p:txBody>
-      </p:sp>
-    </p:spTree>
-    <p:extLst>
-      <p:ext uri="{BB962C8B-B14F-4D97-AF65-F5344CB8AC3E}">
-        <p14:creationId xmlns:p14="http://schemas.microsoft.com/office/powerpoint/2010/main" val="345989988"/>
-      </p:ext>
-    </p:extLst>
-  </p:cSld>
-  <p:clrMapOvr>
-    <a:masterClrMapping/>
-  </p:clrMapOvr>
-</p:sld>
-</file>
-
-<file path=ppt/slides/slide33.xml><?xml version="1.0" encoding="utf-8"?>
-<p:sld xmlns:a="http://schemas.openxmlformats.org/drawingml/2006/main" xmlns:r="http://schemas.openxmlformats.org/officeDocument/2006/relationships" xmlns:p="http://schemas.openxmlformats.org/presentationml/2006/main">
-  <p:cSld>
-    <p:spTree>
-      <p:nvGrpSpPr>
-        <p:cNvPr id="1" name=""/>
-        <p:cNvGrpSpPr/>
-        <p:nvPr/>
-      </p:nvGrpSpPr>
-      <p:grpSpPr>
-        <a:xfrm>
-          <a:off x="0" y="0"/>
-          <a:ext cx="0" cy="0"/>
-          <a:chOff x="0" y="0"/>
-          <a:chExt cx="0" cy="0"/>
-        </a:xfrm>
-      </p:grpSpPr>
-      <p:sp>
-        <p:nvSpPr>
-          <p:cNvPr id="2" name="Titel 1">
-            <a:extLst>
-              <a:ext uri="{FF2B5EF4-FFF2-40B4-BE49-F238E27FC236}">
-                <a16:creationId xmlns:a16="http://schemas.microsoft.com/office/drawing/2014/main" id="{9AD358E7-F39E-EF65-C4C0-6907CB00234F}"/>
-              </a:ext>
-            </a:extLst>
-          </p:cNvPr>
-          <p:cNvSpPr>
-            <a:spLocks noGrp="1"/>
-          </p:cNvSpPr>
-          <p:nvPr>
-            <p:ph type="title"/>
-          </p:nvPr>
-        </p:nvSpPr>
-        <p:spPr/>
-        <p:txBody>
-          <a:bodyPr/>
-          <a:lstStyle/>
-          <a:p>
-            <a:r>
-              <a:rPr lang="de-DE" dirty="0" err="1"/>
-              <a:t>Choosing</a:t>
-            </a:r>
-            <a:r>
-              <a:rPr lang="de-DE" dirty="0"/>
-              <a:t> </a:t>
-            </a:r>
-            <a:r>
-              <a:rPr lang="el-GR" dirty="0">
-                <a:latin typeface="Cambria Math" panose="02040503050406030204" pitchFamily="18" charset="0"/>
-                <a:ea typeface="Cambria Math" panose="02040503050406030204" pitchFamily="18" charset="0"/>
-              </a:rPr>
-              <a:t>ε</a:t>
-            </a:r>
-            <a:r>
-              <a:rPr lang="el-GR" dirty="0"/>
-              <a:t> </a:t>
-            </a:r>
-            <a:r>
-              <a:rPr lang="de-DE" dirty="0"/>
-              <a:t>and </a:t>
-            </a:r>
-            <a:r>
-              <a:rPr lang="de-DE" dirty="0" err="1">
-                <a:latin typeface="Cambria Math" panose="02040503050406030204" pitchFamily="18" charset="0"/>
-                <a:ea typeface="Cambria Math" panose="02040503050406030204" pitchFamily="18" charset="0"/>
-              </a:rPr>
-              <a:t>min_samples</a:t>
-            </a:r>
-            <a:endParaRPr lang="de-DE" dirty="0">
-              <a:latin typeface="Cambria Math" panose="02040503050406030204" pitchFamily="18" charset="0"/>
-              <a:ea typeface="Cambria Math" panose="02040503050406030204" pitchFamily="18" charset="0"/>
-            </a:endParaRPr>
-          </a:p>
-        </p:txBody>
-      </p:sp>
-      <p:sp>
-        <p:nvSpPr>
-          <p:cNvPr id="4" name="Inhaltsplatzhalter 3">
-            <a:extLst>
-              <a:ext uri="{FF2B5EF4-FFF2-40B4-BE49-F238E27FC236}">
-                <a16:creationId xmlns:a16="http://schemas.microsoft.com/office/drawing/2014/main" id="{E4AF28DA-AC95-17F4-756E-FF4AE1F224EA}"/>
-              </a:ext>
-            </a:extLst>
-          </p:cNvPr>
-          <p:cNvSpPr>
-            <a:spLocks noGrp="1"/>
-          </p:cNvSpPr>
-          <p:nvPr>
-            <p:ph idx="1"/>
-          </p:nvPr>
-        </p:nvSpPr>
-        <p:spPr/>
-        <p:txBody>
-          <a:bodyPr>
-            <a:normAutofit fontScale="85000" lnSpcReduction="20000"/>
-          </a:bodyPr>
-          <a:lstStyle/>
-          <a:p>
-            <a:pPr marL="0" indent="0">
-              <a:buNone/>
-            </a:pPr>
-            <a:r>
-              <a:rPr lang="de-DE" dirty="0" err="1"/>
-              <a:t>Choosing</a:t>
-            </a:r>
-            <a:r>
-              <a:rPr lang="de-DE" dirty="0"/>
-              <a:t> </a:t>
-            </a:r>
-            <a:r>
-              <a:rPr lang="el-GR" dirty="0">
-                <a:latin typeface="Cambria Math" panose="02040503050406030204" pitchFamily="18" charset="0"/>
-                <a:ea typeface="Cambria Math" panose="02040503050406030204" pitchFamily="18" charset="0"/>
-              </a:rPr>
-              <a:t>ε</a:t>
-            </a:r>
-            <a:r>
-              <a:rPr lang="el-GR" dirty="0"/>
-              <a:t> (</a:t>
-            </a:r>
-            <a:r>
-              <a:rPr lang="de-DE" dirty="0" err="1"/>
-              <a:t>neighborhood</a:t>
-            </a:r>
-            <a:r>
-              <a:rPr lang="de-DE" dirty="0"/>
-              <a:t> </a:t>
-            </a:r>
-            <a:r>
-              <a:rPr lang="de-DE" dirty="0" err="1"/>
-              <a:t>radius</a:t>
-            </a:r>
-            <a:r>
-              <a:rPr lang="de-DE" dirty="0"/>
-              <a:t>)</a:t>
-            </a:r>
-          </a:p>
-          <a:p>
-            <a:r>
-              <a:rPr lang="de-DE" dirty="0" err="1"/>
-              <a:t>Too</a:t>
-            </a:r>
-            <a:r>
-              <a:rPr lang="de-DE" dirty="0"/>
-              <a:t> </a:t>
-            </a:r>
-            <a:r>
-              <a:rPr lang="de-DE" dirty="0" err="1"/>
-              <a:t>small</a:t>
-            </a:r>
-            <a:r>
-              <a:rPr lang="de-DE" dirty="0"/>
-              <a:t> </a:t>
-            </a:r>
-            <a:r>
-              <a:rPr lang="de-DE" dirty="0">
-                <a:sym typeface="Wingdings" pitchFamily="2" charset="2"/>
-              </a:rPr>
-              <a:t></a:t>
-            </a:r>
-            <a:r>
-              <a:rPr lang="de-DE" dirty="0"/>
-              <a:t> </a:t>
-            </a:r>
-            <a:r>
-              <a:rPr lang="de-DE" dirty="0" err="1"/>
-              <a:t>many</a:t>
-            </a:r>
-            <a:r>
-              <a:rPr lang="de-DE" dirty="0"/>
-              <a:t> </a:t>
-            </a:r>
-            <a:r>
-              <a:rPr lang="de-DE" dirty="0" err="1"/>
-              <a:t>points</a:t>
-            </a:r>
-            <a:r>
-              <a:rPr lang="de-DE" dirty="0"/>
-              <a:t> </a:t>
-            </a:r>
-            <a:r>
-              <a:rPr lang="de-DE" dirty="0" err="1"/>
-              <a:t>labeled</a:t>
-            </a:r>
-            <a:r>
-              <a:rPr lang="de-DE" dirty="0"/>
-              <a:t> </a:t>
-            </a:r>
-            <a:r>
-              <a:rPr lang="de-DE" dirty="0" err="1"/>
-              <a:t>as</a:t>
-            </a:r>
-            <a:r>
-              <a:rPr lang="de-DE" dirty="0"/>
-              <a:t> </a:t>
-            </a:r>
-            <a:r>
-              <a:rPr lang="de-DE" dirty="0" err="1"/>
-              <a:t>noise</a:t>
-            </a:r>
-            <a:endParaRPr lang="de-DE" dirty="0"/>
-          </a:p>
-          <a:p>
-            <a:r>
-              <a:rPr lang="de-DE" dirty="0" err="1"/>
-              <a:t>Too</a:t>
-            </a:r>
-            <a:r>
-              <a:rPr lang="de-DE" dirty="0"/>
-              <a:t> large </a:t>
-            </a:r>
-            <a:r>
-              <a:rPr lang="de-DE" dirty="0">
-                <a:sym typeface="Wingdings" pitchFamily="2" charset="2"/>
-              </a:rPr>
-              <a:t></a:t>
-            </a:r>
-            <a:r>
-              <a:rPr lang="de-DE" dirty="0"/>
-              <a:t> </a:t>
-            </a:r>
-            <a:r>
-              <a:rPr lang="de-DE" dirty="0" err="1"/>
-              <a:t>clusters</a:t>
-            </a:r>
-            <a:r>
-              <a:rPr lang="de-DE" dirty="0"/>
-              <a:t> </a:t>
-            </a:r>
-            <a:r>
-              <a:rPr lang="de-DE" dirty="0" err="1"/>
-              <a:t>merge</a:t>
-            </a:r>
-            <a:endParaRPr lang="de-DE" dirty="0"/>
-          </a:p>
-          <a:p>
-            <a:r>
-              <a:rPr lang="de-DE" dirty="0" err="1"/>
-              <a:t>Heuristic</a:t>
-            </a:r>
-            <a:r>
-              <a:rPr lang="de-DE" dirty="0"/>
-              <a:t>: </a:t>
-            </a:r>
-            <a:r>
-              <a:rPr lang="de-DE" dirty="0" err="1"/>
-              <a:t>use</a:t>
-            </a:r>
-            <a:r>
-              <a:rPr lang="de-DE" dirty="0"/>
-              <a:t> </a:t>
-            </a:r>
-            <a:r>
-              <a:rPr lang="de-DE" dirty="0" err="1"/>
-              <a:t>k-distance</a:t>
-            </a:r>
-            <a:r>
-              <a:rPr lang="de-DE" dirty="0"/>
-              <a:t> </a:t>
-            </a:r>
-            <a:r>
-              <a:rPr lang="de-DE" dirty="0" err="1"/>
-              <a:t>graph</a:t>
-            </a:r>
-            <a:r>
-              <a:rPr lang="de-DE" dirty="0"/>
-              <a:t>, </a:t>
-            </a:r>
-            <a:r>
-              <a:rPr lang="de-DE" dirty="0" err="1"/>
-              <a:t>look</a:t>
-            </a:r>
-            <a:r>
-              <a:rPr lang="de-DE" dirty="0"/>
-              <a:t> </a:t>
-            </a:r>
-            <a:r>
-              <a:rPr lang="de-DE" dirty="0" err="1"/>
-              <a:t>for</a:t>
-            </a:r>
-            <a:r>
-              <a:rPr lang="de-DE" dirty="0"/>
-              <a:t> “</a:t>
-            </a:r>
-            <a:r>
-              <a:rPr lang="de-DE" dirty="0" err="1"/>
-              <a:t>elbow</a:t>
-            </a:r>
-            <a:r>
-              <a:rPr lang="de-DE" dirty="0"/>
-              <a:t>” </a:t>
-            </a:r>
-            <a:r>
-              <a:rPr lang="de-DE" dirty="0" err="1"/>
-              <a:t>point</a:t>
-            </a:r>
-            <a:endParaRPr lang="de-DE" dirty="0"/>
-          </a:p>
-          <a:p>
-            <a:pPr marL="0" indent="0">
-              <a:buNone/>
-            </a:pPr>
-            <a:endParaRPr lang="de-DE" dirty="0"/>
-          </a:p>
-          <a:p>
-            <a:pPr marL="0" indent="0">
-              <a:buNone/>
-            </a:pPr>
-            <a:r>
-              <a:rPr lang="de-DE" dirty="0" err="1"/>
-              <a:t>Typical</a:t>
-            </a:r>
-            <a:r>
-              <a:rPr lang="de-DE" dirty="0"/>
-              <a:t> </a:t>
-            </a:r>
-            <a:r>
-              <a:rPr lang="de-DE" dirty="0" err="1"/>
-              <a:t>values</a:t>
-            </a:r>
-            <a:r>
-              <a:rPr lang="de-DE" dirty="0"/>
-              <a:t> </a:t>
-            </a:r>
-            <a:r>
-              <a:rPr lang="de-DE" dirty="0" err="1">
-                <a:latin typeface="Cambria Math" panose="02040503050406030204" pitchFamily="18" charset="0"/>
-                <a:ea typeface="Cambria Math" panose="02040503050406030204" pitchFamily="18" charset="0"/>
-              </a:rPr>
-              <a:t>min_samples</a:t>
-            </a:r>
-            <a:r>
-              <a:rPr lang="de-DE" dirty="0"/>
-              <a:t> (</a:t>
-            </a:r>
-            <a:r>
-              <a:rPr lang="de-DE" dirty="0" err="1"/>
-              <a:t>minimum</a:t>
-            </a:r>
-            <a:r>
-              <a:rPr lang="de-DE" dirty="0"/>
-              <a:t> </a:t>
-            </a:r>
-            <a:r>
-              <a:rPr lang="de-DE" dirty="0" err="1"/>
-              <a:t>points</a:t>
-            </a:r>
-            <a:r>
-              <a:rPr lang="de-DE" dirty="0"/>
-              <a:t> </a:t>
-            </a:r>
-            <a:r>
-              <a:rPr lang="de-DE" dirty="0" err="1"/>
-              <a:t>for</a:t>
-            </a:r>
-            <a:r>
-              <a:rPr lang="de-DE" dirty="0"/>
-              <a:t> </a:t>
-            </a:r>
-            <a:r>
-              <a:rPr lang="de-DE" dirty="0" err="1"/>
-              <a:t>density</a:t>
-            </a:r>
-            <a:r>
-              <a:rPr lang="de-DE" dirty="0"/>
-              <a:t>)</a:t>
-            </a:r>
-          </a:p>
-          <a:p>
-            <a:r>
-              <a:rPr lang="de-DE" dirty="0">
-                <a:latin typeface="Cambria Math" panose="02040503050406030204" pitchFamily="18" charset="0"/>
-                <a:ea typeface="Cambria Math" panose="02040503050406030204" pitchFamily="18" charset="0"/>
-              </a:rPr>
-              <a:t>4</a:t>
-            </a:r>
-            <a:r>
-              <a:rPr lang="de-DE" dirty="0"/>
-              <a:t> (</a:t>
-            </a:r>
-            <a:r>
-              <a:rPr lang="de-DE" dirty="0" err="1"/>
-              <a:t>low</a:t>
-            </a:r>
-            <a:r>
-              <a:rPr lang="de-DE" dirty="0"/>
-              <a:t>-dimensional </a:t>
-            </a:r>
-            <a:r>
-              <a:rPr lang="de-DE" dirty="0" err="1"/>
-              <a:t>data</a:t>
-            </a:r>
-            <a:r>
-              <a:rPr lang="de-DE" dirty="0"/>
-              <a:t>)</a:t>
-            </a:r>
-          </a:p>
-          <a:p>
-            <a:r>
-              <a:rPr lang="de-DE" dirty="0"/>
-              <a:t>Higher </a:t>
-            </a:r>
-            <a:r>
-              <a:rPr lang="de-DE" dirty="0" err="1"/>
-              <a:t>for</a:t>
-            </a:r>
-            <a:r>
-              <a:rPr lang="de-DE" dirty="0"/>
-              <a:t> high-dimensional </a:t>
-            </a:r>
-            <a:r>
-              <a:rPr lang="de-DE" dirty="0" err="1"/>
-              <a:t>data</a:t>
-            </a:r>
-            <a:endParaRPr lang="de-DE" dirty="0"/>
-          </a:p>
-          <a:p>
-            <a:r>
-              <a:rPr lang="de-DE" dirty="0"/>
-              <a:t>Guideline: </a:t>
-            </a:r>
-            <a:r>
-              <a:rPr lang="de-DE" dirty="0" err="1">
-                <a:latin typeface="Cambria Math" panose="02040503050406030204" pitchFamily="18" charset="0"/>
-                <a:ea typeface="Cambria Math" panose="02040503050406030204" pitchFamily="18" charset="0"/>
-              </a:rPr>
-              <a:t>min_samples</a:t>
-            </a:r>
-            <a:r>
-              <a:rPr lang="de-DE" dirty="0">
-                <a:latin typeface="Cambria Math" panose="02040503050406030204" pitchFamily="18" charset="0"/>
-                <a:ea typeface="Cambria Math" panose="02040503050406030204" pitchFamily="18" charset="0"/>
-              </a:rPr>
-              <a:t> ≥ </a:t>
-            </a:r>
-            <a:r>
-              <a:rPr lang="de-DE" dirty="0" err="1">
-                <a:latin typeface="Cambria Math" panose="02040503050406030204" pitchFamily="18" charset="0"/>
-                <a:ea typeface="Cambria Math" panose="02040503050406030204" pitchFamily="18" charset="0"/>
-              </a:rPr>
-              <a:t>dimensionality</a:t>
-            </a:r>
-            <a:r>
-              <a:rPr lang="de-DE" dirty="0">
-                <a:latin typeface="Cambria Math" panose="02040503050406030204" pitchFamily="18" charset="0"/>
-                <a:ea typeface="Cambria Math" panose="02040503050406030204" pitchFamily="18" charset="0"/>
-              </a:rPr>
-              <a:t> + 1</a:t>
-            </a:r>
-          </a:p>
-          <a:p>
-            <a:pPr marL="0" indent="0">
-              <a:buNone/>
-            </a:pPr>
-            <a:endParaRPr lang="de-DE" dirty="0"/>
-          </a:p>
-          <a:p>
-            <a:pPr marL="0" indent="0">
-              <a:buNone/>
-            </a:pPr>
-            <a:r>
-              <a:rPr lang="el-GR" dirty="0">
-                <a:latin typeface="Cambria Math" panose="02040503050406030204" pitchFamily="18" charset="0"/>
-                <a:ea typeface="Cambria Math" panose="02040503050406030204" pitchFamily="18" charset="0"/>
-              </a:rPr>
-              <a:t>ε</a:t>
-            </a:r>
-            <a:r>
-              <a:rPr lang="el-GR" dirty="0"/>
-              <a:t> </a:t>
-            </a:r>
-            <a:r>
-              <a:rPr lang="de-DE" dirty="0"/>
-              <a:t>and </a:t>
-            </a:r>
-            <a:r>
-              <a:rPr lang="de-DE" dirty="0" err="1">
-                <a:latin typeface="Cambria Math" panose="02040503050406030204" pitchFamily="18" charset="0"/>
-                <a:ea typeface="Cambria Math" panose="02040503050406030204" pitchFamily="18" charset="0"/>
-              </a:rPr>
-              <a:t>min_samples</a:t>
-            </a:r>
-            <a:r>
-              <a:rPr lang="de-DE" dirty="0"/>
-              <a:t> </a:t>
-            </a:r>
-            <a:r>
-              <a:rPr lang="de-DE" dirty="0" err="1"/>
-              <a:t>strongly</a:t>
-            </a:r>
-            <a:r>
-              <a:rPr lang="de-DE" dirty="0"/>
-              <a:t> </a:t>
-            </a:r>
-            <a:r>
-              <a:rPr lang="de-DE" dirty="0" err="1"/>
-              <a:t>affect</a:t>
-            </a:r>
-            <a:r>
-              <a:rPr lang="de-DE" dirty="0"/>
-              <a:t> </a:t>
-            </a:r>
-            <a:r>
-              <a:rPr lang="de-DE" dirty="0" err="1"/>
-              <a:t>results</a:t>
-            </a:r>
-            <a:r>
-              <a:rPr lang="de-DE" dirty="0"/>
-              <a:t> </a:t>
-            </a:r>
-            <a:r>
-              <a:rPr lang="de-DE" dirty="0">
-                <a:sym typeface="Wingdings" pitchFamily="2" charset="2"/>
-              </a:rPr>
-              <a:t> </a:t>
-            </a:r>
-            <a:r>
-              <a:rPr lang="de-DE" dirty="0" err="1">
-                <a:sym typeface="Wingdings" pitchFamily="2" charset="2"/>
-              </a:rPr>
-              <a:t>tuning</a:t>
-            </a:r>
-            <a:r>
-              <a:rPr lang="de-DE" dirty="0">
-                <a:sym typeface="Wingdings" pitchFamily="2" charset="2"/>
-              </a:rPr>
-              <a:t> and </a:t>
-            </a:r>
-            <a:r>
-              <a:rPr lang="de-DE" dirty="0" err="1">
-                <a:sym typeface="Wingdings" pitchFamily="2" charset="2"/>
-              </a:rPr>
-              <a:t>d</a:t>
-            </a:r>
-            <a:r>
-              <a:rPr lang="de-DE" dirty="0" err="1"/>
-              <a:t>ata</a:t>
-            </a:r>
-            <a:r>
-              <a:rPr lang="de-DE" dirty="0"/>
-              <a:t> </a:t>
-            </a:r>
-            <a:r>
-              <a:rPr lang="de-DE" dirty="0" err="1"/>
-              <a:t>scaling</a:t>
-            </a:r>
-            <a:r>
-              <a:rPr lang="de-DE" dirty="0"/>
-              <a:t> </a:t>
-            </a:r>
-            <a:r>
-              <a:rPr lang="de-DE" dirty="0" err="1"/>
-              <a:t>matters</a:t>
-            </a:r>
-            <a:endParaRPr lang="de-DE" dirty="0"/>
-          </a:p>
-        </p:txBody>
-      </p:sp>
-      <p:sp>
-        <p:nvSpPr>
-          <p:cNvPr id="3" name="Foliennummernplatzhalter 2">
-            <a:extLst>
-              <a:ext uri="{FF2B5EF4-FFF2-40B4-BE49-F238E27FC236}">
-                <a16:creationId xmlns:a16="http://schemas.microsoft.com/office/drawing/2014/main" id="{7F67A71D-5771-002A-3ED3-D1F7EA87F83F}"/>
-              </a:ext>
-            </a:extLst>
-          </p:cNvPr>
-          <p:cNvSpPr>
-            <a:spLocks noGrp="1"/>
-          </p:cNvSpPr>
-          <p:nvPr>
-            <p:ph type="sldNum" sz="quarter" idx="12"/>
-          </p:nvPr>
-        </p:nvSpPr>
-        <p:spPr/>
-        <p:txBody>
-          <a:bodyPr/>
-          <a:lstStyle/>
-          <a:p>
-            <a:fld id="{08C366F5-AFAD-49CB-854A-9D9E238FCA13}" type="slidenum">
-              <a:rPr lang="en-GB" smtClean="0"/>
-              <a:t>33</a:t>
-            </a:fld>
-            <a:endParaRPr lang="en-GB"/>
-          </a:p>
-        </p:txBody>
-      </p:sp>
-    </p:spTree>
-    <p:extLst>
-      <p:ext uri="{BB962C8B-B14F-4D97-AF65-F5344CB8AC3E}">
-        <p14:creationId xmlns:p14="http://schemas.microsoft.com/office/powerpoint/2010/main" val="1011311951"/>
-      </p:ext>
-    </p:extLst>
-  </p:cSld>
-  <p:clrMapOvr>
-    <a:masterClrMapping/>
-  </p:clrMapOvr>
-</p:sld>
-</file>
-
-<file path=ppt/slides/slide34.xml><?xml version="1.0" encoding="utf-8"?>
-<p:sld xmlns:a="http://schemas.openxmlformats.org/drawingml/2006/main" xmlns:r="http://schemas.openxmlformats.org/officeDocument/2006/relationships" xmlns:p="http://schemas.openxmlformats.org/presentationml/2006/main">
-  <p:cSld>
-    <p:spTree>
-      <p:nvGrpSpPr>
-        <p:cNvPr id="1" name=""/>
-        <p:cNvGrpSpPr/>
-        <p:nvPr/>
-      </p:nvGrpSpPr>
-      <p:grpSpPr>
-        <a:xfrm>
-          <a:off x="0" y="0"/>
-          <a:ext cx="0" cy="0"/>
-          <a:chOff x="0" y="0"/>
-          <a:chExt cx="0" cy="0"/>
-        </a:xfrm>
-      </p:grpSpPr>
-      <p:sp>
-        <p:nvSpPr>
-          <p:cNvPr id="2" name="Titel 1">
-            <a:extLst>
-              <a:ext uri="{FF2B5EF4-FFF2-40B4-BE49-F238E27FC236}">
-                <a16:creationId xmlns:a16="http://schemas.microsoft.com/office/drawing/2014/main" id="{12451C77-ED0D-F705-8D1C-ADFA8F6C97BF}"/>
-              </a:ext>
-            </a:extLst>
-          </p:cNvPr>
-          <p:cNvSpPr>
-            <a:spLocks noGrp="1"/>
-          </p:cNvSpPr>
-          <p:nvPr>
-            <p:ph type="title"/>
-          </p:nvPr>
-        </p:nvSpPr>
-        <p:spPr/>
-        <p:txBody>
-          <a:bodyPr/>
-          <a:lstStyle/>
-          <a:p>
-            <a:r>
-              <a:rPr lang="de-DE" dirty="0"/>
-              <a:t>How </a:t>
-            </a:r>
-            <a:r>
-              <a:rPr lang="de-DE" dirty="0" err="1"/>
-              <a:t>to</a:t>
-            </a:r>
-            <a:r>
-              <a:rPr lang="de-DE" dirty="0"/>
-              <a:t> </a:t>
-            </a:r>
-            <a:r>
-              <a:rPr lang="de-DE" dirty="0" err="1"/>
-              <a:t>Assign</a:t>
-            </a:r>
-            <a:r>
-              <a:rPr lang="de-DE" dirty="0"/>
-              <a:t> New Points</a:t>
-            </a:r>
-          </a:p>
-        </p:txBody>
-      </p:sp>
-      <p:sp>
-        <p:nvSpPr>
-          <p:cNvPr id="3" name="Inhaltsplatzhalter 2">
-            <a:extLst>
-              <a:ext uri="{FF2B5EF4-FFF2-40B4-BE49-F238E27FC236}">
-                <a16:creationId xmlns:a16="http://schemas.microsoft.com/office/drawing/2014/main" id="{FA126657-2593-4771-3A67-51F3B2F3A6EF}"/>
-              </a:ext>
-            </a:extLst>
-          </p:cNvPr>
-          <p:cNvSpPr>
-            <a:spLocks noGrp="1"/>
-          </p:cNvSpPr>
-          <p:nvPr>
-            <p:ph idx="1"/>
-          </p:nvPr>
-        </p:nvSpPr>
-        <p:spPr/>
-        <p:txBody>
-          <a:bodyPr>
-            <a:normAutofit/>
-          </a:bodyPr>
-          <a:lstStyle/>
-          <a:p>
-            <a:pPr marL="0" indent="0">
-              <a:buNone/>
-            </a:pPr>
-            <a:r>
-              <a:rPr lang="de-DE" dirty="0" err="1"/>
-              <a:t>For</a:t>
-            </a:r>
-            <a:r>
-              <a:rPr lang="de-DE" dirty="0"/>
-              <a:t> a </a:t>
-            </a:r>
-            <a:r>
-              <a:rPr lang="de-DE" dirty="0" err="1"/>
-              <a:t>new</a:t>
-            </a:r>
-            <a:r>
-              <a:rPr lang="de-DE" dirty="0"/>
-              <a:t> </a:t>
-            </a:r>
-            <a:r>
-              <a:rPr lang="de-DE" dirty="0" err="1"/>
-              <a:t>point</a:t>
-            </a:r>
-            <a:r>
-              <a:rPr lang="de-DE" dirty="0"/>
-              <a:t>: Check </a:t>
-            </a:r>
-            <a:r>
-              <a:rPr lang="de-DE" dirty="0" err="1"/>
-              <a:t>its</a:t>
-            </a:r>
-            <a:r>
-              <a:rPr lang="de-DE" dirty="0"/>
-              <a:t> </a:t>
-            </a:r>
-            <a:r>
-              <a:rPr lang="el-GR" dirty="0">
-                <a:latin typeface="Cambria Math" panose="02040503050406030204" pitchFamily="18" charset="0"/>
-                <a:ea typeface="Cambria Math" panose="02040503050406030204" pitchFamily="18" charset="0"/>
-              </a:rPr>
-              <a:t>ε</a:t>
-            </a:r>
-            <a:r>
-              <a:rPr lang="el-GR" dirty="0"/>
-              <a:t>-</a:t>
-            </a:r>
-            <a:r>
-              <a:rPr lang="de-DE" dirty="0" err="1"/>
-              <a:t>neighborhood</a:t>
-            </a:r>
-            <a:endParaRPr lang="de-DE" dirty="0"/>
-          </a:p>
-          <a:p>
-            <a:r>
-              <a:rPr lang="de-DE" dirty="0" err="1"/>
-              <a:t>If</a:t>
-            </a:r>
-            <a:r>
-              <a:rPr lang="de-DE" dirty="0"/>
-              <a:t> </a:t>
-            </a:r>
-            <a:r>
-              <a:rPr lang="de-DE" dirty="0" err="1"/>
-              <a:t>within</a:t>
-            </a:r>
-            <a:r>
-              <a:rPr lang="de-DE" dirty="0"/>
-              <a:t> </a:t>
-            </a:r>
-            <a:r>
-              <a:rPr lang="el-GR" dirty="0">
-                <a:latin typeface="Cambria Math" panose="02040503050406030204" pitchFamily="18" charset="0"/>
-                <a:ea typeface="Cambria Math" panose="02040503050406030204" pitchFamily="18" charset="0"/>
-              </a:rPr>
-              <a:t>ε</a:t>
-            </a:r>
-            <a:r>
-              <a:rPr lang="el-GR" dirty="0"/>
-              <a:t> </a:t>
-            </a:r>
-            <a:r>
-              <a:rPr lang="de-DE" dirty="0" err="1"/>
-              <a:t>of</a:t>
-            </a:r>
-            <a:r>
-              <a:rPr lang="de-DE" dirty="0"/>
-              <a:t> a </a:t>
-            </a:r>
-            <a:r>
-              <a:rPr lang="de-DE" dirty="0" err="1"/>
-              <a:t>core</a:t>
-            </a:r>
-            <a:r>
-              <a:rPr lang="de-DE" dirty="0"/>
-              <a:t> </a:t>
-            </a:r>
-            <a:r>
-              <a:rPr lang="de-DE" dirty="0" err="1"/>
-              <a:t>point</a:t>
-            </a:r>
-            <a:r>
-              <a:rPr lang="de-DE" dirty="0"/>
-              <a:t>: </a:t>
-            </a:r>
-            <a:r>
-              <a:rPr lang="de-DE" dirty="0" err="1"/>
-              <a:t>Assign</a:t>
-            </a:r>
-            <a:r>
-              <a:rPr lang="de-DE" dirty="0"/>
-              <a:t> </a:t>
-            </a:r>
-            <a:r>
-              <a:rPr lang="de-DE" dirty="0" err="1"/>
-              <a:t>it</a:t>
-            </a:r>
-            <a:r>
-              <a:rPr lang="de-DE" dirty="0"/>
-              <a:t> </a:t>
-            </a:r>
-            <a:r>
-              <a:rPr lang="de-DE" dirty="0" err="1"/>
-              <a:t>to</a:t>
-            </a:r>
-            <a:r>
-              <a:rPr lang="de-DE" dirty="0"/>
-              <a:t> </a:t>
-            </a:r>
-            <a:r>
-              <a:rPr lang="de-DE" dirty="0" err="1"/>
-              <a:t>that</a:t>
-            </a:r>
-            <a:r>
-              <a:rPr lang="de-DE" dirty="0"/>
-              <a:t> </a:t>
-            </a:r>
-            <a:r>
-              <a:rPr lang="de-DE" dirty="0" err="1"/>
-              <a:t>cluster</a:t>
-            </a:r>
-            <a:endParaRPr lang="de-DE" dirty="0"/>
-          </a:p>
-          <a:p>
-            <a:r>
-              <a:rPr lang="de-DE" dirty="0" err="1"/>
-              <a:t>If</a:t>
-            </a:r>
-            <a:r>
-              <a:rPr lang="de-DE" dirty="0"/>
-              <a:t> not </a:t>
-            </a:r>
-            <a:r>
-              <a:rPr lang="de-DE" dirty="0" err="1"/>
-              <a:t>near</a:t>
-            </a:r>
-            <a:r>
-              <a:rPr lang="de-DE" dirty="0"/>
-              <a:t> </a:t>
-            </a:r>
-            <a:r>
-              <a:rPr lang="de-DE" dirty="0" err="1"/>
-              <a:t>any</a:t>
-            </a:r>
-            <a:r>
-              <a:rPr lang="de-DE" dirty="0"/>
-              <a:t> </a:t>
-            </a:r>
-            <a:r>
-              <a:rPr lang="de-DE" dirty="0" err="1"/>
-              <a:t>core</a:t>
-            </a:r>
-            <a:r>
-              <a:rPr lang="de-DE" dirty="0"/>
-              <a:t> </a:t>
-            </a:r>
-            <a:r>
-              <a:rPr lang="de-DE" dirty="0" err="1"/>
-              <a:t>point</a:t>
-            </a:r>
-            <a:r>
-              <a:rPr lang="de-DE" dirty="0"/>
-              <a:t>: Label </a:t>
-            </a:r>
-            <a:r>
-              <a:rPr lang="de-DE" dirty="0" err="1"/>
-              <a:t>as</a:t>
-            </a:r>
-            <a:r>
-              <a:rPr lang="de-DE" dirty="0"/>
-              <a:t> </a:t>
-            </a:r>
-            <a:r>
-              <a:rPr lang="de-DE" dirty="0" err="1"/>
-              <a:t>noise</a:t>
-            </a:r>
-            <a:endParaRPr lang="de-DE" dirty="0"/>
-          </a:p>
-          <a:p>
-            <a:r>
-              <a:rPr lang="de-DE" dirty="0" err="1"/>
-              <a:t>If</a:t>
-            </a:r>
-            <a:r>
-              <a:rPr lang="de-DE" dirty="0"/>
-              <a:t> </a:t>
-            </a:r>
-            <a:r>
-              <a:rPr lang="de-DE" dirty="0" err="1"/>
-              <a:t>within</a:t>
-            </a:r>
-            <a:r>
-              <a:rPr lang="de-DE" dirty="0"/>
-              <a:t> </a:t>
-            </a:r>
-            <a:r>
-              <a:rPr lang="el-GR" dirty="0">
-                <a:latin typeface="Cambria Math" panose="02040503050406030204" pitchFamily="18" charset="0"/>
-                <a:ea typeface="Cambria Math" panose="02040503050406030204" pitchFamily="18" charset="0"/>
-              </a:rPr>
-              <a:t>ε</a:t>
-            </a:r>
-            <a:r>
-              <a:rPr lang="el-GR" dirty="0"/>
-              <a:t> </a:t>
-            </a:r>
-            <a:r>
-              <a:rPr lang="de-DE" dirty="0" err="1"/>
-              <a:t>of</a:t>
-            </a:r>
-            <a:r>
-              <a:rPr lang="de-DE" dirty="0"/>
-              <a:t> </a:t>
-            </a:r>
-            <a:r>
-              <a:rPr lang="de-DE" dirty="0" err="1"/>
-              <a:t>core</a:t>
-            </a:r>
-            <a:r>
-              <a:rPr lang="de-DE" dirty="0"/>
-              <a:t> </a:t>
-            </a:r>
-            <a:r>
-              <a:rPr lang="de-DE" dirty="0" err="1"/>
-              <a:t>points</a:t>
-            </a:r>
-            <a:r>
-              <a:rPr lang="de-DE" dirty="0"/>
-              <a:t> </a:t>
-            </a:r>
-            <a:r>
-              <a:rPr lang="de-DE" dirty="0" err="1"/>
-              <a:t>from</a:t>
-            </a:r>
-            <a:r>
-              <a:rPr lang="de-DE" dirty="0"/>
-              <a:t> different </a:t>
-            </a:r>
-            <a:r>
-              <a:rPr lang="de-DE" dirty="0" err="1"/>
-              <a:t>clusters</a:t>
-            </a:r>
-            <a:r>
-              <a:rPr lang="de-DE" dirty="0"/>
-              <a:t>:</a:t>
-            </a:r>
-          </a:p>
-          <a:p>
-            <a:pPr lvl="1"/>
-            <a:r>
-              <a:rPr lang="de-DE" dirty="0"/>
-              <a:t>Option 1: </a:t>
-            </a:r>
-            <a:r>
-              <a:rPr lang="de-DE" dirty="0" err="1"/>
-              <a:t>Assign</a:t>
-            </a:r>
-            <a:r>
-              <a:rPr lang="de-DE" dirty="0"/>
-              <a:t> </a:t>
-            </a:r>
-            <a:r>
-              <a:rPr lang="de-DE" dirty="0" err="1"/>
-              <a:t>to</a:t>
-            </a:r>
-            <a:r>
-              <a:rPr lang="de-DE" dirty="0"/>
-              <a:t> </a:t>
-            </a:r>
-            <a:r>
-              <a:rPr lang="de-DE" dirty="0" err="1"/>
-              <a:t>first</a:t>
-            </a:r>
-            <a:r>
-              <a:rPr lang="de-DE" dirty="0"/>
-              <a:t> </a:t>
-            </a:r>
-            <a:r>
-              <a:rPr lang="de-DE" dirty="0" err="1"/>
-              <a:t>found</a:t>
-            </a:r>
-            <a:r>
-              <a:rPr lang="de-DE" dirty="0"/>
-              <a:t> (like DBSCAN </a:t>
-            </a:r>
-            <a:r>
-              <a:rPr lang="de-DE" dirty="0" err="1"/>
-              <a:t>would</a:t>
-            </a:r>
-            <a:r>
-              <a:rPr lang="de-DE" dirty="0"/>
-              <a:t>)</a:t>
-            </a:r>
-          </a:p>
-          <a:p>
-            <a:pPr lvl="1"/>
-            <a:r>
-              <a:rPr lang="de-DE" dirty="0"/>
-              <a:t>Option 2: </a:t>
-            </a:r>
-            <a:r>
-              <a:rPr lang="de-DE" dirty="0" err="1"/>
-              <a:t>Assign</a:t>
-            </a:r>
-            <a:r>
-              <a:rPr lang="de-DE" dirty="0"/>
-              <a:t> </a:t>
-            </a:r>
-            <a:r>
-              <a:rPr lang="de-DE" dirty="0" err="1"/>
-              <a:t>to</a:t>
-            </a:r>
-            <a:r>
-              <a:rPr lang="de-DE" dirty="0"/>
-              <a:t> </a:t>
-            </a:r>
-            <a:r>
-              <a:rPr lang="de-DE" dirty="0" err="1"/>
-              <a:t>closest</a:t>
-            </a:r>
-            <a:r>
-              <a:rPr lang="de-DE" dirty="0"/>
-              <a:t> </a:t>
-            </a:r>
-            <a:r>
-              <a:rPr lang="de-DE" dirty="0" err="1"/>
-              <a:t>core</a:t>
-            </a:r>
-            <a:r>
-              <a:rPr lang="de-DE" dirty="0"/>
-              <a:t> </a:t>
-            </a:r>
-            <a:r>
-              <a:rPr lang="de-DE" dirty="0" err="1"/>
-              <a:t>point</a:t>
-            </a:r>
-            <a:endParaRPr lang="de-DE" dirty="0"/>
-          </a:p>
-          <a:p>
-            <a:pPr marL="0" indent="0">
-              <a:buNone/>
-            </a:pPr>
-            <a:endParaRPr lang="de-DE" b="1" dirty="0"/>
-          </a:p>
-          <a:p>
-            <a:pPr marL="0" indent="0">
-              <a:buNone/>
-            </a:pPr>
-            <a:r>
-              <a:rPr lang="de-DE" dirty="0" err="1"/>
-              <a:t>Adding</a:t>
-            </a:r>
-            <a:r>
-              <a:rPr lang="de-DE" dirty="0"/>
-              <a:t> </a:t>
-            </a:r>
-            <a:r>
-              <a:rPr lang="de-DE" dirty="0" err="1"/>
-              <a:t>one</a:t>
-            </a:r>
-            <a:r>
-              <a:rPr lang="de-DE" dirty="0"/>
-              <a:t> </a:t>
-            </a:r>
-            <a:r>
-              <a:rPr lang="de-DE" dirty="0" err="1"/>
-              <a:t>point</a:t>
-            </a:r>
-            <a:r>
-              <a:rPr lang="de-DE" dirty="0"/>
-              <a:t> </a:t>
-            </a:r>
-            <a:r>
-              <a:rPr lang="de-DE" dirty="0" err="1"/>
-              <a:t>can</a:t>
-            </a:r>
-            <a:r>
-              <a:rPr lang="de-DE" dirty="0"/>
-              <a:t> </a:t>
-            </a:r>
-            <a:r>
-              <a:rPr lang="de-DE" dirty="0" err="1"/>
-              <a:t>change</a:t>
-            </a:r>
-            <a:r>
-              <a:rPr lang="de-DE" dirty="0"/>
-              <a:t> </a:t>
-            </a:r>
-            <a:r>
-              <a:rPr lang="de-DE" dirty="0" err="1"/>
-              <a:t>cluster</a:t>
-            </a:r>
-            <a:r>
-              <a:rPr lang="de-DE" dirty="0"/>
-              <a:t> </a:t>
-            </a:r>
-            <a:r>
-              <a:rPr lang="de-DE" dirty="0" err="1"/>
-              <a:t>structure</a:t>
-            </a:r>
-            <a:endParaRPr lang="de-DE" dirty="0"/>
-          </a:p>
-          <a:p>
-            <a:pPr marL="0" indent="0">
-              <a:buNone/>
-            </a:pPr>
-            <a:r>
-              <a:rPr lang="de-DE" dirty="0">
-                <a:sym typeface="Wingdings" pitchFamily="2" charset="2"/>
-              </a:rPr>
-              <a:t> </a:t>
-            </a:r>
-            <a:r>
-              <a:rPr lang="de-DE" dirty="0"/>
-              <a:t>True DBSCAN </a:t>
-            </a:r>
-            <a:r>
-              <a:rPr lang="de-DE" dirty="0" err="1"/>
-              <a:t>would</a:t>
-            </a:r>
-            <a:r>
-              <a:rPr lang="de-DE" dirty="0"/>
-              <a:t> </a:t>
-            </a:r>
-            <a:r>
-              <a:rPr lang="de-DE" dirty="0" err="1"/>
-              <a:t>require</a:t>
-            </a:r>
-            <a:r>
-              <a:rPr lang="de-DE" dirty="0"/>
-              <a:t> </a:t>
-            </a:r>
-            <a:r>
-              <a:rPr lang="de-DE" dirty="0" err="1"/>
-              <a:t>re-running</a:t>
-            </a:r>
-            <a:r>
-              <a:rPr lang="de-DE" dirty="0"/>
-              <a:t> </a:t>
-            </a:r>
-            <a:r>
-              <a:rPr lang="de-DE" dirty="0" err="1"/>
-              <a:t>the</a:t>
-            </a:r>
-            <a:r>
-              <a:rPr lang="de-DE" dirty="0"/>
-              <a:t> </a:t>
-            </a:r>
-            <a:r>
-              <a:rPr lang="de-DE" dirty="0" err="1"/>
-              <a:t>algorithm</a:t>
-            </a:r>
-            <a:endParaRPr lang="de-DE" dirty="0"/>
-          </a:p>
-        </p:txBody>
-      </p:sp>
-      <p:sp>
-        <p:nvSpPr>
-          <p:cNvPr id="4" name="Foliennummernplatzhalter 3">
-            <a:extLst>
-              <a:ext uri="{FF2B5EF4-FFF2-40B4-BE49-F238E27FC236}">
-                <a16:creationId xmlns:a16="http://schemas.microsoft.com/office/drawing/2014/main" id="{0B161C99-D9A5-D8DB-0687-150C7C9C9AE1}"/>
-              </a:ext>
-            </a:extLst>
-          </p:cNvPr>
-          <p:cNvSpPr>
-            <a:spLocks noGrp="1"/>
-          </p:cNvSpPr>
-          <p:nvPr>
-            <p:ph type="sldNum" sz="quarter" idx="12"/>
-          </p:nvPr>
-        </p:nvSpPr>
-        <p:spPr/>
-        <p:txBody>
-          <a:bodyPr/>
-          <a:lstStyle/>
-          <a:p>
-            <a:fld id="{08C366F5-AFAD-49CB-854A-9D9E238FCA13}" type="slidenum">
-              <a:rPr lang="en-GB" smtClean="0"/>
-              <a:t>34</a:t>
-            </a:fld>
-            <a:endParaRPr lang="en-GB"/>
-          </a:p>
-        </p:txBody>
-      </p:sp>
-    </p:spTree>
-    <p:extLst>
-      <p:ext uri="{BB962C8B-B14F-4D97-AF65-F5344CB8AC3E}">
-        <p14:creationId xmlns:p14="http://schemas.microsoft.com/office/powerpoint/2010/main" val="1263246602"/>
-      </p:ext>
-    </p:extLst>
-  </p:cSld>
-  <p:clrMapOvr>
-    <a:masterClrMapping/>
-  </p:clrMapOvr>
-</p:sld>
-</file>
-
-<file path=ppt/slides/slide35.xml><?xml version="1.0" encoding="utf-8"?>
-<p:sld xmlns:a="http://schemas.openxmlformats.org/drawingml/2006/main" xmlns:r="http://schemas.openxmlformats.org/officeDocument/2006/relationships" xmlns:p="http://schemas.openxmlformats.org/presentationml/2006/main">
-  <p:cSld>
-    <p:spTree>
-      <p:nvGrpSpPr>
-        <p:cNvPr id="1" name=""/>
-        <p:cNvGrpSpPr/>
-        <p:nvPr/>
-      </p:nvGrpSpPr>
-      <p:grpSpPr>
-        <a:xfrm>
-          <a:off x="0" y="0"/>
-          <a:ext cx="0" cy="0"/>
-          <a:chOff x="0" y="0"/>
-          <a:chExt cx="0" cy="0"/>
-        </a:xfrm>
-      </p:grpSpPr>
-      <p:sp>
-        <p:nvSpPr>
-          <p:cNvPr id="2" name="Titel 1">
-            <a:extLst>
-              <a:ext uri="{FF2B5EF4-FFF2-40B4-BE49-F238E27FC236}">
-                <a16:creationId xmlns:a16="http://schemas.microsoft.com/office/drawing/2014/main" id="{AB0A312D-A6FF-AB8E-359F-EE1BDB1D4399}"/>
-              </a:ext>
-            </a:extLst>
-          </p:cNvPr>
-          <p:cNvSpPr>
-            <a:spLocks noGrp="1"/>
-          </p:cNvSpPr>
-          <p:nvPr>
-            <p:ph type="title"/>
-          </p:nvPr>
-        </p:nvSpPr>
-        <p:spPr/>
-        <p:txBody>
-          <a:bodyPr/>
-          <a:lstStyle/>
-          <a:p>
-            <a:r>
-              <a:rPr lang="de-DE" dirty="0" err="1"/>
-              <a:t>Comparing</a:t>
-            </a:r>
-            <a:r>
-              <a:rPr lang="de-DE" dirty="0"/>
-              <a:t> Clustering Methods</a:t>
-            </a:r>
-          </a:p>
-        </p:txBody>
-      </p:sp>
-      <p:sp>
-        <p:nvSpPr>
-          <p:cNvPr id="5" name="Inhaltsplatzhalter 4">
-            <a:extLst>
-              <a:ext uri="{FF2B5EF4-FFF2-40B4-BE49-F238E27FC236}">
-                <a16:creationId xmlns:a16="http://schemas.microsoft.com/office/drawing/2014/main" id="{403B17D7-2EA9-DC24-B9E5-1139CCEB955F}"/>
-              </a:ext>
-            </a:extLst>
-          </p:cNvPr>
-          <p:cNvSpPr>
-            <a:spLocks noGrp="1"/>
-          </p:cNvSpPr>
-          <p:nvPr>
-            <p:ph idx="1"/>
-          </p:nvPr>
-        </p:nvSpPr>
-        <p:spPr>
-          <a:xfrm>
-            <a:off x="8076841" y="1492595"/>
-            <a:ext cx="4115159" cy="4863755"/>
-          </a:xfrm>
-        </p:spPr>
-        <p:txBody>
-          <a:bodyPr>
-            <a:normAutofit fontScale="70000" lnSpcReduction="20000"/>
-          </a:bodyPr>
-          <a:lstStyle/>
-          <a:p>
-            <a:pPr marL="0" indent="0">
-              <a:buNone/>
-            </a:pPr>
-            <a:r>
-              <a:rPr lang="de-DE" dirty="0"/>
-              <a:t>Different </a:t>
-            </a:r>
-            <a:r>
-              <a:rPr lang="de-DE" dirty="0" err="1"/>
-              <a:t>algorithms</a:t>
-            </a:r>
-            <a:r>
-              <a:rPr lang="de-DE" dirty="0"/>
-              <a:t> </a:t>
-            </a:r>
-            <a:r>
-              <a:rPr lang="de-DE" dirty="0" err="1"/>
-              <a:t>suit</a:t>
-            </a:r>
-            <a:r>
-              <a:rPr lang="de-DE" dirty="0"/>
-              <a:t> different </a:t>
-            </a:r>
-            <a:r>
-              <a:rPr lang="de-DE" dirty="0" err="1"/>
-              <a:t>data</a:t>
-            </a:r>
-            <a:r>
-              <a:rPr lang="de-DE" dirty="0"/>
-              <a:t> </a:t>
-            </a:r>
-            <a:r>
-              <a:rPr lang="de-DE" dirty="0">
-                <a:sym typeface="Wingdings" pitchFamily="2" charset="2"/>
-              </a:rPr>
-              <a:t> </a:t>
-            </a:r>
-            <a:r>
-              <a:rPr lang="de-DE" dirty="0" err="1">
-                <a:sym typeface="Wingdings" pitchFamily="2" charset="2"/>
-              </a:rPr>
-              <a:t>n</a:t>
-            </a:r>
-            <a:r>
-              <a:rPr lang="de-DE" dirty="0" err="1"/>
-              <a:t>o</a:t>
-            </a:r>
-            <a:r>
-              <a:rPr lang="de-DE" dirty="0"/>
-              <a:t> </a:t>
-            </a:r>
-            <a:r>
-              <a:rPr lang="de-DE" dirty="0" err="1"/>
-              <a:t>single</a:t>
-            </a:r>
-            <a:r>
-              <a:rPr lang="de-DE" dirty="0"/>
-              <a:t> </a:t>
-            </a:r>
-            <a:r>
-              <a:rPr lang="de-DE" dirty="0" err="1"/>
-              <a:t>best</a:t>
-            </a:r>
-            <a:r>
-              <a:rPr lang="de-DE" dirty="0"/>
-              <a:t> </a:t>
-            </a:r>
-            <a:r>
-              <a:rPr lang="de-DE" dirty="0" err="1"/>
-              <a:t>method</a:t>
-            </a:r>
-            <a:endParaRPr lang="de-DE" dirty="0"/>
-          </a:p>
-          <a:p>
-            <a:pPr marL="0" indent="0">
-              <a:buNone/>
-            </a:pPr>
-            <a:endParaRPr lang="de-DE" dirty="0"/>
-          </a:p>
-          <a:p>
-            <a:pPr marL="0" indent="0">
-              <a:buNone/>
-            </a:pPr>
-            <a:r>
-              <a:rPr lang="de-DE" dirty="0" err="1"/>
-              <a:t>Practical</a:t>
-            </a:r>
-            <a:r>
-              <a:rPr lang="de-DE" dirty="0"/>
-              <a:t> </a:t>
-            </a:r>
-            <a:r>
-              <a:rPr lang="de-DE" dirty="0" err="1"/>
-              <a:t>guidance</a:t>
-            </a:r>
-            <a:r>
-              <a:rPr lang="de-DE" dirty="0"/>
-              <a:t>:</a:t>
-            </a:r>
-          </a:p>
-          <a:p>
-            <a:r>
-              <a:rPr lang="de-DE" dirty="0" err="1"/>
-              <a:t>k-Means</a:t>
-            </a:r>
-            <a:r>
-              <a:rPr lang="de-DE" dirty="0"/>
-              <a:t> </a:t>
-            </a:r>
-            <a:r>
-              <a:rPr lang="de-DE" dirty="0" err="1"/>
-              <a:t>if</a:t>
-            </a:r>
-            <a:r>
-              <a:rPr lang="de-DE" dirty="0"/>
-              <a:t> </a:t>
-            </a:r>
-            <a:r>
-              <a:rPr lang="de-DE" dirty="0" err="1"/>
-              <a:t>clusters</a:t>
-            </a:r>
-            <a:r>
-              <a:rPr lang="de-DE" dirty="0"/>
-              <a:t> </a:t>
-            </a:r>
-            <a:r>
-              <a:rPr lang="de-DE" dirty="0" err="1"/>
-              <a:t>are</a:t>
-            </a:r>
-            <a:r>
-              <a:rPr lang="de-DE" dirty="0"/>
-              <a:t> </a:t>
-            </a:r>
-            <a:r>
-              <a:rPr lang="de-DE" dirty="0" err="1"/>
-              <a:t>compact</a:t>
-            </a:r>
-            <a:r>
-              <a:rPr lang="de-DE" dirty="0"/>
-              <a:t> and </a:t>
-            </a:r>
-            <a:r>
-              <a:rPr lang="de-DE" dirty="0" err="1"/>
-              <a:t>known</a:t>
-            </a:r>
-            <a:endParaRPr lang="de-DE" dirty="0"/>
-          </a:p>
-          <a:p>
-            <a:r>
-              <a:rPr lang="de-DE" dirty="0" err="1"/>
-              <a:t>Hierarchical</a:t>
-            </a:r>
-            <a:r>
-              <a:rPr lang="de-DE" dirty="0"/>
-              <a:t> </a:t>
-            </a:r>
-            <a:r>
-              <a:rPr lang="de-DE" dirty="0" err="1"/>
-              <a:t>if</a:t>
-            </a:r>
-            <a:r>
-              <a:rPr lang="de-DE" dirty="0"/>
-              <a:t> </a:t>
-            </a:r>
-            <a:r>
-              <a:rPr lang="de-DE" dirty="0" err="1"/>
-              <a:t>structure</a:t>
-            </a:r>
-            <a:r>
-              <a:rPr lang="de-DE" dirty="0"/>
-              <a:t> and </a:t>
-            </a:r>
-            <a:r>
-              <a:rPr lang="de-DE" dirty="0" err="1"/>
-              <a:t>interpretability</a:t>
-            </a:r>
-            <a:r>
-              <a:rPr lang="de-DE" dirty="0"/>
-              <a:t> </a:t>
-            </a:r>
-            <a:r>
-              <a:rPr lang="de-DE" dirty="0" err="1"/>
-              <a:t>is</a:t>
-            </a:r>
-            <a:r>
-              <a:rPr lang="de-DE" dirty="0"/>
-              <a:t> </a:t>
-            </a:r>
-            <a:r>
-              <a:rPr lang="de-DE" dirty="0" err="1"/>
-              <a:t>needed</a:t>
-            </a:r>
-            <a:endParaRPr lang="de-DE" dirty="0"/>
-          </a:p>
-          <a:p>
-            <a:r>
-              <a:rPr lang="de-DE" dirty="0"/>
-              <a:t>DBSCAN </a:t>
-            </a:r>
-            <a:r>
-              <a:rPr lang="de-DE" dirty="0" err="1"/>
-              <a:t>if</a:t>
-            </a:r>
-            <a:r>
-              <a:rPr lang="de-DE" dirty="0"/>
-              <a:t> </a:t>
-            </a:r>
-            <a:r>
-              <a:rPr lang="de-DE" dirty="0" err="1"/>
-              <a:t>data</a:t>
-            </a:r>
-            <a:r>
-              <a:rPr lang="de-DE" dirty="0"/>
-              <a:t> </a:t>
-            </a:r>
-            <a:r>
-              <a:rPr lang="de-DE" dirty="0" err="1"/>
-              <a:t>has</a:t>
-            </a:r>
-            <a:r>
-              <a:rPr lang="de-DE" dirty="0"/>
-              <a:t> </a:t>
-            </a:r>
-            <a:r>
-              <a:rPr lang="de-DE" dirty="0" err="1"/>
-              <a:t>noise</a:t>
-            </a:r>
-            <a:r>
-              <a:rPr lang="de-DE" dirty="0"/>
-              <a:t> </a:t>
-            </a:r>
-            <a:r>
-              <a:rPr lang="de-DE" dirty="0" err="1"/>
-              <a:t>or</a:t>
-            </a:r>
-            <a:r>
-              <a:rPr lang="de-DE" dirty="0"/>
-              <a:t> </a:t>
-            </a:r>
-            <a:r>
-              <a:rPr lang="de-DE" dirty="0" err="1"/>
-              <a:t>complex</a:t>
-            </a:r>
-            <a:r>
-              <a:rPr lang="de-DE" dirty="0"/>
-              <a:t> </a:t>
-            </a:r>
-            <a:r>
-              <a:rPr lang="de-DE" dirty="0" err="1"/>
-              <a:t>shapes</a:t>
-            </a:r>
-            <a:endParaRPr lang="de-DE" dirty="0"/>
-          </a:p>
-          <a:p>
-            <a:pPr marL="0" indent="0">
-              <a:buNone/>
-            </a:pPr>
-            <a:endParaRPr lang="de-DE" dirty="0"/>
-          </a:p>
-          <a:p>
-            <a:pPr marL="0" indent="0">
-              <a:buNone/>
-            </a:pPr>
-            <a:r>
-              <a:rPr lang="de-DE" dirty="0" err="1"/>
-              <a:t>What</a:t>
-            </a:r>
-            <a:r>
-              <a:rPr lang="de-DE" dirty="0"/>
-              <a:t> </a:t>
-            </a:r>
-            <a:r>
-              <a:rPr lang="de-DE" dirty="0" err="1"/>
-              <a:t>affects</a:t>
-            </a:r>
-            <a:r>
-              <a:rPr lang="de-DE" dirty="0"/>
-              <a:t> </a:t>
-            </a:r>
-            <a:r>
-              <a:rPr lang="de-DE" dirty="0" err="1"/>
-              <a:t>results</a:t>
-            </a:r>
-            <a:r>
-              <a:rPr lang="de-DE" dirty="0"/>
-              <a:t>?</a:t>
-            </a:r>
-          </a:p>
-          <a:p>
-            <a:r>
-              <a:rPr lang="de-DE" dirty="0" err="1"/>
-              <a:t>k-Means</a:t>
-            </a:r>
-            <a:r>
-              <a:rPr lang="de-DE" dirty="0"/>
-              <a:t>: initial </a:t>
-            </a:r>
-            <a:r>
-              <a:rPr lang="de-DE" dirty="0" err="1"/>
-              <a:t>centroids</a:t>
-            </a:r>
-            <a:endParaRPr lang="de-DE" dirty="0"/>
-          </a:p>
-          <a:p>
-            <a:r>
-              <a:rPr lang="de-DE" dirty="0" err="1"/>
-              <a:t>Hierarchical</a:t>
-            </a:r>
-            <a:r>
-              <a:rPr lang="de-DE" dirty="0"/>
-              <a:t>: </a:t>
-            </a:r>
-            <a:r>
-              <a:rPr lang="de-DE" dirty="0" err="1"/>
-              <a:t>linkage</a:t>
-            </a:r>
-            <a:r>
-              <a:rPr lang="de-DE" dirty="0"/>
-              <a:t> </a:t>
-            </a:r>
-            <a:r>
-              <a:rPr lang="de-DE" dirty="0" err="1"/>
-              <a:t>method</a:t>
-            </a:r>
-            <a:endParaRPr lang="de-DE" dirty="0"/>
-          </a:p>
-          <a:p>
-            <a:r>
-              <a:rPr lang="de-DE" dirty="0"/>
-              <a:t>DBSCAN: </a:t>
-            </a:r>
-            <a:r>
-              <a:rPr lang="el-GR" dirty="0">
-                <a:latin typeface="Cambria Math" panose="02040503050406030204" pitchFamily="18" charset="0"/>
-                <a:ea typeface="Cambria Math" panose="02040503050406030204" pitchFamily="18" charset="0"/>
-              </a:rPr>
-              <a:t>ε</a:t>
-            </a:r>
-            <a:r>
-              <a:rPr lang="el-GR" dirty="0"/>
-              <a:t> </a:t>
-            </a:r>
-            <a:r>
-              <a:rPr lang="de-DE" dirty="0"/>
-              <a:t>and </a:t>
-            </a:r>
-            <a:r>
-              <a:rPr lang="de-DE" dirty="0" err="1">
-                <a:latin typeface="Cambria Math" panose="02040503050406030204" pitchFamily="18" charset="0"/>
-                <a:ea typeface="Cambria Math" panose="02040503050406030204" pitchFamily="18" charset="0"/>
-              </a:rPr>
-              <a:t>min_samples</a:t>
-            </a:r>
-            <a:endParaRPr lang="de-DE" dirty="0">
-              <a:latin typeface="Cambria Math" panose="02040503050406030204" pitchFamily="18" charset="0"/>
-              <a:ea typeface="Cambria Math" panose="02040503050406030204" pitchFamily="18" charset="0"/>
-            </a:endParaRPr>
-          </a:p>
-        </p:txBody>
-      </p:sp>
-      <p:sp>
-        <p:nvSpPr>
-          <p:cNvPr id="3" name="Foliennummernplatzhalter 2">
-            <a:extLst>
-              <a:ext uri="{FF2B5EF4-FFF2-40B4-BE49-F238E27FC236}">
-                <a16:creationId xmlns:a16="http://schemas.microsoft.com/office/drawing/2014/main" id="{6EFA0DEA-9C10-4341-0996-B658FBE37513}"/>
-              </a:ext>
-            </a:extLst>
-          </p:cNvPr>
-          <p:cNvSpPr>
-            <a:spLocks noGrp="1"/>
-          </p:cNvSpPr>
-          <p:nvPr>
-            <p:ph type="sldNum" sz="quarter" idx="12"/>
-          </p:nvPr>
-        </p:nvSpPr>
-        <p:spPr/>
-        <p:txBody>
-          <a:bodyPr/>
-          <a:lstStyle/>
-          <a:p>
-            <a:fld id="{08C366F5-AFAD-49CB-854A-9D9E238FCA13}" type="slidenum">
-              <a:rPr lang="en-GB" smtClean="0"/>
-              <a:t>35</a:t>
-            </a:fld>
-            <a:endParaRPr lang="en-GB"/>
-          </a:p>
-        </p:txBody>
-      </p:sp>
-      <p:pic>
-        <p:nvPicPr>
-          <p:cNvPr id="4" name="Picture 2" descr="MiniBatch KMeans, Affinity Propagation, MeanShift, Spectral Clustering, Ward, Agglomerative Clustering, DBSCAN, HDBSCAN, OPTICS, BIRCH, Gaussian Mixture">
-            <a:extLst>
-              <a:ext uri="{FF2B5EF4-FFF2-40B4-BE49-F238E27FC236}">
-                <a16:creationId xmlns:a16="http://schemas.microsoft.com/office/drawing/2014/main" id="{5A730511-A7F9-E57C-2E0C-B6C2442784C9}"/>
-              </a:ext>
-            </a:extLst>
-          </p:cNvPr>
-          <p:cNvPicPr>
-            <a:picLocks noChangeAspect="1" noChangeArrowheads="1"/>
-          </p:cNvPicPr>
-          <p:nvPr/>
-        </p:nvPicPr>
-        <p:blipFill>
-          <a:blip r:embed="rId2">
-            <a:extLst>
-              <a:ext uri="{28A0092B-C50C-407E-A947-70E740481C1C}">
-                <a14:useLocalDpi xmlns:a14="http://schemas.microsoft.com/office/drawing/2010/main" val="0"/>
-              </a:ext>
-            </a:extLst>
-          </a:blip>
-          <a:srcRect/>
-          <a:stretch>
-            <a:fillRect/>
-          </a:stretch>
-        </p:blipFill>
-        <p:spPr bwMode="auto">
-          <a:xfrm>
-            <a:off x="0" y="1492595"/>
-            <a:ext cx="8076841" cy="5000280"/>
-          </a:xfrm>
-          <a:prstGeom prst="rect">
-            <a:avLst/>
-          </a:prstGeom>
-          <a:noFill/>
-          <a:extLst>
-            <a:ext uri="{909E8E84-426E-40DD-AFC4-6F175D3DCCD1}">
-              <a14:hiddenFill xmlns:a14="http://schemas.microsoft.com/office/drawing/2010/main">
-                <a:solidFill>
-                  <a:srgbClr val="FFFFFF"/>
-                </a:solidFill>
-              </a14:hiddenFill>
-            </a:ext>
-          </a:extLst>
-        </p:spPr>
-      </p:pic>
-    </p:spTree>
-    <p:extLst>
-      <p:ext uri="{BB962C8B-B14F-4D97-AF65-F5344CB8AC3E}">
-        <p14:creationId xmlns:p14="http://schemas.microsoft.com/office/powerpoint/2010/main" val="2928299488"/>
-      </p:ext>
-    </p:extLst>
-  </p:cSld>
-  <p:clrMapOvr>
-    <a:masterClrMapping/>
-  </p:clrMapOvr>
-</p:sld>
-</file>
-
-<file path=ppt/slides/slide36.xml><?xml version="1.0" encoding="utf-8"?>
-<p:sld xmlns:a="http://schemas.openxmlformats.org/drawingml/2006/main" xmlns:r="http://schemas.openxmlformats.org/officeDocument/2006/relationships" xmlns:p="http://schemas.openxmlformats.org/presentationml/2006/main">
-  <p:cSld>
-    <p:spTree>
-      <p:nvGrpSpPr>
-        <p:cNvPr id="1" name="">
-          <a:extLst>
-            <a:ext uri="{FF2B5EF4-FFF2-40B4-BE49-F238E27FC236}">
-              <a16:creationId xmlns:a16="http://schemas.microsoft.com/office/drawing/2014/main" id="{CB00C5E9-3765-EE2A-7DFF-13E5F7EA431F}"/>
-            </a:ext>
-          </a:extLst>
-        </p:cNvPr>
-        <p:cNvGrpSpPr/>
-        <p:nvPr/>
-      </p:nvGrpSpPr>
-      <p:grpSpPr>
-        <a:xfrm>
-          <a:off x="0" y="0"/>
-          <a:ext cx="0" cy="0"/>
-          <a:chOff x="0" y="0"/>
-          <a:chExt cx="0" cy="0"/>
-        </a:xfrm>
-      </p:grpSpPr>
-      <p:sp>
-        <p:nvSpPr>
-          <p:cNvPr id="2" name="Titel 1">
-            <a:extLst>
-              <a:ext uri="{FF2B5EF4-FFF2-40B4-BE49-F238E27FC236}">
-                <a16:creationId xmlns:a16="http://schemas.microsoft.com/office/drawing/2014/main" id="{3F8DE861-6867-FA20-1E8C-02A7DCD9C0B2}"/>
-              </a:ext>
-            </a:extLst>
-          </p:cNvPr>
-          <p:cNvSpPr>
-            <a:spLocks noGrp="1"/>
-          </p:cNvSpPr>
-          <p:nvPr>
-            <p:ph type="title"/>
-          </p:nvPr>
-        </p:nvSpPr>
-        <p:spPr/>
-        <p:txBody>
-          <a:bodyPr/>
-          <a:lstStyle/>
-          <a:p>
-            <a:r>
-              <a:rPr lang="de-DE" dirty="0"/>
-              <a:t>Practice Project</a:t>
-            </a:r>
-          </a:p>
-        </p:txBody>
-      </p:sp>
-      <p:sp>
-        <p:nvSpPr>
-          <p:cNvPr id="4" name="Inhaltsplatzhalter 3">
-            <a:extLst>
-              <a:ext uri="{FF2B5EF4-FFF2-40B4-BE49-F238E27FC236}">
-                <a16:creationId xmlns:a16="http://schemas.microsoft.com/office/drawing/2014/main" id="{276E0A6B-1BDF-FD30-67E7-B5624AD47587}"/>
-              </a:ext>
-            </a:extLst>
-          </p:cNvPr>
-          <p:cNvSpPr>
-            <a:spLocks noGrp="1"/>
-          </p:cNvSpPr>
-          <p:nvPr>
-            <p:ph idx="1"/>
-          </p:nvPr>
-        </p:nvSpPr>
-        <p:spPr/>
-        <p:txBody>
-          <a:bodyPr/>
-          <a:lstStyle/>
-          <a:p>
-            <a:pPr marL="0" indent="0">
-              <a:buNone/>
-            </a:pPr>
-            <a:endParaRPr lang="de-DE" dirty="0"/>
-          </a:p>
-          <a:p>
-            <a:pPr marL="0" indent="0">
-              <a:buNone/>
-            </a:pPr>
-            <a:endParaRPr lang="de-DE" dirty="0"/>
-          </a:p>
-          <a:p>
-            <a:pPr marL="0" indent="0">
-              <a:buNone/>
-            </a:pPr>
-            <a:r>
-              <a:rPr lang="de-DE" dirty="0" err="1"/>
-              <a:t>Compare</a:t>
-            </a:r>
-            <a:r>
-              <a:rPr lang="de-DE" dirty="0"/>
-              <a:t> different </a:t>
-            </a:r>
-            <a:r>
-              <a:rPr lang="de-DE" dirty="0" err="1"/>
-              <a:t>clustering</a:t>
-            </a:r>
-            <a:r>
-              <a:rPr lang="de-DE" dirty="0"/>
-              <a:t> </a:t>
-            </a:r>
-            <a:r>
-              <a:rPr lang="de-DE" dirty="0" err="1"/>
-              <a:t>methods</a:t>
-            </a:r>
-            <a:r>
-              <a:rPr lang="de-DE" dirty="0"/>
-              <a:t> on </a:t>
-            </a:r>
-            <a:r>
-              <a:rPr lang="de-DE" dirty="0">
-                <a:hlinkClick r:id="rId2"/>
-              </a:rPr>
-              <a:t>Mall Customers dataset</a:t>
-            </a:r>
-            <a:endParaRPr lang="de-DE" dirty="0"/>
-          </a:p>
-        </p:txBody>
-      </p:sp>
-      <p:sp>
-        <p:nvSpPr>
-          <p:cNvPr id="3" name="Foliennummernplatzhalter 2">
-            <a:extLst>
-              <a:ext uri="{FF2B5EF4-FFF2-40B4-BE49-F238E27FC236}">
-                <a16:creationId xmlns:a16="http://schemas.microsoft.com/office/drawing/2014/main" id="{E795438C-73C3-6A2D-0846-70202255C097}"/>
-              </a:ext>
-            </a:extLst>
-          </p:cNvPr>
-          <p:cNvSpPr>
-            <a:spLocks noGrp="1"/>
-          </p:cNvSpPr>
-          <p:nvPr>
-            <p:ph type="sldNum" sz="quarter" idx="12"/>
-          </p:nvPr>
-        </p:nvSpPr>
-        <p:spPr/>
-        <p:txBody>
-          <a:bodyPr/>
-          <a:lstStyle/>
-          <a:p>
-            <a:fld id="{08C366F5-AFAD-49CB-854A-9D9E238FCA13}" type="slidenum">
-              <a:rPr lang="en-GB" smtClean="0"/>
-              <a:t>36</a:t>
-            </a:fld>
-            <a:endParaRPr lang="en-GB"/>
-          </a:p>
-        </p:txBody>
-      </p:sp>
-    </p:spTree>
-    <p:extLst>
-      <p:ext uri="{BB962C8B-B14F-4D97-AF65-F5344CB8AC3E}">
-        <p14:creationId xmlns:p14="http://schemas.microsoft.com/office/powerpoint/2010/main" val="3631203560"/>
-      </p:ext>
-    </p:extLst>
-  </p:cSld>
-  <p:clrMapOvr>
-    <a:masterClrMapping/>
-  </p:clrMapOvr>
-</p:sld>
-</file>
-
-<file path=ppt/slides/slide4.xml><?xml version="1.0" encoding="utf-8"?>
+<file path=ppt/slides/slide3.xml><?xml version="1.0" encoding="utf-8"?>
 <p:sld xmlns:a="http://schemas.openxmlformats.org/drawingml/2006/main" xmlns:r="http://schemas.openxmlformats.org/officeDocument/2006/relationships" xmlns:p="http://schemas.openxmlformats.org/presentationml/2006/main">
   <p:cSld>
     <p:spTree>
@@ -20353,7 +15910,7 @@
           <a:p>
             <a:fld id="{3D4C94FE-FF23-4504-88E9-14D481113291}" type="slidenum">
               <a:rPr lang="en-GB" smtClean="0"/>
-              <a:t>4</a:t>
+              <a:t>3</a:t>
             </a:fld>
             <a:endParaRPr lang="en-GB"/>
           </a:p>
@@ -22272,7 +17829,3313 @@
 </p:sld>
 </file>
 
-<file path=ppt/slides/slide5.xml><?xml version="1.0" encoding="utf-8"?>
+<file path=ppt/slides/slide30.xml><?xml version="1.0" encoding="utf-8"?>
+<p:sld xmlns:a="http://schemas.openxmlformats.org/drawingml/2006/main" xmlns:r="http://schemas.openxmlformats.org/officeDocument/2006/relationships" xmlns:p="http://schemas.openxmlformats.org/presentationml/2006/main">
+  <p:cSld>
+    <p:spTree>
+      <p:nvGrpSpPr>
+        <p:cNvPr id="1" name=""/>
+        <p:cNvGrpSpPr/>
+        <p:nvPr/>
+      </p:nvGrpSpPr>
+      <p:grpSpPr>
+        <a:xfrm>
+          <a:off x="0" y="0"/>
+          <a:ext cx="0" cy="0"/>
+          <a:chOff x="0" y="0"/>
+          <a:chExt cx="0" cy="0"/>
+        </a:xfrm>
+      </p:grpSpPr>
+      <p:sp>
+        <p:nvSpPr>
+          <p:cNvPr id="2" name="Titel 1">
+            <a:extLst>
+              <a:ext uri="{FF2B5EF4-FFF2-40B4-BE49-F238E27FC236}">
+                <a16:creationId xmlns:a16="http://schemas.microsoft.com/office/drawing/2014/main" id="{9CC7556B-98BB-9EF2-B9BD-688767AA83EE}"/>
+              </a:ext>
+            </a:extLst>
+          </p:cNvPr>
+          <p:cNvSpPr>
+            <a:spLocks noGrp="1"/>
+          </p:cNvSpPr>
+          <p:nvPr>
+            <p:ph type="title"/>
+          </p:nvPr>
+        </p:nvSpPr>
+        <p:spPr/>
+        <p:txBody>
+          <a:bodyPr/>
+          <a:lstStyle/>
+          <a:p>
+            <a:r>
+              <a:rPr lang="de-DE" dirty="0"/>
+              <a:t>Core Points, Border Points, Noise</a:t>
+            </a:r>
+          </a:p>
+        </p:txBody>
+      </p:sp>
+      <p:sp>
+        <p:nvSpPr>
+          <p:cNvPr id="4" name="Inhaltsplatzhalter 3">
+            <a:extLst>
+              <a:ext uri="{FF2B5EF4-FFF2-40B4-BE49-F238E27FC236}">
+                <a16:creationId xmlns:a16="http://schemas.microsoft.com/office/drawing/2014/main" id="{C0D2316E-28EC-6582-BF64-207C98454652}"/>
+              </a:ext>
+            </a:extLst>
+          </p:cNvPr>
+          <p:cNvSpPr>
+            <a:spLocks noGrp="1"/>
+          </p:cNvSpPr>
+          <p:nvPr>
+            <p:ph idx="1"/>
+          </p:nvPr>
+        </p:nvSpPr>
+        <p:spPr/>
+        <p:txBody>
+          <a:bodyPr>
+            <a:normAutofit/>
+          </a:bodyPr>
+          <a:lstStyle/>
+          <a:p>
+            <a:pPr marL="0" indent="0">
+              <a:buNone/>
+            </a:pPr>
+            <a:r>
+              <a:rPr lang="de-DE" dirty="0" err="1"/>
+              <a:t>Define</a:t>
+            </a:r>
+            <a:r>
+              <a:rPr lang="de-DE" dirty="0"/>
+              <a:t> different </a:t>
+            </a:r>
+            <a:r>
+              <a:rPr lang="de-DE" dirty="0" err="1"/>
+              <a:t>types</a:t>
+            </a:r>
+            <a:r>
+              <a:rPr lang="de-DE" dirty="0"/>
+              <a:t> </a:t>
+            </a:r>
+            <a:r>
+              <a:rPr lang="de-DE" dirty="0" err="1"/>
+              <a:t>of</a:t>
+            </a:r>
+            <a:r>
+              <a:rPr lang="de-DE" dirty="0"/>
+              <a:t> </a:t>
+            </a:r>
+            <a:r>
+              <a:rPr lang="de-DE" dirty="0" err="1"/>
+              <a:t>points</a:t>
+            </a:r>
+            <a:endParaRPr lang="de-DE" dirty="0"/>
+          </a:p>
+          <a:p>
+            <a:pPr marL="0" indent="0">
+              <a:buNone/>
+            </a:pPr>
+            <a:endParaRPr lang="de-DE" dirty="0"/>
+          </a:p>
+          <a:p>
+            <a:r>
+              <a:rPr lang="de-DE" dirty="0"/>
+              <a:t>Core Point: </a:t>
+            </a:r>
+            <a:r>
+              <a:rPr lang="de-DE" dirty="0" err="1"/>
+              <a:t>have</a:t>
+            </a:r>
+            <a:r>
+              <a:rPr lang="de-DE" dirty="0"/>
+              <a:t> </a:t>
+            </a:r>
+            <a:r>
+              <a:rPr lang="de-DE" dirty="0">
+                <a:latin typeface="Cambria Math" panose="02040503050406030204" pitchFamily="18" charset="0"/>
+                <a:ea typeface="Cambria Math" panose="02040503050406030204" pitchFamily="18" charset="0"/>
+              </a:rPr>
+              <a:t>≥ </a:t>
+            </a:r>
+            <a:r>
+              <a:rPr lang="de-DE" dirty="0" err="1">
+                <a:latin typeface="Cambria Math" panose="02040503050406030204" pitchFamily="18" charset="0"/>
+                <a:ea typeface="Cambria Math" panose="02040503050406030204" pitchFamily="18" charset="0"/>
+              </a:rPr>
+              <a:t>min_samples</a:t>
+            </a:r>
+            <a:r>
+              <a:rPr lang="de-DE" dirty="0"/>
+              <a:t> </a:t>
+            </a:r>
+            <a:r>
+              <a:rPr lang="de-DE" dirty="0" err="1"/>
+              <a:t>points</a:t>
+            </a:r>
+            <a:r>
+              <a:rPr lang="de-DE" dirty="0"/>
+              <a:t> </a:t>
+            </a:r>
+            <a:r>
+              <a:rPr lang="de-DE" dirty="0" err="1"/>
+              <a:t>within</a:t>
+            </a:r>
+            <a:r>
+              <a:rPr lang="de-DE" dirty="0"/>
+              <a:t> </a:t>
+            </a:r>
+            <a:r>
+              <a:rPr lang="el-GR" dirty="0">
+                <a:latin typeface="Cambria Math" panose="02040503050406030204" pitchFamily="18" charset="0"/>
+                <a:ea typeface="Cambria Math" panose="02040503050406030204" pitchFamily="18" charset="0"/>
+              </a:rPr>
+              <a:t>ε</a:t>
+            </a:r>
+            <a:r>
+              <a:rPr lang="de-DE" dirty="0"/>
+              <a:t> </a:t>
+            </a:r>
+            <a:r>
+              <a:rPr lang="de-DE" dirty="0">
+                <a:sym typeface="Wingdings" pitchFamily="2" charset="2"/>
+              </a:rPr>
+              <a:t> </a:t>
+            </a:r>
+            <a:r>
+              <a:rPr lang="de-DE" dirty="0" err="1">
+                <a:sym typeface="Wingdings" pitchFamily="2" charset="2"/>
+              </a:rPr>
+              <a:t>dense</a:t>
+            </a:r>
+            <a:r>
+              <a:rPr lang="de-DE" dirty="0">
+                <a:sym typeface="Wingdings" pitchFamily="2" charset="2"/>
+              </a:rPr>
+              <a:t> </a:t>
+            </a:r>
+            <a:r>
+              <a:rPr lang="de-DE" dirty="0" err="1">
+                <a:sym typeface="Wingdings" pitchFamily="2" charset="2"/>
+              </a:rPr>
+              <a:t>center</a:t>
+            </a:r>
+            <a:endParaRPr lang="el-GR" dirty="0"/>
+          </a:p>
+          <a:p>
+            <a:pPr marL="0" indent="0">
+              <a:buNone/>
+            </a:pPr>
+            <a:endParaRPr lang="de-DE" dirty="0"/>
+          </a:p>
+          <a:p>
+            <a:r>
+              <a:rPr lang="de-DE" dirty="0"/>
+              <a:t>Border Point: </a:t>
+            </a:r>
+            <a:r>
+              <a:rPr lang="de-DE" dirty="0" err="1"/>
+              <a:t>within</a:t>
+            </a:r>
+            <a:r>
+              <a:rPr lang="de-DE" dirty="0"/>
+              <a:t> </a:t>
+            </a:r>
+            <a:r>
+              <a:rPr lang="el-GR" dirty="0">
+                <a:latin typeface="Cambria Math" panose="02040503050406030204" pitchFamily="18" charset="0"/>
+                <a:ea typeface="Cambria Math" panose="02040503050406030204" pitchFamily="18" charset="0"/>
+              </a:rPr>
+              <a:t>ε</a:t>
+            </a:r>
+            <a:r>
+              <a:rPr lang="el-GR" dirty="0"/>
+              <a:t> </a:t>
+            </a:r>
+            <a:r>
+              <a:rPr lang="de-DE" dirty="0" err="1"/>
+              <a:t>of</a:t>
+            </a:r>
+            <a:r>
+              <a:rPr lang="de-DE" dirty="0"/>
+              <a:t> a </a:t>
+            </a:r>
+            <a:r>
+              <a:rPr lang="de-DE" dirty="0" err="1"/>
+              <a:t>core</a:t>
+            </a:r>
+            <a:r>
+              <a:rPr lang="de-DE" dirty="0"/>
+              <a:t> </a:t>
+            </a:r>
+            <a:r>
+              <a:rPr lang="de-DE" dirty="0" err="1"/>
+              <a:t>point</a:t>
+            </a:r>
+            <a:r>
+              <a:rPr lang="de-DE" dirty="0"/>
+              <a:t>, but not a </a:t>
+            </a:r>
+            <a:r>
+              <a:rPr lang="de-DE" dirty="0" err="1"/>
+              <a:t>core</a:t>
+            </a:r>
+            <a:r>
+              <a:rPr lang="de-DE" dirty="0"/>
+              <a:t> </a:t>
+            </a:r>
+            <a:r>
+              <a:rPr lang="de-DE" dirty="0" err="1"/>
+              <a:t>point</a:t>
+            </a:r>
+            <a:r>
+              <a:rPr lang="de-DE" dirty="0"/>
+              <a:t> </a:t>
+            </a:r>
+            <a:r>
+              <a:rPr lang="de-DE" dirty="0" err="1"/>
+              <a:t>itself</a:t>
+            </a:r>
+            <a:r>
+              <a:rPr lang="de-DE" dirty="0"/>
+              <a:t> (not </a:t>
+            </a:r>
+            <a:r>
+              <a:rPr lang="de-DE" dirty="0" err="1"/>
+              <a:t>dense</a:t>
+            </a:r>
+            <a:r>
+              <a:rPr lang="de-DE" dirty="0"/>
+              <a:t> </a:t>
+            </a:r>
+            <a:r>
+              <a:rPr lang="de-DE" dirty="0" err="1"/>
+              <a:t>enough</a:t>
+            </a:r>
+            <a:r>
+              <a:rPr lang="de-DE" dirty="0"/>
+              <a:t>) </a:t>
+            </a:r>
+            <a:r>
+              <a:rPr lang="de-DE" dirty="0">
+                <a:sym typeface="Wingdings" pitchFamily="2" charset="2"/>
+              </a:rPr>
+              <a:t> </a:t>
+            </a:r>
+            <a:r>
+              <a:rPr lang="de-DE" dirty="0" err="1">
+                <a:sym typeface="Wingdings" pitchFamily="2" charset="2"/>
+              </a:rPr>
+              <a:t>edge</a:t>
+            </a:r>
+            <a:r>
+              <a:rPr lang="de-DE" dirty="0">
+                <a:sym typeface="Wingdings" pitchFamily="2" charset="2"/>
+              </a:rPr>
+              <a:t> </a:t>
+            </a:r>
+            <a:r>
+              <a:rPr lang="de-DE" dirty="0" err="1">
+                <a:sym typeface="Wingdings" pitchFamily="2" charset="2"/>
+              </a:rPr>
+              <a:t>of</a:t>
+            </a:r>
+            <a:r>
+              <a:rPr lang="de-DE" dirty="0">
+                <a:sym typeface="Wingdings" pitchFamily="2" charset="2"/>
+              </a:rPr>
+              <a:t> </a:t>
+            </a:r>
+            <a:r>
+              <a:rPr lang="de-DE" dirty="0" err="1">
+                <a:sym typeface="Wingdings" pitchFamily="2" charset="2"/>
+              </a:rPr>
+              <a:t>cluster</a:t>
+            </a:r>
+            <a:endParaRPr lang="de-DE" dirty="0"/>
+          </a:p>
+          <a:p>
+            <a:pPr marL="0" indent="0">
+              <a:buNone/>
+            </a:pPr>
+            <a:endParaRPr lang="de-DE" dirty="0"/>
+          </a:p>
+          <a:p>
+            <a:r>
+              <a:rPr lang="de-DE" dirty="0"/>
+              <a:t>Noise Point: not </a:t>
+            </a:r>
+            <a:r>
+              <a:rPr lang="de-DE" dirty="0" err="1"/>
+              <a:t>reachable</a:t>
+            </a:r>
+            <a:r>
+              <a:rPr lang="de-DE" dirty="0"/>
+              <a:t> </a:t>
+            </a:r>
+            <a:r>
+              <a:rPr lang="de-DE" dirty="0" err="1"/>
+              <a:t>from</a:t>
+            </a:r>
+            <a:r>
+              <a:rPr lang="de-DE" dirty="0"/>
+              <a:t> </a:t>
+            </a:r>
+            <a:r>
+              <a:rPr lang="de-DE" dirty="0" err="1"/>
+              <a:t>any</a:t>
+            </a:r>
+            <a:r>
+              <a:rPr lang="de-DE" dirty="0"/>
+              <a:t> </a:t>
+            </a:r>
+            <a:r>
+              <a:rPr lang="de-DE" dirty="0" err="1"/>
+              <a:t>core</a:t>
+            </a:r>
+            <a:r>
+              <a:rPr lang="de-DE" dirty="0"/>
+              <a:t> </a:t>
+            </a:r>
+            <a:r>
+              <a:rPr lang="de-DE" dirty="0" err="1"/>
+              <a:t>point</a:t>
+            </a:r>
+            <a:r>
+              <a:rPr lang="de-DE" dirty="0"/>
+              <a:t> </a:t>
+            </a:r>
+            <a:r>
+              <a:rPr lang="de-DE" dirty="0">
+                <a:sym typeface="Wingdings" pitchFamily="2" charset="2"/>
+              </a:rPr>
+              <a:t> </a:t>
+            </a:r>
+            <a:r>
+              <a:rPr lang="de-DE" dirty="0" err="1">
+                <a:sym typeface="Wingdings" pitchFamily="2" charset="2"/>
+              </a:rPr>
+              <a:t>isolated</a:t>
+            </a:r>
+            <a:r>
+              <a:rPr lang="de-DE" dirty="0">
+                <a:sym typeface="Wingdings" pitchFamily="2" charset="2"/>
+              </a:rPr>
+              <a:t> </a:t>
+            </a:r>
+            <a:r>
+              <a:rPr lang="de-DE" dirty="0" err="1">
+                <a:sym typeface="Wingdings" pitchFamily="2" charset="2"/>
+              </a:rPr>
+              <a:t>point</a:t>
+            </a:r>
+            <a:endParaRPr lang="de-DE" dirty="0"/>
+          </a:p>
+        </p:txBody>
+      </p:sp>
+      <p:sp>
+        <p:nvSpPr>
+          <p:cNvPr id="3" name="Foliennummernplatzhalter 2">
+            <a:extLst>
+              <a:ext uri="{FF2B5EF4-FFF2-40B4-BE49-F238E27FC236}">
+                <a16:creationId xmlns:a16="http://schemas.microsoft.com/office/drawing/2014/main" id="{157EE93D-CF21-6985-77E6-E17034472C2F}"/>
+              </a:ext>
+            </a:extLst>
+          </p:cNvPr>
+          <p:cNvSpPr>
+            <a:spLocks noGrp="1"/>
+          </p:cNvSpPr>
+          <p:nvPr>
+            <p:ph type="sldNum" sz="quarter" idx="12"/>
+          </p:nvPr>
+        </p:nvSpPr>
+        <p:spPr/>
+        <p:txBody>
+          <a:bodyPr/>
+          <a:lstStyle/>
+          <a:p>
+            <a:fld id="{08C366F5-AFAD-49CB-854A-9D9E238FCA13}" type="slidenum">
+              <a:rPr lang="en-GB" smtClean="0"/>
+              <a:t>30</a:t>
+            </a:fld>
+            <a:endParaRPr lang="en-GB"/>
+          </a:p>
+        </p:txBody>
+      </p:sp>
+    </p:spTree>
+    <p:extLst>
+      <p:ext uri="{BB962C8B-B14F-4D97-AF65-F5344CB8AC3E}">
+        <p14:creationId xmlns:p14="http://schemas.microsoft.com/office/powerpoint/2010/main" val="1093548525"/>
+      </p:ext>
+    </p:extLst>
+  </p:cSld>
+  <p:clrMapOvr>
+    <a:masterClrMapping/>
+  </p:clrMapOvr>
+</p:sld>
+</file>
+
+<file path=ppt/slides/slide31.xml><?xml version="1.0" encoding="utf-8"?>
+<p:sld xmlns:a="http://schemas.openxmlformats.org/drawingml/2006/main" xmlns:r="http://schemas.openxmlformats.org/officeDocument/2006/relationships" xmlns:p="http://schemas.openxmlformats.org/presentationml/2006/main">
+  <p:cSld>
+    <p:spTree>
+      <p:nvGrpSpPr>
+        <p:cNvPr id="1" name=""/>
+        <p:cNvGrpSpPr/>
+        <p:nvPr/>
+      </p:nvGrpSpPr>
+      <p:grpSpPr>
+        <a:xfrm>
+          <a:off x="0" y="0"/>
+          <a:ext cx="0" cy="0"/>
+          <a:chOff x="0" y="0"/>
+          <a:chExt cx="0" cy="0"/>
+        </a:xfrm>
+      </p:grpSpPr>
+      <p:sp>
+        <p:nvSpPr>
+          <p:cNvPr id="2" name="Titel 1">
+            <a:extLst>
+              <a:ext uri="{FF2B5EF4-FFF2-40B4-BE49-F238E27FC236}">
+                <a16:creationId xmlns:a16="http://schemas.microsoft.com/office/drawing/2014/main" id="{DA85E08B-65CA-DA0F-8B2B-32C7BF1987BF}"/>
+              </a:ext>
+            </a:extLst>
+          </p:cNvPr>
+          <p:cNvSpPr>
+            <a:spLocks noGrp="1"/>
+          </p:cNvSpPr>
+          <p:nvPr>
+            <p:ph type="title"/>
+          </p:nvPr>
+        </p:nvSpPr>
+        <p:spPr/>
+        <p:txBody>
+          <a:bodyPr/>
+          <a:lstStyle/>
+          <a:p>
+            <a:r>
+              <a:rPr lang="de-DE" dirty="0"/>
+              <a:t>DBSCAN </a:t>
+            </a:r>
+            <a:r>
+              <a:rPr lang="de-DE" dirty="0" err="1"/>
+              <a:t>Algorithm</a:t>
+            </a:r>
+            <a:endParaRPr lang="de-DE" dirty="0"/>
+          </a:p>
+        </p:txBody>
+      </p:sp>
+      <mc:AlternateContent xmlns:mc="http://schemas.openxmlformats.org/markup-compatibility/2006" xmlns:a14="http://schemas.microsoft.com/office/drawing/2010/main">
+        <mc:Choice Requires="a14">
+          <p:sp>
+            <p:nvSpPr>
+              <p:cNvPr id="3" name="Inhaltsplatzhalter 2">
+                <a:extLst>
+                  <a:ext uri="{FF2B5EF4-FFF2-40B4-BE49-F238E27FC236}">
+                    <a16:creationId xmlns:a16="http://schemas.microsoft.com/office/drawing/2014/main" id="{48293539-B5EA-4406-02DD-1F9D36FDC673}"/>
+                  </a:ext>
+                </a:extLst>
+              </p:cNvPr>
+              <p:cNvSpPr>
+                <a:spLocks noGrp="1"/>
+              </p:cNvSpPr>
+              <p:nvPr>
+                <p:ph idx="1"/>
+              </p:nvPr>
+            </p:nvSpPr>
+            <p:spPr/>
+            <p:txBody>
+              <a:bodyPr>
+                <a:normAutofit fontScale="70000" lnSpcReduction="20000"/>
+              </a:bodyPr>
+              <a:lstStyle/>
+              <a:p>
+                <a:pPr marL="514350" indent="-514350">
+                  <a:buFont typeface="+mj-lt"/>
+                  <a:buAutoNum type="arabicPeriod"/>
+                </a:pPr>
+                <a:r>
+                  <a:rPr lang="de-DE" dirty="0"/>
+                  <a:t>Pick an </a:t>
+                </a:r>
+                <a:r>
+                  <a:rPr lang="de-DE" dirty="0" err="1"/>
+                  <a:t>unvisited</a:t>
+                </a:r>
+                <a:r>
+                  <a:rPr lang="de-DE" dirty="0"/>
+                  <a:t> </a:t>
+                </a:r>
+                <a:r>
+                  <a:rPr lang="de-DE" dirty="0" err="1"/>
+                  <a:t>point</a:t>
+                </a:r>
+                <a:r>
+                  <a:rPr lang="de-DE" dirty="0"/>
+                  <a:t> </a:t>
+                </a:r>
+                <a:r>
+                  <a:rPr lang="de-DE" i="1" dirty="0">
+                    <a:latin typeface="Cambria Math" panose="02040503050406030204" pitchFamily="18" charset="0"/>
+                    <a:ea typeface="Cambria Math" panose="02040503050406030204" pitchFamily="18" charset="0"/>
+                  </a:rPr>
+                  <a:t>P</a:t>
+                </a:r>
+                <a:r>
+                  <a:rPr lang="de-DE" dirty="0"/>
+                  <a:t> and </a:t>
+                </a:r>
+                <a:r>
+                  <a:rPr lang="de-DE" dirty="0" err="1"/>
+                  <a:t>mark</a:t>
+                </a:r>
+                <a:r>
+                  <a:rPr lang="de-DE" dirty="0"/>
+                  <a:t> </a:t>
+                </a:r>
+                <a:r>
+                  <a:rPr lang="de-DE" dirty="0" err="1"/>
+                  <a:t>it</a:t>
+                </a:r>
+                <a:r>
+                  <a:rPr lang="de-DE" dirty="0"/>
+                  <a:t> </a:t>
+                </a:r>
+                <a:r>
+                  <a:rPr lang="de-DE" dirty="0" err="1"/>
+                  <a:t>as</a:t>
+                </a:r>
+                <a:r>
+                  <a:rPr lang="de-DE" dirty="0"/>
+                  <a:t> </a:t>
+                </a:r>
+                <a:r>
+                  <a:rPr lang="de-DE" dirty="0" err="1"/>
+                  <a:t>visited</a:t>
+                </a:r>
+                <a:endParaRPr lang="de-DE" dirty="0"/>
+              </a:p>
+              <a:p>
+                <a:pPr marL="514350" indent="-514350">
+                  <a:buFont typeface="+mj-lt"/>
+                  <a:buAutoNum type="arabicPeriod"/>
+                </a:pPr>
+                <a:r>
+                  <a:rPr lang="de-DE" dirty="0" err="1"/>
+                  <a:t>Retrieve</a:t>
+                </a:r>
+                <a:r>
+                  <a:rPr lang="de-DE" dirty="0"/>
+                  <a:t> </a:t>
+                </a:r>
+                <a:r>
+                  <a:rPr lang="de-DE" dirty="0" err="1"/>
+                  <a:t>its</a:t>
+                </a:r>
+                <a:r>
+                  <a:rPr lang="de-DE" dirty="0"/>
+                  <a:t> </a:t>
+                </a:r>
+                <a:r>
+                  <a:rPr lang="el-GR" dirty="0">
+                    <a:latin typeface="Cambria Math" panose="02040503050406030204" pitchFamily="18" charset="0"/>
+                    <a:ea typeface="Cambria Math" panose="02040503050406030204" pitchFamily="18" charset="0"/>
+                  </a:rPr>
+                  <a:t>ε</a:t>
+                </a:r>
+                <a:r>
+                  <a:rPr lang="el-GR" dirty="0"/>
+                  <a:t>-</a:t>
+                </a:r>
+                <a:r>
+                  <a:rPr lang="de-DE" dirty="0" err="1"/>
+                  <a:t>neighborhood</a:t>
+                </a:r>
+                <a:r>
+                  <a:rPr lang="de-DE" dirty="0"/>
+                  <a:t> </a:t>
+                </a:r>
+                <a14:m>
+                  <m:oMath xmlns:m="http://schemas.openxmlformats.org/officeDocument/2006/math">
+                    <m:sSub>
+                      <m:sSubPr>
+                        <m:ctrlPr>
+                          <a:rPr lang="de-DE" i="1">
+                            <a:latin typeface="Cambria Math" panose="02040503050406030204" pitchFamily="18" charset="0"/>
+                          </a:rPr>
+                        </m:ctrlPr>
+                      </m:sSubPr>
+                      <m:e>
+                        <m:r>
+                          <a:rPr lang="de-DE" i="1">
+                            <a:latin typeface="Cambria Math" panose="02040503050406030204" pitchFamily="18" charset="0"/>
+                          </a:rPr>
+                          <m:t>𝑁</m:t>
+                        </m:r>
+                      </m:e>
+                      <m:sub>
+                        <m:r>
+                          <m:rPr>
+                            <m:nor/>
+                          </m:rPr>
+                          <a:rPr lang="el-GR" dirty="0">
+                            <a:latin typeface="Cambria Math" panose="02040503050406030204" pitchFamily="18" charset="0"/>
+                            <a:ea typeface="Cambria Math" panose="02040503050406030204" pitchFamily="18" charset="0"/>
+                          </a:rPr>
+                          <m:t>ε</m:t>
+                        </m:r>
+                      </m:sub>
+                    </m:sSub>
+                    <m:r>
+                      <a:rPr lang="de-DE" i="1">
+                        <a:latin typeface="Cambria Math" panose="02040503050406030204" pitchFamily="18" charset="0"/>
+                      </a:rPr>
+                      <m:t>(</m:t>
+                    </m:r>
+                    <m:r>
+                      <a:rPr lang="de-DE" i="1">
+                        <a:latin typeface="Cambria Math" panose="02040503050406030204" pitchFamily="18" charset="0"/>
+                      </a:rPr>
+                      <m:t>𝑃</m:t>
+                    </m:r>
+                    <m:r>
+                      <a:rPr lang="de-DE" i="1">
+                        <a:latin typeface="Cambria Math" panose="02040503050406030204" pitchFamily="18" charset="0"/>
+                      </a:rPr>
+                      <m:t>)</m:t>
+                    </m:r>
+                  </m:oMath>
+                </a14:m>
+                <a:endParaRPr lang="de-DE" dirty="0"/>
+              </a:p>
+              <a:p>
+                <a:pPr marL="514350" indent="-514350">
+                  <a:buFont typeface="+mj-lt"/>
+                  <a:buAutoNum type="arabicPeriod"/>
+                </a:pPr>
+                <a:r>
+                  <a:rPr lang="de-DE" dirty="0" err="1"/>
+                  <a:t>If</a:t>
+                </a:r>
+                <a:r>
+                  <a:rPr lang="de-DE" dirty="0"/>
+                  <a:t> </a:t>
+                </a:r>
+                <a:r>
+                  <a:rPr lang="de-DE" i="1" dirty="0">
+                    <a:latin typeface="Cambria Math" panose="02040503050406030204" pitchFamily="18" charset="0"/>
+                    <a:ea typeface="Cambria Math" panose="02040503050406030204" pitchFamily="18" charset="0"/>
+                  </a:rPr>
+                  <a:t>P </a:t>
+                </a:r>
+                <a:r>
+                  <a:rPr lang="de-DE" dirty="0"/>
+                  <a:t> </a:t>
+                </a:r>
+                <a:r>
+                  <a:rPr lang="de-DE" dirty="0" err="1"/>
+                  <a:t>is</a:t>
+                </a:r>
+                <a:r>
+                  <a:rPr lang="de-DE" dirty="0"/>
+                  <a:t> a </a:t>
+                </a:r>
+                <a:r>
+                  <a:rPr lang="de-DE" dirty="0" err="1"/>
+                  <a:t>core</a:t>
+                </a:r>
+                <a:r>
+                  <a:rPr lang="de-DE" dirty="0"/>
+                  <a:t> </a:t>
+                </a:r>
+                <a:r>
+                  <a:rPr lang="de-DE" dirty="0" err="1"/>
+                  <a:t>point</a:t>
+                </a:r>
+                <a:r>
+                  <a:rPr lang="de-DE" dirty="0"/>
+                  <a:t>:</a:t>
+                </a:r>
+              </a:p>
+              <a:p>
+                <a:pPr lvl="1"/>
+                <a:r>
+                  <a:rPr lang="de-DE" dirty="0"/>
+                  <a:t>Create a </a:t>
+                </a:r>
+                <a:r>
+                  <a:rPr lang="de-DE" dirty="0" err="1"/>
+                  <a:t>new</a:t>
+                </a:r>
+                <a:r>
+                  <a:rPr lang="de-DE" dirty="0"/>
+                  <a:t> </a:t>
+                </a:r>
+                <a:r>
+                  <a:rPr lang="de-DE" dirty="0" err="1"/>
+                  <a:t>cluster</a:t>
+                </a:r>
+                <a:r>
+                  <a:rPr lang="de-DE" dirty="0"/>
+                  <a:t> and </a:t>
+                </a:r>
+                <a:r>
+                  <a:rPr lang="de-DE" dirty="0" err="1"/>
+                  <a:t>add</a:t>
+                </a:r>
+                <a:r>
+                  <a:rPr lang="de-DE" dirty="0"/>
+                  <a:t> </a:t>
+                </a:r>
+                <a:r>
+                  <a:rPr lang="de-DE" i="1" dirty="0">
+                    <a:latin typeface="Cambria Math" panose="02040503050406030204" pitchFamily="18" charset="0"/>
+                    <a:ea typeface="Cambria Math" panose="02040503050406030204" pitchFamily="18" charset="0"/>
+                  </a:rPr>
+                  <a:t>P</a:t>
+                </a:r>
+                <a:r>
+                  <a:rPr lang="de-DE" dirty="0"/>
+                  <a:t> and all </a:t>
+                </a:r>
+                <a:r>
+                  <a:rPr lang="de-DE" dirty="0" err="1"/>
+                  <a:t>points</a:t>
+                </a:r>
+                <a:r>
+                  <a:rPr lang="de-DE" dirty="0"/>
+                  <a:t> in </a:t>
+                </a:r>
+                <a14:m>
+                  <m:oMath xmlns:m="http://schemas.openxmlformats.org/officeDocument/2006/math">
+                    <m:sSub>
+                      <m:sSubPr>
+                        <m:ctrlPr>
+                          <a:rPr lang="de-DE" i="1">
+                            <a:latin typeface="Cambria Math" panose="02040503050406030204" pitchFamily="18" charset="0"/>
+                          </a:rPr>
+                        </m:ctrlPr>
+                      </m:sSubPr>
+                      <m:e>
+                        <m:r>
+                          <a:rPr lang="de-DE" i="1">
+                            <a:latin typeface="Cambria Math" panose="02040503050406030204" pitchFamily="18" charset="0"/>
+                          </a:rPr>
+                          <m:t>𝑁</m:t>
+                        </m:r>
+                      </m:e>
+                      <m:sub>
+                        <m:r>
+                          <m:rPr>
+                            <m:nor/>
+                          </m:rPr>
+                          <a:rPr lang="el-GR" dirty="0">
+                            <a:latin typeface="Cambria Math" panose="02040503050406030204" pitchFamily="18" charset="0"/>
+                            <a:ea typeface="Cambria Math" panose="02040503050406030204" pitchFamily="18" charset="0"/>
+                          </a:rPr>
+                          <m:t>ε</m:t>
+                        </m:r>
+                      </m:sub>
+                    </m:sSub>
+                    <m:r>
+                      <a:rPr lang="de-DE" i="1">
+                        <a:latin typeface="Cambria Math" panose="02040503050406030204" pitchFamily="18" charset="0"/>
+                      </a:rPr>
+                      <m:t>(</m:t>
+                    </m:r>
+                    <m:r>
+                      <a:rPr lang="de-DE" i="1">
+                        <a:latin typeface="Cambria Math" panose="02040503050406030204" pitchFamily="18" charset="0"/>
+                      </a:rPr>
+                      <m:t>𝑃</m:t>
+                    </m:r>
+                    <m:r>
+                      <a:rPr lang="de-DE" i="1" smtClean="0">
+                        <a:latin typeface="Cambria Math" panose="02040503050406030204" pitchFamily="18" charset="0"/>
+                      </a:rPr>
+                      <m:t>)</m:t>
+                    </m:r>
+                  </m:oMath>
+                </a14:m>
+                <a:r>
+                  <a:rPr lang="de-DE" dirty="0"/>
+                  <a:t> </a:t>
+                </a:r>
+                <a:r>
+                  <a:rPr lang="de-DE" dirty="0" err="1"/>
+                  <a:t>to</a:t>
+                </a:r>
+                <a:r>
+                  <a:rPr lang="de-DE" dirty="0"/>
+                  <a:t> </a:t>
+                </a:r>
+                <a:r>
+                  <a:rPr lang="de-DE" dirty="0" err="1"/>
+                  <a:t>it</a:t>
+                </a:r>
+                <a:r>
+                  <a:rPr lang="de-DE" dirty="0"/>
+                  <a:t> (</a:t>
+                </a:r>
+                <a:r>
+                  <a:rPr lang="de-DE" dirty="0" err="1"/>
+                  <a:t>that</a:t>
+                </a:r>
+                <a:r>
+                  <a:rPr lang="de-DE" dirty="0"/>
+                  <a:t> </a:t>
+                </a:r>
+                <a:r>
+                  <a:rPr lang="de-DE" dirty="0" err="1"/>
+                  <a:t>are</a:t>
+                </a:r>
+                <a:r>
+                  <a:rPr lang="de-DE" dirty="0"/>
+                  <a:t> not </a:t>
+                </a:r>
+                <a:r>
+                  <a:rPr lang="de-DE" dirty="0" err="1"/>
+                  <a:t>yet</a:t>
+                </a:r>
+                <a:r>
+                  <a:rPr lang="de-DE" dirty="0"/>
+                  <a:t> </a:t>
+                </a:r>
+                <a:r>
+                  <a:rPr lang="de-DE" dirty="0" err="1"/>
+                  <a:t>assigned</a:t>
+                </a:r>
+                <a:r>
+                  <a:rPr lang="de-DE" dirty="0"/>
+                  <a:t> </a:t>
+                </a:r>
+                <a:r>
+                  <a:rPr lang="de-DE" dirty="0" err="1"/>
+                  <a:t>to</a:t>
+                </a:r>
+                <a:r>
+                  <a:rPr lang="de-DE" dirty="0"/>
+                  <a:t> </a:t>
+                </a:r>
+                <a:r>
+                  <a:rPr lang="de-DE" dirty="0" err="1"/>
+                  <a:t>any</a:t>
+                </a:r>
+                <a:r>
+                  <a:rPr lang="de-DE" dirty="0"/>
+                  <a:t> </a:t>
+                </a:r>
+                <a:r>
+                  <a:rPr lang="de-DE" dirty="0" err="1"/>
+                  <a:t>cluster</a:t>
+                </a:r>
+                <a:r>
+                  <a:rPr lang="de-DE" dirty="0"/>
+                  <a:t>)</a:t>
+                </a:r>
+              </a:p>
+              <a:p>
+                <a:pPr lvl="1"/>
+                <a:r>
+                  <a:rPr lang="de-DE" dirty="0" err="1"/>
+                  <a:t>For</a:t>
+                </a:r>
+                <a:r>
+                  <a:rPr lang="de-DE" dirty="0"/>
+                  <a:t> </a:t>
+                </a:r>
+                <a:r>
+                  <a:rPr lang="de-DE" dirty="0" err="1"/>
+                  <a:t>each</a:t>
+                </a:r>
+                <a:r>
+                  <a:rPr lang="de-DE" dirty="0"/>
+                  <a:t> </a:t>
+                </a:r>
+                <a:r>
+                  <a:rPr lang="de-DE" dirty="0" err="1"/>
+                  <a:t>point</a:t>
+                </a:r>
+                <a:r>
+                  <a:rPr lang="de-DE" dirty="0"/>
+                  <a:t> </a:t>
+                </a:r>
+                <a:r>
+                  <a:rPr lang="de-DE" i="1" dirty="0">
+                    <a:latin typeface="Cambria Math" panose="02040503050406030204" pitchFamily="18" charset="0"/>
+                    <a:ea typeface="Cambria Math" panose="02040503050406030204" pitchFamily="18" charset="0"/>
+                  </a:rPr>
+                  <a:t>Q</a:t>
+                </a:r>
+                <a:r>
+                  <a:rPr lang="de-DE" dirty="0"/>
+                  <a:t> in </a:t>
+                </a:r>
+                <a14:m>
+                  <m:oMath xmlns:m="http://schemas.openxmlformats.org/officeDocument/2006/math">
+                    <m:sSub>
+                      <m:sSubPr>
+                        <m:ctrlPr>
+                          <a:rPr lang="de-DE" i="1" smtClean="0">
+                            <a:latin typeface="Cambria Math" panose="02040503050406030204" pitchFamily="18" charset="0"/>
+                          </a:rPr>
+                        </m:ctrlPr>
+                      </m:sSubPr>
+                      <m:e>
+                        <m:r>
+                          <a:rPr lang="de-DE" b="0" i="1" smtClean="0">
+                            <a:latin typeface="Cambria Math" panose="02040503050406030204" pitchFamily="18" charset="0"/>
+                          </a:rPr>
+                          <m:t>𝑁</m:t>
+                        </m:r>
+                      </m:e>
+                      <m:sub>
+                        <m:r>
+                          <m:rPr>
+                            <m:nor/>
+                          </m:rPr>
+                          <a:rPr lang="el-GR" dirty="0">
+                            <a:latin typeface="Cambria Math" panose="02040503050406030204" pitchFamily="18" charset="0"/>
+                            <a:ea typeface="Cambria Math" panose="02040503050406030204" pitchFamily="18" charset="0"/>
+                          </a:rPr>
+                          <m:t>ε</m:t>
+                        </m:r>
+                      </m:sub>
+                    </m:sSub>
+                    <m:r>
+                      <a:rPr lang="de-DE" b="0" i="1" smtClean="0">
+                        <a:latin typeface="Cambria Math" panose="02040503050406030204" pitchFamily="18" charset="0"/>
+                      </a:rPr>
+                      <m:t>(</m:t>
+                    </m:r>
+                    <m:r>
+                      <a:rPr lang="de-DE" b="0" i="1" smtClean="0">
+                        <a:latin typeface="Cambria Math" panose="02040503050406030204" pitchFamily="18" charset="0"/>
+                      </a:rPr>
+                      <m:t>𝑃</m:t>
+                    </m:r>
+                    <m:r>
+                      <a:rPr lang="de-DE" b="0" i="1" smtClean="0">
+                        <a:latin typeface="Cambria Math" panose="02040503050406030204" pitchFamily="18" charset="0"/>
+                      </a:rPr>
+                      <m:t>)</m:t>
+                    </m:r>
+                  </m:oMath>
+                </a14:m>
+                <a:r>
+                  <a:rPr lang="de-DE" dirty="0"/>
+                  <a:t>:</a:t>
+                </a:r>
+              </a:p>
+              <a:p>
+                <a:pPr lvl="2"/>
+                <a:r>
+                  <a:rPr lang="de-DE" dirty="0"/>
+                  <a:t>Mark </a:t>
+                </a:r>
+                <a:r>
+                  <a:rPr lang="de-DE" dirty="0" err="1"/>
+                  <a:t>as</a:t>
+                </a:r>
+                <a:r>
+                  <a:rPr lang="de-DE" dirty="0"/>
+                  <a:t> </a:t>
+                </a:r>
+                <a:r>
+                  <a:rPr lang="de-DE" dirty="0" err="1"/>
+                  <a:t>visited</a:t>
+                </a:r>
+                <a:r>
+                  <a:rPr lang="de-DE" dirty="0"/>
+                  <a:t> (</a:t>
+                </a:r>
+                <a:r>
+                  <a:rPr lang="de-DE" dirty="0" err="1"/>
+                  <a:t>if</a:t>
+                </a:r>
+                <a:r>
+                  <a:rPr lang="de-DE" dirty="0"/>
+                  <a:t> </a:t>
+                </a:r>
+                <a:r>
+                  <a:rPr lang="de-DE" dirty="0" err="1"/>
+                  <a:t>unvisited</a:t>
+                </a:r>
+                <a:r>
+                  <a:rPr lang="de-DE" dirty="0"/>
+                  <a:t>) and </a:t>
+                </a:r>
+                <a:r>
+                  <a:rPr lang="de-DE" dirty="0" err="1"/>
+                  <a:t>retrieve</a:t>
+                </a:r>
+                <a:r>
+                  <a:rPr lang="de-DE" dirty="0"/>
+                  <a:t> </a:t>
+                </a:r>
+                <a14:m>
+                  <m:oMath xmlns:m="http://schemas.openxmlformats.org/officeDocument/2006/math">
+                    <m:sSub>
+                      <m:sSubPr>
+                        <m:ctrlPr>
+                          <a:rPr lang="de-DE" i="1">
+                            <a:latin typeface="Cambria Math" panose="02040503050406030204" pitchFamily="18" charset="0"/>
+                          </a:rPr>
+                        </m:ctrlPr>
+                      </m:sSubPr>
+                      <m:e>
+                        <m:r>
+                          <a:rPr lang="de-DE" i="1">
+                            <a:latin typeface="Cambria Math" panose="02040503050406030204" pitchFamily="18" charset="0"/>
+                          </a:rPr>
+                          <m:t>𝑁</m:t>
+                        </m:r>
+                      </m:e>
+                      <m:sub>
+                        <m:r>
+                          <m:rPr>
+                            <m:nor/>
+                          </m:rPr>
+                          <a:rPr lang="el-GR" dirty="0">
+                            <a:latin typeface="Cambria Math" panose="02040503050406030204" pitchFamily="18" charset="0"/>
+                            <a:ea typeface="Cambria Math" panose="02040503050406030204" pitchFamily="18" charset="0"/>
+                          </a:rPr>
+                          <m:t>ε</m:t>
+                        </m:r>
+                      </m:sub>
+                    </m:sSub>
+                    <m:r>
+                      <a:rPr lang="de-DE" i="1">
+                        <a:latin typeface="Cambria Math" panose="02040503050406030204" pitchFamily="18" charset="0"/>
+                      </a:rPr>
+                      <m:t>(</m:t>
+                    </m:r>
+                    <m:r>
+                      <a:rPr lang="de-DE" b="0" i="1" smtClean="0">
+                        <a:latin typeface="Cambria Math" panose="02040503050406030204" pitchFamily="18" charset="0"/>
+                      </a:rPr>
+                      <m:t>𝑄</m:t>
+                    </m:r>
+                    <m:r>
+                      <a:rPr lang="de-DE" i="1">
+                        <a:latin typeface="Cambria Math" panose="02040503050406030204" pitchFamily="18" charset="0"/>
+                      </a:rPr>
+                      <m:t>)</m:t>
+                    </m:r>
+                  </m:oMath>
+                </a14:m>
+                <a:endParaRPr lang="de-DE" dirty="0"/>
+              </a:p>
+              <a:p>
+                <a:pPr lvl="2"/>
+                <a:r>
+                  <a:rPr lang="de-DE" dirty="0" err="1"/>
+                  <a:t>If</a:t>
+                </a:r>
+                <a:r>
+                  <a:rPr lang="de-DE" dirty="0"/>
+                  <a:t> </a:t>
+                </a:r>
+                <a:r>
+                  <a:rPr lang="de-DE" i="1" dirty="0">
+                    <a:latin typeface="Cambria Math" panose="02040503050406030204" pitchFamily="18" charset="0"/>
+                    <a:ea typeface="Cambria Math" panose="02040503050406030204" pitchFamily="18" charset="0"/>
+                  </a:rPr>
+                  <a:t>Q</a:t>
+                </a:r>
+                <a:r>
+                  <a:rPr lang="de-DE" dirty="0"/>
+                  <a:t> </a:t>
+                </a:r>
+                <a:r>
+                  <a:rPr lang="de-DE" dirty="0" err="1"/>
+                  <a:t>is</a:t>
+                </a:r>
+                <a:r>
+                  <a:rPr lang="de-DE" dirty="0"/>
+                  <a:t> a </a:t>
+                </a:r>
+                <a:r>
+                  <a:rPr lang="de-DE" dirty="0" err="1"/>
+                  <a:t>core</a:t>
+                </a:r>
+                <a:r>
+                  <a:rPr lang="de-DE" dirty="0"/>
+                  <a:t> </a:t>
+                </a:r>
+                <a:r>
+                  <a:rPr lang="de-DE" dirty="0" err="1"/>
+                  <a:t>core</a:t>
+                </a:r>
+                <a:r>
+                  <a:rPr lang="de-DE" dirty="0"/>
+                  <a:t> </a:t>
+                </a:r>
+                <a:r>
+                  <a:rPr lang="de-DE" dirty="0" err="1"/>
+                  <a:t>point</a:t>
+                </a:r>
+                <a:r>
+                  <a:rPr lang="de-DE" dirty="0"/>
+                  <a:t>: </a:t>
+                </a:r>
+                <a:r>
+                  <a:rPr lang="de-DE" dirty="0" err="1"/>
+                  <a:t>iteratively</a:t>
+                </a:r>
+                <a:r>
+                  <a:rPr lang="de-DE" dirty="0"/>
+                  <a:t> </a:t>
+                </a:r>
+                <a:r>
+                  <a:rPr lang="de-DE" dirty="0" err="1"/>
+                  <a:t>expand</a:t>
+                </a:r>
+                <a:r>
+                  <a:rPr lang="de-DE" dirty="0"/>
+                  <a:t> </a:t>
+                </a:r>
+                <a:r>
+                  <a:rPr lang="de-DE" dirty="0" err="1"/>
+                  <a:t>the</a:t>
+                </a:r>
+                <a:r>
+                  <a:rPr lang="de-DE" dirty="0"/>
+                  <a:t> </a:t>
+                </a:r>
+                <a:r>
+                  <a:rPr lang="de-DE" dirty="0" err="1"/>
+                  <a:t>cluster</a:t>
+                </a:r>
+                <a:r>
+                  <a:rPr lang="de-DE" dirty="0"/>
+                  <a:t> (</a:t>
+                </a:r>
+                <a:r>
+                  <a:rPr lang="de-DE" dirty="0" err="1"/>
+                  <a:t>density-reachable</a:t>
+                </a:r>
+                <a:r>
+                  <a:rPr lang="de-DE" dirty="0"/>
+                  <a:t> </a:t>
+                </a:r>
+                <a:r>
+                  <a:rPr lang="de-DE" dirty="0" err="1"/>
+                  <a:t>points</a:t>
+                </a:r>
+                <a:r>
+                  <a:rPr lang="de-DE" dirty="0"/>
+                  <a:t>)</a:t>
+                </a:r>
+              </a:p>
+              <a:p>
+                <a:pPr marL="514350" indent="-514350">
+                  <a:buFont typeface="+mj-lt"/>
+                  <a:buAutoNum type="arabicPeriod"/>
+                </a:pPr>
+                <a:r>
+                  <a:rPr lang="de-DE" dirty="0"/>
+                  <a:t>Else: </a:t>
+                </a:r>
+                <a:r>
+                  <a:rPr lang="de-DE" dirty="0" err="1"/>
+                  <a:t>mark</a:t>
+                </a:r>
+                <a:r>
+                  <a:rPr lang="de-DE" dirty="0"/>
+                  <a:t> </a:t>
+                </a:r>
+                <a:r>
+                  <a:rPr lang="de-DE" i="1" dirty="0">
+                    <a:latin typeface="Cambria Math" panose="02040503050406030204" pitchFamily="18" charset="0"/>
+                    <a:ea typeface="Cambria Math" panose="02040503050406030204" pitchFamily="18" charset="0"/>
+                  </a:rPr>
+                  <a:t>P </a:t>
+                </a:r>
+                <a:r>
+                  <a:rPr lang="de-DE" dirty="0"/>
+                  <a:t> </a:t>
+                </a:r>
+                <a:r>
+                  <a:rPr lang="de-DE" dirty="0" err="1"/>
+                  <a:t>as</a:t>
+                </a:r>
+                <a:r>
+                  <a:rPr lang="de-DE" dirty="0"/>
+                  <a:t> </a:t>
+                </a:r>
+                <a:r>
+                  <a:rPr lang="de-DE" dirty="0" err="1"/>
+                  <a:t>noise</a:t>
+                </a:r>
+                <a:r>
+                  <a:rPr lang="de-DE" dirty="0"/>
+                  <a:t> (</a:t>
+                </a:r>
+                <a:r>
+                  <a:rPr lang="de-DE" dirty="0" err="1"/>
+                  <a:t>temporary</a:t>
+                </a:r>
+                <a:r>
+                  <a:rPr lang="de-DE" dirty="0"/>
+                  <a:t>, </a:t>
+                </a:r>
+                <a:r>
+                  <a:rPr lang="de-DE" dirty="0" err="1"/>
+                  <a:t>may</a:t>
+                </a:r>
+                <a:r>
+                  <a:rPr lang="de-DE" dirty="0"/>
+                  <a:t> </a:t>
+                </a:r>
+                <a:r>
+                  <a:rPr lang="de-DE" dirty="0" err="1"/>
+                  <a:t>later</a:t>
+                </a:r>
+                <a:r>
+                  <a:rPr lang="de-DE" dirty="0"/>
+                  <a:t> </a:t>
+                </a:r>
+                <a:r>
+                  <a:rPr lang="de-DE" dirty="0" err="1"/>
+                  <a:t>become</a:t>
+                </a:r>
+                <a:r>
+                  <a:rPr lang="de-DE" dirty="0"/>
+                  <a:t> a </a:t>
+                </a:r>
+                <a:r>
+                  <a:rPr lang="de-DE" dirty="0" err="1"/>
+                  <a:t>border</a:t>
+                </a:r>
+                <a:r>
+                  <a:rPr lang="de-DE" dirty="0"/>
+                  <a:t> </a:t>
+                </a:r>
+                <a:r>
+                  <a:rPr lang="de-DE" dirty="0" err="1"/>
+                  <a:t>point</a:t>
+                </a:r>
+                <a:r>
+                  <a:rPr lang="de-DE" dirty="0"/>
+                  <a:t>)</a:t>
+                </a:r>
+              </a:p>
+              <a:p>
+                <a:pPr marL="514350" indent="-514350">
+                  <a:buFont typeface="+mj-lt"/>
+                  <a:buAutoNum type="arabicPeriod"/>
+                </a:pPr>
+                <a:r>
+                  <a:rPr lang="de-DE" dirty="0"/>
+                  <a:t>Repeat </a:t>
+                </a:r>
+                <a:r>
+                  <a:rPr lang="de-DE" dirty="0" err="1"/>
+                  <a:t>until</a:t>
+                </a:r>
+                <a:r>
+                  <a:rPr lang="de-DE" dirty="0"/>
+                  <a:t> all </a:t>
+                </a:r>
+                <a:r>
+                  <a:rPr lang="de-DE" dirty="0" err="1"/>
+                  <a:t>points</a:t>
+                </a:r>
+                <a:r>
+                  <a:rPr lang="de-DE" dirty="0"/>
+                  <a:t> </a:t>
+                </a:r>
+                <a:r>
+                  <a:rPr lang="de-DE" dirty="0" err="1"/>
+                  <a:t>are</a:t>
+                </a:r>
+                <a:r>
+                  <a:rPr lang="de-DE" dirty="0"/>
+                  <a:t> </a:t>
+                </a:r>
+                <a:r>
+                  <a:rPr lang="de-DE" dirty="0" err="1"/>
+                  <a:t>processed</a:t>
+                </a:r>
+                <a:endParaRPr lang="de-DE" dirty="0"/>
+              </a:p>
+              <a:p>
+                <a:pPr marL="0" indent="0">
+                  <a:buNone/>
+                </a:pPr>
+                <a:endParaRPr lang="de-DE" dirty="0"/>
+              </a:p>
+              <a:p>
+                <a:pPr marL="0" indent="0">
+                  <a:buNone/>
+                </a:pPr>
+                <a:r>
+                  <a:rPr lang="de-DE" dirty="0"/>
+                  <a:t>Cluster </a:t>
+                </a:r>
+                <a:r>
+                  <a:rPr lang="de-DE" dirty="0" err="1"/>
+                  <a:t>formation</a:t>
+                </a:r>
+                <a:r>
+                  <a:rPr lang="de-DE" dirty="0"/>
+                  <a:t> </a:t>
+                </a:r>
+                <a:r>
+                  <a:rPr lang="de-DE" dirty="0" err="1"/>
+                  <a:t>concept</a:t>
+                </a:r>
+                <a:r>
+                  <a:rPr lang="de-DE" dirty="0"/>
+                  <a:t>:</a:t>
+                </a:r>
+              </a:p>
+              <a:p>
+                <a:r>
+                  <a:rPr lang="de-DE" dirty="0"/>
+                  <a:t>Points </a:t>
+                </a:r>
+                <a:r>
+                  <a:rPr lang="de-DE" dirty="0" err="1"/>
+                  <a:t>are</a:t>
+                </a:r>
+                <a:r>
+                  <a:rPr lang="de-DE" dirty="0"/>
+                  <a:t> </a:t>
+                </a:r>
+                <a:r>
+                  <a:rPr lang="de-DE" dirty="0" err="1"/>
+                  <a:t>density-connected</a:t>
+                </a:r>
+                <a:r>
+                  <a:rPr lang="de-DE" dirty="0"/>
+                  <a:t> </a:t>
+                </a:r>
+                <a:r>
+                  <a:rPr lang="de-DE" dirty="0" err="1"/>
+                  <a:t>if</a:t>
+                </a:r>
+                <a:r>
+                  <a:rPr lang="de-DE" dirty="0"/>
+                  <a:t> </a:t>
+                </a:r>
+                <a:r>
+                  <a:rPr lang="de-DE" dirty="0" err="1"/>
+                  <a:t>they</a:t>
+                </a:r>
+                <a:r>
+                  <a:rPr lang="de-DE" dirty="0"/>
+                  <a:t> </a:t>
+                </a:r>
+                <a:r>
+                  <a:rPr lang="de-DE" dirty="0" err="1"/>
+                  <a:t>can</a:t>
+                </a:r>
+                <a:r>
+                  <a:rPr lang="de-DE" dirty="0"/>
+                  <a:t> </a:t>
+                </a:r>
+                <a:r>
+                  <a:rPr lang="de-DE" dirty="0" err="1"/>
+                  <a:t>be</a:t>
+                </a:r>
+                <a:r>
+                  <a:rPr lang="de-DE" dirty="0"/>
+                  <a:t> </a:t>
+                </a:r>
+                <a:r>
+                  <a:rPr lang="de-DE" dirty="0" err="1"/>
+                  <a:t>reached</a:t>
+                </a:r>
+                <a:r>
+                  <a:rPr lang="de-DE" dirty="0"/>
+                  <a:t> via a </a:t>
+                </a:r>
+                <a:r>
+                  <a:rPr lang="de-DE" dirty="0" err="1"/>
+                  <a:t>chain</a:t>
+                </a:r>
+                <a:r>
+                  <a:rPr lang="de-DE" dirty="0"/>
+                  <a:t> </a:t>
+                </a:r>
+                <a:r>
+                  <a:rPr lang="de-DE" dirty="0" err="1"/>
+                  <a:t>of</a:t>
+                </a:r>
+                <a:r>
+                  <a:rPr lang="de-DE" dirty="0"/>
+                  <a:t> </a:t>
+                </a:r>
+                <a:r>
+                  <a:rPr lang="de-DE" dirty="0" err="1"/>
+                  <a:t>core</a:t>
+                </a:r>
+                <a:r>
+                  <a:rPr lang="de-DE" dirty="0"/>
+                  <a:t> </a:t>
+                </a:r>
+                <a:r>
+                  <a:rPr lang="de-DE" dirty="0" err="1"/>
+                  <a:t>points</a:t>
+                </a:r>
+                <a:endParaRPr lang="de-DE" dirty="0"/>
+              </a:p>
+              <a:p>
+                <a:r>
+                  <a:rPr lang="de-DE" dirty="0"/>
+                  <a:t>Clusters </a:t>
+                </a:r>
+                <a:r>
+                  <a:rPr lang="de-DE" dirty="0" err="1"/>
+                  <a:t>grow</a:t>
+                </a:r>
+                <a:r>
+                  <a:rPr lang="de-DE" dirty="0"/>
+                  <a:t> </a:t>
+                </a:r>
+                <a:r>
+                  <a:rPr lang="de-DE" dirty="0" err="1"/>
+                  <a:t>outward</a:t>
+                </a:r>
+                <a:r>
+                  <a:rPr lang="de-DE" dirty="0"/>
+                  <a:t> </a:t>
+                </a:r>
+                <a:r>
+                  <a:rPr lang="de-DE" dirty="0" err="1"/>
+                  <a:t>from</a:t>
+                </a:r>
+                <a:r>
+                  <a:rPr lang="de-DE" dirty="0"/>
+                  <a:t> </a:t>
+                </a:r>
+                <a:r>
+                  <a:rPr lang="de-DE" dirty="0" err="1"/>
+                  <a:t>core</a:t>
+                </a:r>
+                <a:r>
+                  <a:rPr lang="de-DE" dirty="0"/>
+                  <a:t> </a:t>
+                </a:r>
+                <a:r>
+                  <a:rPr lang="de-DE" dirty="0" err="1"/>
+                  <a:t>points</a:t>
+                </a:r>
+                <a:endParaRPr lang="de-DE" dirty="0"/>
+              </a:p>
+            </p:txBody>
+          </p:sp>
+        </mc:Choice>
+        <mc:Fallback xmlns="">
+          <p:sp>
+            <p:nvSpPr>
+              <p:cNvPr id="3" name="Inhaltsplatzhalter 2">
+                <a:extLst>
+                  <a:ext uri="{FF2B5EF4-FFF2-40B4-BE49-F238E27FC236}">
+                    <a16:creationId xmlns:a16="http://schemas.microsoft.com/office/drawing/2014/main" id="{48293539-B5EA-4406-02DD-1F9D36FDC673}"/>
+                  </a:ext>
+                </a:extLst>
+              </p:cNvPr>
+              <p:cNvSpPr>
+                <a:spLocks noGrp="1" noRot="1" noChangeAspect="1" noMove="1" noResize="1" noEditPoints="1" noAdjustHandles="1" noChangeArrowheads="1" noChangeShapeType="1" noTextEdit="1"/>
+              </p:cNvSpPr>
+              <p:nvPr>
+                <p:ph idx="1"/>
+              </p:nvPr>
+            </p:nvSpPr>
+            <p:spPr>
+              <a:blipFill>
+                <a:blip r:embed="rId2"/>
+                <a:stretch>
+                  <a:fillRect l="-724" t="-2616"/>
+                </a:stretch>
+              </a:blipFill>
+            </p:spPr>
+            <p:txBody>
+              <a:bodyPr/>
+              <a:lstStyle/>
+              <a:p>
+                <a:r>
+                  <a:rPr lang="de-DE">
+                    <a:noFill/>
+                  </a:rPr>
+                  <a:t> </a:t>
+                </a:r>
+              </a:p>
+            </p:txBody>
+          </p:sp>
+        </mc:Fallback>
+      </mc:AlternateContent>
+      <p:sp>
+        <p:nvSpPr>
+          <p:cNvPr id="4" name="Foliennummernplatzhalter 3">
+            <a:extLst>
+              <a:ext uri="{FF2B5EF4-FFF2-40B4-BE49-F238E27FC236}">
+                <a16:creationId xmlns:a16="http://schemas.microsoft.com/office/drawing/2014/main" id="{D4A6B421-D07D-5E41-B951-5DE4AE10DC48}"/>
+              </a:ext>
+            </a:extLst>
+          </p:cNvPr>
+          <p:cNvSpPr>
+            <a:spLocks noGrp="1"/>
+          </p:cNvSpPr>
+          <p:nvPr>
+            <p:ph type="sldNum" sz="quarter" idx="12"/>
+          </p:nvPr>
+        </p:nvSpPr>
+        <p:spPr/>
+        <p:txBody>
+          <a:bodyPr/>
+          <a:lstStyle/>
+          <a:p>
+            <a:fld id="{08C366F5-AFAD-49CB-854A-9D9E238FCA13}" type="slidenum">
+              <a:rPr lang="en-GB" smtClean="0"/>
+              <a:t>31</a:t>
+            </a:fld>
+            <a:endParaRPr lang="en-GB"/>
+          </a:p>
+        </p:txBody>
+      </p:sp>
+    </p:spTree>
+    <p:extLst>
+      <p:ext uri="{BB962C8B-B14F-4D97-AF65-F5344CB8AC3E}">
+        <p14:creationId xmlns:p14="http://schemas.microsoft.com/office/powerpoint/2010/main" val="345989988"/>
+      </p:ext>
+    </p:extLst>
+  </p:cSld>
+  <p:clrMapOvr>
+    <a:masterClrMapping/>
+  </p:clrMapOvr>
+</p:sld>
+</file>
+
+<file path=ppt/slides/slide32.xml><?xml version="1.0" encoding="utf-8"?>
+<p:sld xmlns:a="http://schemas.openxmlformats.org/drawingml/2006/main" xmlns:r="http://schemas.openxmlformats.org/officeDocument/2006/relationships" xmlns:p="http://schemas.openxmlformats.org/presentationml/2006/main">
+  <p:cSld>
+    <p:spTree>
+      <p:nvGrpSpPr>
+        <p:cNvPr id="1" name=""/>
+        <p:cNvGrpSpPr/>
+        <p:nvPr/>
+      </p:nvGrpSpPr>
+      <p:grpSpPr>
+        <a:xfrm>
+          <a:off x="0" y="0"/>
+          <a:ext cx="0" cy="0"/>
+          <a:chOff x="0" y="0"/>
+          <a:chExt cx="0" cy="0"/>
+        </a:xfrm>
+      </p:grpSpPr>
+      <p:sp>
+        <p:nvSpPr>
+          <p:cNvPr id="2" name="Titel 1">
+            <a:extLst>
+              <a:ext uri="{FF2B5EF4-FFF2-40B4-BE49-F238E27FC236}">
+                <a16:creationId xmlns:a16="http://schemas.microsoft.com/office/drawing/2014/main" id="{9AD358E7-F39E-EF65-C4C0-6907CB00234F}"/>
+              </a:ext>
+            </a:extLst>
+          </p:cNvPr>
+          <p:cNvSpPr>
+            <a:spLocks noGrp="1"/>
+          </p:cNvSpPr>
+          <p:nvPr>
+            <p:ph type="title"/>
+          </p:nvPr>
+        </p:nvSpPr>
+        <p:spPr/>
+        <p:txBody>
+          <a:bodyPr/>
+          <a:lstStyle/>
+          <a:p>
+            <a:r>
+              <a:rPr lang="de-DE" dirty="0" err="1"/>
+              <a:t>Choosing</a:t>
+            </a:r>
+            <a:r>
+              <a:rPr lang="de-DE" dirty="0"/>
+              <a:t> </a:t>
+            </a:r>
+            <a:r>
+              <a:rPr lang="el-GR" dirty="0">
+                <a:latin typeface="Cambria Math" panose="02040503050406030204" pitchFamily="18" charset="0"/>
+                <a:ea typeface="Cambria Math" panose="02040503050406030204" pitchFamily="18" charset="0"/>
+              </a:rPr>
+              <a:t>ε</a:t>
+            </a:r>
+            <a:r>
+              <a:rPr lang="el-GR" dirty="0"/>
+              <a:t> </a:t>
+            </a:r>
+            <a:r>
+              <a:rPr lang="de-DE" dirty="0"/>
+              <a:t>and </a:t>
+            </a:r>
+            <a:r>
+              <a:rPr lang="de-DE" dirty="0" err="1">
+                <a:latin typeface="Cambria Math" panose="02040503050406030204" pitchFamily="18" charset="0"/>
+                <a:ea typeface="Cambria Math" panose="02040503050406030204" pitchFamily="18" charset="0"/>
+              </a:rPr>
+              <a:t>min_samples</a:t>
+            </a:r>
+            <a:endParaRPr lang="de-DE" dirty="0">
+              <a:latin typeface="Cambria Math" panose="02040503050406030204" pitchFamily="18" charset="0"/>
+              <a:ea typeface="Cambria Math" panose="02040503050406030204" pitchFamily="18" charset="0"/>
+            </a:endParaRPr>
+          </a:p>
+        </p:txBody>
+      </p:sp>
+      <p:sp>
+        <p:nvSpPr>
+          <p:cNvPr id="4" name="Inhaltsplatzhalter 3">
+            <a:extLst>
+              <a:ext uri="{FF2B5EF4-FFF2-40B4-BE49-F238E27FC236}">
+                <a16:creationId xmlns:a16="http://schemas.microsoft.com/office/drawing/2014/main" id="{E4AF28DA-AC95-17F4-756E-FF4AE1F224EA}"/>
+              </a:ext>
+            </a:extLst>
+          </p:cNvPr>
+          <p:cNvSpPr>
+            <a:spLocks noGrp="1"/>
+          </p:cNvSpPr>
+          <p:nvPr>
+            <p:ph idx="1"/>
+          </p:nvPr>
+        </p:nvSpPr>
+        <p:spPr/>
+        <p:txBody>
+          <a:bodyPr>
+            <a:normAutofit fontScale="85000" lnSpcReduction="20000"/>
+          </a:bodyPr>
+          <a:lstStyle/>
+          <a:p>
+            <a:pPr marL="0" indent="0">
+              <a:buNone/>
+            </a:pPr>
+            <a:r>
+              <a:rPr lang="de-DE" dirty="0" err="1"/>
+              <a:t>Choosing</a:t>
+            </a:r>
+            <a:r>
+              <a:rPr lang="de-DE" dirty="0"/>
+              <a:t> </a:t>
+            </a:r>
+            <a:r>
+              <a:rPr lang="el-GR" dirty="0">
+                <a:latin typeface="Cambria Math" panose="02040503050406030204" pitchFamily="18" charset="0"/>
+                <a:ea typeface="Cambria Math" panose="02040503050406030204" pitchFamily="18" charset="0"/>
+              </a:rPr>
+              <a:t>ε</a:t>
+            </a:r>
+            <a:r>
+              <a:rPr lang="el-GR" dirty="0"/>
+              <a:t> (</a:t>
+            </a:r>
+            <a:r>
+              <a:rPr lang="de-DE" dirty="0" err="1"/>
+              <a:t>neighborhood</a:t>
+            </a:r>
+            <a:r>
+              <a:rPr lang="de-DE" dirty="0"/>
+              <a:t> </a:t>
+            </a:r>
+            <a:r>
+              <a:rPr lang="de-DE" dirty="0" err="1"/>
+              <a:t>radius</a:t>
+            </a:r>
+            <a:r>
+              <a:rPr lang="de-DE" dirty="0"/>
+              <a:t>)</a:t>
+            </a:r>
+          </a:p>
+          <a:p>
+            <a:r>
+              <a:rPr lang="de-DE" dirty="0" err="1"/>
+              <a:t>Too</a:t>
+            </a:r>
+            <a:r>
+              <a:rPr lang="de-DE" dirty="0"/>
+              <a:t> </a:t>
+            </a:r>
+            <a:r>
+              <a:rPr lang="de-DE" dirty="0" err="1"/>
+              <a:t>small</a:t>
+            </a:r>
+            <a:r>
+              <a:rPr lang="de-DE" dirty="0"/>
+              <a:t> </a:t>
+            </a:r>
+            <a:r>
+              <a:rPr lang="de-DE" dirty="0">
+                <a:sym typeface="Wingdings" pitchFamily="2" charset="2"/>
+              </a:rPr>
+              <a:t></a:t>
+            </a:r>
+            <a:r>
+              <a:rPr lang="de-DE" dirty="0"/>
+              <a:t> </a:t>
+            </a:r>
+            <a:r>
+              <a:rPr lang="de-DE" dirty="0" err="1"/>
+              <a:t>many</a:t>
+            </a:r>
+            <a:r>
+              <a:rPr lang="de-DE" dirty="0"/>
+              <a:t> </a:t>
+            </a:r>
+            <a:r>
+              <a:rPr lang="de-DE" dirty="0" err="1"/>
+              <a:t>points</a:t>
+            </a:r>
+            <a:r>
+              <a:rPr lang="de-DE" dirty="0"/>
+              <a:t> </a:t>
+            </a:r>
+            <a:r>
+              <a:rPr lang="de-DE" dirty="0" err="1"/>
+              <a:t>labeled</a:t>
+            </a:r>
+            <a:r>
+              <a:rPr lang="de-DE" dirty="0"/>
+              <a:t> </a:t>
+            </a:r>
+            <a:r>
+              <a:rPr lang="de-DE" dirty="0" err="1"/>
+              <a:t>as</a:t>
+            </a:r>
+            <a:r>
+              <a:rPr lang="de-DE" dirty="0"/>
+              <a:t> </a:t>
+            </a:r>
+            <a:r>
+              <a:rPr lang="de-DE" dirty="0" err="1"/>
+              <a:t>noise</a:t>
+            </a:r>
+            <a:endParaRPr lang="de-DE" dirty="0"/>
+          </a:p>
+          <a:p>
+            <a:r>
+              <a:rPr lang="de-DE" dirty="0" err="1"/>
+              <a:t>Too</a:t>
+            </a:r>
+            <a:r>
+              <a:rPr lang="de-DE" dirty="0"/>
+              <a:t> large </a:t>
+            </a:r>
+            <a:r>
+              <a:rPr lang="de-DE" dirty="0">
+                <a:sym typeface="Wingdings" pitchFamily="2" charset="2"/>
+              </a:rPr>
+              <a:t></a:t>
+            </a:r>
+            <a:r>
+              <a:rPr lang="de-DE" dirty="0"/>
+              <a:t> </a:t>
+            </a:r>
+            <a:r>
+              <a:rPr lang="de-DE" dirty="0" err="1"/>
+              <a:t>clusters</a:t>
+            </a:r>
+            <a:r>
+              <a:rPr lang="de-DE" dirty="0"/>
+              <a:t> </a:t>
+            </a:r>
+            <a:r>
+              <a:rPr lang="de-DE" dirty="0" err="1"/>
+              <a:t>merge</a:t>
+            </a:r>
+            <a:endParaRPr lang="de-DE" dirty="0"/>
+          </a:p>
+          <a:p>
+            <a:r>
+              <a:rPr lang="de-DE" dirty="0" err="1"/>
+              <a:t>Heuristic</a:t>
+            </a:r>
+            <a:r>
+              <a:rPr lang="de-DE" dirty="0"/>
+              <a:t>: </a:t>
+            </a:r>
+            <a:r>
+              <a:rPr lang="de-DE" dirty="0" err="1"/>
+              <a:t>use</a:t>
+            </a:r>
+            <a:r>
+              <a:rPr lang="de-DE" dirty="0"/>
+              <a:t> </a:t>
+            </a:r>
+            <a:r>
+              <a:rPr lang="de-DE" dirty="0" err="1"/>
+              <a:t>k-distance</a:t>
+            </a:r>
+            <a:r>
+              <a:rPr lang="de-DE" dirty="0"/>
+              <a:t> </a:t>
+            </a:r>
+            <a:r>
+              <a:rPr lang="de-DE" dirty="0" err="1"/>
+              <a:t>graph</a:t>
+            </a:r>
+            <a:r>
+              <a:rPr lang="de-DE" dirty="0"/>
+              <a:t>, </a:t>
+            </a:r>
+            <a:r>
+              <a:rPr lang="de-DE" dirty="0" err="1"/>
+              <a:t>look</a:t>
+            </a:r>
+            <a:r>
+              <a:rPr lang="de-DE" dirty="0"/>
+              <a:t> </a:t>
+            </a:r>
+            <a:r>
+              <a:rPr lang="de-DE" dirty="0" err="1"/>
+              <a:t>for</a:t>
+            </a:r>
+            <a:r>
+              <a:rPr lang="de-DE" dirty="0"/>
+              <a:t> “</a:t>
+            </a:r>
+            <a:r>
+              <a:rPr lang="de-DE" dirty="0" err="1"/>
+              <a:t>elbow</a:t>
+            </a:r>
+            <a:r>
+              <a:rPr lang="de-DE" dirty="0"/>
+              <a:t>” </a:t>
+            </a:r>
+            <a:r>
+              <a:rPr lang="de-DE" dirty="0" err="1"/>
+              <a:t>point</a:t>
+            </a:r>
+            <a:endParaRPr lang="de-DE" dirty="0"/>
+          </a:p>
+          <a:p>
+            <a:pPr marL="0" indent="0">
+              <a:buNone/>
+            </a:pPr>
+            <a:endParaRPr lang="de-DE" dirty="0"/>
+          </a:p>
+          <a:p>
+            <a:pPr marL="0" indent="0">
+              <a:buNone/>
+            </a:pPr>
+            <a:r>
+              <a:rPr lang="de-DE" dirty="0" err="1"/>
+              <a:t>Typical</a:t>
+            </a:r>
+            <a:r>
+              <a:rPr lang="de-DE" dirty="0"/>
+              <a:t> </a:t>
+            </a:r>
+            <a:r>
+              <a:rPr lang="de-DE" dirty="0" err="1"/>
+              <a:t>values</a:t>
+            </a:r>
+            <a:r>
+              <a:rPr lang="de-DE" dirty="0"/>
+              <a:t> </a:t>
+            </a:r>
+            <a:r>
+              <a:rPr lang="de-DE" dirty="0" err="1">
+                <a:latin typeface="Cambria Math" panose="02040503050406030204" pitchFamily="18" charset="0"/>
+                <a:ea typeface="Cambria Math" panose="02040503050406030204" pitchFamily="18" charset="0"/>
+              </a:rPr>
+              <a:t>min_samples</a:t>
+            </a:r>
+            <a:r>
+              <a:rPr lang="de-DE" dirty="0"/>
+              <a:t> (</a:t>
+            </a:r>
+            <a:r>
+              <a:rPr lang="de-DE" dirty="0" err="1"/>
+              <a:t>minimum</a:t>
+            </a:r>
+            <a:r>
+              <a:rPr lang="de-DE" dirty="0"/>
+              <a:t> </a:t>
+            </a:r>
+            <a:r>
+              <a:rPr lang="de-DE" dirty="0" err="1"/>
+              <a:t>points</a:t>
+            </a:r>
+            <a:r>
+              <a:rPr lang="de-DE" dirty="0"/>
+              <a:t> </a:t>
+            </a:r>
+            <a:r>
+              <a:rPr lang="de-DE" dirty="0" err="1"/>
+              <a:t>for</a:t>
+            </a:r>
+            <a:r>
+              <a:rPr lang="de-DE" dirty="0"/>
+              <a:t> </a:t>
+            </a:r>
+            <a:r>
+              <a:rPr lang="de-DE" dirty="0" err="1"/>
+              <a:t>density</a:t>
+            </a:r>
+            <a:r>
+              <a:rPr lang="de-DE" dirty="0"/>
+              <a:t>)</a:t>
+            </a:r>
+          </a:p>
+          <a:p>
+            <a:r>
+              <a:rPr lang="de-DE" dirty="0">
+                <a:latin typeface="Cambria Math" panose="02040503050406030204" pitchFamily="18" charset="0"/>
+                <a:ea typeface="Cambria Math" panose="02040503050406030204" pitchFamily="18" charset="0"/>
+              </a:rPr>
+              <a:t>4</a:t>
+            </a:r>
+            <a:r>
+              <a:rPr lang="de-DE" dirty="0"/>
+              <a:t> (</a:t>
+            </a:r>
+            <a:r>
+              <a:rPr lang="de-DE" dirty="0" err="1"/>
+              <a:t>low</a:t>
+            </a:r>
+            <a:r>
+              <a:rPr lang="de-DE" dirty="0"/>
+              <a:t>-dimensional </a:t>
+            </a:r>
+            <a:r>
+              <a:rPr lang="de-DE" dirty="0" err="1"/>
+              <a:t>data</a:t>
+            </a:r>
+            <a:r>
+              <a:rPr lang="de-DE" dirty="0"/>
+              <a:t>)</a:t>
+            </a:r>
+          </a:p>
+          <a:p>
+            <a:r>
+              <a:rPr lang="de-DE" dirty="0"/>
+              <a:t>Higher </a:t>
+            </a:r>
+            <a:r>
+              <a:rPr lang="de-DE" dirty="0" err="1"/>
+              <a:t>for</a:t>
+            </a:r>
+            <a:r>
+              <a:rPr lang="de-DE" dirty="0"/>
+              <a:t> high-dimensional </a:t>
+            </a:r>
+            <a:r>
+              <a:rPr lang="de-DE" dirty="0" err="1"/>
+              <a:t>data</a:t>
+            </a:r>
+            <a:endParaRPr lang="de-DE" dirty="0"/>
+          </a:p>
+          <a:p>
+            <a:r>
+              <a:rPr lang="de-DE" dirty="0"/>
+              <a:t>Guideline: </a:t>
+            </a:r>
+            <a:r>
+              <a:rPr lang="de-DE" dirty="0" err="1">
+                <a:latin typeface="Cambria Math" panose="02040503050406030204" pitchFamily="18" charset="0"/>
+                <a:ea typeface="Cambria Math" panose="02040503050406030204" pitchFamily="18" charset="0"/>
+              </a:rPr>
+              <a:t>min_samples</a:t>
+            </a:r>
+            <a:r>
+              <a:rPr lang="de-DE" dirty="0">
+                <a:latin typeface="Cambria Math" panose="02040503050406030204" pitchFamily="18" charset="0"/>
+                <a:ea typeface="Cambria Math" panose="02040503050406030204" pitchFamily="18" charset="0"/>
+              </a:rPr>
+              <a:t> ≥ </a:t>
+            </a:r>
+            <a:r>
+              <a:rPr lang="de-DE" dirty="0" err="1">
+                <a:latin typeface="Cambria Math" panose="02040503050406030204" pitchFamily="18" charset="0"/>
+                <a:ea typeface="Cambria Math" panose="02040503050406030204" pitchFamily="18" charset="0"/>
+              </a:rPr>
+              <a:t>dimensionality</a:t>
+            </a:r>
+            <a:r>
+              <a:rPr lang="de-DE" dirty="0">
+                <a:latin typeface="Cambria Math" panose="02040503050406030204" pitchFamily="18" charset="0"/>
+                <a:ea typeface="Cambria Math" panose="02040503050406030204" pitchFamily="18" charset="0"/>
+              </a:rPr>
+              <a:t> + 1</a:t>
+            </a:r>
+          </a:p>
+          <a:p>
+            <a:pPr marL="0" indent="0">
+              <a:buNone/>
+            </a:pPr>
+            <a:endParaRPr lang="de-DE" dirty="0"/>
+          </a:p>
+          <a:p>
+            <a:pPr marL="0" indent="0">
+              <a:buNone/>
+            </a:pPr>
+            <a:r>
+              <a:rPr lang="el-GR" dirty="0">
+                <a:latin typeface="Cambria Math" panose="02040503050406030204" pitchFamily="18" charset="0"/>
+                <a:ea typeface="Cambria Math" panose="02040503050406030204" pitchFamily="18" charset="0"/>
+              </a:rPr>
+              <a:t>ε</a:t>
+            </a:r>
+            <a:r>
+              <a:rPr lang="el-GR" dirty="0"/>
+              <a:t> </a:t>
+            </a:r>
+            <a:r>
+              <a:rPr lang="de-DE" dirty="0"/>
+              <a:t>and </a:t>
+            </a:r>
+            <a:r>
+              <a:rPr lang="de-DE" dirty="0" err="1">
+                <a:latin typeface="Cambria Math" panose="02040503050406030204" pitchFamily="18" charset="0"/>
+                <a:ea typeface="Cambria Math" panose="02040503050406030204" pitchFamily="18" charset="0"/>
+              </a:rPr>
+              <a:t>min_samples</a:t>
+            </a:r>
+            <a:r>
+              <a:rPr lang="de-DE" dirty="0"/>
+              <a:t> </a:t>
+            </a:r>
+            <a:r>
+              <a:rPr lang="de-DE" dirty="0" err="1"/>
+              <a:t>strongly</a:t>
+            </a:r>
+            <a:r>
+              <a:rPr lang="de-DE" dirty="0"/>
+              <a:t> </a:t>
+            </a:r>
+            <a:r>
+              <a:rPr lang="de-DE" dirty="0" err="1"/>
+              <a:t>affect</a:t>
+            </a:r>
+            <a:r>
+              <a:rPr lang="de-DE" dirty="0"/>
+              <a:t> </a:t>
+            </a:r>
+            <a:r>
+              <a:rPr lang="de-DE" dirty="0" err="1"/>
+              <a:t>results</a:t>
+            </a:r>
+            <a:r>
+              <a:rPr lang="de-DE" dirty="0"/>
+              <a:t> </a:t>
+            </a:r>
+            <a:r>
+              <a:rPr lang="de-DE" dirty="0">
+                <a:sym typeface="Wingdings" pitchFamily="2" charset="2"/>
+              </a:rPr>
+              <a:t> </a:t>
+            </a:r>
+            <a:r>
+              <a:rPr lang="de-DE" dirty="0" err="1">
+                <a:sym typeface="Wingdings" pitchFamily="2" charset="2"/>
+              </a:rPr>
+              <a:t>tuning</a:t>
+            </a:r>
+            <a:r>
+              <a:rPr lang="de-DE" dirty="0">
+                <a:sym typeface="Wingdings" pitchFamily="2" charset="2"/>
+              </a:rPr>
+              <a:t> and </a:t>
+            </a:r>
+            <a:r>
+              <a:rPr lang="de-DE" dirty="0" err="1">
+                <a:sym typeface="Wingdings" pitchFamily="2" charset="2"/>
+              </a:rPr>
+              <a:t>d</a:t>
+            </a:r>
+            <a:r>
+              <a:rPr lang="de-DE" dirty="0" err="1"/>
+              <a:t>ata</a:t>
+            </a:r>
+            <a:r>
+              <a:rPr lang="de-DE" dirty="0"/>
+              <a:t> </a:t>
+            </a:r>
+            <a:r>
+              <a:rPr lang="de-DE" dirty="0" err="1"/>
+              <a:t>scaling</a:t>
+            </a:r>
+            <a:r>
+              <a:rPr lang="de-DE" dirty="0"/>
+              <a:t> </a:t>
+            </a:r>
+            <a:r>
+              <a:rPr lang="de-DE" dirty="0" err="1"/>
+              <a:t>matters</a:t>
+            </a:r>
+            <a:endParaRPr lang="de-DE" dirty="0"/>
+          </a:p>
+        </p:txBody>
+      </p:sp>
+      <p:sp>
+        <p:nvSpPr>
+          <p:cNvPr id="3" name="Foliennummernplatzhalter 2">
+            <a:extLst>
+              <a:ext uri="{FF2B5EF4-FFF2-40B4-BE49-F238E27FC236}">
+                <a16:creationId xmlns:a16="http://schemas.microsoft.com/office/drawing/2014/main" id="{7F67A71D-5771-002A-3ED3-D1F7EA87F83F}"/>
+              </a:ext>
+            </a:extLst>
+          </p:cNvPr>
+          <p:cNvSpPr>
+            <a:spLocks noGrp="1"/>
+          </p:cNvSpPr>
+          <p:nvPr>
+            <p:ph type="sldNum" sz="quarter" idx="12"/>
+          </p:nvPr>
+        </p:nvSpPr>
+        <p:spPr/>
+        <p:txBody>
+          <a:bodyPr/>
+          <a:lstStyle/>
+          <a:p>
+            <a:fld id="{08C366F5-AFAD-49CB-854A-9D9E238FCA13}" type="slidenum">
+              <a:rPr lang="en-GB" smtClean="0"/>
+              <a:t>32</a:t>
+            </a:fld>
+            <a:endParaRPr lang="en-GB"/>
+          </a:p>
+        </p:txBody>
+      </p:sp>
+    </p:spTree>
+    <p:extLst>
+      <p:ext uri="{BB962C8B-B14F-4D97-AF65-F5344CB8AC3E}">
+        <p14:creationId xmlns:p14="http://schemas.microsoft.com/office/powerpoint/2010/main" val="1011311951"/>
+      </p:ext>
+    </p:extLst>
+  </p:cSld>
+  <p:clrMapOvr>
+    <a:masterClrMapping/>
+  </p:clrMapOvr>
+</p:sld>
+</file>
+
+<file path=ppt/slides/slide33.xml><?xml version="1.0" encoding="utf-8"?>
+<p:sld xmlns:a="http://schemas.openxmlformats.org/drawingml/2006/main" xmlns:r="http://schemas.openxmlformats.org/officeDocument/2006/relationships" xmlns:p="http://schemas.openxmlformats.org/presentationml/2006/main">
+  <p:cSld>
+    <p:spTree>
+      <p:nvGrpSpPr>
+        <p:cNvPr id="1" name=""/>
+        <p:cNvGrpSpPr/>
+        <p:nvPr/>
+      </p:nvGrpSpPr>
+      <p:grpSpPr>
+        <a:xfrm>
+          <a:off x="0" y="0"/>
+          <a:ext cx="0" cy="0"/>
+          <a:chOff x="0" y="0"/>
+          <a:chExt cx="0" cy="0"/>
+        </a:xfrm>
+      </p:grpSpPr>
+      <p:sp>
+        <p:nvSpPr>
+          <p:cNvPr id="2" name="Titel 1">
+            <a:extLst>
+              <a:ext uri="{FF2B5EF4-FFF2-40B4-BE49-F238E27FC236}">
+                <a16:creationId xmlns:a16="http://schemas.microsoft.com/office/drawing/2014/main" id="{12451C77-ED0D-F705-8D1C-ADFA8F6C97BF}"/>
+              </a:ext>
+            </a:extLst>
+          </p:cNvPr>
+          <p:cNvSpPr>
+            <a:spLocks noGrp="1"/>
+          </p:cNvSpPr>
+          <p:nvPr>
+            <p:ph type="title"/>
+          </p:nvPr>
+        </p:nvSpPr>
+        <p:spPr/>
+        <p:txBody>
+          <a:bodyPr/>
+          <a:lstStyle/>
+          <a:p>
+            <a:r>
+              <a:rPr lang="de-DE" dirty="0"/>
+              <a:t>How </a:t>
+            </a:r>
+            <a:r>
+              <a:rPr lang="de-DE" dirty="0" err="1"/>
+              <a:t>to</a:t>
+            </a:r>
+            <a:r>
+              <a:rPr lang="de-DE" dirty="0"/>
+              <a:t> </a:t>
+            </a:r>
+            <a:r>
+              <a:rPr lang="de-DE" dirty="0" err="1"/>
+              <a:t>Assign</a:t>
+            </a:r>
+            <a:r>
+              <a:rPr lang="de-DE" dirty="0"/>
+              <a:t> New Points</a:t>
+            </a:r>
+          </a:p>
+        </p:txBody>
+      </p:sp>
+      <p:sp>
+        <p:nvSpPr>
+          <p:cNvPr id="3" name="Inhaltsplatzhalter 2">
+            <a:extLst>
+              <a:ext uri="{FF2B5EF4-FFF2-40B4-BE49-F238E27FC236}">
+                <a16:creationId xmlns:a16="http://schemas.microsoft.com/office/drawing/2014/main" id="{FA126657-2593-4771-3A67-51F3B2F3A6EF}"/>
+              </a:ext>
+            </a:extLst>
+          </p:cNvPr>
+          <p:cNvSpPr>
+            <a:spLocks noGrp="1"/>
+          </p:cNvSpPr>
+          <p:nvPr>
+            <p:ph idx="1"/>
+          </p:nvPr>
+        </p:nvSpPr>
+        <p:spPr/>
+        <p:txBody>
+          <a:bodyPr>
+            <a:normAutofit/>
+          </a:bodyPr>
+          <a:lstStyle/>
+          <a:p>
+            <a:pPr marL="0" indent="0">
+              <a:buNone/>
+            </a:pPr>
+            <a:r>
+              <a:rPr lang="de-DE" dirty="0" err="1"/>
+              <a:t>For</a:t>
+            </a:r>
+            <a:r>
+              <a:rPr lang="de-DE" dirty="0"/>
+              <a:t> a </a:t>
+            </a:r>
+            <a:r>
+              <a:rPr lang="de-DE" dirty="0" err="1"/>
+              <a:t>new</a:t>
+            </a:r>
+            <a:r>
+              <a:rPr lang="de-DE" dirty="0"/>
+              <a:t> </a:t>
+            </a:r>
+            <a:r>
+              <a:rPr lang="de-DE" dirty="0" err="1"/>
+              <a:t>point</a:t>
+            </a:r>
+            <a:r>
+              <a:rPr lang="de-DE" dirty="0"/>
+              <a:t>: Check </a:t>
+            </a:r>
+            <a:r>
+              <a:rPr lang="de-DE" dirty="0" err="1"/>
+              <a:t>its</a:t>
+            </a:r>
+            <a:r>
+              <a:rPr lang="de-DE" dirty="0"/>
+              <a:t> </a:t>
+            </a:r>
+            <a:r>
+              <a:rPr lang="el-GR" dirty="0">
+                <a:latin typeface="Cambria Math" panose="02040503050406030204" pitchFamily="18" charset="0"/>
+                <a:ea typeface="Cambria Math" panose="02040503050406030204" pitchFamily="18" charset="0"/>
+              </a:rPr>
+              <a:t>ε</a:t>
+            </a:r>
+            <a:r>
+              <a:rPr lang="el-GR" dirty="0"/>
+              <a:t>-</a:t>
+            </a:r>
+            <a:r>
+              <a:rPr lang="de-DE" dirty="0" err="1"/>
+              <a:t>neighborhood</a:t>
+            </a:r>
+            <a:endParaRPr lang="de-DE" dirty="0"/>
+          </a:p>
+          <a:p>
+            <a:r>
+              <a:rPr lang="de-DE" dirty="0" err="1"/>
+              <a:t>If</a:t>
+            </a:r>
+            <a:r>
+              <a:rPr lang="de-DE" dirty="0"/>
+              <a:t> </a:t>
+            </a:r>
+            <a:r>
+              <a:rPr lang="de-DE" dirty="0" err="1"/>
+              <a:t>within</a:t>
+            </a:r>
+            <a:r>
+              <a:rPr lang="de-DE" dirty="0"/>
+              <a:t> </a:t>
+            </a:r>
+            <a:r>
+              <a:rPr lang="el-GR" dirty="0">
+                <a:latin typeface="Cambria Math" panose="02040503050406030204" pitchFamily="18" charset="0"/>
+                <a:ea typeface="Cambria Math" panose="02040503050406030204" pitchFamily="18" charset="0"/>
+              </a:rPr>
+              <a:t>ε</a:t>
+            </a:r>
+            <a:r>
+              <a:rPr lang="el-GR" dirty="0"/>
+              <a:t> </a:t>
+            </a:r>
+            <a:r>
+              <a:rPr lang="de-DE" dirty="0" err="1"/>
+              <a:t>of</a:t>
+            </a:r>
+            <a:r>
+              <a:rPr lang="de-DE" dirty="0"/>
+              <a:t> a </a:t>
+            </a:r>
+            <a:r>
+              <a:rPr lang="de-DE" dirty="0" err="1"/>
+              <a:t>core</a:t>
+            </a:r>
+            <a:r>
+              <a:rPr lang="de-DE" dirty="0"/>
+              <a:t> </a:t>
+            </a:r>
+            <a:r>
+              <a:rPr lang="de-DE" dirty="0" err="1"/>
+              <a:t>point</a:t>
+            </a:r>
+            <a:r>
+              <a:rPr lang="de-DE" dirty="0"/>
+              <a:t>: </a:t>
+            </a:r>
+            <a:r>
+              <a:rPr lang="de-DE" dirty="0" err="1"/>
+              <a:t>Assign</a:t>
+            </a:r>
+            <a:r>
+              <a:rPr lang="de-DE" dirty="0"/>
+              <a:t> </a:t>
+            </a:r>
+            <a:r>
+              <a:rPr lang="de-DE" dirty="0" err="1"/>
+              <a:t>it</a:t>
+            </a:r>
+            <a:r>
+              <a:rPr lang="de-DE" dirty="0"/>
+              <a:t> </a:t>
+            </a:r>
+            <a:r>
+              <a:rPr lang="de-DE" dirty="0" err="1"/>
+              <a:t>to</a:t>
+            </a:r>
+            <a:r>
+              <a:rPr lang="de-DE" dirty="0"/>
+              <a:t> </a:t>
+            </a:r>
+            <a:r>
+              <a:rPr lang="de-DE" dirty="0" err="1"/>
+              <a:t>that</a:t>
+            </a:r>
+            <a:r>
+              <a:rPr lang="de-DE" dirty="0"/>
+              <a:t> </a:t>
+            </a:r>
+            <a:r>
+              <a:rPr lang="de-DE" dirty="0" err="1"/>
+              <a:t>cluster</a:t>
+            </a:r>
+            <a:endParaRPr lang="de-DE" dirty="0"/>
+          </a:p>
+          <a:p>
+            <a:r>
+              <a:rPr lang="de-DE" dirty="0" err="1"/>
+              <a:t>If</a:t>
+            </a:r>
+            <a:r>
+              <a:rPr lang="de-DE" dirty="0"/>
+              <a:t> not </a:t>
+            </a:r>
+            <a:r>
+              <a:rPr lang="de-DE" dirty="0" err="1"/>
+              <a:t>near</a:t>
+            </a:r>
+            <a:r>
+              <a:rPr lang="de-DE" dirty="0"/>
+              <a:t> </a:t>
+            </a:r>
+            <a:r>
+              <a:rPr lang="de-DE" dirty="0" err="1"/>
+              <a:t>any</a:t>
+            </a:r>
+            <a:r>
+              <a:rPr lang="de-DE" dirty="0"/>
+              <a:t> </a:t>
+            </a:r>
+            <a:r>
+              <a:rPr lang="de-DE" dirty="0" err="1"/>
+              <a:t>core</a:t>
+            </a:r>
+            <a:r>
+              <a:rPr lang="de-DE" dirty="0"/>
+              <a:t> </a:t>
+            </a:r>
+            <a:r>
+              <a:rPr lang="de-DE" dirty="0" err="1"/>
+              <a:t>point</a:t>
+            </a:r>
+            <a:r>
+              <a:rPr lang="de-DE" dirty="0"/>
+              <a:t>: Label </a:t>
+            </a:r>
+            <a:r>
+              <a:rPr lang="de-DE" dirty="0" err="1"/>
+              <a:t>as</a:t>
+            </a:r>
+            <a:r>
+              <a:rPr lang="de-DE" dirty="0"/>
+              <a:t> </a:t>
+            </a:r>
+            <a:r>
+              <a:rPr lang="de-DE" dirty="0" err="1"/>
+              <a:t>noise</a:t>
+            </a:r>
+            <a:endParaRPr lang="de-DE" dirty="0"/>
+          </a:p>
+          <a:p>
+            <a:r>
+              <a:rPr lang="de-DE" dirty="0" err="1"/>
+              <a:t>If</a:t>
+            </a:r>
+            <a:r>
+              <a:rPr lang="de-DE" dirty="0"/>
+              <a:t> </a:t>
+            </a:r>
+            <a:r>
+              <a:rPr lang="de-DE" dirty="0" err="1"/>
+              <a:t>within</a:t>
+            </a:r>
+            <a:r>
+              <a:rPr lang="de-DE" dirty="0"/>
+              <a:t> </a:t>
+            </a:r>
+            <a:r>
+              <a:rPr lang="el-GR" dirty="0">
+                <a:latin typeface="Cambria Math" panose="02040503050406030204" pitchFamily="18" charset="0"/>
+                <a:ea typeface="Cambria Math" panose="02040503050406030204" pitchFamily="18" charset="0"/>
+              </a:rPr>
+              <a:t>ε</a:t>
+            </a:r>
+            <a:r>
+              <a:rPr lang="el-GR" dirty="0"/>
+              <a:t> </a:t>
+            </a:r>
+            <a:r>
+              <a:rPr lang="de-DE" dirty="0" err="1"/>
+              <a:t>of</a:t>
+            </a:r>
+            <a:r>
+              <a:rPr lang="de-DE" dirty="0"/>
+              <a:t> </a:t>
+            </a:r>
+            <a:r>
+              <a:rPr lang="de-DE" dirty="0" err="1"/>
+              <a:t>core</a:t>
+            </a:r>
+            <a:r>
+              <a:rPr lang="de-DE" dirty="0"/>
+              <a:t> </a:t>
+            </a:r>
+            <a:r>
+              <a:rPr lang="de-DE" dirty="0" err="1"/>
+              <a:t>points</a:t>
+            </a:r>
+            <a:r>
+              <a:rPr lang="de-DE" dirty="0"/>
+              <a:t> </a:t>
+            </a:r>
+            <a:r>
+              <a:rPr lang="de-DE" dirty="0" err="1"/>
+              <a:t>from</a:t>
+            </a:r>
+            <a:r>
+              <a:rPr lang="de-DE" dirty="0"/>
+              <a:t> different </a:t>
+            </a:r>
+            <a:r>
+              <a:rPr lang="de-DE" dirty="0" err="1"/>
+              <a:t>clusters</a:t>
+            </a:r>
+            <a:r>
+              <a:rPr lang="de-DE" dirty="0"/>
+              <a:t>:</a:t>
+            </a:r>
+          </a:p>
+          <a:p>
+            <a:pPr lvl="1"/>
+            <a:r>
+              <a:rPr lang="de-DE" dirty="0"/>
+              <a:t>Option 1: </a:t>
+            </a:r>
+            <a:r>
+              <a:rPr lang="de-DE" dirty="0" err="1"/>
+              <a:t>Assign</a:t>
+            </a:r>
+            <a:r>
+              <a:rPr lang="de-DE" dirty="0"/>
+              <a:t> </a:t>
+            </a:r>
+            <a:r>
+              <a:rPr lang="de-DE" dirty="0" err="1"/>
+              <a:t>to</a:t>
+            </a:r>
+            <a:r>
+              <a:rPr lang="de-DE" dirty="0"/>
+              <a:t> </a:t>
+            </a:r>
+            <a:r>
+              <a:rPr lang="de-DE" dirty="0" err="1"/>
+              <a:t>first</a:t>
+            </a:r>
+            <a:r>
+              <a:rPr lang="de-DE" dirty="0"/>
+              <a:t> </a:t>
+            </a:r>
+            <a:r>
+              <a:rPr lang="de-DE" dirty="0" err="1"/>
+              <a:t>found</a:t>
+            </a:r>
+            <a:r>
+              <a:rPr lang="de-DE" dirty="0"/>
+              <a:t> (like DBSCAN </a:t>
+            </a:r>
+            <a:r>
+              <a:rPr lang="de-DE" dirty="0" err="1"/>
+              <a:t>would</a:t>
+            </a:r>
+            <a:r>
+              <a:rPr lang="de-DE" dirty="0"/>
+              <a:t>)</a:t>
+            </a:r>
+          </a:p>
+          <a:p>
+            <a:pPr lvl="1"/>
+            <a:r>
+              <a:rPr lang="de-DE" dirty="0"/>
+              <a:t>Option 2: </a:t>
+            </a:r>
+            <a:r>
+              <a:rPr lang="de-DE" dirty="0" err="1"/>
+              <a:t>Assign</a:t>
+            </a:r>
+            <a:r>
+              <a:rPr lang="de-DE" dirty="0"/>
+              <a:t> </a:t>
+            </a:r>
+            <a:r>
+              <a:rPr lang="de-DE" dirty="0" err="1"/>
+              <a:t>to</a:t>
+            </a:r>
+            <a:r>
+              <a:rPr lang="de-DE" dirty="0"/>
+              <a:t> </a:t>
+            </a:r>
+            <a:r>
+              <a:rPr lang="de-DE" dirty="0" err="1"/>
+              <a:t>closest</a:t>
+            </a:r>
+            <a:r>
+              <a:rPr lang="de-DE" dirty="0"/>
+              <a:t> </a:t>
+            </a:r>
+            <a:r>
+              <a:rPr lang="de-DE" dirty="0" err="1"/>
+              <a:t>core</a:t>
+            </a:r>
+            <a:r>
+              <a:rPr lang="de-DE" dirty="0"/>
+              <a:t> </a:t>
+            </a:r>
+            <a:r>
+              <a:rPr lang="de-DE" dirty="0" err="1"/>
+              <a:t>point</a:t>
+            </a:r>
+            <a:endParaRPr lang="de-DE" dirty="0"/>
+          </a:p>
+          <a:p>
+            <a:pPr marL="0" indent="0">
+              <a:buNone/>
+            </a:pPr>
+            <a:endParaRPr lang="de-DE" b="1" dirty="0"/>
+          </a:p>
+          <a:p>
+            <a:pPr marL="0" indent="0">
+              <a:buNone/>
+            </a:pPr>
+            <a:r>
+              <a:rPr lang="de-DE" dirty="0" err="1"/>
+              <a:t>Adding</a:t>
+            </a:r>
+            <a:r>
+              <a:rPr lang="de-DE" dirty="0"/>
+              <a:t> </a:t>
+            </a:r>
+            <a:r>
+              <a:rPr lang="de-DE" dirty="0" err="1"/>
+              <a:t>one</a:t>
+            </a:r>
+            <a:r>
+              <a:rPr lang="de-DE" dirty="0"/>
+              <a:t> </a:t>
+            </a:r>
+            <a:r>
+              <a:rPr lang="de-DE" dirty="0" err="1"/>
+              <a:t>point</a:t>
+            </a:r>
+            <a:r>
+              <a:rPr lang="de-DE" dirty="0"/>
+              <a:t> </a:t>
+            </a:r>
+            <a:r>
+              <a:rPr lang="de-DE" dirty="0" err="1"/>
+              <a:t>can</a:t>
+            </a:r>
+            <a:r>
+              <a:rPr lang="de-DE" dirty="0"/>
+              <a:t> </a:t>
+            </a:r>
+            <a:r>
+              <a:rPr lang="de-DE" dirty="0" err="1"/>
+              <a:t>change</a:t>
+            </a:r>
+            <a:r>
+              <a:rPr lang="de-DE" dirty="0"/>
+              <a:t> </a:t>
+            </a:r>
+            <a:r>
+              <a:rPr lang="de-DE" dirty="0" err="1"/>
+              <a:t>cluster</a:t>
+            </a:r>
+            <a:r>
+              <a:rPr lang="de-DE" dirty="0"/>
+              <a:t> </a:t>
+            </a:r>
+            <a:r>
+              <a:rPr lang="de-DE" dirty="0" err="1"/>
+              <a:t>structure</a:t>
+            </a:r>
+            <a:endParaRPr lang="de-DE" dirty="0"/>
+          </a:p>
+          <a:p>
+            <a:pPr marL="0" indent="0">
+              <a:buNone/>
+            </a:pPr>
+            <a:r>
+              <a:rPr lang="de-DE" dirty="0">
+                <a:sym typeface="Wingdings" pitchFamily="2" charset="2"/>
+              </a:rPr>
+              <a:t> </a:t>
+            </a:r>
+            <a:r>
+              <a:rPr lang="de-DE" dirty="0"/>
+              <a:t>True DBSCAN </a:t>
+            </a:r>
+            <a:r>
+              <a:rPr lang="de-DE" dirty="0" err="1"/>
+              <a:t>would</a:t>
+            </a:r>
+            <a:r>
+              <a:rPr lang="de-DE" dirty="0"/>
+              <a:t> </a:t>
+            </a:r>
+            <a:r>
+              <a:rPr lang="de-DE" dirty="0" err="1"/>
+              <a:t>require</a:t>
+            </a:r>
+            <a:r>
+              <a:rPr lang="de-DE" dirty="0"/>
+              <a:t> </a:t>
+            </a:r>
+            <a:r>
+              <a:rPr lang="de-DE" dirty="0" err="1"/>
+              <a:t>re-running</a:t>
+            </a:r>
+            <a:r>
+              <a:rPr lang="de-DE" dirty="0"/>
+              <a:t> </a:t>
+            </a:r>
+            <a:r>
+              <a:rPr lang="de-DE" dirty="0" err="1"/>
+              <a:t>the</a:t>
+            </a:r>
+            <a:r>
+              <a:rPr lang="de-DE" dirty="0"/>
+              <a:t> </a:t>
+            </a:r>
+            <a:r>
+              <a:rPr lang="de-DE" dirty="0" err="1"/>
+              <a:t>algorithm</a:t>
+            </a:r>
+            <a:endParaRPr lang="de-DE" dirty="0"/>
+          </a:p>
+        </p:txBody>
+      </p:sp>
+      <p:sp>
+        <p:nvSpPr>
+          <p:cNvPr id="4" name="Foliennummernplatzhalter 3">
+            <a:extLst>
+              <a:ext uri="{FF2B5EF4-FFF2-40B4-BE49-F238E27FC236}">
+                <a16:creationId xmlns:a16="http://schemas.microsoft.com/office/drawing/2014/main" id="{0B161C99-D9A5-D8DB-0687-150C7C9C9AE1}"/>
+              </a:ext>
+            </a:extLst>
+          </p:cNvPr>
+          <p:cNvSpPr>
+            <a:spLocks noGrp="1"/>
+          </p:cNvSpPr>
+          <p:nvPr>
+            <p:ph type="sldNum" sz="quarter" idx="12"/>
+          </p:nvPr>
+        </p:nvSpPr>
+        <p:spPr/>
+        <p:txBody>
+          <a:bodyPr/>
+          <a:lstStyle/>
+          <a:p>
+            <a:fld id="{08C366F5-AFAD-49CB-854A-9D9E238FCA13}" type="slidenum">
+              <a:rPr lang="en-GB" smtClean="0"/>
+              <a:t>33</a:t>
+            </a:fld>
+            <a:endParaRPr lang="en-GB"/>
+          </a:p>
+        </p:txBody>
+      </p:sp>
+    </p:spTree>
+    <p:extLst>
+      <p:ext uri="{BB962C8B-B14F-4D97-AF65-F5344CB8AC3E}">
+        <p14:creationId xmlns:p14="http://schemas.microsoft.com/office/powerpoint/2010/main" val="1263246602"/>
+      </p:ext>
+    </p:extLst>
+  </p:cSld>
+  <p:clrMapOvr>
+    <a:masterClrMapping/>
+  </p:clrMapOvr>
+</p:sld>
+</file>
+
+<file path=ppt/slides/slide34.xml><?xml version="1.0" encoding="utf-8"?>
+<p:sld xmlns:a="http://schemas.openxmlformats.org/drawingml/2006/main" xmlns:r="http://schemas.openxmlformats.org/officeDocument/2006/relationships" xmlns:p="http://schemas.openxmlformats.org/presentationml/2006/main">
+  <p:cSld>
+    <p:spTree>
+      <p:nvGrpSpPr>
+        <p:cNvPr id="1" name=""/>
+        <p:cNvGrpSpPr/>
+        <p:nvPr/>
+      </p:nvGrpSpPr>
+      <p:grpSpPr>
+        <a:xfrm>
+          <a:off x="0" y="0"/>
+          <a:ext cx="0" cy="0"/>
+          <a:chOff x="0" y="0"/>
+          <a:chExt cx="0" cy="0"/>
+        </a:xfrm>
+      </p:grpSpPr>
+      <p:sp>
+        <p:nvSpPr>
+          <p:cNvPr id="2" name="Titel 1">
+            <a:extLst>
+              <a:ext uri="{FF2B5EF4-FFF2-40B4-BE49-F238E27FC236}">
+                <a16:creationId xmlns:a16="http://schemas.microsoft.com/office/drawing/2014/main" id="{AB0A312D-A6FF-AB8E-359F-EE1BDB1D4399}"/>
+              </a:ext>
+            </a:extLst>
+          </p:cNvPr>
+          <p:cNvSpPr>
+            <a:spLocks noGrp="1"/>
+          </p:cNvSpPr>
+          <p:nvPr>
+            <p:ph type="title"/>
+          </p:nvPr>
+        </p:nvSpPr>
+        <p:spPr/>
+        <p:txBody>
+          <a:bodyPr/>
+          <a:lstStyle/>
+          <a:p>
+            <a:r>
+              <a:rPr lang="de-DE" dirty="0" err="1"/>
+              <a:t>Comparing</a:t>
+            </a:r>
+            <a:r>
+              <a:rPr lang="de-DE" dirty="0"/>
+              <a:t> Clustering Methods</a:t>
+            </a:r>
+          </a:p>
+        </p:txBody>
+      </p:sp>
+      <p:sp>
+        <p:nvSpPr>
+          <p:cNvPr id="5" name="Inhaltsplatzhalter 4">
+            <a:extLst>
+              <a:ext uri="{FF2B5EF4-FFF2-40B4-BE49-F238E27FC236}">
+                <a16:creationId xmlns:a16="http://schemas.microsoft.com/office/drawing/2014/main" id="{403B17D7-2EA9-DC24-B9E5-1139CCEB955F}"/>
+              </a:ext>
+            </a:extLst>
+          </p:cNvPr>
+          <p:cNvSpPr>
+            <a:spLocks noGrp="1"/>
+          </p:cNvSpPr>
+          <p:nvPr>
+            <p:ph idx="1"/>
+          </p:nvPr>
+        </p:nvSpPr>
+        <p:spPr>
+          <a:xfrm>
+            <a:off x="8076841" y="1492595"/>
+            <a:ext cx="4115159" cy="4863755"/>
+          </a:xfrm>
+        </p:spPr>
+        <p:txBody>
+          <a:bodyPr>
+            <a:normAutofit fontScale="70000" lnSpcReduction="20000"/>
+          </a:bodyPr>
+          <a:lstStyle/>
+          <a:p>
+            <a:pPr marL="0" indent="0">
+              <a:buNone/>
+            </a:pPr>
+            <a:r>
+              <a:rPr lang="de-DE" dirty="0"/>
+              <a:t>Different </a:t>
+            </a:r>
+            <a:r>
+              <a:rPr lang="de-DE" dirty="0" err="1"/>
+              <a:t>algorithms</a:t>
+            </a:r>
+            <a:r>
+              <a:rPr lang="de-DE" dirty="0"/>
+              <a:t> </a:t>
+            </a:r>
+            <a:r>
+              <a:rPr lang="de-DE" dirty="0" err="1"/>
+              <a:t>suit</a:t>
+            </a:r>
+            <a:r>
+              <a:rPr lang="de-DE" dirty="0"/>
+              <a:t> different </a:t>
+            </a:r>
+            <a:r>
+              <a:rPr lang="de-DE" dirty="0" err="1"/>
+              <a:t>data</a:t>
+            </a:r>
+            <a:r>
+              <a:rPr lang="de-DE" dirty="0"/>
+              <a:t> </a:t>
+            </a:r>
+            <a:r>
+              <a:rPr lang="de-DE" dirty="0">
+                <a:sym typeface="Wingdings" pitchFamily="2" charset="2"/>
+              </a:rPr>
+              <a:t> </a:t>
+            </a:r>
+            <a:r>
+              <a:rPr lang="de-DE" dirty="0" err="1">
+                <a:sym typeface="Wingdings" pitchFamily="2" charset="2"/>
+              </a:rPr>
+              <a:t>n</a:t>
+            </a:r>
+            <a:r>
+              <a:rPr lang="de-DE" dirty="0" err="1"/>
+              <a:t>o</a:t>
+            </a:r>
+            <a:r>
+              <a:rPr lang="de-DE" dirty="0"/>
+              <a:t> </a:t>
+            </a:r>
+            <a:r>
+              <a:rPr lang="de-DE" dirty="0" err="1"/>
+              <a:t>single</a:t>
+            </a:r>
+            <a:r>
+              <a:rPr lang="de-DE" dirty="0"/>
+              <a:t> </a:t>
+            </a:r>
+            <a:r>
+              <a:rPr lang="de-DE" dirty="0" err="1"/>
+              <a:t>best</a:t>
+            </a:r>
+            <a:r>
+              <a:rPr lang="de-DE" dirty="0"/>
+              <a:t> </a:t>
+            </a:r>
+            <a:r>
+              <a:rPr lang="de-DE" dirty="0" err="1"/>
+              <a:t>method</a:t>
+            </a:r>
+            <a:endParaRPr lang="de-DE" dirty="0"/>
+          </a:p>
+          <a:p>
+            <a:pPr marL="0" indent="0">
+              <a:buNone/>
+            </a:pPr>
+            <a:endParaRPr lang="de-DE" dirty="0"/>
+          </a:p>
+          <a:p>
+            <a:pPr marL="0" indent="0">
+              <a:buNone/>
+            </a:pPr>
+            <a:r>
+              <a:rPr lang="de-DE" dirty="0" err="1"/>
+              <a:t>Practical</a:t>
+            </a:r>
+            <a:r>
+              <a:rPr lang="de-DE" dirty="0"/>
+              <a:t> </a:t>
+            </a:r>
+            <a:r>
+              <a:rPr lang="de-DE" dirty="0" err="1"/>
+              <a:t>guidance</a:t>
+            </a:r>
+            <a:r>
+              <a:rPr lang="de-DE" dirty="0"/>
+              <a:t>:</a:t>
+            </a:r>
+          </a:p>
+          <a:p>
+            <a:r>
+              <a:rPr lang="de-DE" dirty="0" err="1"/>
+              <a:t>k-Means</a:t>
+            </a:r>
+            <a:r>
+              <a:rPr lang="de-DE" dirty="0"/>
+              <a:t> </a:t>
+            </a:r>
+            <a:r>
+              <a:rPr lang="de-DE" dirty="0" err="1"/>
+              <a:t>if</a:t>
+            </a:r>
+            <a:r>
+              <a:rPr lang="de-DE" dirty="0"/>
+              <a:t> </a:t>
+            </a:r>
+            <a:r>
+              <a:rPr lang="de-DE" dirty="0" err="1"/>
+              <a:t>clusters</a:t>
+            </a:r>
+            <a:r>
+              <a:rPr lang="de-DE" dirty="0"/>
+              <a:t> </a:t>
+            </a:r>
+            <a:r>
+              <a:rPr lang="de-DE" dirty="0" err="1"/>
+              <a:t>are</a:t>
+            </a:r>
+            <a:r>
+              <a:rPr lang="de-DE" dirty="0"/>
+              <a:t> </a:t>
+            </a:r>
+            <a:r>
+              <a:rPr lang="de-DE" dirty="0" err="1"/>
+              <a:t>compact</a:t>
+            </a:r>
+            <a:r>
+              <a:rPr lang="de-DE" dirty="0"/>
+              <a:t> and </a:t>
+            </a:r>
+            <a:r>
+              <a:rPr lang="de-DE" dirty="0" err="1"/>
+              <a:t>known</a:t>
+            </a:r>
+            <a:endParaRPr lang="de-DE" dirty="0"/>
+          </a:p>
+          <a:p>
+            <a:r>
+              <a:rPr lang="de-DE" dirty="0" err="1"/>
+              <a:t>Hierarchical</a:t>
+            </a:r>
+            <a:r>
+              <a:rPr lang="de-DE" dirty="0"/>
+              <a:t> </a:t>
+            </a:r>
+            <a:r>
+              <a:rPr lang="de-DE" dirty="0" err="1"/>
+              <a:t>if</a:t>
+            </a:r>
+            <a:r>
+              <a:rPr lang="de-DE" dirty="0"/>
+              <a:t> </a:t>
+            </a:r>
+            <a:r>
+              <a:rPr lang="de-DE" dirty="0" err="1"/>
+              <a:t>structure</a:t>
+            </a:r>
+            <a:r>
+              <a:rPr lang="de-DE" dirty="0"/>
+              <a:t> and </a:t>
+            </a:r>
+            <a:r>
+              <a:rPr lang="de-DE" dirty="0" err="1"/>
+              <a:t>interpretability</a:t>
+            </a:r>
+            <a:r>
+              <a:rPr lang="de-DE" dirty="0"/>
+              <a:t> </a:t>
+            </a:r>
+            <a:r>
+              <a:rPr lang="de-DE" dirty="0" err="1"/>
+              <a:t>is</a:t>
+            </a:r>
+            <a:r>
+              <a:rPr lang="de-DE" dirty="0"/>
+              <a:t> </a:t>
+            </a:r>
+            <a:r>
+              <a:rPr lang="de-DE" dirty="0" err="1"/>
+              <a:t>needed</a:t>
+            </a:r>
+            <a:endParaRPr lang="de-DE" dirty="0"/>
+          </a:p>
+          <a:p>
+            <a:r>
+              <a:rPr lang="de-DE" dirty="0"/>
+              <a:t>DBSCAN </a:t>
+            </a:r>
+            <a:r>
+              <a:rPr lang="de-DE" dirty="0" err="1"/>
+              <a:t>if</a:t>
+            </a:r>
+            <a:r>
+              <a:rPr lang="de-DE" dirty="0"/>
+              <a:t> </a:t>
+            </a:r>
+            <a:r>
+              <a:rPr lang="de-DE" dirty="0" err="1"/>
+              <a:t>data</a:t>
+            </a:r>
+            <a:r>
+              <a:rPr lang="de-DE" dirty="0"/>
+              <a:t> </a:t>
+            </a:r>
+            <a:r>
+              <a:rPr lang="de-DE" dirty="0" err="1"/>
+              <a:t>has</a:t>
+            </a:r>
+            <a:r>
+              <a:rPr lang="de-DE" dirty="0"/>
+              <a:t> </a:t>
+            </a:r>
+            <a:r>
+              <a:rPr lang="de-DE" dirty="0" err="1"/>
+              <a:t>noise</a:t>
+            </a:r>
+            <a:r>
+              <a:rPr lang="de-DE" dirty="0"/>
+              <a:t> </a:t>
+            </a:r>
+            <a:r>
+              <a:rPr lang="de-DE" dirty="0" err="1"/>
+              <a:t>or</a:t>
+            </a:r>
+            <a:r>
+              <a:rPr lang="de-DE" dirty="0"/>
+              <a:t> </a:t>
+            </a:r>
+            <a:r>
+              <a:rPr lang="de-DE" dirty="0" err="1"/>
+              <a:t>complex</a:t>
+            </a:r>
+            <a:r>
+              <a:rPr lang="de-DE" dirty="0"/>
+              <a:t> </a:t>
+            </a:r>
+            <a:r>
+              <a:rPr lang="de-DE" dirty="0" err="1"/>
+              <a:t>shapes</a:t>
+            </a:r>
+            <a:endParaRPr lang="de-DE" dirty="0"/>
+          </a:p>
+          <a:p>
+            <a:pPr marL="0" indent="0">
+              <a:buNone/>
+            </a:pPr>
+            <a:endParaRPr lang="de-DE" dirty="0"/>
+          </a:p>
+          <a:p>
+            <a:pPr marL="0" indent="0">
+              <a:buNone/>
+            </a:pPr>
+            <a:r>
+              <a:rPr lang="de-DE" dirty="0" err="1"/>
+              <a:t>What</a:t>
+            </a:r>
+            <a:r>
+              <a:rPr lang="de-DE" dirty="0"/>
+              <a:t> </a:t>
+            </a:r>
+            <a:r>
+              <a:rPr lang="de-DE" dirty="0" err="1"/>
+              <a:t>affects</a:t>
+            </a:r>
+            <a:r>
+              <a:rPr lang="de-DE" dirty="0"/>
+              <a:t> </a:t>
+            </a:r>
+            <a:r>
+              <a:rPr lang="de-DE" dirty="0" err="1"/>
+              <a:t>results</a:t>
+            </a:r>
+            <a:r>
+              <a:rPr lang="de-DE" dirty="0"/>
+              <a:t>?</a:t>
+            </a:r>
+          </a:p>
+          <a:p>
+            <a:r>
+              <a:rPr lang="de-DE" dirty="0" err="1"/>
+              <a:t>k-Means</a:t>
+            </a:r>
+            <a:r>
+              <a:rPr lang="de-DE" dirty="0"/>
+              <a:t>: initial </a:t>
+            </a:r>
+            <a:r>
+              <a:rPr lang="de-DE" dirty="0" err="1"/>
+              <a:t>centroids</a:t>
+            </a:r>
+            <a:endParaRPr lang="de-DE" dirty="0"/>
+          </a:p>
+          <a:p>
+            <a:r>
+              <a:rPr lang="de-DE" dirty="0" err="1"/>
+              <a:t>Hierarchical</a:t>
+            </a:r>
+            <a:r>
+              <a:rPr lang="de-DE" dirty="0"/>
+              <a:t>: </a:t>
+            </a:r>
+            <a:r>
+              <a:rPr lang="de-DE" dirty="0" err="1"/>
+              <a:t>linkage</a:t>
+            </a:r>
+            <a:r>
+              <a:rPr lang="de-DE" dirty="0"/>
+              <a:t> </a:t>
+            </a:r>
+            <a:r>
+              <a:rPr lang="de-DE" dirty="0" err="1"/>
+              <a:t>method</a:t>
+            </a:r>
+            <a:endParaRPr lang="de-DE" dirty="0"/>
+          </a:p>
+          <a:p>
+            <a:r>
+              <a:rPr lang="de-DE" dirty="0"/>
+              <a:t>DBSCAN: </a:t>
+            </a:r>
+            <a:r>
+              <a:rPr lang="el-GR" dirty="0">
+                <a:latin typeface="Cambria Math" panose="02040503050406030204" pitchFamily="18" charset="0"/>
+                <a:ea typeface="Cambria Math" panose="02040503050406030204" pitchFamily="18" charset="0"/>
+              </a:rPr>
+              <a:t>ε</a:t>
+            </a:r>
+            <a:r>
+              <a:rPr lang="el-GR" dirty="0"/>
+              <a:t> </a:t>
+            </a:r>
+            <a:r>
+              <a:rPr lang="de-DE" dirty="0"/>
+              <a:t>and </a:t>
+            </a:r>
+            <a:r>
+              <a:rPr lang="de-DE" dirty="0" err="1">
+                <a:latin typeface="Cambria Math" panose="02040503050406030204" pitchFamily="18" charset="0"/>
+                <a:ea typeface="Cambria Math" panose="02040503050406030204" pitchFamily="18" charset="0"/>
+              </a:rPr>
+              <a:t>min_samples</a:t>
+            </a:r>
+            <a:endParaRPr lang="de-DE" dirty="0">
+              <a:latin typeface="Cambria Math" panose="02040503050406030204" pitchFamily="18" charset="0"/>
+              <a:ea typeface="Cambria Math" panose="02040503050406030204" pitchFamily="18" charset="0"/>
+            </a:endParaRPr>
+          </a:p>
+        </p:txBody>
+      </p:sp>
+      <p:sp>
+        <p:nvSpPr>
+          <p:cNvPr id="3" name="Foliennummernplatzhalter 2">
+            <a:extLst>
+              <a:ext uri="{FF2B5EF4-FFF2-40B4-BE49-F238E27FC236}">
+                <a16:creationId xmlns:a16="http://schemas.microsoft.com/office/drawing/2014/main" id="{6EFA0DEA-9C10-4341-0996-B658FBE37513}"/>
+              </a:ext>
+            </a:extLst>
+          </p:cNvPr>
+          <p:cNvSpPr>
+            <a:spLocks noGrp="1"/>
+          </p:cNvSpPr>
+          <p:nvPr>
+            <p:ph type="sldNum" sz="quarter" idx="12"/>
+          </p:nvPr>
+        </p:nvSpPr>
+        <p:spPr/>
+        <p:txBody>
+          <a:bodyPr/>
+          <a:lstStyle/>
+          <a:p>
+            <a:fld id="{08C366F5-AFAD-49CB-854A-9D9E238FCA13}" type="slidenum">
+              <a:rPr lang="en-GB" smtClean="0"/>
+              <a:t>34</a:t>
+            </a:fld>
+            <a:endParaRPr lang="en-GB"/>
+          </a:p>
+        </p:txBody>
+      </p:sp>
+      <p:pic>
+        <p:nvPicPr>
+          <p:cNvPr id="4" name="Picture 2" descr="MiniBatch KMeans, Affinity Propagation, MeanShift, Spectral Clustering, Ward, Agglomerative Clustering, DBSCAN, HDBSCAN, OPTICS, BIRCH, Gaussian Mixture">
+            <a:extLst>
+              <a:ext uri="{FF2B5EF4-FFF2-40B4-BE49-F238E27FC236}">
+                <a16:creationId xmlns:a16="http://schemas.microsoft.com/office/drawing/2014/main" id="{5A730511-A7F9-E57C-2E0C-B6C2442784C9}"/>
+              </a:ext>
+            </a:extLst>
+          </p:cNvPr>
+          <p:cNvPicPr>
+            <a:picLocks noChangeAspect="1" noChangeArrowheads="1"/>
+          </p:cNvPicPr>
+          <p:nvPr/>
+        </p:nvPicPr>
+        <p:blipFill>
+          <a:blip r:embed="rId2">
+            <a:extLst>
+              <a:ext uri="{28A0092B-C50C-407E-A947-70E740481C1C}">
+                <a14:useLocalDpi xmlns:a14="http://schemas.microsoft.com/office/drawing/2010/main" val="0"/>
+              </a:ext>
+            </a:extLst>
+          </a:blip>
+          <a:srcRect/>
+          <a:stretch>
+            <a:fillRect/>
+          </a:stretch>
+        </p:blipFill>
+        <p:spPr bwMode="auto">
+          <a:xfrm>
+            <a:off x="0" y="1492595"/>
+            <a:ext cx="8076841" cy="5000280"/>
+          </a:xfrm>
+          <a:prstGeom prst="rect">
+            <a:avLst/>
+          </a:prstGeom>
+          <a:noFill/>
+          <a:extLst>
+            <a:ext uri="{909E8E84-426E-40DD-AFC4-6F175D3DCCD1}">
+              <a14:hiddenFill xmlns:a14="http://schemas.microsoft.com/office/drawing/2010/main">
+                <a:solidFill>
+                  <a:srgbClr val="FFFFFF"/>
+                </a:solidFill>
+              </a14:hiddenFill>
+            </a:ext>
+          </a:extLst>
+        </p:spPr>
+      </p:pic>
+    </p:spTree>
+    <p:extLst>
+      <p:ext uri="{BB962C8B-B14F-4D97-AF65-F5344CB8AC3E}">
+        <p14:creationId xmlns:p14="http://schemas.microsoft.com/office/powerpoint/2010/main" val="2928299488"/>
+      </p:ext>
+    </p:extLst>
+  </p:cSld>
+  <p:clrMapOvr>
+    <a:masterClrMapping/>
+  </p:clrMapOvr>
+</p:sld>
+</file>
+
+<file path=ppt/slides/slide4.xml><?xml version="1.0" encoding="utf-8"?>
 <p:sld xmlns:a="http://schemas.openxmlformats.org/drawingml/2006/main" xmlns:r="http://schemas.openxmlformats.org/officeDocument/2006/relationships" xmlns:p="http://schemas.openxmlformats.org/presentationml/2006/main">
   <p:cSld>
     <p:spTree>
@@ -22399,7 +21262,7 @@
           <a:p>
             <a:fld id="{08C366F5-AFAD-49CB-854A-9D9E238FCA13}" type="slidenum">
               <a:rPr lang="en-GB" smtClean="0"/>
-              <a:t>5</a:t>
+              <a:t>4</a:t>
             </a:fld>
             <a:endParaRPr lang="en-GB"/>
           </a:p>
@@ -23058,7 +21921,7 @@
 </p:sld>
 </file>
 
-<file path=ppt/slides/slide6.xml><?xml version="1.0" encoding="utf-8"?>
+<file path=ppt/slides/slide5.xml><?xml version="1.0" encoding="utf-8"?>
 <p:sld xmlns:a="http://schemas.openxmlformats.org/drawingml/2006/main" xmlns:r="http://schemas.openxmlformats.org/officeDocument/2006/relationships" xmlns:p="http://schemas.openxmlformats.org/presentationml/2006/main">
   <p:cSld>
     <p:spTree>
@@ -23441,7 +22304,7 @@
           <a:p>
             <a:fld id="{08C366F5-AFAD-49CB-854A-9D9E238FCA13}" type="slidenum">
               <a:rPr lang="en-GB" smtClean="0"/>
-              <a:t>6</a:t>
+              <a:t>5</a:t>
             </a:fld>
             <a:endParaRPr lang="en-GB"/>
           </a:p>
@@ -23460,7 +22323,7 @@
 </p:sld>
 </file>
 
-<file path=ppt/slides/slide7.xml><?xml version="1.0" encoding="utf-8"?>
+<file path=ppt/slides/slide6.xml><?xml version="1.0" encoding="utf-8"?>
 <p:sld xmlns:a="http://schemas.openxmlformats.org/drawingml/2006/main" xmlns:r="http://schemas.openxmlformats.org/officeDocument/2006/relationships" xmlns:p="http://schemas.openxmlformats.org/presentationml/2006/main">
   <p:cSld>
     <p:spTree>
@@ -24366,7 +23229,7 @@
           <a:p>
             <a:fld id="{08C366F5-AFAD-49CB-854A-9D9E238FCA13}" type="slidenum">
               <a:rPr lang="en-GB" smtClean="0"/>
-              <a:t>7</a:t>
+              <a:t>6</a:t>
             </a:fld>
             <a:endParaRPr lang="en-GB"/>
           </a:p>
@@ -24385,7 +23248,7 @@
 </p:sld>
 </file>
 
-<file path=ppt/slides/slide8.xml><?xml version="1.0" encoding="utf-8"?>
+<file path=ppt/slides/slide7.xml><?xml version="1.0" encoding="utf-8"?>
 <p:sld xmlns:a="http://schemas.openxmlformats.org/drawingml/2006/main" xmlns:r="http://schemas.openxmlformats.org/officeDocument/2006/relationships" xmlns:p="http://schemas.openxmlformats.org/presentationml/2006/main">
   <p:cSld>
     <p:spTree>
@@ -24809,7 +23672,7 @@
           <a:p>
             <a:fld id="{08C366F5-AFAD-49CB-854A-9D9E238FCA13}" type="slidenum">
               <a:rPr lang="en-GB" smtClean="0"/>
-              <a:t>8</a:t>
+              <a:t>7</a:t>
             </a:fld>
             <a:endParaRPr lang="en-GB"/>
           </a:p>
@@ -24828,7 +23691,7 @@
 </p:sld>
 </file>
 
-<file path=ppt/slides/slide9.xml><?xml version="1.0" encoding="utf-8"?>
+<file path=ppt/slides/slide8.xml><?xml version="1.0" encoding="utf-8"?>
 <p:sld xmlns:a="http://schemas.openxmlformats.org/drawingml/2006/main" xmlns:r="http://schemas.openxmlformats.org/officeDocument/2006/relationships" xmlns:p="http://schemas.openxmlformats.org/presentationml/2006/main">
   <p:cSld>
     <p:spTree>
@@ -25274,7 +24137,7 @@
           <a:p>
             <a:fld id="{08C366F5-AFAD-49CB-854A-9D9E238FCA13}" type="slidenum">
               <a:rPr lang="en-GB" smtClean="0"/>
-              <a:t>9</a:t>
+              <a:t>8</a:t>
             </a:fld>
             <a:endParaRPr lang="en-GB"/>
           </a:p>
@@ -25460,6 +24323,671 @@
     <p:extLst>
       <p:ext uri="{BB962C8B-B14F-4D97-AF65-F5344CB8AC3E}">
         <p14:creationId xmlns:p14="http://schemas.microsoft.com/office/powerpoint/2010/main" val="2526389082"/>
+      </p:ext>
+    </p:extLst>
+  </p:cSld>
+  <p:clrMapOvr>
+    <a:masterClrMapping/>
+  </p:clrMapOvr>
+</p:sld>
+</file>
+
+<file path=ppt/slides/slide9.xml><?xml version="1.0" encoding="utf-8"?>
+<p:sld xmlns:a="http://schemas.openxmlformats.org/drawingml/2006/main" xmlns:r="http://schemas.openxmlformats.org/officeDocument/2006/relationships" xmlns:p="http://schemas.openxmlformats.org/presentationml/2006/main">
+  <p:cSld>
+    <p:spTree>
+      <p:nvGrpSpPr>
+        <p:cNvPr id="1" name=""/>
+        <p:cNvGrpSpPr/>
+        <p:nvPr/>
+      </p:nvGrpSpPr>
+      <p:grpSpPr>
+        <a:xfrm>
+          <a:off x="0" y="0"/>
+          <a:ext cx="0" cy="0"/>
+          <a:chOff x="0" y="0"/>
+          <a:chExt cx="0" cy="0"/>
+        </a:xfrm>
+      </p:grpSpPr>
+      <p:sp>
+        <p:nvSpPr>
+          <p:cNvPr id="2" name="Titel 1">
+            <a:extLst>
+              <a:ext uri="{FF2B5EF4-FFF2-40B4-BE49-F238E27FC236}">
+                <a16:creationId xmlns:a16="http://schemas.microsoft.com/office/drawing/2014/main" id="{3449D85B-4E0C-2CDA-A2D9-4273DBF6D8D3}"/>
+              </a:ext>
+            </a:extLst>
+          </p:cNvPr>
+          <p:cNvSpPr>
+            <a:spLocks noGrp="1"/>
+          </p:cNvSpPr>
+          <p:nvPr>
+            <p:ph type="title"/>
+          </p:nvPr>
+        </p:nvSpPr>
+        <p:spPr/>
+        <p:txBody>
+          <a:bodyPr/>
+          <a:lstStyle/>
+          <a:p>
+            <a:r>
+              <a:rPr lang="de-DE" dirty="0" err="1"/>
+              <a:t>k-Means</a:t>
+            </a:r>
+            <a:r>
+              <a:rPr lang="de-DE" dirty="0"/>
+              <a:t> </a:t>
+            </a:r>
+            <a:r>
+              <a:rPr lang="de-DE" dirty="0" err="1"/>
+              <a:t>Algorithm</a:t>
+            </a:r>
+            <a:endParaRPr lang="de-DE" dirty="0"/>
+          </a:p>
+        </p:txBody>
+      </p:sp>
+      <p:sp>
+        <p:nvSpPr>
+          <p:cNvPr id="4" name="Inhaltsplatzhalter 3">
+            <a:extLst>
+              <a:ext uri="{FF2B5EF4-FFF2-40B4-BE49-F238E27FC236}">
+                <a16:creationId xmlns:a16="http://schemas.microsoft.com/office/drawing/2014/main" id="{E22A36B6-BDB3-0940-B6A3-50D4BB310EA6}"/>
+              </a:ext>
+            </a:extLst>
+          </p:cNvPr>
+          <p:cNvSpPr>
+            <a:spLocks noGrp="1"/>
+          </p:cNvSpPr>
+          <p:nvPr>
+            <p:ph idx="1"/>
+          </p:nvPr>
+        </p:nvSpPr>
+        <p:spPr/>
+        <p:txBody>
+          <a:bodyPr>
+            <a:normAutofit fontScale="85000" lnSpcReduction="20000"/>
+          </a:bodyPr>
+          <a:lstStyle/>
+          <a:p>
+            <a:pPr marL="0" indent="0">
+              <a:buNone/>
+            </a:pPr>
+            <a:r>
+              <a:rPr lang="de-DE" dirty="0"/>
+              <a:t>Fit:</a:t>
+            </a:r>
+          </a:p>
+          <a:p>
+            <a:pPr marL="514350" indent="-514350">
+              <a:buFont typeface="+mj-lt"/>
+              <a:buAutoNum type="arabicPeriod"/>
+            </a:pPr>
+            <a:r>
+              <a:rPr lang="de-DE" dirty="0" err="1"/>
+              <a:t>choose</a:t>
+            </a:r>
+            <a:r>
+              <a:rPr lang="de-DE" dirty="0"/>
+              <a:t> </a:t>
+            </a:r>
+            <a:r>
+              <a:rPr lang="de-DE" b="1" dirty="0" err="1"/>
+              <a:t>k</a:t>
+            </a:r>
+            <a:r>
+              <a:rPr lang="de-DE" dirty="0"/>
+              <a:t> (</a:t>
+            </a:r>
+            <a:r>
+              <a:rPr lang="de-DE" dirty="0" err="1"/>
+              <a:t>number</a:t>
+            </a:r>
+            <a:r>
+              <a:rPr lang="de-DE" dirty="0"/>
+              <a:t> </a:t>
+            </a:r>
+            <a:r>
+              <a:rPr lang="de-DE" dirty="0" err="1"/>
+              <a:t>of</a:t>
+            </a:r>
+            <a:r>
+              <a:rPr lang="de-DE" dirty="0"/>
+              <a:t> </a:t>
+            </a:r>
+            <a:r>
+              <a:rPr lang="de-DE" dirty="0" err="1"/>
+              <a:t>clusters</a:t>
+            </a:r>
+            <a:r>
+              <a:rPr lang="de-DE" dirty="0"/>
+              <a:t>)</a:t>
+            </a:r>
+          </a:p>
+          <a:p>
+            <a:pPr marL="514350" indent="-514350">
+              <a:buFont typeface="+mj-lt"/>
+              <a:buAutoNum type="arabicPeriod"/>
+            </a:pPr>
+            <a:r>
+              <a:rPr lang="de-DE" dirty="0" err="1"/>
+              <a:t>initialize</a:t>
+            </a:r>
+            <a:r>
+              <a:rPr lang="de-DE" dirty="0"/>
+              <a:t> </a:t>
+            </a:r>
+            <a:r>
+              <a:rPr lang="de-DE" dirty="0" err="1"/>
+              <a:t>centroids</a:t>
+            </a:r>
+            <a:r>
+              <a:rPr lang="de-DE" dirty="0"/>
+              <a:t>: (</a:t>
+            </a:r>
+            <a:r>
+              <a:rPr lang="de-DE" dirty="0" err="1"/>
+              <a:t>randomly</a:t>
+            </a:r>
+            <a:r>
+              <a:rPr lang="de-DE" dirty="0"/>
+              <a:t>) </a:t>
+            </a:r>
+            <a:r>
+              <a:rPr lang="de-DE" dirty="0" err="1"/>
+              <a:t>place</a:t>
+            </a:r>
+            <a:r>
+              <a:rPr lang="de-DE" dirty="0"/>
+              <a:t> </a:t>
+            </a:r>
+            <a:r>
+              <a:rPr lang="de-DE" dirty="0" err="1"/>
+              <a:t>k</a:t>
+            </a:r>
+            <a:r>
+              <a:rPr lang="de-DE" dirty="0"/>
+              <a:t> </a:t>
+            </a:r>
+            <a:r>
+              <a:rPr lang="de-DE" dirty="0" err="1"/>
+              <a:t>centroids</a:t>
+            </a:r>
+            <a:r>
+              <a:rPr lang="de-DE" dirty="0"/>
+              <a:t> in </a:t>
+            </a:r>
+            <a:r>
+              <a:rPr lang="de-DE" dirty="0" err="1"/>
+              <a:t>data</a:t>
+            </a:r>
+            <a:r>
+              <a:rPr lang="de-DE" dirty="0"/>
+              <a:t> </a:t>
+            </a:r>
+            <a:r>
+              <a:rPr lang="de-DE" dirty="0" err="1"/>
+              <a:t>space</a:t>
+            </a:r>
+            <a:endParaRPr lang="de-DE" dirty="0"/>
+          </a:p>
+          <a:p>
+            <a:pPr marL="514350" indent="-514350">
+              <a:buFont typeface="+mj-lt"/>
+              <a:buAutoNum type="arabicPeriod"/>
+            </a:pPr>
+            <a:r>
+              <a:rPr lang="de-DE" dirty="0" err="1"/>
+              <a:t>assign</a:t>
+            </a:r>
+            <a:r>
+              <a:rPr lang="de-DE" dirty="0"/>
+              <a:t> </a:t>
+            </a:r>
+            <a:r>
+              <a:rPr lang="de-DE" dirty="0" err="1"/>
+              <a:t>each</a:t>
+            </a:r>
+            <a:r>
+              <a:rPr lang="de-DE" dirty="0"/>
+              <a:t> </a:t>
+            </a:r>
+            <a:r>
+              <a:rPr lang="de-DE" dirty="0" err="1"/>
+              <a:t>point</a:t>
+            </a:r>
+            <a:r>
+              <a:rPr lang="de-DE" dirty="0"/>
+              <a:t> </a:t>
+            </a:r>
+            <a:r>
+              <a:rPr lang="de-DE" dirty="0" err="1"/>
+              <a:t>to</a:t>
+            </a:r>
+            <a:r>
+              <a:rPr lang="de-DE" dirty="0"/>
+              <a:t> </a:t>
+            </a:r>
+            <a:r>
+              <a:rPr lang="de-DE" dirty="0" err="1"/>
+              <a:t>the</a:t>
+            </a:r>
+            <a:r>
+              <a:rPr lang="de-DE" dirty="0"/>
+              <a:t> </a:t>
+            </a:r>
+            <a:r>
+              <a:rPr lang="de-DE" dirty="0" err="1"/>
+              <a:t>nearest</a:t>
+            </a:r>
+            <a:r>
+              <a:rPr lang="de-DE" dirty="0"/>
+              <a:t> </a:t>
+            </a:r>
+            <a:r>
+              <a:rPr lang="de-DE" dirty="0" err="1"/>
+              <a:t>centroid</a:t>
+            </a:r>
+            <a:r>
+              <a:rPr lang="de-DE" dirty="0"/>
+              <a:t> (</a:t>
+            </a:r>
+            <a:r>
+              <a:rPr lang="de-DE" dirty="0" err="1"/>
+              <a:t>according</a:t>
+            </a:r>
+            <a:r>
+              <a:rPr lang="de-DE" dirty="0"/>
+              <a:t> </a:t>
+            </a:r>
+            <a:r>
+              <a:rPr lang="de-DE" dirty="0" err="1"/>
+              <a:t>to</a:t>
+            </a:r>
+            <a:r>
+              <a:rPr lang="de-DE" dirty="0"/>
+              <a:t> </a:t>
+            </a:r>
+            <a:r>
+              <a:rPr lang="de-DE" dirty="0" err="1"/>
+              <a:t>computed</a:t>
+            </a:r>
+            <a:r>
+              <a:rPr lang="de-DE" dirty="0"/>
+              <a:t> </a:t>
+            </a:r>
+            <a:r>
+              <a:rPr lang="de-DE" b="1" dirty="0" err="1"/>
+              <a:t>Euclidean</a:t>
+            </a:r>
+            <a:r>
+              <a:rPr lang="de-DE" b="1" dirty="0"/>
+              <a:t> </a:t>
+            </a:r>
+            <a:r>
+              <a:rPr lang="de-DE" b="1" dirty="0" err="1"/>
+              <a:t>distances</a:t>
+            </a:r>
+            <a:r>
+              <a:rPr lang="de-DE" dirty="0"/>
+              <a:t>)</a:t>
+            </a:r>
+          </a:p>
+          <a:p>
+            <a:pPr marL="514350" indent="-514350">
+              <a:buFont typeface="+mj-lt"/>
+              <a:buAutoNum type="arabicPeriod"/>
+            </a:pPr>
+            <a:r>
+              <a:rPr lang="de-DE" dirty="0" err="1"/>
+              <a:t>recalculate</a:t>
+            </a:r>
+            <a:r>
+              <a:rPr lang="de-DE" dirty="0"/>
+              <a:t> </a:t>
+            </a:r>
+            <a:r>
+              <a:rPr lang="de-DE" dirty="0" err="1"/>
+              <a:t>centroids</a:t>
+            </a:r>
+            <a:r>
+              <a:rPr lang="de-DE" dirty="0"/>
+              <a:t> </a:t>
+            </a:r>
+            <a:r>
+              <a:rPr lang="de-DE" dirty="0" err="1"/>
+              <a:t>of</a:t>
+            </a:r>
+            <a:r>
+              <a:rPr lang="de-DE" dirty="0"/>
+              <a:t> </a:t>
+            </a:r>
+            <a:r>
+              <a:rPr lang="de-DE" dirty="0" err="1"/>
+              <a:t>each</a:t>
+            </a:r>
+            <a:r>
+              <a:rPr lang="de-DE" dirty="0"/>
+              <a:t> </a:t>
+            </a:r>
+            <a:r>
+              <a:rPr lang="de-DE" dirty="0" err="1"/>
+              <a:t>cluster</a:t>
+            </a:r>
+            <a:r>
+              <a:rPr lang="de-DE" dirty="0"/>
+              <a:t> (</a:t>
+            </a:r>
+            <a:r>
+              <a:rPr lang="de-DE" b="1" dirty="0" err="1"/>
+              <a:t>average</a:t>
+            </a:r>
+            <a:r>
+              <a:rPr lang="de-DE" dirty="0"/>
+              <a:t> </a:t>
+            </a:r>
+            <a:r>
+              <a:rPr lang="de-DE" dirty="0" err="1"/>
+              <a:t>of</a:t>
+            </a:r>
+            <a:r>
+              <a:rPr lang="de-DE" dirty="0"/>
+              <a:t> all </a:t>
+            </a:r>
+            <a:r>
+              <a:rPr lang="de-DE" dirty="0" err="1"/>
+              <a:t>points</a:t>
+            </a:r>
+            <a:r>
+              <a:rPr lang="de-DE" dirty="0"/>
+              <a:t> </a:t>
+            </a:r>
+            <a:r>
+              <a:rPr lang="de-DE" dirty="0" err="1"/>
+              <a:t>assigned</a:t>
+            </a:r>
+            <a:r>
+              <a:rPr lang="de-DE" dirty="0"/>
+              <a:t> </a:t>
+            </a:r>
+            <a:r>
+              <a:rPr lang="de-DE" dirty="0" err="1"/>
+              <a:t>to</a:t>
+            </a:r>
+            <a:r>
+              <a:rPr lang="de-DE" dirty="0"/>
+              <a:t> </a:t>
+            </a:r>
+            <a:r>
+              <a:rPr lang="de-DE" dirty="0" err="1"/>
+              <a:t>the</a:t>
+            </a:r>
+            <a:r>
+              <a:rPr lang="de-DE" dirty="0"/>
+              <a:t> </a:t>
+            </a:r>
+            <a:r>
+              <a:rPr lang="de-DE" dirty="0" err="1"/>
+              <a:t>cluster</a:t>
+            </a:r>
+            <a:r>
+              <a:rPr lang="de-DE" dirty="0"/>
+              <a:t>)</a:t>
+            </a:r>
+          </a:p>
+          <a:p>
+            <a:pPr marL="514350" indent="-514350">
+              <a:buFont typeface="+mj-lt"/>
+              <a:buAutoNum type="arabicPeriod"/>
+            </a:pPr>
+            <a:r>
+              <a:rPr lang="de-DE" dirty="0" err="1"/>
+              <a:t>iterate</a:t>
+            </a:r>
+            <a:r>
+              <a:rPr lang="de-DE" dirty="0"/>
+              <a:t> </a:t>
+            </a:r>
+            <a:r>
+              <a:rPr lang="de-DE" dirty="0" err="1"/>
+              <a:t>until</a:t>
+            </a:r>
+            <a:r>
+              <a:rPr lang="de-DE" dirty="0"/>
+              <a:t> </a:t>
+            </a:r>
+            <a:r>
+              <a:rPr lang="de-DE" dirty="0" err="1"/>
+              <a:t>convergence</a:t>
+            </a:r>
+            <a:r>
+              <a:rPr lang="de-DE" dirty="0"/>
+              <a:t> (</a:t>
+            </a:r>
+            <a:r>
+              <a:rPr lang="de-DE" dirty="0" err="1"/>
+              <a:t>centroids</a:t>
+            </a:r>
+            <a:r>
+              <a:rPr lang="de-DE" dirty="0"/>
+              <a:t> </a:t>
+            </a:r>
+            <a:r>
+              <a:rPr lang="de-DE" dirty="0" err="1"/>
+              <a:t>stop</a:t>
+            </a:r>
+            <a:r>
+              <a:rPr lang="de-DE" dirty="0"/>
+              <a:t> </a:t>
+            </a:r>
+            <a:r>
+              <a:rPr lang="de-DE" dirty="0" err="1"/>
+              <a:t>moving</a:t>
+            </a:r>
+            <a:r>
+              <a:rPr lang="de-DE" dirty="0"/>
+              <a:t> </a:t>
+            </a:r>
+            <a:r>
+              <a:rPr lang="de-DE" dirty="0" err="1"/>
+              <a:t>significantly</a:t>
+            </a:r>
+            <a:r>
+              <a:rPr lang="de-DE" dirty="0"/>
+              <a:t> </a:t>
+            </a:r>
+            <a:r>
+              <a:rPr lang="de-DE" dirty="0" err="1"/>
+              <a:t>or</a:t>
+            </a:r>
+            <a:r>
+              <a:rPr lang="de-DE" dirty="0"/>
+              <a:t> </a:t>
+            </a:r>
+            <a:r>
+              <a:rPr lang="de-DE" dirty="0" err="1"/>
+              <a:t>cluster</a:t>
+            </a:r>
+            <a:r>
+              <a:rPr lang="de-DE" dirty="0"/>
+              <a:t> </a:t>
+            </a:r>
+            <a:r>
+              <a:rPr lang="de-DE" dirty="0" err="1"/>
+              <a:t>assignments</a:t>
+            </a:r>
+            <a:r>
+              <a:rPr lang="de-DE" dirty="0"/>
+              <a:t> </a:t>
+            </a:r>
+            <a:r>
+              <a:rPr lang="de-DE" dirty="0" err="1"/>
+              <a:t>stop</a:t>
+            </a:r>
+            <a:r>
+              <a:rPr lang="de-DE" dirty="0"/>
+              <a:t> </a:t>
+            </a:r>
+            <a:r>
+              <a:rPr lang="de-DE" dirty="0" err="1"/>
+              <a:t>changing</a:t>
+            </a:r>
+            <a:r>
+              <a:rPr lang="de-DE" dirty="0"/>
+              <a:t>)</a:t>
+            </a:r>
+          </a:p>
+          <a:p>
+            <a:pPr marL="0" indent="0">
+              <a:buNone/>
+            </a:pPr>
+            <a:endParaRPr lang="de-DE" dirty="0"/>
+          </a:p>
+          <a:p>
+            <a:pPr marL="0" indent="0">
+              <a:buNone/>
+            </a:pPr>
+            <a:r>
+              <a:rPr lang="de-DE" dirty="0" err="1"/>
+              <a:t>Predict</a:t>
+            </a:r>
+            <a:r>
+              <a:rPr lang="de-DE" dirty="0"/>
+              <a:t>:</a:t>
+            </a:r>
+          </a:p>
+          <a:p>
+            <a:pPr marL="0" indent="0">
+              <a:buNone/>
+            </a:pPr>
+            <a:r>
+              <a:rPr lang="de-DE" dirty="0" err="1"/>
+              <a:t>For</a:t>
+            </a:r>
+            <a:r>
+              <a:rPr lang="de-DE" dirty="0"/>
+              <a:t> a </a:t>
+            </a:r>
+            <a:r>
+              <a:rPr lang="de-DE" dirty="0" err="1"/>
+              <a:t>new</a:t>
+            </a:r>
+            <a:r>
+              <a:rPr lang="de-DE" dirty="0"/>
+              <a:t> </a:t>
+            </a:r>
+            <a:r>
+              <a:rPr lang="de-DE" dirty="0" err="1"/>
+              <a:t>point</a:t>
+            </a:r>
+            <a:r>
+              <a:rPr lang="de-DE" dirty="0"/>
+              <a:t>: </a:t>
+            </a:r>
+            <a:r>
+              <a:rPr lang="de-DE" dirty="0" err="1"/>
+              <a:t>Assign</a:t>
+            </a:r>
+            <a:r>
+              <a:rPr lang="de-DE" dirty="0"/>
+              <a:t> </a:t>
+            </a:r>
+            <a:r>
+              <a:rPr lang="de-DE" dirty="0" err="1"/>
+              <a:t>it</a:t>
+            </a:r>
+            <a:r>
+              <a:rPr lang="de-DE" dirty="0"/>
+              <a:t> </a:t>
+            </a:r>
+            <a:r>
+              <a:rPr lang="de-DE" dirty="0" err="1"/>
+              <a:t>to</a:t>
+            </a:r>
+            <a:r>
+              <a:rPr lang="de-DE" dirty="0"/>
+              <a:t> </a:t>
+            </a:r>
+            <a:r>
+              <a:rPr lang="de-DE" dirty="0" err="1"/>
+              <a:t>the</a:t>
+            </a:r>
+            <a:r>
+              <a:rPr lang="de-DE" dirty="0"/>
+              <a:t> </a:t>
+            </a:r>
+            <a:r>
+              <a:rPr lang="de-DE" dirty="0" err="1"/>
+              <a:t>cluster</a:t>
+            </a:r>
+            <a:r>
+              <a:rPr lang="de-DE" dirty="0"/>
+              <a:t> </a:t>
+            </a:r>
+            <a:r>
+              <a:rPr lang="de-DE" dirty="0" err="1"/>
+              <a:t>with</a:t>
+            </a:r>
+            <a:r>
+              <a:rPr lang="de-DE" dirty="0"/>
+              <a:t> </a:t>
+            </a:r>
+            <a:r>
+              <a:rPr lang="de-DE" dirty="0" err="1"/>
+              <a:t>the</a:t>
+            </a:r>
+            <a:r>
+              <a:rPr lang="de-DE" dirty="0"/>
+              <a:t> </a:t>
+            </a:r>
+            <a:r>
+              <a:rPr lang="de-DE" b="1" dirty="0" err="1"/>
+              <a:t>nearest</a:t>
+            </a:r>
+            <a:r>
+              <a:rPr lang="de-DE" b="1" dirty="0"/>
+              <a:t> </a:t>
+            </a:r>
+            <a:r>
+              <a:rPr lang="de-DE" b="1" dirty="0" err="1"/>
+              <a:t>centroid</a:t>
+            </a:r>
+            <a:endParaRPr lang="de-DE" dirty="0"/>
+          </a:p>
+        </p:txBody>
+      </p:sp>
+      <p:sp>
+        <p:nvSpPr>
+          <p:cNvPr id="3" name="Foliennummernplatzhalter 2">
+            <a:extLst>
+              <a:ext uri="{FF2B5EF4-FFF2-40B4-BE49-F238E27FC236}">
+                <a16:creationId xmlns:a16="http://schemas.microsoft.com/office/drawing/2014/main" id="{5AF30DBF-AD11-3C18-1D07-A54DAB515319}"/>
+              </a:ext>
+            </a:extLst>
+          </p:cNvPr>
+          <p:cNvSpPr>
+            <a:spLocks noGrp="1"/>
+          </p:cNvSpPr>
+          <p:nvPr>
+            <p:ph type="sldNum" sz="quarter" idx="12"/>
+          </p:nvPr>
+        </p:nvSpPr>
+        <p:spPr/>
+        <p:txBody>
+          <a:bodyPr/>
+          <a:lstStyle/>
+          <a:p>
+            <a:fld id="{08C366F5-AFAD-49CB-854A-9D9E238FCA13}" type="slidenum">
+              <a:rPr lang="en-GB" smtClean="0"/>
+              <a:t>9</a:t>
+            </a:fld>
+            <a:endParaRPr lang="en-GB"/>
+          </a:p>
+        </p:txBody>
+      </p:sp>
+    </p:spTree>
+    <p:extLst>
+      <p:ext uri="{BB962C8B-B14F-4D97-AF65-F5344CB8AC3E}">
+        <p14:creationId xmlns:p14="http://schemas.microsoft.com/office/powerpoint/2010/main" val="3988780308"/>
       </p:ext>
     </p:extLst>
   </p:cSld>
